--- a/trabalhos/T1-Docker-Invite-People.pptx
+++ b/trabalhos/T1-Docker-Invite-People.pptx
@@ -11605,26 +11605,145 @@
           </a:p>
         </p:txBody>
       </p:sp>
-      <p:sp>
-        <p:nvSpPr>
-          <p:cNvPr id="3" name="Rectangle 2"/>
+      <p:pic>
+        <p:nvPicPr>
+          <p:cNvPr id="3" name="Picture 2" descr="lockup-branco.png"/>
+          <p:cNvPicPr>
+            <a:picLocks noChangeAspect="1"/>
+          </p:cNvPicPr>
+          <p:nvPr/>
+        </p:nvPicPr>
+        <p:blipFill>
+          <a:blip r:embed="rId2"/>
+          <a:stretch>
+            <a:fillRect/>
+          </a:stretch>
+        </p:blipFill>
+        <p:spPr>
+          <a:xfrm>
+            <a:off x="685800" y="552450"/>
+            <a:ext cx="2038350" cy="701063"/>
+          </a:xfrm>
+          <a:prstGeom prst="rect">
+            <a:avLst/>
+          </a:prstGeom>
+        </p:spPr>
+      </p:pic>
+      <p:sp>
+        <p:nvSpPr>
+          <p:cNvPr id="4" name="TextBox 3"/>
+          <p:cNvSpPr txBox="1"/>
+          <p:nvPr/>
+        </p:nvSpPr>
+        <p:spPr>
+          <a:xfrm>
+            <a:off x="685800" y="1905000"/>
+            <a:ext cx="6667500" cy="198120"/>
+          </a:xfrm>
+          <a:prstGeom prst="rect">
+            <a:avLst/>
+          </a:prstGeom>
+          <a:noFill/>
+        </p:spPr>
+        <p:txBody>
+          <a:bodyPr wrap="square" lIns="0" rIns="0" tIns="0" bIns="0" anchor="t">
+            <a:spAutoFit/>
+          </a:bodyPr>
+          <a:lstStyle/>
+          <a:p>
+            <a:pPr algn="l">
+              <a:lnSpc>
+                <a:spcPct val="120000"/>
+              </a:lnSpc>
+            </a:pPr>
+            <a:r>
+              <a:rPr sz="980" b="1" i="0" spc="160">
+                <a:solidFill>
+                  <a:srgbClr val="E94D1C"/>
+                </a:solidFill>
+                <a:latin typeface="Roboto"/>
+              </a:rPr>
+              <a:t>SEMINÁRIO T1 · TECNOLOGIAS EMERGENTES</a:t>
+            </a:r>
+          </a:p>
+        </p:txBody>
+      </p:sp>
+      <p:sp>
+        <p:nvSpPr>
+          <p:cNvPr id="5" name="TextBox 4"/>
+          <p:cNvSpPr txBox="1"/>
+          <p:nvPr/>
+        </p:nvSpPr>
+        <p:spPr>
+          <a:xfrm>
+            <a:off x="685800" y="2133600"/>
+            <a:ext cx="7429500" cy="1905000"/>
+          </a:xfrm>
+          <a:prstGeom prst="rect">
+            <a:avLst/>
+          </a:prstGeom>
+          <a:noFill/>
+        </p:spPr>
+        <p:txBody>
+          <a:bodyPr wrap="square" lIns="0" rIns="0" tIns="0" bIns="0" anchor="t">
+            <a:spAutoFit/>
+          </a:bodyPr>
+          <a:lstStyle/>
+          <a:p>
+            <a:pPr algn="l">
+              <a:lnSpc>
+                <a:spcPct val="102000"/>
+              </a:lnSpc>
+            </a:pPr>
+            <a:r>
+              <a:rPr sz="5250" b="1" i="0">
+                <a:solidFill>
+                  <a:srgbClr val="FFFFFF"/>
+                </a:solidFill>
+                <a:latin typeface="Roboto"/>
+              </a:rPr>
+              <a:t>Do diagrama</a:t>
+            </a:r>
+          </a:p>
+          <a:p>
+            <a:pPr>
+              <a:lnSpc>
+                <a:spcPct val="102000"/>
+              </a:lnSpc>
+            </a:pPr>
+            <a:r>
+              <a:rPr sz="5250" b="1" i="0">
+                <a:solidFill>
+                  <a:srgbClr val="FFFFFF"/>
+                </a:solidFill>
+                <a:latin typeface="Roboto"/>
+              </a:rPr>
+              <a:t>à execução</a:t>
+            </a:r>
+          </a:p>
+        </p:txBody>
+      </p:sp>
+      <p:sp>
+        <p:nvSpPr>
+          <p:cNvPr id="6" name="Rounded Rectangle 5"/>
           <p:cNvSpPr/>
           <p:nvPr/>
         </p:nvSpPr>
         <p:spPr>
           <a:xfrm>
-            <a:off x="685800" y="590550"/>
-            <a:ext cx="1257300" cy="266700"/>
-          </a:xfrm>
-          <a:prstGeom prst="rect">
-            <a:avLst/>
-          </a:prstGeom>
-          <a:noFill/>
-          <a:ln w="12700">
-            <a:solidFill>
-              <a:srgbClr val="8A7AC8"/>
-            </a:solidFill>
-            <a:prstDash val="dash"/>
+            <a:off x="685800" y="3848100"/>
+            <a:ext cx="609600" cy="47625"/>
+          </a:xfrm>
+          <a:prstGeom prst="roundRect">
+            <a:avLst>
+              <a:gd name="adj" fmla="val 40000"/>
+            </a:avLst>
+          </a:prstGeom>
+          <a:solidFill>
+            <a:srgbClr val="E94D1C"/>
+          </a:solidFill>
+          <a:ln>
+            <a:noFill/>
           </a:ln>
           <a:effectLst/>
         </p:spPr>
@@ -11652,186 +11771,7 @@
       </p:sp>
       <p:sp>
         <p:nvSpPr>
-          <p:cNvPr id="4" name="TextBox 3"/>
-          <p:cNvSpPr txBox="1"/>
-          <p:nvPr/>
-        </p:nvSpPr>
-        <p:spPr>
-          <a:xfrm>
-            <a:off x="685800" y="666750"/>
-            <a:ext cx="1257300" cy="152400"/>
-          </a:xfrm>
-          <a:prstGeom prst="rect">
-            <a:avLst/>
-          </a:prstGeom>
-          <a:noFill/>
-        </p:spPr>
-        <p:txBody>
-          <a:bodyPr wrap="square" lIns="0" rIns="0" tIns="0" bIns="0" anchor="t">
-            <a:spAutoFit/>
-          </a:bodyPr>
-          <a:lstStyle/>
-          <a:p>
-            <a:pPr algn="ctr">
-              <a:lnSpc>
-                <a:spcPct val="120000"/>
-              </a:lnSpc>
-            </a:pPr>
-            <a:r>
-              <a:rPr sz="750" b="0" i="0" spc="140">
-                <a:solidFill>
-                  <a:srgbClr val="B5AAE0"/>
-                </a:solidFill>
-                <a:latin typeface="Roboto"/>
-              </a:rPr>
-              <a:t>LOGO UNISINOS</a:t>
-            </a:r>
-          </a:p>
-        </p:txBody>
-      </p:sp>
-      <p:sp>
-        <p:nvSpPr>
-          <p:cNvPr id="5" name="TextBox 4"/>
-          <p:cNvSpPr txBox="1"/>
-          <p:nvPr/>
-        </p:nvSpPr>
-        <p:spPr>
-          <a:xfrm>
-            <a:off x="685800" y="1905000"/>
-            <a:ext cx="6667500" cy="198120"/>
-          </a:xfrm>
-          <a:prstGeom prst="rect">
-            <a:avLst/>
-          </a:prstGeom>
-          <a:noFill/>
-        </p:spPr>
-        <p:txBody>
-          <a:bodyPr wrap="square" lIns="0" rIns="0" tIns="0" bIns="0" anchor="t">
-            <a:spAutoFit/>
-          </a:bodyPr>
-          <a:lstStyle/>
-          <a:p>
-            <a:pPr algn="l">
-              <a:lnSpc>
-                <a:spcPct val="120000"/>
-              </a:lnSpc>
-            </a:pPr>
-            <a:r>
-              <a:rPr sz="980" b="1" i="0" spc="160">
-                <a:solidFill>
-                  <a:srgbClr val="E94D1C"/>
-                </a:solidFill>
-                <a:latin typeface="Roboto"/>
-              </a:rPr>
-              <a:t>SEMINÁRIO T1 · TECNOLOGIAS EMERGENTES</a:t>
-            </a:r>
-          </a:p>
-        </p:txBody>
-      </p:sp>
-      <p:sp>
-        <p:nvSpPr>
-          <p:cNvPr id="6" name="TextBox 5"/>
-          <p:cNvSpPr txBox="1"/>
-          <p:nvPr/>
-        </p:nvSpPr>
-        <p:spPr>
-          <a:xfrm>
-            <a:off x="685800" y="2133600"/>
-            <a:ext cx="7429500" cy="1905000"/>
-          </a:xfrm>
-          <a:prstGeom prst="rect">
-            <a:avLst/>
-          </a:prstGeom>
-          <a:noFill/>
-        </p:spPr>
-        <p:txBody>
-          <a:bodyPr wrap="square" lIns="0" rIns="0" tIns="0" bIns="0" anchor="t">
-            <a:spAutoFit/>
-          </a:bodyPr>
-          <a:lstStyle/>
-          <a:p>
-            <a:pPr algn="l">
-              <a:lnSpc>
-                <a:spcPct val="102000"/>
-              </a:lnSpc>
-            </a:pPr>
-            <a:r>
-              <a:rPr sz="5250" b="1" i="0">
-                <a:solidFill>
-                  <a:srgbClr val="FFFFFF"/>
-                </a:solidFill>
-                <a:latin typeface="Roboto"/>
-              </a:rPr>
-              <a:t>Do diagrama</a:t>
-            </a:r>
-          </a:p>
-          <a:p>
-            <a:pPr>
-              <a:lnSpc>
-                <a:spcPct val="102000"/>
-              </a:lnSpc>
-            </a:pPr>
-            <a:r>
-              <a:rPr sz="5250" b="1" i="0">
-                <a:solidFill>
-                  <a:srgbClr val="FFFFFF"/>
-                </a:solidFill>
-                <a:latin typeface="Roboto"/>
-              </a:rPr>
-              <a:t>à execução</a:t>
-            </a:r>
-          </a:p>
-        </p:txBody>
-      </p:sp>
-      <p:sp>
-        <p:nvSpPr>
-          <p:cNvPr id="7" name="Rounded Rectangle 6"/>
-          <p:cNvSpPr/>
-          <p:nvPr/>
-        </p:nvSpPr>
-        <p:spPr>
-          <a:xfrm>
-            <a:off x="685800" y="3848100"/>
-            <a:ext cx="609600" cy="47625"/>
-          </a:xfrm>
-          <a:prstGeom prst="roundRect">
-            <a:avLst>
-              <a:gd name="adj" fmla="val 40000"/>
-            </a:avLst>
-          </a:prstGeom>
-          <a:solidFill>
-            <a:srgbClr val="E94D1C"/>
-          </a:solidFill>
-          <a:ln>
-            <a:noFill/>
-          </a:ln>
-          <a:effectLst/>
-        </p:spPr>
-        <p:style>
-          <a:lnRef idx="1">
-            <a:schemeClr val="accent1"/>
-          </a:lnRef>
-          <a:fillRef idx="3">
-            <a:schemeClr val="accent1"/>
-          </a:fillRef>
-          <a:effectRef idx="2">
-            <a:schemeClr val="accent1"/>
-          </a:effectRef>
-          <a:fontRef idx="minor">
-            <a:schemeClr val="lt1"/>
-          </a:fontRef>
-        </p:style>
-        <p:txBody>
-          <a:bodyPr rtlCol="0" anchor="ctr" wrap="square" lIns="0" rIns="0" tIns="0" bIns="0"/>
-          <a:lstStyle/>
-          <a:p>
-            <a:pPr algn="ctr"/>
-          </a:p>
-        </p:txBody>
-      </p:sp>
-      <p:sp>
-        <p:nvSpPr>
-          <p:cNvPr id="8" name="TextBox 7"/>
+          <p:cNvPr id="7" name="TextBox 6"/>
           <p:cNvSpPr txBox="1"/>
           <p:nvPr/>
         </p:nvSpPr>
@@ -11870,7 +11810,7 @@
       </p:sp>
       <p:sp>
         <p:nvSpPr>
-          <p:cNvPr id="9" name="TextBox 8"/>
+          <p:cNvPr id="8" name="TextBox 7"/>
           <p:cNvSpPr txBox="1"/>
           <p:nvPr/>
         </p:nvSpPr>
@@ -11909,7 +11849,7 @@
       </p:sp>
       <p:sp>
         <p:nvSpPr>
-          <p:cNvPr id="10" name="TextBox 9"/>
+          <p:cNvPr id="9" name="TextBox 8"/>
           <p:cNvSpPr txBox="1"/>
           <p:nvPr/>
         </p:nvSpPr>
@@ -11964,7 +11904,7 @@
       </p:sp>
       <p:sp>
         <p:nvSpPr>
-          <p:cNvPr id="11" name="TextBox 10"/>
+          <p:cNvPr id="10" name="TextBox 9"/>
           <p:cNvSpPr txBox="1"/>
           <p:nvPr/>
         </p:nvSpPr>
@@ -12003,7 +11943,7 @@
       </p:sp>
       <p:sp>
         <p:nvSpPr>
-          <p:cNvPr id="12" name="TextBox 11"/>
+          <p:cNvPr id="11" name="TextBox 10"/>
           <p:cNvSpPr txBox="1"/>
           <p:nvPr/>
         </p:nvSpPr>
@@ -12058,7 +11998,7 @@
       </p:sp>
       <p:sp>
         <p:nvSpPr>
-          <p:cNvPr id="13" name="TextBox 12"/>
+          <p:cNvPr id="12" name="TextBox 11"/>
           <p:cNvSpPr txBox="1"/>
           <p:nvPr/>
         </p:nvSpPr>
@@ -12097,7 +12037,7 @@
       </p:sp>
       <p:sp>
         <p:nvSpPr>
-          <p:cNvPr id="14" name="TextBox 13"/>
+          <p:cNvPr id="13" name="TextBox 12"/>
           <p:cNvSpPr txBox="1"/>
           <p:nvPr/>
         </p:nvSpPr>
@@ -12176,9 +12116,33 @@
         <p:nvPr/>
       </p:nvGrpSpPr>
       <p:grpSpPr/>
-      <p:sp>
-        <p:nvSpPr>
-          <p:cNvPr id="2" name="TextBox 1"/>
+      <p:pic>
+        <p:nvPicPr>
+          <p:cNvPr id="2" name="Picture 1" descr="u-azul.png"/>
+          <p:cNvPicPr>
+            <a:picLocks noChangeAspect="1"/>
+          </p:cNvPicPr>
+          <p:nvPr/>
+        </p:nvPicPr>
+        <p:blipFill>
+          <a:blip r:embed="rId2"/>
+          <a:stretch>
+            <a:fillRect/>
+          </a:stretch>
+        </p:blipFill>
+        <p:spPr>
+          <a:xfrm>
+            <a:off x="10744200" y="457200"/>
+            <a:ext cx="342900" cy="342900"/>
+          </a:xfrm>
+          <a:prstGeom prst="rect">
+            <a:avLst/>
+          </a:prstGeom>
+        </p:spPr>
+      </p:pic>
+      <p:sp>
+        <p:nvSpPr>
+          <p:cNvPr id="3" name="TextBox 2"/>
           <p:cNvSpPr txBox="1"/>
           <p:nvPr/>
         </p:nvSpPr>
@@ -12217,14 +12181,14 @@
       </p:sp>
       <p:sp>
         <p:nvSpPr>
-          <p:cNvPr id="3" name="TextBox 2"/>
+          <p:cNvPr id="4" name="TextBox 3"/>
           <p:cNvSpPr txBox="1"/>
           <p:nvPr/>
         </p:nvSpPr>
         <p:spPr>
           <a:xfrm>
             <a:off x="685800" y="838200"/>
-            <a:ext cx="9525000" cy="1524000"/>
+            <a:ext cx="9620250" cy="1524000"/>
           </a:xfrm>
           <a:prstGeom prst="rect">
             <a:avLst/>
@@ -12272,7 +12236,7 @@
       </p:sp>
       <p:sp>
         <p:nvSpPr>
-          <p:cNvPr id="4" name="Rounded Rectangle 3"/>
+          <p:cNvPr id="5" name="Rounded Rectangle 4"/>
           <p:cNvSpPr/>
           <p:nvPr/>
         </p:nvSpPr>
@@ -12318,7 +12282,7 @@
       </p:sp>
       <p:sp>
         <p:nvSpPr>
-          <p:cNvPr id="5" name="Rounded Rectangle 4"/>
+          <p:cNvPr id="6" name="Rounded Rectangle 5"/>
           <p:cNvSpPr/>
           <p:nvPr/>
         </p:nvSpPr>
@@ -12364,7 +12328,7 @@
       </p:sp>
       <p:sp>
         <p:nvSpPr>
-          <p:cNvPr id="6" name="TextBox 5"/>
+          <p:cNvPr id="7" name="TextBox 6"/>
           <p:cNvSpPr txBox="1"/>
           <p:nvPr/>
         </p:nvSpPr>
@@ -12403,7 +12367,7 @@
       </p:sp>
       <p:sp>
         <p:nvSpPr>
-          <p:cNvPr id="7" name="TextBox 6"/>
+          <p:cNvPr id="8" name="TextBox 7"/>
           <p:cNvSpPr txBox="1"/>
           <p:nvPr/>
         </p:nvSpPr>
@@ -12442,7 +12406,7 @@
       </p:sp>
       <p:sp>
         <p:nvSpPr>
-          <p:cNvPr id="8" name="TextBox 7"/>
+          <p:cNvPr id="9" name="TextBox 8"/>
           <p:cNvSpPr txBox="1"/>
           <p:nvPr/>
         </p:nvSpPr>
@@ -12481,7 +12445,7 @@
       </p:sp>
       <p:sp>
         <p:nvSpPr>
-          <p:cNvPr id="9" name="TextBox 8"/>
+          <p:cNvPr id="10" name="TextBox 9"/>
           <p:cNvSpPr txBox="1"/>
           <p:nvPr/>
         </p:nvSpPr>
@@ -12520,7 +12484,7 @@
       </p:sp>
       <p:sp>
         <p:nvSpPr>
-          <p:cNvPr id="10" name="TextBox 9"/>
+          <p:cNvPr id="11" name="TextBox 10"/>
           <p:cNvSpPr txBox="1"/>
           <p:nvPr/>
         </p:nvSpPr>
@@ -12559,7 +12523,7 @@
       </p:sp>
       <p:sp>
         <p:nvSpPr>
-          <p:cNvPr id="11" name="TextBox 10"/>
+          <p:cNvPr id="12" name="TextBox 11"/>
           <p:cNvSpPr txBox="1"/>
           <p:nvPr/>
         </p:nvSpPr>
@@ -12598,7 +12562,7 @@
       </p:sp>
       <p:sp>
         <p:nvSpPr>
-          <p:cNvPr id="12" name="TextBox 11"/>
+          <p:cNvPr id="13" name="TextBox 12"/>
           <p:cNvSpPr txBox="1"/>
           <p:nvPr/>
         </p:nvSpPr>
@@ -12637,7 +12601,7 @@
       </p:sp>
       <p:sp>
         <p:nvSpPr>
-          <p:cNvPr id="13" name="TextBox 12"/>
+          <p:cNvPr id="14" name="TextBox 13"/>
           <p:cNvSpPr txBox="1"/>
           <p:nvPr/>
         </p:nvSpPr>
@@ -12676,7 +12640,7 @@
       </p:sp>
       <p:sp>
         <p:nvSpPr>
-          <p:cNvPr id="14" name="TextBox 13"/>
+          <p:cNvPr id="15" name="TextBox 14"/>
           <p:cNvSpPr txBox="1"/>
           <p:nvPr/>
         </p:nvSpPr>
@@ -12715,7 +12679,7 @@
       </p:sp>
       <p:sp>
         <p:nvSpPr>
-          <p:cNvPr id="15" name="TextBox 14"/>
+          <p:cNvPr id="16" name="TextBox 15"/>
           <p:cNvSpPr txBox="1"/>
           <p:nvPr/>
         </p:nvSpPr>
@@ -12754,7 +12718,7 @@
       </p:sp>
       <p:sp>
         <p:nvSpPr>
-          <p:cNvPr id="16" name="TextBox 15"/>
+          <p:cNvPr id="17" name="TextBox 16"/>
           <p:cNvSpPr txBox="1"/>
           <p:nvPr/>
         </p:nvSpPr>
@@ -12793,7 +12757,7 @@
       </p:sp>
       <p:sp>
         <p:nvSpPr>
-          <p:cNvPr id="17" name="TextBox 16"/>
+          <p:cNvPr id="18" name="TextBox 17"/>
           <p:cNvSpPr txBox="1"/>
           <p:nvPr/>
         </p:nvSpPr>
@@ -12832,7 +12796,7 @@
       </p:sp>
       <p:sp>
         <p:nvSpPr>
-          <p:cNvPr id="18" name="TextBox 17"/>
+          <p:cNvPr id="19" name="TextBox 18"/>
           <p:cNvSpPr txBox="1"/>
           <p:nvPr/>
         </p:nvSpPr>
@@ -12871,7 +12835,7 @@
       </p:sp>
       <p:sp>
         <p:nvSpPr>
-          <p:cNvPr id="19" name="TextBox 18"/>
+          <p:cNvPr id="20" name="TextBox 19"/>
           <p:cNvSpPr txBox="1"/>
           <p:nvPr/>
         </p:nvSpPr>
@@ -12910,7 +12874,7 @@
       </p:sp>
       <p:sp>
         <p:nvSpPr>
-          <p:cNvPr id="20" name="TextBox 19"/>
+          <p:cNvPr id="21" name="TextBox 20"/>
           <p:cNvSpPr txBox="1"/>
           <p:nvPr/>
         </p:nvSpPr>
@@ -12973,9 +12937,33 @@
         <p:nvPr/>
       </p:nvGrpSpPr>
       <p:grpSpPr/>
-      <p:sp>
-        <p:nvSpPr>
-          <p:cNvPr id="2" name="TextBox 1"/>
+      <p:pic>
+        <p:nvPicPr>
+          <p:cNvPr id="2" name="Picture 1" descr="u-azul.png"/>
+          <p:cNvPicPr>
+            <a:picLocks noChangeAspect="1"/>
+          </p:cNvPicPr>
+          <p:nvPr/>
+        </p:nvPicPr>
+        <p:blipFill>
+          <a:blip r:embed="rId2"/>
+          <a:stretch>
+            <a:fillRect/>
+          </a:stretch>
+        </p:blipFill>
+        <p:spPr>
+          <a:xfrm>
+            <a:off x="10744200" y="457200"/>
+            <a:ext cx="342900" cy="342900"/>
+          </a:xfrm>
+          <a:prstGeom prst="rect">
+            <a:avLst/>
+          </a:prstGeom>
+        </p:spPr>
+      </p:pic>
+      <p:sp>
+        <p:nvSpPr>
+          <p:cNvPr id="3" name="TextBox 2"/>
           <p:cNvSpPr txBox="1"/>
           <p:nvPr/>
         </p:nvSpPr>
@@ -13014,14 +13002,14 @@
       </p:sp>
       <p:sp>
         <p:nvSpPr>
-          <p:cNvPr id="3" name="TextBox 2"/>
+          <p:cNvPr id="4" name="TextBox 3"/>
           <p:cNvSpPr txBox="1"/>
           <p:nvPr/>
         </p:nvSpPr>
         <p:spPr>
           <a:xfrm>
             <a:off x="685800" y="838200"/>
-            <a:ext cx="9525000" cy="1524000"/>
+            <a:ext cx="9620250" cy="1524000"/>
           </a:xfrm>
           <a:prstGeom prst="rect">
             <a:avLst/>
@@ -13069,7 +13057,7 @@
       </p:sp>
       <p:sp>
         <p:nvSpPr>
-          <p:cNvPr id="4" name="TextBox 3"/>
+          <p:cNvPr id="5" name="TextBox 4"/>
           <p:cNvSpPr txBox="1"/>
           <p:nvPr/>
         </p:nvSpPr>
@@ -13108,7 +13096,7 @@
       </p:sp>
       <p:sp>
         <p:nvSpPr>
-          <p:cNvPr id="5" name="Rectangle 4"/>
+          <p:cNvPr id="6" name="Rectangle 5"/>
           <p:cNvSpPr/>
           <p:nvPr/>
         </p:nvSpPr>
@@ -13152,7 +13140,7 @@
       </p:sp>
       <p:sp>
         <p:nvSpPr>
-          <p:cNvPr id="6" name="TextBox 5"/>
+          <p:cNvPr id="7" name="TextBox 6"/>
           <p:cNvSpPr txBox="1"/>
           <p:nvPr/>
         </p:nvSpPr>
@@ -13191,7 +13179,7 @@
       </p:sp>
       <p:sp>
         <p:nvSpPr>
-          <p:cNvPr id="7" name="TextBox 6"/>
+          <p:cNvPr id="8" name="TextBox 7"/>
           <p:cNvSpPr txBox="1"/>
           <p:nvPr/>
         </p:nvSpPr>
@@ -13230,7 +13218,7 @@
       </p:sp>
       <p:sp>
         <p:nvSpPr>
-          <p:cNvPr id="8" name="TextBox 7"/>
+          <p:cNvPr id="9" name="TextBox 8"/>
           <p:cNvSpPr txBox="1"/>
           <p:nvPr/>
         </p:nvSpPr>
@@ -13269,7 +13257,7 @@
       </p:sp>
       <p:sp>
         <p:nvSpPr>
-          <p:cNvPr id="9" name="TextBox 8"/>
+          <p:cNvPr id="10" name="TextBox 9"/>
           <p:cNvSpPr txBox="1"/>
           <p:nvPr/>
         </p:nvSpPr>
@@ -13308,7 +13296,7 @@
       </p:sp>
       <p:sp>
         <p:nvSpPr>
-          <p:cNvPr id="10" name="TextBox 9"/>
+          <p:cNvPr id="11" name="TextBox 10"/>
           <p:cNvSpPr txBox="1"/>
           <p:nvPr/>
         </p:nvSpPr>
@@ -13347,7 +13335,7 @@
       </p:sp>
       <p:sp>
         <p:nvSpPr>
-          <p:cNvPr id="11" name="TextBox 10"/>
+          <p:cNvPr id="12" name="TextBox 11"/>
           <p:cNvSpPr txBox="1"/>
           <p:nvPr/>
         </p:nvSpPr>
@@ -13386,7 +13374,7 @@
       </p:sp>
       <p:sp>
         <p:nvSpPr>
-          <p:cNvPr id="12" name="TextBox 11"/>
+          <p:cNvPr id="13" name="TextBox 12"/>
           <p:cNvSpPr txBox="1"/>
           <p:nvPr/>
         </p:nvSpPr>
@@ -13425,7 +13413,7 @@
       </p:sp>
       <p:sp>
         <p:nvSpPr>
-          <p:cNvPr id="13" name="TextBox 12"/>
+          <p:cNvPr id="14" name="TextBox 13"/>
           <p:cNvSpPr txBox="1"/>
           <p:nvPr/>
         </p:nvSpPr>
@@ -13464,7 +13452,7 @@
       </p:sp>
       <p:sp>
         <p:nvSpPr>
-          <p:cNvPr id="14" name="TextBox 13"/>
+          <p:cNvPr id="15" name="TextBox 14"/>
           <p:cNvSpPr txBox="1"/>
           <p:nvPr/>
         </p:nvSpPr>
@@ -13503,7 +13491,7 @@
       </p:sp>
       <p:sp>
         <p:nvSpPr>
-          <p:cNvPr id="15" name="Rectangle 14"/>
+          <p:cNvPr id="16" name="Rectangle 15"/>
           <p:cNvSpPr/>
           <p:nvPr/>
         </p:nvSpPr>
@@ -13547,7 +13535,7 @@
       </p:sp>
       <p:sp>
         <p:nvSpPr>
-          <p:cNvPr id="16" name="TextBox 15"/>
+          <p:cNvPr id="17" name="TextBox 16"/>
           <p:cNvSpPr txBox="1"/>
           <p:nvPr/>
         </p:nvSpPr>
@@ -13586,7 +13574,7 @@
       </p:sp>
       <p:sp>
         <p:nvSpPr>
-          <p:cNvPr id="17" name="TextBox 16"/>
+          <p:cNvPr id="18" name="TextBox 17"/>
           <p:cNvSpPr txBox="1"/>
           <p:nvPr/>
         </p:nvSpPr>
@@ -13625,7 +13613,7 @@
       </p:sp>
       <p:sp>
         <p:nvSpPr>
-          <p:cNvPr id="18" name="TextBox 17"/>
+          <p:cNvPr id="19" name="TextBox 18"/>
           <p:cNvSpPr txBox="1"/>
           <p:nvPr/>
         </p:nvSpPr>
@@ -13664,7 +13652,7 @@
       </p:sp>
       <p:sp>
         <p:nvSpPr>
-          <p:cNvPr id="19" name="TextBox 18"/>
+          <p:cNvPr id="20" name="TextBox 19"/>
           <p:cNvSpPr txBox="1"/>
           <p:nvPr/>
         </p:nvSpPr>
@@ -13703,7 +13691,7 @@
       </p:sp>
       <p:sp>
         <p:nvSpPr>
-          <p:cNvPr id="20" name="TextBox 19"/>
+          <p:cNvPr id="21" name="TextBox 20"/>
           <p:cNvSpPr txBox="1"/>
           <p:nvPr/>
         </p:nvSpPr>
@@ -13742,7 +13730,7 @@
       </p:sp>
       <p:sp>
         <p:nvSpPr>
-          <p:cNvPr id="21" name="TextBox 20"/>
+          <p:cNvPr id="22" name="TextBox 21"/>
           <p:cNvSpPr txBox="1"/>
           <p:nvPr/>
         </p:nvSpPr>
@@ -13781,7 +13769,7 @@
       </p:sp>
       <p:sp>
         <p:nvSpPr>
-          <p:cNvPr id="22" name="TextBox 21"/>
+          <p:cNvPr id="23" name="TextBox 22"/>
           <p:cNvSpPr txBox="1"/>
           <p:nvPr/>
         </p:nvSpPr>
@@ -13820,7 +13808,7 @@
       </p:sp>
       <p:sp>
         <p:nvSpPr>
-          <p:cNvPr id="23" name="TextBox 22"/>
+          <p:cNvPr id="24" name="TextBox 23"/>
           <p:cNvSpPr txBox="1"/>
           <p:nvPr/>
         </p:nvSpPr>
@@ -13883,9 +13871,33 @@
         <p:nvPr/>
       </p:nvGrpSpPr>
       <p:grpSpPr/>
-      <p:sp>
-        <p:nvSpPr>
-          <p:cNvPr id="2" name="TextBox 1"/>
+      <p:pic>
+        <p:nvPicPr>
+          <p:cNvPr id="2" name="Picture 1" descr="u-azul.png"/>
+          <p:cNvPicPr>
+            <a:picLocks noChangeAspect="1"/>
+          </p:cNvPicPr>
+          <p:nvPr/>
+        </p:nvPicPr>
+        <p:blipFill>
+          <a:blip r:embed="rId2"/>
+          <a:stretch>
+            <a:fillRect/>
+          </a:stretch>
+        </p:blipFill>
+        <p:spPr>
+          <a:xfrm>
+            <a:off x="10744200" y="457200"/>
+            <a:ext cx="342900" cy="342900"/>
+          </a:xfrm>
+          <a:prstGeom prst="rect">
+            <a:avLst/>
+          </a:prstGeom>
+        </p:spPr>
+      </p:pic>
+      <p:sp>
+        <p:nvSpPr>
+          <p:cNvPr id="3" name="TextBox 2"/>
           <p:cNvSpPr txBox="1"/>
           <p:nvPr/>
         </p:nvSpPr>
@@ -13924,14 +13936,14 @@
       </p:sp>
       <p:sp>
         <p:nvSpPr>
-          <p:cNvPr id="3" name="TextBox 2"/>
+          <p:cNvPr id="4" name="TextBox 3"/>
           <p:cNvSpPr txBox="1"/>
           <p:nvPr/>
         </p:nvSpPr>
         <p:spPr>
           <a:xfrm>
             <a:off x="685800" y="838200"/>
-            <a:ext cx="9525000" cy="1524000"/>
+            <a:ext cx="9620250" cy="1524000"/>
           </a:xfrm>
           <a:prstGeom prst="rect">
             <a:avLst/>
@@ -13963,7 +13975,7 @@
       </p:sp>
       <p:sp>
         <p:nvSpPr>
-          <p:cNvPr id="4" name="TextBox 3"/>
+          <p:cNvPr id="5" name="TextBox 4"/>
           <p:cNvSpPr txBox="1"/>
           <p:nvPr/>
         </p:nvSpPr>
@@ -14002,7 +14014,7 @@
       </p:sp>
       <p:sp>
         <p:nvSpPr>
-          <p:cNvPr id="5" name="Rounded Rectangle 4"/>
+          <p:cNvPr id="6" name="Rounded Rectangle 5"/>
           <p:cNvSpPr/>
           <p:nvPr/>
         </p:nvSpPr>
@@ -14050,7 +14062,7 @@
       </p:sp>
       <p:sp>
         <p:nvSpPr>
-          <p:cNvPr id="6" name="TextBox 5"/>
+          <p:cNvPr id="7" name="TextBox 6"/>
           <p:cNvSpPr txBox="1"/>
           <p:nvPr/>
         </p:nvSpPr>
@@ -14089,7 +14101,7 @@
       </p:sp>
       <p:sp>
         <p:nvSpPr>
-          <p:cNvPr id="7" name="Rounded Rectangle 6"/>
+          <p:cNvPr id="8" name="Rounded Rectangle 7"/>
           <p:cNvSpPr/>
           <p:nvPr/>
         </p:nvSpPr>
@@ -14137,7 +14149,7 @@
       </p:sp>
       <p:sp>
         <p:nvSpPr>
-          <p:cNvPr id="8" name="TextBox 7"/>
+          <p:cNvPr id="9" name="TextBox 8"/>
           <p:cNvSpPr txBox="1"/>
           <p:nvPr/>
         </p:nvSpPr>
@@ -14176,7 +14188,7 @@
       </p:sp>
       <p:sp>
         <p:nvSpPr>
-          <p:cNvPr id="9" name="Rounded Rectangle 8"/>
+          <p:cNvPr id="10" name="Rounded Rectangle 9"/>
           <p:cNvSpPr/>
           <p:nvPr/>
         </p:nvSpPr>
@@ -14224,7 +14236,7 @@
       </p:sp>
       <p:sp>
         <p:nvSpPr>
-          <p:cNvPr id="10" name="TextBox 9"/>
+          <p:cNvPr id="11" name="TextBox 10"/>
           <p:cNvSpPr txBox="1"/>
           <p:nvPr/>
         </p:nvSpPr>
@@ -14263,7 +14275,7 @@
       </p:sp>
       <p:sp>
         <p:nvSpPr>
-          <p:cNvPr id="11" name="Rounded Rectangle 10"/>
+          <p:cNvPr id="12" name="Rounded Rectangle 11"/>
           <p:cNvSpPr/>
           <p:nvPr/>
         </p:nvSpPr>
@@ -14312,7 +14324,7 @@
       </p:sp>
       <p:sp>
         <p:nvSpPr>
-          <p:cNvPr id="12" name="TextBox 11"/>
+          <p:cNvPr id="13" name="TextBox 12"/>
           <p:cNvSpPr txBox="1"/>
           <p:nvPr/>
         </p:nvSpPr>
@@ -14351,7 +14363,7 @@
       </p:sp>
       <p:sp>
         <p:nvSpPr>
-          <p:cNvPr id="13" name="TextBox 12"/>
+          <p:cNvPr id="14" name="TextBox 13"/>
           <p:cNvSpPr txBox="1"/>
           <p:nvPr/>
         </p:nvSpPr>
@@ -14390,7 +14402,7 @@
       </p:sp>
       <p:cxnSp>
         <p:nvCxnSpPr>
-          <p:cNvPr id="14" name="Connector 13"/>
+          <p:cNvPr id="15" name="Connector 14"/>
           <p:cNvCxnSpPr/>
           <p:nvPr/>
         </p:nvCxnSpPr>
@@ -14425,7 +14437,7 @@
       </p:cxnSp>
       <p:sp>
         <p:nvSpPr>
-          <p:cNvPr id="15" name="TextBox 14"/>
+          <p:cNvPr id="16" name="TextBox 15"/>
           <p:cNvSpPr txBox="1"/>
           <p:nvPr/>
         </p:nvSpPr>
@@ -14464,7 +14476,7 @@
       </p:sp>
       <p:sp>
         <p:nvSpPr>
-          <p:cNvPr id="16" name="TextBox 15"/>
+          <p:cNvPr id="17" name="TextBox 16"/>
           <p:cNvSpPr txBox="1"/>
           <p:nvPr/>
         </p:nvSpPr>
@@ -14503,7 +14515,7 @@
       </p:sp>
       <p:sp>
         <p:nvSpPr>
-          <p:cNvPr id="17" name="TextBox 16"/>
+          <p:cNvPr id="18" name="TextBox 17"/>
           <p:cNvSpPr txBox="1"/>
           <p:nvPr/>
         </p:nvSpPr>
@@ -14542,7 +14554,7 @@
       </p:sp>
       <p:sp>
         <p:nvSpPr>
-          <p:cNvPr id="18" name="TextBox 17"/>
+          <p:cNvPr id="19" name="TextBox 18"/>
           <p:cNvSpPr txBox="1"/>
           <p:nvPr/>
         </p:nvSpPr>
@@ -14581,7 +14593,7 @@
       </p:sp>
       <p:sp>
         <p:nvSpPr>
-          <p:cNvPr id="19" name="TextBox 18"/>
+          <p:cNvPr id="20" name="TextBox 19"/>
           <p:cNvSpPr txBox="1"/>
           <p:nvPr/>
         </p:nvSpPr>
@@ -14620,7 +14632,7 @@
       </p:sp>
       <p:sp>
         <p:nvSpPr>
-          <p:cNvPr id="20" name="TextBox 19"/>
+          <p:cNvPr id="21" name="TextBox 20"/>
           <p:cNvSpPr txBox="1"/>
           <p:nvPr/>
         </p:nvSpPr>
@@ -14659,7 +14671,7 @@
       </p:sp>
       <p:sp>
         <p:nvSpPr>
-          <p:cNvPr id="21" name="TextBox 20"/>
+          <p:cNvPr id="22" name="TextBox 21"/>
           <p:cNvSpPr txBox="1"/>
           <p:nvPr/>
         </p:nvSpPr>
@@ -14722,9 +14734,33 @@
         <p:nvPr/>
       </p:nvGrpSpPr>
       <p:grpSpPr/>
-      <p:sp>
-        <p:nvSpPr>
-          <p:cNvPr id="2" name="TextBox 1"/>
+      <p:pic>
+        <p:nvPicPr>
+          <p:cNvPr id="2" name="Picture 1" descr="u-azul.png"/>
+          <p:cNvPicPr>
+            <a:picLocks noChangeAspect="1"/>
+          </p:cNvPicPr>
+          <p:nvPr/>
+        </p:nvPicPr>
+        <p:blipFill>
+          <a:blip r:embed="rId2"/>
+          <a:stretch>
+            <a:fillRect/>
+          </a:stretch>
+        </p:blipFill>
+        <p:spPr>
+          <a:xfrm>
+            <a:off x="10744200" y="457200"/>
+            <a:ext cx="342900" cy="342900"/>
+          </a:xfrm>
+          <a:prstGeom prst="rect">
+            <a:avLst/>
+          </a:prstGeom>
+        </p:spPr>
+      </p:pic>
+      <p:sp>
+        <p:nvSpPr>
+          <p:cNvPr id="3" name="TextBox 2"/>
           <p:cNvSpPr txBox="1"/>
           <p:nvPr/>
         </p:nvSpPr>
@@ -14763,14 +14799,14 @@
       </p:sp>
       <p:sp>
         <p:nvSpPr>
-          <p:cNvPr id="3" name="TextBox 2"/>
+          <p:cNvPr id="4" name="TextBox 3"/>
           <p:cNvSpPr txBox="1"/>
           <p:nvPr/>
         </p:nvSpPr>
         <p:spPr>
           <a:xfrm>
             <a:off x="685800" y="838200"/>
-            <a:ext cx="9525000" cy="1524000"/>
+            <a:ext cx="9620250" cy="1524000"/>
           </a:xfrm>
           <a:prstGeom prst="rect">
             <a:avLst/>
@@ -14802,7 +14838,7 @@
       </p:sp>
       <p:sp>
         <p:nvSpPr>
-          <p:cNvPr id="4" name="Rounded Rectangle 3"/>
+          <p:cNvPr id="5" name="Rounded Rectangle 4"/>
           <p:cNvSpPr/>
           <p:nvPr/>
         </p:nvSpPr>
@@ -14848,7 +14884,7 @@
       </p:sp>
       <p:sp>
         <p:nvSpPr>
-          <p:cNvPr id="5" name="TextBox 4"/>
+          <p:cNvPr id="6" name="TextBox 5"/>
           <p:cNvSpPr txBox="1"/>
           <p:nvPr/>
         </p:nvSpPr>
@@ -14887,7 +14923,7 @@
       </p:sp>
       <p:sp>
         <p:nvSpPr>
-          <p:cNvPr id="6" name="TextBox 5"/>
+          <p:cNvPr id="7" name="TextBox 6"/>
           <p:cNvSpPr txBox="1"/>
           <p:nvPr/>
         </p:nvSpPr>
@@ -14926,7 +14962,7 @@
       </p:sp>
       <p:sp>
         <p:nvSpPr>
-          <p:cNvPr id="7" name="Rounded Rectangle 6"/>
+          <p:cNvPr id="8" name="Rounded Rectangle 7"/>
           <p:cNvSpPr/>
           <p:nvPr/>
         </p:nvSpPr>
@@ -14972,7 +15008,7 @@
       </p:sp>
       <p:sp>
         <p:nvSpPr>
-          <p:cNvPr id="8" name="TextBox 7"/>
+          <p:cNvPr id="9" name="TextBox 8"/>
           <p:cNvSpPr txBox="1"/>
           <p:nvPr/>
         </p:nvSpPr>
@@ -15011,7 +15047,7 @@
       </p:sp>
       <p:sp>
         <p:nvSpPr>
-          <p:cNvPr id="9" name="TextBox 8"/>
+          <p:cNvPr id="10" name="TextBox 9"/>
           <p:cNvSpPr txBox="1"/>
           <p:nvPr/>
         </p:nvSpPr>
@@ -15050,7 +15086,7 @@
       </p:sp>
       <p:cxnSp>
         <p:nvCxnSpPr>
-          <p:cNvPr id="10" name="Connector 9"/>
+          <p:cNvPr id="11" name="Connector 10"/>
           <p:cNvCxnSpPr/>
           <p:nvPr/>
         </p:nvCxnSpPr>
@@ -15085,7 +15121,7 @@
       </p:cxnSp>
       <p:sp>
         <p:nvSpPr>
-          <p:cNvPr id="11" name="Rounded Rectangle 10"/>
+          <p:cNvPr id="12" name="Rounded Rectangle 11"/>
           <p:cNvSpPr/>
           <p:nvPr/>
         </p:nvSpPr>
@@ -15131,7 +15167,7 @@
       </p:sp>
       <p:sp>
         <p:nvSpPr>
-          <p:cNvPr id="12" name="TextBox 11"/>
+          <p:cNvPr id="13" name="TextBox 12"/>
           <p:cNvSpPr txBox="1"/>
           <p:nvPr/>
         </p:nvSpPr>
@@ -15170,7 +15206,7 @@
       </p:sp>
       <p:sp>
         <p:nvSpPr>
-          <p:cNvPr id="13" name="TextBox 12"/>
+          <p:cNvPr id="14" name="TextBox 13"/>
           <p:cNvSpPr txBox="1"/>
           <p:nvPr/>
         </p:nvSpPr>
@@ -15209,7 +15245,7 @@
       </p:sp>
       <p:cxnSp>
         <p:nvCxnSpPr>
-          <p:cNvPr id="14" name="Connector 13"/>
+          <p:cNvPr id="15" name="Connector 14"/>
           <p:cNvCxnSpPr/>
           <p:nvPr/>
         </p:nvCxnSpPr>
@@ -15244,7 +15280,7 @@
       </p:cxnSp>
       <p:sp>
         <p:nvSpPr>
-          <p:cNvPr id="15" name="Rounded Rectangle 14"/>
+          <p:cNvPr id="16" name="Rounded Rectangle 15"/>
           <p:cNvSpPr/>
           <p:nvPr/>
         </p:nvSpPr>
@@ -15290,7 +15326,7 @@
       </p:sp>
       <p:sp>
         <p:nvSpPr>
-          <p:cNvPr id="16" name="TextBox 15"/>
+          <p:cNvPr id="17" name="TextBox 16"/>
           <p:cNvSpPr txBox="1"/>
           <p:nvPr/>
         </p:nvSpPr>
@@ -15329,7 +15365,7 @@
       </p:sp>
       <p:sp>
         <p:nvSpPr>
-          <p:cNvPr id="17" name="TextBox 16"/>
+          <p:cNvPr id="18" name="TextBox 17"/>
           <p:cNvSpPr txBox="1"/>
           <p:nvPr/>
         </p:nvSpPr>
@@ -15368,7 +15404,7 @@
       </p:sp>
       <p:cxnSp>
         <p:nvCxnSpPr>
-          <p:cNvPr id="18" name="Connector 17"/>
+          <p:cNvPr id="19" name="Connector 18"/>
           <p:cNvCxnSpPr/>
           <p:nvPr/>
         </p:nvCxnSpPr>
@@ -15403,7 +15439,7 @@
       </p:cxnSp>
       <p:sp>
         <p:nvSpPr>
-          <p:cNvPr id="19" name="Rounded Rectangle 18"/>
+          <p:cNvPr id="20" name="Rounded Rectangle 19"/>
           <p:cNvSpPr/>
           <p:nvPr/>
         </p:nvSpPr>
@@ -15449,7 +15485,7 @@
       </p:sp>
       <p:sp>
         <p:nvSpPr>
-          <p:cNvPr id="20" name="TextBox 19"/>
+          <p:cNvPr id="21" name="TextBox 20"/>
           <p:cNvSpPr txBox="1"/>
           <p:nvPr/>
         </p:nvSpPr>
@@ -15488,7 +15524,7 @@
       </p:sp>
       <p:sp>
         <p:nvSpPr>
-          <p:cNvPr id="21" name="TextBox 20"/>
+          <p:cNvPr id="22" name="TextBox 21"/>
           <p:cNvSpPr txBox="1"/>
           <p:nvPr/>
         </p:nvSpPr>
@@ -15527,7 +15563,7 @@
       </p:sp>
       <p:cxnSp>
         <p:nvCxnSpPr>
-          <p:cNvPr id="22" name="Connector 21"/>
+          <p:cNvPr id="23" name="Connector 22"/>
           <p:cNvCxnSpPr/>
           <p:nvPr/>
         </p:nvCxnSpPr>
@@ -15562,7 +15598,7 @@
       </p:cxnSp>
       <p:sp>
         <p:nvSpPr>
-          <p:cNvPr id="23" name="TextBox 22"/>
+          <p:cNvPr id="24" name="TextBox 23"/>
           <p:cNvSpPr txBox="1"/>
           <p:nvPr/>
         </p:nvSpPr>
@@ -15601,7 +15637,7 @@
       </p:sp>
       <p:sp>
         <p:nvSpPr>
-          <p:cNvPr id="24" name="TextBox 23"/>
+          <p:cNvPr id="25" name="TextBox 24"/>
           <p:cNvSpPr txBox="1"/>
           <p:nvPr/>
         </p:nvSpPr>
@@ -15640,7 +15676,7 @@
       </p:sp>
       <p:sp>
         <p:nvSpPr>
-          <p:cNvPr id="25" name="TextBox 24"/>
+          <p:cNvPr id="26" name="TextBox 25"/>
           <p:cNvSpPr txBox="1"/>
           <p:nvPr/>
         </p:nvSpPr>
@@ -15679,7 +15715,7 @@
       </p:sp>
       <p:sp>
         <p:nvSpPr>
-          <p:cNvPr id="26" name="TextBox 25"/>
+          <p:cNvPr id="27" name="TextBox 26"/>
           <p:cNvSpPr txBox="1"/>
           <p:nvPr/>
         </p:nvSpPr>
@@ -15718,7 +15754,7 @@
       </p:sp>
       <p:sp>
         <p:nvSpPr>
-          <p:cNvPr id="27" name="TextBox 26"/>
+          <p:cNvPr id="28" name="TextBox 27"/>
           <p:cNvSpPr txBox="1"/>
           <p:nvPr/>
         </p:nvSpPr>
@@ -15781,9 +15817,33 @@
         <p:nvPr/>
       </p:nvGrpSpPr>
       <p:grpSpPr/>
-      <p:sp>
-        <p:nvSpPr>
-          <p:cNvPr id="2" name="TextBox 1"/>
+      <p:pic>
+        <p:nvPicPr>
+          <p:cNvPr id="2" name="Picture 1" descr="u-azul.png"/>
+          <p:cNvPicPr>
+            <a:picLocks noChangeAspect="1"/>
+          </p:cNvPicPr>
+          <p:nvPr/>
+        </p:nvPicPr>
+        <p:blipFill>
+          <a:blip r:embed="rId2"/>
+          <a:stretch>
+            <a:fillRect/>
+          </a:stretch>
+        </p:blipFill>
+        <p:spPr>
+          <a:xfrm>
+            <a:off x="10744200" y="457200"/>
+            <a:ext cx="342900" cy="342900"/>
+          </a:xfrm>
+          <a:prstGeom prst="rect">
+            <a:avLst/>
+          </a:prstGeom>
+        </p:spPr>
+      </p:pic>
+      <p:sp>
+        <p:nvSpPr>
+          <p:cNvPr id="3" name="TextBox 2"/>
           <p:cNvSpPr txBox="1"/>
           <p:nvPr/>
         </p:nvSpPr>
@@ -15822,14 +15882,14 @@
       </p:sp>
       <p:sp>
         <p:nvSpPr>
-          <p:cNvPr id="3" name="TextBox 2"/>
+          <p:cNvPr id="4" name="TextBox 3"/>
           <p:cNvSpPr txBox="1"/>
           <p:nvPr/>
         </p:nvSpPr>
         <p:spPr>
           <a:xfrm>
             <a:off x="685800" y="838200"/>
-            <a:ext cx="9525000" cy="1524000"/>
+            <a:ext cx="9620250" cy="1524000"/>
           </a:xfrm>
           <a:prstGeom prst="rect">
             <a:avLst/>
@@ -15861,7 +15921,7 @@
       </p:sp>
       <p:sp>
         <p:nvSpPr>
-          <p:cNvPr id="4" name="TextBox 3"/>
+          <p:cNvPr id="5" name="TextBox 4"/>
           <p:cNvSpPr txBox="1"/>
           <p:nvPr/>
         </p:nvSpPr>
@@ -15900,7 +15960,7 @@
       </p:sp>
       <p:sp>
         <p:nvSpPr>
-          <p:cNvPr id="5" name="TextBox 4"/>
+          <p:cNvPr id="6" name="TextBox 5"/>
           <p:cNvSpPr txBox="1"/>
           <p:nvPr/>
         </p:nvSpPr>
@@ -15948,7 +16008,7 @@
       </p:sp>
       <p:sp>
         <p:nvSpPr>
-          <p:cNvPr id="6" name="TextBox 5"/>
+          <p:cNvPr id="7" name="TextBox 6"/>
           <p:cNvSpPr txBox="1"/>
           <p:nvPr/>
         </p:nvSpPr>
@@ -15987,7 +16047,7 @@
       </p:sp>
       <p:sp>
         <p:nvSpPr>
-          <p:cNvPr id="7" name="TextBox 6"/>
+          <p:cNvPr id="8" name="TextBox 7"/>
           <p:cNvSpPr txBox="1"/>
           <p:nvPr/>
         </p:nvSpPr>
@@ -16035,7 +16095,7 @@
       </p:sp>
       <p:sp>
         <p:nvSpPr>
-          <p:cNvPr id="8" name="TextBox 7"/>
+          <p:cNvPr id="9" name="TextBox 8"/>
           <p:cNvSpPr txBox="1"/>
           <p:nvPr/>
         </p:nvSpPr>
@@ -16074,7 +16134,7 @@
       </p:sp>
       <p:sp>
         <p:nvSpPr>
-          <p:cNvPr id="9" name="TextBox 8"/>
+          <p:cNvPr id="10" name="TextBox 9"/>
           <p:cNvSpPr txBox="1"/>
           <p:nvPr/>
         </p:nvSpPr>
@@ -16122,23 +16182,23 @@
       </p:sp>
       <p:sp>
         <p:nvSpPr>
-          <p:cNvPr id="10" name="Rectangle 9"/>
+          <p:cNvPr id="11" name="Isosceles Triangle 10"/>
           <p:cNvSpPr/>
           <p:nvPr/>
         </p:nvSpPr>
         <p:spPr>
           <a:xfrm>
             <a:off x="9124950" y="2000250"/>
-            <a:ext cx="28575" cy="876300"/>
-          </a:xfrm>
-          <a:prstGeom prst="rect">
-            <a:avLst/>
-          </a:prstGeom>
-          <a:solidFill>
-            <a:srgbClr val="E94D1C"/>
-          </a:solidFill>
-          <a:ln>
-            <a:noFill/>
+            <a:ext cx="152400" cy="133350"/>
+          </a:xfrm>
+          <a:prstGeom prst="triangle">
+            <a:avLst/>
+          </a:prstGeom>
+          <a:noFill/>
+          <a:ln w="19050">
+            <a:solidFill>
+              <a:srgbClr val="E94D1C"/>
+            </a:solidFill>
           </a:ln>
           <a:effectLst/>
         </p:spPr>
@@ -16157,6 +16217,133 @@
           </a:fontRef>
         </p:style>
         <p:txBody>
+          <a:bodyPr rtlCol="0" anchor="ctr"/>
+          <a:lstStyle/>
+          <a:p>
+            <a:pPr algn="ctr"/>
+          </a:p>
+        </p:txBody>
+      </p:sp>
+      <p:sp>
+        <p:nvSpPr>
+          <p:cNvPr id="12" name="Rectangle 11"/>
+          <p:cNvSpPr/>
+          <p:nvPr/>
+        </p:nvSpPr>
+        <p:spPr>
+          <a:xfrm>
+            <a:off x="9193530" y="2057400"/>
+            <a:ext cx="15240" cy="38100"/>
+          </a:xfrm>
+          <a:prstGeom prst="rect">
+            <a:avLst/>
+          </a:prstGeom>
+          <a:solidFill>
+            <a:srgbClr val="E94D1C"/>
+          </a:solidFill>
+          <a:ln>
+            <a:noFill/>
+          </a:ln>
+          <a:effectLst/>
+        </p:spPr>
+        <p:style>
+          <a:lnRef idx="1">
+            <a:schemeClr val="accent1"/>
+          </a:lnRef>
+          <a:fillRef idx="3">
+            <a:schemeClr val="accent1"/>
+          </a:fillRef>
+          <a:effectRef idx="2">
+            <a:schemeClr val="accent1"/>
+          </a:effectRef>
+          <a:fontRef idx="minor">
+            <a:schemeClr val="lt1"/>
+          </a:fontRef>
+        </p:style>
+        <p:txBody>
+          <a:bodyPr rtlCol="0" anchor="ctr"/>
+          <a:lstStyle/>
+          <a:p>
+            <a:pPr algn="ctr"/>
+          </a:p>
+        </p:txBody>
+      </p:sp>
+      <p:sp>
+        <p:nvSpPr>
+          <p:cNvPr id="13" name="TextBox 12"/>
+          <p:cNvSpPr txBox="1"/>
+          <p:nvPr/>
+        </p:nvSpPr>
+        <p:spPr>
+          <a:xfrm>
+            <a:off x="9353550" y="2009775"/>
+            <a:ext cx="2152650" cy="167640"/>
+          </a:xfrm>
+          <a:prstGeom prst="rect">
+            <a:avLst/>
+          </a:prstGeom>
+          <a:noFill/>
+        </p:spPr>
+        <p:txBody>
+          <a:bodyPr wrap="square" lIns="0" rIns="0" tIns="0" bIns="0" anchor="t">
+            <a:spAutoFit/>
+          </a:bodyPr>
+          <a:lstStyle/>
+          <a:p>
+            <a:pPr algn="l">
+              <a:lnSpc>
+                <a:spcPct val="120000"/>
+              </a:lnSpc>
+            </a:pPr>
+            <a:r>
+              <a:rPr sz="819" b="1" i="0" spc="120">
+                <a:solidFill>
+                  <a:srgbClr val="E94D1C"/>
+                </a:solidFill>
+                <a:latin typeface="Roboto"/>
+              </a:rPr>
+              <a:t>CUIDADO</a:t>
+            </a:r>
+          </a:p>
+        </p:txBody>
+      </p:sp>
+      <p:sp>
+        <p:nvSpPr>
+          <p:cNvPr id="14" name="Rectangle 13"/>
+          <p:cNvSpPr/>
+          <p:nvPr/>
+        </p:nvSpPr>
+        <p:spPr>
+          <a:xfrm>
+            <a:off x="9124950" y="2247900"/>
+            <a:ext cx="28575" cy="628650"/>
+          </a:xfrm>
+          <a:prstGeom prst="rect">
+            <a:avLst/>
+          </a:prstGeom>
+          <a:solidFill>
+            <a:srgbClr val="E94D1C"/>
+          </a:solidFill>
+          <a:ln>
+            <a:noFill/>
+          </a:ln>
+          <a:effectLst/>
+        </p:spPr>
+        <p:style>
+          <a:lnRef idx="1">
+            <a:schemeClr val="accent1"/>
+          </a:lnRef>
+          <a:fillRef idx="3">
+            <a:schemeClr val="accent1"/>
+          </a:fillRef>
+          <a:effectRef idx="2">
+            <a:schemeClr val="accent1"/>
+          </a:effectRef>
+          <a:fontRef idx="minor">
+            <a:schemeClr val="lt1"/>
+          </a:fontRef>
+        </p:style>
+        <p:txBody>
           <a:bodyPr rtlCol="0" anchor="ctr" wrap="square" lIns="0" rIns="0" tIns="0" bIns="0"/>
           <a:lstStyle/>
           <a:p>
@@ -16166,52 +16353,13 @@
       </p:sp>
       <p:sp>
         <p:nvSpPr>
-          <p:cNvPr id="11" name="TextBox 10"/>
-          <p:cNvSpPr txBox="1"/>
-          <p:nvPr/>
-        </p:nvSpPr>
-        <p:spPr>
-          <a:xfrm>
-            <a:off x="9286875" y="2000250"/>
-            <a:ext cx="2219325" cy="167640"/>
-          </a:xfrm>
-          <a:prstGeom prst="rect">
-            <a:avLst/>
-          </a:prstGeom>
-          <a:noFill/>
-        </p:spPr>
-        <p:txBody>
-          <a:bodyPr wrap="square" lIns="0" rIns="0" tIns="0" bIns="0" anchor="t">
-            <a:spAutoFit/>
-          </a:bodyPr>
-          <a:lstStyle/>
-          <a:p>
-            <a:pPr algn="l">
-              <a:lnSpc>
-                <a:spcPct val="120000"/>
-              </a:lnSpc>
-            </a:pPr>
-            <a:r>
-              <a:rPr sz="819" b="1" i="0" spc="120">
-                <a:solidFill>
-                  <a:srgbClr val="E94D1C"/>
-                </a:solidFill>
-                <a:latin typeface="Roboto"/>
-              </a:rPr>
-              <a:t>CUIDADO</a:t>
-            </a:r>
-          </a:p>
-        </p:txBody>
-      </p:sp>
-      <p:sp>
-        <p:nvSpPr>
-          <p:cNvPr id="12" name="TextBox 11"/>
-          <p:cNvSpPr txBox="1"/>
-          <p:nvPr/>
-        </p:nvSpPr>
-        <p:spPr>
-          <a:xfrm>
-            <a:off x="9286875" y="2209800"/>
+          <p:cNvPr id="15" name="TextBox 14"/>
+          <p:cNvSpPr txBox="1"/>
+          <p:nvPr/>
+        </p:nvSpPr>
+        <p:spPr>
+          <a:xfrm>
+            <a:off x="9286875" y="2286000"/>
             <a:ext cx="2219325" cy="2286000"/>
           </a:xfrm>
           <a:prstGeom prst="rect">
@@ -16247,7 +16395,7 @@
       </p:sp>
       <p:sp>
         <p:nvSpPr>
-          <p:cNvPr id="13" name="TextBox 12"/>
+          <p:cNvPr id="16" name="TextBox 15"/>
           <p:cNvSpPr txBox="1"/>
           <p:nvPr/>
         </p:nvSpPr>
@@ -16286,7 +16434,7 @@
       </p:sp>
       <p:sp>
         <p:nvSpPr>
-          <p:cNvPr id="14" name="TextBox 13"/>
+          <p:cNvPr id="17" name="TextBox 16"/>
           <p:cNvSpPr txBox="1"/>
           <p:nvPr/>
         </p:nvSpPr>
@@ -16349,9 +16497,33 @@
         <p:nvPr/>
       </p:nvGrpSpPr>
       <p:grpSpPr/>
-      <p:sp>
-        <p:nvSpPr>
-          <p:cNvPr id="2" name="TextBox 1"/>
+      <p:pic>
+        <p:nvPicPr>
+          <p:cNvPr id="2" name="Picture 1" descr="u-branco.png"/>
+          <p:cNvPicPr>
+            <a:picLocks noChangeAspect="1"/>
+          </p:cNvPicPr>
+          <p:nvPr/>
+        </p:nvPicPr>
+        <p:blipFill>
+          <a:blip r:embed="rId2"/>
+          <a:stretch>
+            <a:fillRect/>
+          </a:stretch>
+        </p:blipFill>
+        <p:spPr>
+          <a:xfrm>
+            <a:off x="10744200" y="457200"/>
+            <a:ext cx="342900" cy="342900"/>
+          </a:xfrm>
+          <a:prstGeom prst="rect">
+            <a:avLst/>
+          </a:prstGeom>
+        </p:spPr>
+      </p:pic>
+      <p:sp>
+        <p:nvSpPr>
+          <p:cNvPr id="3" name="TextBox 2"/>
           <p:cNvSpPr txBox="1"/>
           <p:nvPr/>
         </p:nvSpPr>
@@ -16390,7 +16562,7 @@
       </p:sp>
       <p:sp>
         <p:nvSpPr>
-          <p:cNvPr id="3" name="TextBox 2"/>
+          <p:cNvPr id="4" name="TextBox 3"/>
           <p:cNvSpPr txBox="1"/>
           <p:nvPr/>
         </p:nvSpPr>
@@ -16461,7 +16633,7 @@
       </p:sp>
       <p:sp>
         <p:nvSpPr>
-          <p:cNvPr id="4" name="TextBox 3"/>
+          <p:cNvPr id="5" name="TextBox 4"/>
           <p:cNvSpPr txBox="1"/>
           <p:nvPr/>
         </p:nvSpPr>
@@ -16500,7 +16672,7 @@
       </p:sp>
       <p:sp>
         <p:nvSpPr>
-          <p:cNvPr id="5" name="TextBox 4"/>
+          <p:cNvPr id="6" name="TextBox 5"/>
           <p:cNvSpPr txBox="1"/>
           <p:nvPr/>
         </p:nvSpPr>
@@ -16539,7 +16711,7 @@
       </p:sp>
       <p:sp>
         <p:nvSpPr>
-          <p:cNvPr id="6" name="TextBox 5"/>
+          <p:cNvPr id="7" name="TextBox 6"/>
           <p:cNvSpPr txBox="1"/>
           <p:nvPr/>
         </p:nvSpPr>
@@ -16646,9 +16818,165 @@
           </a:p>
         </p:txBody>
       </p:sp>
-      <p:sp>
-        <p:nvSpPr>
-          <p:cNvPr id="3" name="TextBox 2"/>
+      <p:pic>
+        <p:nvPicPr>
+          <p:cNvPr id="3" name="Picture 2" descr="u-branco.png"/>
+          <p:cNvPicPr>
+            <a:picLocks noChangeAspect="1"/>
+          </p:cNvPicPr>
+          <p:nvPr/>
+        </p:nvPicPr>
+        <p:blipFill>
+          <a:blip r:embed="rId2"/>
+          <a:stretch>
+            <a:fillRect/>
+          </a:stretch>
+        </p:blipFill>
+        <p:spPr>
+          <a:xfrm>
+            <a:off x="10744200" y="457200"/>
+            <a:ext cx="342900" cy="342900"/>
+          </a:xfrm>
+          <a:prstGeom prst="rect">
+            <a:avLst/>
+          </a:prstGeom>
+        </p:spPr>
+      </p:pic>
+      <p:sp>
+        <p:nvSpPr>
+          <p:cNvPr id="4" name="Rounded Rectangle 3"/>
+          <p:cNvSpPr/>
+          <p:nvPr/>
+        </p:nvSpPr>
+        <p:spPr>
+          <a:xfrm>
+            <a:off x="8953500" y="3009900"/>
+            <a:ext cx="438150" cy="438150"/>
+          </a:xfrm>
+          <a:prstGeom prst="roundRect">
+            <a:avLst/>
+          </a:prstGeom>
+          <a:noFill/>
+          <a:ln w="31750">
+            <a:solidFill>
+              <a:srgbClr val="E94D1C"/>
+            </a:solidFill>
+          </a:ln>
+          <a:effectLst/>
+        </p:spPr>
+        <p:style>
+          <a:lnRef idx="1">
+            <a:schemeClr val="accent1"/>
+          </a:lnRef>
+          <a:fillRef idx="3">
+            <a:schemeClr val="accent1"/>
+          </a:fillRef>
+          <a:effectRef idx="2">
+            <a:schemeClr val="accent1"/>
+          </a:effectRef>
+          <a:fontRef idx="minor">
+            <a:schemeClr val="lt1"/>
+          </a:fontRef>
+        </p:style>
+        <p:txBody>
+          <a:bodyPr rtlCol="0" anchor="ctr"/>
+          <a:lstStyle/>
+          <a:p>
+            <a:pPr algn="ctr"/>
+          </a:p>
+        </p:txBody>
+      </p:sp>
+      <p:sp>
+        <p:nvSpPr>
+          <p:cNvPr id="5" name="Right Arrow 4"/>
+          <p:cNvSpPr/>
+          <p:nvPr/>
+        </p:nvSpPr>
+        <p:spPr>
+          <a:xfrm>
+            <a:off x="9486900" y="3143250"/>
+            <a:ext cx="323850" cy="171450"/>
+          </a:xfrm>
+          <a:prstGeom prst="rightArrow">
+            <a:avLst/>
+          </a:prstGeom>
+          <a:solidFill>
+            <a:srgbClr val="E94D1C"/>
+          </a:solidFill>
+          <a:ln>
+            <a:noFill/>
+          </a:ln>
+          <a:effectLst/>
+        </p:spPr>
+        <p:style>
+          <a:lnRef idx="1">
+            <a:schemeClr val="accent1"/>
+          </a:lnRef>
+          <a:fillRef idx="3">
+            <a:schemeClr val="accent1"/>
+          </a:fillRef>
+          <a:effectRef idx="2">
+            <a:schemeClr val="accent1"/>
+          </a:effectRef>
+          <a:fontRef idx="minor">
+            <a:schemeClr val="lt1"/>
+          </a:fontRef>
+        </p:style>
+        <p:txBody>
+          <a:bodyPr rtlCol="0" anchor="ctr"/>
+          <a:lstStyle/>
+          <a:p>
+            <a:pPr algn="ctr"/>
+          </a:p>
+        </p:txBody>
+      </p:sp>
+      <p:sp>
+        <p:nvSpPr>
+          <p:cNvPr id="6" name="Rounded Rectangle 5"/>
+          <p:cNvSpPr/>
+          <p:nvPr/>
+        </p:nvSpPr>
+        <p:spPr>
+          <a:xfrm>
+            <a:off x="9906000" y="3009900"/>
+            <a:ext cx="438150" cy="438150"/>
+          </a:xfrm>
+          <a:prstGeom prst="roundRect">
+            <a:avLst/>
+          </a:prstGeom>
+          <a:solidFill>
+            <a:srgbClr val="E94D1C"/>
+          </a:solidFill>
+          <a:ln>
+            <a:noFill/>
+          </a:ln>
+          <a:effectLst/>
+        </p:spPr>
+        <p:style>
+          <a:lnRef idx="1">
+            <a:schemeClr val="accent1"/>
+          </a:lnRef>
+          <a:fillRef idx="3">
+            <a:schemeClr val="accent1"/>
+          </a:fillRef>
+          <a:effectRef idx="2">
+            <a:schemeClr val="accent1"/>
+          </a:effectRef>
+          <a:fontRef idx="minor">
+            <a:schemeClr val="lt1"/>
+          </a:fontRef>
+        </p:style>
+        <p:txBody>
+          <a:bodyPr rtlCol="0" anchor="ctr"/>
+          <a:lstStyle/>
+          <a:p>
+            <a:pPr algn="ctr"/>
+          </a:p>
+        </p:txBody>
+      </p:sp>
+      <p:sp>
+        <p:nvSpPr>
+          <p:cNvPr id="7" name="TextBox 6"/>
           <p:cNvSpPr txBox="1"/>
           <p:nvPr/>
         </p:nvSpPr>
@@ -16687,7 +17015,7 @@
       </p:sp>
       <p:sp>
         <p:nvSpPr>
-          <p:cNvPr id="4" name="TextBox 3"/>
+          <p:cNvPr id="8" name="TextBox 7"/>
           <p:cNvSpPr txBox="1"/>
           <p:nvPr/>
         </p:nvSpPr>
@@ -16726,7 +17054,7 @@
       </p:sp>
       <p:sp>
         <p:nvSpPr>
-          <p:cNvPr id="5" name="TextBox 4"/>
+          <p:cNvPr id="9" name="TextBox 8"/>
           <p:cNvSpPr txBox="1"/>
           <p:nvPr/>
         </p:nvSpPr>
@@ -16765,7 +17093,7 @@
       </p:sp>
       <p:sp>
         <p:nvSpPr>
-          <p:cNvPr id="6" name="TextBox 5"/>
+          <p:cNvPr id="10" name="TextBox 9"/>
           <p:cNvSpPr txBox="1"/>
           <p:nvPr/>
         </p:nvSpPr>
@@ -16804,7 +17132,7 @@
       </p:sp>
       <p:sp>
         <p:nvSpPr>
-          <p:cNvPr id="7" name="TextBox 6"/>
+          <p:cNvPr id="11" name="TextBox 10"/>
           <p:cNvSpPr txBox="1"/>
           <p:nvPr/>
         </p:nvSpPr>
@@ -16843,7 +17171,7 @@
       </p:sp>
       <p:sp>
         <p:nvSpPr>
-          <p:cNvPr id="8" name="TextBox 7"/>
+          <p:cNvPr id="12" name="TextBox 11"/>
           <p:cNvSpPr txBox="1"/>
           <p:nvPr/>
         </p:nvSpPr>
@@ -16906,9 +17234,33 @@
         <p:nvPr/>
       </p:nvGrpSpPr>
       <p:grpSpPr/>
-      <p:sp>
-        <p:nvSpPr>
-          <p:cNvPr id="2" name="TextBox 1"/>
+      <p:pic>
+        <p:nvPicPr>
+          <p:cNvPr id="2" name="Picture 1" descr="u-azul.png"/>
+          <p:cNvPicPr>
+            <a:picLocks noChangeAspect="1"/>
+          </p:cNvPicPr>
+          <p:nvPr/>
+        </p:nvPicPr>
+        <p:blipFill>
+          <a:blip r:embed="rId2"/>
+          <a:stretch>
+            <a:fillRect/>
+          </a:stretch>
+        </p:blipFill>
+        <p:spPr>
+          <a:xfrm>
+            <a:off x="10744200" y="457200"/>
+            <a:ext cx="342900" cy="342900"/>
+          </a:xfrm>
+          <a:prstGeom prst="rect">
+            <a:avLst/>
+          </a:prstGeom>
+        </p:spPr>
+      </p:pic>
+      <p:sp>
+        <p:nvSpPr>
+          <p:cNvPr id="3" name="TextBox 2"/>
           <p:cNvSpPr txBox="1"/>
           <p:nvPr/>
         </p:nvSpPr>
@@ -16947,14 +17299,14 @@
       </p:sp>
       <p:sp>
         <p:nvSpPr>
-          <p:cNvPr id="3" name="TextBox 2"/>
+          <p:cNvPr id="4" name="TextBox 3"/>
           <p:cNvSpPr txBox="1"/>
           <p:nvPr/>
         </p:nvSpPr>
         <p:spPr>
           <a:xfrm>
             <a:off x="685800" y="838200"/>
-            <a:ext cx="9525000" cy="1524000"/>
+            <a:ext cx="9620250" cy="1524000"/>
           </a:xfrm>
           <a:prstGeom prst="rect">
             <a:avLst/>
@@ -17002,7 +17354,7 @@
       </p:sp>
       <p:sp>
         <p:nvSpPr>
-          <p:cNvPr id="4" name="TextBox 3"/>
+          <p:cNvPr id="5" name="TextBox 4"/>
           <p:cNvSpPr txBox="1"/>
           <p:nvPr/>
         </p:nvSpPr>
@@ -17041,7 +17393,7 @@
       </p:sp>
       <p:sp>
         <p:nvSpPr>
-          <p:cNvPr id="5" name="Rectangle 4"/>
+          <p:cNvPr id="6" name="Rectangle 5"/>
           <p:cNvSpPr/>
           <p:nvPr/>
         </p:nvSpPr>
@@ -17085,7 +17437,7 @@
       </p:sp>
       <p:sp>
         <p:nvSpPr>
-          <p:cNvPr id="6" name="TextBox 5"/>
+          <p:cNvPr id="7" name="TextBox 6"/>
           <p:cNvSpPr txBox="1"/>
           <p:nvPr/>
         </p:nvSpPr>
@@ -17124,7 +17476,7 @@
       </p:sp>
       <p:sp>
         <p:nvSpPr>
-          <p:cNvPr id="7" name="TextBox 6"/>
+          <p:cNvPr id="8" name="TextBox 7"/>
           <p:cNvSpPr txBox="1"/>
           <p:nvPr/>
         </p:nvSpPr>
@@ -17172,7 +17524,7 @@
       </p:sp>
       <p:sp>
         <p:nvSpPr>
-          <p:cNvPr id="8" name="TextBox 7"/>
+          <p:cNvPr id="9" name="TextBox 8"/>
           <p:cNvSpPr txBox="1"/>
           <p:nvPr/>
         </p:nvSpPr>
@@ -17211,7 +17563,7 @@
       </p:sp>
       <p:sp>
         <p:nvSpPr>
-          <p:cNvPr id="9" name="TextBox 8"/>
+          <p:cNvPr id="10" name="TextBox 9"/>
           <p:cNvSpPr txBox="1"/>
           <p:nvPr/>
         </p:nvSpPr>
@@ -17259,7 +17611,7 @@
       </p:sp>
       <p:sp>
         <p:nvSpPr>
-          <p:cNvPr id="10" name="TextBox 9"/>
+          <p:cNvPr id="11" name="TextBox 10"/>
           <p:cNvSpPr txBox="1"/>
           <p:nvPr/>
         </p:nvSpPr>
@@ -17298,7 +17650,7 @@
       </p:sp>
       <p:sp>
         <p:nvSpPr>
-          <p:cNvPr id="11" name="TextBox 10"/>
+          <p:cNvPr id="12" name="TextBox 11"/>
           <p:cNvSpPr txBox="1"/>
           <p:nvPr/>
         </p:nvSpPr>
@@ -17346,7 +17698,7 @@
       </p:sp>
       <p:sp>
         <p:nvSpPr>
-          <p:cNvPr id="12" name="TextBox 11"/>
+          <p:cNvPr id="13" name="TextBox 12"/>
           <p:cNvSpPr txBox="1"/>
           <p:nvPr/>
         </p:nvSpPr>
@@ -17385,7 +17737,7 @@
       </p:sp>
       <p:sp>
         <p:nvSpPr>
-          <p:cNvPr id="13" name="Rectangle 12"/>
+          <p:cNvPr id="14" name="Rectangle 13"/>
           <p:cNvSpPr/>
           <p:nvPr/>
         </p:nvSpPr>
@@ -17429,7 +17781,7 @@
       </p:sp>
       <p:sp>
         <p:nvSpPr>
-          <p:cNvPr id="14" name="TextBox 13"/>
+          <p:cNvPr id="15" name="TextBox 14"/>
           <p:cNvSpPr txBox="1"/>
           <p:nvPr/>
         </p:nvSpPr>
@@ -17468,7 +17820,7 @@
       </p:sp>
       <p:sp>
         <p:nvSpPr>
-          <p:cNvPr id="15" name="TextBox 14"/>
+          <p:cNvPr id="16" name="TextBox 15"/>
           <p:cNvSpPr txBox="1"/>
           <p:nvPr/>
         </p:nvSpPr>
@@ -17516,7 +17868,7 @@
       </p:sp>
       <p:sp>
         <p:nvSpPr>
-          <p:cNvPr id="16" name="TextBox 15"/>
+          <p:cNvPr id="17" name="TextBox 16"/>
           <p:cNvSpPr txBox="1"/>
           <p:nvPr/>
         </p:nvSpPr>
@@ -17555,7 +17907,7 @@
       </p:sp>
       <p:sp>
         <p:nvSpPr>
-          <p:cNvPr id="17" name="TextBox 16"/>
+          <p:cNvPr id="18" name="TextBox 17"/>
           <p:cNvSpPr txBox="1"/>
           <p:nvPr/>
         </p:nvSpPr>
@@ -17603,7 +17955,7 @@
       </p:sp>
       <p:sp>
         <p:nvSpPr>
-          <p:cNvPr id="18" name="TextBox 17"/>
+          <p:cNvPr id="19" name="TextBox 18"/>
           <p:cNvSpPr txBox="1"/>
           <p:nvPr/>
         </p:nvSpPr>
@@ -17642,7 +17994,7 @@
       </p:sp>
       <p:sp>
         <p:nvSpPr>
-          <p:cNvPr id="19" name="TextBox 18"/>
+          <p:cNvPr id="20" name="TextBox 19"/>
           <p:cNvSpPr txBox="1"/>
           <p:nvPr/>
         </p:nvSpPr>
@@ -17699,7 +18051,7 @@
       </p:sp>
       <p:sp>
         <p:nvSpPr>
-          <p:cNvPr id="20" name="TextBox 19"/>
+          <p:cNvPr id="21" name="TextBox 20"/>
           <p:cNvSpPr txBox="1"/>
           <p:nvPr/>
         </p:nvSpPr>
@@ -17738,7 +18090,7 @@
       </p:sp>
       <p:sp>
         <p:nvSpPr>
-          <p:cNvPr id="21" name="TextBox 20"/>
+          <p:cNvPr id="22" name="TextBox 21"/>
           <p:cNvSpPr txBox="1"/>
           <p:nvPr/>
         </p:nvSpPr>
@@ -17795,7 +18147,7 @@
       </p:sp>
       <p:sp>
         <p:nvSpPr>
-          <p:cNvPr id="22" name="TextBox 21"/>
+          <p:cNvPr id="23" name="TextBox 22"/>
           <p:cNvSpPr txBox="1"/>
           <p:nvPr/>
         </p:nvSpPr>
@@ -17834,7 +18186,7 @@
       </p:sp>
       <p:sp>
         <p:nvSpPr>
-          <p:cNvPr id="23" name="TextBox 22"/>
+          <p:cNvPr id="24" name="TextBox 23"/>
           <p:cNvSpPr txBox="1"/>
           <p:nvPr/>
         </p:nvSpPr>
@@ -17897,9 +18249,33 @@
         <p:nvPr/>
       </p:nvGrpSpPr>
       <p:grpSpPr/>
-      <p:sp>
-        <p:nvSpPr>
-          <p:cNvPr id="2" name="TextBox 1"/>
+      <p:pic>
+        <p:nvPicPr>
+          <p:cNvPr id="2" name="Picture 1" descr="u-azul.png"/>
+          <p:cNvPicPr>
+            <a:picLocks noChangeAspect="1"/>
+          </p:cNvPicPr>
+          <p:nvPr/>
+        </p:nvPicPr>
+        <p:blipFill>
+          <a:blip r:embed="rId2"/>
+          <a:stretch>
+            <a:fillRect/>
+          </a:stretch>
+        </p:blipFill>
+        <p:spPr>
+          <a:xfrm>
+            <a:off x="10744200" y="457200"/>
+            <a:ext cx="342900" cy="342900"/>
+          </a:xfrm>
+          <a:prstGeom prst="rect">
+            <a:avLst/>
+          </a:prstGeom>
+        </p:spPr>
+      </p:pic>
+      <p:sp>
+        <p:nvSpPr>
+          <p:cNvPr id="3" name="TextBox 2"/>
           <p:cNvSpPr txBox="1"/>
           <p:nvPr/>
         </p:nvSpPr>
@@ -17938,14 +18314,14 @@
       </p:sp>
       <p:sp>
         <p:nvSpPr>
-          <p:cNvPr id="3" name="TextBox 2"/>
+          <p:cNvPr id="4" name="TextBox 3"/>
           <p:cNvSpPr txBox="1"/>
           <p:nvPr/>
         </p:nvSpPr>
         <p:spPr>
           <a:xfrm>
             <a:off x="685800" y="838200"/>
-            <a:ext cx="9525000" cy="1524000"/>
+            <a:ext cx="9620250" cy="1524000"/>
           </a:xfrm>
           <a:prstGeom prst="rect">
             <a:avLst/>
@@ -17993,7 +18369,7 @@
       </p:sp>
       <p:sp>
         <p:nvSpPr>
-          <p:cNvPr id="4" name="TextBox 3"/>
+          <p:cNvPr id="5" name="TextBox 4"/>
           <p:cNvSpPr txBox="1"/>
           <p:nvPr/>
         </p:nvSpPr>
@@ -18032,7 +18408,7 @@
       </p:sp>
       <p:sp>
         <p:nvSpPr>
-          <p:cNvPr id="5" name="Rounded Rectangle 4"/>
+          <p:cNvPr id="6" name="Rounded Rectangle 5"/>
           <p:cNvSpPr/>
           <p:nvPr/>
         </p:nvSpPr>
@@ -18081,7 +18457,7 @@
       </p:sp>
       <p:sp>
         <p:nvSpPr>
-          <p:cNvPr id="6" name="Rounded Rectangle 5"/>
+          <p:cNvPr id="7" name="Rounded Rectangle 6"/>
           <p:cNvSpPr/>
           <p:nvPr/>
         </p:nvSpPr>
@@ -18129,7 +18505,7 @@
       </p:sp>
       <p:sp>
         <p:nvSpPr>
-          <p:cNvPr id="7" name="TextBox 6"/>
+          <p:cNvPr id="8" name="TextBox 7"/>
           <p:cNvSpPr txBox="1"/>
           <p:nvPr/>
         </p:nvSpPr>
@@ -18168,7 +18544,7 @@
       </p:sp>
       <p:sp>
         <p:nvSpPr>
-          <p:cNvPr id="8" name="Rounded Rectangle 7"/>
+          <p:cNvPr id="9" name="Rounded Rectangle 8"/>
           <p:cNvSpPr/>
           <p:nvPr/>
         </p:nvSpPr>
@@ -18216,7 +18592,7 @@
       </p:sp>
       <p:sp>
         <p:nvSpPr>
-          <p:cNvPr id="9" name="TextBox 8"/>
+          <p:cNvPr id="10" name="TextBox 9"/>
           <p:cNvSpPr txBox="1"/>
           <p:nvPr/>
         </p:nvSpPr>
@@ -18255,7 +18631,7 @@
       </p:sp>
       <p:sp>
         <p:nvSpPr>
-          <p:cNvPr id="10" name="TextBox 9"/>
+          <p:cNvPr id="11" name="TextBox 10"/>
           <p:cNvSpPr txBox="1"/>
           <p:nvPr/>
         </p:nvSpPr>
@@ -18294,7 +18670,7 @@
       </p:sp>
       <p:sp>
         <p:nvSpPr>
-          <p:cNvPr id="11" name="TextBox 10"/>
+          <p:cNvPr id="12" name="TextBox 11"/>
           <p:cNvSpPr txBox="1"/>
           <p:nvPr/>
         </p:nvSpPr>
@@ -18333,7 +18709,7 @@
       </p:sp>
       <p:sp>
         <p:nvSpPr>
-          <p:cNvPr id="12" name="Rounded Rectangle 11"/>
+          <p:cNvPr id="13" name="Rounded Rectangle 12"/>
           <p:cNvSpPr/>
           <p:nvPr/>
         </p:nvSpPr>
@@ -18381,7 +18757,7 @@
       </p:sp>
       <p:sp>
         <p:nvSpPr>
-          <p:cNvPr id="13" name="TextBox 12"/>
+          <p:cNvPr id="14" name="TextBox 13"/>
           <p:cNvSpPr txBox="1"/>
           <p:nvPr/>
         </p:nvSpPr>
@@ -18420,7 +18796,7 @@
       </p:sp>
       <p:sp>
         <p:nvSpPr>
-          <p:cNvPr id="14" name="TextBox 13"/>
+          <p:cNvPr id="15" name="TextBox 14"/>
           <p:cNvSpPr txBox="1"/>
           <p:nvPr/>
         </p:nvSpPr>
@@ -18459,7 +18835,7 @@
       </p:sp>
       <p:sp>
         <p:nvSpPr>
-          <p:cNvPr id="15" name="TextBox 14"/>
+          <p:cNvPr id="16" name="TextBox 15"/>
           <p:cNvSpPr txBox="1"/>
           <p:nvPr/>
         </p:nvSpPr>
@@ -18498,7 +18874,7 @@
       </p:sp>
       <p:sp>
         <p:nvSpPr>
-          <p:cNvPr id="16" name="Rounded Rectangle 15"/>
+          <p:cNvPr id="17" name="Rounded Rectangle 16"/>
           <p:cNvSpPr/>
           <p:nvPr/>
         </p:nvSpPr>
@@ -18547,7 +18923,7 @@
       </p:sp>
       <p:sp>
         <p:nvSpPr>
-          <p:cNvPr id="17" name="Rounded Rectangle 16"/>
+          <p:cNvPr id="18" name="Rounded Rectangle 17"/>
           <p:cNvSpPr/>
           <p:nvPr/>
         </p:nvSpPr>
@@ -18595,7 +18971,7 @@
       </p:sp>
       <p:sp>
         <p:nvSpPr>
-          <p:cNvPr id="18" name="TextBox 17"/>
+          <p:cNvPr id="19" name="TextBox 18"/>
           <p:cNvSpPr txBox="1"/>
           <p:nvPr/>
         </p:nvSpPr>
@@ -18634,7 +19010,7 @@
       </p:sp>
       <p:sp>
         <p:nvSpPr>
-          <p:cNvPr id="19" name="Rounded Rectangle 18"/>
+          <p:cNvPr id="20" name="Rounded Rectangle 19"/>
           <p:cNvSpPr/>
           <p:nvPr/>
         </p:nvSpPr>
@@ -18683,7 +19059,7 @@
       </p:sp>
       <p:sp>
         <p:nvSpPr>
-          <p:cNvPr id="20" name="Rounded Rectangle 19"/>
+          <p:cNvPr id="21" name="Rounded Rectangle 20"/>
           <p:cNvSpPr/>
           <p:nvPr/>
         </p:nvSpPr>
@@ -18731,7 +19107,7 @@
       </p:sp>
       <p:sp>
         <p:nvSpPr>
-          <p:cNvPr id="21" name="TextBox 20"/>
+          <p:cNvPr id="22" name="TextBox 21"/>
           <p:cNvSpPr txBox="1"/>
           <p:nvPr/>
         </p:nvSpPr>
@@ -18770,7 +19146,7 @@
       </p:sp>
       <p:sp>
         <p:nvSpPr>
-          <p:cNvPr id="22" name="TextBox 21"/>
+          <p:cNvPr id="23" name="TextBox 22"/>
           <p:cNvSpPr txBox="1"/>
           <p:nvPr/>
         </p:nvSpPr>
@@ -18809,7 +19185,7 @@
       </p:sp>
       <p:sp>
         <p:nvSpPr>
-          <p:cNvPr id="23" name="TextBox 22"/>
+          <p:cNvPr id="24" name="TextBox 23"/>
           <p:cNvSpPr txBox="1"/>
           <p:nvPr/>
         </p:nvSpPr>
@@ -18848,7 +19224,7 @@
       </p:sp>
       <p:sp>
         <p:nvSpPr>
-          <p:cNvPr id="24" name="Rounded Rectangle 23"/>
+          <p:cNvPr id="25" name="Rounded Rectangle 24"/>
           <p:cNvSpPr/>
           <p:nvPr/>
         </p:nvSpPr>
@@ -18896,7 +19272,7 @@
       </p:sp>
       <p:sp>
         <p:nvSpPr>
-          <p:cNvPr id="25" name="TextBox 24"/>
+          <p:cNvPr id="26" name="TextBox 25"/>
           <p:cNvSpPr txBox="1"/>
           <p:nvPr/>
         </p:nvSpPr>
@@ -18935,7 +19311,7 @@
       </p:sp>
       <p:sp>
         <p:nvSpPr>
-          <p:cNvPr id="26" name="TextBox 25"/>
+          <p:cNvPr id="27" name="TextBox 26"/>
           <p:cNvSpPr txBox="1"/>
           <p:nvPr/>
         </p:nvSpPr>
@@ -18974,7 +19350,7 @@
       </p:sp>
       <p:sp>
         <p:nvSpPr>
-          <p:cNvPr id="27" name="TextBox 26"/>
+          <p:cNvPr id="28" name="TextBox 27"/>
           <p:cNvSpPr txBox="1"/>
           <p:nvPr/>
         </p:nvSpPr>
@@ -19013,7 +19389,7 @@
       </p:sp>
       <p:sp>
         <p:nvSpPr>
-          <p:cNvPr id="28" name="Rounded Rectangle 27"/>
+          <p:cNvPr id="29" name="Rounded Rectangle 28"/>
           <p:cNvSpPr/>
           <p:nvPr/>
         </p:nvSpPr>
@@ -19062,7 +19438,7 @@
       </p:sp>
       <p:sp>
         <p:nvSpPr>
-          <p:cNvPr id="29" name="Rounded Rectangle 28"/>
+          <p:cNvPr id="30" name="Rounded Rectangle 29"/>
           <p:cNvSpPr/>
           <p:nvPr/>
         </p:nvSpPr>
@@ -19110,7 +19486,7 @@
       </p:sp>
       <p:sp>
         <p:nvSpPr>
-          <p:cNvPr id="30" name="TextBox 29"/>
+          <p:cNvPr id="31" name="TextBox 30"/>
           <p:cNvSpPr txBox="1"/>
           <p:nvPr/>
         </p:nvSpPr>
@@ -19149,7 +19525,7 @@
       </p:sp>
       <p:sp>
         <p:nvSpPr>
-          <p:cNvPr id="31" name="Rounded Rectangle 30"/>
+          <p:cNvPr id="32" name="Rounded Rectangle 31"/>
           <p:cNvSpPr/>
           <p:nvPr/>
         </p:nvSpPr>
@@ -19198,7 +19574,7 @@
       </p:sp>
       <p:sp>
         <p:nvSpPr>
-          <p:cNvPr id="32" name="Rounded Rectangle 31"/>
+          <p:cNvPr id="33" name="Rounded Rectangle 32"/>
           <p:cNvSpPr/>
           <p:nvPr/>
         </p:nvSpPr>
@@ -19246,7 +19622,7 @@
       </p:sp>
       <p:sp>
         <p:nvSpPr>
-          <p:cNvPr id="33" name="TextBox 32"/>
+          <p:cNvPr id="34" name="TextBox 33"/>
           <p:cNvSpPr txBox="1"/>
           <p:nvPr/>
         </p:nvSpPr>
@@ -19285,7 +19661,7 @@
       </p:sp>
       <p:sp>
         <p:nvSpPr>
-          <p:cNvPr id="34" name="TextBox 33"/>
+          <p:cNvPr id="35" name="TextBox 34"/>
           <p:cNvSpPr txBox="1"/>
           <p:nvPr/>
         </p:nvSpPr>
@@ -19324,7 +19700,7 @@
       </p:sp>
       <p:sp>
         <p:nvSpPr>
-          <p:cNvPr id="35" name="TextBox 34"/>
+          <p:cNvPr id="36" name="TextBox 35"/>
           <p:cNvSpPr txBox="1"/>
           <p:nvPr/>
         </p:nvSpPr>
@@ -19363,7 +19739,7 @@
       </p:sp>
       <p:sp>
         <p:nvSpPr>
-          <p:cNvPr id="36" name="Rounded Rectangle 35"/>
+          <p:cNvPr id="37" name="Rounded Rectangle 36"/>
           <p:cNvSpPr/>
           <p:nvPr/>
         </p:nvSpPr>
@@ -19412,7 +19788,7 @@
       </p:sp>
       <p:sp>
         <p:nvSpPr>
-          <p:cNvPr id="37" name="Rounded Rectangle 36"/>
+          <p:cNvPr id="38" name="Rounded Rectangle 37"/>
           <p:cNvSpPr/>
           <p:nvPr/>
         </p:nvSpPr>
@@ -19460,7 +19836,7 @@
       </p:sp>
       <p:sp>
         <p:nvSpPr>
-          <p:cNvPr id="38" name="TextBox 37"/>
+          <p:cNvPr id="39" name="TextBox 38"/>
           <p:cNvSpPr txBox="1"/>
           <p:nvPr/>
         </p:nvSpPr>
@@ -19499,7 +19875,7 @@
       </p:sp>
       <p:sp>
         <p:nvSpPr>
-          <p:cNvPr id="39" name="TextBox 38"/>
+          <p:cNvPr id="40" name="TextBox 39"/>
           <p:cNvSpPr txBox="1"/>
           <p:nvPr/>
         </p:nvSpPr>
@@ -19538,7 +19914,7 @@
       </p:sp>
       <p:sp>
         <p:nvSpPr>
-          <p:cNvPr id="40" name="TextBox 39"/>
+          <p:cNvPr id="41" name="TextBox 40"/>
           <p:cNvSpPr txBox="1"/>
           <p:nvPr/>
         </p:nvSpPr>
@@ -19577,7 +19953,7 @@
       </p:sp>
       <p:sp>
         <p:nvSpPr>
-          <p:cNvPr id="41" name="TextBox 40"/>
+          <p:cNvPr id="42" name="TextBox 41"/>
           <p:cNvSpPr txBox="1"/>
           <p:nvPr/>
         </p:nvSpPr>
@@ -19616,7 +19992,7 @@
       </p:sp>
       <p:sp>
         <p:nvSpPr>
-          <p:cNvPr id="42" name="TextBox 41"/>
+          <p:cNvPr id="43" name="TextBox 42"/>
           <p:cNvSpPr txBox="1"/>
           <p:nvPr/>
         </p:nvSpPr>
@@ -19655,7 +20031,7 @@
       </p:sp>
       <p:sp>
         <p:nvSpPr>
-          <p:cNvPr id="43" name="TextBox 42"/>
+          <p:cNvPr id="44" name="TextBox 43"/>
           <p:cNvSpPr txBox="1"/>
           <p:nvPr/>
         </p:nvSpPr>
@@ -19718,9 +20094,33 @@
         <p:nvPr/>
       </p:nvGrpSpPr>
       <p:grpSpPr/>
-      <p:sp>
-        <p:nvSpPr>
-          <p:cNvPr id="2" name="TextBox 1"/>
+      <p:pic>
+        <p:nvPicPr>
+          <p:cNvPr id="2" name="Picture 1" descr="u-azul.png"/>
+          <p:cNvPicPr>
+            <a:picLocks noChangeAspect="1"/>
+          </p:cNvPicPr>
+          <p:nvPr/>
+        </p:nvPicPr>
+        <p:blipFill>
+          <a:blip r:embed="rId2"/>
+          <a:stretch>
+            <a:fillRect/>
+          </a:stretch>
+        </p:blipFill>
+        <p:spPr>
+          <a:xfrm>
+            <a:off x="10744200" y="457200"/>
+            <a:ext cx="342900" cy="342900"/>
+          </a:xfrm>
+          <a:prstGeom prst="rect">
+            <a:avLst/>
+          </a:prstGeom>
+        </p:spPr>
+      </p:pic>
+      <p:sp>
+        <p:nvSpPr>
+          <p:cNvPr id="3" name="TextBox 2"/>
           <p:cNvSpPr txBox="1"/>
           <p:nvPr/>
         </p:nvSpPr>
@@ -19759,14 +20159,14 @@
       </p:sp>
       <p:sp>
         <p:nvSpPr>
-          <p:cNvPr id="3" name="TextBox 2"/>
+          <p:cNvPr id="4" name="TextBox 3"/>
           <p:cNvSpPr txBox="1"/>
           <p:nvPr/>
         </p:nvSpPr>
         <p:spPr>
           <a:xfrm>
             <a:off x="685800" y="838200"/>
-            <a:ext cx="9525000" cy="1524000"/>
+            <a:ext cx="9620250" cy="1524000"/>
           </a:xfrm>
           <a:prstGeom prst="rect">
             <a:avLst/>
@@ -19814,7 +20214,7 @@
       </p:sp>
       <p:sp>
         <p:nvSpPr>
-          <p:cNvPr id="4" name="Rectangle 3"/>
+          <p:cNvPr id="5" name="Rectangle 4"/>
           <p:cNvSpPr/>
           <p:nvPr/>
         </p:nvSpPr>
@@ -19858,7 +20258,7 @@
       </p:sp>
       <p:sp>
         <p:nvSpPr>
-          <p:cNvPr id="5" name="TextBox 4"/>
+          <p:cNvPr id="6" name="TextBox 5"/>
           <p:cNvSpPr txBox="1"/>
           <p:nvPr/>
         </p:nvSpPr>
@@ -19897,7 +20297,7 @@
       </p:sp>
       <p:sp>
         <p:nvSpPr>
-          <p:cNvPr id="6" name="TextBox 5"/>
+          <p:cNvPr id="7" name="TextBox 6"/>
           <p:cNvSpPr txBox="1"/>
           <p:nvPr/>
         </p:nvSpPr>
@@ -19936,7 +20336,7 @@
       </p:sp>
       <p:sp>
         <p:nvSpPr>
-          <p:cNvPr id="7" name="Rectangle 6"/>
+          <p:cNvPr id="8" name="Rectangle 7"/>
           <p:cNvSpPr/>
           <p:nvPr/>
         </p:nvSpPr>
@@ -19980,7 +20380,7 @@
       </p:sp>
       <p:sp>
         <p:nvSpPr>
-          <p:cNvPr id="8" name="TextBox 7"/>
+          <p:cNvPr id="9" name="TextBox 8"/>
           <p:cNvSpPr txBox="1"/>
           <p:nvPr/>
         </p:nvSpPr>
@@ -20019,7 +20419,7 @@
       </p:sp>
       <p:sp>
         <p:nvSpPr>
-          <p:cNvPr id="9" name="TextBox 8"/>
+          <p:cNvPr id="10" name="TextBox 9"/>
           <p:cNvSpPr txBox="1"/>
           <p:nvPr/>
         </p:nvSpPr>
@@ -20058,7 +20458,7 @@
       </p:sp>
       <p:sp>
         <p:nvSpPr>
-          <p:cNvPr id="10" name="Rounded Rectangle 9"/>
+          <p:cNvPr id="11" name="Rounded Rectangle 10"/>
           <p:cNvSpPr/>
           <p:nvPr/>
         </p:nvSpPr>
@@ -20106,7 +20506,7 @@
       </p:sp>
       <p:sp>
         <p:nvSpPr>
-          <p:cNvPr id="11" name="TextBox 10"/>
+          <p:cNvPr id="12" name="TextBox 11"/>
           <p:cNvSpPr txBox="1"/>
           <p:nvPr/>
         </p:nvSpPr>
@@ -20145,7 +20545,7 @@
       </p:sp>
       <p:sp>
         <p:nvSpPr>
-          <p:cNvPr id="12" name="TextBox 11"/>
+          <p:cNvPr id="13" name="TextBox 12"/>
           <p:cNvSpPr txBox="1"/>
           <p:nvPr/>
         </p:nvSpPr>
@@ -20184,7 +20584,7 @@
       </p:sp>
       <p:sp>
         <p:nvSpPr>
-          <p:cNvPr id="13" name="TextBox 12"/>
+          <p:cNvPr id="14" name="TextBox 13"/>
           <p:cNvSpPr txBox="1"/>
           <p:nvPr/>
         </p:nvSpPr>
@@ -20239,7 +20639,7 @@
       </p:sp>
       <p:sp>
         <p:nvSpPr>
-          <p:cNvPr id="14" name="TextBox 13"/>
+          <p:cNvPr id="15" name="TextBox 14"/>
           <p:cNvSpPr txBox="1"/>
           <p:nvPr/>
         </p:nvSpPr>
@@ -20278,7 +20678,7 @@
       </p:sp>
       <p:cxnSp>
         <p:nvCxnSpPr>
-          <p:cNvPr id="15" name="Connector 14"/>
+          <p:cNvPr id="16" name="Connector 15"/>
           <p:cNvCxnSpPr/>
           <p:nvPr/>
         </p:nvCxnSpPr>
@@ -20313,7 +20713,7 @@
       </p:cxnSp>
       <p:sp>
         <p:nvSpPr>
-          <p:cNvPr id="16" name="TextBox 15"/>
+          <p:cNvPr id="17" name="TextBox 16"/>
           <p:cNvSpPr txBox="1"/>
           <p:nvPr/>
         </p:nvSpPr>
@@ -20352,7 +20752,7 @@
       </p:sp>
       <p:sp>
         <p:nvSpPr>
-          <p:cNvPr id="17" name="TextBox 16"/>
+          <p:cNvPr id="18" name="TextBox 17"/>
           <p:cNvSpPr txBox="1"/>
           <p:nvPr/>
         </p:nvSpPr>
@@ -20391,7 +20791,7 @@
       </p:sp>
       <p:sp>
         <p:nvSpPr>
-          <p:cNvPr id="18" name="TextBox 17"/>
+          <p:cNvPr id="19" name="TextBox 18"/>
           <p:cNvSpPr txBox="1"/>
           <p:nvPr/>
         </p:nvSpPr>
@@ -20454,9 +20854,33 @@
         <p:nvPr/>
       </p:nvGrpSpPr>
       <p:grpSpPr/>
-      <p:sp>
-        <p:nvSpPr>
-          <p:cNvPr id="2" name="TextBox 1"/>
+      <p:pic>
+        <p:nvPicPr>
+          <p:cNvPr id="2" name="Picture 1" descr="u-branco.png"/>
+          <p:cNvPicPr>
+            <a:picLocks noChangeAspect="1"/>
+          </p:cNvPicPr>
+          <p:nvPr/>
+        </p:nvPicPr>
+        <p:blipFill>
+          <a:blip r:embed="rId2"/>
+          <a:stretch>
+            <a:fillRect/>
+          </a:stretch>
+        </p:blipFill>
+        <p:spPr>
+          <a:xfrm>
+            <a:off x="10744200" y="457200"/>
+            <a:ext cx="342900" cy="342900"/>
+          </a:xfrm>
+          <a:prstGeom prst="rect">
+            <a:avLst/>
+          </a:prstGeom>
+        </p:spPr>
+      </p:pic>
+      <p:sp>
+        <p:nvSpPr>
+          <p:cNvPr id="3" name="TextBox 2"/>
           <p:cNvSpPr txBox="1"/>
           <p:nvPr/>
         </p:nvSpPr>
@@ -20495,7 +20919,7 @@
       </p:sp>
       <p:sp>
         <p:nvSpPr>
-          <p:cNvPr id="3" name="TextBox 2"/>
+          <p:cNvPr id="4" name="TextBox 3"/>
           <p:cNvSpPr txBox="1"/>
           <p:nvPr/>
         </p:nvSpPr>
@@ -20534,7 +20958,7 @@
       </p:sp>
       <p:sp>
         <p:nvSpPr>
-          <p:cNvPr id="4" name="Rounded Rectangle 3"/>
+          <p:cNvPr id="5" name="Rounded Rectangle 4"/>
           <p:cNvSpPr/>
           <p:nvPr/>
         </p:nvSpPr>
@@ -20580,7 +21004,7 @@
       </p:sp>
       <p:sp>
         <p:nvSpPr>
-          <p:cNvPr id="5" name="TextBox 4"/>
+          <p:cNvPr id="6" name="TextBox 5"/>
           <p:cNvSpPr txBox="1"/>
           <p:nvPr/>
         </p:nvSpPr>
@@ -20619,7 +21043,7 @@
       </p:sp>
       <p:sp>
         <p:nvSpPr>
-          <p:cNvPr id="6" name="TextBox 5"/>
+          <p:cNvPr id="7" name="TextBox 6"/>
           <p:cNvSpPr txBox="1"/>
           <p:nvPr/>
         </p:nvSpPr>
@@ -20658,7 +21082,7 @@
       </p:sp>
       <p:sp>
         <p:nvSpPr>
-          <p:cNvPr id="7" name="TextBox 6"/>
+          <p:cNvPr id="8" name="TextBox 7"/>
           <p:cNvSpPr txBox="1"/>
           <p:nvPr/>
         </p:nvSpPr>
@@ -20721,9 +21145,33 @@
         <p:nvPr/>
       </p:nvGrpSpPr>
       <p:grpSpPr/>
-      <p:sp>
-        <p:nvSpPr>
-          <p:cNvPr id="2" name="TextBox 1"/>
+      <p:pic>
+        <p:nvPicPr>
+          <p:cNvPr id="2" name="Picture 1" descr="u-azul.png"/>
+          <p:cNvPicPr>
+            <a:picLocks noChangeAspect="1"/>
+          </p:cNvPicPr>
+          <p:nvPr/>
+        </p:nvPicPr>
+        <p:blipFill>
+          <a:blip r:embed="rId2"/>
+          <a:stretch>
+            <a:fillRect/>
+          </a:stretch>
+        </p:blipFill>
+        <p:spPr>
+          <a:xfrm>
+            <a:off x="10744200" y="457200"/>
+            <a:ext cx="342900" cy="342900"/>
+          </a:xfrm>
+          <a:prstGeom prst="rect">
+            <a:avLst/>
+          </a:prstGeom>
+        </p:spPr>
+      </p:pic>
+      <p:sp>
+        <p:nvSpPr>
+          <p:cNvPr id="3" name="TextBox 2"/>
           <p:cNvSpPr txBox="1"/>
           <p:nvPr/>
         </p:nvSpPr>
@@ -20762,14 +21210,14 @@
       </p:sp>
       <p:sp>
         <p:nvSpPr>
-          <p:cNvPr id="3" name="TextBox 2"/>
+          <p:cNvPr id="4" name="TextBox 3"/>
           <p:cNvSpPr txBox="1"/>
           <p:nvPr/>
         </p:nvSpPr>
         <p:spPr>
           <a:xfrm>
             <a:off x="685800" y="838200"/>
-            <a:ext cx="9525000" cy="1524000"/>
+            <a:ext cx="9620250" cy="1524000"/>
           </a:xfrm>
           <a:prstGeom prst="rect">
             <a:avLst/>
@@ -20817,7 +21265,7 @@
       </p:sp>
       <p:sp>
         <p:nvSpPr>
-          <p:cNvPr id="4" name="TextBox 3"/>
+          <p:cNvPr id="5" name="TextBox 4"/>
           <p:cNvSpPr txBox="1"/>
           <p:nvPr/>
         </p:nvSpPr>
@@ -20856,7 +21304,7 @@
       </p:sp>
       <p:sp>
         <p:nvSpPr>
-          <p:cNvPr id="5" name="Rectangle 4"/>
+          <p:cNvPr id="6" name="Rectangle 5"/>
           <p:cNvSpPr/>
           <p:nvPr/>
         </p:nvSpPr>
@@ -20900,7 +21348,7 @@
       </p:sp>
       <p:sp>
         <p:nvSpPr>
-          <p:cNvPr id="6" name="Rounded Rectangle 5"/>
+          <p:cNvPr id="7" name="Rounded Rectangle 6"/>
           <p:cNvSpPr/>
           <p:nvPr/>
         </p:nvSpPr>
@@ -20946,7 +21394,7 @@
       </p:sp>
       <p:sp>
         <p:nvSpPr>
-          <p:cNvPr id="7" name="TextBox 6"/>
+          <p:cNvPr id="8" name="TextBox 7"/>
           <p:cNvSpPr txBox="1"/>
           <p:nvPr/>
         </p:nvSpPr>
@@ -20985,7 +21433,7 @@
       </p:sp>
       <p:sp>
         <p:nvSpPr>
-          <p:cNvPr id="8" name="Rounded Rectangle 7"/>
+          <p:cNvPr id="9" name="Rounded Rectangle 8"/>
           <p:cNvSpPr/>
           <p:nvPr/>
         </p:nvSpPr>
@@ -21031,7 +21479,7 @@
       </p:sp>
       <p:sp>
         <p:nvSpPr>
-          <p:cNvPr id="9" name="TextBox 8"/>
+          <p:cNvPr id="10" name="TextBox 9"/>
           <p:cNvSpPr txBox="1"/>
           <p:nvPr/>
         </p:nvSpPr>
@@ -21070,7 +21518,7 @@
       </p:sp>
       <p:sp>
         <p:nvSpPr>
-          <p:cNvPr id="10" name="Rounded Rectangle 9"/>
+          <p:cNvPr id="11" name="Rounded Rectangle 10"/>
           <p:cNvSpPr/>
           <p:nvPr/>
         </p:nvSpPr>
@@ -21116,7 +21564,7 @@
       </p:sp>
       <p:sp>
         <p:nvSpPr>
-          <p:cNvPr id="11" name="TextBox 10"/>
+          <p:cNvPr id="12" name="TextBox 11"/>
           <p:cNvSpPr txBox="1"/>
           <p:nvPr/>
         </p:nvSpPr>
@@ -21155,7 +21603,7 @@
       </p:sp>
       <p:sp>
         <p:nvSpPr>
-          <p:cNvPr id="12" name="Rounded Rectangle 11"/>
+          <p:cNvPr id="13" name="Rounded Rectangle 12"/>
           <p:cNvSpPr/>
           <p:nvPr/>
         </p:nvSpPr>
@@ -21201,7 +21649,7 @@
       </p:sp>
       <p:sp>
         <p:nvSpPr>
-          <p:cNvPr id="13" name="TextBox 12"/>
+          <p:cNvPr id="14" name="TextBox 13"/>
           <p:cNvSpPr txBox="1"/>
           <p:nvPr/>
         </p:nvSpPr>
@@ -21238,41 +21686,6 @@
           </a:p>
         </p:txBody>
       </p:sp>
-      <p:cxnSp>
-        <p:nvCxnSpPr>
-          <p:cNvPr id="14" name="Connector 13"/>
-          <p:cNvCxnSpPr/>
-          <p:nvPr/>
-        </p:nvCxnSpPr>
-        <p:spPr>
-          <a:xfrm>
-            <a:off x="1838325" y="2914650"/>
-            <a:ext cx="733425" cy="209550"/>
-          </a:xfrm>
-          <a:prstGeom prst="line">
-            <a:avLst/>
-          </a:prstGeom>
-          <a:ln w="17780">
-            <a:solidFill>
-              <a:srgbClr val="6B6B78"/>
-            </a:solidFill>
-          </a:ln>
-        </p:spPr>
-        <p:style>
-          <a:lnRef idx="2">
-            <a:schemeClr val="accent1"/>
-          </a:lnRef>
-          <a:fillRef idx="0">
-            <a:schemeClr val="accent1"/>
-          </a:fillRef>
-          <a:effectRef idx="1">
-            <a:schemeClr val="accent1"/>
-          </a:effectRef>
-          <a:fontRef idx="minor">
-            <a:schemeClr val="tx1"/>
-          </a:fontRef>
-        </p:style>
-      </p:cxnSp>
       <p:cxnSp>
         <p:nvCxnSpPr>
           <p:cNvPr id="15" name="Connector 14"/>
@@ -21280,8 +21693,8 @@
           <p:nvPr/>
         </p:nvCxnSpPr>
         <p:spPr>
-          <a:xfrm flipH="1">
-            <a:off x="2952750" y="2914650"/>
+          <a:xfrm>
+            <a:off x="1838325" y="2914650"/>
             <a:ext cx="733425" cy="209550"/>
           </a:xfrm>
           <a:prstGeom prst="line">
@@ -21315,9 +21728,9 @@
           <p:nvPr/>
         </p:nvCxnSpPr>
         <p:spPr>
-          <a:xfrm>
-            <a:off x="2762250" y="3543300"/>
-            <a:ext cx="0" cy="133350"/>
+          <a:xfrm flipH="1">
+            <a:off x="2952750" y="2914650"/>
+            <a:ext cx="733425" cy="209550"/>
           </a:xfrm>
           <a:prstGeom prst="line">
             <a:avLst/>
@@ -21351,15 +21764,15 @@
         </p:nvCxnSpPr>
         <p:spPr>
           <a:xfrm>
-            <a:off x="4857750" y="3124200"/>
-            <a:ext cx="952500" cy="0"/>
+            <a:off x="2762250" y="3543300"/>
+            <a:ext cx="0" cy="133350"/>
           </a:xfrm>
           <a:prstGeom prst="line">
             <a:avLst/>
           </a:prstGeom>
-          <a:ln w="25400">
+          <a:ln w="17780">
             <a:solidFill>
-              <a:srgbClr val="E94D1C"/>
+              <a:srgbClr val="6B6B78"/>
             </a:solidFill>
           </a:ln>
         </p:spPr>
@@ -21378,426 +21791,21 @@
           </a:fontRef>
         </p:style>
       </p:cxnSp>
-      <p:sp>
-        <p:nvSpPr>
-          <p:cNvPr id="18" name="TextBox 17"/>
-          <p:cNvSpPr txBox="1"/>
-          <p:nvPr/>
-        </p:nvSpPr>
-        <p:spPr>
-          <a:xfrm>
-            <a:off x="4933950" y="2914650"/>
-            <a:ext cx="571500" cy="182880"/>
-          </a:xfrm>
-          <a:prstGeom prst="rect">
-            <a:avLst/>
-          </a:prstGeom>
-          <a:noFill/>
-        </p:spPr>
-        <p:txBody>
-          <a:bodyPr wrap="square" lIns="0" rIns="0" tIns="0" bIns="0" anchor="t">
-            <a:spAutoFit/>
-          </a:bodyPr>
-          <a:lstStyle/>
-          <a:p>
-            <a:pPr algn="l">
-              <a:lnSpc>
-                <a:spcPct val="120000"/>
-              </a:lnSpc>
-            </a:pPr>
-            <a:r>
-              <a:rPr sz="900" b="1" i="0">
-                <a:solidFill>
-                  <a:srgbClr val="E94D1C"/>
-                </a:solidFill>
-                <a:latin typeface="Roboto"/>
-              </a:rPr>
-              <a:t>#72</a:t>
-            </a:r>
-          </a:p>
-        </p:txBody>
-      </p:sp>
-      <p:sp>
-        <p:nvSpPr>
-          <p:cNvPr id="19" name="TextBox 18"/>
-          <p:cNvSpPr txBox="1"/>
-          <p:nvPr/>
-        </p:nvSpPr>
-        <p:spPr>
-          <a:xfrm>
-            <a:off x="6191250" y="2038350"/>
-            <a:ext cx="4000500" cy="167640"/>
-          </a:xfrm>
-          <a:prstGeom prst="rect">
-            <a:avLst/>
-          </a:prstGeom>
-          <a:noFill/>
-        </p:spPr>
-        <p:txBody>
-          <a:bodyPr wrap="square" lIns="0" rIns="0" tIns="0" bIns="0" anchor="t">
-            <a:spAutoFit/>
-          </a:bodyPr>
-          <a:lstStyle/>
-          <a:p>
-            <a:pPr algn="l">
-              <a:lnSpc>
-                <a:spcPct val="120000"/>
-              </a:lnSpc>
-            </a:pPr>
-            <a:r>
-              <a:rPr sz="819" b="1" i="0" spc="140">
-                <a:solidFill>
-                  <a:srgbClr val="E94D1C"/>
-                </a:solidFill>
-                <a:latin typeface="Roboto"/>
-              </a:rPr>
-              <a:t>RASCUNHO #60, DIAGRAMA DE IMPLANTAÇÃO</a:t>
-            </a:r>
-          </a:p>
-        </p:txBody>
-      </p:sp>
-      <p:sp>
-        <p:nvSpPr>
-          <p:cNvPr id="20" name="Rectangle 19"/>
-          <p:cNvSpPr/>
-          <p:nvPr/>
-        </p:nvSpPr>
-        <p:spPr>
-          <a:xfrm>
-            <a:off x="6191250" y="2209800"/>
-            <a:ext cx="3810000" cy="1866900"/>
-          </a:xfrm>
-          <a:prstGeom prst="rect">
-            <a:avLst/>
-          </a:prstGeom>
-          <a:noFill/>
-          <a:ln w="25400">
-            <a:solidFill>
-              <a:srgbClr val="E94D1C"/>
-            </a:solidFill>
-          </a:ln>
-          <a:effectLst/>
-        </p:spPr>
-        <p:style>
-          <a:lnRef idx="1">
-            <a:schemeClr val="accent1"/>
-          </a:lnRef>
-          <a:fillRef idx="3">
-            <a:schemeClr val="accent1"/>
-          </a:fillRef>
-          <a:effectRef idx="2">
-            <a:schemeClr val="accent1"/>
-          </a:effectRef>
-          <a:fontRef idx="minor">
-            <a:schemeClr val="lt1"/>
-          </a:fontRef>
-        </p:style>
-        <p:txBody>
-          <a:bodyPr rtlCol="0" anchor="ctr" wrap="square" lIns="0" rIns="0" tIns="0" bIns="0"/>
-          <a:lstStyle/>
-          <a:p>
-            <a:pPr algn="ctr"/>
-          </a:p>
-        </p:txBody>
-      </p:sp>
-      <p:sp>
-        <p:nvSpPr>
-          <p:cNvPr id="21" name="TextBox 20"/>
-          <p:cNvSpPr txBox="1"/>
-          <p:nvPr/>
-        </p:nvSpPr>
-        <p:spPr>
-          <a:xfrm>
-            <a:off x="6381750" y="2324100"/>
-            <a:ext cx="1905000" cy="167640"/>
-          </a:xfrm>
-          <a:prstGeom prst="rect">
-            <a:avLst/>
-          </a:prstGeom>
-          <a:noFill/>
-        </p:spPr>
-        <p:txBody>
-          <a:bodyPr wrap="square" lIns="0" rIns="0" tIns="0" bIns="0" anchor="t">
-            <a:spAutoFit/>
-          </a:bodyPr>
-          <a:lstStyle/>
-          <a:p>
-            <a:pPr algn="l">
-              <a:lnSpc>
-                <a:spcPct val="120000"/>
-              </a:lnSpc>
-            </a:pPr>
-            <a:r>
-              <a:rPr sz="819" b="1" i="0">
-                <a:solidFill>
-                  <a:srgbClr val="E94D1C"/>
-                </a:solidFill>
-                <a:latin typeface="Roboto"/>
-              </a:rPr>
-              <a:t>«device» host</a:t>
-            </a:r>
-          </a:p>
-        </p:txBody>
-      </p:sp>
-      <p:sp>
-        <p:nvSpPr>
-          <p:cNvPr id="22" name="Rectangle 21"/>
-          <p:cNvSpPr/>
-          <p:nvPr/>
-        </p:nvSpPr>
-        <p:spPr>
-          <a:xfrm>
-            <a:off x="6381750" y="2552700"/>
-            <a:ext cx="1066800" cy="495300"/>
-          </a:xfrm>
-          <a:prstGeom prst="rect">
-            <a:avLst/>
-          </a:prstGeom>
-          <a:noFill/>
-          <a:ln w="19050">
-            <a:solidFill>
-              <a:srgbClr val="21049A"/>
-            </a:solidFill>
-          </a:ln>
-          <a:effectLst/>
-        </p:spPr>
-        <p:style>
-          <a:lnRef idx="1">
-            <a:schemeClr val="accent1"/>
-          </a:lnRef>
-          <a:fillRef idx="3">
-            <a:schemeClr val="accent1"/>
-          </a:fillRef>
-          <a:effectRef idx="2">
-            <a:schemeClr val="accent1"/>
-          </a:effectRef>
-          <a:fontRef idx="minor">
-            <a:schemeClr val="lt1"/>
-          </a:fontRef>
-        </p:style>
-        <p:txBody>
-          <a:bodyPr rtlCol="0" anchor="ctr" wrap="square" lIns="0" rIns="0" tIns="0" bIns="0"/>
-          <a:lstStyle/>
-          <a:p>
-            <a:pPr algn="ctr"/>
-          </a:p>
-        </p:txBody>
-      </p:sp>
-      <p:sp>
-        <p:nvSpPr>
-          <p:cNvPr id="23" name="TextBox 22"/>
-          <p:cNvSpPr txBox="1"/>
-          <p:nvPr/>
-        </p:nvSpPr>
-        <p:spPr>
-          <a:xfrm>
-            <a:off x="6400800" y="2628900"/>
-            <a:ext cx="1028700" cy="175260"/>
-          </a:xfrm>
-          <a:prstGeom prst="rect">
-            <a:avLst/>
-          </a:prstGeom>
-          <a:noFill/>
-        </p:spPr>
-        <p:txBody>
-          <a:bodyPr wrap="square" lIns="0" rIns="0" tIns="0" bIns="0" anchor="t">
-            <a:spAutoFit/>
-          </a:bodyPr>
-          <a:lstStyle/>
-          <a:p>
-            <a:pPr algn="ctr">
-              <a:lnSpc>
-                <a:spcPct val="120000"/>
-              </a:lnSpc>
-            </a:pPr>
-            <a:r>
-              <a:rPr sz="860" b="1" i="0">
-                <a:solidFill>
-                  <a:srgbClr val="21049A"/>
-                </a:solidFill>
-                <a:latin typeface="Roboto"/>
-              </a:rPr>
-              <a:t>«executionEnv»</a:t>
-            </a:r>
-          </a:p>
-        </p:txBody>
-      </p:sp>
-      <p:sp>
-        <p:nvSpPr>
-          <p:cNvPr id="24" name="TextBox 23"/>
-          <p:cNvSpPr txBox="1"/>
-          <p:nvPr/>
-        </p:nvSpPr>
-        <p:spPr>
-          <a:xfrm>
-            <a:off x="6400800" y="2800350"/>
-            <a:ext cx="1028700" cy="167640"/>
-          </a:xfrm>
-          <a:prstGeom prst="rect">
-            <a:avLst/>
-          </a:prstGeom>
-          <a:noFill/>
-        </p:spPr>
-        <p:txBody>
-          <a:bodyPr wrap="square" lIns="0" rIns="0" tIns="0" bIns="0" anchor="t">
-            <a:spAutoFit/>
-          </a:bodyPr>
-          <a:lstStyle/>
-          <a:p>
-            <a:pPr algn="ctr">
-              <a:lnSpc>
-                <a:spcPct val="120000"/>
-              </a:lnSpc>
-            </a:pPr>
-            <a:r>
-              <a:rPr sz="819" b="0" i="0">
-                <a:solidFill>
-                  <a:srgbClr val="1A1A1E"/>
-                </a:solidFill>
-                <a:latin typeface="Roboto"/>
-              </a:rPr>
-              <a:t>front</a:t>
-            </a:r>
-          </a:p>
-        </p:txBody>
-      </p:sp>
-      <p:sp>
-        <p:nvSpPr>
-          <p:cNvPr id="25" name="Rectangle 24"/>
-          <p:cNvSpPr/>
-          <p:nvPr/>
-        </p:nvSpPr>
-        <p:spPr>
-          <a:xfrm>
-            <a:off x="7562850" y="2552700"/>
-            <a:ext cx="1066800" cy="495300"/>
-          </a:xfrm>
-          <a:prstGeom prst="rect">
-            <a:avLst/>
-          </a:prstGeom>
-          <a:noFill/>
-          <a:ln w="19050">
-            <a:solidFill>
-              <a:srgbClr val="21049A"/>
-            </a:solidFill>
-          </a:ln>
-          <a:effectLst/>
-        </p:spPr>
-        <p:style>
-          <a:lnRef idx="1">
-            <a:schemeClr val="accent1"/>
-          </a:lnRef>
-          <a:fillRef idx="3">
-            <a:schemeClr val="accent1"/>
-          </a:fillRef>
-          <a:effectRef idx="2">
-            <a:schemeClr val="accent1"/>
-          </a:effectRef>
-          <a:fontRef idx="minor">
-            <a:schemeClr val="lt1"/>
-          </a:fontRef>
-        </p:style>
-        <p:txBody>
-          <a:bodyPr rtlCol="0" anchor="ctr" wrap="square" lIns="0" rIns="0" tIns="0" bIns="0"/>
-          <a:lstStyle/>
-          <a:p>
-            <a:pPr algn="ctr"/>
-          </a:p>
-        </p:txBody>
-      </p:sp>
-      <p:sp>
-        <p:nvSpPr>
-          <p:cNvPr id="26" name="TextBox 25"/>
-          <p:cNvSpPr txBox="1"/>
-          <p:nvPr/>
-        </p:nvSpPr>
-        <p:spPr>
-          <a:xfrm>
-            <a:off x="7581900" y="2628900"/>
-            <a:ext cx="1028700" cy="175260"/>
-          </a:xfrm>
-          <a:prstGeom prst="rect">
-            <a:avLst/>
-          </a:prstGeom>
-          <a:noFill/>
-        </p:spPr>
-        <p:txBody>
-          <a:bodyPr wrap="square" lIns="0" rIns="0" tIns="0" bIns="0" anchor="t">
-            <a:spAutoFit/>
-          </a:bodyPr>
-          <a:lstStyle/>
-          <a:p>
-            <a:pPr algn="ctr">
-              <a:lnSpc>
-                <a:spcPct val="120000"/>
-              </a:lnSpc>
-            </a:pPr>
-            <a:r>
-              <a:rPr sz="860" b="1" i="0">
-                <a:solidFill>
-                  <a:srgbClr val="21049A"/>
-                </a:solidFill>
-                <a:latin typeface="Roboto"/>
-              </a:rPr>
-              <a:t>«executionEnv»</a:t>
-            </a:r>
-          </a:p>
-        </p:txBody>
-      </p:sp>
-      <p:sp>
-        <p:nvSpPr>
-          <p:cNvPr id="27" name="TextBox 26"/>
-          <p:cNvSpPr txBox="1"/>
-          <p:nvPr/>
-        </p:nvSpPr>
-        <p:spPr>
-          <a:xfrm>
-            <a:off x="7581900" y="2800350"/>
-            <a:ext cx="1028700" cy="167640"/>
-          </a:xfrm>
-          <a:prstGeom prst="rect">
-            <a:avLst/>
-          </a:prstGeom>
-          <a:noFill/>
-        </p:spPr>
-        <p:txBody>
-          <a:bodyPr wrap="square" lIns="0" rIns="0" tIns="0" bIns="0" anchor="t">
-            <a:spAutoFit/>
-          </a:bodyPr>
-          <a:lstStyle/>
-          <a:p>
-            <a:pPr algn="ctr">
-              <a:lnSpc>
-                <a:spcPct val="120000"/>
-              </a:lnSpc>
-            </a:pPr>
-            <a:r>
-              <a:rPr sz="819" b="0" i="0">
-                <a:solidFill>
-                  <a:srgbClr val="1A1A1E"/>
-                </a:solidFill>
-                <a:latin typeface="Roboto"/>
-              </a:rPr>
-              <a:t>API</a:t>
-            </a:r>
-          </a:p>
-        </p:txBody>
-      </p:sp>
       <p:cxnSp>
         <p:nvCxnSpPr>
-          <p:cNvPr id="28" name="Connector 27"/>
+          <p:cNvPr id="18" name="Connector 17"/>
           <p:cNvCxnSpPr/>
           <p:nvPr/>
         </p:nvCxnSpPr>
         <p:spPr>
           <a:xfrm>
-            <a:off x="7448550" y="2800350"/>
-            <a:ext cx="114300" cy="0"/>
+            <a:off x="4857750" y="3124200"/>
+            <a:ext cx="952500" cy="0"/>
           </a:xfrm>
           <a:prstGeom prst="line">
             <a:avLst/>
           </a:prstGeom>
-          <a:ln w="20320">
+          <a:ln w="25400">
             <a:solidFill>
               <a:srgbClr val="E94D1C"/>
             </a:solidFill>
@@ -21820,22 +21828,100 @@
       </p:cxnSp>
       <p:sp>
         <p:nvSpPr>
-          <p:cNvPr id="29" name="Rectangle 28"/>
+          <p:cNvPr id="19" name="TextBox 18"/>
+          <p:cNvSpPr txBox="1"/>
+          <p:nvPr/>
+        </p:nvSpPr>
+        <p:spPr>
+          <a:xfrm>
+            <a:off x="4933950" y="2914650"/>
+            <a:ext cx="571500" cy="182880"/>
+          </a:xfrm>
+          <a:prstGeom prst="rect">
+            <a:avLst/>
+          </a:prstGeom>
+          <a:noFill/>
+        </p:spPr>
+        <p:txBody>
+          <a:bodyPr wrap="square" lIns="0" rIns="0" tIns="0" bIns="0" anchor="t">
+            <a:spAutoFit/>
+          </a:bodyPr>
+          <a:lstStyle/>
+          <a:p>
+            <a:pPr algn="l">
+              <a:lnSpc>
+                <a:spcPct val="120000"/>
+              </a:lnSpc>
+            </a:pPr>
+            <a:r>
+              <a:rPr sz="900" b="1" i="0">
+                <a:solidFill>
+                  <a:srgbClr val="E94D1C"/>
+                </a:solidFill>
+                <a:latin typeface="Roboto"/>
+              </a:rPr>
+              <a:t>#72</a:t>
+            </a:r>
+          </a:p>
+        </p:txBody>
+      </p:sp>
+      <p:sp>
+        <p:nvSpPr>
+          <p:cNvPr id="20" name="TextBox 19"/>
+          <p:cNvSpPr txBox="1"/>
+          <p:nvPr/>
+        </p:nvSpPr>
+        <p:spPr>
+          <a:xfrm>
+            <a:off x="6191250" y="2038350"/>
+            <a:ext cx="4000500" cy="167640"/>
+          </a:xfrm>
+          <a:prstGeom prst="rect">
+            <a:avLst/>
+          </a:prstGeom>
+          <a:noFill/>
+        </p:spPr>
+        <p:txBody>
+          <a:bodyPr wrap="square" lIns="0" rIns="0" tIns="0" bIns="0" anchor="t">
+            <a:spAutoFit/>
+          </a:bodyPr>
+          <a:lstStyle/>
+          <a:p>
+            <a:pPr algn="l">
+              <a:lnSpc>
+                <a:spcPct val="120000"/>
+              </a:lnSpc>
+            </a:pPr>
+            <a:r>
+              <a:rPr sz="819" b="1" i="0" spc="140">
+                <a:solidFill>
+                  <a:srgbClr val="E94D1C"/>
+                </a:solidFill>
+                <a:latin typeface="Roboto"/>
+              </a:rPr>
+              <a:t>RASCUNHO #60, DIAGRAMA DE IMPLANTAÇÃO</a:t>
+            </a:r>
+          </a:p>
+        </p:txBody>
+      </p:sp>
+      <p:sp>
+        <p:nvSpPr>
+          <p:cNvPr id="21" name="Rectangle 20"/>
           <p:cNvSpPr/>
           <p:nvPr/>
         </p:nvSpPr>
         <p:spPr>
           <a:xfrm>
-            <a:off x="8743950" y="2552700"/>
-            <a:ext cx="1066800" cy="495300"/>
-          </a:xfrm>
-          <a:prstGeom prst="rect">
-            <a:avLst/>
-          </a:prstGeom>
-          <a:noFill/>
-          <a:ln w="19050">
+            <a:off x="6191250" y="2209800"/>
+            <a:ext cx="3810000" cy="1866900"/>
+          </a:xfrm>
+          <a:prstGeom prst="rect">
+            <a:avLst/>
+          </a:prstGeom>
+          <a:noFill/>
+          <a:ln w="25400">
             <a:solidFill>
-              <a:srgbClr val="21049A"/>
+              <a:srgbClr val="E94D1C"/>
             </a:solidFill>
           </a:ln>
           <a:effectLst/>
@@ -21864,13 +21950,96 @@
       </p:sp>
       <p:sp>
         <p:nvSpPr>
-          <p:cNvPr id="30" name="TextBox 29"/>
-          <p:cNvSpPr txBox="1"/>
-          <p:nvPr/>
-        </p:nvSpPr>
-        <p:spPr>
-          <a:xfrm>
-            <a:off x="8763000" y="2628900"/>
+          <p:cNvPr id="22" name="TextBox 21"/>
+          <p:cNvSpPr txBox="1"/>
+          <p:nvPr/>
+        </p:nvSpPr>
+        <p:spPr>
+          <a:xfrm>
+            <a:off x="6381750" y="2324100"/>
+            <a:ext cx="1905000" cy="167640"/>
+          </a:xfrm>
+          <a:prstGeom prst="rect">
+            <a:avLst/>
+          </a:prstGeom>
+          <a:noFill/>
+        </p:spPr>
+        <p:txBody>
+          <a:bodyPr wrap="square" lIns="0" rIns="0" tIns="0" bIns="0" anchor="t">
+            <a:spAutoFit/>
+          </a:bodyPr>
+          <a:lstStyle/>
+          <a:p>
+            <a:pPr algn="l">
+              <a:lnSpc>
+                <a:spcPct val="120000"/>
+              </a:lnSpc>
+            </a:pPr>
+            <a:r>
+              <a:rPr sz="819" b="1" i="0">
+                <a:solidFill>
+                  <a:srgbClr val="E94D1C"/>
+                </a:solidFill>
+                <a:latin typeface="Roboto"/>
+              </a:rPr>
+              <a:t>«device» host</a:t>
+            </a:r>
+          </a:p>
+        </p:txBody>
+      </p:sp>
+      <p:sp>
+        <p:nvSpPr>
+          <p:cNvPr id="23" name="Rectangle 22"/>
+          <p:cNvSpPr/>
+          <p:nvPr/>
+        </p:nvSpPr>
+        <p:spPr>
+          <a:xfrm>
+            <a:off x="6381750" y="2552700"/>
+            <a:ext cx="1066800" cy="495300"/>
+          </a:xfrm>
+          <a:prstGeom prst="rect">
+            <a:avLst/>
+          </a:prstGeom>
+          <a:noFill/>
+          <a:ln w="19050">
+            <a:solidFill>
+              <a:srgbClr val="21049A"/>
+            </a:solidFill>
+          </a:ln>
+          <a:effectLst/>
+        </p:spPr>
+        <p:style>
+          <a:lnRef idx="1">
+            <a:schemeClr val="accent1"/>
+          </a:lnRef>
+          <a:fillRef idx="3">
+            <a:schemeClr val="accent1"/>
+          </a:fillRef>
+          <a:effectRef idx="2">
+            <a:schemeClr val="accent1"/>
+          </a:effectRef>
+          <a:fontRef idx="minor">
+            <a:schemeClr val="lt1"/>
+          </a:fontRef>
+        </p:style>
+        <p:txBody>
+          <a:bodyPr rtlCol="0" anchor="ctr" wrap="square" lIns="0" rIns="0" tIns="0" bIns="0"/>
+          <a:lstStyle/>
+          <a:p>
+            <a:pPr algn="ctr"/>
+          </a:p>
+        </p:txBody>
+      </p:sp>
+      <p:sp>
+        <p:nvSpPr>
+          <p:cNvPr id="24" name="TextBox 23"/>
+          <p:cNvSpPr txBox="1"/>
+          <p:nvPr/>
+        </p:nvSpPr>
+        <p:spPr>
+          <a:xfrm>
+            <a:off x="6400800" y="2628900"/>
             <a:ext cx="1028700" cy="175260"/>
           </a:xfrm>
           <a:prstGeom prst="rect">
@@ -21903,13 +22072,13 @@
       </p:sp>
       <p:sp>
         <p:nvSpPr>
-          <p:cNvPr id="31" name="TextBox 30"/>
-          <p:cNvSpPr txBox="1"/>
-          <p:nvPr/>
-        </p:nvSpPr>
-        <p:spPr>
-          <a:xfrm>
-            <a:off x="8763000" y="2800350"/>
+          <p:cNvPr id="25" name="TextBox 24"/>
+          <p:cNvSpPr txBox="1"/>
+          <p:nvPr/>
+        </p:nvSpPr>
+        <p:spPr>
+          <a:xfrm>
+            <a:off x="6400800" y="2800350"/>
             <a:ext cx="1028700" cy="167640"/>
           </a:xfrm>
           <a:prstGeom prst="rect">
@@ -21935,20 +22104,142 @@
                 </a:solidFill>
                 <a:latin typeface="Roboto"/>
               </a:rPr>
-              <a:t>banco</a:t>
+              <a:t>front</a:t>
+            </a:r>
+          </a:p>
+        </p:txBody>
+      </p:sp>
+      <p:sp>
+        <p:nvSpPr>
+          <p:cNvPr id="26" name="Rectangle 25"/>
+          <p:cNvSpPr/>
+          <p:nvPr/>
+        </p:nvSpPr>
+        <p:spPr>
+          <a:xfrm>
+            <a:off x="7562850" y="2552700"/>
+            <a:ext cx="1066800" cy="495300"/>
+          </a:xfrm>
+          <a:prstGeom prst="rect">
+            <a:avLst/>
+          </a:prstGeom>
+          <a:noFill/>
+          <a:ln w="19050">
+            <a:solidFill>
+              <a:srgbClr val="21049A"/>
+            </a:solidFill>
+          </a:ln>
+          <a:effectLst/>
+        </p:spPr>
+        <p:style>
+          <a:lnRef idx="1">
+            <a:schemeClr val="accent1"/>
+          </a:lnRef>
+          <a:fillRef idx="3">
+            <a:schemeClr val="accent1"/>
+          </a:fillRef>
+          <a:effectRef idx="2">
+            <a:schemeClr val="accent1"/>
+          </a:effectRef>
+          <a:fontRef idx="minor">
+            <a:schemeClr val="lt1"/>
+          </a:fontRef>
+        </p:style>
+        <p:txBody>
+          <a:bodyPr rtlCol="0" anchor="ctr" wrap="square" lIns="0" rIns="0" tIns="0" bIns="0"/>
+          <a:lstStyle/>
+          <a:p>
+            <a:pPr algn="ctr"/>
+          </a:p>
+        </p:txBody>
+      </p:sp>
+      <p:sp>
+        <p:nvSpPr>
+          <p:cNvPr id="27" name="TextBox 26"/>
+          <p:cNvSpPr txBox="1"/>
+          <p:nvPr/>
+        </p:nvSpPr>
+        <p:spPr>
+          <a:xfrm>
+            <a:off x="7581900" y="2628900"/>
+            <a:ext cx="1028700" cy="175260"/>
+          </a:xfrm>
+          <a:prstGeom prst="rect">
+            <a:avLst/>
+          </a:prstGeom>
+          <a:noFill/>
+        </p:spPr>
+        <p:txBody>
+          <a:bodyPr wrap="square" lIns="0" rIns="0" tIns="0" bIns="0" anchor="t">
+            <a:spAutoFit/>
+          </a:bodyPr>
+          <a:lstStyle/>
+          <a:p>
+            <a:pPr algn="ctr">
+              <a:lnSpc>
+                <a:spcPct val="120000"/>
+              </a:lnSpc>
+            </a:pPr>
+            <a:r>
+              <a:rPr sz="860" b="1" i="0">
+                <a:solidFill>
+                  <a:srgbClr val="21049A"/>
+                </a:solidFill>
+                <a:latin typeface="Roboto"/>
+              </a:rPr>
+              <a:t>«executionEnv»</a:t>
+            </a:r>
+          </a:p>
+        </p:txBody>
+      </p:sp>
+      <p:sp>
+        <p:nvSpPr>
+          <p:cNvPr id="28" name="TextBox 27"/>
+          <p:cNvSpPr txBox="1"/>
+          <p:nvPr/>
+        </p:nvSpPr>
+        <p:spPr>
+          <a:xfrm>
+            <a:off x="7581900" y="2800350"/>
+            <a:ext cx="1028700" cy="167640"/>
+          </a:xfrm>
+          <a:prstGeom prst="rect">
+            <a:avLst/>
+          </a:prstGeom>
+          <a:noFill/>
+        </p:spPr>
+        <p:txBody>
+          <a:bodyPr wrap="square" lIns="0" rIns="0" tIns="0" bIns="0" anchor="t">
+            <a:spAutoFit/>
+          </a:bodyPr>
+          <a:lstStyle/>
+          <a:p>
+            <a:pPr algn="ctr">
+              <a:lnSpc>
+                <a:spcPct val="120000"/>
+              </a:lnSpc>
+            </a:pPr>
+            <a:r>
+              <a:rPr sz="819" b="0" i="0">
+                <a:solidFill>
+                  <a:srgbClr val="1A1A1E"/>
+                </a:solidFill>
+                <a:latin typeface="Roboto"/>
+              </a:rPr>
+              <a:t>API</a:t>
             </a:r>
           </a:p>
         </p:txBody>
       </p:sp>
       <p:cxnSp>
         <p:nvCxnSpPr>
-          <p:cNvPr id="32" name="Connector 31"/>
+          <p:cNvPr id="29" name="Connector 28"/>
           <p:cNvCxnSpPr/>
           <p:nvPr/>
         </p:nvCxnSpPr>
         <p:spPr>
           <a:xfrm>
-            <a:off x="8629650" y="2800350"/>
+            <a:off x="7448550" y="2800350"/>
             <a:ext cx="114300" cy="0"/>
           </a:xfrm>
           <a:prstGeom prst="line">
@@ -21977,28 +22268,23 @@
       </p:cxnSp>
       <p:sp>
         <p:nvSpPr>
-          <p:cNvPr id="33" name="Rounded Rectangle 32"/>
+          <p:cNvPr id="30" name="Rectangle 29"/>
           <p:cNvSpPr/>
           <p:nvPr/>
         </p:nvSpPr>
         <p:spPr>
           <a:xfrm>
-            <a:off x="6381750" y="3276600"/>
-            <a:ext cx="3429000" cy="323850"/>
-          </a:xfrm>
-          <a:prstGeom prst="roundRect">
-            <a:avLst>
-              <a:gd name="adj" fmla="val 8823"/>
-            </a:avLst>
-          </a:prstGeom>
-          <a:solidFill>
-            <a:srgbClr val="FDEAE3"/>
-          </a:solidFill>
-          <a:ln w="12700">
+            <a:off x="8743950" y="2552700"/>
+            <a:ext cx="1066800" cy="495300"/>
+          </a:xfrm>
+          <a:prstGeom prst="rect">
+            <a:avLst/>
+          </a:prstGeom>
+          <a:noFill/>
+          <a:ln w="19050">
             <a:solidFill>
-              <a:srgbClr val="E94D1C"/>
+              <a:srgbClr val="21049A"/>
             </a:solidFill>
-            <a:prstDash val="dash"/>
           </a:ln>
           <a:effectLst/>
         </p:spPr>
@@ -22026,7 +22312,169 @@
       </p:sp>
       <p:sp>
         <p:nvSpPr>
-          <p:cNvPr id="34" name="TextBox 33"/>
+          <p:cNvPr id="31" name="TextBox 30"/>
+          <p:cNvSpPr txBox="1"/>
+          <p:nvPr/>
+        </p:nvSpPr>
+        <p:spPr>
+          <a:xfrm>
+            <a:off x="8763000" y="2628900"/>
+            <a:ext cx="1028700" cy="175260"/>
+          </a:xfrm>
+          <a:prstGeom prst="rect">
+            <a:avLst/>
+          </a:prstGeom>
+          <a:noFill/>
+        </p:spPr>
+        <p:txBody>
+          <a:bodyPr wrap="square" lIns="0" rIns="0" tIns="0" bIns="0" anchor="t">
+            <a:spAutoFit/>
+          </a:bodyPr>
+          <a:lstStyle/>
+          <a:p>
+            <a:pPr algn="ctr">
+              <a:lnSpc>
+                <a:spcPct val="120000"/>
+              </a:lnSpc>
+            </a:pPr>
+            <a:r>
+              <a:rPr sz="860" b="1" i="0">
+                <a:solidFill>
+                  <a:srgbClr val="21049A"/>
+                </a:solidFill>
+                <a:latin typeface="Roboto"/>
+              </a:rPr>
+              <a:t>«executionEnv»</a:t>
+            </a:r>
+          </a:p>
+        </p:txBody>
+      </p:sp>
+      <p:sp>
+        <p:nvSpPr>
+          <p:cNvPr id="32" name="TextBox 31"/>
+          <p:cNvSpPr txBox="1"/>
+          <p:nvPr/>
+        </p:nvSpPr>
+        <p:spPr>
+          <a:xfrm>
+            <a:off x="8763000" y="2800350"/>
+            <a:ext cx="1028700" cy="167640"/>
+          </a:xfrm>
+          <a:prstGeom prst="rect">
+            <a:avLst/>
+          </a:prstGeom>
+          <a:noFill/>
+        </p:spPr>
+        <p:txBody>
+          <a:bodyPr wrap="square" lIns="0" rIns="0" tIns="0" bIns="0" anchor="t">
+            <a:spAutoFit/>
+          </a:bodyPr>
+          <a:lstStyle/>
+          <a:p>
+            <a:pPr algn="ctr">
+              <a:lnSpc>
+                <a:spcPct val="120000"/>
+              </a:lnSpc>
+            </a:pPr>
+            <a:r>
+              <a:rPr sz="819" b="0" i="0">
+                <a:solidFill>
+                  <a:srgbClr val="1A1A1E"/>
+                </a:solidFill>
+                <a:latin typeface="Roboto"/>
+              </a:rPr>
+              <a:t>banco</a:t>
+            </a:r>
+          </a:p>
+        </p:txBody>
+      </p:sp>
+      <p:cxnSp>
+        <p:nvCxnSpPr>
+          <p:cNvPr id="33" name="Connector 32"/>
+          <p:cNvCxnSpPr/>
+          <p:nvPr/>
+        </p:nvCxnSpPr>
+        <p:spPr>
+          <a:xfrm>
+            <a:off x="8629650" y="2800350"/>
+            <a:ext cx="114300" cy="0"/>
+          </a:xfrm>
+          <a:prstGeom prst="line">
+            <a:avLst/>
+          </a:prstGeom>
+          <a:ln w="20320">
+            <a:solidFill>
+              <a:srgbClr val="E94D1C"/>
+            </a:solidFill>
+          </a:ln>
+        </p:spPr>
+        <p:style>
+          <a:lnRef idx="2">
+            <a:schemeClr val="accent1"/>
+          </a:lnRef>
+          <a:fillRef idx="0">
+            <a:schemeClr val="accent1"/>
+          </a:fillRef>
+          <a:effectRef idx="1">
+            <a:schemeClr val="accent1"/>
+          </a:effectRef>
+          <a:fontRef idx="minor">
+            <a:schemeClr val="tx1"/>
+          </a:fontRef>
+        </p:style>
+      </p:cxnSp>
+      <p:sp>
+        <p:nvSpPr>
+          <p:cNvPr id="34" name="Rounded Rectangle 33"/>
+          <p:cNvSpPr/>
+          <p:nvPr/>
+        </p:nvSpPr>
+        <p:spPr>
+          <a:xfrm>
+            <a:off x="6381750" y="3276600"/>
+            <a:ext cx="3429000" cy="323850"/>
+          </a:xfrm>
+          <a:prstGeom prst="roundRect">
+            <a:avLst>
+              <a:gd name="adj" fmla="val 8823"/>
+            </a:avLst>
+          </a:prstGeom>
+          <a:solidFill>
+            <a:srgbClr val="FDEAE3"/>
+          </a:solidFill>
+          <a:ln w="12700">
+            <a:solidFill>
+              <a:srgbClr val="E94D1C"/>
+            </a:solidFill>
+            <a:prstDash val="dash"/>
+          </a:ln>
+          <a:effectLst/>
+        </p:spPr>
+        <p:style>
+          <a:lnRef idx="1">
+            <a:schemeClr val="accent1"/>
+          </a:lnRef>
+          <a:fillRef idx="3">
+            <a:schemeClr val="accent1"/>
+          </a:fillRef>
+          <a:effectRef idx="2">
+            <a:schemeClr val="accent1"/>
+          </a:effectRef>
+          <a:fontRef idx="minor">
+            <a:schemeClr val="lt1"/>
+          </a:fontRef>
+        </p:style>
+        <p:txBody>
+          <a:bodyPr rtlCol="0" anchor="ctr" wrap="square" lIns="0" rIns="0" tIns="0" bIns="0"/>
+          <a:lstStyle/>
+          <a:p>
+            <a:pPr algn="ctr"/>
+          </a:p>
+        </p:txBody>
+      </p:sp>
+      <p:sp>
+        <p:nvSpPr>
+          <p:cNvPr id="35" name="TextBox 34"/>
           <p:cNvSpPr txBox="1"/>
           <p:nvPr/>
         </p:nvSpPr>
@@ -22065,7 +22513,7 @@
       </p:sp>
       <p:sp>
         <p:nvSpPr>
-          <p:cNvPr id="35" name="TextBox 34"/>
+          <p:cNvPr id="36" name="TextBox 35"/>
           <p:cNvSpPr txBox="1"/>
           <p:nvPr/>
         </p:nvSpPr>
@@ -22104,7 +22552,7 @@
       </p:sp>
       <p:sp>
         <p:nvSpPr>
-          <p:cNvPr id="36" name="TextBox 35"/>
+          <p:cNvPr id="37" name="TextBox 36"/>
           <p:cNvSpPr txBox="1"/>
           <p:nvPr/>
         </p:nvSpPr>
@@ -22143,7 +22591,7 @@
       </p:sp>
       <p:sp>
         <p:nvSpPr>
-          <p:cNvPr id="37" name="TextBox 36"/>
+          <p:cNvPr id="38" name="TextBox 37"/>
           <p:cNvSpPr txBox="1"/>
           <p:nvPr/>
         </p:nvSpPr>
@@ -22206,9 +22654,33 @@
         <p:nvPr/>
       </p:nvGrpSpPr>
       <p:grpSpPr/>
-      <p:sp>
-        <p:nvSpPr>
-          <p:cNvPr id="2" name="TextBox 1"/>
+      <p:pic>
+        <p:nvPicPr>
+          <p:cNvPr id="2" name="Picture 1" descr="u-azul.png"/>
+          <p:cNvPicPr>
+            <a:picLocks noChangeAspect="1"/>
+          </p:cNvPicPr>
+          <p:nvPr/>
+        </p:nvPicPr>
+        <p:blipFill>
+          <a:blip r:embed="rId2"/>
+          <a:stretch>
+            <a:fillRect/>
+          </a:stretch>
+        </p:blipFill>
+        <p:spPr>
+          <a:xfrm>
+            <a:off x="10744200" y="457200"/>
+            <a:ext cx="342900" cy="342900"/>
+          </a:xfrm>
+          <a:prstGeom prst="rect">
+            <a:avLst/>
+          </a:prstGeom>
+        </p:spPr>
+      </p:pic>
+      <p:sp>
+        <p:nvSpPr>
+          <p:cNvPr id="3" name="TextBox 2"/>
           <p:cNvSpPr txBox="1"/>
           <p:nvPr/>
         </p:nvSpPr>
@@ -22247,14 +22719,14 @@
       </p:sp>
       <p:sp>
         <p:nvSpPr>
-          <p:cNvPr id="3" name="TextBox 2"/>
+          <p:cNvPr id="4" name="TextBox 3"/>
           <p:cNvSpPr txBox="1"/>
           <p:nvPr/>
         </p:nvSpPr>
         <p:spPr>
           <a:xfrm>
             <a:off x="685800" y="838200"/>
-            <a:ext cx="9525000" cy="1524000"/>
+            <a:ext cx="9620250" cy="1524000"/>
           </a:xfrm>
           <a:prstGeom prst="rect">
             <a:avLst/>
@@ -22302,7 +22774,7 @@
       </p:sp>
       <p:sp>
         <p:nvSpPr>
-          <p:cNvPr id="4" name="Rounded Rectangle 3"/>
+          <p:cNvPr id="5" name="Rounded Rectangle 4"/>
           <p:cNvSpPr/>
           <p:nvPr/>
         </p:nvSpPr>
@@ -22350,7 +22822,7 @@
       </p:sp>
       <p:sp>
         <p:nvSpPr>
-          <p:cNvPr id="5" name="TextBox 4"/>
+          <p:cNvPr id="6" name="TextBox 5"/>
           <p:cNvSpPr txBox="1"/>
           <p:nvPr/>
         </p:nvSpPr>
@@ -22389,7 +22861,7 @@
       </p:sp>
       <p:sp>
         <p:nvSpPr>
-          <p:cNvPr id="6" name="TextBox 5"/>
+          <p:cNvPr id="7" name="TextBox 6"/>
           <p:cNvSpPr txBox="1"/>
           <p:nvPr/>
         </p:nvSpPr>
@@ -22428,7 +22900,7 @@
       </p:sp>
       <p:sp>
         <p:nvSpPr>
-          <p:cNvPr id="7" name="TextBox 6"/>
+          <p:cNvPr id="8" name="TextBox 7"/>
           <p:cNvSpPr txBox="1"/>
           <p:nvPr/>
         </p:nvSpPr>
@@ -22467,7 +22939,7 @@
       </p:sp>
       <p:sp>
         <p:nvSpPr>
-          <p:cNvPr id="8" name="TextBox 7"/>
+          <p:cNvPr id="9" name="TextBox 8"/>
           <p:cNvSpPr txBox="1"/>
           <p:nvPr/>
         </p:nvSpPr>
@@ -22506,7 +22978,7 @@
       </p:sp>
       <p:sp>
         <p:nvSpPr>
-          <p:cNvPr id="9" name="TextBox 8"/>
+          <p:cNvPr id="10" name="TextBox 9"/>
           <p:cNvSpPr txBox="1"/>
           <p:nvPr/>
         </p:nvSpPr>
@@ -22545,7 +23017,7 @@
       </p:sp>
       <p:sp>
         <p:nvSpPr>
-          <p:cNvPr id="10" name="TextBox 9"/>
+          <p:cNvPr id="11" name="TextBox 10"/>
           <p:cNvSpPr txBox="1"/>
           <p:nvPr/>
         </p:nvSpPr>
@@ -22584,7 +23056,7 @@
       </p:sp>
       <p:sp>
         <p:nvSpPr>
-          <p:cNvPr id="11" name="TextBox 10"/>
+          <p:cNvPr id="12" name="TextBox 11"/>
           <p:cNvSpPr txBox="1"/>
           <p:nvPr/>
         </p:nvSpPr>
@@ -22623,7 +23095,7 @@
       </p:sp>
       <p:sp>
         <p:nvSpPr>
-          <p:cNvPr id="12" name="TextBox 11"/>
+          <p:cNvPr id="13" name="TextBox 12"/>
           <p:cNvSpPr txBox="1"/>
           <p:nvPr/>
         </p:nvSpPr>
@@ -22662,7 +23134,7 @@
       </p:sp>
       <p:sp>
         <p:nvSpPr>
-          <p:cNvPr id="13" name="TextBox 12"/>
+          <p:cNvPr id="14" name="TextBox 13"/>
           <p:cNvSpPr txBox="1"/>
           <p:nvPr/>
         </p:nvSpPr>
@@ -22701,7 +23173,7 @@
       </p:sp>
       <p:sp>
         <p:nvSpPr>
-          <p:cNvPr id="14" name="TextBox 13"/>
+          <p:cNvPr id="15" name="TextBox 14"/>
           <p:cNvSpPr txBox="1"/>
           <p:nvPr/>
         </p:nvSpPr>
@@ -22740,7 +23212,7 @@
       </p:sp>
       <p:sp>
         <p:nvSpPr>
-          <p:cNvPr id="15" name="TextBox 14"/>
+          <p:cNvPr id="16" name="TextBox 15"/>
           <p:cNvSpPr txBox="1"/>
           <p:nvPr/>
         </p:nvSpPr>
@@ -22779,7 +23251,7 @@
       </p:sp>
       <p:sp>
         <p:nvSpPr>
-          <p:cNvPr id="16" name="TextBox 15"/>
+          <p:cNvPr id="17" name="TextBox 16"/>
           <p:cNvSpPr txBox="1"/>
           <p:nvPr/>
         </p:nvSpPr>
@@ -22818,7 +23290,7 @@
       </p:sp>
       <p:sp>
         <p:nvSpPr>
-          <p:cNvPr id="17" name="TextBox 16"/>
+          <p:cNvPr id="18" name="TextBox 17"/>
           <p:cNvSpPr txBox="1"/>
           <p:nvPr/>
         </p:nvSpPr>
@@ -22857,7 +23329,7 @@
       </p:sp>
       <p:sp>
         <p:nvSpPr>
-          <p:cNvPr id="18" name="TextBox 17"/>
+          <p:cNvPr id="19" name="TextBox 18"/>
           <p:cNvSpPr txBox="1"/>
           <p:nvPr/>
         </p:nvSpPr>
@@ -22896,7 +23368,7 @@
       </p:sp>
       <p:sp>
         <p:nvSpPr>
-          <p:cNvPr id="19" name="TextBox 18"/>
+          <p:cNvPr id="20" name="TextBox 19"/>
           <p:cNvSpPr txBox="1"/>
           <p:nvPr/>
         </p:nvSpPr>
@@ -22935,7 +23407,7 @@
       </p:sp>
       <p:sp>
         <p:nvSpPr>
-          <p:cNvPr id="20" name="TextBox 19"/>
+          <p:cNvPr id="21" name="TextBox 20"/>
           <p:cNvSpPr txBox="1"/>
           <p:nvPr/>
         </p:nvSpPr>
@@ -22974,7 +23446,7 @@
       </p:sp>
       <p:sp>
         <p:nvSpPr>
-          <p:cNvPr id="21" name="TextBox 20"/>
+          <p:cNvPr id="22" name="TextBox 21"/>
           <p:cNvSpPr txBox="1"/>
           <p:nvPr/>
         </p:nvSpPr>
@@ -23013,7 +23485,7 @@
       </p:sp>
       <p:sp>
         <p:nvSpPr>
-          <p:cNvPr id="22" name="TextBox 21"/>
+          <p:cNvPr id="23" name="TextBox 22"/>
           <p:cNvSpPr txBox="1"/>
           <p:nvPr/>
         </p:nvSpPr>
@@ -23070,7 +23542,7 @@
       </p:sp>
       <p:sp>
         <p:nvSpPr>
-          <p:cNvPr id="23" name="TextBox 22"/>
+          <p:cNvPr id="24" name="TextBox 23"/>
           <p:cNvSpPr txBox="1"/>
           <p:nvPr/>
         </p:nvSpPr>
@@ -23109,7 +23581,7 @@
       </p:sp>
       <p:sp>
         <p:nvSpPr>
-          <p:cNvPr id="24" name="TextBox 23"/>
+          <p:cNvPr id="25" name="TextBox 24"/>
           <p:cNvSpPr txBox="1"/>
           <p:nvPr/>
         </p:nvSpPr>
@@ -23166,7 +23638,7 @@
       </p:sp>
       <p:sp>
         <p:nvSpPr>
-          <p:cNvPr id="25" name="TextBox 24"/>
+          <p:cNvPr id="26" name="TextBox 25"/>
           <p:cNvSpPr txBox="1"/>
           <p:nvPr/>
         </p:nvSpPr>
@@ -23205,7 +23677,7 @@
       </p:sp>
       <p:sp>
         <p:nvSpPr>
-          <p:cNvPr id="26" name="TextBox 25"/>
+          <p:cNvPr id="27" name="TextBox 26"/>
           <p:cNvSpPr txBox="1"/>
           <p:nvPr/>
         </p:nvSpPr>
@@ -23244,7 +23716,7 @@
       </p:sp>
       <p:sp>
         <p:nvSpPr>
-          <p:cNvPr id="27" name="TextBox 26"/>
+          <p:cNvPr id="28" name="TextBox 27"/>
           <p:cNvSpPr txBox="1"/>
           <p:nvPr/>
         </p:nvSpPr>
@@ -23283,7 +23755,7 @@
       </p:sp>
       <p:sp>
         <p:nvSpPr>
-          <p:cNvPr id="28" name="TextBox 27"/>
+          <p:cNvPr id="29" name="TextBox 28"/>
           <p:cNvSpPr txBox="1"/>
           <p:nvPr/>
         </p:nvSpPr>
@@ -23331,7 +23803,7 @@
       </p:sp>
       <p:sp>
         <p:nvSpPr>
-          <p:cNvPr id="29" name="TextBox 28"/>
+          <p:cNvPr id="30" name="TextBox 29"/>
           <p:cNvSpPr txBox="1"/>
           <p:nvPr/>
         </p:nvSpPr>
@@ -23370,7 +23842,7 @@
       </p:sp>
       <p:sp>
         <p:nvSpPr>
-          <p:cNvPr id="30" name="TextBox 29"/>
+          <p:cNvPr id="31" name="TextBox 30"/>
           <p:cNvSpPr txBox="1"/>
           <p:nvPr/>
         </p:nvSpPr>
@@ -23433,9 +23905,33 @@
         <p:nvPr/>
       </p:nvGrpSpPr>
       <p:grpSpPr/>
-      <p:sp>
-        <p:nvSpPr>
-          <p:cNvPr id="2" name="TextBox 1"/>
+      <p:pic>
+        <p:nvPicPr>
+          <p:cNvPr id="2" name="Picture 1" descr="u-azul.png"/>
+          <p:cNvPicPr>
+            <a:picLocks noChangeAspect="1"/>
+          </p:cNvPicPr>
+          <p:nvPr/>
+        </p:nvPicPr>
+        <p:blipFill>
+          <a:blip r:embed="rId2"/>
+          <a:stretch>
+            <a:fillRect/>
+          </a:stretch>
+        </p:blipFill>
+        <p:spPr>
+          <a:xfrm>
+            <a:off x="10744200" y="457200"/>
+            <a:ext cx="342900" cy="342900"/>
+          </a:xfrm>
+          <a:prstGeom prst="rect">
+            <a:avLst/>
+          </a:prstGeom>
+        </p:spPr>
+      </p:pic>
+      <p:sp>
+        <p:nvSpPr>
+          <p:cNvPr id="3" name="TextBox 2"/>
           <p:cNvSpPr txBox="1"/>
           <p:nvPr/>
         </p:nvSpPr>
@@ -23474,14 +23970,14 @@
       </p:sp>
       <p:sp>
         <p:nvSpPr>
-          <p:cNvPr id="3" name="TextBox 2"/>
+          <p:cNvPr id="4" name="TextBox 3"/>
           <p:cNvSpPr txBox="1"/>
           <p:nvPr/>
         </p:nvSpPr>
         <p:spPr>
           <a:xfrm>
             <a:off x="685800" y="838200"/>
-            <a:ext cx="9525000" cy="1524000"/>
+            <a:ext cx="9620250" cy="1524000"/>
           </a:xfrm>
           <a:prstGeom prst="rect">
             <a:avLst/>
@@ -23529,7 +24025,7 @@
       </p:sp>
       <p:sp>
         <p:nvSpPr>
-          <p:cNvPr id="4" name="TextBox 3"/>
+          <p:cNvPr id="5" name="TextBox 4"/>
           <p:cNvSpPr txBox="1"/>
           <p:nvPr/>
         </p:nvSpPr>
@@ -23568,7 +24064,7 @@
       </p:sp>
       <p:sp>
         <p:nvSpPr>
-          <p:cNvPr id="5" name="Rectangle 4"/>
+          <p:cNvPr id="6" name="Rectangle 5"/>
           <p:cNvSpPr/>
           <p:nvPr/>
         </p:nvSpPr>
@@ -23612,7 +24108,7 @@
       </p:sp>
       <p:sp>
         <p:nvSpPr>
-          <p:cNvPr id="6" name="TextBox 5"/>
+          <p:cNvPr id="7" name="TextBox 6"/>
           <p:cNvSpPr txBox="1"/>
           <p:nvPr/>
         </p:nvSpPr>
@@ -23651,7 +24147,7 @@
       </p:sp>
       <p:sp>
         <p:nvSpPr>
-          <p:cNvPr id="7" name="TextBox 6"/>
+          <p:cNvPr id="8" name="TextBox 7"/>
           <p:cNvSpPr txBox="1"/>
           <p:nvPr/>
         </p:nvSpPr>
@@ -23690,7 +24186,7 @@
       </p:sp>
       <p:sp>
         <p:nvSpPr>
-          <p:cNvPr id="8" name="TextBox 7"/>
+          <p:cNvPr id="9" name="TextBox 8"/>
           <p:cNvSpPr txBox="1"/>
           <p:nvPr/>
         </p:nvSpPr>
@@ -23729,7 +24225,7 @@
       </p:sp>
       <p:sp>
         <p:nvSpPr>
-          <p:cNvPr id="9" name="TextBox 8"/>
+          <p:cNvPr id="10" name="TextBox 9"/>
           <p:cNvSpPr txBox="1"/>
           <p:nvPr/>
         </p:nvSpPr>
@@ -23768,7 +24264,7 @@
       </p:sp>
       <p:sp>
         <p:nvSpPr>
-          <p:cNvPr id="10" name="TextBox 9"/>
+          <p:cNvPr id="11" name="TextBox 10"/>
           <p:cNvSpPr txBox="1"/>
           <p:nvPr/>
         </p:nvSpPr>
@@ -23807,7 +24303,7 @@
       </p:sp>
       <p:sp>
         <p:nvSpPr>
-          <p:cNvPr id="11" name="TextBox 10"/>
+          <p:cNvPr id="12" name="TextBox 11"/>
           <p:cNvSpPr txBox="1"/>
           <p:nvPr/>
         </p:nvSpPr>
@@ -23846,7 +24342,7 @@
       </p:sp>
       <p:sp>
         <p:nvSpPr>
-          <p:cNvPr id="12" name="TextBox 11"/>
+          <p:cNvPr id="13" name="TextBox 12"/>
           <p:cNvSpPr txBox="1"/>
           <p:nvPr/>
         </p:nvSpPr>
@@ -23885,7 +24381,7 @@
       </p:sp>
       <p:sp>
         <p:nvSpPr>
-          <p:cNvPr id="13" name="TextBox 12"/>
+          <p:cNvPr id="14" name="TextBox 13"/>
           <p:cNvSpPr txBox="1"/>
           <p:nvPr/>
         </p:nvSpPr>
@@ -23924,7 +24420,7 @@
       </p:sp>
       <p:sp>
         <p:nvSpPr>
-          <p:cNvPr id="14" name="TextBox 13"/>
+          <p:cNvPr id="15" name="TextBox 14"/>
           <p:cNvSpPr txBox="1"/>
           <p:nvPr/>
         </p:nvSpPr>
@@ -23963,7 +24459,7 @@
       </p:sp>
       <p:sp>
         <p:nvSpPr>
-          <p:cNvPr id="15" name="Rectangle 14"/>
+          <p:cNvPr id="16" name="Rectangle 15"/>
           <p:cNvSpPr/>
           <p:nvPr/>
         </p:nvSpPr>
@@ -24007,7 +24503,7 @@
       </p:sp>
       <p:sp>
         <p:nvSpPr>
-          <p:cNvPr id="16" name="TextBox 15"/>
+          <p:cNvPr id="17" name="TextBox 16"/>
           <p:cNvSpPr txBox="1"/>
           <p:nvPr/>
         </p:nvSpPr>
@@ -24046,7 +24542,7 @@
       </p:sp>
       <p:sp>
         <p:nvSpPr>
-          <p:cNvPr id="17" name="TextBox 16"/>
+          <p:cNvPr id="18" name="TextBox 17"/>
           <p:cNvSpPr txBox="1"/>
           <p:nvPr/>
         </p:nvSpPr>
@@ -24085,7 +24581,7 @@
       </p:sp>
       <p:sp>
         <p:nvSpPr>
-          <p:cNvPr id="18" name="TextBox 17"/>
+          <p:cNvPr id="19" name="TextBox 18"/>
           <p:cNvSpPr txBox="1"/>
           <p:nvPr/>
         </p:nvSpPr>
@@ -24124,7 +24620,7 @@
       </p:sp>
       <p:sp>
         <p:nvSpPr>
-          <p:cNvPr id="19" name="TextBox 18"/>
+          <p:cNvPr id="20" name="TextBox 19"/>
           <p:cNvSpPr txBox="1"/>
           <p:nvPr/>
         </p:nvSpPr>
@@ -24163,7 +24659,7 @@
       </p:sp>
       <p:sp>
         <p:nvSpPr>
-          <p:cNvPr id="20" name="TextBox 19"/>
+          <p:cNvPr id="21" name="TextBox 20"/>
           <p:cNvSpPr txBox="1"/>
           <p:nvPr/>
         </p:nvSpPr>
@@ -24202,7 +24698,7 @@
       </p:sp>
       <p:sp>
         <p:nvSpPr>
-          <p:cNvPr id="21" name="TextBox 20"/>
+          <p:cNvPr id="22" name="TextBox 21"/>
           <p:cNvSpPr txBox="1"/>
           <p:nvPr/>
         </p:nvSpPr>
@@ -24265,9 +24761,33 @@
         <p:nvPr/>
       </p:nvGrpSpPr>
       <p:grpSpPr/>
-      <p:sp>
-        <p:nvSpPr>
-          <p:cNvPr id="2" name="TextBox 1"/>
+      <p:pic>
+        <p:nvPicPr>
+          <p:cNvPr id="2" name="Picture 1" descr="u-azul.png"/>
+          <p:cNvPicPr>
+            <a:picLocks noChangeAspect="1"/>
+          </p:cNvPicPr>
+          <p:nvPr/>
+        </p:nvPicPr>
+        <p:blipFill>
+          <a:blip r:embed="rId2"/>
+          <a:stretch>
+            <a:fillRect/>
+          </a:stretch>
+        </p:blipFill>
+        <p:spPr>
+          <a:xfrm>
+            <a:off x="10744200" y="457200"/>
+            <a:ext cx="342900" cy="342900"/>
+          </a:xfrm>
+          <a:prstGeom prst="rect">
+            <a:avLst/>
+          </a:prstGeom>
+        </p:spPr>
+      </p:pic>
+      <p:sp>
+        <p:nvSpPr>
+          <p:cNvPr id="3" name="TextBox 2"/>
           <p:cNvSpPr txBox="1"/>
           <p:nvPr/>
         </p:nvSpPr>
@@ -24306,14 +24826,14 @@
       </p:sp>
       <p:sp>
         <p:nvSpPr>
-          <p:cNvPr id="3" name="TextBox 2"/>
+          <p:cNvPr id="4" name="TextBox 3"/>
           <p:cNvSpPr txBox="1"/>
           <p:nvPr/>
         </p:nvSpPr>
         <p:spPr>
           <a:xfrm>
             <a:off x="685800" y="838200"/>
-            <a:ext cx="9525000" cy="1524000"/>
+            <a:ext cx="9620250" cy="1524000"/>
           </a:xfrm>
           <a:prstGeom prst="rect">
             <a:avLst/>
@@ -24361,7 +24881,7 @@
       </p:sp>
       <p:sp>
         <p:nvSpPr>
-          <p:cNvPr id="4" name="TextBox 3"/>
+          <p:cNvPr id="5" name="TextBox 4"/>
           <p:cNvSpPr txBox="1"/>
           <p:nvPr/>
         </p:nvSpPr>
@@ -24400,7 +24920,7 @@
       </p:sp>
       <p:sp>
         <p:nvSpPr>
-          <p:cNvPr id="5" name="TextBox 4"/>
+          <p:cNvPr id="6" name="TextBox 5"/>
           <p:cNvSpPr txBox="1"/>
           <p:nvPr/>
         </p:nvSpPr>
@@ -24439,7 +24959,7 @@
       </p:sp>
       <p:sp>
         <p:nvSpPr>
-          <p:cNvPr id="6" name="TextBox 5"/>
+          <p:cNvPr id="7" name="TextBox 6"/>
           <p:cNvSpPr txBox="1"/>
           <p:nvPr/>
         </p:nvSpPr>
@@ -24478,7 +24998,7 @@
       </p:sp>
       <p:sp>
         <p:nvSpPr>
-          <p:cNvPr id="7" name="TextBox 6"/>
+          <p:cNvPr id="8" name="TextBox 7"/>
           <p:cNvSpPr txBox="1"/>
           <p:nvPr/>
         </p:nvSpPr>
@@ -24517,7 +25037,7 @@
       </p:sp>
       <p:sp>
         <p:nvSpPr>
-          <p:cNvPr id="8" name="TextBox 7"/>
+          <p:cNvPr id="9" name="TextBox 8"/>
           <p:cNvSpPr txBox="1"/>
           <p:nvPr/>
         </p:nvSpPr>
@@ -24556,7 +25076,7 @@
       </p:sp>
       <p:sp>
         <p:nvSpPr>
-          <p:cNvPr id="9" name="TextBox 8"/>
+          <p:cNvPr id="10" name="TextBox 9"/>
           <p:cNvSpPr txBox="1"/>
           <p:nvPr/>
         </p:nvSpPr>
@@ -24595,16 +25115,16 @@
       </p:sp>
       <p:sp>
         <p:nvSpPr>
-          <p:cNvPr id="10" name="Rectangle 9"/>
+          <p:cNvPr id="11" name="Donut 10"/>
           <p:cNvSpPr/>
           <p:nvPr/>
         </p:nvSpPr>
         <p:spPr>
           <a:xfrm>
             <a:off x="9124950" y="2000250"/>
-            <a:ext cx="28575" cy="876300"/>
-          </a:xfrm>
-          <a:prstGeom prst="rect">
+            <a:ext cx="142875" cy="142875"/>
+          </a:xfrm>
+          <a:prstGeom prst="donut">
             <a:avLst/>
           </a:prstGeom>
           <a:solidFill>
@@ -24630,6 +25150,89 @@
           </a:fontRef>
         </p:style>
         <p:txBody>
+          <a:bodyPr rtlCol="0" anchor="ctr"/>
+          <a:lstStyle/>
+          <a:p>
+            <a:pPr algn="ctr"/>
+          </a:p>
+        </p:txBody>
+      </p:sp>
+      <p:sp>
+        <p:nvSpPr>
+          <p:cNvPr id="12" name="TextBox 11"/>
+          <p:cNvSpPr txBox="1"/>
+          <p:nvPr/>
+        </p:nvSpPr>
+        <p:spPr>
+          <a:xfrm>
+            <a:off x="9353550" y="2009775"/>
+            <a:ext cx="2152650" cy="167640"/>
+          </a:xfrm>
+          <a:prstGeom prst="rect">
+            <a:avLst/>
+          </a:prstGeom>
+          <a:noFill/>
+        </p:spPr>
+        <p:txBody>
+          <a:bodyPr wrap="square" lIns="0" rIns="0" tIns="0" bIns="0" anchor="t">
+            <a:spAutoFit/>
+          </a:bodyPr>
+          <a:lstStyle/>
+          <a:p>
+            <a:pPr algn="l">
+              <a:lnSpc>
+                <a:spcPct val="120000"/>
+              </a:lnSpc>
+            </a:pPr>
+            <a:r>
+              <a:rPr sz="819" b="1" i="0" spc="120">
+                <a:solidFill>
+                  <a:srgbClr val="E94D1C"/>
+                </a:solidFill>
+                <a:latin typeface="Roboto"/>
+              </a:rPr>
+              <a:t>EM ABERTO</a:t>
+            </a:r>
+          </a:p>
+        </p:txBody>
+      </p:sp>
+      <p:sp>
+        <p:nvSpPr>
+          <p:cNvPr id="13" name="Rectangle 12"/>
+          <p:cNvSpPr/>
+          <p:nvPr/>
+        </p:nvSpPr>
+        <p:spPr>
+          <a:xfrm>
+            <a:off x="9124950" y="2247900"/>
+            <a:ext cx="28575" cy="628650"/>
+          </a:xfrm>
+          <a:prstGeom prst="rect">
+            <a:avLst/>
+          </a:prstGeom>
+          <a:solidFill>
+            <a:srgbClr val="E94D1C"/>
+          </a:solidFill>
+          <a:ln>
+            <a:noFill/>
+          </a:ln>
+          <a:effectLst/>
+        </p:spPr>
+        <p:style>
+          <a:lnRef idx="1">
+            <a:schemeClr val="accent1"/>
+          </a:lnRef>
+          <a:fillRef idx="3">
+            <a:schemeClr val="accent1"/>
+          </a:fillRef>
+          <a:effectRef idx="2">
+            <a:schemeClr val="accent1"/>
+          </a:effectRef>
+          <a:fontRef idx="minor">
+            <a:schemeClr val="lt1"/>
+          </a:fontRef>
+        </p:style>
+        <p:txBody>
           <a:bodyPr rtlCol="0" anchor="ctr" wrap="square" lIns="0" rIns="0" tIns="0" bIns="0"/>
           <a:lstStyle/>
           <a:p>
@@ -24639,52 +25242,13 @@
       </p:sp>
       <p:sp>
         <p:nvSpPr>
-          <p:cNvPr id="11" name="TextBox 10"/>
-          <p:cNvSpPr txBox="1"/>
-          <p:nvPr/>
-        </p:nvSpPr>
-        <p:spPr>
-          <a:xfrm>
-            <a:off x="9286875" y="2000250"/>
-            <a:ext cx="2219325" cy="167640"/>
-          </a:xfrm>
-          <a:prstGeom prst="rect">
-            <a:avLst/>
-          </a:prstGeom>
-          <a:noFill/>
-        </p:spPr>
-        <p:txBody>
-          <a:bodyPr wrap="square" lIns="0" rIns="0" tIns="0" bIns="0" anchor="t">
-            <a:spAutoFit/>
-          </a:bodyPr>
-          <a:lstStyle/>
-          <a:p>
-            <a:pPr algn="l">
-              <a:lnSpc>
-                <a:spcPct val="120000"/>
-              </a:lnSpc>
-            </a:pPr>
-            <a:r>
-              <a:rPr sz="819" b="1" i="0" spc="120">
-                <a:solidFill>
-                  <a:srgbClr val="E94D1C"/>
-                </a:solidFill>
-                <a:latin typeface="Roboto"/>
-              </a:rPr>
-              <a:t>EM ABERTO</a:t>
-            </a:r>
-          </a:p>
-        </p:txBody>
-      </p:sp>
-      <p:sp>
-        <p:nvSpPr>
-          <p:cNvPr id="12" name="TextBox 11"/>
-          <p:cNvSpPr txBox="1"/>
-          <p:nvPr/>
-        </p:nvSpPr>
-        <p:spPr>
-          <a:xfrm>
-            <a:off x="9286875" y="2209800"/>
+          <p:cNvPr id="14" name="TextBox 13"/>
+          <p:cNvSpPr txBox="1"/>
+          <p:nvPr/>
+        </p:nvSpPr>
+        <p:spPr>
+          <a:xfrm>
+            <a:off x="9286875" y="2286000"/>
             <a:ext cx="2219325" cy="2286000"/>
           </a:xfrm>
           <a:prstGeom prst="rect">
@@ -24758,7 +25322,7 @@
       </p:sp>
       <p:sp>
         <p:nvSpPr>
-          <p:cNvPr id="13" name="TextBox 12"/>
+          <p:cNvPr id="15" name="TextBox 14"/>
           <p:cNvSpPr txBox="1"/>
           <p:nvPr/>
         </p:nvSpPr>
@@ -24797,7 +25361,7 @@
       </p:sp>
       <p:sp>
         <p:nvSpPr>
-          <p:cNvPr id="14" name="TextBox 13"/>
+          <p:cNvPr id="16" name="TextBox 15"/>
           <p:cNvSpPr txBox="1"/>
           <p:nvPr/>
         </p:nvSpPr>
@@ -24904,9 +25468,165 @@
           </a:p>
         </p:txBody>
       </p:sp>
-      <p:sp>
-        <p:nvSpPr>
-          <p:cNvPr id="3" name="TextBox 2"/>
+      <p:pic>
+        <p:nvPicPr>
+          <p:cNvPr id="3" name="Picture 2" descr="u-branco.png"/>
+          <p:cNvPicPr>
+            <a:picLocks noChangeAspect="1"/>
+          </p:cNvPicPr>
+          <p:nvPr/>
+        </p:nvPicPr>
+        <p:blipFill>
+          <a:blip r:embed="rId2"/>
+          <a:stretch>
+            <a:fillRect/>
+          </a:stretch>
+        </p:blipFill>
+        <p:spPr>
+          <a:xfrm>
+            <a:off x="10744200" y="457200"/>
+            <a:ext cx="342900" cy="342900"/>
+          </a:xfrm>
+          <a:prstGeom prst="rect">
+            <a:avLst/>
+          </a:prstGeom>
+        </p:spPr>
+      </p:pic>
+      <p:sp>
+        <p:nvSpPr>
+          <p:cNvPr id="4" name="Rounded Rectangle 3"/>
+          <p:cNvSpPr/>
+          <p:nvPr/>
+        </p:nvSpPr>
+        <p:spPr>
+          <a:xfrm>
+            <a:off x="8953500" y="2895600"/>
+            <a:ext cx="381000" cy="685800"/>
+          </a:xfrm>
+          <a:prstGeom prst="roundRect">
+            <a:avLst/>
+          </a:prstGeom>
+          <a:solidFill>
+            <a:srgbClr val="E94D1C"/>
+          </a:solidFill>
+          <a:ln>
+            <a:noFill/>
+          </a:ln>
+          <a:effectLst/>
+        </p:spPr>
+        <p:style>
+          <a:lnRef idx="1">
+            <a:schemeClr val="accent1"/>
+          </a:lnRef>
+          <a:fillRef idx="3">
+            <a:schemeClr val="accent1"/>
+          </a:fillRef>
+          <a:effectRef idx="2">
+            <a:schemeClr val="accent1"/>
+          </a:effectRef>
+          <a:fontRef idx="minor">
+            <a:schemeClr val="lt1"/>
+          </a:fontRef>
+        </p:style>
+        <p:txBody>
+          <a:bodyPr rtlCol="0" anchor="ctr"/>
+          <a:lstStyle/>
+          <a:p>
+            <a:pPr algn="ctr"/>
+          </a:p>
+        </p:txBody>
+      </p:sp>
+      <p:sp>
+        <p:nvSpPr>
+          <p:cNvPr id="5" name="Rounded Rectangle 4"/>
+          <p:cNvSpPr/>
+          <p:nvPr/>
+        </p:nvSpPr>
+        <p:spPr>
+          <a:xfrm>
+            <a:off x="9467850" y="3200400"/>
+            <a:ext cx="381000" cy="381000"/>
+          </a:xfrm>
+          <a:prstGeom prst="roundRect">
+            <a:avLst/>
+          </a:prstGeom>
+          <a:noFill/>
+          <a:ln w="31750">
+            <a:solidFill>
+              <a:srgbClr val="E94D1C"/>
+            </a:solidFill>
+          </a:ln>
+          <a:effectLst/>
+        </p:spPr>
+        <p:style>
+          <a:lnRef idx="1">
+            <a:schemeClr val="accent1"/>
+          </a:lnRef>
+          <a:fillRef idx="3">
+            <a:schemeClr val="accent1"/>
+          </a:fillRef>
+          <a:effectRef idx="2">
+            <a:schemeClr val="accent1"/>
+          </a:effectRef>
+          <a:fontRef idx="minor">
+            <a:schemeClr val="lt1"/>
+          </a:fontRef>
+        </p:style>
+        <p:txBody>
+          <a:bodyPr rtlCol="0" anchor="ctr"/>
+          <a:lstStyle/>
+          <a:p>
+            <a:pPr algn="ctr"/>
+          </a:p>
+        </p:txBody>
+      </p:sp>
+      <p:sp>
+        <p:nvSpPr>
+          <p:cNvPr id="6" name="Rectangle 5"/>
+          <p:cNvSpPr/>
+          <p:nvPr/>
+        </p:nvSpPr>
+        <p:spPr>
+          <a:xfrm>
+            <a:off x="8877300" y="3638550"/>
+            <a:ext cx="1047750" cy="28575"/>
+          </a:xfrm>
+          <a:prstGeom prst="rect">
+            <a:avLst/>
+          </a:prstGeom>
+          <a:solidFill>
+            <a:srgbClr val="E94D1C"/>
+          </a:solidFill>
+          <a:ln>
+            <a:noFill/>
+          </a:ln>
+          <a:effectLst/>
+        </p:spPr>
+        <p:style>
+          <a:lnRef idx="1">
+            <a:schemeClr val="accent1"/>
+          </a:lnRef>
+          <a:fillRef idx="3">
+            <a:schemeClr val="accent1"/>
+          </a:fillRef>
+          <a:effectRef idx="2">
+            <a:schemeClr val="accent1"/>
+          </a:effectRef>
+          <a:fontRef idx="minor">
+            <a:schemeClr val="lt1"/>
+          </a:fontRef>
+        </p:style>
+        <p:txBody>
+          <a:bodyPr rtlCol="0" anchor="ctr"/>
+          <a:lstStyle/>
+          <a:p>
+            <a:pPr algn="ctr"/>
+          </a:p>
+        </p:txBody>
+      </p:sp>
+      <p:sp>
+        <p:nvSpPr>
+          <p:cNvPr id="7" name="TextBox 6"/>
           <p:cNvSpPr txBox="1"/>
           <p:nvPr/>
         </p:nvSpPr>
@@ -24945,7 +25665,7 @@
       </p:sp>
       <p:sp>
         <p:nvSpPr>
-          <p:cNvPr id="4" name="TextBox 3"/>
+          <p:cNvPr id="8" name="TextBox 7"/>
           <p:cNvSpPr txBox="1"/>
           <p:nvPr/>
         </p:nvSpPr>
@@ -24984,7 +25704,7 @@
       </p:sp>
       <p:sp>
         <p:nvSpPr>
-          <p:cNvPr id="5" name="TextBox 4"/>
+          <p:cNvPr id="9" name="TextBox 8"/>
           <p:cNvSpPr txBox="1"/>
           <p:nvPr/>
         </p:nvSpPr>
@@ -25023,7 +25743,7 @@
       </p:sp>
       <p:sp>
         <p:nvSpPr>
-          <p:cNvPr id="6" name="TextBox 5"/>
+          <p:cNvPr id="10" name="TextBox 9"/>
           <p:cNvSpPr txBox="1"/>
           <p:nvPr/>
         </p:nvSpPr>
@@ -25062,7 +25782,7 @@
       </p:sp>
       <p:sp>
         <p:nvSpPr>
-          <p:cNvPr id="7" name="TextBox 6"/>
+          <p:cNvPr id="11" name="TextBox 10"/>
           <p:cNvSpPr txBox="1"/>
           <p:nvPr/>
         </p:nvSpPr>
@@ -25101,7 +25821,7 @@
       </p:sp>
       <p:sp>
         <p:nvSpPr>
-          <p:cNvPr id="8" name="TextBox 7"/>
+          <p:cNvPr id="12" name="TextBox 11"/>
           <p:cNvSpPr txBox="1"/>
           <p:nvPr/>
         </p:nvSpPr>
@@ -25164,9 +25884,33 @@
         <p:nvPr/>
       </p:nvGrpSpPr>
       <p:grpSpPr/>
-      <p:sp>
-        <p:nvSpPr>
-          <p:cNvPr id="2" name="TextBox 1"/>
+      <p:pic>
+        <p:nvPicPr>
+          <p:cNvPr id="2" name="Picture 1" descr="u-azul.png"/>
+          <p:cNvPicPr>
+            <a:picLocks noChangeAspect="1"/>
+          </p:cNvPicPr>
+          <p:nvPr/>
+        </p:nvPicPr>
+        <p:blipFill>
+          <a:blip r:embed="rId2"/>
+          <a:stretch>
+            <a:fillRect/>
+          </a:stretch>
+        </p:blipFill>
+        <p:spPr>
+          <a:xfrm>
+            <a:off x="10744200" y="457200"/>
+            <a:ext cx="342900" cy="342900"/>
+          </a:xfrm>
+          <a:prstGeom prst="rect">
+            <a:avLst/>
+          </a:prstGeom>
+        </p:spPr>
+      </p:pic>
+      <p:sp>
+        <p:nvSpPr>
+          <p:cNvPr id="3" name="TextBox 2"/>
           <p:cNvSpPr txBox="1"/>
           <p:nvPr/>
         </p:nvSpPr>
@@ -25205,14 +25949,14 @@
       </p:sp>
       <p:sp>
         <p:nvSpPr>
-          <p:cNvPr id="3" name="TextBox 2"/>
+          <p:cNvPr id="4" name="TextBox 3"/>
           <p:cNvSpPr txBox="1"/>
           <p:nvPr/>
         </p:nvSpPr>
         <p:spPr>
           <a:xfrm>
             <a:off x="685800" y="838200"/>
-            <a:ext cx="9525000" cy="1524000"/>
+            <a:ext cx="9620250" cy="1524000"/>
           </a:xfrm>
           <a:prstGeom prst="rect">
             <a:avLst/>
@@ -25244,7 +25988,7 @@
       </p:sp>
       <p:sp>
         <p:nvSpPr>
-          <p:cNvPr id="4" name="Rounded Rectangle 3"/>
+          <p:cNvPr id="5" name="Rounded Rectangle 4"/>
           <p:cNvSpPr/>
           <p:nvPr/>
         </p:nvSpPr>
@@ -25290,7 +26034,7 @@
       </p:sp>
       <p:sp>
         <p:nvSpPr>
-          <p:cNvPr id="5" name="Rounded Rectangle 4"/>
+          <p:cNvPr id="6" name="Rounded Rectangle 5"/>
           <p:cNvSpPr/>
           <p:nvPr/>
         </p:nvSpPr>
@@ -25336,7 +26080,7 @@
       </p:sp>
       <p:sp>
         <p:nvSpPr>
-          <p:cNvPr id="6" name="TextBox 5"/>
+          <p:cNvPr id="7" name="TextBox 6"/>
           <p:cNvSpPr txBox="1"/>
           <p:nvPr/>
         </p:nvSpPr>
@@ -25375,7 +26119,7 @@
       </p:sp>
       <p:sp>
         <p:nvSpPr>
-          <p:cNvPr id="7" name="TextBox 6"/>
+          <p:cNvPr id="8" name="TextBox 7"/>
           <p:cNvSpPr txBox="1"/>
           <p:nvPr/>
         </p:nvSpPr>
@@ -25414,7 +26158,7 @@
       </p:sp>
       <p:sp>
         <p:nvSpPr>
-          <p:cNvPr id="8" name="TextBox 7"/>
+          <p:cNvPr id="9" name="TextBox 8"/>
           <p:cNvSpPr txBox="1"/>
           <p:nvPr/>
         </p:nvSpPr>
@@ -25453,7 +26197,7 @@
       </p:sp>
       <p:sp>
         <p:nvSpPr>
-          <p:cNvPr id="9" name="TextBox 8"/>
+          <p:cNvPr id="10" name="TextBox 9"/>
           <p:cNvSpPr txBox="1"/>
           <p:nvPr/>
         </p:nvSpPr>
@@ -25492,7 +26236,7 @@
       </p:sp>
       <p:sp>
         <p:nvSpPr>
-          <p:cNvPr id="10" name="TextBox 9"/>
+          <p:cNvPr id="11" name="TextBox 10"/>
           <p:cNvSpPr txBox="1"/>
           <p:nvPr/>
         </p:nvSpPr>
@@ -25531,7 +26275,7 @@
       </p:sp>
       <p:sp>
         <p:nvSpPr>
-          <p:cNvPr id="11" name="TextBox 10"/>
+          <p:cNvPr id="12" name="TextBox 11"/>
           <p:cNvSpPr txBox="1"/>
           <p:nvPr/>
         </p:nvSpPr>
@@ -25570,7 +26314,7 @@
       </p:sp>
       <p:sp>
         <p:nvSpPr>
-          <p:cNvPr id="12" name="TextBox 11"/>
+          <p:cNvPr id="13" name="TextBox 12"/>
           <p:cNvSpPr txBox="1"/>
           <p:nvPr/>
         </p:nvSpPr>
@@ -25609,7 +26353,7 @@
       </p:sp>
       <p:sp>
         <p:nvSpPr>
-          <p:cNvPr id="13" name="TextBox 12"/>
+          <p:cNvPr id="14" name="TextBox 13"/>
           <p:cNvSpPr txBox="1"/>
           <p:nvPr/>
         </p:nvSpPr>
@@ -25648,7 +26392,7 @@
       </p:sp>
       <p:sp>
         <p:nvSpPr>
-          <p:cNvPr id="14" name="TextBox 13"/>
+          <p:cNvPr id="15" name="TextBox 14"/>
           <p:cNvSpPr txBox="1"/>
           <p:nvPr/>
         </p:nvSpPr>
@@ -25687,7 +26431,7 @@
       </p:sp>
       <p:sp>
         <p:nvSpPr>
-          <p:cNvPr id="15" name="TextBox 14"/>
+          <p:cNvPr id="16" name="TextBox 15"/>
           <p:cNvSpPr txBox="1"/>
           <p:nvPr/>
         </p:nvSpPr>
@@ -25726,7 +26470,7 @@
       </p:sp>
       <p:sp>
         <p:nvSpPr>
-          <p:cNvPr id="16" name="TextBox 15"/>
+          <p:cNvPr id="17" name="TextBox 16"/>
           <p:cNvSpPr txBox="1"/>
           <p:nvPr/>
         </p:nvSpPr>
@@ -25765,7 +26509,7 @@
       </p:sp>
       <p:sp>
         <p:nvSpPr>
-          <p:cNvPr id="17" name="TextBox 16"/>
+          <p:cNvPr id="18" name="TextBox 17"/>
           <p:cNvSpPr txBox="1"/>
           <p:nvPr/>
         </p:nvSpPr>
@@ -25804,7 +26548,7 @@
       </p:sp>
       <p:sp>
         <p:nvSpPr>
-          <p:cNvPr id="18" name="TextBox 17"/>
+          <p:cNvPr id="19" name="TextBox 18"/>
           <p:cNvSpPr txBox="1"/>
           <p:nvPr/>
         </p:nvSpPr>
@@ -25843,7 +26587,7 @@
       </p:sp>
       <p:sp>
         <p:nvSpPr>
-          <p:cNvPr id="19" name="TextBox 18"/>
+          <p:cNvPr id="20" name="TextBox 19"/>
           <p:cNvSpPr txBox="1"/>
           <p:nvPr/>
         </p:nvSpPr>
@@ -25882,7 +26626,7 @@
       </p:sp>
       <p:sp>
         <p:nvSpPr>
-          <p:cNvPr id="20" name="TextBox 19"/>
+          <p:cNvPr id="21" name="TextBox 20"/>
           <p:cNvSpPr txBox="1"/>
           <p:nvPr/>
         </p:nvSpPr>
@@ -25921,7 +26665,7 @@
       </p:sp>
       <p:sp>
         <p:nvSpPr>
-          <p:cNvPr id="21" name="TextBox 20"/>
+          <p:cNvPr id="22" name="TextBox 21"/>
           <p:cNvSpPr txBox="1"/>
           <p:nvPr/>
         </p:nvSpPr>
@@ -25984,9 +26728,33 @@
         <p:nvPr/>
       </p:nvGrpSpPr>
       <p:grpSpPr/>
-      <p:sp>
-        <p:nvSpPr>
-          <p:cNvPr id="2" name="TextBox 1"/>
+      <p:pic>
+        <p:nvPicPr>
+          <p:cNvPr id="2" name="Picture 1" descr="u-branco.png"/>
+          <p:cNvPicPr>
+            <a:picLocks noChangeAspect="1"/>
+          </p:cNvPicPr>
+          <p:nvPr/>
+        </p:nvPicPr>
+        <p:blipFill>
+          <a:blip r:embed="rId2"/>
+          <a:stretch>
+            <a:fillRect/>
+          </a:stretch>
+        </p:blipFill>
+        <p:spPr>
+          <a:xfrm>
+            <a:off x="10744200" y="457200"/>
+            <a:ext cx="342900" cy="342900"/>
+          </a:xfrm>
+          <a:prstGeom prst="rect">
+            <a:avLst/>
+          </a:prstGeom>
+        </p:spPr>
+      </p:pic>
+      <p:sp>
+        <p:nvSpPr>
+          <p:cNvPr id="3" name="TextBox 2"/>
           <p:cNvSpPr txBox="1"/>
           <p:nvPr/>
         </p:nvSpPr>
@@ -26025,7 +26793,7 @@
       </p:sp>
       <p:sp>
         <p:nvSpPr>
-          <p:cNvPr id="3" name="TextBox 2"/>
+          <p:cNvPr id="4" name="TextBox 3"/>
           <p:cNvSpPr txBox="1"/>
           <p:nvPr/>
         </p:nvSpPr>
@@ -26096,7 +26864,7 @@
       </p:sp>
       <p:sp>
         <p:nvSpPr>
-          <p:cNvPr id="4" name="TextBox 3"/>
+          <p:cNvPr id="5" name="TextBox 4"/>
           <p:cNvSpPr txBox="1"/>
           <p:nvPr/>
         </p:nvSpPr>
@@ -26135,7 +26903,7 @@
       </p:sp>
       <p:sp>
         <p:nvSpPr>
-          <p:cNvPr id="5" name="TextBox 4"/>
+          <p:cNvPr id="6" name="TextBox 5"/>
           <p:cNvSpPr txBox="1"/>
           <p:nvPr/>
         </p:nvSpPr>
@@ -26174,7 +26942,7 @@
       </p:sp>
       <p:sp>
         <p:nvSpPr>
-          <p:cNvPr id="6" name="TextBox 5"/>
+          <p:cNvPr id="7" name="TextBox 6"/>
           <p:cNvSpPr txBox="1"/>
           <p:nvPr/>
         </p:nvSpPr>
@@ -26237,9 +27005,33 @@
         <p:nvPr/>
       </p:nvGrpSpPr>
       <p:grpSpPr/>
-      <p:sp>
-        <p:nvSpPr>
-          <p:cNvPr id="2" name="TextBox 1"/>
+      <p:pic>
+        <p:nvPicPr>
+          <p:cNvPr id="2" name="Picture 1" descr="u-azul.png"/>
+          <p:cNvPicPr>
+            <a:picLocks noChangeAspect="1"/>
+          </p:cNvPicPr>
+          <p:nvPr/>
+        </p:nvPicPr>
+        <p:blipFill>
+          <a:blip r:embed="rId2"/>
+          <a:stretch>
+            <a:fillRect/>
+          </a:stretch>
+        </p:blipFill>
+        <p:spPr>
+          <a:xfrm>
+            <a:off x="10744200" y="457200"/>
+            <a:ext cx="342900" cy="342900"/>
+          </a:xfrm>
+          <a:prstGeom prst="rect">
+            <a:avLst/>
+          </a:prstGeom>
+        </p:spPr>
+      </p:pic>
+      <p:sp>
+        <p:nvSpPr>
+          <p:cNvPr id="3" name="TextBox 2"/>
           <p:cNvSpPr txBox="1"/>
           <p:nvPr/>
         </p:nvSpPr>
@@ -26278,14 +27070,14 @@
       </p:sp>
       <p:sp>
         <p:nvSpPr>
-          <p:cNvPr id="3" name="TextBox 2"/>
+          <p:cNvPr id="4" name="TextBox 3"/>
           <p:cNvSpPr txBox="1"/>
           <p:nvPr/>
         </p:nvSpPr>
         <p:spPr>
           <a:xfrm>
             <a:off x="685800" y="838200"/>
-            <a:ext cx="9525000" cy="1524000"/>
+            <a:ext cx="9620250" cy="1524000"/>
           </a:xfrm>
           <a:prstGeom prst="rect">
             <a:avLst/>
@@ -26317,7 +27109,7 @@
       </p:sp>
       <p:sp>
         <p:nvSpPr>
-          <p:cNvPr id="4" name="TextBox 3"/>
+          <p:cNvPr id="5" name="TextBox 4"/>
           <p:cNvSpPr txBox="1"/>
           <p:nvPr/>
         </p:nvSpPr>
@@ -26356,7 +27148,7 @@
       </p:sp>
       <p:sp>
         <p:nvSpPr>
-          <p:cNvPr id="5" name="Rectangle 4"/>
+          <p:cNvPr id="6" name="Rectangle 5"/>
           <p:cNvSpPr/>
           <p:nvPr/>
         </p:nvSpPr>
@@ -26400,7 +27192,7 @@
       </p:sp>
       <p:sp>
         <p:nvSpPr>
-          <p:cNvPr id="6" name="TextBox 5"/>
+          <p:cNvPr id="7" name="TextBox 6"/>
           <p:cNvSpPr txBox="1"/>
           <p:nvPr/>
         </p:nvSpPr>
@@ -26439,7 +27231,7 @@
       </p:sp>
       <p:sp>
         <p:nvSpPr>
-          <p:cNvPr id="7" name="TextBox 6"/>
+          <p:cNvPr id="8" name="TextBox 7"/>
           <p:cNvSpPr txBox="1"/>
           <p:nvPr/>
         </p:nvSpPr>
@@ -26478,7 +27270,7 @@
       </p:sp>
       <p:sp>
         <p:nvSpPr>
-          <p:cNvPr id="8" name="TextBox 7"/>
+          <p:cNvPr id="9" name="TextBox 8"/>
           <p:cNvSpPr txBox="1"/>
           <p:nvPr/>
         </p:nvSpPr>
@@ -26517,7 +27309,7 @@
       </p:sp>
       <p:sp>
         <p:nvSpPr>
-          <p:cNvPr id="9" name="TextBox 8"/>
+          <p:cNvPr id="10" name="TextBox 9"/>
           <p:cNvSpPr txBox="1"/>
           <p:nvPr/>
         </p:nvSpPr>
@@ -26556,7 +27348,7 @@
       </p:sp>
       <p:sp>
         <p:nvSpPr>
-          <p:cNvPr id="10" name="TextBox 9"/>
+          <p:cNvPr id="11" name="TextBox 10"/>
           <p:cNvSpPr txBox="1"/>
           <p:nvPr/>
         </p:nvSpPr>
@@ -26595,7 +27387,7 @@
       </p:sp>
       <p:sp>
         <p:nvSpPr>
-          <p:cNvPr id="11" name="TextBox 10"/>
+          <p:cNvPr id="12" name="TextBox 11"/>
           <p:cNvSpPr txBox="1"/>
           <p:nvPr/>
         </p:nvSpPr>
@@ -26634,7 +27426,7 @@
       </p:sp>
       <p:sp>
         <p:nvSpPr>
-          <p:cNvPr id="12" name="TextBox 11"/>
+          <p:cNvPr id="13" name="TextBox 12"/>
           <p:cNvSpPr txBox="1"/>
           <p:nvPr/>
         </p:nvSpPr>
@@ -26673,7 +27465,7 @@
       </p:sp>
       <p:sp>
         <p:nvSpPr>
-          <p:cNvPr id="13" name="TextBox 12"/>
+          <p:cNvPr id="14" name="TextBox 13"/>
           <p:cNvSpPr txBox="1"/>
           <p:nvPr/>
         </p:nvSpPr>
@@ -26712,7 +27504,7 @@
       </p:sp>
       <p:sp>
         <p:nvSpPr>
-          <p:cNvPr id="14" name="TextBox 13"/>
+          <p:cNvPr id="15" name="TextBox 14"/>
           <p:cNvSpPr txBox="1"/>
           <p:nvPr/>
         </p:nvSpPr>
@@ -26751,7 +27543,7 @@
       </p:sp>
       <p:sp>
         <p:nvSpPr>
-          <p:cNvPr id="15" name="Rectangle 14"/>
+          <p:cNvPr id="16" name="Rectangle 15"/>
           <p:cNvSpPr/>
           <p:nvPr/>
         </p:nvSpPr>
@@ -26795,7 +27587,7 @@
       </p:sp>
       <p:sp>
         <p:nvSpPr>
-          <p:cNvPr id="16" name="TextBox 15"/>
+          <p:cNvPr id="17" name="TextBox 16"/>
           <p:cNvSpPr txBox="1"/>
           <p:nvPr/>
         </p:nvSpPr>
@@ -26834,7 +27626,7 @@
       </p:sp>
       <p:sp>
         <p:nvSpPr>
-          <p:cNvPr id="17" name="TextBox 16"/>
+          <p:cNvPr id="18" name="TextBox 17"/>
           <p:cNvSpPr txBox="1"/>
           <p:nvPr/>
         </p:nvSpPr>
@@ -26873,7 +27665,7 @@
       </p:sp>
       <p:sp>
         <p:nvSpPr>
-          <p:cNvPr id="18" name="TextBox 17"/>
+          <p:cNvPr id="19" name="TextBox 18"/>
           <p:cNvSpPr txBox="1"/>
           <p:nvPr/>
         </p:nvSpPr>
@@ -26912,7 +27704,7 @@
       </p:sp>
       <p:sp>
         <p:nvSpPr>
-          <p:cNvPr id="19" name="TextBox 18"/>
+          <p:cNvPr id="20" name="TextBox 19"/>
           <p:cNvSpPr txBox="1"/>
           <p:nvPr/>
         </p:nvSpPr>
@@ -26951,7 +27743,7 @@
       </p:sp>
       <p:sp>
         <p:nvSpPr>
-          <p:cNvPr id="20" name="TextBox 19"/>
+          <p:cNvPr id="21" name="TextBox 20"/>
           <p:cNvSpPr txBox="1"/>
           <p:nvPr/>
         </p:nvSpPr>
@@ -26990,7 +27782,7 @@
       </p:sp>
       <p:sp>
         <p:nvSpPr>
-          <p:cNvPr id="21" name="TextBox 20"/>
+          <p:cNvPr id="22" name="TextBox 21"/>
           <p:cNvSpPr txBox="1"/>
           <p:nvPr/>
         </p:nvSpPr>
@@ -27029,7 +27821,7 @@
       </p:sp>
       <p:sp>
         <p:nvSpPr>
-          <p:cNvPr id="22" name="TextBox 21"/>
+          <p:cNvPr id="23" name="TextBox 22"/>
           <p:cNvSpPr txBox="1"/>
           <p:nvPr/>
         </p:nvSpPr>
@@ -27068,7 +27860,7 @@
       </p:sp>
       <p:sp>
         <p:nvSpPr>
-          <p:cNvPr id="23" name="TextBox 22"/>
+          <p:cNvPr id="24" name="TextBox 23"/>
           <p:cNvSpPr txBox="1"/>
           <p:nvPr/>
         </p:nvSpPr>
@@ -27107,7 +27899,7 @@
       </p:sp>
       <p:sp>
         <p:nvSpPr>
-          <p:cNvPr id="24" name="TextBox 23"/>
+          <p:cNvPr id="25" name="TextBox 24"/>
           <p:cNvSpPr txBox="1"/>
           <p:nvPr/>
         </p:nvSpPr>
@@ -27146,7 +27938,7 @@
       </p:sp>
       <p:sp>
         <p:nvSpPr>
-          <p:cNvPr id="25" name="TextBox 24"/>
+          <p:cNvPr id="26" name="TextBox 25"/>
           <p:cNvSpPr txBox="1"/>
           <p:nvPr/>
         </p:nvSpPr>
@@ -27209,9 +28001,33 @@
         <p:nvPr/>
       </p:nvGrpSpPr>
       <p:grpSpPr/>
-      <p:sp>
-        <p:nvSpPr>
-          <p:cNvPr id="2" name="TextBox 1"/>
+      <p:pic>
+        <p:nvPicPr>
+          <p:cNvPr id="2" name="Picture 1" descr="u-azul.png"/>
+          <p:cNvPicPr>
+            <a:picLocks noChangeAspect="1"/>
+          </p:cNvPicPr>
+          <p:nvPr/>
+        </p:nvPicPr>
+        <p:blipFill>
+          <a:blip r:embed="rId2"/>
+          <a:stretch>
+            <a:fillRect/>
+          </a:stretch>
+        </p:blipFill>
+        <p:spPr>
+          <a:xfrm>
+            <a:off x="10744200" y="457200"/>
+            <a:ext cx="342900" cy="342900"/>
+          </a:xfrm>
+          <a:prstGeom prst="rect">
+            <a:avLst/>
+          </a:prstGeom>
+        </p:spPr>
+      </p:pic>
+      <p:sp>
+        <p:nvSpPr>
+          <p:cNvPr id="3" name="TextBox 2"/>
           <p:cNvSpPr txBox="1"/>
           <p:nvPr/>
         </p:nvSpPr>
@@ -27250,14 +28066,14 @@
       </p:sp>
       <p:sp>
         <p:nvSpPr>
-          <p:cNvPr id="3" name="TextBox 2"/>
+          <p:cNvPr id="4" name="TextBox 3"/>
           <p:cNvSpPr txBox="1"/>
           <p:nvPr/>
         </p:nvSpPr>
         <p:spPr>
           <a:xfrm>
             <a:off x="685800" y="838200"/>
-            <a:ext cx="9525000" cy="1524000"/>
+            <a:ext cx="9620250" cy="1524000"/>
           </a:xfrm>
           <a:prstGeom prst="rect">
             <a:avLst/>
@@ -27289,7 +28105,7 @@
       </p:sp>
       <p:sp>
         <p:nvSpPr>
-          <p:cNvPr id="4" name="TextBox 3"/>
+          <p:cNvPr id="5" name="TextBox 4"/>
           <p:cNvSpPr txBox="1"/>
           <p:nvPr/>
         </p:nvSpPr>
@@ -27328,7 +28144,7 @@
       </p:sp>
       <p:sp>
         <p:nvSpPr>
-          <p:cNvPr id="5" name="TextBox 4"/>
+          <p:cNvPr id="6" name="TextBox 5"/>
           <p:cNvSpPr txBox="1"/>
           <p:nvPr/>
         </p:nvSpPr>
@@ -27367,7 +28183,7 @@
       </p:sp>
       <p:sp>
         <p:nvSpPr>
-          <p:cNvPr id="6" name="TextBox 5"/>
+          <p:cNvPr id="7" name="TextBox 6"/>
           <p:cNvSpPr txBox="1"/>
           <p:nvPr/>
         </p:nvSpPr>
@@ -27406,7 +28222,7 @@
       </p:sp>
       <p:sp>
         <p:nvSpPr>
-          <p:cNvPr id="7" name="TextBox 6"/>
+          <p:cNvPr id="8" name="TextBox 7"/>
           <p:cNvSpPr txBox="1"/>
           <p:nvPr/>
         </p:nvSpPr>
@@ -27445,7 +28261,7 @@
       </p:sp>
       <p:sp>
         <p:nvSpPr>
-          <p:cNvPr id="8" name="TextBox 7"/>
+          <p:cNvPr id="9" name="TextBox 8"/>
           <p:cNvSpPr txBox="1"/>
           <p:nvPr/>
         </p:nvSpPr>
@@ -27484,7 +28300,7 @@
       </p:sp>
       <p:sp>
         <p:nvSpPr>
-          <p:cNvPr id="9" name="TextBox 8"/>
+          <p:cNvPr id="10" name="TextBox 9"/>
           <p:cNvSpPr txBox="1"/>
           <p:nvPr/>
         </p:nvSpPr>
@@ -27523,7 +28339,7 @@
       </p:sp>
       <p:sp>
         <p:nvSpPr>
-          <p:cNvPr id="10" name="TextBox 9"/>
+          <p:cNvPr id="11" name="TextBox 10"/>
           <p:cNvSpPr txBox="1"/>
           <p:nvPr/>
         </p:nvSpPr>
@@ -27562,7 +28378,7 @@
       </p:sp>
       <p:sp>
         <p:nvSpPr>
-          <p:cNvPr id="11" name="TextBox 10"/>
+          <p:cNvPr id="12" name="TextBox 11"/>
           <p:cNvSpPr txBox="1"/>
           <p:nvPr/>
         </p:nvSpPr>
@@ -27601,7 +28417,7 @@
       </p:sp>
       <p:sp>
         <p:nvSpPr>
-          <p:cNvPr id="12" name="TextBox 11"/>
+          <p:cNvPr id="13" name="TextBox 12"/>
           <p:cNvSpPr txBox="1"/>
           <p:nvPr/>
         </p:nvSpPr>
@@ -27640,7 +28456,7 @@
       </p:sp>
       <p:sp>
         <p:nvSpPr>
-          <p:cNvPr id="13" name="TextBox 12"/>
+          <p:cNvPr id="14" name="TextBox 13"/>
           <p:cNvSpPr txBox="1"/>
           <p:nvPr/>
         </p:nvSpPr>
@@ -27679,23 +28495,23 @@
       </p:sp>
       <p:sp>
         <p:nvSpPr>
-          <p:cNvPr id="14" name="Rectangle 13"/>
+          <p:cNvPr id="15" name="Isosceles Triangle 14"/>
           <p:cNvSpPr/>
           <p:nvPr/>
         </p:nvSpPr>
         <p:spPr>
           <a:xfrm>
             <a:off x="9124950" y="2000250"/>
-            <a:ext cx="28575" cy="876300"/>
-          </a:xfrm>
-          <a:prstGeom prst="rect">
-            <a:avLst/>
-          </a:prstGeom>
-          <a:solidFill>
-            <a:srgbClr val="E94D1C"/>
-          </a:solidFill>
-          <a:ln>
-            <a:noFill/>
+            <a:ext cx="152400" cy="133350"/>
+          </a:xfrm>
+          <a:prstGeom prst="triangle">
+            <a:avLst/>
+          </a:prstGeom>
+          <a:noFill/>
+          <a:ln w="19050">
+            <a:solidFill>
+              <a:srgbClr val="E94D1C"/>
+            </a:solidFill>
           </a:ln>
           <a:effectLst/>
         </p:spPr>
@@ -27714,6 +28530,133 @@
           </a:fontRef>
         </p:style>
         <p:txBody>
+          <a:bodyPr rtlCol="0" anchor="ctr"/>
+          <a:lstStyle/>
+          <a:p>
+            <a:pPr algn="ctr"/>
+          </a:p>
+        </p:txBody>
+      </p:sp>
+      <p:sp>
+        <p:nvSpPr>
+          <p:cNvPr id="16" name="Rectangle 15"/>
+          <p:cNvSpPr/>
+          <p:nvPr/>
+        </p:nvSpPr>
+        <p:spPr>
+          <a:xfrm>
+            <a:off x="9193530" y="2057400"/>
+            <a:ext cx="15240" cy="38100"/>
+          </a:xfrm>
+          <a:prstGeom prst="rect">
+            <a:avLst/>
+          </a:prstGeom>
+          <a:solidFill>
+            <a:srgbClr val="E94D1C"/>
+          </a:solidFill>
+          <a:ln>
+            <a:noFill/>
+          </a:ln>
+          <a:effectLst/>
+        </p:spPr>
+        <p:style>
+          <a:lnRef idx="1">
+            <a:schemeClr val="accent1"/>
+          </a:lnRef>
+          <a:fillRef idx="3">
+            <a:schemeClr val="accent1"/>
+          </a:fillRef>
+          <a:effectRef idx="2">
+            <a:schemeClr val="accent1"/>
+          </a:effectRef>
+          <a:fontRef idx="minor">
+            <a:schemeClr val="lt1"/>
+          </a:fontRef>
+        </p:style>
+        <p:txBody>
+          <a:bodyPr rtlCol="0" anchor="ctr"/>
+          <a:lstStyle/>
+          <a:p>
+            <a:pPr algn="ctr"/>
+          </a:p>
+        </p:txBody>
+      </p:sp>
+      <p:sp>
+        <p:nvSpPr>
+          <p:cNvPr id="17" name="TextBox 16"/>
+          <p:cNvSpPr txBox="1"/>
+          <p:nvPr/>
+        </p:nvSpPr>
+        <p:spPr>
+          <a:xfrm>
+            <a:off x="9353550" y="2009775"/>
+            <a:ext cx="2152650" cy="167640"/>
+          </a:xfrm>
+          <a:prstGeom prst="rect">
+            <a:avLst/>
+          </a:prstGeom>
+          <a:noFill/>
+        </p:spPr>
+        <p:txBody>
+          <a:bodyPr wrap="square" lIns="0" rIns="0" tIns="0" bIns="0" anchor="t">
+            <a:spAutoFit/>
+          </a:bodyPr>
+          <a:lstStyle/>
+          <a:p>
+            <a:pPr algn="l">
+              <a:lnSpc>
+                <a:spcPct val="120000"/>
+              </a:lnSpc>
+            </a:pPr>
+            <a:r>
+              <a:rPr sz="819" b="1" i="0" spc="120">
+                <a:solidFill>
+                  <a:srgbClr val="E94D1C"/>
+                </a:solidFill>
+                <a:latin typeface="Roboto"/>
+              </a:rPr>
+              <a:t>REGRA</a:t>
+            </a:r>
+          </a:p>
+        </p:txBody>
+      </p:sp>
+      <p:sp>
+        <p:nvSpPr>
+          <p:cNvPr id="18" name="Rectangle 17"/>
+          <p:cNvSpPr/>
+          <p:nvPr/>
+        </p:nvSpPr>
+        <p:spPr>
+          <a:xfrm>
+            <a:off x="9124950" y="2247900"/>
+            <a:ext cx="28575" cy="628650"/>
+          </a:xfrm>
+          <a:prstGeom prst="rect">
+            <a:avLst/>
+          </a:prstGeom>
+          <a:solidFill>
+            <a:srgbClr val="E94D1C"/>
+          </a:solidFill>
+          <a:ln>
+            <a:noFill/>
+          </a:ln>
+          <a:effectLst/>
+        </p:spPr>
+        <p:style>
+          <a:lnRef idx="1">
+            <a:schemeClr val="accent1"/>
+          </a:lnRef>
+          <a:fillRef idx="3">
+            <a:schemeClr val="accent1"/>
+          </a:fillRef>
+          <a:effectRef idx="2">
+            <a:schemeClr val="accent1"/>
+          </a:effectRef>
+          <a:fontRef idx="minor">
+            <a:schemeClr val="lt1"/>
+          </a:fontRef>
+        </p:style>
+        <p:txBody>
           <a:bodyPr rtlCol="0" anchor="ctr" wrap="square" lIns="0" rIns="0" tIns="0" bIns="0"/>
           <a:lstStyle/>
           <a:p>
@@ -27723,52 +28666,13 @@
       </p:sp>
       <p:sp>
         <p:nvSpPr>
-          <p:cNvPr id="15" name="TextBox 14"/>
-          <p:cNvSpPr txBox="1"/>
-          <p:nvPr/>
-        </p:nvSpPr>
-        <p:spPr>
-          <a:xfrm>
-            <a:off x="9286875" y="2000250"/>
-            <a:ext cx="2219325" cy="167640"/>
-          </a:xfrm>
-          <a:prstGeom prst="rect">
-            <a:avLst/>
-          </a:prstGeom>
-          <a:noFill/>
-        </p:spPr>
-        <p:txBody>
-          <a:bodyPr wrap="square" lIns="0" rIns="0" tIns="0" bIns="0" anchor="t">
-            <a:spAutoFit/>
-          </a:bodyPr>
-          <a:lstStyle/>
-          <a:p>
-            <a:pPr algn="l">
-              <a:lnSpc>
-                <a:spcPct val="120000"/>
-              </a:lnSpc>
-            </a:pPr>
-            <a:r>
-              <a:rPr sz="819" b="1" i="0" spc="120">
-                <a:solidFill>
-                  <a:srgbClr val="E94D1C"/>
-                </a:solidFill>
-                <a:latin typeface="Roboto"/>
-              </a:rPr>
-              <a:t>REGRA</a:t>
-            </a:r>
-          </a:p>
-        </p:txBody>
-      </p:sp>
-      <p:sp>
-        <p:nvSpPr>
-          <p:cNvPr id="16" name="TextBox 15"/>
-          <p:cNvSpPr txBox="1"/>
-          <p:nvPr/>
-        </p:nvSpPr>
-        <p:spPr>
-          <a:xfrm>
-            <a:off x="9286875" y="2209800"/>
+          <p:cNvPr id="19" name="TextBox 18"/>
+          <p:cNvSpPr txBox="1"/>
+          <p:nvPr/>
+        </p:nvSpPr>
+        <p:spPr>
+          <a:xfrm>
+            <a:off x="9286875" y="2286000"/>
             <a:ext cx="2219325" cy="2286000"/>
           </a:xfrm>
           <a:prstGeom prst="rect">
@@ -27804,7 +28708,7 @@
       </p:sp>
       <p:sp>
         <p:nvSpPr>
-          <p:cNvPr id="17" name="TextBox 16"/>
+          <p:cNvPr id="20" name="TextBox 19"/>
           <p:cNvSpPr txBox="1"/>
           <p:nvPr/>
         </p:nvSpPr>
@@ -27843,7 +28747,7 @@
       </p:sp>
       <p:sp>
         <p:nvSpPr>
-          <p:cNvPr id="18" name="TextBox 17"/>
+          <p:cNvPr id="21" name="TextBox 20"/>
           <p:cNvSpPr txBox="1"/>
           <p:nvPr/>
         </p:nvSpPr>
@@ -27906,9 +28810,33 @@
         <p:nvPr/>
       </p:nvGrpSpPr>
       <p:grpSpPr/>
-      <p:sp>
-        <p:nvSpPr>
-          <p:cNvPr id="2" name="TextBox 1"/>
+      <p:pic>
+        <p:nvPicPr>
+          <p:cNvPr id="2" name="Picture 1" descr="u-azul.png"/>
+          <p:cNvPicPr>
+            <a:picLocks noChangeAspect="1"/>
+          </p:cNvPicPr>
+          <p:nvPr/>
+        </p:nvPicPr>
+        <p:blipFill>
+          <a:blip r:embed="rId2"/>
+          <a:stretch>
+            <a:fillRect/>
+          </a:stretch>
+        </p:blipFill>
+        <p:spPr>
+          <a:xfrm>
+            <a:off x="10744200" y="457200"/>
+            <a:ext cx="342900" cy="342900"/>
+          </a:xfrm>
+          <a:prstGeom prst="rect">
+            <a:avLst/>
+          </a:prstGeom>
+        </p:spPr>
+      </p:pic>
+      <p:sp>
+        <p:nvSpPr>
+          <p:cNvPr id="3" name="TextBox 2"/>
           <p:cNvSpPr txBox="1"/>
           <p:nvPr/>
         </p:nvSpPr>
@@ -27947,14 +28875,14 @@
       </p:sp>
       <p:sp>
         <p:nvSpPr>
-          <p:cNvPr id="3" name="TextBox 2"/>
+          <p:cNvPr id="4" name="TextBox 3"/>
           <p:cNvSpPr txBox="1"/>
           <p:nvPr/>
         </p:nvSpPr>
         <p:spPr>
           <a:xfrm>
             <a:off x="685800" y="838200"/>
-            <a:ext cx="9525000" cy="1524000"/>
+            <a:ext cx="9620250" cy="1524000"/>
           </a:xfrm>
           <a:prstGeom prst="rect">
             <a:avLst/>
@@ -28018,7 +28946,7 @@
       </p:sp>
       <p:sp>
         <p:nvSpPr>
-          <p:cNvPr id="4" name="TextBox 3"/>
+          <p:cNvPr id="5" name="TextBox 4"/>
           <p:cNvSpPr txBox="1"/>
           <p:nvPr/>
         </p:nvSpPr>
@@ -28057,7 +28985,7 @@
       </p:sp>
       <p:sp>
         <p:nvSpPr>
-          <p:cNvPr id="5" name="Rectangle 4"/>
+          <p:cNvPr id="6" name="Rectangle 5"/>
           <p:cNvSpPr/>
           <p:nvPr/>
         </p:nvSpPr>
@@ -28101,7 +29029,7 @@
       </p:sp>
       <p:sp>
         <p:nvSpPr>
-          <p:cNvPr id="6" name="TextBox 5"/>
+          <p:cNvPr id="7" name="TextBox 6"/>
           <p:cNvSpPr txBox="1"/>
           <p:nvPr/>
         </p:nvSpPr>
@@ -28140,7 +29068,7 @@
       </p:sp>
       <p:sp>
         <p:nvSpPr>
-          <p:cNvPr id="7" name="TextBox 6"/>
+          <p:cNvPr id="8" name="TextBox 7"/>
           <p:cNvSpPr txBox="1"/>
           <p:nvPr/>
         </p:nvSpPr>
@@ -28179,7 +29107,7 @@
       </p:sp>
       <p:sp>
         <p:nvSpPr>
-          <p:cNvPr id="8" name="TextBox 7"/>
+          <p:cNvPr id="9" name="TextBox 8"/>
           <p:cNvSpPr txBox="1"/>
           <p:nvPr/>
         </p:nvSpPr>
@@ -28218,7 +29146,7 @@
       </p:sp>
       <p:sp>
         <p:nvSpPr>
-          <p:cNvPr id="9" name="TextBox 8"/>
+          <p:cNvPr id="10" name="TextBox 9"/>
           <p:cNvSpPr txBox="1"/>
           <p:nvPr/>
         </p:nvSpPr>
@@ -28257,7 +29185,7 @@
       </p:sp>
       <p:sp>
         <p:nvSpPr>
-          <p:cNvPr id="10" name="TextBox 9"/>
+          <p:cNvPr id="11" name="TextBox 10"/>
           <p:cNvSpPr txBox="1"/>
           <p:nvPr/>
         </p:nvSpPr>
@@ -28296,7 +29224,7 @@
       </p:sp>
       <p:sp>
         <p:nvSpPr>
-          <p:cNvPr id="11" name="TextBox 10"/>
+          <p:cNvPr id="12" name="TextBox 11"/>
           <p:cNvSpPr txBox="1"/>
           <p:nvPr/>
         </p:nvSpPr>
@@ -28335,7 +29263,7 @@
       </p:sp>
       <p:sp>
         <p:nvSpPr>
-          <p:cNvPr id="12" name="TextBox 11"/>
+          <p:cNvPr id="13" name="TextBox 12"/>
           <p:cNvSpPr txBox="1"/>
           <p:nvPr/>
         </p:nvSpPr>
@@ -28374,7 +29302,7 @@
       </p:sp>
       <p:sp>
         <p:nvSpPr>
-          <p:cNvPr id="13" name="Rectangle 12"/>
+          <p:cNvPr id="14" name="Rectangle 13"/>
           <p:cNvSpPr/>
           <p:nvPr/>
         </p:nvSpPr>
@@ -28418,7 +29346,7 @@
       </p:sp>
       <p:sp>
         <p:nvSpPr>
-          <p:cNvPr id="14" name="TextBox 13"/>
+          <p:cNvPr id="15" name="TextBox 14"/>
           <p:cNvSpPr txBox="1"/>
           <p:nvPr/>
         </p:nvSpPr>
@@ -28457,7 +29385,7 @@
       </p:sp>
       <p:sp>
         <p:nvSpPr>
-          <p:cNvPr id="15" name="TextBox 14"/>
+          <p:cNvPr id="16" name="TextBox 15"/>
           <p:cNvSpPr txBox="1"/>
           <p:nvPr/>
         </p:nvSpPr>
@@ -28496,7 +29424,7 @@
       </p:sp>
       <p:sp>
         <p:nvSpPr>
-          <p:cNvPr id="16" name="TextBox 15"/>
+          <p:cNvPr id="17" name="TextBox 16"/>
           <p:cNvSpPr txBox="1"/>
           <p:nvPr/>
         </p:nvSpPr>
@@ -28535,7 +29463,7 @@
       </p:sp>
       <p:sp>
         <p:nvSpPr>
-          <p:cNvPr id="17" name="TextBox 16"/>
+          <p:cNvPr id="18" name="TextBox 17"/>
           <p:cNvSpPr txBox="1"/>
           <p:nvPr/>
         </p:nvSpPr>
@@ -28574,7 +29502,7 @@
       </p:sp>
       <p:sp>
         <p:nvSpPr>
-          <p:cNvPr id="18" name="TextBox 17"/>
+          <p:cNvPr id="19" name="TextBox 18"/>
           <p:cNvSpPr txBox="1"/>
           <p:nvPr/>
         </p:nvSpPr>
@@ -28613,7 +29541,7 @@
       </p:sp>
       <p:sp>
         <p:nvSpPr>
-          <p:cNvPr id="19" name="TextBox 18"/>
+          <p:cNvPr id="20" name="TextBox 19"/>
           <p:cNvSpPr txBox="1"/>
           <p:nvPr/>
         </p:nvSpPr>
@@ -28652,7 +29580,7 @@
       </p:sp>
       <p:sp>
         <p:nvSpPr>
-          <p:cNvPr id="20" name="TextBox 19"/>
+          <p:cNvPr id="21" name="TextBox 20"/>
           <p:cNvSpPr txBox="1"/>
           <p:nvPr/>
         </p:nvSpPr>
@@ -28691,7 +29619,7 @@
       </p:sp>
       <p:sp>
         <p:nvSpPr>
-          <p:cNvPr id="21" name="TextBox 20"/>
+          <p:cNvPr id="22" name="TextBox 21"/>
           <p:cNvSpPr txBox="1"/>
           <p:nvPr/>
         </p:nvSpPr>
@@ -28754,9 +29682,33 @@
         <p:nvPr/>
       </p:nvGrpSpPr>
       <p:grpSpPr/>
-      <p:sp>
-        <p:nvSpPr>
-          <p:cNvPr id="2" name="TextBox 1"/>
+      <p:pic>
+        <p:nvPicPr>
+          <p:cNvPr id="2" name="Picture 1" descr="u-azul.png"/>
+          <p:cNvPicPr>
+            <a:picLocks noChangeAspect="1"/>
+          </p:cNvPicPr>
+          <p:nvPr/>
+        </p:nvPicPr>
+        <p:blipFill>
+          <a:blip r:embed="rId2"/>
+          <a:stretch>
+            <a:fillRect/>
+          </a:stretch>
+        </p:blipFill>
+        <p:spPr>
+          <a:xfrm>
+            <a:off x="10744200" y="457200"/>
+            <a:ext cx="342900" cy="342900"/>
+          </a:xfrm>
+          <a:prstGeom prst="rect">
+            <a:avLst/>
+          </a:prstGeom>
+        </p:spPr>
+      </p:pic>
+      <p:sp>
+        <p:nvSpPr>
+          <p:cNvPr id="3" name="TextBox 2"/>
           <p:cNvSpPr txBox="1"/>
           <p:nvPr/>
         </p:nvSpPr>
@@ -28795,14 +29747,14 @@
       </p:sp>
       <p:sp>
         <p:nvSpPr>
-          <p:cNvPr id="3" name="TextBox 2"/>
+          <p:cNvPr id="4" name="TextBox 3"/>
           <p:cNvSpPr txBox="1"/>
           <p:nvPr/>
         </p:nvSpPr>
         <p:spPr>
           <a:xfrm>
             <a:off x="685800" y="838200"/>
-            <a:ext cx="9525000" cy="1524000"/>
+            <a:ext cx="9620250" cy="1524000"/>
           </a:xfrm>
           <a:prstGeom prst="rect">
             <a:avLst/>
@@ -28850,7 +29802,7 @@
       </p:sp>
       <p:sp>
         <p:nvSpPr>
-          <p:cNvPr id="4" name="TextBox 3"/>
+          <p:cNvPr id="5" name="TextBox 4"/>
           <p:cNvSpPr txBox="1"/>
           <p:nvPr/>
         </p:nvSpPr>
@@ -28889,7 +29841,7 @@
       </p:sp>
       <p:sp>
         <p:nvSpPr>
-          <p:cNvPr id="5" name="TextBox 4"/>
+          <p:cNvPr id="6" name="TextBox 5"/>
           <p:cNvSpPr txBox="1"/>
           <p:nvPr/>
         </p:nvSpPr>
@@ -28937,7 +29889,7 @@
       </p:sp>
       <p:sp>
         <p:nvSpPr>
-          <p:cNvPr id="6" name="TextBox 5"/>
+          <p:cNvPr id="7" name="TextBox 6"/>
           <p:cNvSpPr txBox="1"/>
           <p:nvPr/>
         </p:nvSpPr>
@@ -28976,7 +29928,7 @@
       </p:sp>
       <p:sp>
         <p:nvSpPr>
-          <p:cNvPr id="7" name="TextBox 6"/>
+          <p:cNvPr id="8" name="TextBox 7"/>
           <p:cNvSpPr txBox="1"/>
           <p:nvPr/>
         </p:nvSpPr>
@@ -29024,7 +29976,7 @@
       </p:sp>
       <p:sp>
         <p:nvSpPr>
-          <p:cNvPr id="8" name="TextBox 7"/>
+          <p:cNvPr id="9" name="TextBox 8"/>
           <p:cNvSpPr txBox="1"/>
           <p:nvPr/>
         </p:nvSpPr>
@@ -29063,7 +30015,7 @@
       </p:sp>
       <p:sp>
         <p:nvSpPr>
-          <p:cNvPr id="9" name="TextBox 8"/>
+          <p:cNvPr id="10" name="TextBox 9"/>
           <p:cNvSpPr txBox="1"/>
           <p:nvPr/>
         </p:nvSpPr>
@@ -29111,23 +30063,23 @@
       </p:sp>
       <p:sp>
         <p:nvSpPr>
-          <p:cNvPr id="10" name="Rectangle 9"/>
+          <p:cNvPr id="11" name="Document 10"/>
           <p:cNvSpPr/>
           <p:nvPr/>
         </p:nvSpPr>
         <p:spPr>
           <a:xfrm>
             <a:off x="9124950" y="2000250"/>
-            <a:ext cx="28575" cy="876300"/>
-          </a:xfrm>
-          <a:prstGeom prst="rect">
-            <a:avLst/>
-          </a:prstGeom>
-          <a:solidFill>
-            <a:srgbClr val="E94D1C"/>
-          </a:solidFill>
-          <a:ln>
-            <a:noFill/>
+            <a:ext cx="142875" cy="133350"/>
+          </a:xfrm>
+          <a:prstGeom prst="flowChartDocument">
+            <a:avLst/>
+          </a:prstGeom>
+          <a:noFill/>
+          <a:ln w="19050">
+            <a:solidFill>
+              <a:srgbClr val="E94D1C"/>
+            </a:solidFill>
           </a:ln>
           <a:effectLst/>
         </p:spPr>
@@ -29146,6 +30098,89 @@
           </a:fontRef>
         </p:style>
         <p:txBody>
+          <a:bodyPr rtlCol="0" anchor="ctr"/>
+          <a:lstStyle/>
+          <a:p>
+            <a:pPr algn="ctr"/>
+          </a:p>
+        </p:txBody>
+      </p:sp>
+      <p:sp>
+        <p:nvSpPr>
+          <p:cNvPr id="12" name="TextBox 11"/>
+          <p:cNvSpPr txBox="1"/>
+          <p:nvPr/>
+        </p:nvSpPr>
+        <p:spPr>
+          <a:xfrm>
+            <a:off x="9353550" y="2009775"/>
+            <a:ext cx="2152650" cy="167640"/>
+          </a:xfrm>
+          <a:prstGeom prst="rect">
+            <a:avLst/>
+          </a:prstGeom>
+          <a:noFill/>
+        </p:spPr>
+        <p:txBody>
+          <a:bodyPr wrap="square" lIns="0" rIns="0" tIns="0" bIns="0" anchor="t">
+            <a:spAutoFit/>
+          </a:bodyPr>
+          <a:lstStyle/>
+          <a:p>
+            <a:pPr algn="l">
+              <a:lnSpc>
+                <a:spcPct val="120000"/>
+              </a:lnSpc>
+            </a:pPr>
+            <a:r>
+              <a:rPr sz="819" b="1" i="0" spc="120">
+                <a:solidFill>
+                  <a:srgbClr val="E94D1C"/>
+                </a:solidFill>
+                <a:latin typeface="Roboto"/>
+              </a:rPr>
+              <a:t>FONTE</a:t>
+            </a:r>
+          </a:p>
+        </p:txBody>
+      </p:sp>
+      <p:sp>
+        <p:nvSpPr>
+          <p:cNvPr id="13" name="Rectangle 12"/>
+          <p:cNvSpPr/>
+          <p:nvPr/>
+        </p:nvSpPr>
+        <p:spPr>
+          <a:xfrm>
+            <a:off x="9124950" y="2247900"/>
+            <a:ext cx="28575" cy="628650"/>
+          </a:xfrm>
+          <a:prstGeom prst="rect">
+            <a:avLst/>
+          </a:prstGeom>
+          <a:solidFill>
+            <a:srgbClr val="E94D1C"/>
+          </a:solidFill>
+          <a:ln>
+            <a:noFill/>
+          </a:ln>
+          <a:effectLst/>
+        </p:spPr>
+        <p:style>
+          <a:lnRef idx="1">
+            <a:schemeClr val="accent1"/>
+          </a:lnRef>
+          <a:fillRef idx="3">
+            <a:schemeClr val="accent1"/>
+          </a:fillRef>
+          <a:effectRef idx="2">
+            <a:schemeClr val="accent1"/>
+          </a:effectRef>
+          <a:fontRef idx="minor">
+            <a:schemeClr val="lt1"/>
+          </a:fontRef>
+        </p:style>
+        <p:txBody>
           <a:bodyPr rtlCol="0" anchor="ctr" wrap="square" lIns="0" rIns="0" tIns="0" bIns="0"/>
           <a:lstStyle/>
           <a:p>
@@ -29155,52 +30190,13 @@
       </p:sp>
       <p:sp>
         <p:nvSpPr>
-          <p:cNvPr id="11" name="TextBox 10"/>
-          <p:cNvSpPr txBox="1"/>
-          <p:nvPr/>
-        </p:nvSpPr>
-        <p:spPr>
-          <a:xfrm>
-            <a:off x="9286875" y="2000250"/>
-            <a:ext cx="2219325" cy="167640"/>
-          </a:xfrm>
-          <a:prstGeom prst="rect">
-            <a:avLst/>
-          </a:prstGeom>
-          <a:noFill/>
-        </p:spPr>
-        <p:txBody>
-          <a:bodyPr wrap="square" lIns="0" rIns="0" tIns="0" bIns="0" anchor="t">
-            <a:spAutoFit/>
-          </a:bodyPr>
-          <a:lstStyle/>
-          <a:p>
-            <a:pPr algn="l">
-              <a:lnSpc>
-                <a:spcPct val="120000"/>
-              </a:lnSpc>
-            </a:pPr>
-            <a:r>
-              <a:rPr sz="819" b="1" i="0" spc="120">
-                <a:solidFill>
-                  <a:srgbClr val="E94D1C"/>
-                </a:solidFill>
-                <a:latin typeface="Roboto"/>
-              </a:rPr>
-              <a:t>FONTE</a:t>
-            </a:r>
-          </a:p>
-        </p:txBody>
-      </p:sp>
-      <p:sp>
-        <p:nvSpPr>
-          <p:cNvPr id="12" name="TextBox 11"/>
-          <p:cNvSpPr txBox="1"/>
-          <p:nvPr/>
-        </p:nvSpPr>
-        <p:spPr>
-          <a:xfrm>
-            <a:off x="9286875" y="2209800"/>
+          <p:cNvPr id="14" name="TextBox 13"/>
+          <p:cNvSpPr txBox="1"/>
+          <p:nvPr/>
+        </p:nvSpPr>
+        <p:spPr>
+          <a:xfrm>
+            <a:off x="9286875" y="2286000"/>
             <a:ext cx="2219325" cy="2286000"/>
           </a:xfrm>
           <a:prstGeom prst="rect">
@@ -29236,7 +30232,7 @@
       </p:sp>
       <p:sp>
         <p:nvSpPr>
-          <p:cNvPr id="13" name="TextBox 12"/>
+          <p:cNvPr id="15" name="TextBox 14"/>
           <p:cNvSpPr txBox="1"/>
           <p:nvPr/>
         </p:nvSpPr>
@@ -29275,7 +30271,7 @@
       </p:sp>
       <p:sp>
         <p:nvSpPr>
-          <p:cNvPr id="14" name="TextBox 13"/>
+          <p:cNvPr id="16" name="TextBox 15"/>
           <p:cNvSpPr txBox="1"/>
           <p:nvPr/>
         </p:nvSpPr>
@@ -29338,9 +30334,33 @@
         <p:nvPr/>
       </p:nvGrpSpPr>
       <p:grpSpPr/>
-      <p:sp>
-        <p:nvSpPr>
-          <p:cNvPr id="2" name="TextBox 1"/>
+      <p:pic>
+        <p:nvPicPr>
+          <p:cNvPr id="2" name="Picture 1" descr="u-azul.png"/>
+          <p:cNvPicPr>
+            <a:picLocks noChangeAspect="1"/>
+          </p:cNvPicPr>
+          <p:nvPr/>
+        </p:nvPicPr>
+        <p:blipFill>
+          <a:blip r:embed="rId2"/>
+          <a:stretch>
+            <a:fillRect/>
+          </a:stretch>
+        </p:blipFill>
+        <p:spPr>
+          <a:xfrm>
+            <a:off x="10744200" y="457200"/>
+            <a:ext cx="342900" cy="342900"/>
+          </a:xfrm>
+          <a:prstGeom prst="rect">
+            <a:avLst/>
+          </a:prstGeom>
+        </p:spPr>
+      </p:pic>
+      <p:sp>
+        <p:nvSpPr>
+          <p:cNvPr id="3" name="TextBox 2"/>
           <p:cNvSpPr txBox="1"/>
           <p:nvPr/>
         </p:nvSpPr>
@@ -29379,14 +30399,14 @@
       </p:sp>
       <p:sp>
         <p:nvSpPr>
-          <p:cNvPr id="3" name="TextBox 2"/>
+          <p:cNvPr id="4" name="TextBox 3"/>
           <p:cNvSpPr txBox="1"/>
           <p:nvPr/>
         </p:nvSpPr>
         <p:spPr>
           <a:xfrm>
             <a:off x="685800" y="838200"/>
-            <a:ext cx="9525000" cy="1524000"/>
+            <a:ext cx="9620250" cy="1524000"/>
           </a:xfrm>
           <a:prstGeom prst="rect">
             <a:avLst/>
@@ -29418,7 +30438,7 @@
       </p:sp>
       <p:sp>
         <p:nvSpPr>
-          <p:cNvPr id="4" name="TextBox 3"/>
+          <p:cNvPr id="5" name="TextBox 4"/>
           <p:cNvSpPr txBox="1"/>
           <p:nvPr/>
         </p:nvSpPr>
@@ -29457,7 +30477,7 @@
       </p:sp>
       <p:sp>
         <p:nvSpPr>
-          <p:cNvPr id="5" name="TextBox 4"/>
+          <p:cNvPr id="6" name="TextBox 5"/>
           <p:cNvSpPr txBox="1"/>
           <p:nvPr/>
         </p:nvSpPr>
@@ -29496,7 +30516,7 @@
       </p:sp>
       <p:sp>
         <p:nvSpPr>
-          <p:cNvPr id="6" name="TextBox 5"/>
+          <p:cNvPr id="7" name="TextBox 6"/>
           <p:cNvSpPr txBox="1"/>
           <p:nvPr/>
         </p:nvSpPr>
@@ -29535,7 +30555,7 @@
       </p:sp>
       <p:sp>
         <p:nvSpPr>
-          <p:cNvPr id="7" name="Rectangle 6"/>
+          <p:cNvPr id="8" name="Rectangle 7"/>
           <p:cNvSpPr/>
           <p:nvPr/>
         </p:nvSpPr>
@@ -29579,7 +30599,7 @@
       </p:sp>
       <p:sp>
         <p:nvSpPr>
-          <p:cNvPr id="8" name="TextBox 7"/>
+          <p:cNvPr id="9" name="TextBox 8"/>
           <p:cNvSpPr txBox="1"/>
           <p:nvPr/>
         </p:nvSpPr>
@@ -29618,7 +30638,7 @@
       </p:sp>
       <p:sp>
         <p:nvSpPr>
-          <p:cNvPr id="9" name="TextBox 8"/>
+          <p:cNvPr id="10" name="TextBox 9"/>
           <p:cNvSpPr txBox="1"/>
           <p:nvPr/>
         </p:nvSpPr>
@@ -29657,7 +30677,7 @@
       </p:sp>
       <p:sp>
         <p:nvSpPr>
-          <p:cNvPr id="10" name="TextBox 9"/>
+          <p:cNvPr id="11" name="TextBox 10"/>
           <p:cNvSpPr txBox="1"/>
           <p:nvPr/>
         </p:nvSpPr>
@@ -29696,7 +30716,7 @@
       </p:sp>
       <p:sp>
         <p:nvSpPr>
-          <p:cNvPr id="11" name="Rectangle 10"/>
+          <p:cNvPr id="12" name="Rectangle 11"/>
           <p:cNvSpPr/>
           <p:nvPr/>
         </p:nvSpPr>
@@ -29740,7 +30760,7 @@
       </p:sp>
       <p:sp>
         <p:nvSpPr>
-          <p:cNvPr id="12" name="TextBox 11"/>
+          <p:cNvPr id="13" name="TextBox 12"/>
           <p:cNvSpPr txBox="1"/>
           <p:nvPr/>
         </p:nvSpPr>
@@ -29779,7 +30799,7 @@
       </p:sp>
       <p:sp>
         <p:nvSpPr>
-          <p:cNvPr id="13" name="TextBox 12"/>
+          <p:cNvPr id="14" name="TextBox 13"/>
           <p:cNvSpPr txBox="1"/>
           <p:nvPr/>
         </p:nvSpPr>
@@ -29818,7 +30838,7 @@
       </p:sp>
       <p:sp>
         <p:nvSpPr>
-          <p:cNvPr id="14" name="TextBox 13"/>
+          <p:cNvPr id="15" name="TextBox 14"/>
           <p:cNvSpPr txBox="1"/>
           <p:nvPr/>
         </p:nvSpPr>
@@ -29857,7 +30877,7 @@
       </p:sp>
       <p:sp>
         <p:nvSpPr>
-          <p:cNvPr id="15" name="Rectangle 14"/>
+          <p:cNvPr id="16" name="Rectangle 15"/>
           <p:cNvSpPr/>
           <p:nvPr/>
         </p:nvSpPr>
@@ -29901,7 +30921,7 @@
       </p:sp>
       <p:sp>
         <p:nvSpPr>
-          <p:cNvPr id="16" name="TextBox 15"/>
+          <p:cNvPr id="17" name="TextBox 16"/>
           <p:cNvSpPr txBox="1"/>
           <p:nvPr/>
         </p:nvSpPr>
@@ -29940,7 +30960,7 @@
       </p:sp>
       <p:sp>
         <p:nvSpPr>
-          <p:cNvPr id="17" name="TextBox 16"/>
+          <p:cNvPr id="18" name="TextBox 17"/>
           <p:cNvSpPr txBox="1"/>
           <p:nvPr/>
         </p:nvSpPr>
@@ -29979,7 +30999,7 @@
       </p:sp>
       <p:sp>
         <p:nvSpPr>
-          <p:cNvPr id="18" name="TextBox 17"/>
+          <p:cNvPr id="19" name="TextBox 18"/>
           <p:cNvSpPr txBox="1"/>
           <p:nvPr/>
         </p:nvSpPr>
@@ -30018,7 +31038,7 @@
       </p:sp>
       <p:sp>
         <p:nvSpPr>
-          <p:cNvPr id="19" name="Rectangle 18"/>
+          <p:cNvPr id="20" name="Rectangle 19"/>
           <p:cNvSpPr/>
           <p:nvPr/>
         </p:nvSpPr>
@@ -30062,7 +31082,7 @@
       </p:sp>
       <p:sp>
         <p:nvSpPr>
-          <p:cNvPr id="20" name="TextBox 19"/>
+          <p:cNvPr id="21" name="TextBox 20"/>
           <p:cNvSpPr txBox="1"/>
           <p:nvPr/>
         </p:nvSpPr>
@@ -30101,7 +31121,7 @@
       </p:sp>
       <p:sp>
         <p:nvSpPr>
-          <p:cNvPr id="21" name="TextBox 20"/>
+          <p:cNvPr id="22" name="TextBox 21"/>
           <p:cNvSpPr txBox="1"/>
           <p:nvPr/>
         </p:nvSpPr>
@@ -30140,7 +31160,7 @@
       </p:sp>
       <p:sp>
         <p:nvSpPr>
-          <p:cNvPr id="22" name="TextBox 21"/>
+          <p:cNvPr id="23" name="TextBox 22"/>
           <p:cNvSpPr txBox="1"/>
           <p:nvPr/>
         </p:nvSpPr>
@@ -30179,7 +31199,7 @@
       </p:sp>
       <p:sp>
         <p:nvSpPr>
-          <p:cNvPr id="23" name="Rectangle 22"/>
+          <p:cNvPr id="24" name="Rectangle 23"/>
           <p:cNvSpPr/>
           <p:nvPr/>
         </p:nvSpPr>
@@ -30223,7 +31243,7 @@
       </p:sp>
       <p:sp>
         <p:nvSpPr>
-          <p:cNvPr id="24" name="TextBox 23"/>
+          <p:cNvPr id="25" name="TextBox 24"/>
           <p:cNvSpPr txBox="1"/>
           <p:nvPr/>
         </p:nvSpPr>
@@ -30262,7 +31282,7 @@
       </p:sp>
       <p:sp>
         <p:nvSpPr>
-          <p:cNvPr id="25" name="TextBox 24"/>
+          <p:cNvPr id="26" name="TextBox 25"/>
           <p:cNvSpPr txBox="1"/>
           <p:nvPr/>
         </p:nvSpPr>
@@ -30325,9 +31345,33 @@
         <p:nvPr/>
       </p:nvGrpSpPr>
       <p:grpSpPr/>
-      <p:sp>
-        <p:nvSpPr>
-          <p:cNvPr id="2" name="TextBox 1"/>
+      <p:pic>
+        <p:nvPicPr>
+          <p:cNvPr id="2" name="Picture 1" descr="u-azul.png"/>
+          <p:cNvPicPr>
+            <a:picLocks noChangeAspect="1"/>
+          </p:cNvPicPr>
+          <p:nvPr/>
+        </p:nvPicPr>
+        <p:blipFill>
+          <a:blip r:embed="rId2"/>
+          <a:stretch>
+            <a:fillRect/>
+          </a:stretch>
+        </p:blipFill>
+        <p:spPr>
+          <a:xfrm>
+            <a:off x="10744200" y="457200"/>
+            <a:ext cx="342900" cy="342900"/>
+          </a:xfrm>
+          <a:prstGeom prst="rect">
+            <a:avLst/>
+          </a:prstGeom>
+        </p:spPr>
+      </p:pic>
+      <p:sp>
+        <p:nvSpPr>
+          <p:cNvPr id="3" name="TextBox 2"/>
           <p:cNvSpPr txBox="1"/>
           <p:nvPr/>
         </p:nvSpPr>
@@ -30366,14 +31410,14 @@
       </p:sp>
       <p:sp>
         <p:nvSpPr>
-          <p:cNvPr id="3" name="TextBox 2"/>
+          <p:cNvPr id="4" name="TextBox 3"/>
           <p:cNvSpPr txBox="1"/>
           <p:nvPr/>
         </p:nvSpPr>
         <p:spPr>
           <a:xfrm>
             <a:off x="685800" y="838200"/>
-            <a:ext cx="9525000" cy="1524000"/>
+            <a:ext cx="9620250" cy="1524000"/>
           </a:xfrm>
           <a:prstGeom prst="rect">
             <a:avLst/>
@@ -30421,7 +31465,7 @@
       </p:sp>
       <p:sp>
         <p:nvSpPr>
-          <p:cNvPr id="4" name="TextBox 3"/>
+          <p:cNvPr id="5" name="TextBox 4"/>
           <p:cNvSpPr txBox="1"/>
           <p:nvPr/>
         </p:nvSpPr>
@@ -30460,7 +31504,7 @@
       </p:sp>
       <p:sp>
         <p:nvSpPr>
-          <p:cNvPr id="5" name="Rectangle 4"/>
+          <p:cNvPr id="6" name="Rectangle 5"/>
           <p:cNvSpPr/>
           <p:nvPr/>
         </p:nvSpPr>
@@ -30504,7 +31548,7 @@
       </p:sp>
       <p:sp>
         <p:nvSpPr>
-          <p:cNvPr id="6" name="TextBox 5"/>
+          <p:cNvPr id="7" name="TextBox 6"/>
           <p:cNvSpPr txBox="1"/>
           <p:nvPr/>
         </p:nvSpPr>
@@ -30543,7 +31587,7 @@
       </p:sp>
       <p:sp>
         <p:nvSpPr>
-          <p:cNvPr id="7" name="TextBox 6"/>
+          <p:cNvPr id="8" name="TextBox 7"/>
           <p:cNvSpPr txBox="1"/>
           <p:nvPr/>
         </p:nvSpPr>
@@ -30582,7 +31626,7 @@
       </p:sp>
       <p:sp>
         <p:nvSpPr>
-          <p:cNvPr id="8" name="TextBox 7"/>
+          <p:cNvPr id="9" name="TextBox 8"/>
           <p:cNvSpPr txBox="1"/>
           <p:nvPr/>
         </p:nvSpPr>
@@ -30621,7 +31665,7 @@
       </p:sp>
       <p:sp>
         <p:nvSpPr>
-          <p:cNvPr id="9" name="TextBox 8"/>
+          <p:cNvPr id="10" name="TextBox 9"/>
           <p:cNvSpPr txBox="1"/>
           <p:nvPr/>
         </p:nvSpPr>
@@ -30660,7 +31704,7 @@
       </p:sp>
       <p:sp>
         <p:nvSpPr>
-          <p:cNvPr id="10" name="TextBox 9"/>
+          <p:cNvPr id="11" name="TextBox 10"/>
           <p:cNvSpPr txBox="1"/>
           <p:nvPr/>
         </p:nvSpPr>
@@ -30699,7 +31743,7 @@
       </p:sp>
       <p:sp>
         <p:nvSpPr>
-          <p:cNvPr id="11" name="TextBox 10"/>
+          <p:cNvPr id="12" name="TextBox 11"/>
           <p:cNvSpPr txBox="1"/>
           <p:nvPr/>
         </p:nvSpPr>
@@ -30738,7 +31782,7 @@
       </p:sp>
       <p:sp>
         <p:nvSpPr>
-          <p:cNvPr id="12" name="TextBox 11"/>
+          <p:cNvPr id="13" name="TextBox 12"/>
           <p:cNvSpPr txBox="1"/>
           <p:nvPr/>
         </p:nvSpPr>
@@ -30777,7 +31821,7 @@
       </p:sp>
       <p:sp>
         <p:nvSpPr>
-          <p:cNvPr id="13" name="TextBox 12"/>
+          <p:cNvPr id="14" name="TextBox 13"/>
           <p:cNvSpPr txBox="1"/>
           <p:nvPr/>
         </p:nvSpPr>
@@ -30816,7 +31860,7 @@
       </p:sp>
       <p:sp>
         <p:nvSpPr>
-          <p:cNvPr id="14" name="TextBox 13"/>
+          <p:cNvPr id="15" name="TextBox 14"/>
           <p:cNvSpPr txBox="1"/>
           <p:nvPr/>
         </p:nvSpPr>
@@ -30855,7 +31899,7 @@
       </p:sp>
       <p:sp>
         <p:nvSpPr>
-          <p:cNvPr id="15" name="Rectangle 14"/>
+          <p:cNvPr id="16" name="Rectangle 15"/>
           <p:cNvSpPr/>
           <p:nvPr/>
         </p:nvSpPr>
@@ -30899,7 +31943,7 @@
       </p:sp>
       <p:sp>
         <p:nvSpPr>
-          <p:cNvPr id="16" name="TextBox 15"/>
+          <p:cNvPr id="17" name="TextBox 16"/>
           <p:cNvSpPr txBox="1"/>
           <p:nvPr/>
         </p:nvSpPr>
@@ -30938,7 +31982,7 @@
       </p:sp>
       <p:sp>
         <p:nvSpPr>
-          <p:cNvPr id="17" name="TextBox 16"/>
+          <p:cNvPr id="18" name="TextBox 17"/>
           <p:cNvSpPr txBox="1"/>
           <p:nvPr/>
         </p:nvSpPr>
@@ -30977,7 +32021,7 @@
       </p:sp>
       <p:sp>
         <p:nvSpPr>
-          <p:cNvPr id="18" name="TextBox 17"/>
+          <p:cNvPr id="19" name="TextBox 18"/>
           <p:cNvSpPr txBox="1"/>
           <p:nvPr/>
         </p:nvSpPr>
@@ -31016,7 +32060,7 @@
       </p:sp>
       <p:sp>
         <p:nvSpPr>
-          <p:cNvPr id="19" name="TextBox 18"/>
+          <p:cNvPr id="20" name="TextBox 19"/>
           <p:cNvSpPr txBox="1"/>
           <p:nvPr/>
         </p:nvSpPr>
@@ -31055,7 +32099,7 @@
       </p:sp>
       <p:sp>
         <p:nvSpPr>
-          <p:cNvPr id="20" name="TextBox 19"/>
+          <p:cNvPr id="21" name="TextBox 20"/>
           <p:cNvSpPr txBox="1"/>
           <p:nvPr/>
         </p:nvSpPr>
@@ -31094,7 +32138,7 @@
       </p:sp>
       <p:sp>
         <p:nvSpPr>
-          <p:cNvPr id="21" name="TextBox 20"/>
+          <p:cNvPr id="22" name="TextBox 21"/>
           <p:cNvSpPr txBox="1"/>
           <p:nvPr/>
         </p:nvSpPr>
@@ -31133,7 +32177,7 @@
       </p:sp>
       <p:sp>
         <p:nvSpPr>
-          <p:cNvPr id="22" name="TextBox 21"/>
+          <p:cNvPr id="23" name="TextBox 22"/>
           <p:cNvSpPr txBox="1"/>
           <p:nvPr/>
         </p:nvSpPr>
@@ -31172,7 +32216,7 @@
       </p:sp>
       <p:sp>
         <p:nvSpPr>
-          <p:cNvPr id="23" name="TextBox 22"/>
+          <p:cNvPr id="24" name="TextBox 23"/>
           <p:cNvSpPr txBox="1"/>
           <p:nvPr/>
         </p:nvSpPr>
@@ -31235,9 +32279,33 @@
         <p:nvPr/>
       </p:nvGrpSpPr>
       <p:grpSpPr/>
-      <p:sp>
-        <p:nvSpPr>
-          <p:cNvPr id="2" name="TextBox 1"/>
+      <p:pic>
+        <p:nvPicPr>
+          <p:cNvPr id="2" name="Picture 1" descr="u-azul.png"/>
+          <p:cNvPicPr>
+            <a:picLocks noChangeAspect="1"/>
+          </p:cNvPicPr>
+          <p:nvPr/>
+        </p:nvPicPr>
+        <p:blipFill>
+          <a:blip r:embed="rId2"/>
+          <a:stretch>
+            <a:fillRect/>
+          </a:stretch>
+        </p:blipFill>
+        <p:spPr>
+          <a:xfrm>
+            <a:off x="10744200" y="457200"/>
+            <a:ext cx="342900" cy="342900"/>
+          </a:xfrm>
+          <a:prstGeom prst="rect">
+            <a:avLst/>
+          </a:prstGeom>
+        </p:spPr>
+      </p:pic>
+      <p:sp>
+        <p:nvSpPr>
+          <p:cNvPr id="3" name="TextBox 2"/>
           <p:cNvSpPr txBox="1"/>
           <p:nvPr/>
         </p:nvSpPr>
@@ -31276,14 +32344,14 @@
       </p:sp>
       <p:sp>
         <p:nvSpPr>
-          <p:cNvPr id="3" name="TextBox 2"/>
+          <p:cNvPr id="4" name="TextBox 3"/>
           <p:cNvSpPr txBox="1"/>
           <p:nvPr/>
         </p:nvSpPr>
         <p:spPr>
           <a:xfrm>
             <a:off x="685800" y="838200"/>
-            <a:ext cx="9525000" cy="1524000"/>
+            <a:ext cx="9620250" cy="1524000"/>
           </a:xfrm>
           <a:prstGeom prst="rect">
             <a:avLst/>
@@ -31331,7 +32399,7 @@
       </p:sp>
       <p:sp>
         <p:nvSpPr>
-          <p:cNvPr id="4" name="TextBox 3"/>
+          <p:cNvPr id="5" name="TextBox 4"/>
           <p:cNvSpPr txBox="1"/>
           <p:nvPr/>
         </p:nvSpPr>
@@ -31370,7 +32438,7 @@
       </p:sp>
       <p:sp>
         <p:nvSpPr>
-          <p:cNvPr id="5" name="Rectangle 4"/>
+          <p:cNvPr id="6" name="Rectangle 5"/>
           <p:cNvSpPr/>
           <p:nvPr/>
         </p:nvSpPr>
@@ -31414,7 +32482,7 @@
       </p:sp>
       <p:sp>
         <p:nvSpPr>
-          <p:cNvPr id="6" name="TextBox 5"/>
+          <p:cNvPr id="7" name="TextBox 6"/>
           <p:cNvSpPr txBox="1"/>
           <p:nvPr/>
         </p:nvSpPr>
@@ -31453,7 +32521,7 @@
       </p:sp>
       <p:sp>
         <p:nvSpPr>
-          <p:cNvPr id="7" name="TextBox 6"/>
+          <p:cNvPr id="8" name="TextBox 7"/>
           <p:cNvSpPr txBox="1"/>
           <p:nvPr/>
         </p:nvSpPr>
@@ -31501,7 +32569,7 @@
       </p:sp>
       <p:sp>
         <p:nvSpPr>
-          <p:cNvPr id="8" name="TextBox 7"/>
+          <p:cNvPr id="9" name="TextBox 8"/>
           <p:cNvSpPr txBox="1"/>
           <p:nvPr/>
         </p:nvSpPr>
@@ -31540,7 +32608,7 @@
       </p:sp>
       <p:sp>
         <p:nvSpPr>
-          <p:cNvPr id="9" name="TextBox 8"/>
+          <p:cNvPr id="10" name="TextBox 9"/>
           <p:cNvSpPr txBox="1"/>
           <p:nvPr/>
         </p:nvSpPr>
@@ -31588,7 +32656,7 @@
       </p:sp>
       <p:sp>
         <p:nvSpPr>
-          <p:cNvPr id="10" name="TextBox 9"/>
+          <p:cNvPr id="11" name="TextBox 10"/>
           <p:cNvSpPr txBox="1"/>
           <p:nvPr/>
         </p:nvSpPr>
@@ -31627,7 +32695,7 @@
       </p:sp>
       <p:sp>
         <p:nvSpPr>
-          <p:cNvPr id="11" name="TextBox 10"/>
+          <p:cNvPr id="12" name="TextBox 11"/>
           <p:cNvSpPr txBox="1"/>
           <p:nvPr/>
         </p:nvSpPr>
@@ -31675,7 +32743,7 @@
       </p:sp>
       <p:sp>
         <p:nvSpPr>
-          <p:cNvPr id="12" name="TextBox 11"/>
+          <p:cNvPr id="13" name="TextBox 12"/>
           <p:cNvSpPr txBox="1"/>
           <p:nvPr/>
         </p:nvSpPr>
@@ -31714,7 +32782,7 @@
       </p:sp>
       <p:sp>
         <p:nvSpPr>
-          <p:cNvPr id="13" name="Rectangle 12"/>
+          <p:cNvPr id="14" name="Rectangle 13"/>
           <p:cNvSpPr/>
           <p:nvPr/>
         </p:nvSpPr>
@@ -31758,7 +32826,7 @@
       </p:sp>
       <p:sp>
         <p:nvSpPr>
-          <p:cNvPr id="14" name="TextBox 13"/>
+          <p:cNvPr id="15" name="TextBox 14"/>
           <p:cNvSpPr txBox="1"/>
           <p:nvPr/>
         </p:nvSpPr>
@@ -31797,7 +32865,7 @@
       </p:sp>
       <p:sp>
         <p:nvSpPr>
-          <p:cNvPr id="15" name="TextBox 14"/>
+          <p:cNvPr id="16" name="TextBox 15"/>
           <p:cNvSpPr txBox="1"/>
           <p:nvPr/>
         </p:nvSpPr>
@@ -31845,7 +32913,7 @@
       </p:sp>
       <p:sp>
         <p:nvSpPr>
-          <p:cNvPr id="16" name="TextBox 15"/>
+          <p:cNvPr id="17" name="TextBox 16"/>
           <p:cNvSpPr txBox="1"/>
           <p:nvPr/>
         </p:nvSpPr>
@@ -31884,7 +32952,7 @@
       </p:sp>
       <p:sp>
         <p:nvSpPr>
-          <p:cNvPr id="17" name="TextBox 16"/>
+          <p:cNvPr id="18" name="TextBox 17"/>
           <p:cNvSpPr txBox="1"/>
           <p:nvPr/>
         </p:nvSpPr>
@@ -31932,7 +33000,7 @@
       </p:sp>
       <p:sp>
         <p:nvSpPr>
-          <p:cNvPr id="18" name="TextBox 17"/>
+          <p:cNvPr id="19" name="TextBox 18"/>
           <p:cNvSpPr txBox="1"/>
           <p:nvPr/>
         </p:nvSpPr>
@@ -31971,7 +33039,7 @@
       </p:sp>
       <p:sp>
         <p:nvSpPr>
-          <p:cNvPr id="19" name="TextBox 18"/>
+          <p:cNvPr id="20" name="TextBox 19"/>
           <p:cNvSpPr txBox="1"/>
           <p:nvPr/>
         </p:nvSpPr>
@@ -32034,9 +33102,33 @@
         <p:nvPr/>
       </p:nvGrpSpPr>
       <p:grpSpPr/>
-      <p:sp>
-        <p:nvSpPr>
-          <p:cNvPr id="2" name="TextBox 1"/>
+      <p:pic>
+        <p:nvPicPr>
+          <p:cNvPr id="2" name="Picture 1" descr="u-azul.png"/>
+          <p:cNvPicPr>
+            <a:picLocks noChangeAspect="1"/>
+          </p:cNvPicPr>
+          <p:nvPr/>
+        </p:nvPicPr>
+        <p:blipFill>
+          <a:blip r:embed="rId2"/>
+          <a:stretch>
+            <a:fillRect/>
+          </a:stretch>
+        </p:blipFill>
+        <p:spPr>
+          <a:xfrm>
+            <a:off x="10744200" y="457200"/>
+            <a:ext cx="342900" cy="342900"/>
+          </a:xfrm>
+          <a:prstGeom prst="rect">
+            <a:avLst/>
+          </a:prstGeom>
+        </p:spPr>
+      </p:pic>
+      <p:sp>
+        <p:nvSpPr>
+          <p:cNvPr id="3" name="TextBox 2"/>
           <p:cNvSpPr txBox="1"/>
           <p:nvPr/>
         </p:nvSpPr>
@@ -32075,14 +33167,14 @@
       </p:sp>
       <p:sp>
         <p:nvSpPr>
-          <p:cNvPr id="3" name="TextBox 2"/>
+          <p:cNvPr id="4" name="TextBox 3"/>
           <p:cNvSpPr txBox="1"/>
           <p:nvPr/>
         </p:nvSpPr>
         <p:spPr>
           <a:xfrm>
             <a:off x="685800" y="838200"/>
-            <a:ext cx="9525000" cy="1524000"/>
+            <a:ext cx="9620250" cy="1524000"/>
           </a:xfrm>
           <a:prstGeom prst="rect">
             <a:avLst/>
@@ -32114,7 +33206,7 @@
       </p:sp>
       <p:sp>
         <p:nvSpPr>
-          <p:cNvPr id="4" name="TextBox 3"/>
+          <p:cNvPr id="5" name="TextBox 4"/>
           <p:cNvSpPr txBox="1"/>
           <p:nvPr/>
         </p:nvSpPr>
@@ -32153,7 +33245,7 @@
       </p:sp>
       <p:sp>
         <p:nvSpPr>
-          <p:cNvPr id="5" name="TextBox 4"/>
+          <p:cNvPr id="6" name="TextBox 5"/>
           <p:cNvSpPr txBox="1"/>
           <p:nvPr/>
         </p:nvSpPr>
@@ -32192,7 +33284,7 @@
       </p:sp>
       <p:sp>
         <p:nvSpPr>
-          <p:cNvPr id="6" name="TextBox 5"/>
+          <p:cNvPr id="7" name="TextBox 6"/>
           <p:cNvSpPr txBox="1"/>
           <p:nvPr/>
         </p:nvSpPr>
@@ -32231,7 +33323,7 @@
       </p:sp>
       <p:sp>
         <p:nvSpPr>
-          <p:cNvPr id="7" name="TextBox 6"/>
+          <p:cNvPr id="8" name="TextBox 7"/>
           <p:cNvSpPr txBox="1"/>
           <p:nvPr/>
         </p:nvSpPr>
@@ -32270,7 +33362,7 @@
       </p:sp>
       <p:sp>
         <p:nvSpPr>
-          <p:cNvPr id="8" name="TextBox 7"/>
+          <p:cNvPr id="9" name="TextBox 8"/>
           <p:cNvSpPr txBox="1"/>
           <p:nvPr/>
         </p:nvSpPr>
@@ -32309,7 +33401,7 @@
       </p:sp>
       <p:sp>
         <p:nvSpPr>
-          <p:cNvPr id="9" name="TextBox 8"/>
+          <p:cNvPr id="10" name="TextBox 9"/>
           <p:cNvSpPr txBox="1"/>
           <p:nvPr/>
         </p:nvSpPr>
@@ -32348,16 +33440,16 @@
       </p:sp>
       <p:sp>
         <p:nvSpPr>
-          <p:cNvPr id="10" name="Rectangle 9"/>
+          <p:cNvPr id="11" name="Chevron 10"/>
           <p:cNvSpPr/>
           <p:nvPr/>
         </p:nvSpPr>
         <p:spPr>
           <a:xfrm>
-            <a:off x="9124950" y="2000250"/>
-            <a:ext cx="28575" cy="876300"/>
-          </a:xfrm>
-          <a:prstGeom prst="rect">
+            <a:off x="9124950" y="2009775"/>
+            <a:ext cx="142875" cy="123825"/>
+          </a:xfrm>
+          <a:prstGeom prst="chevron">
             <a:avLst/>
           </a:prstGeom>
           <a:solidFill>
@@ -32383,6 +33475,89 @@
           </a:fontRef>
         </p:style>
         <p:txBody>
+          <a:bodyPr rtlCol="0" anchor="ctr"/>
+          <a:lstStyle/>
+          <a:p>
+            <a:pPr algn="ctr"/>
+          </a:p>
+        </p:txBody>
+      </p:sp>
+      <p:sp>
+        <p:nvSpPr>
+          <p:cNvPr id="12" name="TextBox 11"/>
+          <p:cNvSpPr txBox="1"/>
+          <p:nvPr/>
+        </p:nvSpPr>
+        <p:spPr>
+          <a:xfrm>
+            <a:off x="9353550" y="2009775"/>
+            <a:ext cx="2152650" cy="167640"/>
+          </a:xfrm>
+          <a:prstGeom prst="rect">
+            <a:avLst/>
+          </a:prstGeom>
+          <a:noFill/>
+        </p:spPr>
+        <p:txBody>
+          <a:bodyPr wrap="square" lIns="0" rIns="0" tIns="0" bIns="0" anchor="t">
+            <a:spAutoFit/>
+          </a:bodyPr>
+          <a:lstStyle/>
+          <a:p>
+            <a:pPr algn="l">
+              <a:lnSpc>
+                <a:spcPct val="120000"/>
+              </a:lnSpc>
+            </a:pPr>
+            <a:r>
+              <a:rPr sz="819" b="1" i="0" spc="120">
+                <a:solidFill>
+                  <a:srgbClr val="E94D1C"/>
+                </a:solidFill>
+                <a:latin typeface="Roboto"/>
+              </a:rPr>
+              <a:t>PRÓXIMO PASSO</a:t>
+            </a:r>
+          </a:p>
+        </p:txBody>
+      </p:sp>
+      <p:sp>
+        <p:nvSpPr>
+          <p:cNvPr id="13" name="Rectangle 12"/>
+          <p:cNvSpPr/>
+          <p:nvPr/>
+        </p:nvSpPr>
+        <p:spPr>
+          <a:xfrm>
+            <a:off x="9124950" y="2247900"/>
+            <a:ext cx="28575" cy="628650"/>
+          </a:xfrm>
+          <a:prstGeom prst="rect">
+            <a:avLst/>
+          </a:prstGeom>
+          <a:solidFill>
+            <a:srgbClr val="E94D1C"/>
+          </a:solidFill>
+          <a:ln>
+            <a:noFill/>
+          </a:ln>
+          <a:effectLst/>
+        </p:spPr>
+        <p:style>
+          <a:lnRef idx="1">
+            <a:schemeClr val="accent1"/>
+          </a:lnRef>
+          <a:fillRef idx="3">
+            <a:schemeClr val="accent1"/>
+          </a:fillRef>
+          <a:effectRef idx="2">
+            <a:schemeClr val="accent1"/>
+          </a:effectRef>
+          <a:fontRef idx="minor">
+            <a:schemeClr val="lt1"/>
+          </a:fontRef>
+        </p:style>
+        <p:txBody>
           <a:bodyPr rtlCol="0" anchor="ctr" wrap="square" lIns="0" rIns="0" tIns="0" bIns="0"/>
           <a:lstStyle/>
           <a:p>
@@ -32392,52 +33567,13 @@
       </p:sp>
       <p:sp>
         <p:nvSpPr>
-          <p:cNvPr id="11" name="TextBox 10"/>
-          <p:cNvSpPr txBox="1"/>
-          <p:nvPr/>
-        </p:nvSpPr>
-        <p:spPr>
-          <a:xfrm>
-            <a:off x="9286875" y="2000250"/>
-            <a:ext cx="2219325" cy="167640"/>
-          </a:xfrm>
-          <a:prstGeom prst="rect">
-            <a:avLst/>
-          </a:prstGeom>
-          <a:noFill/>
-        </p:spPr>
-        <p:txBody>
-          <a:bodyPr wrap="square" lIns="0" rIns="0" tIns="0" bIns="0" anchor="t">
-            <a:spAutoFit/>
-          </a:bodyPr>
-          <a:lstStyle/>
-          <a:p>
-            <a:pPr algn="l">
-              <a:lnSpc>
-                <a:spcPct val="120000"/>
-              </a:lnSpc>
-            </a:pPr>
-            <a:r>
-              <a:rPr sz="819" b="1" i="0" spc="120">
-                <a:solidFill>
-                  <a:srgbClr val="E94D1C"/>
-                </a:solidFill>
-                <a:latin typeface="Roboto"/>
-              </a:rPr>
-              <a:t>PRÓXIMO PASSO</a:t>
-            </a:r>
-          </a:p>
-        </p:txBody>
-      </p:sp>
-      <p:sp>
-        <p:nvSpPr>
-          <p:cNvPr id="12" name="TextBox 11"/>
-          <p:cNvSpPr txBox="1"/>
-          <p:nvPr/>
-        </p:nvSpPr>
-        <p:spPr>
-          <a:xfrm>
-            <a:off x="9286875" y="2209800"/>
+          <p:cNvPr id="14" name="TextBox 13"/>
+          <p:cNvSpPr txBox="1"/>
+          <p:nvPr/>
+        </p:nvSpPr>
+        <p:spPr>
+          <a:xfrm>
+            <a:off x="9286875" y="2286000"/>
             <a:ext cx="2219325" cy="2286000"/>
           </a:xfrm>
           <a:prstGeom prst="rect">
@@ -32473,7 +33609,7 @@
       </p:sp>
       <p:sp>
         <p:nvSpPr>
-          <p:cNvPr id="13" name="TextBox 12"/>
+          <p:cNvPr id="15" name="TextBox 14"/>
           <p:cNvSpPr txBox="1"/>
           <p:nvPr/>
         </p:nvSpPr>
@@ -32512,7 +33648,7 @@
       </p:sp>
       <p:sp>
         <p:nvSpPr>
-          <p:cNvPr id="14" name="TextBox 13"/>
+          <p:cNvPr id="16" name="TextBox 15"/>
           <p:cNvSpPr txBox="1"/>
           <p:nvPr/>
         </p:nvSpPr>
@@ -32575,9 +33711,33 @@
         <p:nvPr/>
       </p:nvGrpSpPr>
       <p:grpSpPr/>
-      <p:sp>
-        <p:nvSpPr>
-          <p:cNvPr id="2" name="TextBox 1"/>
+      <p:pic>
+        <p:nvPicPr>
+          <p:cNvPr id="2" name="Picture 1" descr="u-azul.png"/>
+          <p:cNvPicPr>
+            <a:picLocks noChangeAspect="1"/>
+          </p:cNvPicPr>
+          <p:nvPr/>
+        </p:nvPicPr>
+        <p:blipFill>
+          <a:blip r:embed="rId2"/>
+          <a:stretch>
+            <a:fillRect/>
+          </a:stretch>
+        </p:blipFill>
+        <p:spPr>
+          <a:xfrm>
+            <a:off x="10744200" y="457200"/>
+            <a:ext cx="342900" cy="342900"/>
+          </a:xfrm>
+          <a:prstGeom prst="rect">
+            <a:avLst/>
+          </a:prstGeom>
+        </p:spPr>
+      </p:pic>
+      <p:sp>
+        <p:nvSpPr>
+          <p:cNvPr id="3" name="TextBox 2"/>
           <p:cNvSpPr txBox="1"/>
           <p:nvPr/>
         </p:nvSpPr>
@@ -32616,14 +33776,14 @@
       </p:sp>
       <p:sp>
         <p:nvSpPr>
-          <p:cNvPr id="3" name="TextBox 2"/>
+          <p:cNvPr id="4" name="TextBox 3"/>
           <p:cNvSpPr txBox="1"/>
           <p:nvPr/>
         </p:nvSpPr>
         <p:spPr>
           <a:xfrm>
             <a:off x="685800" y="838200"/>
-            <a:ext cx="9525000" cy="1524000"/>
+            <a:ext cx="9620250" cy="1524000"/>
           </a:xfrm>
           <a:prstGeom prst="rect">
             <a:avLst/>
@@ -32655,7 +33815,7 @@
       </p:sp>
       <p:sp>
         <p:nvSpPr>
-          <p:cNvPr id="4" name="TextBox 3"/>
+          <p:cNvPr id="5" name="TextBox 4"/>
           <p:cNvSpPr txBox="1"/>
           <p:nvPr/>
         </p:nvSpPr>
@@ -32694,7 +33854,7 @@
       </p:sp>
       <p:sp>
         <p:nvSpPr>
-          <p:cNvPr id="5" name="Rectangle 4"/>
+          <p:cNvPr id="6" name="Rectangle 5"/>
           <p:cNvSpPr/>
           <p:nvPr/>
         </p:nvSpPr>
@@ -32738,7 +33898,7 @@
       </p:sp>
       <p:sp>
         <p:nvSpPr>
-          <p:cNvPr id="6" name="TextBox 5"/>
+          <p:cNvPr id="7" name="TextBox 6"/>
           <p:cNvSpPr txBox="1"/>
           <p:nvPr/>
         </p:nvSpPr>
@@ -32777,7 +33937,7 @@
       </p:sp>
       <p:sp>
         <p:nvSpPr>
-          <p:cNvPr id="7" name="TextBox 6"/>
+          <p:cNvPr id="8" name="TextBox 7"/>
           <p:cNvSpPr txBox="1"/>
           <p:nvPr/>
         </p:nvSpPr>
@@ -32816,7 +33976,7 @@
       </p:sp>
       <p:sp>
         <p:nvSpPr>
-          <p:cNvPr id="8" name="TextBox 7"/>
+          <p:cNvPr id="9" name="TextBox 8"/>
           <p:cNvSpPr txBox="1"/>
           <p:nvPr/>
         </p:nvSpPr>
@@ -32855,7 +34015,7 @@
       </p:sp>
       <p:sp>
         <p:nvSpPr>
-          <p:cNvPr id="9" name="TextBox 8"/>
+          <p:cNvPr id="10" name="TextBox 9"/>
           <p:cNvSpPr txBox="1"/>
           <p:nvPr/>
         </p:nvSpPr>
@@ -32894,7 +34054,7 @@
       </p:sp>
       <p:sp>
         <p:nvSpPr>
-          <p:cNvPr id="10" name="TextBox 9"/>
+          <p:cNvPr id="11" name="TextBox 10"/>
           <p:cNvSpPr txBox="1"/>
           <p:nvPr/>
         </p:nvSpPr>
@@ -32933,7 +34093,7 @@
       </p:sp>
       <p:sp>
         <p:nvSpPr>
-          <p:cNvPr id="11" name="Rectangle 10"/>
+          <p:cNvPr id="12" name="Rectangle 11"/>
           <p:cNvSpPr/>
           <p:nvPr/>
         </p:nvSpPr>
@@ -32977,7 +34137,7 @@
       </p:sp>
       <p:sp>
         <p:nvSpPr>
-          <p:cNvPr id="12" name="TextBox 11"/>
+          <p:cNvPr id="13" name="TextBox 12"/>
           <p:cNvSpPr txBox="1"/>
           <p:nvPr/>
         </p:nvSpPr>
@@ -33016,7 +34176,7 @@
       </p:sp>
       <p:sp>
         <p:nvSpPr>
-          <p:cNvPr id="13" name="TextBox 12"/>
+          <p:cNvPr id="14" name="TextBox 13"/>
           <p:cNvSpPr txBox="1"/>
           <p:nvPr/>
         </p:nvSpPr>
@@ -33055,7 +34215,7 @@
       </p:sp>
       <p:sp>
         <p:nvSpPr>
-          <p:cNvPr id="14" name="TextBox 13"/>
+          <p:cNvPr id="15" name="TextBox 14"/>
           <p:cNvSpPr txBox="1"/>
           <p:nvPr/>
         </p:nvSpPr>
@@ -33094,7 +34254,7 @@
       </p:sp>
       <p:sp>
         <p:nvSpPr>
-          <p:cNvPr id="15" name="TextBox 14"/>
+          <p:cNvPr id="16" name="TextBox 15"/>
           <p:cNvSpPr txBox="1"/>
           <p:nvPr/>
         </p:nvSpPr>
@@ -33133,7 +34293,7 @@
       </p:sp>
       <p:sp>
         <p:nvSpPr>
-          <p:cNvPr id="16" name="TextBox 15"/>
+          <p:cNvPr id="17" name="TextBox 16"/>
           <p:cNvSpPr txBox="1"/>
           <p:nvPr/>
         </p:nvSpPr>
@@ -33172,7 +34332,7 @@
       </p:sp>
       <p:sp>
         <p:nvSpPr>
-          <p:cNvPr id="17" name="TextBox 16"/>
+          <p:cNvPr id="18" name="TextBox 17"/>
           <p:cNvSpPr txBox="1"/>
           <p:nvPr/>
         </p:nvSpPr>
@@ -33235,9 +34395,33 @@
         <p:nvPr/>
       </p:nvGrpSpPr>
       <p:grpSpPr/>
-      <p:sp>
-        <p:nvSpPr>
-          <p:cNvPr id="2" name="TextBox 1"/>
+      <p:pic>
+        <p:nvPicPr>
+          <p:cNvPr id="2" name="Picture 1" descr="u-azul.png"/>
+          <p:cNvPicPr>
+            <a:picLocks noChangeAspect="1"/>
+          </p:cNvPicPr>
+          <p:nvPr/>
+        </p:nvPicPr>
+        <p:blipFill>
+          <a:blip r:embed="rId2"/>
+          <a:stretch>
+            <a:fillRect/>
+          </a:stretch>
+        </p:blipFill>
+        <p:spPr>
+          <a:xfrm>
+            <a:off x="10744200" y="457200"/>
+            <a:ext cx="342900" cy="342900"/>
+          </a:xfrm>
+          <a:prstGeom prst="rect">
+            <a:avLst/>
+          </a:prstGeom>
+        </p:spPr>
+      </p:pic>
+      <p:sp>
+        <p:nvSpPr>
+          <p:cNvPr id="3" name="TextBox 2"/>
           <p:cNvSpPr txBox="1"/>
           <p:nvPr/>
         </p:nvSpPr>
@@ -33276,14 +34460,14 @@
       </p:sp>
       <p:sp>
         <p:nvSpPr>
-          <p:cNvPr id="3" name="TextBox 2"/>
+          <p:cNvPr id="4" name="TextBox 3"/>
           <p:cNvSpPr txBox="1"/>
           <p:nvPr/>
         </p:nvSpPr>
         <p:spPr>
           <a:xfrm>
             <a:off x="685800" y="838200"/>
-            <a:ext cx="9525000" cy="1524000"/>
+            <a:ext cx="9620250" cy="1524000"/>
           </a:xfrm>
           <a:prstGeom prst="rect">
             <a:avLst/>
@@ -33315,7 +34499,7 @@
       </p:sp>
       <p:sp>
         <p:nvSpPr>
-          <p:cNvPr id="4" name="TextBox 3"/>
+          <p:cNvPr id="5" name="TextBox 4"/>
           <p:cNvSpPr txBox="1"/>
           <p:nvPr/>
         </p:nvSpPr>
@@ -33354,7 +34538,7 @@
       </p:sp>
       <p:sp>
         <p:nvSpPr>
-          <p:cNvPr id="5" name="TextBox 4"/>
+          <p:cNvPr id="6" name="TextBox 5"/>
           <p:cNvSpPr txBox="1"/>
           <p:nvPr/>
         </p:nvSpPr>
@@ -33393,7 +34577,7 @@
       </p:sp>
       <p:sp>
         <p:nvSpPr>
-          <p:cNvPr id="6" name="TextBox 5"/>
+          <p:cNvPr id="7" name="TextBox 6"/>
           <p:cNvSpPr txBox="1"/>
           <p:nvPr/>
         </p:nvSpPr>
@@ -33432,7 +34616,7 @@
       </p:sp>
       <p:sp>
         <p:nvSpPr>
-          <p:cNvPr id="7" name="TextBox 6"/>
+          <p:cNvPr id="8" name="TextBox 7"/>
           <p:cNvSpPr txBox="1"/>
           <p:nvPr/>
         </p:nvSpPr>
@@ -33471,7 +34655,7 @@
       </p:sp>
       <p:sp>
         <p:nvSpPr>
-          <p:cNvPr id="8" name="TextBox 7"/>
+          <p:cNvPr id="9" name="TextBox 8"/>
           <p:cNvSpPr txBox="1"/>
           <p:nvPr/>
         </p:nvSpPr>
@@ -33510,7 +34694,7 @@
       </p:sp>
       <p:sp>
         <p:nvSpPr>
-          <p:cNvPr id="9" name="TextBox 8"/>
+          <p:cNvPr id="10" name="TextBox 9"/>
           <p:cNvSpPr txBox="1"/>
           <p:nvPr/>
         </p:nvSpPr>
@@ -33549,7 +34733,7 @@
       </p:sp>
       <p:sp>
         <p:nvSpPr>
-          <p:cNvPr id="10" name="TextBox 9"/>
+          <p:cNvPr id="11" name="TextBox 10"/>
           <p:cNvSpPr txBox="1"/>
           <p:nvPr/>
         </p:nvSpPr>
@@ -33588,7 +34772,7 @@
       </p:sp>
       <p:sp>
         <p:nvSpPr>
-          <p:cNvPr id="11" name="TextBox 10"/>
+          <p:cNvPr id="12" name="TextBox 11"/>
           <p:cNvSpPr txBox="1"/>
           <p:nvPr/>
         </p:nvSpPr>
@@ -33627,23 +34811,23 @@
       </p:sp>
       <p:sp>
         <p:nvSpPr>
-          <p:cNvPr id="12" name="Rectangle 11"/>
+          <p:cNvPr id="13" name="Document 12"/>
           <p:cNvSpPr/>
           <p:nvPr/>
         </p:nvSpPr>
         <p:spPr>
           <a:xfrm>
             <a:off x="8839200" y="2000250"/>
-            <a:ext cx="28575" cy="876300"/>
-          </a:xfrm>
-          <a:prstGeom prst="rect">
-            <a:avLst/>
-          </a:prstGeom>
-          <a:solidFill>
-            <a:srgbClr val="E94D1C"/>
-          </a:solidFill>
-          <a:ln>
-            <a:noFill/>
+            <a:ext cx="142875" cy="133350"/>
+          </a:xfrm>
+          <a:prstGeom prst="flowChartDocument">
+            <a:avLst/>
+          </a:prstGeom>
+          <a:noFill/>
+          <a:ln w="19050">
+            <a:solidFill>
+              <a:srgbClr val="E94D1C"/>
+            </a:solidFill>
           </a:ln>
           <a:effectLst/>
         </p:spPr>
@@ -33662,6 +34846,89 @@
           </a:fontRef>
         </p:style>
         <p:txBody>
+          <a:bodyPr rtlCol="0" anchor="ctr"/>
+          <a:lstStyle/>
+          <a:p>
+            <a:pPr algn="ctr"/>
+          </a:p>
+        </p:txBody>
+      </p:sp>
+      <p:sp>
+        <p:nvSpPr>
+          <p:cNvPr id="14" name="TextBox 13"/>
+          <p:cNvSpPr txBox="1"/>
+          <p:nvPr/>
+        </p:nvSpPr>
+        <p:spPr>
+          <a:xfrm>
+            <a:off x="9067800" y="2009775"/>
+            <a:ext cx="2438400" cy="167640"/>
+          </a:xfrm>
+          <a:prstGeom prst="rect">
+            <a:avLst/>
+          </a:prstGeom>
+          <a:noFill/>
+        </p:spPr>
+        <p:txBody>
+          <a:bodyPr wrap="square" lIns="0" rIns="0" tIns="0" bIns="0" anchor="t">
+            <a:spAutoFit/>
+          </a:bodyPr>
+          <a:lstStyle/>
+          <a:p>
+            <a:pPr algn="l">
+              <a:lnSpc>
+                <a:spcPct val="120000"/>
+              </a:lnSpc>
+            </a:pPr>
+            <a:r>
+              <a:rPr sz="819" b="1" i="0" spc="120">
+                <a:solidFill>
+                  <a:srgbClr val="E94D1C"/>
+                </a:solidFill>
+                <a:latin typeface="Roboto"/>
+              </a:rPr>
+              <a:t>PARA LEVAR PARA A P1</a:t>
+            </a:r>
+          </a:p>
+        </p:txBody>
+      </p:sp>
+      <p:sp>
+        <p:nvSpPr>
+          <p:cNvPr id="15" name="Rectangle 14"/>
+          <p:cNvSpPr/>
+          <p:nvPr/>
+        </p:nvSpPr>
+        <p:spPr>
+          <a:xfrm>
+            <a:off x="8839200" y="2247900"/>
+            <a:ext cx="28575" cy="628650"/>
+          </a:xfrm>
+          <a:prstGeom prst="rect">
+            <a:avLst/>
+          </a:prstGeom>
+          <a:solidFill>
+            <a:srgbClr val="E94D1C"/>
+          </a:solidFill>
+          <a:ln>
+            <a:noFill/>
+          </a:ln>
+          <a:effectLst/>
+        </p:spPr>
+        <p:style>
+          <a:lnRef idx="1">
+            <a:schemeClr val="accent1"/>
+          </a:lnRef>
+          <a:fillRef idx="3">
+            <a:schemeClr val="accent1"/>
+          </a:fillRef>
+          <a:effectRef idx="2">
+            <a:schemeClr val="accent1"/>
+          </a:effectRef>
+          <a:fontRef idx="minor">
+            <a:schemeClr val="lt1"/>
+          </a:fontRef>
+        </p:style>
+        <p:txBody>
           <a:bodyPr rtlCol="0" anchor="ctr" wrap="square" lIns="0" rIns="0" tIns="0" bIns="0"/>
           <a:lstStyle/>
           <a:p>
@@ -33671,52 +34938,13 @@
       </p:sp>
       <p:sp>
         <p:nvSpPr>
-          <p:cNvPr id="13" name="TextBox 12"/>
-          <p:cNvSpPr txBox="1"/>
-          <p:nvPr/>
-        </p:nvSpPr>
-        <p:spPr>
-          <a:xfrm>
-            <a:off x="9001125" y="2000250"/>
-            <a:ext cx="2505075" cy="167640"/>
-          </a:xfrm>
-          <a:prstGeom prst="rect">
-            <a:avLst/>
-          </a:prstGeom>
-          <a:noFill/>
-        </p:spPr>
-        <p:txBody>
-          <a:bodyPr wrap="square" lIns="0" rIns="0" tIns="0" bIns="0" anchor="t">
-            <a:spAutoFit/>
-          </a:bodyPr>
-          <a:lstStyle/>
-          <a:p>
-            <a:pPr algn="l">
-              <a:lnSpc>
-                <a:spcPct val="120000"/>
-              </a:lnSpc>
-            </a:pPr>
-            <a:r>
-              <a:rPr sz="819" b="1" i="0" spc="120">
-                <a:solidFill>
-                  <a:srgbClr val="E94D1C"/>
-                </a:solidFill>
-                <a:latin typeface="Roboto"/>
-              </a:rPr>
-              <a:t>PARA LEVAR PARA A P1</a:t>
-            </a:r>
-          </a:p>
-        </p:txBody>
-      </p:sp>
-      <p:sp>
-        <p:nvSpPr>
-          <p:cNvPr id="14" name="TextBox 13"/>
-          <p:cNvSpPr txBox="1"/>
-          <p:nvPr/>
-        </p:nvSpPr>
-        <p:spPr>
-          <a:xfrm>
-            <a:off x="9001125" y="2209800"/>
+          <p:cNvPr id="16" name="TextBox 15"/>
+          <p:cNvSpPr txBox="1"/>
+          <p:nvPr/>
+        </p:nvSpPr>
+        <p:spPr>
+          <a:xfrm>
+            <a:off x="9001125" y="2286000"/>
             <a:ext cx="2505075" cy="2286000"/>
           </a:xfrm>
           <a:prstGeom prst="rect">
@@ -33828,7 +35056,7 @@
       </p:sp>
       <p:sp>
         <p:nvSpPr>
-          <p:cNvPr id="15" name="TextBox 14"/>
+          <p:cNvPr id="17" name="TextBox 16"/>
           <p:cNvSpPr txBox="1"/>
           <p:nvPr/>
         </p:nvSpPr>
@@ -33867,7 +35095,7 @@
       </p:sp>
       <p:sp>
         <p:nvSpPr>
-          <p:cNvPr id="16" name="TextBox 15"/>
+          <p:cNvPr id="18" name="TextBox 17"/>
           <p:cNvSpPr txBox="1"/>
           <p:nvPr/>
         </p:nvSpPr>
@@ -33930,9 +35158,33 @@
         <p:nvPr/>
       </p:nvGrpSpPr>
       <p:grpSpPr/>
-      <p:sp>
-        <p:nvSpPr>
-          <p:cNvPr id="2" name="TextBox 1"/>
+      <p:pic>
+        <p:nvPicPr>
+          <p:cNvPr id="2" name="Picture 1" descr="u-azul.png"/>
+          <p:cNvPicPr>
+            <a:picLocks noChangeAspect="1"/>
+          </p:cNvPicPr>
+          <p:nvPr/>
+        </p:nvPicPr>
+        <p:blipFill>
+          <a:blip r:embed="rId2"/>
+          <a:stretch>
+            <a:fillRect/>
+          </a:stretch>
+        </p:blipFill>
+        <p:spPr>
+          <a:xfrm>
+            <a:off x="10744200" y="457200"/>
+            <a:ext cx="342900" cy="342900"/>
+          </a:xfrm>
+          <a:prstGeom prst="rect">
+            <a:avLst/>
+          </a:prstGeom>
+        </p:spPr>
+      </p:pic>
+      <p:sp>
+        <p:nvSpPr>
+          <p:cNvPr id="3" name="TextBox 2"/>
           <p:cNvSpPr txBox="1"/>
           <p:nvPr/>
         </p:nvSpPr>
@@ -33971,14 +35223,14 @@
       </p:sp>
       <p:sp>
         <p:nvSpPr>
-          <p:cNvPr id="3" name="TextBox 2"/>
+          <p:cNvPr id="4" name="TextBox 3"/>
           <p:cNvSpPr txBox="1"/>
           <p:nvPr/>
         </p:nvSpPr>
         <p:spPr>
           <a:xfrm>
             <a:off x="685800" y="838200"/>
-            <a:ext cx="9525000" cy="1524000"/>
+            <a:ext cx="9620250" cy="1524000"/>
           </a:xfrm>
           <a:prstGeom prst="rect">
             <a:avLst/>
@@ -34010,7 +35262,7 @@
       </p:sp>
       <p:sp>
         <p:nvSpPr>
-          <p:cNvPr id="4" name="TextBox 3"/>
+          <p:cNvPr id="5" name="TextBox 4"/>
           <p:cNvSpPr txBox="1"/>
           <p:nvPr/>
         </p:nvSpPr>
@@ -34049,7 +35301,7 @@
       </p:sp>
       <p:sp>
         <p:nvSpPr>
-          <p:cNvPr id="5" name="TextBox 4"/>
+          <p:cNvPr id="6" name="TextBox 5"/>
           <p:cNvSpPr txBox="1"/>
           <p:nvPr/>
         </p:nvSpPr>
@@ -34088,7 +35340,7 @@
       </p:sp>
       <p:sp>
         <p:nvSpPr>
-          <p:cNvPr id="6" name="TextBox 5"/>
+          <p:cNvPr id="7" name="TextBox 6"/>
           <p:cNvSpPr txBox="1"/>
           <p:nvPr/>
         </p:nvSpPr>
@@ -34127,7 +35379,7 @@
       </p:sp>
       <p:sp>
         <p:nvSpPr>
-          <p:cNvPr id="7" name="TextBox 6"/>
+          <p:cNvPr id="8" name="TextBox 7"/>
           <p:cNvSpPr txBox="1"/>
           <p:nvPr/>
         </p:nvSpPr>
@@ -34166,7 +35418,7 @@
       </p:sp>
       <p:sp>
         <p:nvSpPr>
-          <p:cNvPr id="8" name="TextBox 7"/>
+          <p:cNvPr id="9" name="TextBox 8"/>
           <p:cNvSpPr txBox="1"/>
           <p:nvPr/>
         </p:nvSpPr>
@@ -34205,7 +35457,7 @@
       </p:sp>
       <p:sp>
         <p:nvSpPr>
-          <p:cNvPr id="9" name="TextBox 8"/>
+          <p:cNvPr id="10" name="TextBox 9"/>
           <p:cNvSpPr txBox="1"/>
           <p:nvPr/>
         </p:nvSpPr>
@@ -34244,7 +35496,7 @@
       </p:sp>
       <p:sp>
         <p:nvSpPr>
-          <p:cNvPr id="10" name="TextBox 9"/>
+          <p:cNvPr id="11" name="TextBox 10"/>
           <p:cNvSpPr txBox="1"/>
           <p:nvPr/>
         </p:nvSpPr>
@@ -34283,7 +35535,7 @@
       </p:sp>
       <p:sp>
         <p:nvSpPr>
-          <p:cNvPr id="11" name="TextBox 10"/>
+          <p:cNvPr id="12" name="TextBox 11"/>
           <p:cNvSpPr txBox="1"/>
           <p:nvPr/>
         </p:nvSpPr>
@@ -34322,7 +35574,7 @@
       </p:sp>
       <p:sp>
         <p:nvSpPr>
-          <p:cNvPr id="12" name="TextBox 11"/>
+          <p:cNvPr id="13" name="TextBox 12"/>
           <p:cNvSpPr txBox="1"/>
           <p:nvPr/>
         </p:nvSpPr>
@@ -34361,7 +35613,7 @@
       </p:sp>
       <p:sp>
         <p:nvSpPr>
-          <p:cNvPr id="13" name="TextBox 12"/>
+          <p:cNvPr id="14" name="TextBox 13"/>
           <p:cNvSpPr txBox="1"/>
           <p:nvPr/>
         </p:nvSpPr>
@@ -34400,7 +35652,7 @@
       </p:sp>
       <p:sp>
         <p:nvSpPr>
-          <p:cNvPr id="14" name="TextBox 13"/>
+          <p:cNvPr id="15" name="TextBox 14"/>
           <p:cNvSpPr txBox="1"/>
           <p:nvPr/>
         </p:nvSpPr>
@@ -34439,7 +35691,7 @@
       </p:sp>
       <p:sp>
         <p:nvSpPr>
-          <p:cNvPr id="15" name="TextBox 14"/>
+          <p:cNvPr id="16" name="TextBox 15"/>
           <p:cNvSpPr txBox="1"/>
           <p:nvPr/>
         </p:nvSpPr>
@@ -34478,7 +35730,7 @@
       </p:sp>
       <p:sp>
         <p:nvSpPr>
-          <p:cNvPr id="16" name="TextBox 15"/>
+          <p:cNvPr id="17" name="TextBox 16"/>
           <p:cNvSpPr txBox="1"/>
           <p:nvPr/>
         </p:nvSpPr>
@@ -34517,7 +35769,7 @@
       </p:sp>
       <p:sp>
         <p:nvSpPr>
-          <p:cNvPr id="17" name="TextBox 16"/>
+          <p:cNvPr id="18" name="TextBox 17"/>
           <p:cNvSpPr txBox="1"/>
           <p:nvPr/>
         </p:nvSpPr>
@@ -34556,7 +35808,7 @@
       </p:sp>
       <p:sp>
         <p:nvSpPr>
-          <p:cNvPr id="18" name="TextBox 17"/>
+          <p:cNvPr id="19" name="TextBox 18"/>
           <p:cNvSpPr txBox="1"/>
           <p:nvPr/>
         </p:nvSpPr>
@@ -34595,7 +35847,7 @@
       </p:sp>
       <p:sp>
         <p:nvSpPr>
-          <p:cNvPr id="19" name="TextBox 18"/>
+          <p:cNvPr id="20" name="TextBox 19"/>
           <p:cNvSpPr txBox="1"/>
           <p:nvPr/>
         </p:nvSpPr>
@@ -34658,9 +35910,33 @@
         <p:nvPr/>
       </p:nvGrpSpPr>
       <p:grpSpPr/>
-      <p:sp>
-        <p:nvSpPr>
-          <p:cNvPr id="2" name="TextBox 1"/>
+      <p:pic>
+        <p:nvPicPr>
+          <p:cNvPr id="2" name="Picture 1" descr="u-azul.png"/>
+          <p:cNvPicPr>
+            <a:picLocks noChangeAspect="1"/>
+          </p:cNvPicPr>
+          <p:nvPr/>
+        </p:nvPicPr>
+        <p:blipFill>
+          <a:blip r:embed="rId2"/>
+          <a:stretch>
+            <a:fillRect/>
+          </a:stretch>
+        </p:blipFill>
+        <p:spPr>
+          <a:xfrm>
+            <a:off x="10744200" y="457200"/>
+            <a:ext cx="342900" cy="342900"/>
+          </a:xfrm>
+          <a:prstGeom prst="rect">
+            <a:avLst/>
+          </a:prstGeom>
+        </p:spPr>
+      </p:pic>
+      <p:sp>
+        <p:nvSpPr>
+          <p:cNvPr id="3" name="TextBox 2"/>
           <p:cNvSpPr txBox="1"/>
           <p:nvPr/>
         </p:nvSpPr>
@@ -34699,14 +35975,14 @@
       </p:sp>
       <p:sp>
         <p:nvSpPr>
-          <p:cNvPr id="3" name="TextBox 2"/>
+          <p:cNvPr id="4" name="TextBox 3"/>
           <p:cNvSpPr txBox="1"/>
           <p:nvPr/>
         </p:nvSpPr>
         <p:spPr>
           <a:xfrm>
             <a:off x="685800" y="838200"/>
-            <a:ext cx="9525000" cy="1524000"/>
+            <a:ext cx="9620250" cy="1524000"/>
           </a:xfrm>
           <a:prstGeom prst="rect">
             <a:avLst/>
@@ -34754,7 +36030,7 @@
       </p:sp>
       <p:sp>
         <p:nvSpPr>
-          <p:cNvPr id="4" name="TextBox 3"/>
+          <p:cNvPr id="5" name="TextBox 4"/>
           <p:cNvSpPr txBox="1"/>
           <p:nvPr/>
         </p:nvSpPr>
@@ -34793,7 +36069,7 @@
       </p:sp>
       <p:sp>
         <p:nvSpPr>
-          <p:cNvPr id="5" name="Rectangle 4"/>
+          <p:cNvPr id="6" name="Rectangle 5"/>
           <p:cNvSpPr/>
           <p:nvPr/>
         </p:nvSpPr>
@@ -34837,7 +36113,7 @@
       </p:sp>
       <p:sp>
         <p:nvSpPr>
-          <p:cNvPr id="6" name="TextBox 5"/>
+          <p:cNvPr id="7" name="TextBox 6"/>
           <p:cNvSpPr txBox="1"/>
           <p:nvPr/>
         </p:nvSpPr>
@@ -34876,7 +36152,7 @@
       </p:sp>
       <p:sp>
         <p:nvSpPr>
-          <p:cNvPr id="7" name="TextBox 6"/>
+          <p:cNvPr id="8" name="TextBox 7"/>
           <p:cNvSpPr txBox="1"/>
           <p:nvPr/>
         </p:nvSpPr>
@@ -34915,7 +36191,7 @@
       </p:sp>
       <p:sp>
         <p:nvSpPr>
-          <p:cNvPr id="8" name="TextBox 7"/>
+          <p:cNvPr id="9" name="TextBox 8"/>
           <p:cNvSpPr txBox="1"/>
           <p:nvPr/>
         </p:nvSpPr>
@@ -34954,7 +36230,7 @@
       </p:sp>
       <p:sp>
         <p:nvSpPr>
-          <p:cNvPr id="9" name="TextBox 8"/>
+          <p:cNvPr id="10" name="TextBox 9"/>
           <p:cNvSpPr txBox="1"/>
           <p:nvPr/>
         </p:nvSpPr>
@@ -34993,7 +36269,7 @@
       </p:sp>
       <p:sp>
         <p:nvSpPr>
-          <p:cNvPr id="10" name="TextBox 9"/>
+          <p:cNvPr id="11" name="TextBox 10"/>
           <p:cNvSpPr txBox="1"/>
           <p:nvPr/>
         </p:nvSpPr>
@@ -35032,7 +36308,7 @@
       </p:sp>
       <p:sp>
         <p:nvSpPr>
-          <p:cNvPr id="11" name="Rectangle 10"/>
+          <p:cNvPr id="12" name="Rectangle 11"/>
           <p:cNvSpPr/>
           <p:nvPr/>
         </p:nvSpPr>
@@ -35076,7 +36352,7 @@
       </p:sp>
       <p:sp>
         <p:nvSpPr>
-          <p:cNvPr id="12" name="TextBox 11"/>
+          <p:cNvPr id="13" name="TextBox 12"/>
           <p:cNvSpPr txBox="1"/>
           <p:nvPr/>
         </p:nvSpPr>
@@ -35115,7 +36391,7 @@
       </p:sp>
       <p:sp>
         <p:nvSpPr>
-          <p:cNvPr id="13" name="TextBox 12"/>
+          <p:cNvPr id="14" name="TextBox 13"/>
           <p:cNvSpPr txBox="1"/>
           <p:nvPr/>
         </p:nvSpPr>
@@ -35154,7 +36430,7 @@
       </p:sp>
       <p:sp>
         <p:nvSpPr>
-          <p:cNvPr id="14" name="TextBox 13"/>
+          <p:cNvPr id="15" name="TextBox 14"/>
           <p:cNvSpPr txBox="1"/>
           <p:nvPr/>
         </p:nvSpPr>
@@ -35193,7 +36469,7 @@
       </p:sp>
       <p:sp>
         <p:nvSpPr>
-          <p:cNvPr id="15" name="TextBox 14"/>
+          <p:cNvPr id="16" name="TextBox 15"/>
           <p:cNvSpPr txBox="1"/>
           <p:nvPr/>
         </p:nvSpPr>
@@ -35232,7 +36508,7 @@
       </p:sp>
       <p:sp>
         <p:nvSpPr>
-          <p:cNvPr id="16" name="TextBox 15"/>
+          <p:cNvPr id="17" name="TextBox 16"/>
           <p:cNvSpPr txBox="1"/>
           <p:nvPr/>
         </p:nvSpPr>
@@ -35271,7 +36547,7 @@
       </p:sp>
       <p:sp>
         <p:nvSpPr>
-          <p:cNvPr id="17" name="TextBox 16"/>
+          <p:cNvPr id="18" name="TextBox 17"/>
           <p:cNvSpPr txBox="1"/>
           <p:nvPr/>
         </p:nvSpPr>
@@ -35334,9 +36610,33 @@
         <p:nvPr/>
       </p:nvGrpSpPr>
       <p:grpSpPr/>
-      <p:sp>
-        <p:nvSpPr>
-          <p:cNvPr id="2" name="TextBox 1"/>
+      <p:pic>
+        <p:nvPicPr>
+          <p:cNvPr id="2" name="Picture 1" descr="u-azul.png"/>
+          <p:cNvPicPr>
+            <a:picLocks noChangeAspect="1"/>
+          </p:cNvPicPr>
+          <p:nvPr/>
+        </p:nvPicPr>
+        <p:blipFill>
+          <a:blip r:embed="rId2"/>
+          <a:stretch>
+            <a:fillRect/>
+          </a:stretch>
+        </p:blipFill>
+        <p:spPr>
+          <a:xfrm>
+            <a:off x="10744200" y="457200"/>
+            <a:ext cx="342900" cy="342900"/>
+          </a:xfrm>
+          <a:prstGeom prst="rect">
+            <a:avLst/>
+          </a:prstGeom>
+        </p:spPr>
+      </p:pic>
+      <p:sp>
+        <p:nvSpPr>
+          <p:cNvPr id="3" name="TextBox 2"/>
           <p:cNvSpPr txBox="1"/>
           <p:nvPr/>
         </p:nvSpPr>
@@ -35375,14 +36675,14 @@
       </p:sp>
       <p:sp>
         <p:nvSpPr>
-          <p:cNvPr id="3" name="TextBox 2"/>
+          <p:cNvPr id="4" name="TextBox 3"/>
           <p:cNvSpPr txBox="1"/>
           <p:nvPr/>
         </p:nvSpPr>
         <p:spPr>
           <a:xfrm>
             <a:off x="685800" y="838200"/>
-            <a:ext cx="9525000" cy="1524000"/>
+            <a:ext cx="9620250" cy="1524000"/>
           </a:xfrm>
           <a:prstGeom prst="rect">
             <a:avLst/>
@@ -35414,7 +36714,7 @@
       </p:sp>
       <p:sp>
         <p:nvSpPr>
-          <p:cNvPr id="4" name="TextBox 3"/>
+          <p:cNvPr id="5" name="TextBox 4"/>
           <p:cNvSpPr txBox="1"/>
           <p:nvPr/>
         </p:nvSpPr>
@@ -35453,7 +36753,7 @@
       </p:sp>
       <p:sp>
         <p:nvSpPr>
-          <p:cNvPr id="5" name="TextBox 4"/>
+          <p:cNvPr id="6" name="TextBox 5"/>
           <p:cNvSpPr txBox="1"/>
           <p:nvPr/>
         </p:nvSpPr>
@@ -35492,7 +36792,7 @@
       </p:sp>
       <p:sp>
         <p:nvSpPr>
-          <p:cNvPr id="6" name="TextBox 5"/>
+          <p:cNvPr id="7" name="TextBox 6"/>
           <p:cNvSpPr txBox="1"/>
           <p:nvPr/>
         </p:nvSpPr>
@@ -35531,7 +36831,7 @@
       </p:sp>
       <p:sp>
         <p:nvSpPr>
-          <p:cNvPr id="7" name="TextBox 6"/>
+          <p:cNvPr id="8" name="TextBox 7"/>
           <p:cNvSpPr txBox="1"/>
           <p:nvPr/>
         </p:nvSpPr>
@@ -35570,7 +36870,7 @@
       </p:sp>
       <p:sp>
         <p:nvSpPr>
-          <p:cNvPr id="8" name="TextBox 7"/>
+          <p:cNvPr id="9" name="TextBox 8"/>
           <p:cNvSpPr txBox="1"/>
           <p:nvPr/>
         </p:nvSpPr>
@@ -35609,7 +36909,7 @@
       </p:sp>
       <p:sp>
         <p:nvSpPr>
-          <p:cNvPr id="9" name="TextBox 8"/>
+          <p:cNvPr id="10" name="TextBox 9"/>
           <p:cNvSpPr txBox="1"/>
           <p:nvPr/>
         </p:nvSpPr>
@@ -35648,7 +36948,7 @@
       </p:sp>
       <p:sp>
         <p:nvSpPr>
-          <p:cNvPr id="10" name="TextBox 9"/>
+          <p:cNvPr id="11" name="TextBox 10"/>
           <p:cNvSpPr txBox="1"/>
           <p:nvPr/>
         </p:nvSpPr>
@@ -35687,7 +36987,7 @@
       </p:sp>
       <p:sp>
         <p:nvSpPr>
-          <p:cNvPr id="11" name="TextBox 10"/>
+          <p:cNvPr id="12" name="TextBox 11"/>
           <p:cNvSpPr txBox="1"/>
           <p:nvPr/>
         </p:nvSpPr>
@@ -35726,16 +37026,16 @@
       </p:sp>
       <p:sp>
         <p:nvSpPr>
-          <p:cNvPr id="12" name="Rectangle 11"/>
+          <p:cNvPr id="13" name="Donut 12"/>
           <p:cNvSpPr/>
           <p:nvPr/>
         </p:nvSpPr>
         <p:spPr>
           <a:xfrm>
             <a:off x="9124950" y="2000250"/>
-            <a:ext cx="28575" cy="876300"/>
-          </a:xfrm>
-          <a:prstGeom prst="rect">
+            <a:ext cx="142875" cy="142875"/>
+          </a:xfrm>
+          <a:prstGeom prst="donut">
             <a:avLst/>
           </a:prstGeom>
           <a:solidFill>
@@ -35761,6 +37061,89 @@
           </a:fontRef>
         </p:style>
         <p:txBody>
+          <a:bodyPr rtlCol="0" anchor="ctr"/>
+          <a:lstStyle/>
+          <a:p>
+            <a:pPr algn="ctr"/>
+          </a:p>
+        </p:txBody>
+      </p:sp>
+      <p:sp>
+        <p:nvSpPr>
+          <p:cNvPr id="14" name="TextBox 13"/>
+          <p:cNvSpPr txBox="1"/>
+          <p:nvPr/>
+        </p:nvSpPr>
+        <p:spPr>
+          <a:xfrm>
+            <a:off x="9353550" y="2009775"/>
+            <a:ext cx="2152650" cy="167640"/>
+          </a:xfrm>
+          <a:prstGeom prst="rect">
+            <a:avLst/>
+          </a:prstGeom>
+          <a:noFill/>
+        </p:spPr>
+        <p:txBody>
+          <a:bodyPr wrap="square" lIns="0" rIns="0" tIns="0" bIns="0" anchor="t">
+            <a:spAutoFit/>
+          </a:bodyPr>
+          <a:lstStyle/>
+          <a:p>
+            <a:pPr algn="l">
+              <a:lnSpc>
+                <a:spcPct val="120000"/>
+              </a:lnSpc>
+            </a:pPr>
+            <a:r>
+              <a:rPr sz="819" b="1" i="0" spc="120">
+                <a:solidFill>
+                  <a:srgbClr val="E94D1C"/>
+                </a:solidFill>
+                <a:latin typeface="Roboto"/>
+              </a:rPr>
+              <a:t>ONDE ESTAMOS HOJE</a:t>
+            </a:r>
+          </a:p>
+        </p:txBody>
+      </p:sp>
+      <p:sp>
+        <p:nvSpPr>
+          <p:cNvPr id="15" name="Rectangle 14"/>
+          <p:cNvSpPr/>
+          <p:nvPr/>
+        </p:nvSpPr>
+        <p:spPr>
+          <a:xfrm>
+            <a:off x="9124950" y="2247900"/>
+            <a:ext cx="28575" cy="628650"/>
+          </a:xfrm>
+          <a:prstGeom prst="rect">
+            <a:avLst/>
+          </a:prstGeom>
+          <a:solidFill>
+            <a:srgbClr val="E94D1C"/>
+          </a:solidFill>
+          <a:ln>
+            <a:noFill/>
+          </a:ln>
+          <a:effectLst/>
+        </p:spPr>
+        <p:style>
+          <a:lnRef idx="1">
+            <a:schemeClr val="accent1"/>
+          </a:lnRef>
+          <a:fillRef idx="3">
+            <a:schemeClr val="accent1"/>
+          </a:fillRef>
+          <a:effectRef idx="2">
+            <a:schemeClr val="accent1"/>
+          </a:effectRef>
+          <a:fontRef idx="minor">
+            <a:schemeClr val="lt1"/>
+          </a:fontRef>
+        </p:style>
+        <p:txBody>
           <a:bodyPr rtlCol="0" anchor="ctr" wrap="square" lIns="0" rIns="0" tIns="0" bIns="0"/>
           <a:lstStyle/>
           <a:p>
@@ -35770,52 +37153,13 @@
       </p:sp>
       <p:sp>
         <p:nvSpPr>
-          <p:cNvPr id="13" name="TextBox 12"/>
-          <p:cNvSpPr txBox="1"/>
-          <p:nvPr/>
-        </p:nvSpPr>
-        <p:spPr>
-          <a:xfrm>
-            <a:off x="9286875" y="2000250"/>
-            <a:ext cx="2219325" cy="167640"/>
-          </a:xfrm>
-          <a:prstGeom prst="rect">
-            <a:avLst/>
-          </a:prstGeom>
-          <a:noFill/>
-        </p:spPr>
-        <p:txBody>
-          <a:bodyPr wrap="square" lIns="0" rIns="0" tIns="0" bIns="0" anchor="t">
-            <a:spAutoFit/>
-          </a:bodyPr>
-          <a:lstStyle/>
-          <a:p>
-            <a:pPr algn="l">
-              <a:lnSpc>
-                <a:spcPct val="120000"/>
-              </a:lnSpc>
-            </a:pPr>
-            <a:r>
-              <a:rPr sz="819" b="1" i="0" spc="120">
-                <a:solidFill>
-                  <a:srgbClr val="E94D1C"/>
-                </a:solidFill>
-                <a:latin typeface="Roboto"/>
-              </a:rPr>
-              <a:t>ONDE ESTAMOS HOJE</a:t>
-            </a:r>
-          </a:p>
-        </p:txBody>
-      </p:sp>
-      <p:sp>
-        <p:nvSpPr>
-          <p:cNvPr id="14" name="TextBox 13"/>
-          <p:cNvSpPr txBox="1"/>
-          <p:nvPr/>
-        </p:nvSpPr>
-        <p:spPr>
-          <a:xfrm>
-            <a:off x="9286875" y="2209800"/>
+          <p:cNvPr id="16" name="TextBox 15"/>
+          <p:cNvSpPr txBox="1"/>
+          <p:nvPr/>
+        </p:nvSpPr>
+        <p:spPr>
+          <a:xfrm>
+            <a:off x="9286875" y="2286000"/>
             <a:ext cx="2219325" cy="2286000"/>
           </a:xfrm>
           <a:prstGeom prst="rect">
@@ -35889,7 +37233,7 @@
       </p:sp>
       <p:sp>
         <p:nvSpPr>
-          <p:cNvPr id="15" name="TextBox 14"/>
+          <p:cNvPr id="17" name="TextBox 16"/>
           <p:cNvSpPr txBox="1"/>
           <p:nvPr/>
         </p:nvSpPr>
@@ -35928,7 +37272,7 @@
       </p:sp>
       <p:sp>
         <p:nvSpPr>
-          <p:cNvPr id="16" name="TextBox 15"/>
+          <p:cNvPr id="18" name="TextBox 17"/>
           <p:cNvSpPr txBox="1"/>
           <p:nvPr/>
         </p:nvSpPr>
@@ -35991,9 +37335,33 @@
         <p:nvPr/>
       </p:nvGrpSpPr>
       <p:grpSpPr/>
-      <p:sp>
-        <p:nvSpPr>
-          <p:cNvPr id="2" name="TextBox 1"/>
+      <p:pic>
+        <p:nvPicPr>
+          <p:cNvPr id="2" name="Picture 1" descr="u-azul.png"/>
+          <p:cNvPicPr>
+            <a:picLocks noChangeAspect="1"/>
+          </p:cNvPicPr>
+          <p:nvPr/>
+        </p:nvPicPr>
+        <p:blipFill>
+          <a:blip r:embed="rId2"/>
+          <a:stretch>
+            <a:fillRect/>
+          </a:stretch>
+        </p:blipFill>
+        <p:spPr>
+          <a:xfrm>
+            <a:off x="10744200" y="457200"/>
+            <a:ext cx="342900" cy="342900"/>
+          </a:xfrm>
+          <a:prstGeom prst="rect">
+            <a:avLst/>
+          </a:prstGeom>
+        </p:spPr>
+      </p:pic>
+      <p:sp>
+        <p:nvSpPr>
+          <p:cNvPr id="3" name="TextBox 2"/>
           <p:cNvSpPr txBox="1"/>
           <p:nvPr/>
         </p:nvSpPr>
@@ -36032,14 +37400,14 @@
       </p:sp>
       <p:sp>
         <p:nvSpPr>
-          <p:cNvPr id="3" name="TextBox 2"/>
+          <p:cNvPr id="4" name="TextBox 3"/>
           <p:cNvSpPr txBox="1"/>
           <p:nvPr/>
         </p:nvSpPr>
         <p:spPr>
           <a:xfrm>
             <a:off x="685800" y="838200"/>
-            <a:ext cx="9525000" cy="1524000"/>
+            <a:ext cx="9620250" cy="1524000"/>
           </a:xfrm>
           <a:prstGeom prst="rect">
             <a:avLst/>
@@ -36087,7 +37455,7 @@
       </p:sp>
       <p:sp>
         <p:nvSpPr>
-          <p:cNvPr id="4" name="TextBox 3"/>
+          <p:cNvPr id="5" name="TextBox 4"/>
           <p:cNvSpPr txBox="1"/>
           <p:nvPr/>
         </p:nvSpPr>
@@ -36126,7 +37494,7 @@
       </p:sp>
       <p:sp>
         <p:nvSpPr>
-          <p:cNvPr id="5" name="TextBox 4"/>
+          <p:cNvPr id="6" name="TextBox 5"/>
           <p:cNvSpPr txBox="1"/>
           <p:nvPr/>
         </p:nvSpPr>
@@ -36165,7 +37533,7 @@
       </p:sp>
       <p:sp>
         <p:nvSpPr>
-          <p:cNvPr id="6" name="TextBox 5"/>
+          <p:cNvPr id="7" name="TextBox 6"/>
           <p:cNvSpPr txBox="1"/>
           <p:nvPr/>
         </p:nvSpPr>
@@ -36204,7 +37572,7 @@
       </p:sp>
       <p:sp>
         <p:nvSpPr>
-          <p:cNvPr id="7" name="Rectangle 6"/>
+          <p:cNvPr id="8" name="Rectangle 7"/>
           <p:cNvSpPr/>
           <p:nvPr/>
         </p:nvSpPr>
@@ -36248,7 +37616,7 @@
       </p:sp>
       <p:sp>
         <p:nvSpPr>
-          <p:cNvPr id="8" name="TextBox 7"/>
+          <p:cNvPr id="9" name="TextBox 8"/>
           <p:cNvSpPr txBox="1"/>
           <p:nvPr/>
         </p:nvSpPr>
@@ -36287,7 +37655,7 @@
       </p:sp>
       <p:sp>
         <p:nvSpPr>
-          <p:cNvPr id="9" name="TextBox 8"/>
+          <p:cNvPr id="10" name="TextBox 9"/>
           <p:cNvSpPr txBox="1"/>
           <p:nvPr/>
         </p:nvSpPr>
@@ -36326,7 +37694,7 @@
       </p:sp>
       <p:sp>
         <p:nvSpPr>
-          <p:cNvPr id="10" name="TextBox 9"/>
+          <p:cNvPr id="11" name="TextBox 10"/>
           <p:cNvSpPr txBox="1"/>
           <p:nvPr/>
         </p:nvSpPr>
@@ -36365,7 +37733,7 @@
       </p:sp>
       <p:sp>
         <p:nvSpPr>
-          <p:cNvPr id="11" name="Rectangle 10"/>
+          <p:cNvPr id="12" name="Rectangle 11"/>
           <p:cNvSpPr/>
           <p:nvPr/>
         </p:nvSpPr>
@@ -36409,7 +37777,7 @@
       </p:sp>
       <p:sp>
         <p:nvSpPr>
-          <p:cNvPr id="12" name="TextBox 11"/>
+          <p:cNvPr id="13" name="TextBox 12"/>
           <p:cNvSpPr txBox="1"/>
           <p:nvPr/>
         </p:nvSpPr>
@@ -36448,7 +37816,7 @@
       </p:sp>
       <p:sp>
         <p:nvSpPr>
-          <p:cNvPr id="13" name="TextBox 12"/>
+          <p:cNvPr id="14" name="TextBox 13"/>
           <p:cNvSpPr txBox="1"/>
           <p:nvPr/>
         </p:nvSpPr>
@@ -36487,7 +37855,7 @@
       </p:sp>
       <p:sp>
         <p:nvSpPr>
-          <p:cNvPr id="14" name="TextBox 13"/>
+          <p:cNvPr id="15" name="TextBox 14"/>
           <p:cNvSpPr txBox="1"/>
           <p:nvPr/>
         </p:nvSpPr>
@@ -36526,7 +37894,7 @@
       </p:sp>
       <p:sp>
         <p:nvSpPr>
-          <p:cNvPr id="15" name="Rectangle 14"/>
+          <p:cNvPr id="16" name="Rectangle 15"/>
           <p:cNvSpPr/>
           <p:nvPr/>
         </p:nvSpPr>
@@ -36570,7 +37938,7 @@
       </p:sp>
       <p:sp>
         <p:nvSpPr>
-          <p:cNvPr id="16" name="TextBox 15"/>
+          <p:cNvPr id="17" name="TextBox 16"/>
           <p:cNvSpPr txBox="1"/>
           <p:nvPr/>
         </p:nvSpPr>
@@ -36609,7 +37977,7 @@
       </p:sp>
       <p:sp>
         <p:nvSpPr>
-          <p:cNvPr id="17" name="TextBox 16"/>
+          <p:cNvPr id="18" name="TextBox 17"/>
           <p:cNvSpPr txBox="1"/>
           <p:nvPr/>
         </p:nvSpPr>
@@ -36648,7 +38016,7 @@
       </p:sp>
       <p:sp>
         <p:nvSpPr>
-          <p:cNvPr id="18" name="TextBox 17"/>
+          <p:cNvPr id="19" name="TextBox 18"/>
           <p:cNvSpPr txBox="1"/>
           <p:nvPr/>
         </p:nvSpPr>
@@ -36687,7 +38055,7 @@
       </p:sp>
       <p:sp>
         <p:nvSpPr>
-          <p:cNvPr id="19" name="Rectangle 18"/>
+          <p:cNvPr id="20" name="Rectangle 19"/>
           <p:cNvSpPr/>
           <p:nvPr/>
         </p:nvSpPr>
@@ -36731,7 +38099,7 @@
       </p:sp>
       <p:sp>
         <p:nvSpPr>
-          <p:cNvPr id="20" name="TextBox 19"/>
+          <p:cNvPr id="21" name="TextBox 20"/>
           <p:cNvSpPr txBox="1"/>
           <p:nvPr/>
         </p:nvSpPr>
@@ -36770,7 +38138,7 @@
       </p:sp>
       <p:sp>
         <p:nvSpPr>
-          <p:cNvPr id="21" name="TextBox 20"/>
+          <p:cNvPr id="22" name="TextBox 21"/>
           <p:cNvSpPr txBox="1"/>
           <p:nvPr/>
         </p:nvSpPr>
@@ -36809,7 +38177,7 @@
       </p:sp>
       <p:sp>
         <p:nvSpPr>
-          <p:cNvPr id="22" name="TextBox 21"/>
+          <p:cNvPr id="23" name="TextBox 22"/>
           <p:cNvSpPr txBox="1"/>
           <p:nvPr/>
         </p:nvSpPr>
@@ -36848,7 +38216,7 @@
       </p:sp>
       <p:sp>
         <p:nvSpPr>
-          <p:cNvPr id="23" name="Rectangle 22"/>
+          <p:cNvPr id="24" name="Rectangle 23"/>
           <p:cNvSpPr/>
           <p:nvPr/>
         </p:nvSpPr>
@@ -36892,7 +38260,7 @@
       </p:sp>
       <p:sp>
         <p:nvSpPr>
-          <p:cNvPr id="24" name="TextBox 23"/>
+          <p:cNvPr id="25" name="TextBox 24"/>
           <p:cNvSpPr txBox="1"/>
           <p:nvPr/>
         </p:nvSpPr>
@@ -36931,7 +38299,7 @@
       </p:sp>
       <p:sp>
         <p:nvSpPr>
-          <p:cNvPr id="25" name="TextBox 24"/>
+          <p:cNvPr id="26" name="TextBox 25"/>
           <p:cNvSpPr txBox="1"/>
           <p:nvPr/>
         </p:nvSpPr>
@@ -36970,7 +38338,7 @@
       </p:sp>
       <p:sp>
         <p:nvSpPr>
-          <p:cNvPr id="26" name="TextBox 25"/>
+          <p:cNvPr id="27" name="TextBox 26"/>
           <p:cNvSpPr txBox="1"/>
           <p:nvPr/>
         </p:nvSpPr>
@@ -37077,9 +38445,167 @@
           </a:p>
         </p:txBody>
       </p:sp>
-      <p:sp>
-        <p:nvSpPr>
-          <p:cNvPr id="3" name="TextBox 2"/>
+      <p:pic>
+        <p:nvPicPr>
+          <p:cNvPr id="3" name="Picture 2" descr="u-branco.png"/>
+          <p:cNvPicPr>
+            <a:picLocks noChangeAspect="1"/>
+          </p:cNvPicPr>
+          <p:nvPr/>
+        </p:nvPicPr>
+        <p:blipFill>
+          <a:blip r:embed="rId2"/>
+          <a:stretch>
+            <a:fillRect/>
+          </a:stretch>
+        </p:blipFill>
+        <p:spPr>
+          <a:xfrm>
+            <a:off x="10744200" y="457200"/>
+            <a:ext cx="342900" cy="342900"/>
+          </a:xfrm>
+          <a:prstGeom prst="rect">
+            <a:avLst/>
+          </a:prstGeom>
+        </p:spPr>
+      </p:pic>
+      <p:sp>
+        <p:nvSpPr>
+          <p:cNvPr id="4" name="Rounded Rectangle 3"/>
+          <p:cNvSpPr/>
+          <p:nvPr/>
+        </p:nvSpPr>
+        <p:spPr>
+          <a:xfrm>
+            <a:off x="8953500" y="3352800"/>
+            <a:ext cx="990600" cy="190500"/>
+          </a:xfrm>
+          <a:prstGeom prst="roundRect">
+            <a:avLst/>
+          </a:prstGeom>
+          <a:noFill/>
+          <a:ln w="31750">
+            <a:solidFill>
+              <a:srgbClr val="E94D1C"/>
+            </a:solidFill>
+          </a:ln>
+          <a:effectLst/>
+        </p:spPr>
+        <p:style>
+          <a:lnRef idx="1">
+            <a:schemeClr val="accent1"/>
+          </a:lnRef>
+          <a:fillRef idx="3">
+            <a:schemeClr val="accent1"/>
+          </a:fillRef>
+          <a:effectRef idx="2">
+            <a:schemeClr val="accent1"/>
+          </a:effectRef>
+          <a:fontRef idx="minor">
+            <a:schemeClr val="lt1"/>
+          </a:fontRef>
+        </p:style>
+        <p:txBody>
+          <a:bodyPr rtlCol="0" anchor="ctr"/>
+          <a:lstStyle/>
+          <a:p>
+            <a:pPr algn="ctr"/>
+          </a:p>
+        </p:txBody>
+      </p:sp>
+      <p:sp>
+        <p:nvSpPr>
+          <p:cNvPr id="5" name="Rounded Rectangle 4"/>
+          <p:cNvSpPr/>
+          <p:nvPr/>
+        </p:nvSpPr>
+        <p:spPr>
+          <a:xfrm>
+            <a:off x="9039225" y="3105150"/>
+            <a:ext cx="990600" cy="190500"/>
+          </a:xfrm>
+          <a:prstGeom prst="roundRect">
+            <a:avLst/>
+          </a:prstGeom>
+          <a:noFill/>
+          <a:ln w="31750">
+            <a:solidFill>
+              <a:srgbClr val="E94D1C"/>
+            </a:solidFill>
+          </a:ln>
+          <a:effectLst/>
+        </p:spPr>
+        <p:style>
+          <a:lnRef idx="1">
+            <a:schemeClr val="accent1"/>
+          </a:lnRef>
+          <a:fillRef idx="3">
+            <a:schemeClr val="accent1"/>
+          </a:fillRef>
+          <a:effectRef idx="2">
+            <a:schemeClr val="accent1"/>
+          </a:effectRef>
+          <a:fontRef idx="minor">
+            <a:schemeClr val="lt1"/>
+          </a:fontRef>
+        </p:style>
+        <p:txBody>
+          <a:bodyPr rtlCol="0" anchor="ctr"/>
+          <a:lstStyle/>
+          <a:p>
+            <a:pPr algn="ctr"/>
+          </a:p>
+        </p:txBody>
+      </p:sp>
+      <p:sp>
+        <p:nvSpPr>
+          <p:cNvPr id="6" name="Rounded Rectangle 5"/>
+          <p:cNvSpPr/>
+          <p:nvPr/>
+        </p:nvSpPr>
+        <p:spPr>
+          <a:xfrm>
+            <a:off x="9124950" y="2857500"/>
+            <a:ext cx="990600" cy="190500"/>
+          </a:xfrm>
+          <a:prstGeom prst="roundRect">
+            <a:avLst/>
+          </a:prstGeom>
+          <a:solidFill>
+            <a:srgbClr val="E94D1C"/>
+          </a:solidFill>
+          <a:ln w="31750">
+            <a:solidFill>
+              <a:srgbClr val="E94D1C"/>
+            </a:solidFill>
+          </a:ln>
+          <a:effectLst/>
+        </p:spPr>
+        <p:style>
+          <a:lnRef idx="1">
+            <a:schemeClr val="accent1"/>
+          </a:lnRef>
+          <a:fillRef idx="3">
+            <a:schemeClr val="accent1"/>
+          </a:fillRef>
+          <a:effectRef idx="2">
+            <a:schemeClr val="accent1"/>
+          </a:effectRef>
+          <a:fontRef idx="minor">
+            <a:schemeClr val="lt1"/>
+          </a:fontRef>
+        </p:style>
+        <p:txBody>
+          <a:bodyPr rtlCol="0" anchor="ctr"/>
+          <a:lstStyle/>
+          <a:p>
+            <a:pPr algn="ctr"/>
+          </a:p>
+        </p:txBody>
+      </p:sp>
+      <p:sp>
+        <p:nvSpPr>
+          <p:cNvPr id="7" name="TextBox 6"/>
           <p:cNvSpPr txBox="1"/>
           <p:nvPr/>
         </p:nvSpPr>
@@ -37118,7 +38644,7 @@
       </p:sp>
       <p:sp>
         <p:nvSpPr>
-          <p:cNvPr id="4" name="TextBox 3"/>
+          <p:cNvPr id="8" name="TextBox 7"/>
           <p:cNvSpPr txBox="1"/>
           <p:nvPr/>
         </p:nvSpPr>
@@ -37157,7 +38683,7 @@
       </p:sp>
       <p:sp>
         <p:nvSpPr>
-          <p:cNvPr id="5" name="TextBox 4"/>
+          <p:cNvPr id="9" name="TextBox 8"/>
           <p:cNvSpPr txBox="1"/>
           <p:nvPr/>
         </p:nvSpPr>
@@ -37196,7 +38722,7 @@
       </p:sp>
       <p:sp>
         <p:nvSpPr>
-          <p:cNvPr id="6" name="TextBox 5"/>
+          <p:cNvPr id="10" name="TextBox 9"/>
           <p:cNvSpPr txBox="1"/>
           <p:nvPr/>
         </p:nvSpPr>
@@ -37235,7 +38761,7 @@
       </p:sp>
       <p:sp>
         <p:nvSpPr>
-          <p:cNvPr id="7" name="TextBox 6"/>
+          <p:cNvPr id="11" name="TextBox 10"/>
           <p:cNvSpPr txBox="1"/>
           <p:nvPr/>
         </p:nvSpPr>
@@ -37274,7 +38800,7 @@
       </p:sp>
       <p:sp>
         <p:nvSpPr>
-          <p:cNvPr id="8" name="TextBox 7"/>
+          <p:cNvPr id="12" name="TextBox 11"/>
           <p:cNvSpPr txBox="1"/>
           <p:nvPr/>
         </p:nvSpPr>
@@ -37337,9 +38863,33 @@
         <p:nvPr/>
       </p:nvGrpSpPr>
       <p:grpSpPr/>
-      <p:sp>
-        <p:nvSpPr>
-          <p:cNvPr id="2" name="TextBox 1"/>
+      <p:pic>
+        <p:nvPicPr>
+          <p:cNvPr id="2" name="Picture 1" descr="u-azul.png"/>
+          <p:cNvPicPr>
+            <a:picLocks noChangeAspect="1"/>
+          </p:cNvPicPr>
+          <p:nvPr/>
+        </p:nvPicPr>
+        <p:blipFill>
+          <a:blip r:embed="rId2"/>
+          <a:stretch>
+            <a:fillRect/>
+          </a:stretch>
+        </p:blipFill>
+        <p:spPr>
+          <a:xfrm>
+            <a:off x="10744200" y="457200"/>
+            <a:ext cx="342900" cy="342900"/>
+          </a:xfrm>
+          <a:prstGeom prst="rect">
+            <a:avLst/>
+          </a:prstGeom>
+        </p:spPr>
+      </p:pic>
+      <p:sp>
+        <p:nvSpPr>
+          <p:cNvPr id="3" name="TextBox 2"/>
           <p:cNvSpPr txBox="1"/>
           <p:nvPr/>
         </p:nvSpPr>
@@ -37378,14 +38928,14 @@
       </p:sp>
       <p:sp>
         <p:nvSpPr>
-          <p:cNvPr id="3" name="TextBox 2"/>
+          <p:cNvPr id="4" name="TextBox 3"/>
           <p:cNvSpPr txBox="1"/>
           <p:nvPr/>
         </p:nvSpPr>
         <p:spPr>
           <a:xfrm>
             <a:off x="685800" y="838200"/>
-            <a:ext cx="9525000" cy="1524000"/>
+            <a:ext cx="9620250" cy="1524000"/>
           </a:xfrm>
           <a:prstGeom prst="rect">
             <a:avLst/>
@@ -37417,7 +38967,7 @@
       </p:sp>
       <p:sp>
         <p:nvSpPr>
-          <p:cNvPr id="4" name="Rectangle 3"/>
+          <p:cNvPr id="5" name="Rectangle 4"/>
           <p:cNvSpPr/>
           <p:nvPr/>
         </p:nvSpPr>
@@ -37461,7 +39011,7 @@
       </p:sp>
       <p:sp>
         <p:nvSpPr>
-          <p:cNvPr id="5" name="Rounded Rectangle 4"/>
+          <p:cNvPr id="6" name="Rounded Rectangle 5"/>
           <p:cNvSpPr/>
           <p:nvPr/>
         </p:nvSpPr>
@@ -37507,7 +39057,7 @@
       </p:sp>
       <p:sp>
         <p:nvSpPr>
-          <p:cNvPr id="6" name="TextBox 5"/>
+          <p:cNvPr id="7" name="TextBox 6"/>
           <p:cNvSpPr txBox="1"/>
           <p:nvPr/>
         </p:nvSpPr>
@@ -37546,7 +39096,7 @@
       </p:sp>
       <p:sp>
         <p:nvSpPr>
-          <p:cNvPr id="7" name="TextBox 6"/>
+          <p:cNvPr id="8" name="TextBox 7"/>
           <p:cNvSpPr txBox="1"/>
           <p:nvPr/>
         </p:nvSpPr>
@@ -37585,7 +39135,7 @@
       </p:sp>
       <p:sp>
         <p:nvSpPr>
-          <p:cNvPr id="8" name="Rounded Rectangle 7"/>
+          <p:cNvPr id="9" name="Rounded Rectangle 8"/>
           <p:cNvSpPr/>
           <p:nvPr/>
         </p:nvSpPr>
@@ -37631,7 +39181,7 @@
       </p:sp>
       <p:sp>
         <p:nvSpPr>
-          <p:cNvPr id="9" name="TextBox 8"/>
+          <p:cNvPr id="10" name="TextBox 9"/>
           <p:cNvSpPr txBox="1"/>
           <p:nvPr/>
         </p:nvSpPr>
@@ -37670,7 +39220,7 @@
       </p:sp>
       <p:sp>
         <p:nvSpPr>
-          <p:cNvPr id="10" name="TextBox 9"/>
+          <p:cNvPr id="11" name="TextBox 10"/>
           <p:cNvSpPr txBox="1"/>
           <p:nvPr/>
         </p:nvSpPr>
@@ -37709,7 +39259,7 @@
       </p:sp>
       <p:sp>
         <p:nvSpPr>
-          <p:cNvPr id="11" name="Rounded Rectangle 10"/>
+          <p:cNvPr id="12" name="Rounded Rectangle 11"/>
           <p:cNvSpPr/>
           <p:nvPr/>
         </p:nvSpPr>
@@ -37755,7 +39305,7 @@
       </p:sp>
       <p:sp>
         <p:nvSpPr>
-          <p:cNvPr id="12" name="TextBox 11"/>
+          <p:cNvPr id="13" name="TextBox 12"/>
           <p:cNvSpPr txBox="1"/>
           <p:nvPr/>
         </p:nvSpPr>
@@ -37794,7 +39344,7 @@
       </p:sp>
       <p:sp>
         <p:nvSpPr>
-          <p:cNvPr id="13" name="TextBox 12"/>
+          <p:cNvPr id="14" name="TextBox 13"/>
           <p:cNvSpPr txBox="1"/>
           <p:nvPr/>
         </p:nvSpPr>
@@ -37833,7 +39383,7 @@
       </p:sp>
       <p:sp>
         <p:nvSpPr>
-          <p:cNvPr id="14" name="Rounded Rectangle 13"/>
+          <p:cNvPr id="15" name="Rounded Rectangle 14"/>
           <p:cNvSpPr/>
           <p:nvPr/>
         </p:nvSpPr>
@@ -37879,7 +39429,7 @@
       </p:sp>
       <p:sp>
         <p:nvSpPr>
-          <p:cNvPr id="15" name="TextBox 14"/>
+          <p:cNvPr id="16" name="TextBox 15"/>
           <p:cNvSpPr txBox="1"/>
           <p:nvPr/>
         </p:nvSpPr>
@@ -37918,7 +39468,7 @@
       </p:sp>
       <p:sp>
         <p:nvSpPr>
-          <p:cNvPr id="16" name="TextBox 15"/>
+          <p:cNvPr id="17" name="TextBox 16"/>
           <p:cNvSpPr txBox="1"/>
           <p:nvPr/>
         </p:nvSpPr>
@@ -37957,7 +39507,7 @@
       </p:sp>
       <p:sp>
         <p:nvSpPr>
-          <p:cNvPr id="17" name="Rounded Rectangle 16"/>
+          <p:cNvPr id="18" name="Rounded Rectangle 17"/>
           <p:cNvSpPr/>
           <p:nvPr/>
         </p:nvSpPr>
@@ -38003,7 +39553,7 @@
       </p:sp>
       <p:sp>
         <p:nvSpPr>
-          <p:cNvPr id="18" name="TextBox 17"/>
+          <p:cNvPr id="19" name="TextBox 18"/>
           <p:cNvSpPr txBox="1"/>
           <p:nvPr/>
         </p:nvSpPr>
@@ -38042,7 +39592,7 @@
       </p:sp>
       <p:sp>
         <p:nvSpPr>
-          <p:cNvPr id="19" name="TextBox 18"/>
+          <p:cNvPr id="20" name="TextBox 19"/>
           <p:cNvSpPr txBox="1"/>
           <p:nvPr/>
         </p:nvSpPr>
@@ -38081,7 +39631,7 @@
       </p:sp>
       <p:sp>
         <p:nvSpPr>
-          <p:cNvPr id="20" name="Rounded Rectangle 19"/>
+          <p:cNvPr id="21" name="Rounded Rectangle 20"/>
           <p:cNvSpPr/>
           <p:nvPr/>
         </p:nvSpPr>
@@ -38127,7 +39677,7 @@
       </p:sp>
       <p:sp>
         <p:nvSpPr>
-          <p:cNvPr id="21" name="TextBox 20"/>
+          <p:cNvPr id="22" name="TextBox 21"/>
           <p:cNvSpPr txBox="1"/>
           <p:nvPr/>
         </p:nvSpPr>
@@ -38166,7 +39716,7 @@
       </p:sp>
       <p:sp>
         <p:nvSpPr>
-          <p:cNvPr id="22" name="TextBox 21"/>
+          <p:cNvPr id="23" name="TextBox 22"/>
           <p:cNvSpPr txBox="1"/>
           <p:nvPr/>
         </p:nvSpPr>
@@ -38205,7 +39755,7 @@
       </p:sp>
       <p:sp>
         <p:nvSpPr>
-          <p:cNvPr id="23" name="Rounded Rectangle 22"/>
+          <p:cNvPr id="24" name="Rounded Rectangle 23"/>
           <p:cNvSpPr/>
           <p:nvPr/>
         </p:nvSpPr>
@@ -38251,7 +39801,7 @@
       </p:sp>
       <p:sp>
         <p:nvSpPr>
-          <p:cNvPr id="24" name="TextBox 23"/>
+          <p:cNvPr id="25" name="TextBox 24"/>
           <p:cNvSpPr txBox="1"/>
           <p:nvPr/>
         </p:nvSpPr>
@@ -38290,7 +39840,7 @@
       </p:sp>
       <p:sp>
         <p:nvSpPr>
-          <p:cNvPr id="25" name="TextBox 24"/>
+          <p:cNvPr id="26" name="TextBox 25"/>
           <p:cNvSpPr txBox="1"/>
           <p:nvPr/>
         </p:nvSpPr>
@@ -38329,7 +39879,7 @@
       </p:sp>
       <p:sp>
         <p:nvSpPr>
-          <p:cNvPr id="26" name="Rectangle 25"/>
+          <p:cNvPr id="27" name="Rectangle 26"/>
           <p:cNvSpPr/>
           <p:nvPr/>
         </p:nvSpPr>
@@ -38373,7 +39923,7 @@
       </p:sp>
       <p:sp>
         <p:nvSpPr>
-          <p:cNvPr id="27" name="TextBox 26"/>
+          <p:cNvPr id="28" name="TextBox 27"/>
           <p:cNvSpPr txBox="1"/>
           <p:nvPr/>
         </p:nvSpPr>
@@ -38412,7 +39962,7 @@
       </p:sp>
       <p:sp>
         <p:nvSpPr>
-          <p:cNvPr id="28" name="TextBox 27"/>
+          <p:cNvPr id="29" name="TextBox 28"/>
           <p:cNvSpPr txBox="1"/>
           <p:nvPr/>
         </p:nvSpPr>
@@ -38451,7 +40001,7 @@
       </p:sp>
       <p:sp>
         <p:nvSpPr>
-          <p:cNvPr id="29" name="TextBox 28"/>
+          <p:cNvPr id="30" name="TextBox 29"/>
           <p:cNvSpPr txBox="1"/>
           <p:nvPr/>
         </p:nvSpPr>
@@ -38514,9 +40064,33 @@
         <p:nvPr/>
       </p:nvGrpSpPr>
       <p:grpSpPr/>
-      <p:sp>
-        <p:nvSpPr>
-          <p:cNvPr id="2" name="TextBox 1"/>
+      <p:pic>
+        <p:nvPicPr>
+          <p:cNvPr id="2" name="Picture 1" descr="u-azul.png"/>
+          <p:cNvPicPr>
+            <a:picLocks noChangeAspect="1"/>
+          </p:cNvPicPr>
+          <p:nvPr/>
+        </p:nvPicPr>
+        <p:blipFill>
+          <a:blip r:embed="rId2"/>
+          <a:stretch>
+            <a:fillRect/>
+          </a:stretch>
+        </p:blipFill>
+        <p:spPr>
+          <a:xfrm>
+            <a:off x="10744200" y="457200"/>
+            <a:ext cx="342900" cy="342900"/>
+          </a:xfrm>
+          <a:prstGeom prst="rect">
+            <a:avLst/>
+          </a:prstGeom>
+        </p:spPr>
+      </p:pic>
+      <p:sp>
+        <p:nvSpPr>
+          <p:cNvPr id="3" name="TextBox 2"/>
           <p:cNvSpPr txBox="1"/>
           <p:nvPr/>
         </p:nvSpPr>
@@ -38555,14 +40129,14 @@
       </p:sp>
       <p:sp>
         <p:nvSpPr>
-          <p:cNvPr id="3" name="TextBox 2"/>
+          <p:cNvPr id="4" name="TextBox 3"/>
           <p:cNvSpPr txBox="1"/>
           <p:nvPr/>
         </p:nvSpPr>
         <p:spPr>
           <a:xfrm>
             <a:off x="685800" y="838200"/>
-            <a:ext cx="9525000" cy="1524000"/>
+            <a:ext cx="9620250" cy="1524000"/>
           </a:xfrm>
           <a:prstGeom prst="rect">
             <a:avLst/>
@@ -38594,7 +40168,7 @@
       </p:sp>
       <p:sp>
         <p:nvSpPr>
-          <p:cNvPr id="4" name="TextBox 3"/>
+          <p:cNvPr id="5" name="TextBox 4"/>
           <p:cNvSpPr txBox="1"/>
           <p:nvPr/>
         </p:nvSpPr>
@@ -38633,7 +40207,7 @@
       </p:sp>
       <p:sp>
         <p:nvSpPr>
-          <p:cNvPr id="5" name="Rectangle 4"/>
+          <p:cNvPr id="6" name="Rectangle 5"/>
           <p:cNvSpPr/>
           <p:nvPr/>
         </p:nvSpPr>
@@ -38677,7 +40251,7 @@
       </p:sp>
       <p:sp>
         <p:nvSpPr>
-          <p:cNvPr id="6" name="TextBox 5"/>
+          <p:cNvPr id="7" name="TextBox 6"/>
           <p:cNvSpPr txBox="1"/>
           <p:nvPr/>
         </p:nvSpPr>
@@ -38716,7 +40290,7 @@
       </p:sp>
       <p:sp>
         <p:nvSpPr>
-          <p:cNvPr id="7" name="TextBox 6"/>
+          <p:cNvPr id="8" name="TextBox 7"/>
           <p:cNvSpPr txBox="1"/>
           <p:nvPr/>
         </p:nvSpPr>
@@ -38755,7 +40329,7 @@
       </p:sp>
       <p:sp>
         <p:nvSpPr>
-          <p:cNvPr id="8" name="TextBox 7"/>
+          <p:cNvPr id="9" name="TextBox 8"/>
           <p:cNvSpPr txBox="1"/>
           <p:nvPr/>
         </p:nvSpPr>
@@ -38794,7 +40368,7 @@
       </p:sp>
       <p:sp>
         <p:nvSpPr>
-          <p:cNvPr id="9" name="Rectangle 8"/>
+          <p:cNvPr id="10" name="Rectangle 9"/>
           <p:cNvSpPr/>
           <p:nvPr/>
         </p:nvSpPr>
@@ -38838,7 +40412,7 @@
       </p:sp>
       <p:sp>
         <p:nvSpPr>
-          <p:cNvPr id="10" name="TextBox 9"/>
+          <p:cNvPr id="11" name="TextBox 10"/>
           <p:cNvSpPr txBox="1"/>
           <p:nvPr/>
         </p:nvSpPr>
@@ -38877,7 +40451,7 @@
       </p:sp>
       <p:sp>
         <p:nvSpPr>
-          <p:cNvPr id="11" name="TextBox 10"/>
+          <p:cNvPr id="12" name="TextBox 11"/>
           <p:cNvSpPr txBox="1"/>
           <p:nvPr/>
         </p:nvSpPr>
@@ -38916,7 +40490,7 @@
       </p:sp>
       <p:sp>
         <p:nvSpPr>
-          <p:cNvPr id="12" name="TextBox 11"/>
+          <p:cNvPr id="13" name="TextBox 12"/>
           <p:cNvSpPr txBox="1"/>
           <p:nvPr/>
         </p:nvSpPr>
@@ -38955,7 +40529,7 @@
       </p:sp>
       <p:sp>
         <p:nvSpPr>
-          <p:cNvPr id="13" name="TextBox 12"/>
+          <p:cNvPr id="14" name="TextBox 13"/>
           <p:cNvSpPr txBox="1"/>
           <p:nvPr/>
         </p:nvSpPr>

--- a/trabalhos/T1-Docker-Invite-People.pptx
+++ b/trabalhos/T1-Docker-Invite-People.pptx
@@ -11702,7 +11702,7 @@
                 </a:solidFill>
                 <a:latin typeface="Roboto"/>
               </a:rPr>
-              <a:t>Do diagrama</a:t>
+              <a:t>Docker e</a:t>
             </a:r>
           </a:p>
           <a:p>
@@ -11718,7 +11718,7 @@
                 </a:solidFill>
                 <a:latin typeface="Roboto"/>
               </a:rPr>
-              <a:t>à execução</a:t>
+              <a:t>conteinerização</a:t>
             </a:r>
           </a:p>
         </p:txBody>
@@ -11803,7 +11803,7 @@
                 </a:solidFill>
                 <a:latin typeface="Roboto"/>
               </a:rPr>
-              <a:t>Conteinerização como decisão de arquitetura sobre empacotamento e implantação</a:t>
+              <a:t>Como o empacotamento em containers se aplica ao projeto Invite People</a:t>
             </a:r>
           </a:p>
         </p:txBody>
@@ -12174,7 +12174,7 @@
                 </a:solidFill>
                 <a:latin typeface="Roboto"/>
               </a:rPr>
-              <a:t>NÃO EXISTE CONTAINER NO KERNEL</a:t>
+              <a:t>O QUE O KERNEL ENXERGA</a:t>
             </a:r>
           </a:p>
         </p:txBody>
@@ -12213,7 +12213,7 @@
                 </a:solidFill>
                 <a:latin typeface="Roboto"/>
               </a:rPr>
-              <a:t>O que existe é um processo comum</a:t>
+              <a:t>Um container é um processo</a:t>
             </a:r>
           </a:p>
           <a:p>
@@ -12229,7 +12229,7 @@
                 </a:solidFill>
                 <a:latin typeface="Roboto"/>
               </a:rPr>
-              <a:t>com a visão restringida</a:t>
+              <a:t>com a visão restringida por namespaces</a:t>
             </a:r>
           </a:p>
         </p:txBody>
@@ -12995,7 +12995,7 @@
                 </a:solidFill>
                 <a:latin typeface="Roboto"/>
               </a:rPr>
-              <a:t>DOIS MECANISMOS, DOIS PAPÉIS</a:t>
+              <a:t>NAMESPACES E CGROUPS</a:t>
             </a:r>
           </a:p>
         </p:txBody>
@@ -13929,7 +13929,7 @@
                 </a:solidFill>
                 <a:latin typeface="Roboto"/>
               </a:rPr>
-              <a:t>A IMAGEM POR DENTRO</a:t>
+              <a:t>ESTRUTURA DA IMAGEM</a:t>
             </a:r>
           </a:p>
         </p:txBody>
@@ -13968,7 +13968,23 @@
                 </a:solidFill>
                 <a:latin typeface="Roboto"/>
               </a:rPr>
-              <a:t>Camadas empilhadas, uma só de escrita</a:t>
+              <a:t>Camadas somente leitura</a:t>
+            </a:r>
+          </a:p>
+          <a:p>
+            <a:pPr>
+              <a:lnSpc>
+                <a:spcPct val="104000"/>
+              </a:lnSpc>
+            </a:pPr>
+            <a:r>
+              <a:rPr sz="3000" b="1" i="0">
+                <a:solidFill>
+                  <a:srgbClr val="21049A"/>
+                </a:solidFill>
+                <a:latin typeface="Roboto"/>
+              </a:rPr>
+              <a:t>e a camada de escrita</a:t>
             </a:r>
           </a:p>
         </p:txBody>
@@ -14831,7 +14847,23 @@
                 </a:solidFill>
                 <a:latin typeface="Roboto"/>
               </a:rPr>
-              <a:t>Do comando ao processo</a:t>
+              <a:t>CLI, dockerd, containerd,</a:t>
+            </a:r>
+          </a:p>
+          <a:p>
+            <a:pPr>
+              <a:lnSpc>
+                <a:spcPct val="104000"/>
+              </a:lnSpc>
+            </a:pPr>
+            <a:r>
+              <a:rPr sz="3000" b="1" i="0">
+                <a:solidFill>
+                  <a:srgbClr val="21049A"/>
+                </a:solidFill>
+                <a:latin typeface="Roboto"/>
+              </a:rPr>
+              <a:t>shim e runc</a:t>
             </a:r>
           </a:p>
         </p:txBody>
@@ -15875,7 +15907,7 @@
                 </a:solidFill>
                 <a:latin typeface="Roboto"/>
               </a:rPr>
-              <a:t>TRÊS PAREDES, EM ORDEM</a:t>
+              <a:t>RESTRIÇÃO DE PRIVILÉGIO</a:t>
             </a:r>
           </a:p>
         </p:txBody>
@@ -15914,7 +15946,7 @@
                 </a:solidFill>
                 <a:latin typeface="Roboto"/>
               </a:rPr>
-              <a:t>O que separa o container do host</a:t>
+              <a:t>Capabilities, seccomp e LSM</a:t>
             </a:r>
           </a:p>
         </p:txBody>
@@ -16594,7 +16626,7 @@
                 </a:solidFill>
                 <a:latin typeface="Roboto"/>
               </a:rPr>
-              <a:t>Docker é a implementação</a:t>
+              <a:t>Docker implementa as</a:t>
             </a:r>
           </a:p>
           <a:p>
@@ -16610,23 +16642,7 @@
                 </a:solidFill>
                 <a:latin typeface="Roboto"/>
               </a:rPr>
-              <a:t>de um padrão aberto,</a:t>
-            </a:r>
-          </a:p>
-          <a:p>
-            <a:pPr>
-              <a:lnSpc>
-                <a:spcPct val="106000"/>
-              </a:lnSpc>
-            </a:pPr>
-            <a:r>
-              <a:rPr sz="3450" b="1" i="0">
-                <a:solidFill>
-                  <a:srgbClr val="FFFFFF"/>
-                </a:solidFill>
-                <a:latin typeface="Roboto"/>
-              </a:rPr>
-              <a:t>não o padrão.</a:t>
+              <a:t>especificações da OCI</a:t>
             </a:r>
           </a:p>
         </p:txBody>
@@ -16665,7 +16681,7 @@
                 </a:solidFill>
                 <a:latin typeface="Roboto"/>
               </a:rPr>
-              <a:t>Fundada em 2015 sob a Linux Foundation, com a Runtime Spec, a Image Spec e a Distribution Spec. O runc é trocável por crun, gVisor ou Kata. O engine é trocável por Podman. É a substituibilidade por compatibilidade de interface da Aula 05, acontecendo dentro da própria pilha da ferramenta.</a:t>
+              <a:t>Fundada em 2015 sob a Linux Foundation, com a Runtime Spec, a Image Spec e a Distribution Spec. O runc é trocável por crun, gVisor ou Kata. O engine é trocável por Podman. É um exemplo da substituibilidade por compatibilidade de interface da Aula 05.</a:t>
             </a:r>
           </a:p>
         </p:txBody>
@@ -17125,7 +17141,7 @@
                 </a:solidFill>
                 <a:latin typeface="Roboto"/>
               </a:rPr>
-              <a:t>Do diagrama para o arquivo, com o número de cada task do board na tela.</a:t>
+              <a:t>Mapeamento entre os diagramas da Sprint 2 e o arquivo de compose, com o número de cada task.</a:t>
             </a:r>
           </a:p>
         </p:txBody>
@@ -17292,7 +17308,7 @@
                 </a:solidFill>
                 <a:latin typeface="Roboto"/>
               </a:rPr>
-              <a:t>VOCABULÁRIO ANTES DO MAPEAMENTO</a:t>
+              <a:t>VOCABULÁRIO</a:t>
             </a:r>
           </a:p>
         </p:txBody>
@@ -17331,7 +17347,7 @@
                 </a:solidFill>
                 <a:latin typeface="Roboto"/>
               </a:rPr>
-              <a:t>Cinco termos que não podem</a:t>
+              <a:t>Componente, artefato, nó,</a:t>
             </a:r>
           </a:p>
           <a:p>
@@ -17347,7 +17363,7 @@
                 </a:solidFill>
                 <a:latin typeface="Roboto"/>
               </a:rPr>
-              <a:t>ser trocados entre si</a:t>
+              <a:t>imagem e container</a:t>
             </a:r>
           </a:p>
         </p:txBody>
@@ -18307,7 +18323,7 @@
                 </a:solidFill>
                 <a:latin typeface="Roboto"/>
               </a:rPr>
-              <a:t>LAYER CONTRA TIER, AULA 03</a:t>
+              <a:t>CAMADA LÓGICA E TIER, AULA 03</a:t>
             </a:r>
           </a:p>
         </p:txBody>
@@ -20152,7 +20168,7 @@
                 </a:solidFill>
                 <a:latin typeface="Roboto"/>
               </a:rPr>
-              <a:t>A MODELAGEM CORRETA</a:t>
+              <a:t>MODELAGEM UML</a:t>
             </a:r>
           </a:p>
         </p:txBody>
@@ -21036,7 +21052,7 @@
                 </a:solidFill>
                 <a:latin typeface="Roboto"/>
               </a:rPr>
-              <a:t>Que conceito da disciplina esta frase define?</a:t>
+              <a:t>FARIAS, K. Aula 05, Arquiteturas Baseadas em Componentes.</a:t>
             </a:r>
           </a:p>
         </p:txBody>
@@ -21242,7 +21258,7 @@
                 </a:solidFill>
                 <a:latin typeface="Roboto"/>
               </a:rPr>
-              <a:t>O compose é a forma executável</a:t>
+              <a:t>Mapeamento dos componentes</a:t>
             </a:r>
           </a:p>
           <a:p>
@@ -21258,7 +21274,7 @@
                 </a:solidFill>
                 <a:latin typeface="Roboto"/>
               </a:rPr>
-              <a:t>do diagrama que temos que desenhar</a:t>
+              <a:t>para os nós do diagrama</a:t>
             </a:r>
           </a:p>
         </p:txBody>
@@ -22712,7 +22728,7 @@
                 </a:solidFill>
                 <a:latin typeface="Roboto"/>
               </a:rPr>
-              <a:t>NOTAÇÃO DE COMPONENTE SOBRE O ARQUIVO</a:t>
+              <a:t>INTERFACES NO ARQUIVO DE COMPOSE</a:t>
             </a:r>
           </a:p>
         </p:txBody>
@@ -22751,7 +22767,7 @@
                 </a:solidFill>
                 <a:latin typeface="Roboto"/>
               </a:rPr>
-              <a:t>Pirulito e soquete</a:t>
+              <a:t>Onde ficam a interface</a:t>
             </a:r>
           </a:p>
           <a:p>
@@ -22767,7 +22783,7 @@
                 </a:solidFill>
                 <a:latin typeface="Roboto"/>
               </a:rPr>
-              <a:t>estão no compose</a:t>
+              <a:t>provida e a requerida</a:t>
             </a:r>
           </a:p>
         </p:txBody>
@@ -24413,7 +24429,7 @@
                 </a:solidFill>
                 <a:latin typeface="Roboto"/>
               </a:rPr>
-              <a:t>Regra na wiki depende de revisão. Regra virando topologia é sustentada pela estrutura, contra a degradação arquitetural da Aula 02.</a:t>
+              <a:t>Uma regra escrita na wiki depende de alguém revisar. A mesma regra na topologia é verificada pela estrutura, o que reduz a degradação arquitetural da Aula 02.</a:t>
             </a:r>
           </a:p>
         </p:txBody>
@@ -24819,7 +24835,7 @@
                 </a:solidFill>
                 <a:latin typeface="Roboto"/>
               </a:rPr>
-              <a:t>A PERGUNTA QUE VOLTA PARA O PROJETO</a:t>
+              <a:t>CONSEQUÊNCIA PARA O PROJETO</a:t>
             </a:r>
           </a:p>
         </p:txBody>
@@ -25981,7 +25997,23 @@
                 </a:solidFill>
                 <a:latin typeface="Roboto"/>
               </a:rPr>
-              <a:t>Persistência é decisão declarada</a:t>
+              <a:t>Volume nomeado e persistência</a:t>
+            </a:r>
+          </a:p>
+          <a:p>
+            <a:pPr>
+              <a:lnSpc>
+                <a:spcPct val="104000"/>
+              </a:lnSpc>
+            </a:pPr>
+            <a:r>
+              <a:rPr sz="3000" b="1" i="0">
+                <a:solidFill>
+                  <a:srgbClr val="21049A"/>
+                </a:solidFill>
+                <a:latin typeface="Roboto"/>
+              </a:rPr>
+              <a:t>entre execuções</a:t>
             </a:r>
           </a:p>
         </p:txBody>
@@ -26825,7 +26857,7 @@
                 </a:solidFill>
                 <a:latin typeface="Roboto"/>
               </a:rPr>
-              <a:t>Removeram o dockershim</a:t>
+              <a:t>A remoção do dockershim</a:t>
             </a:r>
           </a:p>
           <a:p>
@@ -26841,23 +26873,7 @@
                 </a:solidFill>
                 <a:latin typeface="Roboto"/>
               </a:rPr>
-              <a:t>e nenhuma imagem parou</a:t>
-            </a:r>
-          </a:p>
-          <a:p>
-            <a:pPr>
-              <a:lnSpc>
-                <a:spcPct val="106000"/>
-              </a:lnSpc>
-            </a:pPr>
-            <a:r>
-              <a:rPr sz="3600" b="1" i="0">
-                <a:solidFill>
-                  <a:srgbClr val="FFFFFF"/>
-                </a:solidFill>
-                <a:latin typeface="Roboto"/>
-              </a:rPr>
-              <a:t>de funcionar.</a:t>
+              <a:t>no Kubernetes 1.24</a:t>
             </a:r>
           </a:p>
         </p:txBody>
@@ -26896,7 +26912,7 @@
                 </a:solidFill>
                 <a:latin typeface="Roboto"/>
               </a:rPr>
-              <a:t>O que saiu foi o adaptador embutido que falava com o Docker Engine, não o formato das imagens. Como imagem é OCI, nada quebrou. É substituição por compatibilidade de interface acontecendo em escala real, no vocabulário que a Aula 05 usa para componentes.</a:t>
+              <a:t>O que saiu foi o adaptador embutido que falava com o Docker Engine, não o formato das imagens. Como imagem é OCI, nada quebrou. É um caso real de substituição por compatibilidade de interface, no vocabulário da Aula 05.</a:t>
             </a:r>
           </a:p>
         </p:txBody>
@@ -27102,7 +27118,23 @@
                 </a:solidFill>
                 <a:latin typeface="Roboto"/>
               </a:rPr>
-              <a:t>No vocabulário da disciplina</a:t>
+              <a:t>Vantagens no vocabulário</a:t>
+            </a:r>
+          </a:p>
+          <a:p>
+            <a:pPr>
+              <a:lnSpc>
+                <a:spcPct val="104000"/>
+              </a:lnSpc>
+            </a:pPr>
+            <a:r>
+              <a:rPr sz="3000" b="1" i="0">
+                <a:solidFill>
+                  <a:srgbClr val="21049A"/>
+                </a:solidFill>
+                <a:latin typeface="Roboto"/>
+              </a:rPr>
+              <a:t>da Aula 03</a:t>
             </a:r>
           </a:p>
         </p:txBody>
@@ -28098,7 +28130,7 @@
                 </a:solidFill>
                 <a:latin typeface="Roboto"/>
               </a:rPr>
-              <a:t>O que conteinerizar custa</a:t>
+              <a:t>Limitações e custos</a:t>
             </a:r>
           </a:p>
         </p:txBody>
@@ -28868,7 +28900,7 @@
                 </a:solidFill>
                 <a:latin typeface="Roboto"/>
               </a:rPr>
-              <a:t>PELA SUPERFÍCIE DE ATAQUE</a:t>
+              <a:t>CONTAINER E MÁQUINA VIRTUAL</a:t>
             </a:r>
           </a:p>
         </p:txBody>
@@ -28907,7 +28939,7 @@
                 </a:solidFill>
                 <a:latin typeface="Roboto"/>
               </a:rPr>
-              <a:t>Container é fronteira de isolamento.</a:t>
+              <a:t>Comparação pela</a:t>
             </a:r>
           </a:p>
           <a:p>
@@ -28923,23 +28955,7 @@
                 </a:solidFill>
                 <a:latin typeface="Roboto"/>
               </a:rPr>
-              <a:t>Não é fronteira de segurança</a:t>
-            </a:r>
-          </a:p>
-          <a:p>
-            <a:pPr>
-              <a:lnSpc>
-                <a:spcPct val="104000"/>
-              </a:lnSpc>
-            </a:pPr>
-            <a:r>
-              <a:rPr sz="2400" b="1" i="0">
-                <a:solidFill>
-                  <a:srgbClr val="21049A"/>
-                </a:solidFill>
-                <a:latin typeface="Roboto"/>
-              </a:rPr>
-              <a:t>da mesma classe que uma VM.</a:t>
+              <a:t>superfície de ataque</a:t>
             </a:r>
           </a:p>
         </p:txBody>
@@ -29740,7 +29756,7 @@
                 </a:solidFill>
                 <a:latin typeface="Roboto"/>
               </a:rPr>
-              <a:t>A FRASE DEFINE COMPONENTE</a:t>
+              <a:t>DEFINIÇÃO DE COMPONENTE</a:t>
             </a:r>
           </a:p>
         </p:txBody>
@@ -29779,7 +29795,7 @@
                 </a:solidFill>
                 <a:latin typeface="Roboto"/>
               </a:rPr>
-              <a:t>E descreve, sem citar,</a:t>
+              <a:t>Como a definição se aplica</a:t>
             </a:r>
           </a:p>
           <a:p>
@@ -29795,7 +29811,7 @@
                 </a:solidFill>
                 <a:latin typeface="Roboto"/>
               </a:rPr>
-              <a:t>um serviço de container</a:t>
+              <a:t>a um serviço de container</a:t>
             </a:r>
           </a:p>
         </p:txBody>
@@ -30392,7 +30408,7 @@
                 </a:solidFill>
                 <a:latin typeface="Roboto"/>
               </a:rPr>
-              <a:t>O QUE MAIS ESTAVA NA MESA</a:t>
+              <a:t>ALTERNATIVAS CONSIDERADAS</a:t>
             </a:r>
           </a:p>
         </p:txBody>
@@ -30431,7 +30447,7 @@
                 </a:solidFill>
                 <a:latin typeface="Roboto"/>
               </a:rPr>
-              <a:t>Avaliação crítica exige alternativa</a:t>
+              <a:t>Comparação com as outras opções</a:t>
             </a:r>
           </a:p>
         </p:txBody>
@@ -31442,7 +31458,7 @@
                 </a:solidFill>
                 <a:latin typeface="Roboto"/>
               </a:rPr>
-              <a:t>Dois destes critérios</a:t>
+              <a:t>Critérios de contraindicação</a:t>
             </a:r>
           </a:p>
           <a:p>
@@ -31458,7 +31474,7 @@
                 </a:solidFill>
                 <a:latin typeface="Roboto"/>
               </a:rPr>
-              <a:t>descrevem o nosso caso</a:t>
+              <a:t>e a nossa situação</a:t>
             </a:r>
           </a:p>
         </p:txBody>
@@ -32014,7 +32030,7 @@
                 </a:solidFill>
                 <a:latin typeface="Roboto"/>
               </a:rPr>
-              <a:t>Não temos integração contínua definida. Não temos hospedagem decidida. Estamos na zona cinzenta.</a:t>
+              <a:t>Não temos integração contínua definida nem hospedagem decidida, então dois dos critérios ao lado se aplicam a nós.</a:t>
             </a:r>
           </a:p>
         </p:txBody>
@@ -32092,7 +32108,7 @@
                 </a:solidFill>
                 <a:latin typeface="Roboto"/>
               </a:rPr>
-              <a:t>O que sustenta a adoção é um motivo só, e ele basta: ambiente igual para quatro pessoas com stacks diferentes, com banco rodando sem instalação local, antes de escrever a primeira linha.</a:t>
+              <a:t>O motivo que resta é o ambiente igual para quatro integrantes com stacks diferentes, com o banco rodando sem instalação local, antes de escrever a primeira linha.</a:t>
             </a:r>
           </a:p>
         </p:txBody>
@@ -32105,7 +32121,7 @@
         </p:nvSpPr>
         <p:spPr>
           <a:xfrm>
-            <a:off x="6362700" y="3939921"/>
+            <a:off x="6362700" y="3726180"/>
             <a:ext cx="247650" cy="238354"/>
           </a:xfrm>
           <a:prstGeom prst="rect">
@@ -32144,7 +32160,7 @@
         </p:nvSpPr>
         <p:spPr>
           <a:xfrm>
-            <a:off x="6648450" y="3930396"/>
+            <a:off x="6648450" y="3716655"/>
             <a:ext cx="4857750" cy="95250"/>
           </a:xfrm>
           <a:prstGeom prst="rect">
@@ -33199,7 +33215,7 @@
                 </a:solidFill>
                 <a:latin typeface="Roboto"/>
               </a:rPr>
-              <a:t>Três frases</a:t>
+              <a:t>Recomendação do grupo</a:t>
             </a:r>
           </a:p>
         </p:txBody>
@@ -33433,7 +33449,7 @@
                 </a:solidFill>
                 <a:latin typeface="Roboto"/>
               </a:rPr>
-              <a:t>Conteinerizar barateia errar: a stack ainda não está decidida, e com Dockerfile a escolha de runtime e de banco vira uma linha de arquivo em vez de instalação em quatro notebooks.</a:t>
+              <a:t>A stack ainda não está decidida. Com Dockerfile, trocar runtime ou banco é editar uma linha de arquivo em vez de reinstalar em quatro notebooks.</a:t>
             </a:r>
           </a:p>
         </p:txBody>
@@ -33769,7 +33785,7 @@
                 </a:solidFill>
                 <a:latin typeface="Roboto"/>
               </a:rPr>
-              <a:t>ABRIMOS E FECHAMOS NO MESMO LUGAR</a:t>
+              <a:t>RETOMANDO A EVIDÊNCIA INICIAL</a:t>
             </a:r>
           </a:p>
         </p:txBody>
@@ -33808,7 +33824,23 @@
                 </a:solidFill>
                 <a:latin typeface="Roboto"/>
               </a:rPr>
-              <a:t>Do sintoma ao arquivo</a:t>
+              <a:t>Do problema de ambiente</a:t>
+            </a:r>
+          </a:p>
+          <a:p>
+            <a:pPr>
+              <a:lnSpc>
+                <a:spcPct val="104000"/>
+              </a:lnSpc>
+            </a:pPr>
+            <a:r>
+              <a:rPr sz="3000" b="1" i="0">
+                <a:solidFill>
+                  <a:srgbClr val="21049A"/>
+                </a:solidFill>
+                <a:latin typeface="Roboto"/>
+              </a:rPr>
+              <a:t>ao arquivo de compose</a:t>
             </a:r>
           </a:p>
         </p:txBody>
@@ -35968,7 +36000,7 @@
                 </a:solidFill>
                 <a:latin typeface="Roboto"/>
               </a:rPr>
-              <a:t>O TEMA NÃO VEIO DA MODA</a:t>
+              <a:t>ORIGEM DO TEMA</a:t>
             </a:r>
           </a:p>
         </p:txBody>
@@ -36007,7 +36039,7 @@
                 </a:solidFill>
                 <a:latin typeface="Roboto"/>
               </a:rPr>
-              <a:t>Está registrado no board</a:t>
+              <a:t>O tema saiu de um item</a:t>
             </a:r>
           </a:p>
           <a:p>
@@ -36023,7 +36055,7 @@
                 </a:solidFill>
                 <a:latin typeface="Roboto"/>
               </a:rPr>
-              <a:t>antes desta apresentação</a:t>
+              <a:t>da Sprint 2</a:t>
             </a:r>
           </a:p>
         </p:txBody>
@@ -37393,7 +37425,7 @@
                 </a:solidFill>
                 <a:latin typeface="Roboto"/>
               </a:rPr>
-              <a:t>CONTRATO E AGENDA</a:t>
+              <a:t>AGENDA</a:t>
             </a:r>
           </a:p>
         </p:txBody>
@@ -37432,7 +37464,7 @@
                 </a:solidFill>
                 <a:latin typeface="Roboto"/>
               </a:rPr>
-              <a:t>A implementação começa na Sprint 4.</a:t>
+              <a:t>Escopo e divisão</a:t>
             </a:r>
           </a:p>
           <a:p>
@@ -37448,7 +37480,7 @@
                 </a:solidFill>
                 <a:latin typeface="Roboto"/>
               </a:rPr>
-              <a:t>A demonstração de hoje é do ambiente.</a:t>
+              <a:t>da apresentação</a:t>
             </a:r>
           </a:p>
         </p:txBody>
@@ -38292,7 +38324,7 @@
                 </a:solidFill>
                 <a:latin typeface="Roboto"/>
               </a:rPr>
-              <a:t>Cada integrante responde pelo próprio bloco na arguição. Segurança e mecanismos de kernel são com o Tiago, em qualquer bloco.</a:t>
+              <a:t>A implementação do produto começa na Sprint 4, em 06/10, então a demonstração de hoje é do ambiente e não do produto. Cada integrante responde pelo próprio bloco na arguição.</a:t>
             </a:r>
           </a:p>
         </p:txBody>
@@ -38921,7 +38953,7 @@
                 </a:solidFill>
                 <a:latin typeface="Roboto"/>
               </a:rPr>
-              <a:t>POR QUE ISSO CONTA COMO EMERGENTE</a:t>
+              <a:t>LINHA DO TEMPO</a:t>
             </a:r>
           </a:p>
         </p:txBody>
@@ -38960,7 +38992,7 @@
                 </a:solidFill>
                 <a:latin typeface="Roboto"/>
               </a:rPr>
-              <a:t>O mecanismo é antigo</a:t>
+              <a:t>Do chroot à padronização OCI</a:t>
             </a:r>
           </a:p>
         </p:txBody>
@@ -39955,7 +39987,7 @@
                 </a:solidFill>
                 <a:latin typeface="Roboto"/>
               </a:rPr>
-              <a:t>O que é recente não é o isolamento. É a padronização e a estabilização da cadeia.</a:t>
+              <a:t>O isolamento de processos existe desde 1979. O que é recente é a padronização da cadeia de execução, a partir de 2015.</a:t>
             </a:r>
           </a:p>
         </p:txBody>

--- a/trabalhos/T1-Docker-Invite-People.pptx
+++ b/trabalhos/T1-Docker-Invite-People.pptx
@@ -17533,7 +17533,7 @@
                 </a:solidFill>
                 <a:latin typeface="Roboto"/>
               </a:rPr>
-              <a:t> é a abstração de um serviço, coesa e de baixo acoplamento.</a:t>
+              <a:t> é uma unidade coesa e de baixo acoplamento que denota a abstração de um serviço (Sommerville, 2004).</a:t>
             </a:r>
           </a:p>
         </p:txBody>
@@ -20961,13 +20961,13 @@
               </a:lnSpc>
             </a:pPr>
             <a:r>
-              <a:rPr sz="2850" b="0" i="0">
+              <a:rPr sz="2320" b="0" i="0">
                 <a:solidFill>
                   <a:srgbClr val="FFFFFF"/>
                 </a:solidFill>
                 <a:latin typeface="Roboto"/>
               </a:rPr>
-              <a:t>Unidade de composição com interfaces especificadas e dependências de contexto explícitas, que pode ser implantada de forma independente.</a:t>
+              <a:t>Um componente é uma unidade de composição com interfaces (contratos) especificadas e com dependências de contexto explícitas; um componente de software pode ser implantado de forma independente ou se combinar com outros.</a:t>
             </a:r>
           </a:p>
         </p:txBody>
@@ -21052,7 +21052,7 @@
                 </a:solidFill>
                 <a:latin typeface="Roboto"/>
               </a:rPr>
-              <a:t>FARIAS, K. Aula 05, Arquiteturas Baseadas em Componentes.</a:t>
+              <a:t>SOMMERVILLE, I. Engenharia de Software, 6ª ed., Addison Wesley, 2004. Citado na Aula 05, Arquiteturas Baseadas em Componentes.</a:t>
             </a:r>
           </a:p>
         </p:txBody>
@@ -35755,7 +35755,7 @@
                 </a:solidFill>
                 <a:latin typeface="Roboto"/>
               </a:rPr>
-              <a:t>SOMMERVILLE, I. Engenharia de Software. · FOWLER, M. Patterns of Enterprise Application Architecture.</a:t>
+              <a:t>SOMMERVILLE, I. Engenharia de Software. 6. ed. Addison Wesley, 2004. · FOWLER, M. Patterns of Enterprise Application Architecture.</a:t>
             </a:r>
           </a:p>
         </p:txBody>
@@ -35768,7 +35768,7 @@
         </p:nvSpPr>
         <p:spPr>
           <a:xfrm>
-            <a:off x="685800" y="4807458"/>
+            <a:off x="685800" y="5046345"/>
             <a:ext cx="247650" cy="266395"/>
           </a:xfrm>
           <a:prstGeom prst="rect">
@@ -35807,7 +35807,7 @@
         </p:nvSpPr>
         <p:spPr>
           <a:xfrm>
-            <a:off x="971550" y="4797933"/>
+            <a:off x="971550" y="5036820"/>
             <a:ext cx="9677400" cy="95250"/>
           </a:xfrm>
           <a:prstGeom prst="rect">

--- a/trabalhos/T1-Docker-Invite-People.pptx
+++ b/trabalhos/T1-Docker-Invite-People.pptx
@@ -12675,7 +12675,7 @@
                 </a:solidFill>
                 <a:latin typeface="Roboto"/>
               </a:rPr>
-              <a:t>Bloco B · Arquitetura</a:t>
+              <a:t>01 · Arquitetura</a:t>
             </a:r>
           </a:p>
         </p:txBody>
@@ -12941,7 +12941,7 @@
                 </a:solidFill>
                 <a:latin typeface="Roboto"/>
               </a:rPr>
-              <a:t>Fundada em 2015 sob a Linux Foundation, com a Runtime Spec, a Image Spec e a Distribution Spec. O runc é trocável por crun, gVisor ou Kata. O engine é trocável por Podman. É um exemplo da substituibilidade por compatibilidade de interface da Aula 05.</a:t>
+              <a:t>Fundada em 2015 sob a Linux Foundation, com a Runtime Spec, a Image Spec e a Distribution Spec. O runc é trocável por crun, gVisor ou Kata. O engine é trocável por Podman. É a substituibilidade por compatibilidade de interface da Aula 05, e o Bloco D traz um caso real.</a:t>
             </a:r>
           </a:p>
         </p:txBody>
@@ -12980,7 +12980,7 @@
                 </a:solidFill>
                 <a:latin typeface="Roboto"/>
               </a:rPr>
-              <a:t>Bloco B · Arquitetura</a:t>
+              <a:t>01 · Arquitetura</a:t>
             </a:r>
           </a:p>
         </p:txBody>
@@ -13484,7 +13484,7 @@
                 </a:solidFill>
                 <a:latin typeface="Roboto"/>
               </a:rPr>
-              <a:t>Bloco C</a:t>
+              <a:t>02 · Aplicação no projeto</a:t>
             </a:r>
           </a:p>
         </p:txBody>
@@ -15391,7 +15391,7 @@
                 </a:solidFill>
                 <a:latin typeface="Roboto"/>
               </a:rPr>
-              <a:t>Bloco C · Aplicação</a:t>
+              <a:t>02 · Aplicação no projeto</a:t>
             </a:r>
           </a:p>
         </p:txBody>
@@ -16151,7 +16151,7 @@
                 </a:solidFill>
                 <a:latin typeface="Roboto"/>
               </a:rPr>
-              <a:t>Bloco C · Aplicação</a:t>
+              <a:t>02 · Aplicação no projeto</a:t>
             </a:r>
           </a:p>
         </p:txBody>
@@ -17660,7 +17660,7 @@
                 </a:solidFill>
                 <a:latin typeface="Roboto"/>
               </a:rPr>
-              <a:t>Bloco C · Aplicação</a:t>
+              <a:t>02 · Aplicação no projeto</a:t>
             </a:r>
           </a:p>
         </p:txBody>
@@ -18677,7 +18677,7 @@
                 </a:solidFill>
                 <a:latin typeface="Roboto"/>
               </a:rPr>
-              <a:t>Bloco C · Aplicação</a:t>
+              <a:t>02 · Aplicação no projeto</a:t>
             </a:r>
           </a:p>
         </p:txBody>
@@ -19533,7 +19533,7 @@
                 </a:solidFill>
                 <a:latin typeface="Roboto"/>
               </a:rPr>
-              <a:t>Bloco C · Aplicação</a:t>
+              <a:t>02 · Aplicação no projeto</a:t>
             </a:r>
           </a:p>
         </p:txBody>
@@ -20196,7 +20196,7 @@
                 </a:solidFill>
                 <a:latin typeface="Roboto"/>
               </a:rPr>
-              <a:t>Bloco C · Aplicação</a:t>
+              <a:t>02 · Aplicação no projeto</a:t>
             </a:r>
           </a:p>
         </p:txBody>
@@ -20700,7 +20700,7 @@
                 </a:solidFill>
                 <a:latin typeface="Roboto"/>
               </a:rPr>
-              <a:t>Bloco D</a:t>
+              <a:t>03 · Vantagens e desvantagens</a:t>
             </a:r>
           </a:p>
         </p:txBody>
@@ -20880,8 +20880,8 @@
         </p:nvSpPr>
         <p:spPr>
           <a:xfrm>
-            <a:off x="685800" y="2065020"/>
-            <a:ext cx="247650" cy="308458"/>
+            <a:off x="685800" y="2134172"/>
+            <a:ext cx="247650" cy="266395"/>
           </a:xfrm>
           <a:prstGeom prst="rect">
             <a:avLst/>
@@ -20900,7 +20900,7 @@
               </a:lnSpc>
             </a:pPr>
             <a:r>
-              <a:rPr sz="1520" b="1" i="0">
+              <a:rPr sz="1310" b="1" i="0">
                 <a:solidFill>
                   <a:srgbClr val="E94D1C"/>
                 </a:solidFill>
@@ -20919,7 +20919,7 @@
         </p:nvSpPr>
         <p:spPr>
           <a:xfrm>
-            <a:off x="971550" y="2055495"/>
+            <a:off x="971550" y="2124646"/>
             <a:ext cx="7677150" cy="95250"/>
           </a:xfrm>
           <a:prstGeom prst="rect">
@@ -20939,7 +20939,7 @@
               </a:lnSpc>
             </a:pPr>
             <a:r>
-              <a:rPr sz="1650" b="0" i="0">
+              <a:rPr sz="1420" b="0" i="0">
                 <a:solidFill>
                   <a:srgbClr val="1A1A1E"/>
                 </a:solidFill>
@@ -20958,8 +20958,8 @@
         </p:nvSpPr>
         <p:spPr>
           <a:xfrm>
-            <a:off x="685800" y="2903982"/>
-            <a:ext cx="247650" cy="308458"/>
+            <a:off x="685800" y="2840546"/>
+            <a:ext cx="247650" cy="266395"/>
           </a:xfrm>
           <a:prstGeom prst="rect">
             <a:avLst/>
@@ -20978,7 +20978,7 @@
               </a:lnSpc>
             </a:pPr>
             <a:r>
-              <a:rPr sz="1520" b="1" i="0">
+              <a:rPr sz="1310" b="1" i="0">
                 <a:solidFill>
                   <a:srgbClr val="E94D1C"/>
                 </a:solidFill>
@@ -20997,7 +20997,7 @@
         </p:nvSpPr>
         <p:spPr>
           <a:xfrm>
-            <a:off x="971550" y="2894457"/>
+            <a:off x="971550" y="2831021"/>
             <a:ext cx="7677150" cy="95250"/>
           </a:xfrm>
           <a:prstGeom prst="rect">
@@ -21017,7 +21017,7 @@
               </a:lnSpc>
             </a:pPr>
             <a:r>
-              <a:rPr sz="1650" b="0" i="0">
+              <a:rPr sz="1420" b="0" i="0">
                 <a:solidFill>
                   <a:srgbClr val="1A1A1E"/>
                 </a:solidFill>
@@ -21036,8 +21036,8 @@
         </p:nvSpPr>
         <p:spPr>
           <a:xfrm>
-            <a:off x="685800" y="3742944"/>
-            <a:ext cx="247650" cy="308458"/>
+            <a:off x="685800" y="3546920"/>
+            <a:ext cx="247650" cy="266395"/>
           </a:xfrm>
           <a:prstGeom prst="rect">
             <a:avLst/>
@@ -21056,7 +21056,7 @@
               </a:lnSpc>
             </a:pPr>
             <a:r>
-              <a:rPr sz="1520" b="1" i="0">
+              <a:rPr sz="1310" b="1" i="0">
                 <a:solidFill>
                   <a:srgbClr val="E94D1C"/>
                 </a:solidFill>
@@ -21075,7 +21075,7 @@
         </p:nvSpPr>
         <p:spPr>
           <a:xfrm>
-            <a:off x="971550" y="3733419"/>
+            <a:off x="971550" y="3537394"/>
             <a:ext cx="7677150" cy="95250"/>
           </a:xfrm>
           <a:prstGeom prst="rect">
@@ -21095,7 +21095,7 @@
               </a:lnSpc>
             </a:pPr>
             <a:r>
-              <a:rPr sz="1650" b="0" i="0">
+              <a:rPr sz="1420" b="0" i="0">
                 <a:solidFill>
                   <a:srgbClr val="1A1A1E"/>
                 </a:solidFill>
@@ -21114,8 +21114,8 @@
         </p:nvSpPr>
         <p:spPr>
           <a:xfrm>
-            <a:off x="685800" y="4581906"/>
-            <a:ext cx="247650" cy="308458"/>
+            <a:off x="685800" y="4014406"/>
+            <a:ext cx="247650" cy="266395"/>
           </a:xfrm>
           <a:prstGeom prst="rect">
             <a:avLst/>
@@ -21134,7 +21134,7 @@
               </a:lnSpc>
             </a:pPr>
             <a:r>
-              <a:rPr sz="1520" b="1" i="0">
+              <a:rPr sz="1310" b="1" i="0">
                 <a:solidFill>
                   <a:srgbClr val="E94D1C"/>
                 </a:solidFill>
@@ -21153,7 +21153,7 @@
         </p:nvSpPr>
         <p:spPr>
           <a:xfrm>
-            <a:off x="971550" y="4572381"/>
+            <a:off x="971550" y="4004882"/>
             <a:ext cx="7677150" cy="95250"/>
           </a:xfrm>
           <a:prstGeom prst="rect">
@@ -21173,7 +21173,7 @@
               </a:lnSpc>
             </a:pPr>
             <a:r>
-              <a:rPr sz="1650" b="0" i="0">
+              <a:rPr sz="1420" b="0" i="0">
                 <a:solidFill>
                   <a:srgbClr val="1A1A1E"/>
                 </a:solidFill>
@@ -21192,8 +21192,8 @@
         </p:nvSpPr>
         <p:spPr>
           <a:xfrm>
-            <a:off x="685800" y="5420868"/>
-            <a:ext cx="247650" cy="308458"/>
+            <a:off x="685800" y="4720780"/>
+            <a:ext cx="247650" cy="266395"/>
           </a:xfrm>
           <a:prstGeom prst="rect">
             <a:avLst/>
@@ -21212,7 +21212,7 @@
               </a:lnSpc>
             </a:pPr>
             <a:r>
-              <a:rPr sz="1520" b="1" i="0">
+              <a:rPr sz="1310" b="1" i="0">
                 <a:solidFill>
                   <a:srgbClr val="E94D1C"/>
                 </a:solidFill>
@@ -21231,7 +21231,7 @@
         </p:nvSpPr>
         <p:spPr>
           <a:xfrm>
-            <a:off x="971550" y="5411343"/>
+            <a:off x="971550" y="4711256"/>
             <a:ext cx="7677150" cy="95250"/>
           </a:xfrm>
           <a:prstGeom prst="rect">
@@ -21251,7 +21251,7 @@
               </a:lnSpc>
             </a:pPr>
             <a:r>
-              <a:rPr sz="1650" b="0" i="0">
+              <a:rPr sz="1420" b="0" i="0">
                 <a:solidFill>
                   <a:srgbClr val="1A1A1E"/>
                 </a:solidFill>
@@ -21264,13 +21264,91 @@
       </p:sp>
       <p:sp>
         <p:nvSpPr>
-          <p:cNvPr id="15" name="Donut 14"/>
+          <p:cNvPr id="15" name="TextBox 14"/>
+          <p:cNvSpPr txBox="1"/>
+          <p:nvPr/>
+        </p:nvSpPr>
+        <p:spPr>
+          <a:xfrm>
+            <a:off x="685800" y="5427154"/>
+            <a:ext cx="247650" cy="266395"/>
+          </a:xfrm>
+          <a:prstGeom prst="rect">
+            <a:avLst/>
+          </a:prstGeom>
+          <a:noFill/>
+        </p:spPr>
+        <p:txBody>
+          <a:bodyPr wrap="square" lIns="0" rIns="0" tIns="0" bIns="0" anchor="t">
+            <a:spAutoFit/>
+          </a:bodyPr>
+          <a:lstStyle/>
+          <a:p>
+            <a:pPr algn="l">
+              <a:lnSpc>
+                <a:spcPct val="120000"/>
+              </a:lnSpc>
+            </a:pPr>
+            <a:r>
+              <a:rPr sz="1310" b="1" i="0">
+                <a:solidFill>
+                  <a:srgbClr val="E94D1C"/>
+                </a:solidFill>
+                <a:latin typeface="Roboto"/>
+              </a:rPr>
+              <a:t>//</a:t>
+            </a:r>
+          </a:p>
+        </p:txBody>
+      </p:sp>
+      <p:sp>
+        <p:nvSpPr>
+          <p:cNvPr id="16" name="TextBox 15"/>
+          <p:cNvSpPr txBox="1"/>
+          <p:nvPr/>
+        </p:nvSpPr>
+        <p:spPr>
+          <a:xfrm>
+            <a:off x="971550" y="5417630"/>
+            <a:ext cx="7677150" cy="95250"/>
+          </a:xfrm>
+          <a:prstGeom prst="rect">
+            <a:avLst/>
+          </a:prstGeom>
+          <a:noFill/>
+        </p:spPr>
+        <p:txBody>
+          <a:bodyPr wrap="square" lIns="0" rIns="0" tIns="0" bIns="0" anchor="t">
+            <a:spAutoFit/>
+          </a:bodyPr>
+          <a:lstStyle/>
+          <a:p>
+            <a:pPr algn="l">
+              <a:lnSpc>
+                <a:spcPct val="130000"/>
+              </a:lnSpc>
+            </a:pPr>
+            <a:r>
+              <a:rPr sz="1420" b="0" i="0">
+                <a:solidFill>
+                  <a:srgbClr val="1A1A1E"/>
+                </a:solidFill>
+                <a:latin typeface="Roboto"/>
+              </a:rPr>
+              <a:t>A seção 01 é sobre Docker. O projeto volta na seção 02, onde essa pergunta é respondida.</a:t>
+            </a:r>
+          </a:p>
+        </p:txBody>
+      </p:sp>
+      <p:sp>
+        <p:nvSpPr>
+          <p:cNvPr id="17" name="Donut 16"/>
           <p:cNvSpPr/>
           <p:nvPr/>
         </p:nvSpPr>
         <p:spPr>
           <a:xfrm>
-            <a:off x="9124950" y="2055495"/>
+            <a:off x="9124950" y="2124646"/>
             <a:ext cx="142875" cy="142875"/>
           </a:xfrm>
           <a:prstGeom prst="donut">
@@ -21308,13 +21386,13 @@
       </p:sp>
       <p:sp>
         <p:nvSpPr>
-          <p:cNvPr id="16" name="TextBox 15"/>
-          <p:cNvSpPr txBox="1"/>
-          <p:nvPr/>
-        </p:nvSpPr>
-        <p:spPr>
-          <a:xfrm>
-            <a:off x="9372600" y="2065020"/>
+          <p:cNvPr id="18" name="TextBox 17"/>
+          <p:cNvSpPr txBox="1"/>
+          <p:nvPr/>
+        </p:nvSpPr>
+        <p:spPr>
+          <a:xfrm>
+            <a:off x="9372600" y="2134172"/>
             <a:ext cx="2133600" cy="182880"/>
           </a:xfrm>
           <a:prstGeom prst="rect">
@@ -21347,13 +21425,13 @@
       </p:sp>
       <p:sp>
         <p:nvSpPr>
-          <p:cNvPr id="17" name="Rectangle 16"/>
+          <p:cNvPr id="19" name="Rectangle 18"/>
           <p:cNvSpPr/>
           <p:nvPr/>
         </p:nvSpPr>
         <p:spPr>
           <a:xfrm>
-            <a:off x="9124950" y="2341245"/>
+            <a:off x="9124950" y="2410396"/>
             <a:ext cx="38100" cy="832104"/>
           </a:xfrm>
           <a:prstGeom prst="rect">
@@ -21391,13 +21469,13 @@
       </p:sp>
       <p:sp>
         <p:nvSpPr>
-          <p:cNvPr id="18" name="TextBox 17"/>
-          <p:cNvSpPr txBox="1"/>
-          <p:nvPr/>
-        </p:nvSpPr>
-        <p:spPr>
-          <a:xfrm>
-            <a:off x="9334500" y="2341245"/>
+          <p:cNvPr id="20" name="TextBox 19"/>
+          <p:cNvSpPr txBox="1"/>
+          <p:nvPr/>
+        </p:nvSpPr>
+        <p:spPr>
+          <a:xfrm>
+            <a:off x="9334500" y="2410396"/>
             <a:ext cx="2171700" cy="1403604"/>
           </a:xfrm>
           <a:prstGeom prst="rect">
@@ -21471,7 +21549,7 @@
       </p:sp>
       <p:sp>
         <p:nvSpPr>
-          <p:cNvPr id="19" name="TextBox 18"/>
+          <p:cNvPr id="21" name="TextBox 20"/>
           <p:cNvSpPr txBox="1"/>
           <p:nvPr/>
         </p:nvSpPr>
@@ -21503,14 +21581,14 @@
                 </a:solidFill>
                 <a:latin typeface="Roboto"/>
               </a:rPr>
-              <a:t>Bloco A · Introdução</a:t>
-            </a:r>
-          </a:p>
-        </p:txBody>
-      </p:sp>
-      <p:sp>
-        <p:nvSpPr>
-          <p:cNvPr id="20" name="TextBox 19"/>
+              <a:t>Introdução</a:t>
+            </a:r>
+          </a:p>
+        </p:txBody>
+      </p:sp>
+      <p:sp>
+        <p:nvSpPr>
+          <p:cNvPr id="22" name="TextBox 21"/>
           <p:cNvSpPr txBox="1"/>
           <p:nvPr/>
         </p:nvSpPr>
@@ -22407,7 +22485,7 @@
                 </a:solidFill>
                 <a:latin typeface="Roboto"/>
               </a:rPr>
-              <a:t>Bloco D · Demonstração</a:t>
+              <a:t>03 · Demonstração</a:t>
             </a:r>
           </a:p>
         </p:txBody>
@@ -22712,7 +22790,7 @@
                 </a:solidFill>
                 <a:latin typeface="Roboto"/>
               </a:rPr>
-              <a:t>Bloco D · Estudo de caso</a:t>
+              <a:t>03 · Estudo de caso</a:t>
             </a:r>
           </a:p>
         </p:txBody>
@@ -23724,7 +23802,7 @@
                 </a:solidFill>
                 <a:latin typeface="Roboto"/>
               </a:rPr>
-              <a:t>Bloco D · Vantagens</a:t>
+              <a:t>03 · Vantagens e desvantagens</a:t>
             </a:r>
           </a:p>
         </p:txBody>
@@ -24533,7 +24611,7 @@
                 </a:solidFill>
                 <a:latin typeface="Roboto"/>
               </a:rPr>
-              <a:t>Bloco D · Limitações</a:t>
+              <a:t>03 · Vantagens e desvantagens</a:t>
             </a:r>
           </a:p>
         </p:txBody>
@@ -25389,7 +25467,7 @@
                 </a:solidFill>
                 <a:latin typeface="Roboto"/>
               </a:rPr>
-              <a:t>Bloco D · Segurança</a:t>
+              <a:t>03 · Vantagens e desvantagens</a:t>
             </a:r>
           </a:p>
         </p:txBody>
@@ -26444,7 +26522,7 @@
                 </a:solidFill>
                 <a:latin typeface="Roboto"/>
               </a:rPr>
-              <a:t>Bloco D · Alternativas</a:t>
+              <a:t>03 · Vantagens e desvantagens</a:t>
             </a:r>
           </a:p>
         </p:txBody>
@@ -27378,7 +27456,7 @@
                 </a:solidFill>
                 <a:latin typeface="Roboto"/>
               </a:rPr>
-              <a:t>Bloco D · Honestidade</a:t>
+              <a:t>03 · Vantagens e desvantagens</a:t>
             </a:r>
           </a:p>
         </p:txBody>
@@ -28201,7 +28279,7 @@
                 </a:solidFill>
                 <a:latin typeface="Roboto"/>
               </a:rPr>
-              <a:t>Bloco D · Considerações finais</a:t>
+              <a:t>03 · Vantagens e desvantagens</a:t>
             </a:r>
           </a:p>
         </p:txBody>
@@ -28810,7 +28888,7 @@
                 </a:solidFill>
                 <a:latin typeface="Roboto"/>
               </a:rPr>
-              <a:t>Bloco D · Considerações finais</a:t>
+              <a:t>Considerações finais</a:t>
             </a:r>
           </a:p>
         </p:txBody>
@@ -28938,7 +29016,7 @@
                 </a:solidFill>
                 <a:latin typeface="Roboto"/>
               </a:rPr>
-              <a:t>RETOMANDO A EVIDÊNCIA INICIAL</a:t>
+              <a:t>ANTES E DEPOIS, NO NOSSO REPOSITÓRIO</a:t>
             </a:r>
           </a:p>
         </p:txBody>
@@ -29510,7 +29588,7 @@
                 </a:solidFill>
                 <a:latin typeface="Roboto"/>
               </a:rPr>
-              <a:t>Bloco D · Fecho</a:t>
+              <a:t>Considerações finais</a:t>
             </a:r>
           </a:p>
         </p:txBody>
@@ -30014,7 +30092,7 @@
                 </a:solidFill>
                 <a:latin typeface="Roboto"/>
               </a:rPr>
-              <a:t>Bloco B</a:t>
+              <a:t>01 · Definições e arquitetura</a:t>
             </a:r>
           </a:p>
         </p:txBody>
@@ -30777,7 +30855,7 @@
                 </a:solidFill>
                 <a:latin typeface="Roboto"/>
               </a:rPr>
-              <a:t>Bloco D · Fecho</a:t>
+              <a:t>Considerações finais</a:t>
             </a:r>
           </a:p>
         </p:txBody>
@@ -31607,7 +31685,7 @@
                 </a:solidFill>
                 <a:latin typeface="Roboto"/>
               </a:rPr>
-              <a:t>Bloco D · Fecho</a:t>
+              <a:t>Referências</a:t>
             </a:r>
           </a:p>
         </p:txBody>
@@ -32808,7 +32886,7 @@
                 </a:solidFill>
                 <a:latin typeface="Roboto"/>
               </a:rPr>
-              <a:t>Bloco B · Definições</a:t>
+              <a:t>01 · Definições</a:t>
             </a:r>
           </a:p>
         </p:txBody>
@@ -33336,7 +33414,7 @@
                 </a:solidFill>
                 <a:latin typeface="Roboto"/>
               </a:rPr>
-              <a:t>Bloco B · Definições</a:t>
+              <a:t>01 · Definições</a:t>
             </a:r>
           </a:p>
         </p:txBody>
@@ -34201,7 +34279,7 @@
                 </a:solidFill>
                 <a:latin typeface="Roboto"/>
               </a:rPr>
-              <a:t>Bloco B · Arquitetura</a:t>
+              <a:t>01 · Arquitetura</a:t>
             </a:r>
           </a:p>
         </p:txBody>
@@ -35135,7 +35213,7 @@
                 </a:solidFill>
                 <a:latin typeface="Roboto"/>
               </a:rPr>
-              <a:t>Bloco B · Arquitetura</a:t>
+              <a:t>01 · Arquitetura</a:t>
             </a:r>
           </a:p>
         </p:txBody>
@@ -36141,7 +36219,7 @@
                 </a:solidFill>
                 <a:latin typeface="Roboto"/>
               </a:rPr>
-              <a:t>Bloco B · Arquitetura</a:t>
+              <a:t>01 · Arquitetura</a:t>
             </a:r>
           </a:p>
         </p:txBody>
@@ -37318,7 +37396,7 @@
                 </a:solidFill>
                 <a:latin typeface="Roboto"/>
               </a:rPr>
-              <a:t>Bloco B · Arquitetura</a:t>
+              <a:t>01 · Arquitetura</a:t>
             </a:r>
           </a:p>
         </p:txBody>

--- a/trabalhos/T1-Docker-Invite-People.pptx
+++ b/trabalhos/T1-Docker-Invite-People.pptx
@@ -20880,8 +20880,8 @@
         </p:nvSpPr>
         <p:spPr>
           <a:xfrm>
-            <a:off x="685800" y="2134172"/>
-            <a:ext cx="247650" cy="266395"/>
+            <a:off x="685800" y="2484501"/>
+            <a:ext cx="247650" cy="308458"/>
           </a:xfrm>
           <a:prstGeom prst="rect">
             <a:avLst/>
@@ -20900,7 +20900,7 @@
               </a:lnSpc>
             </a:pPr>
             <a:r>
-              <a:rPr sz="1310" b="1" i="0">
+              <a:rPr sz="1520" b="1" i="0">
                 <a:solidFill>
                   <a:srgbClr val="E94D1C"/>
                 </a:solidFill>
@@ -20919,7 +20919,7 @@
         </p:nvSpPr>
         <p:spPr>
           <a:xfrm>
-            <a:off x="971550" y="2124646"/>
+            <a:off x="971550" y="2474976"/>
             <a:ext cx="7677150" cy="95250"/>
           </a:xfrm>
           <a:prstGeom prst="rect">
@@ -20939,7 +20939,7 @@
               </a:lnSpc>
             </a:pPr>
             <a:r>
-              <a:rPr sz="1420" b="0" i="0">
+              <a:rPr sz="1650" b="0" i="0">
                 <a:solidFill>
                   <a:srgbClr val="1A1A1E"/>
                 </a:solidFill>
@@ -20958,8 +20958,8 @@
         </p:nvSpPr>
         <p:spPr>
           <a:xfrm>
-            <a:off x="685800" y="2840546"/>
-            <a:ext cx="247650" cy="266395"/>
+            <a:off x="685800" y="3323463"/>
+            <a:ext cx="247650" cy="308458"/>
           </a:xfrm>
           <a:prstGeom prst="rect">
             <a:avLst/>
@@ -20978,7 +20978,7 @@
               </a:lnSpc>
             </a:pPr>
             <a:r>
-              <a:rPr sz="1310" b="1" i="0">
+              <a:rPr sz="1520" b="1" i="0">
                 <a:solidFill>
                   <a:srgbClr val="E94D1C"/>
                 </a:solidFill>
@@ -20997,7 +20997,7 @@
         </p:nvSpPr>
         <p:spPr>
           <a:xfrm>
-            <a:off x="971550" y="2831021"/>
+            <a:off x="971550" y="3313938"/>
             <a:ext cx="7677150" cy="95250"/>
           </a:xfrm>
           <a:prstGeom prst="rect">
@@ -21017,7 +21017,7 @@
               </a:lnSpc>
             </a:pPr>
             <a:r>
-              <a:rPr sz="1420" b="0" i="0">
+              <a:rPr sz="1650" b="0" i="0">
                 <a:solidFill>
                   <a:srgbClr val="1A1A1E"/>
                 </a:solidFill>
@@ -21036,8 +21036,8 @@
         </p:nvSpPr>
         <p:spPr>
           <a:xfrm>
-            <a:off x="685800" y="3546920"/>
-            <a:ext cx="247650" cy="266395"/>
+            <a:off x="685800" y="4162425"/>
+            <a:ext cx="247650" cy="308458"/>
           </a:xfrm>
           <a:prstGeom prst="rect">
             <a:avLst/>
@@ -21056,7 +21056,7 @@
               </a:lnSpc>
             </a:pPr>
             <a:r>
-              <a:rPr sz="1310" b="1" i="0">
+              <a:rPr sz="1520" b="1" i="0">
                 <a:solidFill>
                   <a:srgbClr val="E94D1C"/>
                 </a:solidFill>
@@ -21075,7 +21075,7 @@
         </p:nvSpPr>
         <p:spPr>
           <a:xfrm>
-            <a:off x="971550" y="3537394"/>
+            <a:off x="971550" y="4152900"/>
             <a:ext cx="7677150" cy="95250"/>
           </a:xfrm>
           <a:prstGeom prst="rect">
@@ -21095,7 +21095,7 @@
               </a:lnSpc>
             </a:pPr>
             <a:r>
-              <a:rPr sz="1420" b="0" i="0">
+              <a:rPr sz="1650" b="0" i="0">
                 <a:solidFill>
                   <a:srgbClr val="1A1A1E"/>
                 </a:solidFill>
@@ -21114,8 +21114,8 @@
         </p:nvSpPr>
         <p:spPr>
           <a:xfrm>
-            <a:off x="685800" y="4014406"/>
-            <a:ext cx="247650" cy="266395"/>
+            <a:off x="685800" y="5001387"/>
+            <a:ext cx="247650" cy="308458"/>
           </a:xfrm>
           <a:prstGeom prst="rect">
             <a:avLst/>
@@ -21134,7 +21134,7 @@
               </a:lnSpc>
             </a:pPr>
             <a:r>
-              <a:rPr sz="1310" b="1" i="0">
+              <a:rPr sz="1520" b="1" i="0">
                 <a:solidFill>
                   <a:srgbClr val="E94D1C"/>
                 </a:solidFill>
@@ -21153,7 +21153,7 @@
         </p:nvSpPr>
         <p:spPr>
           <a:xfrm>
-            <a:off x="971550" y="4004882"/>
+            <a:off x="971550" y="4991862"/>
             <a:ext cx="7677150" cy="95250"/>
           </a:xfrm>
           <a:prstGeom prst="rect">
@@ -21173,7 +21173,7 @@
               </a:lnSpc>
             </a:pPr>
             <a:r>
-              <a:rPr sz="1420" b="0" i="0">
+              <a:rPr sz="1650" b="0" i="0">
                 <a:solidFill>
                   <a:srgbClr val="1A1A1E"/>
                 </a:solidFill>
@@ -21186,169 +21186,13 @@
       </p:sp>
       <p:sp>
         <p:nvSpPr>
-          <p:cNvPr id="13" name="TextBox 12"/>
-          <p:cNvSpPr txBox="1"/>
-          <p:nvPr/>
-        </p:nvSpPr>
-        <p:spPr>
-          <a:xfrm>
-            <a:off x="685800" y="4720780"/>
-            <a:ext cx="247650" cy="266395"/>
-          </a:xfrm>
-          <a:prstGeom prst="rect">
-            <a:avLst/>
-          </a:prstGeom>
-          <a:noFill/>
-        </p:spPr>
-        <p:txBody>
-          <a:bodyPr wrap="square" lIns="0" rIns="0" tIns="0" bIns="0" anchor="t">
-            <a:spAutoFit/>
-          </a:bodyPr>
-          <a:lstStyle/>
-          <a:p>
-            <a:pPr algn="l">
-              <a:lnSpc>
-                <a:spcPct val="120000"/>
-              </a:lnSpc>
-            </a:pPr>
-            <a:r>
-              <a:rPr sz="1310" b="1" i="0">
-                <a:solidFill>
-                  <a:srgbClr val="E94D1C"/>
-                </a:solidFill>
-                <a:latin typeface="Roboto"/>
-              </a:rPr>
-              <a:t>//</a:t>
-            </a:r>
-          </a:p>
-        </p:txBody>
-      </p:sp>
-      <p:sp>
-        <p:nvSpPr>
-          <p:cNvPr id="14" name="TextBox 13"/>
-          <p:cNvSpPr txBox="1"/>
-          <p:nvPr/>
-        </p:nvSpPr>
-        <p:spPr>
-          <a:xfrm>
-            <a:off x="971550" y="4711256"/>
-            <a:ext cx="7677150" cy="95250"/>
-          </a:xfrm>
-          <a:prstGeom prst="rect">
-            <a:avLst/>
-          </a:prstGeom>
-          <a:noFill/>
-        </p:spPr>
-        <p:txBody>
-          <a:bodyPr wrap="square" lIns="0" rIns="0" tIns="0" bIns="0" anchor="t">
-            <a:spAutoFit/>
-          </a:bodyPr>
-          <a:lstStyle/>
-          <a:p>
-            <a:pPr algn="l">
-              <a:lnSpc>
-                <a:spcPct val="130000"/>
-              </a:lnSpc>
-            </a:pPr>
-            <a:r>
-              <a:rPr sz="1420" b="0" i="0">
-                <a:solidFill>
-                  <a:srgbClr val="1A1A1E"/>
-                </a:solidFill>
-                <a:latin typeface="Roboto"/>
-              </a:rPr>
-              <a:t>A implementação do produto começa na Sprint 4, em 06/10. A demonstração do final é do ambiente, não do produto.</a:t>
-            </a:r>
-          </a:p>
-        </p:txBody>
-      </p:sp>
-      <p:sp>
-        <p:nvSpPr>
-          <p:cNvPr id="15" name="TextBox 14"/>
-          <p:cNvSpPr txBox="1"/>
-          <p:nvPr/>
-        </p:nvSpPr>
-        <p:spPr>
-          <a:xfrm>
-            <a:off x="685800" y="5427154"/>
-            <a:ext cx="247650" cy="266395"/>
-          </a:xfrm>
-          <a:prstGeom prst="rect">
-            <a:avLst/>
-          </a:prstGeom>
-          <a:noFill/>
-        </p:spPr>
-        <p:txBody>
-          <a:bodyPr wrap="square" lIns="0" rIns="0" tIns="0" bIns="0" anchor="t">
-            <a:spAutoFit/>
-          </a:bodyPr>
-          <a:lstStyle/>
-          <a:p>
-            <a:pPr algn="l">
-              <a:lnSpc>
-                <a:spcPct val="120000"/>
-              </a:lnSpc>
-            </a:pPr>
-            <a:r>
-              <a:rPr sz="1310" b="1" i="0">
-                <a:solidFill>
-                  <a:srgbClr val="E94D1C"/>
-                </a:solidFill>
-                <a:latin typeface="Roboto"/>
-              </a:rPr>
-              <a:t>//</a:t>
-            </a:r>
-          </a:p>
-        </p:txBody>
-      </p:sp>
-      <p:sp>
-        <p:nvSpPr>
-          <p:cNvPr id="16" name="TextBox 15"/>
-          <p:cNvSpPr txBox="1"/>
-          <p:nvPr/>
-        </p:nvSpPr>
-        <p:spPr>
-          <a:xfrm>
-            <a:off x="971550" y="5417630"/>
-            <a:ext cx="7677150" cy="95250"/>
-          </a:xfrm>
-          <a:prstGeom prst="rect">
-            <a:avLst/>
-          </a:prstGeom>
-          <a:noFill/>
-        </p:spPr>
-        <p:txBody>
-          <a:bodyPr wrap="square" lIns="0" rIns="0" tIns="0" bIns="0" anchor="t">
-            <a:spAutoFit/>
-          </a:bodyPr>
-          <a:lstStyle/>
-          <a:p>
-            <a:pPr algn="l">
-              <a:lnSpc>
-                <a:spcPct val="130000"/>
-              </a:lnSpc>
-            </a:pPr>
-            <a:r>
-              <a:rPr sz="1420" b="0" i="0">
-                <a:solidFill>
-                  <a:srgbClr val="1A1A1E"/>
-                </a:solidFill>
-                <a:latin typeface="Roboto"/>
-              </a:rPr>
-              <a:t>A seção 01 é sobre Docker. O projeto volta na seção 02, onde essa pergunta é respondida.</a:t>
-            </a:r>
-          </a:p>
-        </p:txBody>
-      </p:sp>
-      <p:sp>
-        <p:nvSpPr>
-          <p:cNvPr id="17" name="Donut 16"/>
+          <p:cNvPr id="13" name="Donut 12"/>
           <p:cNvSpPr/>
           <p:nvPr/>
         </p:nvSpPr>
         <p:spPr>
           <a:xfrm>
-            <a:off x="9124950" y="2124646"/>
+            <a:off x="9124950" y="2474976"/>
             <a:ext cx="142875" cy="142875"/>
           </a:xfrm>
           <a:prstGeom prst="donut">
@@ -21386,13 +21230,13 @@
       </p:sp>
       <p:sp>
         <p:nvSpPr>
-          <p:cNvPr id="18" name="TextBox 17"/>
-          <p:cNvSpPr txBox="1"/>
-          <p:nvPr/>
-        </p:nvSpPr>
-        <p:spPr>
-          <a:xfrm>
-            <a:off x="9372600" y="2134172"/>
+          <p:cNvPr id="14" name="TextBox 13"/>
+          <p:cNvSpPr txBox="1"/>
+          <p:nvPr/>
+        </p:nvSpPr>
+        <p:spPr>
+          <a:xfrm>
+            <a:off x="9372600" y="2484501"/>
             <a:ext cx="2133600" cy="182880"/>
           </a:xfrm>
           <a:prstGeom prst="rect">
@@ -21425,13 +21269,13 @@
       </p:sp>
       <p:sp>
         <p:nvSpPr>
-          <p:cNvPr id="19" name="Rectangle 18"/>
+          <p:cNvPr id="15" name="Rectangle 14"/>
           <p:cNvSpPr/>
           <p:nvPr/>
         </p:nvSpPr>
         <p:spPr>
           <a:xfrm>
-            <a:off x="9124950" y="2410396"/>
+            <a:off x="9124950" y="2760726"/>
             <a:ext cx="38100" cy="832104"/>
           </a:xfrm>
           <a:prstGeom prst="rect">
@@ -21469,13 +21313,13 @@
       </p:sp>
       <p:sp>
         <p:nvSpPr>
-          <p:cNvPr id="20" name="TextBox 19"/>
-          <p:cNvSpPr txBox="1"/>
-          <p:nvPr/>
-        </p:nvSpPr>
-        <p:spPr>
-          <a:xfrm>
-            <a:off x="9334500" y="2410396"/>
+          <p:cNvPr id="16" name="TextBox 15"/>
+          <p:cNvSpPr txBox="1"/>
+          <p:nvPr/>
+        </p:nvSpPr>
+        <p:spPr>
+          <a:xfrm>
+            <a:off x="9334500" y="2760726"/>
             <a:ext cx="2171700" cy="1403604"/>
           </a:xfrm>
           <a:prstGeom prst="rect">
@@ -21549,7 +21393,7 @@
       </p:sp>
       <p:sp>
         <p:nvSpPr>
-          <p:cNvPr id="21" name="TextBox 20"/>
+          <p:cNvPr id="17" name="TextBox 16"/>
           <p:cNvSpPr txBox="1"/>
           <p:nvPr/>
         </p:nvSpPr>
@@ -21588,7 +21432,7 @@
       </p:sp>
       <p:sp>
         <p:nvSpPr>
-          <p:cNvPr id="22" name="TextBox 21"/>
+          <p:cNvPr id="18" name="TextBox 17"/>
           <p:cNvSpPr txBox="1"/>
           <p:nvPr/>
         </p:nvSpPr>
@@ -30053,7 +29897,7 @@
                 </a:solidFill>
                 <a:latin typeface="Roboto"/>
               </a:rPr>
-              <a:t>O que o kernel faz quando alguém digita docker run, e por que a imagem é em camadas.</a:t>
+              <a:t>Antes de decidir onde cada parte roda, o que o kernel faz quando alguém digita docker run e por que a imagem é em camadas.</a:t>
             </a:r>
           </a:p>
         </p:txBody>

--- a/trabalhos/T1-Docker-Invite-People.pptx
+++ b/trabalhos/T1-Docker-Invite-People.pptx
@@ -18844,7 +18844,7 @@
                 </a:solidFill>
                 <a:latin typeface="Roboto"/>
               </a:rPr>
-              <a:t>O que a fronteira garante</a:t>
+              <a:t>A fronteira aumenta a coesão</a:t>
             </a:r>
           </a:p>
           <a:p>
@@ -18860,7 +18860,7 @@
                 </a:solidFill>
                 <a:latin typeface="Roboto"/>
               </a:rPr>
-              <a:t>e o que ela não garante</a:t>
+              <a:t>e muda a forma do acoplamento</a:t>
             </a:r>
           </a:p>
         </p:txBody>
@@ -18899,7 +18899,7 @@
                 </a:solidFill>
                 <a:latin typeface="Roboto"/>
               </a:rPr>
-              <a:t>GARANTE</a:t>
+              <a:t>COESÃO</a:t>
             </a:r>
           </a:p>
         </p:txBody>
@@ -19294,7 +19294,7 @@
                 </a:solidFill>
                 <a:latin typeface="Roboto"/>
               </a:rPr>
-              <a:t>NÃO GARANTE</a:t>
+              <a:t>ACOPLAMENTO</a:t>
             </a:r>
           </a:p>
         </p:txBody>
@@ -19700,7 +19700,7 @@
                 </a:solidFill>
                 <a:latin typeface="Roboto"/>
               </a:rPr>
-              <a:t>Duas views sobre o mesmo Model,</a:t>
+              <a:t>O convite público e o painel</a:t>
             </a:r>
           </a:p>
           <a:p>
@@ -19716,7 +19716,7 @@
                 </a:solidFill>
                 <a:latin typeface="Roboto"/>
               </a:rPr>
-              <a:t>dois perfis de carga</a:t>
+              <a:t>têm cargas diferentes</a:t>
             </a:r>
           </a:p>
         </p:txBody>
@@ -22856,7 +22856,7 @@
                 </a:solidFill>
                 <a:latin typeface="Roboto"/>
               </a:rPr>
-              <a:t>O QUE ELE CREDITA A CAMADAS</a:t>
+              <a:t>NA AULA 03</a:t>
             </a:r>
           </a:p>
         </p:txBody>
@@ -23251,7 +23251,7 @@
                 </a:solidFill>
                 <a:latin typeface="Roboto"/>
               </a:rPr>
-              <a:t>O QUE CADA UMA VIRA AQUI</a:t>
+              <a:t>COM CONTAINER</a:t>
             </a:r>
           </a:p>
         </p:txBody>
@@ -26533,7 +26533,7 @@
                 </a:solidFill>
                 <a:latin typeface="Roboto"/>
               </a:rPr>
-              <a:t>Critérios de contraindicação</a:t>
+              <a:t>Quatro critérios para não conteinerizar,</a:t>
             </a:r>
           </a:p>
           <a:p>
@@ -26588,7 +26588,7 @@
                 </a:solidFill>
                 <a:latin typeface="Roboto"/>
               </a:rPr>
-              <a:t>QUANDO NÃO COMPENSA</a:t>
+              <a:t>OS QUATRO CRITÉRIOS</a:t>
             </a:r>
           </a:p>
         </p:txBody>
@@ -27428,7 +27428,7 @@
                 </a:solidFill>
                 <a:latin typeface="Roboto"/>
               </a:rPr>
-              <a:t>O BALANÇO DO TIME</a:t>
+              <a:t>GANHO E CUSTO</a:t>
             </a:r>
           </a:p>
         </p:txBody>
@@ -27467,7 +27467,7 @@
                 </a:solidFill>
                 <a:latin typeface="Roboto"/>
               </a:rPr>
-              <a:t>Ganho e custo, nos quatro atributos</a:t>
+              <a:t>Efeito nos quatro atributos</a:t>
             </a:r>
           </a:p>
           <a:p>
@@ -28860,7 +28860,7 @@
                 </a:solidFill>
                 <a:latin typeface="Roboto"/>
               </a:rPr>
-              <a:t>ANTES E DEPOIS, NO NOSSO REPOSITÓRIO</a:t>
+              <a:t>ANTES E DEPOIS</a:t>
             </a:r>
           </a:p>
         </p:txBody>
@@ -28899,7 +28899,7 @@
                 </a:solidFill>
                 <a:latin typeface="Roboto"/>
               </a:rPr>
-              <a:t>Do problema de ambiente</a:t>
+              <a:t>O que mudou no ambiente</a:t>
             </a:r>
           </a:p>
           <a:p>
@@ -28915,7 +28915,7 @@
                 </a:solidFill>
                 <a:latin typeface="Roboto"/>
               </a:rPr>
-              <a:t>ao arquivo de compose</a:t>
+              <a:t>do time</a:t>
             </a:r>
           </a:p>
         </p:txBody>
@@ -30827,7 +30827,7 @@
                 </a:solidFill>
                 <a:latin typeface="Roboto"/>
               </a:rPr>
-              <a:t>PARA CONSULTAR DEPOIS</a:t>
+              <a:t>FONTES CITADAS</a:t>
             </a:r>
           </a:p>
         </p:txBody>
@@ -31696,7 +31696,7 @@
                 </a:solidFill>
                 <a:latin typeface="Roboto"/>
               </a:rPr>
-              <a:t>Do chroot à padronização OCI</a:t>
+              <a:t>Marcos do isolamento de processos</a:t>
             </a:r>
           </a:p>
         </p:txBody>

--- a/trabalhos/T1-Docker-Invite-People.pptx
+++ b/trabalhos/T1-Docker-Invite-People.pptx
@@ -38,7 +38,6 @@
     <p:sldId id="283" r:id="rId38"/>
     <p:sldId id="284" r:id="rId39"/>
     <p:sldId id="285" r:id="rId40"/>
-    <p:sldId id="286" r:id="rId41"/>
   </p:sldIdLst>
   <p:sldSz cx="12192000" cy="6858000"/>
   <p:notesSz cx="6858000" cy="9144000"/>
@@ -12249,7 +12248,7 @@
                 </a:solidFill>
                 <a:latin typeface="Roboto"/>
               </a:rPr>
-              <a:t> O root do POSIX fatiado em cerca de quarenta bits independentes, derrubados e devolvidos um a um.</a:t>
+              <a:t> O root do POSIX fatiado em privilégios independentes, derrubados e devolvidos um a um.</a:t>
             </a:r>
           </a:p>
         </p:txBody>
@@ -12336,7 +12335,7 @@
                 </a:solidFill>
                 <a:latin typeface="Roboto"/>
               </a:rPr>
-              <a:t> O perfil padrão bloqueia cerca de 44 chamadas de sistema de mais de trezentas.</a:t>
+              <a:t> O perfil padrão bloqueia parte das chamadas de sistema disponíveis.</a:t>
             </a:r>
           </a:p>
         </p:txBody>
@@ -22762,7 +22761,7 @@
                 </a:solidFill>
                 <a:latin typeface="Roboto"/>
               </a:rPr>
-              <a:t>VANTAGENS</a:t>
+              <a:t>LIMITAÇÕES</a:t>
             </a:r>
           </a:p>
         </p:txBody>
@@ -22801,23 +22800,7 @@
                 </a:solidFill>
                 <a:latin typeface="Roboto"/>
               </a:rPr>
-              <a:t>Vantagens no vocabulário</a:t>
-            </a:r>
-          </a:p>
-          <a:p>
-            <a:pPr>
-              <a:lnSpc>
-                <a:spcPct val="104000"/>
-              </a:lnSpc>
-            </a:pPr>
-            <a:r>
-              <a:rPr sz="3000" b="1" i="0">
-                <a:solidFill>
-                  <a:srgbClr val="21049A"/>
-                </a:solidFill>
-                <a:latin typeface="Roboto"/>
-              </a:rPr>
-              <a:t>da Aula 03</a:t>
+              <a:t>Limitações e custos</a:t>
             </a:r>
           </a:p>
         </p:txBody>
@@ -22830,8 +22813,8 @@
         </p:nvSpPr>
         <p:spPr>
           <a:xfrm>
-            <a:off x="685800" y="2325243"/>
-            <a:ext cx="5143500" cy="182880"/>
+            <a:off x="685800" y="2761107"/>
+            <a:ext cx="247650" cy="308458"/>
           </a:xfrm>
           <a:prstGeom prst="rect">
             <a:avLst/>
@@ -22850,36 +22833,309 @@
               </a:lnSpc>
             </a:pPr>
             <a:r>
-              <a:rPr sz="900" b="1" i="0" spc="120">
-                <a:solidFill>
-                  <a:srgbClr val="21049A"/>
-                </a:solidFill>
-                <a:latin typeface="Roboto"/>
-              </a:rPr>
-              <a:t>NA AULA 03</a:t>
-            </a:r>
-          </a:p>
-        </p:txBody>
-      </p:sp>
-      <p:sp>
-        <p:nvSpPr>
-          <p:cNvPr id="6" name="Rectangle 5"/>
+              <a:rPr sz="1520" b="1" i="0">
+                <a:solidFill>
+                  <a:srgbClr val="E94D1C"/>
+                </a:solidFill>
+                <a:latin typeface="Roboto"/>
+              </a:rPr>
+              <a:t>//</a:t>
+            </a:r>
+          </a:p>
+        </p:txBody>
+      </p:sp>
+      <p:sp>
+        <p:nvSpPr>
+          <p:cNvPr id="6" name="TextBox 5"/>
+          <p:cNvSpPr txBox="1"/>
+          <p:nvPr/>
+        </p:nvSpPr>
+        <p:spPr>
+          <a:xfrm>
+            <a:off x="971550" y="2751582"/>
+            <a:ext cx="7772400" cy="95250"/>
+          </a:xfrm>
+          <a:prstGeom prst="rect">
+            <a:avLst/>
+          </a:prstGeom>
+          <a:noFill/>
+        </p:spPr>
+        <p:txBody>
+          <a:bodyPr wrap="square" lIns="0" rIns="0" tIns="0" bIns="0" anchor="t">
+            <a:spAutoFit/>
+          </a:bodyPr>
+          <a:lstStyle/>
+          <a:p>
+            <a:pPr algn="l">
+              <a:lnSpc>
+                <a:spcPct val="130000"/>
+              </a:lnSpc>
+            </a:pPr>
+            <a:r>
+              <a:rPr sz="1650" b="0" i="0">
+                <a:solidFill>
+                  <a:srgbClr val="1A1A1E"/>
+                </a:solidFill>
+                <a:latin typeface="Roboto"/>
+              </a:rPr>
+              <a:t>O daemon roda como root. Estar no grupo docker equivale a root no host, sem sudo e sem trilha de auditoria.</a:t>
+            </a:r>
+          </a:p>
+        </p:txBody>
+      </p:sp>
+      <p:sp>
+        <p:nvSpPr>
+          <p:cNvPr id="7" name="TextBox 6"/>
+          <p:cNvSpPr txBox="1"/>
+          <p:nvPr/>
+        </p:nvSpPr>
+        <p:spPr>
+          <a:xfrm>
+            <a:off x="685800" y="3600069"/>
+            <a:ext cx="247650" cy="308458"/>
+          </a:xfrm>
+          <a:prstGeom prst="rect">
+            <a:avLst/>
+          </a:prstGeom>
+          <a:noFill/>
+        </p:spPr>
+        <p:txBody>
+          <a:bodyPr wrap="square" lIns="0" rIns="0" tIns="0" bIns="0" anchor="t">
+            <a:spAutoFit/>
+          </a:bodyPr>
+          <a:lstStyle/>
+          <a:p>
+            <a:pPr algn="l">
+              <a:lnSpc>
+                <a:spcPct val="120000"/>
+              </a:lnSpc>
+            </a:pPr>
+            <a:r>
+              <a:rPr sz="1520" b="1" i="0">
+                <a:solidFill>
+                  <a:srgbClr val="E94D1C"/>
+                </a:solidFill>
+                <a:latin typeface="Roboto"/>
+              </a:rPr>
+              <a:t>//</a:t>
+            </a:r>
+          </a:p>
+        </p:txBody>
+      </p:sp>
+      <p:sp>
+        <p:nvSpPr>
+          <p:cNvPr id="8" name="TextBox 7"/>
+          <p:cNvSpPr txBox="1"/>
+          <p:nvPr/>
+        </p:nvSpPr>
+        <p:spPr>
+          <a:xfrm>
+            <a:off x="971550" y="3590544"/>
+            <a:ext cx="7772400" cy="95250"/>
+          </a:xfrm>
+          <a:prstGeom prst="rect">
+            <a:avLst/>
+          </a:prstGeom>
+          <a:noFill/>
+        </p:spPr>
+        <p:txBody>
+          <a:bodyPr wrap="square" lIns="0" rIns="0" tIns="0" bIns="0" anchor="t">
+            <a:spAutoFit/>
+          </a:bodyPr>
+          <a:lstStyle/>
+          <a:p>
+            <a:pPr algn="l">
+              <a:lnSpc>
+                <a:spcPct val="130000"/>
+              </a:lnSpc>
+            </a:pPr>
+            <a:r>
+              <a:rPr sz="1650" b="0" i="0">
+                <a:solidFill>
+                  <a:srgbClr val="1A1A1E"/>
+                </a:solidFill>
+                <a:latin typeface="Roboto"/>
+              </a:rPr>
+              <a:t>A regra de rede que o Docker escreve passa na frente da do administrador, então um deny de firewall na porta publicada não bloqueia nada.</a:t>
+            </a:r>
+          </a:p>
+        </p:txBody>
+      </p:sp>
+      <p:sp>
+        <p:nvSpPr>
+          <p:cNvPr id="9" name="TextBox 8"/>
+          <p:cNvSpPr txBox="1"/>
+          <p:nvPr/>
+        </p:nvSpPr>
+        <p:spPr>
+          <a:xfrm>
+            <a:off x="685800" y="4439031"/>
+            <a:ext cx="247650" cy="308458"/>
+          </a:xfrm>
+          <a:prstGeom prst="rect">
+            <a:avLst/>
+          </a:prstGeom>
+          <a:noFill/>
+        </p:spPr>
+        <p:txBody>
+          <a:bodyPr wrap="square" lIns="0" rIns="0" tIns="0" bIns="0" anchor="t">
+            <a:spAutoFit/>
+          </a:bodyPr>
+          <a:lstStyle/>
+          <a:p>
+            <a:pPr algn="l">
+              <a:lnSpc>
+                <a:spcPct val="120000"/>
+              </a:lnSpc>
+            </a:pPr>
+            <a:r>
+              <a:rPr sz="1520" b="1" i="0">
+                <a:solidFill>
+                  <a:srgbClr val="E94D1C"/>
+                </a:solidFill>
+                <a:latin typeface="Roboto"/>
+              </a:rPr>
+              <a:t>//</a:t>
+            </a:r>
+          </a:p>
+        </p:txBody>
+      </p:sp>
+      <p:sp>
+        <p:nvSpPr>
+          <p:cNvPr id="10" name="TextBox 9"/>
+          <p:cNvSpPr txBox="1"/>
+          <p:nvPr/>
+        </p:nvSpPr>
+        <p:spPr>
+          <a:xfrm>
+            <a:off x="971550" y="4429506"/>
+            <a:ext cx="7772400" cy="95250"/>
+          </a:xfrm>
+          <a:prstGeom prst="rect">
+            <a:avLst/>
+          </a:prstGeom>
+          <a:noFill/>
+        </p:spPr>
+        <p:txBody>
+          <a:bodyPr wrap="square" lIns="0" rIns="0" tIns="0" bIns="0" anchor="t">
+            <a:spAutoFit/>
+          </a:bodyPr>
+          <a:lstStyle/>
+          <a:p>
+            <a:pPr algn="l">
+              <a:lnSpc>
+                <a:spcPct val="130000"/>
+              </a:lnSpc>
+            </a:pPr>
+            <a:r>
+              <a:rPr sz="1650" b="0" i="0">
+                <a:solidFill>
+                  <a:srgbClr val="1A1A1E"/>
+                </a:solidFill>
+                <a:latin typeface="Roboto"/>
+              </a:rPr>
+              <a:t>Estado, que traz junto backup e upgrade de versão maior do banco.</a:t>
+            </a:r>
+          </a:p>
+        </p:txBody>
+      </p:sp>
+      <p:sp>
+        <p:nvSpPr>
+          <p:cNvPr id="11" name="TextBox 10"/>
+          <p:cNvSpPr txBox="1"/>
+          <p:nvPr/>
+        </p:nvSpPr>
+        <p:spPr>
+          <a:xfrm>
+            <a:off x="685800" y="5001387"/>
+            <a:ext cx="247650" cy="308458"/>
+          </a:xfrm>
+          <a:prstGeom prst="rect">
+            <a:avLst/>
+          </a:prstGeom>
+          <a:noFill/>
+        </p:spPr>
+        <p:txBody>
+          <a:bodyPr wrap="square" lIns="0" rIns="0" tIns="0" bIns="0" anchor="t">
+            <a:spAutoFit/>
+          </a:bodyPr>
+          <a:lstStyle/>
+          <a:p>
+            <a:pPr algn="l">
+              <a:lnSpc>
+                <a:spcPct val="120000"/>
+              </a:lnSpc>
+            </a:pPr>
+            <a:r>
+              <a:rPr sz="1520" b="1" i="0">
+                <a:solidFill>
+                  <a:srgbClr val="E94D1C"/>
+                </a:solidFill>
+                <a:latin typeface="Roboto"/>
+              </a:rPr>
+              <a:t>//</a:t>
+            </a:r>
+          </a:p>
+        </p:txBody>
+      </p:sp>
+      <p:sp>
+        <p:nvSpPr>
+          <p:cNvPr id="12" name="TextBox 11"/>
+          <p:cNvSpPr txBox="1"/>
+          <p:nvPr/>
+        </p:nvSpPr>
+        <p:spPr>
+          <a:xfrm>
+            <a:off x="971550" y="4991862"/>
+            <a:ext cx="7772400" cy="95250"/>
+          </a:xfrm>
+          <a:prstGeom prst="rect">
+            <a:avLst/>
+          </a:prstGeom>
+          <a:noFill/>
+        </p:spPr>
+        <p:txBody>
+          <a:bodyPr wrap="square" lIns="0" rIns="0" tIns="0" bIns="0" anchor="t">
+            <a:spAutoFit/>
+          </a:bodyPr>
+          <a:lstStyle/>
+          <a:p>
+            <a:pPr algn="l">
+              <a:lnSpc>
+                <a:spcPct val="130000"/>
+              </a:lnSpc>
+            </a:pPr>
+            <a:r>
+              <a:rPr sz="1650" b="0" i="0">
+                <a:solidFill>
+                  <a:srgbClr val="1A1A1E"/>
+                </a:solidFill>
+                <a:latin typeface="Roboto"/>
+              </a:rPr>
+              <a:t>Licenciamento do Docker Desktop.</a:t>
+            </a:r>
+          </a:p>
+        </p:txBody>
+      </p:sp>
+      <p:sp>
+        <p:nvSpPr>
+          <p:cNvPr id="13" name="Isosceles Triangle 12"/>
           <p:cNvSpPr/>
           <p:nvPr/>
         </p:nvSpPr>
         <p:spPr>
           <a:xfrm>
-            <a:off x="685800" y="2534793"/>
-            <a:ext cx="419100" cy="28575"/>
-          </a:xfrm>
-          <a:prstGeom prst="rect">
-            <a:avLst/>
-          </a:prstGeom>
-          <a:solidFill>
-            <a:srgbClr val="21049A"/>
-          </a:solidFill>
-          <a:ln>
-            <a:noFill/>
+            <a:off x="9124950" y="2751582"/>
+            <a:ext cx="152400" cy="133350"/>
+          </a:xfrm>
+          <a:prstGeom prst="triangle">
+            <a:avLst/>
+          </a:prstGeom>
+          <a:noFill/>
+          <a:ln w="19050">
+            <a:solidFill>
+              <a:srgbClr val="E94D1C"/>
+            </a:solidFill>
           </a:ln>
           <a:effectLst/>
         </p:spPr>
@@ -22898,7 +23154,7 @@
           </a:fontRef>
         </p:style>
         <p:txBody>
-          <a:bodyPr rtlCol="0" anchor="ctr" wrap="square" lIns="0" rIns="0" tIns="0" bIns="0"/>
+          <a:bodyPr rtlCol="0" anchor="ctr"/>
           <a:lstStyle/>
           <a:p>
             <a:pPr algn="ctr"/>
@@ -22907,365 +23163,14 @@
       </p:sp>
       <p:sp>
         <p:nvSpPr>
-          <p:cNvPr id="7" name="TextBox 6"/>
-          <p:cNvSpPr txBox="1"/>
-          <p:nvPr/>
-        </p:nvSpPr>
-        <p:spPr>
-          <a:xfrm>
-            <a:off x="685800" y="2830068"/>
-            <a:ext cx="247650" cy="294437"/>
-          </a:xfrm>
-          <a:prstGeom prst="rect">
-            <a:avLst/>
-          </a:prstGeom>
-          <a:noFill/>
-        </p:spPr>
-        <p:txBody>
-          <a:bodyPr wrap="square" lIns="0" rIns="0" tIns="0" bIns="0" anchor="t">
-            <a:spAutoFit/>
-          </a:bodyPr>
-          <a:lstStyle/>
-          <a:p>
-            <a:pPr algn="l">
-              <a:lnSpc>
-                <a:spcPct val="120000"/>
-              </a:lnSpc>
-            </a:pPr>
-            <a:r>
-              <a:rPr sz="1450" b="1" i="0">
-                <a:solidFill>
-                  <a:srgbClr val="E94D1C"/>
-                </a:solidFill>
-                <a:latin typeface="Roboto"/>
-              </a:rPr>
-              <a:t>//</a:t>
-            </a:r>
-          </a:p>
-        </p:txBody>
-      </p:sp>
-      <p:sp>
-        <p:nvSpPr>
-          <p:cNvPr id="8" name="TextBox 7"/>
-          <p:cNvSpPr txBox="1"/>
-          <p:nvPr/>
-        </p:nvSpPr>
-        <p:spPr>
-          <a:xfrm>
-            <a:off x="971550" y="2820543"/>
-            <a:ext cx="4857750" cy="95250"/>
-          </a:xfrm>
-          <a:prstGeom prst="rect">
-            <a:avLst/>
-          </a:prstGeom>
-          <a:noFill/>
-        </p:spPr>
-        <p:txBody>
-          <a:bodyPr wrap="square" lIns="0" rIns="0" tIns="0" bIns="0" anchor="t">
-            <a:spAutoFit/>
-          </a:bodyPr>
-          <a:lstStyle/>
-          <a:p>
-            <a:pPr algn="l">
-              <a:lnSpc>
-                <a:spcPct val="130000"/>
-              </a:lnSpc>
-            </a:pPr>
-            <a:r>
-              <a:rPr sz="1580" b="1" i="0">
-                <a:solidFill>
-                  <a:srgbClr val="1A1A1E"/>
-                </a:solidFill>
-                <a:latin typeface="Roboto"/>
-              </a:rPr>
-              <a:t>Modularidade.</a:t>
-            </a:r>
-          </a:p>
-        </p:txBody>
-      </p:sp>
-      <p:sp>
-        <p:nvSpPr>
-          <p:cNvPr id="9" name="TextBox 8"/>
-          <p:cNvSpPr txBox="1"/>
-          <p:nvPr/>
-        </p:nvSpPr>
-        <p:spPr>
-          <a:xfrm>
-            <a:off x="685800" y="3360801"/>
-            <a:ext cx="247650" cy="294437"/>
-          </a:xfrm>
-          <a:prstGeom prst="rect">
-            <a:avLst/>
-          </a:prstGeom>
-          <a:noFill/>
-        </p:spPr>
-        <p:txBody>
-          <a:bodyPr wrap="square" lIns="0" rIns="0" tIns="0" bIns="0" anchor="t">
-            <a:spAutoFit/>
-          </a:bodyPr>
-          <a:lstStyle/>
-          <a:p>
-            <a:pPr algn="l">
-              <a:lnSpc>
-                <a:spcPct val="120000"/>
-              </a:lnSpc>
-            </a:pPr>
-            <a:r>
-              <a:rPr sz="1450" b="1" i="0">
-                <a:solidFill>
-                  <a:srgbClr val="E94D1C"/>
-                </a:solidFill>
-                <a:latin typeface="Roboto"/>
-              </a:rPr>
-              <a:t>//</a:t>
-            </a:r>
-          </a:p>
-        </p:txBody>
-      </p:sp>
-      <p:sp>
-        <p:nvSpPr>
-          <p:cNvPr id="10" name="TextBox 9"/>
-          <p:cNvSpPr txBox="1"/>
-          <p:nvPr/>
-        </p:nvSpPr>
-        <p:spPr>
-          <a:xfrm>
-            <a:off x="971550" y="3351276"/>
-            <a:ext cx="4857750" cy="95250"/>
-          </a:xfrm>
-          <a:prstGeom prst="rect">
-            <a:avLst/>
-          </a:prstGeom>
-          <a:noFill/>
-        </p:spPr>
-        <p:txBody>
-          <a:bodyPr wrap="square" lIns="0" rIns="0" tIns="0" bIns="0" anchor="t">
-            <a:spAutoFit/>
-          </a:bodyPr>
-          <a:lstStyle/>
-          <a:p>
-            <a:pPr algn="l">
-              <a:lnSpc>
-                <a:spcPct val="130000"/>
-              </a:lnSpc>
-            </a:pPr>
-            <a:r>
-              <a:rPr sz="1580" b="1" i="0">
-                <a:solidFill>
-                  <a:srgbClr val="1A1A1E"/>
-                </a:solidFill>
-                <a:latin typeface="Roboto"/>
-              </a:rPr>
-              <a:t>Reusabilidade.</a:t>
-            </a:r>
-          </a:p>
-        </p:txBody>
-      </p:sp>
-      <p:sp>
-        <p:nvSpPr>
-          <p:cNvPr id="11" name="TextBox 10"/>
-          <p:cNvSpPr txBox="1"/>
-          <p:nvPr/>
-        </p:nvSpPr>
-        <p:spPr>
-          <a:xfrm>
-            <a:off x="685800" y="3891534"/>
-            <a:ext cx="247650" cy="294437"/>
-          </a:xfrm>
-          <a:prstGeom prst="rect">
-            <a:avLst/>
-          </a:prstGeom>
-          <a:noFill/>
-        </p:spPr>
-        <p:txBody>
-          <a:bodyPr wrap="square" lIns="0" rIns="0" tIns="0" bIns="0" anchor="t">
-            <a:spAutoFit/>
-          </a:bodyPr>
-          <a:lstStyle/>
-          <a:p>
-            <a:pPr algn="l">
-              <a:lnSpc>
-                <a:spcPct val="120000"/>
-              </a:lnSpc>
-            </a:pPr>
-            <a:r>
-              <a:rPr sz="1450" b="1" i="0">
-                <a:solidFill>
-                  <a:srgbClr val="E94D1C"/>
-                </a:solidFill>
-                <a:latin typeface="Roboto"/>
-              </a:rPr>
-              <a:t>//</a:t>
-            </a:r>
-          </a:p>
-        </p:txBody>
-      </p:sp>
-      <p:sp>
-        <p:nvSpPr>
-          <p:cNvPr id="12" name="TextBox 11"/>
-          <p:cNvSpPr txBox="1"/>
-          <p:nvPr/>
-        </p:nvSpPr>
-        <p:spPr>
-          <a:xfrm>
-            <a:off x="971550" y="3882009"/>
-            <a:ext cx="4857750" cy="95250"/>
-          </a:xfrm>
-          <a:prstGeom prst="rect">
-            <a:avLst/>
-          </a:prstGeom>
-          <a:noFill/>
-        </p:spPr>
-        <p:txBody>
-          <a:bodyPr wrap="square" lIns="0" rIns="0" tIns="0" bIns="0" anchor="t">
-            <a:spAutoFit/>
-          </a:bodyPr>
-          <a:lstStyle/>
-          <a:p>
-            <a:pPr algn="l">
-              <a:lnSpc>
-                <a:spcPct val="130000"/>
-              </a:lnSpc>
-            </a:pPr>
-            <a:r>
-              <a:rPr sz="1580" b="1" i="0">
-                <a:solidFill>
-                  <a:srgbClr val="1A1A1E"/>
-                </a:solidFill>
-                <a:latin typeface="Roboto"/>
-              </a:rPr>
-              <a:t>Compreensibilidade.</a:t>
-            </a:r>
-          </a:p>
-        </p:txBody>
-      </p:sp>
-      <p:sp>
-        <p:nvSpPr>
-          <p:cNvPr id="13" name="TextBox 12"/>
-          <p:cNvSpPr txBox="1"/>
-          <p:nvPr/>
-        </p:nvSpPr>
-        <p:spPr>
-          <a:xfrm>
-            <a:off x="685800" y="4422267"/>
-            <a:ext cx="247650" cy="294437"/>
-          </a:xfrm>
-          <a:prstGeom prst="rect">
-            <a:avLst/>
-          </a:prstGeom>
-          <a:noFill/>
-        </p:spPr>
-        <p:txBody>
-          <a:bodyPr wrap="square" lIns="0" rIns="0" tIns="0" bIns="0" anchor="t">
-            <a:spAutoFit/>
-          </a:bodyPr>
-          <a:lstStyle/>
-          <a:p>
-            <a:pPr algn="l">
-              <a:lnSpc>
-                <a:spcPct val="120000"/>
-              </a:lnSpc>
-            </a:pPr>
-            <a:r>
-              <a:rPr sz="1450" b="1" i="0">
-                <a:solidFill>
-                  <a:srgbClr val="E94D1C"/>
-                </a:solidFill>
-                <a:latin typeface="Roboto"/>
-              </a:rPr>
-              <a:t>//</a:t>
-            </a:r>
-          </a:p>
-        </p:txBody>
-      </p:sp>
-      <p:sp>
-        <p:nvSpPr>
-          <p:cNvPr id="14" name="TextBox 13"/>
-          <p:cNvSpPr txBox="1"/>
-          <p:nvPr/>
-        </p:nvSpPr>
-        <p:spPr>
-          <a:xfrm>
-            <a:off x="971550" y="4412742"/>
-            <a:ext cx="4857750" cy="95250"/>
-          </a:xfrm>
-          <a:prstGeom prst="rect">
-            <a:avLst/>
-          </a:prstGeom>
-          <a:noFill/>
-        </p:spPr>
-        <p:txBody>
-          <a:bodyPr wrap="square" lIns="0" rIns="0" tIns="0" bIns="0" anchor="t">
-            <a:spAutoFit/>
-          </a:bodyPr>
-          <a:lstStyle/>
-          <a:p>
-            <a:pPr algn="l">
-              <a:lnSpc>
-                <a:spcPct val="130000"/>
-              </a:lnSpc>
-            </a:pPr>
-            <a:r>
-              <a:rPr sz="1580" b="1" i="0">
-                <a:solidFill>
-                  <a:srgbClr val="1A1A1E"/>
-                </a:solidFill>
-                <a:latin typeface="Roboto"/>
-              </a:rPr>
-              <a:t>Extensibilidade.</a:t>
-            </a:r>
-          </a:p>
-        </p:txBody>
-      </p:sp>
-      <p:sp>
-        <p:nvSpPr>
-          <p:cNvPr id="15" name="TextBox 14"/>
-          <p:cNvSpPr txBox="1"/>
-          <p:nvPr/>
-        </p:nvSpPr>
-        <p:spPr>
-          <a:xfrm>
-            <a:off x="6362700" y="2325243"/>
-            <a:ext cx="5143500" cy="182880"/>
-          </a:xfrm>
-          <a:prstGeom prst="rect">
-            <a:avLst/>
-          </a:prstGeom>
-          <a:noFill/>
-        </p:spPr>
-        <p:txBody>
-          <a:bodyPr wrap="square" lIns="0" rIns="0" tIns="0" bIns="0" anchor="t">
-            <a:spAutoFit/>
-          </a:bodyPr>
-          <a:lstStyle/>
-          <a:p>
-            <a:pPr algn="l">
-              <a:lnSpc>
-                <a:spcPct val="120000"/>
-              </a:lnSpc>
-            </a:pPr>
-            <a:r>
-              <a:rPr sz="900" b="1" i="0" spc="120">
-                <a:solidFill>
-                  <a:srgbClr val="E94D1C"/>
-                </a:solidFill>
-                <a:latin typeface="Roboto"/>
-              </a:rPr>
-              <a:t>COM CONTAINER</a:t>
-            </a:r>
-          </a:p>
-        </p:txBody>
-      </p:sp>
-      <p:sp>
-        <p:nvSpPr>
-          <p:cNvPr id="16" name="Rectangle 15"/>
+          <p:cNvPr id="14" name="Rectangle 13"/>
           <p:cNvSpPr/>
           <p:nvPr/>
         </p:nvSpPr>
         <p:spPr>
           <a:xfrm>
-            <a:off x="6362700" y="2534793"/>
-            <a:ext cx="419100" cy="28575"/>
+            <a:off x="9193530" y="2808732"/>
+            <a:ext cx="15240" cy="38100"/>
           </a:xfrm>
           <a:prstGeom prst="rect">
             <a:avLst/>
@@ -23293,6 +23198,89 @@
           </a:fontRef>
         </p:style>
         <p:txBody>
+          <a:bodyPr rtlCol="0" anchor="ctr"/>
+          <a:lstStyle/>
+          <a:p>
+            <a:pPr algn="ctr"/>
+          </a:p>
+        </p:txBody>
+      </p:sp>
+      <p:sp>
+        <p:nvSpPr>
+          <p:cNvPr id="15" name="TextBox 14"/>
+          <p:cNvSpPr txBox="1"/>
+          <p:nvPr/>
+        </p:nvSpPr>
+        <p:spPr>
+          <a:xfrm>
+            <a:off x="9372600" y="2761107"/>
+            <a:ext cx="2133600" cy="182880"/>
+          </a:xfrm>
+          <a:prstGeom prst="rect">
+            <a:avLst/>
+          </a:prstGeom>
+          <a:noFill/>
+        </p:spPr>
+        <p:txBody>
+          <a:bodyPr wrap="square" lIns="0" rIns="0" tIns="0" bIns="0" anchor="t">
+            <a:spAutoFit/>
+          </a:bodyPr>
+          <a:lstStyle/>
+          <a:p>
+            <a:pPr algn="l">
+              <a:lnSpc>
+                <a:spcPct val="120000"/>
+              </a:lnSpc>
+            </a:pPr>
+            <a:r>
+              <a:rPr sz="900" b="1" i="0" spc="120">
+                <a:solidFill>
+                  <a:srgbClr val="E94D1C"/>
+                </a:solidFill>
+                <a:latin typeface="Roboto"/>
+              </a:rPr>
+              <a:t>REGRA</a:t>
+            </a:r>
+          </a:p>
+        </p:txBody>
+      </p:sp>
+      <p:sp>
+        <p:nvSpPr>
+          <p:cNvPr id="16" name="Rectangle 15"/>
+          <p:cNvSpPr/>
+          <p:nvPr/>
+        </p:nvSpPr>
+        <p:spPr>
+          <a:xfrm>
+            <a:off x="9124950" y="3037332"/>
+            <a:ext cx="38100" cy="804672"/>
+          </a:xfrm>
+          <a:prstGeom prst="rect">
+            <a:avLst/>
+          </a:prstGeom>
+          <a:solidFill>
+            <a:srgbClr val="E94D1C"/>
+          </a:solidFill>
+          <a:ln>
+            <a:noFill/>
+          </a:ln>
+          <a:effectLst/>
+        </p:spPr>
+        <p:style>
+          <a:lnRef idx="1">
+            <a:schemeClr val="accent1"/>
+          </a:lnRef>
+          <a:fillRef idx="3">
+            <a:schemeClr val="accent1"/>
+          </a:fillRef>
+          <a:effectRef idx="2">
+            <a:schemeClr val="accent1"/>
+          </a:effectRef>
+          <a:fontRef idx="minor">
+            <a:schemeClr val="lt1"/>
+          </a:fontRef>
+        </p:style>
+        <p:txBody>
           <a:bodyPr rtlCol="0" anchor="ctr" wrap="square" lIns="0" rIns="0" tIns="0" bIns="0"/>
           <a:lstStyle/>
           <a:p>
@@ -23308,8 +23296,8 @@
         </p:nvSpPr>
         <p:spPr>
           <a:xfrm>
-            <a:off x="6362700" y="2830068"/>
-            <a:ext cx="247650" cy="294437"/>
+            <a:off x="9334500" y="3037332"/>
+            <a:ext cx="2171700" cy="1376172"/>
           </a:xfrm>
           <a:prstGeom prst="rect">
             <a:avLst/>
@@ -23324,17 +23312,20 @@
           <a:p>
             <a:pPr algn="l">
               <a:lnSpc>
-                <a:spcPct val="120000"/>
-              </a:lnSpc>
-            </a:pPr>
-            <a:r>
-              <a:rPr sz="1450" b="1" i="0">
-                <a:solidFill>
-                  <a:srgbClr val="E94D1C"/>
-                </a:solidFill>
-                <a:latin typeface="Roboto"/>
-              </a:rPr>
-              <a:t>//</a:t>
+                <a:spcPct val="140000"/>
+              </a:lnSpc>
+              <a:spcAft>
+                <a:spcPts val="600"/>
+              </a:spcAft>
+            </a:pPr>
+            <a:r>
+              <a:rPr sz="1200" b="0" i="0">
+                <a:solidFill>
+                  <a:srgbClr val="3A3A44"/>
+                </a:solidFill>
+                <a:latin typeface="Roboto"/>
+              </a:rPr>
+              <a:t>Nenhum número entra neste slide sem medição feita pelo time, com o modelo da máquina e a data.</a:t>
             </a:r>
           </a:p>
         </p:txBody>
@@ -23342,279 +23333,6 @@
       <p:sp>
         <p:nvSpPr>
           <p:cNvPr id="18" name="TextBox 17"/>
-          <p:cNvSpPr txBox="1"/>
-          <p:nvPr/>
-        </p:nvSpPr>
-        <p:spPr>
-          <a:xfrm>
-            <a:off x="6648450" y="2820543"/>
-            <a:ext cx="4857750" cy="95250"/>
-          </a:xfrm>
-          <a:prstGeom prst="rect">
-            <a:avLst/>
-          </a:prstGeom>
-          <a:noFill/>
-        </p:spPr>
-        <p:txBody>
-          <a:bodyPr wrap="square" lIns="0" rIns="0" tIns="0" bIns="0" anchor="t">
-            <a:spAutoFit/>
-          </a:bodyPr>
-          <a:lstStyle/>
-          <a:p>
-            <a:pPr algn="l">
-              <a:lnSpc>
-                <a:spcPct val="130000"/>
-              </a:lnSpc>
-            </a:pPr>
-            <a:r>
-              <a:rPr sz="1580" b="0" i="0">
-                <a:solidFill>
-                  <a:srgbClr val="1A1A1E"/>
-                </a:solidFill>
-                <a:latin typeface="Roboto"/>
-              </a:rPr>
-              <a:t>Uma responsabilidade por imagem, com fronteira declarada.</a:t>
-            </a:r>
-          </a:p>
-        </p:txBody>
-      </p:sp>
-      <p:sp>
-        <p:nvSpPr>
-          <p:cNvPr id="19" name="TextBox 18"/>
-          <p:cNvSpPr txBox="1"/>
-          <p:nvPr/>
-        </p:nvSpPr>
-        <p:spPr>
-          <a:xfrm>
-            <a:off x="6362700" y="3624834"/>
-            <a:ext cx="247650" cy="294437"/>
-          </a:xfrm>
-          <a:prstGeom prst="rect">
-            <a:avLst/>
-          </a:prstGeom>
-          <a:noFill/>
-        </p:spPr>
-        <p:txBody>
-          <a:bodyPr wrap="square" lIns="0" rIns="0" tIns="0" bIns="0" anchor="t">
-            <a:spAutoFit/>
-          </a:bodyPr>
-          <a:lstStyle/>
-          <a:p>
-            <a:pPr algn="l">
-              <a:lnSpc>
-                <a:spcPct val="120000"/>
-              </a:lnSpc>
-            </a:pPr>
-            <a:r>
-              <a:rPr sz="1450" b="1" i="0">
-                <a:solidFill>
-                  <a:srgbClr val="E94D1C"/>
-                </a:solidFill>
-                <a:latin typeface="Roboto"/>
-              </a:rPr>
-              <a:t>//</a:t>
-            </a:r>
-          </a:p>
-        </p:txBody>
-      </p:sp>
-      <p:sp>
-        <p:nvSpPr>
-          <p:cNvPr id="20" name="TextBox 19"/>
-          <p:cNvSpPr txBox="1"/>
-          <p:nvPr/>
-        </p:nvSpPr>
-        <p:spPr>
-          <a:xfrm>
-            <a:off x="6648450" y="3615309"/>
-            <a:ext cx="4857750" cy="95250"/>
-          </a:xfrm>
-          <a:prstGeom prst="rect">
-            <a:avLst/>
-          </a:prstGeom>
-          <a:noFill/>
-        </p:spPr>
-        <p:txBody>
-          <a:bodyPr wrap="square" lIns="0" rIns="0" tIns="0" bIns="0" anchor="t">
-            <a:spAutoFit/>
-          </a:bodyPr>
-          <a:lstStyle/>
-          <a:p>
-            <a:pPr algn="l">
-              <a:lnSpc>
-                <a:spcPct val="130000"/>
-              </a:lnSpc>
-            </a:pPr>
-            <a:r>
-              <a:rPr sz="1580" b="0" i="0">
-                <a:solidFill>
-                  <a:srgbClr val="1A1A1E"/>
-                </a:solidFill>
-                <a:latin typeface="Roboto"/>
-              </a:rPr>
-              <a:t>A mesma imagem atravessa notebook, pipeline e a demonstração funcional do T3.</a:t>
-            </a:r>
-          </a:p>
-        </p:txBody>
-      </p:sp>
-      <p:sp>
-        <p:nvSpPr>
-          <p:cNvPr id="21" name="TextBox 20"/>
-          <p:cNvSpPr txBox="1"/>
-          <p:nvPr/>
-        </p:nvSpPr>
-        <p:spPr>
-          <a:xfrm>
-            <a:off x="6362700" y="4419600"/>
-            <a:ext cx="247650" cy="294437"/>
-          </a:xfrm>
-          <a:prstGeom prst="rect">
-            <a:avLst/>
-          </a:prstGeom>
-          <a:noFill/>
-        </p:spPr>
-        <p:txBody>
-          <a:bodyPr wrap="square" lIns="0" rIns="0" tIns="0" bIns="0" anchor="t">
-            <a:spAutoFit/>
-          </a:bodyPr>
-          <a:lstStyle/>
-          <a:p>
-            <a:pPr algn="l">
-              <a:lnSpc>
-                <a:spcPct val="120000"/>
-              </a:lnSpc>
-            </a:pPr>
-            <a:r>
-              <a:rPr sz="1450" b="1" i="0">
-                <a:solidFill>
-                  <a:srgbClr val="E94D1C"/>
-                </a:solidFill>
-                <a:latin typeface="Roboto"/>
-              </a:rPr>
-              <a:t>//</a:t>
-            </a:r>
-          </a:p>
-        </p:txBody>
-      </p:sp>
-      <p:sp>
-        <p:nvSpPr>
-          <p:cNvPr id="22" name="TextBox 21"/>
-          <p:cNvSpPr txBox="1"/>
-          <p:nvPr/>
-        </p:nvSpPr>
-        <p:spPr>
-          <a:xfrm>
-            <a:off x="6648450" y="4410075"/>
-            <a:ext cx="4857750" cy="95250"/>
-          </a:xfrm>
-          <a:prstGeom prst="rect">
-            <a:avLst/>
-          </a:prstGeom>
-          <a:noFill/>
-        </p:spPr>
-        <p:txBody>
-          <a:bodyPr wrap="square" lIns="0" rIns="0" tIns="0" bIns="0" anchor="t">
-            <a:spAutoFit/>
-          </a:bodyPr>
-          <a:lstStyle/>
-          <a:p>
-            <a:pPr algn="l">
-              <a:lnSpc>
-                <a:spcPct val="130000"/>
-              </a:lnSpc>
-            </a:pPr>
-            <a:r>
-              <a:rPr sz="1580" b="0" i="0">
-                <a:solidFill>
-                  <a:srgbClr val="1A1A1E"/>
-                </a:solidFill>
-                <a:latin typeface="Roboto"/>
-              </a:rPr>
-              <a:t>O ambiente vira arquivo legível, versionado junto com o código.</a:t>
-            </a:r>
-          </a:p>
-        </p:txBody>
-      </p:sp>
-      <p:sp>
-        <p:nvSpPr>
-          <p:cNvPr id="23" name="TextBox 22"/>
-          <p:cNvSpPr txBox="1"/>
-          <p:nvPr/>
-        </p:nvSpPr>
-        <p:spPr>
-          <a:xfrm>
-            <a:off x="6362700" y="5214366"/>
-            <a:ext cx="247650" cy="294437"/>
-          </a:xfrm>
-          <a:prstGeom prst="rect">
-            <a:avLst/>
-          </a:prstGeom>
-          <a:noFill/>
-        </p:spPr>
-        <p:txBody>
-          <a:bodyPr wrap="square" lIns="0" rIns="0" tIns="0" bIns="0" anchor="t">
-            <a:spAutoFit/>
-          </a:bodyPr>
-          <a:lstStyle/>
-          <a:p>
-            <a:pPr algn="l">
-              <a:lnSpc>
-                <a:spcPct val="120000"/>
-              </a:lnSpc>
-            </a:pPr>
-            <a:r>
-              <a:rPr sz="1450" b="1" i="0">
-                <a:solidFill>
-                  <a:srgbClr val="E94D1C"/>
-                </a:solidFill>
-                <a:latin typeface="Roboto"/>
-              </a:rPr>
-              <a:t>//</a:t>
-            </a:r>
-          </a:p>
-        </p:txBody>
-      </p:sp>
-      <p:sp>
-        <p:nvSpPr>
-          <p:cNvPr id="24" name="TextBox 23"/>
-          <p:cNvSpPr txBox="1"/>
-          <p:nvPr/>
-        </p:nvSpPr>
-        <p:spPr>
-          <a:xfrm>
-            <a:off x="6648450" y="5204841"/>
-            <a:ext cx="4857750" cy="95250"/>
-          </a:xfrm>
-          <a:prstGeom prst="rect">
-            <a:avLst/>
-          </a:prstGeom>
-          <a:noFill/>
-        </p:spPr>
-        <p:txBody>
-          <a:bodyPr wrap="square" lIns="0" rIns="0" tIns="0" bIns="0" anchor="t">
-            <a:spAutoFit/>
-          </a:bodyPr>
-          <a:lstStyle/>
-          <a:p>
-            <a:pPr algn="l">
-              <a:lnSpc>
-                <a:spcPct val="130000"/>
-              </a:lnSpc>
-            </a:pPr>
-            <a:r>
-              <a:rPr sz="1580" b="0" i="0">
-                <a:solidFill>
-                  <a:srgbClr val="1A1A1E"/>
-                </a:solidFill>
-                <a:latin typeface="Roboto"/>
-              </a:rPr>
-              <a:t>Trocar runtime ou banco é editar uma linha, não reinstalar quatro notebooks.</a:t>
-            </a:r>
-          </a:p>
-        </p:txBody>
-      </p:sp>
-      <p:sp>
-        <p:nvSpPr>
-          <p:cNvPr id="25" name="TextBox 24"/>
           <p:cNvSpPr txBox="1"/>
           <p:nvPr/>
         </p:nvSpPr>
@@ -23653,7 +23371,7 @@
       </p:sp>
       <p:sp>
         <p:nvSpPr>
-          <p:cNvPr id="26" name="TextBox 25"/>
+          <p:cNvPr id="19" name="TextBox 18"/>
           <p:cNvSpPr txBox="1"/>
           <p:nvPr/>
         </p:nvSpPr>
@@ -23774,7 +23492,7 @@
                 </a:solidFill>
                 <a:latin typeface="Roboto"/>
               </a:rPr>
-              <a:t>LIMITAÇÕES</a:t>
+              <a:t>CONTAINER E MÁQUINA VIRTUAL</a:t>
             </a:r>
           </a:p>
         </p:txBody>
@@ -23807,13 +23525,29 @@
               </a:lnSpc>
             </a:pPr>
             <a:r>
-              <a:rPr sz="3000" b="1" i="0">
+              <a:rPr sz="2400" b="1" i="0">
                 <a:solidFill>
                   <a:srgbClr val="21049A"/>
                 </a:solidFill>
                 <a:latin typeface="Roboto"/>
               </a:rPr>
-              <a:t>Limitações e custos</a:t>
+              <a:t>Comparação pela</a:t>
+            </a:r>
+          </a:p>
+          <a:p>
+            <a:pPr>
+              <a:lnSpc>
+                <a:spcPct val="104000"/>
+              </a:lnSpc>
+            </a:pPr>
+            <a:r>
+              <a:rPr sz="2400" b="1" i="0">
+                <a:solidFill>
+                  <a:srgbClr val="21049A"/>
+                </a:solidFill>
+                <a:latin typeface="Roboto"/>
+              </a:rPr>
+              <a:t>superfície de ataque</a:t>
             </a:r>
           </a:p>
         </p:txBody>
@@ -23826,8 +23560,8 @@
         </p:nvSpPr>
         <p:spPr>
           <a:xfrm>
-            <a:off x="685800" y="2479929"/>
-            <a:ext cx="247650" cy="308458"/>
+            <a:off x="685800" y="2722626"/>
+            <a:ext cx="5143500" cy="182880"/>
           </a:xfrm>
           <a:prstGeom prst="rect">
             <a:avLst/>
@@ -23846,387 +23580,36 @@
               </a:lnSpc>
             </a:pPr>
             <a:r>
-              <a:rPr sz="1520" b="1" i="0">
-                <a:solidFill>
-                  <a:srgbClr val="E94D1C"/>
-                </a:solidFill>
-                <a:latin typeface="Roboto"/>
-              </a:rPr>
-              <a:t>//</a:t>
-            </a:r>
-          </a:p>
-        </p:txBody>
-      </p:sp>
-      <p:sp>
-        <p:nvSpPr>
-          <p:cNvPr id="6" name="TextBox 5"/>
-          <p:cNvSpPr txBox="1"/>
-          <p:nvPr/>
-        </p:nvSpPr>
-        <p:spPr>
-          <a:xfrm>
-            <a:off x="971550" y="2470404"/>
-            <a:ext cx="7772400" cy="95250"/>
-          </a:xfrm>
-          <a:prstGeom prst="rect">
-            <a:avLst/>
-          </a:prstGeom>
-          <a:noFill/>
-        </p:spPr>
-        <p:txBody>
-          <a:bodyPr wrap="square" lIns="0" rIns="0" tIns="0" bIns="0" anchor="t">
-            <a:spAutoFit/>
-          </a:bodyPr>
-          <a:lstStyle/>
-          <a:p>
-            <a:pPr algn="l">
-              <a:lnSpc>
-                <a:spcPct val="130000"/>
-              </a:lnSpc>
-            </a:pPr>
-            <a:r>
-              <a:rPr sz="1650" b="0" i="0">
-                <a:solidFill>
-                  <a:srgbClr val="1A1A1E"/>
-                </a:solidFill>
-                <a:latin typeface="Roboto"/>
-              </a:rPr>
-              <a:t>O daemon roda como root. Estar no grupo docker equivale a root no host, sem sudo e sem trilha de auditoria.</a:t>
-            </a:r>
-          </a:p>
-        </p:txBody>
-      </p:sp>
-      <p:sp>
-        <p:nvSpPr>
-          <p:cNvPr id="7" name="TextBox 6"/>
-          <p:cNvSpPr txBox="1"/>
-          <p:nvPr/>
-        </p:nvSpPr>
-        <p:spPr>
-          <a:xfrm>
-            <a:off x="685800" y="3318891"/>
-            <a:ext cx="247650" cy="308458"/>
-          </a:xfrm>
-          <a:prstGeom prst="rect">
-            <a:avLst/>
-          </a:prstGeom>
-          <a:noFill/>
-        </p:spPr>
-        <p:txBody>
-          <a:bodyPr wrap="square" lIns="0" rIns="0" tIns="0" bIns="0" anchor="t">
-            <a:spAutoFit/>
-          </a:bodyPr>
-          <a:lstStyle/>
-          <a:p>
-            <a:pPr algn="l">
-              <a:lnSpc>
-                <a:spcPct val="120000"/>
-              </a:lnSpc>
-            </a:pPr>
-            <a:r>
-              <a:rPr sz="1520" b="1" i="0">
-                <a:solidFill>
-                  <a:srgbClr val="E94D1C"/>
-                </a:solidFill>
-                <a:latin typeface="Roboto"/>
-              </a:rPr>
-              <a:t>//</a:t>
-            </a:r>
-          </a:p>
-        </p:txBody>
-      </p:sp>
-      <p:sp>
-        <p:nvSpPr>
-          <p:cNvPr id="8" name="TextBox 7"/>
-          <p:cNvSpPr txBox="1"/>
-          <p:nvPr/>
-        </p:nvSpPr>
-        <p:spPr>
-          <a:xfrm>
-            <a:off x="971550" y="3309366"/>
-            <a:ext cx="7772400" cy="95250"/>
-          </a:xfrm>
-          <a:prstGeom prst="rect">
-            <a:avLst/>
-          </a:prstGeom>
-          <a:noFill/>
-        </p:spPr>
-        <p:txBody>
-          <a:bodyPr wrap="square" lIns="0" rIns="0" tIns="0" bIns="0" anchor="t">
-            <a:spAutoFit/>
-          </a:bodyPr>
-          <a:lstStyle/>
-          <a:p>
-            <a:pPr algn="l">
-              <a:lnSpc>
-                <a:spcPct val="130000"/>
-              </a:lnSpc>
-            </a:pPr>
-            <a:r>
-              <a:rPr sz="1650" b="0" i="0">
-                <a:solidFill>
-                  <a:srgbClr val="1A1A1E"/>
-                </a:solidFill>
-                <a:latin typeface="Roboto"/>
-              </a:rPr>
-              <a:t>O Docker escreve a regra de DNAT antes das regras do administrador, então um deny de firewall na porta publicada não bloqueia nada.</a:t>
-            </a:r>
-          </a:p>
-        </p:txBody>
-      </p:sp>
-      <p:sp>
-        <p:nvSpPr>
-          <p:cNvPr id="9" name="TextBox 8"/>
-          <p:cNvSpPr txBox="1"/>
-          <p:nvPr/>
-        </p:nvSpPr>
-        <p:spPr>
-          <a:xfrm>
-            <a:off x="685800" y="4157853"/>
-            <a:ext cx="247650" cy="308458"/>
-          </a:xfrm>
-          <a:prstGeom prst="rect">
-            <a:avLst/>
-          </a:prstGeom>
-          <a:noFill/>
-        </p:spPr>
-        <p:txBody>
-          <a:bodyPr wrap="square" lIns="0" rIns="0" tIns="0" bIns="0" anchor="t">
-            <a:spAutoFit/>
-          </a:bodyPr>
-          <a:lstStyle/>
-          <a:p>
-            <a:pPr algn="l">
-              <a:lnSpc>
-                <a:spcPct val="120000"/>
-              </a:lnSpc>
-            </a:pPr>
-            <a:r>
-              <a:rPr sz="1520" b="1" i="0">
-                <a:solidFill>
-                  <a:srgbClr val="E94D1C"/>
-                </a:solidFill>
-                <a:latin typeface="Roboto"/>
-              </a:rPr>
-              <a:t>//</a:t>
-            </a:r>
-          </a:p>
-        </p:txBody>
-      </p:sp>
-      <p:sp>
-        <p:nvSpPr>
-          <p:cNvPr id="10" name="TextBox 9"/>
-          <p:cNvSpPr txBox="1"/>
-          <p:nvPr/>
-        </p:nvSpPr>
-        <p:spPr>
-          <a:xfrm>
-            <a:off x="971550" y="4148328"/>
-            <a:ext cx="7772400" cy="95250"/>
-          </a:xfrm>
-          <a:prstGeom prst="rect">
-            <a:avLst/>
-          </a:prstGeom>
-          <a:noFill/>
-        </p:spPr>
-        <p:txBody>
-          <a:bodyPr wrap="square" lIns="0" rIns="0" tIns="0" bIns="0" anchor="t">
-            <a:spAutoFit/>
-          </a:bodyPr>
-          <a:lstStyle/>
-          <a:p>
-            <a:pPr algn="l">
-              <a:lnSpc>
-                <a:spcPct val="130000"/>
-              </a:lnSpc>
-            </a:pPr>
-            <a:r>
-              <a:rPr sz="1650" b="0" i="0">
-                <a:solidFill>
-                  <a:srgbClr val="1A1A1E"/>
-                </a:solidFill>
-                <a:latin typeface="Roboto"/>
-              </a:rPr>
-              <a:t>I/O de bind mount atravessando a fronteira da máquina virtual no WSL2.</a:t>
-            </a:r>
-          </a:p>
-        </p:txBody>
-      </p:sp>
-      <p:sp>
-        <p:nvSpPr>
-          <p:cNvPr id="11" name="TextBox 10"/>
-          <p:cNvSpPr txBox="1"/>
-          <p:nvPr/>
-        </p:nvSpPr>
-        <p:spPr>
-          <a:xfrm>
-            <a:off x="685800" y="4720209"/>
-            <a:ext cx="247650" cy="308458"/>
-          </a:xfrm>
-          <a:prstGeom prst="rect">
-            <a:avLst/>
-          </a:prstGeom>
-          <a:noFill/>
-        </p:spPr>
-        <p:txBody>
-          <a:bodyPr wrap="square" lIns="0" rIns="0" tIns="0" bIns="0" anchor="t">
-            <a:spAutoFit/>
-          </a:bodyPr>
-          <a:lstStyle/>
-          <a:p>
-            <a:pPr algn="l">
-              <a:lnSpc>
-                <a:spcPct val="120000"/>
-              </a:lnSpc>
-            </a:pPr>
-            <a:r>
-              <a:rPr sz="1520" b="1" i="0">
-                <a:solidFill>
-                  <a:srgbClr val="E94D1C"/>
-                </a:solidFill>
-                <a:latin typeface="Roboto"/>
-              </a:rPr>
-              <a:t>//</a:t>
-            </a:r>
-          </a:p>
-        </p:txBody>
-      </p:sp>
-      <p:sp>
-        <p:nvSpPr>
-          <p:cNvPr id="12" name="TextBox 11"/>
-          <p:cNvSpPr txBox="1"/>
-          <p:nvPr/>
-        </p:nvSpPr>
-        <p:spPr>
-          <a:xfrm>
-            <a:off x="971550" y="4710684"/>
-            <a:ext cx="7772400" cy="95250"/>
-          </a:xfrm>
-          <a:prstGeom prst="rect">
-            <a:avLst/>
-          </a:prstGeom>
-          <a:noFill/>
-        </p:spPr>
-        <p:txBody>
-          <a:bodyPr wrap="square" lIns="0" rIns="0" tIns="0" bIns="0" anchor="t">
-            <a:spAutoFit/>
-          </a:bodyPr>
-          <a:lstStyle/>
-          <a:p>
-            <a:pPr algn="l">
-              <a:lnSpc>
-                <a:spcPct val="130000"/>
-              </a:lnSpc>
-            </a:pPr>
-            <a:r>
-              <a:rPr sz="1650" b="0" i="0">
-                <a:solidFill>
-                  <a:srgbClr val="1A1A1E"/>
-                </a:solidFill>
-                <a:latin typeface="Roboto"/>
-              </a:rPr>
-              <a:t>Estado, que traz junto backup e upgrade de versão maior do banco.</a:t>
-            </a:r>
-          </a:p>
-        </p:txBody>
-      </p:sp>
-      <p:sp>
-        <p:nvSpPr>
-          <p:cNvPr id="13" name="TextBox 12"/>
-          <p:cNvSpPr txBox="1"/>
-          <p:nvPr/>
-        </p:nvSpPr>
-        <p:spPr>
-          <a:xfrm>
-            <a:off x="685800" y="5282565"/>
-            <a:ext cx="247650" cy="308458"/>
-          </a:xfrm>
-          <a:prstGeom prst="rect">
-            <a:avLst/>
-          </a:prstGeom>
-          <a:noFill/>
-        </p:spPr>
-        <p:txBody>
-          <a:bodyPr wrap="square" lIns="0" rIns="0" tIns="0" bIns="0" anchor="t">
-            <a:spAutoFit/>
-          </a:bodyPr>
-          <a:lstStyle/>
-          <a:p>
-            <a:pPr algn="l">
-              <a:lnSpc>
-                <a:spcPct val="120000"/>
-              </a:lnSpc>
-            </a:pPr>
-            <a:r>
-              <a:rPr sz="1520" b="1" i="0">
-                <a:solidFill>
-                  <a:srgbClr val="E94D1C"/>
-                </a:solidFill>
-                <a:latin typeface="Roboto"/>
-              </a:rPr>
-              <a:t>//</a:t>
-            </a:r>
-          </a:p>
-        </p:txBody>
-      </p:sp>
-      <p:sp>
-        <p:nvSpPr>
-          <p:cNvPr id="14" name="TextBox 13"/>
-          <p:cNvSpPr txBox="1"/>
-          <p:nvPr/>
-        </p:nvSpPr>
-        <p:spPr>
-          <a:xfrm>
-            <a:off x="971550" y="5273040"/>
-            <a:ext cx="7772400" cy="95250"/>
-          </a:xfrm>
-          <a:prstGeom prst="rect">
-            <a:avLst/>
-          </a:prstGeom>
-          <a:noFill/>
-        </p:spPr>
-        <p:txBody>
-          <a:bodyPr wrap="square" lIns="0" rIns="0" tIns="0" bIns="0" anchor="t">
-            <a:spAutoFit/>
-          </a:bodyPr>
-          <a:lstStyle/>
-          <a:p>
-            <a:pPr algn="l">
-              <a:lnSpc>
-                <a:spcPct val="130000"/>
-              </a:lnSpc>
-            </a:pPr>
-            <a:r>
-              <a:rPr sz="1650" b="0" i="0">
-                <a:solidFill>
-                  <a:srgbClr val="1A1A1E"/>
-                </a:solidFill>
-                <a:latin typeface="Roboto"/>
-              </a:rPr>
-              <a:t>Licenciamento do Docker Desktop.</a:t>
-            </a:r>
-          </a:p>
-        </p:txBody>
-      </p:sp>
-      <p:sp>
-        <p:nvSpPr>
-          <p:cNvPr id="15" name="Isosceles Triangle 14"/>
+              <a:rPr sz="900" b="1" i="0" spc="120">
+                <a:solidFill>
+                  <a:srgbClr val="21049A"/>
+                </a:solidFill>
+                <a:latin typeface="Roboto"/>
+              </a:rPr>
+              <a:t>MÁQUINA VIRTUAL</a:t>
+            </a:r>
+          </a:p>
+        </p:txBody>
+      </p:sp>
+      <p:sp>
+        <p:nvSpPr>
+          <p:cNvPr id="6" name="Rectangle 5"/>
           <p:cNvSpPr/>
           <p:nvPr/>
         </p:nvSpPr>
         <p:spPr>
           <a:xfrm>
-            <a:off x="9124950" y="2470404"/>
-            <a:ext cx="152400" cy="133350"/>
-          </a:xfrm>
-          <a:prstGeom prst="triangle">
-            <a:avLst/>
-          </a:prstGeom>
-          <a:noFill/>
-          <a:ln w="19050">
-            <a:solidFill>
-              <a:srgbClr val="E94D1C"/>
-            </a:solidFill>
+            <a:off x="685800" y="2932176"/>
+            <a:ext cx="419100" cy="28575"/>
+          </a:xfrm>
+          <a:prstGeom prst="rect">
+            <a:avLst/>
+          </a:prstGeom>
+          <a:solidFill>
+            <a:srgbClr val="21049A"/>
+          </a:solidFill>
+          <a:ln>
+            <a:noFill/>
           </a:ln>
           <a:effectLst/>
         </p:spPr>
@@ -24245,7 +23628,7 @@
           </a:fontRef>
         </p:style>
         <p:txBody>
-          <a:bodyPr rtlCol="0" anchor="ctr"/>
+          <a:bodyPr rtlCol="0" anchor="ctr" wrap="square" lIns="0" rIns="0" tIns="0" bIns="0"/>
           <a:lstStyle/>
           <a:p>
             <a:pPr algn="ctr"/>
@@ -24254,14 +23637,287 @@
       </p:sp>
       <p:sp>
         <p:nvSpPr>
-          <p:cNvPr id="16" name="Rectangle 15"/>
+          <p:cNvPr id="7" name="TextBox 6"/>
+          <p:cNvSpPr txBox="1"/>
+          <p:nvPr/>
+        </p:nvSpPr>
+        <p:spPr>
+          <a:xfrm>
+            <a:off x="685800" y="3227451"/>
+            <a:ext cx="247650" cy="294437"/>
+          </a:xfrm>
+          <a:prstGeom prst="rect">
+            <a:avLst/>
+          </a:prstGeom>
+          <a:noFill/>
+        </p:spPr>
+        <p:txBody>
+          <a:bodyPr wrap="square" lIns="0" rIns="0" tIns="0" bIns="0" anchor="t">
+            <a:spAutoFit/>
+          </a:bodyPr>
+          <a:lstStyle/>
+          <a:p>
+            <a:pPr algn="l">
+              <a:lnSpc>
+                <a:spcPct val="120000"/>
+              </a:lnSpc>
+            </a:pPr>
+            <a:r>
+              <a:rPr sz="1450" b="1" i="0">
+                <a:solidFill>
+                  <a:srgbClr val="E94D1C"/>
+                </a:solidFill>
+                <a:latin typeface="Roboto"/>
+              </a:rPr>
+              <a:t>//</a:t>
+            </a:r>
+          </a:p>
+        </p:txBody>
+      </p:sp>
+      <p:sp>
+        <p:nvSpPr>
+          <p:cNvPr id="8" name="TextBox 7"/>
+          <p:cNvSpPr txBox="1"/>
+          <p:nvPr/>
+        </p:nvSpPr>
+        <p:spPr>
+          <a:xfrm>
+            <a:off x="971550" y="3217926"/>
+            <a:ext cx="4857750" cy="95250"/>
+          </a:xfrm>
+          <a:prstGeom prst="rect">
+            <a:avLst/>
+          </a:prstGeom>
+          <a:noFill/>
+        </p:spPr>
+        <p:txBody>
+          <a:bodyPr wrap="square" lIns="0" rIns="0" tIns="0" bIns="0" anchor="t">
+            <a:spAutoFit/>
+          </a:bodyPr>
+          <a:lstStyle/>
+          <a:p>
+            <a:pPr algn="l">
+              <a:lnSpc>
+                <a:spcPct val="130000"/>
+              </a:lnSpc>
+            </a:pPr>
+            <a:r>
+              <a:rPr sz="1580" b="0" i="0">
+                <a:solidFill>
+                  <a:srgbClr val="1A1A1E"/>
+                </a:solidFill>
+                <a:latin typeface="Roboto"/>
+              </a:rPr>
+              <a:t>Kernel próprio.</a:t>
+            </a:r>
+          </a:p>
+        </p:txBody>
+      </p:sp>
+      <p:sp>
+        <p:nvSpPr>
+          <p:cNvPr id="9" name="TextBox 8"/>
+          <p:cNvSpPr txBox="1"/>
+          <p:nvPr/>
+        </p:nvSpPr>
+        <p:spPr>
+          <a:xfrm>
+            <a:off x="685800" y="3758184"/>
+            <a:ext cx="247650" cy="294437"/>
+          </a:xfrm>
+          <a:prstGeom prst="rect">
+            <a:avLst/>
+          </a:prstGeom>
+          <a:noFill/>
+        </p:spPr>
+        <p:txBody>
+          <a:bodyPr wrap="square" lIns="0" rIns="0" tIns="0" bIns="0" anchor="t">
+            <a:spAutoFit/>
+          </a:bodyPr>
+          <a:lstStyle/>
+          <a:p>
+            <a:pPr algn="l">
+              <a:lnSpc>
+                <a:spcPct val="120000"/>
+              </a:lnSpc>
+            </a:pPr>
+            <a:r>
+              <a:rPr sz="1450" b="1" i="0">
+                <a:solidFill>
+                  <a:srgbClr val="E94D1C"/>
+                </a:solidFill>
+                <a:latin typeface="Roboto"/>
+              </a:rPr>
+              <a:t>//</a:t>
+            </a:r>
+          </a:p>
+        </p:txBody>
+      </p:sp>
+      <p:sp>
+        <p:nvSpPr>
+          <p:cNvPr id="10" name="TextBox 9"/>
+          <p:cNvSpPr txBox="1"/>
+          <p:nvPr/>
+        </p:nvSpPr>
+        <p:spPr>
+          <a:xfrm>
+            <a:off x="971550" y="3748659"/>
+            <a:ext cx="4857750" cy="95250"/>
+          </a:xfrm>
+          <a:prstGeom prst="rect">
+            <a:avLst/>
+          </a:prstGeom>
+          <a:noFill/>
+        </p:spPr>
+        <p:txBody>
+          <a:bodyPr wrap="square" lIns="0" rIns="0" tIns="0" bIns="0" anchor="t">
+            <a:spAutoFit/>
+          </a:bodyPr>
+          <a:lstStyle/>
+          <a:p>
+            <a:pPr algn="l">
+              <a:lnSpc>
+                <a:spcPct val="130000"/>
+              </a:lnSpc>
+            </a:pPr>
+            <a:r>
+              <a:rPr sz="1580" b="0" i="0">
+                <a:solidFill>
+                  <a:srgbClr val="1A1A1E"/>
+                </a:solidFill>
+                <a:latin typeface="Roboto"/>
+              </a:rPr>
+              <a:t>Fronteira imposta em hardware.</a:t>
+            </a:r>
+          </a:p>
+        </p:txBody>
+      </p:sp>
+      <p:sp>
+        <p:nvSpPr>
+          <p:cNvPr id="11" name="TextBox 10"/>
+          <p:cNvSpPr txBox="1"/>
+          <p:nvPr/>
+        </p:nvSpPr>
+        <p:spPr>
+          <a:xfrm>
+            <a:off x="685800" y="4288917"/>
+            <a:ext cx="247650" cy="294437"/>
+          </a:xfrm>
+          <a:prstGeom prst="rect">
+            <a:avLst/>
+          </a:prstGeom>
+          <a:noFill/>
+        </p:spPr>
+        <p:txBody>
+          <a:bodyPr wrap="square" lIns="0" rIns="0" tIns="0" bIns="0" anchor="t">
+            <a:spAutoFit/>
+          </a:bodyPr>
+          <a:lstStyle/>
+          <a:p>
+            <a:pPr algn="l">
+              <a:lnSpc>
+                <a:spcPct val="120000"/>
+              </a:lnSpc>
+            </a:pPr>
+            <a:r>
+              <a:rPr sz="1450" b="1" i="0">
+                <a:solidFill>
+                  <a:srgbClr val="E94D1C"/>
+                </a:solidFill>
+                <a:latin typeface="Roboto"/>
+              </a:rPr>
+              <a:t>//</a:t>
+            </a:r>
+          </a:p>
+        </p:txBody>
+      </p:sp>
+      <p:sp>
+        <p:nvSpPr>
+          <p:cNvPr id="12" name="TextBox 11"/>
+          <p:cNvSpPr txBox="1"/>
+          <p:nvPr/>
+        </p:nvSpPr>
+        <p:spPr>
+          <a:xfrm>
+            <a:off x="971550" y="4279392"/>
+            <a:ext cx="4857750" cy="95250"/>
+          </a:xfrm>
+          <a:prstGeom prst="rect">
+            <a:avLst/>
+          </a:prstGeom>
+          <a:noFill/>
+        </p:spPr>
+        <p:txBody>
+          <a:bodyPr wrap="square" lIns="0" rIns="0" tIns="0" bIns="0" anchor="t">
+            <a:spAutoFit/>
+          </a:bodyPr>
+          <a:lstStyle/>
+          <a:p>
+            <a:pPr algn="l">
+              <a:lnSpc>
+                <a:spcPct val="130000"/>
+              </a:lnSpc>
+            </a:pPr>
+            <a:r>
+              <a:rPr sz="1580" b="0" i="0">
+                <a:solidFill>
+                  <a:srgbClr val="1A1A1E"/>
+                </a:solidFill>
+                <a:latin typeface="Roboto"/>
+              </a:rPr>
+              <a:t>Superfície relativamente estreita.</a:t>
+            </a:r>
+          </a:p>
+        </p:txBody>
+      </p:sp>
+      <p:sp>
+        <p:nvSpPr>
+          <p:cNvPr id="13" name="TextBox 12"/>
+          <p:cNvSpPr txBox="1"/>
+          <p:nvPr/>
+        </p:nvSpPr>
+        <p:spPr>
+          <a:xfrm>
+            <a:off x="6362700" y="2722626"/>
+            <a:ext cx="5143500" cy="182880"/>
+          </a:xfrm>
+          <a:prstGeom prst="rect">
+            <a:avLst/>
+          </a:prstGeom>
+          <a:noFill/>
+        </p:spPr>
+        <p:txBody>
+          <a:bodyPr wrap="square" lIns="0" rIns="0" tIns="0" bIns="0" anchor="t">
+            <a:spAutoFit/>
+          </a:bodyPr>
+          <a:lstStyle/>
+          <a:p>
+            <a:pPr algn="l">
+              <a:lnSpc>
+                <a:spcPct val="120000"/>
+              </a:lnSpc>
+            </a:pPr>
+            <a:r>
+              <a:rPr sz="900" b="1" i="0" spc="120">
+                <a:solidFill>
+                  <a:srgbClr val="E94D1C"/>
+                </a:solidFill>
+                <a:latin typeface="Roboto"/>
+              </a:rPr>
+              <a:t>CONTAINER</a:t>
+            </a:r>
+          </a:p>
+        </p:txBody>
+      </p:sp>
+      <p:sp>
+        <p:nvSpPr>
+          <p:cNvPr id="14" name="Rectangle 13"/>
           <p:cNvSpPr/>
           <p:nvPr/>
         </p:nvSpPr>
         <p:spPr>
           <a:xfrm>
-            <a:off x="9193530" y="2527554"/>
-            <a:ext cx="15240" cy="38100"/>
+            <a:off x="6362700" y="2932176"/>
+            <a:ext cx="419100" cy="28575"/>
           </a:xfrm>
           <a:prstGeom prst="rect">
             <a:avLst/>
@@ -24289,7 +23945,7 @@
           </a:fontRef>
         </p:style>
         <p:txBody>
-          <a:bodyPr rtlCol="0" anchor="ctr"/>
+          <a:bodyPr rtlCol="0" anchor="ctr" wrap="square" lIns="0" rIns="0" tIns="0" bIns="0"/>
           <a:lstStyle/>
           <a:p>
             <a:pPr algn="ctr"/>
@@ -24298,14 +23954,92 @@
       </p:sp>
       <p:sp>
         <p:nvSpPr>
+          <p:cNvPr id="15" name="TextBox 14"/>
+          <p:cNvSpPr txBox="1"/>
+          <p:nvPr/>
+        </p:nvSpPr>
+        <p:spPr>
+          <a:xfrm>
+            <a:off x="6362700" y="3227451"/>
+            <a:ext cx="247650" cy="294437"/>
+          </a:xfrm>
+          <a:prstGeom prst="rect">
+            <a:avLst/>
+          </a:prstGeom>
+          <a:noFill/>
+        </p:spPr>
+        <p:txBody>
+          <a:bodyPr wrap="square" lIns="0" rIns="0" tIns="0" bIns="0" anchor="t">
+            <a:spAutoFit/>
+          </a:bodyPr>
+          <a:lstStyle/>
+          <a:p>
+            <a:pPr algn="l">
+              <a:lnSpc>
+                <a:spcPct val="120000"/>
+              </a:lnSpc>
+            </a:pPr>
+            <a:r>
+              <a:rPr sz="1450" b="1" i="0">
+                <a:solidFill>
+                  <a:srgbClr val="E94D1C"/>
+                </a:solidFill>
+                <a:latin typeface="Roboto"/>
+              </a:rPr>
+              <a:t>//</a:t>
+            </a:r>
+          </a:p>
+        </p:txBody>
+      </p:sp>
+      <p:sp>
+        <p:nvSpPr>
+          <p:cNvPr id="16" name="TextBox 15"/>
+          <p:cNvSpPr txBox="1"/>
+          <p:nvPr/>
+        </p:nvSpPr>
+        <p:spPr>
+          <a:xfrm>
+            <a:off x="6648450" y="3217926"/>
+            <a:ext cx="4857750" cy="95250"/>
+          </a:xfrm>
+          <a:prstGeom prst="rect">
+            <a:avLst/>
+          </a:prstGeom>
+          <a:noFill/>
+        </p:spPr>
+        <p:txBody>
+          <a:bodyPr wrap="square" lIns="0" rIns="0" tIns="0" bIns="0" anchor="t">
+            <a:spAutoFit/>
+          </a:bodyPr>
+          <a:lstStyle/>
+          <a:p>
+            <a:pPr algn="l">
+              <a:lnSpc>
+                <a:spcPct val="130000"/>
+              </a:lnSpc>
+            </a:pPr>
+            <a:r>
+              <a:rPr sz="1580" b="0" i="0">
+                <a:solidFill>
+                  <a:srgbClr val="1A1A1E"/>
+                </a:solidFill>
+                <a:latin typeface="Roboto"/>
+              </a:rPr>
+              <a:t>Compartilha o kernel do host.</a:t>
+            </a:r>
+          </a:p>
+        </p:txBody>
+      </p:sp>
+      <p:sp>
+        <p:nvSpPr>
           <p:cNvPr id="17" name="TextBox 16"/>
           <p:cNvSpPr txBox="1"/>
           <p:nvPr/>
         </p:nvSpPr>
         <p:spPr>
           <a:xfrm>
-            <a:off x="9372600" y="2479929"/>
-            <a:ext cx="2133600" cy="182880"/>
+            <a:off x="6362700" y="3758184"/>
+            <a:ext cx="247650" cy="294437"/>
           </a:xfrm>
           <a:prstGeom prst="rect">
             <a:avLst/>
@@ -24324,58 +24058,53 @@
               </a:lnSpc>
             </a:pPr>
             <a:r>
-              <a:rPr sz="900" b="1" i="0" spc="120">
+              <a:rPr sz="1450" b="1" i="0">
                 <a:solidFill>
                   <a:srgbClr val="E94D1C"/>
                 </a:solidFill>
                 <a:latin typeface="Roboto"/>
               </a:rPr>
-              <a:t>REGRA</a:t>
-            </a:r>
-          </a:p>
-        </p:txBody>
-      </p:sp>
-      <p:sp>
-        <p:nvSpPr>
-          <p:cNvPr id="18" name="Rectangle 17"/>
-          <p:cNvSpPr/>
-          <p:nvPr/>
-        </p:nvSpPr>
-        <p:spPr>
-          <a:xfrm>
-            <a:off x="9124950" y="2756154"/>
-            <a:ext cx="38100" cy="804672"/>
-          </a:xfrm>
-          <a:prstGeom prst="rect">
-            <a:avLst/>
-          </a:prstGeom>
-          <a:solidFill>
-            <a:srgbClr val="E94D1C"/>
-          </a:solidFill>
-          <a:ln>
-            <a:noFill/>
-          </a:ln>
-          <a:effectLst/>
-        </p:spPr>
-        <p:style>
-          <a:lnRef idx="1">
-            <a:schemeClr val="accent1"/>
-          </a:lnRef>
-          <a:fillRef idx="3">
-            <a:schemeClr val="accent1"/>
-          </a:fillRef>
-          <a:effectRef idx="2">
-            <a:schemeClr val="accent1"/>
-          </a:effectRef>
-          <a:fontRef idx="minor">
-            <a:schemeClr val="lt1"/>
-          </a:fontRef>
-        </p:style>
-        <p:txBody>
-          <a:bodyPr rtlCol="0" anchor="ctr" wrap="square" lIns="0" rIns="0" tIns="0" bIns="0"/>
-          <a:lstStyle/>
-          <a:p>
-            <a:pPr algn="ctr"/>
+              <a:t>//</a:t>
+            </a:r>
+          </a:p>
+        </p:txBody>
+      </p:sp>
+      <p:sp>
+        <p:nvSpPr>
+          <p:cNvPr id="18" name="TextBox 17"/>
+          <p:cNvSpPr txBox="1"/>
+          <p:nvPr/>
+        </p:nvSpPr>
+        <p:spPr>
+          <a:xfrm>
+            <a:off x="6648450" y="3748659"/>
+            <a:ext cx="4857750" cy="95250"/>
+          </a:xfrm>
+          <a:prstGeom prst="rect">
+            <a:avLst/>
+          </a:prstGeom>
+          <a:noFill/>
+        </p:spPr>
+        <p:txBody>
+          <a:bodyPr wrap="square" lIns="0" rIns="0" tIns="0" bIns="0" anchor="t">
+            <a:spAutoFit/>
+          </a:bodyPr>
+          <a:lstStyle/>
+          <a:p>
+            <a:pPr algn="l">
+              <a:lnSpc>
+                <a:spcPct val="130000"/>
+              </a:lnSpc>
+            </a:pPr>
+            <a:r>
+              <a:rPr sz="1580" b="0" i="0">
+                <a:solidFill>
+                  <a:srgbClr val="1A1A1E"/>
+                </a:solidFill>
+                <a:latin typeface="Roboto"/>
+              </a:rPr>
+              <a:t>A fronteira é a interface de chamadas de sistema, mais de trezentas, mais /proc, /sys e ioctl.</a:t>
+            </a:r>
           </a:p>
         </p:txBody>
       </p:sp>
@@ -24387,8 +24116,8 @@
         </p:nvSpPr>
         <p:spPr>
           <a:xfrm>
-            <a:off x="9334500" y="2756154"/>
-            <a:ext cx="2171700" cy="1376172"/>
+            <a:off x="6362700" y="4552950"/>
+            <a:ext cx="247650" cy="294437"/>
           </a:xfrm>
           <a:prstGeom prst="rect">
             <a:avLst/>
@@ -24403,20 +24132,17 @@
           <a:p>
             <a:pPr algn="l">
               <a:lnSpc>
-                <a:spcPct val="140000"/>
-              </a:lnSpc>
-              <a:spcAft>
-                <a:spcPts val="600"/>
-              </a:spcAft>
-            </a:pPr>
-            <a:r>
-              <a:rPr sz="1200" b="0" i="0">
-                <a:solidFill>
-                  <a:srgbClr val="3A3A44"/>
-                </a:solidFill>
-                <a:latin typeface="Roboto"/>
-              </a:rPr>
-              <a:t>Nenhum número entra neste slide sem medição feita pelo time, com o modelo da máquina e a data.</a:t>
+                <a:spcPct val="120000"/>
+              </a:lnSpc>
+            </a:pPr>
+            <a:r>
+              <a:rPr sz="1450" b="1" i="0">
+                <a:solidFill>
+                  <a:srgbClr val="E94D1C"/>
+                </a:solidFill>
+                <a:latin typeface="Roboto"/>
+              </a:rPr>
+              <a:t>//</a:t>
             </a:r>
           </a:p>
         </p:txBody>
@@ -24424,6 +24150,45 @@
       <p:sp>
         <p:nvSpPr>
           <p:cNvPr id="20" name="TextBox 19"/>
+          <p:cNvSpPr txBox="1"/>
+          <p:nvPr/>
+        </p:nvSpPr>
+        <p:spPr>
+          <a:xfrm>
+            <a:off x="6648450" y="4543425"/>
+            <a:ext cx="4857750" cy="95250"/>
+          </a:xfrm>
+          <a:prstGeom prst="rect">
+            <a:avLst/>
+          </a:prstGeom>
+          <a:noFill/>
+        </p:spPr>
+        <p:txBody>
+          <a:bodyPr wrap="square" lIns="0" rIns="0" tIns="0" bIns="0" anchor="t">
+            <a:spAutoFit/>
+          </a:bodyPr>
+          <a:lstStyle/>
+          <a:p>
+            <a:pPr algn="l">
+              <a:lnSpc>
+                <a:spcPct val="130000"/>
+              </a:lnSpc>
+            </a:pPr>
+            <a:r>
+              <a:rPr sz="1580" b="0" i="0">
+                <a:solidFill>
+                  <a:srgbClr val="1A1A1E"/>
+                </a:solidFill>
+                <a:latin typeface="Roboto"/>
+              </a:rPr>
+              <a:t>CVE-2019-5736 no runc: o processo de dentro sobrescrevia o binário do runtime pelo /proc/self/exe.</a:t>
+            </a:r>
+          </a:p>
+        </p:txBody>
+      </p:sp>
+      <p:sp>
+        <p:nvSpPr>
+          <p:cNvPr id="21" name="TextBox 20"/>
           <p:cNvSpPr txBox="1"/>
           <p:nvPr/>
         </p:nvSpPr>
@@ -24462,7 +24227,7 @@
       </p:sp>
       <p:sp>
         <p:nvSpPr>
-          <p:cNvPr id="21" name="TextBox 20"/>
+          <p:cNvPr id="22" name="TextBox 21"/>
           <p:cNvSpPr txBox="1"/>
           <p:nvPr/>
         </p:nvSpPr>
@@ -24583,7 +24348,7 @@
                 </a:solidFill>
                 <a:latin typeface="Roboto"/>
               </a:rPr>
-              <a:t>CONTAINER E MÁQUINA VIRTUAL</a:t>
+              <a:t>ALTERNATIVAS CONSIDERADAS</a:t>
             </a:r>
           </a:p>
         </p:txBody>
@@ -24616,43 +24381,66 @@
               </a:lnSpc>
             </a:pPr>
             <a:r>
-              <a:rPr sz="2400" b="1" i="0">
+              <a:rPr sz="3000" b="1" i="0">
                 <a:solidFill>
                   <a:srgbClr val="21049A"/>
                 </a:solidFill>
                 <a:latin typeface="Roboto"/>
               </a:rPr>
-              <a:t>Comparação pela</a:t>
-            </a:r>
-          </a:p>
-          <a:p>
-            <a:pPr>
-              <a:lnSpc>
-                <a:spcPct val="104000"/>
-              </a:lnSpc>
-            </a:pPr>
-            <a:r>
-              <a:rPr sz="2400" b="1" i="0">
+              <a:t>Comparação com as outras opções</a:t>
+            </a:r>
+          </a:p>
+        </p:txBody>
+      </p:sp>
+      <p:sp>
+        <p:nvSpPr>
+          <p:cNvPr id="5" name="TextBox 4"/>
+          <p:cNvSpPr txBox="1"/>
+          <p:nvPr/>
+        </p:nvSpPr>
+        <p:spPr>
+          <a:xfrm>
+            <a:off x="685800" y="2864739"/>
+            <a:ext cx="2190750" cy="167640"/>
+          </a:xfrm>
+          <a:prstGeom prst="rect">
+            <a:avLst/>
+          </a:prstGeom>
+          <a:noFill/>
+        </p:spPr>
+        <p:txBody>
+          <a:bodyPr wrap="square" lIns="0" rIns="0" tIns="0" bIns="0" anchor="t">
+            <a:spAutoFit/>
+          </a:bodyPr>
+          <a:lstStyle/>
+          <a:p>
+            <a:pPr algn="l">
+              <a:lnSpc>
+                <a:spcPct val="120000"/>
+              </a:lnSpc>
+            </a:pPr>
+            <a:r>
+              <a:rPr sz="819" b="1" i="0" spc="120">
                 <a:solidFill>
                   <a:srgbClr val="21049A"/>
                 </a:solidFill>
                 <a:latin typeface="Roboto"/>
               </a:rPr>
-              <a:t>superfície de ataque</a:t>
-            </a:r>
-          </a:p>
-        </p:txBody>
-      </p:sp>
-      <p:sp>
-        <p:nvSpPr>
-          <p:cNvPr id="5" name="TextBox 4"/>
-          <p:cNvSpPr txBox="1"/>
-          <p:nvPr/>
-        </p:nvSpPr>
-        <p:spPr>
-          <a:xfrm>
-            <a:off x="685800" y="2722626"/>
-            <a:ext cx="5143500" cy="182880"/>
+              <a:t>OPÇÃO</a:t>
+            </a:r>
+          </a:p>
+        </p:txBody>
+      </p:sp>
+      <p:sp>
+        <p:nvSpPr>
+          <p:cNvPr id="6" name="TextBox 5"/>
+          <p:cNvSpPr txBox="1"/>
+          <p:nvPr/>
+        </p:nvSpPr>
+        <p:spPr>
+          <a:xfrm>
+            <a:off x="3048000" y="2864739"/>
+            <a:ext cx="3429000" cy="167640"/>
           </a:xfrm>
           <a:prstGeom prst="rect">
             <a:avLst/>
@@ -24671,27 +24459,66 @@
               </a:lnSpc>
             </a:pPr>
             <a:r>
-              <a:rPr sz="900" b="1" i="0" spc="120">
+              <a:rPr sz="819" b="1" i="0" spc="120">
                 <a:solidFill>
                   <a:srgbClr val="21049A"/>
                 </a:solidFill>
                 <a:latin typeface="Roboto"/>
               </a:rPr>
-              <a:t>MÁQUINA VIRTUAL</a:t>
-            </a:r>
-          </a:p>
-        </p:txBody>
-      </p:sp>
-      <p:sp>
-        <p:nvSpPr>
-          <p:cNvPr id="6" name="Rectangle 5"/>
+              <a:t>A FAVOR</a:t>
+            </a:r>
+          </a:p>
+        </p:txBody>
+      </p:sp>
+      <p:sp>
+        <p:nvSpPr>
+          <p:cNvPr id="7" name="TextBox 6"/>
+          <p:cNvSpPr txBox="1"/>
+          <p:nvPr/>
+        </p:nvSpPr>
+        <p:spPr>
+          <a:xfrm>
+            <a:off x="6667500" y="2864739"/>
+            <a:ext cx="4762500" cy="167640"/>
+          </a:xfrm>
+          <a:prstGeom prst="rect">
+            <a:avLst/>
+          </a:prstGeom>
+          <a:noFill/>
+        </p:spPr>
+        <p:txBody>
+          <a:bodyPr wrap="square" lIns="0" rIns="0" tIns="0" bIns="0" anchor="t">
+            <a:spAutoFit/>
+          </a:bodyPr>
+          <a:lstStyle/>
+          <a:p>
+            <a:pPr algn="l">
+              <a:lnSpc>
+                <a:spcPct val="120000"/>
+              </a:lnSpc>
+            </a:pPr>
+            <a:r>
+              <a:rPr sz="819" b="1" i="0" spc="120">
+                <a:solidFill>
+                  <a:srgbClr val="21049A"/>
+                </a:solidFill>
+                <a:latin typeface="Roboto"/>
+              </a:rPr>
+              <a:t>CONTRA</a:t>
+            </a:r>
+          </a:p>
+        </p:txBody>
+      </p:sp>
+      <p:sp>
+        <p:nvSpPr>
+          <p:cNvPr id="8" name="Rectangle 7"/>
           <p:cNvSpPr/>
           <p:nvPr/>
         </p:nvSpPr>
         <p:spPr>
           <a:xfrm>
-            <a:off x="685800" y="2932176"/>
-            <a:ext cx="419100" cy="28575"/>
+            <a:off x="685800" y="3093339"/>
+            <a:ext cx="10820400" cy="19050"/>
           </a:xfrm>
           <a:prstGeom prst="rect">
             <a:avLst/>
@@ -24728,14 +24555,14 @@
       </p:sp>
       <p:sp>
         <p:nvSpPr>
-          <p:cNvPr id="7" name="TextBox 6"/>
-          <p:cNvSpPr txBox="1"/>
-          <p:nvPr/>
-        </p:nvSpPr>
-        <p:spPr>
-          <a:xfrm>
-            <a:off x="685800" y="3227451"/>
-            <a:ext cx="247650" cy="294437"/>
+          <p:cNvPr id="9" name="TextBox 8"/>
+          <p:cNvSpPr txBox="1"/>
+          <p:nvPr/>
+        </p:nvSpPr>
+        <p:spPr>
+          <a:xfrm>
+            <a:off x="685800" y="3245739"/>
+            <a:ext cx="2019300" cy="762000"/>
           </a:xfrm>
           <a:prstGeom prst="rect">
             <a:avLst/>
@@ -24750,31 +24577,31 @@
           <a:p>
             <a:pPr algn="l">
               <a:lnSpc>
-                <a:spcPct val="120000"/>
-              </a:lnSpc>
-            </a:pPr>
-            <a:r>
-              <a:rPr sz="1450" b="1" i="0">
-                <a:solidFill>
-                  <a:srgbClr val="E94D1C"/>
-                </a:solidFill>
-                <a:latin typeface="Roboto"/>
-              </a:rPr>
-              <a:t>//</a:t>
-            </a:r>
-          </a:p>
-        </p:txBody>
-      </p:sp>
-      <p:sp>
-        <p:nvSpPr>
-          <p:cNvPr id="8" name="TextBox 7"/>
-          <p:cNvSpPr txBox="1"/>
-          <p:nvPr/>
-        </p:nvSpPr>
-        <p:spPr>
-          <a:xfrm>
-            <a:off x="971550" y="3217926"/>
-            <a:ext cx="4857750" cy="95250"/>
+                <a:spcPct val="135000"/>
+              </a:lnSpc>
+            </a:pPr>
+            <a:r>
+              <a:rPr sz="1350" b="1" i="0">
+                <a:solidFill>
+                  <a:srgbClr val="21049A"/>
+                </a:solidFill>
+                <a:latin typeface="Roboto"/>
+              </a:rPr>
+              <a:t>README nativo</a:t>
+            </a:r>
+          </a:p>
+        </p:txBody>
+      </p:sp>
+      <p:sp>
+        <p:nvSpPr>
+          <p:cNvPr id="10" name="TextBox 9"/>
+          <p:cNvSpPr txBox="1"/>
+          <p:nvPr/>
+        </p:nvSpPr>
+        <p:spPr>
+          <a:xfrm>
+            <a:off x="3048000" y="3245739"/>
+            <a:ext cx="3257550" cy="762000"/>
           </a:xfrm>
           <a:prstGeom prst="rect">
             <a:avLst/>
@@ -24789,31 +24616,31 @@
           <a:p>
             <a:pPr algn="l">
               <a:lnSpc>
-                <a:spcPct val="130000"/>
-              </a:lnSpc>
-            </a:pPr>
-            <a:r>
-              <a:rPr sz="1580" b="0" i="0">
+                <a:spcPct val="135000"/>
+              </a:lnSpc>
+            </a:pPr>
+            <a:r>
+              <a:rPr sz="1280" b="0" i="0">
                 <a:solidFill>
                   <a:srgbClr val="1A1A1E"/>
                 </a:solidFill>
                 <a:latin typeface="Roboto"/>
               </a:rPr>
-              <a:t>Kernel próprio.</a:t>
-            </a:r>
-          </a:p>
-        </p:txBody>
-      </p:sp>
-      <p:sp>
-        <p:nvSpPr>
-          <p:cNvPr id="9" name="TextBox 8"/>
-          <p:cNvSpPr txBox="1"/>
-          <p:nvPr/>
-        </p:nvSpPr>
-        <p:spPr>
-          <a:xfrm>
-            <a:off x="685800" y="3758184"/>
-            <a:ext cx="247650" cy="294437"/>
+              <a:t>Custo zero para começar</a:t>
+            </a:r>
+          </a:p>
+        </p:txBody>
+      </p:sp>
+      <p:sp>
+        <p:nvSpPr>
+          <p:cNvPr id="11" name="TextBox 10"/>
+          <p:cNvSpPr txBox="1"/>
+          <p:nvPr/>
+        </p:nvSpPr>
+        <p:spPr>
+          <a:xfrm>
+            <a:off x="6667500" y="3245739"/>
+            <a:ext cx="4591050" cy="762000"/>
           </a:xfrm>
           <a:prstGeom prst="rect">
             <a:avLst/>
@@ -24828,31 +24655,75 @@
           <a:p>
             <a:pPr algn="l">
               <a:lnSpc>
-                <a:spcPct val="120000"/>
-              </a:lnSpc>
-            </a:pPr>
-            <a:r>
-              <a:rPr sz="1450" b="1" i="0">
-                <a:solidFill>
-                  <a:srgbClr val="E94D1C"/>
-                </a:solidFill>
-                <a:latin typeface="Roboto"/>
-              </a:rPr>
-              <a:t>//</a:t>
-            </a:r>
-          </a:p>
-        </p:txBody>
-      </p:sp>
-      <p:sp>
-        <p:nvSpPr>
-          <p:cNvPr id="10" name="TextBox 9"/>
-          <p:cNvSpPr txBox="1"/>
-          <p:nvPr/>
-        </p:nvSpPr>
-        <p:spPr>
-          <a:xfrm>
-            <a:off x="971550" y="3748659"/>
-            <a:ext cx="4857750" cy="95250"/>
+                <a:spcPct val="135000"/>
+              </a:lnSpc>
+            </a:pPr>
+            <a:r>
+              <a:rPr sz="1280" b="0" i="0">
+                <a:solidFill>
+                  <a:srgbClr val="1A1A1E"/>
+                </a:solidFill>
+                <a:latin typeface="Roboto"/>
+              </a:rPr>
+              <a:t>Quebra na primeira divergência de versão</a:t>
+            </a:r>
+          </a:p>
+        </p:txBody>
+      </p:sp>
+      <p:sp>
+        <p:nvSpPr>
+          <p:cNvPr id="12" name="Rectangle 11"/>
+          <p:cNvSpPr/>
+          <p:nvPr/>
+        </p:nvSpPr>
+        <p:spPr>
+          <a:xfrm>
+            <a:off x="685800" y="3570732"/>
+            <a:ext cx="10820400" cy="9525"/>
+          </a:xfrm>
+          <a:prstGeom prst="rect">
+            <a:avLst/>
+          </a:prstGeom>
+          <a:solidFill>
+            <a:srgbClr val="EDEDF2"/>
+          </a:solidFill>
+          <a:ln>
+            <a:noFill/>
+          </a:ln>
+          <a:effectLst/>
+        </p:spPr>
+        <p:style>
+          <a:lnRef idx="1">
+            <a:schemeClr val="accent1"/>
+          </a:lnRef>
+          <a:fillRef idx="3">
+            <a:schemeClr val="accent1"/>
+          </a:fillRef>
+          <a:effectRef idx="2">
+            <a:schemeClr val="accent1"/>
+          </a:effectRef>
+          <a:fontRef idx="minor">
+            <a:schemeClr val="lt1"/>
+          </a:fontRef>
+        </p:style>
+        <p:txBody>
+          <a:bodyPr rtlCol="0" anchor="ctr" wrap="square" lIns="0" rIns="0" tIns="0" bIns="0"/>
+          <a:lstStyle/>
+          <a:p>
+            <a:pPr algn="ctr"/>
+          </a:p>
+        </p:txBody>
+      </p:sp>
+      <p:sp>
+        <p:nvSpPr>
+          <p:cNvPr id="13" name="TextBox 12"/>
+          <p:cNvSpPr txBox="1"/>
+          <p:nvPr/>
+        </p:nvSpPr>
+        <p:spPr>
+          <a:xfrm>
+            <a:off x="685800" y="3694557"/>
+            <a:ext cx="2019300" cy="762000"/>
           </a:xfrm>
           <a:prstGeom prst="rect">
             <a:avLst/>
@@ -24867,31 +24738,70 @@
           <a:p>
             <a:pPr algn="l">
               <a:lnSpc>
-                <a:spcPct val="130000"/>
-              </a:lnSpc>
-            </a:pPr>
-            <a:r>
-              <a:rPr sz="1580" b="0" i="0">
+                <a:spcPct val="135000"/>
+              </a:lnSpc>
+            </a:pPr>
+            <a:r>
+              <a:rPr sz="1350" b="1" i="0">
+                <a:solidFill>
+                  <a:srgbClr val="21049A"/>
+                </a:solidFill>
+                <a:latin typeface="Roboto"/>
+              </a:rPr>
+              <a:t>VM compartilhada</a:t>
+            </a:r>
+          </a:p>
+        </p:txBody>
+      </p:sp>
+      <p:sp>
+        <p:nvSpPr>
+          <p:cNvPr id="14" name="TextBox 13"/>
+          <p:cNvSpPr txBox="1"/>
+          <p:nvPr/>
+        </p:nvSpPr>
+        <p:spPr>
+          <a:xfrm>
+            <a:off x="3048000" y="3694557"/>
+            <a:ext cx="3257550" cy="762000"/>
+          </a:xfrm>
+          <a:prstGeom prst="rect">
+            <a:avLst/>
+          </a:prstGeom>
+          <a:noFill/>
+        </p:spPr>
+        <p:txBody>
+          <a:bodyPr wrap="square" lIns="0" rIns="0" tIns="0" bIns="0" anchor="t">
+            <a:spAutoFit/>
+          </a:bodyPr>
+          <a:lstStyle/>
+          <a:p>
+            <a:pPr algn="l">
+              <a:lnSpc>
+                <a:spcPct val="135000"/>
+              </a:lnSpc>
+            </a:pPr>
+            <a:r>
+              <a:rPr sz="1280" b="0" i="0">
                 <a:solidFill>
                   <a:srgbClr val="1A1A1E"/>
                 </a:solidFill>
                 <a:latin typeface="Roboto"/>
               </a:rPr>
-              <a:t>Fronteira imposta em hardware.</a:t>
-            </a:r>
-          </a:p>
-        </p:txBody>
-      </p:sp>
-      <p:sp>
-        <p:nvSpPr>
-          <p:cNvPr id="11" name="TextBox 10"/>
-          <p:cNvSpPr txBox="1"/>
-          <p:nvPr/>
-        </p:nvSpPr>
-        <p:spPr>
-          <a:xfrm>
-            <a:off x="685800" y="4288917"/>
-            <a:ext cx="247650" cy="294437"/>
+              <a:t>Isola de verdade</a:t>
+            </a:r>
+          </a:p>
+        </p:txBody>
+      </p:sp>
+      <p:sp>
+        <p:nvSpPr>
+          <p:cNvPr id="15" name="TextBox 14"/>
+          <p:cNvSpPr txBox="1"/>
+          <p:nvPr/>
+        </p:nvSpPr>
+        <p:spPr>
+          <a:xfrm>
+            <a:off x="6667500" y="3694557"/>
+            <a:ext cx="4591050" cy="762000"/>
           </a:xfrm>
           <a:prstGeom prst="rect">
             <a:avLst/>
@@ -24906,31 +24816,75 @@
           <a:p>
             <a:pPr algn="l">
               <a:lnSpc>
-                <a:spcPct val="120000"/>
-              </a:lnSpc>
-            </a:pPr>
-            <a:r>
-              <a:rPr sz="1450" b="1" i="0">
-                <a:solidFill>
-                  <a:srgbClr val="E94D1C"/>
-                </a:solidFill>
-                <a:latin typeface="Roboto"/>
-              </a:rPr>
-              <a:t>//</a:t>
-            </a:r>
-          </a:p>
-        </p:txBody>
-      </p:sp>
-      <p:sp>
-        <p:nvSpPr>
-          <p:cNvPr id="12" name="TextBox 11"/>
-          <p:cNvSpPr txBox="1"/>
-          <p:nvPr/>
-        </p:nvSpPr>
-        <p:spPr>
-          <a:xfrm>
-            <a:off x="971550" y="4279392"/>
-            <a:ext cx="4857750" cy="95250"/>
+                <a:spcPct val="135000"/>
+              </a:lnSpc>
+            </a:pPr>
+            <a:r>
+              <a:rPr sz="1280" b="0" i="0">
+                <a:solidFill>
+                  <a:srgbClr val="1A1A1E"/>
+                </a:solidFill>
+                <a:latin typeface="Roboto"/>
+              </a:rPr>
+              <a:t>Pesada e difícil de versionar</a:t>
+            </a:r>
+          </a:p>
+        </p:txBody>
+      </p:sp>
+      <p:sp>
+        <p:nvSpPr>
+          <p:cNvPr id="16" name="Rectangle 15"/>
+          <p:cNvSpPr/>
+          <p:nvPr/>
+        </p:nvSpPr>
+        <p:spPr>
+          <a:xfrm>
+            <a:off x="685800" y="4019550"/>
+            <a:ext cx="10820400" cy="9525"/>
+          </a:xfrm>
+          <a:prstGeom prst="rect">
+            <a:avLst/>
+          </a:prstGeom>
+          <a:solidFill>
+            <a:srgbClr val="EDEDF2"/>
+          </a:solidFill>
+          <a:ln>
+            <a:noFill/>
+          </a:ln>
+          <a:effectLst/>
+        </p:spPr>
+        <p:style>
+          <a:lnRef idx="1">
+            <a:schemeClr val="accent1"/>
+          </a:lnRef>
+          <a:fillRef idx="3">
+            <a:schemeClr val="accent1"/>
+          </a:fillRef>
+          <a:effectRef idx="2">
+            <a:schemeClr val="accent1"/>
+          </a:effectRef>
+          <a:fontRef idx="minor">
+            <a:schemeClr val="lt1"/>
+          </a:fontRef>
+        </p:style>
+        <p:txBody>
+          <a:bodyPr rtlCol="0" anchor="ctr" wrap="square" lIns="0" rIns="0" tIns="0" bIns="0"/>
+          <a:lstStyle/>
+          <a:p>
+            <a:pPr algn="ctr"/>
+          </a:p>
+        </p:txBody>
+      </p:sp>
+      <p:sp>
+        <p:nvSpPr>
+          <p:cNvPr id="17" name="TextBox 16"/>
+          <p:cNvSpPr txBox="1"/>
+          <p:nvPr/>
+        </p:nvSpPr>
+        <p:spPr>
+          <a:xfrm>
+            <a:off x="685800" y="4143375"/>
+            <a:ext cx="2019300" cy="762000"/>
           </a:xfrm>
           <a:prstGeom prst="rect">
             <a:avLst/>
@@ -24945,31 +24899,70 @@
           <a:p>
             <a:pPr algn="l">
               <a:lnSpc>
-                <a:spcPct val="130000"/>
-              </a:lnSpc>
-            </a:pPr>
-            <a:r>
-              <a:rPr sz="1580" b="0" i="0">
+                <a:spcPct val="135000"/>
+              </a:lnSpc>
+            </a:pPr>
+            <a:r>
+              <a:rPr sz="1350" b="1" i="0">
+                <a:solidFill>
+                  <a:srgbClr val="21049A"/>
+                </a:solidFill>
+                <a:latin typeface="Roboto"/>
+              </a:rPr>
+              <a:t>Podman</a:t>
+            </a:r>
+          </a:p>
+        </p:txBody>
+      </p:sp>
+      <p:sp>
+        <p:nvSpPr>
+          <p:cNvPr id="18" name="TextBox 17"/>
+          <p:cNvSpPr txBox="1"/>
+          <p:nvPr/>
+        </p:nvSpPr>
+        <p:spPr>
+          <a:xfrm>
+            <a:off x="3048000" y="4143375"/>
+            <a:ext cx="3257550" cy="762000"/>
+          </a:xfrm>
+          <a:prstGeom prst="rect">
+            <a:avLst/>
+          </a:prstGeom>
+          <a:noFill/>
+        </p:spPr>
+        <p:txBody>
+          <a:bodyPr wrap="square" lIns="0" rIns="0" tIns="0" bIns="0" anchor="t">
+            <a:spAutoFit/>
+          </a:bodyPr>
+          <a:lstStyle/>
+          <a:p>
+            <a:pPr algn="l">
+              <a:lnSpc>
+                <a:spcPct val="135000"/>
+              </a:lnSpc>
+            </a:pPr>
+            <a:r>
+              <a:rPr sz="1280" b="0" i="0">
                 <a:solidFill>
                   <a:srgbClr val="1A1A1E"/>
                 </a:solidFill>
                 <a:latin typeface="Roboto"/>
               </a:rPr>
-              <a:t>Superfície relativamente estreita.</a:t>
-            </a:r>
-          </a:p>
-        </p:txBody>
-      </p:sp>
-      <p:sp>
-        <p:nvSpPr>
-          <p:cNvPr id="13" name="TextBox 12"/>
-          <p:cNvSpPr txBox="1"/>
-          <p:nvPr/>
-        </p:nvSpPr>
-        <p:spPr>
-          <a:xfrm>
-            <a:off x="6362700" y="2722626"/>
-            <a:ext cx="5143500" cy="182880"/>
+              <a:t>Mesmo modelo, sem daemon root</a:t>
+            </a:r>
+          </a:p>
+        </p:txBody>
+      </p:sp>
+      <p:sp>
+        <p:nvSpPr>
+          <p:cNvPr id="19" name="TextBox 18"/>
+          <p:cNvSpPr txBox="1"/>
+          <p:nvPr/>
+        </p:nvSpPr>
+        <p:spPr>
+          <a:xfrm>
+            <a:off x="6667500" y="4143375"/>
+            <a:ext cx="4591050" cy="762000"/>
           </a:xfrm>
           <a:prstGeom prst="rect">
             <a:avLst/>
@@ -24984,31 +24977,75 @@
           <a:p>
             <a:pPr algn="l">
               <a:lnSpc>
-                <a:spcPct val="120000"/>
-              </a:lnSpc>
-            </a:pPr>
-            <a:r>
-              <a:rPr sz="900" b="1" i="0" spc="120">
-                <a:solidFill>
-                  <a:srgbClr val="E94D1C"/>
-                </a:solidFill>
-                <a:latin typeface="Roboto"/>
-              </a:rPr>
-              <a:t>CONTAINER</a:t>
-            </a:r>
-          </a:p>
-        </p:txBody>
-      </p:sp>
-      <p:sp>
-        <p:nvSpPr>
-          <p:cNvPr id="14" name="Rectangle 13"/>
+                <a:spcPct val="135000"/>
+              </a:lnSpc>
+            </a:pPr>
+            <a:r>
+              <a:rPr sz="1280" b="0" i="0">
+                <a:solidFill>
+                  <a:srgbClr val="1A1A1E"/>
+                </a:solidFill>
+                <a:latin typeface="Roboto"/>
+              </a:rPr>
+              <a:t>Menos material e menos gente do time conhece</a:t>
+            </a:r>
+          </a:p>
+        </p:txBody>
+      </p:sp>
+      <p:sp>
+        <p:nvSpPr>
+          <p:cNvPr id="20" name="Rectangle 19"/>
           <p:cNvSpPr/>
           <p:nvPr/>
         </p:nvSpPr>
         <p:spPr>
           <a:xfrm>
-            <a:off x="6362700" y="2932176"/>
-            <a:ext cx="419100" cy="28575"/>
+            <a:off x="685800" y="4468368"/>
+            <a:ext cx="10820400" cy="9525"/>
+          </a:xfrm>
+          <a:prstGeom prst="rect">
+            <a:avLst/>
+          </a:prstGeom>
+          <a:solidFill>
+            <a:srgbClr val="EDEDF2"/>
+          </a:solidFill>
+          <a:ln>
+            <a:noFill/>
+          </a:ln>
+          <a:effectLst/>
+        </p:spPr>
+        <p:style>
+          <a:lnRef idx="1">
+            <a:schemeClr val="accent1"/>
+          </a:lnRef>
+          <a:fillRef idx="3">
+            <a:schemeClr val="accent1"/>
+          </a:fillRef>
+          <a:effectRef idx="2">
+            <a:schemeClr val="accent1"/>
+          </a:effectRef>
+          <a:fontRef idx="minor">
+            <a:schemeClr val="lt1"/>
+          </a:fontRef>
+        </p:style>
+        <p:txBody>
+          <a:bodyPr rtlCol="0" anchor="ctr" wrap="square" lIns="0" rIns="0" tIns="0" bIns="0"/>
+          <a:lstStyle/>
+          <a:p>
+            <a:pPr algn="ctr"/>
+          </a:p>
+        </p:txBody>
+      </p:sp>
+      <p:sp>
+        <p:nvSpPr>
+          <p:cNvPr id="21" name="Rectangle 20"/>
+          <p:cNvSpPr/>
+          <p:nvPr/>
+        </p:nvSpPr>
+        <p:spPr>
+          <a:xfrm>
+            <a:off x="571500" y="4535043"/>
+            <a:ext cx="28575" cy="323850"/>
           </a:xfrm>
           <a:prstGeom prst="rect">
             <a:avLst/>
@@ -25045,14 +25082,14 @@
       </p:sp>
       <p:sp>
         <p:nvSpPr>
-          <p:cNvPr id="15" name="TextBox 14"/>
-          <p:cNvSpPr txBox="1"/>
-          <p:nvPr/>
-        </p:nvSpPr>
-        <p:spPr>
-          <a:xfrm>
-            <a:off x="6362700" y="3227451"/>
-            <a:ext cx="247650" cy="294437"/>
+          <p:cNvPr id="22" name="TextBox 21"/>
+          <p:cNvSpPr txBox="1"/>
+          <p:nvPr/>
+        </p:nvSpPr>
+        <p:spPr>
+          <a:xfrm>
+            <a:off x="685800" y="4592193"/>
+            <a:ext cx="2019300" cy="762000"/>
           </a:xfrm>
           <a:prstGeom prst="rect">
             <a:avLst/>
@@ -25067,31 +25104,31 @@
           <a:p>
             <a:pPr algn="l">
               <a:lnSpc>
-                <a:spcPct val="120000"/>
-              </a:lnSpc>
-            </a:pPr>
-            <a:r>
-              <a:rPr sz="1450" b="1" i="0">
+                <a:spcPct val="135000"/>
+              </a:lnSpc>
+            </a:pPr>
+            <a:r>
+              <a:rPr sz="1350" b="1" i="0">
                 <a:solidFill>
                   <a:srgbClr val="E94D1C"/>
                 </a:solidFill>
                 <a:latin typeface="Roboto"/>
               </a:rPr>
-              <a:t>//</a:t>
-            </a:r>
-          </a:p>
-        </p:txBody>
-      </p:sp>
-      <p:sp>
-        <p:nvSpPr>
-          <p:cNvPr id="16" name="TextBox 15"/>
-          <p:cNvSpPr txBox="1"/>
-          <p:nvPr/>
-        </p:nvSpPr>
-        <p:spPr>
-          <a:xfrm>
-            <a:off x="6648450" y="3217926"/>
-            <a:ext cx="4857750" cy="95250"/>
+              <a:t>Compose</a:t>
+            </a:r>
+          </a:p>
+        </p:txBody>
+      </p:sp>
+      <p:sp>
+        <p:nvSpPr>
+          <p:cNvPr id="23" name="TextBox 22"/>
+          <p:cNvSpPr txBox="1"/>
+          <p:nvPr/>
+        </p:nvSpPr>
+        <p:spPr>
+          <a:xfrm>
+            <a:off x="3048000" y="4592193"/>
+            <a:ext cx="3257550" cy="762000"/>
           </a:xfrm>
           <a:prstGeom prst="rect">
             <a:avLst/>
@@ -25106,31 +25143,31 @@
           <a:p>
             <a:pPr algn="l">
               <a:lnSpc>
-                <a:spcPct val="130000"/>
-              </a:lnSpc>
-            </a:pPr>
-            <a:r>
-              <a:rPr sz="1580" b="0" i="0">
+                <a:spcPct val="135000"/>
+              </a:lnSpc>
+            </a:pPr>
+            <a:r>
+              <a:rPr sz="1280" b="0" i="0">
                 <a:solidFill>
                   <a:srgbClr val="1A1A1E"/>
                 </a:solidFill>
                 <a:latin typeface="Roboto"/>
               </a:rPr>
-              <a:t>Compartilha o kernel do host.</a:t>
-            </a:r>
-          </a:p>
-        </p:txBody>
-      </p:sp>
-      <p:sp>
-        <p:nvSpPr>
-          <p:cNvPr id="17" name="TextBox 16"/>
-          <p:cNvSpPr txBox="1"/>
-          <p:nvPr/>
-        </p:nvSpPr>
-        <p:spPr>
-          <a:xfrm>
-            <a:off x="6362700" y="3758184"/>
-            <a:ext cx="247650" cy="294437"/>
+              <a:t>Escolhido, com o custo declarado</a:t>
+            </a:r>
+          </a:p>
+        </p:txBody>
+      </p:sp>
+      <p:sp>
+        <p:nvSpPr>
+          <p:cNvPr id="24" name="TextBox 23"/>
+          <p:cNvSpPr txBox="1"/>
+          <p:nvPr/>
+        </p:nvSpPr>
+        <p:spPr>
+          <a:xfrm>
+            <a:off x="6667500" y="4592193"/>
+            <a:ext cx="4591050" cy="762000"/>
           </a:xfrm>
           <a:prstGeom prst="rect">
             <a:avLst/>
@@ -25145,141 +25182,68 @@
           <a:p>
             <a:pPr algn="l">
               <a:lnSpc>
-                <a:spcPct val="120000"/>
-              </a:lnSpc>
-            </a:pPr>
-            <a:r>
-              <a:rPr sz="1450" b="1" i="0">
-                <a:solidFill>
-                  <a:srgbClr val="E94D1C"/>
-                </a:solidFill>
-                <a:latin typeface="Roboto"/>
-              </a:rPr>
-              <a:t>//</a:t>
-            </a:r>
-          </a:p>
-        </p:txBody>
-      </p:sp>
-      <p:sp>
-        <p:nvSpPr>
-          <p:cNvPr id="18" name="TextBox 17"/>
-          <p:cNvSpPr txBox="1"/>
-          <p:nvPr/>
-        </p:nvSpPr>
-        <p:spPr>
-          <a:xfrm>
-            <a:off x="6648450" y="3748659"/>
-            <a:ext cx="4857750" cy="95250"/>
-          </a:xfrm>
-          <a:prstGeom prst="rect">
-            <a:avLst/>
-          </a:prstGeom>
-          <a:noFill/>
-        </p:spPr>
-        <p:txBody>
-          <a:bodyPr wrap="square" lIns="0" rIns="0" tIns="0" bIns="0" anchor="t">
-            <a:spAutoFit/>
-          </a:bodyPr>
-          <a:lstStyle/>
-          <a:p>
-            <a:pPr algn="l">
-              <a:lnSpc>
-                <a:spcPct val="130000"/>
-              </a:lnSpc>
-            </a:pPr>
-            <a:r>
-              <a:rPr sz="1580" b="0" i="0">
+                <a:spcPct val="135000"/>
+              </a:lnSpc>
+            </a:pPr>
+            <a:r>
+              <a:rPr sz="1280" b="0" i="0">
                 <a:solidFill>
                   <a:srgbClr val="1A1A1E"/>
                 </a:solidFill>
                 <a:latin typeface="Roboto"/>
               </a:rPr>
-              <a:t>A fronteira é a interface de chamadas de sistema, mais de trezentas, mais /proc, /sys e ioctl.</a:t>
-            </a:r>
-          </a:p>
-        </p:txBody>
-      </p:sp>
-      <p:sp>
-        <p:nvSpPr>
-          <p:cNvPr id="19" name="TextBox 18"/>
-          <p:cNvSpPr txBox="1"/>
-          <p:nvPr/>
-        </p:nvSpPr>
-        <p:spPr>
-          <a:xfrm>
-            <a:off x="6362700" y="4552950"/>
-            <a:ext cx="247650" cy="294437"/>
-          </a:xfrm>
-          <a:prstGeom prst="rect">
-            <a:avLst/>
-          </a:prstGeom>
-          <a:noFill/>
-        </p:spPr>
-        <p:txBody>
-          <a:bodyPr wrap="square" lIns="0" rIns="0" tIns="0" bIns="0" anchor="t">
-            <a:spAutoFit/>
-          </a:bodyPr>
-          <a:lstStyle/>
-          <a:p>
-            <a:pPr algn="l">
-              <a:lnSpc>
-                <a:spcPct val="120000"/>
-              </a:lnSpc>
-            </a:pPr>
-            <a:r>
-              <a:rPr sz="1450" b="1" i="0">
-                <a:solidFill>
-                  <a:srgbClr val="E94D1C"/>
-                </a:solidFill>
-                <a:latin typeface="Roboto"/>
-              </a:rPr>
-              <a:t>//</a:t>
-            </a:r>
-          </a:p>
-        </p:txBody>
-      </p:sp>
-      <p:sp>
-        <p:nvSpPr>
-          <p:cNvPr id="20" name="TextBox 19"/>
-          <p:cNvSpPr txBox="1"/>
-          <p:nvPr/>
-        </p:nvSpPr>
-        <p:spPr>
-          <a:xfrm>
-            <a:off x="6648450" y="4543425"/>
-            <a:ext cx="4857750" cy="95250"/>
-          </a:xfrm>
-          <a:prstGeom prst="rect">
-            <a:avLst/>
-          </a:prstGeom>
-          <a:noFill/>
-        </p:spPr>
-        <p:txBody>
-          <a:bodyPr wrap="square" lIns="0" rIns="0" tIns="0" bIns="0" anchor="t">
-            <a:spAutoFit/>
-          </a:bodyPr>
-          <a:lstStyle/>
-          <a:p>
-            <a:pPr algn="l">
-              <a:lnSpc>
-                <a:spcPct val="130000"/>
-              </a:lnSpc>
-            </a:pPr>
-            <a:r>
-              <a:rPr sz="1580" b="0" i="0">
-                <a:solidFill>
-                  <a:srgbClr val="1A1A1E"/>
-                </a:solidFill>
-                <a:latin typeface="Roboto"/>
-              </a:rPr>
-              <a:t>CVE-2019-5736 no runc: o processo de dentro sobrescrevia o binário do runtime pelo /proc/self/exe.</a:t>
-            </a:r>
-          </a:p>
-        </p:txBody>
-      </p:sp>
-      <p:sp>
-        <p:nvSpPr>
-          <p:cNvPr id="21" name="TextBox 20"/>
+              <a:t>Move complexidade em vez de apagá-la</a:t>
+            </a:r>
+          </a:p>
+        </p:txBody>
+      </p:sp>
+      <p:sp>
+        <p:nvSpPr>
+          <p:cNvPr id="25" name="Rectangle 24"/>
+          <p:cNvSpPr/>
+          <p:nvPr/>
+        </p:nvSpPr>
+        <p:spPr>
+          <a:xfrm>
+            <a:off x="685800" y="4917186"/>
+            <a:ext cx="10820400" cy="9525"/>
+          </a:xfrm>
+          <a:prstGeom prst="rect">
+            <a:avLst/>
+          </a:prstGeom>
+          <a:solidFill>
+            <a:srgbClr val="EDEDF2"/>
+          </a:solidFill>
+          <a:ln>
+            <a:noFill/>
+          </a:ln>
+          <a:effectLst/>
+        </p:spPr>
+        <p:style>
+          <a:lnRef idx="1">
+            <a:schemeClr val="accent1"/>
+          </a:lnRef>
+          <a:fillRef idx="3">
+            <a:schemeClr val="accent1"/>
+          </a:fillRef>
+          <a:effectRef idx="2">
+            <a:schemeClr val="accent1"/>
+          </a:effectRef>
+          <a:fontRef idx="minor">
+            <a:schemeClr val="lt1"/>
+          </a:fontRef>
+        </p:style>
+        <p:txBody>
+          <a:bodyPr rtlCol="0" anchor="ctr" wrap="square" lIns="0" rIns="0" tIns="0" bIns="0"/>
+          <a:lstStyle/>
+          <a:p>
+            <a:pPr algn="ctr"/>
+          </a:p>
+        </p:txBody>
+      </p:sp>
+      <p:sp>
+        <p:nvSpPr>
+          <p:cNvPr id="26" name="TextBox 25"/>
           <p:cNvSpPr txBox="1"/>
           <p:nvPr/>
         </p:nvSpPr>
@@ -25318,7 +25282,7 @@
       </p:sp>
       <p:sp>
         <p:nvSpPr>
-          <p:cNvPr id="22" name="TextBox 21"/>
+          <p:cNvPr id="27" name="TextBox 26"/>
           <p:cNvSpPr txBox="1"/>
           <p:nvPr/>
         </p:nvSpPr>
@@ -25439,7 +25403,7 @@
                 </a:solidFill>
                 <a:latin typeface="Roboto"/>
               </a:rPr>
-              <a:t>ALTERNATIVAS CONSIDERADAS</a:t>
+              <a:t>QUANDO NÃO COMPENSA</a:t>
             </a:r>
           </a:p>
         </p:txBody>
@@ -25472,13 +25436,29 @@
               </a:lnSpc>
             </a:pPr>
             <a:r>
-              <a:rPr sz="3000" b="1" i="0">
+              <a:rPr sz="2550" b="1" i="0">
                 <a:solidFill>
                   <a:srgbClr val="21049A"/>
                 </a:solidFill>
                 <a:latin typeface="Roboto"/>
               </a:rPr>
-              <a:t>Comparação com as outras opções</a:t>
+              <a:t>Quatro critérios para não conteinerizar,</a:t>
+            </a:r>
+          </a:p>
+          <a:p>
+            <a:pPr>
+              <a:lnSpc>
+                <a:spcPct val="104000"/>
+              </a:lnSpc>
+            </a:pPr>
+            <a:r>
+              <a:rPr sz="2550" b="1" i="0">
+                <a:solidFill>
+                  <a:srgbClr val="21049A"/>
+                </a:solidFill>
+                <a:latin typeface="Roboto"/>
+              </a:rPr>
+              <a:t>e a nossa situação</a:t>
             </a:r>
           </a:p>
         </p:txBody>
@@ -25491,8 +25471,8 @@
         </p:nvSpPr>
         <p:spPr>
           <a:xfrm>
-            <a:off x="685800" y="2864739"/>
-            <a:ext cx="2190750" cy="167640"/>
+            <a:off x="685800" y="2721292"/>
+            <a:ext cx="5143500" cy="182880"/>
           </a:xfrm>
           <a:prstGeom prst="rect">
             <a:avLst/>
@@ -25511,105 +25491,27 @@
               </a:lnSpc>
             </a:pPr>
             <a:r>
-              <a:rPr sz="819" b="1" i="0" spc="120">
+              <a:rPr sz="900" b="1" i="0" spc="120">
                 <a:solidFill>
                   <a:srgbClr val="21049A"/>
                 </a:solidFill>
                 <a:latin typeface="Roboto"/>
               </a:rPr>
-              <a:t>OPÇÃO</a:t>
-            </a:r>
-          </a:p>
-        </p:txBody>
-      </p:sp>
-      <p:sp>
-        <p:nvSpPr>
-          <p:cNvPr id="6" name="TextBox 5"/>
-          <p:cNvSpPr txBox="1"/>
-          <p:nvPr/>
-        </p:nvSpPr>
-        <p:spPr>
-          <a:xfrm>
-            <a:off x="3048000" y="2864739"/>
-            <a:ext cx="3429000" cy="167640"/>
-          </a:xfrm>
-          <a:prstGeom prst="rect">
-            <a:avLst/>
-          </a:prstGeom>
-          <a:noFill/>
-        </p:spPr>
-        <p:txBody>
-          <a:bodyPr wrap="square" lIns="0" rIns="0" tIns="0" bIns="0" anchor="t">
-            <a:spAutoFit/>
-          </a:bodyPr>
-          <a:lstStyle/>
-          <a:p>
-            <a:pPr algn="l">
-              <a:lnSpc>
-                <a:spcPct val="120000"/>
-              </a:lnSpc>
-            </a:pPr>
-            <a:r>
-              <a:rPr sz="819" b="1" i="0" spc="120">
-                <a:solidFill>
-                  <a:srgbClr val="21049A"/>
-                </a:solidFill>
-                <a:latin typeface="Roboto"/>
-              </a:rPr>
-              <a:t>A FAVOR</a:t>
-            </a:r>
-          </a:p>
-        </p:txBody>
-      </p:sp>
-      <p:sp>
-        <p:nvSpPr>
-          <p:cNvPr id="7" name="TextBox 6"/>
-          <p:cNvSpPr txBox="1"/>
-          <p:nvPr/>
-        </p:nvSpPr>
-        <p:spPr>
-          <a:xfrm>
-            <a:off x="6667500" y="2864739"/>
-            <a:ext cx="4762500" cy="167640"/>
-          </a:xfrm>
-          <a:prstGeom prst="rect">
-            <a:avLst/>
-          </a:prstGeom>
-          <a:noFill/>
-        </p:spPr>
-        <p:txBody>
-          <a:bodyPr wrap="square" lIns="0" rIns="0" tIns="0" bIns="0" anchor="t">
-            <a:spAutoFit/>
-          </a:bodyPr>
-          <a:lstStyle/>
-          <a:p>
-            <a:pPr algn="l">
-              <a:lnSpc>
-                <a:spcPct val="120000"/>
-              </a:lnSpc>
-            </a:pPr>
-            <a:r>
-              <a:rPr sz="819" b="1" i="0" spc="120">
-                <a:solidFill>
-                  <a:srgbClr val="21049A"/>
-                </a:solidFill>
-                <a:latin typeface="Roboto"/>
-              </a:rPr>
-              <a:t>CONTRA</a:t>
-            </a:r>
-          </a:p>
-        </p:txBody>
-      </p:sp>
-      <p:sp>
-        <p:nvSpPr>
-          <p:cNvPr id="8" name="Rectangle 7"/>
+              <a:t>OS QUATRO CRITÉRIOS</a:t>
+            </a:r>
+          </a:p>
+        </p:txBody>
+      </p:sp>
+      <p:sp>
+        <p:nvSpPr>
+          <p:cNvPr id="6" name="Rectangle 5"/>
           <p:cNvSpPr/>
           <p:nvPr/>
         </p:nvSpPr>
         <p:spPr>
           <a:xfrm>
-            <a:off x="685800" y="3093339"/>
-            <a:ext cx="10820400" cy="19050"/>
+            <a:off x="685800" y="2930842"/>
+            <a:ext cx="419100" cy="28575"/>
           </a:xfrm>
           <a:prstGeom prst="rect">
             <a:avLst/>
@@ -25646,14 +25548,92 @@
       </p:sp>
       <p:sp>
         <p:nvSpPr>
+          <p:cNvPr id="7" name="TextBox 6"/>
+          <p:cNvSpPr txBox="1"/>
+          <p:nvPr/>
+        </p:nvSpPr>
+        <p:spPr>
+          <a:xfrm>
+            <a:off x="685800" y="3226118"/>
+            <a:ext cx="247650" cy="294437"/>
+          </a:xfrm>
+          <a:prstGeom prst="rect">
+            <a:avLst/>
+          </a:prstGeom>
+          <a:noFill/>
+        </p:spPr>
+        <p:txBody>
+          <a:bodyPr wrap="square" lIns="0" rIns="0" tIns="0" bIns="0" anchor="t">
+            <a:spAutoFit/>
+          </a:bodyPr>
+          <a:lstStyle/>
+          <a:p>
+            <a:pPr algn="l">
+              <a:lnSpc>
+                <a:spcPct val="120000"/>
+              </a:lnSpc>
+            </a:pPr>
+            <a:r>
+              <a:rPr sz="1450" b="1" i="0">
+                <a:solidFill>
+                  <a:srgbClr val="E94D1C"/>
+                </a:solidFill>
+                <a:latin typeface="Roboto"/>
+              </a:rPr>
+              <a:t>//</a:t>
+            </a:r>
+          </a:p>
+        </p:txBody>
+      </p:sp>
+      <p:sp>
+        <p:nvSpPr>
+          <p:cNvPr id="8" name="TextBox 7"/>
+          <p:cNvSpPr txBox="1"/>
+          <p:nvPr/>
+        </p:nvSpPr>
+        <p:spPr>
+          <a:xfrm>
+            <a:off x="971550" y="3216592"/>
+            <a:ext cx="4857750" cy="95250"/>
+          </a:xfrm>
+          <a:prstGeom prst="rect">
+            <a:avLst/>
+          </a:prstGeom>
+          <a:noFill/>
+        </p:spPr>
+        <p:txBody>
+          <a:bodyPr wrap="square" lIns="0" rIns="0" tIns="0" bIns="0" anchor="t">
+            <a:spAutoFit/>
+          </a:bodyPr>
+          <a:lstStyle/>
+          <a:p>
+            <a:pPr algn="l">
+              <a:lnSpc>
+                <a:spcPct val="130000"/>
+              </a:lnSpc>
+            </a:pPr>
+            <a:r>
+              <a:rPr sz="1580" b="0" i="0">
+                <a:solidFill>
+                  <a:srgbClr val="1A1A1E"/>
+                </a:solidFill>
+                <a:latin typeface="Roboto"/>
+              </a:rPr>
+              <a:t>Monolito num servidor que nunca escala.</a:t>
+            </a:r>
+          </a:p>
+        </p:txBody>
+      </p:sp>
+      <p:sp>
+        <p:nvSpPr>
           <p:cNvPr id="9" name="TextBox 8"/>
           <p:cNvSpPr txBox="1"/>
           <p:nvPr/>
         </p:nvSpPr>
         <p:spPr>
           <a:xfrm>
-            <a:off x="685800" y="3245739"/>
-            <a:ext cx="2019300" cy="762000"/>
+            <a:off x="685800" y="3756850"/>
+            <a:ext cx="247650" cy="294437"/>
           </a:xfrm>
           <a:prstGeom prst="rect">
             <a:avLst/>
@@ -25668,17 +25648,17 @@
           <a:p>
             <a:pPr algn="l">
               <a:lnSpc>
-                <a:spcPct val="135000"/>
-              </a:lnSpc>
-            </a:pPr>
-            <a:r>
-              <a:rPr sz="1350" b="1" i="0">
-                <a:solidFill>
-                  <a:srgbClr val="21049A"/>
-                </a:solidFill>
-                <a:latin typeface="Roboto"/>
-              </a:rPr>
-              <a:t>README nativo</a:t>
+                <a:spcPct val="120000"/>
+              </a:lnSpc>
+            </a:pPr>
+            <a:r>
+              <a:rPr sz="1450" b="1" i="0">
+                <a:solidFill>
+                  <a:srgbClr val="E94D1C"/>
+                </a:solidFill>
+                <a:latin typeface="Roboto"/>
+              </a:rPr>
+              <a:t>//</a:t>
             </a:r>
           </a:p>
         </p:txBody>
@@ -25691,8 +25671,8 @@
         </p:nvSpPr>
         <p:spPr>
           <a:xfrm>
-            <a:off x="3048000" y="3245739"/>
-            <a:ext cx="3257550" cy="762000"/>
+            <a:off x="971550" y="3747325"/>
+            <a:ext cx="4857750" cy="95250"/>
           </a:xfrm>
           <a:prstGeom prst="rect">
             <a:avLst/>
@@ -25707,17 +25687,17 @@
           <a:p>
             <a:pPr algn="l">
               <a:lnSpc>
-                <a:spcPct val="135000"/>
-              </a:lnSpc>
-            </a:pPr>
-            <a:r>
-              <a:rPr sz="1280" b="0" i="0">
+                <a:spcPct val="130000"/>
+              </a:lnSpc>
+            </a:pPr>
+            <a:r>
+              <a:rPr sz="1580" b="0" i="0">
                 <a:solidFill>
                   <a:srgbClr val="1A1A1E"/>
                 </a:solidFill>
                 <a:latin typeface="Roboto"/>
               </a:rPr>
-              <a:t>Custo zero para começar</a:t>
+              <a:t>Time sem integração contínua, que só ganha um passo de build a mais.</a:t>
             </a:r>
           </a:p>
         </p:txBody>
@@ -25730,8 +25710,8 @@
         </p:nvSpPr>
         <p:spPr>
           <a:xfrm>
-            <a:off x="6667500" y="3245739"/>
-            <a:ext cx="4591050" cy="762000"/>
+            <a:off x="685800" y="4551616"/>
+            <a:ext cx="247650" cy="294437"/>
           </a:xfrm>
           <a:prstGeom prst="rect">
             <a:avLst/>
@@ -25746,62 +25726,57 @@
           <a:p>
             <a:pPr algn="l">
               <a:lnSpc>
-                <a:spcPct val="135000"/>
-              </a:lnSpc>
-            </a:pPr>
-            <a:r>
-              <a:rPr sz="1280" b="0" i="0">
+                <a:spcPct val="120000"/>
+              </a:lnSpc>
+            </a:pPr>
+            <a:r>
+              <a:rPr sz="1450" b="1" i="0">
+                <a:solidFill>
+                  <a:srgbClr val="E94D1C"/>
+                </a:solidFill>
+                <a:latin typeface="Roboto"/>
+              </a:rPr>
+              <a:t>//</a:t>
+            </a:r>
+          </a:p>
+        </p:txBody>
+      </p:sp>
+      <p:sp>
+        <p:nvSpPr>
+          <p:cNvPr id="12" name="TextBox 11"/>
+          <p:cNvSpPr txBox="1"/>
+          <p:nvPr/>
+        </p:nvSpPr>
+        <p:spPr>
+          <a:xfrm>
+            <a:off x="971550" y="4542092"/>
+            <a:ext cx="4857750" cy="95250"/>
+          </a:xfrm>
+          <a:prstGeom prst="rect">
+            <a:avLst/>
+          </a:prstGeom>
+          <a:noFill/>
+        </p:spPr>
+        <p:txBody>
+          <a:bodyPr wrap="square" lIns="0" rIns="0" tIns="0" bIns="0" anchor="t">
+            <a:spAutoFit/>
+          </a:bodyPr>
+          <a:lstStyle/>
+          <a:p>
+            <a:pPr algn="l">
+              <a:lnSpc>
+                <a:spcPct val="130000"/>
+              </a:lnSpc>
+            </a:pPr>
+            <a:r>
+              <a:rPr sz="1580" b="0" i="0">
                 <a:solidFill>
                   <a:srgbClr val="1A1A1E"/>
                 </a:solidFill>
                 <a:latin typeface="Roboto"/>
               </a:rPr>
-              <a:t>Quebra na primeira divergência de versão</a:t>
-            </a:r>
-          </a:p>
-        </p:txBody>
-      </p:sp>
-      <p:sp>
-        <p:nvSpPr>
-          <p:cNvPr id="12" name="Rectangle 11"/>
-          <p:cNvSpPr/>
-          <p:nvPr/>
-        </p:nvSpPr>
-        <p:spPr>
-          <a:xfrm>
-            <a:off x="685800" y="3570732"/>
-            <a:ext cx="10820400" cy="9525"/>
-          </a:xfrm>
-          <a:prstGeom prst="rect">
-            <a:avLst/>
-          </a:prstGeom>
-          <a:solidFill>
-            <a:srgbClr val="EDEDF2"/>
-          </a:solidFill>
-          <a:ln>
-            <a:noFill/>
-          </a:ln>
-          <a:effectLst/>
-        </p:spPr>
-        <p:style>
-          <a:lnRef idx="1">
-            <a:schemeClr val="accent1"/>
-          </a:lnRef>
-          <a:fillRef idx="3">
-            <a:schemeClr val="accent1"/>
-          </a:fillRef>
-          <a:effectRef idx="2">
-            <a:schemeClr val="accent1"/>
-          </a:effectRef>
-          <a:fontRef idx="minor">
-            <a:schemeClr val="lt1"/>
-          </a:fontRef>
-        </p:style>
-        <p:txBody>
-          <a:bodyPr rtlCol="0" anchor="ctr" wrap="square" lIns="0" rIns="0" tIns="0" bIns="0"/>
-          <a:lstStyle/>
-          <a:p>
-            <a:pPr algn="ctr"/>
+              <a:t>Aplicação sensível a latência de cauda.</a:t>
+            </a:r>
           </a:p>
         </p:txBody>
       </p:sp>
@@ -25813,8 +25788,8 @@
         </p:nvSpPr>
         <p:spPr>
           <a:xfrm>
-            <a:off x="685800" y="3694557"/>
-            <a:ext cx="2019300" cy="762000"/>
+            <a:off x="685800" y="5082349"/>
+            <a:ext cx="247650" cy="294437"/>
           </a:xfrm>
           <a:prstGeom prst="rect">
             <a:avLst/>
@@ -25829,17 +25804,17 @@
           <a:p>
             <a:pPr algn="l">
               <a:lnSpc>
-                <a:spcPct val="135000"/>
-              </a:lnSpc>
-            </a:pPr>
-            <a:r>
-              <a:rPr sz="1350" b="1" i="0">
-                <a:solidFill>
-                  <a:srgbClr val="21049A"/>
-                </a:solidFill>
-                <a:latin typeface="Roboto"/>
-              </a:rPr>
-              <a:t>VM compartilhada</a:t>
+                <a:spcPct val="120000"/>
+              </a:lnSpc>
+            </a:pPr>
+            <a:r>
+              <a:rPr sz="1450" b="1" i="0">
+                <a:solidFill>
+                  <a:srgbClr val="E94D1C"/>
+                </a:solidFill>
+                <a:latin typeface="Roboto"/>
+              </a:rPr>
+              <a:t>//</a:t>
             </a:r>
           </a:p>
         </p:txBody>
@@ -25852,8 +25827,8 @@
         </p:nvSpPr>
         <p:spPr>
           <a:xfrm>
-            <a:off x="3048000" y="3694557"/>
-            <a:ext cx="3257550" cy="762000"/>
+            <a:off x="971550" y="5072824"/>
+            <a:ext cx="4857750" cy="95250"/>
           </a:xfrm>
           <a:prstGeom prst="rect">
             <a:avLst/>
@@ -25868,17 +25843,17 @@
           <a:p>
             <a:pPr algn="l">
               <a:lnSpc>
-                <a:spcPct val="135000"/>
-              </a:lnSpc>
-            </a:pPr>
-            <a:r>
-              <a:rPr sz="1280" b="0" i="0">
+                <a:spcPct val="130000"/>
+              </a:lnSpc>
+            </a:pPr>
+            <a:r>
+              <a:rPr sz="1580" b="0" i="0">
                 <a:solidFill>
                   <a:srgbClr val="1A1A1E"/>
                 </a:solidFill>
                 <a:latin typeface="Roboto"/>
               </a:rPr>
-              <a:t>Isola de verdade</a:t>
+              <a:t>Sistema dominado por estado.</a:t>
             </a:r>
           </a:p>
         </p:txBody>
@@ -25891,8 +25866,8 @@
         </p:nvSpPr>
         <p:spPr>
           <a:xfrm>
-            <a:off x="6667500" y="3694557"/>
-            <a:ext cx="4591050" cy="762000"/>
+            <a:off x="6362700" y="2721292"/>
+            <a:ext cx="5143500" cy="182880"/>
           </a:xfrm>
           <a:prstGeom prst="rect">
             <a:avLst/>
@@ -25907,17 +25882,17 @@
           <a:p>
             <a:pPr algn="l">
               <a:lnSpc>
-                <a:spcPct val="135000"/>
-              </a:lnSpc>
-            </a:pPr>
-            <a:r>
-              <a:rPr sz="1280" b="0" i="0">
-                <a:solidFill>
-                  <a:srgbClr val="1A1A1E"/>
-                </a:solidFill>
-                <a:latin typeface="Roboto"/>
-              </a:rPr>
-              <a:t>Pesada e difícil de versionar</a:t>
+                <a:spcPct val="120000"/>
+              </a:lnSpc>
+            </a:pPr>
+            <a:r>
+              <a:rPr sz="900" b="1" i="0" spc="120">
+                <a:solidFill>
+                  <a:srgbClr val="E94D1C"/>
+                </a:solidFill>
+                <a:latin typeface="Roboto"/>
+              </a:rPr>
+              <a:t>ONDE NÓS ESTAMOS</a:t>
             </a:r>
           </a:p>
         </p:txBody>
@@ -25930,213 +25905,8 @@
         </p:nvSpPr>
         <p:spPr>
           <a:xfrm>
-            <a:off x="685800" y="4019550"/>
-            <a:ext cx="10820400" cy="9525"/>
-          </a:xfrm>
-          <a:prstGeom prst="rect">
-            <a:avLst/>
-          </a:prstGeom>
-          <a:solidFill>
-            <a:srgbClr val="EDEDF2"/>
-          </a:solidFill>
-          <a:ln>
-            <a:noFill/>
-          </a:ln>
-          <a:effectLst/>
-        </p:spPr>
-        <p:style>
-          <a:lnRef idx="1">
-            <a:schemeClr val="accent1"/>
-          </a:lnRef>
-          <a:fillRef idx="3">
-            <a:schemeClr val="accent1"/>
-          </a:fillRef>
-          <a:effectRef idx="2">
-            <a:schemeClr val="accent1"/>
-          </a:effectRef>
-          <a:fontRef idx="minor">
-            <a:schemeClr val="lt1"/>
-          </a:fontRef>
-        </p:style>
-        <p:txBody>
-          <a:bodyPr rtlCol="0" anchor="ctr" wrap="square" lIns="0" rIns="0" tIns="0" bIns="0"/>
-          <a:lstStyle/>
-          <a:p>
-            <a:pPr algn="ctr"/>
-          </a:p>
-        </p:txBody>
-      </p:sp>
-      <p:sp>
-        <p:nvSpPr>
-          <p:cNvPr id="17" name="TextBox 16"/>
-          <p:cNvSpPr txBox="1"/>
-          <p:nvPr/>
-        </p:nvSpPr>
-        <p:spPr>
-          <a:xfrm>
-            <a:off x="685800" y="4143375"/>
-            <a:ext cx="2019300" cy="762000"/>
-          </a:xfrm>
-          <a:prstGeom prst="rect">
-            <a:avLst/>
-          </a:prstGeom>
-          <a:noFill/>
-        </p:spPr>
-        <p:txBody>
-          <a:bodyPr wrap="square" lIns="0" rIns="0" tIns="0" bIns="0" anchor="t">
-            <a:spAutoFit/>
-          </a:bodyPr>
-          <a:lstStyle/>
-          <a:p>
-            <a:pPr algn="l">
-              <a:lnSpc>
-                <a:spcPct val="135000"/>
-              </a:lnSpc>
-            </a:pPr>
-            <a:r>
-              <a:rPr sz="1350" b="1" i="0">
-                <a:solidFill>
-                  <a:srgbClr val="21049A"/>
-                </a:solidFill>
-                <a:latin typeface="Roboto"/>
-              </a:rPr>
-              <a:t>Podman</a:t>
-            </a:r>
-          </a:p>
-        </p:txBody>
-      </p:sp>
-      <p:sp>
-        <p:nvSpPr>
-          <p:cNvPr id="18" name="TextBox 17"/>
-          <p:cNvSpPr txBox="1"/>
-          <p:nvPr/>
-        </p:nvSpPr>
-        <p:spPr>
-          <a:xfrm>
-            <a:off x="3048000" y="4143375"/>
-            <a:ext cx="3257550" cy="762000"/>
-          </a:xfrm>
-          <a:prstGeom prst="rect">
-            <a:avLst/>
-          </a:prstGeom>
-          <a:noFill/>
-        </p:spPr>
-        <p:txBody>
-          <a:bodyPr wrap="square" lIns="0" rIns="0" tIns="0" bIns="0" anchor="t">
-            <a:spAutoFit/>
-          </a:bodyPr>
-          <a:lstStyle/>
-          <a:p>
-            <a:pPr algn="l">
-              <a:lnSpc>
-                <a:spcPct val="135000"/>
-              </a:lnSpc>
-            </a:pPr>
-            <a:r>
-              <a:rPr sz="1280" b="0" i="0">
-                <a:solidFill>
-                  <a:srgbClr val="1A1A1E"/>
-                </a:solidFill>
-                <a:latin typeface="Roboto"/>
-              </a:rPr>
-              <a:t>Mesmo modelo, sem daemon root</a:t>
-            </a:r>
-          </a:p>
-        </p:txBody>
-      </p:sp>
-      <p:sp>
-        <p:nvSpPr>
-          <p:cNvPr id="19" name="TextBox 18"/>
-          <p:cNvSpPr txBox="1"/>
-          <p:nvPr/>
-        </p:nvSpPr>
-        <p:spPr>
-          <a:xfrm>
-            <a:off x="6667500" y="4143375"/>
-            <a:ext cx="4591050" cy="762000"/>
-          </a:xfrm>
-          <a:prstGeom prst="rect">
-            <a:avLst/>
-          </a:prstGeom>
-          <a:noFill/>
-        </p:spPr>
-        <p:txBody>
-          <a:bodyPr wrap="square" lIns="0" rIns="0" tIns="0" bIns="0" anchor="t">
-            <a:spAutoFit/>
-          </a:bodyPr>
-          <a:lstStyle/>
-          <a:p>
-            <a:pPr algn="l">
-              <a:lnSpc>
-                <a:spcPct val="135000"/>
-              </a:lnSpc>
-            </a:pPr>
-            <a:r>
-              <a:rPr sz="1280" b="0" i="0">
-                <a:solidFill>
-                  <a:srgbClr val="1A1A1E"/>
-                </a:solidFill>
-                <a:latin typeface="Roboto"/>
-              </a:rPr>
-              <a:t>Menos material e menos gente do time conhece</a:t>
-            </a:r>
-          </a:p>
-        </p:txBody>
-      </p:sp>
-      <p:sp>
-        <p:nvSpPr>
-          <p:cNvPr id="20" name="Rectangle 19"/>
-          <p:cNvSpPr/>
-          <p:nvPr/>
-        </p:nvSpPr>
-        <p:spPr>
-          <a:xfrm>
-            <a:off x="685800" y="4468368"/>
-            <a:ext cx="10820400" cy="9525"/>
-          </a:xfrm>
-          <a:prstGeom prst="rect">
-            <a:avLst/>
-          </a:prstGeom>
-          <a:solidFill>
-            <a:srgbClr val="EDEDF2"/>
-          </a:solidFill>
-          <a:ln>
-            <a:noFill/>
-          </a:ln>
-          <a:effectLst/>
-        </p:spPr>
-        <p:style>
-          <a:lnRef idx="1">
-            <a:schemeClr val="accent1"/>
-          </a:lnRef>
-          <a:fillRef idx="3">
-            <a:schemeClr val="accent1"/>
-          </a:fillRef>
-          <a:effectRef idx="2">
-            <a:schemeClr val="accent1"/>
-          </a:effectRef>
-          <a:fontRef idx="minor">
-            <a:schemeClr val="lt1"/>
-          </a:fontRef>
-        </p:style>
-        <p:txBody>
-          <a:bodyPr rtlCol="0" anchor="ctr" wrap="square" lIns="0" rIns="0" tIns="0" bIns="0"/>
-          <a:lstStyle/>
-          <a:p>
-            <a:pPr algn="ctr"/>
-          </a:p>
-        </p:txBody>
-      </p:sp>
-      <p:sp>
-        <p:nvSpPr>
-          <p:cNvPr id="21" name="Rectangle 20"/>
-          <p:cNvSpPr/>
-          <p:nvPr/>
-        </p:nvSpPr>
-        <p:spPr>
-          <a:xfrm>
-            <a:off x="571500" y="4535043"/>
-            <a:ext cx="28575" cy="323850"/>
+            <a:off x="6362700" y="2930842"/>
+            <a:ext cx="419100" cy="28575"/>
           </a:xfrm>
           <a:prstGeom prst="rect">
             <a:avLst/>
@@ -26173,14 +25943,14 @@
       </p:sp>
       <p:sp>
         <p:nvSpPr>
-          <p:cNvPr id="22" name="TextBox 21"/>
-          <p:cNvSpPr txBox="1"/>
-          <p:nvPr/>
-        </p:nvSpPr>
-        <p:spPr>
-          <a:xfrm>
-            <a:off x="685800" y="4592193"/>
-            <a:ext cx="2019300" cy="762000"/>
+          <p:cNvPr id="17" name="TextBox 16"/>
+          <p:cNvSpPr txBox="1"/>
+          <p:nvPr/>
+        </p:nvSpPr>
+        <p:spPr>
+          <a:xfrm>
+            <a:off x="6362700" y="3226118"/>
+            <a:ext cx="247650" cy="294437"/>
           </a:xfrm>
           <a:prstGeom prst="rect">
             <a:avLst/>
@@ -26195,31 +25965,31 @@
           <a:p>
             <a:pPr algn="l">
               <a:lnSpc>
-                <a:spcPct val="135000"/>
-              </a:lnSpc>
-            </a:pPr>
-            <a:r>
-              <a:rPr sz="1350" b="1" i="0">
+                <a:spcPct val="120000"/>
+              </a:lnSpc>
+            </a:pPr>
+            <a:r>
+              <a:rPr sz="1450" b="1" i="0">
                 <a:solidFill>
                   <a:srgbClr val="E94D1C"/>
                 </a:solidFill>
                 <a:latin typeface="Roboto"/>
               </a:rPr>
-              <a:t>Compose</a:t>
-            </a:r>
-          </a:p>
-        </p:txBody>
-      </p:sp>
-      <p:sp>
-        <p:nvSpPr>
-          <p:cNvPr id="23" name="TextBox 22"/>
-          <p:cNvSpPr txBox="1"/>
-          <p:nvPr/>
-        </p:nvSpPr>
-        <p:spPr>
-          <a:xfrm>
-            <a:off x="3048000" y="4592193"/>
-            <a:ext cx="3257550" cy="762000"/>
+              <a:t>//</a:t>
+            </a:r>
+          </a:p>
+        </p:txBody>
+      </p:sp>
+      <p:sp>
+        <p:nvSpPr>
+          <p:cNvPr id="18" name="TextBox 17"/>
+          <p:cNvSpPr txBox="1"/>
+          <p:nvPr/>
+        </p:nvSpPr>
+        <p:spPr>
+          <a:xfrm>
+            <a:off x="6648450" y="3216592"/>
+            <a:ext cx="4857750" cy="95250"/>
           </a:xfrm>
           <a:prstGeom prst="rect">
             <a:avLst/>
@@ -26234,31 +26004,31 @@
           <a:p>
             <a:pPr algn="l">
               <a:lnSpc>
-                <a:spcPct val="135000"/>
-              </a:lnSpc>
-            </a:pPr>
-            <a:r>
-              <a:rPr sz="1280" b="0" i="0">
+                <a:spcPct val="130000"/>
+              </a:lnSpc>
+            </a:pPr>
+            <a:r>
+              <a:rPr sz="1580" b="0" i="0">
                 <a:solidFill>
                   <a:srgbClr val="1A1A1E"/>
                 </a:solidFill>
                 <a:latin typeface="Roboto"/>
               </a:rPr>
-              <a:t>Escolhido, com o custo declarado</a:t>
-            </a:r>
-          </a:p>
-        </p:txBody>
-      </p:sp>
-      <p:sp>
-        <p:nvSpPr>
-          <p:cNvPr id="24" name="TextBox 23"/>
-          <p:cNvSpPr txBox="1"/>
-          <p:nvPr/>
-        </p:nvSpPr>
-        <p:spPr>
-          <a:xfrm>
-            <a:off x="6667500" y="4592193"/>
-            <a:ext cx="4591050" cy="762000"/>
+              <a:t>Não temos integração contínua definida nem hospedagem decidida, então dois dos critérios ao lado se aplicam a nós.</a:t>
+            </a:r>
+          </a:p>
+        </p:txBody>
+      </p:sp>
+      <p:sp>
+        <p:nvSpPr>
+          <p:cNvPr id="19" name="TextBox 18"/>
+          <p:cNvSpPr txBox="1"/>
+          <p:nvPr/>
+        </p:nvSpPr>
+        <p:spPr>
+          <a:xfrm>
+            <a:off x="6362700" y="4284916"/>
+            <a:ext cx="247650" cy="294437"/>
           </a:xfrm>
           <a:prstGeom prst="rect">
             <a:avLst/>
@@ -26273,68 +26043,63 @@
           <a:p>
             <a:pPr algn="l">
               <a:lnSpc>
-                <a:spcPct val="135000"/>
-              </a:lnSpc>
-            </a:pPr>
-            <a:r>
-              <a:rPr sz="1280" b="0" i="0">
+                <a:spcPct val="120000"/>
+              </a:lnSpc>
+            </a:pPr>
+            <a:r>
+              <a:rPr sz="1450" b="1" i="0">
+                <a:solidFill>
+                  <a:srgbClr val="E94D1C"/>
+                </a:solidFill>
+                <a:latin typeface="Roboto"/>
+              </a:rPr>
+              <a:t>//</a:t>
+            </a:r>
+          </a:p>
+        </p:txBody>
+      </p:sp>
+      <p:sp>
+        <p:nvSpPr>
+          <p:cNvPr id="20" name="TextBox 19"/>
+          <p:cNvSpPr txBox="1"/>
+          <p:nvPr/>
+        </p:nvSpPr>
+        <p:spPr>
+          <a:xfrm>
+            <a:off x="6648450" y="4275392"/>
+            <a:ext cx="4857750" cy="95250"/>
+          </a:xfrm>
+          <a:prstGeom prst="rect">
+            <a:avLst/>
+          </a:prstGeom>
+          <a:noFill/>
+        </p:spPr>
+        <p:txBody>
+          <a:bodyPr wrap="square" lIns="0" rIns="0" tIns="0" bIns="0" anchor="t">
+            <a:spAutoFit/>
+          </a:bodyPr>
+          <a:lstStyle/>
+          <a:p>
+            <a:pPr algn="l">
+              <a:lnSpc>
+                <a:spcPct val="130000"/>
+              </a:lnSpc>
+            </a:pPr>
+            <a:r>
+              <a:rPr sz="1580" b="0" i="0">
                 <a:solidFill>
                   <a:srgbClr val="1A1A1E"/>
                 </a:solidFill>
                 <a:latin typeface="Roboto"/>
               </a:rPr>
-              <a:t>Move complexidade em vez de apagá-la</a:t>
-            </a:r>
-          </a:p>
-        </p:txBody>
-      </p:sp>
-      <p:sp>
-        <p:nvSpPr>
-          <p:cNvPr id="25" name="Rectangle 24"/>
-          <p:cNvSpPr/>
-          <p:nvPr/>
-        </p:nvSpPr>
-        <p:spPr>
-          <a:xfrm>
-            <a:off x="685800" y="4917186"/>
-            <a:ext cx="10820400" cy="9525"/>
-          </a:xfrm>
-          <a:prstGeom prst="rect">
-            <a:avLst/>
-          </a:prstGeom>
-          <a:solidFill>
-            <a:srgbClr val="EDEDF2"/>
-          </a:solidFill>
-          <a:ln>
-            <a:noFill/>
-          </a:ln>
-          <a:effectLst/>
-        </p:spPr>
-        <p:style>
-          <a:lnRef idx="1">
-            <a:schemeClr val="accent1"/>
-          </a:lnRef>
-          <a:fillRef idx="3">
-            <a:schemeClr val="accent1"/>
-          </a:fillRef>
-          <a:effectRef idx="2">
-            <a:schemeClr val="accent1"/>
-          </a:effectRef>
-          <a:fontRef idx="minor">
-            <a:schemeClr val="lt1"/>
-          </a:fontRef>
-        </p:style>
-        <p:txBody>
-          <a:bodyPr rtlCol="0" anchor="ctr" wrap="square" lIns="0" rIns="0" tIns="0" bIns="0"/>
-          <a:lstStyle/>
-          <a:p>
-            <a:pPr algn="ctr"/>
-          </a:p>
-        </p:txBody>
-      </p:sp>
-      <p:sp>
-        <p:nvSpPr>
-          <p:cNvPr id="26" name="TextBox 25"/>
+              <a:t>O motivo que resta é o ambiente igual para quatro integrantes com stacks diferentes, com o banco rodando sem instalação local, antes de escrever a primeira linha.</a:t>
+            </a:r>
+          </a:p>
+        </p:txBody>
+      </p:sp>
+      <p:sp>
+        <p:nvSpPr>
+          <p:cNvPr id="21" name="TextBox 20"/>
           <p:cNvSpPr txBox="1"/>
           <p:nvPr/>
         </p:nvSpPr>
@@ -26373,7 +26138,7 @@
       </p:sp>
       <p:sp>
         <p:nvSpPr>
-          <p:cNvPr id="27" name="TextBox 26"/>
+          <p:cNvPr id="22" name="TextBox 21"/>
           <p:cNvSpPr txBox="1"/>
           <p:nvPr/>
         </p:nvSpPr>
@@ -26494,7 +26259,7 @@
                 </a:solidFill>
                 <a:latin typeface="Roboto"/>
               </a:rPr>
-              <a:t>QUANDO NÃO COMPENSA</a:t>
+              <a:t>VANTAGENS E CUSTOS</a:t>
             </a:r>
           </a:p>
         </p:txBody>
@@ -26533,7 +26298,7 @@
                 </a:solidFill>
                 <a:latin typeface="Roboto"/>
               </a:rPr>
-              <a:t>Quatro critérios para não conteinerizar,</a:t>
+              <a:t>Efeito nos atributos da Aula 03</a:t>
             </a:r>
           </a:p>
           <a:p>
@@ -26549,7 +26314,7 @@
                 </a:solidFill>
                 <a:latin typeface="Roboto"/>
               </a:rPr>
-              <a:t>e a nossa situação</a:t>
+              <a:t>e das Questões Norteadoras</a:t>
             </a:r>
           </a:p>
         </p:txBody>
@@ -26562,7 +26327,7 @@
         </p:nvSpPr>
         <p:spPr>
           <a:xfrm>
-            <a:off x="685800" y="2194560"/>
+            <a:off x="685800" y="2028825"/>
             <a:ext cx="5143500" cy="182880"/>
           </a:xfrm>
           <a:prstGeom prst="rect">
@@ -26588,7 +26353,7 @@
                 </a:solidFill>
                 <a:latin typeface="Roboto"/>
               </a:rPr>
-              <a:t>OS QUATRO CRITÉRIOS</a:t>
+              <a:t>GANHA</a:t>
             </a:r>
           </a:p>
         </p:txBody>
@@ -26601,7 +26366,7 @@
         </p:nvSpPr>
         <p:spPr>
           <a:xfrm>
-            <a:off x="685800" y="2404110"/>
+            <a:off x="685800" y="2238375"/>
             <a:ext cx="419100" cy="28575"/>
           </a:xfrm>
           <a:prstGeom prst="rect">
@@ -26645,8 +26410,8 @@
         </p:nvSpPr>
         <p:spPr>
           <a:xfrm>
-            <a:off x="685800" y="2699385"/>
-            <a:ext cx="247650" cy="294437"/>
+            <a:off x="685800" y="2533650"/>
+            <a:ext cx="247650" cy="280416"/>
           </a:xfrm>
           <a:prstGeom prst="rect">
             <a:avLst/>
@@ -26665,7 +26430,7 @@
               </a:lnSpc>
             </a:pPr>
             <a:r>
-              <a:rPr sz="1450" b="1" i="0">
+              <a:rPr sz="1380" b="1" i="0">
                 <a:solidFill>
                   <a:srgbClr val="E94D1C"/>
                 </a:solidFill>
@@ -26684,7 +26449,7 @@
         </p:nvSpPr>
         <p:spPr>
           <a:xfrm>
-            <a:off x="971550" y="2689860"/>
+            <a:off x="971550" y="2524125"/>
             <a:ext cx="4857750" cy="95250"/>
           </a:xfrm>
           <a:prstGeom prst="rect">
@@ -26704,13 +26469,22 @@
               </a:lnSpc>
             </a:pPr>
             <a:r>
-              <a:rPr sz="1580" b="0" i="0">
+              <a:rPr sz="1500" b="1" i="0">
                 <a:solidFill>
                   <a:srgbClr val="1A1A1E"/>
                 </a:solidFill>
                 <a:latin typeface="Roboto"/>
               </a:rPr>
-              <a:t>Monolito num servidor que nunca escala.</a:t>
+              <a:t>Modularidade e reusabilidade.</a:t>
+            </a:r>
+            <a:r>
+              <a:rPr sz="1500" b="0" i="0">
+                <a:solidFill>
+                  <a:srgbClr val="1A1A1E"/>
+                </a:solidFill>
+                <a:latin typeface="Roboto"/>
+              </a:rPr>
+              <a:t> Uma responsabilidade por imagem, com fronteira declarada.</a:t>
             </a:r>
           </a:p>
         </p:txBody>
@@ -26723,8 +26497,8 @@
         </p:nvSpPr>
         <p:spPr>
           <a:xfrm>
-            <a:off x="685800" y="3230118"/>
-            <a:ext cx="247650" cy="294437"/>
+            <a:off x="685800" y="3284220"/>
+            <a:ext cx="247650" cy="280416"/>
           </a:xfrm>
           <a:prstGeom prst="rect">
             <a:avLst/>
@@ -26743,7 +26517,7 @@
               </a:lnSpc>
             </a:pPr>
             <a:r>
-              <a:rPr sz="1450" b="1" i="0">
+              <a:rPr sz="1380" b="1" i="0">
                 <a:solidFill>
                   <a:srgbClr val="E94D1C"/>
                 </a:solidFill>
@@ -26762,7 +26536,7 @@
         </p:nvSpPr>
         <p:spPr>
           <a:xfrm>
-            <a:off x="971550" y="3220593"/>
+            <a:off x="971550" y="3274695"/>
             <a:ext cx="4857750" cy="95250"/>
           </a:xfrm>
           <a:prstGeom prst="rect">
@@ -26782,13 +26556,22 @@
               </a:lnSpc>
             </a:pPr>
             <a:r>
-              <a:rPr sz="1580" b="0" i="0">
+              <a:rPr sz="1500" b="1" i="0">
                 <a:solidFill>
                   <a:srgbClr val="1A1A1E"/>
                 </a:solidFill>
                 <a:latin typeface="Roboto"/>
               </a:rPr>
-              <a:t>Time sem integração contínua, que só ganha um passo de build a mais.</a:t>
+              <a:t>Compreensibilidade.</a:t>
+            </a:r>
+            <a:r>
+              <a:rPr sz="1500" b="0" i="0">
+                <a:solidFill>
+                  <a:srgbClr val="1A1A1E"/>
+                </a:solidFill>
+                <a:latin typeface="Roboto"/>
+              </a:rPr>
+              <a:t> O ambiente vira arquivo legível, versionado junto com o código.</a:t>
             </a:r>
           </a:p>
         </p:txBody>
@@ -26801,8 +26584,8 @@
         </p:nvSpPr>
         <p:spPr>
           <a:xfrm>
-            <a:off x="685800" y="4024884"/>
-            <a:ext cx="247650" cy="294437"/>
+            <a:off x="685800" y="4034790"/>
+            <a:ext cx="247650" cy="280416"/>
           </a:xfrm>
           <a:prstGeom prst="rect">
             <a:avLst/>
@@ -26821,7 +26604,7 @@
               </a:lnSpc>
             </a:pPr>
             <a:r>
-              <a:rPr sz="1450" b="1" i="0">
+              <a:rPr sz="1380" b="1" i="0">
                 <a:solidFill>
                   <a:srgbClr val="E94D1C"/>
                 </a:solidFill>
@@ -26840,7 +26623,7 @@
         </p:nvSpPr>
         <p:spPr>
           <a:xfrm>
-            <a:off x="971550" y="4015359"/>
+            <a:off x="971550" y="4025265"/>
             <a:ext cx="4857750" cy="95250"/>
           </a:xfrm>
           <a:prstGeom prst="rect">
@@ -26860,13 +26643,22 @@
               </a:lnSpc>
             </a:pPr>
             <a:r>
-              <a:rPr sz="1580" b="0" i="0">
+              <a:rPr sz="1500" b="1" i="0">
                 <a:solidFill>
                   <a:srgbClr val="1A1A1E"/>
                 </a:solidFill>
                 <a:latin typeface="Roboto"/>
               </a:rPr>
-              <a:t>Aplicação sensível a latência de cauda.</a:t>
+              <a:t>Extensibilidade.</a:t>
+            </a:r>
+            <a:r>
+              <a:rPr sz="1500" b="0" i="0">
+                <a:solidFill>
+                  <a:srgbClr val="1A1A1E"/>
+                </a:solidFill>
+                <a:latin typeface="Roboto"/>
+              </a:rPr>
+              <a:t> Trocar runtime ou banco é editar uma linha de arquivo.</a:t>
             </a:r>
           </a:p>
         </p:txBody>
@@ -26879,8 +26671,8 @@
         </p:nvSpPr>
         <p:spPr>
           <a:xfrm>
-            <a:off x="685800" y="4555617"/>
-            <a:ext cx="247650" cy="294437"/>
+            <a:off x="685800" y="4785360"/>
+            <a:ext cx="247650" cy="280416"/>
           </a:xfrm>
           <a:prstGeom prst="rect">
             <a:avLst/>
@@ -26899,7 +26691,7 @@
               </a:lnSpc>
             </a:pPr>
             <a:r>
-              <a:rPr sz="1450" b="1" i="0">
+              <a:rPr sz="1380" b="1" i="0">
                 <a:solidFill>
                   <a:srgbClr val="E94D1C"/>
                 </a:solidFill>
@@ -26918,7 +26710,7 @@
         </p:nvSpPr>
         <p:spPr>
           <a:xfrm>
-            <a:off x="971550" y="4546092"/>
+            <a:off x="971550" y="4775835"/>
             <a:ext cx="4857750" cy="95250"/>
           </a:xfrm>
           <a:prstGeom prst="rect">
@@ -26938,13 +26730,22 @@
               </a:lnSpc>
             </a:pPr>
             <a:r>
-              <a:rPr sz="1580" b="0" i="0">
+              <a:rPr sz="1500" b="1" i="0">
                 <a:solidFill>
                   <a:srgbClr val="1A1A1E"/>
                 </a:solidFill>
                 <a:latin typeface="Roboto"/>
               </a:rPr>
-              <a:t>Sistema dominado por estado.</a:t>
+              <a:t>Manutenibilidade.</a:t>
+            </a:r>
+            <a:r>
+              <a:rPr sz="1500" b="0" i="0">
+                <a:solidFill>
+                  <a:srgbClr val="1A1A1E"/>
+                </a:solidFill>
+                <a:latin typeface="Roboto"/>
+              </a:rPr>
+              <a:t> A mesma imagem atravessa notebook, pipeline e a demonstração funcional do T3.</a:t>
             </a:r>
           </a:p>
         </p:txBody>
@@ -26957,7 +26758,94 @@
         </p:nvSpPr>
         <p:spPr>
           <a:xfrm>
-            <a:off x="6362700" y="2194560"/>
+            <a:off x="685800" y="5535930"/>
+            <a:ext cx="247650" cy="280416"/>
+          </a:xfrm>
+          <a:prstGeom prst="rect">
+            <a:avLst/>
+          </a:prstGeom>
+          <a:noFill/>
+        </p:spPr>
+        <p:txBody>
+          <a:bodyPr wrap="square" lIns="0" rIns="0" tIns="0" bIns="0" anchor="t">
+            <a:spAutoFit/>
+          </a:bodyPr>
+          <a:lstStyle/>
+          <a:p>
+            <a:pPr algn="l">
+              <a:lnSpc>
+                <a:spcPct val="120000"/>
+              </a:lnSpc>
+            </a:pPr>
+            <a:r>
+              <a:rPr sz="1380" b="1" i="0">
+                <a:solidFill>
+                  <a:srgbClr val="E94D1C"/>
+                </a:solidFill>
+                <a:latin typeface="Roboto"/>
+              </a:rPr>
+              <a:t>//</a:t>
+            </a:r>
+          </a:p>
+        </p:txBody>
+      </p:sp>
+      <p:sp>
+        <p:nvSpPr>
+          <p:cNvPr id="16" name="TextBox 15"/>
+          <p:cNvSpPr txBox="1"/>
+          <p:nvPr/>
+        </p:nvSpPr>
+        <p:spPr>
+          <a:xfrm>
+            <a:off x="971550" y="5526405"/>
+            <a:ext cx="4857750" cy="95250"/>
+          </a:xfrm>
+          <a:prstGeom prst="rect">
+            <a:avLst/>
+          </a:prstGeom>
+          <a:noFill/>
+        </p:spPr>
+        <p:txBody>
+          <a:bodyPr wrap="square" lIns="0" rIns="0" tIns="0" bIns="0" anchor="t">
+            <a:spAutoFit/>
+          </a:bodyPr>
+          <a:lstStyle/>
+          <a:p>
+            <a:pPr algn="l">
+              <a:lnSpc>
+                <a:spcPct val="130000"/>
+              </a:lnSpc>
+            </a:pPr>
+            <a:r>
+              <a:rPr sz="1500" b="1" i="0">
+                <a:solidFill>
+                  <a:srgbClr val="1A1A1E"/>
+                </a:solidFill>
+                <a:latin typeface="Roboto"/>
+              </a:rPr>
+              <a:t>Escalabilidade,</a:t>
+            </a:r>
+            <a:r>
+              <a:rPr sz="1500" b="0" i="0">
+                <a:solidFill>
+                  <a:srgbClr val="1A1A1E"/>
+                </a:solidFill>
+                <a:latin typeface="Roboto"/>
+              </a:rPr>
+              <a:t> de forma seletiva, e isso impõe que a aplicação seja mesmo sem estado.</a:t>
+            </a:r>
+          </a:p>
+        </p:txBody>
+      </p:sp>
+      <p:sp>
+        <p:nvSpPr>
+          <p:cNvPr id="17" name="TextBox 16"/>
+          <p:cNvSpPr txBox="1"/>
+          <p:nvPr/>
+        </p:nvSpPr>
+        <p:spPr>
+          <a:xfrm>
+            <a:off x="6362700" y="2028825"/>
             <a:ext cx="5143500" cy="182880"/>
           </a:xfrm>
           <a:prstGeom prst="rect">
@@ -26983,20 +26871,20 @@
                 </a:solidFill>
                 <a:latin typeface="Roboto"/>
               </a:rPr>
-              <a:t>ONDE NÓS ESTAMOS</a:t>
-            </a:r>
-          </a:p>
-        </p:txBody>
-      </p:sp>
-      <p:sp>
-        <p:nvSpPr>
-          <p:cNvPr id="16" name="Rectangle 15"/>
+              <a:t>CUSTA</a:t>
+            </a:r>
+          </a:p>
+        </p:txBody>
+      </p:sp>
+      <p:sp>
+        <p:nvSpPr>
+          <p:cNvPr id="18" name="Rectangle 17"/>
           <p:cNvSpPr/>
           <p:nvPr/>
         </p:nvSpPr>
         <p:spPr>
           <a:xfrm>
-            <a:off x="6362700" y="2404110"/>
+            <a:off x="6362700" y="2238375"/>
             <a:ext cx="419100" cy="28575"/>
           </a:xfrm>
           <a:prstGeom prst="rect">
@@ -27034,14 +26922,14 @@
       </p:sp>
       <p:sp>
         <p:nvSpPr>
-          <p:cNvPr id="17" name="TextBox 16"/>
-          <p:cNvSpPr txBox="1"/>
-          <p:nvPr/>
-        </p:nvSpPr>
-        <p:spPr>
-          <a:xfrm>
-            <a:off x="6362700" y="2699385"/>
-            <a:ext cx="247650" cy="294437"/>
+          <p:cNvPr id="19" name="TextBox 18"/>
+          <p:cNvSpPr txBox="1"/>
+          <p:nvPr/>
+        </p:nvSpPr>
+        <p:spPr>
+          <a:xfrm>
+            <a:off x="6362700" y="2533650"/>
+            <a:ext cx="247650" cy="280416"/>
           </a:xfrm>
           <a:prstGeom prst="rect">
             <a:avLst/>
@@ -27060,7 +26948,7 @@
               </a:lnSpc>
             </a:pPr>
             <a:r>
-              <a:rPr sz="1450" b="1" i="0">
+              <a:rPr sz="1380" b="1" i="0">
                 <a:solidFill>
                   <a:srgbClr val="E94D1C"/>
                 </a:solidFill>
@@ -27073,13 +26961,13 @@
       </p:sp>
       <p:sp>
         <p:nvSpPr>
-          <p:cNvPr id="18" name="TextBox 17"/>
-          <p:cNvSpPr txBox="1"/>
-          <p:nvPr/>
-        </p:nvSpPr>
-        <p:spPr>
-          <a:xfrm>
-            <a:off x="6648450" y="2689860"/>
+          <p:cNvPr id="20" name="TextBox 19"/>
+          <p:cNvSpPr txBox="1"/>
+          <p:nvPr/>
+        </p:nvSpPr>
+        <p:spPr>
+          <a:xfrm>
+            <a:off x="6648450" y="2524125"/>
             <a:ext cx="4857750" cy="95250"/>
           </a:xfrm>
           <a:prstGeom prst="rect">
@@ -27099,27 +26987,36 @@
               </a:lnSpc>
             </a:pPr>
             <a:r>
-              <a:rPr sz="1580" b="0" i="0">
+              <a:rPr sz="1500" b="1" i="0">
                 <a:solidFill>
                   <a:srgbClr val="1A1A1E"/>
                 </a:solidFill>
                 <a:latin typeface="Roboto"/>
               </a:rPr>
-              <a:t>Não temos integração contínua definida nem hospedagem decidida, então dois dos critérios ao lado se aplicam a nós.</a:t>
-            </a:r>
-          </a:p>
-        </p:txBody>
-      </p:sp>
-      <p:sp>
-        <p:nvSpPr>
-          <p:cNvPr id="19" name="TextBox 18"/>
-          <p:cNvSpPr txBox="1"/>
-          <p:nvPr/>
-        </p:nvSpPr>
-        <p:spPr>
-          <a:xfrm>
-            <a:off x="6362700" y="3758184"/>
-            <a:ext cx="247650" cy="294437"/>
+              <a:t>Segurança.</a:t>
+            </a:r>
+            <a:r>
+              <a:rPr sz="1500" b="0" i="0">
+                <a:solidFill>
+                  <a:srgbClr val="1A1A1E"/>
+                </a:solidFill>
+                <a:latin typeface="Roboto"/>
+              </a:rPr>
+              <a:t> Ganha isolamento, e herda uma superfície nova: imagem base e privilégio de execução.</a:t>
+            </a:r>
+          </a:p>
+        </p:txBody>
+      </p:sp>
+      <p:sp>
+        <p:nvSpPr>
+          <p:cNvPr id="21" name="TextBox 20"/>
+          <p:cNvSpPr txBox="1"/>
+          <p:nvPr/>
+        </p:nvSpPr>
+        <p:spPr>
+          <a:xfrm>
+            <a:off x="6362700" y="3284220"/>
+            <a:ext cx="247650" cy="280416"/>
           </a:xfrm>
           <a:prstGeom prst="rect">
             <a:avLst/>
@@ -27138,7 +27035,7 @@
               </a:lnSpc>
             </a:pPr>
             <a:r>
-              <a:rPr sz="1450" b="1" i="0">
+              <a:rPr sz="1380" b="1" i="0">
                 <a:solidFill>
                   <a:srgbClr val="E94D1C"/>
                 </a:solidFill>
@@ -27151,13 +27048,13 @@
       </p:sp>
       <p:sp>
         <p:nvSpPr>
-          <p:cNvPr id="20" name="TextBox 19"/>
-          <p:cNvSpPr txBox="1"/>
-          <p:nvPr/>
-        </p:nvSpPr>
-        <p:spPr>
-          <a:xfrm>
-            <a:off x="6648450" y="3748659"/>
+          <p:cNvPr id="22" name="TextBox 21"/>
+          <p:cNvSpPr txBox="1"/>
+          <p:nvPr/>
+        </p:nvSpPr>
+        <p:spPr>
+          <a:xfrm>
+            <a:off x="6648450" y="3274695"/>
             <a:ext cx="4857750" cy="95250"/>
           </a:xfrm>
           <a:prstGeom prst="rect">
@@ -27177,91 +27074,22 @@
               </a:lnSpc>
             </a:pPr>
             <a:r>
-              <a:rPr sz="1580" b="0" i="0">
+              <a:rPr sz="1500" b="1" i="0">
                 <a:solidFill>
                   <a:srgbClr val="1A1A1E"/>
                 </a:solidFill>
                 <a:latin typeface="Roboto"/>
               </a:rPr>
-              <a:t>O motivo que resta é o ambiente igual para quatro integrantes com stacks diferentes, com o banco rodando sem instalação local, antes de escrever a primeira linha.</a:t>
-            </a:r>
-          </a:p>
-        </p:txBody>
-      </p:sp>
-      <p:sp>
-        <p:nvSpPr>
-          <p:cNvPr id="21" name="TextBox 20"/>
-          <p:cNvSpPr txBox="1"/>
-          <p:nvPr/>
-        </p:nvSpPr>
-        <p:spPr>
-          <a:xfrm>
-            <a:off x="6362700" y="5081016"/>
-            <a:ext cx="247650" cy="294437"/>
-          </a:xfrm>
-          <a:prstGeom prst="rect">
-            <a:avLst/>
-          </a:prstGeom>
-          <a:noFill/>
-        </p:spPr>
-        <p:txBody>
-          <a:bodyPr wrap="square" lIns="0" rIns="0" tIns="0" bIns="0" anchor="t">
-            <a:spAutoFit/>
-          </a:bodyPr>
-          <a:lstStyle/>
-          <a:p>
-            <a:pPr algn="l">
-              <a:lnSpc>
-                <a:spcPct val="120000"/>
-              </a:lnSpc>
-            </a:pPr>
-            <a:r>
-              <a:rPr sz="1450" b="1" i="0">
-                <a:solidFill>
-                  <a:srgbClr val="E94D1C"/>
-                </a:solidFill>
-                <a:latin typeface="Roboto"/>
-              </a:rPr>
-              <a:t>//</a:t>
-            </a:r>
-          </a:p>
-        </p:txBody>
-      </p:sp>
-      <p:sp>
-        <p:nvSpPr>
-          <p:cNvPr id="22" name="TextBox 21"/>
-          <p:cNvSpPr txBox="1"/>
-          <p:nvPr/>
-        </p:nvSpPr>
-        <p:spPr>
-          <a:xfrm>
-            <a:off x="6648450" y="5071491"/>
-            <a:ext cx="4857750" cy="95250"/>
-          </a:xfrm>
-          <a:prstGeom prst="rect">
-            <a:avLst/>
-          </a:prstGeom>
-          <a:noFill/>
-        </p:spPr>
-        <p:txBody>
-          <a:bodyPr wrap="square" lIns="0" rIns="0" tIns="0" bIns="0" anchor="t">
-            <a:spAutoFit/>
-          </a:bodyPr>
-          <a:lstStyle/>
-          <a:p>
-            <a:pPr algn="l">
-              <a:lnSpc>
-                <a:spcPct val="130000"/>
-              </a:lnSpc>
-            </a:pPr>
-            <a:r>
-              <a:rPr sz="1580" b="0" i="0">
+              <a:t>Desempenho.</a:t>
+            </a:r>
+            <a:r>
+              <a:rPr sz="1500" b="0" i="0">
                 <a:solidFill>
                   <a:srgbClr val="1A1A1E"/>
                 </a:solidFill>
                 <a:latin typeface="Roboto"/>
               </a:rPr>
-              <a:t>Compose é de host único. O MVP cabe num host. Kubernetes entraria com múltiplos nós, e é tema de outro grupo.</a:t>
+              <a:t> Principalmente I/O nas máquinas Windows. A Aula 03 já avisa que camada extra prejudica desempenho.</a:t>
             </a:r>
           </a:p>
         </p:txBody>
@@ -27428,7 +27256,7 @@
                 </a:solidFill>
                 <a:latin typeface="Roboto"/>
               </a:rPr>
-              <a:t>GANHO E CUSTO</a:t>
+              <a:t>RECOMENDAÇÃO PARA O ADR #63</a:t>
             </a:r>
           </a:p>
         </p:txBody>
@@ -27461,29 +27289,13 @@
               </a:lnSpc>
             </a:pPr>
             <a:r>
-              <a:rPr sz="2550" b="1" i="0">
+              <a:rPr sz="3000" b="1" i="0">
                 <a:solidFill>
                   <a:srgbClr val="21049A"/>
                 </a:solidFill>
                 <a:latin typeface="Roboto"/>
               </a:rPr>
-              <a:t>Efeito nos quatro atributos</a:t>
-            </a:r>
-          </a:p>
-          <a:p>
-            <a:pPr>
-              <a:lnSpc>
-                <a:spcPct val="104000"/>
-              </a:lnSpc>
-            </a:pPr>
-            <a:r>
-              <a:rPr sz="2550" b="1" i="0">
-                <a:solidFill>
-                  <a:srgbClr val="21049A"/>
-                </a:solidFill>
-                <a:latin typeface="Roboto"/>
-              </a:rPr>
-              <a:t>das Questões Norteadoras</a:t>
+              <a:t>Recomendação do grupo</a:t>
             </a:r>
           </a:p>
         </p:txBody>
@@ -27496,8 +27308,8 @@
         </p:nvSpPr>
         <p:spPr>
           <a:xfrm>
-            <a:off x="685800" y="2854642"/>
-            <a:ext cx="5143500" cy="182880"/>
+            <a:off x="685800" y="3042285"/>
+            <a:ext cx="247650" cy="308458"/>
           </a:xfrm>
           <a:prstGeom prst="rect">
             <a:avLst/>
@@ -27516,373 +27328,224 @@
               </a:lnSpc>
             </a:pPr>
             <a:r>
-              <a:rPr sz="900" b="1" i="0" spc="120">
-                <a:solidFill>
-                  <a:srgbClr val="21049A"/>
-                </a:solidFill>
-                <a:latin typeface="Roboto"/>
-              </a:rPr>
-              <a:t>GANHA</a:t>
-            </a:r>
-          </a:p>
-        </p:txBody>
-      </p:sp>
-      <p:sp>
-        <p:nvSpPr>
-          <p:cNvPr id="6" name="Rectangle 5"/>
+              <a:rPr sz="1520" b="1" i="0">
+                <a:solidFill>
+                  <a:srgbClr val="E94D1C"/>
+                </a:solidFill>
+                <a:latin typeface="Roboto"/>
+              </a:rPr>
+              <a:t>//</a:t>
+            </a:r>
+          </a:p>
+        </p:txBody>
+      </p:sp>
+      <p:sp>
+        <p:nvSpPr>
+          <p:cNvPr id="6" name="TextBox 5"/>
+          <p:cNvSpPr txBox="1"/>
+          <p:nvPr/>
+        </p:nvSpPr>
+        <p:spPr>
+          <a:xfrm>
+            <a:off x="971550" y="3032760"/>
+            <a:ext cx="7677150" cy="95250"/>
+          </a:xfrm>
+          <a:prstGeom prst="rect">
+            <a:avLst/>
+          </a:prstGeom>
+          <a:noFill/>
+        </p:spPr>
+        <p:txBody>
+          <a:bodyPr wrap="square" lIns="0" rIns="0" tIns="0" bIns="0" anchor="t">
+            <a:spAutoFit/>
+          </a:bodyPr>
+          <a:lstStyle/>
+          <a:p>
+            <a:pPr algn="l">
+              <a:lnSpc>
+                <a:spcPct val="130000"/>
+              </a:lnSpc>
+            </a:pPr>
+            <a:r>
+              <a:rPr sz="1650" b="0" i="0">
+                <a:solidFill>
+                  <a:srgbClr val="1A1A1E"/>
+                </a:solidFill>
+                <a:latin typeface="Roboto"/>
+              </a:rPr>
+              <a:t>Adotamos conteinerização como estratégia de empacotamento e de ambiente de desenvolvimento, registrada como troca.</a:t>
+            </a:r>
+          </a:p>
+        </p:txBody>
+      </p:sp>
+      <p:sp>
+        <p:nvSpPr>
+          <p:cNvPr id="7" name="TextBox 6"/>
+          <p:cNvSpPr txBox="1"/>
+          <p:nvPr/>
+        </p:nvSpPr>
+        <p:spPr>
+          <a:xfrm>
+            <a:off x="685800" y="3881247"/>
+            <a:ext cx="247650" cy="308458"/>
+          </a:xfrm>
+          <a:prstGeom prst="rect">
+            <a:avLst/>
+          </a:prstGeom>
+          <a:noFill/>
+        </p:spPr>
+        <p:txBody>
+          <a:bodyPr wrap="square" lIns="0" rIns="0" tIns="0" bIns="0" anchor="t">
+            <a:spAutoFit/>
+          </a:bodyPr>
+          <a:lstStyle/>
+          <a:p>
+            <a:pPr algn="l">
+              <a:lnSpc>
+                <a:spcPct val="120000"/>
+              </a:lnSpc>
+            </a:pPr>
+            <a:r>
+              <a:rPr sz="1520" b="1" i="0">
+                <a:solidFill>
+                  <a:srgbClr val="E94D1C"/>
+                </a:solidFill>
+                <a:latin typeface="Roboto"/>
+              </a:rPr>
+              <a:t>//</a:t>
+            </a:r>
+          </a:p>
+        </p:txBody>
+      </p:sp>
+      <p:sp>
+        <p:nvSpPr>
+          <p:cNvPr id="8" name="TextBox 7"/>
+          <p:cNvSpPr txBox="1"/>
+          <p:nvPr/>
+        </p:nvSpPr>
+        <p:spPr>
+          <a:xfrm>
+            <a:off x="971550" y="3871722"/>
+            <a:ext cx="7677150" cy="95250"/>
+          </a:xfrm>
+          <a:prstGeom prst="rect">
+            <a:avLst/>
+          </a:prstGeom>
+          <a:noFill/>
+        </p:spPr>
+        <p:txBody>
+          <a:bodyPr wrap="square" lIns="0" rIns="0" tIns="0" bIns="0" anchor="t">
+            <a:spAutoFit/>
+          </a:bodyPr>
+          <a:lstStyle/>
+          <a:p>
+            <a:pPr algn="l">
+              <a:lnSpc>
+                <a:spcPct val="130000"/>
+              </a:lnSpc>
+            </a:pPr>
+            <a:r>
+              <a:rPr sz="1650" b="0" i="0">
+                <a:solidFill>
+                  <a:srgbClr val="1A1A1E"/>
+                </a:solidFill>
+                <a:latin typeface="Roboto"/>
+              </a:rPr>
+              <a:t>O #60 deixa de ser caixa genérica e passa a ter um arquivo correspondente que roda, e esse arquivo vira artefato do repositório.</a:t>
+            </a:r>
+          </a:p>
+        </p:txBody>
+      </p:sp>
+      <p:sp>
+        <p:nvSpPr>
+          <p:cNvPr id="9" name="TextBox 8"/>
+          <p:cNvSpPr txBox="1"/>
+          <p:nvPr/>
+        </p:nvSpPr>
+        <p:spPr>
+          <a:xfrm>
+            <a:off x="685800" y="4720209"/>
+            <a:ext cx="247650" cy="308458"/>
+          </a:xfrm>
+          <a:prstGeom prst="rect">
+            <a:avLst/>
+          </a:prstGeom>
+          <a:noFill/>
+        </p:spPr>
+        <p:txBody>
+          <a:bodyPr wrap="square" lIns="0" rIns="0" tIns="0" bIns="0" anchor="t">
+            <a:spAutoFit/>
+          </a:bodyPr>
+          <a:lstStyle/>
+          <a:p>
+            <a:pPr algn="l">
+              <a:lnSpc>
+                <a:spcPct val="120000"/>
+              </a:lnSpc>
+            </a:pPr>
+            <a:r>
+              <a:rPr sz="1520" b="1" i="0">
+                <a:solidFill>
+                  <a:srgbClr val="E94D1C"/>
+                </a:solidFill>
+                <a:latin typeface="Roboto"/>
+              </a:rPr>
+              <a:t>//</a:t>
+            </a:r>
+          </a:p>
+        </p:txBody>
+      </p:sp>
+      <p:sp>
+        <p:nvSpPr>
+          <p:cNvPr id="10" name="TextBox 9"/>
+          <p:cNvSpPr txBox="1"/>
+          <p:nvPr/>
+        </p:nvSpPr>
+        <p:spPr>
+          <a:xfrm>
+            <a:off x="971550" y="4710684"/>
+            <a:ext cx="7677150" cy="95250"/>
+          </a:xfrm>
+          <a:prstGeom prst="rect">
+            <a:avLst/>
+          </a:prstGeom>
+          <a:noFill/>
+        </p:spPr>
+        <p:txBody>
+          <a:bodyPr wrap="square" lIns="0" rIns="0" tIns="0" bIns="0" anchor="t">
+            <a:spAutoFit/>
+          </a:bodyPr>
+          <a:lstStyle/>
+          <a:p>
+            <a:pPr algn="l">
+              <a:lnSpc>
+                <a:spcPct val="130000"/>
+              </a:lnSpc>
+            </a:pPr>
+            <a:r>
+              <a:rPr sz="1650" b="0" i="0">
+                <a:solidFill>
+                  <a:srgbClr val="1A1A1E"/>
+                </a:solidFill>
+                <a:latin typeface="Roboto"/>
+              </a:rPr>
+              <a:t>A stack ainda não está decidida, e o ADR #63 é onde ela será registrada.</a:t>
+            </a:r>
+          </a:p>
+        </p:txBody>
+      </p:sp>
+      <p:sp>
+        <p:nvSpPr>
+          <p:cNvPr id="11" name="Chevron 10"/>
           <p:cNvSpPr/>
           <p:nvPr/>
         </p:nvSpPr>
         <p:spPr>
           <a:xfrm>
-            <a:off x="685800" y="3064192"/>
-            <a:ext cx="419100" cy="28575"/>
-          </a:xfrm>
-          <a:prstGeom prst="rect">
-            <a:avLst/>
-          </a:prstGeom>
-          <a:solidFill>
-            <a:srgbClr val="21049A"/>
-          </a:solidFill>
-          <a:ln>
-            <a:noFill/>
-          </a:ln>
-          <a:effectLst/>
-        </p:spPr>
-        <p:style>
-          <a:lnRef idx="1">
-            <a:schemeClr val="accent1"/>
-          </a:lnRef>
-          <a:fillRef idx="3">
-            <a:schemeClr val="accent1"/>
-          </a:fillRef>
-          <a:effectRef idx="2">
-            <a:schemeClr val="accent1"/>
-          </a:effectRef>
-          <a:fontRef idx="minor">
-            <a:schemeClr val="lt1"/>
-          </a:fontRef>
-        </p:style>
-        <p:txBody>
-          <a:bodyPr rtlCol="0" anchor="ctr" wrap="square" lIns="0" rIns="0" tIns="0" bIns="0"/>
-          <a:lstStyle/>
-          <a:p>
-            <a:pPr algn="ctr"/>
-          </a:p>
-        </p:txBody>
-      </p:sp>
-      <p:sp>
-        <p:nvSpPr>
-          <p:cNvPr id="7" name="TextBox 6"/>
-          <p:cNvSpPr txBox="1"/>
-          <p:nvPr/>
-        </p:nvSpPr>
-        <p:spPr>
-          <a:xfrm>
-            <a:off x="685800" y="3359468"/>
-            <a:ext cx="247650" cy="294437"/>
-          </a:xfrm>
-          <a:prstGeom prst="rect">
-            <a:avLst/>
-          </a:prstGeom>
-          <a:noFill/>
-        </p:spPr>
-        <p:txBody>
-          <a:bodyPr wrap="square" lIns="0" rIns="0" tIns="0" bIns="0" anchor="t">
-            <a:spAutoFit/>
-          </a:bodyPr>
-          <a:lstStyle/>
-          <a:p>
-            <a:pPr algn="l">
-              <a:lnSpc>
-                <a:spcPct val="120000"/>
-              </a:lnSpc>
-            </a:pPr>
-            <a:r>
-              <a:rPr sz="1450" b="1" i="0">
-                <a:solidFill>
-                  <a:srgbClr val="E94D1C"/>
-                </a:solidFill>
-                <a:latin typeface="Roboto"/>
-              </a:rPr>
-              <a:t>//</a:t>
-            </a:r>
-          </a:p>
-        </p:txBody>
-      </p:sp>
-      <p:sp>
-        <p:nvSpPr>
-          <p:cNvPr id="8" name="TextBox 7"/>
-          <p:cNvSpPr txBox="1"/>
-          <p:nvPr/>
-        </p:nvSpPr>
-        <p:spPr>
-          <a:xfrm>
-            <a:off x="971550" y="3349942"/>
-            <a:ext cx="4857750" cy="95250"/>
-          </a:xfrm>
-          <a:prstGeom prst="rect">
-            <a:avLst/>
-          </a:prstGeom>
-          <a:noFill/>
-        </p:spPr>
-        <p:txBody>
-          <a:bodyPr wrap="square" lIns="0" rIns="0" tIns="0" bIns="0" anchor="t">
-            <a:spAutoFit/>
-          </a:bodyPr>
-          <a:lstStyle/>
-          <a:p>
-            <a:pPr algn="l">
-              <a:lnSpc>
-                <a:spcPct val="130000"/>
-              </a:lnSpc>
-            </a:pPr>
-            <a:r>
-              <a:rPr sz="1580" b="1" i="0">
-                <a:solidFill>
-                  <a:srgbClr val="1A1A1E"/>
-                </a:solidFill>
-                <a:latin typeface="Roboto"/>
-              </a:rPr>
-              <a:t>Manutenibilidade.</a:t>
-            </a:r>
-            <a:r>
-              <a:rPr sz="1580" b="0" i="0">
-                <a:solidFill>
-                  <a:srgbClr val="1A1A1E"/>
-                </a:solidFill>
-                <a:latin typeface="Roboto"/>
-              </a:rPr>
-              <a:t> O ambiente passa a ser versionado junto com o código.</a:t>
-            </a:r>
-          </a:p>
-        </p:txBody>
-      </p:sp>
-      <p:sp>
-        <p:nvSpPr>
-          <p:cNvPr id="9" name="TextBox 8"/>
-          <p:cNvSpPr txBox="1"/>
-          <p:nvPr/>
-        </p:nvSpPr>
-        <p:spPr>
-          <a:xfrm>
-            <a:off x="685800" y="4154234"/>
-            <a:ext cx="247650" cy="294437"/>
-          </a:xfrm>
-          <a:prstGeom prst="rect">
-            <a:avLst/>
-          </a:prstGeom>
-          <a:noFill/>
-        </p:spPr>
-        <p:txBody>
-          <a:bodyPr wrap="square" lIns="0" rIns="0" tIns="0" bIns="0" anchor="t">
-            <a:spAutoFit/>
-          </a:bodyPr>
-          <a:lstStyle/>
-          <a:p>
-            <a:pPr algn="l">
-              <a:lnSpc>
-                <a:spcPct val="120000"/>
-              </a:lnSpc>
-            </a:pPr>
-            <a:r>
-              <a:rPr sz="1450" b="1" i="0">
-                <a:solidFill>
-                  <a:srgbClr val="E94D1C"/>
-                </a:solidFill>
-                <a:latin typeface="Roboto"/>
-              </a:rPr>
-              <a:t>//</a:t>
-            </a:r>
-          </a:p>
-        </p:txBody>
-      </p:sp>
-      <p:sp>
-        <p:nvSpPr>
-          <p:cNvPr id="10" name="TextBox 9"/>
-          <p:cNvSpPr txBox="1"/>
-          <p:nvPr/>
-        </p:nvSpPr>
-        <p:spPr>
-          <a:xfrm>
-            <a:off x="971550" y="4144708"/>
-            <a:ext cx="4857750" cy="95250"/>
-          </a:xfrm>
-          <a:prstGeom prst="rect">
-            <a:avLst/>
-          </a:prstGeom>
-          <a:noFill/>
-        </p:spPr>
-        <p:txBody>
-          <a:bodyPr wrap="square" lIns="0" rIns="0" tIns="0" bIns="0" anchor="t">
-            <a:spAutoFit/>
-          </a:bodyPr>
-          <a:lstStyle/>
-          <a:p>
-            <a:pPr algn="l">
-              <a:lnSpc>
-                <a:spcPct val="130000"/>
-              </a:lnSpc>
-            </a:pPr>
-            <a:r>
-              <a:rPr sz="1580" b="1" i="0">
-                <a:solidFill>
-                  <a:srgbClr val="1A1A1E"/>
-                </a:solidFill>
-                <a:latin typeface="Roboto"/>
-              </a:rPr>
-              <a:t>Escalabilidade,</a:t>
-            </a:r>
-            <a:r>
-              <a:rPr sz="1580" b="0" i="0">
-                <a:solidFill>
-                  <a:srgbClr val="1A1A1E"/>
-                </a:solidFill>
-                <a:latin typeface="Roboto"/>
-              </a:rPr>
-              <a:t> de forma seletiva, e isso impõe que a aplicação seja mesmo sem estado.</a:t>
-            </a:r>
-          </a:p>
-        </p:txBody>
-      </p:sp>
-      <p:sp>
-        <p:nvSpPr>
-          <p:cNvPr id="11" name="TextBox 10"/>
-          <p:cNvSpPr txBox="1"/>
-          <p:nvPr/>
-        </p:nvSpPr>
-        <p:spPr>
-          <a:xfrm>
-            <a:off x="685800" y="4948999"/>
-            <a:ext cx="247650" cy="294437"/>
-          </a:xfrm>
-          <a:prstGeom prst="rect">
-            <a:avLst/>
-          </a:prstGeom>
-          <a:noFill/>
-        </p:spPr>
-        <p:txBody>
-          <a:bodyPr wrap="square" lIns="0" rIns="0" tIns="0" bIns="0" anchor="t">
-            <a:spAutoFit/>
-          </a:bodyPr>
-          <a:lstStyle/>
-          <a:p>
-            <a:pPr algn="l">
-              <a:lnSpc>
-                <a:spcPct val="120000"/>
-              </a:lnSpc>
-            </a:pPr>
-            <a:r>
-              <a:rPr sz="1450" b="1" i="0">
-                <a:solidFill>
-                  <a:srgbClr val="E94D1C"/>
-                </a:solidFill>
-                <a:latin typeface="Roboto"/>
-              </a:rPr>
-              <a:t>//</a:t>
-            </a:r>
-          </a:p>
-        </p:txBody>
-      </p:sp>
-      <p:sp>
-        <p:nvSpPr>
-          <p:cNvPr id="12" name="TextBox 11"/>
-          <p:cNvSpPr txBox="1"/>
-          <p:nvPr/>
-        </p:nvSpPr>
-        <p:spPr>
-          <a:xfrm>
-            <a:off x="971550" y="4939474"/>
-            <a:ext cx="4857750" cy="95250"/>
-          </a:xfrm>
-          <a:prstGeom prst="rect">
-            <a:avLst/>
-          </a:prstGeom>
-          <a:noFill/>
-        </p:spPr>
-        <p:txBody>
-          <a:bodyPr wrap="square" lIns="0" rIns="0" tIns="0" bIns="0" anchor="t">
-            <a:spAutoFit/>
-          </a:bodyPr>
-          <a:lstStyle/>
-          <a:p>
-            <a:pPr algn="l">
-              <a:lnSpc>
-                <a:spcPct val="130000"/>
-              </a:lnSpc>
-            </a:pPr>
-            <a:r>
-              <a:rPr sz="1580" b="1" i="0">
-                <a:solidFill>
-                  <a:srgbClr val="1A1A1E"/>
-                </a:solidFill>
-                <a:latin typeface="Roboto"/>
-              </a:rPr>
-              <a:t>Segurança.</a:t>
-            </a:r>
-            <a:r>
-              <a:rPr sz="1580" b="0" i="0">
-                <a:solidFill>
-                  <a:srgbClr val="1A1A1E"/>
-                </a:solidFill>
-                <a:latin typeface="Roboto"/>
-              </a:rPr>
-              <a:t> Ganha isolamento.</a:t>
-            </a:r>
-          </a:p>
-        </p:txBody>
-      </p:sp>
-      <p:sp>
-        <p:nvSpPr>
-          <p:cNvPr id="13" name="TextBox 12"/>
-          <p:cNvSpPr txBox="1"/>
-          <p:nvPr/>
-        </p:nvSpPr>
-        <p:spPr>
-          <a:xfrm>
-            <a:off x="6362700" y="2854642"/>
-            <a:ext cx="5143500" cy="182880"/>
-          </a:xfrm>
-          <a:prstGeom prst="rect">
-            <a:avLst/>
-          </a:prstGeom>
-          <a:noFill/>
-        </p:spPr>
-        <p:txBody>
-          <a:bodyPr wrap="square" lIns="0" rIns="0" tIns="0" bIns="0" anchor="t">
-            <a:spAutoFit/>
-          </a:bodyPr>
-          <a:lstStyle/>
-          <a:p>
-            <a:pPr algn="l">
-              <a:lnSpc>
-                <a:spcPct val="120000"/>
-              </a:lnSpc>
-            </a:pPr>
-            <a:r>
-              <a:rPr sz="900" b="1" i="0" spc="120">
-                <a:solidFill>
-                  <a:srgbClr val="E94D1C"/>
-                </a:solidFill>
-                <a:latin typeface="Roboto"/>
-              </a:rPr>
-              <a:t>CUSTA</a:t>
-            </a:r>
-          </a:p>
-        </p:txBody>
-      </p:sp>
-      <p:sp>
-        <p:nvSpPr>
-          <p:cNvPr id="14" name="Rectangle 13"/>
-          <p:cNvSpPr/>
-          <p:nvPr/>
-        </p:nvSpPr>
-        <p:spPr>
-          <a:xfrm>
-            <a:off x="6362700" y="3064192"/>
-            <a:ext cx="419100" cy="28575"/>
-          </a:xfrm>
-          <a:prstGeom prst="rect">
+            <a:off x="9124950" y="3042285"/>
+            <a:ext cx="142875" cy="123825"/>
+          </a:xfrm>
+          <a:prstGeom prst="chevron">
             <a:avLst/>
           </a:prstGeom>
           <a:solidFill>
@@ -27908,6 +27571,89 @@
           </a:fontRef>
         </p:style>
         <p:txBody>
+          <a:bodyPr rtlCol="0" anchor="ctr"/>
+          <a:lstStyle/>
+          <a:p>
+            <a:pPr algn="ctr"/>
+          </a:p>
+        </p:txBody>
+      </p:sp>
+      <p:sp>
+        <p:nvSpPr>
+          <p:cNvPr id="12" name="TextBox 11"/>
+          <p:cNvSpPr txBox="1"/>
+          <p:nvPr/>
+        </p:nvSpPr>
+        <p:spPr>
+          <a:xfrm>
+            <a:off x="9372600" y="3042285"/>
+            <a:ext cx="2133600" cy="182880"/>
+          </a:xfrm>
+          <a:prstGeom prst="rect">
+            <a:avLst/>
+          </a:prstGeom>
+          <a:noFill/>
+        </p:spPr>
+        <p:txBody>
+          <a:bodyPr wrap="square" lIns="0" rIns="0" tIns="0" bIns="0" anchor="t">
+            <a:spAutoFit/>
+          </a:bodyPr>
+          <a:lstStyle/>
+          <a:p>
+            <a:pPr algn="l">
+              <a:lnSpc>
+                <a:spcPct val="120000"/>
+              </a:lnSpc>
+            </a:pPr>
+            <a:r>
+              <a:rPr sz="900" b="1" i="0" spc="120">
+                <a:solidFill>
+                  <a:srgbClr val="E94D1C"/>
+                </a:solidFill>
+                <a:latin typeface="Roboto"/>
+              </a:rPr>
+              <a:t>PRÓXIMO PASSO</a:t>
+            </a:r>
+          </a:p>
+        </p:txBody>
+      </p:sp>
+      <p:sp>
+        <p:nvSpPr>
+          <p:cNvPr id="13" name="Rectangle 12"/>
+          <p:cNvSpPr/>
+          <p:nvPr/>
+        </p:nvSpPr>
+        <p:spPr>
+          <a:xfrm>
+            <a:off x="9124950" y="3318510"/>
+            <a:ext cx="38100" cy="1005840"/>
+          </a:xfrm>
+          <a:prstGeom prst="rect">
+            <a:avLst/>
+          </a:prstGeom>
+          <a:solidFill>
+            <a:srgbClr val="E94D1C"/>
+          </a:solidFill>
+          <a:ln>
+            <a:noFill/>
+          </a:ln>
+          <a:effectLst/>
+        </p:spPr>
+        <p:style>
+          <a:lnRef idx="1">
+            <a:schemeClr val="accent1"/>
+          </a:lnRef>
+          <a:fillRef idx="3">
+            <a:schemeClr val="accent1"/>
+          </a:fillRef>
+          <a:effectRef idx="2">
+            <a:schemeClr val="accent1"/>
+          </a:effectRef>
+          <a:fontRef idx="minor">
+            <a:schemeClr val="lt1"/>
+          </a:fontRef>
+        </p:style>
+        <p:txBody>
           <a:bodyPr rtlCol="0" anchor="ctr" wrap="square" lIns="0" rIns="0" tIns="0" bIns="0"/>
           <a:lstStyle/>
           <a:p>
@@ -27917,181 +27663,49 @@
       </p:sp>
       <p:sp>
         <p:nvSpPr>
+          <p:cNvPr id="14" name="TextBox 13"/>
+          <p:cNvSpPr txBox="1"/>
+          <p:nvPr/>
+        </p:nvSpPr>
+        <p:spPr>
+          <a:xfrm>
+            <a:off x="9334500" y="3318510"/>
+            <a:ext cx="2171700" cy="1577340"/>
+          </a:xfrm>
+          <a:prstGeom prst="rect">
+            <a:avLst/>
+          </a:prstGeom>
+          <a:noFill/>
+        </p:spPr>
+        <p:txBody>
+          <a:bodyPr wrap="square" lIns="0" rIns="0" tIns="0" bIns="0" anchor="t">
+            <a:spAutoFit/>
+          </a:bodyPr>
+          <a:lstStyle/>
+          <a:p>
+            <a:pPr algn="l">
+              <a:lnSpc>
+                <a:spcPct val="140000"/>
+              </a:lnSpc>
+              <a:spcAft>
+                <a:spcPts val="600"/>
+              </a:spcAft>
+            </a:pPr>
+            <a:r>
+              <a:rPr sz="1200" b="0" i="0">
+                <a:solidFill>
+                  <a:srgbClr val="3A3A44"/>
+                </a:solidFill>
+                <a:latin typeface="Roboto"/>
+              </a:rPr>
+              <a:t>Insumo direto da Sprint 3, que começa no dia 15 e tem como objetivo declarado definir as tecnologias e os mecanismos da implementação.</a:t>
+            </a:r>
+          </a:p>
+        </p:txBody>
+      </p:sp>
+      <p:sp>
+        <p:nvSpPr>
           <p:cNvPr id="15" name="TextBox 14"/>
-          <p:cNvSpPr txBox="1"/>
-          <p:nvPr/>
-        </p:nvSpPr>
-        <p:spPr>
-          <a:xfrm>
-            <a:off x="6362700" y="3359468"/>
-            <a:ext cx="247650" cy="294437"/>
-          </a:xfrm>
-          <a:prstGeom prst="rect">
-            <a:avLst/>
-          </a:prstGeom>
-          <a:noFill/>
-        </p:spPr>
-        <p:txBody>
-          <a:bodyPr wrap="square" lIns="0" rIns="0" tIns="0" bIns="0" anchor="t">
-            <a:spAutoFit/>
-          </a:bodyPr>
-          <a:lstStyle/>
-          <a:p>
-            <a:pPr algn="l">
-              <a:lnSpc>
-                <a:spcPct val="120000"/>
-              </a:lnSpc>
-            </a:pPr>
-            <a:r>
-              <a:rPr sz="1450" b="1" i="0">
-                <a:solidFill>
-                  <a:srgbClr val="E94D1C"/>
-                </a:solidFill>
-                <a:latin typeface="Roboto"/>
-              </a:rPr>
-              <a:t>//</a:t>
-            </a:r>
-          </a:p>
-        </p:txBody>
-      </p:sp>
-      <p:sp>
-        <p:nvSpPr>
-          <p:cNvPr id="16" name="TextBox 15"/>
-          <p:cNvSpPr txBox="1"/>
-          <p:nvPr/>
-        </p:nvSpPr>
-        <p:spPr>
-          <a:xfrm>
-            <a:off x="6648450" y="3349942"/>
-            <a:ext cx="4857750" cy="95250"/>
-          </a:xfrm>
-          <a:prstGeom prst="rect">
-            <a:avLst/>
-          </a:prstGeom>
-          <a:noFill/>
-        </p:spPr>
-        <p:txBody>
-          <a:bodyPr wrap="square" lIns="0" rIns="0" tIns="0" bIns="0" anchor="t">
-            <a:spAutoFit/>
-          </a:bodyPr>
-          <a:lstStyle/>
-          <a:p>
-            <a:pPr algn="l">
-              <a:lnSpc>
-                <a:spcPct val="130000"/>
-              </a:lnSpc>
-            </a:pPr>
-            <a:r>
-              <a:rPr sz="1580" b="1" i="0">
-                <a:solidFill>
-                  <a:srgbClr val="1A1A1E"/>
-                </a:solidFill>
-                <a:latin typeface="Roboto"/>
-              </a:rPr>
-              <a:t>Segurança.</a:t>
-            </a:r>
-            <a:r>
-              <a:rPr sz="1580" b="0" i="0">
-                <a:solidFill>
-                  <a:srgbClr val="1A1A1E"/>
-                </a:solidFill>
-                <a:latin typeface="Roboto"/>
-              </a:rPr>
-              <a:t> Herda uma superfície nova: imagem base e privilégio de execução.</a:t>
-            </a:r>
-          </a:p>
-        </p:txBody>
-      </p:sp>
-      <p:sp>
-        <p:nvSpPr>
-          <p:cNvPr id="17" name="TextBox 16"/>
-          <p:cNvSpPr txBox="1"/>
-          <p:nvPr/>
-        </p:nvSpPr>
-        <p:spPr>
-          <a:xfrm>
-            <a:off x="6362700" y="4154234"/>
-            <a:ext cx="247650" cy="294437"/>
-          </a:xfrm>
-          <a:prstGeom prst="rect">
-            <a:avLst/>
-          </a:prstGeom>
-          <a:noFill/>
-        </p:spPr>
-        <p:txBody>
-          <a:bodyPr wrap="square" lIns="0" rIns="0" tIns="0" bIns="0" anchor="t">
-            <a:spAutoFit/>
-          </a:bodyPr>
-          <a:lstStyle/>
-          <a:p>
-            <a:pPr algn="l">
-              <a:lnSpc>
-                <a:spcPct val="120000"/>
-              </a:lnSpc>
-            </a:pPr>
-            <a:r>
-              <a:rPr sz="1450" b="1" i="0">
-                <a:solidFill>
-                  <a:srgbClr val="E94D1C"/>
-                </a:solidFill>
-                <a:latin typeface="Roboto"/>
-              </a:rPr>
-              <a:t>//</a:t>
-            </a:r>
-          </a:p>
-        </p:txBody>
-      </p:sp>
-      <p:sp>
-        <p:nvSpPr>
-          <p:cNvPr id="18" name="TextBox 17"/>
-          <p:cNvSpPr txBox="1"/>
-          <p:nvPr/>
-        </p:nvSpPr>
-        <p:spPr>
-          <a:xfrm>
-            <a:off x="6648450" y="4144708"/>
-            <a:ext cx="4857750" cy="95250"/>
-          </a:xfrm>
-          <a:prstGeom prst="rect">
-            <a:avLst/>
-          </a:prstGeom>
-          <a:noFill/>
-        </p:spPr>
-        <p:txBody>
-          <a:bodyPr wrap="square" lIns="0" rIns="0" tIns="0" bIns="0" anchor="t">
-            <a:spAutoFit/>
-          </a:bodyPr>
-          <a:lstStyle/>
-          <a:p>
-            <a:pPr algn="l">
-              <a:lnSpc>
-                <a:spcPct val="130000"/>
-              </a:lnSpc>
-            </a:pPr>
-            <a:r>
-              <a:rPr sz="1580" b="1" i="0">
-                <a:solidFill>
-                  <a:srgbClr val="1A1A1E"/>
-                </a:solidFill>
-                <a:latin typeface="Roboto"/>
-              </a:rPr>
-              <a:t>Desempenho.</a:t>
-            </a:r>
-            <a:r>
-              <a:rPr sz="1580" b="0" i="0">
-                <a:solidFill>
-                  <a:srgbClr val="1A1A1E"/>
-                </a:solidFill>
-                <a:latin typeface="Roboto"/>
-              </a:rPr>
-              <a:t> Principalmente I/O nas máquinas Windows. A Aula 03 já avisa que camada extra prejudica desempenho.</a:t>
-            </a:r>
-          </a:p>
-        </p:txBody>
-      </p:sp>
-      <p:sp>
-        <p:nvSpPr>
-          <p:cNvPr id="19" name="TextBox 18"/>
           <p:cNvSpPr txBox="1"/>
           <p:nvPr/>
         </p:nvSpPr>
@@ -28123,14 +27737,14 @@
                 </a:solidFill>
                 <a:latin typeface="Roboto"/>
               </a:rPr>
-              <a:t>03 · Vantagens e desvantagens</a:t>
-            </a:r>
-          </a:p>
-        </p:txBody>
-      </p:sp>
-      <p:sp>
-        <p:nvSpPr>
-          <p:cNvPr id="20" name="TextBox 19"/>
+              <a:t>Considerações finais</a:t>
+            </a:r>
+          </a:p>
+        </p:txBody>
+      </p:sp>
+      <p:sp>
+        <p:nvSpPr>
+          <p:cNvPr id="16" name="TextBox 15"/>
           <p:cNvSpPr txBox="1"/>
           <p:nvPr/>
         </p:nvSpPr>
@@ -28251,7 +27865,7 @@
                 </a:solidFill>
                 <a:latin typeface="Roboto"/>
               </a:rPr>
-              <a:t>RECOMENDAÇÃO PARA O ADR #63</a:t>
+              <a:t>ANTES E DEPOIS</a:t>
             </a:r>
           </a:p>
         </p:txBody>
@@ -28290,7 +27904,23 @@
                 </a:solidFill>
                 <a:latin typeface="Roboto"/>
               </a:rPr>
-              <a:t>Recomendação do grupo</a:t>
+              <a:t>O que mudou no ambiente</a:t>
+            </a:r>
+          </a:p>
+          <a:p>
+            <a:pPr>
+              <a:lnSpc>
+                <a:spcPct val="104000"/>
+              </a:lnSpc>
+            </a:pPr>
+            <a:r>
+              <a:rPr sz="3000" b="1" i="0">
+                <a:solidFill>
+                  <a:srgbClr val="21049A"/>
+                </a:solidFill>
+                <a:latin typeface="Roboto"/>
+              </a:rPr>
+              <a:t>do time</a:t>
             </a:r>
           </a:p>
         </p:txBody>
@@ -28303,8 +27933,8 @@
         </p:nvSpPr>
         <p:spPr>
           <a:xfrm>
-            <a:off x="685800" y="2903982"/>
-            <a:ext cx="247650" cy="308458"/>
+            <a:off x="685800" y="3120009"/>
+            <a:ext cx="5143500" cy="182880"/>
           </a:xfrm>
           <a:prstGeom prst="rect">
             <a:avLst/>
@@ -28323,7 +27953,90 @@
               </a:lnSpc>
             </a:pPr>
             <a:r>
-              <a:rPr sz="1520" b="1" i="0">
+              <a:rPr sz="900" b="1" i="0" spc="120">
+                <a:solidFill>
+                  <a:srgbClr val="21049A"/>
+                </a:solidFill>
+                <a:latin typeface="Roboto"/>
+              </a:rPr>
+              <a:t>NO COMEÇO DO PROJETO</a:t>
+            </a:r>
+          </a:p>
+        </p:txBody>
+      </p:sp>
+      <p:sp>
+        <p:nvSpPr>
+          <p:cNvPr id="6" name="Rectangle 5"/>
+          <p:cNvSpPr/>
+          <p:nvPr/>
+        </p:nvSpPr>
+        <p:spPr>
+          <a:xfrm>
+            <a:off x="685800" y="3329559"/>
+            <a:ext cx="419100" cy="28575"/>
+          </a:xfrm>
+          <a:prstGeom prst="rect">
+            <a:avLst/>
+          </a:prstGeom>
+          <a:solidFill>
+            <a:srgbClr val="21049A"/>
+          </a:solidFill>
+          <a:ln>
+            <a:noFill/>
+          </a:ln>
+          <a:effectLst/>
+        </p:spPr>
+        <p:style>
+          <a:lnRef idx="1">
+            <a:schemeClr val="accent1"/>
+          </a:lnRef>
+          <a:fillRef idx="3">
+            <a:schemeClr val="accent1"/>
+          </a:fillRef>
+          <a:effectRef idx="2">
+            <a:schemeClr val="accent1"/>
+          </a:effectRef>
+          <a:fontRef idx="minor">
+            <a:schemeClr val="lt1"/>
+          </a:fontRef>
+        </p:style>
+        <p:txBody>
+          <a:bodyPr rtlCol="0" anchor="ctr" wrap="square" lIns="0" rIns="0" tIns="0" bIns="0"/>
+          <a:lstStyle/>
+          <a:p>
+            <a:pPr algn="ctr"/>
+          </a:p>
+        </p:txBody>
+      </p:sp>
+      <p:sp>
+        <p:nvSpPr>
+          <p:cNvPr id="7" name="TextBox 6"/>
+          <p:cNvSpPr txBox="1"/>
+          <p:nvPr/>
+        </p:nvSpPr>
+        <p:spPr>
+          <a:xfrm>
+            <a:off x="685800" y="3624834"/>
+            <a:ext cx="247650" cy="294437"/>
+          </a:xfrm>
+          <a:prstGeom prst="rect">
+            <a:avLst/>
+          </a:prstGeom>
+          <a:noFill/>
+        </p:spPr>
+        <p:txBody>
+          <a:bodyPr wrap="square" lIns="0" rIns="0" tIns="0" bIns="0" anchor="t">
+            <a:spAutoFit/>
+          </a:bodyPr>
+          <a:lstStyle/>
+          <a:p>
+            <a:pPr algn="l">
+              <a:lnSpc>
+                <a:spcPct val="120000"/>
+              </a:lnSpc>
+            </a:pPr>
+            <a:r>
+              <a:rPr sz="1450" b="1" i="0">
                 <a:solidFill>
                   <a:srgbClr val="E94D1C"/>
                 </a:solidFill>
@@ -28336,14 +28049,14 @@
       </p:sp>
       <p:sp>
         <p:nvSpPr>
-          <p:cNvPr id="6" name="TextBox 5"/>
-          <p:cNvSpPr txBox="1"/>
-          <p:nvPr/>
-        </p:nvSpPr>
-        <p:spPr>
-          <a:xfrm>
-            <a:off x="971550" y="2894457"/>
-            <a:ext cx="7677150" cy="95250"/>
+          <p:cNvPr id="8" name="TextBox 7"/>
+          <p:cNvSpPr txBox="1"/>
+          <p:nvPr/>
+        </p:nvSpPr>
+        <p:spPr>
+          <a:xfrm>
+            <a:off x="971550" y="3615309"/>
+            <a:ext cx="4857750" cy="95250"/>
           </a:xfrm>
           <a:prstGeom prst="rect">
             <a:avLst/>
@@ -28362,27 +28075,27 @@
               </a:lnSpc>
             </a:pPr>
             <a:r>
-              <a:rPr sz="1650" b="0" i="0">
+              <a:rPr sz="1580" b="0" i="0">
                 <a:solidFill>
                   <a:srgbClr val="1A1A1E"/>
                 </a:solidFill>
                 <a:latin typeface="Roboto"/>
               </a:rPr>
-              <a:t>Adotamos conteinerização como estratégia de empacotamento e de ambiente de desenvolvimento, registrada como troca.</a:t>
-            </a:r>
-          </a:p>
-        </p:txBody>
-      </p:sp>
-      <p:sp>
-        <p:nvSpPr>
-          <p:cNvPr id="7" name="TextBox 6"/>
-          <p:cNvSpPr txBox="1"/>
-          <p:nvPr/>
-        </p:nvSpPr>
-        <p:spPr>
-          <a:xfrm>
-            <a:off x="685800" y="3742944"/>
-            <a:ext cx="247650" cy="308458"/>
+              <a:t>Uma linha de .gitattributes forçando LF nos scripts, porque o Git Bash quebra no Windows.</a:t>
+            </a:r>
+          </a:p>
+        </p:txBody>
+      </p:sp>
+      <p:sp>
+        <p:nvSpPr>
+          <p:cNvPr id="9" name="TextBox 8"/>
+          <p:cNvSpPr txBox="1"/>
+          <p:nvPr/>
+        </p:nvSpPr>
+        <p:spPr>
+          <a:xfrm>
+            <a:off x="685800" y="4419600"/>
+            <a:ext cx="247650" cy="294437"/>
           </a:xfrm>
           <a:prstGeom prst="rect">
             <a:avLst/>
@@ -28401,7 +28114,7 @@
               </a:lnSpc>
             </a:pPr>
             <a:r>
-              <a:rPr sz="1520" b="1" i="0">
+              <a:rPr sz="1450" b="1" i="0">
                 <a:solidFill>
                   <a:srgbClr val="E94D1C"/>
                 </a:solidFill>
@@ -28414,14 +28127,14 @@
       </p:sp>
       <p:sp>
         <p:nvSpPr>
-          <p:cNvPr id="8" name="TextBox 7"/>
-          <p:cNvSpPr txBox="1"/>
-          <p:nvPr/>
-        </p:nvSpPr>
-        <p:spPr>
-          <a:xfrm>
-            <a:off x="971550" y="3733419"/>
-            <a:ext cx="7677150" cy="95250"/>
+          <p:cNvPr id="10" name="TextBox 9"/>
+          <p:cNvSpPr txBox="1"/>
+          <p:nvPr/>
+        </p:nvSpPr>
+        <p:spPr>
+          <a:xfrm>
+            <a:off x="971550" y="4410075"/>
+            <a:ext cx="4857750" cy="95250"/>
           </a:xfrm>
           <a:prstGeom prst="rect">
             <a:avLst/>
@@ -28440,27 +28153,27 @@
               </a:lnSpc>
             </a:pPr>
             <a:r>
-              <a:rPr sz="1650" b="0" i="0">
+              <a:rPr sz="1580" b="0" i="0">
                 <a:solidFill>
                   <a:srgbClr val="1A1A1E"/>
                 </a:solidFill>
                 <a:latin typeface="Roboto"/>
               </a:rPr>
-              <a:t>O #60 deixa de ser caixa genérica e passa a ter um arquivo correspondente que roda, e esse arquivo vira artefato do repositório.</a:t>
-            </a:r>
-          </a:p>
-        </p:txBody>
-      </p:sp>
-      <p:sp>
-        <p:nvSpPr>
-          <p:cNvPr id="9" name="TextBox 8"/>
-          <p:cNvSpPr txBox="1"/>
-          <p:nvPr/>
-        </p:nvSpPr>
-        <p:spPr>
-          <a:xfrm>
-            <a:off x="685800" y="4581906"/>
-            <a:ext cx="247650" cy="308458"/>
+              <a:t>Os ambientes do time já divergem antes de existir a primeira linha de código do produto.</a:t>
+            </a:r>
+          </a:p>
+        </p:txBody>
+      </p:sp>
+      <p:sp>
+        <p:nvSpPr>
+          <p:cNvPr id="11" name="TextBox 10"/>
+          <p:cNvSpPr txBox="1"/>
+          <p:nvPr/>
+        </p:nvSpPr>
+        <p:spPr>
+          <a:xfrm>
+            <a:off x="6362700" y="3120009"/>
+            <a:ext cx="5143500" cy="182880"/>
           </a:xfrm>
           <a:prstGeom prst="rect">
             <a:avLst/>
@@ -28479,68 +28192,29 @@
               </a:lnSpc>
             </a:pPr>
             <a:r>
-              <a:rPr sz="1520" b="1" i="0">
+              <a:rPr sz="900" b="1" i="0" spc="120">
                 <a:solidFill>
                   <a:srgbClr val="E94D1C"/>
                 </a:solidFill>
                 <a:latin typeface="Roboto"/>
               </a:rPr>
-              <a:t>//</a:t>
-            </a:r>
-          </a:p>
-        </p:txBody>
-      </p:sp>
-      <p:sp>
-        <p:nvSpPr>
-          <p:cNvPr id="10" name="TextBox 9"/>
-          <p:cNvSpPr txBox="1"/>
-          <p:nvPr/>
-        </p:nvSpPr>
-        <p:spPr>
-          <a:xfrm>
-            <a:off x="971550" y="4572381"/>
-            <a:ext cx="7677150" cy="95250"/>
-          </a:xfrm>
-          <a:prstGeom prst="rect">
-            <a:avLst/>
-          </a:prstGeom>
-          <a:noFill/>
-        </p:spPr>
-        <p:txBody>
-          <a:bodyPr wrap="square" lIns="0" rIns="0" tIns="0" bIns="0" anchor="t">
-            <a:spAutoFit/>
-          </a:bodyPr>
-          <a:lstStyle/>
-          <a:p>
-            <a:pPr algn="l">
-              <a:lnSpc>
-                <a:spcPct val="130000"/>
-              </a:lnSpc>
-            </a:pPr>
-            <a:r>
-              <a:rPr sz="1650" b="0" i="0">
-                <a:solidFill>
-                  <a:srgbClr val="1A1A1E"/>
-                </a:solidFill>
-                <a:latin typeface="Roboto"/>
-              </a:rPr>
-              <a:t>A stack ainda não está decidida. Com Dockerfile, trocar runtime ou banco é editar uma linha de arquivo em vez de reinstalar em quatro notebooks.</a:t>
-            </a:r>
-          </a:p>
-        </p:txBody>
-      </p:sp>
-      <p:sp>
-        <p:nvSpPr>
-          <p:cNvPr id="11" name="Chevron 10"/>
+              <a:t>AGORA</a:t>
+            </a:r>
+          </a:p>
+        </p:txBody>
+      </p:sp>
+      <p:sp>
+        <p:nvSpPr>
+          <p:cNvPr id="12" name="Rectangle 11"/>
           <p:cNvSpPr/>
           <p:nvPr/>
         </p:nvSpPr>
         <p:spPr>
           <a:xfrm>
-            <a:off x="9124950" y="2903982"/>
-            <a:ext cx="142875" cy="123825"/>
-          </a:xfrm>
-          <a:prstGeom prst="chevron">
+            <a:off x="6362700" y="3329559"/>
+            <a:ext cx="419100" cy="28575"/>
+          </a:xfrm>
+          <a:prstGeom prst="rect">
             <a:avLst/>
           </a:prstGeom>
           <a:solidFill>
@@ -28566,7 +28240,7 @@
           </a:fontRef>
         </p:style>
         <p:txBody>
-          <a:bodyPr rtlCol="0" anchor="ctr"/>
+          <a:bodyPr rtlCol="0" anchor="ctr" wrap="square" lIns="0" rIns="0" tIns="0" bIns="0"/>
           <a:lstStyle/>
           <a:p>
             <a:pPr algn="ctr"/>
@@ -28575,14 +28249,14 @@
       </p:sp>
       <p:sp>
         <p:nvSpPr>
-          <p:cNvPr id="12" name="TextBox 11"/>
-          <p:cNvSpPr txBox="1"/>
-          <p:nvPr/>
-        </p:nvSpPr>
-        <p:spPr>
-          <a:xfrm>
-            <a:off x="9372600" y="2903982"/>
-            <a:ext cx="2133600" cy="182880"/>
+          <p:cNvPr id="13" name="TextBox 12"/>
+          <p:cNvSpPr txBox="1"/>
+          <p:nvPr/>
+        </p:nvSpPr>
+        <p:spPr>
+          <a:xfrm>
+            <a:off x="6362700" y="3624834"/>
+            <a:ext cx="247650" cy="294437"/>
           </a:xfrm>
           <a:prstGeom prst="rect">
             <a:avLst/>
@@ -28601,58 +28275,14 @@
               </a:lnSpc>
             </a:pPr>
             <a:r>
-              <a:rPr sz="900" b="1" i="0" spc="120">
+              <a:rPr sz="1450" b="1" i="0">
                 <a:solidFill>
                   <a:srgbClr val="E94D1C"/>
                 </a:solidFill>
                 <a:latin typeface="Roboto"/>
               </a:rPr>
-              <a:t>PRÓXIMO PASSO</a:t>
-            </a:r>
-          </a:p>
-        </p:txBody>
-      </p:sp>
-      <p:sp>
-        <p:nvSpPr>
-          <p:cNvPr id="13" name="Rectangle 12"/>
-          <p:cNvSpPr/>
-          <p:nvPr/>
-        </p:nvSpPr>
-        <p:spPr>
-          <a:xfrm>
-            <a:off x="9124950" y="3180207"/>
-            <a:ext cx="38100" cy="1005840"/>
-          </a:xfrm>
-          <a:prstGeom prst="rect">
-            <a:avLst/>
-          </a:prstGeom>
-          <a:solidFill>
-            <a:srgbClr val="E94D1C"/>
-          </a:solidFill>
-          <a:ln>
-            <a:noFill/>
-          </a:ln>
-          <a:effectLst/>
-        </p:spPr>
-        <p:style>
-          <a:lnRef idx="1">
-            <a:schemeClr val="accent1"/>
-          </a:lnRef>
-          <a:fillRef idx="3">
-            <a:schemeClr val="accent1"/>
-          </a:fillRef>
-          <a:effectRef idx="2">
-            <a:schemeClr val="accent1"/>
-          </a:effectRef>
-          <a:fontRef idx="minor">
-            <a:schemeClr val="lt1"/>
-          </a:fontRef>
-        </p:style>
-        <p:txBody>
-          <a:bodyPr rtlCol="0" anchor="ctr" wrap="square" lIns="0" rIns="0" tIns="0" bIns="0"/>
-          <a:lstStyle/>
-          <a:p>
-            <a:pPr algn="ctr"/>
+              <a:t>//</a:t>
+            </a:r>
           </a:p>
         </p:txBody>
       </p:sp>
@@ -28664,8 +28294,8 @@
         </p:nvSpPr>
         <p:spPr>
           <a:xfrm>
-            <a:off x="9334500" y="3180207"/>
-            <a:ext cx="2171700" cy="1577340"/>
+            <a:off x="6648450" y="3615309"/>
+            <a:ext cx="4857750" cy="95250"/>
           </a:xfrm>
           <a:prstGeom prst="rect">
             <a:avLst/>
@@ -28680,20 +28310,17 @@
           <a:p>
             <a:pPr algn="l">
               <a:lnSpc>
-                <a:spcPct val="140000"/>
-              </a:lnSpc>
-              <a:spcAft>
-                <a:spcPts val="600"/>
-              </a:spcAft>
-            </a:pPr>
-            <a:r>
-              <a:rPr sz="1200" b="0" i="0">
-                <a:solidFill>
-                  <a:srgbClr val="3A3A44"/>
-                </a:solidFill>
-                <a:latin typeface="Roboto"/>
-              </a:rPr>
-              <a:t>Insumo direto da Sprint 3, que começa no dia 15 e tem como objetivo declarado definir as tecnologias e os mecanismos da implementação.</a:t>
+                <a:spcPct val="130000"/>
+              </a:lnSpc>
+            </a:pPr>
+            <a:r>
+              <a:rPr sz="1580" b="0" i="0">
+                <a:solidFill>
+                  <a:srgbClr val="1A1A1E"/>
+                </a:solidFill>
+                <a:latin typeface="Roboto"/>
+              </a:rPr>
+              <a:t>Um arquivo que descreve o ambiente inteiro e que qualquer um dos quatro sobe com um comando.</a:t>
             </a:r>
           </a:p>
         </p:txBody>
@@ -28701,6 +28328,84 @@
       <p:sp>
         <p:nvSpPr>
           <p:cNvPr id="15" name="TextBox 14"/>
+          <p:cNvSpPr txBox="1"/>
+          <p:nvPr/>
+        </p:nvSpPr>
+        <p:spPr>
+          <a:xfrm>
+            <a:off x="6362700" y="4419600"/>
+            <a:ext cx="247650" cy="294437"/>
+          </a:xfrm>
+          <a:prstGeom prst="rect">
+            <a:avLst/>
+          </a:prstGeom>
+          <a:noFill/>
+        </p:spPr>
+        <p:txBody>
+          <a:bodyPr wrap="square" lIns="0" rIns="0" tIns="0" bIns="0" anchor="t">
+            <a:spAutoFit/>
+          </a:bodyPr>
+          <a:lstStyle/>
+          <a:p>
+            <a:pPr algn="l">
+              <a:lnSpc>
+                <a:spcPct val="120000"/>
+              </a:lnSpc>
+            </a:pPr>
+            <a:r>
+              <a:rPr sz="1450" b="1" i="0">
+                <a:solidFill>
+                  <a:srgbClr val="E94D1C"/>
+                </a:solidFill>
+                <a:latin typeface="Roboto"/>
+              </a:rPr>
+              <a:t>//</a:t>
+            </a:r>
+          </a:p>
+        </p:txBody>
+      </p:sp>
+      <p:sp>
+        <p:nvSpPr>
+          <p:cNvPr id="16" name="TextBox 15"/>
+          <p:cNvSpPr txBox="1"/>
+          <p:nvPr/>
+        </p:nvSpPr>
+        <p:spPr>
+          <a:xfrm>
+            <a:off x="6648450" y="4410075"/>
+            <a:ext cx="4857750" cy="95250"/>
+          </a:xfrm>
+          <a:prstGeom prst="rect">
+            <a:avLst/>
+          </a:prstGeom>
+          <a:noFill/>
+        </p:spPr>
+        <p:txBody>
+          <a:bodyPr wrap="square" lIns="0" rIns="0" tIns="0" bIns="0" anchor="t">
+            <a:spAutoFit/>
+          </a:bodyPr>
+          <a:lstStyle/>
+          <a:p>
+            <a:pPr algn="l">
+              <a:lnSpc>
+                <a:spcPct val="130000"/>
+              </a:lnSpc>
+            </a:pPr>
+            <a:r>
+              <a:rPr sz="1580" b="0" i="0">
+                <a:solidFill>
+                  <a:srgbClr val="1A1A1E"/>
+                </a:solidFill>
+                <a:latin typeface="Roboto"/>
+              </a:rPr>
+              <a:t>E que vira o diagrama de implantação do item #60.</a:t>
+            </a:r>
+          </a:p>
+        </p:txBody>
+      </p:sp>
+      <p:sp>
+        <p:nvSpPr>
+          <p:cNvPr id="17" name="TextBox 16"/>
           <p:cNvSpPr txBox="1"/>
           <p:nvPr/>
         </p:nvSpPr>
@@ -28739,7 +28444,7 @@
       </p:sp>
       <p:sp>
         <p:nvSpPr>
-          <p:cNvPr id="16" name="TextBox 15"/>
+          <p:cNvPr id="18" name="TextBox 17"/>
           <p:cNvSpPr txBox="1"/>
           <p:nvPr/>
         </p:nvSpPr>
@@ -28860,7 +28565,7 @@
                 </a:solidFill>
                 <a:latin typeface="Roboto"/>
               </a:rPr>
-              <a:t>ANTES E DEPOIS</a:t>
+              <a:t>O QUE NÃO ESTAMOS AFIRMANDO</a:t>
             </a:r>
           </a:p>
         </p:txBody>
@@ -28899,23 +28604,7 @@
                 </a:solidFill>
                 <a:latin typeface="Roboto"/>
               </a:rPr>
-              <a:t>O que mudou no ambiente</a:t>
-            </a:r>
-          </a:p>
-          <a:p>
-            <a:pPr>
-              <a:lnSpc>
-                <a:spcPct val="104000"/>
-              </a:lnSpc>
-            </a:pPr>
-            <a:r>
-              <a:rPr sz="3000" b="1" i="0">
-                <a:solidFill>
-                  <a:srgbClr val="21049A"/>
-                </a:solidFill>
-                <a:latin typeface="Roboto"/>
-              </a:rPr>
-              <a:t>do time</a:t>
+              <a:t>Pendências, com número de item</a:t>
             </a:r>
           </a:p>
         </p:txBody>
@@ -28928,8 +28617,8 @@
         </p:nvSpPr>
         <p:spPr>
           <a:xfrm>
-            <a:off x="685800" y="3120009"/>
-            <a:ext cx="5143500" cy="182880"/>
+            <a:off x="685800" y="3461766"/>
+            <a:ext cx="247650" cy="308458"/>
           </a:xfrm>
           <a:prstGeom prst="rect">
             <a:avLst/>
@@ -28948,36 +28637,153 @@
               </a:lnSpc>
             </a:pPr>
             <a:r>
-              <a:rPr sz="900" b="1" i="0" spc="120">
-                <a:solidFill>
-                  <a:srgbClr val="21049A"/>
-                </a:solidFill>
-                <a:latin typeface="Roboto"/>
-              </a:rPr>
-              <a:t>NO COMEÇO DO PROJETO</a:t>
-            </a:r>
-          </a:p>
-        </p:txBody>
-      </p:sp>
-      <p:sp>
-        <p:nvSpPr>
-          <p:cNvPr id="6" name="Rectangle 5"/>
+              <a:rPr sz="1520" b="1" i="0">
+                <a:solidFill>
+                  <a:srgbClr val="E94D1C"/>
+                </a:solidFill>
+                <a:latin typeface="Roboto"/>
+              </a:rPr>
+              <a:t>//</a:t>
+            </a:r>
+          </a:p>
+        </p:txBody>
+      </p:sp>
+      <p:sp>
+        <p:nvSpPr>
+          <p:cNvPr id="6" name="TextBox 5"/>
+          <p:cNvSpPr txBox="1"/>
+          <p:nvPr/>
+        </p:nvSpPr>
+        <p:spPr>
+          <a:xfrm>
+            <a:off x="971550" y="3452241"/>
+            <a:ext cx="7486650" cy="95250"/>
+          </a:xfrm>
+          <a:prstGeom prst="rect">
+            <a:avLst/>
+          </a:prstGeom>
+          <a:noFill/>
+        </p:spPr>
+        <p:txBody>
+          <a:bodyPr wrap="square" lIns="0" rIns="0" tIns="0" bIns="0" anchor="t">
+            <a:spAutoFit/>
+          </a:bodyPr>
+          <a:lstStyle/>
+          <a:p>
+            <a:pPr algn="l">
+              <a:lnSpc>
+                <a:spcPct val="130000"/>
+              </a:lnSpc>
+            </a:pPr>
+            <a:r>
+              <a:rPr sz="1650" b="0" i="0">
+                <a:solidFill>
+                  <a:srgbClr val="1A1A1E"/>
+                </a:solidFill>
+                <a:latin typeface="Roboto"/>
+              </a:rPr>
+              <a:t>Os itens #58 a #63 da Sprint 2 estão em To Do. Isto é insumo desses itens, não relato de item concluído.</a:t>
+            </a:r>
+          </a:p>
+        </p:txBody>
+      </p:sp>
+      <p:sp>
+        <p:nvSpPr>
+          <p:cNvPr id="7" name="TextBox 6"/>
+          <p:cNvSpPr txBox="1"/>
+          <p:nvPr/>
+        </p:nvSpPr>
+        <p:spPr>
+          <a:xfrm>
+            <a:off x="685800" y="4300728"/>
+            <a:ext cx="247650" cy="308458"/>
+          </a:xfrm>
+          <a:prstGeom prst="rect">
+            <a:avLst/>
+          </a:prstGeom>
+          <a:noFill/>
+        </p:spPr>
+        <p:txBody>
+          <a:bodyPr wrap="square" lIns="0" rIns="0" tIns="0" bIns="0" anchor="t">
+            <a:spAutoFit/>
+          </a:bodyPr>
+          <a:lstStyle/>
+          <a:p>
+            <a:pPr algn="l">
+              <a:lnSpc>
+                <a:spcPct val="120000"/>
+              </a:lnSpc>
+            </a:pPr>
+            <a:r>
+              <a:rPr sz="1520" b="1" i="0">
+                <a:solidFill>
+                  <a:srgbClr val="E94D1C"/>
+                </a:solidFill>
+                <a:latin typeface="Roboto"/>
+              </a:rPr>
+              <a:t>//</a:t>
+            </a:r>
+          </a:p>
+        </p:txBody>
+      </p:sp>
+      <p:sp>
+        <p:nvSpPr>
+          <p:cNvPr id="8" name="TextBox 7"/>
+          <p:cNvSpPr txBox="1"/>
+          <p:nvPr/>
+        </p:nvSpPr>
+        <p:spPr>
+          <a:xfrm>
+            <a:off x="971550" y="4291203"/>
+            <a:ext cx="7486650" cy="95250"/>
+          </a:xfrm>
+          <a:prstGeom prst="rect">
+            <a:avLst/>
+          </a:prstGeom>
+          <a:noFill/>
+        </p:spPr>
+        <p:txBody>
+          <a:bodyPr wrap="square" lIns="0" rIns="0" tIns="0" bIns="0" anchor="t">
+            <a:spAutoFit/>
+          </a:bodyPr>
+          <a:lstStyle/>
+          <a:p>
+            <a:pPr algn="l">
+              <a:lnSpc>
+                <a:spcPct val="130000"/>
+              </a:lnSpc>
+            </a:pPr>
+            <a:r>
+              <a:rPr sz="1650" b="0" i="0">
+                <a:solidFill>
+                  <a:srgbClr val="1A1A1E"/>
+                </a:solidFill>
+                <a:latin typeface="Roboto"/>
+              </a:rPr>
+              <a:t>O #63, onde a stack será decidida, ainda não foi escrito.</a:t>
+            </a:r>
+          </a:p>
+        </p:txBody>
+      </p:sp>
+      <p:sp>
+        <p:nvSpPr>
+          <p:cNvPr id="9" name="Document 8"/>
           <p:cNvSpPr/>
           <p:nvPr/>
         </p:nvSpPr>
         <p:spPr>
           <a:xfrm>
-            <a:off x="685800" y="3329559"/>
-            <a:ext cx="419100" cy="28575"/>
-          </a:xfrm>
-          <a:prstGeom prst="rect">
-            <a:avLst/>
-          </a:prstGeom>
-          <a:solidFill>
-            <a:srgbClr val="21049A"/>
-          </a:solidFill>
-          <a:ln>
-            <a:noFill/>
+            <a:off x="9124950" y="3452241"/>
+            <a:ext cx="142875" cy="133350"/>
+          </a:xfrm>
+          <a:prstGeom prst="flowChartDocument">
+            <a:avLst/>
+          </a:prstGeom>
+          <a:noFill/>
+          <a:ln w="19050">
+            <a:solidFill>
+              <a:srgbClr val="E94D1C"/>
+            </a:solidFill>
           </a:ln>
           <a:effectLst/>
         </p:spPr>
@@ -28996,7 +28802,7 @@
           </a:fontRef>
         </p:style>
         <p:txBody>
-          <a:bodyPr rtlCol="0" anchor="ctr" wrap="square" lIns="0" rIns="0" tIns="0" bIns="0"/>
+          <a:bodyPr rtlCol="0" anchor="ctr"/>
           <a:lstStyle/>
           <a:p>
             <a:pPr algn="ctr"/>
@@ -29005,14 +28811,14 @@
       </p:sp>
       <p:sp>
         <p:nvSpPr>
-          <p:cNvPr id="7" name="TextBox 6"/>
-          <p:cNvSpPr txBox="1"/>
-          <p:nvPr/>
-        </p:nvSpPr>
-        <p:spPr>
-          <a:xfrm>
-            <a:off x="685800" y="3624834"/>
-            <a:ext cx="247650" cy="294437"/>
+          <p:cNvPr id="10" name="TextBox 9"/>
+          <p:cNvSpPr txBox="1"/>
+          <p:nvPr/>
+        </p:nvSpPr>
+        <p:spPr>
+          <a:xfrm>
+            <a:off x="9372600" y="3461766"/>
+            <a:ext cx="2133600" cy="182880"/>
           </a:xfrm>
           <a:prstGeom prst="rect">
             <a:avLst/>
@@ -29031,183 +28837,27 @@
               </a:lnSpc>
             </a:pPr>
             <a:r>
-              <a:rPr sz="1450" b="1" i="0">
+              <a:rPr sz="900" b="1" i="0" spc="120">
                 <a:solidFill>
                   <a:srgbClr val="E94D1C"/>
                 </a:solidFill>
                 <a:latin typeface="Roboto"/>
               </a:rPr>
-              <a:t>//</a:t>
-            </a:r>
-          </a:p>
-        </p:txBody>
-      </p:sp>
-      <p:sp>
-        <p:nvSpPr>
-          <p:cNvPr id="8" name="TextBox 7"/>
-          <p:cNvSpPr txBox="1"/>
-          <p:nvPr/>
-        </p:nvSpPr>
-        <p:spPr>
-          <a:xfrm>
-            <a:off x="971550" y="3615309"/>
-            <a:ext cx="4857750" cy="95250"/>
-          </a:xfrm>
-          <a:prstGeom prst="rect">
-            <a:avLst/>
-          </a:prstGeom>
-          <a:noFill/>
-        </p:spPr>
-        <p:txBody>
-          <a:bodyPr wrap="square" lIns="0" rIns="0" tIns="0" bIns="0" anchor="t">
-            <a:spAutoFit/>
-          </a:bodyPr>
-          <a:lstStyle/>
-          <a:p>
-            <a:pPr algn="l">
-              <a:lnSpc>
-                <a:spcPct val="130000"/>
-              </a:lnSpc>
-            </a:pPr>
-            <a:r>
-              <a:rPr sz="1580" b="0" i="0">
-                <a:solidFill>
-                  <a:srgbClr val="1A1A1E"/>
-                </a:solidFill>
-                <a:latin typeface="Roboto"/>
-              </a:rPr>
-              <a:t>Uma linha de .gitattributes forçando LF nos scripts, porque o Git Bash quebra no Windows.</a:t>
-            </a:r>
-          </a:p>
-        </p:txBody>
-      </p:sp>
-      <p:sp>
-        <p:nvSpPr>
-          <p:cNvPr id="9" name="TextBox 8"/>
-          <p:cNvSpPr txBox="1"/>
-          <p:nvPr/>
-        </p:nvSpPr>
-        <p:spPr>
-          <a:xfrm>
-            <a:off x="685800" y="4419600"/>
-            <a:ext cx="247650" cy="294437"/>
-          </a:xfrm>
-          <a:prstGeom prst="rect">
-            <a:avLst/>
-          </a:prstGeom>
-          <a:noFill/>
-        </p:spPr>
-        <p:txBody>
-          <a:bodyPr wrap="square" lIns="0" rIns="0" tIns="0" bIns="0" anchor="t">
-            <a:spAutoFit/>
-          </a:bodyPr>
-          <a:lstStyle/>
-          <a:p>
-            <a:pPr algn="l">
-              <a:lnSpc>
-                <a:spcPct val="120000"/>
-              </a:lnSpc>
-            </a:pPr>
-            <a:r>
-              <a:rPr sz="1450" b="1" i="0">
-                <a:solidFill>
-                  <a:srgbClr val="E94D1C"/>
-                </a:solidFill>
-                <a:latin typeface="Roboto"/>
-              </a:rPr>
-              <a:t>//</a:t>
-            </a:r>
-          </a:p>
-        </p:txBody>
-      </p:sp>
-      <p:sp>
-        <p:nvSpPr>
-          <p:cNvPr id="10" name="TextBox 9"/>
-          <p:cNvSpPr txBox="1"/>
-          <p:nvPr/>
-        </p:nvSpPr>
-        <p:spPr>
-          <a:xfrm>
-            <a:off x="971550" y="4410075"/>
-            <a:ext cx="4857750" cy="95250"/>
-          </a:xfrm>
-          <a:prstGeom prst="rect">
-            <a:avLst/>
-          </a:prstGeom>
-          <a:noFill/>
-        </p:spPr>
-        <p:txBody>
-          <a:bodyPr wrap="square" lIns="0" rIns="0" tIns="0" bIns="0" anchor="t">
-            <a:spAutoFit/>
-          </a:bodyPr>
-          <a:lstStyle/>
-          <a:p>
-            <a:pPr algn="l">
-              <a:lnSpc>
-                <a:spcPct val="130000"/>
-              </a:lnSpc>
-            </a:pPr>
-            <a:r>
-              <a:rPr sz="1580" b="0" i="0">
-                <a:solidFill>
-                  <a:srgbClr val="1A1A1E"/>
-                </a:solidFill>
-                <a:latin typeface="Roboto"/>
-              </a:rPr>
-              <a:t>Os ambientes do time já divergem antes de existir a primeira linha de código do produto.</a:t>
-            </a:r>
-          </a:p>
-        </p:txBody>
-      </p:sp>
-      <p:sp>
-        <p:nvSpPr>
-          <p:cNvPr id="11" name="TextBox 10"/>
-          <p:cNvSpPr txBox="1"/>
-          <p:nvPr/>
-        </p:nvSpPr>
-        <p:spPr>
-          <a:xfrm>
-            <a:off x="6362700" y="3120009"/>
-            <a:ext cx="5143500" cy="182880"/>
-          </a:xfrm>
-          <a:prstGeom prst="rect">
-            <a:avLst/>
-          </a:prstGeom>
-          <a:noFill/>
-        </p:spPr>
-        <p:txBody>
-          <a:bodyPr wrap="square" lIns="0" rIns="0" tIns="0" bIns="0" anchor="t">
-            <a:spAutoFit/>
-          </a:bodyPr>
-          <a:lstStyle/>
-          <a:p>
-            <a:pPr algn="l">
-              <a:lnSpc>
-                <a:spcPct val="120000"/>
-              </a:lnSpc>
-            </a:pPr>
-            <a:r>
-              <a:rPr sz="900" b="1" i="0" spc="120">
-                <a:solidFill>
-                  <a:srgbClr val="E94D1C"/>
-                </a:solidFill>
-                <a:latin typeface="Roboto"/>
-              </a:rPr>
-              <a:t>AGORA</a:t>
-            </a:r>
-          </a:p>
-        </p:txBody>
-      </p:sp>
-      <p:sp>
-        <p:nvSpPr>
-          <p:cNvPr id="12" name="Rectangle 11"/>
+              <a:t>PARA LEVAR PARA A P1</a:t>
+            </a:r>
+          </a:p>
+        </p:txBody>
+      </p:sp>
+      <p:sp>
+        <p:nvSpPr>
+          <p:cNvPr id="11" name="Rectangle 10"/>
           <p:cNvSpPr/>
           <p:nvPr/>
         </p:nvSpPr>
         <p:spPr>
           <a:xfrm>
-            <a:off x="6362700" y="3329559"/>
-            <a:ext cx="419100" cy="28575"/>
+            <a:off x="9124950" y="3737991"/>
+            <a:ext cx="38100" cy="1664208"/>
           </a:xfrm>
           <a:prstGeom prst="rect">
             <a:avLst/>
@@ -29244,163 +28894,125 @@
       </p:sp>
       <p:sp>
         <p:nvSpPr>
+          <p:cNvPr id="12" name="TextBox 11"/>
+          <p:cNvSpPr txBox="1"/>
+          <p:nvPr/>
+        </p:nvSpPr>
+        <p:spPr>
+          <a:xfrm>
+            <a:off x="9334500" y="3737991"/>
+            <a:ext cx="2171700" cy="2235708"/>
+          </a:xfrm>
+          <a:prstGeom prst="rect">
+            <a:avLst/>
+          </a:prstGeom>
+          <a:noFill/>
+        </p:spPr>
+        <p:txBody>
+          <a:bodyPr wrap="square" lIns="0" rIns="0" tIns="0" bIns="0" anchor="t">
+            <a:spAutoFit/>
+          </a:bodyPr>
+          <a:lstStyle/>
+          <a:p>
+            <a:pPr algn="l">
+              <a:lnSpc>
+                <a:spcPct val="140000"/>
+              </a:lnSpc>
+              <a:spcAft>
+                <a:spcPts val="600"/>
+              </a:spcAft>
+            </a:pPr>
+            <a:r>
+              <a:rPr sz="1200" b="0" i="0">
+                <a:solidFill>
+                  <a:srgbClr val="3A3A44"/>
+                </a:solidFill>
+                <a:latin typeface="Roboto"/>
+              </a:rPr>
+              <a:t>Container é processo isolado por mecanismo de kernel.</a:t>
+            </a:r>
+          </a:p>
+          <a:p>
+            <a:pPr>
+              <a:lnSpc>
+                <a:spcPct val="140000"/>
+              </a:lnSpc>
+              <a:spcAft>
+                <a:spcPts val="600"/>
+              </a:spcAft>
+            </a:pPr>
+            <a:r>
+              <a:rPr sz="1200" b="0" i="0">
+                <a:solidFill>
+                  <a:srgbClr val="3A3A44"/>
+                </a:solidFill>
+                <a:latin typeface="Roboto"/>
+              </a:rPr>
+              <a:t/>
+            </a:r>
+          </a:p>
+          <a:p>
+            <a:pPr>
+              <a:lnSpc>
+                <a:spcPct val="140000"/>
+              </a:lnSpc>
+              <a:spcAft>
+                <a:spcPts val="600"/>
+              </a:spcAft>
+            </a:pPr>
+            <a:r>
+              <a:rPr sz="1200" b="0" i="0">
+                <a:solidFill>
+                  <a:srgbClr val="3A3A44"/>
+                </a:solidFill>
+                <a:latin typeface="Roboto"/>
+              </a:rPr>
+              <a:t>Imagem é artefato, container é ambiente de execução.</a:t>
+            </a:r>
+          </a:p>
+          <a:p>
+            <a:pPr>
+              <a:lnSpc>
+                <a:spcPct val="140000"/>
+              </a:lnSpc>
+              <a:spcAft>
+                <a:spcPts val="600"/>
+              </a:spcAft>
+            </a:pPr>
+            <a:r>
+              <a:rPr sz="1200" b="0" i="0">
+                <a:solidFill>
+                  <a:srgbClr val="3A3A44"/>
+                </a:solidFill>
+                <a:latin typeface="Roboto"/>
+              </a:rPr>
+              <a:t/>
+            </a:r>
+          </a:p>
+          <a:p>
+            <a:pPr>
+              <a:lnSpc>
+                <a:spcPct val="140000"/>
+              </a:lnSpc>
+              <a:spcAft>
+                <a:spcPts val="600"/>
+              </a:spcAft>
+            </a:pPr>
+            <a:r>
+              <a:rPr sz="1200" b="0" i="0">
+                <a:solidFill>
+                  <a:srgbClr val="3A3A44"/>
+                </a:solidFill>
+                <a:latin typeface="Roboto"/>
+              </a:rPr>
+              <a:t>A decisão arquitetural é a granularidade de tier.</a:t>
+            </a:r>
+          </a:p>
+        </p:txBody>
+      </p:sp>
+      <p:sp>
+        <p:nvSpPr>
           <p:cNvPr id="13" name="TextBox 12"/>
-          <p:cNvSpPr txBox="1"/>
-          <p:nvPr/>
-        </p:nvSpPr>
-        <p:spPr>
-          <a:xfrm>
-            <a:off x="6362700" y="3624834"/>
-            <a:ext cx="247650" cy="294437"/>
-          </a:xfrm>
-          <a:prstGeom prst="rect">
-            <a:avLst/>
-          </a:prstGeom>
-          <a:noFill/>
-        </p:spPr>
-        <p:txBody>
-          <a:bodyPr wrap="square" lIns="0" rIns="0" tIns="0" bIns="0" anchor="t">
-            <a:spAutoFit/>
-          </a:bodyPr>
-          <a:lstStyle/>
-          <a:p>
-            <a:pPr algn="l">
-              <a:lnSpc>
-                <a:spcPct val="120000"/>
-              </a:lnSpc>
-            </a:pPr>
-            <a:r>
-              <a:rPr sz="1450" b="1" i="0">
-                <a:solidFill>
-                  <a:srgbClr val="E94D1C"/>
-                </a:solidFill>
-                <a:latin typeface="Roboto"/>
-              </a:rPr>
-              <a:t>//</a:t>
-            </a:r>
-          </a:p>
-        </p:txBody>
-      </p:sp>
-      <p:sp>
-        <p:nvSpPr>
-          <p:cNvPr id="14" name="TextBox 13"/>
-          <p:cNvSpPr txBox="1"/>
-          <p:nvPr/>
-        </p:nvSpPr>
-        <p:spPr>
-          <a:xfrm>
-            <a:off x="6648450" y="3615309"/>
-            <a:ext cx="4857750" cy="95250"/>
-          </a:xfrm>
-          <a:prstGeom prst="rect">
-            <a:avLst/>
-          </a:prstGeom>
-          <a:noFill/>
-        </p:spPr>
-        <p:txBody>
-          <a:bodyPr wrap="square" lIns="0" rIns="0" tIns="0" bIns="0" anchor="t">
-            <a:spAutoFit/>
-          </a:bodyPr>
-          <a:lstStyle/>
-          <a:p>
-            <a:pPr algn="l">
-              <a:lnSpc>
-                <a:spcPct val="130000"/>
-              </a:lnSpc>
-            </a:pPr>
-            <a:r>
-              <a:rPr sz="1580" b="0" i="0">
-                <a:solidFill>
-                  <a:srgbClr val="1A1A1E"/>
-                </a:solidFill>
-                <a:latin typeface="Roboto"/>
-              </a:rPr>
-              <a:t>Um arquivo que descreve o ambiente inteiro e que qualquer um dos quatro sobe com um comando.</a:t>
-            </a:r>
-          </a:p>
-        </p:txBody>
-      </p:sp>
-      <p:sp>
-        <p:nvSpPr>
-          <p:cNvPr id="15" name="TextBox 14"/>
-          <p:cNvSpPr txBox="1"/>
-          <p:nvPr/>
-        </p:nvSpPr>
-        <p:spPr>
-          <a:xfrm>
-            <a:off x="6362700" y="4419600"/>
-            <a:ext cx="247650" cy="294437"/>
-          </a:xfrm>
-          <a:prstGeom prst="rect">
-            <a:avLst/>
-          </a:prstGeom>
-          <a:noFill/>
-        </p:spPr>
-        <p:txBody>
-          <a:bodyPr wrap="square" lIns="0" rIns="0" tIns="0" bIns="0" anchor="t">
-            <a:spAutoFit/>
-          </a:bodyPr>
-          <a:lstStyle/>
-          <a:p>
-            <a:pPr algn="l">
-              <a:lnSpc>
-                <a:spcPct val="120000"/>
-              </a:lnSpc>
-            </a:pPr>
-            <a:r>
-              <a:rPr sz="1450" b="1" i="0">
-                <a:solidFill>
-                  <a:srgbClr val="E94D1C"/>
-                </a:solidFill>
-                <a:latin typeface="Roboto"/>
-              </a:rPr>
-              <a:t>//</a:t>
-            </a:r>
-          </a:p>
-        </p:txBody>
-      </p:sp>
-      <p:sp>
-        <p:nvSpPr>
-          <p:cNvPr id="16" name="TextBox 15"/>
-          <p:cNvSpPr txBox="1"/>
-          <p:nvPr/>
-        </p:nvSpPr>
-        <p:spPr>
-          <a:xfrm>
-            <a:off x="6648450" y="4410075"/>
-            <a:ext cx="4857750" cy="95250"/>
-          </a:xfrm>
-          <a:prstGeom prst="rect">
-            <a:avLst/>
-          </a:prstGeom>
-          <a:noFill/>
-        </p:spPr>
-        <p:txBody>
-          <a:bodyPr wrap="square" lIns="0" rIns="0" tIns="0" bIns="0" anchor="t">
-            <a:spAutoFit/>
-          </a:bodyPr>
-          <a:lstStyle/>
-          <a:p>
-            <a:pPr algn="l">
-              <a:lnSpc>
-                <a:spcPct val="130000"/>
-              </a:lnSpc>
-            </a:pPr>
-            <a:r>
-              <a:rPr sz="1580" b="0" i="0">
-                <a:solidFill>
-                  <a:srgbClr val="1A1A1E"/>
-                </a:solidFill>
-                <a:latin typeface="Roboto"/>
-              </a:rPr>
-              <a:t>E que vira o diagrama de implantação do item #60.</a:t>
-            </a:r>
-          </a:p>
-        </p:txBody>
-      </p:sp>
-      <p:sp>
-        <p:nvSpPr>
-          <p:cNvPr id="17" name="TextBox 16"/>
           <p:cNvSpPr txBox="1"/>
           <p:nvPr/>
         </p:nvSpPr>
@@ -29439,7 +29051,7 @@
       </p:sp>
       <p:sp>
         <p:nvSpPr>
-          <p:cNvPr id="18" name="TextBox 17"/>
+          <p:cNvPr id="14" name="TextBox 13"/>
           <p:cNvSpPr txBox="1"/>
           <p:nvPr/>
         </p:nvSpPr>
@@ -30064,7 +29676,7 @@
                 </a:solidFill>
                 <a:latin typeface="Roboto"/>
               </a:rPr>
-              <a:t>O QUE NÃO ESTAMOS AFIRMANDO</a:t>
+              <a:t>FONTES CITADAS</a:t>
             </a:r>
           </a:p>
         </p:txBody>
@@ -30103,7 +29715,7 @@
                 </a:solidFill>
                 <a:latin typeface="Roboto"/>
               </a:rPr>
-              <a:t>Pendências, com número de item</a:t>
+              <a:t>Referências</a:t>
             </a:r>
           </a:p>
         </p:txBody>
@@ -30116,8 +29728,8 @@
         </p:nvSpPr>
         <p:spPr>
           <a:xfrm>
-            <a:off x="685800" y="2899410"/>
-            <a:ext cx="247650" cy="308458"/>
+            <a:off x="685800" y="2267712"/>
+            <a:ext cx="247650" cy="252374"/>
           </a:xfrm>
           <a:prstGeom prst="rect">
             <a:avLst/>
@@ -30136,7 +29748,7 @@
               </a:lnSpc>
             </a:pPr>
             <a:r>
-              <a:rPr sz="1520" b="1" i="0">
+              <a:rPr sz="1240" b="1" i="0">
                 <a:solidFill>
                   <a:srgbClr val="E94D1C"/>
                 </a:solidFill>
@@ -30155,8 +29767,8 @@
         </p:nvSpPr>
         <p:spPr>
           <a:xfrm>
-            <a:off x="971550" y="2889885"/>
-            <a:ext cx="7486650" cy="95250"/>
+            <a:off x="971550" y="2258187"/>
+            <a:ext cx="9677400" cy="95250"/>
           </a:xfrm>
           <a:prstGeom prst="rect">
             <a:avLst/>
@@ -30175,13 +29787,13 @@
               </a:lnSpc>
             </a:pPr>
             <a:r>
-              <a:rPr sz="1650" b="0" i="0">
+              <a:rPr sz="1350" b="0" i="0">
                 <a:solidFill>
                   <a:srgbClr val="1A1A1E"/>
                 </a:solidFill>
                 <a:latin typeface="Roboto"/>
               </a:rPr>
-              <a:t>Os itens #58 a #63 da Sprint 2 estão em To Do. Isto é insumo desses itens, não relato de item concluído.</a:t>
+              <a:t>Open Container Initiative. Runtime Spec, Image Spec e Distribution Spec. Linux Foundation, fundada em 2015.</a:t>
             </a:r>
           </a:p>
         </p:txBody>
@@ -30194,8 +29806,8 @@
         </p:nvSpPr>
         <p:spPr>
           <a:xfrm>
-            <a:off x="685800" y="3738372"/>
-            <a:ext cx="247650" cy="308458"/>
+            <a:off x="685800" y="2703576"/>
+            <a:ext cx="247650" cy="252374"/>
           </a:xfrm>
           <a:prstGeom prst="rect">
             <a:avLst/>
@@ -30214,7 +29826,7 @@
               </a:lnSpc>
             </a:pPr>
             <a:r>
-              <a:rPr sz="1520" b="1" i="0">
+              <a:rPr sz="1240" b="1" i="0">
                 <a:solidFill>
                   <a:srgbClr val="E94D1C"/>
                 </a:solidFill>
@@ -30233,8 +29845,8 @@
         </p:nvSpPr>
         <p:spPr>
           <a:xfrm>
-            <a:off x="971550" y="3728847"/>
-            <a:ext cx="7486650" cy="95250"/>
+            <a:off x="971550" y="2694051"/>
+            <a:ext cx="9677400" cy="95250"/>
           </a:xfrm>
           <a:prstGeom prst="rect">
             <a:avLst/>
@@ -30253,13 +29865,13 @@
               </a:lnSpc>
             </a:pPr>
             <a:r>
-              <a:rPr sz="1650" b="0" i="0">
+              <a:rPr sz="1350" b="0" i="0">
                 <a:solidFill>
                   <a:srgbClr val="1A1A1E"/>
                 </a:solidFill>
                 <a:latin typeface="Roboto"/>
               </a:rPr>
-              <a:t>O #63, onde a stack será decidida, ainda não foi escrito.</a:t>
+              <a:t>WIGGINS, A. The Twelve-Factor App, 2011.</a:t>
             </a:r>
           </a:p>
         </p:txBody>
@@ -30272,8 +29884,8 @@
         </p:nvSpPr>
         <p:spPr>
           <a:xfrm>
-            <a:off x="685800" y="4300728"/>
-            <a:ext cx="247650" cy="308458"/>
+            <a:off x="685800" y="3139440"/>
+            <a:ext cx="247650" cy="252374"/>
           </a:xfrm>
           <a:prstGeom prst="rect">
             <a:avLst/>
@@ -30292,7 +29904,7 @@
               </a:lnSpc>
             </a:pPr>
             <a:r>
-              <a:rPr sz="1520" b="1" i="0">
+              <a:rPr sz="1240" b="1" i="0">
                 <a:solidFill>
                   <a:srgbClr val="E94D1C"/>
                 </a:solidFill>
@@ -30311,8 +29923,8 @@
         </p:nvSpPr>
         <p:spPr>
           <a:xfrm>
-            <a:off x="971550" y="4291203"/>
-            <a:ext cx="7486650" cy="95250"/>
+            <a:off x="971550" y="3129915"/>
+            <a:ext cx="9677400" cy="95250"/>
           </a:xfrm>
           <a:prstGeom prst="rect">
             <a:avLst/>
@@ -30331,13 +29943,13 @@
               </a:lnSpc>
             </a:pPr>
             <a:r>
-              <a:rPr sz="1650" b="0" i="0">
+              <a:rPr sz="1350" b="0" i="0">
                 <a:solidFill>
                   <a:srgbClr val="1A1A1E"/>
                 </a:solidFill>
                 <a:latin typeface="Roboto"/>
               </a:rPr>
-              <a:t>Os itens #56 e #57 da Sprint 1 seguem em Doing.</a:t>
+              <a:t>FELTER, W. et al. An updated performance comparison of virtual machines and Linux containers. IBM Research Report, 2015.</a:t>
             </a:r>
           </a:p>
         </p:txBody>
@@ -30350,8 +29962,8 @@
         </p:nvSpPr>
         <p:spPr>
           <a:xfrm>
-            <a:off x="685800" y="4863084"/>
-            <a:ext cx="247650" cy="308458"/>
+            <a:off x="685800" y="3801618"/>
+            <a:ext cx="247650" cy="252374"/>
           </a:xfrm>
           <a:prstGeom prst="rect">
             <a:avLst/>
@@ -30370,7 +29982,7 @@
               </a:lnSpc>
             </a:pPr>
             <a:r>
-              <a:rPr sz="1520" b="1" i="0">
+              <a:rPr sz="1240" b="1" i="0">
                 <a:solidFill>
                   <a:srgbClr val="E94D1C"/>
                 </a:solidFill>
@@ -30389,8 +30001,8 @@
         </p:nvSpPr>
         <p:spPr>
           <a:xfrm>
-            <a:off x="971550" y="4853559"/>
-            <a:ext cx="7486650" cy="95250"/>
+            <a:off x="971550" y="3792093"/>
+            <a:ext cx="9677400" cy="95250"/>
           </a:xfrm>
           <a:prstGeom prst="rect">
             <a:avLst/>
@@ -30409,58 +30021,53 @@
               </a:lnSpc>
             </a:pPr>
             <a:r>
-              <a:rPr sz="1650" b="0" i="0">
+              <a:rPr sz="1350" b="0" i="0">
                 <a:solidFill>
                   <a:srgbClr val="1A1A1E"/>
                 </a:solidFill>
                 <a:latin typeface="Roboto"/>
               </a:rPr>
-              <a:t>A Sprint 2 fecha no dia 14.</a:t>
-            </a:r>
-          </a:p>
-        </p:txBody>
-      </p:sp>
-      <p:sp>
-        <p:nvSpPr>
-          <p:cNvPr id="13" name="Document 12"/>
-          <p:cNvSpPr/>
-          <p:nvPr/>
-        </p:nvSpPr>
-        <p:spPr>
-          <a:xfrm>
-            <a:off x="9124950" y="2889885"/>
-            <a:ext cx="142875" cy="133350"/>
-          </a:xfrm>
-          <a:prstGeom prst="flowChartDocument">
-            <a:avLst/>
-          </a:prstGeom>
-          <a:noFill/>
-          <a:ln w="19050">
-            <a:solidFill>
-              <a:srgbClr val="E94D1C"/>
-            </a:solidFill>
-          </a:ln>
-          <a:effectLst/>
-        </p:spPr>
-        <p:style>
-          <a:lnRef idx="1">
-            <a:schemeClr val="accent1"/>
-          </a:lnRef>
-          <a:fillRef idx="3">
-            <a:schemeClr val="accent1"/>
-          </a:fillRef>
-          <a:effectRef idx="2">
-            <a:schemeClr val="accent1"/>
-          </a:effectRef>
-          <a:fontRef idx="minor">
-            <a:schemeClr val="lt1"/>
-          </a:fontRef>
-        </p:style>
-        <p:txBody>
-          <a:bodyPr rtlCol="0" anchor="ctr"/>
-          <a:lstStyle/>
-          <a:p>
-            <a:pPr algn="ctr"/>
+              <a:t>MERKEL, D. Docker: lightweight Linux containers for consistent development and deployment. Linux Journal, 2014.</a:t>
+            </a:r>
+          </a:p>
+        </p:txBody>
+      </p:sp>
+      <p:sp>
+        <p:nvSpPr>
+          <p:cNvPr id="13" name="TextBox 12"/>
+          <p:cNvSpPr txBox="1"/>
+          <p:nvPr/>
+        </p:nvSpPr>
+        <p:spPr>
+          <a:xfrm>
+            <a:off x="685800" y="4237482"/>
+            <a:ext cx="247650" cy="252374"/>
+          </a:xfrm>
+          <a:prstGeom prst="rect">
+            <a:avLst/>
+          </a:prstGeom>
+          <a:noFill/>
+        </p:spPr>
+        <p:txBody>
+          <a:bodyPr wrap="square" lIns="0" rIns="0" tIns="0" bIns="0" anchor="t">
+            <a:spAutoFit/>
+          </a:bodyPr>
+          <a:lstStyle/>
+          <a:p>
+            <a:pPr algn="l">
+              <a:lnSpc>
+                <a:spcPct val="120000"/>
+              </a:lnSpc>
+            </a:pPr>
+            <a:r>
+              <a:rPr sz="1240" b="1" i="0">
+                <a:solidFill>
+                  <a:srgbClr val="E94D1C"/>
+                </a:solidFill>
+                <a:latin typeface="Roboto"/>
+              </a:rPr>
+              <a:t>//</a:t>
+            </a:r>
           </a:p>
         </p:txBody>
       </p:sp>
@@ -30472,8 +30079,8 @@
         </p:nvSpPr>
         <p:spPr>
           <a:xfrm>
-            <a:off x="9372600" y="2899410"/>
-            <a:ext cx="2133600" cy="182880"/>
+            <a:off x="971550" y="4227957"/>
+            <a:ext cx="9677400" cy="95250"/>
           </a:xfrm>
           <a:prstGeom prst="rect">
             <a:avLst/>
@@ -30488,62 +30095,57 @@
           <a:p>
             <a:pPr algn="l">
               <a:lnSpc>
+                <a:spcPct val="130000"/>
+              </a:lnSpc>
+            </a:pPr>
+            <a:r>
+              <a:rPr sz="1350" b="0" i="0">
+                <a:solidFill>
+                  <a:srgbClr val="1A1A1E"/>
+                </a:solidFill>
+                <a:latin typeface="Roboto"/>
+              </a:rPr>
+              <a:t>NIST SP 800-190. Application Container Security Guide.</a:t>
+            </a:r>
+          </a:p>
+        </p:txBody>
+      </p:sp>
+      <p:sp>
+        <p:nvSpPr>
+          <p:cNvPr id="15" name="TextBox 14"/>
+          <p:cNvSpPr txBox="1"/>
+          <p:nvPr/>
+        </p:nvSpPr>
+        <p:spPr>
+          <a:xfrm>
+            <a:off x="685800" y="4673346"/>
+            <a:ext cx="247650" cy="252374"/>
+          </a:xfrm>
+          <a:prstGeom prst="rect">
+            <a:avLst/>
+          </a:prstGeom>
+          <a:noFill/>
+        </p:spPr>
+        <p:txBody>
+          <a:bodyPr wrap="square" lIns="0" rIns="0" tIns="0" bIns="0" anchor="t">
+            <a:spAutoFit/>
+          </a:bodyPr>
+          <a:lstStyle/>
+          <a:p>
+            <a:pPr algn="l">
+              <a:lnSpc>
                 <a:spcPct val="120000"/>
               </a:lnSpc>
             </a:pPr>
             <a:r>
-              <a:rPr sz="900" b="1" i="0" spc="120">
+              <a:rPr sz="1240" b="1" i="0">
                 <a:solidFill>
                   <a:srgbClr val="E94D1C"/>
                 </a:solidFill>
                 <a:latin typeface="Roboto"/>
               </a:rPr>
-              <a:t>PARA LEVAR PARA A P1</a:t>
-            </a:r>
-          </a:p>
-        </p:txBody>
-      </p:sp>
-      <p:sp>
-        <p:nvSpPr>
-          <p:cNvPr id="15" name="Rectangle 14"/>
-          <p:cNvSpPr/>
-          <p:nvPr/>
-        </p:nvSpPr>
-        <p:spPr>
-          <a:xfrm>
-            <a:off x="9124950" y="3175635"/>
-            <a:ext cx="38100" cy="1664208"/>
-          </a:xfrm>
-          <a:prstGeom prst="rect">
-            <a:avLst/>
-          </a:prstGeom>
-          <a:solidFill>
-            <a:srgbClr val="E94D1C"/>
-          </a:solidFill>
-          <a:ln>
-            <a:noFill/>
-          </a:ln>
-          <a:effectLst/>
-        </p:spPr>
-        <p:style>
-          <a:lnRef idx="1">
-            <a:schemeClr val="accent1"/>
-          </a:lnRef>
-          <a:fillRef idx="3">
-            <a:schemeClr val="accent1"/>
-          </a:fillRef>
-          <a:effectRef idx="2">
-            <a:schemeClr val="accent1"/>
-          </a:effectRef>
-          <a:fontRef idx="minor">
-            <a:schemeClr val="lt1"/>
-          </a:fontRef>
-        </p:style>
-        <p:txBody>
-          <a:bodyPr rtlCol="0" anchor="ctr" wrap="square" lIns="0" rIns="0" tIns="0" bIns="0"/>
-          <a:lstStyle/>
-          <a:p>
-            <a:pPr algn="ctr"/>
+              <a:t>//</a:t>
+            </a:r>
           </a:p>
         </p:txBody>
       </p:sp>
@@ -30555,8 +30157,8 @@
         </p:nvSpPr>
         <p:spPr>
           <a:xfrm>
-            <a:off x="9334500" y="3175635"/>
-            <a:ext cx="2171700" cy="2235708"/>
+            <a:off x="971550" y="4663821"/>
+            <a:ext cx="9677400" cy="95250"/>
           </a:xfrm>
           <a:prstGeom prst="rect">
             <a:avLst/>
@@ -30571,96 +30173,17 @@
           <a:p>
             <a:pPr algn="l">
               <a:lnSpc>
-                <a:spcPct val="140000"/>
-              </a:lnSpc>
-              <a:spcAft>
-                <a:spcPts val="600"/>
-              </a:spcAft>
-            </a:pPr>
-            <a:r>
-              <a:rPr sz="1200" b="0" i="0">
-                <a:solidFill>
-                  <a:srgbClr val="3A3A44"/>
-                </a:solidFill>
-                <a:latin typeface="Roboto"/>
-              </a:rPr>
-              <a:t>Container é processo isolado por mecanismo de kernel.</a:t>
-            </a:r>
-          </a:p>
-          <a:p>
-            <a:pPr>
-              <a:lnSpc>
-                <a:spcPct val="140000"/>
-              </a:lnSpc>
-              <a:spcAft>
-                <a:spcPts val="600"/>
-              </a:spcAft>
-            </a:pPr>
-            <a:r>
-              <a:rPr sz="1200" b="0" i="0">
-                <a:solidFill>
-                  <a:srgbClr val="3A3A44"/>
-                </a:solidFill>
-                <a:latin typeface="Roboto"/>
-              </a:rPr>
-              <a:t/>
-            </a:r>
-          </a:p>
-          <a:p>
-            <a:pPr>
-              <a:lnSpc>
-                <a:spcPct val="140000"/>
-              </a:lnSpc>
-              <a:spcAft>
-                <a:spcPts val="600"/>
-              </a:spcAft>
-            </a:pPr>
-            <a:r>
-              <a:rPr sz="1200" b="0" i="0">
-                <a:solidFill>
-                  <a:srgbClr val="3A3A44"/>
-                </a:solidFill>
-                <a:latin typeface="Roboto"/>
-              </a:rPr>
-              <a:t>Imagem é artefato, container é ambiente de execução.</a:t>
-            </a:r>
-          </a:p>
-          <a:p>
-            <a:pPr>
-              <a:lnSpc>
-                <a:spcPct val="140000"/>
-              </a:lnSpc>
-              <a:spcAft>
-                <a:spcPts val="600"/>
-              </a:spcAft>
-            </a:pPr>
-            <a:r>
-              <a:rPr sz="1200" b="0" i="0">
-                <a:solidFill>
-                  <a:srgbClr val="3A3A44"/>
-                </a:solidFill>
-                <a:latin typeface="Roboto"/>
-              </a:rPr>
-              <a:t/>
-            </a:r>
-          </a:p>
-          <a:p>
-            <a:pPr>
-              <a:lnSpc>
-                <a:spcPct val="140000"/>
-              </a:lnSpc>
-              <a:spcAft>
-                <a:spcPts val="600"/>
-              </a:spcAft>
-            </a:pPr>
-            <a:r>
-              <a:rPr sz="1200" b="0" i="0">
-                <a:solidFill>
-                  <a:srgbClr val="3A3A44"/>
-                </a:solidFill>
-                <a:latin typeface="Roboto"/>
-              </a:rPr>
-              <a:t>A decisão arquitetural é a granularidade de tier.</a:t>
+                <a:spcPct val="130000"/>
+              </a:lnSpc>
+            </a:pPr>
+            <a:r>
+              <a:rPr sz="1350" b="0" i="0">
+                <a:solidFill>
+                  <a:srgbClr val="1A1A1E"/>
+                </a:solidFill>
+                <a:latin typeface="Roboto"/>
+              </a:rPr>
+              <a:t>SOMMERVILLE, I. Engenharia de Software. 6. ed. Addison Wesley, 2004.</a:t>
             </a:r>
           </a:p>
         </p:txBody>
@@ -30668,6 +30191,162 @@
       <p:sp>
         <p:nvSpPr>
           <p:cNvPr id="17" name="TextBox 16"/>
+          <p:cNvSpPr txBox="1"/>
+          <p:nvPr/>
+        </p:nvSpPr>
+        <p:spPr>
+          <a:xfrm>
+            <a:off x="685800" y="5109210"/>
+            <a:ext cx="247650" cy="252374"/>
+          </a:xfrm>
+          <a:prstGeom prst="rect">
+            <a:avLst/>
+          </a:prstGeom>
+          <a:noFill/>
+        </p:spPr>
+        <p:txBody>
+          <a:bodyPr wrap="square" lIns="0" rIns="0" tIns="0" bIns="0" anchor="t">
+            <a:spAutoFit/>
+          </a:bodyPr>
+          <a:lstStyle/>
+          <a:p>
+            <a:pPr algn="l">
+              <a:lnSpc>
+                <a:spcPct val="120000"/>
+              </a:lnSpc>
+            </a:pPr>
+            <a:r>
+              <a:rPr sz="1240" b="1" i="0">
+                <a:solidFill>
+                  <a:srgbClr val="E94D1C"/>
+                </a:solidFill>
+                <a:latin typeface="Roboto"/>
+              </a:rPr>
+              <a:t>//</a:t>
+            </a:r>
+          </a:p>
+        </p:txBody>
+      </p:sp>
+      <p:sp>
+        <p:nvSpPr>
+          <p:cNvPr id="18" name="TextBox 17"/>
+          <p:cNvSpPr txBox="1"/>
+          <p:nvPr/>
+        </p:nvSpPr>
+        <p:spPr>
+          <a:xfrm>
+            <a:off x="971550" y="5099685"/>
+            <a:ext cx="9677400" cy="95250"/>
+          </a:xfrm>
+          <a:prstGeom prst="rect">
+            <a:avLst/>
+          </a:prstGeom>
+          <a:noFill/>
+        </p:spPr>
+        <p:txBody>
+          <a:bodyPr wrap="square" lIns="0" rIns="0" tIns="0" bIns="0" anchor="t">
+            <a:spAutoFit/>
+          </a:bodyPr>
+          <a:lstStyle/>
+          <a:p>
+            <a:pPr algn="l">
+              <a:lnSpc>
+                <a:spcPct val="130000"/>
+              </a:lnSpc>
+            </a:pPr>
+            <a:r>
+              <a:rPr sz="1350" b="0" i="0">
+                <a:solidFill>
+                  <a:srgbClr val="1A1A1E"/>
+                </a:solidFill>
+                <a:latin typeface="Roboto"/>
+              </a:rPr>
+              <a:t>FOWLER, M. Patterns of Enterprise Application Architecture. Addison Wesley, 2002.</a:t>
+            </a:r>
+          </a:p>
+        </p:txBody>
+      </p:sp>
+      <p:sp>
+        <p:nvSpPr>
+          <p:cNvPr id="19" name="TextBox 18"/>
+          <p:cNvSpPr txBox="1"/>
+          <p:nvPr/>
+        </p:nvSpPr>
+        <p:spPr>
+          <a:xfrm>
+            <a:off x="685800" y="5545074"/>
+            <a:ext cx="247650" cy="252374"/>
+          </a:xfrm>
+          <a:prstGeom prst="rect">
+            <a:avLst/>
+          </a:prstGeom>
+          <a:noFill/>
+        </p:spPr>
+        <p:txBody>
+          <a:bodyPr wrap="square" lIns="0" rIns="0" tIns="0" bIns="0" anchor="t">
+            <a:spAutoFit/>
+          </a:bodyPr>
+          <a:lstStyle/>
+          <a:p>
+            <a:pPr algn="l">
+              <a:lnSpc>
+                <a:spcPct val="120000"/>
+              </a:lnSpc>
+            </a:pPr>
+            <a:r>
+              <a:rPr sz="1240" b="1" i="0">
+                <a:solidFill>
+                  <a:srgbClr val="E94D1C"/>
+                </a:solidFill>
+                <a:latin typeface="Roboto"/>
+              </a:rPr>
+              <a:t>//</a:t>
+            </a:r>
+          </a:p>
+        </p:txBody>
+      </p:sp>
+      <p:sp>
+        <p:nvSpPr>
+          <p:cNvPr id="20" name="TextBox 19"/>
+          <p:cNvSpPr txBox="1"/>
+          <p:nvPr/>
+        </p:nvSpPr>
+        <p:spPr>
+          <a:xfrm>
+            <a:off x="971550" y="5535549"/>
+            <a:ext cx="9677400" cy="95250"/>
+          </a:xfrm>
+          <a:prstGeom prst="rect">
+            <a:avLst/>
+          </a:prstGeom>
+          <a:noFill/>
+        </p:spPr>
+        <p:txBody>
+          <a:bodyPr wrap="square" lIns="0" rIns="0" tIns="0" bIns="0" anchor="t">
+            <a:spAutoFit/>
+          </a:bodyPr>
+          <a:lstStyle/>
+          <a:p>
+            <a:pPr algn="l">
+              <a:lnSpc>
+                <a:spcPct val="130000"/>
+              </a:lnSpc>
+            </a:pPr>
+            <a:r>
+              <a:rPr sz="1350" b="0" i="0">
+                <a:solidFill>
+                  <a:srgbClr val="1A1A1E"/>
+                </a:solidFill>
+                <a:latin typeface="Roboto"/>
+              </a:rPr>
+              <a:t>FARIAS, K. Aula 03, Arquiteturas em Camadas. Aula 05, Arquiteturas Baseadas em Componentes.</a:t>
+            </a:r>
+          </a:p>
+        </p:txBody>
+      </p:sp>
+      <p:sp>
+        <p:nvSpPr>
+          <p:cNvPr id="21" name="TextBox 20"/>
           <p:cNvSpPr txBox="1"/>
           <p:nvPr/>
         </p:nvSpPr>
@@ -30699,14 +30378,14 @@
                 </a:solidFill>
                 <a:latin typeface="Roboto"/>
               </a:rPr>
-              <a:t>Considerações finais</a:t>
-            </a:r>
-          </a:p>
-        </p:txBody>
-      </p:sp>
-      <p:sp>
-        <p:nvSpPr>
-          <p:cNvPr id="18" name="TextBox 17"/>
+              <a:t>Referências</a:t>
+            </a:r>
+          </a:p>
+        </p:txBody>
+      </p:sp>
+      <p:sp>
+        <p:nvSpPr>
+          <p:cNvPr id="22" name="TextBox 21"/>
           <p:cNvSpPr txBox="1"/>
           <p:nvPr/>
         </p:nvSpPr>
@@ -30739,836 +30418,6 @@
                 <a:latin typeface="Roboto"/>
               </a:rPr>
               <a:t>30</a:t>
-            </a:r>
-          </a:p>
-        </p:txBody>
-      </p:sp>
-    </p:spTree>
-  </p:cSld>
-  <p:clrMapOvr>
-    <a:masterClrMapping/>
-  </p:clrMapOvr>
-</p:sld>
-</file>
-
-<file path=ppt/slides/slide31.xml><?xml version="1.0" encoding="utf-8"?>
-<p:sld xmlns:a="http://schemas.openxmlformats.org/drawingml/2006/main" xmlns:p="http://schemas.openxmlformats.org/presentationml/2006/main" xmlns:r="http://schemas.openxmlformats.org/officeDocument/2006/relationships">
-  <p:cSld>
-    <p:bg>
-      <p:bgPr>
-        <a:solidFill>
-          <a:srgbClr val="FFFFFF"/>
-        </a:solidFill>
-        <a:effectLst/>
-      </p:bgPr>
-    </p:bg>
-    <p:spTree>
-      <p:nvGrpSpPr>
-        <p:cNvPr id="1" name=""/>
-        <p:cNvGrpSpPr/>
-        <p:nvPr/>
-      </p:nvGrpSpPr>
-      <p:grpSpPr/>
-      <p:pic>
-        <p:nvPicPr>
-          <p:cNvPr id="2" name="Picture 1" descr="u-azul.png"/>
-          <p:cNvPicPr>
-            <a:picLocks noChangeAspect="1"/>
-          </p:cNvPicPr>
-          <p:nvPr/>
-        </p:nvPicPr>
-        <p:blipFill>
-          <a:blip r:embed="rId2"/>
-          <a:stretch>
-            <a:fillRect/>
-          </a:stretch>
-        </p:blipFill>
-        <p:spPr>
-          <a:xfrm>
-            <a:off x="10744200" y="457200"/>
-            <a:ext cx="342900" cy="342900"/>
-          </a:xfrm>
-          <a:prstGeom prst="rect">
-            <a:avLst/>
-          </a:prstGeom>
-        </p:spPr>
-      </p:pic>
-      <p:sp>
-        <p:nvSpPr>
-          <p:cNvPr id="3" name="TextBox 2"/>
-          <p:cNvSpPr txBox="1"/>
-          <p:nvPr/>
-        </p:nvSpPr>
-        <p:spPr>
-          <a:xfrm>
-            <a:off x="685800" y="628650"/>
-            <a:ext cx="10820400" cy="198120"/>
-          </a:xfrm>
-          <a:prstGeom prst="rect">
-            <a:avLst/>
-          </a:prstGeom>
-          <a:noFill/>
-        </p:spPr>
-        <p:txBody>
-          <a:bodyPr wrap="square" lIns="0" rIns="0" tIns="0" bIns="0" anchor="t">
-            <a:spAutoFit/>
-          </a:bodyPr>
-          <a:lstStyle/>
-          <a:p>
-            <a:pPr algn="l">
-              <a:lnSpc>
-                <a:spcPct val="120000"/>
-              </a:lnSpc>
-            </a:pPr>
-            <a:r>
-              <a:rPr sz="980" b="1" i="0" spc="160">
-                <a:solidFill>
-                  <a:srgbClr val="E94D1C"/>
-                </a:solidFill>
-                <a:latin typeface="Roboto"/>
-              </a:rPr>
-              <a:t>FONTES CITADAS</a:t>
-            </a:r>
-          </a:p>
-        </p:txBody>
-      </p:sp>
-      <p:sp>
-        <p:nvSpPr>
-          <p:cNvPr id="4" name="TextBox 3"/>
-          <p:cNvSpPr txBox="1"/>
-          <p:nvPr/>
-        </p:nvSpPr>
-        <p:spPr>
-          <a:xfrm>
-            <a:off x="685800" y="838200"/>
-            <a:ext cx="9620250" cy="1524000"/>
-          </a:xfrm>
-          <a:prstGeom prst="rect">
-            <a:avLst/>
-          </a:prstGeom>
-          <a:noFill/>
-        </p:spPr>
-        <p:txBody>
-          <a:bodyPr wrap="square" lIns="0" rIns="0" tIns="0" bIns="0" anchor="t">
-            <a:spAutoFit/>
-          </a:bodyPr>
-          <a:lstStyle/>
-          <a:p>
-            <a:pPr algn="l">
-              <a:lnSpc>
-                <a:spcPct val="104000"/>
-              </a:lnSpc>
-            </a:pPr>
-            <a:r>
-              <a:rPr sz="3000" b="1" i="0">
-                <a:solidFill>
-                  <a:srgbClr val="21049A"/>
-                </a:solidFill>
-                <a:latin typeface="Roboto"/>
-              </a:rPr>
-              <a:t>Referências</a:t>
-            </a:r>
-          </a:p>
-        </p:txBody>
-      </p:sp>
-      <p:sp>
-        <p:nvSpPr>
-          <p:cNvPr id="5" name="TextBox 4"/>
-          <p:cNvSpPr txBox="1"/>
-          <p:nvPr/>
-        </p:nvSpPr>
-        <p:spPr>
-          <a:xfrm>
-            <a:off x="685800" y="2267712"/>
-            <a:ext cx="247650" cy="252374"/>
-          </a:xfrm>
-          <a:prstGeom prst="rect">
-            <a:avLst/>
-          </a:prstGeom>
-          <a:noFill/>
-        </p:spPr>
-        <p:txBody>
-          <a:bodyPr wrap="square" lIns="0" rIns="0" tIns="0" bIns="0" anchor="t">
-            <a:spAutoFit/>
-          </a:bodyPr>
-          <a:lstStyle/>
-          <a:p>
-            <a:pPr algn="l">
-              <a:lnSpc>
-                <a:spcPct val="120000"/>
-              </a:lnSpc>
-            </a:pPr>
-            <a:r>
-              <a:rPr sz="1240" b="1" i="0">
-                <a:solidFill>
-                  <a:srgbClr val="E94D1C"/>
-                </a:solidFill>
-                <a:latin typeface="Roboto"/>
-              </a:rPr>
-              <a:t>//</a:t>
-            </a:r>
-          </a:p>
-        </p:txBody>
-      </p:sp>
-      <p:sp>
-        <p:nvSpPr>
-          <p:cNvPr id="6" name="TextBox 5"/>
-          <p:cNvSpPr txBox="1"/>
-          <p:nvPr/>
-        </p:nvSpPr>
-        <p:spPr>
-          <a:xfrm>
-            <a:off x="971550" y="2258187"/>
-            <a:ext cx="9677400" cy="95250"/>
-          </a:xfrm>
-          <a:prstGeom prst="rect">
-            <a:avLst/>
-          </a:prstGeom>
-          <a:noFill/>
-        </p:spPr>
-        <p:txBody>
-          <a:bodyPr wrap="square" lIns="0" rIns="0" tIns="0" bIns="0" anchor="t">
-            <a:spAutoFit/>
-          </a:bodyPr>
-          <a:lstStyle/>
-          <a:p>
-            <a:pPr algn="l">
-              <a:lnSpc>
-                <a:spcPct val="130000"/>
-              </a:lnSpc>
-            </a:pPr>
-            <a:r>
-              <a:rPr sz="1350" b="0" i="0">
-                <a:solidFill>
-                  <a:srgbClr val="1A1A1E"/>
-                </a:solidFill>
-                <a:latin typeface="Roboto"/>
-              </a:rPr>
-              <a:t>Open Container Initiative. Runtime Spec, Image Spec e Distribution Spec. Linux Foundation, fundada em 2015.</a:t>
-            </a:r>
-          </a:p>
-        </p:txBody>
-      </p:sp>
-      <p:sp>
-        <p:nvSpPr>
-          <p:cNvPr id="7" name="TextBox 6"/>
-          <p:cNvSpPr txBox="1"/>
-          <p:nvPr/>
-        </p:nvSpPr>
-        <p:spPr>
-          <a:xfrm>
-            <a:off x="685800" y="2703576"/>
-            <a:ext cx="247650" cy="252374"/>
-          </a:xfrm>
-          <a:prstGeom prst="rect">
-            <a:avLst/>
-          </a:prstGeom>
-          <a:noFill/>
-        </p:spPr>
-        <p:txBody>
-          <a:bodyPr wrap="square" lIns="0" rIns="0" tIns="0" bIns="0" anchor="t">
-            <a:spAutoFit/>
-          </a:bodyPr>
-          <a:lstStyle/>
-          <a:p>
-            <a:pPr algn="l">
-              <a:lnSpc>
-                <a:spcPct val="120000"/>
-              </a:lnSpc>
-            </a:pPr>
-            <a:r>
-              <a:rPr sz="1240" b="1" i="0">
-                <a:solidFill>
-                  <a:srgbClr val="E94D1C"/>
-                </a:solidFill>
-                <a:latin typeface="Roboto"/>
-              </a:rPr>
-              <a:t>//</a:t>
-            </a:r>
-          </a:p>
-        </p:txBody>
-      </p:sp>
-      <p:sp>
-        <p:nvSpPr>
-          <p:cNvPr id="8" name="TextBox 7"/>
-          <p:cNvSpPr txBox="1"/>
-          <p:nvPr/>
-        </p:nvSpPr>
-        <p:spPr>
-          <a:xfrm>
-            <a:off x="971550" y="2694051"/>
-            <a:ext cx="9677400" cy="95250"/>
-          </a:xfrm>
-          <a:prstGeom prst="rect">
-            <a:avLst/>
-          </a:prstGeom>
-          <a:noFill/>
-        </p:spPr>
-        <p:txBody>
-          <a:bodyPr wrap="square" lIns="0" rIns="0" tIns="0" bIns="0" anchor="t">
-            <a:spAutoFit/>
-          </a:bodyPr>
-          <a:lstStyle/>
-          <a:p>
-            <a:pPr algn="l">
-              <a:lnSpc>
-                <a:spcPct val="130000"/>
-              </a:lnSpc>
-            </a:pPr>
-            <a:r>
-              <a:rPr sz="1350" b="0" i="0">
-                <a:solidFill>
-                  <a:srgbClr val="1A1A1E"/>
-                </a:solidFill>
-                <a:latin typeface="Roboto"/>
-              </a:rPr>
-              <a:t>WIGGINS, A. The Twelve-Factor App, 2011.</a:t>
-            </a:r>
-          </a:p>
-        </p:txBody>
-      </p:sp>
-      <p:sp>
-        <p:nvSpPr>
-          <p:cNvPr id="9" name="TextBox 8"/>
-          <p:cNvSpPr txBox="1"/>
-          <p:nvPr/>
-        </p:nvSpPr>
-        <p:spPr>
-          <a:xfrm>
-            <a:off x="685800" y="3139440"/>
-            <a:ext cx="247650" cy="252374"/>
-          </a:xfrm>
-          <a:prstGeom prst="rect">
-            <a:avLst/>
-          </a:prstGeom>
-          <a:noFill/>
-        </p:spPr>
-        <p:txBody>
-          <a:bodyPr wrap="square" lIns="0" rIns="0" tIns="0" bIns="0" anchor="t">
-            <a:spAutoFit/>
-          </a:bodyPr>
-          <a:lstStyle/>
-          <a:p>
-            <a:pPr algn="l">
-              <a:lnSpc>
-                <a:spcPct val="120000"/>
-              </a:lnSpc>
-            </a:pPr>
-            <a:r>
-              <a:rPr sz="1240" b="1" i="0">
-                <a:solidFill>
-                  <a:srgbClr val="E94D1C"/>
-                </a:solidFill>
-                <a:latin typeface="Roboto"/>
-              </a:rPr>
-              <a:t>//</a:t>
-            </a:r>
-          </a:p>
-        </p:txBody>
-      </p:sp>
-      <p:sp>
-        <p:nvSpPr>
-          <p:cNvPr id="10" name="TextBox 9"/>
-          <p:cNvSpPr txBox="1"/>
-          <p:nvPr/>
-        </p:nvSpPr>
-        <p:spPr>
-          <a:xfrm>
-            <a:off x="971550" y="3129915"/>
-            <a:ext cx="9677400" cy="95250"/>
-          </a:xfrm>
-          <a:prstGeom prst="rect">
-            <a:avLst/>
-          </a:prstGeom>
-          <a:noFill/>
-        </p:spPr>
-        <p:txBody>
-          <a:bodyPr wrap="square" lIns="0" rIns="0" tIns="0" bIns="0" anchor="t">
-            <a:spAutoFit/>
-          </a:bodyPr>
-          <a:lstStyle/>
-          <a:p>
-            <a:pPr algn="l">
-              <a:lnSpc>
-                <a:spcPct val="130000"/>
-              </a:lnSpc>
-            </a:pPr>
-            <a:r>
-              <a:rPr sz="1350" b="0" i="0">
-                <a:solidFill>
-                  <a:srgbClr val="1A1A1E"/>
-                </a:solidFill>
-                <a:latin typeface="Roboto"/>
-              </a:rPr>
-              <a:t>FELTER, W. et al. An updated performance comparison of virtual machines and Linux containers. IBM Research Report, 2015.</a:t>
-            </a:r>
-          </a:p>
-        </p:txBody>
-      </p:sp>
-      <p:sp>
-        <p:nvSpPr>
-          <p:cNvPr id="11" name="TextBox 10"/>
-          <p:cNvSpPr txBox="1"/>
-          <p:nvPr/>
-        </p:nvSpPr>
-        <p:spPr>
-          <a:xfrm>
-            <a:off x="685800" y="3801618"/>
-            <a:ext cx="247650" cy="252374"/>
-          </a:xfrm>
-          <a:prstGeom prst="rect">
-            <a:avLst/>
-          </a:prstGeom>
-          <a:noFill/>
-        </p:spPr>
-        <p:txBody>
-          <a:bodyPr wrap="square" lIns="0" rIns="0" tIns="0" bIns="0" anchor="t">
-            <a:spAutoFit/>
-          </a:bodyPr>
-          <a:lstStyle/>
-          <a:p>
-            <a:pPr algn="l">
-              <a:lnSpc>
-                <a:spcPct val="120000"/>
-              </a:lnSpc>
-            </a:pPr>
-            <a:r>
-              <a:rPr sz="1240" b="1" i="0">
-                <a:solidFill>
-                  <a:srgbClr val="E94D1C"/>
-                </a:solidFill>
-                <a:latin typeface="Roboto"/>
-              </a:rPr>
-              <a:t>//</a:t>
-            </a:r>
-          </a:p>
-        </p:txBody>
-      </p:sp>
-      <p:sp>
-        <p:nvSpPr>
-          <p:cNvPr id="12" name="TextBox 11"/>
-          <p:cNvSpPr txBox="1"/>
-          <p:nvPr/>
-        </p:nvSpPr>
-        <p:spPr>
-          <a:xfrm>
-            <a:off x="971550" y="3792093"/>
-            <a:ext cx="9677400" cy="95250"/>
-          </a:xfrm>
-          <a:prstGeom prst="rect">
-            <a:avLst/>
-          </a:prstGeom>
-          <a:noFill/>
-        </p:spPr>
-        <p:txBody>
-          <a:bodyPr wrap="square" lIns="0" rIns="0" tIns="0" bIns="0" anchor="t">
-            <a:spAutoFit/>
-          </a:bodyPr>
-          <a:lstStyle/>
-          <a:p>
-            <a:pPr algn="l">
-              <a:lnSpc>
-                <a:spcPct val="130000"/>
-              </a:lnSpc>
-            </a:pPr>
-            <a:r>
-              <a:rPr sz="1350" b="0" i="0">
-                <a:solidFill>
-                  <a:srgbClr val="1A1A1E"/>
-                </a:solidFill>
-                <a:latin typeface="Roboto"/>
-              </a:rPr>
-              <a:t>MERKEL, D. Docker: lightweight Linux containers for consistent development and deployment. Linux Journal, 2014.</a:t>
-            </a:r>
-          </a:p>
-        </p:txBody>
-      </p:sp>
-      <p:sp>
-        <p:nvSpPr>
-          <p:cNvPr id="13" name="TextBox 12"/>
-          <p:cNvSpPr txBox="1"/>
-          <p:nvPr/>
-        </p:nvSpPr>
-        <p:spPr>
-          <a:xfrm>
-            <a:off x="685800" y="4237482"/>
-            <a:ext cx="247650" cy="252374"/>
-          </a:xfrm>
-          <a:prstGeom prst="rect">
-            <a:avLst/>
-          </a:prstGeom>
-          <a:noFill/>
-        </p:spPr>
-        <p:txBody>
-          <a:bodyPr wrap="square" lIns="0" rIns="0" tIns="0" bIns="0" anchor="t">
-            <a:spAutoFit/>
-          </a:bodyPr>
-          <a:lstStyle/>
-          <a:p>
-            <a:pPr algn="l">
-              <a:lnSpc>
-                <a:spcPct val="120000"/>
-              </a:lnSpc>
-            </a:pPr>
-            <a:r>
-              <a:rPr sz="1240" b="1" i="0">
-                <a:solidFill>
-                  <a:srgbClr val="E94D1C"/>
-                </a:solidFill>
-                <a:latin typeface="Roboto"/>
-              </a:rPr>
-              <a:t>//</a:t>
-            </a:r>
-          </a:p>
-        </p:txBody>
-      </p:sp>
-      <p:sp>
-        <p:nvSpPr>
-          <p:cNvPr id="14" name="TextBox 13"/>
-          <p:cNvSpPr txBox="1"/>
-          <p:nvPr/>
-        </p:nvSpPr>
-        <p:spPr>
-          <a:xfrm>
-            <a:off x="971550" y="4227957"/>
-            <a:ext cx="9677400" cy="95250"/>
-          </a:xfrm>
-          <a:prstGeom prst="rect">
-            <a:avLst/>
-          </a:prstGeom>
-          <a:noFill/>
-        </p:spPr>
-        <p:txBody>
-          <a:bodyPr wrap="square" lIns="0" rIns="0" tIns="0" bIns="0" anchor="t">
-            <a:spAutoFit/>
-          </a:bodyPr>
-          <a:lstStyle/>
-          <a:p>
-            <a:pPr algn="l">
-              <a:lnSpc>
-                <a:spcPct val="130000"/>
-              </a:lnSpc>
-            </a:pPr>
-            <a:r>
-              <a:rPr sz="1350" b="0" i="0">
-                <a:solidFill>
-                  <a:srgbClr val="1A1A1E"/>
-                </a:solidFill>
-                <a:latin typeface="Roboto"/>
-              </a:rPr>
-              <a:t>NIST SP 800-190. Application Container Security Guide.</a:t>
-            </a:r>
-          </a:p>
-        </p:txBody>
-      </p:sp>
-      <p:sp>
-        <p:nvSpPr>
-          <p:cNvPr id="15" name="TextBox 14"/>
-          <p:cNvSpPr txBox="1"/>
-          <p:nvPr/>
-        </p:nvSpPr>
-        <p:spPr>
-          <a:xfrm>
-            <a:off x="685800" y="4673346"/>
-            <a:ext cx="247650" cy="252374"/>
-          </a:xfrm>
-          <a:prstGeom prst="rect">
-            <a:avLst/>
-          </a:prstGeom>
-          <a:noFill/>
-        </p:spPr>
-        <p:txBody>
-          <a:bodyPr wrap="square" lIns="0" rIns="0" tIns="0" bIns="0" anchor="t">
-            <a:spAutoFit/>
-          </a:bodyPr>
-          <a:lstStyle/>
-          <a:p>
-            <a:pPr algn="l">
-              <a:lnSpc>
-                <a:spcPct val="120000"/>
-              </a:lnSpc>
-            </a:pPr>
-            <a:r>
-              <a:rPr sz="1240" b="1" i="0">
-                <a:solidFill>
-                  <a:srgbClr val="E94D1C"/>
-                </a:solidFill>
-                <a:latin typeface="Roboto"/>
-              </a:rPr>
-              <a:t>//</a:t>
-            </a:r>
-          </a:p>
-        </p:txBody>
-      </p:sp>
-      <p:sp>
-        <p:nvSpPr>
-          <p:cNvPr id="16" name="TextBox 15"/>
-          <p:cNvSpPr txBox="1"/>
-          <p:nvPr/>
-        </p:nvSpPr>
-        <p:spPr>
-          <a:xfrm>
-            <a:off x="971550" y="4663821"/>
-            <a:ext cx="9677400" cy="95250"/>
-          </a:xfrm>
-          <a:prstGeom prst="rect">
-            <a:avLst/>
-          </a:prstGeom>
-          <a:noFill/>
-        </p:spPr>
-        <p:txBody>
-          <a:bodyPr wrap="square" lIns="0" rIns="0" tIns="0" bIns="0" anchor="t">
-            <a:spAutoFit/>
-          </a:bodyPr>
-          <a:lstStyle/>
-          <a:p>
-            <a:pPr algn="l">
-              <a:lnSpc>
-                <a:spcPct val="130000"/>
-              </a:lnSpc>
-            </a:pPr>
-            <a:r>
-              <a:rPr sz="1350" b="0" i="0">
-                <a:solidFill>
-                  <a:srgbClr val="1A1A1E"/>
-                </a:solidFill>
-                <a:latin typeface="Roboto"/>
-              </a:rPr>
-              <a:t>SOMMERVILLE, I. Engenharia de Software. 6. ed. Addison Wesley, 2004.</a:t>
-            </a:r>
-          </a:p>
-        </p:txBody>
-      </p:sp>
-      <p:sp>
-        <p:nvSpPr>
-          <p:cNvPr id="17" name="TextBox 16"/>
-          <p:cNvSpPr txBox="1"/>
-          <p:nvPr/>
-        </p:nvSpPr>
-        <p:spPr>
-          <a:xfrm>
-            <a:off x="685800" y="5109210"/>
-            <a:ext cx="247650" cy="252374"/>
-          </a:xfrm>
-          <a:prstGeom prst="rect">
-            <a:avLst/>
-          </a:prstGeom>
-          <a:noFill/>
-        </p:spPr>
-        <p:txBody>
-          <a:bodyPr wrap="square" lIns="0" rIns="0" tIns="0" bIns="0" anchor="t">
-            <a:spAutoFit/>
-          </a:bodyPr>
-          <a:lstStyle/>
-          <a:p>
-            <a:pPr algn="l">
-              <a:lnSpc>
-                <a:spcPct val="120000"/>
-              </a:lnSpc>
-            </a:pPr>
-            <a:r>
-              <a:rPr sz="1240" b="1" i="0">
-                <a:solidFill>
-                  <a:srgbClr val="E94D1C"/>
-                </a:solidFill>
-                <a:latin typeface="Roboto"/>
-              </a:rPr>
-              <a:t>//</a:t>
-            </a:r>
-          </a:p>
-        </p:txBody>
-      </p:sp>
-      <p:sp>
-        <p:nvSpPr>
-          <p:cNvPr id="18" name="TextBox 17"/>
-          <p:cNvSpPr txBox="1"/>
-          <p:nvPr/>
-        </p:nvSpPr>
-        <p:spPr>
-          <a:xfrm>
-            <a:off x="971550" y="5099685"/>
-            <a:ext cx="9677400" cy="95250"/>
-          </a:xfrm>
-          <a:prstGeom prst="rect">
-            <a:avLst/>
-          </a:prstGeom>
-          <a:noFill/>
-        </p:spPr>
-        <p:txBody>
-          <a:bodyPr wrap="square" lIns="0" rIns="0" tIns="0" bIns="0" anchor="t">
-            <a:spAutoFit/>
-          </a:bodyPr>
-          <a:lstStyle/>
-          <a:p>
-            <a:pPr algn="l">
-              <a:lnSpc>
-                <a:spcPct val="130000"/>
-              </a:lnSpc>
-            </a:pPr>
-            <a:r>
-              <a:rPr sz="1350" b="0" i="0">
-                <a:solidFill>
-                  <a:srgbClr val="1A1A1E"/>
-                </a:solidFill>
-                <a:latin typeface="Roboto"/>
-              </a:rPr>
-              <a:t>FOWLER, M. Patterns of Enterprise Application Architecture. Addison Wesley, 2002.</a:t>
-            </a:r>
-          </a:p>
-        </p:txBody>
-      </p:sp>
-      <p:sp>
-        <p:nvSpPr>
-          <p:cNvPr id="19" name="TextBox 18"/>
-          <p:cNvSpPr txBox="1"/>
-          <p:nvPr/>
-        </p:nvSpPr>
-        <p:spPr>
-          <a:xfrm>
-            <a:off x="685800" y="5545074"/>
-            <a:ext cx="247650" cy="252374"/>
-          </a:xfrm>
-          <a:prstGeom prst="rect">
-            <a:avLst/>
-          </a:prstGeom>
-          <a:noFill/>
-        </p:spPr>
-        <p:txBody>
-          <a:bodyPr wrap="square" lIns="0" rIns="0" tIns="0" bIns="0" anchor="t">
-            <a:spAutoFit/>
-          </a:bodyPr>
-          <a:lstStyle/>
-          <a:p>
-            <a:pPr algn="l">
-              <a:lnSpc>
-                <a:spcPct val="120000"/>
-              </a:lnSpc>
-            </a:pPr>
-            <a:r>
-              <a:rPr sz="1240" b="1" i="0">
-                <a:solidFill>
-                  <a:srgbClr val="E94D1C"/>
-                </a:solidFill>
-                <a:latin typeface="Roboto"/>
-              </a:rPr>
-              <a:t>//</a:t>
-            </a:r>
-          </a:p>
-        </p:txBody>
-      </p:sp>
-      <p:sp>
-        <p:nvSpPr>
-          <p:cNvPr id="20" name="TextBox 19"/>
-          <p:cNvSpPr txBox="1"/>
-          <p:nvPr/>
-        </p:nvSpPr>
-        <p:spPr>
-          <a:xfrm>
-            <a:off x="971550" y="5535549"/>
-            <a:ext cx="9677400" cy="95250"/>
-          </a:xfrm>
-          <a:prstGeom prst="rect">
-            <a:avLst/>
-          </a:prstGeom>
-          <a:noFill/>
-        </p:spPr>
-        <p:txBody>
-          <a:bodyPr wrap="square" lIns="0" rIns="0" tIns="0" bIns="0" anchor="t">
-            <a:spAutoFit/>
-          </a:bodyPr>
-          <a:lstStyle/>
-          <a:p>
-            <a:pPr algn="l">
-              <a:lnSpc>
-                <a:spcPct val="130000"/>
-              </a:lnSpc>
-            </a:pPr>
-            <a:r>
-              <a:rPr sz="1350" b="0" i="0">
-                <a:solidFill>
-                  <a:srgbClr val="1A1A1E"/>
-                </a:solidFill>
-                <a:latin typeface="Roboto"/>
-              </a:rPr>
-              <a:t>FARIAS, K. Aula 03, Arquiteturas em Camadas. Aula 05, Arquiteturas Baseadas em Componentes.</a:t>
-            </a:r>
-          </a:p>
-        </p:txBody>
-      </p:sp>
-      <p:sp>
-        <p:nvSpPr>
-          <p:cNvPr id="21" name="TextBox 20"/>
-          <p:cNvSpPr txBox="1"/>
-          <p:nvPr/>
-        </p:nvSpPr>
-        <p:spPr>
-          <a:xfrm>
-            <a:off x="685800" y="6324600"/>
-            <a:ext cx="6667500" cy="182880"/>
-          </a:xfrm>
-          <a:prstGeom prst="rect">
-            <a:avLst/>
-          </a:prstGeom>
-          <a:noFill/>
-        </p:spPr>
-        <p:txBody>
-          <a:bodyPr wrap="square" lIns="0" rIns="0" tIns="0" bIns="0" anchor="t">
-            <a:spAutoFit/>
-          </a:bodyPr>
-          <a:lstStyle/>
-          <a:p>
-            <a:pPr algn="l">
-              <a:lnSpc>
-                <a:spcPct val="120000"/>
-              </a:lnSpc>
-            </a:pPr>
-            <a:r>
-              <a:rPr sz="900" b="0" i="0">
-                <a:solidFill>
-                  <a:srgbClr val="6B6B78"/>
-                </a:solidFill>
-                <a:latin typeface="Roboto"/>
-              </a:rPr>
-              <a:t>Referências</a:t>
-            </a:r>
-          </a:p>
-        </p:txBody>
-      </p:sp>
-      <p:sp>
-        <p:nvSpPr>
-          <p:cNvPr id="22" name="TextBox 21"/>
-          <p:cNvSpPr txBox="1"/>
-          <p:nvPr/>
-        </p:nvSpPr>
-        <p:spPr>
-          <a:xfrm>
-            <a:off x="10477500" y="6324600"/>
-            <a:ext cx="1028700" cy="182880"/>
-          </a:xfrm>
-          <a:prstGeom prst="rect">
-            <a:avLst/>
-          </a:prstGeom>
-          <a:noFill/>
-        </p:spPr>
-        <p:txBody>
-          <a:bodyPr wrap="square" lIns="0" rIns="0" tIns="0" bIns="0" anchor="t">
-            <a:spAutoFit/>
-          </a:bodyPr>
-          <a:lstStyle/>
-          <a:p>
-            <a:pPr algn="r">
-              <a:lnSpc>
-                <a:spcPct val="120000"/>
-              </a:lnSpc>
-            </a:pPr>
-            <a:r>
-              <a:rPr sz="900" b="1" i="0">
-                <a:solidFill>
-                  <a:srgbClr val="21049A"/>
-                </a:solidFill>
-                <a:latin typeface="Roboto"/>
-              </a:rPr>
-              <a:t>31</a:t>
             </a:r>
           </a:p>
         </p:txBody>
@@ -33454,7 +32303,7 @@
         </p:nvSpPr>
         <p:spPr>
           <a:xfrm>
-            <a:off x="685800" y="2083118"/>
+            <a:off x="685800" y="2177415"/>
             <a:ext cx="10820400" cy="3286125"/>
           </a:xfrm>
           <a:prstGeom prst="roundRect">
@@ -33500,7 +32349,7 @@
         </p:nvSpPr>
         <p:spPr>
           <a:xfrm>
-            <a:off x="952500" y="2292668"/>
+            <a:off x="952500" y="2386965"/>
             <a:ext cx="323850" cy="28575"/>
           </a:xfrm>
           <a:prstGeom prst="roundRect">
@@ -33546,7 +32395,7 @@
         </p:nvSpPr>
         <p:spPr>
           <a:xfrm>
-            <a:off x="1371600" y="2235518"/>
+            <a:off x="1371600" y="2329815"/>
             <a:ext cx="1905000" cy="167640"/>
           </a:xfrm>
           <a:prstGeom prst="rect">
@@ -33585,7 +32434,7 @@
         </p:nvSpPr>
         <p:spPr>
           <a:xfrm>
-            <a:off x="952500" y="2578418"/>
+            <a:off x="952500" y="2672715"/>
             <a:ext cx="10287000" cy="228600"/>
           </a:xfrm>
           <a:prstGeom prst="rect">
@@ -33624,7 +32473,7 @@
         </p:nvSpPr>
         <p:spPr>
           <a:xfrm>
-            <a:off x="952500" y="2816542"/>
+            <a:off x="952500" y="2910840"/>
             <a:ext cx="10287000" cy="228600"/>
           </a:xfrm>
           <a:prstGeom prst="rect">
@@ -33663,7 +32512,7 @@
         </p:nvSpPr>
         <p:spPr>
           <a:xfrm>
-            <a:off x="952500" y="3054668"/>
+            <a:off x="952500" y="3148965"/>
             <a:ext cx="10287000" cy="228600"/>
           </a:xfrm>
           <a:prstGeom prst="rect">
@@ -33702,7 +32551,7 @@
         </p:nvSpPr>
         <p:spPr>
           <a:xfrm>
-            <a:off x="952500" y="3292792"/>
+            <a:off x="952500" y="3387090"/>
             <a:ext cx="10287000" cy="228600"/>
           </a:xfrm>
           <a:prstGeom prst="rect">
@@ -33741,7 +32590,7 @@
         </p:nvSpPr>
         <p:spPr>
           <a:xfrm>
-            <a:off x="952500" y="3530918"/>
+            <a:off x="952500" y="3625215"/>
             <a:ext cx="10287000" cy="228600"/>
           </a:xfrm>
           <a:prstGeom prst="rect">
@@ -33780,7 +32629,7 @@
         </p:nvSpPr>
         <p:spPr>
           <a:xfrm>
-            <a:off x="952500" y="3769042"/>
+            <a:off x="952500" y="3863340"/>
             <a:ext cx="10287000" cy="228600"/>
           </a:xfrm>
           <a:prstGeom prst="rect">
@@ -33819,7 +32668,7 @@
         </p:nvSpPr>
         <p:spPr>
           <a:xfrm>
-            <a:off x="952500" y="4007168"/>
+            <a:off x="952500" y="4101465"/>
             <a:ext cx="10287000" cy="228600"/>
           </a:xfrm>
           <a:prstGeom prst="rect">
@@ -33858,7 +32707,7 @@
         </p:nvSpPr>
         <p:spPr>
           <a:xfrm>
-            <a:off x="952500" y="4245292"/>
+            <a:off x="952500" y="4339590"/>
             <a:ext cx="10287000" cy="228600"/>
           </a:xfrm>
           <a:prstGeom prst="rect">
@@ -33897,7 +32746,7 @@
         </p:nvSpPr>
         <p:spPr>
           <a:xfrm>
-            <a:off x="952500" y="4483418"/>
+            <a:off x="952500" y="4577715"/>
             <a:ext cx="10287000" cy="228600"/>
           </a:xfrm>
           <a:prstGeom prst="rect">
@@ -33936,7 +32785,7 @@
         </p:nvSpPr>
         <p:spPr>
           <a:xfrm>
-            <a:off x="952500" y="4721542"/>
+            <a:off x="952500" y="4815840"/>
             <a:ext cx="10287000" cy="228600"/>
           </a:xfrm>
           <a:prstGeom prst="rect">
@@ -33975,7 +32824,7 @@
         </p:nvSpPr>
         <p:spPr>
           <a:xfrm>
-            <a:off x="952500" y="4959668"/>
+            <a:off x="952500" y="5053965"/>
             <a:ext cx="10287000" cy="228600"/>
           </a:xfrm>
           <a:prstGeom prst="rect">
@@ -34014,8 +32863,8 @@
         </p:nvSpPr>
         <p:spPr>
           <a:xfrm>
-            <a:off x="685800" y="5597842"/>
-            <a:ext cx="28575" cy="377190"/>
+            <a:off x="685800" y="5692140"/>
+            <a:ext cx="28575" cy="188595"/>
           </a:xfrm>
           <a:prstGeom prst="rect">
             <a:avLst/>
@@ -34058,7 +32907,7 @@
         </p:nvSpPr>
         <p:spPr>
           <a:xfrm>
-            <a:off x="876300" y="5578792"/>
+            <a:off x="876300" y="5673090"/>
             <a:ext cx="10629900" cy="666750"/>
           </a:xfrm>
           <a:prstGeom prst="rect">
@@ -34084,7 +32933,7 @@
                 </a:solidFill>
                 <a:latin typeface="Roboto"/>
               </a:rPr>
-              <a:t>Saída da distro docker-desktop do WSL. No Docker Desktop em Windows o daemon e os containers rodam numa distro própria, com namespace de PID separado, então ps na distro de trabalho não mostraria container nenhum.</a:t>
+              <a:t>Saída da distro docker-desktop do WSL. O mesmo processo tem PID 1 dentro do container e outro PID no host, que é o que o namespace de PID faz.</a:t>
             </a:r>
           </a:p>
         </p:txBody>
@@ -34319,7 +33168,7 @@
         </p:nvSpPr>
         <p:spPr>
           <a:xfrm>
-            <a:off x="685800" y="2589276"/>
+            <a:off x="685800" y="2722626"/>
             <a:ext cx="5143500" cy="182880"/>
           </a:xfrm>
           <a:prstGeom prst="rect">
@@ -34358,7 +33207,7 @@
         </p:nvSpPr>
         <p:spPr>
           <a:xfrm>
-            <a:off x="685800" y="2798826"/>
+            <a:off x="685800" y="2932176"/>
             <a:ext cx="419100" cy="28575"/>
           </a:xfrm>
           <a:prstGeom prst="rect">
@@ -34402,7 +33251,7 @@
         </p:nvSpPr>
         <p:spPr>
           <a:xfrm>
-            <a:off x="685800" y="3094101"/>
+            <a:off x="685800" y="3227451"/>
             <a:ext cx="247650" cy="294437"/>
           </a:xfrm>
           <a:prstGeom prst="rect">
@@ -34441,7 +33290,7 @@
         </p:nvSpPr>
         <p:spPr>
           <a:xfrm>
-            <a:off x="971550" y="3084576"/>
+            <a:off x="971550" y="3217926"/>
             <a:ext cx="4857750" cy="95250"/>
           </a:xfrm>
           <a:prstGeom prst="rect">
@@ -34480,7 +33329,7 @@
         </p:nvSpPr>
         <p:spPr>
           <a:xfrm>
-            <a:off x="685800" y="3624834"/>
+            <a:off x="685800" y="3758184"/>
             <a:ext cx="247650" cy="294437"/>
           </a:xfrm>
           <a:prstGeom prst="rect">
@@ -34519,7 +33368,7 @@
         </p:nvSpPr>
         <p:spPr>
           <a:xfrm>
-            <a:off x="971550" y="3615309"/>
+            <a:off x="971550" y="3748659"/>
             <a:ext cx="4857750" cy="95250"/>
           </a:xfrm>
           <a:prstGeom prst="rect">
@@ -34558,7 +33407,7 @@
         </p:nvSpPr>
         <p:spPr>
           <a:xfrm>
-            <a:off x="685800" y="4155567"/>
+            <a:off x="685800" y="4288917"/>
             <a:ext cx="247650" cy="294437"/>
           </a:xfrm>
           <a:prstGeom prst="rect">
@@ -34597,7 +33446,7 @@
         </p:nvSpPr>
         <p:spPr>
           <a:xfrm>
-            <a:off x="971550" y="4146042"/>
+            <a:off x="971550" y="4279392"/>
             <a:ext cx="4857750" cy="95250"/>
           </a:xfrm>
           <a:prstGeom prst="rect">
@@ -34636,8 +33485,8 @@
         </p:nvSpPr>
         <p:spPr>
           <a:xfrm>
-            <a:off x="685800" y="4950333"/>
-            <a:ext cx="247650" cy="294437"/>
+            <a:off x="6362700" y="2722626"/>
+            <a:ext cx="5143500" cy="182880"/>
           </a:xfrm>
           <a:prstGeom prst="rect">
             <a:avLst/>
@@ -34656,90 +33505,12 @@
               </a:lnSpc>
             </a:pPr>
             <a:r>
-              <a:rPr sz="1450" b="1" i="0">
+              <a:rPr sz="900" b="1" i="0" spc="120">
                 <a:solidFill>
                   <a:srgbClr val="E94D1C"/>
                 </a:solidFill>
                 <a:latin typeface="Roboto"/>
               </a:rPr>
-              <a:t>//</a:t>
-            </a:r>
-          </a:p>
-        </p:txBody>
-      </p:sp>
-      <p:sp>
-        <p:nvSpPr>
-          <p:cNvPr id="14" name="TextBox 13"/>
-          <p:cNvSpPr txBox="1"/>
-          <p:nvPr/>
-        </p:nvSpPr>
-        <p:spPr>
-          <a:xfrm>
-            <a:off x="971550" y="4940808"/>
-            <a:ext cx="4857750" cy="95250"/>
-          </a:xfrm>
-          <a:prstGeom prst="rect">
-            <a:avLst/>
-          </a:prstGeom>
-          <a:noFill/>
-        </p:spPr>
-        <p:txBody>
-          <a:bodyPr wrap="square" lIns="0" rIns="0" tIns="0" bIns="0" anchor="t">
-            <a:spAutoFit/>
-          </a:bodyPr>
-          <a:lstStyle/>
-          <a:p>
-            <a:pPr algn="l">
-              <a:lnSpc>
-                <a:spcPct val="130000"/>
-              </a:lnSpc>
-            </a:pPr>
-            <a:r>
-              <a:rPr sz="1580" b="0" i="0">
-                <a:solidFill>
-                  <a:srgbClr val="1A1A1E"/>
-                </a:solidFill>
-                <a:latin typeface="Roboto"/>
-              </a:rPr>
-              <a:t>clone e unshare criam um namespace. setns entra num que já existe.</a:t>
-            </a:r>
-          </a:p>
-        </p:txBody>
-      </p:sp>
-      <p:sp>
-        <p:nvSpPr>
-          <p:cNvPr id="15" name="TextBox 14"/>
-          <p:cNvSpPr txBox="1"/>
-          <p:nvPr/>
-        </p:nvSpPr>
-        <p:spPr>
-          <a:xfrm>
-            <a:off x="6362700" y="2589276"/>
-            <a:ext cx="5143500" cy="182880"/>
-          </a:xfrm>
-          <a:prstGeom prst="rect">
-            <a:avLst/>
-          </a:prstGeom>
-          <a:noFill/>
-        </p:spPr>
-        <p:txBody>
-          <a:bodyPr wrap="square" lIns="0" rIns="0" tIns="0" bIns="0" anchor="t">
-            <a:spAutoFit/>
-          </a:bodyPr>
-          <a:lstStyle/>
-          <a:p>
-            <a:pPr algn="l">
-              <a:lnSpc>
-                <a:spcPct val="120000"/>
-              </a:lnSpc>
-            </a:pPr>
-            <a:r>
-              <a:rPr sz="900" b="1" i="0" spc="120">
-                <a:solidFill>
-                  <a:srgbClr val="E94D1C"/>
-                </a:solidFill>
-                <a:latin typeface="Roboto"/>
-              </a:rPr>
               <a:t>CGROUPS V2</a:t>
             </a:r>
           </a:p>
@@ -34747,13 +33518,13 @@
       </p:sp>
       <p:sp>
         <p:nvSpPr>
-          <p:cNvPr id="16" name="Rectangle 15"/>
+          <p:cNvPr id="14" name="Rectangle 13"/>
           <p:cNvSpPr/>
           <p:nvPr/>
         </p:nvSpPr>
         <p:spPr>
           <a:xfrm>
-            <a:off x="6362700" y="2798826"/>
+            <a:off x="6362700" y="2932176"/>
             <a:ext cx="419100" cy="28575"/>
           </a:xfrm>
           <a:prstGeom prst="rect">
@@ -34791,13 +33562,91 @@
       </p:sp>
       <p:sp>
         <p:nvSpPr>
+          <p:cNvPr id="15" name="TextBox 14"/>
+          <p:cNvSpPr txBox="1"/>
+          <p:nvPr/>
+        </p:nvSpPr>
+        <p:spPr>
+          <a:xfrm>
+            <a:off x="6362700" y="3227451"/>
+            <a:ext cx="247650" cy="294437"/>
+          </a:xfrm>
+          <a:prstGeom prst="rect">
+            <a:avLst/>
+          </a:prstGeom>
+          <a:noFill/>
+        </p:spPr>
+        <p:txBody>
+          <a:bodyPr wrap="square" lIns="0" rIns="0" tIns="0" bIns="0" anchor="t">
+            <a:spAutoFit/>
+          </a:bodyPr>
+          <a:lstStyle/>
+          <a:p>
+            <a:pPr algn="l">
+              <a:lnSpc>
+                <a:spcPct val="120000"/>
+              </a:lnSpc>
+            </a:pPr>
+            <a:r>
+              <a:rPr sz="1450" b="1" i="0">
+                <a:solidFill>
+                  <a:srgbClr val="E94D1C"/>
+                </a:solidFill>
+                <a:latin typeface="Roboto"/>
+              </a:rPr>
+              <a:t>//</a:t>
+            </a:r>
+          </a:p>
+        </p:txBody>
+      </p:sp>
+      <p:sp>
+        <p:nvSpPr>
+          <p:cNvPr id="16" name="TextBox 15"/>
+          <p:cNvSpPr txBox="1"/>
+          <p:nvPr/>
+        </p:nvSpPr>
+        <p:spPr>
+          <a:xfrm>
+            <a:off x="6648450" y="3217926"/>
+            <a:ext cx="4857750" cy="95250"/>
+          </a:xfrm>
+          <a:prstGeom prst="rect">
+            <a:avLst/>
+          </a:prstGeom>
+          <a:noFill/>
+        </p:spPr>
+        <p:txBody>
+          <a:bodyPr wrap="square" lIns="0" rIns="0" tIns="0" bIns="0" anchor="t">
+            <a:spAutoFit/>
+          </a:bodyPr>
+          <a:lstStyle/>
+          <a:p>
+            <a:pPr algn="l">
+              <a:lnSpc>
+                <a:spcPct val="130000"/>
+              </a:lnSpc>
+            </a:pPr>
+            <a:r>
+              <a:rPr sz="1580" b="0" i="0">
+                <a:solidFill>
+                  <a:srgbClr val="1A1A1E"/>
+                </a:solidFill>
+                <a:latin typeface="Roboto"/>
+              </a:rPr>
+              <a:t>Não isolam. Contabilizam e limitam.</a:t>
+            </a:r>
+          </a:p>
+        </p:txBody>
+      </p:sp>
+      <p:sp>
+        <p:nvSpPr>
           <p:cNvPr id="17" name="TextBox 16"/>
           <p:cNvSpPr txBox="1"/>
           <p:nvPr/>
         </p:nvSpPr>
         <p:spPr>
           <a:xfrm>
-            <a:off x="6362700" y="3094101"/>
+            <a:off x="6362700" y="3758184"/>
             <a:ext cx="247650" cy="294437"/>
           </a:xfrm>
           <a:prstGeom prst="rect">
@@ -34836,7 +33685,7 @@
         </p:nvSpPr>
         <p:spPr>
           <a:xfrm>
-            <a:off x="6648450" y="3084576"/>
+            <a:off x="6648450" y="3748659"/>
             <a:ext cx="4857750" cy="95250"/>
           </a:xfrm>
           <a:prstGeom prst="rect">
@@ -34862,7 +33711,7 @@
                 </a:solidFill>
                 <a:latin typeface="Roboto"/>
               </a:rPr>
-              <a:t>Não isolam. Contabilizam e limitam.</a:t>
+              <a:t>Estourar o limite de memória não deixa lento, o kernel mata o processo.</a:t>
             </a:r>
           </a:p>
         </p:txBody>
@@ -34875,7 +33724,7 @@
         </p:nvSpPr>
         <p:spPr>
           <a:xfrm>
-            <a:off x="6362700" y="3624834"/>
+            <a:off x="6362700" y="4552950"/>
             <a:ext cx="247650" cy="294437"/>
           </a:xfrm>
           <a:prstGeom prst="rect">
@@ -34914,7 +33763,7 @@
         </p:nvSpPr>
         <p:spPr>
           <a:xfrm>
-            <a:off x="6648450" y="3615309"/>
+            <a:off x="6648450" y="4543425"/>
             <a:ext cx="4857750" cy="95250"/>
           </a:xfrm>
           <a:prstGeom prst="rect">
@@ -34940,7 +33789,7 @@
                 </a:solidFill>
                 <a:latin typeface="Roboto"/>
               </a:rPr>
-              <a:t>Estourar memory.max não deixa lento: o kernel mata e o Docker reporta 137.</a:t>
+              <a:t>Limite de CPU é throttling. Degrada latência de cauda, não a média, e por isso é mais difícil de diagnosticar.</a:t>
             </a:r>
           </a:p>
         </p:txBody>
@@ -34948,84 +33797,6 @@
       <p:sp>
         <p:nvSpPr>
           <p:cNvPr id="21" name="TextBox 20"/>
-          <p:cNvSpPr txBox="1"/>
-          <p:nvPr/>
-        </p:nvSpPr>
-        <p:spPr>
-          <a:xfrm>
-            <a:off x="6362700" y="4419600"/>
-            <a:ext cx="247650" cy="294437"/>
-          </a:xfrm>
-          <a:prstGeom prst="rect">
-            <a:avLst/>
-          </a:prstGeom>
-          <a:noFill/>
-        </p:spPr>
-        <p:txBody>
-          <a:bodyPr wrap="square" lIns="0" rIns="0" tIns="0" bIns="0" anchor="t">
-            <a:spAutoFit/>
-          </a:bodyPr>
-          <a:lstStyle/>
-          <a:p>
-            <a:pPr algn="l">
-              <a:lnSpc>
-                <a:spcPct val="120000"/>
-              </a:lnSpc>
-            </a:pPr>
-            <a:r>
-              <a:rPr sz="1450" b="1" i="0">
-                <a:solidFill>
-                  <a:srgbClr val="E94D1C"/>
-                </a:solidFill>
-                <a:latin typeface="Roboto"/>
-              </a:rPr>
-              <a:t>//</a:t>
-            </a:r>
-          </a:p>
-        </p:txBody>
-      </p:sp>
-      <p:sp>
-        <p:nvSpPr>
-          <p:cNvPr id="22" name="TextBox 21"/>
-          <p:cNvSpPr txBox="1"/>
-          <p:nvPr/>
-        </p:nvSpPr>
-        <p:spPr>
-          <a:xfrm>
-            <a:off x="6648450" y="4410075"/>
-            <a:ext cx="4857750" cy="95250"/>
-          </a:xfrm>
-          <a:prstGeom prst="rect">
-            <a:avLst/>
-          </a:prstGeom>
-          <a:noFill/>
-        </p:spPr>
-        <p:txBody>
-          <a:bodyPr wrap="square" lIns="0" rIns="0" tIns="0" bIns="0" anchor="t">
-            <a:spAutoFit/>
-          </a:bodyPr>
-          <a:lstStyle/>
-          <a:p>
-            <a:pPr algn="l">
-              <a:lnSpc>
-                <a:spcPct val="130000"/>
-              </a:lnSpc>
-            </a:pPr>
-            <a:r>
-              <a:rPr sz="1580" b="0" i="0">
-                <a:solidFill>
-                  <a:srgbClr val="1A1A1E"/>
-                </a:solidFill>
-                <a:latin typeface="Roboto"/>
-              </a:rPr>
-              <a:t>Limite de CPU é throttling. Degrada latência de cauda, não a média, e por isso é mais difícil de diagnosticar.</a:t>
-            </a:r>
-          </a:p>
-        </p:txBody>
-      </p:sp>
-      <p:sp>
-        <p:nvSpPr>
-          <p:cNvPr id="23" name="TextBox 22"/>
           <p:cNvSpPr txBox="1"/>
           <p:nvPr/>
         </p:nvSpPr>
@@ -35064,7 +33835,7 @@
       </p:sp>
       <p:sp>
         <p:nvSpPr>
-          <p:cNvPr id="24" name="TextBox 23"/>
+          <p:cNvPr id="22" name="TextBox 21"/>
           <p:cNvSpPr txBox="1"/>
           <p:nvPr/>
         </p:nvSpPr>

--- a/trabalhos/T1-Docker-Invite-People.pptx
+++ b/trabalhos/T1-Docker-Invite-People.pptx
@@ -12233,22 +12233,13 @@
               </a:lnSpc>
             </a:pPr>
             <a:r>
-              <a:rPr sz="1650" b="1" i="0">
+              <a:rPr sz="1650" b="0" i="0">
                 <a:solidFill>
                   <a:srgbClr val="1A1A1E"/>
                 </a:solidFill>
                 <a:latin typeface="Roboto"/>
               </a:rPr>
-              <a:t>Capabilities.</a:t>
-            </a:r>
-            <a:r>
-              <a:rPr sz="1650" b="0" i="0">
-                <a:solidFill>
-                  <a:srgbClr val="1A1A1E"/>
-                </a:solidFill>
-                <a:latin typeface="Roboto"/>
-              </a:rPr>
-              <a:t> O root do POSIX fatiado em privilégios independentes, derrubados e devolvidos um a um.</a:t>
+              <a:t>Capabilities fatiam o root do POSIX em privilégios independentes, que podem ser derrubados e devolvidos um a um.</a:t>
             </a:r>
           </a:p>
         </p:txBody>
@@ -12320,22 +12311,13 @@
               </a:lnSpc>
             </a:pPr>
             <a:r>
-              <a:rPr sz="1650" b="1" i="0">
+              <a:rPr sz="1650" b="0" i="0">
                 <a:solidFill>
                   <a:srgbClr val="1A1A1E"/>
                 </a:solidFill>
                 <a:latin typeface="Roboto"/>
               </a:rPr>
-              <a:t>Seccomp-bpf.</a:t>
-            </a:r>
-            <a:r>
-              <a:rPr sz="1650" b="0" i="0">
-                <a:solidFill>
-                  <a:srgbClr val="1A1A1E"/>
-                </a:solidFill>
-                <a:latin typeface="Roboto"/>
-              </a:rPr>
-              <a:t> O perfil padrão bloqueia parte das chamadas de sistema disponíveis.</a:t>
+              <a:t>O perfil padrão de seccomp-bpf bloqueia parte das chamadas de sistema disponíveis.</a:t>
             </a:r>
           </a:p>
         </p:txBody>
@@ -12407,22 +12389,13 @@
               </a:lnSpc>
             </a:pPr>
             <a:r>
-              <a:rPr sz="1650" b="1" i="0">
+              <a:rPr sz="1650" b="0" i="0">
                 <a:solidFill>
                   <a:srgbClr val="1A1A1E"/>
                 </a:solidFill>
                 <a:latin typeface="Roboto"/>
               </a:rPr>
-              <a:t>LSM.</a:t>
-            </a:r>
-            <a:r>
-              <a:rPr sz="1650" b="0" i="0">
-                <a:solidFill>
-                  <a:srgbClr val="1A1A1E"/>
-                </a:solidFill>
-                <a:latin typeface="Roboto"/>
-              </a:rPr>
-              <a:t> AppArmor ou SELinux por cima de tudo.</a:t>
+              <a:t>AppArmor ou SELinux entram por cima de tudo, como LSM.</a:t>
             </a:r>
           </a:p>
         </p:txBody>
@@ -18622,22 +18595,13 @@
               </a:lnSpc>
             </a:pPr>
             <a:r>
-              <a:rPr sz="1280" b="1" i="0">
+              <a:rPr sz="1280" b="0" i="0">
                 <a:solidFill>
                   <a:srgbClr val="1A1A1E"/>
                 </a:solidFill>
                 <a:latin typeface="Roboto"/>
               </a:rPr>
-              <a:t>As imagens são exemplo.</a:t>
-            </a:r>
-            <a:r>
-              <a:rPr sz="1280" b="0" i="0">
-                <a:solidFill>
-                  <a:srgbClr val="1A1A1E"/>
-                </a:solidFill>
-                <a:latin typeface="Roboto"/>
-              </a:rPr>
-              <a:t> A stack ainda não foi decidida, é assunto do ADR #63.</a:t>
+              <a:t>As imagens do arquivo são exemplo. A stack ainda não foi decidida e é assunto do ADR #63.</a:t>
             </a:r>
           </a:p>
         </p:txBody>
@@ -18872,7 +18836,7 @@
         </p:nvSpPr>
         <p:spPr>
           <a:xfrm>
-            <a:off x="685800" y="2193226"/>
+            <a:off x="685800" y="2061210"/>
             <a:ext cx="5143500" cy="182880"/>
           </a:xfrm>
           <a:prstGeom prst="rect">
@@ -18911,7 +18875,7 @@
         </p:nvSpPr>
         <p:spPr>
           <a:xfrm>
-            <a:off x="685800" y="2402776"/>
+            <a:off x="685800" y="2270760"/>
             <a:ext cx="419100" cy="28575"/>
           </a:xfrm>
           <a:prstGeom prst="rect">
@@ -18955,7 +18919,7 @@
         </p:nvSpPr>
         <p:spPr>
           <a:xfrm>
-            <a:off x="685800" y="2698052"/>
+            <a:off x="685800" y="2566035"/>
             <a:ext cx="247650" cy="294437"/>
           </a:xfrm>
           <a:prstGeom prst="rect">
@@ -18994,7 +18958,7 @@
         </p:nvSpPr>
         <p:spPr>
           <a:xfrm>
-            <a:off x="971550" y="2688526"/>
+            <a:off x="971550" y="2556510"/>
             <a:ext cx="4857750" cy="95250"/>
           </a:xfrm>
           <a:prstGeom prst="rect">
@@ -19020,7 +18984,7 @@
                 </a:solidFill>
                 <a:latin typeface="Roboto"/>
               </a:rPr>
-              <a:t>Mais coesão: uma responsabilidade por imagem.</a:t>
+              <a:t>A imagem passa a ter uma responsabilidade só, que é mais coesão.</a:t>
             </a:r>
           </a:p>
         </p:txBody>
@@ -19033,7 +18997,7 @@
         </p:nvSpPr>
         <p:spPr>
           <a:xfrm>
-            <a:off x="685800" y="3228784"/>
+            <a:off x="685800" y="3360801"/>
             <a:ext cx="247650" cy="294437"/>
           </a:xfrm>
           <a:prstGeom prst="rect">
@@ -19072,7 +19036,7 @@
         </p:nvSpPr>
         <p:spPr>
           <a:xfrm>
-            <a:off x="971550" y="3219260"/>
+            <a:off x="971550" y="3351276"/>
             <a:ext cx="4857750" cy="95250"/>
           </a:xfrm>
           <a:prstGeom prst="rect">
@@ -19111,7 +19075,7 @@
         </p:nvSpPr>
         <p:spPr>
           <a:xfrm>
-            <a:off x="685800" y="4023550"/>
+            <a:off x="685800" y="4155567"/>
             <a:ext cx="247650" cy="294437"/>
           </a:xfrm>
           <a:prstGeom prst="rect">
@@ -19150,7 +19114,7 @@
         </p:nvSpPr>
         <p:spPr>
           <a:xfrm>
-            <a:off x="971550" y="4014026"/>
+            <a:off x="971550" y="4146042"/>
             <a:ext cx="4857750" cy="95250"/>
           </a:xfrm>
           <a:prstGeom prst="rect">
@@ -19189,7 +19153,7 @@
         </p:nvSpPr>
         <p:spPr>
           <a:xfrm>
-            <a:off x="685800" y="4818316"/>
+            <a:off x="685800" y="4950333"/>
             <a:ext cx="247650" cy="294437"/>
           </a:xfrm>
           <a:prstGeom prst="rect">
@@ -19228,7 +19192,7 @@
         </p:nvSpPr>
         <p:spPr>
           <a:xfrm>
-            <a:off x="971550" y="4808792"/>
+            <a:off x="971550" y="4940808"/>
             <a:ext cx="4857750" cy="95250"/>
           </a:xfrm>
           <a:prstGeom prst="rect">
@@ -19267,7 +19231,7 @@
         </p:nvSpPr>
         <p:spPr>
           <a:xfrm>
-            <a:off x="6362700" y="2193226"/>
+            <a:off x="6362700" y="2061210"/>
             <a:ext cx="5143500" cy="182880"/>
           </a:xfrm>
           <a:prstGeom prst="rect">
@@ -19306,7 +19270,7 @@
         </p:nvSpPr>
         <p:spPr>
           <a:xfrm>
-            <a:off x="6362700" y="2402776"/>
+            <a:off x="6362700" y="2270760"/>
             <a:ext cx="419100" cy="28575"/>
           </a:xfrm>
           <a:prstGeom prst="rect">
@@ -19350,7 +19314,7 @@
         </p:nvSpPr>
         <p:spPr>
           <a:xfrm>
-            <a:off x="6362700" y="2698052"/>
+            <a:off x="6362700" y="2566035"/>
             <a:ext cx="247650" cy="294437"/>
           </a:xfrm>
           <a:prstGeom prst="rect">
@@ -19389,7 +19353,7 @@
         </p:nvSpPr>
         <p:spPr>
           <a:xfrm>
-            <a:off x="6648450" y="2688526"/>
+            <a:off x="6648450" y="2556510"/>
             <a:ext cx="4857750" cy="95250"/>
           </a:xfrm>
           <a:prstGeom prst="rect">
@@ -19415,7 +19379,7 @@
                 </a:solidFill>
                 <a:latin typeface="Roboto"/>
               </a:rPr>
-              <a:t>A regra entre as nossas três camadas. Elas ficam na mesma imagem do back-end.</a:t>
+              <a:t>Entre as nossas três camadas o acoplamento continua igual, porque elas ficam na mesma imagem do back-end.</a:t>
             </a:r>
           </a:p>
         </p:txBody>
@@ -19428,7 +19392,7 @@
         </p:nvSpPr>
         <p:spPr>
           <a:xfrm>
-            <a:off x="6362700" y="3492818"/>
+            <a:off x="6362700" y="3624834"/>
             <a:ext cx="247650" cy="294437"/>
           </a:xfrm>
           <a:prstGeom prst="rect">
@@ -19467,7 +19431,7 @@
         </p:nvSpPr>
         <p:spPr>
           <a:xfrm>
-            <a:off x="6648450" y="3483292"/>
+            <a:off x="6648450" y="3615309"/>
             <a:ext cx="4857750" cy="95250"/>
           </a:xfrm>
           <a:prstGeom prst="rect">
@@ -19493,7 +19457,7 @@
                 </a:solidFill>
                 <a:latin typeface="Roboto"/>
               </a:rPr>
-              <a:t>Redução de acoplamento. Ele muda de forma e passa a ter latência, falha parcial e ordem de subida.</a:t>
+              <a:t>Onde há separação, o acoplamento não some, muda de forma e passa a ter latência, falha parcial e ordem de subida.</a:t>
             </a:r>
           </a:p>
         </p:txBody>
@@ -24787,7 +24751,7 @@
                 </a:solidFill>
                 <a:latin typeface="Roboto"/>
               </a:rPr>
-              <a:t>Isola de verdade</a:t>
+              <a:t>Isolamento imposto em hardware</a:t>
             </a:r>
           </a:p>
         </p:txBody>
@@ -25153,7 +25117,7 @@
                 </a:solidFill>
                 <a:latin typeface="Roboto"/>
               </a:rPr>
-              <a:t>Escolhido, com o custo declarado</a:t>
+              <a:t>Ambiente igual para os quatro integrantes</a:t>
             </a:r>
           </a:p>
         </p:txBody>
@@ -25192,7 +25156,7 @@
                 </a:solidFill>
                 <a:latin typeface="Roboto"/>
               </a:rPr>
-              <a:t>Move complexidade em vez de apagá-la</a:t>
+              <a:t>Acrescenta uma camada de build e de orquestração</a:t>
             </a:r>
           </a:p>
         </p:txBody>
@@ -26327,7 +26291,7 @@
         </p:nvSpPr>
         <p:spPr>
           <a:xfrm>
-            <a:off x="685800" y="2028825"/>
+            <a:off x="685800" y="2117598"/>
             <a:ext cx="5143500" cy="182880"/>
           </a:xfrm>
           <a:prstGeom prst="rect">
@@ -26366,7 +26330,7 @@
         </p:nvSpPr>
         <p:spPr>
           <a:xfrm>
-            <a:off x="685800" y="2238375"/>
+            <a:off x="685800" y="2327148"/>
             <a:ext cx="419100" cy="28575"/>
           </a:xfrm>
           <a:prstGeom prst="rect">
@@ -26410,8 +26374,8 @@
         </p:nvSpPr>
         <p:spPr>
           <a:xfrm>
-            <a:off x="685800" y="2533650"/>
-            <a:ext cx="247650" cy="280416"/>
+            <a:off x="685800" y="2622423"/>
+            <a:ext cx="247650" cy="252374"/>
           </a:xfrm>
           <a:prstGeom prst="rect">
             <a:avLst/>
@@ -26430,7 +26394,7 @@
               </a:lnSpc>
             </a:pPr>
             <a:r>
-              <a:rPr sz="1380" b="1" i="0">
+              <a:rPr sz="1240" b="1" i="0">
                 <a:solidFill>
                   <a:srgbClr val="E94D1C"/>
                 </a:solidFill>
@@ -26449,7 +26413,7 @@
         </p:nvSpPr>
         <p:spPr>
           <a:xfrm>
-            <a:off x="971550" y="2524125"/>
+            <a:off x="971550" y="2612898"/>
             <a:ext cx="4857750" cy="95250"/>
           </a:xfrm>
           <a:prstGeom prst="rect">
@@ -26469,36 +26433,105 @@
               </a:lnSpc>
             </a:pPr>
             <a:r>
-              <a:rPr sz="1500" b="1" i="0">
+              <a:rPr sz="1350" b="0" i="0">
                 <a:solidFill>
                   <a:srgbClr val="1A1A1E"/>
                 </a:solidFill>
                 <a:latin typeface="Roboto"/>
               </a:rPr>
-              <a:t>Modularidade e reusabilidade.</a:t>
-            </a:r>
-            <a:r>
-              <a:rPr sz="1500" b="0" i="0">
+              <a:t>Cada imagem tem uma responsabilidade e uma fronteira declarada, que é a modularidade e a reusabilidade da Aula 03.</a:t>
+            </a:r>
+          </a:p>
+        </p:txBody>
+      </p:sp>
+      <p:sp>
+        <p:nvSpPr>
+          <p:cNvPr id="9" name="TextBox 8"/>
+          <p:cNvSpPr txBox="1"/>
+          <p:nvPr/>
+        </p:nvSpPr>
+        <p:spPr>
+          <a:xfrm>
+            <a:off x="685800" y="3510915"/>
+            <a:ext cx="247650" cy="252374"/>
+          </a:xfrm>
+          <a:prstGeom prst="rect">
+            <a:avLst/>
+          </a:prstGeom>
+          <a:noFill/>
+        </p:spPr>
+        <p:txBody>
+          <a:bodyPr wrap="square" lIns="0" rIns="0" tIns="0" bIns="0" anchor="t">
+            <a:spAutoFit/>
+          </a:bodyPr>
+          <a:lstStyle/>
+          <a:p>
+            <a:pPr algn="l">
+              <a:lnSpc>
+                <a:spcPct val="120000"/>
+              </a:lnSpc>
+            </a:pPr>
+            <a:r>
+              <a:rPr sz="1240" b="1" i="0">
+                <a:solidFill>
+                  <a:srgbClr val="E94D1C"/>
+                </a:solidFill>
+                <a:latin typeface="Roboto"/>
+              </a:rPr>
+              <a:t>//</a:t>
+            </a:r>
+          </a:p>
+        </p:txBody>
+      </p:sp>
+      <p:sp>
+        <p:nvSpPr>
+          <p:cNvPr id="10" name="TextBox 9"/>
+          <p:cNvSpPr txBox="1"/>
+          <p:nvPr/>
+        </p:nvSpPr>
+        <p:spPr>
+          <a:xfrm>
+            <a:off x="971550" y="3501390"/>
+            <a:ext cx="4857750" cy="95250"/>
+          </a:xfrm>
+          <a:prstGeom prst="rect">
+            <a:avLst/>
+          </a:prstGeom>
+          <a:noFill/>
+        </p:spPr>
+        <p:txBody>
+          <a:bodyPr wrap="square" lIns="0" rIns="0" tIns="0" bIns="0" anchor="t">
+            <a:spAutoFit/>
+          </a:bodyPr>
+          <a:lstStyle/>
+          <a:p>
+            <a:pPr algn="l">
+              <a:lnSpc>
+                <a:spcPct val="130000"/>
+              </a:lnSpc>
+            </a:pPr>
+            <a:r>
+              <a:rPr sz="1350" b="0" i="0">
                 <a:solidFill>
                   <a:srgbClr val="1A1A1E"/>
                 </a:solidFill>
                 <a:latin typeface="Roboto"/>
               </a:rPr>
-              <a:t> Uma responsabilidade por imagem, com fronteira declarada.</a:t>
-            </a:r>
-          </a:p>
-        </p:txBody>
-      </p:sp>
-      <p:sp>
-        <p:nvSpPr>
-          <p:cNvPr id="9" name="TextBox 8"/>
-          <p:cNvSpPr txBox="1"/>
-          <p:nvPr/>
-        </p:nvSpPr>
-        <p:spPr>
-          <a:xfrm>
-            <a:off x="685800" y="3284220"/>
-            <a:ext cx="247650" cy="280416"/>
+              <a:t>O ambiente vira arquivo legível, versionado junto com o código, e com isso ganha compreensibilidade.</a:t>
+            </a:r>
+          </a:p>
+        </p:txBody>
+      </p:sp>
+      <p:sp>
+        <p:nvSpPr>
+          <p:cNvPr id="11" name="TextBox 10"/>
+          <p:cNvSpPr txBox="1"/>
+          <p:nvPr/>
+        </p:nvSpPr>
+        <p:spPr>
+          <a:xfrm>
+            <a:off x="685800" y="4173093"/>
+            <a:ext cx="247650" cy="252374"/>
           </a:xfrm>
           <a:prstGeom prst="rect">
             <a:avLst/>
@@ -26517,7 +26550,7 @@
               </a:lnSpc>
             </a:pPr>
             <a:r>
-              <a:rPr sz="1380" b="1" i="0">
+              <a:rPr sz="1240" b="1" i="0">
                 <a:solidFill>
                   <a:srgbClr val="E94D1C"/>
                 </a:solidFill>
@@ -26530,13 +26563,13 @@
       </p:sp>
       <p:sp>
         <p:nvSpPr>
-          <p:cNvPr id="10" name="TextBox 9"/>
-          <p:cNvSpPr txBox="1"/>
-          <p:nvPr/>
-        </p:nvSpPr>
-        <p:spPr>
-          <a:xfrm>
-            <a:off x="971550" y="3274695"/>
+          <p:cNvPr id="12" name="TextBox 11"/>
+          <p:cNvSpPr txBox="1"/>
+          <p:nvPr/>
+        </p:nvSpPr>
+        <p:spPr>
+          <a:xfrm>
+            <a:off x="971550" y="4163568"/>
             <a:ext cx="4857750" cy="95250"/>
           </a:xfrm>
           <a:prstGeom prst="rect">
@@ -26556,36 +26589,105 @@
               </a:lnSpc>
             </a:pPr>
             <a:r>
-              <a:rPr sz="1500" b="1" i="0">
+              <a:rPr sz="1350" b="0" i="0">
                 <a:solidFill>
                   <a:srgbClr val="1A1A1E"/>
                 </a:solidFill>
                 <a:latin typeface="Roboto"/>
               </a:rPr>
-              <a:t>Compreensibilidade.</a:t>
-            </a:r>
-            <a:r>
-              <a:rPr sz="1500" b="0" i="0">
+              <a:t>Extensibilidade sai barata, porque trocar runtime ou banco é editar uma linha de arquivo.</a:t>
+            </a:r>
+          </a:p>
+        </p:txBody>
+      </p:sp>
+      <p:sp>
+        <p:nvSpPr>
+          <p:cNvPr id="13" name="TextBox 12"/>
+          <p:cNvSpPr txBox="1"/>
+          <p:nvPr/>
+        </p:nvSpPr>
+        <p:spPr>
+          <a:xfrm>
+            <a:off x="685800" y="4835271"/>
+            <a:ext cx="247650" cy="252374"/>
+          </a:xfrm>
+          <a:prstGeom prst="rect">
+            <a:avLst/>
+          </a:prstGeom>
+          <a:noFill/>
+        </p:spPr>
+        <p:txBody>
+          <a:bodyPr wrap="square" lIns="0" rIns="0" tIns="0" bIns="0" anchor="t">
+            <a:spAutoFit/>
+          </a:bodyPr>
+          <a:lstStyle/>
+          <a:p>
+            <a:pPr algn="l">
+              <a:lnSpc>
+                <a:spcPct val="120000"/>
+              </a:lnSpc>
+            </a:pPr>
+            <a:r>
+              <a:rPr sz="1240" b="1" i="0">
+                <a:solidFill>
+                  <a:srgbClr val="E94D1C"/>
+                </a:solidFill>
+                <a:latin typeface="Roboto"/>
+              </a:rPr>
+              <a:t>//</a:t>
+            </a:r>
+          </a:p>
+        </p:txBody>
+      </p:sp>
+      <p:sp>
+        <p:nvSpPr>
+          <p:cNvPr id="14" name="TextBox 13"/>
+          <p:cNvSpPr txBox="1"/>
+          <p:nvPr/>
+        </p:nvSpPr>
+        <p:spPr>
+          <a:xfrm>
+            <a:off x="971550" y="4825746"/>
+            <a:ext cx="4857750" cy="95250"/>
+          </a:xfrm>
+          <a:prstGeom prst="rect">
+            <a:avLst/>
+          </a:prstGeom>
+          <a:noFill/>
+        </p:spPr>
+        <p:txBody>
+          <a:bodyPr wrap="square" lIns="0" rIns="0" tIns="0" bIns="0" anchor="t">
+            <a:spAutoFit/>
+          </a:bodyPr>
+          <a:lstStyle/>
+          <a:p>
+            <a:pPr algn="l">
+              <a:lnSpc>
+                <a:spcPct val="130000"/>
+              </a:lnSpc>
+            </a:pPr>
+            <a:r>
+              <a:rPr sz="1350" b="0" i="0">
                 <a:solidFill>
                   <a:srgbClr val="1A1A1E"/>
                 </a:solidFill>
                 <a:latin typeface="Roboto"/>
               </a:rPr>
-              <a:t> O ambiente vira arquivo legível, versionado junto com o código.</a:t>
-            </a:r>
-          </a:p>
-        </p:txBody>
-      </p:sp>
-      <p:sp>
-        <p:nvSpPr>
-          <p:cNvPr id="11" name="TextBox 10"/>
-          <p:cNvSpPr txBox="1"/>
-          <p:nvPr/>
-        </p:nvSpPr>
-        <p:spPr>
-          <a:xfrm>
-            <a:off x="685800" y="4034790"/>
-            <a:ext cx="247650" cy="280416"/>
+              <a:t>A mesma imagem atravessa notebook, pipeline e a demonstração funcional do T3, o que ajuda a manutenibilidade.</a:t>
+            </a:r>
+          </a:p>
+        </p:txBody>
+      </p:sp>
+      <p:sp>
+        <p:nvSpPr>
+          <p:cNvPr id="15" name="TextBox 14"/>
+          <p:cNvSpPr txBox="1"/>
+          <p:nvPr/>
+        </p:nvSpPr>
+        <p:spPr>
+          <a:xfrm>
+            <a:off x="685800" y="5497449"/>
+            <a:ext cx="247650" cy="252374"/>
           </a:xfrm>
           <a:prstGeom prst="rect">
             <a:avLst/>
@@ -26604,7 +26706,7 @@
               </a:lnSpc>
             </a:pPr>
             <a:r>
-              <a:rPr sz="1380" b="1" i="0">
+              <a:rPr sz="1240" b="1" i="0">
                 <a:solidFill>
                   <a:srgbClr val="E94D1C"/>
                 </a:solidFill>
@@ -26617,13 +26719,13 @@
       </p:sp>
       <p:sp>
         <p:nvSpPr>
-          <p:cNvPr id="12" name="TextBox 11"/>
-          <p:cNvSpPr txBox="1"/>
-          <p:nvPr/>
-        </p:nvSpPr>
-        <p:spPr>
-          <a:xfrm>
-            <a:off x="971550" y="4025265"/>
+          <p:cNvPr id="16" name="TextBox 15"/>
+          <p:cNvSpPr txBox="1"/>
+          <p:nvPr/>
+        </p:nvSpPr>
+        <p:spPr>
+          <a:xfrm>
+            <a:off x="971550" y="5487924"/>
             <a:ext cx="4857750" cy="95250"/>
           </a:xfrm>
           <a:prstGeom prst="rect">
@@ -26643,196 +26745,13 @@
               </a:lnSpc>
             </a:pPr>
             <a:r>
-              <a:rPr sz="1500" b="1" i="0">
+              <a:rPr sz="1350" b="0" i="0">
                 <a:solidFill>
                   <a:srgbClr val="1A1A1E"/>
                 </a:solidFill>
                 <a:latin typeface="Roboto"/>
               </a:rPr>
-              <a:t>Extensibilidade.</a:t>
-            </a:r>
-            <a:r>
-              <a:rPr sz="1500" b="0" i="0">
-                <a:solidFill>
-                  <a:srgbClr val="1A1A1E"/>
-                </a:solidFill>
-                <a:latin typeface="Roboto"/>
-              </a:rPr>
-              <a:t> Trocar runtime ou banco é editar uma linha de arquivo.</a:t>
-            </a:r>
-          </a:p>
-        </p:txBody>
-      </p:sp>
-      <p:sp>
-        <p:nvSpPr>
-          <p:cNvPr id="13" name="TextBox 12"/>
-          <p:cNvSpPr txBox="1"/>
-          <p:nvPr/>
-        </p:nvSpPr>
-        <p:spPr>
-          <a:xfrm>
-            <a:off x="685800" y="4785360"/>
-            <a:ext cx="247650" cy="280416"/>
-          </a:xfrm>
-          <a:prstGeom prst="rect">
-            <a:avLst/>
-          </a:prstGeom>
-          <a:noFill/>
-        </p:spPr>
-        <p:txBody>
-          <a:bodyPr wrap="square" lIns="0" rIns="0" tIns="0" bIns="0" anchor="t">
-            <a:spAutoFit/>
-          </a:bodyPr>
-          <a:lstStyle/>
-          <a:p>
-            <a:pPr algn="l">
-              <a:lnSpc>
-                <a:spcPct val="120000"/>
-              </a:lnSpc>
-            </a:pPr>
-            <a:r>
-              <a:rPr sz="1380" b="1" i="0">
-                <a:solidFill>
-                  <a:srgbClr val="E94D1C"/>
-                </a:solidFill>
-                <a:latin typeface="Roboto"/>
-              </a:rPr>
-              <a:t>//</a:t>
-            </a:r>
-          </a:p>
-        </p:txBody>
-      </p:sp>
-      <p:sp>
-        <p:nvSpPr>
-          <p:cNvPr id="14" name="TextBox 13"/>
-          <p:cNvSpPr txBox="1"/>
-          <p:nvPr/>
-        </p:nvSpPr>
-        <p:spPr>
-          <a:xfrm>
-            <a:off x="971550" y="4775835"/>
-            <a:ext cx="4857750" cy="95250"/>
-          </a:xfrm>
-          <a:prstGeom prst="rect">
-            <a:avLst/>
-          </a:prstGeom>
-          <a:noFill/>
-        </p:spPr>
-        <p:txBody>
-          <a:bodyPr wrap="square" lIns="0" rIns="0" tIns="0" bIns="0" anchor="t">
-            <a:spAutoFit/>
-          </a:bodyPr>
-          <a:lstStyle/>
-          <a:p>
-            <a:pPr algn="l">
-              <a:lnSpc>
-                <a:spcPct val="130000"/>
-              </a:lnSpc>
-            </a:pPr>
-            <a:r>
-              <a:rPr sz="1500" b="1" i="0">
-                <a:solidFill>
-                  <a:srgbClr val="1A1A1E"/>
-                </a:solidFill>
-                <a:latin typeface="Roboto"/>
-              </a:rPr>
-              <a:t>Manutenibilidade.</a:t>
-            </a:r>
-            <a:r>
-              <a:rPr sz="1500" b="0" i="0">
-                <a:solidFill>
-                  <a:srgbClr val="1A1A1E"/>
-                </a:solidFill>
-                <a:latin typeface="Roboto"/>
-              </a:rPr>
-              <a:t> A mesma imagem atravessa notebook, pipeline e a demonstração funcional do T3.</a:t>
-            </a:r>
-          </a:p>
-        </p:txBody>
-      </p:sp>
-      <p:sp>
-        <p:nvSpPr>
-          <p:cNvPr id="15" name="TextBox 14"/>
-          <p:cNvSpPr txBox="1"/>
-          <p:nvPr/>
-        </p:nvSpPr>
-        <p:spPr>
-          <a:xfrm>
-            <a:off x="685800" y="5535930"/>
-            <a:ext cx="247650" cy="280416"/>
-          </a:xfrm>
-          <a:prstGeom prst="rect">
-            <a:avLst/>
-          </a:prstGeom>
-          <a:noFill/>
-        </p:spPr>
-        <p:txBody>
-          <a:bodyPr wrap="square" lIns="0" rIns="0" tIns="0" bIns="0" anchor="t">
-            <a:spAutoFit/>
-          </a:bodyPr>
-          <a:lstStyle/>
-          <a:p>
-            <a:pPr algn="l">
-              <a:lnSpc>
-                <a:spcPct val="120000"/>
-              </a:lnSpc>
-            </a:pPr>
-            <a:r>
-              <a:rPr sz="1380" b="1" i="0">
-                <a:solidFill>
-                  <a:srgbClr val="E94D1C"/>
-                </a:solidFill>
-                <a:latin typeface="Roboto"/>
-              </a:rPr>
-              <a:t>//</a:t>
-            </a:r>
-          </a:p>
-        </p:txBody>
-      </p:sp>
-      <p:sp>
-        <p:nvSpPr>
-          <p:cNvPr id="16" name="TextBox 15"/>
-          <p:cNvSpPr txBox="1"/>
-          <p:nvPr/>
-        </p:nvSpPr>
-        <p:spPr>
-          <a:xfrm>
-            <a:off x="971550" y="5526405"/>
-            <a:ext cx="4857750" cy="95250"/>
-          </a:xfrm>
-          <a:prstGeom prst="rect">
-            <a:avLst/>
-          </a:prstGeom>
-          <a:noFill/>
-        </p:spPr>
-        <p:txBody>
-          <a:bodyPr wrap="square" lIns="0" rIns="0" tIns="0" bIns="0" anchor="t">
-            <a:spAutoFit/>
-          </a:bodyPr>
-          <a:lstStyle/>
-          <a:p>
-            <a:pPr algn="l">
-              <a:lnSpc>
-                <a:spcPct val="130000"/>
-              </a:lnSpc>
-            </a:pPr>
-            <a:r>
-              <a:rPr sz="1500" b="1" i="0">
-                <a:solidFill>
-                  <a:srgbClr val="1A1A1E"/>
-                </a:solidFill>
-                <a:latin typeface="Roboto"/>
-              </a:rPr>
-              <a:t>Escalabilidade,</a:t>
-            </a:r>
-            <a:r>
-              <a:rPr sz="1500" b="0" i="0">
-                <a:solidFill>
-                  <a:srgbClr val="1A1A1E"/>
-                </a:solidFill>
-                <a:latin typeface="Roboto"/>
-              </a:rPr>
-              <a:t> de forma seletiva, e isso impõe que a aplicação seja mesmo sem estado.</a:t>
+              <a:t>A escalabilidade fica seletiva, e só vale se a aplicação for mesmo sem estado.</a:t>
             </a:r>
           </a:p>
         </p:txBody>
@@ -26845,7 +26764,7 @@
         </p:nvSpPr>
         <p:spPr>
           <a:xfrm>
-            <a:off x="6362700" y="2028825"/>
+            <a:off x="6362700" y="2117598"/>
             <a:ext cx="5143500" cy="182880"/>
           </a:xfrm>
           <a:prstGeom prst="rect">
@@ -26884,7 +26803,7 @@
         </p:nvSpPr>
         <p:spPr>
           <a:xfrm>
-            <a:off x="6362700" y="2238375"/>
+            <a:off x="6362700" y="2327148"/>
             <a:ext cx="419100" cy="28575"/>
           </a:xfrm>
           <a:prstGeom prst="rect">
@@ -26928,8 +26847,8 @@
         </p:nvSpPr>
         <p:spPr>
           <a:xfrm>
-            <a:off x="6362700" y="2533650"/>
-            <a:ext cx="247650" cy="280416"/>
+            <a:off x="6362700" y="2622423"/>
+            <a:ext cx="247650" cy="252374"/>
           </a:xfrm>
           <a:prstGeom prst="rect">
             <a:avLst/>
@@ -26948,7 +26867,7 @@
               </a:lnSpc>
             </a:pPr>
             <a:r>
-              <a:rPr sz="1380" b="1" i="0">
+              <a:rPr sz="1240" b="1" i="0">
                 <a:solidFill>
                   <a:srgbClr val="E94D1C"/>
                 </a:solidFill>
@@ -26967,7 +26886,7 @@
         </p:nvSpPr>
         <p:spPr>
           <a:xfrm>
-            <a:off x="6648450" y="2524125"/>
+            <a:off x="6648450" y="2612898"/>
             <a:ext cx="4857750" cy="95250"/>
           </a:xfrm>
           <a:prstGeom prst="rect">
@@ -26987,109 +26906,91 @@
               </a:lnSpc>
             </a:pPr>
             <a:r>
-              <a:rPr sz="1500" b="1" i="0">
+              <a:rPr sz="1350" b="0" i="0">
                 <a:solidFill>
                   <a:srgbClr val="1A1A1E"/>
                 </a:solidFill>
                 <a:latin typeface="Roboto"/>
               </a:rPr>
-              <a:t>Segurança.</a:t>
-            </a:r>
-            <a:r>
-              <a:rPr sz="1500" b="0" i="0">
+              <a:t>Segurança ganha isolamento e herda uma superfície nova, que é a imagem base e o privilégio de execução.</a:t>
+            </a:r>
+          </a:p>
+        </p:txBody>
+      </p:sp>
+      <p:sp>
+        <p:nvSpPr>
+          <p:cNvPr id="21" name="TextBox 20"/>
+          <p:cNvSpPr txBox="1"/>
+          <p:nvPr/>
+        </p:nvSpPr>
+        <p:spPr>
+          <a:xfrm>
+            <a:off x="6362700" y="3284601"/>
+            <a:ext cx="247650" cy="252374"/>
+          </a:xfrm>
+          <a:prstGeom prst="rect">
+            <a:avLst/>
+          </a:prstGeom>
+          <a:noFill/>
+        </p:spPr>
+        <p:txBody>
+          <a:bodyPr wrap="square" lIns="0" rIns="0" tIns="0" bIns="0" anchor="t">
+            <a:spAutoFit/>
+          </a:bodyPr>
+          <a:lstStyle/>
+          <a:p>
+            <a:pPr algn="l">
+              <a:lnSpc>
+                <a:spcPct val="120000"/>
+              </a:lnSpc>
+            </a:pPr>
+            <a:r>
+              <a:rPr sz="1240" b="1" i="0">
+                <a:solidFill>
+                  <a:srgbClr val="E94D1C"/>
+                </a:solidFill>
+                <a:latin typeface="Roboto"/>
+              </a:rPr>
+              <a:t>//</a:t>
+            </a:r>
+          </a:p>
+        </p:txBody>
+      </p:sp>
+      <p:sp>
+        <p:nvSpPr>
+          <p:cNvPr id="22" name="TextBox 21"/>
+          <p:cNvSpPr txBox="1"/>
+          <p:nvPr/>
+        </p:nvSpPr>
+        <p:spPr>
+          <a:xfrm>
+            <a:off x="6648450" y="3275076"/>
+            <a:ext cx="4857750" cy="95250"/>
+          </a:xfrm>
+          <a:prstGeom prst="rect">
+            <a:avLst/>
+          </a:prstGeom>
+          <a:noFill/>
+        </p:spPr>
+        <p:txBody>
+          <a:bodyPr wrap="square" lIns="0" rIns="0" tIns="0" bIns="0" anchor="t">
+            <a:spAutoFit/>
+          </a:bodyPr>
+          <a:lstStyle/>
+          <a:p>
+            <a:pPr algn="l">
+              <a:lnSpc>
+                <a:spcPct val="130000"/>
+              </a:lnSpc>
+            </a:pPr>
+            <a:r>
+              <a:rPr sz="1350" b="0" i="0">
                 <a:solidFill>
                   <a:srgbClr val="1A1A1E"/>
                 </a:solidFill>
                 <a:latin typeface="Roboto"/>
               </a:rPr>
-              <a:t> Ganha isolamento, e herda uma superfície nova: imagem base e privilégio de execução.</a:t>
-            </a:r>
-          </a:p>
-        </p:txBody>
-      </p:sp>
-      <p:sp>
-        <p:nvSpPr>
-          <p:cNvPr id="21" name="TextBox 20"/>
-          <p:cNvSpPr txBox="1"/>
-          <p:nvPr/>
-        </p:nvSpPr>
-        <p:spPr>
-          <a:xfrm>
-            <a:off x="6362700" y="3284220"/>
-            <a:ext cx="247650" cy="280416"/>
-          </a:xfrm>
-          <a:prstGeom prst="rect">
-            <a:avLst/>
-          </a:prstGeom>
-          <a:noFill/>
-        </p:spPr>
-        <p:txBody>
-          <a:bodyPr wrap="square" lIns="0" rIns="0" tIns="0" bIns="0" anchor="t">
-            <a:spAutoFit/>
-          </a:bodyPr>
-          <a:lstStyle/>
-          <a:p>
-            <a:pPr algn="l">
-              <a:lnSpc>
-                <a:spcPct val="120000"/>
-              </a:lnSpc>
-            </a:pPr>
-            <a:r>
-              <a:rPr sz="1380" b="1" i="0">
-                <a:solidFill>
-                  <a:srgbClr val="E94D1C"/>
-                </a:solidFill>
-                <a:latin typeface="Roboto"/>
-              </a:rPr>
-              <a:t>//</a:t>
-            </a:r>
-          </a:p>
-        </p:txBody>
-      </p:sp>
-      <p:sp>
-        <p:nvSpPr>
-          <p:cNvPr id="22" name="TextBox 21"/>
-          <p:cNvSpPr txBox="1"/>
-          <p:nvPr/>
-        </p:nvSpPr>
-        <p:spPr>
-          <a:xfrm>
-            <a:off x="6648450" y="3274695"/>
-            <a:ext cx="4857750" cy="95250"/>
-          </a:xfrm>
-          <a:prstGeom prst="rect">
-            <a:avLst/>
-          </a:prstGeom>
-          <a:noFill/>
-        </p:spPr>
-        <p:txBody>
-          <a:bodyPr wrap="square" lIns="0" rIns="0" tIns="0" bIns="0" anchor="t">
-            <a:spAutoFit/>
-          </a:bodyPr>
-          <a:lstStyle/>
-          <a:p>
-            <a:pPr algn="l">
-              <a:lnSpc>
-                <a:spcPct val="130000"/>
-              </a:lnSpc>
-            </a:pPr>
-            <a:r>
-              <a:rPr sz="1500" b="1" i="0">
-                <a:solidFill>
-                  <a:srgbClr val="1A1A1E"/>
-                </a:solidFill>
-                <a:latin typeface="Roboto"/>
-              </a:rPr>
-              <a:t>Desempenho.</a:t>
-            </a:r>
-            <a:r>
-              <a:rPr sz="1500" b="0" i="0">
-                <a:solidFill>
-                  <a:srgbClr val="1A1A1E"/>
-                </a:solidFill>
-                <a:latin typeface="Roboto"/>
-              </a:rPr>
-              <a:t> Principalmente I/O nas máquinas Windows. A Aula 03 já avisa que camada extra prejudica desempenho.</a:t>
+              <a:t>Desempenho custa, principalmente I/O nas máquinas Windows, e a Aula 03 já avisa que camada extra prejudica desempenho.</a:t>
             </a:r>
           </a:p>
         </p:txBody>
@@ -33168,7 +33069,7 @@
         </p:nvSpPr>
         <p:spPr>
           <a:xfrm>
-            <a:off x="685800" y="2722626"/>
+            <a:off x="685800" y="2590610"/>
             <a:ext cx="5143500" cy="182880"/>
           </a:xfrm>
           <a:prstGeom prst="rect">
@@ -33207,7 +33108,7 @@
         </p:nvSpPr>
         <p:spPr>
           <a:xfrm>
-            <a:off x="685800" y="2932176"/>
+            <a:off x="685800" y="2800160"/>
             <a:ext cx="419100" cy="28575"/>
           </a:xfrm>
           <a:prstGeom prst="rect">
@@ -33251,7 +33152,7 @@
         </p:nvSpPr>
         <p:spPr>
           <a:xfrm>
-            <a:off x="685800" y="3227451"/>
+            <a:off x="685800" y="3095434"/>
             <a:ext cx="247650" cy="294437"/>
           </a:xfrm>
           <a:prstGeom prst="rect">
@@ -33290,7 +33191,7 @@
         </p:nvSpPr>
         <p:spPr>
           <a:xfrm>
-            <a:off x="971550" y="3217926"/>
+            <a:off x="971550" y="3085910"/>
             <a:ext cx="4857750" cy="95250"/>
           </a:xfrm>
           <a:prstGeom prst="rect">
@@ -33329,7 +33230,7 @@
         </p:nvSpPr>
         <p:spPr>
           <a:xfrm>
-            <a:off x="685800" y="3758184"/>
+            <a:off x="685800" y="3626168"/>
             <a:ext cx="247650" cy="294437"/>
           </a:xfrm>
           <a:prstGeom prst="rect">
@@ -33368,7 +33269,7 @@
         </p:nvSpPr>
         <p:spPr>
           <a:xfrm>
-            <a:off x="971550" y="3748659"/>
+            <a:off x="971550" y="3616643"/>
             <a:ext cx="4857750" cy="95250"/>
           </a:xfrm>
           <a:prstGeom prst="rect">
@@ -33407,7 +33308,7 @@
         </p:nvSpPr>
         <p:spPr>
           <a:xfrm>
-            <a:off x="685800" y="4288917"/>
+            <a:off x="685800" y="4156901"/>
             <a:ext cx="247650" cy="294437"/>
           </a:xfrm>
           <a:prstGeom prst="rect">
@@ -33446,7 +33347,7 @@
         </p:nvSpPr>
         <p:spPr>
           <a:xfrm>
-            <a:off x="971550" y="4279392"/>
+            <a:off x="971550" y="4147376"/>
             <a:ext cx="4857750" cy="95250"/>
           </a:xfrm>
           <a:prstGeom prst="rect">
@@ -33485,7 +33386,7 @@
         </p:nvSpPr>
         <p:spPr>
           <a:xfrm>
-            <a:off x="6362700" y="2722626"/>
+            <a:off x="6362700" y="2590610"/>
             <a:ext cx="5143500" cy="182880"/>
           </a:xfrm>
           <a:prstGeom prst="rect">
@@ -33524,7 +33425,7 @@
         </p:nvSpPr>
         <p:spPr>
           <a:xfrm>
-            <a:off x="6362700" y="2932176"/>
+            <a:off x="6362700" y="2800160"/>
             <a:ext cx="419100" cy="28575"/>
           </a:xfrm>
           <a:prstGeom prst="rect">
@@ -33568,7 +33469,7 @@
         </p:nvSpPr>
         <p:spPr>
           <a:xfrm>
-            <a:off x="6362700" y="3227451"/>
+            <a:off x="6362700" y="3095434"/>
             <a:ext cx="247650" cy="294437"/>
           </a:xfrm>
           <a:prstGeom prst="rect">
@@ -33607,7 +33508,7 @@
         </p:nvSpPr>
         <p:spPr>
           <a:xfrm>
-            <a:off x="6648450" y="3217926"/>
+            <a:off x="6648450" y="3085910"/>
             <a:ext cx="4857750" cy="95250"/>
           </a:xfrm>
           <a:prstGeom prst="rect">
@@ -33633,7 +33534,7 @@
                 </a:solidFill>
                 <a:latin typeface="Roboto"/>
               </a:rPr>
-              <a:t>Não isolam. Contabilizam e limitam.</a:t>
+              <a:t>Não isolam nada, apenas contabilizam e limitam o consumo.</a:t>
             </a:r>
           </a:p>
         </p:txBody>
@@ -33646,7 +33547,7 @@
         </p:nvSpPr>
         <p:spPr>
           <a:xfrm>
-            <a:off x="6362700" y="3758184"/>
+            <a:off x="6362700" y="3890200"/>
             <a:ext cx="247650" cy="294437"/>
           </a:xfrm>
           <a:prstGeom prst="rect">
@@ -33685,7 +33586,7 @@
         </p:nvSpPr>
         <p:spPr>
           <a:xfrm>
-            <a:off x="6648450" y="3748659"/>
+            <a:off x="6648450" y="3880676"/>
             <a:ext cx="4857750" cy="95250"/>
           </a:xfrm>
           <a:prstGeom prst="rect">
@@ -33724,7 +33625,7 @@
         </p:nvSpPr>
         <p:spPr>
           <a:xfrm>
-            <a:off x="6362700" y="4552950"/>
+            <a:off x="6362700" y="4684966"/>
             <a:ext cx="247650" cy="294437"/>
           </a:xfrm>
           <a:prstGeom prst="rect">
@@ -33763,7 +33664,7 @@
         </p:nvSpPr>
         <p:spPr>
           <a:xfrm>
-            <a:off x="6648450" y="4543425"/>
+            <a:off x="6648450" y="4675442"/>
             <a:ext cx="4857750" cy="95250"/>
           </a:xfrm>
           <a:prstGeom prst="rect">

--- a/trabalhos/T1-Docker-Invite-People.pptx
+++ b/trabalhos/T1-Docker-Invite-People.pptx
@@ -31686,7 +31686,7 @@
                 </a:solidFill>
                 <a:latin typeface="Roboto"/>
               </a:rPr>
-              <a:t>CONTAINER · SÍNTESE DOS MECANISMOS</a:t>
+              <a:t>CONTAINER, PELO MECANISMO DO KERNEL</a:t>
             </a:r>
           </a:p>
         </p:txBody>
@@ -31847,7 +31847,7 @@
                 </a:solidFill>
                 <a:latin typeface="Roboto"/>
               </a:rPr>
-              <a:t>IMAGEM · OCI IMAGE SPEC</a:t>
+              <a:t>IMAGEM, PELA OCI IMAGE SPEC</a:t>
             </a:r>
           </a:p>
         </p:txBody>

--- a/trabalhos/T1-Docker-Invite-People.pptx
+++ b/trabalhos/T1-Docker-Invite-People.pptx
@@ -12174,7 +12174,7 @@
         </p:nvSpPr>
         <p:spPr>
           <a:xfrm>
-            <a:off x="685800" y="3042285"/>
+            <a:off x="685800" y="2903982"/>
             <a:ext cx="247650" cy="308458"/>
           </a:xfrm>
           <a:prstGeom prst="rect">
@@ -12213,7 +12213,7 @@
         </p:nvSpPr>
         <p:spPr>
           <a:xfrm>
-            <a:off x="971550" y="3032760"/>
+            <a:off x="971550" y="2894457"/>
             <a:ext cx="7677150" cy="95250"/>
           </a:xfrm>
           <a:prstGeom prst="rect">
@@ -12252,7 +12252,7 @@
         </p:nvSpPr>
         <p:spPr>
           <a:xfrm>
-            <a:off x="685800" y="3881247"/>
+            <a:off x="685800" y="3742944"/>
             <a:ext cx="247650" cy="308458"/>
           </a:xfrm>
           <a:prstGeom prst="rect">
@@ -12291,7 +12291,7 @@
         </p:nvSpPr>
         <p:spPr>
           <a:xfrm>
-            <a:off x="971550" y="3871722"/>
+            <a:off x="971550" y="3733419"/>
             <a:ext cx="7677150" cy="95250"/>
           </a:xfrm>
           <a:prstGeom prst="rect">
@@ -12330,7 +12330,7 @@
         </p:nvSpPr>
         <p:spPr>
           <a:xfrm>
-            <a:off x="685800" y="4720209"/>
+            <a:off x="685800" y="4581906"/>
             <a:ext cx="247650" cy="308458"/>
           </a:xfrm>
           <a:prstGeom prst="rect">
@@ -12369,7 +12369,7 @@
         </p:nvSpPr>
         <p:spPr>
           <a:xfrm>
-            <a:off x="971550" y="4710684"/>
+            <a:off x="971550" y="4572381"/>
             <a:ext cx="7677150" cy="95250"/>
           </a:xfrm>
           <a:prstGeom prst="rect">
@@ -12395,7 +12395,7 @@
                 </a:solidFill>
                 <a:latin typeface="Roboto"/>
               </a:rPr>
-              <a:t>AppArmor ou SELinux entram por cima de tudo, como LSM.</a:t>
+              <a:t>AppArmor ou SELinux entram por cima de tudo, pelo módulo de segurança do próprio kernel.</a:t>
             </a:r>
           </a:p>
         </p:txBody>
@@ -12408,7 +12408,7 @@
         </p:nvSpPr>
         <p:spPr>
           <a:xfrm>
-            <a:off x="9124950" y="3032760"/>
+            <a:off x="9124950" y="2894457"/>
             <a:ext cx="152400" cy="133350"/>
           </a:xfrm>
           <a:prstGeom prst="triangle">
@@ -12452,7 +12452,7 @@
         </p:nvSpPr>
         <p:spPr>
           <a:xfrm>
-            <a:off x="9193530" y="3089910"/>
+            <a:off x="9193530" y="2951607"/>
             <a:ext cx="15240" cy="38100"/>
           </a:xfrm>
           <a:prstGeom prst="rect">
@@ -12496,7 +12496,7 @@
         </p:nvSpPr>
         <p:spPr>
           <a:xfrm>
-            <a:off x="9372600" y="3042285"/>
+            <a:off x="9372600" y="2903982"/>
             <a:ext cx="2133600" cy="182880"/>
           </a:xfrm>
           <a:prstGeom prst="rect">
@@ -12535,7 +12535,7 @@
         </p:nvSpPr>
         <p:spPr>
           <a:xfrm>
-            <a:off x="9124950" y="3318510"/>
+            <a:off x="9124950" y="3180207"/>
             <a:ext cx="38100" cy="603504"/>
           </a:xfrm>
           <a:prstGeom prst="rect">
@@ -12579,7 +12579,7 @@
         </p:nvSpPr>
         <p:spPr>
           <a:xfrm>
-            <a:off x="9334500" y="3318510"/>
+            <a:off x="9334500" y="3180207"/>
             <a:ext cx="2171700" cy="1175004"/>
           </a:xfrm>
           <a:prstGeom prst="rect">
@@ -15306,7 +15306,7 @@
                 </a:solidFill>
                 <a:latin typeface="Roboto"/>
               </a:rPr>
-              <a:t>Nenhuma das três muda uma linha do projeto lógico. Todas mudam o empacotamento, e essa escolha é entrada do ADR #63. Cuidado com o vocabulário: Docker usa </a:t>
+              <a:t>Nenhuma das três muda uma linha do projeto lógico. Todas mudam o empacotamento, e essa escolha é entrada do ADR #63, o documento de decisões arquiteturais da Sprint 2. Cuidado com o vocabulário: Docker usa </a:t>
             </a:r>
             <a:r>
               <a:rPr sz="1280" b="0" i="1">
@@ -19692,7 +19692,7 @@
         </p:nvSpPr>
         <p:spPr>
           <a:xfrm>
-            <a:off x="685800" y="3042285"/>
+            <a:off x="685800" y="2903982"/>
             <a:ext cx="247650" cy="308458"/>
           </a:xfrm>
           <a:prstGeom prst="rect">
@@ -19731,7 +19731,7 @@
         </p:nvSpPr>
         <p:spPr>
           <a:xfrm>
-            <a:off x="971550" y="3032760"/>
+            <a:off x="971550" y="2894457"/>
             <a:ext cx="7581900" cy="95250"/>
           </a:xfrm>
           <a:prstGeom prst="rect">
@@ -19757,7 +19757,7 @@
                 </a:solidFill>
                 <a:latin typeface="Roboto"/>
               </a:rPr>
-              <a:t>A jornada da Marina descreve o link caindo no grupo da família. Pico no convite público (UC005), uma pessoa no painel (UC007).</a:t>
+              <a:t>Marina é a persona da anfitriã, e a jornada dela descreve o link caindo no grupo da família. Isso é pico no convite público, onde o convidado confirma presença, e uma pessoa só no painel, onde a anfitriã vê a lista.</a:t>
             </a:r>
           </a:p>
         </p:txBody>
@@ -19770,7 +19770,7 @@
         </p:nvSpPr>
         <p:spPr>
           <a:xfrm>
-            <a:off x="685800" y="3881247"/>
+            <a:off x="685800" y="4019550"/>
             <a:ext cx="247650" cy="308458"/>
           </a:xfrm>
           <a:prstGeom prst="rect">
@@ -19809,7 +19809,7 @@
         </p:nvSpPr>
         <p:spPr>
           <a:xfrm>
-            <a:off x="971550" y="3871722"/>
+            <a:off x="971550" y="4010025"/>
             <a:ext cx="7581900" cy="95250"/>
           </a:xfrm>
           <a:prstGeom prst="rect">
@@ -19848,7 +19848,7 @@
         </p:nvSpPr>
         <p:spPr>
           <a:xfrm>
-            <a:off x="685800" y="4443603"/>
+            <a:off x="685800" y="4581906"/>
             <a:ext cx="247650" cy="308458"/>
           </a:xfrm>
           <a:prstGeom prst="rect">
@@ -19887,7 +19887,7 @@
         </p:nvSpPr>
         <p:spPr>
           <a:xfrm>
-            <a:off x="971550" y="4434078"/>
+            <a:off x="971550" y="4572381"/>
             <a:ext cx="7581900" cy="95250"/>
           </a:xfrm>
           <a:prstGeom prst="rect">
@@ -19926,7 +19926,7 @@
         </p:nvSpPr>
         <p:spPr>
           <a:xfrm>
-            <a:off x="9124950" y="3032760"/>
+            <a:off x="9124950" y="2894457"/>
             <a:ext cx="142875" cy="142875"/>
           </a:xfrm>
           <a:prstGeom prst="donut">
@@ -19970,7 +19970,7 @@
         </p:nvSpPr>
         <p:spPr>
           <a:xfrm>
-            <a:off x="9372600" y="3042285"/>
+            <a:off x="9372600" y="2903982"/>
             <a:ext cx="2133600" cy="182880"/>
           </a:xfrm>
           <a:prstGeom prst="rect">
@@ -20009,7 +20009,7 @@
         </p:nvSpPr>
         <p:spPr>
           <a:xfrm>
-            <a:off x="9124950" y="3318510"/>
+            <a:off x="9124950" y="3180207"/>
             <a:ext cx="38100" cy="1033272"/>
           </a:xfrm>
           <a:prstGeom prst="rect">
@@ -20053,7 +20053,7 @@
         </p:nvSpPr>
         <p:spPr>
           <a:xfrm>
-            <a:off x="9334500" y="3318510"/>
+            <a:off x="9334500" y="3180207"/>
             <a:ext cx="2171700" cy="1604772"/>
           </a:xfrm>
           <a:prstGeom prst="rect">
@@ -21555,7 +21555,7 @@
                 </a:solidFill>
                 <a:latin typeface="Roboto"/>
               </a:rPr>
-              <a:t>Volume nomeado e persistência</a:t>
+              <a:t>O dado sobrevive ao container</a:t>
             </a:r>
           </a:p>
           <a:p>
@@ -21571,7 +21571,7 @@
                 </a:solidFill>
                 <a:latin typeface="Roboto"/>
               </a:rPr>
-              <a:t>entre execuções</a:t>
+              <a:t>se ficar num volume</a:t>
             </a:r>
           </a:p>
         </p:txBody>
@@ -22253,7 +22253,7 @@
                 </a:solidFill>
                 <a:latin typeface="Roboto"/>
               </a:rPr>
-              <a:t>A imagem de fundo do UC003 e o CSV do UC008 não podem morrer junto com o container. A decisão de implantação volta como restrição de projeto para as camadas de cima.</a:t>
+              <a:t>A imagem de fundo que a anfitriã envia ao personalizar o convite e o CSV de restrições alimentares que ela exporta não podem morrer junto com o container. A decisão de implantação volta como restrição de projeto para as camadas de cima.</a:t>
             </a:r>
           </a:p>
         </p:txBody>
@@ -31110,7 +31110,7 @@
                 </a:solidFill>
                 <a:latin typeface="Roboto"/>
               </a:rPr>
-              <a:t>OCI</a:t>
+              <a:t>primeiras especificações comuns de container</a:t>
             </a:r>
           </a:p>
         </p:txBody>
@@ -31660,7 +31660,7 @@
         </p:nvSpPr>
         <p:spPr>
           <a:xfrm>
-            <a:off x="685800" y="3253359"/>
+            <a:off x="685800" y="2723960"/>
             <a:ext cx="5143500" cy="182880"/>
           </a:xfrm>
           <a:prstGeom prst="rect">
@@ -31686,7 +31686,7 @@
                 </a:solidFill>
                 <a:latin typeface="Roboto"/>
               </a:rPr>
-              <a:t>CONTAINER, PELO MECANISMO DO KERNEL</a:t>
+              <a:t>O QUE É UM CONTAINER</a:t>
             </a:r>
           </a:p>
         </p:txBody>
@@ -31699,7 +31699,7 @@
         </p:nvSpPr>
         <p:spPr>
           <a:xfrm>
-            <a:off x="685800" y="3462909"/>
+            <a:off x="685800" y="2933510"/>
             <a:ext cx="419100" cy="28575"/>
           </a:xfrm>
           <a:prstGeom prst="rect">
@@ -31743,7 +31743,7 @@
         </p:nvSpPr>
         <p:spPr>
           <a:xfrm>
-            <a:off x="685800" y="3758184"/>
+            <a:off x="685800" y="3228784"/>
             <a:ext cx="247650" cy="294437"/>
           </a:xfrm>
           <a:prstGeom prst="rect">
@@ -31782,7 +31782,7 @@
         </p:nvSpPr>
         <p:spPr>
           <a:xfrm>
-            <a:off x="971550" y="3748659"/>
+            <a:off x="971550" y="3219260"/>
             <a:ext cx="4857750" cy="95250"/>
           </a:xfrm>
           <a:prstGeom prst="rect">
@@ -31821,7 +31821,85 @@
         </p:nvSpPr>
         <p:spPr>
           <a:xfrm>
-            <a:off x="6362700" y="3253359"/>
+            <a:off x="685800" y="4551616"/>
+            <a:ext cx="247650" cy="294437"/>
+          </a:xfrm>
+          <a:prstGeom prst="rect">
+            <a:avLst/>
+          </a:prstGeom>
+          <a:noFill/>
+        </p:spPr>
+        <p:txBody>
+          <a:bodyPr wrap="square" lIns="0" rIns="0" tIns="0" bIns="0" anchor="t">
+            <a:spAutoFit/>
+          </a:bodyPr>
+          <a:lstStyle/>
+          <a:p>
+            <a:pPr algn="l">
+              <a:lnSpc>
+                <a:spcPct val="120000"/>
+              </a:lnSpc>
+            </a:pPr>
+            <a:r>
+              <a:rPr sz="1450" b="1" i="0">
+                <a:solidFill>
+                  <a:srgbClr val="E94D1C"/>
+                </a:solidFill>
+                <a:latin typeface="Roboto"/>
+              </a:rPr>
+              <a:t>//</a:t>
+            </a:r>
+          </a:p>
+        </p:txBody>
+      </p:sp>
+      <p:sp>
+        <p:nvSpPr>
+          <p:cNvPr id="10" name="TextBox 9"/>
+          <p:cNvSpPr txBox="1"/>
+          <p:nvPr/>
+        </p:nvSpPr>
+        <p:spPr>
+          <a:xfrm>
+            <a:off x="971550" y="4542092"/>
+            <a:ext cx="4857750" cy="95250"/>
+          </a:xfrm>
+          <a:prstGeom prst="rect">
+            <a:avLst/>
+          </a:prstGeom>
+          <a:noFill/>
+        </p:spPr>
+        <p:txBody>
+          <a:bodyPr wrap="square" lIns="0" rIns="0" tIns="0" bIns="0" anchor="t">
+            <a:spAutoFit/>
+          </a:bodyPr>
+          <a:lstStyle/>
+          <a:p>
+            <a:pPr algn="l">
+              <a:lnSpc>
+                <a:spcPct val="130000"/>
+              </a:lnSpc>
+            </a:pPr>
+            <a:r>
+              <a:rPr sz="1580" b="0" i="0">
+                <a:solidFill>
+                  <a:srgbClr val="1A1A1E"/>
+                </a:solidFill>
+                <a:latin typeface="Roboto"/>
+              </a:rPr>
+              <a:t>Essa definição não é citação de livro. É a que o grupo montou a partir dos quatro mecanismos do Linux que os próximos slides mostram.</a:t>
+            </a:r>
+          </a:p>
+        </p:txBody>
+      </p:sp>
+      <p:sp>
+        <p:nvSpPr>
+          <p:cNvPr id="11" name="TextBox 10"/>
+          <p:cNvSpPr txBox="1"/>
+          <p:nvPr/>
+        </p:nvSpPr>
+        <p:spPr>
+          <a:xfrm>
+            <a:off x="6362700" y="2723960"/>
             <a:ext cx="5143500" cy="182880"/>
           </a:xfrm>
           <a:prstGeom prst="rect">
@@ -31847,20 +31925,20 @@
                 </a:solidFill>
                 <a:latin typeface="Roboto"/>
               </a:rPr>
-              <a:t>IMAGEM, PELA OCI IMAGE SPEC</a:t>
-            </a:r>
-          </a:p>
-        </p:txBody>
-      </p:sp>
-      <p:sp>
-        <p:nvSpPr>
-          <p:cNvPr id="10" name="Rectangle 9"/>
+              <a:t>O QUE É UMA IMAGEM</a:t>
+            </a:r>
+          </a:p>
+        </p:txBody>
+      </p:sp>
+      <p:sp>
+        <p:nvSpPr>
+          <p:cNvPr id="12" name="Rectangle 11"/>
           <p:cNvSpPr/>
           <p:nvPr/>
         </p:nvSpPr>
         <p:spPr>
           <a:xfrm>
-            <a:off x="6362700" y="3462909"/>
+            <a:off x="6362700" y="2933510"/>
             <a:ext cx="419100" cy="28575"/>
           </a:xfrm>
           <a:prstGeom prst="rect">
@@ -31898,13 +31976,13 @@
       </p:sp>
       <p:sp>
         <p:nvSpPr>
-          <p:cNvPr id="11" name="TextBox 10"/>
-          <p:cNvSpPr txBox="1"/>
-          <p:nvPr/>
-        </p:nvSpPr>
-        <p:spPr>
-          <a:xfrm>
-            <a:off x="6362700" y="3758184"/>
+          <p:cNvPr id="13" name="TextBox 12"/>
+          <p:cNvSpPr txBox="1"/>
+          <p:nvPr/>
+        </p:nvSpPr>
+        <p:spPr>
+          <a:xfrm>
+            <a:off x="6362700" y="3228784"/>
             <a:ext cx="247650" cy="294437"/>
           </a:xfrm>
           <a:prstGeom prst="rect">
@@ -31937,13 +32015,13 @@
       </p:sp>
       <p:sp>
         <p:nvSpPr>
-          <p:cNvPr id="12" name="TextBox 11"/>
-          <p:cNvSpPr txBox="1"/>
-          <p:nvPr/>
-        </p:nvSpPr>
-        <p:spPr>
-          <a:xfrm>
-            <a:off x="6648450" y="3748659"/>
+          <p:cNvPr id="14" name="TextBox 13"/>
+          <p:cNvSpPr txBox="1"/>
+          <p:nvPr/>
+        </p:nvSpPr>
+        <p:spPr>
+          <a:xfrm>
+            <a:off x="6648450" y="3219260"/>
             <a:ext cx="4857750" cy="95250"/>
           </a:xfrm>
           <a:prstGeom prst="rect">
@@ -31969,14 +32047,92 @@
                 </a:solidFill>
                 <a:latin typeface="Roboto"/>
               </a:rPr>
-              <a:t>Conjunto ordenado de camadas de sistema de arquivos mais a configuração de execução, identificado por digest.</a:t>
-            </a:r>
-          </a:p>
-        </p:txBody>
-      </p:sp>
-      <p:sp>
-        <p:nvSpPr>
-          <p:cNvPr id="13" name="TextBox 12"/>
+              <a:t>Conjunto ordenado de camadas de sistema de arquivos mais a configuração de execução, identificado por um digest, que é o hash do próprio conteúdo.</a:t>
+            </a:r>
+          </a:p>
+        </p:txBody>
+      </p:sp>
+      <p:sp>
+        <p:nvSpPr>
+          <p:cNvPr id="15" name="TextBox 14"/>
+          <p:cNvSpPr txBox="1"/>
+          <p:nvPr/>
+        </p:nvSpPr>
+        <p:spPr>
+          <a:xfrm>
+            <a:off x="6362700" y="4551616"/>
+            <a:ext cx="247650" cy="294437"/>
+          </a:xfrm>
+          <a:prstGeom prst="rect">
+            <a:avLst/>
+          </a:prstGeom>
+          <a:noFill/>
+        </p:spPr>
+        <p:txBody>
+          <a:bodyPr wrap="square" lIns="0" rIns="0" tIns="0" bIns="0" anchor="t">
+            <a:spAutoFit/>
+          </a:bodyPr>
+          <a:lstStyle/>
+          <a:p>
+            <a:pPr algn="l">
+              <a:lnSpc>
+                <a:spcPct val="120000"/>
+              </a:lnSpc>
+            </a:pPr>
+            <a:r>
+              <a:rPr sz="1450" b="1" i="0">
+                <a:solidFill>
+                  <a:srgbClr val="E94D1C"/>
+                </a:solidFill>
+                <a:latin typeface="Roboto"/>
+              </a:rPr>
+              <a:t>//</a:t>
+            </a:r>
+          </a:p>
+        </p:txBody>
+      </p:sp>
+      <p:sp>
+        <p:nvSpPr>
+          <p:cNvPr id="16" name="TextBox 15"/>
+          <p:cNvSpPr txBox="1"/>
+          <p:nvPr/>
+        </p:nvSpPr>
+        <p:spPr>
+          <a:xfrm>
+            <a:off x="6648450" y="4542092"/>
+            <a:ext cx="4857750" cy="95250"/>
+          </a:xfrm>
+          <a:prstGeom prst="rect">
+            <a:avLst/>
+          </a:prstGeom>
+          <a:noFill/>
+        </p:spPr>
+        <p:txBody>
+          <a:bodyPr wrap="square" lIns="0" rIns="0" tIns="0" bIns="0" anchor="t">
+            <a:spAutoFit/>
+          </a:bodyPr>
+          <a:lstStyle/>
+          <a:p>
+            <a:pPr algn="l">
+              <a:lnSpc>
+                <a:spcPct val="130000"/>
+              </a:lnSpc>
+            </a:pPr>
+            <a:r>
+              <a:rPr sz="1580" b="0" i="0">
+                <a:solidFill>
+                  <a:srgbClr val="1A1A1E"/>
+                </a:solidFill>
+                <a:latin typeface="Roboto"/>
+              </a:rPr>
+              <a:t>Essa é citação da Image Spec, um dos documentos da Open Container Initiative, a organização que padroniza o formato de imagem desde 2015.</a:t>
+            </a:r>
+          </a:p>
+        </p:txBody>
+      </p:sp>
+      <p:sp>
+        <p:nvSpPr>
+          <p:cNvPr id="17" name="TextBox 16"/>
           <p:cNvSpPr txBox="1"/>
           <p:nvPr/>
         </p:nvSpPr>
@@ -32015,7 +32171,7 @@
       </p:sp>
       <p:sp>
         <p:nvSpPr>
-          <p:cNvPr id="14" name="TextBox 13"/>
+          <p:cNvPr id="18" name="TextBox 17"/>
           <p:cNvSpPr txBox="1"/>
           <p:nvPr/>
         </p:nvSpPr>
@@ -33690,7 +33846,7 @@
                 </a:solidFill>
                 <a:latin typeface="Roboto"/>
               </a:rPr>
-              <a:t>Limite de CPU é throttling. Degrada latência de cauda, não a média, e por isso é mais difícil de diagnosticar.</a:t>
+              <a:t>Limite de CPU não mata, freia. Isso piora as requisições mais lentas e quase não mexe na média, por isso é mais difícil de perceber.</a:t>
             </a:r>
           </a:p>
         </p:txBody>
@@ -34696,7 +34852,7 @@
                 </a:solidFill>
                 <a:latin typeface="Roboto"/>
               </a:rPr>
-              <a:t>Um Dockerfile que copia um .env e faz RUN rm na instrução seguinte produz uma imagem em que o segredo continua legível. No nosso caso o segredo seria a senha do banco e o segredo de sessão do UC001.</a:t>
+              <a:t>Um Dockerfile que copia um .env e faz RUN rm na instrução seguinte produz uma imagem em que o segredo continua legível. No nosso caso o segredo seria a senha do banco e o segredo de sessão do login do anfitrião, o UC001.</a:t>
             </a:r>
           </a:p>
         </p:txBody>

--- a/trabalhos/T1-Docker-Invite-People.pptx
+++ b/trabalhos/T1-Docker-Invite-People.pptx
@@ -13623,7 +13623,7 @@
                 </a:solidFill>
                 <a:latin typeface="Roboto"/>
               </a:rPr>
-              <a:t>Layer é camada lógica.</a:t>
+              <a:t>As mesmas três camadas lógicas,</a:t>
             </a:r>
           </a:p>
           <a:p>
@@ -13639,7 +13639,7 @@
                 </a:solidFill>
                 <a:latin typeface="Roboto"/>
               </a:rPr>
-              <a:t>Tier é separação física.</a:t>
+              <a:t>empacotadas de três jeitos</a:t>
             </a:r>
           </a:p>
         </p:txBody>
@@ -15530,7 +15530,7 @@
                 </a:solidFill>
                 <a:latin typeface="Roboto"/>
               </a:rPr>
-              <a:t>Container é ambiente de execução,</a:t>
+              <a:t>No diagrama de implantação, o container</a:t>
             </a:r>
           </a:p>
           <a:p>
@@ -15546,7 +15546,7 @@
                 </a:solidFill>
                 <a:latin typeface="Roboto"/>
               </a:rPr>
-              <a:t>imagem é artefato</a:t>
+              <a:t>é um nó e a imagem é um artefato</a:t>
             </a:r>
           </a:p>
         </p:txBody>
@@ -31660,7 +31660,7 @@
         </p:nvSpPr>
         <p:spPr>
           <a:xfrm>
-            <a:off x="685800" y="2723960"/>
+            <a:off x="685800" y="3253359"/>
             <a:ext cx="5143500" cy="182880"/>
           </a:xfrm>
           <a:prstGeom prst="rect">
@@ -31686,7 +31686,7 @@
                 </a:solidFill>
                 <a:latin typeface="Roboto"/>
               </a:rPr>
-              <a:t>O QUE É UM CONTAINER</a:t>
+              <a:t>CONTAINER · DEFINIÇÃO DO GRUPO</a:t>
             </a:r>
           </a:p>
         </p:txBody>
@@ -31699,7 +31699,7 @@
         </p:nvSpPr>
         <p:spPr>
           <a:xfrm>
-            <a:off x="685800" y="2933510"/>
+            <a:off x="685800" y="3462909"/>
             <a:ext cx="419100" cy="28575"/>
           </a:xfrm>
           <a:prstGeom prst="rect">
@@ -31743,7 +31743,7 @@
         </p:nvSpPr>
         <p:spPr>
           <a:xfrm>
-            <a:off x="685800" y="3228784"/>
+            <a:off x="685800" y="3758184"/>
             <a:ext cx="247650" cy="294437"/>
           </a:xfrm>
           <a:prstGeom prst="rect">
@@ -31782,7 +31782,7 @@
         </p:nvSpPr>
         <p:spPr>
           <a:xfrm>
-            <a:off x="971550" y="3219260"/>
+            <a:off x="971550" y="3748659"/>
             <a:ext cx="4857750" cy="95250"/>
           </a:xfrm>
           <a:prstGeom prst="rect">
@@ -31821,8 +31821,8 @@
         </p:nvSpPr>
         <p:spPr>
           <a:xfrm>
-            <a:off x="685800" y="4551616"/>
-            <a:ext cx="247650" cy="294437"/>
+            <a:off x="6362700" y="3253359"/>
+            <a:ext cx="5143500" cy="182880"/>
           </a:xfrm>
           <a:prstGeom prst="rect">
             <a:avLst/>
@@ -31841,104 +31841,26 @@
               </a:lnSpc>
             </a:pPr>
             <a:r>
-              <a:rPr sz="1450" b="1" i="0">
+              <a:rPr sz="900" b="1" i="0" spc="120">
                 <a:solidFill>
                   <a:srgbClr val="E94D1C"/>
                 </a:solidFill>
                 <a:latin typeface="Roboto"/>
               </a:rPr>
-              <a:t>//</a:t>
-            </a:r>
-          </a:p>
-        </p:txBody>
-      </p:sp>
-      <p:sp>
-        <p:nvSpPr>
-          <p:cNvPr id="10" name="TextBox 9"/>
-          <p:cNvSpPr txBox="1"/>
-          <p:nvPr/>
-        </p:nvSpPr>
-        <p:spPr>
-          <a:xfrm>
-            <a:off x="971550" y="4542092"/>
-            <a:ext cx="4857750" cy="95250"/>
-          </a:xfrm>
-          <a:prstGeom prst="rect">
-            <a:avLst/>
-          </a:prstGeom>
-          <a:noFill/>
-        </p:spPr>
-        <p:txBody>
-          <a:bodyPr wrap="square" lIns="0" rIns="0" tIns="0" bIns="0" anchor="t">
-            <a:spAutoFit/>
-          </a:bodyPr>
-          <a:lstStyle/>
-          <a:p>
-            <a:pPr algn="l">
-              <a:lnSpc>
-                <a:spcPct val="130000"/>
-              </a:lnSpc>
-            </a:pPr>
-            <a:r>
-              <a:rPr sz="1580" b="0" i="0">
-                <a:solidFill>
-                  <a:srgbClr val="1A1A1E"/>
-                </a:solidFill>
-                <a:latin typeface="Roboto"/>
-              </a:rPr>
-              <a:t>Essa definição não é citação de livro. É a que o grupo montou a partir dos quatro mecanismos do Linux que os próximos slides mostram.</a:t>
-            </a:r>
-          </a:p>
-        </p:txBody>
-      </p:sp>
-      <p:sp>
-        <p:nvSpPr>
-          <p:cNvPr id="11" name="TextBox 10"/>
-          <p:cNvSpPr txBox="1"/>
-          <p:nvPr/>
-        </p:nvSpPr>
-        <p:spPr>
-          <a:xfrm>
-            <a:off x="6362700" y="2723960"/>
-            <a:ext cx="5143500" cy="182880"/>
-          </a:xfrm>
-          <a:prstGeom prst="rect">
-            <a:avLst/>
-          </a:prstGeom>
-          <a:noFill/>
-        </p:spPr>
-        <p:txBody>
-          <a:bodyPr wrap="square" lIns="0" rIns="0" tIns="0" bIns="0" anchor="t">
-            <a:spAutoFit/>
-          </a:bodyPr>
-          <a:lstStyle/>
-          <a:p>
-            <a:pPr algn="l">
-              <a:lnSpc>
-                <a:spcPct val="120000"/>
-              </a:lnSpc>
-            </a:pPr>
-            <a:r>
-              <a:rPr sz="900" b="1" i="0" spc="120">
-                <a:solidFill>
-                  <a:srgbClr val="E94D1C"/>
-                </a:solidFill>
-                <a:latin typeface="Roboto"/>
-              </a:rPr>
-              <a:t>O QUE É UMA IMAGEM</a:t>
-            </a:r>
-          </a:p>
-        </p:txBody>
-      </p:sp>
-      <p:sp>
-        <p:nvSpPr>
-          <p:cNvPr id="12" name="Rectangle 11"/>
+              <a:t>IMAGEM · OPEN CONTAINER INITIATIVE, IMAGE SPEC</a:t>
+            </a:r>
+          </a:p>
+        </p:txBody>
+      </p:sp>
+      <p:sp>
+        <p:nvSpPr>
+          <p:cNvPr id="10" name="Rectangle 9"/>
           <p:cNvSpPr/>
           <p:nvPr/>
         </p:nvSpPr>
         <p:spPr>
           <a:xfrm>
-            <a:off x="6362700" y="2933510"/>
+            <a:off x="6362700" y="3462909"/>
             <a:ext cx="419100" cy="28575"/>
           </a:xfrm>
           <a:prstGeom prst="rect">
@@ -31976,163 +31898,85 @@
       </p:sp>
       <p:sp>
         <p:nvSpPr>
+          <p:cNvPr id="11" name="TextBox 10"/>
+          <p:cNvSpPr txBox="1"/>
+          <p:nvPr/>
+        </p:nvSpPr>
+        <p:spPr>
+          <a:xfrm>
+            <a:off x="6362700" y="3758184"/>
+            <a:ext cx="247650" cy="294437"/>
+          </a:xfrm>
+          <a:prstGeom prst="rect">
+            <a:avLst/>
+          </a:prstGeom>
+          <a:noFill/>
+        </p:spPr>
+        <p:txBody>
+          <a:bodyPr wrap="square" lIns="0" rIns="0" tIns="0" bIns="0" anchor="t">
+            <a:spAutoFit/>
+          </a:bodyPr>
+          <a:lstStyle/>
+          <a:p>
+            <a:pPr algn="l">
+              <a:lnSpc>
+                <a:spcPct val="120000"/>
+              </a:lnSpc>
+            </a:pPr>
+            <a:r>
+              <a:rPr sz="1450" b="1" i="0">
+                <a:solidFill>
+                  <a:srgbClr val="E94D1C"/>
+                </a:solidFill>
+                <a:latin typeface="Roboto"/>
+              </a:rPr>
+              <a:t>//</a:t>
+            </a:r>
+          </a:p>
+        </p:txBody>
+      </p:sp>
+      <p:sp>
+        <p:nvSpPr>
+          <p:cNvPr id="12" name="TextBox 11"/>
+          <p:cNvSpPr txBox="1"/>
+          <p:nvPr/>
+        </p:nvSpPr>
+        <p:spPr>
+          <a:xfrm>
+            <a:off x="6648450" y="3748659"/>
+            <a:ext cx="4857750" cy="95250"/>
+          </a:xfrm>
+          <a:prstGeom prst="rect">
+            <a:avLst/>
+          </a:prstGeom>
+          <a:noFill/>
+        </p:spPr>
+        <p:txBody>
+          <a:bodyPr wrap="square" lIns="0" rIns="0" tIns="0" bIns="0" anchor="t">
+            <a:spAutoFit/>
+          </a:bodyPr>
+          <a:lstStyle/>
+          <a:p>
+            <a:pPr algn="l">
+              <a:lnSpc>
+                <a:spcPct val="130000"/>
+              </a:lnSpc>
+            </a:pPr>
+            <a:r>
+              <a:rPr sz="1580" b="0" i="0">
+                <a:solidFill>
+                  <a:srgbClr val="1A1A1E"/>
+                </a:solidFill>
+                <a:latin typeface="Roboto"/>
+              </a:rPr>
+              <a:t>Conjunto ordenado de camadas de sistema de arquivos mais a configuração de execução, identificado por um digest, que é o hash do próprio conteúdo.</a:t>
+            </a:r>
+          </a:p>
+        </p:txBody>
+      </p:sp>
+      <p:sp>
+        <p:nvSpPr>
           <p:cNvPr id="13" name="TextBox 12"/>
-          <p:cNvSpPr txBox="1"/>
-          <p:nvPr/>
-        </p:nvSpPr>
-        <p:spPr>
-          <a:xfrm>
-            <a:off x="6362700" y="3228784"/>
-            <a:ext cx="247650" cy="294437"/>
-          </a:xfrm>
-          <a:prstGeom prst="rect">
-            <a:avLst/>
-          </a:prstGeom>
-          <a:noFill/>
-        </p:spPr>
-        <p:txBody>
-          <a:bodyPr wrap="square" lIns="0" rIns="0" tIns="0" bIns="0" anchor="t">
-            <a:spAutoFit/>
-          </a:bodyPr>
-          <a:lstStyle/>
-          <a:p>
-            <a:pPr algn="l">
-              <a:lnSpc>
-                <a:spcPct val="120000"/>
-              </a:lnSpc>
-            </a:pPr>
-            <a:r>
-              <a:rPr sz="1450" b="1" i="0">
-                <a:solidFill>
-                  <a:srgbClr val="E94D1C"/>
-                </a:solidFill>
-                <a:latin typeface="Roboto"/>
-              </a:rPr>
-              <a:t>//</a:t>
-            </a:r>
-          </a:p>
-        </p:txBody>
-      </p:sp>
-      <p:sp>
-        <p:nvSpPr>
-          <p:cNvPr id="14" name="TextBox 13"/>
-          <p:cNvSpPr txBox="1"/>
-          <p:nvPr/>
-        </p:nvSpPr>
-        <p:spPr>
-          <a:xfrm>
-            <a:off x="6648450" y="3219260"/>
-            <a:ext cx="4857750" cy="95250"/>
-          </a:xfrm>
-          <a:prstGeom prst="rect">
-            <a:avLst/>
-          </a:prstGeom>
-          <a:noFill/>
-        </p:spPr>
-        <p:txBody>
-          <a:bodyPr wrap="square" lIns="0" rIns="0" tIns="0" bIns="0" anchor="t">
-            <a:spAutoFit/>
-          </a:bodyPr>
-          <a:lstStyle/>
-          <a:p>
-            <a:pPr algn="l">
-              <a:lnSpc>
-                <a:spcPct val="130000"/>
-              </a:lnSpc>
-            </a:pPr>
-            <a:r>
-              <a:rPr sz="1580" b="0" i="0">
-                <a:solidFill>
-                  <a:srgbClr val="1A1A1E"/>
-                </a:solidFill>
-                <a:latin typeface="Roboto"/>
-              </a:rPr>
-              <a:t>Conjunto ordenado de camadas de sistema de arquivos mais a configuração de execução, identificado por um digest, que é o hash do próprio conteúdo.</a:t>
-            </a:r>
-          </a:p>
-        </p:txBody>
-      </p:sp>
-      <p:sp>
-        <p:nvSpPr>
-          <p:cNvPr id="15" name="TextBox 14"/>
-          <p:cNvSpPr txBox="1"/>
-          <p:nvPr/>
-        </p:nvSpPr>
-        <p:spPr>
-          <a:xfrm>
-            <a:off x="6362700" y="4551616"/>
-            <a:ext cx="247650" cy="294437"/>
-          </a:xfrm>
-          <a:prstGeom prst="rect">
-            <a:avLst/>
-          </a:prstGeom>
-          <a:noFill/>
-        </p:spPr>
-        <p:txBody>
-          <a:bodyPr wrap="square" lIns="0" rIns="0" tIns="0" bIns="0" anchor="t">
-            <a:spAutoFit/>
-          </a:bodyPr>
-          <a:lstStyle/>
-          <a:p>
-            <a:pPr algn="l">
-              <a:lnSpc>
-                <a:spcPct val="120000"/>
-              </a:lnSpc>
-            </a:pPr>
-            <a:r>
-              <a:rPr sz="1450" b="1" i="0">
-                <a:solidFill>
-                  <a:srgbClr val="E94D1C"/>
-                </a:solidFill>
-                <a:latin typeface="Roboto"/>
-              </a:rPr>
-              <a:t>//</a:t>
-            </a:r>
-          </a:p>
-        </p:txBody>
-      </p:sp>
-      <p:sp>
-        <p:nvSpPr>
-          <p:cNvPr id="16" name="TextBox 15"/>
-          <p:cNvSpPr txBox="1"/>
-          <p:nvPr/>
-        </p:nvSpPr>
-        <p:spPr>
-          <a:xfrm>
-            <a:off x="6648450" y="4542092"/>
-            <a:ext cx="4857750" cy="95250"/>
-          </a:xfrm>
-          <a:prstGeom prst="rect">
-            <a:avLst/>
-          </a:prstGeom>
-          <a:noFill/>
-        </p:spPr>
-        <p:txBody>
-          <a:bodyPr wrap="square" lIns="0" rIns="0" tIns="0" bIns="0" anchor="t">
-            <a:spAutoFit/>
-          </a:bodyPr>
-          <a:lstStyle/>
-          <a:p>
-            <a:pPr algn="l">
-              <a:lnSpc>
-                <a:spcPct val="130000"/>
-              </a:lnSpc>
-            </a:pPr>
-            <a:r>
-              <a:rPr sz="1580" b="0" i="0">
-                <a:solidFill>
-                  <a:srgbClr val="1A1A1E"/>
-                </a:solidFill>
-                <a:latin typeface="Roboto"/>
-              </a:rPr>
-              <a:t>Essa é citação da Image Spec, um dos documentos da Open Container Initiative, a organização que padroniza o formato de imagem desde 2015.</a:t>
-            </a:r>
-          </a:p>
-        </p:txBody>
-      </p:sp>
-      <p:sp>
-        <p:nvSpPr>
-          <p:cNvPr id="17" name="TextBox 16"/>
           <p:cNvSpPr txBox="1"/>
           <p:nvPr/>
         </p:nvSpPr>
@@ -32171,7 +32015,7 @@
       </p:sp>
       <p:sp>
         <p:nvSpPr>
-          <p:cNvPr id="18" name="TextBox 17"/>
+          <p:cNvPr id="14" name="TextBox 13"/>
           <p:cNvSpPr txBox="1"/>
           <p:nvPr/>
         </p:nvSpPr>

--- a/trabalhos/T1-Docker-Invite-People.pptx
+++ b/trabalhos/T1-Docker-Invite-People.pptx
@@ -12168,14 +12168,58 @@
       </p:sp>
       <p:sp>
         <p:nvSpPr>
-          <p:cNvPr id="5" name="TextBox 4"/>
+          <p:cNvPr id="5" name="Rectangle 4"/>
+          <p:cNvSpPr/>
+          <p:nvPr/>
+        </p:nvSpPr>
+        <p:spPr>
+          <a:xfrm>
+            <a:off x="704850" y="3003423"/>
+            <a:ext cx="57150" cy="57150"/>
+          </a:xfrm>
+          <a:prstGeom prst="rect">
+            <a:avLst/>
+          </a:prstGeom>
+          <a:solidFill>
+            <a:srgbClr val="E94D1C"/>
+          </a:solidFill>
+          <a:ln>
+            <a:noFill/>
+          </a:ln>
+          <a:effectLst/>
+        </p:spPr>
+        <p:style>
+          <a:lnRef idx="1">
+            <a:schemeClr val="accent1"/>
+          </a:lnRef>
+          <a:fillRef idx="3">
+            <a:schemeClr val="accent1"/>
+          </a:fillRef>
+          <a:effectRef idx="2">
+            <a:schemeClr val="accent1"/>
+          </a:effectRef>
+          <a:fontRef idx="minor">
+            <a:schemeClr val="lt1"/>
+          </a:fontRef>
+        </p:style>
+        <p:txBody>
+          <a:bodyPr rtlCol="0" anchor="ctr" wrap="square" lIns="0" rIns="0" tIns="0" bIns="0"/>
+          <a:lstStyle/>
+          <a:p>
+            <a:pPr algn="ctr"/>
+          </a:p>
+        </p:txBody>
+      </p:sp>
+      <p:sp>
+        <p:nvSpPr>
+          <p:cNvPr id="6" name="TextBox 5"/>
           <p:cNvSpPr txBox="1"/>
           <p:nvPr/>
         </p:nvSpPr>
         <p:spPr>
           <a:xfrm>
-            <a:off x="685800" y="2903982"/>
-            <a:ext cx="247650" cy="308458"/>
+            <a:off x="971550" y="2894457"/>
+            <a:ext cx="7677150" cy="95250"/>
           </a:xfrm>
           <a:prstGeom prst="rect">
             <a:avLst/>
@@ -12190,30 +12234,74 @@
           <a:p>
             <a:pPr algn="l">
               <a:lnSpc>
-                <a:spcPct val="120000"/>
-              </a:lnSpc>
-            </a:pPr>
-            <a:r>
-              <a:rPr sz="1520" b="1" i="0">
-                <a:solidFill>
-                  <a:srgbClr val="E94D1C"/>
-                </a:solidFill>
-                <a:latin typeface="Roboto"/>
-              </a:rPr>
-              <a:t>//</a:t>
-            </a:r>
-          </a:p>
-        </p:txBody>
-      </p:sp>
-      <p:sp>
-        <p:nvSpPr>
-          <p:cNvPr id="6" name="TextBox 5"/>
+                <a:spcPct val="130000"/>
+              </a:lnSpc>
+            </a:pPr>
+            <a:r>
+              <a:rPr sz="1650" b="0" i="0">
+                <a:solidFill>
+                  <a:srgbClr val="1A1A1E"/>
+                </a:solidFill>
+                <a:latin typeface="Roboto"/>
+              </a:rPr>
+              <a:t>Capabilities fatiam o root do POSIX em privilégios independentes, que podem ser derrubados e devolvidos um a um.</a:t>
+            </a:r>
+          </a:p>
+        </p:txBody>
+      </p:sp>
+      <p:sp>
+        <p:nvSpPr>
+          <p:cNvPr id="7" name="Rectangle 6"/>
+          <p:cNvSpPr/>
+          <p:nvPr/>
+        </p:nvSpPr>
+        <p:spPr>
+          <a:xfrm>
+            <a:off x="704850" y="3842385"/>
+            <a:ext cx="57150" cy="57150"/>
+          </a:xfrm>
+          <a:prstGeom prst="rect">
+            <a:avLst/>
+          </a:prstGeom>
+          <a:solidFill>
+            <a:srgbClr val="E94D1C"/>
+          </a:solidFill>
+          <a:ln>
+            <a:noFill/>
+          </a:ln>
+          <a:effectLst/>
+        </p:spPr>
+        <p:style>
+          <a:lnRef idx="1">
+            <a:schemeClr val="accent1"/>
+          </a:lnRef>
+          <a:fillRef idx="3">
+            <a:schemeClr val="accent1"/>
+          </a:fillRef>
+          <a:effectRef idx="2">
+            <a:schemeClr val="accent1"/>
+          </a:effectRef>
+          <a:fontRef idx="minor">
+            <a:schemeClr val="lt1"/>
+          </a:fontRef>
+        </p:style>
+        <p:txBody>
+          <a:bodyPr rtlCol="0" anchor="ctr" wrap="square" lIns="0" rIns="0" tIns="0" bIns="0"/>
+          <a:lstStyle/>
+          <a:p>
+            <a:pPr algn="ctr"/>
+          </a:p>
+        </p:txBody>
+      </p:sp>
+      <p:sp>
+        <p:nvSpPr>
+          <p:cNvPr id="8" name="TextBox 7"/>
           <p:cNvSpPr txBox="1"/>
           <p:nvPr/>
         </p:nvSpPr>
         <p:spPr>
           <a:xfrm>
-            <a:off x="971550" y="2894457"/>
+            <a:off x="971550" y="3733419"/>
             <a:ext cx="7677150" cy="95250"/>
           </a:xfrm>
           <a:prstGeom prst="rect">
@@ -12239,84 +12327,6 @@
                 </a:solidFill>
                 <a:latin typeface="Roboto"/>
               </a:rPr>
-              <a:t>Capabilities fatiam o root do POSIX em privilégios independentes, que podem ser derrubados e devolvidos um a um.</a:t>
-            </a:r>
-          </a:p>
-        </p:txBody>
-      </p:sp>
-      <p:sp>
-        <p:nvSpPr>
-          <p:cNvPr id="7" name="TextBox 6"/>
-          <p:cNvSpPr txBox="1"/>
-          <p:nvPr/>
-        </p:nvSpPr>
-        <p:spPr>
-          <a:xfrm>
-            <a:off x="685800" y="3742944"/>
-            <a:ext cx="247650" cy="308458"/>
-          </a:xfrm>
-          <a:prstGeom prst="rect">
-            <a:avLst/>
-          </a:prstGeom>
-          <a:noFill/>
-        </p:spPr>
-        <p:txBody>
-          <a:bodyPr wrap="square" lIns="0" rIns="0" tIns="0" bIns="0" anchor="t">
-            <a:spAutoFit/>
-          </a:bodyPr>
-          <a:lstStyle/>
-          <a:p>
-            <a:pPr algn="l">
-              <a:lnSpc>
-                <a:spcPct val="120000"/>
-              </a:lnSpc>
-            </a:pPr>
-            <a:r>
-              <a:rPr sz="1520" b="1" i="0">
-                <a:solidFill>
-                  <a:srgbClr val="E94D1C"/>
-                </a:solidFill>
-                <a:latin typeface="Roboto"/>
-              </a:rPr>
-              <a:t>//</a:t>
-            </a:r>
-          </a:p>
-        </p:txBody>
-      </p:sp>
-      <p:sp>
-        <p:nvSpPr>
-          <p:cNvPr id="8" name="TextBox 7"/>
-          <p:cNvSpPr txBox="1"/>
-          <p:nvPr/>
-        </p:nvSpPr>
-        <p:spPr>
-          <a:xfrm>
-            <a:off x="971550" y="3733419"/>
-            <a:ext cx="7677150" cy="95250"/>
-          </a:xfrm>
-          <a:prstGeom prst="rect">
-            <a:avLst/>
-          </a:prstGeom>
-          <a:noFill/>
-        </p:spPr>
-        <p:txBody>
-          <a:bodyPr wrap="square" lIns="0" rIns="0" tIns="0" bIns="0" anchor="t">
-            <a:spAutoFit/>
-          </a:bodyPr>
-          <a:lstStyle/>
-          <a:p>
-            <a:pPr algn="l">
-              <a:lnSpc>
-                <a:spcPct val="130000"/>
-              </a:lnSpc>
-            </a:pPr>
-            <a:r>
-              <a:rPr sz="1650" b="0" i="0">
-                <a:solidFill>
-                  <a:srgbClr val="1A1A1E"/>
-                </a:solidFill>
-                <a:latin typeface="Roboto"/>
-              </a:rPr>
               <a:t>O perfil padrão de seccomp-bpf bloqueia parte das chamadas de sistema disponíveis.</a:t>
             </a:r>
           </a:p>
@@ -12324,40 +12334,45 @@
       </p:sp>
       <p:sp>
         <p:nvSpPr>
-          <p:cNvPr id="9" name="TextBox 8"/>
-          <p:cNvSpPr txBox="1"/>
-          <p:nvPr/>
-        </p:nvSpPr>
-        <p:spPr>
-          <a:xfrm>
-            <a:off x="685800" y="4581906"/>
-            <a:ext cx="247650" cy="308458"/>
-          </a:xfrm>
-          <a:prstGeom prst="rect">
-            <a:avLst/>
-          </a:prstGeom>
-          <a:noFill/>
-        </p:spPr>
-        <p:txBody>
-          <a:bodyPr wrap="square" lIns="0" rIns="0" tIns="0" bIns="0" anchor="t">
-            <a:spAutoFit/>
-          </a:bodyPr>
-          <a:lstStyle/>
-          <a:p>
-            <a:pPr algn="l">
-              <a:lnSpc>
-                <a:spcPct val="120000"/>
-              </a:lnSpc>
-            </a:pPr>
-            <a:r>
-              <a:rPr sz="1520" b="1" i="0">
-                <a:solidFill>
-                  <a:srgbClr val="E94D1C"/>
-                </a:solidFill>
-                <a:latin typeface="Roboto"/>
-              </a:rPr>
-              <a:t>//</a:t>
-            </a:r>
+          <p:cNvPr id="9" name="Rectangle 8"/>
+          <p:cNvSpPr/>
+          <p:nvPr/>
+        </p:nvSpPr>
+        <p:spPr>
+          <a:xfrm>
+            <a:off x="704850" y="4681347"/>
+            <a:ext cx="57150" cy="57150"/>
+          </a:xfrm>
+          <a:prstGeom prst="rect">
+            <a:avLst/>
+          </a:prstGeom>
+          <a:solidFill>
+            <a:srgbClr val="E94D1C"/>
+          </a:solidFill>
+          <a:ln>
+            <a:noFill/>
+          </a:ln>
+          <a:effectLst/>
+        </p:spPr>
+        <p:style>
+          <a:lnRef idx="1">
+            <a:schemeClr val="accent1"/>
+          </a:lnRef>
+          <a:fillRef idx="3">
+            <a:schemeClr val="accent1"/>
+          </a:fillRef>
+          <a:effectRef idx="2">
+            <a:schemeClr val="accent1"/>
+          </a:effectRef>
+          <a:fontRef idx="minor">
+            <a:schemeClr val="lt1"/>
+          </a:fontRef>
+        </p:style>
+        <p:txBody>
+          <a:bodyPr rtlCol="0" anchor="ctr" wrap="square" lIns="0" rIns="0" tIns="0" bIns="0"/>
+          <a:lstStyle/>
+          <a:p>
+            <a:pPr algn="ctr"/>
           </a:p>
         </p:txBody>
       </p:sp>
@@ -18260,14 +18275,58 @@
       </p:sp>
       <p:sp>
         <p:nvSpPr>
-          <p:cNvPr id="16" name="TextBox 15"/>
+          <p:cNvPr id="16" name="Rectangle 15"/>
+          <p:cNvSpPr/>
+          <p:nvPr/>
+        </p:nvSpPr>
+        <p:spPr>
+          <a:xfrm>
+            <a:off x="7067550" y="2589276"/>
+            <a:ext cx="57150" cy="57150"/>
+          </a:xfrm>
+          <a:prstGeom prst="rect">
+            <a:avLst/>
+          </a:prstGeom>
+          <a:solidFill>
+            <a:srgbClr val="E94D1C"/>
+          </a:solidFill>
+          <a:ln>
+            <a:noFill/>
+          </a:ln>
+          <a:effectLst/>
+        </p:spPr>
+        <p:style>
+          <a:lnRef idx="1">
+            <a:schemeClr val="accent1"/>
+          </a:lnRef>
+          <a:fillRef idx="3">
+            <a:schemeClr val="accent1"/>
+          </a:fillRef>
+          <a:effectRef idx="2">
+            <a:schemeClr val="accent1"/>
+          </a:effectRef>
+          <a:fontRef idx="minor">
+            <a:schemeClr val="lt1"/>
+          </a:fontRef>
+        </p:style>
+        <p:txBody>
+          <a:bodyPr rtlCol="0" anchor="ctr" wrap="square" lIns="0" rIns="0" tIns="0" bIns="0"/>
+          <a:lstStyle/>
+          <a:p>
+            <a:pPr algn="ctr"/>
+          </a:p>
+        </p:txBody>
+      </p:sp>
+      <p:sp>
+        <p:nvSpPr>
+          <p:cNvPr id="17" name="TextBox 16"/>
           <p:cNvSpPr txBox="1"/>
           <p:nvPr/>
         </p:nvSpPr>
         <p:spPr>
           <a:xfrm>
-            <a:off x="7048500" y="2514600"/>
-            <a:ext cx="247650" cy="238354"/>
+            <a:off x="7334250" y="2505075"/>
+            <a:ext cx="4171950" cy="95250"/>
           </a:xfrm>
           <a:prstGeom prst="rect">
             <a:avLst/>
@@ -18282,30 +18341,92 @@
           <a:p>
             <a:pPr algn="l">
               <a:lnSpc>
-                <a:spcPct val="120000"/>
-              </a:lnSpc>
-            </a:pPr>
-            <a:r>
-              <a:rPr sz="1170" b="1" i="0">
-                <a:solidFill>
-                  <a:srgbClr val="E94D1C"/>
-                </a:solidFill>
-                <a:latin typeface="Roboto"/>
-              </a:rPr>
-              <a:t>//</a:t>
-            </a:r>
-          </a:p>
-        </p:txBody>
-      </p:sp>
-      <p:sp>
-        <p:nvSpPr>
-          <p:cNvPr id="17" name="TextBox 16"/>
+                <a:spcPct val="130000"/>
+              </a:lnSpc>
+            </a:pPr>
+            <a:r>
+              <a:rPr sz="1280" b="0" i="0">
+                <a:solidFill>
+                  <a:srgbClr val="1A1A1E"/>
+                </a:solidFill>
+                <a:latin typeface="Roboto"/>
+              </a:rPr>
+              <a:t>A porta publicada mais o contrato HTTP é a </a:t>
+            </a:r>
+            <a:r>
+              <a:rPr sz="1280" b="1" i="0">
+                <a:solidFill>
+                  <a:srgbClr val="1A1A1E"/>
+                </a:solidFill>
+                <a:latin typeface="Roboto"/>
+              </a:rPr>
+              <a:t>interface provida</a:t>
+            </a:r>
+            <a:r>
+              <a:rPr sz="1280" b="0" i="0">
+                <a:solidFill>
+                  <a:srgbClr val="1A1A1E"/>
+                </a:solidFill>
+                <a:latin typeface="Roboto"/>
+              </a:rPr>
+              <a:t>, o pirulito da UML.</a:t>
+            </a:r>
+          </a:p>
+        </p:txBody>
+      </p:sp>
+      <p:sp>
+        <p:nvSpPr>
+          <p:cNvPr id="18" name="Rectangle 17"/>
+          <p:cNvSpPr/>
+          <p:nvPr/>
+        </p:nvSpPr>
+        <p:spPr>
+          <a:xfrm>
+            <a:off x="7067550" y="3169158"/>
+            <a:ext cx="57150" cy="57150"/>
+          </a:xfrm>
+          <a:prstGeom prst="rect">
+            <a:avLst/>
+          </a:prstGeom>
+          <a:solidFill>
+            <a:srgbClr val="E94D1C"/>
+          </a:solidFill>
+          <a:ln>
+            <a:noFill/>
+          </a:ln>
+          <a:effectLst/>
+        </p:spPr>
+        <p:style>
+          <a:lnRef idx="1">
+            <a:schemeClr val="accent1"/>
+          </a:lnRef>
+          <a:fillRef idx="3">
+            <a:schemeClr val="accent1"/>
+          </a:fillRef>
+          <a:effectRef idx="2">
+            <a:schemeClr val="accent1"/>
+          </a:effectRef>
+          <a:fontRef idx="minor">
+            <a:schemeClr val="lt1"/>
+          </a:fontRef>
+        </p:style>
+        <p:txBody>
+          <a:bodyPr rtlCol="0" anchor="ctr" wrap="square" lIns="0" rIns="0" tIns="0" bIns="0"/>
+          <a:lstStyle/>
+          <a:p>
+            <a:pPr algn="ctr"/>
+          </a:p>
+        </p:txBody>
+      </p:sp>
+      <p:sp>
+        <p:nvSpPr>
+          <p:cNvPr id="19" name="TextBox 18"/>
           <p:cNvSpPr txBox="1"/>
           <p:nvPr/>
         </p:nvSpPr>
         <p:spPr>
           <a:xfrm>
-            <a:off x="7334250" y="2505075"/>
+            <a:off x="7334250" y="3084957"/>
             <a:ext cx="4171950" cy="95250"/>
           </a:xfrm>
           <a:prstGeom prst="rect">
@@ -18331,7 +18452,7 @@
                 </a:solidFill>
                 <a:latin typeface="Roboto"/>
               </a:rPr>
-              <a:t>A porta publicada mais o contrato HTTP é a </a:t>
+              <a:t>A variável de conexão mais a dependência declarada é a </a:t>
             </a:r>
             <a:r>
               <a:rPr sz="1280" b="1" i="0">
@@ -18340,7 +18461,7 @@
                 </a:solidFill>
                 <a:latin typeface="Roboto"/>
               </a:rPr>
-              <a:t>interface provida</a:t>
+              <a:t>interface requerida</a:t>
             </a:r>
             <a:r>
               <a:rPr sz="1280" b="0" i="0">
@@ -18349,21 +18470,65 @@
                 </a:solidFill>
                 <a:latin typeface="Roboto"/>
               </a:rPr>
-              <a:t>, o pirulito da UML.</a:t>
-            </a:r>
-          </a:p>
-        </p:txBody>
-      </p:sp>
-      <p:sp>
-        <p:nvSpPr>
-          <p:cNvPr id="18" name="TextBox 17"/>
+              <a:t>, o soquete.</a:t>
+            </a:r>
+          </a:p>
+        </p:txBody>
+      </p:sp>
+      <p:sp>
+        <p:nvSpPr>
+          <p:cNvPr id="20" name="Rectangle 19"/>
+          <p:cNvSpPr/>
+          <p:nvPr/>
+        </p:nvSpPr>
+        <p:spPr>
+          <a:xfrm>
+            <a:off x="7067550" y="3749040"/>
+            <a:ext cx="57150" cy="57150"/>
+          </a:xfrm>
+          <a:prstGeom prst="rect">
+            <a:avLst/>
+          </a:prstGeom>
+          <a:solidFill>
+            <a:srgbClr val="E94D1C"/>
+          </a:solidFill>
+          <a:ln>
+            <a:noFill/>
+          </a:ln>
+          <a:effectLst/>
+        </p:spPr>
+        <p:style>
+          <a:lnRef idx="1">
+            <a:schemeClr val="accent1"/>
+          </a:lnRef>
+          <a:fillRef idx="3">
+            <a:schemeClr val="accent1"/>
+          </a:fillRef>
+          <a:effectRef idx="2">
+            <a:schemeClr val="accent1"/>
+          </a:effectRef>
+          <a:fontRef idx="minor">
+            <a:schemeClr val="lt1"/>
+          </a:fontRef>
+        </p:style>
+        <p:txBody>
+          <a:bodyPr rtlCol="0" anchor="ctr" wrap="square" lIns="0" rIns="0" tIns="0" bIns="0"/>
+          <a:lstStyle/>
+          <a:p>
+            <a:pPr algn="ctr"/>
+          </a:p>
+        </p:txBody>
+      </p:sp>
+      <p:sp>
+        <p:nvSpPr>
+          <p:cNvPr id="21" name="TextBox 20"/>
           <p:cNvSpPr txBox="1"/>
           <p:nvPr/>
         </p:nvSpPr>
         <p:spPr>
           <a:xfrm>
-            <a:off x="7048500" y="3094482"/>
-            <a:ext cx="247650" cy="238354"/>
+            <a:off x="7334250" y="3664839"/>
+            <a:ext cx="4171950" cy="95250"/>
           </a:xfrm>
           <a:prstGeom prst="rect">
             <a:avLst/>
@@ -18378,45 +18543,6 @@
           <a:p>
             <a:pPr algn="l">
               <a:lnSpc>
-                <a:spcPct val="120000"/>
-              </a:lnSpc>
-            </a:pPr>
-            <a:r>
-              <a:rPr sz="1170" b="1" i="0">
-                <a:solidFill>
-                  <a:srgbClr val="E94D1C"/>
-                </a:solidFill>
-                <a:latin typeface="Roboto"/>
-              </a:rPr>
-              <a:t>//</a:t>
-            </a:r>
-          </a:p>
-        </p:txBody>
-      </p:sp>
-      <p:sp>
-        <p:nvSpPr>
-          <p:cNvPr id="19" name="TextBox 18"/>
-          <p:cNvSpPr txBox="1"/>
-          <p:nvPr/>
-        </p:nvSpPr>
-        <p:spPr>
-          <a:xfrm>
-            <a:off x="7334250" y="3084957"/>
-            <a:ext cx="4171950" cy="95250"/>
-          </a:xfrm>
-          <a:prstGeom prst="rect">
-            <a:avLst/>
-          </a:prstGeom>
-          <a:noFill/>
-        </p:spPr>
-        <p:txBody>
-          <a:bodyPr wrap="square" lIns="0" rIns="0" tIns="0" bIns="0" anchor="t">
-            <a:spAutoFit/>
-          </a:bodyPr>
-          <a:lstStyle/>
-          <a:p>
-            <a:pPr algn="l">
-              <a:lnSpc>
                 <a:spcPct val="130000"/>
               </a:lnSpc>
             </a:pPr>
@@ -18427,102 +18553,6 @@
                 </a:solidFill>
                 <a:latin typeface="Roboto"/>
               </a:rPr>
-              <a:t>A variável de conexão mais a dependência declarada é a </a:t>
-            </a:r>
-            <a:r>
-              <a:rPr sz="1280" b="1" i="0">
-                <a:solidFill>
-                  <a:srgbClr val="1A1A1E"/>
-                </a:solidFill>
-                <a:latin typeface="Roboto"/>
-              </a:rPr>
-              <a:t>interface requerida</a:t>
-            </a:r>
-            <a:r>
-              <a:rPr sz="1280" b="0" i="0">
-                <a:solidFill>
-                  <a:srgbClr val="1A1A1E"/>
-                </a:solidFill>
-                <a:latin typeface="Roboto"/>
-              </a:rPr>
-              <a:t>, o soquete.</a:t>
-            </a:r>
-          </a:p>
-        </p:txBody>
-      </p:sp>
-      <p:sp>
-        <p:nvSpPr>
-          <p:cNvPr id="20" name="TextBox 19"/>
-          <p:cNvSpPr txBox="1"/>
-          <p:nvPr/>
-        </p:nvSpPr>
-        <p:spPr>
-          <a:xfrm>
-            <a:off x="7048500" y="3674364"/>
-            <a:ext cx="247650" cy="238354"/>
-          </a:xfrm>
-          <a:prstGeom prst="rect">
-            <a:avLst/>
-          </a:prstGeom>
-          <a:noFill/>
-        </p:spPr>
-        <p:txBody>
-          <a:bodyPr wrap="square" lIns="0" rIns="0" tIns="0" bIns="0" anchor="t">
-            <a:spAutoFit/>
-          </a:bodyPr>
-          <a:lstStyle/>
-          <a:p>
-            <a:pPr algn="l">
-              <a:lnSpc>
-                <a:spcPct val="120000"/>
-              </a:lnSpc>
-            </a:pPr>
-            <a:r>
-              <a:rPr sz="1170" b="1" i="0">
-                <a:solidFill>
-                  <a:srgbClr val="E94D1C"/>
-                </a:solidFill>
-                <a:latin typeface="Roboto"/>
-              </a:rPr>
-              <a:t>//</a:t>
-            </a:r>
-          </a:p>
-        </p:txBody>
-      </p:sp>
-      <p:sp>
-        <p:nvSpPr>
-          <p:cNvPr id="21" name="TextBox 20"/>
-          <p:cNvSpPr txBox="1"/>
-          <p:nvPr/>
-        </p:nvSpPr>
-        <p:spPr>
-          <a:xfrm>
-            <a:off x="7334250" y="3664839"/>
-            <a:ext cx="4171950" cy="95250"/>
-          </a:xfrm>
-          <a:prstGeom prst="rect">
-            <a:avLst/>
-          </a:prstGeom>
-          <a:noFill/>
-        </p:spPr>
-        <p:txBody>
-          <a:bodyPr wrap="square" lIns="0" rIns="0" tIns="0" bIns="0" anchor="t">
-            <a:spAutoFit/>
-          </a:bodyPr>
-          <a:lstStyle/>
-          <a:p>
-            <a:pPr algn="l">
-              <a:lnSpc>
-                <a:spcPct val="130000"/>
-              </a:lnSpc>
-            </a:pPr>
-            <a:r>
-              <a:rPr sz="1280" b="0" i="0">
-                <a:solidFill>
-                  <a:srgbClr val="1A1A1E"/>
-                </a:solidFill>
-                <a:latin typeface="Roboto"/>
-              </a:rPr>
               <a:t>A porta da UML é literalmente a porta do container, com o mesmo desenho e o mesmo nome.</a:t>
             </a:r>
           </a:p>
@@ -18530,40 +18560,45 @@
       </p:sp>
       <p:sp>
         <p:nvSpPr>
-          <p:cNvPr id="22" name="TextBox 21"/>
-          <p:cNvSpPr txBox="1"/>
-          <p:nvPr/>
-        </p:nvSpPr>
-        <p:spPr>
-          <a:xfrm>
-            <a:off x="7048500" y="4254246"/>
-            <a:ext cx="247650" cy="238354"/>
-          </a:xfrm>
-          <a:prstGeom prst="rect">
-            <a:avLst/>
-          </a:prstGeom>
-          <a:noFill/>
-        </p:spPr>
-        <p:txBody>
-          <a:bodyPr wrap="square" lIns="0" rIns="0" tIns="0" bIns="0" anchor="t">
-            <a:spAutoFit/>
-          </a:bodyPr>
-          <a:lstStyle/>
-          <a:p>
-            <a:pPr algn="l">
-              <a:lnSpc>
-                <a:spcPct val="120000"/>
-              </a:lnSpc>
-            </a:pPr>
-            <a:r>
-              <a:rPr sz="1170" b="1" i="0">
-                <a:solidFill>
-                  <a:srgbClr val="E94D1C"/>
-                </a:solidFill>
-                <a:latin typeface="Roboto"/>
-              </a:rPr>
-              <a:t>//</a:t>
-            </a:r>
+          <p:cNvPr id="22" name="Rectangle 21"/>
+          <p:cNvSpPr/>
+          <p:nvPr/>
+        </p:nvSpPr>
+        <p:spPr>
+          <a:xfrm>
+            <a:off x="7067550" y="4328922"/>
+            <a:ext cx="57150" cy="57150"/>
+          </a:xfrm>
+          <a:prstGeom prst="rect">
+            <a:avLst/>
+          </a:prstGeom>
+          <a:solidFill>
+            <a:srgbClr val="E94D1C"/>
+          </a:solidFill>
+          <a:ln>
+            <a:noFill/>
+          </a:ln>
+          <a:effectLst/>
+        </p:spPr>
+        <p:style>
+          <a:lnRef idx="1">
+            <a:schemeClr val="accent1"/>
+          </a:lnRef>
+          <a:fillRef idx="3">
+            <a:schemeClr val="accent1"/>
+          </a:fillRef>
+          <a:effectRef idx="2">
+            <a:schemeClr val="accent1"/>
+          </a:effectRef>
+          <a:fontRef idx="minor">
+            <a:schemeClr val="lt1"/>
+          </a:fontRef>
+        </p:style>
+        <p:txBody>
+          <a:bodyPr rtlCol="0" anchor="ctr" wrap="square" lIns="0" rIns="0" tIns="0" bIns="0"/>
+          <a:lstStyle/>
+          <a:p>
+            <a:pPr algn="ctr"/>
           </a:p>
         </p:txBody>
       </p:sp>
@@ -18913,365 +18948,14 @@
       </p:sp>
       <p:sp>
         <p:nvSpPr>
-          <p:cNvPr id="7" name="TextBox 6"/>
-          <p:cNvSpPr txBox="1"/>
-          <p:nvPr/>
-        </p:nvSpPr>
-        <p:spPr>
-          <a:xfrm>
-            <a:off x="685800" y="2566035"/>
-            <a:ext cx="247650" cy="294437"/>
-          </a:xfrm>
-          <a:prstGeom prst="rect">
-            <a:avLst/>
-          </a:prstGeom>
-          <a:noFill/>
-        </p:spPr>
-        <p:txBody>
-          <a:bodyPr wrap="square" lIns="0" rIns="0" tIns="0" bIns="0" anchor="t">
-            <a:spAutoFit/>
-          </a:bodyPr>
-          <a:lstStyle/>
-          <a:p>
-            <a:pPr algn="l">
-              <a:lnSpc>
-                <a:spcPct val="120000"/>
-              </a:lnSpc>
-            </a:pPr>
-            <a:r>
-              <a:rPr sz="1450" b="1" i="0">
-                <a:solidFill>
-                  <a:srgbClr val="E94D1C"/>
-                </a:solidFill>
-                <a:latin typeface="Roboto"/>
-              </a:rPr>
-              <a:t>//</a:t>
-            </a:r>
-          </a:p>
-        </p:txBody>
-      </p:sp>
-      <p:sp>
-        <p:nvSpPr>
-          <p:cNvPr id="8" name="TextBox 7"/>
-          <p:cNvSpPr txBox="1"/>
-          <p:nvPr/>
-        </p:nvSpPr>
-        <p:spPr>
-          <a:xfrm>
-            <a:off x="971550" y="2556510"/>
-            <a:ext cx="4857750" cy="95250"/>
-          </a:xfrm>
-          <a:prstGeom prst="rect">
-            <a:avLst/>
-          </a:prstGeom>
-          <a:noFill/>
-        </p:spPr>
-        <p:txBody>
-          <a:bodyPr wrap="square" lIns="0" rIns="0" tIns="0" bIns="0" anchor="t">
-            <a:spAutoFit/>
-          </a:bodyPr>
-          <a:lstStyle/>
-          <a:p>
-            <a:pPr algn="l">
-              <a:lnSpc>
-                <a:spcPct val="130000"/>
-              </a:lnSpc>
-            </a:pPr>
-            <a:r>
-              <a:rPr sz="1580" b="0" i="0">
-                <a:solidFill>
-                  <a:srgbClr val="1A1A1E"/>
-                </a:solidFill>
-                <a:latin typeface="Roboto"/>
-              </a:rPr>
-              <a:t>A imagem passa a ter uma responsabilidade só, que é mais coesão.</a:t>
-            </a:r>
-          </a:p>
-        </p:txBody>
-      </p:sp>
-      <p:sp>
-        <p:nvSpPr>
-          <p:cNvPr id="9" name="TextBox 8"/>
-          <p:cNvSpPr txBox="1"/>
-          <p:nvPr/>
-        </p:nvSpPr>
-        <p:spPr>
-          <a:xfrm>
-            <a:off x="685800" y="3360801"/>
-            <a:ext cx="247650" cy="294437"/>
-          </a:xfrm>
-          <a:prstGeom prst="rect">
-            <a:avLst/>
-          </a:prstGeom>
-          <a:noFill/>
-        </p:spPr>
-        <p:txBody>
-          <a:bodyPr wrap="square" lIns="0" rIns="0" tIns="0" bIns="0" anchor="t">
-            <a:spAutoFit/>
-          </a:bodyPr>
-          <a:lstStyle/>
-          <a:p>
-            <a:pPr algn="l">
-              <a:lnSpc>
-                <a:spcPct val="120000"/>
-              </a:lnSpc>
-            </a:pPr>
-            <a:r>
-              <a:rPr sz="1450" b="1" i="0">
-                <a:solidFill>
-                  <a:srgbClr val="E94D1C"/>
-                </a:solidFill>
-                <a:latin typeface="Roboto"/>
-              </a:rPr>
-              <a:t>//</a:t>
-            </a:r>
-          </a:p>
-        </p:txBody>
-      </p:sp>
-      <p:sp>
-        <p:nvSpPr>
-          <p:cNvPr id="10" name="TextBox 9"/>
-          <p:cNvSpPr txBox="1"/>
-          <p:nvPr/>
-        </p:nvSpPr>
-        <p:spPr>
-          <a:xfrm>
-            <a:off x="971550" y="3351276"/>
-            <a:ext cx="4857750" cy="95250"/>
-          </a:xfrm>
-          <a:prstGeom prst="rect">
-            <a:avLst/>
-          </a:prstGeom>
-          <a:noFill/>
-        </p:spPr>
-        <p:txBody>
-          <a:bodyPr wrap="square" lIns="0" rIns="0" tIns="0" bIns="0" anchor="t">
-            <a:spAutoFit/>
-          </a:bodyPr>
-          <a:lstStyle/>
-          <a:p>
-            <a:pPr algn="l">
-              <a:lnSpc>
-                <a:spcPct val="130000"/>
-              </a:lnSpc>
-            </a:pPr>
-            <a:r>
-              <a:rPr sz="1580" b="0" i="0">
-                <a:solidFill>
-                  <a:srgbClr val="1A1A1E"/>
-                </a:solidFill>
-                <a:latin typeface="Roboto"/>
-              </a:rPr>
-              <a:t>O código do front não está na imagem da API, então a API não depende dele nem por acidente.</a:t>
-            </a:r>
-          </a:p>
-        </p:txBody>
-      </p:sp>
-      <p:sp>
-        <p:nvSpPr>
-          <p:cNvPr id="11" name="TextBox 10"/>
-          <p:cNvSpPr txBox="1"/>
-          <p:nvPr/>
-        </p:nvSpPr>
-        <p:spPr>
-          <a:xfrm>
-            <a:off x="685800" y="4155567"/>
-            <a:ext cx="247650" cy="294437"/>
-          </a:xfrm>
-          <a:prstGeom prst="rect">
-            <a:avLst/>
-          </a:prstGeom>
-          <a:noFill/>
-        </p:spPr>
-        <p:txBody>
-          <a:bodyPr wrap="square" lIns="0" rIns="0" tIns="0" bIns="0" anchor="t">
-            <a:spAutoFit/>
-          </a:bodyPr>
-          <a:lstStyle/>
-          <a:p>
-            <a:pPr algn="l">
-              <a:lnSpc>
-                <a:spcPct val="120000"/>
-              </a:lnSpc>
-            </a:pPr>
-            <a:r>
-              <a:rPr sz="1450" b="1" i="0">
-                <a:solidFill>
-                  <a:srgbClr val="E94D1C"/>
-                </a:solidFill>
-                <a:latin typeface="Roboto"/>
-              </a:rPr>
-              <a:t>//</a:t>
-            </a:r>
-          </a:p>
-        </p:txBody>
-      </p:sp>
-      <p:sp>
-        <p:nvSpPr>
-          <p:cNvPr id="12" name="TextBox 11"/>
-          <p:cNvSpPr txBox="1"/>
-          <p:nvPr/>
-        </p:nvSpPr>
-        <p:spPr>
-          <a:xfrm>
-            <a:off x="971550" y="4146042"/>
-            <a:ext cx="4857750" cy="95250"/>
-          </a:xfrm>
-          <a:prstGeom prst="rect">
-            <a:avLst/>
-          </a:prstGeom>
-          <a:noFill/>
-        </p:spPr>
-        <p:txBody>
-          <a:bodyPr wrap="square" lIns="0" rIns="0" tIns="0" bIns="0" anchor="t">
-            <a:spAutoFit/>
-          </a:bodyPr>
-          <a:lstStyle/>
-          <a:p>
-            <a:pPr algn="l">
-              <a:lnSpc>
-                <a:spcPct val="130000"/>
-              </a:lnSpc>
-            </a:pPr>
-            <a:r>
-              <a:rPr sz="1580" b="0" i="0">
-                <a:solidFill>
-                  <a:srgbClr val="1A1A1E"/>
-                </a:solidFill>
-                <a:latin typeface="Roboto"/>
-              </a:rPr>
-              <a:t>Só o serviço de fronteira publica porta. O banco fica na rede interna sem mapeamento.</a:t>
-            </a:r>
-          </a:p>
-        </p:txBody>
-      </p:sp>
-      <p:sp>
-        <p:nvSpPr>
-          <p:cNvPr id="13" name="TextBox 12"/>
-          <p:cNvSpPr txBox="1"/>
-          <p:nvPr/>
-        </p:nvSpPr>
-        <p:spPr>
-          <a:xfrm>
-            <a:off x="685800" y="4950333"/>
-            <a:ext cx="247650" cy="294437"/>
-          </a:xfrm>
-          <a:prstGeom prst="rect">
-            <a:avLst/>
-          </a:prstGeom>
-          <a:noFill/>
-        </p:spPr>
-        <p:txBody>
-          <a:bodyPr wrap="square" lIns="0" rIns="0" tIns="0" bIns="0" anchor="t">
-            <a:spAutoFit/>
-          </a:bodyPr>
-          <a:lstStyle/>
-          <a:p>
-            <a:pPr algn="l">
-              <a:lnSpc>
-                <a:spcPct val="120000"/>
-              </a:lnSpc>
-            </a:pPr>
-            <a:r>
-              <a:rPr sz="1450" b="1" i="0">
-                <a:solidFill>
-                  <a:srgbClr val="E94D1C"/>
-                </a:solidFill>
-                <a:latin typeface="Roboto"/>
-              </a:rPr>
-              <a:t>//</a:t>
-            </a:r>
-          </a:p>
-        </p:txBody>
-      </p:sp>
-      <p:sp>
-        <p:nvSpPr>
-          <p:cNvPr id="14" name="TextBox 13"/>
-          <p:cNvSpPr txBox="1"/>
-          <p:nvPr/>
-        </p:nvSpPr>
-        <p:spPr>
-          <a:xfrm>
-            <a:off x="971550" y="4940808"/>
-            <a:ext cx="4857750" cy="95250"/>
-          </a:xfrm>
-          <a:prstGeom prst="rect">
-            <a:avLst/>
-          </a:prstGeom>
-          <a:noFill/>
-        </p:spPr>
-        <p:txBody>
-          <a:bodyPr wrap="square" lIns="0" rIns="0" tIns="0" bIns="0" anchor="t">
-            <a:spAutoFit/>
-          </a:bodyPr>
-          <a:lstStyle/>
-          <a:p>
-            <a:pPr algn="l">
-              <a:lnSpc>
-                <a:spcPct val="130000"/>
-              </a:lnSpc>
-            </a:pPr>
-            <a:r>
-              <a:rPr sz="1580" b="0" i="0">
-                <a:solidFill>
-                  <a:srgbClr val="1A1A1E"/>
-                </a:solidFill>
-                <a:latin typeface="Roboto"/>
-              </a:rPr>
-              <a:t>Uma regra escrita na wiki depende de alguém revisar. A mesma regra na topologia é verificada pela estrutura, o que reduz a degradação arquitetural da Aula 02.</a:t>
-            </a:r>
-          </a:p>
-        </p:txBody>
-      </p:sp>
-      <p:sp>
-        <p:nvSpPr>
-          <p:cNvPr id="15" name="TextBox 14"/>
-          <p:cNvSpPr txBox="1"/>
-          <p:nvPr/>
-        </p:nvSpPr>
-        <p:spPr>
-          <a:xfrm>
-            <a:off x="6362700" y="2061210"/>
-            <a:ext cx="5143500" cy="182880"/>
-          </a:xfrm>
-          <a:prstGeom prst="rect">
-            <a:avLst/>
-          </a:prstGeom>
-          <a:noFill/>
-        </p:spPr>
-        <p:txBody>
-          <a:bodyPr wrap="square" lIns="0" rIns="0" tIns="0" bIns="0" anchor="t">
-            <a:spAutoFit/>
-          </a:bodyPr>
-          <a:lstStyle/>
-          <a:p>
-            <a:pPr algn="l">
-              <a:lnSpc>
-                <a:spcPct val="120000"/>
-              </a:lnSpc>
-            </a:pPr>
-            <a:r>
-              <a:rPr sz="900" b="1" i="0" spc="120">
-                <a:solidFill>
-                  <a:srgbClr val="E94D1C"/>
-                </a:solidFill>
-                <a:latin typeface="Roboto"/>
-              </a:rPr>
-              <a:t>ACOPLAMENTO</a:t>
-            </a:r>
-          </a:p>
-        </p:txBody>
-      </p:sp>
-      <p:sp>
-        <p:nvSpPr>
-          <p:cNvPr id="16" name="Rectangle 15"/>
+          <p:cNvPr id="7" name="Rectangle 6"/>
           <p:cNvSpPr/>
           <p:nvPr/>
         </p:nvSpPr>
         <p:spPr>
           <a:xfrm>
-            <a:off x="6362700" y="2270760"/>
-            <a:ext cx="419100" cy="28575"/>
+            <a:off x="704850" y="2660523"/>
+            <a:ext cx="57150" cy="57150"/>
           </a:xfrm>
           <a:prstGeom prst="rect">
             <a:avLst/>
@@ -19308,14 +18992,14 @@
       </p:sp>
       <p:sp>
         <p:nvSpPr>
-          <p:cNvPr id="17" name="TextBox 16"/>
+          <p:cNvPr id="8" name="TextBox 7"/>
           <p:cNvSpPr txBox="1"/>
           <p:nvPr/>
         </p:nvSpPr>
         <p:spPr>
           <a:xfrm>
-            <a:off x="6362700" y="2566035"/>
-            <a:ext cx="247650" cy="294437"/>
+            <a:off x="971550" y="2556510"/>
+            <a:ext cx="4857750" cy="95250"/>
           </a:xfrm>
           <a:prstGeom prst="rect">
             <a:avLst/>
@@ -19330,30 +19014,74 @@
           <a:p>
             <a:pPr algn="l">
               <a:lnSpc>
-                <a:spcPct val="120000"/>
-              </a:lnSpc>
-            </a:pPr>
-            <a:r>
-              <a:rPr sz="1450" b="1" i="0">
-                <a:solidFill>
-                  <a:srgbClr val="E94D1C"/>
-                </a:solidFill>
-                <a:latin typeface="Roboto"/>
-              </a:rPr>
-              <a:t>//</a:t>
-            </a:r>
-          </a:p>
-        </p:txBody>
-      </p:sp>
-      <p:sp>
-        <p:nvSpPr>
-          <p:cNvPr id="18" name="TextBox 17"/>
+                <a:spcPct val="130000"/>
+              </a:lnSpc>
+            </a:pPr>
+            <a:r>
+              <a:rPr sz="1580" b="0" i="0">
+                <a:solidFill>
+                  <a:srgbClr val="1A1A1E"/>
+                </a:solidFill>
+                <a:latin typeface="Roboto"/>
+              </a:rPr>
+              <a:t>A imagem passa a ter uma responsabilidade só, que é mais coesão.</a:t>
+            </a:r>
+          </a:p>
+        </p:txBody>
+      </p:sp>
+      <p:sp>
+        <p:nvSpPr>
+          <p:cNvPr id="9" name="Rectangle 8"/>
+          <p:cNvSpPr/>
+          <p:nvPr/>
+        </p:nvSpPr>
+        <p:spPr>
+          <a:xfrm>
+            <a:off x="704850" y="3455289"/>
+            <a:ext cx="57150" cy="57150"/>
+          </a:xfrm>
+          <a:prstGeom prst="rect">
+            <a:avLst/>
+          </a:prstGeom>
+          <a:solidFill>
+            <a:srgbClr val="E94D1C"/>
+          </a:solidFill>
+          <a:ln>
+            <a:noFill/>
+          </a:ln>
+          <a:effectLst/>
+        </p:spPr>
+        <p:style>
+          <a:lnRef idx="1">
+            <a:schemeClr val="accent1"/>
+          </a:lnRef>
+          <a:fillRef idx="3">
+            <a:schemeClr val="accent1"/>
+          </a:fillRef>
+          <a:effectRef idx="2">
+            <a:schemeClr val="accent1"/>
+          </a:effectRef>
+          <a:fontRef idx="minor">
+            <a:schemeClr val="lt1"/>
+          </a:fontRef>
+        </p:style>
+        <p:txBody>
+          <a:bodyPr rtlCol="0" anchor="ctr" wrap="square" lIns="0" rIns="0" tIns="0" bIns="0"/>
+          <a:lstStyle/>
+          <a:p>
+            <a:pPr algn="ctr"/>
+          </a:p>
+        </p:txBody>
+      </p:sp>
+      <p:sp>
+        <p:nvSpPr>
+          <p:cNvPr id="10" name="TextBox 9"/>
           <p:cNvSpPr txBox="1"/>
           <p:nvPr/>
         </p:nvSpPr>
         <p:spPr>
           <a:xfrm>
-            <a:off x="6648450" y="2556510"/>
+            <a:off x="971550" y="3351276"/>
             <a:ext cx="4857750" cy="95250"/>
           </a:xfrm>
           <a:prstGeom prst="rect">
@@ -19379,21 +19107,65 @@
                 </a:solidFill>
                 <a:latin typeface="Roboto"/>
               </a:rPr>
-              <a:t>Entre as nossas três camadas o acoplamento continua igual, porque elas ficam na mesma imagem do back-end.</a:t>
-            </a:r>
-          </a:p>
-        </p:txBody>
-      </p:sp>
-      <p:sp>
-        <p:nvSpPr>
-          <p:cNvPr id="19" name="TextBox 18"/>
+              <a:t>O código do front não está na imagem da API, então a API não depende dele nem por acidente.</a:t>
+            </a:r>
+          </a:p>
+        </p:txBody>
+      </p:sp>
+      <p:sp>
+        <p:nvSpPr>
+          <p:cNvPr id="11" name="Rectangle 10"/>
+          <p:cNvSpPr/>
+          <p:nvPr/>
+        </p:nvSpPr>
+        <p:spPr>
+          <a:xfrm>
+            <a:off x="704850" y="4250055"/>
+            <a:ext cx="57150" cy="57150"/>
+          </a:xfrm>
+          <a:prstGeom prst="rect">
+            <a:avLst/>
+          </a:prstGeom>
+          <a:solidFill>
+            <a:srgbClr val="E94D1C"/>
+          </a:solidFill>
+          <a:ln>
+            <a:noFill/>
+          </a:ln>
+          <a:effectLst/>
+        </p:spPr>
+        <p:style>
+          <a:lnRef idx="1">
+            <a:schemeClr val="accent1"/>
+          </a:lnRef>
+          <a:fillRef idx="3">
+            <a:schemeClr val="accent1"/>
+          </a:fillRef>
+          <a:effectRef idx="2">
+            <a:schemeClr val="accent1"/>
+          </a:effectRef>
+          <a:fontRef idx="minor">
+            <a:schemeClr val="lt1"/>
+          </a:fontRef>
+        </p:style>
+        <p:txBody>
+          <a:bodyPr rtlCol="0" anchor="ctr" wrap="square" lIns="0" rIns="0" tIns="0" bIns="0"/>
+          <a:lstStyle/>
+          <a:p>
+            <a:pPr algn="ctr"/>
+          </a:p>
+        </p:txBody>
+      </p:sp>
+      <p:sp>
+        <p:nvSpPr>
+          <p:cNvPr id="12" name="TextBox 11"/>
           <p:cNvSpPr txBox="1"/>
           <p:nvPr/>
         </p:nvSpPr>
         <p:spPr>
           <a:xfrm>
-            <a:off x="6362700" y="3624834"/>
-            <a:ext cx="247650" cy="294437"/>
+            <a:off x="971550" y="4146042"/>
+            <a:ext cx="4857750" cy="95250"/>
           </a:xfrm>
           <a:prstGeom prst="rect">
             <a:avLst/>
@@ -19408,18 +19180,311 @@
           <a:p>
             <a:pPr algn="l">
               <a:lnSpc>
+                <a:spcPct val="130000"/>
+              </a:lnSpc>
+            </a:pPr>
+            <a:r>
+              <a:rPr sz="1580" b="0" i="0">
+                <a:solidFill>
+                  <a:srgbClr val="1A1A1E"/>
+                </a:solidFill>
+                <a:latin typeface="Roboto"/>
+              </a:rPr>
+              <a:t>Só o serviço de fronteira publica porta. O banco fica na rede interna sem mapeamento.</a:t>
+            </a:r>
+          </a:p>
+        </p:txBody>
+      </p:sp>
+      <p:sp>
+        <p:nvSpPr>
+          <p:cNvPr id="13" name="Rectangle 12"/>
+          <p:cNvSpPr/>
+          <p:nvPr/>
+        </p:nvSpPr>
+        <p:spPr>
+          <a:xfrm>
+            <a:off x="704850" y="5044821"/>
+            <a:ext cx="57150" cy="57150"/>
+          </a:xfrm>
+          <a:prstGeom prst="rect">
+            <a:avLst/>
+          </a:prstGeom>
+          <a:solidFill>
+            <a:srgbClr val="E94D1C"/>
+          </a:solidFill>
+          <a:ln>
+            <a:noFill/>
+          </a:ln>
+          <a:effectLst/>
+        </p:spPr>
+        <p:style>
+          <a:lnRef idx="1">
+            <a:schemeClr val="accent1"/>
+          </a:lnRef>
+          <a:fillRef idx="3">
+            <a:schemeClr val="accent1"/>
+          </a:fillRef>
+          <a:effectRef idx="2">
+            <a:schemeClr val="accent1"/>
+          </a:effectRef>
+          <a:fontRef idx="minor">
+            <a:schemeClr val="lt1"/>
+          </a:fontRef>
+        </p:style>
+        <p:txBody>
+          <a:bodyPr rtlCol="0" anchor="ctr" wrap="square" lIns="0" rIns="0" tIns="0" bIns="0"/>
+          <a:lstStyle/>
+          <a:p>
+            <a:pPr algn="ctr"/>
+          </a:p>
+        </p:txBody>
+      </p:sp>
+      <p:sp>
+        <p:nvSpPr>
+          <p:cNvPr id="14" name="TextBox 13"/>
+          <p:cNvSpPr txBox="1"/>
+          <p:nvPr/>
+        </p:nvSpPr>
+        <p:spPr>
+          <a:xfrm>
+            <a:off x="971550" y="4940808"/>
+            <a:ext cx="4857750" cy="95250"/>
+          </a:xfrm>
+          <a:prstGeom prst="rect">
+            <a:avLst/>
+          </a:prstGeom>
+          <a:noFill/>
+        </p:spPr>
+        <p:txBody>
+          <a:bodyPr wrap="square" lIns="0" rIns="0" tIns="0" bIns="0" anchor="t">
+            <a:spAutoFit/>
+          </a:bodyPr>
+          <a:lstStyle/>
+          <a:p>
+            <a:pPr algn="l">
+              <a:lnSpc>
+                <a:spcPct val="130000"/>
+              </a:lnSpc>
+            </a:pPr>
+            <a:r>
+              <a:rPr sz="1580" b="0" i="0">
+                <a:solidFill>
+                  <a:srgbClr val="1A1A1E"/>
+                </a:solidFill>
+                <a:latin typeface="Roboto"/>
+              </a:rPr>
+              <a:t>Uma regra escrita na wiki depende de alguém revisar. A mesma regra na topologia é verificada pela estrutura, o que reduz a degradação arquitetural da Aula 02.</a:t>
+            </a:r>
+          </a:p>
+        </p:txBody>
+      </p:sp>
+      <p:sp>
+        <p:nvSpPr>
+          <p:cNvPr id="15" name="TextBox 14"/>
+          <p:cNvSpPr txBox="1"/>
+          <p:nvPr/>
+        </p:nvSpPr>
+        <p:spPr>
+          <a:xfrm>
+            <a:off x="6362700" y="2061210"/>
+            <a:ext cx="5143500" cy="182880"/>
+          </a:xfrm>
+          <a:prstGeom prst="rect">
+            <a:avLst/>
+          </a:prstGeom>
+          <a:noFill/>
+        </p:spPr>
+        <p:txBody>
+          <a:bodyPr wrap="square" lIns="0" rIns="0" tIns="0" bIns="0" anchor="t">
+            <a:spAutoFit/>
+          </a:bodyPr>
+          <a:lstStyle/>
+          <a:p>
+            <a:pPr algn="l">
+              <a:lnSpc>
                 <a:spcPct val="120000"/>
               </a:lnSpc>
             </a:pPr>
             <a:r>
-              <a:rPr sz="1450" b="1" i="0">
+              <a:rPr sz="900" b="1" i="0" spc="120">
                 <a:solidFill>
                   <a:srgbClr val="E94D1C"/>
                 </a:solidFill>
                 <a:latin typeface="Roboto"/>
               </a:rPr>
-              <a:t>//</a:t>
-            </a:r>
+              <a:t>ACOPLAMENTO</a:t>
+            </a:r>
+          </a:p>
+        </p:txBody>
+      </p:sp>
+      <p:sp>
+        <p:nvSpPr>
+          <p:cNvPr id="16" name="Rectangle 15"/>
+          <p:cNvSpPr/>
+          <p:nvPr/>
+        </p:nvSpPr>
+        <p:spPr>
+          <a:xfrm>
+            <a:off x="6362700" y="2270760"/>
+            <a:ext cx="419100" cy="28575"/>
+          </a:xfrm>
+          <a:prstGeom prst="rect">
+            <a:avLst/>
+          </a:prstGeom>
+          <a:solidFill>
+            <a:srgbClr val="E94D1C"/>
+          </a:solidFill>
+          <a:ln>
+            <a:noFill/>
+          </a:ln>
+          <a:effectLst/>
+        </p:spPr>
+        <p:style>
+          <a:lnRef idx="1">
+            <a:schemeClr val="accent1"/>
+          </a:lnRef>
+          <a:fillRef idx="3">
+            <a:schemeClr val="accent1"/>
+          </a:fillRef>
+          <a:effectRef idx="2">
+            <a:schemeClr val="accent1"/>
+          </a:effectRef>
+          <a:fontRef idx="minor">
+            <a:schemeClr val="lt1"/>
+          </a:fontRef>
+        </p:style>
+        <p:txBody>
+          <a:bodyPr rtlCol="0" anchor="ctr" wrap="square" lIns="0" rIns="0" tIns="0" bIns="0"/>
+          <a:lstStyle/>
+          <a:p>
+            <a:pPr algn="ctr"/>
+          </a:p>
+        </p:txBody>
+      </p:sp>
+      <p:sp>
+        <p:nvSpPr>
+          <p:cNvPr id="17" name="Rectangle 16"/>
+          <p:cNvSpPr/>
+          <p:nvPr/>
+        </p:nvSpPr>
+        <p:spPr>
+          <a:xfrm>
+            <a:off x="6381750" y="2660523"/>
+            <a:ext cx="57150" cy="57150"/>
+          </a:xfrm>
+          <a:prstGeom prst="rect">
+            <a:avLst/>
+          </a:prstGeom>
+          <a:solidFill>
+            <a:srgbClr val="E94D1C"/>
+          </a:solidFill>
+          <a:ln>
+            <a:noFill/>
+          </a:ln>
+          <a:effectLst/>
+        </p:spPr>
+        <p:style>
+          <a:lnRef idx="1">
+            <a:schemeClr val="accent1"/>
+          </a:lnRef>
+          <a:fillRef idx="3">
+            <a:schemeClr val="accent1"/>
+          </a:fillRef>
+          <a:effectRef idx="2">
+            <a:schemeClr val="accent1"/>
+          </a:effectRef>
+          <a:fontRef idx="minor">
+            <a:schemeClr val="lt1"/>
+          </a:fontRef>
+        </p:style>
+        <p:txBody>
+          <a:bodyPr rtlCol="0" anchor="ctr" wrap="square" lIns="0" rIns="0" tIns="0" bIns="0"/>
+          <a:lstStyle/>
+          <a:p>
+            <a:pPr algn="ctr"/>
+          </a:p>
+        </p:txBody>
+      </p:sp>
+      <p:sp>
+        <p:nvSpPr>
+          <p:cNvPr id="18" name="TextBox 17"/>
+          <p:cNvSpPr txBox="1"/>
+          <p:nvPr/>
+        </p:nvSpPr>
+        <p:spPr>
+          <a:xfrm>
+            <a:off x="6648450" y="2556510"/>
+            <a:ext cx="4857750" cy="95250"/>
+          </a:xfrm>
+          <a:prstGeom prst="rect">
+            <a:avLst/>
+          </a:prstGeom>
+          <a:noFill/>
+        </p:spPr>
+        <p:txBody>
+          <a:bodyPr wrap="square" lIns="0" rIns="0" tIns="0" bIns="0" anchor="t">
+            <a:spAutoFit/>
+          </a:bodyPr>
+          <a:lstStyle/>
+          <a:p>
+            <a:pPr algn="l">
+              <a:lnSpc>
+                <a:spcPct val="130000"/>
+              </a:lnSpc>
+            </a:pPr>
+            <a:r>
+              <a:rPr sz="1580" b="0" i="0">
+                <a:solidFill>
+                  <a:srgbClr val="1A1A1E"/>
+                </a:solidFill>
+                <a:latin typeface="Roboto"/>
+              </a:rPr>
+              <a:t>Entre as nossas três camadas o acoplamento continua igual, porque elas ficam na mesma imagem do back-end.</a:t>
+            </a:r>
+          </a:p>
+        </p:txBody>
+      </p:sp>
+      <p:sp>
+        <p:nvSpPr>
+          <p:cNvPr id="19" name="Rectangle 18"/>
+          <p:cNvSpPr/>
+          <p:nvPr/>
+        </p:nvSpPr>
+        <p:spPr>
+          <a:xfrm>
+            <a:off x="6381750" y="3719322"/>
+            <a:ext cx="57150" cy="57150"/>
+          </a:xfrm>
+          <a:prstGeom prst="rect">
+            <a:avLst/>
+          </a:prstGeom>
+          <a:solidFill>
+            <a:srgbClr val="E94D1C"/>
+          </a:solidFill>
+          <a:ln>
+            <a:noFill/>
+          </a:ln>
+          <a:effectLst/>
+        </p:spPr>
+        <p:style>
+          <a:lnRef idx="1">
+            <a:schemeClr val="accent1"/>
+          </a:lnRef>
+          <a:fillRef idx="3">
+            <a:schemeClr val="accent1"/>
+          </a:fillRef>
+          <a:effectRef idx="2">
+            <a:schemeClr val="accent1"/>
+          </a:effectRef>
+          <a:fontRef idx="minor">
+            <a:schemeClr val="lt1"/>
+          </a:fontRef>
+        </p:style>
+        <p:txBody>
+          <a:bodyPr rtlCol="0" anchor="ctr" wrap="square" lIns="0" rIns="0" tIns="0" bIns="0"/>
+          <a:lstStyle/>
+          <a:p>
+            <a:pPr algn="ctr"/>
           </a:p>
         </p:txBody>
       </p:sp>
@@ -19686,14 +19751,58 @@
       </p:sp>
       <p:sp>
         <p:nvSpPr>
-          <p:cNvPr id="5" name="TextBox 4"/>
+          <p:cNvPr id="5" name="Rectangle 4"/>
+          <p:cNvSpPr/>
+          <p:nvPr/>
+        </p:nvSpPr>
+        <p:spPr>
+          <a:xfrm>
+            <a:off x="704850" y="3003423"/>
+            <a:ext cx="57150" cy="57150"/>
+          </a:xfrm>
+          <a:prstGeom prst="rect">
+            <a:avLst/>
+          </a:prstGeom>
+          <a:solidFill>
+            <a:srgbClr val="E94D1C"/>
+          </a:solidFill>
+          <a:ln>
+            <a:noFill/>
+          </a:ln>
+          <a:effectLst/>
+        </p:spPr>
+        <p:style>
+          <a:lnRef idx="1">
+            <a:schemeClr val="accent1"/>
+          </a:lnRef>
+          <a:fillRef idx="3">
+            <a:schemeClr val="accent1"/>
+          </a:fillRef>
+          <a:effectRef idx="2">
+            <a:schemeClr val="accent1"/>
+          </a:effectRef>
+          <a:fontRef idx="minor">
+            <a:schemeClr val="lt1"/>
+          </a:fontRef>
+        </p:style>
+        <p:txBody>
+          <a:bodyPr rtlCol="0" anchor="ctr" wrap="square" lIns="0" rIns="0" tIns="0" bIns="0"/>
+          <a:lstStyle/>
+          <a:p>
+            <a:pPr algn="ctr"/>
+          </a:p>
+        </p:txBody>
+      </p:sp>
+      <p:sp>
+        <p:nvSpPr>
+          <p:cNvPr id="6" name="TextBox 5"/>
           <p:cNvSpPr txBox="1"/>
           <p:nvPr/>
         </p:nvSpPr>
         <p:spPr>
           <a:xfrm>
-            <a:off x="685800" y="2903982"/>
-            <a:ext cx="247650" cy="308458"/>
+            <a:off x="971550" y="2894457"/>
+            <a:ext cx="7581900" cy="95250"/>
           </a:xfrm>
           <a:prstGeom prst="rect">
             <a:avLst/>
@@ -19708,30 +19817,74 @@
           <a:p>
             <a:pPr algn="l">
               <a:lnSpc>
-                <a:spcPct val="120000"/>
-              </a:lnSpc>
-            </a:pPr>
-            <a:r>
-              <a:rPr sz="1520" b="1" i="0">
-                <a:solidFill>
-                  <a:srgbClr val="E94D1C"/>
-                </a:solidFill>
-                <a:latin typeface="Roboto"/>
-              </a:rPr>
-              <a:t>//</a:t>
-            </a:r>
-          </a:p>
-        </p:txBody>
-      </p:sp>
-      <p:sp>
-        <p:nvSpPr>
-          <p:cNvPr id="6" name="TextBox 5"/>
+                <a:spcPct val="130000"/>
+              </a:lnSpc>
+            </a:pPr>
+            <a:r>
+              <a:rPr sz="1650" b="0" i="0">
+                <a:solidFill>
+                  <a:srgbClr val="1A1A1E"/>
+                </a:solidFill>
+                <a:latin typeface="Roboto"/>
+              </a:rPr>
+              <a:t>Marina é a persona da anfitriã, e a jornada dela descreve o link caindo no grupo da família. Isso é pico no convite público, onde o convidado confirma presença, e uma pessoa só no painel, onde a anfitriã vê a lista.</a:t>
+            </a:r>
+          </a:p>
+        </p:txBody>
+      </p:sp>
+      <p:sp>
+        <p:nvSpPr>
+          <p:cNvPr id="7" name="Rectangle 6"/>
+          <p:cNvSpPr/>
+          <p:nvPr/>
+        </p:nvSpPr>
+        <p:spPr>
+          <a:xfrm>
+            <a:off x="704850" y="4118991"/>
+            <a:ext cx="57150" cy="57150"/>
+          </a:xfrm>
+          <a:prstGeom prst="rect">
+            <a:avLst/>
+          </a:prstGeom>
+          <a:solidFill>
+            <a:srgbClr val="E94D1C"/>
+          </a:solidFill>
+          <a:ln>
+            <a:noFill/>
+          </a:ln>
+          <a:effectLst/>
+        </p:spPr>
+        <p:style>
+          <a:lnRef idx="1">
+            <a:schemeClr val="accent1"/>
+          </a:lnRef>
+          <a:fillRef idx="3">
+            <a:schemeClr val="accent1"/>
+          </a:fillRef>
+          <a:effectRef idx="2">
+            <a:schemeClr val="accent1"/>
+          </a:effectRef>
+          <a:fontRef idx="minor">
+            <a:schemeClr val="lt1"/>
+          </a:fontRef>
+        </p:style>
+        <p:txBody>
+          <a:bodyPr rtlCol="0" anchor="ctr" wrap="square" lIns="0" rIns="0" tIns="0" bIns="0"/>
+          <a:lstStyle/>
+          <a:p>
+            <a:pPr algn="ctr"/>
+          </a:p>
+        </p:txBody>
+      </p:sp>
+      <p:sp>
+        <p:nvSpPr>
+          <p:cNvPr id="8" name="TextBox 7"/>
           <p:cNvSpPr txBox="1"/>
           <p:nvPr/>
         </p:nvSpPr>
         <p:spPr>
           <a:xfrm>
-            <a:off x="971550" y="2894457"/>
+            <a:off x="971550" y="4010025"/>
             <a:ext cx="7581900" cy="95250"/>
           </a:xfrm>
           <a:prstGeom prst="rect">
@@ -19757,84 +19910,6 @@
                 </a:solidFill>
                 <a:latin typeface="Roboto"/>
               </a:rPr>
-              <a:t>Marina é a persona da anfitriã, e a jornada dela descreve o link caindo no grupo da família. Isso é pico no convite público, onde o convidado confirma presença, e uma pessoa só no painel, onde a anfitriã vê a lista.</a:t>
-            </a:r>
-          </a:p>
-        </p:txBody>
-      </p:sp>
-      <p:sp>
-        <p:nvSpPr>
-          <p:cNvPr id="7" name="TextBox 6"/>
-          <p:cNvSpPr txBox="1"/>
-          <p:nvPr/>
-        </p:nvSpPr>
-        <p:spPr>
-          <a:xfrm>
-            <a:off x="685800" y="4019550"/>
-            <a:ext cx="247650" cy="308458"/>
-          </a:xfrm>
-          <a:prstGeom prst="rect">
-            <a:avLst/>
-          </a:prstGeom>
-          <a:noFill/>
-        </p:spPr>
-        <p:txBody>
-          <a:bodyPr wrap="square" lIns="0" rIns="0" tIns="0" bIns="0" anchor="t">
-            <a:spAutoFit/>
-          </a:bodyPr>
-          <a:lstStyle/>
-          <a:p>
-            <a:pPr algn="l">
-              <a:lnSpc>
-                <a:spcPct val="120000"/>
-              </a:lnSpc>
-            </a:pPr>
-            <a:r>
-              <a:rPr sz="1520" b="1" i="0">
-                <a:solidFill>
-                  <a:srgbClr val="E94D1C"/>
-                </a:solidFill>
-                <a:latin typeface="Roboto"/>
-              </a:rPr>
-              <a:t>//</a:t>
-            </a:r>
-          </a:p>
-        </p:txBody>
-      </p:sp>
-      <p:sp>
-        <p:nvSpPr>
-          <p:cNvPr id="8" name="TextBox 7"/>
-          <p:cNvSpPr txBox="1"/>
-          <p:nvPr/>
-        </p:nvSpPr>
-        <p:spPr>
-          <a:xfrm>
-            <a:off x="971550" y="4010025"/>
-            <a:ext cx="7581900" cy="95250"/>
-          </a:xfrm>
-          <a:prstGeom prst="rect">
-            <a:avLst/>
-          </a:prstGeom>
-          <a:noFill/>
-        </p:spPr>
-        <p:txBody>
-          <a:bodyPr wrap="square" lIns="0" rIns="0" tIns="0" bIns="0" anchor="t">
-            <a:spAutoFit/>
-          </a:bodyPr>
-          <a:lstStyle/>
-          <a:p>
-            <a:pPr algn="l">
-              <a:lnSpc>
-                <a:spcPct val="130000"/>
-              </a:lnSpc>
-            </a:pPr>
-            <a:r>
-              <a:rPr sz="1650" b="0" i="0">
-                <a:solidFill>
-                  <a:srgbClr val="1A1A1E"/>
-                </a:solidFill>
-                <a:latin typeface="Roboto"/>
-              </a:rPr>
               <a:t>Replicar só o serviço público faz sentido. Replicar o painel não.</a:t>
             </a:r>
           </a:p>
@@ -19842,40 +19917,45 @@
       </p:sp>
       <p:sp>
         <p:nvSpPr>
-          <p:cNvPr id="9" name="TextBox 8"/>
-          <p:cNvSpPr txBox="1"/>
-          <p:nvPr/>
-        </p:nvSpPr>
-        <p:spPr>
-          <a:xfrm>
-            <a:off x="685800" y="4581906"/>
-            <a:ext cx="247650" cy="308458"/>
-          </a:xfrm>
-          <a:prstGeom prst="rect">
-            <a:avLst/>
-          </a:prstGeom>
-          <a:noFill/>
-        </p:spPr>
-        <p:txBody>
-          <a:bodyPr wrap="square" lIns="0" rIns="0" tIns="0" bIns="0" anchor="t">
-            <a:spAutoFit/>
-          </a:bodyPr>
-          <a:lstStyle/>
-          <a:p>
-            <a:pPr algn="l">
-              <a:lnSpc>
-                <a:spcPct val="120000"/>
-              </a:lnSpc>
-            </a:pPr>
-            <a:r>
-              <a:rPr sz="1520" b="1" i="0">
-                <a:solidFill>
-                  <a:srgbClr val="E94D1C"/>
-                </a:solidFill>
-                <a:latin typeface="Roboto"/>
-              </a:rPr>
-              <a:t>//</a:t>
-            </a:r>
+          <p:cNvPr id="9" name="Rectangle 8"/>
+          <p:cNvSpPr/>
+          <p:nvPr/>
+        </p:nvSpPr>
+        <p:spPr>
+          <a:xfrm>
+            <a:off x="704850" y="4681347"/>
+            <a:ext cx="57150" cy="57150"/>
+          </a:xfrm>
+          <a:prstGeom prst="rect">
+            <a:avLst/>
+          </a:prstGeom>
+          <a:solidFill>
+            <a:srgbClr val="E94D1C"/>
+          </a:solidFill>
+          <a:ln>
+            <a:noFill/>
+          </a:ln>
+          <a:effectLst/>
+        </p:spPr>
+        <p:style>
+          <a:lnRef idx="1">
+            <a:schemeClr val="accent1"/>
+          </a:lnRef>
+          <a:fillRef idx="3">
+            <a:schemeClr val="accent1"/>
+          </a:fillRef>
+          <a:effectRef idx="2">
+            <a:schemeClr val="accent1"/>
+          </a:effectRef>
+          <a:fontRef idx="minor">
+            <a:schemeClr val="lt1"/>
+          </a:fontRef>
+        </p:style>
+        <p:txBody>
+          <a:bodyPr rtlCol="0" anchor="ctr" wrap="square" lIns="0" rIns="0" tIns="0" bIns="0"/>
+          <a:lstStyle/>
+          <a:p>
+            <a:pPr algn="ctr"/>
           </a:p>
         </p:txBody>
       </p:sp>
@@ -20837,14 +20917,58 @@
       </p:sp>
       <p:sp>
         <p:nvSpPr>
-          <p:cNvPr id="5" name="TextBox 4"/>
+          <p:cNvPr id="5" name="Rectangle 4"/>
+          <p:cNvSpPr/>
+          <p:nvPr/>
+        </p:nvSpPr>
+        <p:spPr>
+          <a:xfrm>
+            <a:off x="704850" y="2583942"/>
+            <a:ext cx="57150" cy="57150"/>
+          </a:xfrm>
+          <a:prstGeom prst="rect">
+            <a:avLst/>
+          </a:prstGeom>
+          <a:solidFill>
+            <a:srgbClr val="E94D1C"/>
+          </a:solidFill>
+          <a:ln>
+            <a:noFill/>
+          </a:ln>
+          <a:effectLst/>
+        </p:spPr>
+        <p:style>
+          <a:lnRef idx="1">
+            <a:schemeClr val="accent1"/>
+          </a:lnRef>
+          <a:fillRef idx="3">
+            <a:schemeClr val="accent1"/>
+          </a:fillRef>
+          <a:effectRef idx="2">
+            <a:schemeClr val="accent1"/>
+          </a:effectRef>
+          <a:fontRef idx="minor">
+            <a:schemeClr val="lt1"/>
+          </a:fontRef>
+        </p:style>
+        <p:txBody>
+          <a:bodyPr rtlCol="0" anchor="ctr" wrap="square" lIns="0" rIns="0" tIns="0" bIns="0"/>
+          <a:lstStyle/>
+          <a:p>
+            <a:pPr algn="ctr"/>
+          </a:p>
+        </p:txBody>
+      </p:sp>
+      <p:sp>
+        <p:nvSpPr>
+          <p:cNvPr id="6" name="TextBox 5"/>
           <p:cNvSpPr txBox="1"/>
           <p:nvPr/>
         </p:nvSpPr>
         <p:spPr>
           <a:xfrm>
-            <a:off x="685800" y="2484501"/>
-            <a:ext cx="247650" cy="308458"/>
+            <a:off x="971550" y="2474976"/>
+            <a:ext cx="7677150" cy="95250"/>
           </a:xfrm>
           <a:prstGeom prst="rect">
             <a:avLst/>
@@ -20859,30 +20983,74 @@
           <a:p>
             <a:pPr algn="l">
               <a:lnSpc>
-                <a:spcPct val="120000"/>
-              </a:lnSpc>
-            </a:pPr>
-            <a:r>
-              <a:rPr sz="1520" b="1" i="0">
-                <a:solidFill>
-                  <a:srgbClr val="E94D1C"/>
-                </a:solidFill>
-                <a:latin typeface="Roboto"/>
-              </a:rPr>
-              <a:t>//</a:t>
-            </a:r>
-          </a:p>
-        </p:txBody>
-      </p:sp>
-      <p:sp>
-        <p:nvSpPr>
-          <p:cNvPr id="6" name="TextBox 5"/>
+                <a:spcPct val="130000"/>
+              </a:lnSpc>
+            </a:pPr>
+            <a:r>
+              <a:rPr sz="1650" b="0" i="0">
+                <a:solidFill>
+                  <a:srgbClr val="1A1A1E"/>
+                </a:solidFill>
+                <a:latin typeface="Roboto"/>
+              </a:rPr>
+              <a:t>App web de convites virtuais, com confirmação de presença e consolidação de restrições alimentares.</a:t>
+            </a:r>
+          </a:p>
+        </p:txBody>
+      </p:sp>
+      <p:sp>
+        <p:nvSpPr>
+          <p:cNvPr id="7" name="Rectangle 6"/>
+          <p:cNvSpPr/>
+          <p:nvPr/>
+        </p:nvSpPr>
+        <p:spPr>
+          <a:xfrm>
+            <a:off x="704850" y="3422904"/>
+            <a:ext cx="57150" cy="57150"/>
+          </a:xfrm>
+          <a:prstGeom prst="rect">
+            <a:avLst/>
+          </a:prstGeom>
+          <a:solidFill>
+            <a:srgbClr val="E94D1C"/>
+          </a:solidFill>
+          <a:ln>
+            <a:noFill/>
+          </a:ln>
+          <a:effectLst/>
+        </p:spPr>
+        <p:style>
+          <a:lnRef idx="1">
+            <a:schemeClr val="accent1"/>
+          </a:lnRef>
+          <a:fillRef idx="3">
+            <a:schemeClr val="accent1"/>
+          </a:fillRef>
+          <a:effectRef idx="2">
+            <a:schemeClr val="accent1"/>
+          </a:effectRef>
+          <a:fontRef idx="minor">
+            <a:schemeClr val="lt1"/>
+          </a:fontRef>
+        </p:style>
+        <p:txBody>
+          <a:bodyPr rtlCol="0" anchor="ctr" wrap="square" lIns="0" rIns="0" tIns="0" bIns="0"/>
+          <a:lstStyle/>
+          <a:p>
+            <a:pPr algn="ctr"/>
+          </a:p>
+        </p:txBody>
+      </p:sp>
+      <p:sp>
+        <p:nvSpPr>
+          <p:cNvPr id="8" name="TextBox 7"/>
           <p:cNvSpPr txBox="1"/>
           <p:nvPr/>
         </p:nvSpPr>
         <p:spPr>
           <a:xfrm>
-            <a:off x="971550" y="2474976"/>
+            <a:off x="971550" y="3313938"/>
             <a:ext cx="7677150" cy="95250"/>
           </a:xfrm>
           <a:prstGeom prst="rect">
@@ -20908,21 +21076,65 @@
                 </a:solidFill>
                 <a:latin typeface="Roboto"/>
               </a:rPr>
-              <a:t>App web de convites virtuais, com confirmação de presença e consolidação de restrições alimentares.</a:t>
-            </a:r>
-          </a:p>
-        </p:txBody>
-      </p:sp>
-      <p:sp>
-        <p:nvSpPr>
-          <p:cNvPr id="7" name="TextBox 6"/>
+              <a:t>Duas superfícies sobre o mesmo Model: o convite público sem login e o painel do anfitrião.</a:t>
+            </a:r>
+          </a:p>
+        </p:txBody>
+      </p:sp>
+      <p:sp>
+        <p:nvSpPr>
+          <p:cNvPr id="9" name="Rectangle 8"/>
+          <p:cNvSpPr/>
+          <p:nvPr/>
+        </p:nvSpPr>
+        <p:spPr>
+          <a:xfrm>
+            <a:off x="704850" y="4261866"/>
+            <a:ext cx="57150" cy="57150"/>
+          </a:xfrm>
+          <a:prstGeom prst="rect">
+            <a:avLst/>
+          </a:prstGeom>
+          <a:solidFill>
+            <a:srgbClr val="E94D1C"/>
+          </a:solidFill>
+          <a:ln>
+            <a:noFill/>
+          </a:ln>
+          <a:effectLst/>
+        </p:spPr>
+        <p:style>
+          <a:lnRef idx="1">
+            <a:schemeClr val="accent1"/>
+          </a:lnRef>
+          <a:fillRef idx="3">
+            <a:schemeClr val="accent1"/>
+          </a:fillRef>
+          <a:effectRef idx="2">
+            <a:schemeClr val="accent1"/>
+          </a:effectRef>
+          <a:fontRef idx="minor">
+            <a:schemeClr val="lt1"/>
+          </a:fontRef>
+        </p:style>
+        <p:txBody>
+          <a:bodyPr rtlCol="0" anchor="ctr" wrap="square" lIns="0" rIns="0" tIns="0" bIns="0"/>
+          <a:lstStyle/>
+          <a:p>
+            <a:pPr algn="ctr"/>
+          </a:p>
+        </p:txBody>
+      </p:sp>
+      <p:sp>
+        <p:nvSpPr>
+          <p:cNvPr id="10" name="TextBox 9"/>
           <p:cNvSpPr txBox="1"/>
           <p:nvPr/>
         </p:nvSpPr>
         <p:spPr>
           <a:xfrm>
-            <a:off x="685800" y="3323463"/>
-            <a:ext cx="247650" cy="308458"/>
+            <a:off x="971550" y="4152900"/>
+            <a:ext cx="7677150" cy="95250"/>
           </a:xfrm>
           <a:prstGeom prst="rect">
             <a:avLst/>
@@ -20937,45 +21149,6 @@
           <a:p>
             <a:pPr algn="l">
               <a:lnSpc>
-                <a:spcPct val="120000"/>
-              </a:lnSpc>
-            </a:pPr>
-            <a:r>
-              <a:rPr sz="1520" b="1" i="0">
-                <a:solidFill>
-                  <a:srgbClr val="E94D1C"/>
-                </a:solidFill>
-                <a:latin typeface="Roboto"/>
-              </a:rPr>
-              <a:t>//</a:t>
-            </a:r>
-          </a:p>
-        </p:txBody>
-      </p:sp>
-      <p:sp>
-        <p:nvSpPr>
-          <p:cNvPr id="8" name="TextBox 7"/>
-          <p:cNvSpPr txBox="1"/>
-          <p:nvPr/>
-        </p:nvSpPr>
-        <p:spPr>
-          <a:xfrm>
-            <a:off x="971550" y="3313938"/>
-            <a:ext cx="7677150" cy="95250"/>
-          </a:xfrm>
-          <a:prstGeom prst="rect">
-            <a:avLst/>
-          </a:prstGeom>
-          <a:noFill/>
-        </p:spPr>
-        <p:txBody>
-          <a:bodyPr wrap="square" lIns="0" rIns="0" tIns="0" bIns="0" anchor="t">
-            <a:spAutoFit/>
-          </a:bodyPr>
-          <a:lstStyle/>
-          <a:p>
-            <a:pPr algn="l">
-              <a:lnSpc>
                 <a:spcPct val="130000"/>
               </a:lnSpc>
             </a:pPr>
@@ -20986,84 +21159,6 @@
                 </a:solidFill>
                 <a:latin typeface="Roboto"/>
               </a:rPr>
-              <a:t>Duas superfícies sobre o mesmo Model: o convite público sem login e o painel do anfitrião.</a:t>
-            </a:r>
-          </a:p>
-        </p:txBody>
-      </p:sp>
-      <p:sp>
-        <p:nvSpPr>
-          <p:cNvPr id="9" name="TextBox 8"/>
-          <p:cNvSpPr txBox="1"/>
-          <p:nvPr/>
-        </p:nvSpPr>
-        <p:spPr>
-          <a:xfrm>
-            <a:off x="685800" y="4162425"/>
-            <a:ext cx="247650" cy="308458"/>
-          </a:xfrm>
-          <a:prstGeom prst="rect">
-            <a:avLst/>
-          </a:prstGeom>
-          <a:noFill/>
-        </p:spPr>
-        <p:txBody>
-          <a:bodyPr wrap="square" lIns="0" rIns="0" tIns="0" bIns="0" anchor="t">
-            <a:spAutoFit/>
-          </a:bodyPr>
-          <a:lstStyle/>
-          <a:p>
-            <a:pPr algn="l">
-              <a:lnSpc>
-                <a:spcPct val="120000"/>
-              </a:lnSpc>
-            </a:pPr>
-            <a:r>
-              <a:rPr sz="1520" b="1" i="0">
-                <a:solidFill>
-                  <a:srgbClr val="E94D1C"/>
-                </a:solidFill>
-                <a:latin typeface="Roboto"/>
-              </a:rPr>
-              <a:t>//</a:t>
-            </a:r>
-          </a:p>
-        </p:txBody>
-      </p:sp>
-      <p:sp>
-        <p:nvSpPr>
-          <p:cNvPr id="10" name="TextBox 9"/>
-          <p:cNvSpPr txBox="1"/>
-          <p:nvPr/>
-        </p:nvSpPr>
-        <p:spPr>
-          <a:xfrm>
-            <a:off x="971550" y="4152900"/>
-            <a:ext cx="7677150" cy="95250"/>
-          </a:xfrm>
-          <a:prstGeom prst="rect">
-            <a:avLst/>
-          </a:prstGeom>
-          <a:noFill/>
-        </p:spPr>
-        <p:txBody>
-          <a:bodyPr wrap="square" lIns="0" rIns="0" tIns="0" bIns="0" anchor="t">
-            <a:spAutoFit/>
-          </a:bodyPr>
-          <a:lstStyle/>
-          <a:p>
-            <a:pPr algn="l">
-              <a:lnSpc>
-                <a:spcPct val="130000"/>
-              </a:lnSpc>
-            </a:pPr>
-            <a:r>
-              <a:rPr sz="1650" b="0" i="0">
-                <a:solidFill>
-                  <a:srgbClr val="1A1A1E"/>
-                </a:solidFill>
-                <a:latin typeface="Roboto"/>
-              </a:rPr>
               <a:t>Arquitetura registrada no Guia da Arquitetura: MVC no front e três camadas no back.</a:t>
             </a:r>
           </a:p>
@@ -21071,40 +21166,45 @@
       </p:sp>
       <p:sp>
         <p:nvSpPr>
-          <p:cNvPr id="11" name="TextBox 10"/>
-          <p:cNvSpPr txBox="1"/>
-          <p:nvPr/>
-        </p:nvSpPr>
-        <p:spPr>
-          <a:xfrm>
-            <a:off x="685800" y="5001387"/>
-            <a:ext cx="247650" cy="308458"/>
-          </a:xfrm>
-          <a:prstGeom prst="rect">
-            <a:avLst/>
-          </a:prstGeom>
-          <a:noFill/>
-        </p:spPr>
-        <p:txBody>
-          <a:bodyPr wrap="square" lIns="0" rIns="0" tIns="0" bIns="0" anchor="t">
-            <a:spAutoFit/>
-          </a:bodyPr>
-          <a:lstStyle/>
-          <a:p>
-            <a:pPr algn="l">
-              <a:lnSpc>
-                <a:spcPct val="120000"/>
-              </a:lnSpc>
-            </a:pPr>
-            <a:r>
-              <a:rPr sz="1520" b="1" i="0">
-                <a:solidFill>
-                  <a:srgbClr val="E94D1C"/>
-                </a:solidFill>
-                <a:latin typeface="Roboto"/>
-              </a:rPr>
-              <a:t>//</a:t>
-            </a:r>
+          <p:cNvPr id="11" name="Rectangle 10"/>
+          <p:cNvSpPr/>
+          <p:nvPr/>
+        </p:nvSpPr>
+        <p:spPr>
+          <a:xfrm>
+            <a:off x="704850" y="5100828"/>
+            <a:ext cx="57150" cy="57150"/>
+          </a:xfrm>
+          <a:prstGeom prst="rect">
+            <a:avLst/>
+          </a:prstGeom>
+          <a:solidFill>
+            <a:srgbClr val="E94D1C"/>
+          </a:solidFill>
+          <a:ln>
+            <a:noFill/>
+          </a:ln>
+          <a:effectLst/>
+        </p:spPr>
+        <p:style>
+          <a:lnRef idx="1">
+            <a:schemeClr val="accent1"/>
+          </a:lnRef>
+          <a:fillRef idx="3">
+            <a:schemeClr val="accent1"/>
+          </a:fillRef>
+          <a:effectRef idx="2">
+            <a:schemeClr val="accent1"/>
+          </a:effectRef>
+          <a:fontRef idx="minor">
+            <a:schemeClr val="lt1"/>
+          </a:fontRef>
+        </p:style>
+        <p:txBody>
+          <a:bodyPr rtlCol="0" anchor="ctr" wrap="square" lIns="0" rIns="0" tIns="0" bIns="0"/>
+          <a:lstStyle/>
+          <a:p>
+            <a:pPr algn="ctr"/>
           </a:p>
         </p:txBody>
       </p:sp>
@@ -22771,14 +22871,58 @@
       </p:sp>
       <p:sp>
         <p:nvSpPr>
-          <p:cNvPr id="5" name="TextBox 4"/>
+          <p:cNvPr id="5" name="Rectangle 4"/>
+          <p:cNvSpPr/>
+          <p:nvPr/>
+        </p:nvSpPr>
+        <p:spPr>
+          <a:xfrm>
+            <a:off x="704850" y="2860548"/>
+            <a:ext cx="57150" cy="57150"/>
+          </a:xfrm>
+          <a:prstGeom prst="rect">
+            <a:avLst/>
+          </a:prstGeom>
+          <a:solidFill>
+            <a:srgbClr val="E94D1C"/>
+          </a:solidFill>
+          <a:ln>
+            <a:noFill/>
+          </a:ln>
+          <a:effectLst/>
+        </p:spPr>
+        <p:style>
+          <a:lnRef idx="1">
+            <a:schemeClr val="accent1"/>
+          </a:lnRef>
+          <a:fillRef idx="3">
+            <a:schemeClr val="accent1"/>
+          </a:fillRef>
+          <a:effectRef idx="2">
+            <a:schemeClr val="accent1"/>
+          </a:effectRef>
+          <a:fontRef idx="minor">
+            <a:schemeClr val="lt1"/>
+          </a:fontRef>
+        </p:style>
+        <p:txBody>
+          <a:bodyPr rtlCol="0" anchor="ctr" wrap="square" lIns="0" rIns="0" tIns="0" bIns="0"/>
+          <a:lstStyle/>
+          <a:p>
+            <a:pPr algn="ctr"/>
+          </a:p>
+        </p:txBody>
+      </p:sp>
+      <p:sp>
+        <p:nvSpPr>
+          <p:cNvPr id="6" name="TextBox 5"/>
           <p:cNvSpPr txBox="1"/>
           <p:nvPr/>
         </p:nvSpPr>
         <p:spPr>
           <a:xfrm>
-            <a:off x="685800" y="2761107"/>
-            <a:ext cx="247650" cy="308458"/>
+            <a:off x="971550" y="2751582"/>
+            <a:ext cx="7772400" cy="95250"/>
           </a:xfrm>
           <a:prstGeom prst="rect">
             <a:avLst/>
@@ -22793,30 +22937,74 @@
           <a:p>
             <a:pPr algn="l">
               <a:lnSpc>
-                <a:spcPct val="120000"/>
-              </a:lnSpc>
-            </a:pPr>
-            <a:r>
-              <a:rPr sz="1520" b="1" i="0">
-                <a:solidFill>
-                  <a:srgbClr val="E94D1C"/>
-                </a:solidFill>
-                <a:latin typeface="Roboto"/>
-              </a:rPr>
-              <a:t>//</a:t>
-            </a:r>
-          </a:p>
-        </p:txBody>
-      </p:sp>
-      <p:sp>
-        <p:nvSpPr>
-          <p:cNvPr id="6" name="TextBox 5"/>
+                <a:spcPct val="130000"/>
+              </a:lnSpc>
+            </a:pPr>
+            <a:r>
+              <a:rPr sz="1650" b="0" i="0">
+                <a:solidFill>
+                  <a:srgbClr val="1A1A1E"/>
+                </a:solidFill>
+                <a:latin typeface="Roboto"/>
+              </a:rPr>
+              <a:t>O daemon roda como root. Estar no grupo docker equivale a root no host, sem sudo e sem trilha de auditoria.</a:t>
+            </a:r>
+          </a:p>
+        </p:txBody>
+      </p:sp>
+      <p:sp>
+        <p:nvSpPr>
+          <p:cNvPr id="7" name="Rectangle 6"/>
+          <p:cNvSpPr/>
+          <p:nvPr/>
+        </p:nvSpPr>
+        <p:spPr>
+          <a:xfrm>
+            <a:off x="704850" y="3699510"/>
+            <a:ext cx="57150" cy="57150"/>
+          </a:xfrm>
+          <a:prstGeom prst="rect">
+            <a:avLst/>
+          </a:prstGeom>
+          <a:solidFill>
+            <a:srgbClr val="E94D1C"/>
+          </a:solidFill>
+          <a:ln>
+            <a:noFill/>
+          </a:ln>
+          <a:effectLst/>
+        </p:spPr>
+        <p:style>
+          <a:lnRef idx="1">
+            <a:schemeClr val="accent1"/>
+          </a:lnRef>
+          <a:fillRef idx="3">
+            <a:schemeClr val="accent1"/>
+          </a:fillRef>
+          <a:effectRef idx="2">
+            <a:schemeClr val="accent1"/>
+          </a:effectRef>
+          <a:fontRef idx="minor">
+            <a:schemeClr val="lt1"/>
+          </a:fontRef>
+        </p:style>
+        <p:txBody>
+          <a:bodyPr rtlCol="0" anchor="ctr" wrap="square" lIns="0" rIns="0" tIns="0" bIns="0"/>
+          <a:lstStyle/>
+          <a:p>
+            <a:pPr algn="ctr"/>
+          </a:p>
+        </p:txBody>
+      </p:sp>
+      <p:sp>
+        <p:nvSpPr>
+          <p:cNvPr id="8" name="TextBox 7"/>
           <p:cNvSpPr txBox="1"/>
           <p:nvPr/>
         </p:nvSpPr>
         <p:spPr>
           <a:xfrm>
-            <a:off x="971550" y="2751582"/>
+            <a:off x="971550" y="3590544"/>
             <a:ext cx="7772400" cy="95250"/>
           </a:xfrm>
           <a:prstGeom prst="rect">
@@ -22842,21 +23030,65 @@
                 </a:solidFill>
                 <a:latin typeface="Roboto"/>
               </a:rPr>
-              <a:t>O daemon roda como root. Estar no grupo docker equivale a root no host, sem sudo e sem trilha de auditoria.</a:t>
-            </a:r>
-          </a:p>
-        </p:txBody>
-      </p:sp>
-      <p:sp>
-        <p:nvSpPr>
-          <p:cNvPr id="7" name="TextBox 6"/>
+              <a:t>A regra de rede que o Docker escreve passa na frente da do administrador, então um deny de firewall na porta publicada não bloqueia nada.</a:t>
+            </a:r>
+          </a:p>
+        </p:txBody>
+      </p:sp>
+      <p:sp>
+        <p:nvSpPr>
+          <p:cNvPr id="9" name="Rectangle 8"/>
+          <p:cNvSpPr/>
+          <p:nvPr/>
+        </p:nvSpPr>
+        <p:spPr>
+          <a:xfrm>
+            <a:off x="704850" y="4538472"/>
+            <a:ext cx="57150" cy="57150"/>
+          </a:xfrm>
+          <a:prstGeom prst="rect">
+            <a:avLst/>
+          </a:prstGeom>
+          <a:solidFill>
+            <a:srgbClr val="E94D1C"/>
+          </a:solidFill>
+          <a:ln>
+            <a:noFill/>
+          </a:ln>
+          <a:effectLst/>
+        </p:spPr>
+        <p:style>
+          <a:lnRef idx="1">
+            <a:schemeClr val="accent1"/>
+          </a:lnRef>
+          <a:fillRef idx="3">
+            <a:schemeClr val="accent1"/>
+          </a:fillRef>
+          <a:effectRef idx="2">
+            <a:schemeClr val="accent1"/>
+          </a:effectRef>
+          <a:fontRef idx="minor">
+            <a:schemeClr val="lt1"/>
+          </a:fontRef>
+        </p:style>
+        <p:txBody>
+          <a:bodyPr rtlCol="0" anchor="ctr" wrap="square" lIns="0" rIns="0" tIns="0" bIns="0"/>
+          <a:lstStyle/>
+          <a:p>
+            <a:pPr algn="ctr"/>
+          </a:p>
+        </p:txBody>
+      </p:sp>
+      <p:sp>
+        <p:nvSpPr>
+          <p:cNvPr id="10" name="TextBox 9"/>
           <p:cNvSpPr txBox="1"/>
           <p:nvPr/>
         </p:nvSpPr>
         <p:spPr>
           <a:xfrm>
-            <a:off x="685800" y="3600069"/>
-            <a:ext cx="247650" cy="308458"/>
+            <a:off x="971550" y="4429506"/>
+            <a:ext cx="7772400" cy="95250"/>
           </a:xfrm>
           <a:prstGeom prst="rect">
             <a:avLst/>
@@ -22871,45 +23103,6 @@
           <a:p>
             <a:pPr algn="l">
               <a:lnSpc>
-                <a:spcPct val="120000"/>
-              </a:lnSpc>
-            </a:pPr>
-            <a:r>
-              <a:rPr sz="1520" b="1" i="0">
-                <a:solidFill>
-                  <a:srgbClr val="E94D1C"/>
-                </a:solidFill>
-                <a:latin typeface="Roboto"/>
-              </a:rPr>
-              <a:t>//</a:t>
-            </a:r>
-          </a:p>
-        </p:txBody>
-      </p:sp>
-      <p:sp>
-        <p:nvSpPr>
-          <p:cNvPr id="8" name="TextBox 7"/>
-          <p:cNvSpPr txBox="1"/>
-          <p:nvPr/>
-        </p:nvSpPr>
-        <p:spPr>
-          <a:xfrm>
-            <a:off x="971550" y="3590544"/>
-            <a:ext cx="7772400" cy="95250"/>
-          </a:xfrm>
-          <a:prstGeom prst="rect">
-            <a:avLst/>
-          </a:prstGeom>
-          <a:noFill/>
-        </p:spPr>
-        <p:txBody>
-          <a:bodyPr wrap="square" lIns="0" rIns="0" tIns="0" bIns="0" anchor="t">
-            <a:spAutoFit/>
-          </a:bodyPr>
-          <a:lstStyle/>
-          <a:p>
-            <a:pPr algn="l">
-              <a:lnSpc>
                 <a:spcPct val="130000"/>
               </a:lnSpc>
             </a:pPr>
@@ -22920,84 +23113,6 @@
                 </a:solidFill>
                 <a:latin typeface="Roboto"/>
               </a:rPr>
-              <a:t>A regra de rede que o Docker escreve passa na frente da do administrador, então um deny de firewall na porta publicada não bloqueia nada.</a:t>
-            </a:r>
-          </a:p>
-        </p:txBody>
-      </p:sp>
-      <p:sp>
-        <p:nvSpPr>
-          <p:cNvPr id="9" name="TextBox 8"/>
-          <p:cNvSpPr txBox="1"/>
-          <p:nvPr/>
-        </p:nvSpPr>
-        <p:spPr>
-          <a:xfrm>
-            <a:off x="685800" y="4439031"/>
-            <a:ext cx="247650" cy="308458"/>
-          </a:xfrm>
-          <a:prstGeom prst="rect">
-            <a:avLst/>
-          </a:prstGeom>
-          <a:noFill/>
-        </p:spPr>
-        <p:txBody>
-          <a:bodyPr wrap="square" lIns="0" rIns="0" tIns="0" bIns="0" anchor="t">
-            <a:spAutoFit/>
-          </a:bodyPr>
-          <a:lstStyle/>
-          <a:p>
-            <a:pPr algn="l">
-              <a:lnSpc>
-                <a:spcPct val="120000"/>
-              </a:lnSpc>
-            </a:pPr>
-            <a:r>
-              <a:rPr sz="1520" b="1" i="0">
-                <a:solidFill>
-                  <a:srgbClr val="E94D1C"/>
-                </a:solidFill>
-                <a:latin typeface="Roboto"/>
-              </a:rPr>
-              <a:t>//</a:t>
-            </a:r>
-          </a:p>
-        </p:txBody>
-      </p:sp>
-      <p:sp>
-        <p:nvSpPr>
-          <p:cNvPr id="10" name="TextBox 9"/>
-          <p:cNvSpPr txBox="1"/>
-          <p:nvPr/>
-        </p:nvSpPr>
-        <p:spPr>
-          <a:xfrm>
-            <a:off x="971550" y="4429506"/>
-            <a:ext cx="7772400" cy="95250"/>
-          </a:xfrm>
-          <a:prstGeom prst="rect">
-            <a:avLst/>
-          </a:prstGeom>
-          <a:noFill/>
-        </p:spPr>
-        <p:txBody>
-          <a:bodyPr wrap="square" lIns="0" rIns="0" tIns="0" bIns="0" anchor="t">
-            <a:spAutoFit/>
-          </a:bodyPr>
-          <a:lstStyle/>
-          <a:p>
-            <a:pPr algn="l">
-              <a:lnSpc>
-                <a:spcPct val="130000"/>
-              </a:lnSpc>
-            </a:pPr>
-            <a:r>
-              <a:rPr sz="1650" b="0" i="0">
-                <a:solidFill>
-                  <a:srgbClr val="1A1A1E"/>
-                </a:solidFill>
-                <a:latin typeface="Roboto"/>
-              </a:rPr>
               <a:t>Estado, que traz junto backup e upgrade de versão maior do banco.</a:t>
             </a:r>
           </a:p>
@@ -23005,40 +23120,45 @@
       </p:sp>
       <p:sp>
         <p:nvSpPr>
-          <p:cNvPr id="11" name="TextBox 10"/>
-          <p:cNvSpPr txBox="1"/>
-          <p:nvPr/>
-        </p:nvSpPr>
-        <p:spPr>
-          <a:xfrm>
-            <a:off x="685800" y="5001387"/>
-            <a:ext cx="247650" cy="308458"/>
-          </a:xfrm>
-          <a:prstGeom prst="rect">
-            <a:avLst/>
-          </a:prstGeom>
-          <a:noFill/>
-        </p:spPr>
-        <p:txBody>
-          <a:bodyPr wrap="square" lIns="0" rIns="0" tIns="0" bIns="0" anchor="t">
-            <a:spAutoFit/>
-          </a:bodyPr>
-          <a:lstStyle/>
-          <a:p>
-            <a:pPr algn="l">
-              <a:lnSpc>
-                <a:spcPct val="120000"/>
-              </a:lnSpc>
-            </a:pPr>
-            <a:r>
-              <a:rPr sz="1520" b="1" i="0">
-                <a:solidFill>
-                  <a:srgbClr val="E94D1C"/>
-                </a:solidFill>
-                <a:latin typeface="Roboto"/>
-              </a:rPr>
-              <a:t>//</a:t>
-            </a:r>
+          <p:cNvPr id="11" name="Rectangle 10"/>
+          <p:cNvSpPr/>
+          <p:nvPr/>
+        </p:nvSpPr>
+        <p:spPr>
+          <a:xfrm>
+            <a:off x="704850" y="5100828"/>
+            <a:ext cx="57150" cy="57150"/>
+          </a:xfrm>
+          <a:prstGeom prst="rect">
+            <a:avLst/>
+          </a:prstGeom>
+          <a:solidFill>
+            <a:srgbClr val="E94D1C"/>
+          </a:solidFill>
+          <a:ln>
+            <a:noFill/>
+          </a:ln>
+          <a:effectLst/>
+        </p:spPr>
+        <p:style>
+          <a:lnRef idx="1">
+            <a:schemeClr val="accent1"/>
+          </a:lnRef>
+          <a:fillRef idx="3">
+            <a:schemeClr val="accent1"/>
+          </a:fillRef>
+          <a:effectRef idx="2">
+            <a:schemeClr val="accent1"/>
+          </a:effectRef>
+          <a:fontRef idx="minor">
+            <a:schemeClr val="lt1"/>
+          </a:fontRef>
+        </p:style>
+        <p:txBody>
+          <a:bodyPr rtlCol="0" anchor="ctr" wrap="square" lIns="0" rIns="0" tIns="0" bIns="0"/>
+          <a:lstStyle/>
+          <a:p>
+            <a:pPr algn="ctr"/>
           </a:p>
         </p:txBody>
       </p:sp>
@@ -23601,287 +23721,14 @@
       </p:sp>
       <p:sp>
         <p:nvSpPr>
-          <p:cNvPr id="7" name="TextBox 6"/>
-          <p:cNvSpPr txBox="1"/>
-          <p:nvPr/>
-        </p:nvSpPr>
-        <p:spPr>
-          <a:xfrm>
-            <a:off x="685800" y="3227451"/>
-            <a:ext cx="247650" cy="294437"/>
-          </a:xfrm>
-          <a:prstGeom prst="rect">
-            <a:avLst/>
-          </a:prstGeom>
-          <a:noFill/>
-        </p:spPr>
-        <p:txBody>
-          <a:bodyPr wrap="square" lIns="0" rIns="0" tIns="0" bIns="0" anchor="t">
-            <a:spAutoFit/>
-          </a:bodyPr>
-          <a:lstStyle/>
-          <a:p>
-            <a:pPr algn="l">
-              <a:lnSpc>
-                <a:spcPct val="120000"/>
-              </a:lnSpc>
-            </a:pPr>
-            <a:r>
-              <a:rPr sz="1450" b="1" i="0">
-                <a:solidFill>
-                  <a:srgbClr val="E94D1C"/>
-                </a:solidFill>
-                <a:latin typeface="Roboto"/>
-              </a:rPr>
-              <a:t>//</a:t>
-            </a:r>
-          </a:p>
-        </p:txBody>
-      </p:sp>
-      <p:sp>
-        <p:nvSpPr>
-          <p:cNvPr id="8" name="TextBox 7"/>
-          <p:cNvSpPr txBox="1"/>
-          <p:nvPr/>
-        </p:nvSpPr>
-        <p:spPr>
-          <a:xfrm>
-            <a:off x="971550" y="3217926"/>
-            <a:ext cx="4857750" cy="95250"/>
-          </a:xfrm>
-          <a:prstGeom prst="rect">
-            <a:avLst/>
-          </a:prstGeom>
-          <a:noFill/>
-        </p:spPr>
-        <p:txBody>
-          <a:bodyPr wrap="square" lIns="0" rIns="0" tIns="0" bIns="0" anchor="t">
-            <a:spAutoFit/>
-          </a:bodyPr>
-          <a:lstStyle/>
-          <a:p>
-            <a:pPr algn="l">
-              <a:lnSpc>
-                <a:spcPct val="130000"/>
-              </a:lnSpc>
-            </a:pPr>
-            <a:r>
-              <a:rPr sz="1580" b="0" i="0">
-                <a:solidFill>
-                  <a:srgbClr val="1A1A1E"/>
-                </a:solidFill>
-                <a:latin typeface="Roboto"/>
-              </a:rPr>
-              <a:t>Kernel próprio.</a:t>
-            </a:r>
-          </a:p>
-        </p:txBody>
-      </p:sp>
-      <p:sp>
-        <p:nvSpPr>
-          <p:cNvPr id="9" name="TextBox 8"/>
-          <p:cNvSpPr txBox="1"/>
-          <p:nvPr/>
-        </p:nvSpPr>
-        <p:spPr>
-          <a:xfrm>
-            <a:off x="685800" y="3758184"/>
-            <a:ext cx="247650" cy="294437"/>
-          </a:xfrm>
-          <a:prstGeom prst="rect">
-            <a:avLst/>
-          </a:prstGeom>
-          <a:noFill/>
-        </p:spPr>
-        <p:txBody>
-          <a:bodyPr wrap="square" lIns="0" rIns="0" tIns="0" bIns="0" anchor="t">
-            <a:spAutoFit/>
-          </a:bodyPr>
-          <a:lstStyle/>
-          <a:p>
-            <a:pPr algn="l">
-              <a:lnSpc>
-                <a:spcPct val="120000"/>
-              </a:lnSpc>
-            </a:pPr>
-            <a:r>
-              <a:rPr sz="1450" b="1" i="0">
-                <a:solidFill>
-                  <a:srgbClr val="E94D1C"/>
-                </a:solidFill>
-                <a:latin typeface="Roboto"/>
-              </a:rPr>
-              <a:t>//</a:t>
-            </a:r>
-          </a:p>
-        </p:txBody>
-      </p:sp>
-      <p:sp>
-        <p:nvSpPr>
-          <p:cNvPr id="10" name="TextBox 9"/>
-          <p:cNvSpPr txBox="1"/>
-          <p:nvPr/>
-        </p:nvSpPr>
-        <p:spPr>
-          <a:xfrm>
-            <a:off x="971550" y="3748659"/>
-            <a:ext cx="4857750" cy="95250"/>
-          </a:xfrm>
-          <a:prstGeom prst="rect">
-            <a:avLst/>
-          </a:prstGeom>
-          <a:noFill/>
-        </p:spPr>
-        <p:txBody>
-          <a:bodyPr wrap="square" lIns="0" rIns="0" tIns="0" bIns="0" anchor="t">
-            <a:spAutoFit/>
-          </a:bodyPr>
-          <a:lstStyle/>
-          <a:p>
-            <a:pPr algn="l">
-              <a:lnSpc>
-                <a:spcPct val="130000"/>
-              </a:lnSpc>
-            </a:pPr>
-            <a:r>
-              <a:rPr sz="1580" b="0" i="0">
-                <a:solidFill>
-                  <a:srgbClr val="1A1A1E"/>
-                </a:solidFill>
-                <a:latin typeface="Roboto"/>
-              </a:rPr>
-              <a:t>Fronteira imposta em hardware.</a:t>
-            </a:r>
-          </a:p>
-        </p:txBody>
-      </p:sp>
-      <p:sp>
-        <p:nvSpPr>
-          <p:cNvPr id="11" name="TextBox 10"/>
-          <p:cNvSpPr txBox="1"/>
-          <p:nvPr/>
-        </p:nvSpPr>
-        <p:spPr>
-          <a:xfrm>
-            <a:off x="685800" y="4288917"/>
-            <a:ext cx="247650" cy="294437"/>
-          </a:xfrm>
-          <a:prstGeom prst="rect">
-            <a:avLst/>
-          </a:prstGeom>
-          <a:noFill/>
-        </p:spPr>
-        <p:txBody>
-          <a:bodyPr wrap="square" lIns="0" rIns="0" tIns="0" bIns="0" anchor="t">
-            <a:spAutoFit/>
-          </a:bodyPr>
-          <a:lstStyle/>
-          <a:p>
-            <a:pPr algn="l">
-              <a:lnSpc>
-                <a:spcPct val="120000"/>
-              </a:lnSpc>
-            </a:pPr>
-            <a:r>
-              <a:rPr sz="1450" b="1" i="0">
-                <a:solidFill>
-                  <a:srgbClr val="E94D1C"/>
-                </a:solidFill>
-                <a:latin typeface="Roboto"/>
-              </a:rPr>
-              <a:t>//</a:t>
-            </a:r>
-          </a:p>
-        </p:txBody>
-      </p:sp>
-      <p:sp>
-        <p:nvSpPr>
-          <p:cNvPr id="12" name="TextBox 11"/>
-          <p:cNvSpPr txBox="1"/>
-          <p:nvPr/>
-        </p:nvSpPr>
-        <p:spPr>
-          <a:xfrm>
-            <a:off x="971550" y="4279392"/>
-            <a:ext cx="4857750" cy="95250"/>
-          </a:xfrm>
-          <a:prstGeom prst="rect">
-            <a:avLst/>
-          </a:prstGeom>
-          <a:noFill/>
-        </p:spPr>
-        <p:txBody>
-          <a:bodyPr wrap="square" lIns="0" rIns="0" tIns="0" bIns="0" anchor="t">
-            <a:spAutoFit/>
-          </a:bodyPr>
-          <a:lstStyle/>
-          <a:p>
-            <a:pPr algn="l">
-              <a:lnSpc>
-                <a:spcPct val="130000"/>
-              </a:lnSpc>
-            </a:pPr>
-            <a:r>
-              <a:rPr sz="1580" b="0" i="0">
-                <a:solidFill>
-                  <a:srgbClr val="1A1A1E"/>
-                </a:solidFill>
-                <a:latin typeface="Roboto"/>
-              </a:rPr>
-              <a:t>Superfície relativamente estreita.</a:t>
-            </a:r>
-          </a:p>
-        </p:txBody>
-      </p:sp>
-      <p:sp>
-        <p:nvSpPr>
-          <p:cNvPr id="13" name="TextBox 12"/>
-          <p:cNvSpPr txBox="1"/>
-          <p:nvPr/>
-        </p:nvSpPr>
-        <p:spPr>
-          <a:xfrm>
-            <a:off x="6362700" y="2722626"/>
-            <a:ext cx="5143500" cy="182880"/>
-          </a:xfrm>
-          <a:prstGeom prst="rect">
-            <a:avLst/>
-          </a:prstGeom>
-          <a:noFill/>
-        </p:spPr>
-        <p:txBody>
-          <a:bodyPr wrap="square" lIns="0" rIns="0" tIns="0" bIns="0" anchor="t">
-            <a:spAutoFit/>
-          </a:bodyPr>
-          <a:lstStyle/>
-          <a:p>
-            <a:pPr algn="l">
-              <a:lnSpc>
-                <a:spcPct val="120000"/>
-              </a:lnSpc>
-            </a:pPr>
-            <a:r>
-              <a:rPr sz="900" b="1" i="0" spc="120">
-                <a:solidFill>
-                  <a:srgbClr val="E94D1C"/>
-                </a:solidFill>
-                <a:latin typeface="Roboto"/>
-              </a:rPr>
-              <a:t>CONTAINER</a:t>
-            </a:r>
-          </a:p>
-        </p:txBody>
-      </p:sp>
-      <p:sp>
-        <p:nvSpPr>
-          <p:cNvPr id="14" name="Rectangle 13"/>
+          <p:cNvPr id="7" name="Rectangle 6"/>
           <p:cNvSpPr/>
           <p:nvPr/>
         </p:nvSpPr>
         <p:spPr>
           <a:xfrm>
-            <a:off x="6362700" y="2932176"/>
-            <a:ext cx="419100" cy="28575"/>
+            <a:off x="704850" y="3321939"/>
+            <a:ext cx="57150" cy="57150"/>
           </a:xfrm>
           <a:prstGeom prst="rect">
             <a:avLst/>
@@ -23918,14 +23765,14 @@
       </p:sp>
       <p:sp>
         <p:nvSpPr>
-          <p:cNvPr id="15" name="TextBox 14"/>
+          <p:cNvPr id="8" name="TextBox 7"/>
           <p:cNvSpPr txBox="1"/>
           <p:nvPr/>
         </p:nvSpPr>
         <p:spPr>
           <a:xfrm>
-            <a:off x="6362700" y="3227451"/>
-            <a:ext cx="247650" cy="294437"/>
+            <a:off x="971550" y="3217926"/>
+            <a:ext cx="4857750" cy="95250"/>
           </a:xfrm>
           <a:prstGeom prst="rect">
             <a:avLst/>
@@ -23940,30 +23787,74 @@
           <a:p>
             <a:pPr algn="l">
               <a:lnSpc>
-                <a:spcPct val="120000"/>
-              </a:lnSpc>
-            </a:pPr>
-            <a:r>
-              <a:rPr sz="1450" b="1" i="0">
-                <a:solidFill>
-                  <a:srgbClr val="E94D1C"/>
-                </a:solidFill>
-                <a:latin typeface="Roboto"/>
-              </a:rPr>
-              <a:t>//</a:t>
-            </a:r>
-          </a:p>
-        </p:txBody>
-      </p:sp>
-      <p:sp>
-        <p:nvSpPr>
-          <p:cNvPr id="16" name="TextBox 15"/>
+                <a:spcPct val="130000"/>
+              </a:lnSpc>
+            </a:pPr>
+            <a:r>
+              <a:rPr sz="1580" b="0" i="0">
+                <a:solidFill>
+                  <a:srgbClr val="1A1A1E"/>
+                </a:solidFill>
+                <a:latin typeface="Roboto"/>
+              </a:rPr>
+              <a:t>Kernel próprio.</a:t>
+            </a:r>
+          </a:p>
+        </p:txBody>
+      </p:sp>
+      <p:sp>
+        <p:nvSpPr>
+          <p:cNvPr id="9" name="Rectangle 8"/>
+          <p:cNvSpPr/>
+          <p:nvPr/>
+        </p:nvSpPr>
+        <p:spPr>
+          <a:xfrm>
+            <a:off x="704850" y="3852672"/>
+            <a:ext cx="57150" cy="57150"/>
+          </a:xfrm>
+          <a:prstGeom prst="rect">
+            <a:avLst/>
+          </a:prstGeom>
+          <a:solidFill>
+            <a:srgbClr val="E94D1C"/>
+          </a:solidFill>
+          <a:ln>
+            <a:noFill/>
+          </a:ln>
+          <a:effectLst/>
+        </p:spPr>
+        <p:style>
+          <a:lnRef idx="1">
+            <a:schemeClr val="accent1"/>
+          </a:lnRef>
+          <a:fillRef idx="3">
+            <a:schemeClr val="accent1"/>
+          </a:fillRef>
+          <a:effectRef idx="2">
+            <a:schemeClr val="accent1"/>
+          </a:effectRef>
+          <a:fontRef idx="minor">
+            <a:schemeClr val="lt1"/>
+          </a:fontRef>
+        </p:style>
+        <p:txBody>
+          <a:bodyPr rtlCol="0" anchor="ctr" wrap="square" lIns="0" rIns="0" tIns="0" bIns="0"/>
+          <a:lstStyle/>
+          <a:p>
+            <a:pPr algn="ctr"/>
+          </a:p>
+        </p:txBody>
+      </p:sp>
+      <p:sp>
+        <p:nvSpPr>
+          <p:cNvPr id="10" name="TextBox 9"/>
           <p:cNvSpPr txBox="1"/>
           <p:nvPr/>
         </p:nvSpPr>
         <p:spPr>
           <a:xfrm>
-            <a:off x="6648450" y="3217926"/>
+            <a:off x="971550" y="3748659"/>
             <a:ext cx="4857750" cy="95250"/>
           </a:xfrm>
           <a:prstGeom prst="rect">
@@ -23989,21 +23880,65 @@
                 </a:solidFill>
                 <a:latin typeface="Roboto"/>
               </a:rPr>
-              <a:t>Compartilha o kernel do host.</a:t>
-            </a:r>
-          </a:p>
-        </p:txBody>
-      </p:sp>
-      <p:sp>
-        <p:nvSpPr>
-          <p:cNvPr id="17" name="TextBox 16"/>
+              <a:t>Fronteira imposta em hardware.</a:t>
+            </a:r>
+          </a:p>
+        </p:txBody>
+      </p:sp>
+      <p:sp>
+        <p:nvSpPr>
+          <p:cNvPr id="11" name="Rectangle 10"/>
+          <p:cNvSpPr/>
+          <p:nvPr/>
+        </p:nvSpPr>
+        <p:spPr>
+          <a:xfrm>
+            <a:off x="704850" y="4383405"/>
+            <a:ext cx="57150" cy="57150"/>
+          </a:xfrm>
+          <a:prstGeom prst="rect">
+            <a:avLst/>
+          </a:prstGeom>
+          <a:solidFill>
+            <a:srgbClr val="E94D1C"/>
+          </a:solidFill>
+          <a:ln>
+            <a:noFill/>
+          </a:ln>
+          <a:effectLst/>
+        </p:spPr>
+        <p:style>
+          <a:lnRef idx="1">
+            <a:schemeClr val="accent1"/>
+          </a:lnRef>
+          <a:fillRef idx="3">
+            <a:schemeClr val="accent1"/>
+          </a:fillRef>
+          <a:effectRef idx="2">
+            <a:schemeClr val="accent1"/>
+          </a:effectRef>
+          <a:fontRef idx="minor">
+            <a:schemeClr val="lt1"/>
+          </a:fontRef>
+        </p:style>
+        <p:txBody>
+          <a:bodyPr rtlCol="0" anchor="ctr" wrap="square" lIns="0" rIns="0" tIns="0" bIns="0"/>
+          <a:lstStyle/>
+          <a:p>
+            <a:pPr algn="ctr"/>
+          </a:p>
+        </p:txBody>
+      </p:sp>
+      <p:sp>
+        <p:nvSpPr>
+          <p:cNvPr id="12" name="TextBox 11"/>
           <p:cNvSpPr txBox="1"/>
           <p:nvPr/>
         </p:nvSpPr>
         <p:spPr>
           <a:xfrm>
-            <a:off x="6362700" y="3758184"/>
-            <a:ext cx="247650" cy="294437"/>
+            <a:off x="971550" y="4279392"/>
+            <a:ext cx="4857750" cy="95250"/>
           </a:xfrm>
           <a:prstGeom prst="rect">
             <a:avLst/>
@@ -24018,31 +23953,31 @@
           <a:p>
             <a:pPr algn="l">
               <a:lnSpc>
-                <a:spcPct val="120000"/>
-              </a:lnSpc>
-            </a:pPr>
-            <a:r>
-              <a:rPr sz="1450" b="1" i="0">
-                <a:solidFill>
-                  <a:srgbClr val="E94D1C"/>
-                </a:solidFill>
-                <a:latin typeface="Roboto"/>
-              </a:rPr>
-              <a:t>//</a:t>
-            </a:r>
-          </a:p>
-        </p:txBody>
-      </p:sp>
-      <p:sp>
-        <p:nvSpPr>
-          <p:cNvPr id="18" name="TextBox 17"/>
+                <a:spcPct val="130000"/>
+              </a:lnSpc>
+            </a:pPr>
+            <a:r>
+              <a:rPr sz="1580" b="0" i="0">
+                <a:solidFill>
+                  <a:srgbClr val="1A1A1E"/>
+                </a:solidFill>
+                <a:latin typeface="Roboto"/>
+              </a:rPr>
+              <a:t>Superfície relativamente estreita.</a:t>
+            </a:r>
+          </a:p>
+        </p:txBody>
+      </p:sp>
+      <p:sp>
+        <p:nvSpPr>
+          <p:cNvPr id="13" name="TextBox 12"/>
           <p:cNvSpPr txBox="1"/>
           <p:nvPr/>
         </p:nvSpPr>
         <p:spPr>
           <a:xfrm>
-            <a:off x="6648450" y="3748659"/>
-            <a:ext cx="4857750" cy="95250"/>
+            <a:off x="6362700" y="2722626"/>
+            <a:ext cx="5143500" cy="182880"/>
           </a:xfrm>
           <a:prstGeom prst="rect">
             <a:avLst/>
@@ -24057,31 +23992,119 @@
           <a:p>
             <a:pPr algn="l">
               <a:lnSpc>
-                <a:spcPct val="130000"/>
-              </a:lnSpc>
-            </a:pPr>
-            <a:r>
-              <a:rPr sz="1580" b="0" i="0">
-                <a:solidFill>
-                  <a:srgbClr val="1A1A1E"/>
-                </a:solidFill>
-                <a:latin typeface="Roboto"/>
-              </a:rPr>
-              <a:t>A fronteira é a interface de chamadas de sistema, mais de trezentas, mais /proc, /sys e ioctl.</a:t>
-            </a:r>
-          </a:p>
-        </p:txBody>
-      </p:sp>
-      <p:sp>
-        <p:nvSpPr>
-          <p:cNvPr id="19" name="TextBox 18"/>
+                <a:spcPct val="120000"/>
+              </a:lnSpc>
+            </a:pPr>
+            <a:r>
+              <a:rPr sz="900" b="1" i="0" spc="120">
+                <a:solidFill>
+                  <a:srgbClr val="E94D1C"/>
+                </a:solidFill>
+                <a:latin typeface="Roboto"/>
+              </a:rPr>
+              <a:t>CONTAINER</a:t>
+            </a:r>
+          </a:p>
+        </p:txBody>
+      </p:sp>
+      <p:sp>
+        <p:nvSpPr>
+          <p:cNvPr id="14" name="Rectangle 13"/>
+          <p:cNvSpPr/>
+          <p:nvPr/>
+        </p:nvSpPr>
+        <p:spPr>
+          <a:xfrm>
+            <a:off x="6362700" y="2932176"/>
+            <a:ext cx="419100" cy="28575"/>
+          </a:xfrm>
+          <a:prstGeom prst="rect">
+            <a:avLst/>
+          </a:prstGeom>
+          <a:solidFill>
+            <a:srgbClr val="E94D1C"/>
+          </a:solidFill>
+          <a:ln>
+            <a:noFill/>
+          </a:ln>
+          <a:effectLst/>
+        </p:spPr>
+        <p:style>
+          <a:lnRef idx="1">
+            <a:schemeClr val="accent1"/>
+          </a:lnRef>
+          <a:fillRef idx="3">
+            <a:schemeClr val="accent1"/>
+          </a:fillRef>
+          <a:effectRef idx="2">
+            <a:schemeClr val="accent1"/>
+          </a:effectRef>
+          <a:fontRef idx="minor">
+            <a:schemeClr val="lt1"/>
+          </a:fontRef>
+        </p:style>
+        <p:txBody>
+          <a:bodyPr rtlCol="0" anchor="ctr" wrap="square" lIns="0" rIns="0" tIns="0" bIns="0"/>
+          <a:lstStyle/>
+          <a:p>
+            <a:pPr algn="ctr"/>
+          </a:p>
+        </p:txBody>
+      </p:sp>
+      <p:sp>
+        <p:nvSpPr>
+          <p:cNvPr id="15" name="Rectangle 14"/>
+          <p:cNvSpPr/>
+          <p:nvPr/>
+        </p:nvSpPr>
+        <p:spPr>
+          <a:xfrm>
+            <a:off x="6381750" y="3321939"/>
+            <a:ext cx="57150" cy="57150"/>
+          </a:xfrm>
+          <a:prstGeom prst="rect">
+            <a:avLst/>
+          </a:prstGeom>
+          <a:solidFill>
+            <a:srgbClr val="E94D1C"/>
+          </a:solidFill>
+          <a:ln>
+            <a:noFill/>
+          </a:ln>
+          <a:effectLst/>
+        </p:spPr>
+        <p:style>
+          <a:lnRef idx="1">
+            <a:schemeClr val="accent1"/>
+          </a:lnRef>
+          <a:fillRef idx="3">
+            <a:schemeClr val="accent1"/>
+          </a:fillRef>
+          <a:effectRef idx="2">
+            <a:schemeClr val="accent1"/>
+          </a:effectRef>
+          <a:fontRef idx="minor">
+            <a:schemeClr val="lt1"/>
+          </a:fontRef>
+        </p:style>
+        <p:txBody>
+          <a:bodyPr rtlCol="0" anchor="ctr" wrap="square" lIns="0" rIns="0" tIns="0" bIns="0"/>
+          <a:lstStyle/>
+          <a:p>
+            <a:pPr algn="ctr"/>
+          </a:p>
+        </p:txBody>
+      </p:sp>
+      <p:sp>
+        <p:nvSpPr>
+          <p:cNvPr id="16" name="TextBox 15"/>
           <p:cNvSpPr txBox="1"/>
           <p:nvPr/>
         </p:nvSpPr>
         <p:spPr>
           <a:xfrm>
-            <a:off x="6362700" y="4552950"/>
-            <a:ext cx="247650" cy="294437"/>
+            <a:off x="6648450" y="3217926"/>
+            <a:ext cx="4857750" cy="95250"/>
           </a:xfrm>
           <a:prstGeom prst="rect">
             <a:avLst/>
@@ -24096,18 +24119,145 @@
           <a:p>
             <a:pPr algn="l">
               <a:lnSpc>
-                <a:spcPct val="120000"/>
-              </a:lnSpc>
-            </a:pPr>
-            <a:r>
-              <a:rPr sz="1450" b="1" i="0">
-                <a:solidFill>
-                  <a:srgbClr val="E94D1C"/>
-                </a:solidFill>
-                <a:latin typeface="Roboto"/>
-              </a:rPr>
-              <a:t>//</a:t>
-            </a:r>
+                <a:spcPct val="130000"/>
+              </a:lnSpc>
+            </a:pPr>
+            <a:r>
+              <a:rPr sz="1580" b="0" i="0">
+                <a:solidFill>
+                  <a:srgbClr val="1A1A1E"/>
+                </a:solidFill>
+                <a:latin typeface="Roboto"/>
+              </a:rPr>
+              <a:t>Compartilha o kernel do host.</a:t>
+            </a:r>
+          </a:p>
+        </p:txBody>
+      </p:sp>
+      <p:sp>
+        <p:nvSpPr>
+          <p:cNvPr id="17" name="Rectangle 16"/>
+          <p:cNvSpPr/>
+          <p:nvPr/>
+        </p:nvSpPr>
+        <p:spPr>
+          <a:xfrm>
+            <a:off x="6381750" y="3852672"/>
+            <a:ext cx="57150" cy="57150"/>
+          </a:xfrm>
+          <a:prstGeom prst="rect">
+            <a:avLst/>
+          </a:prstGeom>
+          <a:solidFill>
+            <a:srgbClr val="E94D1C"/>
+          </a:solidFill>
+          <a:ln>
+            <a:noFill/>
+          </a:ln>
+          <a:effectLst/>
+        </p:spPr>
+        <p:style>
+          <a:lnRef idx="1">
+            <a:schemeClr val="accent1"/>
+          </a:lnRef>
+          <a:fillRef idx="3">
+            <a:schemeClr val="accent1"/>
+          </a:fillRef>
+          <a:effectRef idx="2">
+            <a:schemeClr val="accent1"/>
+          </a:effectRef>
+          <a:fontRef idx="minor">
+            <a:schemeClr val="lt1"/>
+          </a:fontRef>
+        </p:style>
+        <p:txBody>
+          <a:bodyPr rtlCol="0" anchor="ctr" wrap="square" lIns="0" rIns="0" tIns="0" bIns="0"/>
+          <a:lstStyle/>
+          <a:p>
+            <a:pPr algn="ctr"/>
+          </a:p>
+        </p:txBody>
+      </p:sp>
+      <p:sp>
+        <p:nvSpPr>
+          <p:cNvPr id="18" name="TextBox 17"/>
+          <p:cNvSpPr txBox="1"/>
+          <p:nvPr/>
+        </p:nvSpPr>
+        <p:spPr>
+          <a:xfrm>
+            <a:off x="6648450" y="3748659"/>
+            <a:ext cx="4857750" cy="95250"/>
+          </a:xfrm>
+          <a:prstGeom prst="rect">
+            <a:avLst/>
+          </a:prstGeom>
+          <a:noFill/>
+        </p:spPr>
+        <p:txBody>
+          <a:bodyPr wrap="square" lIns="0" rIns="0" tIns="0" bIns="0" anchor="t">
+            <a:spAutoFit/>
+          </a:bodyPr>
+          <a:lstStyle/>
+          <a:p>
+            <a:pPr algn="l">
+              <a:lnSpc>
+                <a:spcPct val="130000"/>
+              </a:lnSpc>
+            </a:pPr>
+            <a:r>
+              <a:rPr sz="1580" b="0" i="0">
+                <a:solidFill>
+                  <a:srgbClr val="1A1A1E"/>
+                </a:solidFill>
+                <a:latin typeface="Roboto"/>
+              </a:rPr>
+              <a:t>A fronteira é a interface de chamadas de sistema, mais de trezentas, mais /proc, /sys e ioctl.</a:t>
+            </a:r>
+          </a:p>
+        </p:txBody>
+      </p:sp>
+      <p:sp>
+        <p:nvSpPr>
+          <p:cNvPr id="19" name="Rectangle 18"/>
+          <p:cNvSpPr/>
+          <p:nvPr/>
+        </p:nvSpPr>
+        <p:spPr>
+          <a:xfrm>
+            <a:off x="6381750" y="4647438"/>
+            <a:ext cx="57150" cy="57150"/>
+          </a:xfrm>
+          <a:prstGeom prst="rect">
+            <a:avLst/>
+          </a:prstGeom>
+          <a:solidFill>
+            <a:srgbClr val="E94D1C"/>
+          </a:solidFill>
+          <a:ln>
+            <a:noFill/>
+          </a:ln>
+          <a:effectLst/>
+        </p:spPr>
+        <p:style>
+          <a:lnRef idx="1">
+            <a:schemeClr val="accent1"/>
+          </a:lnRef>
+          <a:fillRef idx="3">
+            <a:schemeClr val="accent1"/>
+          </a:fillRef>
+          <a:effectRef idx="2">
+            <a:schemeClr val="accent1"/>
+          </a:effectRef>
+          <a:fontRef idx="minor">
+            <a:schemeClr val="lt1"/>
+          </a:fontRef>
+        </p:style>
+        <p:txBody>
+          <a:bodyPr rtlCol="0" anchor="ctr" wrap="square" lIns="0" rIns="0" tIns="0" bIns="0"/>
+          <a:lstStyle/>
+          <a:p>
+            <a:pPr algn="ctr"/>
           </a:p>
         </p:txBody>
       </p:sp>
@@ -25512,365 +25662,14 @@
       </p:sp>
       <p:sp>
         <p:nvSpPr>
-          <p:cNvPr id="7" name="TextBox 6"/>
-          <p:cNvSpPr txBox="1"/>
-          <p:nvPr/>
-        </p:nvSpPr>
-        <p:spPr>
-          <a:xfrm>
-            <a:off x="685800" y="3226118"/>
-            <a:ext cx="247650" cy="294437"/>
-          </a:xfrm>
-          <a:prstGeom prst="rect">
-            <a:avLst/>
-          </a:prstGeom>
-          <a:noFill/>
-        </p:spPr>
-        <p:txBody>
-          <a:bodyPr wrap="square" lIns="0" rIns="0" tIns="0" bIns="0" anchor="t">
-            <a:spAutoFit/>
-          </a:bodyPr>
-          <a:lstStyle/>
-          <a:p>
-            <a:pPr algn="l">
-              <a:lnSpc>
-                <a:spcPct val="120000"/>
-              </a:lnSpc>
-            </a:pPr>
-            <a:r>
-              <a:rPr sz="1450" b="1" i="0">
-                <a:solidFill>
-                  <a:srgbClr val="E94D1C"/>
-                </a:solidFill>
-                <a:latin typeface="Roboto"/>
-              </a:rPr>
-              <a:t>//</a:t>
-            </a:r>
-          </a:p>
-        </p:txBody>
-      </p:sp>
-      <p:sp>
-        <p:nvSpPr>
-          <p:cNvPr id="8" name="TextBox 7"/>
-          <p:cNvSpPr txBox="1"/>
-          <p:nvPr/>
-        </p:nvSpPr>
-        <p:spPr>
-          <a:xfrm>
-            <a:off x="971550" y="3216592"/>
-            <a:ext cx="4857750" cy="95250"/>
-          </a:xfrm>
-          <a:prstGeom prst="rect">
-            <a:avLst/>
-          </a:prstGeom>
-          <a:noFill/>
-        </p:spPr>
-        <p:txBody>
-          <a:bodyPr wrap="square" lIns="0" rIns="0" tIns="0" bIns="0" anchor="t">
-            <a:spAutoFit/>
-          </a:bodyPr>
-          <a:lstStyle/>
-          <a:p>
-            <a:pPr algn="l">
-              <a:lnSpc>
-                <a:spcPct val="130000"/>
-              </a:lnSpc>
-            </a:pPr>
-            <a:r>
-              <a:rPr sz="1580" b="0" i="0">
-                <a:solidFill>
-                  <a:srgbClr val="1A1A1E"/>
-                </a:solidFill>
-                <a:latin typeface="Roboto"/>
-              </a:rPr>
-              <a:t>Monolito num servidor que nunca escala.</a:t>
-            </a:r>
-          </a:p>
-        </p:txBody>
-      </p:sp>
-      <p:sp>
-        <p:nvSpPr>
-          <p:cNvPr id="9" name="TextBox 8"/>
-          <p:cNvSpPr txBox="1"/>
-          <p:nvPr/>
-        </p:nvSpPr>
-        <p:spPr>
-          <a:xfrm>
-            <a:off x="685800" y="3756850"/>
-            <a:ext cx="247650" cy="294437"/>
-          </a:xfrm>
-          <a:prstGeom prst="rect">
-            <a:avLst/>
-          </a:prstGeom>
-          <a:noFill/>
-        </p:spPr>
-        <p:txBody>
-          <a:bodyPr wrap="square" lIns="0" rIns="0" tIns="0" bIns="0" anchor="t">
-            <a:spAutoFit/>
-          </a:bodyPr>
-          <a:lstStyle/>
-          <a:p>
-            <a:pPr algn="l">
-              <a:lnSpc>
-                <a:spcPct val="120000"/>
-              </a:lnSpc>
-            </a:pPr>
-            <a:r>
-              <a:rPr sz="1450" b="1" i="0">
-                <a:solidFill>
-                  <a:srgbClr val="E94D1C"/>
-                </a:solidFill>
-                <a:latin typeface="Roboto"/>
-              </a:rPr>
-              <a:t>//</a:t>
-            </a:r>
-          </a:p>
-        </p:txBody>
-      </p:sp>
-      <p:sp>
-        <p:nvSpPr>
-          <p:cNvPr id="10" name="TextBox 9"/>
-          <p:cNvSpPr txBox="1"/>
-          <p:nvPr/>
-        </p:nvSpPr>
-        <p:spPr>
-          <a:xfrm>
-            <a:off x="971550" y="3747325"/>
-            <a:ext cx="4857750" cy="95250"/>
-          </a:xfrm>
-          <a:prstGeom prst="rect">
-            <a:avLst/>
-          </a:prstGeom>
-          <a:noFill/>
-        </p:spPr>
-        <p:txBody>
-          <a:bodyPr wrap="square" lIns="0" rIns="0" tIns="0" bIns="0" anchor="t">
-            <a:spAutoFit/>
-          </a:bodyPr>
-          <a:lstStyle/>
-          <a:p>
-            <a:pPr algn="l">
-              <a:lnSpc>
-                <a:spcPct val="130000"/>
-              </a:lnSpc>
-            </a:pPr>
-            <a:r>
-              <a:rPr sz="1580" b="0" i="0">
-                <a:solidFill>
-                  <a:srgbClr val="1A1A1E"/>
-                </a:solidFill>
-                <a:latin typeface="Roboto"/>
-              </a:rPr>
-              <a:t>Time sem integração contínua, que só ganha um passo de build a mais.</a:t>
-            </a:r>
-          </a:p>
-        </p:txBody>
-      </p:sp>
-      <p:sp>
-        <p:nvSpPr>
-          <p:cNvPr id="11" name="TextBox 10"/>
-          <p:cNvSpPr txBox="1"/>
-          <p:nvPr/>
-        </p:nvSpPr>
-        <p:spPr>
-          <a:xfrm>
-            <a:off x="685800" y="4551616"/>
-            <a:ext cx="247650" cy="294437"/>
-          </a:xfrm>
-          <a:prstGeom prst="rect">
-            <a:avLst/>
-          </a:prstGeom>
-          <a:noFill/>
-        </p:spPr>
-        <p:txBody>
-          <a:bodyPr wrap="square" lIns="0" rIns="0" tIns="0" bIns="0" anchor="t">
-            <a:spAutoFit/>
-          </a:bodyPr>
-          <a:lstStyle/>
-          <a:p>
-            <a:pPr algn="l">
-              <a:lnSpc>
-                <a:spcPct val="120000"/>
-              </a:lnSpc>
-            </a:pPr>
-            <a:r>
-              <a:rPr sz="1450" b="1" i="0">
-                <a:solidFill>
-                  <a:srgbClr val="E94D1C"/>
-                </a:solidFill>
-                <a:latin typeface="Roboto"/>
-              </a:rPr>
-              <a:t>//</a:t>
-            </a:r>
-          </a:p>
-        </p:txBody>
-      </p:sp>
-      <p:sp>
-        <p:nvSpPr>
-          <p:cNvPr id="12" name="TextBox 11"/>
-          <p:cNvSpPr txBox="1"/>
-          <p:nvPr/>
-        </p:nvSpPr>
-        <p:spPr>
-          <a:xfrm>
-            <a:off x="971550" y="4542092"/>
-            <a:ext cx="4857750" cy="95250"/>
-          </a:xfrm>
-          <a:prstGeom prst="rect">
-            <a:avLst/>
-          </a:prstGeom>
-          <a:noFill/>
-        </p:spPr>
-        <p:txBody>
-          <a:bodyPr wrap="square" lIns="0" rIns="0" tIns="0" bIns="0" anchor="t">
-            <a:spAutoFit/>
-          </a:bodyPr>
-          <a:lstStyle/>
-          <a:p>
-            <a:pPr algn="l">
-              <a:lnSpc>
-                <a:spcPct val="130000"/>
-              </a:lnSpc>
-            </a:pPr>
-            <a:r>
-              <a:rPr sz="1580" b="0" i="0">
-                <a:solidFill>
-                  <a:srgbClr val="1A1A1E"/>
-                </a:solidFill>
-                <a:latin typeface="Roboto"/>
-              </a:rPr>
-              <a:t>Aplicação sensível a latência de cauda.</a:t>
-            </a:r>
-          </a:p>
-        </p:txBody>
-      </p:sp>
-      <p:sp>
-        <p:nvSpPr>
-          <p:cNvPr id="13" name="TextBox 12"/>
-          <p:cNvSpPr txBox="1"/>
-          <p:nvPr/>
-        </p:nvSpPr>
-        <p:spPr>
-          <a:xfrm>
-            <a:off x="685800" y="5082349"/>
-            <a:ext cx="247650" cy="294437"/>
-          </a:xfrm>
-          <a:prstGeom prst="rect">
-            <a:avLst/>
-          </a:prstGeom>
-          <a:noFill/>
-        </p:spPr>
-        <p:txBody>
-          <a:bodyPr wrap="square" lIns="0" rIns="0" tIns="0" bIns="0" anchor="t">
-            <a:spAutoFit/>
-          </a:bodyPr>
-          <a:lstStyle/>
-          <a:p>
-            <a:pPr algn="l">
-              <a:lnSpc>
-                <a:spcPct val="120000"/>
-              </a:lnSpc>
-            </a:pPr>
-            <a:r>
-              <a:rPr sz="1450" b="1" i="0">
-                <a:solidFill>
-                  <a:srgbClr val="E94D1C"/>
-                </a:solidFill>
-                <a:latin typeface="Roboto"/>
-              </a:rPr>
-              <a:t>//</a:t>
-            </a:r>
-          </a:p>
-        </p:txBody>
-      </p:sp>
-      <p:sp>
-        <p:nvSpPr>
-          <p:cNvPr id="14" name="TextBox 13"/>
-          <p:cNvSpPr txBox="1"/>
-          <p:nvPr/>
-        </p:nvSpPr>
-        <p:spPr>
-          <a:xfrm>
-            <a:off x="971550" y="5072824"/>
-            <a:ext cx="4857750" cy="95250"/>
-          </a:xfrm>
-          <a:prstGeom prst="rect">
-            <a:avLst/>
-          </a:prstGeom>
-          <a:noFill/>
-        </p:spPr>
-        <p:txBody>
-          <a:bodyPr wrap="square" lIns="0" rIns="0" tIns="0" bIns="0" anchor="t">
-            <a:spAutoFit/>
-          </a:bodyPr>
-          <a:lstStyle/>
-          <a:p>
-            <a:pPr algn="l">
-              <a:lnSpc>
-                <a:spcPct val="130000"/>
-              </a:lnSpc>
-            </a:pPr>
-            <a:r>
-              <a:rPr sz="1580" b="0" i="0">
-                <a:solidFill>
-                  <a:srgbClr val="1A1A1E"/>
-                </a:solidFill>
-                <a:latin typeface="Roboto"/>
-              </a:rPr>
-              <a:t>Sistema dominado por estado.</a:t>
-            </a:r>
-          </a:p>
-        </p:txBody>
-      </p:sp>
-      <p:sp>
-        <p:nvSpPr>
-          <p:cNvPr id="15" name="TextBox 14"/>
-          <p:cNvSpPr txBox="1"/>
-          <p:nvPr/>
-        </p:nvSpPr>
-        <p:spPr>
-          <a:xfrm>
-            <a:off x="6362700" y="2721292"/>
-            <a:ext cx="5143500" cy="182880"/>
-          </a:xfrm>
-          <a:prstGeom prst="rect">
-            <a:avLst/>
-          </a:prstGeom>
-          <a:noFill/>
-        </p:spPr>
-        <p:txBody>
-          <a:bodyPr wrap="square" lIns="0" rIns="0" tIns="0" bIns="0" anchor="t">
-            <a:spAutoFit/>
-          </a:bodyPr>
-          <a:lstStyle/>
-          <a:p>
-            <a:pPr algn="l">
-              <a:lnSpc>
-                <a:spcPct val="120000"/>
-              </a:lnSpc>
-            </a:pPr>
-            <a:r>
-              <a:rPr sz="900" b="1" i="0" spc="120">
-                <a:solidFill>
-                  <a:srgbClr val="E94D1C"/>
-                </a:solidFill>
-                <a:latin typeface="Roboto"/>
-              </a:rPr>
-              <a:t>ONDE NÓS ESTAMOS</a:t>
-            </a:r>
-          </a:p>
-        </p:txBody>
-      </p:sp>
-      <p:sp>
-        <p:nvSpPr>
-          <p:cNvPr id="16" name="Rectangle 15"/>
+          <p:cNvPr id="7" name="Rectangle 6"/>
           <p:cNvSpPr/>
           <p:nvPr/>
         </p:nvSpPr>
         <p:spPr>
           <a:xfrm>
-            <a:off x="6362700" y="2930842"/>
-            <a:ext cx="419100" cy="28575"/>
+            <a:off x="704850" y="3320606"/>
+            <a:ext cx="57150" cy="57150"/>
           </a:xfrm>
           <a:prstGeom prst="rect">
             <a:avLst/>
@@ -25907,14 +25706,14 @@
       </p:sp>
       <p:sp>
         <p:nvSpPr>
-          <p:cNvPr id="17" name="TextBox 16"/>
+          <p:cNvPr id="8" name="TextBox 7"/>
           <p:cNvSpPr txBox="1"/>
           <p:nvPr/>
         </p:nvSpPr>
         <p:spPr>
           <a:xfrm>
-            <a:off x="6362700" y="3226118"/>
-            <a:ext cx="247650" cy="294437"/>
+            <a:off x="971550" y="3216592"/>
+            <a:ext cx="4857750" cy="95250"/>
           </a:xfrm>
           <a:prstGeom prst="rect">
             <a:avLst/>
@@ -25929,30 +25728,74 @@
           <a:p>
             <a:pPr algn="l">
               <a:lnSpc>
-                <a:spcPct val="120000"/>
-              </a:lnSpc>
-            </a:pPr>
-            <a:r>
-              <a:rPr sz="1450" b="1" i="0">
-                <a:solidFill>
-                  <a:srgbClr val="E94D1C"/>
-                </a:solidFill>
-                <a:latin typeface="Roboto"/>
-              </a:rPr>
-              <a:t>//</a:t>
-            </a:r>
-          </a:p>
-        </p:txBody>
-      </p:sp>
-      <p:sp>
-        <p:nvSpPr>
-          <p:cNvPr id="18" name="TextBox 17"/>
+                <a:spcPct val="130000"/>
+              </a:lnSpc>
+            </a:pPr>
+            <a:r>
+              <a:rPr sz="1580" b="0" i="0">
+                <a:solidFill>
+                  <a:srgbClr val="1A1A1E"/>
+                </a:solidFill>
+                <a:latin typeface="Roboto"/>
+              </a:rPr>
+              <a:t>Monolito num servidor que nunca escala.</a:t>
+            </a:r>
+          </a:p>
+        </p:txBody>
+      </p:sp>
+      <p:sp>
+        <p:nvSpPr>
+          <p:cNvPr id="9" name="Rectangle 8"/>
+          <p:cNvSpPr/>
+          <p:nvPr/>
+        </p:nvSpPr>
+        <p:spPr>
+          <a:xfrm>
+            <a:off x="704850" y="3851338"/>
+            <a:ext cx="57150" cy="57150"/>
+          </a:xfrm>
+          <a:prstGeom prst="rect">
+            <a:avLst/>
+          </a:prstGeom>
+          <a:solidFill>
+            <a:srgbClr val="E94D1C"/>
+          </a:solidFill>
+          <a:ln>
+            <a:noFill/>
+          </a:ln>
+          <a:effectLst/>
+        </p:spPr>
+        <p:style>
+          <a:lnRef idx="1">
+            <a:schemeClr val="accent1"/>
+          </a:lnRef>
+          <a:fillRef idx="3">
+            <a:schemeClr val="accent1"/>
+          </a:fillRef>
+          <a:effectRef idx="2">
+            <a:schemeClr val="accent1"/>
+          </a:effectRef>
+          <a:fontRef idx="minor">
+            <a:schemeClr val="lt1"/>
+          </a:fontRef>
+        </p:style>
+        <p:txBody>
+          <a:bodyPr rtlCol="0" anchor="ctr" wrap="square" lIns="0" rIns="0" tIns="0" bIns="0"/>
+          <a:lstStyle/>
+          <a:p>
+            <a:pPr algn="ctr"/>
+          </a:p>
+        </p:txBody>
+      </p:sp>
+      <p:sp>
+        <p:nvSpPr>
+          <p:cNvPr id="10" name="TextBox 9"/>
           <p:cNvSpPr txBox="1"/>
           <p:nvPr/>
         </p:nvSpPr>
         <p:spPr>
           <a:xfrm>
-            <a:off x="6648450" y="3216592"/>
+            <a:off x="971550" y="3747325"/>
             <a:ext cx="4857750" cy="95250"/>
           </a:xfrm>
           <a:prstGeom prst="rect">
@@ -25978,21 +25821,65 @@
                 </a:solidFill>
                 <a:latin typeface="Roboto"/>
               </a:rPr>
-              <a:t>Não temos integração contínua definida nem hospedagem decidida, então dois dos critérios ao lado se aplicam a nós.</a:t>
-            </a:r>
-          </a:p>
-        </p:txBody>
-      </p:sp>
-      <p:sp>
-        <p:nvSpPr>
-          <p:cNvPr id="19" name="TextBox 18"/>
+              <a:t>Time sem integração contínua, que só ganha um passo de build a mais.</a:t>
+            </a:r>
+          </a:p>
+        </p:txBody>
+      </p:sp>
+      <p:sp>
+        <p:nvSpPr>
+          <p:cNvPr id="11" name="Rectangle 10"/>
+          <p:cNvSpPr/>
+          <p:nvPr/>
+        </p:nvSpPr>
+        <p:spPr>
+          <a:xfrm>
+            <a:off x="704850" y="4646104"/>
+            <a:ext cx="57150" cy="57150"/>
+          </a:xfrm>
+          <a:prstGeom prst="rect">
+            <a:avLst/>
+          </a:prstGeom>
+          <a:solidFill>
+            <a:srgbClr val="E94D1C"/>
+          </a:solidFill>
+          <a:ln>
+            <a:noFill/>
+          </a:ln>
+          <a:effectLst/>
+        </p:spPr>
+        <p:style>
+          <a:lnRef idx="1">
+            <a:schemeClr val="accent1"/>
+          </a:lnRef>
+          <a:fillRef idx="3">
+            <a:schemeClr val="accent1"/>
+          </a:fillRef>
+          <a:effectRef idx="2">
+            <a:schemeClr val="accent1"/>
+          </a:effectRef>
+          <a:fontRef idx="minor">
+            <a:schemeClr val="lt1"/>
+          </a:fontRef>
+        </p:style>
+        <p:txBody>
+          <a:bodyPr rtlCol="0" anchor="ctr" wrap="square" lIns="0" rIns="0" tIns="0" bIns="0"/>
+          <a:lstStyle/>
+          <a:p>
+            <a:pPr algn="ctr"/>
+          </a:p>
+        </p:txBody>
+      </p:sp>
+      <p:sp>
+        <p:nvSpPr>
+          <p:cNvPr id="12" name="TextBox 11"/>
           <p:cNvSpPr txBox="1"/>
           <p:nvPr/>
         </p:nvSpPr>
         <p:spPr>
           <a:xfrm>
-            <a:off x="6362700" y="4284916"/>
-            <a:ext cx="247650" cy="294437"/>
+            <a:off x="971550" y="4542092"/>
+            <a:ext cx="4857750" cy="95250"/>
           </a:xfrm>
           <a:prstGeom prst="rect">
             <a:avLst/>
@@ -26007,18 +25894,311 @@
           <a:p>
             <a:pPr algn="l">
               <a:lnSpc>
+                <a:spcPct val="130000"/>
+              </a:lnSpc>
+            </a:pPr>
+            <a:r>
+              <a:rPr sz="1580" b="0" i="0">
+                <a:solidFill>
+                  <a:srgbClr val="1A1A1E"/>
+                </a:solidFill>
+                <a:latin typeface="Roboto"/>
+              </a:rPr>
+              <a:t>Aplicação sensível a latência de cauda.</a:t>
+            </a:r>
+          </a:p>
+        </p:txBody>
+      </p:sp>
+      <p:sp>
+        <p:nvSpPr>
+          <p:cNvPr id="13" name="Rectangle 12"/>
+          <p:cNvSpPr/>
+          <p:nvPr/>
+        </p:nvSpPr>
+        <p:spPr>
+          <a:xfrm>
+            <a:off x="704850" y="5176837"/>
+            <a:ext cx="57150" cy="57150"/>
+          </a:xfrm>
+          <a:prstGeom prst="rect">
+            <a:avLst/>
+          </a:prstGeom>
+          <a:solidFill>
+            <a:srgbClr val="E94D1C"/>
+          </a:solidFill>
+          <a:ln>
+            <a:noFill/>
+          </a:ln>
+          <a:effectLst/>
+        </p:spPr>
+        <p:style>
+          <a:lnRef idx="1">
+            <a:schemeClr val="accent1"/>
+          </a:lnRef>
+          <a:fillRef idx="3">
+            <a:schemeClr val="accent1"/>
+          </a:fillRef>
+          <a:effectRef idx="2">
+            <a:schemeClr val="accent1"/>
+          </a:effectRef>
+          <a:fontRef idx="minor">
+            <a:schemeClr val="lt1"/>
+          </a:fontRef>
+        </p:style>
+        <p:txBody>
+          <a:bodyPr rtlCol="0" anchor="ctr" wrap="square" lIns="0" rIns="0" tIns="0" bIns="0"/>
+          <a:lstStyle/>
+          <a:p>
+            <a:pPr algn="ctr"/>
+          </a:p>
+        </p:txBody>
+      </p:sp>
+      <p:sp>
+        <p:nvSpPr>
+          <p:cNvPr id="14" name="TextBox 13"/>
+          <p:cNvSpPr txBox="1"/>
+          <p:nvPr/>
+        </p:nvSpPr>
+        <p:spPr>
+          <a:xfrm>
+            <a:off x="971550" y="5072824"/>
+            <a:ext cx="4857750" cy="95250"/>
+          </a:xfrm>
+          <a:prstGeom prst="rect">
+            <a:avLst/>
+          </a:prstGeom>
+          <a:noFill/>
+        </p:spPr>
+        <p:txBody>
+          <a:bodyPr wrap="square" lIns="0" rIns="0" tIns="0" bIns="0" anchor="t">
+            <a:spAutoFit/>
+          </a:bodyPr>
+          <a:lstStyle/>
+          <a:p>
+            <a:pPr algn="l">
+              <a:lnSpc>
+                <a:spcPct val="130000"/>
+              </a:lnSpc>
+            </a:pPr>
+            <a:r>
+              <a:rPr sz="1580" b="0" i="0">
+                <a:solidFill>
+                  <a:srgbClr val="1A1A1E"/>
+                </a:solidFill>
+                <a:latin typeface="Roboto"/>
+              </a:rPr>
+              <a:t>Sistema dominado por estado.</a:t>
+            </a:r>
+          </a:p>
+        </p:txBody>
+      </p:sp>
+      <p:sp>
+        <p:nvSpPr>
+          <p:cNvPr id="15" name="TextBox 14"/>
+          <p:cNvSpPr txBox="1"/>
+          <p:nvPr/>
+        </p:nvSpPr>
+        <p:spPr>
+          <a:xfrm>
+            <a:off x="6362700" y="2721292"/>
+            <a:ext cx="5143500" cy="182880"/>
+          </a:xfrm>
+          <a:prstGeom prst="rect">
+            <a:avLst/>
+          </a:prstGeom>
+          <a:noFill/>
+        </p:spPr>
+        <p:txBody>
+          <a:bodyPr wrap="square" lIns="0" rIns="0" tIns="0" bIns="0" anchor="t">
+            <a:spAutoFit/>
+          </a:bodyPr>
+          <a:lstStyle/>
+          <a:p>
+            <a:pPr algn="l">
+              <a:lnSpc>
                 <a:spcPct val="120000"/>
               </a:lnSpc>
             </a:pPr>
             <a:r>
-              <a:rPr sz="1450" b="1" i="0">
+              <a:rPr sz="900" b="1" i="0" spc="120">
                 <a:solidFill>
                   <a:srgbClr val="E94D1C"/>
                 </a:solidFill>
                 <a:latin typeface="Roboto"/>
               </a:rPr>
-              <a:t>//</a:t>
-            </a:r>
+              <a:t>ONDE NÓS ESTAMOS</a:t>
+            </a:r>
+          </a:p>
+        </p:txBody>
+      </p:sp>
+      <p:sp>
+        <p:nvSpPr>
+          <p:cNvPr id="16" name="Rectangle 15"/>
+          <p:cNvSpPr/>
+          <p:nvPr/>
+        </p:nvSpPr>
+        <p:spPr>
+          <a:xfrm>
+            <a:off x="6362700" y="2930842"/>
+            <a:ext cx="419100" cy="28575"/>
+          </a:xfrm>
+          <a:prstGeom prst="rect">
+            <a:avLst/>
+          </a:prstGeom>
+          <a:solidFill>
+            <a:srgbClr val="E94D1C"/>
+          </a:solidFill>
+          <a:ln>
+            <a:noFill/>
+          </a:ln>
+          <a:effectLst/>
+        </p:spPr>
+        <p:style>
+          <a:lnRef idx="1">
+            <a:schemeClr val="accent1"/>
+          </a:lnRef>
+          <a:fillRef idx="3">
+            <a:schemeClr val="accent1"/>
+          </a:fillRef>
+          <a:effectRef idx="2">
+            <a:schemeClr val="accent1"/>
+          </a:effectRef>
+          <a:fontRef idx="minor">
+            <a:schemeClr val="lt1"/>
+          </a:fontRef>
+        </p:style>
+        <p:txBody>
+          <a:bodyPr rtlCol="0" anchor="ctr" wrap="square" lIns="0" rIns="0" tIns="0" bIns="0"/>
+          <a:lstStyle/>
+          <a:p>
+            <a:pPr algn="ctr"/>
+          </a:p>
+        </p:txBody>
+      </p:sp>
+      <p:sp>
+        <p:nvSpPr>
+          <p:cNvPr id="17" name="Rectangle 16"/>
+          <p:cNvSpPr/>
+          <p:nvPr/>
+        </p:nvSpPr>
+        <p:spPr>
+          <a:xfrm>
+            <a:off x="6381750" y="3320606"/>
+            <a:ext cx="57150" cy="57150"/>
+          </a:xfrm>
+          <a:prstGeom prst="rect">
+            <a:avLst/>
+          </a:prstGeom>
+          <a:solidFill>
+            <a:srgbClr val="E94D1C"/>
+          </a:solidFill>
+          <a:ln>
+            <a:noFill/>
+          </a:ln>
+          <a:effectLst/>
+        </p:spPr>
+        <p:style>
+          <a:lnRef idx="1">
+            <a:schemeClr val="accent1"/>
+          </a:lnRef>
+          <a:fillRef idx="3">
+            <a:schemeClr val="accent1"/>
+          </a:fillRef>
+          <a:effectRef idx="2">
+            <a:schemeClr val="accent1"/>
+          </a:effectRef>
+          <a:fontRef idx="minor">
+            <a:schemeClr val="lt1"/>
+          </a:fontRef>
+        </p:style>
+        <p:txBody>
+          <a:bodyPr rtlCol="0" anchor="ctr" wrap="square" lIns="0" rIns="0" tIns="0" bIns="0"/>
+          <a:lstStyle/>
+          <a:p>
+            <a:pPr algn="ctr"/>
+          </a:p>
+        </p:txBody>
+      </p:sp>
+      <p:sp>
+        <p:nvSpPr>
+          <p:cNvPr id="18" name="TextBox 17"/>
+          <p:cNvSpPr txBox="1"/>
+          <p:nvPr/>
+        </p:nvSpPr>
+        <p:spPr>
+          <a:xfrm>
+            <a:off x="6648450" y="3216592"/>
+            <a:ext cx="4857750" cy="95250"/>
+          </a:xfrm>
+          <a:prstGeom prst="rect">
+            <a:avLst/>
+          </a:prstGeom>
+          <a:noFill/>
+        </p:spPr>
+        <p:txBody>
+          <a:bodyPr wrap="square" lIns="0" rIns="0" tIns="0" bIns="0" anchor="t">
+            <a:spAutoFit/>
+          </a:bodyPr>
+          <a:lstStyle/>
+          <a:p>
+            <a:pPr algn="l">
+              <a:lnSpc>
+                <a:spcPct val="130000"/>
+              </a:lnSpc>
+            </a:pPr>
+            <a:r>
+              <a:rPr sz="1580" b="0" i="0">
+                <a:solidFill>
+                  <a:srgbClr val="1A1A1E"/>
+                </a:solidFill>
+                <a:latin typeface="Roboto"/>
+              </a:rPr>
+              <a:t>Não temos integração contínua definida nem hospedagem decidida, então dois dos critérios ao lado se aplicam a nós.</a:t>
+            </a:r>
+          </a:p>
+        </p:txBody>
+      </p:sp>
+      <p:sp>
+        <p:nvSpPr>
+          <p:cNvPr id="19" name="Rectangle 18"/>
+          <p:cNvSpPr/>
+          <p:nvPr/>
+        </p:nvSpPr>
+        <p:spPr>
+          <a:xfrm>
+            <a:off x="6381750" y="4379404"/>
+            <a:ext cx="57150" cy="57150"/>
+          </a:xfrm>
+          <a:prstGeom prst="rect">
+            <a:avLst/>
+          </a:prstGeom>
+          <a:solidFill>
+            <a:srgbClr val="E94D1C"/>
+          </a:solidFill>
+          <a:ln>
+            <a:noFill/>
+          </a:ln>
+          <a:effectLst/>
+        </p:spPr>
+        <p:style>
+          <a:lnRef idx="1">
+            <a:schemeClr val="accent1"/>
+          </a:lnRef>
+          <a:fillRef idx="3">
+            <a:schemeClr val="accent1"/>
+          </a:fillRef>
+          <a:effectRef idx="2">
+            <a:schemeClr val="accent1"/>
+          </a:effectRef>
+          <a:fontRef idx="minor">
+            <a:schemeClr val="lt1"/>
+          </a:fontRef>
+        </p:style>
+        <p:txBody>
+          <a:bodyPr rtlCol="0" anchor="ctr" wrap="square" lIns="0" rIns="0" tIns="0" bIns="0"/>
+          <a:lstStyle/>
+          <a:p>
+            <a:pPr algn="ctr"/>
           </a:p>
         </p:txBody>
       </p:sp>
@@ -26368,443 +26548,14 @@
       </p:sp>
       <p:sp>
         <p:nvSpPr>
-          <p:cNvPr id="7" name="TextBox 6"/>
-          <p:cNvSpPr txBox="1"/>
-          <p:nvPr/>
-        </p:nvSpPr>
-        <p:spPr>
-          <a:xfrm>
-            <a:off x="685800" y="2622423"/>
-            <a:ext cx="247650" cy="252374"/>
-          </a:xfrm>
-          <a:prstGeom prst="rect">
-            <a:avLst/>
-          </a:prstGeom>
-          <a:noFill/>
-        </p:spPr>
-        <p:txBody>
-          <a:bodyPr wrap="square" lIns="0" rIns="0" tIns="0" bIns="0" anchor="t">
-            <a:spAutoFit/>
-          </a:bodyPr>
-          <a:lstStyle/>
-          <a:p>
-            <a:pPr algn="l">
-              <a:lnSpc>
-                <a:spcPct val="120000"/>
-              </a:lnSpc>
-            </a:pPr>
-            <a:r>
-              <a:rPr sz="1240" b="1" i="0">
-                <a:solidFill>
-                  <a:srgbClr val="E94D1C"/>
-                </a:solidFill>
-                <a:latin typeface="Roboto"/>
-              </a:rPr>
-              <a:t>//</a:t>
-            </a:r>
-          </a:p>
-        </p:txBody>
-      </p:sp>
-      <p:sp>
-        <p:nvSpPr>
-          <p:cNvPr id="8" name="TextBox 7"/>
-          <p:cNvSpPr txBox="1"/>
-          <p:nvPr/>
-        </p:nvSpPr>
-        <p:spPr>
-          <a:xfrm>
-            <a:off x="971550" y="2612898"/>
-            <a:ext cx="4857750" cy="95250"/>
-          </a:xfrm>
-          <a:prstGeom prst="rect">
-            <a:avLst/>
-          </a:prstGeom>
-          <a:noFill/>
-        </p:spPr>
-        <p:txBody>
-          <a:bodyPr wrap="square" lIns="0" rIns="0" tIns="0" bIns="0" anchor="t">
-            <a:spAutoFit/>
-          </a:bodyPr>
-          <a:lstStyle/>
-          <a:p>
-            <a:pPr algn="l">
-              <a:lnSpc>
-                <a:spcPct val="130000"/>
-              </a:lnSpc>
-            </a:pPr>
-            <a:r>
-              <a:rPr sz="1350" b="0" i="0">
-                <a:solidFill>
-                  <a:srgbClr val="1A1A1E"/>
-                </a:solidFill>
-                <a:latin typeface="Roboto"/>
-              </a:rPr>
-              <a:t>Cada imagem tem uma responsabilidade e uma fronteira declarada, que é a modularidade e a reusabilidade da Aula 03.</a:t>
-            </a:r>
-          </a:p>
-        </p:txBody>
-      </p:sp>
-      <p:sp>
-        <p:nvSpPr>
-          <p:cNvPr id="9" name="TextBox 8"/>
-          <p:cNvSpPr txBox="1"/>
-          <p:nvPr/>
-        </p:nvSpPr>
-        <p:spPr>
-          <a:xfrm>
-            <a:off x="685800" y="3510915"/>
-            <a:ext cx="247650" cy="252374"/>
-          </a:xfrm>
-          <a:prstGeom prst="rect">
-            <a:avLst/>
-          </a:prstGeom>
-          <a:noFill/>
-        </p:spPr>
-        <p:txBody>
-          <a:bodyPr wrap="square" lIns="0" rIns="0" tIns="0" bIns="0" anchor="t">
-            <a:spAutoFit/>
-          </a:bodyPr>
-          <a:lstStyle/>
-          <a:p>
-            <a:pPr algn="l">
-              <a:lnSpc>
-                <a:spcPct val="120000"/>
-              </a:lnSpc>
-            </a:pPr>
-            <a:r>
-              <a:rPr sz="1240" b="1" i="0">
-                <a:solidFill>
-                  <a:srgbClr val="E94D1C"/>
-                </a:solidFill>
-                <a:latin typeface="Roboto"/>
-              </a:rPr>
-              <a:t>//</a:t>
-            </a:r>
-          </a:p>
-        </p:txBody>
-      </p:sp>
-      <p:sp>
-        <p:nvSpPr>
-          <p:cNvPr id="10" name="TextBox 9"/>
-          <p:cNvSpPr txBox="1"/>
-          <p:nvPr/>
-        </p:nvSpPr>
-        <p:spPr>
-          <a:xfrm>
-            <a:off x="971550" y="3501390"/>
-            <a:ext cx="4857750" cy="95250"/>
-          </a:xfrm>
-          <a:prstGeom prst="rect">
-            <a:avLst/>
-          </a:prstGeom>
-          <a:noFill/>
-        </p:spPr>
-        <p:txBody>
-          <a:bodyPr wrap="square" lIns="0" rIns="0" tIns="0" bIns="0" anchor="t">
-            <a:spAutoFit/>
-          </a:bodyPr>
-          <a:lstStyle/>
-          <a:p>
-            <a:pPr algn="l">
-              <a:lnSpc>
-                <a:spcPct val="130000"/>
-              </a:lnSpc>
-            </a:pPr>
-            <a:r>
-              <a:rPr sz="1350" b="0" i="0">
-                <a:solidFill>
-                  <a:srgbClr val="1A1A1E"/>
-                </a:solidFill>
-                <a:latin typeface="Roboto"/>
-              </a:rPr>
-              <a:t>O ambiente vira arquivo legível, versionado junto com o código, e com isso ganha compreensibilidade.</a:t>
-            </a:r>
-          </a:p>
-        </p:txBody>
-      </p:sp>
-      <p:sp>
-        <p:nvSpPr>
-          <p:cNvPr id="11" name="TextBox 10"/>
-          <p:cNvSpPr txBox="1"/>
-          <p:nvPr/>
-        </p:nvSpPr>
-        <p:spPr>
-          <a:xfrm>
-            <a:off x="685800" y="4173093"/>
-            <a:ext cx="247650" cy="252374"/>
-          </a:xfrm>
-          <a:prstGeom prst="rect">
-            <a:avLst/>
-          </a:prstGeom>
-          <a:noFill/>
-        </p:spPr>
-        <p:txBody>
-          <a:bodyPr wrap="square" lIns="0" rIns="0" tIns="0" bIns="0" anchor="t">
-            <a:spAutoFit/>
-          </a:bodyPr>
-          <a:lstStyle/>
-          <a:p>
-            <a:pPr algn="l">
-              <a:lnSpc>
-                <a:spcPct val="120000"/>
-              </a:lnSpc>
-            </a:pPr>
-            <a:r>
-              <a:rPr sz="1240" b="1" i="0">
-                <a:solidFill>
-                  <a:srgbClr val="E94D1C"/>
-                </a:solidFill>
-                <a:latin typeface="Roboto"/>
-              </a:rPr>
-              <a:t>//</a:t>
-            </a:r>
-          </a:p>
-        </p:txBody>
-      </p:sp>
-      <p:sp>
-        <p:nvSpPr>
-          <p:cNvPr id="12" name="TextBox 11"/>
-          <p:cNvSpPr txBox="1"/>
-          <p:nvPr/>
-        </p:nvSpPr>
-        <p:spPr>
-          <a:xfrm>
-            <a:off x="971550" y="4163568"/>
-            <a:ext cx="4857750" cy="95250"/>
-          </a:xfrm>
-          <a:prstGeom prst="rect">
-            <a:avLst/>
-          </a:prstGeom>
-          <a:noFill/>
-        </p:spPr>
-        <p:txBody>
-          <a:bodyPr wrap="square" lIns="0" rIns="0" tIns="0" bIns="0" anchor="t">
-            <a:spAutoFit/>
-          </a:bodyPr>
-          <a:lstStyle/>
-          <a:p>
-            <a:pPr algn="l">
-              <a:lnSpc>
-                <a:spcPct val="130000"/>
-              </a:lnSpc>
-            </a:pPr>
-            <a:r>
-              <a:rPr sz="1350" b="0" i="0">
-                <a:solidFill>
-                  <a:srgbClr val="1A1A1E"/>
-                </a:solidFill>
-                <a:latin typeface="Roboto"/>
-              </a:rPr>
-              <a:t>Extensibilidade sai barata, porque trocar runtime ou banco é editar uma linha de arquivo.</a:t>
-            </a:r>
-          </a:p>
-        </p:txBody>
-      </p:sp>
-      <p:sp>
-        <p:nvSpPr>
-          <p:cNvPr id="13" name="TextBox 12"/>
-          <p:cNvSpPr txBox="1"/>
-          <p:nvPr/>
-        </p:nvSpPr>
-        <p:spPr>
-          <a:xfrm>
-            <a:off x="685800" y="4835271"/>
-            <a:ext cx="247650" cy="252374"/>
-          </a:xfrm>
-          <a:prstGeom prst="rect">
-            <a:avLst/>
-          </a:prstGeom>
-          <a:noFill/>
-        </p:spPr>
-        <p:txBody>
-          <a:bodyPr wrap="square" lIns="0" rIns="0" tIns="0" bIns="0" anchor="t">
-            <a:spAutoFit/>
-          </a:bodyPr>
-          <a:lstStyle/>
-          <a:p>
-            <a:pPr algn="l">
-              <a:lnSpc>
-                <a:spcPct val="120000"/>
-              </a:lnSpc>
-            </a:pPr>
-            <a:r>
-              <a:rPr sz="1240" b="1" i="0">
-                <a:solidFill>
-                  <a:srgbClr val="E94D1C"/>
-                </a:solidFill>
-                <a:latin typeface="Roboto"/>
-              </a:rPr>
-              <a:t>//</a:t>
-            </a:r>
-          </a:p>
-        </p:txBody>
-      </p:sp>
-      <p:sp>
-        <p:nvSpPr>
-          <p:cNvPr id="14" name="TextBox 13"/>
-          <p:cNvSpPr txBox="1"/>
-          <p:nvPr/>
-        </p:nvSpPr>
-        <p:spPr>
-          <a:xfrm>
-            <a:off x="971550" y="4825746"/>
-            <a:ext cx="4857750" cy="95250"/>
-          </a:xfrm>
-          <a:prstGeom prst="rect">
-            <a:avLst/>
-          </a:prstGeom>
-          <a:noFill/>
-        </p:spPr>
-        <p:txBody>
-          <a:bodyPr wrap="square" lIns="0" rIns="0" tIns="0" bIns="0" anchor="t">
-            <a:spAutoFit/>
-          </a:bodyPr>
-          <a:lstStyle/>
-          <a:p>
-            <a:pPr algn="l">
-              <a:lnSpc>
-                <a:spcPct val="130000"/>
-              </a:lnSpc>
-            </a:pPr>
-            <a:r>
-              <a:rPr sz="1350" b="0" i="0">
-                <a:solidFill>
-                  <a:srgbClr val="1A1A1E"/>
-                </a:solidFill>
-                <a:latin typeface="Roboto"/>
-              </a:rPr>
-              <a:t>A mesma imagem atravessa notebook, pipeline e a demonstração funcional do T3, o que ajuda a manutenibilidade.</a:t>
-            </a:r>
-          </a:p>
-        </p:txBody>
-      </p:sp>
-      <p:sp>
-        <p:nvSpPr>
-          <p:cNvPr id="15" name="TextBox 14"/>
-          <p:cNvSpPr txBox="1"/>
-          <p:nvPr/>
-        </p:nvSpPr>
-        <p:spPr>
-          <a:xfrm>
-            <a:off x="685800" y="5497449"/>
-            <a:ext cx="247650" cy="252374"/>
-          </a:xfrm>
-          <a:prstGeom prst="rect">
-            <a:avLst/>
-          </a:prstGeom>
-          <a:noFill/>
-        </p:spPr>
-        <p:txBody>
-          <a:bodyPr wrap="square" lIns="0" rIns="0" tIns="0" bIns="0" anchor="t">
-            <a:spAutoFit/>
-          </a:bodyPr>
-          <a:lstStyle/>
-          <a:p>
-            <a:pPr algn="l">
-              <a:lnSpc>
-                <a:spcPct val="120000"/>
-              </a:lnSpc>
-            </a:pPr>
-            <a:r>
-              <a:rPr sz="1240" b="1" i="0">
-                <a:solidFill>
-                  <a:srgbClr val="E94D1C"/>
-                </a:solidFill>
-                <a:latin typeface="Roboto"/>
-              </a:rPr>
-              <a:t>//</a:t>
-            </a:r>
-          </a:p>
-        </p:txBody>
-      </p:sp>
-      <p:sp>
-        <p:nvSpPr>
-          <p:cNvPr id="16" name="TextBox 15"/>
-          <p:cNvSpPr txBox="1"/>
-          <p:nvPr/>
-        </p:nvSpPr>
-        <p:spPr>
-          <a:xfrm>
-            <a:off x="971550" y="5487924"/>
-            <a:ext cx="4857750" cy="95250"/>
-          </a:xfrm>
-          <a:prstGeom prst="rect">
-            <a:avLst/>
-          </a:prstGeom>
-          <a:noFill/>
-        </p:spPr>
-        <p:txBody>
-          <a:bodyPr wrap="square" lIns="0" rIns="0" tIns="0" bIns="0" anchor="t">
-            <a:spAutoFit/>
-          </a:bodyPr>
-          <a:lstStyle/>
-          <a:p>
-            <a:pPr algn="l">
-              <a:lnSpc>
-                <a:spcPct val="130000"/>
-              </a:lnSpc>
-            </a:pPr>
-            <a:r>
-              <a:rPr sz="1350" b="0" i="0">
-                <a:solidFill>
-                  <a:srgbClr val="1A1A1E"/>
-                </a:solidFill>
-                <a:latin typeface="Roboto"/>
-              </a:rPr>
-              <a:t>A escalabilidade fica seletiva, e só vale se a aplicação for mesmo sem estado.</a:t>
-            </a:r>
-          </a:p>
-        </p:txBody>
-      </p:sp>
-      <p:sp>
-        <p:nvSpPr>
-          <p:cNvPr id="17" name="TextBox 16"/>
-          <p:cNvSpPr txBox="1"/>
-          <p:nvPr/>
-        </p:nvSpPr>
-        <p:spPr>
-          <a:xfrm>
-            <a:off x="6362700" y="2117598"/>
-            <a:ext cx="5143500" cy="182880"/>
-          </a:xfrm>
-          <a:prstGeom prst="rect">
-            <a:avLst/>
-          </a:prstGeom>
-          <a:noFill/>
-        </p:spPr>
-        <p:txBody>
-          <a:bodyPr wrap="square" lIns="0" rIns="0" tIns="0" bIns="0" anchor="t">
-            <a:spAutoFit/>
-          </a:bodyPr>
-          <a:lstStyle/>
-          <a:p>
-            <a:pPr algn="l">
-              <a:lnSpc>
-                <a:spcPct val="120000"/>
-              </a:lnSpc>
-            </a:pPr>
-            <a:r>
-              <a:rPr sz="900" b="1" i="0" spc="120">
-                <a:solidFill>
-                  <a:srgbClr val="E94D1C"/>
-                </a:solidFill>
-                <a:latin typeface="Roboto"/>
-              </a:rPr>
-              <a:t>CUSTA</a:t>
-            </a:r>
-          </a:p>
-        </p:txBody>
-      </p:sp>
-      <p:sp>
-        <p:nvSpPr>
-          <p:cNvPr id="18" name="Rectangle 17"/>
+          <p:cNvPr id="7" name="Rectangle 6"/>
           <p:cNvSpPr/>
           <p:nvPr/>
         </p:nvSpPr>
         <p:spPr>
           <a:xfrm>
-            <a:off x="6362700" y="2327148"/>
-            <a:ext cx="419100" cy="28575"/>
+            <a:off x="704850" y="2702052"/>
+            <a:ext cx="57150" cy="57150"/>
           </a:xfrm>
           <a:prstGeom prst="rect">
             <a:avLst/>
@@ -26841,14 +26592,14 @@
       </p:sp>
       <p:sp>
         <p:nvSpPr>
-          <p:cNvPr id="19" name="TextBox 18"/>
+          <p:cNvPr id="8" name="TextBox 7"/>
           <p:cNvSpPr txBox="1"/>
           <p:nvPr/>
         </p:nvSpPr>
         <p:spPr>
           <a:xfrm>
-            <a:off x="6362700" y="2622423"/>
-            <a:ext cx="247650" cy="252374"/>
+            <a:off x="971550" y="2612898"/>
+            <a:ext cx="4857750" cy="95250"/>
           </a:xfrm>
           <a:prstGeom prst="rect">
             <a:avLst/>
@@ -26863,30 +26614,74 @@
           <a:p>
             <a:pPr algn="l">
               <a:lnSpc>
-                <a:spcPct val="120000"/>
-              </a:lnSpc>
-            </a:pPr>
-            <a:r>
-              <a:rPr sz="1240" b="1" i="0">
-                <a:solidFill>
-                  <a:srgbClr val="E94D1C"/>
-                </a:solidFill>
-                <a:latin typeface="Roboto"/>
-              </a:rPr>
-              <a:t>//</a:t>
-            </a:r>
-          </a:p>
-        </p:txBody>
-      </p:sp>
-      <p:sp>
-        <p:nvSpPr>
-          <p:cNvPr id="20" name="TextBox 19"/>
+                <a:spcPct val="130000"/>
+              </a:lnSpc>
+            </a:pPr>
+            <a:r>
+              <a:rPr sz="1350" b="0" i="0">
+                <a:solidFill>
+                  <a:srgbClr val="1A1A1E"/>
+                </a:solidFill>
+                <a:latin typeface="Roboto"/>
+              </a:rPr>
+              <a:t>Cada imagem tem uma responsabilidade e uma fronteira declarada, que é a modularidade e a reusabilidade da Aula 03.</a:t>
+            </a:r>
+          </a:p>
+        </p:txBody>
+      </p:sp>
+      <p:sp>
+        <p:nvSpPr>
+          <p:cNvPr id="9" name="Rectangle 8"/>
+          <p:cNvSpPr/>
+          <p:nvPr/>
+        </p:nvSpPr>
+        <p:spPr>
+          <a:xfrm>
+            <a:off x="704850" y="3590544"/>
+            <a:ext cx="57150" cy="57150"/>
+          </a:xfrm>
+          <a:prstGeom prst="rect">
+            <a:avLst/>
+          </a:prstGeom>
+          <a:solidFill>
+            <a:srgbClr val="E94D1C"/>
+          </a:solidFill>
+          <a:ln>
+            <a:noFill/>
+          </a:ln>
+          <a:effectLst/>
+        </p:spPr>
+        <p:style>
+          <a:lnRef idx="1">
+            <a:schemeClr val="accent1"/>
+          </a:lnRef>
+          <a:fillRef idx="3">
+            <a:schemeClr val="accent1"/>
+          </a:fillRef>
+          <a:effectRef idx="2">
+            <a:schemeClr val="accent1"/>
+          </a:effectRef>
+          <a:fontRef idx="minor">
+            <a:schemeClr val="lt1"/>
+          </a:fontRef>
+        </p:style>
+        <p:txBody>
+          <a:bodyPr rtlCol="0" anchor="ctr" wrap="square" lIns="0" rIns="0" tIns="0" bIns="0"/>
+          <a:lstStyle/>
+          <a:p>
+            <a:pPr algn="ctr"/>
+          </a:p>
+        </p:txBody>
+      </p:sp>
+      <p:sp>
+        <p:nvSpPr>
+          <p:cNvPr id="10" name="TextBox 9"/>
           <p:cNvSpPr txBox="1"/>
           <p:nvPr/>
         </p:nvSpPr>
         <p:spPr>
           <a:xfrm>
-            <a:off x="6648450" y="2612898"/>
+            <a:off x="971550" y="3501390"/>
             <a:ext cx="4857750" cy="95250"/>
           </a:xfrm>
           <a:prstGeom prst="rect">
@@ -26912,21 +26707,65 @@
                 </a:solidFill>
                 <a:latin typeface="Roboto"/>
               </a:rPr>
-              <a:t>Segurança ganha isolamento e herda uma superfície nova, que é a imagem base e o privilégio de execução.</a:t>
-            </a:r>
-          </a:p>
-        </p:txBody>
-      </p:sp>
-      <p:sp>
-        <p:nvSpPr>
-          <p:cNvPr id="21" name="TextBox 20"/>
+              <a:t>O ambiente vira arquivo legível, versionado junto com o código, e com isso ganha compreensibilidade.</a:t>
+            </a:r>
+          </a:p>
+        </p:txBody>
+      </p:sp>
+      <p:sp>
+        <p:nvSpPr>
+          <p:cNvPr id="11" name="Rectangle 10"/>
+          <p:cNvSpPr/>
+          <p:nvPr/>
+        </p:nvSpPr>
+        <p:spPr>
+          <a:xfrm>
+            <a:off x="704850" y="4252722"/>
+            <a:ext cx="57150" cy="57150"/>
+          </a:xfrm>
+          <a:prstGeom prst="rect">
+            <a:avLst/>
+          </a:prstGeom>
+          <a:solidFill>
+            <a:srgbClr val="E94D1C"/>
+          </a:solidFill>
+          <a:ln>
+            <a:noFill/>
+          </a:ln>
+          <a:effectLst/>
+        </p:spPr>
+        <p:style>
+          <a:lnRef idx="1">
+            <a:schemeClr val="accent1"/>
+          </a:lnRef>
+          <a:fillRef idx="3">
+            <a:schemeClr val="accent1"/>
+          </a:fillRef>
+          <a:effectRef idx="2">
+            <a:schemeClr val="accent1"/>
+          </a:effectRef>
+          <a:fontRef idx="minor">
+            <a:schemeClr val="lt1"/>
+          </a:fontRef>
+        </p:style>
+        <p:txBody>
+          <a:bodyPr rtlCol="0" anchor="ctr" wrap="square" lIns="0" rIns="0" tIns="0" bIns="0"/>
+          <a:lstStyle/>
+          <a:p>
+            <a:pPr algn="ctr"/>
+          </a:p>
+        </p:txBody>
+      </p:sp>
+      <p:sp>
+        <p:nvSpPr>
+          <p:cNvPr id="12" name="TextBox 11"/>
           <p:cNvSpPr txBox="1"/>
           <p:nvPr/>
         </p:nvSpPr>
         <p:spPr>
           <a:xfrm>
-            <a:off x="6362700" y="3284601"/>
-            <a:ext cx="247650" cy="252374"/>
+            <a:off x="971550" y="4163568"/>
+            <a:ext cx="4857750" cy="95250"/>
           </a:xfrm>
           <a:prstGeom prst="rect">
             <a:avLst/>
@@ -26941,18 +26780,394 @@
           <a:p>
             <a:pPr algn="l">
               <a:lnSpc>
+                <a:spcPct val="130000"/>
+              </a:lnSpc>
+            </a:pPr>
+            <a:r>
+              <a:rPr sz="1350" b="0" i="0">
+                <a:solidFill>
+                  <a:srgbClr val="1A1A1E"/>
+                </a:solidFill>
+                <a:latin typeface="Roboto"/>
+              </a:rPr>
+              <a:t>Extensibilidade sai barata, porque trocar runtime ou banco é editar uma linha de arquivo.</a:t>
+            </a:r>
+          </a:p>
+        </p:txBody>
+      </p:sp>
+      <p:sp>
+        <p:nvSpPr>
+          <p:cNvPr id="13" name="Rectangle 12"/>
+          <p:cNvSpPr/>
+          <p:nvPr/>
+        </p:nvSpPr>
+        <p:spPr>
+          <a:xfrm>
+            <a:off x="704850" y="4914900"/>
+            <a:ext cx="57150" cy="57150"/>
+          </a:xfrm>
+          <a:prstGeom prst="rect">
+            <a:avLst/>
+          </a:prstGeom>
+          <a:solidFill>
+            <a:srgbClr val="E94D1C"/>
+          </a:solidFill>
+          <a:ln>
+            <a:noFill/>
+          </a:ln>
+          <a:effectLst/>
+        </p:spPr>
+        <p:style>
+          <a:lnRef idx="1">
+            <a:schemeClr val="accent1"/>
+          </a:lnRef>
+          <a:fillRef idx="3">
+            <a:schemeClr val="accent1"/>
+          </a:fillRef>
+          <a:effectRef idx="2">
+            <a:schemeClr val="accent1"/>
+          </a:effectRef>
+          <a:fontRef idx="minor">
+            <a:schemeClr val="lt1"/>
+          </a:fontRef>
+        </p:style>
+        <p:txBody>
+          <a:bodyPr rtlCol="0" anchor="ctr" wrap="square" lIns="0" rIns="0" tIns="0" bIns="0"/>
+          <a:lstStyle/>
+          <a:p>
+            <a:pPr algn="ctr"/>
+          </a:p>
+        </p:txBody>
+      </p:sp>
+      <p:sp>
+        <p:nvSpPr>
+          <p:cNvPr id="14" name="TextBox 13"/>
+          <p:cNvSpPr txBox="1"/>
+          <p:nvPr/>
+        </p:nvSpPr>
+        <p:spPr>
+          <a:xfrm>
+            <a:off x="971550" y="4825746"/>
+            <a:ext cx="4857750" cy="95250"/>
+          </a:xfrm>
+          <a:prstGeom prst="rect">
+            <a:avLst/>
+          </a:prstGeom>
+          <a:noFill/>
+        </p:spPr>
+        <p:txBody>
+          <a:bodyPr wrap="square" lIns="0" rIns="0" tIns="0" bIns="0" anchor="t">
+            <a:spAutoFit/>
+          </a:bodyPr>
+          <a:lstStyle/>
+          <a:p>
+            <a:pPr algn="l">
+              <a:lnSpc>
+                <a:spcPct val="130000"/>
+              </a:lnSpc>
+            </a:pPr>
+            <a:r>
+              <a:rPr sz="1350" b="0" i="0">
+                <a:solidFill>
+                  <a:srgbClr val="1A1A1E"/>
+                </a:solidFill>
+                <a:latin typeface="Roboto"/>
+              </a:rPr>
+              <a:t>A mesma imagem atravessa notebook, pipeline e a demonstração funcional do T3, o que ajuda a manutenibilidade.</a:t>
+            </a:r>
+          </a:p>
+        </p:txBody>
+      </p:sp>
+      <p:sp>
+        <p:nvSpPr>
+          <p:cNvPr id="15" name="Rectangle 14"/>
+          <p:cNvSpPr/>
+          <p:nvPr/>
+        </p:nvSpPr>
+        <p:spPr>
+          <a:xfrm>
+            <a:off x="704850" y="5577078"/>
+            <a:ext cx="57150" cy="57150"/>
+          </a:xfrm>
+          <a:prstGeom prst="rect">
+            <a:avLst/>
+          </a:prstGeom>
+          <a:solidFill>
+            <a:srgbClr val="E94D1C"/>
+          </a:solidFill>
+          <a:ln>
+            <a:noFill/>
+          </a:ln>
+          <a:effectLst/>
+        </p:spPr>
+        <p:style>
+          <a:lnRef idx="1">
+            <a:schemeClr val="accent1"/>
+          </a:lnRef>
+          <a:fillRef idx="3">
+            <a:schemeClr val="accent1"/>
+          </a:fillRef>
+          <a:effectRef idx="2">
+            <a:schemeClr val="accent1"/>
+          </a:effectRef>
+          <a:fontRef idx="minor">
+            <a:schemeClr val="lt1"/>
+          </a:fontRef>
+        </p:style>
+        <p:txBody>
+          <a:bodyPr rtlCol="0" anchor="ctr" wrap="square" lIns="0" rIns="0" tIns="0" bIns="0"/>
+          <a:lstStyle/>
+          <a:p>
+            <a:pPr algn="ctr"/>
+          </a:p>
+        </p:txBody>
+      </p:sp>
+      <p:sp>
+        <p:nvSpPr>
+          <p:cNvPr id="16" name="TextBox 15"/>
+          <p:cNvSpPr txBox="1"/>
+          <p:nvPr/>
+        </p:nvSpPr>
+        <p:spPr>
+          <a:xfrm>
+            <a:off x="971550" y="5487924"/>
+            <a:ext cx="4857750" cy="95250"/>
+          </a:xfrm>
+          <a:prstGeom prst="rect">
+            <a:avLst/>
+          </a:prstGeom>
+          <a:noFill/>
+        </p:spPr>
+        <p:txBody>
+          <a:bodyPr wrap="square" lIns="0" rIns="0" tIns="0" bIns="0" anchor="t">
+            <a:spAutoFit/>
+          </a:bodyPr>
+          <a:lstStyle/>
+          <a:p>
+            <a:pPr algn="l">
+              <a:lnSpc>
+                <a:spcPct val="130000"/>
+              </a:lnSpc>
+            </a:pPr>
+            <a:r>
+              <a:rPr sz="1350" b="0" i="0">
+                <a:solidFill>
+                  <a:srgbClr val="1A1A1E"/>
+                </a:solidFill>
+                <a:latin typeface="Roboto"/>
+              </a:rPr>
+              <a:t>A escalabilidade fica seletiva, e só vale se a aplicação for mesmo sem estado.</a:t>
+            </a:r>
+          </a:p>
+        </p:txBody>
+      </p:sp>
+      <p:sp>
+        <p:nvSpPr>
+          <p:cNvPr id="17" name="TextBox 16"/>
+          <p:cNvSpPr txBox="1"/>
+          <p:nvPr/>
+        </p:nvSpPr>
+        <p:spPr>
+          <a:xfrm>
+            <a:off x="6362700" y="2117598"/>
+            <a:ext cx="5143500" cy="182880"/>
+          </a:xfrm>
+          <a:prstGeom prst="rect">
+            <a:avLst/>
+          </a:prstGeom>
+          <a:noFill/>
+        </p:spPr>
+        <p:txBody>
+          <a:bodyPr wrap="square" lIns="0" rIns="0" tIns="0" bIns="0" anchor="t">
+            <a:spAutoFit/>
+          </a:bodyPr>
+          <a:lstStyle/>
+          <a:p>
+            <a:pPr algn="l">
+              <a:lnSpc>
                 <a:spcPct val="120000"/>
               </a:lnSpc>
             </a:pPr>
             <a:r>
-              <a:rPr sz="1240" b="1" i="0">
+              <a:rPr sz="900" b="1" i="0" spc="120">
                 <a:solidFill>
                   <a:srgbClr val="E94D1C"/>
                 </a:solidFill>
                 <a:latin typeface="Roboto"/>
               </a:rPr>
-              <a:t>//</a:t>
-            </a:r>
+              <a:t>CUSTA</a:t>
+            </a:r>
+          </a:p>
+        </p:txBody>
+      </p:sp>
+      <p:sp>
+        <p:nvSpPr>
+          <p:cNvPr id="18" name="Rectangle 17"/>
+          <p:cNvSpPr/>
+          <p:nvPr/>
+        </p:nvSpPr>
+        <p:spPr>
+          <a:xfrm>
+            <a:off x="6362700" y="2327148"/>
+            <a:ext cx="419100" cy="28575"/>
+          </a:xfrm>
+          <a:prstGeom prst="rect">
+            <a:avLst/>
+          </a:prstGeom>
+          <a:solidFill>
+            <a:srgbClr val="E94D1C"/>
+          </a:solidFill>
+          <a:ln>
+            <a:noFill/>
+          </a:ln>
+          <a:effectLst/>
+        </p:spPr>
+        <p:style>
+          <a:lnRef idx="1">
+            <a:schemeClr val="accent1"/>
+          </a:lnRef>
+          <a:fillRef idx="3">
+            <a:schemeClr val="accent1"/>
+          </a:fillRef>
+          <a:effectRef idx="2">
+            <a:schemeClr val="accent1"/>
+          </a:effectRef>
+          <a:fontRef idx="minor">
+            <a:schemeClr val="lt1"/>
+          </a:fontRef>
+        </p:style>
+        <p:txBody>
+          <a:bodyPr rtlCol="0" anchor="ctr" wrap="square" lIns="0" rIns="0" tIns="0" bIns="0"/>
+          <a:lstStyle/>
+          <a:p>
+            <a:pPr algn="ctr"/>
+          </a:p>
+        </p:txBody>
+      </p:sp>
+      <p:sp>
+        <p:nvSpPr>
+          <p:cNvPr id="19" name="Rectangle 18"/>
+          <p:cNvSpPr/>
+          <p:nvPr/>
+        </p:nvSpPr>
+        <p:spPr>
+          <a:xfrm>
+            <a:off x="6381750" y="2702052"/>
+            <a:ext cx="57150" cy="57150"/>
+          </a:xfrm>
+          <a:prstGeom prst="rect">
+            <a:avLst/>
+          </a:prstGeom>
+          <a:solidFill>
+            <a:srgbClr val="E94D1C"/>
+          </a:solidFill>
+          <a:ln>
+            <a:noFill/>
+          </a:ln>
+          <a:effectLst/>
+        </p:spPr>
+        <p:style>
+          <a:lnRef idx="1">
+            <a:schemeClr val="accent1"/>
+          </a:lnRef>
+          <a:fillRef idx="3">
+            <a:schemeClr val="accent1"/>
+          </a:fillRef>
+          <a:effectRef idx="2">
+            <a:schemeClr val="accent1"/>
+          </a:effectRef>
+          <a:fontRef idx="minor">
+            <a:schemeClr val="lt1"/>
+          </a:fontRef>
+        </p:style>
+        <p:txBody>
+          <a:bodyPr rtlCol="0" anchor="ctr" wrap="square" lIns="0" rIns="0" tIns="0" bIns="0"/>
+          <a:lstStyle/>
+          <a:p>
+            <a:pPr algn="ctr"/>
+          </a:p>
+        </p:txBody>
+      </p:sp>
+      <p:sp>
+        <p:nvSpPr>
+          <p:cNvPr id="20" name="TextBox 19"/>
+          <p:cNvSpPr txBox="1"/>
+          <p:nvPr/>
+        </p:nvSpPr>
+        <p:spPr>
+          <a:xfrm>
+            <a:off x="6648450" y="2612898"/>
+            <a:ext cx="4857750" cy="95250"/>
+          </a:xfrm>
+          <a:prstGeom prst="rect">
+            <a:avLst/>
+          </a:prstGeom>
+          <a:noFill/>
+        </p:spPr>
+        <p:txBody>
+          <a:bodyPr wrap="square" lIns="0" rIns="0" tIns="0" bIns="0" anchor="t">
+            <a:spAutoFit/>
+          </a:bodyPr>
+          <a:lstStyle/>
+          <a:p>
+            <a:pPr algn="l">
+              <a:lnSpc>
+                <a:spcPct val="130000"/>
+              </a:lnSpc>
+            </a:pPr>
+            <a:r>
+              <a:rPr sz="1350" b="0" i="0">
+                <a:solidFill>
+                  <a:srgbClr val="1A1A1E"/>
+                </a:solidFill>
+                <a:latin typeface="Roboto"/>
+              </a:rPr>
+              <a:t>Segurança ganha isolamento e herda uma superfície nova, que é a imagem base e o privilégio de execução.</a:t>
+            </a:r>
+          </a:p>
+        </p:txBody>
+      </p:sp>
+      <p:sp>
+        <p:nvSpPr>
+          <p:cNvPr id="21" name="Rectangle 20"/>
+          <p:cNvSpPr/>
+          <p:nvPr/>
+        </p:nvSpPr>
+        <p:spPr>
+          <a:xfrm>
+            <a:off x="6381750" y="3364230"/>
+            <a:ext cx="57150" cy="57150"/>
+          </a:xfrm>
+          <a:prstGeom prst="rect">
+            <a:avLst/>
+          </a:prstGeom>
+          <a:solidFill>
+            <a:srgbClr val="E94D1C"/>
+          </a:solidFill>
+          <a:ln>
+            <a:noFill/>
+          </a:ln>
+          <a:effectLst/>
+        </p:spPr>
+        <p:style>
+          <a:lnRef idx="1">
+            <a:schemeClr val="accent1"/>
+          </a:lnRef>
+          <a:fillRef idx="3">
+            <a:schemeClr val="accent1"/>
+          </a:fillRef>
+          <a:effectRef idx="2">
+            <a:schemeClr val="accent1"/>
+          </a:effectRef>
+          <a:fontRef idx="minor">
+            <a:schemeClr val="lt1"/>
+          </a:fontRef>
+        </p:style>
+        <p:txBody>
+          <a:bodyPr rtlCol="0" anchor="ctr" wrap="square" lIns="0" rIns="0" tIns="0" bIns="0"/>
+          <a:lstStyle/>
+          <a:p>
+            <a:pPr algn="ctr"/>
           </a:p>
         </p:txBody>
       </p:sp>
@@ -27203,14 +27418,58 @@
       </p:sp>
       <p:sp>
         <p:nvSpPr>
-          <p:cNvPr id="5" name="TextBox 4"/>
+          <p:cNvPr id="5" name="Rectangle 4"/>
+          <p:cNvSpPr/>
+          <p:nvPr/>
+        </p:nvSpPr>
+        <p:spPr>
+          <a:xfrm>
+            <a:off x="704850" y="3141726"/>
+            <a:ext cx="57150" cy="57150"/>
+          </a:xfrm>
+          <a:prstGeom prst="rect">
+            <a:avLst/>
+          </a:prstGeom>
+          <a:solidFill>
+            <a:srgbClr val="E94D1C"/>
+          </a:solidFill>
+          <a:ln>
+            <a:noFill/>
+          </a:ln>
+          <a:effectLst/>
+        </p:spPr>
+        <p:style>
+          <a:lnRef idx="1">
+            <a:schemeClr val="accent1"/>
+          </a:lnRef>
+          <a:fillRef idx="3">
+            <a:schemeClr val="accent1"/>
+          </a:fillRef>
+          <a:effectRef idx="2">
+            <a:schemeClr val="accent1"/>
+          </a:effectRef>
+          <a:fontRef idx="minor">
+            <a:schemeClr val="lt1"/>
+          </a:fontRef>
+        </p:style>
+        <p:txBody>
+          <a:bodyPr rtlCol="0" anchor="ctr" wrap="square" lIns="0" rIns="0" tIns="0" bIns="0"/>
+          <a:lstStyle/>
+          <a:p>
+            <a:pPr algn="ctr"/>
+          </a:p>
+        </p:txBody>
+      </p:sp>
+      <p:sp>
+        <p:nvSpPr>
+          <p:cNvPr id="6" name="TextBox 5"/>
           <p:cNvSpPr txBox="1"/>
           <p:nvPr/>
         </p:nvSpPr>
         <p:spPr>
           <a:xfrm>
-            <a:off x="685800" y="3042285"/>
-            <a:ext cx="247650" cy="308458"/>
+            <a:off x="971550" y="3032760"/>
+            <a:ext cx="7677150" cy="95250"/>
           </a:xfrm>
           <a:prstGeom prst="rect">
             <a:avLst/>
@@ -27225,30 +27484,74 @@
           <a:p>
             <a:pPr algn="l">
               <a:lnSpc>
-                <a:spcPct val="120000"/>
-              </a:lnSpc>
-            </a:pPr>
-            <a:r>
-              <a:rPr sz="1520" b="1" i="0">
-                <a:solidFill>
-                  <a:srgbClr val="E94D1C"/>
-                </a:solidFill>
-                <a:latin typeface="Roboto"/>
-              </a:rPr>
-              <a:t>//</a:t>
-            </a:r>
-          </a:p>
-        </p:txBody>
-      </p:sp>
-      <p:sp>
-        <p:nvSpPr>
-          <p:cNvPr id="6" name="TextBox 5"/>
+                <a:spcPct val="130000"/>
+              </a:lnSpc>
+            </a:pPr>
+            <a:r>
+              <a:rPr sz="1650" b="0" i="0">
+                <a:solidFill>
+                  <a:srgbClr val="1A1A1E"/>
+                </a:solidFill>
+                <a:latin typeface="Roboto"/>
+              </a:rPr>
+              <a:t>Adotamos conteinerização como estratégia de empacotamento e de ambiente de desenvolvimento, registrada como troca.</a:t>
+            </a:r>
+          </a:p>
+        </p:txBody>
+      </p:sp>
+      <p:sp>
+        <p:nvSpPr>
+          <p:cNvPr id="7" name="Rectangle 6"/>
+          <p:cNvSpPr/>
+          <p:nvPr/>
+        </p:nvSpPr>
+        <p:spPr>
+          <a:xfrm>
+            <a:off x="704850" y="3980688"/>
+            <a:ext cx="57150" cy="57150"/>
+          </a:xfrm>
+          <a:prstGeom prst="rect">
+            <a:avLst/>
+          </a:prstGeom>
+          <a:solidFill>
+            <a:srgbClr val="E94D1C"/>
+          </a:solidFill>
+          <a:ln>
+            <a:noFill/>
+          </a:ln>
+          <a:effectLst/>
+        </p:spPr>
+        <p:style>
+          <a:lnRef idx="1">
+            <a:schemeClr val="accent1"/>
+          </a:lnRef>
+          <a:fillRef idx="3">
+            <a:schemeClr val="accent1"/>
+          </a:fillRef>
+          <a:effectRef idx="2">
+            <a:schemeClr val="accent1"/>
+          </a:effectRef>
+          <a:fontRef idx="minor">
+            <a:schemeClr val="lt1"/>
+          </a:fontRef>
+        </p:style>
+        <p:txBody>
+          <a:bodyPr rtlCol="0" anchor="ctr" wrap="square" lIns="0" rIns="0" tIns="0" bIns="0"/>
+          <a:lstStyle/>
+          <a:p>
+            <a:pPr algn="ctr"/>
+          </a:p>
+        </p:txBody>
+      </p:sp>
+      <p:sp>
+        <p:nvSpPr>
+          <p:cNvPr id="8" name="TextBox 7"/>
           <p:cNvSpPr txBox="1"/>
           <p:nvPr/>
         </p:nvSpPr>
         <p:spPr>
           <a:xfrm>
-            <a:off x="971550" y="3032760"/>
+            <a:off x="971550" y="3871722"/>
             <a:ext cx="7677150" cy="95250"/>
           </a:xfrm>
           <a:prstGeom prst="rect">
@@ -27274,84 +27577,6 @@
                 </a:solidFill>
                 <a:latin typeface="Roboto"/>
               </a:rPr>
-              <a:t>Adotamos conteinerização como estratégia de empacotamento e de ambiente de desenvolvimento, registrada como troca.</a:t>
-            </a:r>
-          </a:p>
-        </p:txBody>
-      </p:sp>
-      <p:sp>
-        <p:nvSpPr>
-          <p:cNvPr id="7" name="TextBox 6"/>
-          <p:cNvSpPr txBox="1"/>
-          <p:nvPr/>
-        </p:nvSpPr>
-        <p:spPr>
-          <a:xfrm>
-            <a:off x="685800" y="3881247"/>
-            <a:ext cx="247650" cy="308458"/>
-          </a:xfrm>
-          <a:prstGeom prst="rect">
-            <a:avLst/>
-          </a:prstGeom>
-          <a:noFill/>
-        </p:spPr>
-        <p:txBody>
-          <a:bodyPr wrap="square" lIns="0" rIns="0" tIns="0" bIns="0" anchor="t">
-            <a:spAutoFit/>
-          </a:bodyPr>
-          <a:lstStyle/>
-          <a:p>
-            <a:pPr algn="l">
-              <a:lnSpc>
-                <a:spcPct val="120000"/>
-              </a:lnSpc>
-            </a:pPr>
-            <a:r>
-              <a:rPr sz="1520" b="1" i="0">
-                <a:solidFill>
-                  <a:srgbClr val="E94D1C"/>
-                </a:solidFill>
-                <a:latin typeface="Roboto"/>
-              </a:rPr>
-              <a:t>//</a:t>
-            </a:r>
-          </a:p>
-        </p:txBody>
-      </p:sp>
-      <p:sp>
-        <p:nvSpPr>
-          <p:cNvPr id="8" name="TextBox 7"/>
-          <p:cNvSpPr txBox="1"/>
-          <p:nvPr/>
-        </p:nvSpPr>
-        <p:spPr>
-          <a:xfrm>
-            <a:off x="971550" y="3871722"/>
-            <a:ext cx="7677150" cy="95250"/>
-          </a:xfrm>
-          <a:prstGeom prst="rect">
-            <a:avLst/>
-          </a:prstGeom>
-          <a:noFill/>
-        </p:spPr>
-        <p:txBody>
-          <a:bodyPr wrap="square" lIns="0" rIns="0" tIns="0" bIns="0" anchor="t">
-            <a:spAutoFit/>
-          </a:bodyPr>
-          <a:lstStyle/>
-          <a:p>
-            <a:pPr algn="l">
-              <a:lnSpc>
-                <a:spcPct val="130000"/>
-              </a:lnSpc>
-            </a:pPr>
-            <a:r>
-              <a:rPr sz="1650" b="0" i="0">
-                <a:solidFill>
-                  <a:srgbClr val="1A1A1E"/>
-                </a:solidFill>
-                <a:latin typeface="Roboto"/>
-              </a:rPr>
               <a:t>O #60 deixa de ser caixa genérica e passa a ter um arquivo correspondente que roda, e esse arquivo vira artefato do repositório.</a:t>
             </a:r>
           </a:p>
@@ -27359,40 +27584,45 @@
       </p:sp>
       <p:sp>
         <p:nvSpPr>
-          <p:cNvPr id="9" name="TextBox 8"/>
-          <p:cNvSpPr txBox="1"/>
-          <p:nvPr/>
-        </p:nvSpPr>
-        <p:spPr>
-          <a:xfrm>
-            <a:off x="685800" y="4720209"/>
-            <a:ext cx="247650" cy="308458"/>
-          </a:xfrm>
-          <a:prstGeom prst="rect">
-            <a:avLst/>
-          </a:prstGeom>
-          <a:noFill/>
-        </p:spPr>
-        <p:txBody>
-          <a:bodyPr wrap="square" lIns="0" rIns="0" tIns="0" bIns="0" anchor="t">
-            <a:spAutoFit/>
-          </a:bodyPr>
-          <a:lstStyle/>
-          <a:p>
-            <a:pPr algn="l">
-              <a:lnSpc>
-                <a:spcPct val="120000"/>
-              </a:lnSpc>
-            </a:pPr>
-            <a:r>
-              <a:rPr sz="1520" b="1" i="0">
-                <a:solidFill>
-                  <a:srgbClr val="E94D1C"/>
-                </a:solidFill>
-                <a:latin typeface="Roboto"/>
-              </a:rPr>
-              <a:t>//</a:t>
-            </a:r>
+          <p:cNvPr id="9" name="Rectangle 8"/>
+          <p:cNvSpPr/>
+          <p:nvPr/>
+        </p:nvSpPr>
+        <p:spPr>
+          <a:xfrm>
+            <a:off x="704850" y="4819650"/>
+            <a:ext cx="57150" cy="57150"/>
+          </a:xfrm>
+          <a:prstGeom prst="rect">
+            <a:avLst/>
+          </a:prstGeom>
+          <a:solidFill>
+            <a:srgbClr val="E94D1C"/>
+          </a:solidFill>
+          <a:ln>
+            <a:noFill/>
+          </a:ln>
+          <a:effectLst/>
+        </p:spPr>
+        <p:style>
+          <a:lnRef idx="1">
+            <a:schemeClr val="accent1"/>
+          </a:lnRef>
+          <a:fillRef idx="3">
+            <a:schemeClr val="accent1"/>
+          </a:fillRef>
+          <a:effectRef idx="2">
+            <a:schemeClr val="accent1"/>
+          </a:effectRef>
+          <a:fontRef idx="minor">
+            <a:schemeClr val="lt1"/>
+          </a:fontRef>
+        </p:style>
+        <p:txBody>
+          <a:bodyPr rtlCol="0" anchor="ctr" wrap="square" lIns="0" rIns="0" tIns="0" bIns="0"/>
+          <a:lstStyle/>
+          <a:p>
+            <a:pPr algn="ctr"/>
           </a:p>
         </p:txBody>
       </p:sp>
@@ -27911,209 +28141,14 @@
       </p:sp>
       <p:sp>
         <p:nvSpPr>
-          <p:cNvPr id="7" name="TextBox 6"/>
-          <p:cNvSpPr txBox="1"/>
-          <p:nvPr/>
-        </p:nvSpPr>
-        <p:spPr>
-          <a:xfrm>
-            <a:off x="685800" y="3624834"/>
-            <a:ext cx="247650" cy="294437"/>
-          </a:xfrm>
-          <a:prstGeom prst="rect">
-            <a:avLst/>
-          </a:prstGeom>
-          <a:noFill/>
-        </p:spPr>
-        <p:txBody>
-          <a:bodyPr wrap="square" lIns="0" rIns="0" tIns="0" bIns="0" anchor="t">
-            <a:spAutoFit/>
-          </a:bodyPr>
-          <a:lstStyle/>
-          <a:p>
-            <a:pPr algn="l">
-              <a:lnSpc>
-                <a:spcPct val="120000"/>
-              </a:lnSpc>
-            </a:pPr>
-            <a:r>
-              <a:rPr sz="1450" b="1" i="0">
-                <a:solidFill>
-                  <a:srgbClr val="E94D1C"/>
-                </a:solidFill>
-                <a:latin typeface="Roboto"/>
-              </a:rPr>
-              <a:t>//</a:t>
-            </a:r>
-          </a:p>
-        </p:txBody>
-      </p:sp>
-      <p:sp>
-        <p:nvSpPr>
-          <p:cNvPr id="8" name="TextBox 7"/>
-          <p:cNvSpPr txBox="1"/>
-          <p:nvPr/>
-        </p:nvSpPr>
-        <p:spPr>
-          <a:xfrm>
-            <a:off x="971550" y="3615309"/>
-            <a:ext cx="4857750" cy="95250"/>
-          </a:xfrm>
-          <a:prstGeom prst="rect">
-            <a:avLst/>
-          </a:prstGeom>
-          <a:noFill/>
-        </p:spPr>
-        <p:txBody>
-          <a:bodyPr wrap="square" lIns="0" rIns="0" tIns="0" bIns="0" anchor="t">
-            <a:spAutoFit/>
-          </a:bodyPr>
-          <a:lstStyle/>
-          <a:p>
-            <a:pPr algn="l">
-              <a:lnSpc>
-                <a:spcPct val="130000"/>
-              </a:lnSpc>
-            </a:pPr>
-            <a:r>
-              <a:rPr sz="1580" b="0" i="0">
-                <a:solidFill>
-                  <a:srgbClr val="1A1A1E"/>
-                </a:solidFill>
-                <a:latin typeface="Roboto"/>
-              </a:rPr>
-              <a:t>Uma linha de .gitattributes forçando LF nos scripts, porque o Git Bash quebra no Windows.</a:t>
-            </a:r>
-          </a:p>
-        </p:txBody>
-      </p:sp>
-      <p:sp>
-        <p:nvSpPr>
-          <p:cNvPr id="9" name="TextBox 8"/>
-          <p:cNvSpPr txBox="1"/>
-          <p:nvPr/>
-        </p:nvSpPr>
-        <p:spPr>
-          <a:xfrm>
-            <a:off x="685800" y="4419600"/>
-            <a:ext cx="247650" cy="294437"/>
-          </a:xfrm>
-          <a:prstGeom prst="rect">
-            <a:avLst/>
-          </a:prstGeom>
-          <a:noFill/>
-        </p:spPr>
-        <p:txBody>
-          <a:bodyPr wrap="square" lIns="0" rIns="0" tIns="0" bIns="0" anchor="t">
-            <a:spAutoFit/>
-          </a:bodyPr>
-          <a:lstStyle/>
-          <a:p>
-            <a:pPr algn="l">
-              <a:lnSpc>
-                <a:spcPct val="120000"/>
-              </a:lnSpc>
-            </a:pPr>
-            <a:r>
-              <a:rPr sz="1450" b="1" i="0">
-                <a:solidFill>
-                  <a:srgbClr val="E94D1C"/>
-                </a:solidFill>
-                <a:latin typeface="Roboto"/>
-              </a:rPr>
-              <a:t>//</a:t>
-            </a:r>
-          </a:p>
-        </p:txBody>
-      </p:sp>
-      <p:sp>
-        <p:nvSpPr>
-          <p:cNvPr id="10" name="TextBox 9"/>
-          <p:cNvSpPr txBox="1"/>
-          <p:nvPr/>
-        </p:nvSpPr>
-        <p:spPr>
-          <a:xfrm>
-            <a:off x="971550" y="4410075"/>
-            <a:ext cx="4857750" cy="95250"/>
-          </a:xfrm>
-          <a:prstGeom prst="rect">
-            <a:avLst/>
-          </a:prstGeom>
-          <a:noFill/>
-        </p:spPr>
-        <p:txBody>
-          <a:bodyPr wrap="square" lIns="0" rIns="0" tIns="0" bIns="0" anchor="t">
-            <a:spAutoFit/>
-          </a:bodyPr>
-          <a:lstStyle/>
-          <a:p>
-            <a:pPr algn="l">
-              <a:lnSpc>
-                <a:spcPct val="130000"/>
-              </a:lnSpc>
-            </a:pPr>
-            <a:r>
-              <a:rPr sz="1580" b="0" i="0">
-                <a:solidFill>
-                  <a:srgbClr val="1A1A1E"/>
-                </a:solidFill>
-                <a:latin typeface="Roboto"/>
-              </a:rPr>
-              <a:t>Os ambientes do time já divergem antes de existir a primeira linha de código do produto.</a:t>
-            </a:r>
-          </a:p>
-        </p:txBody>
-      </p:sp>
-      <p:sp>
-        <p:nvSpPr>
-          <p:cNvPr id="11" name="TextBox 10"/>
-          <p:cNvSpPr txBox="1"/>
-          <p:nvPr/>
-        </p:nvSpPr>
-        <p:spPr>
-          <a:xfrm>
-            <a:off x="6362700" y="3120009"/>
-            <a:ext cx="5143500" cy="182880"/>
-          </a:xfrm>
-          <a:prstGeom prst="rect">
-            <a:avLst/>
-          </a:prstGeom>
-          <a:noFill/>
-        </p:spPr>
-        <p:txBody>
-          <a:bodyPr wrap="square" lIns="0" rIns="0" tIns="0" bIns="0" anchor="t">
-            <a:spAutoFit/>
-          </a:bodyPr>
-          <a:lstStyle/>
-          <a:p>
-            <a:pPr algn="l">
-              <a:lnSpc>
-                <a:spcPct val="120000"/>
-              </a:lnSpc>
-            </a:pPr>
-            <a:r>
-              <a:rPr sz="900" b="1" i="0" spc="120">
-                <a:solidFill>
-                  <a:srgbClr val="E94D1C"/>
-                </a:solidFill>
-                <a:latin typeface="Roboto"/>
-              </a:rPr>
-              <a:t>AGORA</a:t>
-            </a:r>
-          </a:p>
-        </p:txBody>
-      </p:sp>
-      <p:sp>
-        <p:nvSpPr>
-          <p:cNvPr id="12" name="Rectangle 11"/>
+          <p:cNvPr id="7" name="Rectangle 6"/>
           <p:cNvSpPr/>
           <p:nvPr/>
         </p:nvSpPr>
         <p:spPr>
           <a:xfrm>
-            <a:off x="6362700" y="3329559"/>
-            <a:ext cx="419100" cy="28575"/>
+            <a:off x="704850" y="3719322"/>
+            <a:ext cx="57150" cy="57150"/>
           </a:xfrm>
           <a:prstGeom prst="rect">
             <a:avLst/>
@@ -28150,14 +28185,14 @@
       </p:sp>
       <p:sp>
         <p:nvSpPr>
-          <p:cNvPr id="13" name="TextBox 12"/>
+          <p:cNvPr id="8" name="TextBox 7"/>
           <p:cNvSpPr txBox="1"/>
           <p:nvPr/>
         </p:nvSpPr>
         <p:spPr>
           <a:xfrm>
-            <a:off x="6362700" y="3624834"/>
-            <a:ext cx="247650" cy="294437"/>
+            <a:off x="971550" y="3615309"/>
+            <a:ext cx="4857750" cy="95250"/>
           </a:xfrm>
           <a:prstGeom prst="rect">
             <a:avLst/>
@@ -28172,30 +28207,74 @@
           <a:p>
             <a:pPr algn="l">
               <a:lnSpc>
-                <a:spcPct val="120000"/>
-              </a:lnSpc>
-            </a:pPr>
-            <a:r>
-              <a:rPr sz="1450" b="1" i="0">
-                <a:solidFill>
-                  <a:srgbClr val="E94D1C"/>
-                </a:solidFill>
-                <a:latin typeface="Roboto"/>
-              </a:rPr>
-              <a:t>//</a:t>
-            </a:r>
-          </a:p>
-        </p:txBody>
-      </p:sp>
-      <p:sp>
-        <p:nvSpPr>
-          <p:cNvPr id="14" name="TextBox 13"/>
+                <a:spcPct val="130000"/>
+              </a:lnSpc>
+            </a:pPr>
+            <a:r>
+              <a:rPr sz="1580" b="0" i="0">
+                <a:solidFill>
+                  <a:srgbClr val="1A1A1E"/>
+                </a:solidFill>
+                <a:latin typeface="Roboto"/>
+              </a:rPr>
+              <a:t>Uma linha de .gitattributes forçando LF nos scripts, porque o Git Bash quebra no Windows.</a:t>
+            </a:r>
+          </a:p>
+        </p:txBody>
+      </p:sp>
+      <p:sp>
+        <p:nvSpPr>
+          <p:cNvPr id="9" name="Rectangle 8"/>
+          <p:cNvSpPr/>
+          <p:nvPr/>
+        </p:nvSpPr>
+        <p:spPr>
+          <a:xfrm>
+            <a:off x="704850" y="4514088"/>
+            <a:ext cx="57150" cy="57150"/>
+          </a:xfrm>
+          <a:prstGeom prst="rect">
+            <a:avLst/>
+          </a:prstGeom>
+          <a:solidFill>
+            <a:srgbClr val="E94D1C"/>
+          </a:solidFill>
+          <a:ln>
+            <a:noFill/>
+          </a:ln>
+          <a:effectLst/>
+        </p:spPr>
+        <p:style>
+          <a:lnRef idx="1">
+            <a:schemeClr val="accent1"/>
+          </a:lnRef>
+          <a:fillRef idx="3">
+            <a:schemeClr val="accent1"/>
+          </a:fillRef>
+          <a:effectRef idx="2">
+            <a:schemeClr val="accent1"/>
+          </a:effectRef>
+          <a:fontRef idx="minor">
+            <a:schemeClr val="lt1"/>
+          </a:fontRef>
+        </p:style>
+        <p:txBody>
+          <a:bodyPr rtlCol="0" anchor="ctr" wrap="square" lIns="0" rIns="0" tIns="0" bIns="0"/>
+          <a:lstStyle/>
+          <a:p>
+            <a:pPr algn="ctr"/>
+          </a:p>
+        </p:txBody>
+      </p:sp>
+      <p:sp>
+        <p:nvSpPr>
+          <p:cNvPr id="10" name="TextBox 9"/>
           <p:cNvSpPr txBox="1"/>
           <p:nvPr/>
         </p:nvSpPr>
         <p:spPr>
           <a:xfrm>
-            <a:off x="6648450" y="3615309"/>
+            <a:off x="971550" y="4410075"/>
             <a:ext cx="4857750" cy="95250"/>
           </a:xfrm>
           <a:prstGeom prst="rect">
@@ -28221,21 +28300,21 @@
                 </a:solidFill>
                 <a:latin typeface="Roboto"/>
               </a:rPr>
-              <a:t>Um arquivo que descreve o ambiente inteiro e que qualquer um dos quatro sobe com um comando.</a:t>
-            </a:r>
-          </a:p>
-        </p:txBody>
-      </p:sp>
-      <p:sp>
-        <p:nvSpPr>
-          <p:cNvPr id="15" name="TextBox 14"/>
+              <a:t>Os ambientes do time já divergem antes de existir a primeira linha de código do produto.</a:t>
+            </a:r>
+          </a:p>
+        </p:txBody>
+      </p:sp>
+      <p:sp>
+        <p:nvSpPr>
+          <p:cNvPr id="11" name="TextBox 10"/>
           <p:cNvSpPr txBox="1"/>
           <p:nvPr/>
         </p:nvSpPr>
         <p:spPr>
           <a:xfrm>
-            <a:off x="6362700" y="4419600"/>
-            <a:ext cx="247650" cy="294437"/>
+            <a:off x="6362700" y="3120009"/>
+            <a:ext cx="5143500" cy="182880"/>
           </a:xfrm>
           <a:prstGeom prst="rect">
             <a:avLst/>
@@ -28254,14 +28333,185 @@
               </a:lnSpc>
             </a:pPr>
             <a:r>
-              <a:rPr sz="1450" b="1" i="0">
+              <a:rPr sz="900" b="1" i="0" spc="120">
                 <a:solidFill>
                   <a:srgbClr val="E94D1C"/>
                 </a:solidFill>
                 <a:latin typeface="Roboto"/>
               </a:rPr>
-              <a:t>//</a:t>
-            </a:r>
+              <a:t>AGORA</a:t>
+            </a:r>
+          </a:p>
+        </p:txBody>
+      </p:sp>
+      <p:sp>
+        <p:nvSpPr>
+          <p:cNvPr id="12" name="Rectangle 11"/>
+          <p:cNvSpPr/>
+          <p:nvPr/>
+        </p:nvSpPr>
+        <p:spPr>
+          <a:xfrm>
+            <a:off x="6362700" y="3329559"/>
+            <a:ext cx="419100" cy="28575"/>
+          </a:xfrm>
+          <a:prstGeom prst="rect">
+            <a:avLst/>
+          </a:prstGeom>
+          <a:solidFill>
+            <a:srgbClr val="E94D1C"/>
+          </a:solidFill>
+          <a:ln>
+            <a:noFill/>
+          </a:ln>
+          <a:effectLst/>
+        </p:spPr>
+        <p:style>
+          <a:lnRef idx="1">
+            <a:schemeClr val="accent1"/>
+          </a:lnRef>
+          <a:fillRef idx="3">
+            <a:schemeClr val="accent1"/>
+          </a:fillRef>
+          <a:effectRef idx="2">
+            <a:schemeClr val="accent1"/>
+          </a:effectRef>
+          <a:fontRef idx="minor">
+            <a:schemeClr val="lt1"/>
+          </a:fontRef>
+        </p:style>
+        <p:txBody>
+          <a:bodyPr rtlCol="0" anchor="ctr" wrap="square" lIns="0" rIns="0" tIns="0" bIns="0"/>
+          <a:lstStyle/>
+          <a:p>
+            <a:pPr algn="ctr"/>
+          </a:p>
+        </p:txBody>
+      </p:sp>
+      <p:sp>
+        <p:nvSpPr>
+          <p:cNvPr id="13" name="Rectangle 12"/>
+          <p:cNvSpPr/>
+          <p:nvPr/>
+        </p:nvSpPr>
+        <p:spPr>
+          <a:xfrm>
+            <a:off x="6381750" y="3719322"/>
+            <a:ext cx="57150" cy="57150"/>
+          </a:xfrm>
+          <a:prstGeom prst="rect">
+            <a:avLst/>
+          </a:prstGeom>
+          <a:solidFill>
+            <a:srgbClr val="E94D1C"/>
+          </a:solidFill>
+          <a:ln>
+            <a:noFill/>
+          </a:ln>
+          <a:effectLst/>
+        </p:spPr>
+        <p:style>
+          <a:lnRef idx="1">
+            <a:schemeClr val="accent1"/>
+          </a:lnRef>
+          <a:fillRef idx="3">
+            <a:schemeClr val="accent1"/>
+          </a:fillRef>
+          <a:effectRef idx="2">
+            <a:schemeClr val="accent1"/>
+          </a:effectRef>
+          <a:fontRef idx="minor">
+            <a:schemeClr val="lt1"/>
+          </a:fontRef>
+        </p:style>
+        <p:txBody>
+          <a:bodyPr rtlCol="0" anchor="ctr" wrap="square" lIns="0" rIns="0" tIns="0" bIns="0"/>
+          <a:lstStyle/>
+          <a:p>
+            <a:pPr algn="ctr"/>
+          </a:p>
+        </p:txBody>
+      </p:sp>
+      <p:sp>
+        <p:nvSpPr>
+          <p:cNvPr id="14" name="TextBox 13"/>
+          <p:cNvSpPr txBox="1"/>
+          <p:nvPr/>
+        </p:nvSpPr>
+        <p:spPr>
+          <a:xfrm>
+            <a:off x="6648450" y="3615309"/>
+            <a:ext cx="4857750" cy="95250"/>
+          </a:xfrm>
+          <a:prstGeom prst="rect">
+            <a:avLst/>
+          </a:prstGeom>
+          <a:noFill/>
+        </p:spPr>
+        <p:txBody>
+          <a:bodyPr wrap="square" lIns="0" rIns="0" tIns="0" bIns="0" anchor="t">
+            <a:spAutoFit/>
+          </a:bodyPr>
+          <a:lstStyle/>
+          <a:p>
+            <a:pPr algn="l">
+              <a:lnSpc>
+                <a:spcPct val="130000"/>
+              </a:lnSpc>
+            </a:pPr>
+            <a:r>
+              <a:rPr sz="1580" b="0" i="0">
+                <a:solidFill>
+                  <a:srgbClr val="1A1A1E"/>
+                </a:solidFill>
+                <a:latin typeface="Roboto"/>
+              </a:rPr>
+              <a:t>Um arquivo que descreve o ambiente inteiro e que qualquer um dos quatro sobe com um comando.</a:t>
+            </a:r>
+          </a:p>
+        </p:txBody>
+      </p:sp>
+      <p:sp>
+        <p:nvSpPr>
+          <p:cNvPr id="15" name="Rectangle 14"/>
+          <p:cNvSpPr/>
+          <p:nvPr/>
+        </p:nvSpPr>
+        <p:spPr>
+          <a:xfrm>
+            <a:off x="6381750" y="4514088"/>
+            <a:ext cx="57150" cy="57150"/>
+          </a:xfrm>
+          <a:prstGeom prst="rect">
+            <a:avLst/>
+          </a:prstGeom>
+          <a:solidFill>
+            <a:srgbClr val="E94D1C"/>
+          </a:solidFill>
+          <a:ln>
+            <a:noFill/>
+          </a:ln>
+          <a:effectLst/>
+        </p:spPr>
+        <p:style>
+          <a:lnRef idx="1">
+            <a:schemeClr val="accent1"/>
+          </a:lnRef>
+          <a:fillRef idx="3">
+            <a:schemeClr val="accent1"/>
+          </a:fillRef>
+          <a:effectRef idx="2">
+            <a:schemeClr val="accent1"/>
+          </a:effectRef>
+          <a:fontRef idx="minor">
+            <a:schemeClr val="lt1"/>
+          </a:fontRef>
+        </p:style>
+        <p:txBody>
+          <a:bodyPr rtlCol="0" anchor="ctr" wrap="square" lIns="0" rIns="0" tIns="0" bIns="0"/>
+          <a:lstStyle/>
+          <a:p>
+            <a:pPr algn="ctr"/>
           </a:p>
         </p:txBody>
       </p:sp>
@@ -28512,14 +28762,58 @@
       </p:sp>
       <p:sp>
         <p:nvSpPr>
-          <p:cNvPr id="5" name="TextBox 4"/>
+          <p:cNvPr id="5" name="Rectangle 4"/>
+          <p:cNvSpPr/>
+          <p:nvPr/>
+        </p:nvSpPr>
+        <p:spPr>
+          <a:xfrm>
+            <a:off x="704850" y="3561207"/>
+            <a:ext cx="57150" cy="57150"/>
+          </a:xfrm>
+          <a:prstGeom prst="rect">
+            <a:avLst/>
+          </a:prstGeom>
+          <a:solidFill>
+            <a:srgbClr val="E94D1C"/>
+          </a:solidFill>
+          <a:ln>
+            <a:noFill/>
+          </a:ln>
+          <a:effectLst/>
+        </p:spPr>
+        <p:style>
+          <a:lnRef idx="1">
+            <a:schemeClr val="accent1"/>
+          </a:lnRef>
+          <a:fillRef idx="3">
+            <a:schemeClr val="accent1"/>
+          </a:fillRef>
+          <a:effectRef idx="2">
+            <a:schemeClr val="accent1"/>
+          </a:effectRef>
+          <a:fontRef idx="minor">
+            <a:schemeClr val="lt1"/>
+          </a:fontRef>
+        </p:style>
+        <p:txBody>
+          <a:bodyPr rtlCol="0" anchor="ctr" wrap="square" lIns="0" rIns="0" tIns="0" bIns="0"/>
+          <a:lstStyle/>
+          <a:p>
+            <a:pPr algn="ctr"/>
+          </a:p>
+        </p:txBody>
+      </p:sp>
+      <p:sp>
+        <p:nvSpPr>
+          <p:cNvPr id="6" name="TextBox 5"/>
           <p:cNvSpPr txBox="1"/>
           <p:nvPr/>
         </p:nvSpPr>
         <p:spPr>
           <a:xfrm>
-            <a:off x="685800" y="3461766"/>
-            <a:ext cx="247650" cy="308458"/>
+            <a:off x="971550" y="3452241"/>
+            <a:ext cx="7486650" cy="95250"/>
           </a:xfrm>
           <a:prstGeom prst="rect">
             <a:avLst/>
@@ -28534,45 +28828,6 @@
           <a:p>
             <a:pPr algn="l">
               <a:lnSpc>
-                <a:spcPct val="120000"/>
-              </a:lnSpc>
-            </a:pPr>
-            <a:r>
-              <a:rPr sz="1520" b="1" i="0">
-                <a:solidFill>
-                  <a:srgbClr val="E94D1C"/>
-                </a:solidFill>
-                <a:latin typeface="Roboto"/>
-              </a:rPr>
-              <a:t>//</a:t>
-            </a:r>
-          </a:p>
-        </p:txBody>
-      </p:sp>
-      <p:sp>
-        <p:nvSpPr>
-          <p:cNvPr id="6" name="TextBox 5"/>
-          <p:cNvSpPr txBox="1"/>
-          <p:nvPr/>
-        </p:nvSpPr>
-        <p:spPr>
-          <a:xfrm>
-            <a:off x="971550" y="3452241"/>
-            <a:ext cx="7486650" cy="95250"/>
-          </a:xfrm>
-          <a:prstGeom prst="rect">
-            <a:avLst/>
-          </a:prstGeom>
-          <a:noFill/>
-        </p:spPr>
-        <p:txBody>
-          <a:bodyPr wrap="square" lIns="0" rIns="0" tIns="0" bIns="0" anchor="t">
-            <a:spAutoFit/>
-          </a:bodyPr>
-          <a:lstStyle/>
-          <a:p>
-            <a:pPr algn="l">
-              <a:lnSpc>
                 <a:spcPct val="130000"/>
               </a:lnSpc>
             </a:pPr>
@@ -28590,40 +28845,45 @@
       </p:sp>
       <p:sp>
         <p:nvSpPr>
-          <p:cNvPr id="7" name="TextBox 6"/>
-          <p:cNvSpPr txBox="1"/>
-          <p:nvPr/>
-        </p:nvSpPr>
-        <p:spPr>
-          <a:xfrm>
-            <a:off x="685800" y="4300728"/>
-            <a:ext cx="247650" cy="308458"/>
-          </a:xfrm>
-          <a:prstGeom prst="rect">
-            <a:avLst/>
-          </a:prstGeom>
-          <a:noFill/>
-        </p:spPr>
-        <p:txBody>
-          <a:bodyPr wrap="square" lIns="0" rIns="0" tIns="0" bIns="0" anchor="t">
-            <a:spAutoFit/>
-          </a:bodyPr>
-          <a:lstStyle/>
-          <a:p>
-            <a:pPr algn="l">
-              <a:lnSpc>
-                <a:spcPct val="120000"/>
-              </a:lnSpc>
-            </a:pPr>
-            <a:r>
-              <a:rPr sz="1520" b="1" i="0">
-                <a:solidFill>
-                  <a:srgbClr val="E94D1C"/>
-                </a:solidFill>
-                <a:latin typeface="Roboto"/>
-              </a:rPr>
-              <a:t>//</a:t>
-            </a:r>
+          <p:cNvPr id="7" name="Rectangle 6"/>
+          <p:cNvSpPr/>
+          <p:nvPr/>
+        </p:nvSpPr>
+        <p:spPr>
+          <a:xfrm>
+            <a:off x="704850" y="4400169"/>
+            <a:ext cx="57150" cy="57150"/>
+          </a:xfrm>
+          <a:prstGeom prst="rect">
+            <a:avLst/>
+          </a:prstGeom>
+          <a:solidFill>
+            <a:srgbClr val="E94D1C"/>
+          </a:solidFill>
+          <a:ln>
+            <a:noFill/>
+          </a:ln>
+          <a:effectLst/>
+        </p:spPr>
+        <p:style>
+          <a:lnRef idx="1">
+            <a:schemeClr val="accent1"/>
+          </a:lnRef>
+          <a:fillRef idx="3">
+            <a:schemeClr val="accent1"/>
+          </a:fillRef>
+          <a:effectRef idx="2">
+            <a:schemeClr val="accent1"/>
+          </a:effectRef>
+          <a:fontRef idx="minor">
+            <a:schemeClr val="lt1"/>
+          </a:fontRef>
+        </p:style>
+        <p:txBody>
+          <a:bodyPr rtlCol="0" anchor="ctr" wrap="square" lIns="0" rIns="0" tIns="0" bIns="0"/>
+          <a:lstStyle/>
+          <a:p>
+            <a:pPr algn="ctr"/>
           </a:p>
         </p:txBody>
       </p:sp>
@@ -29623,14 +29883,58 @@
       </p:sp>
       <p:sp>
         <p:nvSpPr>
-          <p:cNvPr id="5" name="TextBox 4"/>
+          <p:cNvPr id="5" name="Rectangle 4"/>
+          <p:cNvSpPr/>
+          <p:nvPr/>
+        </p:nvSpPr>
+        <p:spPr>
+          <a:xfrm>
+            <a:off x="704850" y="2347341"/>
+            <a:ext cx="57150" cy="57150"/>
+          </a:xfrm>
+          <a:prstGeom prst="rect">
+            <a:avLst/>
+          </a:prstGeom>
+          <a:solidFill>
+            <a:srgbClr val="E94D1C"/>
+          </a:solidFill>
+          <a:ln>
+            <a:noFill/>
+          </a:ln>
+          <a:effectLst/>
+        </p:spPr>
+        <p:style>
+          <a:lnRef idx="1">
+            <a:schemeClr val="accent1"/>
+          </a:lnRef>
+          <a:fillRef idx="3">
+            <a:schemeClr val="accent1"/>
+          </a:fillRef>
+          <a:effectRef idx="2">
+            <a:schemeClr val="accent1"/>
+          </a:effectRef>
+          <a:fontRef idx="minor">
+            <a:schemeClr val="lt1"/>
+          </a:fontRef>
+        </p:style>
+        <p:txBody>
+          <a:bodyPr rtlCol="0" anchor="ctr" wrap="square" lIns="0" rIns="0" tIns="0" bIns="0"/>
+          <a:lstStyle/>
+          <a:p>
+            <a:pPr algn="ctr"/>
+          </a:p>
+        </p:txBody>
+      </p:sp>
+      <p:sp>
+        <p:nvSpPr>
+          <p:cNvPr id="6" name="TextBox 5"/>
           <p:cNvSpPr txBox="1"/>
           <p:nvPr/>
         </p:nvSpPr>
         <p:spPr>
           <a:xfrm>
-            <a:off x="685800" y="2267712"/>
-            <a:ext cx="247650" cy="252374"/>
+            <a:off x="971550" y="2258187"/>
+            <a:ext cx="9677400" cy="95250"/>
           </a:xfrm>
           <a:prstGeom prst="rect">
             <a:avLst/>
@@ -29645,30 +29949,74 @@
           <a:p>
             <a:pPr algn="l">
               <a:lnSpc>
-                <a:spcPct val="120000"/>
-              </a:lnSpc>
-            </a:pPr>
-            <a:r>
-              <a:rPr sz="1240" b="1" i="0">
-                <a:solidFill>
-                  <a:srgbClr val="E94D1C"/>
-                </a:solidFill>
-                <a:latin typeface="Roboto"/>
-              </a:rPr>
-              <a:t>//</a:t>
-            </a:r>
-          </a:p>
-        </p:txBody>
-      </p:sp>
-      <p:sp>
-        <p:nvSpPr>
-          <p:cNvPr id="6" name="TextBox 5"/>
+                <a:spcPct val="130000"/>
+              </a:lnSpc>
+            </a:pPr>
+            <a:r>
+              <a:rPr sz="1350" b="0" i="0">
+                <a:solidFill>
+                  <a:srgbClr val="1A1A1E"/>
+                </a:solidFill>
+                <a:latin typeface="Roboto"/>
+              </a:rPr>
+              <a:t>Open Container Initiative. Runtime Spec, Image Spec e Distribution Spec. Linux Foundation, fundada em 2015.</a:t>
+            </a:r>
+          </a:p>
+        </p:txBody>
+      </p:sp>
+      <p:sp>
+        <p:nvSpPr>
+          <p:cNvPr id="7" name="Rectangle 6"/>
+          <p:cNvSpPr/>
+          <p:nvPr/>
+        </p:nvSpPr>
+        <p:spPr>
+          <a:xfrm>
+            <a:off x="704850" y="2783205"/>
+            <a:ext cx="57150" cy="57150"/>
+          </a:xfrm>
+          <a:prstGeom prst="rect">
+            <a:avLst/>
+          </a:prstGeom>
+          <a:solidFill>
+            <a:srgbClr val="E94D1C"/>
+          </a:solidFill>
+          <a:ln>
+            <a:noFill/>
+          </a:ln>
+          <a:effectLst/>
+        </p:spPr>
+        <p:style>
+          <a:lnRef idx="1">
+            <a:schemeClr val="accent1"/>
+          </a:lnRef>
+          <a:fillRef idx="3">
+            <a:schemeClr val="accent1"/>
+          </a:fillRef>
+          <a:effectRef idx="2">
+            <a:schemeClr val="accent1"/>
+          </a:effectRef>
+          <a:fontRef idx="minor">
+            <a:schemeClr val="lt1"/>
+          </a:fontRef>
+        </p:style>
+        <p:txBody>
+          <a:bodyPr rtlCol="0" anchor="ctr" wrap="square" lIns="0" rIns="0" tIns="0" bIns="0"/>
+          <a:lstStyle/>
+          <a:p>
+            <a:pPr algn="ctr"/>
+          </a:p>
+        </p:txBody>
+      </p:sp>
+      <p:sp>
+        <p:nvSpPr>
+          <p:cNvPr id="8" name="TextBox 7"/>
           <p:cNvSpPr txBox="1"/>
           <p:nvPr/>
         </p:nvSpPr>
         <p:spPr>
           <a:xfrm>
-            <a:off x="971550" y="2258187"/>
+            <a:off x="971550" y="2694051"/>
             <a:ext cx="9677400" cy="95250"/>
           </a:xfrm>
           <a:prstGeom prst="rect">
@@ -29694,21 +30042,65 @@
                 </a:solidFill>
                 <a:latin typeface="Roboto"/>
               </a:rPr>
-              <a:t>Open Container Initiative. Runtime Spec, Image Spec e Distribution Spec. Linux Foundation, fundada em 2015.</a:t>
-            </a:r>
-          </a:p>
-        </p:txBody>
-      </p:sp>
-      <p:sp>
-        <p:nvSpPr>
-          <p:cNvPr id="7" name="TextBox 6"/>
+              <a:t>WIGGINS, A. The Twelve-Factor App, 2011.</a:t>
+            </a:r>
+          </a:p>
+        </p:txBody>
+      </p:sp>
+      <p:sp>
+        <p:nvSpPr>
+          <p:cNvPr id="9" name="Rectangle 8"/>
+          <p:cNvSpPr/>
+          <p:nvPr/>
+        </p:nvSpPr>
+        <p:spPr>
+          <a:xfrm>
+            <a:off x="704850" y="3219069"/>
+            <a:ext cx="57150" cy="57150"/>
+          </a:xfrm>
+          <a:prstGeom prst="rect">
+            <a:avLst/>
+          </a:prstGeom>
+          <a:solidFill>
+            <a:srgbClr val="E94D1C"/>
+          </a:solidFill>
+          <a:ln>
+            <a:noFill/>
+          </a:ln>
+          <a:effectLst/>
+        </p:spPr>
+        <p:style>
+          <a:lnRef idx="1">
+            <a:schemeClr val="accent1"/>
+          </a:lnRef>
+          <a:fillRef idx="3">
+            <a:schemeClr val="accent1"/>
+          </a:fillRef>
+          <a:effectRef idx="2">
+            <a:schemeClr val="accent1"/>
+          </a:effectRef>
+          <a:fontRef idx="minor">
+            <a:schemeClr val="lt1"/>
+          </a:fontRef>
+        </p:style>
+        <p:txBody>
+          <a:bodyPr rtlCol="0" anchor="ctr" wrap="square" lIns="0" rIns="0" tIns="0" bIns="0"/>
+          <a:lstStyle/>
+          <a:p>
+            <a:pPr algn="ctr"/>
+          </a:p>
+        </p:txBody>
+      </p:sp>
+      <p:sp>
+        <p:nvSpPr>
+          <p:cNvPr id="10" name="TextBox 9"/>
           <p:cNvSpPr txBox="1"/>
           <p:nvPr/>
         </p:nvSpPr>
         <p:spPr>
           <a:xfrm>
-            <a:off x="685800" y="2703576"/>
-            <a:ext cx="247650" cy="252374"/>
+            <a:off x="971550" y="3129915"/>
+            <a:ext cx="9677400" cy="95250"/>
           </a:xfrm>
           <a:prstGeom prst="rect">
             <a:avLst/>
@@ -29723,30 +30115,74 @@
           <a:p>
             <a:pPr algn="l">
               <a:lnSpc>
-                <a:spcPct val="120000"/>
-              </a:lnSpc>
-            </a:pPr>
-            <a:r>
-              <a:rPr sz="1240" b="1" i="0">
-                <a:solidFill>
-                  <a:srgbClr val="E94D1C"/>
-                </a:solidFill>
-                <a:latin typeface="Roboto"/>
-              </a:rPr>
-              <a:t>//</a:t>
-            </a:r>
-          </a:p>
-        </p:txBody>
-      </p:sp>
-      <p:sp>
-        <p:nvSpPr>
-          <p:cNvPr id="8" name="TextBox 7"/>
+                <a:spcPct val="130000"/>
+              </a:lnSpc>
+            </a:pPr>
+            <a:r>
+              <a:rPr sz="1350" b="0" i="0">
+                <a:solidFill>
+                  <a:srgbClr val="1A1A1E"/>
+                </a:solidFill>
+                <a:latin typeface="Roboto"/>
+              </a:rPr>
+              <a:t>FELTER, W. et al. An updated performance comparison of virtual machines and Linux containers. IBM Research Report, 2015.</a:t>
+            </a:r>
+          </a:p>
+        </p:txBody>
+      </p:sp>
+      <p:sp>
+        <p:nvSpPr>
+          <p:cNvPr id="11" name="Rectangle 10"/>
+          <p:cNvSpPr/>
+          <p:nvPr/>
+        </p:nvSpPr>
+        <p:spPr>
+          <a:xfrm>
+            <a:off x="704850" y="3881247"/>
+            <a:ext cx="57150" cy="57150"/>
+          </a:xfrm>
+          <a:prstGeom prst="rect">
+            <a:avLst/>
+          </a:prstGeom>
+          <a:solidFill>
+            <a:srgbClr val="E94D1C"/>
+          </a:solidFill>
+          <a:ln>
+            <a:noFill/>
+          </a:ln>
+          <a:effectLst/>
+        </p:spPr>
+        <p:style>
+          <a:lnRef idx="1">
+            <a:schemeClr val="accent1"/>
+          </a:lnRef>
+          <a:fillRef idx="3">
+            <a:schemeClr val="accent1"/>
+          </a:fillRef>
+          <a:effectRef idx="2">
+            <a:schemeClr val="accent1"/>
+          </a:effectRef>
+          <a:fontRef idx="minor">
+            <a:schemeClr val="lt1"/>
+          </a:fontRef>
+        </p:style>
+        <p:txBody>
+          <a:bodyPr rtlCol="0" anchor="ctr" wrap="square" lIns="0" rIns="0" tIns="0" bIns="0"/>
+          <a:lstStyle/>
+          <a:p>
+            <a:pPr algn="ctr"/>
+          </a:p>
+        </p:txBody>
+      </p:sp>
+      <p:sp>
+        <p:nvSpPr>
+          <p:cNvPr id="12" name="TextBox 11"/>
           <p:cNvSpPr txBox="1"/>
           <p:nvPr/>
         </p:nvSpPr>
         <p:spPr>
           <a:xfrm>
-            <a:off x="971550" y="2694051"/>
+            <a:off x="971550" y="3792093"/>
             <a:ext cx="9677400" cy="95250"/>
           </a:xfrm>
           <a:prstGeom prst="rect">
@@ -29772,21 +30208,65 @@
                 </a:solidFill>
                 <a:latin typeface="Roboto"/>
               </a:rPr>
-              <a:t>WIGGINS, A. The Twelve-Factor App, 2011.</a:t>
-            </a:r>
-          </a:p>
-        </p:txBody>
-      </p:sp>
-      <p:sp>
-        <p:nvSpPr>
-          <p:cNvPr id="9" name="TextBox 8"/>
+              <a:t>MERKEL, D. Docker: lightweight Linux containers for consistent development and deployment. Linux Journal, 2014.</a:t>
+            </a:r>
+          </a:p>
+        </p:txBody>
+      </p:sp>
+      <p:sp>
+        <p:nvSpPr>
+          <p:cNvPr id="13" name="Rectangle 12"/>
+          <p:cNvSpPr/>
+          <p:nvPr/>
+        </p:nvSpPr>
+        <p:spPr>
+          <a:xfrm>
+            <a:off x="704850" y="4317111"/>
+            <a:ext cx="57150" cy="57150"/>
+          </a:xfrm>
+          <a:prstGeom prst="rect">
+            <a:avLst/>
+          </a:prstGeom>
+          <a:solidFill>
+            <a:srgbClr val="E94D1C"/>
+          </a:solidFill>
+          <a:ln>
+            <a:noFill/>
+          </a:ln>
+          <a:effectLst/>
+        </p:spPr>
+        <p:style>
+          <a:lnRef idx="1">
+            <a:schemeClr val="accent1"/>
+          </a:lnRef>
+          <a:fillRef idx="3">
+            <a:schemeClr val="accent1"/>
+          </a:fillRef>
+          <a:effectRef idx="2">
+            <a:schemeClr val="accent1"/>
+          </a:effectRef>
+          <a:fontRef idx="minor">
+            <a:schemeClr val="lt1"/>
+          </a:fontRef>
+        </p:style>
+        <p:txBody>
+          <a:bodyPr rtlCol="0" anchor="ctr" wrap="square" lIns="0" rIns="0" tIns="0" bIns="0"/>
+          <a:lstStyle/>
+          <a:p>
+            <a:pPr algn="ctr"/>
+          </a:p>
+        </p:txBody>
+      </p:sp>
+      <p:sp>
+        <p:nvSpPr>
+          <p:cNvPr id="14" name="TextBox 13"/>
           <p:cNvSpPr txBox="1"/>
           <p:nvPr/>
         </p:nvSpPr>
         <p:spPr>
           <a:xfrm>
-            <a:off x="685800" y="3139440"/>
-            <a:ext cx="247650" cy="252374"/>
+            <a:off x="971550" y="4227957"/>
+            <a:ext cx="9677400" cy="95250"/>
           </a:xfrm>
           <a:prstGeom prst="rect">
             <a:avLst/>
@@ -29801,30 +30281,74 @@
           <a:p>
             <a:pPr algn="l">
               <a:lnSpc>
-                <a:spcPct val="120000"/>
-              </a:lnSpc>
-            </a:pPr>
-            <a:r>
-              <a:rPr sz="1240" b="1" i="0">
-                <a:solidFill>
-                  <a:srgbClr val="E94D1C"/>
-                </a:solidFill>
-                <a:latin typeface="Roboto"/>
-              </a:rPr>
-              <a:t>//</a:t>
-            </a:r>
-          </a:p>
-        </p:txBody>
-      </p:sp>
-      <p:sp>
-        <p:nvSpPr>
-          <p:cNvPr id="10" name="TextBox 9"/>
+                <a:spcPct val="130000"/>
+              </a:lnSpc>
+            </a:pPr>
+            <a:r>
+              <a:rPr sz="1350" b="0" i="0">
+                <a:solidFill>
+                  <a:srgbClr val="1A1A1E"/>
+                </a:solidFill>
+                <a:latin typeface="Roboto"/>
+              </a:rPr>
+              <a:t>NIST SP 800-190. Application Container Security Guide.</a:t>
+            </a:r>
+          </a:p>
+        </p:txBody>
+      </p:sp>
+      <p:sp>
+        <p:nvSpPr>
+          <p:cNvPr id="15" name="Rectangle 14"/>
+          <p:cNvSpPr/>
+          <p:nvPr/>
+        </p:nvSpPr>
+        <p:spPr>
+          <a:xfrm>
+            <a:off x="704850" y="4752975"/>
+            <a:ext cx="57150" cy="57150"/>
+          </a:xfrm>
+          <a:prstGeom prst="rect">
+            <a:avLst/>
+          </a:prstGeom>
+          <a:solidFill>
+            <a:srgbClr val="E94D1C"/>
+          </a:solidFill>
+          <a:ln>
+            <a:noFill/>
+          </a:ln>
+          <a:effectLst/>
+        </p:spPr>
+        <p:style>
+          <a:lnRef idx="1">
+            <a:schemeClr val="accent1"/>
+          </a:lnRef>
+          <a:fillRef idx="3">
+            <a:schemeClr val="accent1"/>
+          </a:fillRef>
+          <a:effectRef idx="2">
+            <a:schemeClr val="accent1"/>
+          </a:effectRef>
+          <a:fontRef idx="minor">
+            <a:schemeClr val="lt1"/>
+          </a:fontRef>
+        </p:style>
+        <p:txBody>
+          <a:bodyPr rtlCol="0" anchor="ctr" wrap="square" lIns="0" rIns="0" tIns="0" bIns="0"/>
+          <a:lstStyle/>
+          <a:p>
+            <a:pPr algn="ctr"/>
+          </a:p>
+        </p:txBody>
+      </p:sp>
+      <p:sp>
+        <p:nvSpPr>
+          <p:cNvPr id="16" name="TextBox 15"/>
           <p:cNvSpPr txBox="1"/>
           <p:nvPr/>
         </p:nvSpPr>
         <p:spPr>
           <a:xfrm>
-            <a:off x="971550" y="3129915"/>
+            <a:off x="971550" y="4663821"/>
             <a:ext cx="9677400" cy="95250"/>
           </a:xfrm>
           <a:prstGeom prst="rect">
@@ -29850,21 +30374,65 @@
                 </a:solidFill>
                 <a:latin typeface="Roboto"/>
               </a:rPr>
-              <a:t>FELTER, W. et al. An updated performance comparison of virtual machines and Linux containers. IBM Research Report, 2015.</a:t>
-            </a:r>
-          </a:p>
-        </p:txBody>
-      </p:sp>
-      <p:sp>
-        <p:nvSpPr>
-          <p:cNvPr id="11" name="TextBox 10"/>
+              <a:t>SOMMERVILLE, I. Engenharia de Software. 6. ed. Addison Wesley, 2004.</a:t>
+            </a:r>
+          </a:p>
+        </p:txBody>
+      </p:sp>
+      <p:sp>
+        <p:nvSpPr>
+          <p:cNvPr id="17" name="Rectangle 16"/>
+          <p:cNvSpPr/>
+          <p:nvPr/>
+        </p:nvSpPr>
+        <p:spPr>
+          <a:xfrm>
+            <a:off x="704850" y="5188839"/>
+            <a:ext cx="57150" cy="57150"/>
+          </a:xfrm>
+          <a:prstGeom prst="rect">
+            <a:avLst/>
+          </a:prstGeom>
+          <a:solidFill>
+            <a:srgbClr val="E94D1C"/>
+          </a:solidFill>
+          <a:ln>
+            <a:noFill/>
+          </a:ln>
+          <a:effectLst/>
+        </p:spPr>
+        <p:style>
+          <a:lnRef idx="1">
+            <a:schemeClr val="accent1"/>
+          </a:lnRef>
+          <a:fillRef idx="3">
+            <a:schemeClr val="accent1"/>
+          </a:fillRef>
+          <a:effectRef idx="2">
+            <a:schemeClr val="accent1"/>
+          </a:effectRef>
+          <a:fontRef idx="minor">
+            <a:schemeClr val="lt1"/>
+          </a:fontRef>
+        </p:style>
+        <p:txBody>
+          <a:bodyPr rtlCol="0" anchor="ctr" wrap="square" lIns="0" rIns="0" tIns="0" bIns="0"/>
+          <a:lstStyle/>
+          <a:p>
+            <a:pPr algn="ctr"/>
+          </a:p>
+        </p:txBody>
+      </p:sp>
+      <p:sp>
+        <p:nvSpPr>
+          <p:cNvPr id="18" name="TextBox 17"/>
           <p:cNvSpPr txBox="1"/>
           <p:nvPr/>
         </p:nvSpPr>
         <p:spPr>
           <a:xfrm>
-            <a:off x="685800" y="3801618"/>
-            <a:ext cx="247650" cy="252374"/>
+            <a:off x="971550" y="5099685"/>
+            <a:ext cx="9677400" cy="95250"/>
           </a:xfrm>
           <a:prstGeom prst="rect">
             <a:avLst/>
@@ -29879,45 +30447,6 @@
           <a:p>
             <a:pPr algn="l">
               <a:lnSpc>
-                <a:spcPct val="120000"/>
-              </a:lnSpc>
-            </a:pPr>
-            <a:r>
-              <a:rPr sz="1240" b="1" i="0">
-                <a:solidFill>
-                  <a:srgbClr val="E94D1C"/>
-                </a:solidFill>
-                <a:latin typeface="Roboto"/>
-              </a:rPr>
-              <a:t>//</a:t>
-            </a:r>
-          </a:p>
-        </p:txBody>
-      </p:sp>
-      <p:sp>
-        <p:nvSpPr>
-          <p:cNvPr id="12" name="TextBox 11"/>
-          <p:cNvSpPr txBox="1"/>
-          <p:nvPr/>
-        </p:nvSpPr>
-        <p:spPr>
-          <a:xfrm>
-            <a:off x="971550" y="3792093"/>
-            <a:ext cx="9677400" cy="95250"/>
-          </a:xfrm>
-          <a:prstGeom prst="rect">
-            <a:avLst/>
-          </a:prstGeom>
-          <a:noFill/>
-        </p:spPr>
-        <p:txBody>
-          <a:bodyPr wrap="square" lIns="0" rIns="0" tIns="0" bIns="0" anchor="t">
-            <a:spAutoFit/>
-          </a:bodyPr>
-          <a:lstStyle/>
-          <a:p>
-            <a:pPr algn="l">
-              <a:lnSpc>
                 <a:spcPct val="130000"/>
               </a:lnSpc>
             </a:pPr>
@@ -29928,240 +30457,6 @@
                 </a:solidFill>
                 <a:latin typeface="Roboto"/>
               </a:rPr>
-              <a:t>MERKEL, D. Docker: lightweight Linux containers for consistent development and deployment. Linux Journal, 2014.</a:t>
-            </a:r>
-          </a:p>
-        </p:txBody>
-      </p:sp>
-      <p:sp>
-        <p:nvSpPr>
-          <p:cNvPr id="13" name="TextBox 12"/>
-          <p:cNvSpPr txBox="1"/>
-          <p:nvPr/>
-        </p:nvSpPr>
-        <p:spPr>
-          <a:xfrm>
-            <a:off x="685800" y="4237482"/>
-            <a:ext cx="247650" cy="252374"/>
-          </a:xfrm>
-          <a:prstGeom prst="rect">
-            <a:avLst/>
-          </a:prstGeom>
-          <a:noFill/>
-        </p:spPr>
-        <p:txBody>
-          <a:bodyPr wrap="square" lIns="0" rIns="0" tIns="0" bIns="0" anchor="t">
-            <a:spAutoFit/>
-          </a:bodyPr>
-          <a:lstStyle/>
-          <a:p>
-            <a:pPr algn="l">
-              <a:lnSpc>
-                <a:spcPct val="120000"/>
-              </a:lnSpc>
-            </a:pPr>
-            <a:r>
-              <a:rPr sz="1240" b="1" i="0">
-                <a:solidFill>
-                  <a:srgbClr val="E94D1C"/>
-                </a:solidFill>
-                <a:latin typeface="Roboto"/>
-              </a:rPr>
-              <a:t>//</a:t>
-            </a:r>
-          </a:p>
-        </p:txBody>
-      </p:sp>
-      <p:sp>
-        <p:nvSpPr>
-          <p:cNvPr id="14" name="TextBox 13"/>
-          <p:cNvSpPr txBox="1"/>
-          <p:nvPr/>
-        </p:nvSpPr>
-        <p:spPr>
-          <a:xfrm>
-            <a:off x="971550" y="4227957"/>
-            <a:ext cx="9677400" cy="95250"/>
-          </a:xfrm>
-          <a:prstGeom prst="rect">
-            <a:avLst/>
-          </a:prstGeom>
-          <a:noFill/>
-        </p:spPr>
-        <p:txBody>
-          <a:bodyPr wrap="square" lIns="0" rIns="0" tIns="0" bIns="0" anchor="t">
-            <a:spAutoFit/>
-          </a:bodyPr>
-          <a:lstStyle/>
-          <a:p>
-            <a:pPr algn="l">
-              <a:lnSpc>
-                <a:spcPct val="130000"/>
-              </a:lnSpc>
-            </a:pPr>
-            <a:r>
-              <a:rPr sz="1350" b="0" i="0">
-                <a:solidFill>
-                  <a:srgbClr val="1A1A1E"/>
-                </a:solidFill>
-                <a:latin typeface="Roboto"/>
-              </a:rPr>
-              <a:t>NIST SP 800-190. Application Container Security Guide.</a:t>
-            </a:r>
-          </a:p>
-        </p:txBody>
-      </p:sp>
-      <p:sp>
-        <p:nvSpPr>
-          <p:cNvPr id="15" name="TextBox 14"/>
-          <p:cNvSpPr txBox="1"/>
-          <p:nvPr/>
-        </p:nvSpPr>
-        <p:spPr>
-          <a:xfrm>
-            <a:off x="685800" y="4673346"/>
-            <a:ext cx="247650" cy="252374"/>
-          </a:xfrm>
-          <a:prstGeom prst="rect">
-            <a:avLst/>
-          </a:prstGeom>
-          <a:noFill/>
-        </p:spPr>
-        <p:txBody>
-          <a:bodyPr wrap="square" lIns="0" rIns="0" tIns="0" bIns="0" anchor="t">
-            <a:spAutoFit/>
-          </a:bodyPr>
-          <a:lstStyle/>
-          <a:p>
-            <a:pPr algn="l">
-              <a:lnSpc>
-                <a:spcPct val="120000"/>
-              </a:lnSpc>
-            </a:pPr>
-            <a:r>
-              <a:rPr sz="1240" b="1" i="0">
-                <a:solidFill>
-                  <a:srgbClr val="E94D1C"/>
-                </a:solidFill>
-                <a:latin typeface="Roboto"/>
-              </a:rPr>
-              <a:t>//</a:t>
-            </a:r>
-          </a:p>
-        </p:txBody>
-      </p:sp>
-      <p:sp>
-        <p:nvSpPr>
-          <p:cNvPr id="16" name="TextBox 15"/>
-          <p:cNvSpPr txBox="1"/>
-          <p:nvPr/>
-        </p:nvSpPr>
-        <p:spPr>
-          <a:xfrm>
-            <a:off x="971550" y="4663821"/>
-            <a:ext cx="9677400" cy="95250"/>
-          </a:xfrm>
-          <a:prstGeom prst="rect">
-            <a:avLst/>
-          </a:prstGeom>
-          <a:noFill/>
-        </p:spPr>
-        <p:txBody>
-          <a:bodyPr wrap="square" lIns="0" rIns="0" tIns="0" bIns="0" anchor="t">
-            <a:spAutoFit/>
-          </a:bodyPr>
-          <a:lstStyle/>
-          <a:p>
-            <a:pPr algn="l">
-              <a:lnSpc>
-                <a:spcPct val="130000"/>
-              </a:lnSpc>
-            </a:pPr>
-            <a:r>
-              <a:rPr sz="1350" b="0" i="0">
-                <a:solidFill>
-                  <a:srgbClr val="1A1A1E"/>
-                </a:solidFill>
-                <a:latin typeface="Roboto"/>
-              </a:rPr>
-              <a:t>SOMMERVILLE, I. Engenharia de Software. 6. ed. Addison Wesley, 2004.</a:t>
-            </a:r>
-          </a:p>
-        </p:txBody>
-      </p:sp>
-      <p:sp>
-        <p:nvSpPr>
-          <p:cNvPr id="17" name="TextBox 16"/>
-          <p:cNvSpPr txBox="1"/>
-          <p:nvPr/>
-        </p:nvSpPr>
-        <p:spPr>
-          <a:xfrm>
-            <a:off x="685800" y="5109210"/>
-            <a:ext cx="247650" cy="252374"/>
-          </a:xfrm>
-          <a:prstGeom prst="rect">
-            <a:avLst/>
-          </a:prstGeom>
-          <a:noFill/>
-        </p:spPr>
-        <p:txBody>
-          <a:bodyPr wrap="square" lIns="0" rIns="0" tIns="0" bIns="0" anchor="t">
-            <a:spAutoFit/>
-          </a:bodyPr>
-          <a:lstStyle/>
-          <a:p>
-            <a:pPr algn="l">
-              <a:lnSpc>
-                <a:spcPct val="120000"/>
-              </a:lnSpc>
-            </a:pPr>
-            <a:r>
-              <a:rPr sz="1240" b="1" i="0">
-                <a:solidFill>
-                  <a:srgbClr val="E94D1C"/>
-                </a:solidFill>
-                <a:latin typeface="Roboto"/>
-              </a:rPr>
-              <a:t>//</a:t>
-            </a:r>
-          </a:p>
-        </p:txBody>
-      </p:sp>
-      <p:sp>
-        <p:nvSpPr>
-          <p:cNvPr id="18" name="TextBox 17"/>
-          <p:cNvSpPr txBox="1"/>
-          <p:nvPr/>
-        </p:nvSpPr>
-        <p:spPr>
-          <a:xfrm>
-            <a:off x="971550" y="5099685"/>
-            <a:ext cx="9677400" cy="95250"/>
-          </a:xfrm>
-          <a:prstGeom prst="rect">
-            <a:avLst/>
-          </a:prstGeom>
-          <a:noFill/>
-        </p:spPr>
-        <p:txBody>
-          <a:bodyPr wrap="square" lIns="0" rIns="0" tIns="0" bIns="0" anchor="t">
-            <a:spAutoFit/>
-          </a:bodyPr>
-          <a:lstStyle/>
-          <a:p>
-            <a:pPr algn="l">
-              <a:lnSpc>
-                <a:spcPct val="130000"/>
-              </a:lnSpc>
-            </a:pPr>
-            <a:r>
-              <a:rPr sz="1350" b="0" i="0">
-                <a:solidFill>
-                  <a:srgbClr val="1A1A1E"/>
-                </a:solidFill>
-                <a:latin typeface="Roboto"/>
-              </a:rPr>
               <a:t>FOWLER, M. Patterns of Enterprise Application Architecture. Addison Wesley, 2002.</a:t>
             </a:r>
           </a:p>
@@ -30169,40 +30464,45 @@
       </p:sp>
       <p:sp>
         <p:nvSpPr>
-          <p:cNvPr id="19" name="TextBox 18"/>
-          <p:cNvSpPr txBox="1"/>
-          <p:nvPr/>
-        </p:nvSpPr>
-        <p:spPr>
-          <a:xfrm>
-            <a:off x="685800" y="5545074"/>
-            <a:ext cx="247650" cy="252374"/>
-          </a:xfrm>
-          <a:prstGeom prst="rect">
-            <a:avLst/>
-          </a:prstGeom>
-          <a:noFill/>
-        </p:spPr>
-        <p:txBody>
-          <a:bodyPr wrap="square" lIns="0" rIns="0" tIns="0" bIns="0" anchor="t">
-            <a:spAutoFit/>
-          </a:bodyPr>
-          <a:lstStyle/>
-          <a:p>
-            <a:pPr algn="l">
-              <a:lnSpc>
-                <a:spcPct val="120000"/>
-              </a:lnSpc>
-            </a:pPr>
-            <a:r>
-              <a:rPr sz="1240" b="1" i="0">
-                <a:solidFill>
-                  <a:srgbClr val="E94D1C"/>
-                </a:solidFill>
-                <a:latin typeface="Roboto"/>
-              </a:rPr>
-              <a:t>//</a:t>
-            </a:r>
+          <p:cNvPr id="19" name="Rectangle 18"/>
+          <p:cNvSpPr/>
+          <p:nvPr/>
+        </p:nvSpPr>
+        <p:spPr>
+          <a:xfrm>
+            <a:off x="704850" y="5624703"/>
+            <a:ext cx="57150" cy="57150"/>
+          </a:xfrm>
+          <a:prstGeom prst="rect">
+            <a:avLst/>
+          </a:prstGeom>
+          <a:solidFill>
+            <a:srgbClr val="E94D1C"/>
+          </a:solidFill>
+          <a:ln>
+            <a:noFill/>
+          </a:ln>
+          <a:effectLst/>
+        </p:spPr>
+        <p:style>
+          <a:lnRef idx="1">
+            <a:schemeClr val="accent1"/>
+          </a:lnRef>
+          <a:fillRef idx="3">
+            <a:schemeClr val="accent1"/>
+          </a:fillRef>
+          <a:effectRef idx="2">
+            <a:schemeClr val="accent1"/>
+          </a:effectRef>
+          <a:fontRef idx="minor">
+            <a:schemeClr val="lt1"/>
+          </a:fontRef>
+        </p:style>
+        <p:txBody>
+          <a:bodyPr rtlCol="0" anchor="ctr" wrap="square" lIns="0" rIns="0" tIns="0" bIns="0"/>
+          <a:lstStyle/>
+          <a:p>
+            <a:pPr algn="ctr"/>
           </a:p>
         </p:txBody>
       </p:sp>
@@ -31686,7 +31986,7 @@
                 </a:solidFill>
                 <a:latin typeface="Roboto"/>
               </a:rPr>
-              <a:t>CONTAINER · DEFINIÇÃO DO GRUPO</a:t>
+              <a:t>CONTAINER</a:t>
             </a:r>
           </a:p>
         </p:txBody>
@@ -31737,131 +32037,14 @@
       </p:sp>
       <p:sp>
         <p:nvSpPr>
-          <p:cNvPr id="7" name="TextBox 6"/>
-          <p:cNvSpPr txBox="1"/>
-          <p:nvPr/>
-        </p:nvSpPr>
-        <p:spPr>
-          <a:xfrm>
-            <a:off x="685800" y="3758184"/>
-            <a:ext cx="247650" cy="294437"/>
-          </a:xfrm>
-          <a:prstGeom prst="rect">
-            <a:avLst/>
-          </a:prstGeom>
-          <a:noFill/>
-        </p:spPr>
-        <p:txBody>
-          <a:bodyPr wrap="square" lIns="0" rIns="0" tIns="0" bIns="0" anchor="t">
-            <a:spAutoFit/>
-          </a:bodyPr>
-          <a:lstStyle/>
-          <a:p>
-            <a:pPr algn="l">
-              <a:lnSpc>
-                <a:spcPct val="120000"/>
-              </a:lnSpc>
-            </a:pPr>
-            <a:r>
-              <a:rPr sz="1450" b="1" i="0">
-                <a:solidFill>
-                  <a:srgbClr val="E94D1C"/>
-                </a:solidFill>
-                <a:latin typeface="Roboto"/>
-              </a:rPr>
-              <a:t>//</a:t>
-            </a:r>
-          </a:p>
-        </p:txBody>
-      </p:sp>
-      <p:sp>
-        <p:nvSpPr>
-          <p:cNvPr id="8" name="TextBox 7"/>
-          <p:cNvSpPr txBox="1"/>
-          <p:nvPr/>
-        </p:nvSpPr>
-        <p:spPr>
-          <a:xfrm>
-            <a:off x="971550" y="3748659"/>
-            <a:ext cx="4857750" cy="95250"/>
-          </a:xfrm>
-          <a:prstGeom prst="rect">
-            <a:avLst/>
-          </a:prstGeom>
-          <a:noFill/>
-        </p:spPr>
-        <p:txBody>
-          <a:bodyPr wrap="square" lIns="0" rIns="0" tIns="0" bIns="0" anchor="t">
-            <a:spAutoFit/>
-          </a:bodyPr>
-          <a:lstStyle/>
-          <a:p>
-            <a:pPr algn="l">
-              <a:lnSpc>
-                <a:spcPct val="130000"/>
-              </a:lnSpc>
-            </a:pPr>
-            <a:r>
-              <a:rPr sz="1580" b="0" i="0">
-                <a:solidFill>
-                  <a:srgbClr val="1A1A1E"/>
-                </a:solidFill>
-                <a:latin typeface="Roboto"/>
-              </a:rPr>
-              <a:t>Um ou mais processos executados com visão isolada por namespaces, consumo limitado por cgroups e privilégio reduzido por capabilities e seccomp, sobre um sistema de arquivos raiz próprio.</a:t>
-            </a:r>
-          </a:p>
-        </p:txBody>
-      </p:sp>
-      <p:sp>
-        <p:nvSpPr>
-          <p:cNvPr id="9" name="TextBox 8"/>
-          <p:cNvSpPr txBox="1"/>
-          <p:nvPr/>
-        </p:nvSpPr>
-        <p:spPr>
-          <a:xfrm>
-            <a:off x="6362700" y="3253359"/>
-            <a:ext cx="5143500" cy="182880"/>
-          </a:xfrm>
-          <a:prstGeom prst="rect">
-            <a:avLst/>
-          </a:prstGeom>
-          <a:noFill/>
-        </p:spPr>
-        <p:txBody>
-          <a:bodyPr wrap="square" lIns="0" rIns="0" tIns="0" bIns="0" anchor="t">
-            <a:spAutoFit/>
-          </a:bodyPr>
-          <a:lstStyle/>
-          <a:p>
-            <a:pPr algn="l">
-              <a:lnSpc>
-                <a:spcPct val="120000"/>
-              </a:lnSpc>
-            </a:pPr>
-            <a:r>
-              <a:rPr sz="900" b="1" i="0" spc="120">
-                <a:solidFill>
-                  <a:srgbClr val="E94D1C"/>
-                </a:solidFill>
-                <a:latin typeface="Roboto"/>
-              </a:rPr>
-              <a:t>IMAGEM · OPEN CONTAINER INITIATIVE, IMAGE SPEC</a:t>
-            </a:r>
-          </a:p>
-        </p:txBody>
-      </p:sp>
-      <p:sp>
-        <p:nvSpPr>
-          <p:cNvPr id="10" name="Rectangle 9"/>
+          <p:cNvPr id="7" name="Rectangle 6"/>
           <p:cNvSpPr/>
           <p:nvPr/>
         </p:nvSpPr>
         <p:spPr>
           <a:xfrm>
-            <a:off x="6362700" y="3462909"/>
-            <a:ext cx="419100" cy="28575"/>
+            <a:off x="704850" y="3852672"/>
+            <a:ext cx="57150" cy="57150"/>
           </a:xfrm>
           <a:prstGeom prst="rect">
             <a:avLst/>
@@ -31898,14 +32081,14 @@
       </p:sp>
       <p:sp>
         <p:nvSpPr>
-          <p:cNvPr id="11" name="TextBox 10"/>
+          <p:cNvPr id="8" name="TextBox 7"/>
           <p:cNvSpPr txBox="1"/>
           <p:nvPr/>
         </p:nvSpPr>
         <p:spPr>
           <a:xfrm>
-            <a:off x="6362700" y="3758184"/>
-            <a:ext cx="247650" cy="294437"/>
+            <a:off x="971550" y="3748659"/>
+            <a:ext cx="4857750" cy="95250"/>
           </a:xfrm>
           <a:prstGeom prst="rect">
             <a:avLst/>
@@ -31920,18 +32103,145 @@
           <a:p>
             <a:pPr algn="l">
               <a:lnSpc>
+                <a:spcPct val="130000"/>
+              </a:lnSpc>
+            </a:pPr>
+            <a:r>
+              <a:rPr sz="1580" b="0" i="0">
+                <a:solidFill>
+                  <a:srgbClr val="1A1A1E"/>
+                </a:solidFill>
+                <a:latin typeface="Roboto"/>
+              </a:rPr>
+              <a:t>Um ou mais processos executados com visão isolada por namespaces, consumo limitado por cgroups e privilégio reduzido por capabilities e seccomp, sobre um sistema de arquivos raiz próprio.</a:t>
+            </a:r>
+          </a:p>
+        </p:txBody>
+      </p:sp>
+      <p:sp>
+        <p:nvSpPr>
+          <p:cNvPr id="9" name="TextBox 8"/>
+          <p:cNvSpPr txBox="1"/>
+          <p:nvPr/>
+        </p:nvSpPr>
+        <p:spPr>
+          <a:xfrm>
+            <a:off x="6362700" y="3253359"/>
+            <a:ext cx="5143500" cy="182880"/>
+          </a:xfrm>
+          <a:prstGeom prst="rect">
+            <a:avLst/>
+          </a:prstGeom>
+          <a:noFill/>
+        </p:spPr>
+        <p:txBody>
+          <a:bodyPr wrap="square" lIns="0" rIns="0" tIns="0" bIns="0" anchor="t">
+            <a:spAutoFit/>
+          </a:bodyPr>
+          <a:lstStyle/>
+          <a:p>
+            <a:pPr algn="l">
+              <a:lnSpc>
                 <a:spcPct val="120000"/>
               </a:lnSpc>
             </a:pPr>
             <a:r>
-              <a:rPr sz="1450" b="1" i="0">
+              <a:rPr sz="900" b="1" i="0" spc="120">
                 <a:solidFill>
                   <a:srgbClr val="E94D1C"/>
                 </a:solidFill>
                 <a:latin typeface="Roboto"/>
               </a:rPr>
-              <a:t>//</a:t>
-            </a:r>
+              <a:t>IMAGEM</a:t>
+            </a:r>
+          </a:p>
+        </p:txBody>
+      </p:sp>
+      <p:sp>
+        <p:nvSpPr>
+          <p:cNvPr id="10" name="Rectangle 9"/>
+          <p:cNvSpPr/>
+          <p:nvPr/>
+        </p:nvSpPr>
+        <p:spPr>
+          <a:xfrm>
+            <a:off x="6362700" y="3462909"/>
+            <a:ext cx="419100" cy="28575"/>
+          </a:xfrm>
+          <a:prstGeom prst="rect">
+            <a:avLst/>
+          </a:prstGeom>
+          <a:solidFill>
+            <a:srgbClr val="E94D1C"/>
+          </a:solidFill>
+          <a:ln>
+            <a:noFill/>
+          </a:ln>
+          <a:effectLst/>
+        </p:spPr>
+        <p:style>
+          <a:lnRef idx="1">
+            <a:schemeClr val="accent1"/>
+          </a:lnRef>
+          <a:fillRef idx="3">
+            <a:schemeClr val="accent1"/>
+          </a:fillRef>
+          <a:effectRef idx="2">
+            <a:schemeClr val="accent1"/>
+          </a:effectRef>
+          <a:fontRef idx="minor">
+            <a:schemeClr val="lt1"/>
+          </a:fontRef>
+        </p:style>
+        <p:txBody>
+          <a:bodyPr rtlCol="0" anchor="ctr" wrap="square" lIns="0" rIns="0" tIns="0" bIns="0"/>
+          <a:lstStyle/>
+          <a:p>
+            <a:pPr algn="ctr"/>
+          </a:p>
+        </p:txBody>
+      </p:sp>
+      <p:sp>
+        <p:nvSpPr>
+          <p:cNvPr id="11" name="Rectangle 10"/>
+          <p:cNvSpPr/>
+          <p:nvPr/>
+        </p:nvSpPr>
+        <p:spPr>
+          <a:xfrm>
+            <a:off x="6381750" y="3852672"/>
+            <a:ext cx="57150" cy="57150"/>
+          </a:xfrm>
+          <a:prstGeom prst="rect">
+            <a:avLst/>
+          </a:prstGeom>
+          <a:solidFill>
+            <a:srgbClr val="E94D1C"/>
+          </a:solidFill>
+          <a:ln>
+            <a:noFill/>
+          </a:ln>
+          <a:effectLst/>
+        </p:spPr>
+        <p:style>
+          <a:lnRef idx="1">
+            <a:schemeClr val="accent1"/>
+          </a:lnRef>
+          <a:fillRef idx="3">
+            <a:schemeClr val="accent1"/>
+          </a:fillRef>
+          <a:effectRef idx="2">
+            <a:schemeClr val="accent1"/>
+          </a:effectRef>
+          <a:fontRef idx="minor">
+            <a:schemeClr val="lt1"/>
+          </a:fontRef>
+        </p:style>
+        <p:txBody>
+          <a:bodyPr rtlCol="0" anchor="ctr" wrap="square" lIns="0" rIns="0" tIns="0" bIns="0"/>
+          <a:lstStyle/>
+          <a:p>
+            <a:pPr algn="ctr"/>
           </a:p>
         </p:txBody>
       </p:sp>
@@ -33146,287 +33456,14 @@
       </p:sp>
       <p:sp>
         <p:nvSpPr>
-          <p:cNvPr id="7" name="TextBox 6"/>
-          <p:cNvSpPr txBox="1"/>
-          <p:nvPr/>
-        </p:nvSpPr>
-        <p:spPr>
-          <a:xfrm>
-            <a:off x="685800" y="3095434"/>
-            <a:ext cx="247650" cy="294437"/>
-          </a:xfrm>
-          <a:prstGeom prst="rect">
-            <a:avLst/>
-          </a:prstGeom>
-          <a:noFill/>
-        </p:spPr>
-        <p:txBody>
-          <a:bodyPr wrap="square" lIns="0" rIns="0" tIns="0" bIns="0" anchor="t">
-            <a:spAutoFit/>
-          </a:bodyPr>
-          <a:lstStyle/>
-          <a:p>
-            <a:pPr algn="l">
-              <a:lnSpc>
-                <a:spcPct val="120000"/>
-              </a:lnSpc>
-            </a:pPr>
-            <a:r>
-              <a:rPr sz="1450" b="1" i="0">
-                <a:solidFill>
-                  <a:srgbClr val="E94D1C"/>
-                </a:solidFill>
-                <a:latin typeface="Roboto"/>
-              </a:rPr>
-              <a:t>//</a:t>
-            </a:r>
-          </a:p>
-        </p:txBody>
-      </p:sp>
-      <p:sp>
-        <p:nvSpPr>
-          <p:cNvPr id="8" name="TextBox 7"/>
-          <p:cNvSpPr txBox="1"/>
-          <p:nvPr/>
-        </p:nvSpPr>
-        <p:spPr>
-          <a:xfrm>
-            <a:off x="971550" y="3085910"/>
-            <a:ext cx="4857750" cy="95250"/>
-          </a:xfrm>
-          <a:prstGeom prst="rect">
-            <a:avLst/>
-          </a:prstGeom>
-          <a:noFill/>
-        </p:spPr>
-        <p:txBody>
-          <a:bodyPr wrap="square" lIns="0" rIns="0" tIns="0" bIns="0" anchor="t">
-            <a:spAutoFit/>
-          </a:bodyPr>
-          <a:lstStyle/>
-          <a:p>
-            <a:pPr algn="l">
-              <a:lnSpc>
-                <a:spcPct val="130000"/>
-              </a:lnSpc>
-            </a:pPr>
-            <a:r>
-              <a:rPr sz="1580" b="0" i="0">
-                <a:solidFill>
-                  <a:srgbClr val="1A1A1E"/>
-                </a:solidFill>
-                <a:latin typeface="Roboto"/>
-              </a:rPr>
-              <a:t>mnt dá árvore de montagem própria.</a:t>
-            </a:r>
-          </a:p>
-        </p:txBody>
-      </p:sp>
-      <p:sp>
-        <p:nvSpPr>
-          <p:cNvPr id="9" name="TextBox 8"/>
-          <p:cNvSpPr txBox="1"/>
-          <p:nvPr/>
-        </p:nvSpPr>
-        <p:spPr>
-          <a:xfrm>
-            <a:off x="685800" y="3626168"/>
-            <a:ext cx="247650" cy="294437"/>
-          </a:xfrm>
-          <a:prstGeom prst="rect">
-            <a:avLst/>
-          </a:prstGeom>
-          <a:noFill/>
-        </p:spPr>
-        <p:txBody>
-          <a:bodyPr wrap="square" lIns="0" rIns="0" tIns="0" bIns="0" anchor="t">
-            <a:spAutoFit/>
-          </a:bodyPr>
-          <a:lstStyle/>
-          <a:p>
-            <a:pPr algn="l">
-              <a:lnSpc>
-                <a:spcPct val="120000"/>
-              </a:lnSpc>
-            </a:pPr>
-            <a:r>
-              <a:rPr sz="1450" b="1" i="0">
-                <a:solidFill>
-                  <a:srgbClr val="E94D1C"/>
-                </a:solidFill>
-                <a:latin typeface="Roboto"/>
-              </a:rPr>
-              <a:t>//</a:t>
-            </a:r>
-          </a:p>
-        </p:txBody>
-      </p:sp>
-      <p:sp>
-        <p:nvSpPr>
-          <p:cNvPr id="10" name="TextBox 9"/>
-          <p:cNvSpPr txBox="1"/>
-          <p:nvPr/>
-        </p:nvSpPr>
-        <p:spPr>
-          <a:xfrm>
-            <a:off x="971550" y="3616643"/>
-            <a:ext cx="4857750" cy="95250"/>
-          </a:xfrm>
-          <a:prstGeom prst="rect">
-            <a:avLst/>
-          </a:prstGeom>
-          <a:noFill/>
-        </p:spPr>
-        <p:txBody>
-          <a:bodyPr wrap="square" lIns="0" rIns="0" tIns="0" bIns="0" anchor="t">
-            <a:spAutoFit/>
-          </a:bodyPr>
-          <a:lstStyle/>
-          <a:p>
-            <a:pPr algn="l">
-              <a:lnSpc>
-                <a:spcPct val="130000"/>
-              </a:lnSpc>
-            </a:pPr>
-            <a:r>
-              <a:rPr sz="1580" b="0" i="0">
-                <a:solidFill>
-                  <a:srgbClr val="1A1A1E"/>
-                </a:solidFill>
-                <a:latin typeface="Roboto"/>
-              </a:rPr>
-              <a:t>pid faz o processo virar PID 1 lá dentro.</a:t>
-            </a:r>
-          </a:p>
-        </p:txBody>
-      </p:sp>
-      <p:sp>
-        <p:nvSpPr>
-          <p:cNvPr id="11" name="TextBox 10"/>
-          <p:cNvSpPr txBox="1"/>
-          <p:nvPr/>
-        </p:nvSpPr>
-        <p:spPr>
-          <a:xfrm>
-            <a:off x="685800" y="4156901"/>
-            <a:ext cx="247650" cy="294437"/>
-          </a:xfrm>
-          <a:prstGeom prst="rect">
-            <a:avLst/>
-          </a:prstGeom>
-          <a:noFill/>
-        </p:spPr>
-        <p:txBody>
-          <a:bodyPr wrap="square" lIns="0" rIns="0" tIns="0" bIns="0" anchor="t">
-            <a:spAutoFit/>
-          </a:bodyPr>
-          <a:lstStyle/>
-          <a:p>
-            <a:pPr algn="l">
-              <a:lnSpc>
-                <a:spcPct val="120000"/>
-              </a:lnSpc>
-            </a:pPr>
-            <a:r>
-              <a:rPr sz="1450" b="1" i="0">
-                <a:solidFill>
-                  <a:srgbClr val="E94D1C"/>
-                </a:solidFill>
-                <a:latin typeface="Roboto"/>
-              </a:rPr>
-              <a:t>//</a:t>
-            </a:r>
-          </a:p>
-        </p:txBody>
-      </p:sp>
-      <p:sp>
-        <p:nvSpPr>
-          <p:cNvPr id="12" name="TextBox 11"/>
-          <p:cNvSpPr txBox="1"/>
-          <p:nvPr/>
-        </p:nvSpPr>
-        <p:spPr>
-          <a:xfrm>
-            <a:off x="971550" y="4147376"/>
-            <a:ext cx="4857750" cy="95250"/>
-          </a:xfrm>
-          <a:prstGeom prst="rect">
-            <a:avLst/>
-          </a:prstGeom>
-          <a:noFill/>
-        </p:spPr>
-        <p:txBody>
-          <a:bodyPr wrap="square" lIns="0" rIns="0" tIns="0" bIns="0" anchor="t">
-            <a:spAutoFit/>
-          </a:bodyPr>
-          <a:lstStyle/>
-          <a:p>
-            <a:pPr algn="l">
-              <a:lnSpc>
-                <a:spcPct val="130000"/>
-              </a:lnSpc>
-            </a:pPr>
-            <a:r>
-              <a:rPr sz="1580" b="0" i="0">
-                <a:solidFill>
-                  <a:srgbClr val="1A1A1E"/>
-                </a:solidFill>
-                <a:latin typeface="Roboto"/>
-              </a:rPr>
-              <a:t>net dá pilha de rede própria, por isso dois containers escutam na mesma porta.</a:t>
-            </a:r>
-          </a:p>
-        </p:txBody>
-      </p:sp>
-      <p:sp>
-        <p:nvSpPr>
-          <p:cNvPr id="13" name="TextBox 12"/>
-          <p:cNvSpPr txBox="1"/>
-          <p:nvPr/>
-        </p:nvSpPr>
-        <p:spPr>
-          <a:xfrm>
-            <a:off x="6362700" y="2590610"/>
-            <a:ext cx="5143500" cy="182880"/>
-          </a:xfrm>
-          <a:prstGeom prst="rect">
-            <a:avLst/>
-          </a:prstGeom>
-          <a:noFill/>
-        </p:spPr>
-        <p:txBody>
-          <a:bodyPr wrap="square" lIns="0" rIns="0" tIns="0" bIns="0" anchor="t">
-            <a:spAutoFit/>
-          </a:bodyPr>
-          <a:lstStyle/>
-          <a:p>
-            <a:pPr algn="l">
-              <a:lnSpc>
-                <a:spcPct val="120000"/>
-              </a:lnSpc>
-            </a:pPr>
-            <a:r>
-              <a:rPr sz="900" b="1" i="0" spc="120">
-                <a:solidFill>
-                  <a:srgbClr val="E94D1C"/>
-                </a:solidFill>
-                <a:latin typeface="Roboto"/>
-              </a:rPr>
-              <a:t>CGROUPS V2</a:t>
-            </a:r>
-          </a:p>
-        </p:txBody>
-      </p:sp>
-      <p:sp>
-        <p:nvSpPr>
-          <p:cNvPr id="14" name="Rectangle 13"/>
+          <p:cNvPr id="7" name="Rectangle 6"/>
           <p:cNvSpPr/>
           <p:nvPr/>
         </p:nvSpPr>
         <p:spPr>
           <a:xfrm>
-            <a:off x="6362700" y="2800160"/>
-            <a:ext cx="419100" cy="28575"/>
+            <a:off x="704850" y="3189923"/>
+            <a:ext cx="57150" cy="57150"/>
           </a:xfrm>
           <a:prstGeom prst="rect">
             <a:avLst/>
@@ -33463,14 +33500,14 @@
       </p:sp>
       <p:sp>
         <p:nvSpPr>
-          <p:cNvPr id="15" name="TextBox 14"/>
+          <p:cNvPr id="8" name="TextBox 7"/>
           <p:cNvSpPr txBox="1"/>
           <p:nvPr/>
         </p:nvSpPr>
         <p:spPr>
           <a:xfrm>
-            <a:off x="6362700" y="3095434"/>
-            <a:ext cx="247650" cy="294437"/>
+            <a:off x="971550" y="3085910"/>
+            <a:ext cx="4857750" cy="95250"/>
           </a:xfrm>
           <a:prstGeom prst="rect">
             <a:avLst/>
@@ -33485,30 +33522,74 @@
           <a:p>
             <a:pPr algn="l">
               <a:lnSpc>
-                <a:spcPct val="120000"/>
-              </a:lnSpc>
-            </a:pPr>
-            <a:r>
-              <a:rPr sz="1450" b="1" i="0">
-                <a:solidFill>
-                  <a:srgbClr val="E94D1C"/>
-                </a:solidFill>
-                <a:latin typeface="Roboto"/>
-              </a:rPr>
-              <a:t>//</a:t>
-            </a:r>
-          </a:p>
-        </p:txBody>
-      </p:sp>
-      <p:sp>
-        <p:nvSpPr>
-          <p:cNvPr id="16" name="TextBox 15"/>
+                <a:spcPct val="130000"/>
+              </a:lnSpc>
+            </a:pPr>
+            <a:r>
+              <a:rPr sz="1580" b="0" i="0">
+                <a:solidFill>
+                  <a:srgbClr val="1A1A1E"/>
+                </a:solidFill>
+                <a:latin typeface="Roboto"/>
+              </a:rPr>
+              <a:t>mnt dá árvore de montagem própria.</a:t>
+            </a:r>
+          </a:p>
+        </p:txBody>
+      </p:sp>
+      <p:sp>
+        <p:nvSpPr>
+          <p:cNvPr id="9" name="Rectangle 8"/>
+          <p:cNvSpPr/>
+          <p:nvPr/>
+        </p:nvSpPr>
+        <p:spPr>
+          <a:xfrm>
+            <a:off x="704850" y="3720656"/>
+            <a:ext cx="57150" cy="57150"/>
+          </a:xfrm>
+          <a:prstGeom prst="rect">
+            <a:avLst/>
+          </a:prstGeom>
+          <a:solidFill>
+            <a:srgbClr val="E94D1C"/>
+          </a:solidFill>
+          <a:ln>
+            <a:noFill/>
+          </a:ln>
+          <a:effectLst/>
+        </p:spPr>
+        <p:style>
+          <a:lnRef idx="1">
+            <a:schemeClr val="accent1"/>
+          </a:lnRef>
+          <a:fillRef idx="3">
+            <a:schemeClr val="accent1"/>
+          </a:fillRef>
+          <a:effectRef idx="2">
+            <a:schemeClr val="accent1"/>
+          </a:effectRef>
+          <a:fontRef idx="minor">
+            <a:schemeClr val="lt1"/>
+          </a:fontRef>
+        </p:style>
+        <p:txBody>
+          <a:bodyPr rtlCol="0" anchor="ctr" wrap="square" lIns="0" rIns="0" tIns="0" bIns="0"/>
+          <a:lstStyle/>
+          <a:p>
+            <a:pPr algn="ctr"/>
+          </a:p>
+        </p:txBody>
+      </p:sp>
+      <p:sp>
+        <p:nvSpPr>
+          <p:cNvPr id="10" name="TextBox 9"/>
           <p:cNvSpPr txBox="1"/>
           <p:nvPr/>
         </p:nvSpPr>
         <p:spPr>
           <a:xfrm>
-            <a:off x="6648450" y="3085910"/>
+            <a:off x="971550" y="3616643"/>
             <a:ext cx="4857750" cy="95250"/>
           </a:xfrm>
           <a:prstGeom prst="rect">
@@ -33534,21 +33615,65 @@
                 </a:solidFill>
                 <a:latin typeface="Roboto"/>
               </a:rPr>
-              <a:t>Não isolam nada, apenas contabilizam e limitam o consumo.</a:t>
-            </a:r>
-          </a:p>
-        </p:txBody>
-      </p:sp>
-      <p:sp>
-        <p:nvSpPr>
-          <p:cNvPr id="17" name="TextBox 16"/>
+              <a:t>pid faz o processo virar PID 1 lá dentro.</a:t>
+            </a:r>
+          </a:p>
+        </p:txBody>
+      </p:sp>
+      <p:sp>
+        <p:nvSpPr>
+          <p:cNvPr id="11" name="Rectangle 10"/>
+          <p:cNvSpPr/>
+          <p:nvPr/>
+        </p:nvSpPr>
+        <p:spPr>
+          <a:xfrm>
+            <a:off x="704850" y="4251389"/>
+            <a:ext cx="57150" cy="57150"/>
+          </a:xfrm>
+          <a:prstGeom prst="rect">
+            <a:avLst/>
+          </a:prstGeom>
+          <a:solidFill>
+            <a:srgbClr val="E94D1C"/>
+          </a:solidFill>
+          <a:ln>
+            <a:noFill/>
+          </a:ln>
+          <a:effectLst/>
+        </p:spPr>
+        <p:style>
+          <a:lnRef idx="1">
+            <a:schemeClr val="accent1"/>
+          </a:lnRef>
+          <a:fillRef idx="3">
+            <a:schemeClr val="accent1"/>
+          </a:fillRef>
+          <a:effectRef idx="2">
+            <a:schemeClr val="accent1"/>
+          </a:effectRef>
+          <a:fontRef idx="minor">
+            <a:schemeClr val="lt1"/>
+          </a:fontRef>
+        </p:style>
+        <p:txBody>
+          <a:bodyPr rtlCol="0" anchor="ctr" wrap="square" lIns="0" rIns="0" tIns="0" bIns="0"/>
+          <a:lstStyle/>
+          <a:p>
+            <a:pPr algn="ctr"/>
+          </a:p>
+        </p:txBody>
+      </p:sp>
+      <p:sp>
+        <p:nvSpPr>
+          <p:cNvPr id="12" name="TextBox 11"/>
           <p:cNvSpPr txBox="1"/>
           <p:nvPr/>
         </p:nvSpPr>
         <p:spPr>
           <a:xfrm>
-            <a:off x="6362700" y="3890200"/>
-            <a:ext cx="247650" cy="294437"/>
+            <a:off x="971550" y="4147376"/>
+            <a:ext cx="4857750" cy="95250"/>
           </a:xfrm>
           <a:prstGeom prst="rect">
             <a:avLst/>
@@ -33563,31 +33688,31 @@
           <a:p>
             <a:pPr algn="l">
               <a:lnSpc>
-                <a:spcPct val="120000"/>
-              </a:lnSpc>
-            </a:pPr>
-            <a:r>
-              <a:rPr sz="1450" b="1" i="0">
-                <a:solidFill>
-                  <a:srgbClr val="E94D1C"/>
-                </a:solidFill>
-                <a:latin typeface="Roboto"/>
-              </a:rPr>
-              <a:t>//</a:t>
-            </a:r>
-          </a:p>
-        </p:txBody>
-      </p:sp>
-      <p:sp>
-        <p:nvSpPr>
-          <p:cNvPr id="18" name="TextBox 17"/>
+                <a:spcPct val="130000"/>
+              </a:lnSpc>
+            </a:pPr>
+            <a:r>
+              <a:rPr sz="1580" b="0" i="0">
+                <a:solidFill>
+                  <a:srgbClr val="1A1A1E"/>
+                </a:solidFill>
+                <a:latin typeface="Roboto"/>
+              </a:rPr>
+              <a:t>net dá pilha de rede própria, por isso dois containers escutam na mesma porta.</a:t>
+            </a:r>
+          </a:p>
+        </p:txBody>
+      </p:sp>
+      <p:sp>
+        <p:nvSpPr>
+          <p:cNvPr id="13" name="TextBox 12"/>
           <p:cNvSpPr txBox="1"/>
           <p:nvPr/>
         </p:nvSpPr>
         <p:spPr>
           <a:xfrm>
-            <a:off x="6648450" y="3880676"/>
-            <a:ext cx="4857750" cy="95250"/>
+            <a:off x="6362700" y="2590610"/>
+            <a:ext cx="5143500" cy="182880"/>
           </a:xfrm>
           <a:prstGeom prst="rect">
             <a:avLst/>
@@ -33602,31 +33727,119 @@
           <a:p>
             <a:pPr algn="l">
               <a:lnSpc>
-                <a:spcPct val="130000"/>
-              </a:lnSpc>
-            </a:pPr>
-            <a:r>
-              <a:rPr sz="1580" b="0" i="0">
-                <a:solidFill>
-                  <a:srgbClr val="1A1A1E"/>
-                </a:solidFill>
-                <a:latin typeface="Roboto"/>
-              </a:rPr>
-              <a:t>Estourar o limite de memória não deixa lento, o kernel mata o processo.</a:t>
-            </a:r>
-          </a:p>
-        </p:txBody>
-      </p:sp>
-      <p:sp>
-        <p:nvSpPr>
-          <p:cNvPr id="19" name="TextBox 18"/>
+                <a:spcPct val="120000"/>
+              </a:lnSpc>
+            </a:pPr>
+            <a:r>
+              <a:rPr sz="900" b="1" i="0" spc="120">
+                <a:solidFill>
+                  <a:srgbClr val="E94D1C"/>
+                </a:solidFill>
+                <a:latin typeface="Roboto"/>
+              </a:rPr>
+              <a:t>CGROUPS V2</a:t>
+            </a:r>
+          </a:p>
+        </p:txBody>
+      </p:sp>
+      <p:sp>
+        <p:nvSpPr>
+          <p:cNvPr id="14" name="Rectangle 13"/>
+          <p:cNvSpPr/>
+          <p:nvPr/>
+        </p:nvSpPr>
+        <p:spPr>
+          <a:xfrm>
+            <a:off x="6362700" y="2800160"/>
+            <a:ext cx="419100" cy="28575"/>
+          </a:xfrm>
+          <a:prstGeom prst="rect">
+            <a:avLst/>
+          </a:prstGeom>
+          <a:solidFill>
+            <a:srgbClr val="E94D1C"/>
+          </a:solidFill>
+          <a:ln>
+            <a:noFill/>
+          </a:ln>
+          <a:effectLst/>
+        </p:spPr>
+        <p:style>
+          <a:lnRef idx="1">
+            <a:schemeClr val="accent1"/>
+          </a:lnRef>
+          <a:fillRef idx="3">
+            <a:schemeClr val="accent1"/>
+          </a:fillRef>
+          <a:effectRef idx="2">
+            <a:schemeClr val="accent1"/>
+          </a:effectRef>
+          <a:fontRef idx="minor">
+            <a:schemeClr val="lt1"/>
+          </a:fontRef>
+        </p:style>
+        <p:txBody>
+          <a:bodyPr rtlCol="0" anchor="ctr" wrap="square" lIns="0" rIns="0" tIns="0" bIns="0"/>
+          <a:lstStyle/>
+          <a:p>
+            <a:pPr algn="ctr"/>
+          </a:p>
+        </p:txBody>
+      </p:sp>
+      <p:sp>
+        <p:nvSpPr>
+          <p:cNvPr id="15" name="Rectangle 14"/>
+          <p:cNvSpPr/>
+          <p:nvPr/>
+        </p:nvSpPr>
+        <p:spPr>
+          <a:xfrm>
+            <a:off x="6381750" y="3189923"/>
+            <a:ext cx="57150" cy="57150"/>
+          </a:xfrm>
+          <a:prstGeom prst="rect">
+            <a:avLst/>
+          </a:prstGeom>
+          <a:solidFill>
+            <a:srgbClr val="E94D1C"/>
+          </a:solidFill>
+          <a:ln>
+            <a:noFill/>
+          </a:ln>
+          <a:effectLst/>
+        </p:spPr>
+        <p:style>
+          <a:lnRef idx="1">
+            <a:schemeClr val="accent1"/>
+          </a:lnRef>
+          <a:fillRef idx="3">
+            <a:schemeClr val="accent1"/>
+          </a:fillRef>
+          <a:effectRef idx="2">
+            <a:schemeClr val="accent1"/>
+          </a:effectRef>
+          <a:fontRef idx="minor">
+            <a:schemeClr val="lt1"/>
+          </a:fontRef>
+        </p:style>
+        <p:txBody>
+          <a:bodyPr rtlCol="0" anchor="ctr" wrap="square" lIns="0" rIns="0" tIns="0" bIns="0"/>
+          <a:lstStyle/>
+          <a:p>
+            <a:pPr algn="ctr"/>
+          </a:p>
+        </p:txBody>
+      </p:sp>
+      <p:sp>
+        <p:nvSpPr>
+          <p:cNvPr id="16" name="TextBox 15"/>
           <p:cNvSpPr txBox="1"/>
           <p:nvPr/>
         </p:nvSpPr>
         <p:spPr>
           <a:xfrm>
-            <a:off x="6362700" y="4684966"/>
-            <a:ext cx="247650" cy="294437"/>
+            <a:off x="6648450" y="3085910"/>
+            <a:ext cx="4857750" cy="95250"/>
           </a:xfrm>
           <a:prstGeom prst="rect">
             <a:avLst/>
@@ -33641,18 +33854,145 @@
           <a:p>
             <a:pPr algn="l">
               <a:lnSpc>
-                <a:spcPct val="120000"/>
-              </a:lnSpc>
-            </a:pPr>
-            <a:r>
-              <a:rPr sz="1450" b="1" i="0">
-                <a:solidFill>
-                  <a:srgbClr val="E94D1C"/>
-                </a:solidFill>
-                <a:latin typeface="Roboto"/>
-              </a:rPr>
-              <a:t>//</a:t>
-            </a:r>
+                <a:spcPct val="130000"/>
+              </a:lnSpc>
+            </a:pPr>
+            <a:r>
+              <a:rPr sz="1580" b="0" i="0">
+                <a:solidFill>
+                  <a:srgbClr val="1A1A1E"/>
+                </a:solidFill>
+                <a:latin typeface="Roboto"/>
+              </a:rPr>
+              <a:t>Não isolam nada, apenas contabilizam e limitam o consumo.</a:t>
+            </a:r>
+          </a:p>
+        </p:txBody>
+      </p:sp>
+      <p:sp>
+        <p:nvSpPr>
+          <p:cNvPr id="17" name="Rectangle 16"/>
+          <p:cNvSpPr/>
+          <p:nvPr/>
+        </p:nvSpPr>
+        <p:spPr>
+          <a:xfrm>
+            <a:off x="6381750" y="3984689"/>
+            <a:ext cx="57150" cy="57150"/>
+          </a:xfrm>
+          <a:prstGeom prst="rect">
+            <a:avLst/>
+          </a:prstGeom>
+          <a:solidFill>
+            <a:srgbClr val="E94D1C"/>
+          </a:solidFill>
+          <a:ln>
+            <a:noFill/>
+          </a:ln>
+          <a:effectLst/>
+        </p:spPr>
+        <p:style>
+          <a:lnRef idx="1">
+            <a:schemeClr val="accent1"/>
+          </a:lnRef>
+          <a:fillRef idx="3">
+            <a:schemeClr val="accent1"/>
+          </a:fillRef>
+          <a:effectRef idx="2">
+            <a:schemeClr val="accent1"/>
+          </a:effectRef>
+          <a:fontRef idx="minor">
+            <a:schemeClr val="lt1"/>
+          </a:fontRef>
+        </p:style>
+        <p:txBody>
+          <a:bodyPr rtlCol="0" anchor="ctr" wrap="square" lIns="0" rIns="0" tIns="0" bIns="0"/>
+          <a:lstStyle/>
+          <a:p>
+            <a:pPr algn="ctr"/>
+          </a:p>
+        </p:txBody>
+      </p:sp>
+      <p:sp>
+        <p:nvSpPr>
+          <p:cNvPr id="18" name="TextBox 17"/>
+          <p:cNvSpPr txBox="1"/>
+          <p:nvPr/>
+        </p:nvSpPr>
+        <p:spPr>
+          <a:xfrm>
+            <a:off x="6648450" y="3880676"/>
+            <a:ext cx="4857750" cy="95250"/>
+          </a:xfrm>
+          <a:prstGeom prst="rect">
+            <a:avLst/>
+          </a:prstGeom>
+          <a:noFill/>
+        </p:spPr>
+        <p:txBody>
+          <a:bodyPr wrap="square" lIns="0" rIns="0" tIns="0" bIns="0" anchor="t">
+            <a:spAutoFit/>
+          </a:bodyPr>
+          <a:lstStyle/>
+          <a:p>
+            <a:pPr algn="l">
+              <a:lnSpc>
+                <a:spcPct val="130000"/>
+              </a:lnSpc>
+            </a:pPr>
+            <a:r>
+              <a:rPr sz="1580" b="0" i="0">
+                <a:solidFill>
+                  <a:srgbClr val="1A1A1E"/>
+                </a:solidFill>
+                <a:latin typeface="Roboto"/>
+              </a:rPr>
+              <a:t>Estourar o limite de memória não deixa lento, o kernel mata o processo.</a:t>
+            </a:r>
+          </a:p>
+        </p:txBody>
+      </p:sp>
+      <p:sp>
+        <p:nvSpPr>
+          <p:cNvPr id="19" name="Rectangle 18"/>
+          <p:cNvSpPr/>
+          <p:nvPr/>
+        </p:nvSpPr>
+        <p:spPr>
+          <a:xfrm>
+            <a:off x="6381750" y="4779454"/>
+            <a:ext cx="57150" cy="57150"/>
+          </a:xfrm>
+          <a:prstGeom prst="rect">
+            <a:avLst/>
+          </a:prstGeom>
+          <a:solidFill>
+            <a:srgbClr val="E94D1C"/>
+          </a:solidFill>
+          <a:ln>
+            <a:noFill/>
+          </a:ln>
+          <a:effectLst/>
+        </p:spPr>
+        <p:style>
+          <a:lnRef idx="1">
+            <a:schemeClr val="accent1"/>
+          </a:lnRef>
+          <a:fillRef idx="3">
+            <a:schemeClr val="accent1"/>
+          </a:fillRef>
+          <a:effectRef idx="2">
+            <a:schemeClr val="accent1"/>
+          </a:effectRef>
+          <a:fontRef idx="minor">
+            <a:schemeClr val="lt1"/>
+          </a:fontRef>
+        </p:style>
+        <p:txBody>
+          <a:bodyPr rtlCol="0" anchor="ctr" wrap="square" lIns="0" rIns="0" tIns="0" bIns="0"/>
+          <a:lstStyle/>
+          <a:p>
+            <a:pPr algn="ctr"/>
           </a:p>
         </p:txBody>
       </p:sp>
@@ -34931,7 +35271,7 @@
         </p:nvSpPr>
         <p:spPr>
           <a:xfrm>
-            <a:off x="857250" y="3333750"/>
+            <a:off x="857250" y="3381375"/>
             <a:ext cx="1771650" cy="628650"/>
           </a:xfrm>
           <a:prstGeom prst="roundRect">
@@ -34977,7 +35317,7 @@
         </p:nvSpPr>
         <p:spPr>
           <a:xfrm>
-            <a:off x="857250" y="3448050"/>
+            <a:off x="857250" y="3495675"/>
             <a:ext cx="1771650" cy="228600"/>
           </a:xfrm>
           <a:prstGeom prst="rect">
@@ -35016,7 +35356,7 @@
         </p:nvSpPr>
         <p:spPr>
           <a:xfrm>
-            <a:off x="914400" y="3657600"/>
+            <a:off x="914400" y="3705225"/>
             <a:ext cx="1657350" cy="175260"/>
           </a:xfrm>
           <a:prstGeom prst="rect">
@@ -35055,7 +35395,7 @@
         </p:nvSpPr>
         <p:spPr>
           <a:xfrm>
-            <a:off x="2952750" y="3333750"/>
+            <a:off x="2952750" y="3381375"/>
             <a:ext cx="1771650" cy="628650"/>
           </a:xfrm>
           <a:prstGeom prst="roundRect">
@@ -35101,7 +35441,7 @@
         </p:nvSpPr>
         <p:spPr>
           <a:xfrm>
-            <a:off x="2952750" y="3448050"/>
+            <a:off x="2952750" y="3495675"/>
             <a:ext cx="1771650" cy="228600"/>
           </a:xfrm>
           <a:prstGeom prst="rect">
@@ -35140,7 +35480,7 @@
         </p:nvSpPr>
         <p:spPr>
           <a:xfrm>
-            <a:off x="3009900" y="3657600"/>
+            <a:off x="3009900" y="3705225"/>
             <a:ext cx="1657350" cy="175260"/>
           </a:xfrm>
           <a:prstGeom prst="rect">
@@ -35179,7 +35519,7 @@
         </p:nvCxnSpPr>
         <p:spPr>
           <a:xfrm>
-            <a:off x="2628900" y="3648075"/>
+            <a:off x="2628900" y="3695700"/>
             <a:ext cx="323850" cy="0"/>
           </a:xfrm>
           <a:prstGeom prst="line">
@@ -35214,7 +35554,7 @@
         </p:nvSpPr>
         <p:spPr>
           <a:xfrm>
-            <a:off x="5048250" y="3333750"/>
+            <a:off x="5048250" y="3381375"/>
             <a:ext cx="1771650" cy="628650"/>
           </a:xfrm>
           <a:prstGeom prst="roundRect">
@@ -35260,7 +35600,7 @@
         </p:nvSpPr>
         <p:spPr>
           <a:xfrm>
-            <a:off x="5048250" y="3448050"/>
+            <a:off x="5048250" y="3495675"/>
             <a:ext cx="1771650" cy="228600"/>
           </a:xfrm>
           <a:prstGeom prst="rect">
@@ -35299,7 +35639,7 @@
         </p:nvSpPr>
         <p:spPr>
           <a:xfrm>
-            <a:off x="5105400" y="3657600"/>
+            <a:off x="5105400" y="3705225"/>
             <a:ext cx="1657350" cy="175260"/>
           </a:xfrm>
           <a:prstGeom prst="rect">
@@ -35338,7 +35678,7 @@
         </p:nvCxnSpPr>
         <p:spPr>
           <a:xfrm>
-            <a:off x="4724400" y="3648075"/>
+            <a:off x="4724400" y="3695700"/>
             <a:ext cx="323850" cy="0"/>
           </a:xfrm>
           <a:prstGeom prst="line">
@@ -35373,7 +35713,7 @@
         </p:nvSpPr>
         <p:spPr>
           <a:xfrm>
-            <a:off x="7143750" y="3333750"/>
+            <a:off x="7143750" y="3381375"/>
             <a:ext cx="1771650" cy="628650"/>
           </a:xfrm>
           <a:prstGeom prst="roundRect">
@@ -35419,7 +35759,7 @@
         </p:nvSpPr>
         <p:spPr>
           <a:xfrm>
-            <a:off x="7143750" y="3448050"/>
+            <a:off x="7143750" y="3495675"/>
             <a:ext cx="1771650" cy="228600"/>
           </a:xfrm>
           <a:prstGeom prst="rect">
@@ -35458,7 +35798,7 @@
         </p:nvSpPr>
         <p:spPr>
           <a:xfrm>
-            <a:off x="7200900" y="3657600"/>
+            <a:off x="7200900" y="3705225"/>
             <a:ext cx="1657350" cy="175260"/>
           </a:xfrm>
           <a:prstGeom prst="rect">
@@ -35497,7 +35837,7 @@
         </p:nvCxnSpPr>
         <p:spPr>
           <a:xfrm>
-            <a:off x="6819900" y="3648075"/>
+            <a:off x="6819900" y="3695700"/>
             <a:ext cx="323850" cy="0"/>
           </a:xfrm>
           <a:prstGeom prst="line">
@@ -35532,7 +35872,7 @@
         </p:nvSpPr>
         <p:spPr>
           <a:xfrm>
-            <a:off x="9239250" y="3333750"/>
+            <a:off x="9239250" y="3381375"/>
             <a:ext cx="1771650" cy="628650"/>
           </a:xfrm>
           <a:prstGeom prst="roundRect">
@@ -35578,7 +35918,7 @@
         </p:nvSpPr>
         <p:spPr>
           <a:xfrm>
-            <a:off x="9239250" y="3448050"/>
+            <a:off x="9239250" y="3495675"/>
             <a:ext cx="1771650" cy="228600"/>
           </a:xfrm>
           <a:prstGeom prst="rect">
@@ -35617,7 +35957,7 @@
         </p:nvSpPr>
         <p:spPr>
           <a:xfrm>
-            <a:off x="9296400" y="3657600"/>
+            <a:off x="9296400" y="3705225"/>
             <a:ext cx="1657350" cy="175260"/>
           </a:xfrm>
           <a:prstGeom prst="rect">
@@ -35656,7 +35996,7 @@
         </p:nvCxnSpPr>
         <p:spPr>
           <a:xfrm>
-            <a:off x="8915400" y="3648075"/>
+            <a:off x="8915400" y="3695700"/>
             <a:ext cx="323850" cy="0"/>
           </a:xfrm>
           <a:prstGeom prst="line">
@@ -35691,7 +36031,7 @@
         </p:nvSpPr>
         <p:spPr>
           <a:xfrm>
-            <a:off x="4667250" y="3086100"/>
+            <a:off x="4667250" y="3133725"/>
             <a:ext cx="857250" cy="198120"/>
           </a:xfrm>
           <a:prstGeom prst="rect">
@@ -35724,14 +36064,58 @@
       </p:sp>
       <p:sp>
         <p:nvSpPr>
-          <p:cNvPr id="25" name="TextBox 24"/>
+          <p:cNvPr id="25" name="Rectangle 24"/>
+          <p:cNvSpPr/>
+          <p:nvPr/>
+        </p:nvSpPr>
+        <p:spPr>
+          <a:xfrm>
+            <a:off x="876300" y="4475226"/>
+            <a:ext cx="57150" cy="57150"/>
+          </a:xfrm>
+          <a:prstGeom prst="rect">
+            <a:avLst/>
+          </a:prstGeom>
+          <a:solidFill>
+            <a:srgbClr val="E94D1C"/>
+          </a:solidFill>
+          <a:ln>
+            <a:noFill/>
+          </a:ln>
+          <a:effectLst/>
+        </p:spPr>
+        <p:style>
+          <a:lnRef idx="1">
+            <a:schemeClr val="accent1"/>
+          </a:lnRef>
+          <a:fillRef idx="3">
+            <a:schemeClr val="accent1"/>
+          </a:fillRef>
+          <a:effectRef idx="2">
+            <a:schemeClr val="accent1"/>
+          </a:effectRef>
+          <a:fontRef idx="minor">
+            <a:schemeClr val="lt1"/>
+          </a:fontRef>
+        </p:style>
+        <p:txBody>
+          <a:bodyPr rtlCol="0" anchor="ctr" wrap="square" lIns="0" rIns="0" tIns="0" bIns="0"/>
+          <a:lstStyle/>
+          <a:p>
+            <a:pPr algn="ctr"/>
+          </a:p>
+        </p:txBody>
+      </p:sp>
+      <p:sp>
+        <p:nvSpPr>
+          <p:cNvPr id="26" name="TextBox 25"/>
           <p:cNvSpPr txBox="1"/>
           <p:nvPr/>
         </p:nvSpPr>
         <p:spPr>
           <a:xfrm>
-            <a:off x="857250" y="4352925"/>
-            <a:ext cx="247650" cy="238354"/>
+            <a:off x="1143000" y="4391025"/>
+            <a:ext cx="9620250" cy="95250"/>
           </a:xfrm>
           <a:prstGeom prst="rect">
             <a:avLst/>
@@ -35746,45 +36130,6 @@
           <a:p>
             <a:pPr algn="l">
               <a:lnSpc>
-                <a:spcPct val="120000"/>
-              </a:lnSpc>
-            </a:pPr>
-            <a:r>
-              <a:rPr sz="1170" b="1" i="0">
-                <a:solidFill>
-                  <a:srgbClr val="E94D1C"/>
-                </a:solidFill>
-                <a:latin typeface="Roboto"/>
-              </a:rPr>
-              <a:t>//</a:t>
-            </a:r>
-          </a:p>
-        </p:txBody>
-      </p:sp>
-      <p:sp>
-        <p:nvSpPr>
-          <p:cNvPr id="26" name="TextBox 25"/>
-          <p:cNvSpPr txBox="1"/>
-          <p:nvPr/>
-        </p:nvSpPr>
-        <p:spPr>
-          <a:xfrm>
-            <a:off x="1143000" y="4343400"/>
-            <a:ext cx="9620250" cy="95250"/>
-          </a:xfrm>
-          <a:prstGeom prst="rect">
-            <a:avLst/>
-          </a:prstGeom>
-          <a:noFill/>
-        </p:spPr>
-        <p:txBody>
-          <a:bodyPr wrap="square" lIns="0" rIns="0" tIns="0" bIns="0" anchor="t">
-            <a:spAutoFit/>
-          </a:bodyPr>
-          <a:lstStyle/>
-          <a:p>
-            <a:pPr algn="l">
-              <a:lnSpc>
                 <a:spcPct val="130000"/>
               </a:lnSpc>
             </a:pPr>
@@ -35802,40 +36147,45 @@
       </p:sp>
       <p:sp>
         <p:nvSpPr>
-          <p:cNvPr id="27" name="TextBox 26"/>
-          <p:cNvSpPr txBox="1"/>
-          <p:nvPr/>
-        </p:nvSpPr>
-        <p:spPr>
-          <a:xfrm>
-            <a:off x="857250" y="4970907"/>
-            <a:ext cx="247650" cy="238354"/>
-          </a:xfrm>
-          <a:prstGeom prst="rect">
-            <a:avLst/>
-          </a:prstGeom>
-          <a:noFill/>
-        </p:spPr>
-        <p:txBody>
-          <a:bodyPr wrap="square" lIns="0" rIns="0" tIns="0" bIns="0" anchor="t">
-            <a:spAutoFit/>
-          </a:bodyPr>
-          <a:lstStyle/>
-          <a:p>
-            <a:pPr algn="l">
-              <a:lnSpc>
-                <a:spcPct val="120000"/>
-              </a:lnSpc>
-            </a:pPr>
-            <a:r>
-              <a:rPr sz="1170" b="1" i="0">
-                <a:solidFill>
-                  <a:srgbClr val="E94D1C"/>
-                </a:solidFill>
-                <a:latin typeface="Roboto"/>
-              </a:rPr>
-              <a:t>//</a:t>
-            </a:r>
+          <p:cNvPr id="27" name="Rectangle 26"/>
+          <p:cNvSpPr/>
+          <p:nvPr/>
+        </p:nvSpPr>
+        <p:spPr>
+          <a:xfrm>
+            <a:off x="876300" y="5093208"/>
+            <a:ext cx="57150" cy="57150"/>
+          </a:xfrm>
+          <a:prstGeom prst="rect">
+            <a:avLst/>
+          </a:prstGeom>
+          <a:solidFill>
+            <a:srgbClr val="E94D1C"/>
+          </a:solidFill>
+          <a:ln>
+            <a:noFill/>
+          </a:ln>
+          <a:effectLst/>
+        </p:spPr>
+        <p:style>
+          <a:lnRef idx="1">
+            <a:schemeClr val="accent1"/>
+          </a:lnRef>
+          <a:fillRef idx="3">
+            <a:schemeClr val="accent1"/>
+          </a:fillRef>
+          <a:effectRef idx="2">
+            <a:schemeClr val="accent1"/>
+          </a:effectRef>
+          <a:fontRef idx="minor">
+            <a:schemeClr val="lt1"/>
+          </a:fontRef>
+        </p:style>
+        <p:txBody>
+          <a:bodyPr rtlCol="0" anchor="ctr" wrap="square" lIns="0" rIns="0" tIns="0" bIns="0"/>
+          <a:lstStyle/>
+          <a:p>
+            <a:pPr algn="ctr"/>
           </a:p>
         </p:txBody>
       </p:sp>
@@ -35847,7 +36197,7 @@
         </p:nvSpPr>
         <p:spPr>
           <a:xfrm>
-            <a:off x="1143000" y="4961382"/>
+            <a:off x="1143000" y="5009007"/>
             <a:ext cx="9620250" cy="95250"/>
           </a:xfrm>
           <a:prstGeom prst="rect">

--- a/trabalhos/T1-Docker-Invite-People.pptx
+++ b/trabalhos/T1-Docker-Invite-People.pptx
@@ -19190,7 +19190,7 @@
                 </a:solidFill>
                 <a:latin typeface="Roboto"/>
               </a:rPr>
-              <a:t>Só o serviço de fronteira publica porta. O banco fica na rede interna sem mapeamento.</a:t>
+              <a:t>Só o serviço de fronteira publica porta, e o banco fica na rede interna sem mapeamento nenhum.</a:t>
             </a:r>
           </a:p>
         </p:txBody>
@@ -19910,7 +19910,7 @@
                 </a:solidFill>
                 <a:latin typeface="Roboto"/>
               </a:rPr>
-              <a:t>Replicar só o serviço público faz sentido. Replicar o painel não.</a:t>
+              <a:t>Replicar só o serviço público faz sentido, e replicar o painel não faz.</a:t>
             </a:r>
           </a:p>
         </p:txBody>
@@ -20993,7 +20993,7 @@
                 </a:solidFill>
                 <a:latin typeface="Roboto"/>
               </a:rPr>
-              <a:t>App web de convites virtuais, com confirmação de presença e consolidação de restrições alimentares.</a:t>
+              <a:t>É um app web de convites virtuais, onde o convidado confirma presença e o anfitrião consolida as restrições alimentares.</a:t>
             </a:r>
           </a:p>
         </p:txBody>
@@ -21076,7 +21076,7 @@
                 </a:solidFill>
                 <a:latin typeface="Roboto"/>
               </a:rPr>
-              <a:t>Duas superfícies sobre o mesmo Model: o convite público sem login e o painel do anfitrião.</a:t>
+              <a:t>São duas superfícies sobre o mesmo Model, o convite público, que não pede login, e o painel do anfitrião.</a:t>
             </a:r>
           </a:p>
         </p:txBody>
@@ -21159,7 +21159,7 @@
                 </a:solidFill>
                 <a:latin typeface="Roboto"/>
               </a:rPr>
-              <a:t>Arquitetura registrada no Guia da Arquitetura: MVC no front e três camadas no back.</a:t>
+              <a:t>A arquitetura já está registrada no Guia da Arquitetura, com MVC no front e três camadas no back.</a:t>
             </a:r>
           </a:p>
         </p:txBody>
@@ -21242,7 +21242,7 @@
                 </a:solidFill>
                 <a:latin typeface="Roboto"/>
               </a:rPr>
-              <a:t>Questão Norteadora da Sprint 2: como os componentes serão distribuídos e implantados no ambiente de execução?</a:t>
+              <a:t>A Questão Norteadora da Sprint 2 pergunta como os componentes serão distribuídos e implantados no ambiente de execução.</a:t>
             </a:r>
           </a:p>
         </p:txBody>
@@ -22877,7 +22877,7 @@
         </p:nvSpPr>
         <p:spPr>
           <a:xfrm>
-            <a:off x="704850" y="2860548"/>
+            <a:off x="704850" y="2583942"/>
             <a:ext cx="57150" cy="57150"/>
           </a:xfrm>
           <a:prstGeom prst="rect">
@@ -22921,7 +22921,7 @@
         </p:nvSpPr>
         <p:spPr>
           <a:xfrm>
-            <a:off x="971550" y="2751582"/>
+            <a:off x="971550" y="2474976"/>
             <a:ext cx="7772400" cy="95250"/>
           </a:xfrm>
           <a:prstGeom prst="rect">
@@ -22960,7 +22960,7 @@
         </p:nvSpPr>
         <p:spPr>
           <a:xfrm>
-            <a:off x="704850" y="3699510"/>
+            <a:off x="704850" y="3422904"/>
             <a:ext cx="57150" cy="57150"/>
           </a:xfrm>
           <a:prstGeom prst="rect">
@@ -23004,7 +23004,7 @@
         </p:nvSpPr>
         <p:spPr>
           <a:xfrm>
-            <a:off x="971550" y="3590544"/>
+            <a:off x="971550" y="3313938"/>
             <a:ext cx="7772400" cy="95250"/>
           </a:xfrm>
           <a:prstGeom prst="rect">
@@ -23043,7 +23043,7 @@
         </p:nvSpPr>
         <p:spPr>
           <a:xfrm>
-            <a:off x="704850" y="4538472"/>
+            <a:off x="704850" y="4261866"/>
             <a:ext cx="57150" cy="57150"/>
           </a:xfrm>
           <a:prstGeom prst="rect">
@@ -23087,7 +23087,7 @@
         </p:nvSpPr>
         <p:spPr>
           <a:xfrm>
-            <a:off x="971550" y="4429506"/>
+            <a:off x="971550" y="4152900"/>
             <a:ext cx="7772400" cy="95250"/>
           </a:xfrm>
           <a:prstGeom prst="rect">
@@ -23113,7 +23113,7 @@
                 </a:solidFill>
                 <a:latin typeface="Roboto"/>
               </a:rPr>
-              <a:t>Estado, que traz junto backup e upgrade de versão maior do banco.</a:t>
+              <a:t>Container com estado traz junto o problema de backup e o de upgrade de versão maior do banco, que não somem por estar em imagem.</a:t>
             </a:r>
           </a:p>
         </p:txBody>
@@ -23196,7 +23196,7 @@
                 </a:solidFill>
                 <a:latin typeface="Roboto"/>
               </a:rPr>
-              <a:t>Licenciamento do Docker Desktop.</a:t>
+              <a:t>O Docker Desktop é pago para empresa acima de certo porte, o que afeta quem for usar isto fora da faculdade.</a:t>
             </a:r>
           </a:p>
         </p:txBody>
@@ -23209,7 +23209,7 @@
         </p:nvSpPr>
         <p:spPr>
           <a:xfrm>
-            <a:off x="9124950" y="2751582"/>
+            <a:off x="9124950" y="2474976"/>
             <a:ext cx="152400" cy="133350"/>
           </a:xfrm>
           <a:prstGeom prst="triangle">
@@ -23253,7 +23253,7 @@
         </p:nvSpPr>
         <p:spPr>
           <a:xfrm>
-            <a:off x="9193530" y="2808732"/>
+            <a:off x="9193530" y="2532126"/>
             <a:ext cx="15240" cy="38100"/>
           </a:xfrm>
           <a:prstGeom prst="rect">
@@ -23297,7 +23297,7 @@
         </p:nvSpPr>
         <p:spPr>
           <a:xfrm>
-            <a:off x="9372600" y="2761107"/>
+            <a:off x="9372600" y="2484501"/>
             <a:ext cx="2133600" cy="182880"/>
           </a:xfrm>
           <a:prstGeom prst="rect">
@@ -23336,7 +23336,7 @@
         </p:nvSpPr>
         <p:spPr>
           <a:xfrm>
-            <a:off x="9124950" y="3037332"/>
+            <a:off x="9124950" y="2760726"/>
             <a:ext cx="38100" cy="804672"/>
           </a:xfrm>
           <a:prstGeom prst="rect">
@@ -23380,7 +23380,7 @@
         </p:nvSpPr>
         <p:spPr>
           <a:xfrm>
-            <a:off x="9334500" y="3037332"/>
+            <a:off x="9334500" y="2760726"/>
             <a:ext cx="2171700" cy="1376172"/>
           </a:xfrm>
           <a:prstGeom prst="rect">
@@ -23644,7 +23644,7 @@
         </p:nvSpPr>
         <p:spPr>
           <a:xfrm>
-            <a:off x="685800" y="2722626"/>
+            <a:off x="685800" y="2590610"/>
             <a:ext cx="5143500" cy="182880"/>
           </a:xfrm>
           <a:prstGeom prst="rect">
@@ -23683,7 +23683,7 @@
         </p:nvSpPr>
         <p:spPr>
           <a:xfrm>
-            <a:off x="685800" y="2932176"/>
+            <a:off x="685800" y="2800160"/>
             <a:ext cx="419100" cy="28575"/>
           </a:xfrm>
           <a:prstGeom prst="rect">
@@ -23727,7 +23727,7 @@
         </p:nvSpPr>
         <p:spPr>
           <a:xfrm>
-            <a:off x="704850" y="3321939"/>
+            <a:off x="704850" y="3189923"/>
             <a:ext cx="57150" cy="57150"/>
           </a:xfrm>
           <a:prstGeom prst="rect">
@@ -23771,7 +23771,7 @@
         </p:nvSpPr>
         <p:spPr>
           <a:xfrm>
-            <a:off x="971550" y="3217926"/>
+            <a:off x="971550" y="3085910"/>
             <a:ext cx="4857750" cy="95250"/>
           </a:xfrm>
           <a:prstGeom prst="rect">
@@ -23797,7 +23797,7 @@
                 </a:solidFill>
                 <a:latin typeface="Roboto"/>
               </a:rPr>
-              <a:t>Kernel próprio.</a:t>
+              <a:t>A máquina virtual tem kernel próprio.</a:t>
             </a:r>
           </a:p>
         </p:txBody>
@@ -23810,7 +23810,7 @@
         </p:nvSpPr>
         <p:spPr>
           <a:xfrm>
-            <a:off x="704850" y="3852672"/>
+            <a:off x="704850" y="3720656"/>
             <a:ext cx="57150" cy="57150"/>
           </a:xfrm>
           <a:prstGeom prst="rect">
@@ -23854,7 +23854,7 @@
         </p:nvSpPr>
         <p:spPr>
           <a:xfrm>
-            <a:off x="971550" y="3748659"/>
+            <a:off x="971550" y="3616643"/>
             <a:ext cx="4857750" cy="95250"/>
           </a:xfrm>
           <a:prstGeom prst="rect">
@@ -23880,7 +23880,7 @@
                 </a:solidFill>
                 <a:latin typeface="Roboto"/>
               </a:rPr>
-              <a:t>Fronteira imposta em hardware.</a:t>
+              <a:t>A fronteira entre ela e o host é imposta em hardware.</a:t>
             </a:r>
           </a:p>
         </p:txBody>
@@ -23893,7 +23893,7 @@
         </p:nvSpPr>
         <p:spPr>
           <a:xfrm>
-            <a:off x="704850" y="4383405"/>
+            <a:off x="704850" y="4515422"/>
             <a:ext cx="57150" cy="57150"/>
           </a:xfrm>
           <a:prstGeom prst="rect">
@@ -23937,7 +23937,7 @@
         </p:nvSpPr>
         <p:spPr>
           <a:xfrm>
-            <a:off x="971550" y="4279392"/>
+            <a:off x="971550" y="4411408"/>
             <a:ext cx="4857750" cy="95250"/>
           </a:xfrm>
           <a:prstGeom prst="rect">
@@ -23963,7 +23963,7 @@
                 </a:solidFill>
                 <a:latin typeface="Roboto"/>
               </a:rPr>
-              <a:t>Superfície relativamente estreita.</a:t>
+              <a:t>Por isso a superfície de ataque fica relativamente estreita.</a:t>
             </a:r>
           </a:p>
         </p:txBody>
@@ -23976,7 +23976,7 @@
         </p:nvSpPr>
         <p:spPr>
           <a:xfrm>
-            <a:off x="6362700" y="2722626"/>
+            <a:off x="6362700" y="2590610"/>
             <a:ext cx="5143500" cy="182880"/>
           </a:xfrm>
           <a:prstGeom prst="rect">
@@ -24015,7 +24015,7 @@
         </p:nvSpPr>
         <p:spPr>
           <a:xfrm>
-            <a:off x="6362700" y="2932176"/>
+            <a:off x="6362700" y="2800160"/>
             <a:ext cx="419100" cy="28575"/>
           </a:xfrm>
           <a:prstGeom prst="rect">
@@ -24059,7 +24059,7 @@
         </p:nvSpPr>
         <p:spPr>
           <a:xfrm>
-            <a:off x="6381750" y="3321939"/>
+            <a:off x="6381750" y="3189923"/>
             <a:ext cx="57150" cy="57150"/>
           </a:xfrm>
           <a:prstGeom prst="rect">
@@ -24103,7 +24103,7 @@
         </p:nvSpPr>
         <p:spPr>
           <a:xfrm>
-            <a:off x="6648450" y="3217926"/>
+            <a:off x="6648450" y="3085910"/>
             <a:ext cx="4857750" cy="95250"/>
           </a:xfrm>
           <a:prstGeom prst="rect">
@@ -24129,7 +24129,7 @@
                 </a:solidFill>
                 <a:latin typeface="Roboto"/>
               </a:rPr>
-              <a:t>Compartilha o kernel do host.</a:t>
+              <a:t>O container compartilha o kernel do host.</a:t>
             </a:r>
           </a:p>
         </p:txBody>
@@ -24142,7 +24142,7 @@
         </p:nvSpPr>
         <p:spPr>
           <a:xfrm>
-            <a:off x="6381750" y="3852672"/>
+            <a:off x="6381750" y="3720656"/>
             <a:ext cx="57150" cy="57150"/>
           </a:xfrm>
           <a:prstGeom prst="rect">
@@ -24186,7 +24186,7 @@
         </p:nvSpPr>
         <p:spPr>
           <a:xfrm>
-            <a:off x="6648450" y="3748659"/>
+            <a:off x="6648450" y="3616643"/>
             <a:ext cx="4857750" cy="95250"/>
           </a:xfrm>
           <a:prstGeom prst="rect">
@@ -24212,7 +24212,7 @@
                 </a:solidFill>
                 <a:latin typeface="Roboto"/>
               </a:rPr>
-              <a:t>A fronteira é a interface de chamadas de sistema, mais de trezentas, mais /proc, /sys e ioctl.</a:t>
+              <a:t>A fronteira dele é a interface de chamadas de sistema, que são mais de trezentas, somadas a /proc, /sys e ioctl.</a:t>
             </a:r>
           </a:p>
         </p:txBody>
@@ -24225,7 +24225,7 @@
         </p:nvSpPr>
         <p:spPr>
           <a:xfrm>
-            <a:off x="6381750" y="4647438"/>
+            <a:off x="6381750" y="4779455"/>
             <a:ext cx="57150" cy="57150"/>
           </a:xfrm>
           <a:prstGeom prst="rect">
@@ -24269,7 +24269,7 @@
         </p:nvSpPr>
         <p:spPr>
           <a:xfrm>
-            <a:off x="6648450" y="4543425"/>
+            <a:off x="6648450" y="4675442"/>
             <a:ext cx="4857750" cy="95250"/>
           </a:xfrm>
           <a:prstGeom prst="rect">
@@ -24295,7 +24295,7 @@
                 </a:solidFill>
                 <a:latin typeface="Roboto"/>
               </a:rPr>
-              <a:t>CVE-2019-5736 no runc: o processo de dentro sobrescrevia o binário do runtime pelo /proc/self/exe.</a:t>
+              <a:t>A CVE-2019-5736 mostrou o risco na prática, porque o processo de dentro conseguia sobrescrever o binário do runtime pelo /proc/self/exe.</a:t>
             </a:r>
           </a:p>
         </p:txBody>
@@ -25585,7 +25585,7 @@
         </p:nvSpPr>
         <p:spPr>
           <a:xfrm>
-            <a:off x="685800" y="2721292"/>
+            <a:off x="685800" y="2457260"/>
             <a:ext cx="5143500" cy="182880"/>
           </a:xfrm>
           <a:prstGeom prst="rect">
@@ -25624,7 +25624,7 @@
         </p:nvSpPr>
         <p:spPr>
           <a:xfrm>
-            <a:off x="685800" y="2930842"/>
+            <a:off x="685800" y="2666810"/>
             <a:ext cx="419100" cy="28575"/>
           </a:xfrm>
           <a:prstGeom prst="rect">
@@ -25668,7 +25668,7 @@
         </p:nvSpPr>
         <p:spPr>
           <a:xfrm>
-            <a:off x="704850" y="3320606"/>
+            <a:off x="704850" y="3056573"/>
             <a:ext cx="57150" cy="57150"/>
           </a:xfrm>
           <a:prstGeom prst="rect">
@@ -25712,7 +25712,7 @@
         </p:nvSpPr>
         <p:spPr>
           <a:xfrm>
-            <a:off x="971550" y="3216592"/>
+            <a:off x="971550" y="2952560"/>
             <a:ext cx="4857750" cy="95250"/>
           </a:xfrm>
           <a:prstGeom prst="rect">
@@ -25738,7 +25738,7 @@
                 </a:solidFill>
                 <a:latin typeface="Roboto"/>
               </a:rPr>
-              <a:t>Monolito num servidor que nunca escala.</a:t>
+              <a:t>O primeiro é o monolito que roda num servidor só e nunca vai escalar.</a:t>
             </a:r>
           </a:p>
         </p:txBody>
@@ -25751,7 +25751,7 @@
         </p:nvSpPr>
         <p:spPr>
           <a:xfrm>
-            <a:off x="704850" y="3851338"/>
+            <a:off x="704850" y="3851339"/>
             <a:ext cx="57150" cy="57150"/>
           </a:xfrm>
           <a:prstGeom prst="rect">
@@ -25795,7 +25795,7 @@
         </p:nvSpPr>
         <p:spPr>
           <a:xfrm>
-            <a:off x="971550" y="3747325"/>
+            <a:off x="971550" y="3747326"/>
             <a:ext cx="4857750" cy="95250"/>
           </a:xfrm>
           <a:prstGeom prst="rect">
@@ -25821,7 +25821,7 @@
                 </a:solidFill>
                 <a:latin typeface="Roboto"/>
               </a:rPr>
-              <a:t>Time sem integração contínua, que só ganha um passo de build a mais.</a:t>
+              <a:t>O segundo é o time sem integração contínua, que só ganha um passo de build a mais.</a:t>
             </a:r>
           </a:p>
         </p:txBody>
@@ -25904,7 +25904,7 @@
                 </a:solidFill>
                 <a:latin typeface="Roboto"/>
               </a:rPr>
-              <a:t>Aplicação sensível a latência de cauda.</a:t>
+              <a:t>O terceiro é a aplicação sensível a latência de cauda.</a:t>
             </a:r>
           </a:p>
         </p:txBody>
@@ -25917,7 +25917,7 @@
         </p:nvSpPr>
         <p:spPr>
           <a:xfrm>
-            <a:off x="704850" y="5176837"/>
+            <a:off x="704850" y="5440870"/>
             <a:ext cx="57150" cy="57150"/>
           </a:xfrm>
           <a:prstGeom prst="rect">
@@ -25961,7 +25961,7 @@
         </p:nvSpPr>
         <p:spPr>
           <a:xfrm>
-            <a:off x="971550" y="5072824"/>
+            <a:off x="971550" y="5336858"/>
             <a:ext cx="4857750" cy="95250"/>
           </a:xfrm>
           <a:prstGeom prst="rect">
@@ -25987,7 +25987,7 @@
                 </a:solidFill>
                 <a:latin typeface="Roboto"/>
               </a:rPr>
-              <a:t>Sistema dominado por estado.</a:t>
+              <a:t>O quarto é o sistema dominado por estado.</a:t>
             </a:r>
           </a:p>
         </p:txBody>
@@ -26000,7 +26000,7 @@
         </p:nvSpPr>
         <p:spPr>
           <a:xfrm>
-            <a:off x="6362700" y="2721292"/>
+            <a:off x="6362700" y="2457260"/>
             <a:ext cx="5143500" cy="182880"/>
           </a:xfrm>
           <a:prstGeom prst="rect">
@@ -26039,7 +26039,7 @@
         </p:nvSpPr>
         <p:spPr>
           <a:xfrm>
-            <a:off x="6362700" y="2930842"/>
+            <a:off x="6362700" y="2666810"/>
             <a:ext cx="419100" cy="28575"/>
           </a:xfrm>
           <a:prstGeom prst="rect">
@@ -26083,7 +26083,7 @@
         </p:nvSpPr>
         <p:spPr>
           <a:xfrm>
-            <a:off x="6381750" y="3320606"/>
+            <a:off x="6381750" y="3056573"/>
             <a:ext cx="57150" cy="57150"/>
           </a:xfrm>
           <a:prstGeom prst="rect">
@@ -26127,7 +26127,7 @@
         </p:nvSpPr>
         <p:spPr>
           <a:xfrm>
-            <a:off x="6648450" y="3216592"/>
+            <a:off x="6648450" y="2952560"/>
             <a:ext cx="4857750" cy="95250"/>
           </a:xfrm>
           <a:prstGeom prst="rect">
@@ -26166,7 +26166,7 @@
         </p:nvSpPr>
         <p:spPr>
           <a:xfrm>
-            <a:off x="6381750" y="4379404"/>
+            <a:off x="6381750" y="4115372"/>
             <a:ext cx="57150" cy="57150"/>
           </a:xfrm>
           <a:prstGeom prst="rect">
@@ -26210,7 +26210,7 @@
         </p:nvSpPr>
         <p:spPr>
           <a:xfrm>
-            <a:off x="6648450" y="4275392"/>
+            <a:off x="6648450" y="4011359"/>
             <a:ext cx="4857750" cy="95250"/>
           </a:xfrm>
           <a:prstGeom prst="rect">
@@ -27494,7 +27494,7 @@
                 </a:solidFill>
                 <a:latin typeface="Roboto"/>
               </a:rPr>
-              <a:t>Adotamos conteinerização como estratégia de empacotamento e de ambiente de desenvolvimento, registrada como troca.</a:t>
+              <a:t>O grupo recomenda adotar conteinerização como estratégia de empacotamento e de ambiente de desenvolvimento, com o custo declarado junto.</a:t>
             </a:r>
           </a:p>
         </p:txBody>
@@ -28064,7 +28064,7 @@
         </p:nvSpPr>
         <p:spPr>
           <a:xfrm>
-            <a:off x="685800" y="3120009"/>
+            <a:off x="685800" y="2987992"/>
             <a:ext cx="5143500" cy="182880"/>
           </a:xfrm>
           <a:prstGeom prst="rect">
@@ -28103,7 +28103,7 @@
         </p:nvSpPr>
         <p:spPr>
           <a:xfrm>
-            <a:off x="685800" y="3329559"/>
+            <a:off x="685800" y="3197542"/>
             <a:ext cx="419100" cy="28575"/>
           </a:xfrm>
           <a:prstGeom prst="rect">
@@ -28147,7 +28147,7 @@
         </p:nvSpPr>
         <p:spPr>
           <a:xfrm>
-            <a:off x="704850" y="3719322"/>
+            <a:off x="704850" y="3587306"/>
             <a:ext cx="57150" cy="57150"/>
           </a:xfrm>
           <a:prstGeom prst="rect">
@@ -28191,7 +28191,7 @@
         </p:nvSpPr>
         <p:spPr>
           <a:xfrm>
-            <a:off x="971550" y="3615309"/>
+            <a:off x="971550" y="3483292"/>
             <a:ext cx="4857750" cy="95250"/>
           </a:xfrm>
           <a:prstGeom prst="rect">
@@ -28217,7 +28217,7 @@
                 </a:solidFill>
                 <a:latin typeface="Roboto"/>
               </a:rPr>
-              <a:t>Uma linha de .gitattributes forçando LF nos scripts, porque o Git Bash quebra no Windows.</a:t>
+              <a:t>O repositório tem uma linha de .gitattributes forçando LF nos scripts, porque sem ela o Git Bash quebra no Windows.</a:t>
             </a:r>
           </a:p>
         </p:txBody>
@@ -28230,7 +28230,7 @@
         </p:nvSpPr>
         <p:spPr>
           <a:xfrm>
-            <a:off x="704850" y="4514088"/>
+            <a:off x="704850" y="4646104"/>
             <a:ext cx="57150" cy="57150"/>
           </a:xfrm>
           <a:prstGeom prst="rect">
@@ -28274,7 +28274,7 @@
         </p:nvSpPr>
         <p:spPr>
           <a:xfrm>
-            <a:off x="971550" y="4410075"/>
+            <a:off x="971550" y="4542092"/>
             <a:ext cx="4857750" cy="95250"/>
           </a:xfrm>
           <a:prstGeom prst="rect">
@@ -28313,7 +28313,7 @@
         </p:nvSpPr>
         <p:spPr>
           <a:xfrm>
-            <a:off x="6362700" y="3120009"/>
+            <a:off x="6362700" y="2987992"/>
             <a:ext cx="5143500" cy="182880"/>
           </a:xfrm>
           <a:prstGeom prst="rect">
@@ -28352,7 +28352,7 @@
         </p:nvSpPr>
         <p:spPr>
           <a:xfrm>
-            <a:off x="6362700" y="3329559"/>
+            <a:off x="6362700" y="3197542"/>
             <a:ext cx="419100" cy="28575"/>
           </a:xfrm>
           <a:prstGeom prst="rect">
@@ -28396,7 +28396,7 @@
         </p:nvSpPr>
         <p:spPr>
           <a:xfrm>
-            <a:off x="6381750" y="3719322"/>
+            <a:off x="6381750" y="3587306"/>
             <a:ext cx="57150" cy="57150"/>
           </a:xfrm>
           <a:prstGeom prst="rect">
@@ -28440,7 +28440,7 @@
         </p:nvSpPr>
         <p:spPr>
           <a:xfrm>
-            <a:off x="6648450" y="3615309"/>
+            <a:off x="6648450" y="3483292"/>
             <a:ext cx="4857750" cy="95250"/>
           </a:xfrm>
           <a:prstGeom prst="rect">
@@ -28466,7 +28466,7 @@
                 </a:solidFill>
                 <a:latin typeface="Roboto"/>
               </a:rPr>
-              <a:t>Um arquivo que descreve o ambiente inteiro e que qualquer um dos quatro sobe com um comando.</a:t>
+              <a:t>Existe um arquivo que descreve o ambiente inteiro e que qualquer um dos quatro sobe com um comando.</a:t>
             </a:r>
           </a:p>
         </p:txBody>
@@ -28479,7 +28479,7 @@
         </p:nvSpPr>
         <p:spPr>
           <a:xfrm>
-            <a:off x="6381750" y="4514088"/>
+            <a:off x="6381750" y="4646104"/>
             <a:ext cx="57150" cy="57150"/>
           </a:xfrm>
           <a:prstGeom prst="rect">
@@ -28523,7 +28523,7 @@
         </p:nvSpPr>
         <p:spPr>
           <a:xfrm>
-            <a:off x="6648450" y="4410075"/>
+            <a:off x="6648450" y="4542092"/>
             <a:ext cx="4857750" cy="95250"/>
           </a:xfrm>
           <a:prstGeom prst="rect">
@@ -28549,7 +28549,7 @@
                 </a:solidFill>
                 <a:latin typeface="Roboto"/>
               </a:rPr>
-              <a:t>E que vira o diagrama de implantação do item #60.</a:t>
+              <a:t>Esse mesmo arquivo é o que vira o diagrama de implantação do item #60.</a:t>
             </a:r>
           </a:p>
         </p:txBody>
@@ -33379,7 +33379,7 @@
         </p:nvSpPr>
         <p:spPr>
           <a:xfrm>
-            <a:off x="685800" y="2590610"/>
+            <a:off x="685800" y="2458593"/>
             <a:ext cx="5143500" cy="182880"/>
           </a:xfrm>
           <a:prstGeom prst="rect">
@@ -33418,7 +33418,7 @@
         </p:nvSpPr>
         <p:spPr>
           <a:xfrm>
-            <a:off x="685800" y="2800160"/>
+            <a:off x="685800" y="2668143"/>
             <a:ext cx="419100" cy="28575"/>
           </a:xfrm>
           <a:prstGeom prst="rect">
@@ -33462,7 +33462,7 @@
         </p:nvSpPr>
         <p:spPr>
           <a:xfrm>
-            <a:off x="704850" y="3189923"/>
+            <a:off x="704850" y="3057906"/>
             <a:ext cx="57150" cy="57150"/>
           </a:xfrm>
           <a:prstGeom prst="rect">
@@ -33506,7 +33506,7 @@
         </p:nvSpPr>
         <p:spPr>
           <a:xfrm>
-            <a:off x="971550" y="3085910"/>
+            <a:off x="971550" y="2953893"/>
             <a:ext cx="4857750" cy="95250"/>
           </a:xfrm>
           <a:prstGeom prst="rect">
@@ -33532,7 +33532,7 @@
                 </a:solidFill>
                 <a:latin typeface="Roboto"/>
               </a:rPr>
-              <a:t>mnt dá árvore de montagem própria.</a:t>
+              <a:t>O namespace mnt dá ao processo uma árvore de montagem própria.</a:t>
             </a:r>
           </a:p>
         </p:txBody>
@@ -33545,7 +33545,7 @@
         </p:nvSpPr>
         <p:spPr>
           <a:xfrm>
-            <a:off x="704850" y="3720656"/>
+            <a:off x="704850" y="3852672"/>
             <a:ext cx="57150" cy="57150"/>
           </a:xfrm>
           <a:prstGeom prst="rect">
@@ -33589,7 +33589,7 @@
         </p:nvSpPr>
         <p:spPr>
           <a:xfrm>
-            <a:off x="971550" y="3616643"/>
+            <a:off x="971550" y="3748659"/>
             <a:ext cx="4857750" cy="95250"/>
           </a:xfrm>
           <a:prstGeom prst="rect">
@@ -33615,7 +33615,7 @@
                 </a:solidFill>
                 <a:latin typeface="Roboto"/>
               </a:rPr>
-              <a:t>pid faz o processo virar PID 1 lá dentro.</a:t>
+              <a:t>O namespace pid faz o processo enxergar a si mesmo como PID 1.</a:t>
             </a:r>
           </a:p>
         </p:txBody>
@@ -33628,7 +33628,7 @@
         </p:nvSpPr>
         <p:spPr>
           <a:xfrm>
-            <a:off x="704850" y="4251389"/>
+            <a:off x="704850" y="4647438"/>
             <a:ext cx="57150" cy="57150"/>
           </a:xfrm>
           <a:prstGeom prst="rect">
@@ -33672,7 +33672,7 @@
         </p:nvSpPr>
         <p:spPr>
           <a:xfrm>
-            <a:off x="971550" y="4147376"/>
+            <a:off x="971550" y="4543425"/>
             <a:ext cx="4857750" cy="95250"/>
           </a:xfrm>
           <a:prstGeom prst="rect">
@@ -33698,7 +33698,7 @@
                 </a:solidFill>
                 <a:latin typeface="Roboto"/>
               </a:rPr>
-              <a:t>net dá pilha de rede própria, por isso dois containers escutam na mesma porta.</a:t>
+              <a:t>O namespace net dá uma pilha de rede própria, e é por isso que dois containers conseguem escutar na mesma porta.</a:t>
             </a:r>
           </a:p>
         </p:txBody>
@@ -33711,7 +33711,7 @@
         </p:nvSpPr>
         <p:spPr>
           <a:xfrm>
-            <a:off x="6362700" y="2590610"/>
+            <a:off x="6362700" y="2458593"/>
             <a:ext cx="5143500" cy="182880"/>
           </a:xfrm>
           <a:prstGeom prst="rect">
@@ -33750,7 +33750,7 @@
         </p:nvSpPr>
         <p:spPr>
           <a:xfrm>
-            <a:off x="6362700" y="2800160"/>
+            <a:off x="6362700" y="2668143"/>
             <a:ext cx="419100" cy="28575"/>
           </a:xfrm>
           <a:prstGeom prst="rect">
@@ -33794,7 +33794,7 @@
         </p:nvSpPr>
         <p:spPr>
           <a:xfrm>
-            <a:off x="6381750" y="3189923"/>
+            <a:off x="6381750" y="3057906"/>
             <a:ext cx="57150" cy="57150"/>
           </a:xfrm>
           <a:prstGeom prst="rect">
@@ -33838,7 +33838,7 @@
         </p:nvSpPr>
         <p:spPr>
           <a:xfrm>
-            <a:off x="6648450" y="3085910"/>
+            <a:off x="6648450" y="2953893"/>
             <a:ext cx="4857750" cy="95250"/>
           </a:xfrm>
           <a:prstGeom prst="rect">
@@ -33864,7 +33864,7 @@
                 </a:solidFill>
                 <a:latin typeface="Roboto"/>
               </a:rPr>
-              <a:t>Não isolam nada, apenas contabilizam e limitam o consumo.</a:t>
+              <a:t>Os cgroups não isolam nada, eles contabilizam e limitam o consumo de recursos.</a:t>
             </a:r>
           </a:p>
         </p:txBody>
@@ -33877,7 +33877,7 @@
         </p:nvSpPr>
         <p:spPr>
           <a:xfrm>
-            <a:off x="6381750" y="3984689"/>
+            <a:off x="6381750" y="3852672"/>
             <a:ext cx="57150" cy="57150"/>
           </a:xfrm>
           <a:prstGeom prst="rect">
@@ -33921,7 +33921,7 @@
         </p:nvSpPr>
         <p:spPr>
           <a:xfrm>
-            <a:off x="6648450" y="3880676"/>
+            <a:off x="6648450" y="3748659"/>
             <a:ext cx="4857750" cy="95250"/>
           </a:xfrm>
           <a:prstGeom prst="rect">
@@ -33947,7 +33947,7 @@
                 </a:solidFill>
                 <a:latin typeface="Roboto"/>
               </a:rPr>
-              <a:t>Estourar o limite de memória não deixa lento, o kernel mata o processo.</a:t>
+              <a:t>Quando o processo estoura o limite de memória ele não fica lento, o kernel mata ele.</a:t>
             </a:r>
           </a:p>
         </p:txBody>
@@ -33960,7 +33960,7 @@
         </p:nvSpPr>
         <p:spPr>
           <a:xfrm>
-            <a:off x="6381750" y="4779454"/>
+            <a:off x="6381750" y="4647438"/>
             <a:ext cx="57150" cy="57150"/>
           </a:xfrm>
           <a:prstGeom prst="rect">
@@ -34004,7 +34004,7 @@
         </p:nvSpPr>
         <p:spPr>
           <a:xfrm>
-            <a:off x="6648450" y="4675442"/>
+            <a:off x="6648450" y="4543425"/>
             <a:ext cx="4857750" cy="95250"/>
           </a:xfrm>
           <a:prstGeom prst="rect">
@@ -34030,7 +34030,7 @@
                 </a:solidFill>
                 <a:latin typeface="Roboto"/>
               </a:rPr>
-              <a:t>Limite de CPU não mata, freia. Isso piora as requisições mais lentas e quase não mexe na média, por isso é mais difícil de perceber.</a:t>
+              <a:t>O limite de CPU não mata, ele freia o processo, o que piora as requisições mais lentas e quase não mexe na média, por isso é mais difícil de perceber.</a:t>
             </a:r>
           </a:p>
         </p:txBody>

--- a/trabalhos/T1-Docker-Invite-People.pptx
+++ b/trabalhos/T1-Docker-Invite-People.pptx
@@ -23337,7 +23337,7 @@
         <p:spPr>
           <a:xfrm>
             <a:off x="9124950" y="2760726"/>
-            <a:ext cx="38100" cy="804672"/>
+            <a:ext cx="38100" cy="1636776"/>
           </a:xfrm>
           <a:prstGeom prst="rect">
             <a:avLst/>
@@ -23381,7 +23381,7 @@
         <p:spPr>
           <a:xfrm>
             <a:off x="9334500" y="2760726"/>
-            <a:ext cx="2171700" cy="1376172"/>
+            <a:ext cx="2171700" cy="2208276"/>
           </a:xfrm>
           <a:prstGeom prst="rect">
             <a:avLst/>
@@ -23409,7 +23409,45 @@
                 </a:solidFill>
                 <a:latin typeface="Roboto"/>
               </a:rPr>
-              <a:t>Nenhum número entra neste slide sem medição feita pelo time, com o modelo da máquina e a data.</a:t>
+              <a:t>Dos quatro, o do daemon como root é o que atinge o projeto hoje, porque os quatro integrantes rodam na própria máquina.</a:t>
+            </a:r>
+          </a:p>
+          <a:p>
+            <a:pPr>
+              <a:lnSpc>
+                <a:spcPct val="140000"/>
+              </a:lnSpc>
+              <a:spcAft>
+                <a:spcPts val="600"/>
+              </a:spcAft>
+            </a:pPr>
+            <a:r>
+              <a:rPr sz="1200" b="0" i="0">
+                <a:solidFill>
+                  <a:srgbClr val="3A3A44"/>
+                </a:solidFill>
+                <a:latin typeface="Roboto"/>
+              </a:rPr>
+              <a:t/>
+            </a:r>
+          </a:p>
+          <a:p>
+            <a:pPr>
+              <a:lnSpc>
+                <a:spcPct val="140000"/>
+              </a:lnSpc>
+              <a:spcAft>
+                <a:spcPts val="600"/>
+              </a:spcAft>
+            </a:pPr>
+            <a:r>
+              <a:rPr sz="1200" b="0" i="0">
+                <a:solidFill>
+                  <a:srgbClr val="3A3A44"/>
+                </a:solidFill>
+                <a:latin typeface="Roboto"/>
+              </a:rPr>
+              <a:t>Nenhum número de desempenho entra aqui sem medição feita pelo time.</a:t>
             </a:r>
           </a:p>
         </p:txBody>
@@ -23644,7 +23682,7 @@
         </p:nvSpPr>
         <p:spPr>
           <a:xfrm>
-            <a:off x="685800" y="2590610"/>
+            <a:off x="685800" y="2061210"/>
             <a:ext cx="5143500" cy="182880"/>
           </a:xfrm>
           <a:prstGeom prst="rect">
@@ -23683,7 +23721,7 @@
         </p:nvSpPr>
         <p:spPr>
           <a:xfrm>
-            <a:off x="685800" y="2800160"/>
+            <a:off x="685800" y="2270760"/>
             <a:ext cx="419100" cy="28575"/>
           </a:xfrm>
           <a:prstGeom prst="rect">
@@ -23727,7 +23765,7 @@
         </p:nvSpPr>
         <p:spPr>
           <a:xfrm>
-            <a:off x="704850" y="3189923"/>
+            <a:off x="704850" y="2660523"/>
             <a:ext cx="57150" cy="57150"/>
           </a:xfrm>
           <a:prstGeom prst="rect">
@@ -23771,7 +23809,7 @@
         </p:nvSpPr>
         <p:spPr>
           <a:xfrm>
-            <a:off x="971550" y="3085910"/>
+            <a:off x="971550" y="2556510"/>
             <a:ext cx="4857750" cy="95250"/>
           </a:xfrm>
           <a:prstGeom prst="rect">
@@ -23810,7 +23848,7 @@
         </p:nvSpPr>
         <p:spPr>
           <a:xfrm>
-            <a:off x="704850" y="3720656"/>
+            <a:off x="704850" y="3191256"/>
             <a:ext cx="57150" cy="57150"/>
           </a:xfrm>
           <a:prstGeom prst="rect">
@@ -23854,7 +23892,7 @@
         </p:nvSpPr>
         <p:spPr>
           <a:xfrm>
-            <a:off x="971550" y="3616643"/>
+            <a:off x="971550" y="3087243"/>
             <a:ext cx="4857750" cy="95250"/>
           </a:xfrm>
           <a:prstGeom prst="rect">
@@ -23893,7 +23931,7 @@
         </p:nvSpPr>
         <p:spPr>
           <a:xfrm>
-            <a:off x="704850" y="4515422"/>
+            <a:off x="704850" y="3986022"/>
             <a:ext cx="57150" cy="57150"/>
           </a:xfrm>
           <a:prstGeom prst="rect">
@@ -23937,7 +23975,7 @@
         </p:nvSpPr>
         <p:spPr>
           <a:xfrm>
-            <a:off x="971550" y="4411408"/>
+            <a:off x="971550" y="3882009"/>
             <a:ext cx="4857750" cy="95250"/>
           </a:xfrm>
           <a:prstGeom prst="rect">
@@ -23976,7 +24014,7 @@
         </p:nvSpPr>
         <p:spPr>
           <a:xfrm>
-            <a:off x="6362700" y="2590610"/>
+            <a:off x="6362700" y="2061210"/>
             <a:ext cx="5143500" cy="182880"/>
           </a:xfrm>
           <a:prstGeom prst="rect">
@@ -24015,7 +24053,7 @@
         </p:nvSpPr>
         <p:spPr>
           <a:xfrm>
-            <a:off x="6362700" y="2800160"/>
+            <a:off x="6362700" y="2270760"/>
             <a:ext cx="419100" cy="28575"/>
           </a:xfrm>
           <a:prstGeom prst="rect">
@@ -24059,7 +24097,7 @@
         </p:nvSpPr>
         <p:spPr>
           <a:xfrm>
-            <a:off x="6381750" y="3189923"/>
+            <a:off x="6381750" y="2660523"/>
             <a:ext cx="57150" cy="57150"/>
           </a:xfrm>
           <a:prstGeom prst="rect">
@@ -24103,7 +24141,7 @@
         </p:nvSpPr>
         <p:spPr>
           <a:xfrm>
-            <a:off x="6648450" y="3085910"/>
+            <a:off x="6648450" y="2556510"/>
             <a:ext cx="4857750" cy="95250"/>
           </a:xfrm>
           <a:prstGeom prst="rect">
@@ -24142,7 +24180,7 @@
         </p:nvSpPr>
         <p:spPr>
           <a:xfrm>
-            <a:off x="6381750" y="3720656"/>
+            <a:off x="6381750" y="3191256"/>
             <a:ext cx="57150" cy="57150"/>
           </a:xfrm>
           <a:prstGeom prst="rect">
@@ -24186,7 +24224,7 @@
         </p:nvSpPr>
         <p:spPr>
           <a:xfrm>
-            <a:off x="6648450" y="3616643"/>
+            <a:off x="6648450" y="3087243"/>
             <a:ext cx="4857750" cy="95250"/>
           </a:xfrm>
           <a:prstGeom prst="rect">
@@ -24225,7 +24263,7 @@
         </p:nvSpPr>
         <p:spPr>
           <a:xfrm>
-            <a:off x="6381750" y="4779455"/>
+            <a:off x="6381750" y="4250055"/>
             <a:ext cx="57150" cy="57150"/>
           </a:xfrm>
           <a:prstGeom prst="rect">
@@ -24269,7 +24307,7 @@
         </p:nvSpPr>
         <p:spPr>
           <a:xfrm>
-            <a:off x="6648450" y="4675442"/>
+            <a:off x="6648450" y="4146042"/>
             <a:ext cx="4857750" cy="95250"/>
           </a:xfrm>
           <a:prstGeom prst="rect">
@@ -24302,14 +24340,58 @@
       </p:sp>
       <p:sp>
         <p:nvSpPr>
-          <p:cNvPr id="21" name="TextBox 20"/>
+          <p:cNvPr id="21" name="Rectangle 20"/>
+          <p:cNvSpPr/>
+          <p:nvPr/>
+        </p:nvSpPr>
+        <p:spPr>
+          <a:xfrm>
+            <a:off x="6381750" y="5308854"/>
+            <a:ext cx="57150" cy="57150"/>
+          </a:xfrm>
+          <a:prstGeom prst="rect">
+            <a:avLst/>
+          </a:prstGeom>
+          <a:solidFill>
+            <a:srgbClr val="E94D1C"/>
+          </a:solidFill>
+          <a:ln>
+            <a:noFill/>
+          </a:ln>
+          <a:effectLst/>
+        </p:spPr>
+        <p:style>
+          <a:lnRef idx="1">
+            <a:schemeClr val="accent1"/>
+          </a:lnRef>
+          <a:fillRef idx="3">
+            <a:schemeClr val="accent1"/>
+          </a:fillRef>
+          <a:effectRef idx="2">
+            <a:schemeClr val="accent1"/>
+          </a:effectRef>
+          <a:fontRef idx="minor">
+            <a:schemeClr val="lt1"/>
+          </a:fontRef>
+        </p:style>
+        <p:txBody>
+          <a:bodyPr rtlCol="0" anchor="ctr" wrap="square" lIns="0" rIns="0" tIns="0" bIns="0"/>
+          <a:lstStyle/>
+          <a:p>
+            <a:pPr algn="ctr"/>
+          </a:p>
+        </p:txBody>
+      </p:sp>
+      <p:sp>
+        <p:nvSpPr>
+          <p:cNvPr id="22" name="TextBox 21"/>
           <p:cNvSpPr txBox="1"/>
           <p:nvPr/>
         </p:nvSpPr>
         <p:spPr>
           <a:xfrm>
-            <a:off x="685800" y="6324600"/>
-            <a:ext cx="6667500" cy="182880"/>
+            <a:off x="6648450" y="5204841"/>
+            <a:ext cx="4857750" cy="95250"/>
           </a:xfrm>
           <a:prstGeom prst="rect">
             <a:avLst/>
@@ -24324,6 +24406,45 @@
           <a:p>
             <a:pPr algn="l">
               <a:lnSpc>
+                <a:spcPct val="130000"/>
+              </a:lnSpc>
+            </a:pPr>
+            <a:r>
+              <a:rPr sz="1580" b="0" i="0">
+                <a:solidFill>
+                  <a:srgbClr val="1A1A1E"/>
+                </a:solidFill>
+                <a:latin typeface="Roboto"/>
+              </a:rPr>
+              <a:t>Por isso o ADR #63 precisa registrar que container não dá o mesmo isolamento de uma máquina virtual.</a:t>
+            </a:r>
+          </a:p>
+        </p:txBody>
+      </p:sp>
+      <p:sp>
+        <p:nvSpPr>
+          <p:cNvPr id="23" name="TextBox 22"/>
+          <p:cNvSpPr txBox="1"/>
+          <p:nvPr/>
+        </p:nvSpPr>
+        <p:spPr>
+          <a:xfrm>
+            <a:off x="685800" y="6324600"/>
+            <a:ext cx="6667500" cy="182880"/>
+          </a:xfrm>
+          <a:prstGeom prst="rect">
+            <a:avLst/>
+          </a:prstGeom>
+          <a:noFill/>
+        </p:spPr>
+        <p:txBody>
+          <a:bodyPr wrap="square" lIns="0" rIns="0" tIns="0" bIns="0" anchor="t">
+            <a:spAutoFit/>
+          </a:bodyPr>
+          <a:lstStyle/>
+          <a:p>
+            <a:pPr algn="l">
+              <a:lnSpc>
                 <a:spcPct val="120000"/>
               </a:lnSpc>
             </a:pPr>
@@ -24341,7 +24462,7 @@
       </p:sp>
       <p:sp>
         <p:nvSpPr>
-          <p:cNvPr id="22" name="TextBox 21"/>
+          <p:cNvPr id="24" name="TextBox 23"/>
           <p:cNvSpPr txBox="1"/>
           <p:nvPr/>
         </p:nvSpPr>
@@ -31960,7 +32081,7 @@
         </p:nvSpPr>
         <p:spPr>
           <a:xfrm>
-            <a:off x="685800" y="3253359"/>
+            <a:off x="685800" y="2723960"/>
             <a:ext cx="5143500" cy="182880"/>
           </a:xfrm>
           <a:prstGeom prst="rect">
@@ -31999,7 +32120,7 @@
         </p:nvSpPr>
         <p:spPr>
           <a:xfrm>
-            <a:off x="685800" y="3462909"/>
+            <a:off x="685800" y="2933510"/>
             <a:ext cx="419100" cy="28575"/>
           </a:xfrm>
           <a:prstGeom prst="rect">
@@ -32043,7 +32164,7 @@
         </p:nvSpPr>
         <p:spPr>
           <a:xfrm>
-            <a:off x="704850" y="3852672"/>
+            <a:off x="704850" y="3323273"/>
             <a:ext cx="57150" cy="57150"/>
           </a:xfrm>
           <a:prstGeom prst="rect">
@@ -32087,7 +32208,7 @@
         </p:nvSpPr>
         <p:spPr>
           <a:xfrm>
-            <a:off x="971550" y="3748659"/>
+            <a:off x="971550" y="3219260"/>
             <a:ext cx="4857750" cy="95250"/>
           </a:xfrm>
           <a:prstGeom prst="rect">
@@ -32126,7 +32247,7 @@
         </p:nvSpPr>
         <p:spPr>
           <a:xfrm>
-            <a:off x="6362700" y="3253359"/>
+            <a:off x="6362700" y="2723960"/>
             <a:ext cx="5143500" cy="182880"/>
           </a:xfrm>
           <a:prstGeom prst="rect">
@@ -32165,7 +32286,7 @@
         </p:nvSpPr>
         <p:spPr>
           <a:xfrm>
-            <a:off x="6362700" y="3462909"/>
+            <a:off x="6362700" y="2933510"/>
             <a:ext cx="419100" cy="28575"/>
           </a:xfrm>
           <a:prstGeom prst="rect">
@@ -32209,7 +32330,7 @@
         </p:nvSpPr>
         <p:spPr>
           <a:xfrm>
-            <a:off x="6381750" y="3852672"/>
+            <a:off x="6381750" y="3323273"/>
             <a:ext cx="57150" cy="57150"/>
           </a:xfrm>
           <a:prstGeom prst="rect">
@@ -32253,7 +32374,7 @@
         </p:nvSpPr>
         <p:spPr>
           <a:xfrm>
-            <a:off x="6648450" y="3748659"/>
+            <a:off x="6648450" y="3219260"/>
             <a:ext cx="4857750" cy="95250"/>
           </a:xfrm>
           <a:prstGeom prst="rect">
@@ -32286,14 +32407,58 @@
       </p:sp>
       <p:sp>
         <p:nvSpPr>
-          <p:cNvPr id="13" name="TextBox 12"/>
+          <p:cNvPr id="13" name="Rectangle 12"/>
+          <p:cNvSpPr/>
+          <p:nvPr/>
+        </p:nvSpPr>
+        <p:spPr>
+          <a:xfrm>
+            <a:off x="6381750" y="4646104"/>
+            <a:ext cx="57150" cy="57150"/>
+          </a:xfrm>
+          <a:prstGeom prst="rect">
+            <a:avLst/>
+          </a:prstGeom>
+          <a:solidFill>
+            <a:srgbClr val="E94D1C"/>
+          </a:solidFill>
+          <a:ln>
+            <a:noFill/>
+          </a:ln>
+          <a:effectLst/>
+        </p:spPr>
+        <p:style>
+          <a:lnRef idx="1">
+            <a:schemeClr val="accent1"/>
+          </a:lnRef>
+          <a:fillRef idx="3">
+            <a:schemeClr val="accent1"/>
+          </a:fillRef>
+          <a:effectRef idx="2">
+            <a:schemeClr val="accent1"/>
+          </a:effectRef>
+          <a:fontRef idx="minor">
+            <a:schemeClr val="lt1"/>
+          </a:fontRef>
+        </p:style>
+        <p:txBody>
+          <a:bodyPr rtlCol="0" anchor="ctr" wrap="square" lIns="0" rIns="0" tIns="0" bIns="0"/>
+          <a:lstStyle/>
+          <a:p>
+            <a:pPr algn="ctr"/>
+          </a:p>
+        </p:txBody>
+      </p:sp>
+      <p:sp>
+        <p:nvSpPr>
+          <p:cNvPr id="14" name="TextBox 13"/>
           <p:cNvSpPr txBox="1"/>
           <p:nvPr/>
         </p:nvSpPr>
         <p:spPr>
           <a:xfrm>
-            <a:off x="685800" y="6324600"/>
-            <a:ext cx="6667500" cy="182880"/>
+            <a:off x="6648450" y="4542092"/>
+            <a:ext cx="4857750" cy="95250"/>
           </a:xfrm>
           <a:prstGeom prst="rect">
             <a:avLst/>
@@ -32308,6 +32473,45 @@
           <a:p>
             <a:pPr algn="l">
               <a:lnSpc>
+                <a:spcPct val="130000"/>
+              </a:lnSpc>
+            </a:pPr>
+            <a:r>
+              <a:rPr sz="1580" b="0" i="0">
+                <a:solidFill>
+                  <a:srgbClr val="1A1A1E"/>
+                </a:solidFill>
+                <a:latin typeface="Roboto"/>
+              </a:rPr>
+              <a:t>São essas duas definições que decidem o desenho do item #60, com a imagem entrando como artefato e o container como nó.</a:t>
+            </a:r>
+          </a:p>
+        </p:txBody>
+      </p:sp>
+      <p:sp>
+        <p:nvSpPr>
+          <p:cNvPr id="15" name="TextBox 14"/>
+          <p:cNvSpPr txBox="1"/>
+          <p:nvPr/>
+        </p:nvSpPr>
+        <p:spPr>
+          <a:xfrm>
+            <a:off x="685800" y="6324600"/>
+            <a:ext cx="6667500" cy="182880"/>
+          </a:xfrm>
+          <a:prstGeom prst="rect">
+            <a:avLst/>
+          </a:prstGeom>
+          <a:noFill/>
+        </p:spPr>
+        <p:txBody>
+          <a:bodyPr wrap="square" lIns="0" rIns="0" tIns="0" bIns="0" anchor="t">
+            <a:spAutoFit/>
+          </a:bodyPr>
+          <a:lstStyle/>
+          <a:p>
+            <a:pPr algn="l">
+              <a:lnSpc>
                 <a:spcPct val="120000"/>
               </a:lnSpc>
             </a:pPr>
@@ -32325,7 +32529,7 @@
       </p:sp>
       <p:sp>
         <p:nvSpPr>
-          <p:cNvPr id="14" name="TextBox 13"/>
+          <p:cNvPr id="16" name="TextBox 15"/>
           <p:cNvSpPr txBox="1"/>
           <p:nvPr/>
         </p:nvSpPr>
@@ -32514,7 +32718,7 @@
         </p:nvSpPr>
         <p:spPr>
           <a:xfrm>
-            <a:off x="685800" y="2177415"/>
+            <a:off x="685800" y="2083118"/>
             <a:ext cx="10820400" cy="3286125"/>
           </a:xfrm>
           <a:prstGeom prst="roundRect">
@@ -32560,7 +32764,7 @@
         </p:nvSpPr>
         <p:spPr>
           <a:xfrm>
-            <a:off x="952500" y="2386965"/>
+            <a:off x="952500" y="2292668"/>
             <a:ext cx="323850" cy="28575"/>
           </a:xfrm>
           <a:prstGeom prst="roundRect">
@@ -32606,7 +32810,7 @@
         </p:nvSpPr>
         <p:spPr>
           <a:xfrm>
-            <a:off x="1371600" y="2329815"/>
+            <a:off x="1371600" y="2235518"/>
             <a:ext cx="1905000" cy="167640"/>
           </a:xfrm>
           <a:prstGeom prst="rect">
@@ -32645,7 +32849,7 @@
         </p:nvSpPr>
         <p:spPr>
           <a:xfrm>
-            <a:off x="952500" y="2672715"/>
+            <a:off x="952500" y="2578418"/>
             <a:ext cx="10287000" cy="228600"/>
           </a:xfrm>
           <a:prstGeom prst="rect">
@@ -32684,7 +32888,7 @@
         </p:nvSpPr>
         <p:spPr>
           <a:xfrm>
-            <a:off x="952500" y="2910840"/>
+            <a:off x="952500" y="2816542"/>
             <a:ext cx="10287000" cy="228600"/>
           </a:xfrm>
           <a:prstGeom prst="rect">
@@ -32723,7 +32927,7 @@
         </p:nvSpPr>
         <p:spPr>
           <a:xfrm>
-            <a:off x="952500" y="3148965"/>
+            <a:off x="952500" y="3054668"/>
             <a:ext cx="10287000" cy="228600"/>
           </a:xfrm>
           <a:prstGeom prst="rect">
@@ -32762,7 +32966,7 @@
         </p:nvSpPr>
         <p:spPr>
           <a:xfrm>
-            <a:off x="952500" y="3387090"/>
+            <a:off x="952500" y="3292792"/>
             <a:ext cx="10287000" cy="228600"/>
           </a:xfrm>
           <a:prstGeom prst="rect">
@@ -32801,7 +33005,7 @@
         </p:nvSpPr>
         <p:spPr>
           <a:xfrm>
-            <a:off x="952500" y="3625215"/>
+            <a:off x="952500" y="3530918"/>
             <a:ext cx="10287000" cy="228600"/>
           </a:xfrm>
           <a:prstGeom prst="rect">
@@ -32840,7 +33044,7 @@
         </p:nvSpPr>
         <p:spPr>
           <a:xfrm>
-            <a:off x="952500" y="3863340"/>
+            <a:off x="952500" y="3769042"/>
             <a:ext cx="10287000" cy="228600"/>
           </a:xfrm>
           <a:prstGeom prst="rect">
@@ -32879,7 +33083,7 @@
         </p:nvSpPr>
         <p:spPr>
           <a:xfrm>
-            <a:off x="952500" y="4101465"/>
+            <a:off x="952500" y="4007168"/>
             <a:ext cx="10287000" cy="228600"/>
           </a:xfrm>
           <a:prstGeom prst="rect">
@@ -32918,7 +33122,7 @@
         </p:nvSpPr>
         <p:spPr>
           <a:xfrm>
-            <a:off x="952500" y="4339590"/>
+            <a:off x="952500" y="4245292"/>
             <a:ext cx="10287000" cy="228600"/>
           </a:xfrm>
           <a:prstGeom prst="rect">
@@ -32957,7 +33161,7 @@
         </p:nvSpPr>
         <p:spPr>
           <a:xfrm>
-            <a:off x="952500" y="4577715"/>
+            <a:off x="952500" y="4483418"/>
             <a:ext cx="10287000" cy="228600"/>
           </a:xfrm>
           <a:prstGeom prst="rect">
@@ -32996,7 +33200,7 @@
         </p:nvSpPr>
         <p:spPr>
           <a:xfrm>
-            <a:off x="952500" y="4815840"/>
+            <a:off x="952500" y="4721542"/>
             <a:ext cx="10287000" cy="228600"/>
           </a:xfrm>
           <a:prstGeom prst="rect">
@@ -33035,7 +33239,7 @@
         </p:nvSpPr>
         <p:spPr>
           <a:xfrm>
-            <a:off x="952500" y="5053965"/>
+            <a:off x="952500" y="4959668"/>
             <a:ext cx="10287000" cy="228600"/>
           </a:xfrm>
           <a:prstGeom prst="rect">
@@ -33074,8 +33278,8 @@
         </p:nvSpPr>
         <p:spPr>
           <a:xfrm>
-            <a:off x="685800" y="5692140"/>
-            <a:ext cx="28575" cy="188595"/>
+            <a:off x="685800" y="5597842"/>
+            <a:ext cx="28575" cy="377190"/>
           </a:xfrm>
           <a:prstGeom prst="rect">
             <a:avLst/>
@@ -33118,7 +33322,7 @@
         </p:nvSpPr>
         <p:spPr>
           <a:xfrm>
-            <a:off x="876300" y="5673090"/>
+            <a:off x="876300" y="5578792"/>
             <a:ext cx="10629900" cy="666750"/>
           </a:xfrm>
           <a:prstGeom prst="rect">
@@ -33144,7 +33348,7 @@
                 </a:solidFill>
                 <a:latin typeface="Roboto"/>
               </a:rPr>
-              <a:t>Saída da distro docker-desktop do WSL. O mesmo processo tem PID 1 dentro do container e outro PID no host, que é o que o namespace de PID faz.</a:t>
+              <a:t>Saída da distro docker-desktop do WSL. O mesmo processo tem PID 1 dentro do container e outro PID no host, que é o que o namespace de PID faz. É por isso que no nosso diagrama de implantação o container aparece dentro do host, e não como máquina separada.</a:t>
             </a:r>
           </a:p>
         </p:txBody>
@@ -33379,7 +33583,7 @@
         </p:nvSpPr>
         <p:spPr>
           <a:xfrm>
-            <a:off x="685800" y="2458593"/>
+            <a:off x="685800" y="2061210"/>
             <a:ext cx="5143500" cy="182880"/>
           </a:xfrm>
           <a:prstGeom prst="rect">
@@ -33418,7 +33622,7 @@
         </p:nvSpPr>
         <p:spPr>
           <a:xfrm>
-            <a:off x="685800" y="2668143"/>
+            <a:off x="685800" y="2270760"/>
             <a:ext cx="419100" cy="28575"/>
           </a:xfrm>
           <a:prstGeom prst="rect">
@@ -33462,7 +33666,7 @@
         </p:nvSpPr>
         <p:spPr>
           <a:xfrm>
-            <a:off x="704850" y="3057906"/>
+            <a:off x="704850" y="2660523"/>
             <a:ext cx="57150" cy="57150"/>
           </a:xfrm>
           <a:prstGeom prst="rect">
@@ -33506,7 +33710,7 @@
         </p:nvSpPr>
         <p:spPr>
           <a:xfrm>
-            <a:off x="971550" y="2953893"/>
+            <a:off x="971550" y="2556510"/>
             <a:ext cx="4857750" cy="95250"/>
           </a:xfrm>
           <a:prstGeom prst="rect">
@@ -33545,7 +33749,7 @@
         </p:nvSpPr>
         <p:spPr>
           <a:xfrm>
-            <a:off x="704850" y="3852672"/>
+            <a:off x="704850" y="3455289"/>
             <a:ext cx="57150" cy="57150"/>
           </a:xfrm>
           <a:prstGeom prst="rect">
@@ -33589,7 +33793,7 @@
         </p:nvSpPr>
         <p:spPr>
           <a:xfrm>
-            <a:off x="971550" y="3748659"/>
+            <a:off x="971550" y="3351276"/>
             <a:ext cx="4857750" cy="95250"/>
           </a:xfrm>
           <a:prstGeom prst="rect">
@@ -33628,7 +33832,7 @@
         </p:nvSpPr>
         <p:spPr>
           <a:xfrm>
-            <a:off x="704850" y="4647438"/>
+            <a:off x="704850" y="4250055"/>
             <a:ext cx="57150" cy="57150"/>
           </a:xfrm>
           <a:prstGeom prst="rect">
@@ -33672,7 +33876,7 @@
         </p:nvSpPr>
         <p:spPr>
           <a:xfrm>
-            <a:off x="971550" y="4543425"/>
+            <a:off x="971550" y="4146042"/>
             <a:ext cx="4857750" cy="95250"/>
           </a:xfrm>
           <a:prstGeom prst="rect">
@@ -33705,53 +33909,14 @@
       </p:sp>
       <p:sp>
         <p:nvSpPr>
-          <p:cNvPr id="13" name="TextBox 12"/>
-          <p:cNvSpPr txBox="1"/>
-          <p:nvPr/>
-        </p:nvSpPr>
-        <p:spPr>
-          <a:xfrm>
-            <a:off x="6362700" y="2458593"/>
-            <a:ext cx="5143500" cy="182880"/>
-          </a:xfrm>
-          <a:prstGeom prst="rect">
-            <a:avLst/>
-          </a:prstGeom>
-          <a:noFill/>
-        </p:spPr>
-        <p:txBody>
-          <a:bodyPr wrap="square" lIns="0" rIns="0" tIns="0" bIns="0" anchor="t">
-            <a:spAutoFit/>
-          </a:bodyPr>
-          <a:lstStyle/>
-          <a:p>
-            <a:pPr algn="l">
-              <a:lnSpc>
-                <a:spcPct val="120000"/>
-              </a:lnSpc>
-            </a:pPr>
-            <a:r>
-              <a:rPr sz="900" b="1" i="0" spc="120">
-                <a:solidFill>
-                  <a:srgbClr val="E94D1C"/>
-                </a:solidFill>
-                <a:latin typeface="Roboto"/>
-              </a:rPr>
-              <a:t>CGROUPS V2</a:t>
-            </a:r>
-          </a:p>
-        </p:txBody>
-      </p:sp>
-      <p:sp>
-        <p:nvSpPr>
-          <p:cNvPr id="14" name="Rectangle 13"/>
+          <p:cNvPr id="13" name="Rectangle 12"/>
           <p:cNvSpPr/>
           <p:nvPr/>
         </p:nvSpPr>
         <p:spPr>
           <a:xfrm>
-            <a:off x="6362700" y="2668143"/>
-            <a:ext cx="419100" cy="28575"/>
+            <a:off x="704850" y="5308854"/>
+            <a:ext cx="57150" cy="57150"/>
           </a:xfrm>
           <a:prstGeom prst="rect">
             <a:avLst/>
@@ -33788,14 +33953,92 @@
       </p:sp>
       <p:sp>
         <p:nvSpPr>
-          <p:cNvPr id="15" name="Rectangle 14"/>
+          <p:cNvPr id="14" name="TextBox 13"/>
+          <p:cNvSpPr txBox="1"/>
+          <p:nvPr/>
+        </p:nvSpPr>
+        <p:spPr>
+          <a:xfrm>
+            <a:off x="971550" y="5204841"/>
+            <a:ext cx="4857750" cy="95250"/>
+          </a:xfrm>
+          <a:prstGeom prst="rect">
+            <a:avLst/>
+          </a:prstGeom>
+          <a:noFill/>
+        </p:spPr>
+        <p:txBody>
+          <a:bodyPr wrap="square" lIns="0" rIns="0" tIns="0" bIns="0" anchor="t">
+            <a:spAutoFit/>
+          </a:bodyPr>
+          <a:lstStyle/>
+          <a:p>
+            <a:pPr algn="l">
+              <a:lnSpc>
+                <a:spcPct val="130000"/>
+              </a:lnSpc>
+            </a:pPr>
+            <a:r>
+              <a:rPr sz="1580" b="0" i="0">
+                <a:solidFill>
+                  <a:srgbClr val="1A1A1E"/>
+                </a:solidFill>
+                <a:latin typeface="Roboto"/>
+              </a:rPr>
+              <a:t>Esse é o mecanismo que permite o front, a API e o banco do projeto rodarem no mesmo host sem conflito de porta.</a:t>
+            </a:r>
+          </a:p>
+        </p:txBody>
+      </p:sp>
+      <p:sp>
+        <p:nvSpPr>
+          <p:cNvPr id="15" name="TextBox 14"/>
+          <p:cNvSpPr txBox="1"/>
+          <p:nvPr/>
+        </p:nvSpPr>
+        <p:spPr>
+          <a:xfrm>
+            <a:off x="6362700" y="2061210"/>
+            <a:ext cx="5143500" cy="182880"/>
+          </a:xfrm>
+          <a:prstGeom prst="rect">
+            <a:avLst/>
+          </a:prstGeom>
+          <a:noFill/>
+        </p:spPr>
+        <p:txBody>
+          <a:bodyPr wrap="square" lIns="0" rIns="0" tIns="0" bIns="0" anchor="t">
+            <a:spAutoFit/>
+          </a:bodyPr>
+          <a:lstStyle/>
+          <a:p>
+            <a:pPr algn="l">
+              <a:lnSpc>
+                <a:spcPct val="120000"/>
+              </a:lnSpc>
+            </a:pPr>
+            <a:r>
+              <a:rPr sz="900" b="1" i="0" spc="120">
+                <a:solidFill>
+                  <a:srgbClr val="E94D1C"/>
+                </a:solidFill>
+                <a:latin typeface="Roboto"/>
+              </a:rPr>
+              <a:t>CGROUPS V2</a:t>
+            </a:r>
+          </a:p>
+        </p:txBody>
+      </p:sp>
+      <p:sp>
+        <p:nvSpPr>
+          <p:cNvPr id="16" name="Rectangle 15"/>
           <p:cNvSpPr/>
           <p:nvPr/>
         </p:nvSpPr>
         <p:spPr>
           <a:xfrm>
-            <a:off x="6381750" y="3057906"/>
-            <a:ext cx="57150" cy="57150"/>
+            <a:off x="6362700" y="2270760"/>
+            <a:ext cx="419100" cy="28575"/>
           </a:xfrm>
           <a:prstGeom prst="rect">
             <a:avLst/>
@@ -33832,52 +34075,13 @@
       </p:sp>
       <p:sp>
         <p:nvSpPr>
-          <p:cNvPr id="16" name="TextBox 15"/>
-          <p:cNvSpPr txBox="1"/>
-          <p:nvPr/>
-        </p:nvSpPr>
-        <p:spPr>
-          <a:xfrm>
-            <a:off x="6648450" y="2953893"/>
-            <a:ext cx="4857750" cy="95250"/>
-          </a:xfrm>
-          <a:prstGeom prst="rect">
-            <a:avLst/>
-          </a:prstGeom>
-          <a:noFill/>
-        </p:spPr>
-        <p:txBody>
-          <a:bodyPr wrap="square" lIns="0" rIns="0" tIns="0" bIns="0" anchor="t">
-            <a:spAutoFit/>
-          </a:bodyPr>
-          <a:lstStyle/>
-          <a:p>
-            <a:pPr algn="l">
-              <a:lnSpc>
-                <a:spcPct val="130000"/>
-              </a:lnSpc>
-            </a:pPr>
-            <a:r>
-              <a:rPr sz="1580" b="0" i="0">
-                <a:solidFill>
-                  <a:srgbClr val="1A1A1E"/>
-                </a:solidFill>
-                <a:latin typeface="Roboto"/>
-              </a:rPr>
-              <a:t>Os cgroups não isolam nada, eles contabilizam e limitam o consumo de recursos.</a:t>
-            </a:r>
-          </a:p>
-        </p:txBody>
-      </p:sp>
-      <p:sp>
-        <p:nvSpPr>
           <p:cNvPr id="17" name="Rectangle 16"/>
           <p:cNvSpPr/>
           <p:nvPr/>
         </p:nvSpPr>
         <p:spPr>
           <a:xfrm>
-            <a:off x="6381750" y="3852672"/>
+            <a:off x="6381750" y="2660523"/>
             <a:ext cx="57150" cy="57150"/>
           </a:xfrm>
           <a:prstGeom prst="rect">
@@ -33921,7 +34125,7 @@
         </p:nvSpPr>
         <p:spPr>
           <a:xfrm>
-            <a:off x="6648450" y="3748659"/>
+            <a:off x="6648450" y="2556510"/>
             <a:ext cx="4857750" cy="95250"/>
           </a:xfrm>
           <a:prstGeom prst="rect">
@@ -33947,7 +34151,7 @@
                 </a:solidFill>
                 <a:latin typeface="Roboto"/>
               </a:rPr>
-              <a:t>Quando o processo estoura o limite de memória ele não fica lento, o kernel mata ele.</a:t>
+              <a:t>Os cgroups não isolam nada, eles contabilizam e limitam o consumo de recursos.</a:t>
             </a:r>
           </a:p>
         </p:txBody>
@@ -33960,7 +34164,7 @@
         </p:nvSpPr>
         <p:spPr>
           <a:xfrm>
-            <a:off x="6381750" y="4647438"/>
+            <a:off x="6381750" y="3455289"/>
             <a:ext cx="57150" cy="57150"/>
           </a:xfrm>
           <a:prstGeom prst="rect">
@@ -34004,7 +34208,7 @@
         </p:nvSpPr>
         <p:spPr>
           <a:xfrm>
-            <a:off x="6648450" y="4543425"/>
+            <a:off x="6648450" y="3351276"/>
             <a:ext cx="4857750" cy="95250"/>
           </a:xfrm>
           <a:prstGeom prst="rect">
@@ -34030,21 +34234,65 @@
                 </a:solidFill>
                 <a:latin typeface="Roboto"/>
               </a:rPr>
-              <a:t>O limite de CPU não mata, ele freia o processo, o que piora as requisições mais lentas e quase não mexe na média, por isso é mais difícil de perceber.</a:t>
-            </a:r>
-          </a:p>
-        </p:txBody>
-      </p:sp>
-      <p:sp>
-        <p:nvSpPr>
-          <p:cNvPr id="21" name="TextBox 20"/>
+              <a:t>Quando o processo estoura o limite de memória ele não fica lento, o kernel mata ele.</a:t>
+            </a:r>
+          </a:p>
+        </p:txBody>
+      </p:sp>
+      <p:sp>
+        <p:nvSpPr>
+          <p:cNvPr id="21" name="Rectangle 20"/>
+          <p:cNvSpPr/>
+          <p:nvPr/>
+        </p:nvSpPr>
+        <p:spPr>
+          <a:xfrm>
+            <a:off x="6381750" y="4250055"/>
+            <a:ext cx="57150" cy="57150"/>
+          </a:xfrm>
+          <a:prstGeom prst="rect">
+            <a:avLst/>
+          </a:prstGeom>
+          <a:solidFill>
+            <a:srgbClr val="E94D1C"/>
+          </a:solidFill>
+          <a:ln>
+            <a:noFill/>
+          </a:ln>
+          <a:effectLst/>
+        </p:spPr>
+        <p:style>
+          <a:lnRef idx="1">
+            <a:schemeClr val="accent1"/>
+          </a:lnRef>
+          <a:fillRef idx="3">
+            <a:schemeClr val="accent1"/>
+          </a:fillRef>
+          <a:effectRef idx="2">
+            <a:schemeClr val="accent1"/>
+          </a:effectRef>
+          <a:fontRef idx="minor">
+            <a:schemeClr val="lt1"/>
+          </a:fontRef>
+        </p:style>
+        <p:txBody>
+          <a:bodyPr rtlCol="0" anchor="ctr" wrap="square" lIns="0" rIns="0" tIns="0" bIns="0"/>
+          <a:lstStyle/>
+          <a:p>
+            <a:pPr algn="ctr"/>
+          </a:p>
+        </p:txBody>
+      </p:sp>
+      <p:sp>
+        <p:nvSpPr>
+          <p:cNvPr id="22" name="TextBox 21"/>
           <p:cNvSpPr txBox="1"/>
           <p:nvPr/>
         </p:nvSpPr>
         <p:spPr>
           <a:xfrm>
-            <a:off x="685800" y="6324600"/>
-            <a:ext cx="6667500" cy="182880"/>
+            <a:off x="6648450" y="4146042"/>
+            <a:ext cx="4857750" cy="95250"/>
           </a:xfrm>
           <a:prstGeom prst="rect">
             <a:avLst/>
@@ -34059,6 +34307,45 @@
           <a:p>
             <a:pPr algn="l">
               <a:lnSpc>
+                <a:spcPct val="130000"/>
+              </a:lnSpc>
+            </a:pPr>
+            <a:r>
+              <a:rPr sz="1580" b="0" i="0">
+                <a:solidFill>
+                  <a:srgbClr val="1A1A1E"/>
+                </a:solidFill>
+                <a:latin typeface="Roboto"/>
+              </a:rPr>
+              <a:t>O limite de CPU não mata, ele freia o processo, o que piora as requisições mais lentas e quase não mexe na média, por isso é mais difícil de perceber.</a:t>
+            </a:r>
+          </a:p>
+        </p:txBody>
+      </p:sp>
+      <p:sp>
+        <p:nvSpPr>
+          <p:cNvPr id="23" name="TextBox 22"/>
+          <p:cNvSpPr txBox="1"/>
+          <p:nvPr/>
+        </p:nvSpPr>
+        <p:spPr>
+          <a:xfrm>
+            <a:off x="685800" y="6324600"/>
+            <a:ext cx="6667500" cy="182880"/>
+          </a:xfrm>
+          <a:prstGeom prst="rect">
+            <a:avLst/>
+          </a:prstGeom>
+          <a:noFill/>
+        </p:spPr>
+        <p:txBody>
+          <a:bodyPr wrap="square" lIns="0" rIns="0" tIns="0" bIns="0" anchor="t">
+            <a:spAutoFit/>
+          </a:bodyPr>
+          <a:lstStyle/>
+          <a:p>
+            <a:pPr algn="l">
+              <a:lnSpc>
                 <a:spcPct val="120000"/>
               </a:lnSpc>
             </a:pPr>
@@ -34076,7 +34363,7 @@
       </p:sp>
       <p:sp>
         <p:nvSpPr>
-          <p:cNvPr id="22" name="TextBox 21"/>
+          <p:cNvPr id="24" name="TextBox 23"/>
           <p:cNvSpPr txBox="1"/>
           <p:nvPr/>
         </p:nvSpPr>
@@ -36223,7 +36510,7 @@
                 </a:solidFill>
                 <a:latin typeface="Roboto"/>
               </a:rPr>
-              <a:t>O runc cria os namespaces, configura cgroups, aplica capabilities e seccomp, faz pivot_root, dá execve e sai.</a:t>
+              <a:t>Cada peça tem uma responsabilidade e pode ser trocada. É a substituibilidade da Aula 05, aplicada ao próprio Docker.</a:t>
             </a:r>
           </a:p>
         </p:txBody>

--- a/trabalhos/T1-Docker-Invite-People.pptx
+++ b/trabalhos/T1-Docker-Invite-People.pptx
@@ -20923,7 +20923,7 @@
         </p:nvSpPr>
         <p:spPr>
           <a:xfrm>
-            <a:off x="704850" y="2583942"/>
+            <a:off x="704850" y="2445639"/>
             <a:ext cx="57150" cy="57150"/>
           </a:xfrm>
           <a:prstGeom prst="rect">
@@ -20967,7 +20967,7 @@
         </p:nvSpPr>
         <p:spPr>
           <a:xfrm>
-            <a:off x="971550" y="2474976"/>
+            <a:off x="971550" y="2336673"/>
             <a:ext cx="7677150" cy="95250"/>
           </a:xfrm>
           <a:prstGeom prst="rect">
@@ -21006,7 +21006,7 @@
         </p:nvSpPr>
         <p:spPr>
           <a:xfrm>
-            <a:off x="704850" y="3422904"/>
+            <a:off x="704850" y="3284601"/>
             <a:ext cx="57150" cy="57150"/>
           </a:xfrm>
           <a:prstGeom prst="rect">
@@ -21050,7 +21050,7 @@
         </p:nvSpPr>
         <p:spPr>
           <a:xfrm>
-            <a:off x="971550" y="3313938"/>
+            <a:off x="971550" y="3175635"/>
             <a:ext cx="7677150" cy="95250"/>
           </a:xfrm>
           <a:prstGeom prst="rect">
@@ -21089,7 +21089,7 @@
         </p:nvSpPr>
         <p:spPr>
           <a:xfrm>
-            <a:off x="704850" y="4261866"/>
+            <a:off x="704850" y="4123563"/>
             <a:ext cx="57150" cy="57150"/>
           </a:xfrm>
           <a:prstGeom prst="rect">
@@ -21133,7 +21133,7 @@
         </p:nvSpPr>
         <p:spPr>
           <a:xfrm>
-            <a:off x="971550" y="4152900"/>
+            <a:off x="971550" y="4014597"/>
             <a:ext cx="7677150" cy="95250"/>
           </a:xfrm>
           <a:prstGeom prst="rect">
@@ -21172,7 +21172,7 @@
         </p:nvSpPr>
         <p:spPr>
           <a:xfrm>
-            <a:off x="704850" y="5100828"/>
+            <a:off x="704850" y="4962525"/>
             <a:ext cx="57150" cy="57150"/>
           </a:xfrm>
           <a:prstGeom prst="rect">
@@ -21216,7 +21216,7 @@
         </p:nvSpPr>
         <p:spPr>
           <a:xfrm>
-            <a:off x="971550" y="4991862"/>
+            <a:off x="971550" y="4853559"/>
             <a:ext cx="7677150" cy="95250"/>
           </a:xfrm>
           <a:prstGeom prst="rect">
@@ -21242,7 +21242,7 @@
                 </a:solidFill>
                 <a:latin typeface="Roboto"/>
               </a:rPr>
-              <a:t>A Questão Norteadora da Sprint 2 pergunta como os componentes serão distribuídos e implantados no ambiente de execução.</a:t>
+              <a:t>A Questão Norteadora da Sprint 2, que é a pergunta que a sprint precisa responder, é como os componentes serão distribuídos e implantados no ambiente de execução.</a:t>
             </a:r>
           </a:p>
         </p:txBody>
@@ -21255,7 +21255,7 @@
         </p:nvSpPr>
         <p:spPr>
           <a:xfrm>
-            <a:off x="9124950" y="2474976"/>
+            <a:off x="9124950" y="2336673"/>
             <a:ext cx="142875" cy="142875"/>
           </a:xfrm>
           <a:prstGeom prst="donut">
@@ -21299,7 +21299,7 @@
         </p:nvSpPr>
         <p:spPr>
           <a:xfrm>
-            <a:off x="9372600" y="2484501"/>
+            <a:off x="9372600" y="2346198"/>
             <a:ext cx="2133600" cy="182880"/>
           </a:xfrm>
           <a:prstGeom prst="rect">
@@ -21338,8 +21338,8 @@
         </p:nvSpPr>
         <p:spPr>
           <a:xfrm>
-            <a:off x="9124950" y="2760726"/>
-            <a:ext cx="38100" cy="832104"/>
+            <a:off x="9124950" y="2622423"/>
+            <a:ext cx="38100" cy="1033272"/>
           </a:xfrm>
           <a:prstGeom prst="rect">
             <a:avLst/>
@@ -21382,8 +21382,8 @@
         </p:nvSpPr>
         <p:spPr>
           <a:xfrm>
-            <a:off x="9334500" y="2760726"/>
-            <a:ext cx="2171700" cy="1403604"/>
+            <a:off x="9334500" y="2622423"/>
+            <a:ext cx="2171700" cy="1604772"/>
           </a:xfrm>
           <a:prstGeom prst="rect">
             <a:avLst/>
@@ -21411,7 +21411,7 @@
                 </a:solidFill>
                 <a:latin typeface="Roboto"/>
               </a:rPr>
-              <a:t>Três camadas lógicas decididas.</a:t>
+              <a:t>As três camadas do back já estão decididas.</a:t>
             </a:r>
           </a:p>
           <a:p>
@@ -21449,7 +21449,7 @@
                 </a:solidFill>
                 <a:latin typeface="Roboto"/>
               </a:rPr>
-              <a:t>Nenhuma separação física decidida.</a:t>
+              <a:t>Falta decidir em quantos processos separados elas vão rodar.</a:t>
             </a:r>
           </a:p>
         </p:txBody>

--- a/trabalhos/T1-Docker-Invite-People.pptx
+++ b/trabalhos/T1-Docker-Invite-People.pptx
@@ -13693,7 +13693,7 @@
                 </a:solidFill>
                 <a:latin typeface="Roboto"/>
               </a:rPr>
-              <a:t>AS TRÊS CAMADAS LÓGICAS FICAM SEMPRE NA MESMA IMAGEM. O QUE MUDA É ONDE FRONT E BANCO RODAM.</a:t>
+              <a:t>AS TRÊS CAMADAS LÓGICAS FICAM SEMPRE NA MESMA IMAGEM. O QUE MUDA É ONDE O FRONT-END E O BANCO RODAM.</a:t>
             </a:r>
           </a:p>
         </p:txBody>
@@ -13829,7 +13829,7 @@
                 </a:solidFill>
                 <a:latin typeface="Roboto"/>
               </a:rPr>
-              <a:t>front</a:t>
+              <a:t>front-end</a:t>
             </a:r>
           </a:p>
         </p:txBody>
@@ -14295,7 +14295,7 @@
                 </a:solidFill>
                 <a:latin typeface="Roboto"/>
               </a:rPr>
-              <a:t>front</a:t>
+              <a:t>front-end</a:t>
             </a:r>
           </a:p>
         </p:txBody>
@@ -14674,7 +14674,7 @@
                 </a:solidFill>
                 <a:latin typeface="Roboto"/>
               </a:rPr>
-              <a:t>front separado</a:t>
+              <a:t>front-end separado</a:t>
             </a:r>
           </a:p>
         </p:txBody>
@@ -14810,7 +14810,7 @@
                 </a:solidFill>
                 <a:latin typeface="Roboto"/>
               </a:rPr>
-              <a:t>front</a:t>
+              <a:t>front-end</a:t>
             </a:r>
           </a:p>
         </p:txBody>
@@ -17167,7 +17167,7 @@
                 </a:solidFill>
                 <a:latin typeface="Roboto"/>
               </a:rPr>
-              <a:t>front</a:t>
+              <a:t>front-end</a:t>
             </a:r>
           </a:p>
         </p:txBody>
@@ -19107,7 +19107,7 @@
                 </a:solidFill>
                 <a:latin typeface="Roboto"/>
               </a:rPr>
-              <a:t>O código do front não está na imagem da API, então a API não depende dele nem por acidente.</a:t>
+              <a:t>O código do front-end não está na imagem da API, então a API não depende dele nem por acidente.</a:t>
             </a:r>
           </a:p>
         </p:txBody>
@@ -20162,7 +20162,7 @@
                 </a:solidFill>
                 <a:latin typeface="Roboto"/>
               </a:rPr>
-              <a:t>Mesma imagem de front ou imagens separadas?</a:t>
+              <a:t>Mesma imagem de front-end ou imagens separadas?</a:t>
             </a:r>
           </a:p>
           <a:p>
@@ -21159,7 +21159,7 @@
                 </a:solidFill>
                 <a:latin typeface="Roboto"/>
               </a:rPr>
-              <a:t>A arquitetura já está registrada no Guia da Arquitetura, com MVC no front e três camadas no back.</a:t>
+              <a:t>A arquitetura já está registrada no Guia da Arquitetura, com MVC no front-end e três camadas no back-end.</a:t>
             </a:r>
           </a:p>
         </p:txBody>
@@ -21411,7 +21411,7 @@
                 </a:solidFill>
                 <a:latin typeface="Roboto"/>
               </a:rPr>
-              <a:t>As três camadas do back já estão decididas.</a:t>
+              <a:t>As três camadas do back-end já estão decididas.</a:t>
             </a:r>
           </a:p>
           <a:p>
@@ -33985,7 +33985,7 @@
                 </a:solidFill>
                 <a:latin typeface="Roboto"/>
               </a:rPr>
-              <a:t>Esse é o mecanismo que permite o front, a API e o banco do projeto rodarem no mesmo host sem conflito de porta.</a:t>
+              <a:t>Esse é o mecanismo que permite o front-end, a API e o banco do projeto rodarem no mesmo host sem conflito de porta.</a:t>
             </a:r>
           </a:p>
         </p:txBody>

--- a/trabalhos/T1-Docker-Invite-People.pptx
+++ b/trabalhos/T1-Docker-Invite-People.pptx
@@ -13278,58 +13278,14 @@
       </p:sp>
       <p:sp>
         <p:nvSpPr>
-          <p:cNvPr id="8" name="Rectangle 7"/>
-          <p:cNvSpPr/>
-          <p:nvPr/>
-        </p:nvSpPr>
-        <p:spPr>
-          <a:xfrm>
-            <a:off x="914400" y="2895600"/>
-            <a:ext cx="38100" cy="171450"/>
-          </a:xfrm>
-          <a:prstGeom prst="rect">
-            <a:avLst/>
-          </a:prstGeom>
-          <a:solidFill>
-            <a:srgbClr val="E94D1C"/>
-          </a:solidFill>
-          <a:ln>
-            <a:noFill/>
-          </a:ln>
-          <a:effectLst/>
-        </p:spPr>
-        <p:style>
-          <a:lnRef idx="1">
-            <a:schemeClr val="accent1"/>
-          </a:lnRef>
-          <a:fillRef idx="3">
-            <a:schemeClr val="accent1"/>
-          </a:fillRef>
-          <a:effectRef idx="2">
-            <a:schemeClr val="accent1"/>
-          </a:effectRef>
-          <a:fontRef idx="minor">
-            <a:schemeClr val="lt1"/>
-          </a:fontRef>
-        </p:style>
-        <p:txBody>
-          <a:bodyPr rtlCol="0" anchor="ctr" wrap="square" lIns="0" rIns="0" tIns="0" bIns="0"/>
-          <a:lstStyle/>
-          <a:p>
-            <a:pPr algn="ctr"/>
-          </a:p>
-        </p:txBody>
-      </p:sp>
-      <p:sp>
-        <p:nvSpPr>
-          <p:cNvPr id="9" name="TextBox 8"/>
+          <p:cNvPr id="8" name="TextBox 7"/>
           <p:cNvSpPr txBox="1"/>
           <p:nvPr/>
         </p:nvSpPr>
         <p:spPr>
           <a:xfrm>
-            <a:off x="1066800" y="2857500"/>
-            <a:ext cx="6667500" cy="228600"/>
+            <a:off x="914400" y="3105150"/>
+            <a:ext cx="8191500" cy="1428750"/>
           </a:xfrm>
           <a:prstGeom prst="rect">
             <a:avLst/>
@@ -13344,31 +13300,31 @@
           <a:p>
             <a:pPr algn="l">
               <a:lnSpc>
-                <a:spcPct val="120000"/>
-              </a:lnSpc>
-            </a:pPr>
-            <a:r>
-              <a:rPr sz="1120" b="1" i="0" spc="160">
+                <a:spcPct val="105000"/>
+              </a:lnSpc>
+            </a:pPr>
+            <a:r>
+              <a:rPr sz="4050" b="1" i="0">
                 <a:solidFill>
                   <a:srgbClr val="FFFFFF"/>
                 </a:solidFill>
                 <a:latin typeface="Roboto"/>
               </a:rPr>
-              <a:t>GABRIEL · 6 MINUTOS</a:t>
-            </a:r>
-          </a:p>
-        </p:txBody>
-      </p:sp>
-      <p:sp>
-        <p:nvSpPr>
-          <p:cNvPr id="10" name="TextBox 9"/>
+              <a:t>Aplicação no Invite People</a:t>
+            </a:r>
+          </a:p>
+        </p:txBody>
+      </p:sp>
+      <p:sp>
+        <p:nvSpPr>
+          <p:cNvPr id="9" name="TextBox 8"/>
           <p:cNvSpPr txBox="1"/>
           <p:nvPr/>
         </p:nvSpPr>
         <p:spPr>
           <a:xfrm>
-            <a:off x="914400" y="3105150"/>
-            <a:ext cx="8191500" cy="1428750"/>
+            <a:off x="914400" y="4476750"/>
+            <a:ext cx="6858000" cy="1047750"/>
           </a:xfrm>
           <a:prstGeom prst="rect">
             <a:avLst/>
@@ -13383,31 +13339,31 @@
           <a:p>
             <a:pPr algn="l">
               <a:lnSpc>
-                <a:spcPct val="105000"/>
-              </a:lnSpc>
-            </a:pPr>
-            <a:r>
-              <a:rPr sz="4050" b="1" i="0">
-                <a:solidFill>
-                  <a:srgbClr val="FFFFFF"/>
-                </a:solidFill>
-                <a:latin typeface="Roboto"/>
-              </a:rPr>
-              <a:t>Aplicação no Invite People</a:t>
-            </a:r>
-          </a:p>
-        </p:txBody>
-      </p:sp>
-      <p:sp>
-        <p:nvSpPr>
-          <p:cNvPr id="11" name="TextBox 10"/>
+                <a:spcPct val="145000"/>
+              </a:lnSpc>
+            </a:pPr>
+            <a:r>
+              <a:rPr sz="1420" b="0" i="0">
+                <a:solidFill>
+                  <a:srgbClr val="E2DEF5"/>
+                </a:solidFill>
+                <a:latin typeface="Roboto"/>
+              </a:rPr>
+              <a:t>Mapeamento entre os diagramas da Sprint 2 e o arquivo de compose, com o número de cada task.</a:t>
+            </a:r>
+          </a:p>
+        </p:txBody>
+      </p:sp>
+      <p:sp>
+        <p:nvSpPr>
+          <p:cNvPr id="10" name="TextBox 9"/>
           <p:cNvSpPr txBox="1"/>
           <p:nvPr/>
         </p:nvSpPr>
         <p:spPr>
           <a:xfrm>
-            <a:off x="914400" y="4476750"/>
-            <a:ext cx="6858000" cy="1047750"/>
+            <a:off x="685800" y="6324600"/>
+            <a:ext cx="6667500" cy="182880"/>
           </a:xfrm>
           <a:prstGeom prst="rect">
             <a:avLst/>
@@ -13422,45 +13378,6 @@
           <a:p>
             <a:pPr algn="l">
               <a:lnSpc>
-                <a:spcPct val="145000"/>
-              </a:lnSpc>
-            </a:pPr>
-            <a:r>
-              <a:rPr sz="1420" b="0" i="0">
-                <a:solidFill>
-                  <a:srgbClr val="E2DEF5"/>
-                </a:solidFill>
-                <a:latin typeface="Roboto"/>
-              </a:rPr>
-              <a:t>Mapeamento entre os diagramas da Sprint 2 e o arquivo de compose, com o número de cada task.</a:t>
-            </a:r>
-          </a:p>
-        </p:txBody>
-      </p:sp>
-      <p:sp>
-        <p:nvSpPr>
-          <p:cNvPr id="12" name="TextBox 11"/>
-          <p:cNvSpPr txBox="1"/>
-          <p:nvPr/>
-        </p:nvSpPr>
-        <p:spPr>
-          <a:xfrm>
-            <a:off x="685800" y="6324600"/>
-            <a:ext cx="6667500" cy="182880"/>
-          </a:xfrm>
-          <a:prstGeom prst="rect">
-            <a:avLst/>
-          </a:prstGeom>
-          <a:noFill/>
-        </p:spPr>
-        <p:txBody>
-          <a:bodyPr wrap="square" lIns="0" rIns="0" tIns="0" bIns="0" anchor="t">
-            <a:spAutoFit/>
-          </a:bodyPr>
-          <a:lstStyle/>
-          <a:p>
-            <a:pPr algn="l">
-              <a:lnSpc>
                 <a:spcPct val="120000"/>
               </a:lnSpc>
             </a:pPr>
@@ -13478,7 +13395,7 @@
       </p:sp>
       <p:sp>
         <p:nvSpPr>
-          <p:cNvPr id="13" name="TextBox 12"/>
+          <p:cNvPr id="11" name="TextBox 10"/>
           <p:cNvSpPr txBox="1"/>
           <p:nvPr/>
         </p:nvSpPr>
@@ -20550,58 +20467,14 @@
       </p:sp>
       <p:sp>
         <p:nvSpPr>
-          <p:cNvPr id="8" name="Rectangle 7"/>
-          <p:cNvSpPr/>
-          <p:nvPr/>
-        </p:nvSpPr>
-        <p:spPr>
-          <a:xfrm>
-            <a:off x="914400" y="2895600"/>
-            <a:ext cx="38100" cy="171450"/>
-          </a:xfrm>
-          <a:prstGeom prst="rect">
-            <a:avLst/>
-          </a:prstGeom>
-          <a:solidFill>
-            <a:srgbClr val="E94D1C"/>
-          </a:solidFill>
-          <a:ln>
-            <a:noFill/>
-          </a:ln>
-          <a:effectLst/>
-        </p:spPr>
-        <p:style>
-          <a:lnRef idx="1">
-            <a:schemeClr val="accent1"/>
-          </a:lnRef>
-          <a:fillRef idx="3">
-            <a:schemeClr val="accent1"/>
-          </a:fillRef>
-          <a:effectRef idx="2">
-            <a:schemeClr val="accent1"/>
-          </a:effectRef>
-          <a:fontRef idx="minor">
-            <a:schemeClr val="lt1"/>
-          </a:fontRef>
-        </p:style>
-        <p:txBody>
-          <a:bodyPr rtlCol="0" anchor="ctr" wrap="square" lIns="0" rIns="0" tIns="0" bIns="0"/>
-          <a:lstStyle/>
-          <a:p>
-            <a:pPr algn="ctr"/>
-          </a:p>
-        </p:txBody>
-      </p:sp>
-      <p:sp>
-        <p:nvSpPr>
-          <p:cNvPr id="9" name="TextBox 8"/>
+          <p:cNvPr id="8" name="TextBox 7"/>
           <p:cNvSpPr txBox="1"/>
           <p:nvPr/>
         </p:nvSpPr>
         <p:spPr>
           <a:xfrm>
-            <a:off x="1066800" y="2857500"/>
-            <a:ext cx="6667500" cy="228600"/>
+            <a:off x="914400" y="3105150"/>
+            <a:ext cx="8191500" cy="1428750"/>
           </a:xfrm>
           <a:prstGeom prst="rect">
             <a:avLst/>
@@ -20616,31 +20489,31 @@
           <a:p>
             <a:pPr algn="l">
               <a:lnSpc>
-                <a:spcPct val="120000"/>
-              </a:lnSpc>
-            </a:pPr>
-            <a:r>
-              <a:rPr sz="1120" b="1" i="0" spc="160">
+                <a:spcPct val="105000"/>
+              </a:lnSpc>
+            </a:pPr>
+            <a:r>
+              <a:rPr sz="4050" b="1" i="0">
                 <a:solidFill>
                   <a:srgbClr val="FFFFFF"/>
                 </a:solidFill>
                 <a:latin typeface="Roboto"/>
               </a:rPr>
-              <a:t>ANDREAS, COM TIAGO NA SEGURANÇA · 7 MINUTOS</a:t>
-            </a:r>
-          </a:p>
-        </p:txBody>
-      </p:sp>
-      <p:sp>
-        <p:nvSpPr>
-          <p:cNvPr id="10" name="TextBox 9"/>
+              <a:t>Vantagens, desvantagens e demonstração</a:t>
+            </a:r>
+          </a:p>
+        </p:txBody>
+      </p:sp>
+      <p:sp>
+        <p:nvSpPr>
+          <p:cNvPr id="9" name="TextBox 8"/>
           <p:cNvSpPr txBox="1"/>
           <p:nvPr/>
         </p:nvSpPr>
         <p:spPr>
           <a:xfrm>
-            <a:off x="914400" y="3105150"/>
-            <a:ext cx="8191500" cy="1428750"/>
+            <a:off x="914400" y="4476750"/>
+            <a:ext cx="6858000" cy="1047750"/>
           </a:xfrm>
           <a:prstGeom prst="rect">
             <a:avLst/>
@@ -20655,31 +20528,31 @@
           <a:p>
             <a:pPr algn="l">
               <a:lnSpc>
-                <a:spcPct val="105000"/>
-              </a:lnSpc>
-            </a:pPr>
-            <a:r>
-              <a:rPr sz="4050" b="1" i="0">
-                <a:solidFill>
-                  <a:srgbClr val="FFFFFF"/>
-                </a:solidFill>
-                <a:latin typeface="Roboto"/>
-              </a:rPr>
-              <a:t>Vantagens, desvantagens e demonstração</a:t>
-            </a:r>
-          </a:p>
-        </p:txBody>
-      </p:sp>
-      <p:sp>
-        <p:nvSpPr>
-          <p:cNvPr id="11" name="TextBox 10"/>
+                <a:spcPct val="145000"/>
+              </a:lnSpc>
+            </a:pPr>
+            <a:r>
+              <a:rPr sz="1420" b="0" i="0">
+                <a:solidFill>
+                  <a:srgbClr val="E2DEF5"/>
+                </a:solidFill>
+                <a:latin typeface="Roboto"/>
+              </a:rPr>
+              <a:t>A demonstração é do ambiente e da topologia, não do produto. A implementação começa na Sprint 4.</a:t>
+            </a:r>
+          </a:p>
+        </p:txBody>
+      </p:sp>
+      <p:sp>
+        <p:nvSpPr>
+          <p:cNvPr id="10" name="TextBox 9"/>
           <p:cNvSpPr txBox="1"/>
           <p:nvPr/>
         </p:nvSpPr>
         <p:spPr>
           <a:xfrm>
-            <a:off x="914400" y="4476750"/>
-            <a:ext cx="6858000" cy="1047750"/>
+            <a:off x="685800" y="6324600"/>
+            <a:ext cx="6667500" cy="182880"/>
           </a:xfrm>
           <a:prstGeom prst="rect">
             <a:avLst/>
@@ -20694,45 +20567,6 @@
           <a:p>
             <a:pPr algn="l">
               <a:lnSpc>
-                <a:spcPct val="145000"/>
-              </a:lnSpc>
-            </a:pPr>
-            <a:r>
-              <a:rPr sz="1420" b="0" i="0">
-                <a:solidFill>
-                  <a:srgbClr val="E2DEF5"/>
-                </a:solidFill>
-                <a:latin typeface="Roboto"/>
-              </a:rPr>
-              <a:t>A demonstração é do ambiente e da topologia, não do produto. A implementação começa na Sprint 4.</a:t>
-            </a:r>
-          </a:p>
-        </p:txBody>
-      </p:sp>
-      <p:sp>
-        <p:nvSpPr>
-          <p:cNvPr id="12" name="TextBox 11"/>
-          <p:cNvSpPr txBox="1"/>
-          <p:nvPr/>
-        </p:nvSpPr>
-        <p:spPr>
-          <a:xfrm>
-            <a:off x="685800" y="6324600"/>
-            <a:ext cx="6667500" cy="182880"/>
-          </a:xfrm>
-          <a:prstGeom prst="rect">
-            <a:avLst/>
-          </a:prstGeom>
-          <a:noFill/>
-        </p:spPr>
-        <p:txBody>
-          <a:bodyPr wrap="square" lIns="0" rIns="0" tIns="0" bIns="0" anchor="t">
-            <a:spAutoFit/>
-          </a:bodyPr>
-          <a:lstStyle/>
-          <a:p>
-            <a:pPr algn="l">
-              <a:lnSpc>
                 <a:spcPct val="120000"/>
               </a:lnSpc>
             </a:pPr>
@@ -20750,7 +20584,7 @@
       </p:sp>
       <p:sp>
         <p:nvSpPr>
-          <p:cNvPr id="13" name="TextBox 12"/>
+          <p:cNvPr id="11" name="TextBox 10"/>
           <p:cNvSpPr txBox="1"/>
           <p:nvPr/>
         </p:nvSpPr>
@@ -21616,7 +21450,7 @@
                 </a:solidFill>
                 <a:latin typeface="Roboto"/>
               </a:rPr>
-              <a:t>DEMONSTRAÇÃO, 90 SEGUNDOS</a:t>
+              <a:t>DEMONSTRAÇÃO</a:t>
             </a:r>
           </a:p>
         </p:txBody>
@@ -23323,7 +23157,7 @@
                 </a:solidFill>
                 <a:latin typeface="Roboto"/>
               </a:rPr>
-              <a:t>REGRA</a:t>
+              <a:t>NO NOSSO CASO</a:t>
             </a:r>
           </a:p>
         </p:txBody>
@@ -23337,7 +23171,7 @@
         <p:spPr>
           <a:xfrm>
             <a:off x="9124950" y="2760726"/>
-            <a:ext cx="38100" cy="1636776"/>
+            <a:ext cx="38100" cy="1005840"/>
           </a:xfrm>
           <a:prstGeom prst="rect">
             <a:avLst/>
@@ -23381,7 +23215,7 @@
         <p:spPr>
           <a:xfrm>
             <a:off x="9334500" y="2760726"/>
-            <a:ext cx="2171700" cy="2208276"/>
+            <a:ext cx="2171700" cy="1577340"/>
           </a:xfrm>
           <a:prstGeom prst="rect">
             <a:avLst/>
@@ -23410,44 +23244,6 @@
                 <a:latin typeface="Roboto"/>
               </a:rPr>
               <a:t>Dos quatro, o do daemon como root é o que atinge o projeto hoje, porque os quatro integrantes rodam na própria máquina.</a:t>
-            </a:r>
-          </a:p>
-          <a:p>
-            <a:pPr>
-              <a:lnSpc>
-                <a:spcPct val="140000"/>
-              </a:lnSpc>
-              <a:spcAft>
-                <a:spcPts val="600"/>
-              </a:spcAft>
-            </a:pPr>
-            <a:r>
-              <a:rPr sz="1200" b="0" i="0">
-                <a:solidFill>
-                  <a:srgbClr val="3A3A44"/>
-                </a:solidFill>
-                <a:latin typeface="Roboto"/>
-              </a:rPr>
-              <a:t/>
-            </a:r>
-          </a:p>
-          <a:p>
-            <a:pPr>
-              <a:lnSpc>
-                <a:spcPct val="140000"/>
-              </a:lnSpc>
-              <a:spcAft>
-                <a:spcPts val="600"/>
-              </a:spcAft>
-            </a:pPr>
-            <a:r>
-              <a:rPr sz="1200" b="0" i="0">
-                <a:solidFill>
-                  <a:srgbClr val="3A3A44"/>
-                </a:solidFill>
-                <a:latin typeface="Roboto"/>
-              </a:rPr>
-              <a:t>Nenhum número de desempenho entra aqui sem medição feita pelo time.</a:t>
             </a:r>
           </a:p>
         </p:txBody>
@@ -29637,58 +29433,14 @@
       </p:sp>
       <p:sp>
         <p:nvSpPr>
-          <p:cNvPr id="8" name="Rectangle 7"/>
-          <p:cNvSpPr/>
-          <p:nvPr/>
-        </p:nvSpPr>
-        <p:spPr>
-          <a:xfrm>
-            <a:off x="914400" y="2895600"/>
-            <a:ext cx="38100" cy="171450"/>
-          </a:xfrm>
-          <a:prstGeom prst="rect">
-            <a:avLst/>
-          </a:prstGeom>
-          <a:solidFill>
-            <a:srgbClr val="E94D1C"/>
-          </a:solidFill>
-          <a:ln>
-            <a:noFill/>
-          </a:ln>
-          <a:effectLst/>
-        </p:spPr>
-        <p:style>
-          <a:lnRef idx="1">
-            <a:schemeClr val="accent1"/>
-          </a:lnRef>
-          <a:fillRef idx="3">
-            <a:schemeClr val="accent1"/>
-          </a:fillRef>
-          <a:effectRef idx="2">
-            <a:schemeClr val="accent1"/>
-          </a:effectRef>
-          <a:fontRef idx="minor">
-            <a:schemeClr val="lt1"/>
-          </a:fontRef>
-        </p:style>
-        <p:txBody>
-          <a:bodyPr rtlCol="0" anchor="ctr" wrap="square" lIns="0" rIns="0" tIns="0" bIns="0"/>
-          <a:lstStyle/>
-          <a:p>
-            <a:pPr algn="ctr"/>
-          </a:p>
-        </p:txBody>
-      </p:sp>
-      <p:sp>
-        <p:nvSpPr>
-          <p:cNvPr id="9" name="TextBox 8"/>
+          <p:cNvPr id="8" name="TextBox 7"/>
           <p:cNvSpPr txBox="1"/>
           <p:nvPr/>
         </p:nvSpPr>
         <p:spPr>
           <a:xfrm>
-            <a:off x="1066800" y="2857500"/>
-            <a:ext cx="6667500" cy="228600"/>
+            <a:off x="914400" y="3105150"/>
+            <a:ext cx="8191500" cy="1428750"/>
           </a:xfrm>
           <a:prstGeom prst="rect">
             <a:avLst/>
@@ -29703,31 +29455,31 @@
           <a:p>
             <a:pPr algn="l">
               <a:lnSpc>
-                <a:spcPct val="120000"/>
-              </a:lnSpc>
-            </a:pPr>
-            <a:r>
-              <a:rPr sz="1120" b="1" i="0" spc="160">
+                <a:spcPct val="105000"/>
+              </a:lnSpc>
+            </a:pPr>
+            <a:r>
+              <a:rPr sz="4050" b="1" i="0">
                 <a:solidFill>
                   <a:srgbClr val="FFFFFF"/>
                 </a:solidFill>
                 <a:latin typeface="Roboto"/>
               </a:rPr>
-              <a:t>TIAGO · 6 MINUTOS</a:t>
-            </a:r>
-          </a:p>
-        </p:txBody>
-      </p:sp>
-      <p:sp>
-        <p:nvSpPr>
-          <p:cNvPr id="10" name="TextBox 9"/>
+              <a:t>Definições e arquitetura</a:t>
+            </a:r>
+          </a:p>
+        </p:txBody>
+      </p:sp>
+      <p:sp>
+        <p:nvSpPr>
+          <p:cNvPr id="9" name="TextBox 8"/>
           <p:cNvSpPr txBox="1"/>
           <p:nvPr/>
         </p:nvSpPr>
         <p:spPr>
           <a:xfrm>
-            <a:off x="914400" y="3105150"/>
-            <a:ext cx="8191500" cy="1428750"/>
+            <a:off x="914400" y="4476750"/>
+            <a:ext cx="6858000" cy="1047750"/>
           </a:xfrm>
           <a:prstGeom prst="rect">
             <a:avLst/>
@@ -29742,31 +29494,31 @@
           <a:p>
             <a:pPr algn="l">
               <a:lnSpc>
-                <a:spcPct val="105000"/>
-              </a:lnSpc>
-            </a:pPr>
-            <a:r>
-              <a:rPr sz="4050" b="1" i="0">
-                <a:solidFill>
-                  <a:srgbClr val="FFFFFF"/>
-                </a:solidFill>
-                <a:latin typeface="Roboto"/>
-              </a:rPr>
-              <a:t>Definições e arquitetura</a:t>
-            </a:r>
-          </a:p>
-        </p:txBody>
-      </p:sp>
-      <p:sp>
-        <p:nvSpPr>
-          <p:cNvPr id="11" name="TextBox 10"/>
+                <a:spcPct val="145000"/>
+              </a:lnSpc>
+            </a:pPr>
+            <a:r>
+              <a:rPr sz="1420" b="0" i="0">
+                <a:solidFill>
+                  <a:srgbClr val="E2DEF5"/>
+                </a:solidFill>
+                <a:latin typeface="Roboto"/>
+              </a:rPr>
+              <a:t>Antes de decidir onde cada parte roda, o que o kernel faz quando alguém digita docker run e por que a imagem é em camadas.</a:t>
+            </a:r>
+          </a:p>
+        </p:txBody>
+      </p:sp>
+      <p:sp>
+        <p:nvSpPr>
+          <p:cNvPr id="10" name="TextBox 9"/>
           <p:cNvSpPr txBox="1"/>
           <p:nvPr/>
         </p:nvSpPr>
         <p:spPr>
           <a:xfrm>
-            <a:off x="914400" y="4476750"/>
-            <a:ext cx="6858000" cy="1047750"/>
+            <a:off x="685800" y="6324600"/>
+            <a:ext cx="6667500" cy="182880"/>
           </a:xfrm>
           <a:prstGeom prst="rect">
             <a:avLst/>
@@ -29781,45 +29533,6 @@
           <a:p>
             <a:pPr algn="l">
               <a:lnSpc>
-                <a:spcPct val="145000"/>
-              </a:lnSpc>
-            </a:pPr>
-            <a:r>
-              <a:rPr sz="1420" b="0" i="0">
-                <a:solidFill>
-                  <a:srgbClr val="E2DEF5"/>
-                </a:solidFill>
-                <a:latin typeface="Roboto"/>
-              </a:rPr>
-              <a:t>Antes de decidir onde cada parte roda, o que o kernel faz quando alguém digita docker run e por que a imagem é em camadas.</a:t>
-            </a:r>
-          </a:p>
-        </p:txBody>
-      </p:sp>
-      <p:sp>
-        <p:nvSpPr>
-          <p:cNvPr id="12" name="TextBox 11"/>
-          <p:cNvSpPr txBox="1"/>
-          <p:nvPr/>
-        </p:nvSpPr>
-        <p:spPr>
-          <a:xfrm>
-            <a:off x="685800" y="6324600"/>
-            <a:ext cx="6667500" cy="182880"/>
-          </a:xfrm>
-          <a:prstGeom prst="rect">
-            <a:avLst/>
-          </a:prstGeom>
-          <a:noFill/>
-        </p:spPr>
-        <p:txBody>
-          <a:bodyPr wrap="square" lIns="0" rIns="0" tIns="0" bIns="0" anchor="t">
-            <a:spAutoFit/>
-          </a:bodyPr>
-          <a:lstStyle/>
-          <a:p>
-            <a:pPr algn="l">
-              <a:lnSpc>
                 <a:spcPct val="120000"/>
               </a:lnSpc>
             </a:pPr>
@@ -29837,7 +29550,7 @@
       </p:sp>
       <p:sp>
         <p:nvSpPr>
-          <p:cNvPr id="13" name="TextBox 12"/>
+          <p:cNvPr id="11" name="TextBox 10"/>
           <p:cNvSpPr txBox="1"/>
           <p:nvPr/>
         </p:nvSpPr>

--- a/trabalhos/T1-Docker-Invite-People.pptx
+++ b/trabalhos/T1-Docker-Invite-People.pptx
@@ -12834,7 +12834,7 @@
                 </a:solidFill>
                 <a:latin typeface="Roboto"/>
               </a:rPr>
-              <a:t>OCI, FUNDADA EM 2015</a:t>
+              <a:t>PADRONIZAÇÃO, DESDE 2015</a:t>
             </a:r>
           </a:p>
         </p:txBody>
@@ -21489,7 +21489,7 @@
                 </a:solidFill>
                 <a:latin typeface="Roboto"/>
               </a:rPr>
-              <a:t>O dado sobrevive ao container</a:t>
+              <a:t>O que acontece com o dado</a:t>
             </a:r>
           </a:p>
           <a:p>
@@ -21505,7 +21505,7 @@
                 </a:solidFill>
                 <a:latin typeface="Roboto"/>
               </a:rPr>
-              <a:t>se ficar num volume</a:t>
+              <a:t>quando o container é derrubado</a:t>
             </a:r>
           </a:p>
         </p:txBody>
@@ -22659,7 +22659,7 @@
                 </a:solidFill>
                 <a:latin typeface="Roboto"/>
               </a:rPr>
-              <a:t>LIMITAÇÕES</a:t>
+              <a:t>DESVANTAGENS</a:t>
             </a:r>
           </a:p>
         </p:txBody>
@@ -27289,7 +27289,7 @@
                 </a:solidFill>
                 <a:latin typeface="Roboto"/>
               </a:rPr>
-              <a:t>RECOMENDAÇÃO PARA O ADR #63</a:t>
+              <a:t>ENTRADA PARA O ADR #63</a:t>
             </a:r>
           </a:p>
         </p:txBody>
@@ -32363,7 +32363,7 @@
                 </a:solidFill>
                 <a:latin typeface="Roboto"/>
               </a:rPr>
-              <a:t>O QUE O KERNEL ENXERGA</a:t>
+              <a:t>O PROCESSO VISTO DO HOST</a:t>
             </a:r>
           </a:p>
         </p:txBody>
@@ -33228,7 +33228,7 @@
                 </a:solidFill>
                 <a:latin typeface="Roboto"/>
               </a:rPr>
-              <a:t>NAMESPACES E CGROUPS</a:t>
+              <a:t>OS DOIS MECANISMOS DO KERNEL</a:t>
             </a:r>
           </a:p>
         </p:txBody>
@@ -33267,7 +33267,7 @@
                 </a:solidFill>
                 <a:latin typeface="Roboto"/>
               </a:rPr>
-              <a:t>Namespaces isolam a visão.</a:t>
+              <a:t>Namespaces e cgroups</a:t>
             </a:r>
           </a:p>
           <a:p>
@@ -33283,7 +33283,7 @@
                 </a:solidFill>
                 <a:latin typeface="Roboto"/>
               </a:rPr>
-              <a:t>Cgroups limitam o consumo.</a:t>
+              <a:t>fazem coisas diferentes</a:t>
             </a:r>
           </a:p>
         </p:txBody>

--- a/trabalhos/T1-Docker-Invite-People.pptx
+++ b/trabalhos/T1-Docker-Invite-People.pptx
@@ -12928,7 +12928,7 @@
                 </a:solidFill>
                 <a:latin typeface="Roboto"/>
               </a:rPr>
-              <a:t>Fundada em 2015 sob a Linux Foundation, com a Runtime Spec, a Image Spec e a Distribution Spec. O runc é trocável por crun, gVisor ou Kata. O engine é trocável por Podman. É a substituibilidade por compatibilidade de interface da Aula 05, e o Bloco D traz um caso real.</a:t>
+              <a:t>Fundada em 2015 sob a Linux Foundation, com a Runtime Spec, a Image Spec e a Distribution Spec. O runc é trocável por crun, gVisor ou Kata. O engine é trocável por Podman. É substituibilidade por compatibilidade de interface, e a seção 03 traz um caso real disso.</a:t>
             </a:r>
           </a:p>
         </p:txBody>
@@ -13516,7 +13516,7 @@
                 </a:solidFill>
                 <a:latin typeface="Roboto"/>
               </a:rPr>
-              <a:t>CAMADA LÓGICA E TIER, AULA 03</a:t>
+              <a:t>CAMADA LÓGICA E TIER</a:t>
             </a:r>
           </a:p>
         </p:txBody>
@@ -13584,7 +13584,7 @@
         </p:nvSpPr>
         <p:spPr>
           <a:xfrm>
-            <a:off x="857250" y="2562225"/>
+            <a:off x="857250" y="2457450"/>
             <a:ext cx="10001250" cy="182880"/>
           </a:xfrm>
           <a:prstGeom prst="rect">
@@ -13623,7 +13623,7 @@
         </p:nvSpPr>
         <p:spPr>
           <a:xfrm>
-            <a:off x="857250" y="2809875"/>
+            <a:off x="857250" y="2705100"/>
             <a:ext cx="2724150" cy="1504950"/>
           </a:xfrm>
           <a:prstGeom prst="roundRect">
@@ -13672,7 +13672,7 @@
         </p:nvSpPr>
         <p:spPr>
           <a:xfrm>
-            <a:off x="1009650" y="2886075"/>
+            <a:off x="1009650" y="2781300"/>
             <a:ext cx="2419350" cy="247650"/>
           </a:xfrm>
           <a:prstGeom prst="roundRect">
@@ -13720,7 +13720,7 @@
         </p:nvSpPr>
         <p:spPr>
           <a:xfrm>
-            <a:off x="1009650" y="2943225"/>
+            <a:off x="1009650" y="2838450"/>
             <a:ext cx="2419350" cy="198120"/>
           </a:xfrm>
           <a:prstGeom prst="rect">
@@ -13759,7 +13759,7 @@
         </p:nvSpPr>
         <p:spPr>
           <a:xfrm>
-            <a:off x="1009650" y="3171825"/>
+            <a:off x="1009650" y="3067050"/>
             <a:ext cx="2419350" cy="781050"/>
           </a:xfrm>
           <a:prstGeom prst="roundRect">
@@ -13807,7 +13807,7 @@
         </p:nvSpPr>
         <p:spPr>
           <a:xfrm>
-            <a:off x="1038225" y="3286125"/>
+            <a:off x="1038225" y="3181350"/>
             <a:ext cx="2362200" cy="182880"/>
           </a:xfrm>
           <a:prstGeom prst="rect">
@@ -13846,7 +13846,7 @@
         </p:nvSpPr>
         <p:spPr>
           <a:xfrm>
-            <a:off x="1038225" y="3514725"/>
+            <a:off x="1038225" y="3409950"/>
             <a:ext cx="2362200" cy="182880"/>
           </a:xfrm>
           <a:prstGeom prst="rect">
@@ -13885,7 +13885,7 @@
         </p:nvSpPr>
         <p:spPr>
           <a:xfrm>
-            <a:off x="1038225" y="3743325"/>
+            <a:off x="1038225" y="3638550"/>
             <a:ext cx="2362200" cy="182880"/>
           </a:xfrm>
           <a:prstGeom prst="rect">
@@ -13924,7 +13924,7 @@
         </p:nvSpPr>
         <p:spPr>
           <a:xfrm>
-            <a:off x="1009650" y="3990975"/>
+            <a:off x="1009650" y="3886200"/>
             <a:ext cx="2419350" cy="247650"/>
           </a:xfrm>
           <a:prstGeom prst="roundRect">
@@ -13972,7 +13972,7 @@
         </p:nvSpPr>
         <p:spPr>
           <a:xfrm>
-            <a:off x="1009650" y="4048125"/>
+            <a:off x="1009650" y="3943350"/>
             <a:ext cx="2419350" cy="198120"/>
           </a:xfrm>
           <a:prstGeom prst="rect">
@@ -14011,7 +14011,7 @@
         </p:nvSpPr>
         <p:spPr>
           <a:xfrm>
-            <a:off x="857250" y="4429125"/>
+            <a:off x="857250" y="4324350"/>
             <a:ext cx="2724150" cy="228600"/>
           </a:xfrm>
           <a:prstGeom prst="rect">
@@ -14050,7 +14050,7 @@
         </p:nvSpPr>
         <p:spPr>
           <a:xfrm>
-            <a:off x="857250" y="4638675"/>
+            <a:off x="857250" y="4533900"/>
             <a:ext cx="2724150" cy="198120"/>
           </a:xfrm>
           <a:prstGeom prst="rect">
@@ -14089,7 +14089,7 @@
         </p:nvSpPr>
         <p:spPr>
           <a:xfrm>
-            <a:off x="4162425" y="2809875"/>
+            <a:off x="4162425" y="2705100"/>
             <a:ext cx="1143000" cy="1504950"/>
           </a:xfrm>
           <a:prstGeom prst="roundRect">
@@ -14138,7 +14138,7 @@
         </p:nvSpPr>
         <p:spPr>
           <a:xfrm>
-            <a:off x="4295775" y="3476625"/>
+            <a:off x="4295775" y="3371850"/>
             <a:ext cx="876300" cy="247650"/>
           </a:xfrm>
           <a:prstGeom prst="roundRect">
@@ -14186,7 +14186,7 @@
         </p:nvSpPr>
         <p:spPr>
           <a:xfrm>
-            <a:off x="4295775" y="3533775"/>
+            <a:off x="4295775" y="3429000"/>
             <a:ext cx="876300" cy="198120"/>
           </a:xfrm>
           <a:prstGeom prst="rect">
@@ -14225,7 +14225,7 @@
         </p:nvSpPr>
         <p:spPr>
           <a:xfrm>
-            <a:off x="5495925" y="2809875"/>
+            <a:off x="5495925" y="2705100"/>
             <a:ext cx="1390650" cy="1504950"/>
           </a:xfrm>
           <a:prstGeom prst="roundRect">
@@ -14274,7 +14274,7 @@
         </p:nvSpPr>
         <p:spPr>
           <a:xfrm>
-            <a:off x="5562600" y="3028950"/>
+            <a:off x="5562600" y="2924175"/>
             <a:ext cx="1257300" cy="781050"/>
           </a:xfrm>
           <a:prstGeom prst="roundRect">
@@ -14322,7 +14322,7 @@
         </p:nvSpPr>
         <p:spPr>
           <a:xfrm>
-            <a:off x="5591175" y="3143250"/>
+            <a:off x="5591175" y="3038475"/>
             <a:ext cx="1200150" cy="182880"/>
           </a:xfrm>
           <a:prstGeom prst="rect">
@@ -14361,7 +14361,7 @@
         </p:nvSpPr>
         <p:spPr>
           <a:xfrm>
-            <a:off x="5591175" y="3371850"/>
+            <a:off x="5591175" y="3267075"/>
             <a:ext cx="1200150" cy="182880"/>
           </a:xfrm>
           <a:prstGeom prst="rect">
@@ -14400,7 +14400,7 @@
         </p:nvSpPr>
         <p:spPr>
           <a:xfrm>
-            <a:off x="5591175" y="3600450"/>
+            <a:off x="5591175" y="3495675"/>
             <a:ext cx="1200150" cy="182880"/>
           </a:xfrm>
           <a:prstGeom prst="rect">
@@ -14439,7 +14439,7 @@
         </p:nvSpPr>
         <p:spPr>
           <a:xfrm>
-            <a:off x="5629275" y="3867150"/>
+            <a:off x="5629275" y="3762375"/>
             <a:ext cx="1123950" cy="247650"/>
           </a:xfrm>
           <a:prstGeom prst="roundRect">
@@ -14487,7 +14487,7 @@
         </p:nvSpPr>
         <p:spPr>
           <a:xfrm>
-            <a:off x="5629275" y="3924300"/>
+            <a:off x="5629275" y="3819525"/>
             <a:ext cx="1123950" cy="182880"/>
           </a:xfrm>
           <a:prstGeom prst="rect">
@@ -14526,7 +14526,7 @@
         </p:nvSpPr>
         <p:spPr>
           <a:xfrm>
-            <a:off x="4162425" y="4429125"/>
+            <a:off x="4162425" y="4324350"/>
             <a:ext cx="2724150" cy="228600"/>
           </a:xfrm>
           <a:prstGeom prst="rect">
@@ -14565,7 +14565,7 @@
         </p:nvSpPr>
         <p:spPr>
           <a:xfrm>
-            <a:off x="4162425" y="4638675"/>
+            <a:off x="4162425" y="4533900"/>
             <a:ext cx="2724150" cy="198120"/>
           </a:xfrm>
           <a:prstGeom prst="rect">
@@ -14604,7 +14604,7 @@
         </p:nvSpPr>
         <p:spPr>
           <a:xfrm>
-            <a:off x="7239000" y="2809875"/>
+            <a:off x="7239000" y="2705100"/>
             <a:ext cx="838200" cy="1504950"/>
           </a:xfrm>
           <a:prstGeom prst="roundRect">
@@ -14653,7 +14653,7 @@
         </p:nvSpPr>
         <p:spPr>
           <a:xfrm>
-            <a:off x="7353300" y="3476625"/>
+            <a:off x="7353300" y="3371850"/>
             <a:ext cx="609600" cy="247650"/>
           </a:xfrm>
           <a:prstGeom prst="roundRect">
@@ -14701,7 +14701,7 @@
         </p:nvSpPr>
         <p:spPr>
           <a:xfrm>
-            <a:off x="7353300" y="3533775"/>
+            <a:off x="7353300" y="3429000"/>
             <a:ext cx="609600" cy="182880"/>
           </a:xfrm>
           <a:prstGeom prst="rect">
@@ -14740,7 +14740,7 @@
         </p:nvSpPr>
         <p:spPr>
           <a:xfrm>
-            <a:off x="8305800" y="2809875"/>
+            <a:off x="8305800" y="2705100"/>
             <a:ext cx="1619250" cy="1504950"/>
           </a:xfrm>
           <a:prstGeom prst="roundRect">
@@ -14789,7 +14789,7 @@
         </p:nvSpPr>
         <p:spPr>
           <a:xfrm>
-            <a:off x="8420100" y="3171825"/>
+            <a:off x="8420100" y="3067050"/>
             <a:ext cx="1390650" cy="781050"/>
           </a:xfrm>
           <a:prstGeom prst="roundRect">
@@ -14837,7 +14837,7 @@
         </p:nvSpPr>
         <p:spPr>
           <a:xfrm>
-            <a:off x="8448675" y="3286125"/>
+            <a:off x="8448675" y="3181350"/>
             <a:ext cx="1333500" cy="182880"/>
           </a:xfrm>
           <a:prstGeom prst="rect">
@@ -14876,7 +14876,7 @@
         </p:nvSpPr>
         <p:spPr>
           <a:xfrm>
-            <a:off x="8448675" y="3514725"/>
+            <a:off x="8448675" y="3409950"/>
             <a:ext cx="1333500" cy="182880"/>
           </a:xfrm>
           <a:prstGeom prst="rect">
@@ -14915,7 +14915,7 @@
         </p:nvSpPr>
         <p:spPr>
           <a:xfrm>
-            <a:off x="8448675" y="3743325"/>
+            <a:off x="8448675" y="3638550"/>
             <a:ext cx="1333500" cy="182880"/>
           </a:xfrm>
           <a:prstGeom prst="rect">
@@ -14954,7 +14954,7 @@
         </p:nvSpPr>
         <p:spPr>
           <a:xfrm>
-            <a:off x="10153650" y="2809875"/>
+            <a:off x="10153650" y="2705100"/>
             <a:ext cx="838200" cy="1504950"/>
           </a:xfrm>
           <a:prstGeom prst="roundRect">
@@ -15003,7 +15003,7 @@
         </p:nvSpPr>
         <p:spPr>
           <a:xfrm>
-            <a:off x="10267950" y="3476625"/>
+            <a:off x="10267950" y="3371850"/>
             <a:ext cx="609600" cy="247650"/>
           </a:xfrm>
           <a:prstGeom prst="roundRect">
@@ -15051,7 +15051,7 @@
         </p:nvSpPr>
         <p:spPr>
           <a:xfrm>
-            <a:off x="10267950" y="3533775"/>
+            <a:off x="10267950" y="3429000"/>
             <a:ext cx="609600" cy="182880"/>
           </a:xfrm>
           <a:prstGeom prst="rect">
@@ -15090,7 +15090,7 @@
         </p:nvSpPr>
         <p:spPr>
           <a:xfrm>
-            <a:off x="7239000" y="4429125"/>
+            <a:off x="7239000" y="4324350"/>
             <a:ext cx="3752850" cy="228600"/>
           </a:xfrm>
           <a:prstGeom prst="rect">
@@ -15129,7 +15129,7 @@
         </p:nvSpPr>
         <p:spPr>
           <a:xfrm>
-            <a:off x="7239000" y="4638675"/>
+            <a:off x="7239000" y="4533900"/>
             <a:ext cx="3752850" cy="198120"/>
           </a:xfrm>
           <a:prstGeom prst="rect">
@@ -15168,8 +15168,8 @@
         </p:nvSpPr>
         <p:spPr>
           <a:xfrm>
-            <a:off x="685800" y="5638800"/>
-            <a:ext cx="28575" cy="641223"/>
+            <a:off x="685800" y="5428381"/>
+            <a:ext cx="28575" cy="705719"/>
           </a:xfrm>
           <a:prstGeom prst="rect">
             <a:avLst/>
@@ -15212,8 +15212,8 @@
         </p:nvSpPr>
         <p:spPr>
           <a:xfrm>
-            <a:off x="876300" y="5619750"/>
-            <a:ext cx="10629900" cy="571500"/>
+            <a:off x="876300" y="5409331"/>
+            <a:ext cx="10629900" cy="839069"/>
           </a:xfrm>
           <a:prstGeom prst="rect">
             <a:avLst/>
@@ -19190,7 +19190,7 @@
                 </a:solidFill>
                 <a:latin typeface="Roboto"/>
               </a:rPr>
-              <a:t>Uma regra escrita na wiki depende de alguém revisar. A mesma regra na topologia é verificada pela estrutura, o que reduz a degradação arquitetural da Aula 02.</a:t>
+              <a:t>Uma regra escrita na wiki depende de alguém revisar. A mesma regra na topologia é verificada pela estrutura, o que reduz a degradação arquitetural.</a:t>
             </a:r>
           </a:p>
         </p:txBody>
@@ -22492,7 +22492,7 @@
                 </a:solidFill>
                 <a:latin typeface="Roboto"/>
               </a:rPr>
-              <a:t>O que saiu foi o adaptador embutido que falava com o Docker Engine, não o formato das imagens. Como imagem é OCI, nada quebrou. É um caso real de substituição por compatibilidade de interface, no vocabulário da Aula 05.</a:t>
+              <a:t>O que saiu foi o adaptador embutido que falava com o Docker Engine, não o formato das imagens. Como imagem é OCI, nada quebrou. É um caso real de substituição por compatibilidade de interface.</a:t>
             </a:r>
           </a:p>
         </p:txBody>
@@ -26359,7 +26359,7 @@
                 </a:solidFill>
                 <a:latin typeface="Roboto"/>
               </a:rPr>
-              <a:t>Efeito nos atributos da Aula 03</a:t>
+              <a:t>Efeito nos atributos</a:t>
             </a:r>
           </a:p>
           <a:p>
@@ -26375,7 +26375,7 @@
                 </a:solidFill>
                 <a:latin typeface="Roboto"/>
               </a:rPr>
-              <a:t>e das Questões Norteadoras</a:t>
+              <a:t>de qualidade do projeto</a:t>
             </a:r>
           </a:p>
         </p:txBody>
@@ -26388,7 +26388,7 @@
         </p:nvSpPr>
         <p:spPr>
           <a:xfrm>
-            <a:off x="685800" y="2117598"/>
+            <a:off x="685800" y="2010346"/>
             <a:ext cx="5143500" cy="182880"/>
           </a:xfrm>
           <a:prstGeom prst="rect">
@@ -26427,7 +26427,7 @@
         </p:nvSpPr>
         <p:spPr>
           <a:xfrm>
-            <a:off x="685800" y="2327148"/>
+            <a:off x="685800" y="2219896"/>
             <a:ext cx="419100" cy="28575"/>
           </a:xfrm>
           <a:prstGeom prst="rect">
@@ -26471,7 +26471,7 @@
         </p:nvSpPr>
         <p:spPr>
           <a:xfrm>
-            <a:off x="704850" y="2702052"/>
+            <a:off x="704850" y="2599754"/>
             <a:ext cx="57150" cy="57150"/>
           </a:xfrm>
           <a:prstGeom prst="rect">
@@ -26515,7 +26515,7 @@
         </p:nvSpPr>
         <p:spPr>
           <a:xfrm>
-            <a:off x="971550" y="2612898"/>
+            <a:off x="971550" y="2505646"/>
             <a:ext cx="4857750" cy="95250"/>
           </a:xfrm>
           <a:prstGeom prst="rect">
@@ -26535,13 +26535,13 @@
               </a:lnSpc>
             </a:pPr>
             <a:r>
-              <a:rPr sz="1350" b="0" i="0">
+              <a:rPr sz="1420" b="0" i="0">
                 <a:solidFill>
                   <a:srgbClr val="1A1A1E"/>
                 </a:solidFill>
                 <a:latin typeface="Roboto"/>
               </a:rPr>
-              <a:t>Cada imagem tem uma responsabilidade e uma fronteira declarada, que é a modularidade e a reusabilidade da Aula 03.</a:t>
+              <a:t>Cada imagem tem uma responsabilidade e uma fronteira declarada, que é modularidade e reusabilidade.</a:t>
             </a:r>
           </a:p>
         </p:txBody>
@@ -26554,7 +26554,7 @@
         </p:nvSpPr>
         <p:spPr>
           <a:xfrm>
-            <a:off x="704850" y="3590544"/>
+            <a:off x="704850" y="3306128"/>
             <a:ext cx="57150" cy="57150"/>
           </a:xfrm>
           <a:prstGeom prst="rect">
@@ -26598,7 +26598,7 @@
         </p:nvSpPr>
         <p:spPr>
           <a:xfrm>
-            <a:off x="971550" y="3501390"/>
+            <a:off x="971550" y="3212021"/>
             <a:ext cx="4857750" cy="95250"/>
           </a:xfrm>
           <a:prstGeom prst="rect">
@@ -26618,7 +26618,7 @@
               </a:lnSpc>
             </a:pPr>
             <a:r>
-              <a:rPr sz="1350" b="0" i="0">
+              <a:rPr sz="1420" b="0" i="0">
                 <a:solidFill>
                   <a:srgbClr val="1A1A1E"/>
                 </a:solidFill>
@@ -26637,7 +26637,7 @@
         </p:nvSpPr>
         <p:spPr>
           <a:xfrm>
-            <a:off x="704850" y="4252722"/>
+            <a:off x="704850" y="4012502"/>
             <a:ext cx="57150" cy="57150"/>
           </a:xfrm>
           <a:prstGeom prst="rect">
@@ -26681,7 +26681,7 @@
         </p:nvSpPr>
         <p:spPr>
           <a:xfrm>
-            <a:off x="971550" y="4163568"/>
+            <a:off x="971550" y="3918394"/>
             <a:ext cx="4857750" cy="95250"/>
           </a:xfrm>
           <a:prstGeom prst="rect">
@@ -26701,7 +26701,7 @@
               </a:lnSpc>
             </a:pPr>
             <a:r>
-              <a:rPr sz="1350" b="0" i="0">
+              <a:rPr sz="1420" b="0" i="0">
                 <a:solidFill>
                   <a:srgbClr val="1A1A1E"/>
                 </a:solidFill>
@@ -26720,7 +26720,7 @@
         </p:nvSpPr>
         <p:spPr>
           <a:xfrm>
-            <a:off x="704850" y="4914900"/>
+            <a:off x="704850" y="4718876"/>
             <a:ext cx="57150" cy="57150"/>
           </a:xfrm>
           <a:prstGeom prst="rect">
@@ -26764,7 +26764,7 @@
         </p:nvSpPr>
         <p:spPr>
           <a:xfrm>
-            <a:off x="971550" y="4825746"/>
+            <a:off x="971550" y="4624768"/>
             <a:ext cx="4857750" cy="95250"/>
           </a:xfrm>
           <a:prstGeom prst="rect">
@@ -26784,7 +26784,7 @@
               </a:lnSpc>
             </a:pPr>
             <a:r>
-              <a:rPr sz="1350" b="0" i="0">
+              <a:rPr sz="1420" b="0" i="0">
                 <a:solidFill>
                   <a:srgbClr val="1A1A1E"/>
                 </a:solidFill>
@@ -26803,7 +26803,7 @@
         </p:nvSpPr>
         <p:spPr>
           <a:xfrm>
-            <a:off x="704850" y="5577078"/>
+            <a:off x="704850" y="5664136"/>
             <a:ext cx="57150" cy="57150"/>
           </a:xfrm>
           <a:prstGeom prst="rect">
@@ -26847,7 +26847,7 @@
         </p:nvSpPr>
         <p:spPr>
           <a:xfrm>
-            <a:off x="971550" y="5487924"/>
+            <a:off x="971550" y="5570030"/>
             <a:ext cx="4857750" cy="95250"/>
           </a:xfrm>
           <a:prstGeom prst="rect">
@@ -26867,7 +26867,7 @@
               </a:lnSpc>
             </a:pPr>
             <a:r>
-              <a:rPr sz="1350" b="0" i="0">
+              <a:rPr sz="1420" b="0" i="0">
                 <a:solidFill>
                   <a:srgbClr val="1A1A1E"/>
                 </a:solidFill>
@@ -26886,7 +26886,7 @@
         </p:nvSpPr>
         <p:spPr>
           <a:xfrm>
-            <a:off x="6362700" y="2117598"/>
+            <a:off x="6362700" y="2010346"/>
             <a:ext cx="5143500" cy="182880"/>
           </a:xfrm>
           <a:prstGeom prst="rect">
@@ -26925,7 +26925,7 @@
         </p:nvSpPr>
         <p:spPr>
           <a:xfrm>
-            <a:off x="6362700" y="2327148"/>
+            <a:off x="6362700" y="2219896"/>
             <a:ext cx="419100" cy="28575"/>
           </a:xfrm>
           <a:prstGeom prst="rect">
@@ -26969,7 +26969,7 @@
         </p:nvSpPr>
         <p:spPr>
           <a:xfrm>
-            <a:off x="6381750" y="2702052"/>
+            <a:off x="6381750" y="2599754"/>
             <a:ext cx="57150" cy="57150"/>
           </a:xfrm>
           <a:prstGeom prst="rect">
@@ -27013,7 +27013,7 @@
         </p:nvSpPr>
         <p:spPr>
           <a:xfrm>
-            <a:off x="6648450" y="2612898"/>
+            <a:off x="6648450" y="2505646"/>
             <a:ext cx="4857750" cy="95250"/>
           </a:xfrm>
           <a:prstGeom prst="rect">
@@ -27033,7 +27033,7 @@
               </a:lnSpc>
             </a:pPr>
             <a:r>
-              <a:rPr sz="1350" b="0" i="0">
+              <a:rPr sz="1420" b="0" i="0">
                 <a:solidFill>
                   <a:srgbClr val="1A1A1E"/>
                 </a:solidFill>
@@ -27052,7 +27052,7 @@
         </p:nvSpPr>
         <p:spPr>
           <a:xfrm>
-            <a:off x="6381750" y="3364230"/>
+            <a:off x="6381750" y="3306128"/>
             <a:ext cx="57150" cy="57150"/>
           </a:xfrm>
           <a:prstGeom prst="rect">
@@ -27096,7 +27096,7 @@
         </p:nvSpPr>
         <p:spPr>
           <a:xfrm>
-            <a:off x="6648450" y="3275076"/>
+            <a:off x="6648450" y="3212021"/>
             <a:ext cx="4857750" cy="95250"/>
           </a:xfrm>
           <a:prstGeom prst="rect">
@@ -27116,7 +27116,7 @@
               </a:lnSpc>
             </a:pPr>
             <a:r>
-              <a:rPr sz="1350" b="0" i="0">
+              <a:rPr sz="1420" b="0" i="0">
                 <a:solidFill>
                   <a:srgbClr val="1A1A1E"/>
                 </a:solidFill>
@@ -34265,7 +34265,7 @@
         </p:nvSpPr>
         <p:spPr>
           <a:xfrm>
-            <a:off x="857250" y="2343150"/>
+            <a:off x="857250" y="2362200"/>
             <a:ext cx="4381500" cy="167640"/>
           </a:xfrm>
           <a:prstGeom prst="rect">
@@ -34304,7 +34304,7 @@
         </p:nvSpPr>
         <p:spPr>
           <a:xfrm>
-            <a:off x="857250" y="4057650"/>
+            <a:off x="857250" y="4076700"/>
             <a:ext cx="3429000" cy="438150"/>
           </a:xfrm>
           <a:prstGeom prst="roundRect">
@@ -34352,7 +34352,7 @@
         </p:nvSpPr>
         <p:spPr>
           <a:xfrm>
-            <a:off x="1047750" y="4191000"/>
+            <a:off x="1047750" y="4210050"/>
             <a:ext cx="3048000" cy="213360"/>
           </a:xfrm>
           <a:prstGeom prst="rect">
@@ -34391,7 +34391,7 @@
         </p:nvSpPr>
         <p:spPr>
           <a:xfrm>
-            <a:off x="857250" y="3562350"/>
+            <a:off x="857250" y="3581400"/>
             <a:ext cx="3429000" cy="438150"/>
           </a:xfrm>
           <a:prstGeom prst="roundRect">
@@ -34439,7 +34439,7 @@
         </p:nvSpPr>
         <p:spPr>
           <a:xfrm>
-            <a:off x="1047750" y="3695700"/>
+            <a:off x="1047750" y="3714750"/>
             <a:ext cx="3048000" cy="213360"/>
           </a:xfrm>
           <a:prstGeom prst="rect">
@@ -34478,7 +34478,7 @@
         </p:nvSpPr>
         <p:spPr>
           <a:xfrm>
-            <a:off x="857250" y="3067050"/>
+            <a:off x="857250" y="3086100"/>
             <a:ext cx="3429000" cy="438150"/>
           </a:xfrm>
           <a:prstGeom prst="roundRect">
@@ -34526,7 +34526,7 @@
         </p:nvSpPr>
         <p:spPr>
           <a:xfrm>
-            <a:off x="1047750" y="3200400"/>
+            <a:off x="1047750" y="3219450"/>
             <a:ext cx="3048000" cy="213360"/>
           </a:xfrm>
           <a:prstGeom prst="rect">
@@ -34565,7 +34565,7 @@
         </p:nvSpPr>
         <p:spPr>
           <a:xfrm>
-            <a:off x="4400550" y="3067050"/>
+            <a:off x="4400550" y="3086100"/>
             <a:ext cx="28575" cy="1428750"/>
           </a:xfrm>
           <a:prstGeom prst="rect">
@@ -34609,7 +34609,7 @@
         </p:nvSpPr>
         <p:spPr>
           <a:xfrm>
-            <a:off x="742950" y="4629150"/>
+            <a:off x="742950" y="4648200"/>
             <a:ext cx="3657600" cy="381000"/>
           </a:xfrm>
           <a:prstGeom prst="rect">
@@ -34648,7 +34648,7 @@
         </p:nvSpPr>
         <p:spPr>
           <a:xfrm>
-            <a:off x="857250" y="2514600"/>
+            <a:off x="857250" y="2533650"/>
             <a:ext cx="3429000" cy="495300"/>
           </a:xfrm>
           <a:prstGeom prst="roundRect">
@@ -34697,7 +34697,7 @@
         </p:nvSpPr>
         <p:spPr>
           <a:xfrm>
-            <a:off x="1047750" y="2609850"/>
+            <a:off x="1047750" y="2628900"/>
             <a:ext cx="3048000" cy="213360"/>
           </a:xfrm>
           <a:prstGeom prst="rect">
@@ -34736,7 +34736,7 @@
         </p:nvSpPr>
         <p:spPr>
           <a:xfrm>
-            <a:off x="1047750" y="2790825"/>
+            <a:off x="1047750" y="2809875"/>
             <a:ext cx="3048000" cy="182880"/>
           </a:xfrm>
           <a:prstGeom prst="rect">
@@ -34775,7 +34775,7 @@
         </p:nvCxnSpPr>
         <p:spPr>
           <a:xfrm>
-            <a:off x="4857750" y="2457450"/>
+            <a:off x="4857750" y="2476500"/>
             <a:ext cx="0" cy="2152650"/>
           </a:xfrm>
           <a:prstGeom prst="line">
@@ -34810,7 +34810,7 @@
         </p:nvSpPr>
         <p:spPr>
           <a:xfrm>
-            <a:off x="5257800" y="2914650"/>
+            <a:off x="5257800" y="2933700"/>
             <a:ext cx="3619500" cy="243840"/>
           </a:xfrm>
           <a:prstGeom prst="rect">
@@ -34849,7 +34849,7 @@
         </p:nvSpPr>
         <p:spPr>
           <a:xfrm>
-            <a:off x="5257800" y="3181350"/>
+            <a:off x="5257800" y="3200400"/>
             <a:ext cx="3810000" cy="666750"/>
           </a:xfrm>
           <a:prstGeom prst="rect">
@@ -34888,7 +34888,7 @@
         </p:nvSpPr>
         <p:spPr>
           <a:xfrm>
-            <a:off x="5257800" y="3752850"/>
+            <a:off x="5257800" y="3771900"/>
             <a:ext cx="3619500" cy="243840"/>
           </a:xfrm>
           <a:prstGeom prst="rect">
@@ -34927,7 +34927,7 @@
         </p:nvSpPr>
         <p:spPr>
           <a:xfrm>
-            <a:off x="5257800" y="4019550"/>
+            <a:off x="5257800" y="4038600"/>
             <a:ext cx="3810000" cy="666750"/>
           </a:xfrm>
           <a:prstGeom prst="rect">
@@ -34966,8 +34966,8 @@
         </p:nvSpPr>
         <p:spPr>
           <a:xfrm>
-            <a:off x="685800" y="5638800"/>
-            <a:ext cx="28575" cy="427482"/>
+            <a:off x="685800" y="5676321"/>
+            <a:ext cx="28575" cy="457779"/>
           </a:xfrm>
           <a:prstGeom prst="rect">
             <a:avLst/>
@@ -35010,8 +35010,8 @@
         </p:nvSpPr>
         <p:spPr>
           <a:xfrm>
-            <a:off x="876300" y="5619750"/>
-            <a:ext cx="10629900" cy="571500"/>
+            <a:off x="876300" y="5657271"/>
+            <a:ext cx="10629900" cy="591129"/>
           </a:xfrm>
           <a:prstGeom prst="rect">
             <a:avLst/>
@@ -36223,7 +36223,7 @@
                 </a:solidFill>
                 <a:latin typeface="Roboto"/>
               </a:rPr>
-              <a:t>Cada peça tem uma responsabilidade e pode ser trocada. É a substituibilidade da Aula 05, aplicada ao próprio Docker.</a:t>
+              <a:t>Cada peça tem uma responsabilidade e pode ser trocada por outra que respeite a mesma interface.</a:t>
             </a:r>
           </a:p>
         </p:txBody>

--- a/trabalhos/T1-Docker-Invite-People.pptx
+++ b/trabalhos/T1-Docker-Invite-People.pptx
@@ -15238,7 +15238,7 @@
                 </a:solidFill>
                 <a:latin typeface="Roboto"/>
               </a:rPr>
-              <a:t>Nenhuma das três muda uma linha do projeto lógico. Todas mudam o empacotamento, e essa escolha é entrada do ADR #63, o documento de decisões arquiteturais da Sprint 2. Cuidado com o vocabulário: Docker usa </a:t>
+              <a:t>Nenhuma das três muda uma linha do projeto lógico. Todas mudam o empacotamento, e essa escolha é entrada do ADR, o documento de decisões arquiteturais da Sprint 2. Cuidado com o vocabulário: Docker usa </a:t>
             </a:r>
             <a:r>
               <a:rPr sz="1280" b="0" i="1">
@@ -16183,7 +16183,7 @@
                 </a:solidFill>
                 <a:latin typeface="Roboto"/>
               </a:rPr>
-              <a:t>RASCUNHOS DOS ITENS #59 E #60</a:t>
+              <a:t>RASCUNHOS DOS DOIS DIAGRAMAS</a:t>
             </a:r>
           </a:p>
         </p:txBody>
@@ -16277,7 +16277,7 @@
                 </a:solidFill>
                 <a:latin typeface="Roboto"/>
               </a:rPr>
-              <a:t>RASCUNHO #59, DIAGRAMA DE COMPONENTES</a:t>
+              <a:t>RASCUNHO DO DIAGRAMA DE COMPONENTES</a:t>
             </a:r>
           </a:p>
         </p:txBody>
@@ -16814,8 +16814,8 @@
         </p:nvSpPr>
         <p:spPr>
           <a:xfrm>
-            <a:off x="4953000" y="3886200"/>
-            <a:ext cx="952500" cy="198120"/>
+            <a:off x="4667250" y="3867150"/>
+            <a:ext cx="1524000" cy="198120"/>
           </a:xfrm>
           <a:prstGeom prst="rect">
             <a:avLst/>
@@ -16840,7 +16840,7 @@
                 </a:solidFill>
                 <a:latin typeface="Roboto"/>
               </a:rPr>
-              <a:t>#72</a:t>
+              <a:t>mapeamento</a:t>
             </a:r>
           </a:p>
         </p:txBody>
@@ -16879,7 +16879,7 @@
                 </a:solidFill>
                 <a:latin typeface="Roboto"/>
               </a:rPr>
-              <a:t>RASCUNHO #60, DIAGRAMA DE IMPLANTAÇÃO</a:t>
+              <a:t>RASCUNHO DO DIAGRAMA DE IMPLANTAÇÃO</a:t>
             </a:r>
           </a:p>
         </p:txBody>
@@ -17486,7 +17486,7 @@
                 </a:solidFill>
                 <a:latin typeface="Roboto"/>
               </a:rPr>
-              <a:t>rede nomeada, resolução por nome de serviço  ·  #75</a:t>
+              <a:t>rede nomeada, com resolução por nome de serviço</a:t>
             </a:r>
           </a:p>
         </p:txBody>
@@ -17500,7 +17500,7 @@
         <p:spPr>
           <a:xfrm>
             <a:off x="6381750" y="4762500"/>
-            <a:ext cx="3619500" cy="175260"/>
+            <a:ext cx="3810000" cy="182880"/>
           </a:xfrm>
           <a:prstGeom prst="rect">
             <a:avLst/>
@@ -17519,13 +17519,13 @@
               </a:lnSpc>
             </a:pPr>
             <a:r>
-              <a:rPr sz="860" b="0" i="0">
+              <a:rPr sz="900" b="0" i="0">
                 <a:solidFill>
                   <a:srgbClr val="6B6B78"/>
                 </a:solidFill>
                 <a:latin typeface="Roboto"/>
               </a:rPr>
-              <a:t>#71 nós  ·  #73 imagem por tag e digest  ·  #74, #76 e #77 são passos de processo</a:t>
+              <a:t>Cada nó vira um serviço no arquivo de compose, com a imagem por tag e digest.</a:t>
             </a:r>
           </a:p>
         </p:txBody>
@@ -18553,7 +18553,7 @@
                 </a:solidFill>
                 <a:latin typeface="Roboto"/>
               </a:rPr>
-              <a:t>As imagens do arquivo são exemplo. A stack ainda não foi decidida e é assunto do ADR #63.</a:t>
+              <a:t>As imagens do arquivo são exemplo. A stack ainda não foi decidida e é assunto do ADR.</a:t>
             </a:r>
           </a:p>
         </p:txBody>
@@ -20007,7 +20007,7 @@
         <p:spPr>
           <a:xfrm>
             <a:off x="9124950" y="3180207"/>
-            <a:ext cx="38100" cy="1033272"/>
+            <a:ext cx="38100" cy="1234440"/>
           </a:xfrm>
           <a:prstGeom prst="rect">
             <a:avLst/>
@@ -20051,7 +20051,7 @@
         <p:spPr>
           <a:xfrm>
             <a:off x="9334500" y="3180207"/>
-            <a:ext cx="2171700" cy="1604772"/>
+            <a:ext cx="2171700" cy="1805940"/>
           </a:xfrm>
           <a:prstGeom prst="rect">
             <a:avLst/>
@@ -20117,7 +20117,7 @@
                 </a:solidFill>
                 <a:latin typeface="Roboto"/>
               </a:rPr>
-              <a:t>Entrada direta para o #59 e o #60. Ainda não decidida.</a:t>
+              <a:t>Entrada direta para os dois diagramas da Sprint 2. Ainda não decidida.</a:t>
             </a:r>
           </a:p>
         </p:txBody>
@@ -23478,7 +23478,7 @@
         </p:nvSpPr>
         <p:spPr>
           <a:xfrm>
-            <a:off x="685800" y="2061210"/>
+            <a:off x="685800" y="2193226"/>
             <a:ext cx="5143500" cy="182880"/>
           </a:xfrm>
           <a:prstGeom prst="rect">
@@ -23517,7 +23517,7 @@
         </p:nvSpPr>
         <p:spPr>
           <a:xfrm>
-            <a:off x="685800" y="2270760"/>
+            <a:off x="685800" y="2402776"/>
             <a:ext cx="419100" cy="28575"/>
           </a:xfrm>
           <a:prstGeom prst="rect">
@@ -23561,7 +23561,7 @@
         </p:nvSpPr>
         <p:spPr>
           <a:xfrm>
-            <a:off x="704850" y="2660523"/>
+            <a:off x="704850" y="2792540"/>
             <a:ext cx="57150" cy="57150"/>
           </a:xfrm>
           <a:prstGeom prst="rect">
@@ -23605,7 +23605,7 @@
         </p:nvSpPr>
         <p:spPr>
           <a:xfrm>
-            <a:off x="971550" y="2556510"/>
+            <a:off x="971550" y="2688526"/>
             <a:ext cx="4857750" cy="95250"/>
           </a:xfrm>
           <a:prstGeom prst="rect">
@@ -23644,7 +23644,7 @@
         </p:nvSpPr>
         <p:spPr>
           <a:xfrm>
-            <a:off x="704850" y="3191256"/>
+            <a:off x="704850" y="3323273"/>
             <a:ext cx="57150" cy="57150"/>
           </a:xfrm>
           <a:prstGeom prst="rect">
@@ -23688,7 +23688,7 @@
         </p:nvSpPr>
         <p:spPr>
           <a:xfrm>
-            <a:off x="971550" y="3087243"/>
+            <a:off x="971550" y="3219260"/>
             <a:ext cx="4857750" cy="95250"/>
           </a:xfrm>
           <a:prstGeom prst="rect">
@@ -23727,7 +23727,7 @@
         </p:nvSpPr>
         <p:spPr>
           <a:xfrm>
-            <a:off x="704850" y="3986022"/>
+            <a:off x="704850" y="4118039"/>
             <a:ext cx="57150" cy="57150"/>
           </a:xfrm>
           <a:prstGeom prst="rect">
@@ -23771,7 +23771,7 @@
         </p:nvSpPr>
         <p:spPr>
           <a:xfrm>
-            <a:off x="971550" y="3882009"/>
+            <a:off x="971550" y="4014026"/>
             <a:ext cx="4857750" cy="95250"/>
           </a:xfrm>
           <a:prstGeom prst="rect">
@@ -23810,7 +23810,7 @@
         </p:nvSpPr>
         <p:spPr>
           <a:xfrm>
-            <a:off x="6362700" y="2061210"/>
+            <a:off x="6362700" y="2193226"/>
             <a:ext cx="5143500" cy="182880"/>
           </a:xfrm>
           <a:prstGeom prst="rect">
@@ -23849,7 +23849,7 @@
         </p:nvSpPr>
         <p:spPr>
           <a:xfrm>
-            <a:off x="6362700" y="2270760"/>
+            <a:off x="6362700" y="2402776"/>
             <a:ext cx="419100" cy="28575"/>
           </a:xfrm>
           <a:prstGeom prst="rect">
@@ -23893,7 +23893,7 @@
         </p:nvSpPr>
         <p:spPr>
           <a:xfrm>
-            <a:off x="6381750" y="2660523"/>
+            <a:off x="6381750" y="2792540"/>
             <a:ext cx="57150" cy="57150"/>
           </a:xfrm>
           <a:prstGeom prst="rect">
@@ -23937,7 +23937,7 @@
         </p:nvSpPr>
         <p:spPr>
           <a:xfrm>
-            <a:off x="6648450" y="2556510"/>
+            <a:off x="6648450" y="2688526"/>
             <a:ext cx="4857750" cy="95250"/>
           </a:xfrm>
           <a:prstGeom prst="rect">
@@ -23976,7 +23976,7 @@
         </p:nvSpPr>
         <p:spPr>
           <a:xfrm>
-            <a:off x="6381750" y="3191256"/>
+            <a:off x="6381750" y="3323273"/>
             <a:ext cx="57150" cy="57150"/>
           </a:xfrm>
           <a:prstGeom prst="rect">
@@ -24020,7 +24020,7 @@
         </p:nvSpPr>
         <p:spPr>
           <a:xfrm>
-            <a:off x="6648450" y="3087243"/>
+            <a:off x="6648450" y="3219260"/>
             <a:ext cx="4857750" cy="95250"/>
           </a:xfrm>
           <a:prstGeom prst="rect">
@@ -24059,7 +24059,7 @@
         </p:nvSpPr>
         <p:spPr>
           <a:xfrm>
-            <a:off x="6381750" y="4250055"/>
+            <a:off x="6381750" y="4382072"/>
             <a:ext cx="57150" cy="57150"/>
           </a:xfrm>
           <a:prstGeom prst="rect">
@@ -24103,7 +24103,7 @@
         </p:nvSpPr>
         <p:spPr>
           <a:xfrm>
-            <a:off x="6648450" y="4146042"/>
+            <a:off x="6648450" y="4278058"/>
             <a:ext cx="4857750" cy="95250"/>
           </a:xfrm>
           <a:prstGeom prst="rect">
@@ -24142,7 +24142,7 @@
         </p:nvSpPr>
         <p:spPr>
           <a:xfrm>
-            <a:off x="6381750" y="5308854"/>
+            <a:off x="6381750" y="5440870"/>
             <a:ext cx="57150" cy="57150"/>
           </a:xfrm>
           <a:prstGeom prst="rect">
@@ -24186,7 +24186,7 @@
         </p:nvSpPr>
         <p:spPr>
           <a:xfrm>
-            <a:off x="6648450" y="5204841"/>
+            <a:off x="6648450" y="5336858"/>
             <a:ext cx="4857750" cy="95250"/>
           </a:xfrm>
           <a:prstGeom prst="rect">
@@ -24212,7 +24212,7 @@
                 </a:solidFill>
                 <a:latin typeface="Roboto"/>
               </a:rPr>
-              <a:t>Por isso o ADR #63 precisa registrar que container não dá o mesmo isolamento de uma máquina virtual.</a:t>
+              <a:t>Por isso o ADR precisa registrar que container não dá o mesmo isolamento de uma máquina virtual.</a:t>
             </a:r>
           </a:p>
         </p:txBody>
@@ -27289,7 +27289,7 @@
                 </a:solidFill>
                 <a:latin typeface="Roboto"/>
               </a:rPr>
-              <a:t>ENTRADA PARA O ADR #63</a:t>
+              <a:t>ENTRADA PARA O ADR</a:t>
             </a:r>
           </a:p>
         </p:txBody>
@@ -27341,7 +27341,7 @@
         </p:nvSpPr>
         <p:spPr>
           <a:xfrm>
-            <a:off x="704850" y="3141726"/>
+            <a:off x="704850" y="3003423"/>
             <a:ext cx="57150" cy="57150"/>
           </a:xfrm>
           <a:prstGeom prst="rect">
@@ -27385,7 +27385,7 @@
         </p:nvSpPr>
         <p:spPr>
           <a:xfrm>
-            <a:off x="971550" y="3032760"/>
+            <a:off x="971550" y="2894457"/>
             <a:ext cx="7677150" cy="95250"/>
           </a:xfrm>
           <a:prstGeom prst="rect">
@@ -27424,7 +27424,7 @@
         </p:nvSpPr>
         <p:spPr>
           <a:xfrm>
-            <a:off x="704850" y="3980688"/>
+            <a:off x="704850" y="3842385"/>
             <a:ext cx="57150" cy="57150"/>
           </a:xfrm>
           <a:prstGeom prst="rect">
@@ -27468,7 +27468,7 @@
         </p:nvSpPr>
         <p:spPr>
           <a:xfrm>
-            <a:off x="971550" y="3871722"/>
+            <a:off x="971550" y="3733419"/>
             <a:ext cx="7677150" cy="95250"/>
           </a:xfrm>
           <a:prstGeom prst="rect">
@@ -27494,7 +27494,7 @@
                 </a:solidFill>
                 <a:latin typeface="Roboto"/>
               </a:rPr>
-              <a:t>O #60 deixa de ser caixa genérica e passa a ter um arquivo correspondente que roda, e esse arquivo vira artefato do repositório.</a:t>
+              <a:t>O diagrama de implantação deixa de ser caixa genérica e passa a ter um arquivo correspondente que roda, e esse arquivo vira artefato do repositório.</a:t>
             </a:r>
           </a:p>
         </p:txBody>
@@ -27507,7 +27507,7 @@
         </p:nvSpPr>
         <p:spPr>
           <a:xfrm>
-            <a:off x="704850" y="4819650"/>
+            <a:off x="704850" y="4957953"/>
             <a:ext cx="57150" cy="57150"/>
           </a:xfrm>
           <a:prstGeom prst="rect">
@@ -27551,7 +27551,7 @@
         </p:nvSpPr>
         <p:spPr>
           <a:xfrm>
-            <a:off x="971550" y="4710684"/>
+            <a:off x="971550" y="4848987"/>
             <a:ext cx="7677150" cy="95250"/>
           </a:xfrm>
           <a:prstGeom prst="rect">
@@ -27590,7 +27590,7 @@
         </p:nvSpPr>
         <p:spPr>
           <a:xfrm>
-            <a:off x="9124950" y="3042285"/>
+            <a:off x="9124950" y="2903982"/>
             <a:ext cx="142875" cy="123825"/>
           </a:xfrm>
           <a:prstGeom prst="chevron">
@@ -27634,7 +27634,7 @@
         </p:nvSpPr>
         <p:spPr>
           <a:xfrm>
-            <a:off x="9372600" y="3042285"/>
+            <a:off x="9372600" y="2903982"/>
             <a:ext cx="2133600" cy="182880"/>
           </a:xfrm>
           <a:prstGeom prst="rect">
@@ -27673,7 +27673,7 @@
         </p:nvSpPr>
         <p:spPr>
           <a:xfrm>
-            <a:off x="9124950" y="3318510"/>
+            <a:off x="9124950" y="3180207"/>
             <a:ext cx="38100" cy="1005840"/>
           </a:xfrm>
           <a:prstGeom prst="rect">
@@ -27717,7 +27717,7 @@
         </p:nvSpPr>
         <p:spPr>
           <a:xfrm>
-            <a:off x="9334500" y="3318510"/>
+            <a:off x="9334500" y="3180207"/>
             <a:ext cx="2171700" cy="1577340"/>
           </a:xfrm>
           <a:prstGeom prst="rect">
@@ -28466,7 +28466,7 @@
                 </a:solidFill>
                 <a:latin typeface="Roboto"/>
               </a:rPr>
-              <a:t>Esse mesmo arquivo é o que vira o diagrama de implantação do item #60.</a:t>
+              <a:t>Esse mesmo arquivo é o que vira o diagrama de implantação da Sprint 2.</a:t>
             </a:r>
           </a:p>
         </p:txBody>
@@ -28755,7 +28755,7 @@
                 </a:solidFill>
                 <a:latin typeface="Roboto"/>
               </a:rPr>
-              <a:t>Os itens #58 a #63 da Sprint 2 estão em To Do. Isto é insumo desses itens, não relato de item concluído.</a:t>
+              <a:t>Os seis itens de modelagem da Sprint 2, do #58 ao #63, estão em To Do. Isto é insumo desses itens, não relato de item concluído.</a:t>
             </a:r>
           </a:p>
         </p:txBody>
@@ -28838,7 +28838,7 @@
                 </a:solidFill>
                 <a:latin typeface="Roboto"/>
               </a:rPr>
-              <a:t>O #63, onde a stack será decidida, ainda não foi escrito.</a:t>
+              <a:t>O ADR #63, onde a stack será decidida, ainda não foi escrito.</a:t>
             </a:r>
           </a:p>
         </p:txBody>
@@ -32196,7 +32196,7 @@
                 </a:solidFill>
                 <a:latin typeface="Roboto"/>
               </a:rPr>
-              <a:t>São essas duas definições que decidem o desenho do item #60, com a imagem entrando como artefato e o container como nó.</a:t>
+              <a:t>São essas duas definições que decidem o desenho do diagrama de implantação, com a imagem entrando como artefato e o container como nó.</a:t>
             </a:r>
           </a:p>
         </p:txBody>

--- a/trabalhos/T1-Docker-Invite-People.pptx
+++ b/trabalhos/T1-Docker-Invite-People.pptx
@@ -18788,7 +18788,7 @@
         </p:nvSpPr>
         <p:spPr>
           <a:xfrm>
-            <a:off x="685800" y="2061210"/>
+            <a:off x="685800" y="2026920"/>
             <a:ext cx="5143500" cy="182880"/>
           </a:xfrm>
           <a:prstGeom prst="rect">
@@ -18827,7 +18827,7 @@
         </p:nvSpPr>
         <p:spPr>
           <a:xfrm>
-            <a:off x="685800" y="2270760"/>
+            <a:off x="685800" y="2236470"/>
             <a:ext cx="419100" cy="28575"/>
           </a:xfrm>
           <a:prstGeom prst="rect">
@@ -18871,7 +18871,7 @@
         </p:nvSpPr>
         <p:spPr>
           <a:xfrm>
-            <a:off x="704850" y="2660523"/>
+            <a:off x="704850" y="2621280"/>
             <a:ext cx="57150" cy="57150"/>
           </a:xfrm>
           <a:prstGeom prst="rect">
@@ -18915,7 +18915,7 @@
         </p:nvSpPr>
         <p:spPr>
           <a:xfrm>
-            <a:off x="971550" y="2556510"/>
+            <a:off x="971550" y="2522220"/>
             <a:ext cx="4857750" cy="95250"/>
           </a:xfrm>
           <a:prstGeom prst="rect">
@@ -18935,7 +18935,7 @@
               </a:lnSpc>
             </a:pPr>
             <a:r>
-              <a:rPr sz="1580" b="0" i="0">
+              <a:rPr sz="1500" b="0" i="0">
                 <a:solidFill>
                   <a:srgbClr val="1A1A1E"/>
                 </a:solidFill>
@@ -18954,7 +18954,7 @@
         </p:nvSpPr>
         <p:spPr>
           <a:xfrm>
-            <a:off x="704850" y="3455289"/>
+            <a:off x="704850" y="3371850"/>
             <a:ext cx="57150" cy="57150"/>
           </a:xfrm>
           <a:prstGeom prst="rect">
@@ -18998,7 +18998,7 @@
         </p:nvSpPr>
         <p:spPr>
           <a:xfrm>
-            <a:off x="971550" y="3351276"/>
+            <a:off x="971550" y="3272790"/>
             <a:ext cx="4857750" cy="95250"/>
           </a:xfrm>
           <a:prstGeom prst="rect">
@@ -19018,7 +19018,7 @@
               </a:lnSpc>
             </a:pPr>
             <a:r>
-              <a:rPr sz="1580" b="0" i="0">
+              <a:rPr sz="1500" b="0" i="0">
                 <a:solidFill>
                   <a:srgbClr val="1A1A1E"/>
                 </a:solidFill>
@@ -19037,7 +19037,7 @@
         </p:nvSpPr>
         <p:spPr>
           <a:xfrm>
-            <a:off x="704850" y="4250055"/>
+            <a:off x="704850" y="4122420"/>
             <a:ext cx="57150" cy="57150"/>
           </a:xfrm>
           <a:prstGeom prst="rect">
@@ -19081,7 +19081,7 @@
         </p:nvSpPr>
         <p:spPr>
           <a:xfrm>
-            <a:off x="971550" y="4146042"/>
+            <a:off x="971550" y="4023360"/>
             <a:ext cx="4857750" cy="95250"/>
           </a:xfrm>
           <a:prstGeom prst="rect">
@@ -19101,13 +19101,13 @@
               </a:lnSpc>
             </a:pPr>
             <a:r>
-              <a:rPr sz="1580" b="0" i="0">
+              <a:rPr sz="1500" b="0" i="0">
                 <a:solidFill>
                   <a:srgbClr val="1A1A1E"/>
                 </a:solidFill>
                 <a:latin typeface="Roboto"/>
               </a:rPr>
-              <a:t>Só o serviço de fronteira publica porta, e o banco fica na rede interna sem mapeamento nenhum.</a:t>
+              <a:t>Os serviços conversam por uma rede interna, onde cada um é achado pelo nome. Só o de fronteira publica porta para fora, e o banco fica sem mapeamento nenhum.</a:t>
             </a:r>
           </a:p>
         </p:txBody>
@@ -19120,7 +19120,7 @@
         </p:nvSpPr>
         <p:spPr>
           <a:xfrm>
-            <a:off x="704850" y="5044821"/>
+            <a:off x="704850" y="5375910"/>
             <a:ext cx="57150" cy="57150"/>
           </a:xfrm>
           <a:prstGeom prst="rect">
@@ -19164,7 +19164,7 @@
         </p:nvSpPr>
         <p:spPr>
           <a:xfrm>
-            <a:off x="971550" y="4940808"/>
+            <a:off x="971550" y="5276850"/>
             <a:ext cx="4857750" cy="95250"/>
           </a:xfrm>
           <a:prstGeom prst="rect">
@@ -19184,7 +19184,7 @@
               </a:lnSpc>
             </a:pPr>
             <a:r>
-              <a:rPr sz="1580" b="0" i="0">
+              <a:rPr sz="1500" b="0" i="0">
                 <a:solidFill>
                   <a:srgbClr val="1A1A1E"/>
                 </a:solidFill>
@@ -19203,7 +19203,7 @@
         </p:nvSpPr>
         <p:spPr>
           <a:xfrm>
-            <a:off x="6362700" y="2061210"/>
+            <a:off x="6362700" y="2026920"/>
             <a:ext cx="5143500" cy="182880"/>
           </a:xfrm>
           <a:prstGeom prst="rect">
@@ -19242,7 +19242,7 @@
         </p:nvSpPr>
         <p:spPr>
           <a:xfrm>
-            <a:off x="6362700" y="2270760"/>
+            <a:off x="6362700" y="2236470"/>
             <a:ext cx="419100" cy="28575"/>
           </a:xfrm>
           <a:prstGeom prst="rect">
@@ -19286,7 +19286,7 @@
         </p:nvSpPr>
         <p:spPr>
           <a:xfrm>
-            <a:off x="6381750" y="2660523"/>
+            <a:off x="6381750" y="2621280"/>
             <a:ext cx="57150" cy="57150"/>
           </a:xfrm>
           <a:prstGeom prst="rect">
@@ -19330,7 +19330,7 @@
         </p:nvSpPr>
         <p:spPr>
           <a:xfrm>
-            <a:off x="6648450" y="2556510"/>
+            <a:off x="6648450" y="2522220"/>
             <a:ext cx="4857750" cy="95250"/>
           </a:xfrm>
           <a:prstGeom prst="rect">
@@ -19350,7 +19350,7 @@
               </a:lnSpc>
             </a:pPr>
             <a:r>
-              <a:rPr sz="1580" b="0" i="0">
+              <a:rPr sz="1500" b="0" i="0">
                 <a:solidFill>
                   <a:srgbClr val="1A1A1E"/>
                 </a:solidFill>
@@ -19369,7 +19369,7 @@
         </p:nvSpPr>
         <p:spPr>
           <a:xfrm>
-            <a:off x="6381750" y="3719322"/>
+            <a:off x="6381750" y="3623310"/>
             <a:ext cx="57150" cy="57150"/>
           </a:xfrm>
           <a:prstGeom prst="rect">
@@ -19413,7 +19413,7 @@
         </p:nvSpPr>
         <p:spPr>
           <a:xfrm>
-            <a:off x="6648450" y="3615309"/>
+            <a:off x="6648450" y="3524250"/>
             <a:ext cx="4857750" cy="95250"/>
           </a:xfrm>
           <a:prstGeom prst="rect">
@@ -19433,7 +19433,7 @@
               </a:lnSpc>
             </a:pPr>
             <a:r>
-              <a:rPr sz="1580" b="0" i="0">
+              <a:rPr sz="1500" b="0" i="0">
                 <a:solidFill>
                   <a:srgbClr val="1A1A1E"/>
                 </a:solidFill>
@@ -32431,7 +32431,7 @@
         </p:nvSpPr>
         <p:spPr>
           <a:xfrm>
-            <a:off x="685800" y="2083118"/>
+            <a:off x="685800" y="1988820"/>
             <a:ext cx="10820400" cy="3286125"/>
           </a:xfrm>
           <a:prstGeom prst="roundRect">
@@ -32477,7 +32477,7 @@
         </p:nvSpPr>
         <p:spPr>
           <a:xfrm>
-            <a:off x="952500" y="2292668"/>
+            <a:off x="952500" y="2198370"/>
             <a:ext cx="323850" cy="28575"/>
           </a:xfrm>
           <a:prstGeom prst="roundRect">
@@ -32523,7 +32523,7 @@
         </p:nvSpPr>
         <p:spPr>
           <a:xfrm>
-            <a:off x="1371600" y="2235518"/>
+            <a:off x="1371600" y="2141220"/>
             <a:ext cx="1905000" cy="167640"/>
           </a:xfrm>
           <a:prstGeom prst="rect">
@@ -32562,7 +32562,7 @@
         </p:nvSpPr>
         <p:spPr>
           <a:xfrm>
-            <a:off x="952500" y="2578418"/>
+            <a:off x="952500" y="2484120"/>
             <a:ext cx="10287000" cy="228600"/>
           </a:xfrm>
           <a:prstGeom prst="rect">
@@ -32601,7 +32601,7 @@
         </p:nvSpPr>
         <p:spPr>
           <a:xfrm>
-            <a:off x="952500" y="2816542"/>
+            <a:off x="952500" y="2722245"/>
             <a:ext cx="10287000" cy="228600"/>
           </a:xfrm>
           <a:prstGeom prst="rect">
@@ -32640,7 +32640,7 @@
         </p:nvSpPr>
         <p:spPr>
           <a:xfrm>
-            <a:off x="952500" y="3054668"/>
+            <a:off x="952500" y="2960370"/>
             <a:ext cx="10287000" cy="228600"/>
           </a:xfrm>
           <a:prstGeom prst="rect">
@@ -32679,7 +32679,7 @@
         </p:nvSpPr>
         <p:spPr>
           <a:xfrm>
-            <a:off x="952500" y="3292792"/>
+            <a:off x="952500" y="3198495"/>
             <a:ext cx="10287000" cy="228600"/>
           </a:xfrm>
           <a:prstGeom prst="rect">
@@ -32718,7 +32718,7 @@
         </p:nvSpPr>
         <p:spPr>
           <a:xfrm>
-            <a:off x="952500" y="3530918"/>
+            <a:off x="952500" y="3436620"/>
             <a:ext cx="10287000" cy="228600"/>
           </a:xfrm>
           <a:prstGeom prst="rect">
@@ -32757,7 +32757,7 @@
         </p:nvSpPr>
         <p:spPr>
           <a:xfrm>
-            <a:off x="952500" y="3769042"/>
+            <a:off x="952500" y="3674745"/>
             <a:ext cx="10287000" cy="228600"/>
           </a:xfrm>
           <a:prstGeom prst="rect">
@@ -32796,7 +32796,7 @@
         </p:nvSpPr>
         <p:spPr>
           <a:xfrm>
-            <a:off x="952500" y="4007168"/>
+            <a:off x="952500" y="3912870"/>
             <a:ext cx="10287000" cy="228600"/>
           </a:xfrm>
           <a:prstGeom prst="rect">
@@ -32835,7 +32835,7 @@
         </p:nvSpPr>
         <p:spPr>
           <a:xfrm>
-            <a:off x="952500" y="4245292"/>
+            <a:off x="952500" y="4150995"/>
             <a:ext cx="10287000" cy="228600"/>
           </a:xfrm>
           <a:prstGeom prst="rect">
@@ -32874,7 +32874,7 @@
         </p:nvSpPr>
         <p:spPr>
           <a:xfrm>
-            <a:off x="952500" y="4483418"/>
+            <a:off x="952500" y="4389120"/>
             <a:ext cx="10287000" cy="228600"/>
           </a:xfrm>
           <a:prstGeom prst="rect">
@@ -32913,7 +32913,7 @@
         </p:nvSpPr>
         <p:spPr>
           <a:xfrm>
-            <a:off x="952500" y="4721542"/>
+            <a:off x="952500" y="4627245"/>
             <a:ext cx="10287000" cy="228600"/>
           </a:xfrm>
           <a:prstGeom prst="rect">
@@ -32952,7 +32952,7 @@
         </p:nvSpPr>
         <p:spPr>
           <a:xfrm>
-            <a:off x="952500" y="4959668"/>
+            <a:off x="952500" y="4865370"/>
             <a:ext cx="10287000" cy="228600"/>
           </a:xfrm>
           <a:prstGeom prst="rect">
@@ -32991,8 +32991,8 @@
         </p:nvSpPr>
         <p:spPr>
           <a:xfrm>
-            <a:off x="685800" y="5597842"/>
-            <a:ext cx="28575" cy="377190"/>
+            <a:off x="685800" y="5503545"/>
+            <a:ext cx="28575" cy="565785"/>
           </a:xfrm>
           <a:prstGeom prst="rect">
             <a:avLst/>
@@ -33035,7 +33035,7 @@
         </p:nvSpPr>
         <p:spPr>
           <a:xfrm>
-            <a:off x="876300" y="5578792"/>
+            <a:off x="876300" y="5484495"/>
             <a:ext cx="10629900" cy="666750"/>
           </a:xfrm>
           <a:prstGeom prst="rect">
@@ -33061,7 +33061,7 @@
                 </a:solidFill>
                 <a:latin typeface="Roboto"/>
               </a:rPr>
-              <a:t>Saída da distro docker-desktop do WSL. O mesmo processo tem PID 1 dentro do container e outro PID no host, que é o que o namespace de PID faz. É por isso que no nosso diagrama de implantação o container aparece dentro do host, e não como máquina separada.</a:t>
+              <a:t>Namespaces e cgroups são recursos do kernel Linux, então no Windows o Docker Desktop roda o engine sobre o WSL2, que fornece um kernel Linux real numa máquina virtual leve. Esta saída é dessa distro. O mesmo processo tem PID 1 dentro do container e outro PID no host, que é o que o namespace de PID faz. É por isso que no nosso diagrama de implantação o container aparece dentro do host, e não como máquina separada.</a:t>
             </a:r>
           </a:p>
         </p:txBody>
@@ -34265,7 +34265,7 @@
         </p:nvSpPr>
         <p:spPr>
           <a:xfrm>
-            <a:off x="857250" y="2362200"/>
+            <a:off x="857250" y="2257425"/>
             <a:ext cx="4381500" cy="167640"/>
           </a:xfrm>
           <a:prstGeom prst="rect">
@@ -34304,7 +34304,7 @@
         </p:nvSpPr>
         <p:spPr>
           <a:xfrm>
-            <a:off x="857250" y="4076700"/>
+            <a:off x="857250" y="3971925"/>
             <a:ext cx="3429000" cy="438150"/>
           </a:xfrm>
           <a:prstGeom prst="roundRect">
@@ -34352,7 +34352,7 @@
         </p:nvSpPr>
         <p:spPr>
           <a:xfrm>
-            <a:off x="1047750" y="4210050"/>
+            <a:off x="1047750" y="4105275"/>
             <a:ext cx="3048000" cy="213360"/>
           </a:xfrm>
           <a:prstGeom prst="rect">
@@ -34391,7 +34391,7 @@
         </p:nvSpPr>
         <p:spPr>
           <a:xfrm>
-            <a:off x="857250" y="3581400"/>
+            <a:off x="857250" y="3476625"/>
             <a:ext cx="3429000" cy="438150"/>
           </a:xfrm>
           <a:prstGeom prst="roundRect">
@@ -34439,7 +34439,7 @@
         </p:nvSpPr>
         <p:spPr>
           <a:xfrm>
-            <a:off x="1047750" y="3714750"/>
+            <a:off x="1047750" y="3609975"/>
             <a:ext cx="3048000" cy="213360"/>
           </a:xfrm>
           <a:prstGeom prst="rect">
@@ -34478,7 +34478,7 @@
         </p:nvSpPr>
         <p:spPr>
           <a:xfrm>
-            <a:off x="857250" y="3086100"/>
+            <a:off x="857250" y="2981325"/>
             <a:ext cx="3429000" cy="438150"/>
           </a:xfrm>
           <a:prstGeom prst="roundRect">
@@ -34526,7 +34526,7 @@
         </p:nvSpPr>
         <p:spPr>
           <a:xfrm>
-            <a:off x="1047750" y="3219450"/>
+            <a:off x="1047750" y="3114675"/>
             <a:ext cx="3048000" cy="213360"/>
           </a:xfrm>
           <a:prstGeom prst="rect">
@@ -34565,7 +34565,7 @@
         </p:nvSpPr>
         <p:spPr>
           <a:xfrm>
-            <a:off x="4400550" y="3086100"/>
+            <a:off x="4400550" y="2981325"/>
             <a:ext cx="28575" cy="1428750"/>
           </a:xfrm>
           <a:prstGeom prst="rect">
@@ -34609,7 +34609,7 @@
         </p:nvSpPr>
         <p:spPr>
           <a:xfrm>
-            <a:off x="742950" y="4648200"/>
+            <a:off x="742950" y="4543425"/>
             <a:ext cx="3657600" cy="381000"/>
           </a:xfrm>
           <a:prstGeom prst="rect">
@@ -34648,7 +34648,7 @@
         </p:nvSpPr>
         <p:spPr>
           <a:xfrm>
-            <a:off x="857250" y="2533650"/>
+            <a:off x="857250" y="2428875"/>
             <a:ext cx="3429000" cy="495300"/>
           </a:xfrm>
           <a:prstGeom prst="roundRect">
@@ -34697,7 +34697,7 @@
         </p:nvSpPr>
         <p:spPr>
           <a:xfrm>
-            <a:off x="1047750" y="2628900"/>
+            <a:off x="1047750" y="2524125"/>
             <a:ext cx="3048000" cy="213360"/>
           </a:xfrm>
           <a:prstGeom prst="rect">
@@ -34736,7 +34736,7 @@
         </p:nvSpPr>
         <p:spPr>
           <a:xfrm>
-            <a:off x="1047750" y="2809875"/>
+            <a:off x="1047750" y="2705100"/>
             <a:ext cx="3048000" cy="182880"/>
           </a:xfrm>
           <a:prstGeom prst="rect">
@@ -34775,7 +34775,7 @@
         </p:nvCxnSpPr>
         <p:spPr>
           <a:xfrm>
-            <a:off x="4857750" y="2476500"/>
+            <a:off x="4857750" y="2371725"/>
             <a:ext cx="0" cy="2152650"/>
           </a:xfrm>
           <a:prstGeom prst="line">
@@ -34810,7 +34810,7 @@
         </p:nvSpPr>
         <p:spPr>
           <a:xfrm>
-            <a:off x="5257800" y="2933700"/>
+            <a:off x="5257800" y="2828925"/>
             <a:ext cx="3619500" cy="243840"/>
           </a:xfrm>
           <a:prstGeom prst="rect">
@@ -34849,7 +34849,7 @@
         </p:nvSpPr>
         <p:spPr>
           <a:xfrm>
-            <a:off x="5257800" y="3200400"/>
+            <a:off x="5257800" y="3095625"/>
             <a:ext cx="3810000" cy="666750"/>
           </a:xfrm>
           <a:prstGeom prst="rect">
@@ -34888,7 +34888,7 @@
         </p:nvSpPr>
         <p:spPr>
           <a:xfrm>
-            <a:off x="5257800" y="3771900"/>
+            <a:off x="5257800" y="3667125"/>
             <a:ext cx="3619500" cy="243840"/>
           </a:xfrm>
           <a:prstGeom prst="rect">
@@ -34927,7 +34927,7 @@
         </p:nvSpPr>
         <p:spPr>
           <a:xfrm>
-            <a:off x="5257800" y="4038600"/>
+            <a:off x="5257800" y="3933825"/>
             <a:ext cx="3810000" cy="666750"/>
           </a:xfrm>
           <a:prstGeom prst="rect">
@@ -34966,8 +34966,8 @@
         </p:nvSpPr>
         <p:spPr>
           <a:xfrm>
-            <a:off x="685800" y="5676321"/>
-            <a:ext cx="28575" cy="457779"/>
+            <a:off x="685800" y="5472135"/>
+            <a:ext cx="28575" cy="661965"/>
           </a:xfrm>
           <a:prstGeom prst="rect">
             <a:avLst/>
@@ -35010,8 +35010,8 @@
         </p:nvSpPr>
         <p:spPr>
           <a:xfrm>
-            <a:off x="876300" y="5657271"/>
-            <a:ext cx="10629900" cy="591129"/>
+            <a:off x="876300" y="5453085"/>
+            <a:ext cx="10629900" cy="795315"/>
           </a:xfrm>
           <a:prstGeom prst="rect">
             <a:avLst/>
@@ -35030,13 +35030,13 @@
               </a:lnSpc>
             </a:pPr>
             <a:r>
-              <a:rPr sz="1280" b="0" i="0">
+              <a:rPr sz="1200" b="0" i="0">
                 <a:solidFill>
                   <a:srgbClr val="3A3A44"/>
                 </a:solidFill>
                 <a:latin typeface="Roboto"/>
               </a:rPr>
-              <a:t>Um Dockerfile que copia um .env e faz RUN rm na instrução seguinte produz uma imagem em que o segredo continua legível. No nosso caso o segredo seria a senha do banco e o segredo de sessão do login do anfitrião, o UC001.</a:t>
+              <a:t>A imagem é construída a partir de um Dockerfile, o arquivo de texto que declara a base e os passos, e circula entre máquinas por um registry. Cada instrução vira uma camada, e por isso um Dockerfile que copia um .env e faz RUN rm na instrução seguinte produz uma imagem em que o segredo continua legível. No nosso caso o segredo seria a senha do banco e o segredo de sessão do login do anfitrião, o UC001.</a:t>
             </a:r>
           </a:p>
         </p:txBody>

--- a/trabalhos/T1-Docker-Invite-People.pptx
+++ b/trabalhos/T1-Docker-Invite-People.pptx
@@ -13555,7 +13555,7 @@
                 </a:solidFill>
                 <a:latin typeface="Roboto"/>
               </a:rPr>
-              <a:t>As mesmas três camadas lógicas,</a:t>
+              <a:t>O sistema inteiro em um,</a:t>
             </a:r>
           </a:p>
           <a:p>
@@ -13571,7 +13571,7 @@
                 </a:solidFill>
                 <a:latin typeface="Roboto"/>
               </a:rPr>
-              <a:t>empacotadas de três jeitos</a:t>
+              <a:t>dois ou três containers</a:t>
             </a:r>
           </a:p>
         </p:txBody>
@@ -13610,7 +13610,7 @@
                 </a:solidFill>
                 <a:latin typeface="Roboto"/>
               </a:rPr>
-              <a:t>AS TRÊS CAMADAS LÓGICAS FICAM SEMPRE NA MESMA IMAGEM. O QUE MUDA É ONDE O FRONT-END E O BANCO RODAM.</a:t>
+              <a:t>AS TRÊS CAMADAS DO BACK-END FICAM NA MESMA IMAGEM NOS TRÊS DESENHOS.</a:t>
             </a:r>
           </a:p>
         </p:txBody>
@@ -15238,7 +15238,7 @@
                 </a:solidFill>
                 <a:latin typeface="Roboto"/>
               </a:rPr>
-              <a:t>Nenhuma das três muda uma linha do projeto lógico. Todas mudam o empacotamento, e essa escolha é entrada do ADR, o documento de decisões arquiteturais da Sprint 2. Cuidado com o vocabulário: Docker usa </a:t>
+              <a:t>O projeto lógico é o mesmo nas três opções, e a escolha entre elas entra no ADR, o documento de decisões arquiteturais da Sprint 2. O Docker também usa a palavra </a:t>
             </a:r>
             <a:r>
               <a:rPr sz="1280" b="0" i="1">
@@ -15256,7 +15256,7 @@
                 </a:solidFill>
                 <a:latin typeface="Roboto"/>
               </a:rPr>
-              <a:t> para o empilhamento do sistema de arquivos da imagem, que não tem relação com a camada lógica da Aula 03.</a:t>
+              <a:t>, mas para o empilhamento do sistema de arquivos da imagem, que é outra coisa e não tem relação com a camada lógica da Aula 03.</a:t>
             </a:r>
           </a:p>
         </p:txBody>

--- a/trabalhos/T1-Docker-Invite-People.pptx
+++ b/trabalhos/T1-Docker-Invite-People.pptx
@@ -18788,7 +18788,7 @@
         </p:nvSpPr>
         <p:spPr>
           <a:xfrm>
-            <a:off x="685800" y="2026920"/>
+            <a:off x="685800" y="2061210"/>
             <a:ext cx="5143500" cy="182880"/>
           </a:xfrm>
           <a:prstGeom prst="rect">
@@ -18827,7 +18827,7 @@
         </p:nvSpPr>
         <p:spPr>
           <a:xfrm>
-            <a:off x="685800" y="2236470"/>
+            <a:off x="685800" y="2270760"/>
             <a:ext cx="419100" cy="28575"/>
           </a:xfrm>
           <a:prstGeom prst="rect">
@@ -18871,7 +18871,7 @@
         </p:nvSpPr>
         <p:spPr>
           <a:xfrm>
-            <a:off x="704850" y="2621280"/>
+            <a:off x="704850" y="2660523"/>
             <a:ext cx="57150" cy="57150"/>
           </a:xfrm>
           <a:prstGeom prst="rect">
@@ -18915,7 +18915,7 @@
         </p:nvSpPr>
         <p:spPr>
           <a:xfrm>
-            <a:off x="971550" y="2522220"/>
+            <a:off x="971550" y="2556510"/>
             <a:ext cx="4857750" cy="95250"/>
           </a:xfrm>
           <a:prstGeom prst="rect">
@@ -18935,13 +18935,13 @@
               </a:lnSpc>
             </a:pPr>
             <a:r>
-              <a:rPr sz="1500" b="0" i="0">
+              <a:rPr sz="1580" b="0" i="0">
                 <a:solidFill>
                   <a:srgbClr val="1A1A1E"/>
                 </a:solidFill>
                 <a:latin typeface="Roboto"/>
               </a:rPr>
-              <a:t>A imagem passa a ter uma responsabilidade só, que é mais coesão.</a:t>
+              <a:t>A imagem passa a ter uma responsabilidade só.</a:t>
             </a:r>
           </a:p>
         </p:txBody>
@@ -18954,7 +18954,7 @@
         </p:nvSpPr>
         <p:spPr>
           <a:xfrm>
-            <a:off x="704850" y="3371850"/>
+            <a:off x="704850" y="3191256"/>
             <a:ext cx="57150" cy="57150"/>
           </a:xfrm>
           <a:prstGeom prst="rect">
@@ -18998,7 +18998,7 @@
         </p:nvSpPr>
         <p:spPr>
           <a:xfrm>
-            <a:off x="971550" y="3272790"/>
+            <a:off x="971550" y="3087243"/>
             <a:ext cx="4857750" cy="95250"/>
           </a:xfrm>
           <a:prstGeom prst="rect">
@@ -19018,7 +19018,7 @@
               </a:lnSpc>
             </a:pPr>
             <a:r>
-              <a:rPr sz="1500" b="0" i="0">
+              <a:rPr sz="1580" b="0" i="0">
                 <a:solidFill>
                   <a:srgbClr val="1A1A1E"/>
                 </a:solidFill>
@@ -19037,7 +19037,7 @@
         </p:nvSpPr>
         <p:spPr>
           <a:xfrm>
-            <a:off x="704850" y="4122420"/>
+            <a:off x="704850" y="3986022"/>
             <a:ext cx="57150" cy="57150"/>
           </a:xfrm>
           <a:prstGeom prst="rect">
@@ -19081,7 +19081,7 @@
         </p:nvSpPr>
         <p:spPr>
           <a:xfrm>
-            <a:off x="971550" y="4023360"/>
+            <a:off x="971550" y="3882009"/>
             <a:ext cx="4857750" cy="95250"/>
           </a:xfrm>
           <a:prstGeom prst="rect">
@@ -19101,7 +19101,7 @@
               </a:lnSpc>
             </a:pPr>
             <a:r>
-              <a:rPr sz="1500" b="0" i="0">
+              <a:rPr sz="1580" b="0" i="0">
                 <a:solidFill>
                   <a:srgbClr val="1A1A1E"/>
                 </a:solidFill>
@@ -19120,7 +19120,7 @@
         </p:nvSpPr>
         <p:spPr>
           <a:xfrm>
-            <a:off x="704850" y="5375910"/>
+            <a:off x="704850" y="5308854"/>
             <a:ext cx="57150" cy="57150"/>
           </a:xfrm>
           <a:prstGeom prst="rect">
@@ -19164,7 +19164,7 @@
         </p:nvSpPr>
         <p:spPr>
           <a:xfrm>
-            <a:off x="971550" y="5276850"/>
+            <a:off x="971550" y="5204841"/>
             <a:ext cx="4857750" cy="95250"/>
           </a:xfrm>
           <a:prstGeom prst="rect">
@@ -19184,13 +19184,13 @@
               </a:lnSpc>
             </a:pPr>
             <a:r>
-              <a:rPr sz="1500" b="0" i="0">
+              <a:rPr sz="1580" b="0" i="0">
                 <a:solidFill>
                   <a:srgbClr val="1A1A1E"/>
                 </a:solidFill>
                 <a:latin typeface="Roboto"/>
               </a:rPr>
-              <a:t>Uma regra escrita na wiki depende de alguém revisar. A mesma regra na topologia é verificada pela estrutura, o que reduz a degradação arquitetural.</a:t>
+              <a:t>Uma regra escrita na wiki depende de alguém revisar. A mesma regra na topologia é verificada pela estrutura.</a:t>
             </a:r>
           </a:p>
         </p:txBody>
@@ -19203,7 +19203,7 @@
         </p:nvSpPr>
         <p:spPr>
           <a:xfrm>
-            <a:off x="6362700" y="2026920"/>
+            <a:off x="6362700" y="2061210"/>
             <a:ext cx="5143500" cy="182880"/>
           </a:xfrm>
           <a:prstGeom prst="rect">
@@ -19242,7 +19242,7 @@
         </p:nvSpPr>
         <p:spPr>
           <a:xfrm>
-            <a:off x="6362700" y="2236470"/>
+            <a:off x="6362700" y="2270760"/>
             <a:ext cx="419100" cy="28575"/>
           </a:xfrm>
           <a:prstGeom prst="rect">
@@ -19286,7 +19286,7 @@
         </p:nvSpPr>
         <p:spPr>
           <a:xfrm>
-            <a:off x="6381750" y="2621280"/>
+            <a:off x="6381750" y="2660523"/>
             <a:ext cx="57150" cy="57150"/>
           </a:xfrm>
           <a:prstGeom prst="rect">
@@ -19330,7 +19330,7 @@
         </p:nvSpPr>
         <p:spPr>
           <a:xfrm>
-            <a:off x="6648450" y="2522220"/>
+            <a:off x="6648450" y="2556510"/>
             <a:ext cx="4857750" cy="95250"/>
           </a:xfrm>
           <a:prstGeom prst="rect">
@@ -19350,7 +19350,7 @@
               </a:lnSpc>
             </a:pPr>
             <a:r>
-              <a:rPr sz="1500" b="0" i="0">
+              <a:rPr sz="1580" b="0" i="0">
                 <a:solidFill>
                   <a:srgbClr val="1A1A1E"/>
                 </a:solidFill>
@@ -19369,7 +19369,7 @@
         </p:nvSpPr>
         <p:spPr>
           <a:xfrm>
-            <a:off x="6381750" y="3623310"/>
+            <a:off x="6381750" y="3719322"/>
             <a:ext cx="57150" cy="57150"/>
           </a:xfrm>
           <a:prstGeom prst="rect">
@@ -19413,7 +19413,7 @@
         </p:nvSpPr>
         <p:spPr>
           <a:xfrm>
-            <a:off x="6648450" y="3524250"/>
+            <a:off x="6648450" y="3615309"/>
             <a:ext cx="4857750" cy="95250"/>
           </a:xfrm>
           <a:prstGeom prst="rect">
@@ -19433,7 +19433,7 @@
               </a:lnSpc>
             </a:pPr>
             <a:r>
-              <a:rPr sz="1500" b="0" i="0">
+              <a:rPr sz="1580" b="0" i="0">
                 <a:solidFill>
                   <a:srgbClr val="1A1A1E"/>
                 </a:solidFill>
@@ -20757,7 +20757,7 @@
         </p:nvSpPr>
         <p:spPr>
           <a:xfrm>
-            <a:off x="704850" y="2445639"/>
+            <a:off x="704850" y="2583942"/>
             <a:ext cx="57150" cy="57150"/>
           </a:xfrm>
           <a:prstGeom prst="rect">
@@ -20801,7 +20801,7 @@
         </p:nvSpPr>
         <p:spPr>
           <a:xfrm>
-            <a:off x="971550" y="2336673"/>
+            <a:off x="971550" y="2474976"/>
             <a:ext cx="7677150" cy="95250"/>
           </a:xfrm>
           <a:prstGeom prst="rect">
@@ -20840,7 +20840,7 @@
         </p:nvSpPr>
         <p:spPr>
           <a:xfrm>
-            <a:off x="704850" y="3284601"/>
+            <a:off x="704850" y="3422904"/>
             <a:ext cx="57150" cy="57150"/>
           </a:xfrm>
           <a:prstGeom prst="rect">
@@ -20884,7 +20884,7 @@
         </p:nvSpPr>
         <p:spPr>
           <a:xfrm>
-            <a:off x="971550" y="3175635"/>
+            <a:off x="971550" y="3313938"/>
             <a:ext cx="7677150" cy="95250"/>
           </a:xfrm>
           <a:prstGeom prst="rect">
@@ -20923,7 +20923,7 @@
         </p:nvSpPr>
         <p:spPr>
           <a:xfrm>
-            <a:off x="704850" y="4123563"/>
+            <a:off x="704850" y="4261866"/>
             <a:ext cx="57150" cy="57150"/>
           </a:xfrm>
           <a:prstGeom prst="rect">
@@ -20967,7 +20967,7 @@
         </p:nvSpPr>
         <p:spPr>
           <a:xfrm>
-            <a:off x="971550" y="4014597"/>
+            <a:off x="971550" y="4152900"/>
             <a:ext cx="7677150" cy="95250"/>
           </a:xfrm>
           <a:prstGeom prst="rect">
@@ -21006,7 +21006,7 @@
         </p:nvSpPr>
         <p:spPr>
           <a:xfrm>
-            <a:off x="704850" y="4962525"/>
+            <a:off x="704850" y="5100828"/>
             <a:ext cx="57150" cy="57150"/>
           </a:xfrm>
           <a:prstGeom prst="rect">
@@ -21050,7 +21050,7 @@
         </p:nvSpPr>
         <p:spPr>
           <a:xfrm>
-            <a:off x="971550" y="4853559"/>
+            <a:off x="971550" y="4991862"/>
             <a:ext cx="7677150" cy="95250"/>
           </a:xfrm>
           <a:prstGeom prst="rect">
@@ -21076,7 +21076,7 @@
                 </a:solidFill>
                 <a:latin typeface="Roboto"/>
               </a:rPr>
-              <a:t>A Questão Norteadora da Sprint 2, que é a pergunta que a sprint precisa responder, é como os componentes serão distribuídos e implantados no ambiente de execução.</a:t>
+              <a:t>A Sprint 2 tem uma Questão Norteadora a responder: como os componentes serão distribuídos e implantados no ambiente de execução.</a:t>
             </a:r>
           </a:p>
         </p:txBody>
@@ -21089,7 +21089,7 @@
         </p:nvSpPr>
         <p:spPr>
           <a:xfrm>
-            <a:off x="9124950" y="2336673"/>
+            <a:off x="9124950" y="2474976"/>
             <a:ext cx="142875" cy="142875"/>
           </a:xfrm>
           <a:prstGeom prst="donut">
@@ -21133,7 +21133,7 @@
         </p:nvSpPr>
         <p:spPr>
           <a:xfrm>
-            <a:off x="9372600" y="2346198"/>
+            <a:off x="9372600" y="2484501"/>
             <a:ext cx="2133600" cy="182880"/>
           </a:xfrm>
           <a:prstGeom prst="rect">
@@ -21172,7 +21172,7 @@
         </p:nvSpPr>
         <p:spPr>
           <a:xfrm>
-            <a:off x="9124950" y="2622423"/>
+            <a:off x="9124950" y="2760726"/>
             <a:ext cx="38100" cy="1033272"/>
           </a:xfrm>
           <a:prstGeom prst="rect">
@@ -21216,7 +21216,7 @@
         </p:nvSpPr>
         <p:spPr>
           <a:xfrm>
-            <a:off x="9334500" y="2622423"/>
+            <a:off x="9334500" y="2760726"/>
             <a:ext cx="2171700" cy="1604772"/>
           </a:xfrm>
           <a:prstGeom prst="rect">
@@ -22711,7 +22711,7 @@
         </p:nvSpPr>
         <p:spPr>
           <a:xfrm>
-            <a:off x="704850" y="2583942"/>
+            <a:off x="704850" y="2722245"/>
             <a:ext cx="57150" cy="57150"/>
           </a:xfrm>
           <a:prstGeom prst="rect">
@@ -22755,7 +22755,7 @@
         </p:nvSpPr>
         <p:spPr>
           <a:xfrm>
-            <a:off x="971550" y="2474976"/>
+            <a:off x="971550" y="2613279"/>
             <a:ext cx="7772400" cy="95250"/>
           </a:xfrm>
           <a:prstGeom prst="rect">
@@ -22794,7 +22794,7 @@
         </p:nvSpPr>
         <p:spPr>
           <a:xfrm>
-            <a:off x="704850" y="3422904"/>
+            <a:off x="704850" y="3561207"/>
             <a:ext cx="57150" cy="57150"/>
           </a:xfrm>
           <a:prstGeom prst="rect">
@@ -22838,7 +22838,7 @@
         </p:nvSpPr>
         <p:spPr>
           <a:xfrm>
-            <a:off x="971550" y="3313938"/>
+            <a:off x="971550" y="3452241"/>
             <a:ext cx="7772400" cy="95250"/>
           </a:xfrm>
           <a:prstGeom prst="rect">
@@ -22877,7 +22877,7 @@
         </p:nvSpPr>
         <p:spPr>
           <a:xfrm>
-            <a:off x="704850" y="4261866"/>
+            <a:off x="704850" y="4400169"/>
             <a:ext cx="57150" cy="57150"/>
           </a:xfrm>
           <a:prstGeom prst="rect">
@@ -22921,7 +22921,7 @@
         </p:nvSpPr>
         <p:spPr>
           <a:xfrm>
-            <a:off x="971550" y="4152900"/>
+            <a:off x="971550" y="4291203"/>
             <a:ext cx="7772400" cy="95250"/>
           </a:xfrm>
           <a:prstGeom prst="rect">
@@ -22960,7 +22960,7 @@
         </p:nvSpPr>
         <p:spPr>
           <a:xfrm>
-            <a:off x="704850" y="5100828"/>
+            <a:off x="704850" y="5239131"/>
             <a:ext cx="57150" cy="57150"/>
           </a:xfrm>
           <a:prstGeom prst="rect">
@@ -23004,7 +23004,7 @@
         </p:nvSpPr>
         <p:spPr>
           <a:xfrm>
-            <a:off x="971550" y="4991862"/>
+            <a:off x="971550" y="5130165"/>
             <a:ext cx="7772400" cy="95250"/>
           </a:xfrm>
           <a:prstGeom prst="rect">
@@ -23030,7 +23030,7 @@
                 </a:solidFill>
                 <a:latin typeface="Roboto"/>
               </a:rPr>
-              <a:t>O Docker Desktop é pago para empresa acima de certo porte, o que afeta quem for usar isto fora da faculdade.</a:t>
+              <a:t>O Docker Desktop é pago para empresa acima de certo porte.</a:t>
             </a:r>
           </a:p>
         </p:txBody>
@@ -23043,7 +23043,7 @@
         </p:nvSpPr>
         <p:spPr>
           <a:xfrm>
-            <a:off x="9124950" y="2474976"/>
+            <a:off x="9124950" y="2613279"/>
             <a:ext cx="152400" cy="133350"/>
           </a:xfrm>
           <a:prstGeom prst="triangle">
@@ -23087,7 +23087,7 @@
         </p:nvSpPr>
         <p:spPr>
           <a:xfrm>
-            <a:off x="9193530" y="2532126"/>
+            <a:off x="9193530" y="2670429"/>
             <a:ext cx="15240" cy="38100"/>
           </a:xfrm>
           <a:prstGeom prst="rect">
@@ -23131,7 +23131,7 @@
         </p:nvSpPr>
         <p:spPr>
           <a:xfrm>
-            <a:off x="9372600" y="2484501"/>
+            <a:off x="9372600" y="2622804"/>
             <a:ext cx="2133600" cy="182880"/>
           </a:xfrm>
           <a:prstGeom prst="rect">
@@ -23170,7 +23170,7 @@
         </p:nvSpPr>
         <p:spPr>
           <a:xfrm>
-            <a:off x="9124950" y="2760726"/>
+            <a:off x="9124950" y="2899029"/>
             <a:ext cx="38100" cy="1005840"/>
           </a:xfrm>
           <a:prstGeom prst="rect">
@@ -23214,7 +23214,7 @@
         </p:nvSpPr>
         <p:spPr>
           <a:xfrm>
-            <a:off x="9334500" y="2760726"/>
+            <a:off x="9334500" y="2899029"/>
             <a:ext cx="2171700" cy="1577340"/>
           </a:xfrm>
           <a:prstGeom prst="rect">
@@ -26388,7 +26388,7 @@
         </p:nvSpPr>
         <p:spPr>
           <a:xfrm>
-            <a:off x="685800" y="2010346"/>
+            <a:off x="685800" y="2028825"/>
             <a:ext cx="5143500" cy="182880"/>
           </a:xfrm>
           <a:prstGeom prst="rect">
@@ -26427,7 +26427,7 @@
         </p:nvSpPr>
         <p:spPr>
           <a:xfrm>
-            <a:off x="685800" y="2219896"/>
+            <a:off x="685800" y="2238375"/>
             <a:ext cx="419100" cy="28575"/>
           </a:xfrm>
           <a:prstGeom prst="rect">
@@ -26471,7 +26471,7 @@
         </p:nvSpPr>
         <p:spPr>
           <a:xfrm>
-            <a:off x="704850" y="2599754"/>
+            <a:off x="704850" y="2623185"/>
             <a:ext cx="57150" cy="57150"/>
           </a:xfrm>
           <a:prstGeom prst="rect">
@@ -26515,7 +26515,7 @@
         </p:nvSpPr>
         <p:spPr>
           <a:xfrm>
-            <a:off x="971550" y="2505646"/>
+            <a:off x="971550" y="2524125"/>
             <a:ext cx="4857750" cy="95250"/>
           </a:xfrm>
           <a:prstGeom prst="rect">
@@ -26535,13 +26535,13 @@
               </a:lnSpc>
             </a:pPr>
             <a:r>
-              <a:rPr sz="1420" b="0" i="0">
+              <a:rPr sz="1500" b="0" i="0">
                 <a:solidFill>
                   <a:srgbClr val="1A1A1E"/>
                 </a:solidFill>
                 <a:latin typeface="Roboto"/>
               </a:rPr>
-              <a:t>Cada imagem tem uma responsabilidade e uma fronteira declarada, que é modularidade e reusabilidade.</a:t>
+              <a:t>Uma responsabilidade por imagem, com a fronteira declarada.</a:t>
             </a:r>
           </a:p>
         </p:txBody>
@@ -26554,7 +26554,7 @@
         </p:nvSpPr>
         <p:spPr>
           <a:xfrm>
-            <a:off x="704850" y="3306128"/>
+            <a:off x="704850" y="3373755"/>
             <a:ext cx="57150" cy="57150"/>
           </a:xfrm>
           <a:prstGeom prst="rect">
@@ -26598,7 +26598,7 @@
         </p:nvSpPr>
         <p:spPr>
           <a:xfrm>
-            <a:off x="971550" y="3212021"/>
+            <a:off x="971550" y="3274695"/>
             <a:ext cx="4857750" cy="95250"/>
           </a:xfrm>
           <a:prstGeom prst="rect">
@@ -26618,13 +26618,13 @@
               </a:lnSpc>
             </a:pPr>
             <a:r>
-              <a:rPr sz="1420" b="0" i="0">
+              <a:rPr sz="1500" b="0" i="0">
                 <a:solidFill>
                   <a:srgbClr val="1A1A1E"/>
                 </a:solidFill>
                 <a:latin typeface="Roboto"/>
               </a:rPr>
-              <a:t>O ambiente vira arquivo legível, versionado junto com o código, e com isso ganha compreensibilidade.</a:t>
+              <a:t>O ambiente vira arquivo legível, versionado junto com o código.</a:t>
             </a:r>
           </a:p>
         </p:txBody>
@@ -26637,7 +26637,7 @@
         </p:nvSpPr>
         <p:spPr>
           <a:xfrm>
-            <a:off x="704850" y="4012502"/>
+            <a:off x="704850" y="4124325"/>
             <a:ext cx="57150" cy="57150"/>
           </a:xfrm>
           <a:prstGeom prst="rect">
@@ -26681,7 +26681,7 @@
         </p:nvSpPr>
         <p:spPr>
           <a:xfrm>
-            <a:off x="971550" y="3918394"/>
+            <a:off x="971550" y="4025265"/>
             <a:ext cx="4857750" cy="95250"/>
           </a:xfrm>
           <a:prstGeom prst="rect">
@@ -26701,13 +26701,13 @@
               </a:lnSpc>
             </a:pPr>
             <a:r>
-              <a:rPr sz="1420" b="0" i="0">
+              <a:rPr sz="1500" b="0" i="0">
                 <a:solidFill>
                   <a:srgbClr val="1A1A1E"/>
                 </a:solidFill>
                 <a:latin typeface="Roboto"/>
               </a:rPr>
-              <a:t>Extensibilidade sai barata, porque trocar runtime ou banco é editar uma linha de arquivo.</a:t>
+              <a:t>Trocar runtime ou banco passa a ser editar uma linha de arquivo.</a:t>
             </a:r>
           </a:p>
         </p:txBody>
@@ -26720,7 +26720,7 @@
         </p:nvSpPr>
         <p:spPr>
           <a:xfrm>
-            <a:off x="704850" y="4718876"/>
+            <a:off x="704850" y="4874895"/>
             <a:ext cx="57150" cy="57150"/>
           </a:xfrm>
           <a:prstGeom prst="rect">
@@ -26764,7 +26764,7 @@
         </p:nvSpPr>
         <p:spPr>
           <a:xfrm>
-            <a:off x="971550" y="4624768"/>
+            <a:off x="971550" y="4775835"/>
             <a:ext cx="4857750" cy="95250"/>
           </a:xfrm>
           <a:prstGeom prst="rect">
@@ -26784,13 +26784,13 @@
               </a:lnSpc>
             </a:pPr>
             <a:r>
-              <a:rPr sz="1420" b="0" i="0">
+              <a:rPr sz="1500" b="0" i="0">
                 <a:solidFill>
                   <a:srgbClr val="1A1A1E"/>
                 </a:solidFill>
                 <a:latin typeface="Roboto"/>
               </a:rPr>
-              <a:t>A mesma imagem atravessa notebook, pipeline e a demonstração funcional do T3, o que ajuda a manutenibilidade.</a:t>
+              <a:t>A mesma imagem atravessa notebook, pipeline e a demonstração do T3.</a:t>
             </a:r>
           </a:p>
         </p:txBody>
@@ -26803,7 +26803,7 @@
         </p:nvSpPr>
         <p:spPr>
           <a:xfrm>
-            <a:off x="704850" y="5664136"/>
+            <a:off x="704850" y="5625465"/>
             <a:ext cx="57150" cy="57150"/>
           </a:xfrm>
           <a:prstGeom prst="rect">
@@ -26847,7 +26847,7 @@
         </p:nvSpPr>
         <p:spPr>
           <a:xfrm>
-            <a:off x="971550" y="5570030"/>
+            <a:off x="971550" y="5526405"/>
             <a:ext cx="4857750" cy="95250"/>
           </a:xfrm>
           <a:prstGeom prst="rect">
@@ -26867,13 +26867,13 @@
               </a:lnSpc>
             </a:pPr>
             <a:r>
-              <a:rPr sz="1420" b="0" i="0">
+              <a:rPr sz="1500" b="0" i="0">
                 <a:solidFill>
                   <a:srgbClr val="1A1A1E"/>
                 </a:solidFill>
                 <a:latin typeface="Roboto"/>
               </a:rPr>
-              <a:t>A escalabilidade fica seletiva, e só vale se a aplicação for mesmo sem estado.</a:t>
+              <a:t>Dá para escalar só o serviço público, se a aplicação for mesmo sem estado.</a:t>
             </a:r>
           </a:p>
         </p:txBody>
@@ -26886,7 +26886,7 @@
         </p:nvSpPr>
         <p:spPr>
           <a:xfrm>
-            <a:off x="6362700" y="2010346"/>
+            <a:off x="6362700" y="2028825"/>
             <a:ext cx="5143500" cy="182880"/>
           </a:xfrm>
           <a:prstGeom prst="rect">
@@ -26925,7 +26925,7 @@
         </p:nvSpPr>
         <p:spPr>
           <a:xfrm>
-            <a:off x="6362700" y="2219896"/>
+            <a:off x="6362700" y="2238375"/>
             <a:ext cx="419100" cy="28575"/>
           </a:xfrm>
           <a:prstGeom prst="rect">
@@ -26969,7 +26969,7 @@
         </p:nvSpPr>
         <p:spPr>
           <a:xfrm>
-            <a:off x="6381750" y="2599754"/>
+            <a:off x="6381750" y="2623185"/>
             <a:ext cx="57150" cy="57150"/>
           </a:xfrm>
           <a:prstGeom prst="rect">
@@ -27013,7 +27013,7 @@
         </p:nvSpPr>
         <p:spPr>
           <a:xfrm>
-            <a:off x="6648450" y="2505646"/>
+            <a:off x="6648450" y="2524125"/>
             <a:ext cx="4857750" cy="95250"/>
           </a:xfrm>
           <a:prstGeom prst="rect">
@@ -27033,13 +27033,13 @@
               </a:lnSpc>
             </a:pPr>
             <a:r>
-              <a:rPr sz="1420" b="0" i="0">
+              <a:rPr sz="1500" b="0" i="0">
                 <a:solidFill>
                   <a:srgbClr val="1A1A1E"/>
                 </a:solidFill>
                 <a:latin typeface="Roboto"/>
               </a:rPr>
-              <a:t>Segurança ganha isolamento e herda uma superfície nova, que é a imagem base e o privilégio de execução.</a:t>
+              <a:t>Uma superfície de ataque nova, na imagem base e no privilégio de execução.</a:t>
             </a:r>
           </a:p>
         </p:txBody>
@@ -27052,7 +27052,7 @@
         </p:nvSpPr>
         <p:spPr>
           <a:xfrm>
-            <a:off x="6381750" y="3306128"/>
+            <a:off x="6381750" y="3373755"/>
             <a:ext cx="57150" cy="57150"/>
           </a:xfrm>
           <a:prstGeom prst="rect">
@@ -27096,7 +27096,7 @@
         </p:nvSpPr>
         <p:spPr>
           <a:xfrm>
-            <a:off x="6648450" y="3212021"/>
+            <a:off x="6648450" y="3274695"/>
             <a:ext cx="4857750" cy="95250"/>
           </a:xfrm>
           <a:prstGeom prst="rect">
@@ -27116,13 +27116,13 @@
               </a:lnSpc>
             </a:pPr>
             <a:r>
-              <a:rPr sz="1420" b="0" i="0">
+              <a:rPr sz="1500" b="0" i="0">
                 <a:solidFill>
                   <a:srgbClr val="1A1A1E"/>
                 </a:solidFill>
                 <a:latin typeface="Roboto"/>
               </a:rPr>
-              <a:t>Desempenho custa, principalmente I/O nas máquinas Windows, e a Aula 03 já avisa que camada extra prejudica desempenho.</a:t>
+              <a:t>I/O mais lento, principalmente nas máquinas Windows. A Aula 03 já avisa que camada extra prejudica desempenho.</a:t>
             </a:r>
           </a:p>
         </p:txBody>
@@ -31794,7 +31794,7 @@
         </p:nvSpPr>
         <p:spPr>
           <a:xfrm>
-            <a:off x="685800" y="2723960"/>
+            <a:off x="685800" y="2855976"/>
             <a:ext cx="5143500" cy="182880"/>
           </a:xfrm>
           <a:prstGeom prst="rect">
@@ -31833,7 +31833,7 @@
         </p:nvSpPr>
         <p:spPr>
           <a:xfrm>
-            <a:off x="685800" y="2933510"/>
+            <a:off x="685800" y="3065526"/>
             <a:ext cx="419100" cy="28575"/>
           </a:xfrm>
           <a:prstGeom prst="rect">
@@ -31877,7 +31877,7 @@
         </p:nvSpPr>
         <p:spPr>
           <a:xfrm>
-            <a:off x="704850" y="3323273"/>
+            <a:off x="704850" y="3455289"/>
             <a:ext cx="57150" cy="57150"/>
           </a:xfrm>
           <a:prstGeom prst="rect">
@@ -31921,7 +31921,7 @@
         </p:nvSpPr>
         <p:spPr>
           <a:xfrm>
-            <a:off x="971550" y="3219260"/>
+            <a:off x="971550" y="3351276"/>
             <a:ext cx="4857750" cy="95250"/>
           </a:xfrm>
           <a:prstGeom prst="rect">
@@ -31960,7 +31960,7 @@
         </p:nvSpPr>
         <p:spPr>
           <a:xfrm>
-            <a:off x="6362700" y="2723960"/>
+            <a:off x="6362700" y="2855976"/>
             <a:ext cx="5143500" cy="182880"/>
           </a:xfrm>
           <a:prstGeom prst="rect">
@@ -31999,7 +31999,7 @@
         </p:nvSpPr>
         <p:spPr>
           <a:xfrm>
-            <a:off x="6362700" y="2933510"/>
+            <a:off x="6362700" y="3065526"/>
             <a:ext cx="419100" cy="28575"/>
           </a:xfrm>
           <a:prstGeom prst="rect">
@@ -32043,7 +32043,7 @@
         </p:nvSpPr>
         <p:spPr>
           <a:xfrm>
-            <a:off x="6381750" y="3323273"/>
+            <a:off x="6381750" y="3455289"/>
             <a:ext cx="57150" cy="57150"/>
           </a:xfrm>
           <a:prstGeom prst="rect">
@@ -32087,7 +32087,7 @@
         </p:nvSpPr>
         <p:spPr>
           <a:xfrm>
-            <a:off x="6648450" y="3219260"/>
+            <a:off x="6648450" y="3351276"/>
             <a:ext cx="4857750" cy="95250"/>
           </a:xfrm>
           <a:prstGeom prst="rect">
@@ -32113,7 +32113,7 @@
                 </a:solidFill>
                 <a:latin typeface="Roboto"/>
               </a:rPr>
-              <a:t>Conjunto ordenado de camadas de sistema de arquivos mais a configuração de execução, identificado por um digest, que é o hash do próprio conteúdo.</a:t>
+              <a:t>Conjunto ordenado de camadas de sistema de arquivos mais a configuração de execução, identificado por um digest, o hash do próprio conteúdo.</a:t>
             </a:r>
           </a:p>
         </p:txBody>
@@ -32126,7 +32126,7 @@
         </p:nvSpPr>
         <p:spPr>
           <a:xfrm>
-            <a:off x="6381750" y="4646104"/>
+            <a:off x="6381750" y="4514088"/>
             <a:ext cx="57150" cy="57150"/>
           </a:xfrm>
           <a:prstGeom prst="rect">
@@ -32170,7 +32170,7 @@
         </p:nvSpPr>
         <p:spPr>
           <a:xfrm>
-            <a:off x="6648450" y="4542092"/>
+            <a:off x="6648450" y="4410075"/>
             <a:ext cx="4857750" cy="95250"/>
           </a:xfrm>
           <a:prstGeom prst="rect">
@@ -33296,7 +33296,7 @@
         </p:nvSpPr>
         <p:spPr>
           <a:xfrm>
-            <a:off x="685800" y="2061210"/>
+            <a:off x="685800" y="2193226"/>
             <a:ext cx="5143500" cy="182880"/>
           </a:xfrm>
           <a:prstGeom prst="rect">
@@ -33335,7 +33335,7 @@
         </p:nvSpPr>
         <p:spPr>
           <a:xfrm>
-            <a:off x="685800" y="2270760"/>
+            <a:off x="685800" y="2402776"/>
             <a:ext cx="419100" cy="28575"/>
           </a:xfrm>
           <a:prstGeom prst="rect">
@@ -33379,7 +33379,7 @@
         </p:nvSpPr>
         <p:spPr>
           <a:xfrm>
-            <a:off x="704850" y="2660523"/>
+            <a:off x="704850" y="2792540"/>
             <a:ext cx="57150" cy="57150"/>
           </a:xfrm>
           <a:prstGeom prst="rect">
@@ -33423,7 +33423,7 @@
         </p:nvSpPr>
         <p:spPr>
           <a:xfrm>
-            <a:off x="971550" y="2556510"/>
+            <a:off x="971550" y="2688526"/>
             <a:ext cx="4857750" cy="95250"/>
           </a:xfrm>
           <a:prstGeom prst="rect">
@@ -33462,7 +33462,7 @@
         </p:nvSpPr>
         <p:spPr>
           <a:xfrm>
-            <a:off x="704850" y="3455289"/>
+            <a:off x="704850" y="3587306"/>
             <a:ext cx="57150" cy="57150"/>
           </a:xfrm>
           <a:prstGeom prst="rect">
@@ -33506,7 +33506,7 @@
         </p:nvSpPr>
         <p:spPr>
           <a:xfrm>
-            <a:off x="971550" y="3351276"/>
+            <a:off x="971550" y="3483292"/>
             <a:ext cx="4857750" cy="95250"/>
           </a:xfrm>
           <a:prstGeom prst="rect">
@@ -33545,7 +33545,7 @@
         </p:nvSpPr>
         <p:spPr>
           <a:xfrm>
-            <a:off x="704850" y="4250055"/>
+            <a:off x="704850" y="4382072"/>
             <a:ext cx="57150" cy="57150"/>
           </a:xfrm>
           <a:prstGeom prst="rect">
@@ -33589,7 +33589,7 @@
         </p:nvSpPr>
         <p:spPr>
           <a:xfrm>
-            <a:off x="971550" y="4146042"/>
+            <a:off x="971550" y="4278058"/>
             <a:ext cx="4857750" cy="95250"/>
           </a:xfrm>
           <a:prstGeom prst="rect">
@@ -33615,7 +33615,7 @@
                 </a:solidFill>
                 <a:latin typeface="Roboto"/>
               </a:rPr>
-              <a:t>O namespace net dá uma pilha de rede própria, e é por isso que dois containers conseguem escutar na mesma porta.</a:t>
+              <a:t>O namespace net dá uma pilha de rede própria. Dois containers conseguem escutar na mesma porta.</a:t>
             </a:r>
           </a:p>
         </p:txBody>
@@ -33628,7 +33628,7 @@
         </p:nvSpPr>
         <p:spPr>
           <a:xfrm>
-            <a:off x="704850" y="5308854"/>
+            <a:off x="704850" y="5176837"/>
             <a:ext cx="57150" cy="57150"/>
           </a:xfrm>
           <a:prstGeom prst="rect">
@@ -33672,7 +33672,7 @@
         </p:nvSpPr>
         <p:spPr>
           <a:xfrm>
-            <a:off x="971550" y="5204841"/>
+            <a:off x="971550" y="5072824"/>
             <a:ext cx="4857750" cy="95250"/>
           </a:xfrm>
           <a:prstGeom prst="rect">
@@ -33711,7 +33711,7 @@
         </p:nvSpPr>
         <p:spPr>
           <a:xfrm>
-            <a:off x="6362700" y="2061210"/>
+            <a:off x="6362700" y="2193226"/>
             <a:ext cx="5143500" cy="182880"/>
           </a:xfrm>
           <a:prstGeom prst="rect">
@@ -33750,7 +33750,7 @@
         </p:nvSpPr>
         <p:spPr>
           <a:xfrm>
-            <a:off x="6362700" y="2270760"/>
+            <a:off x="6362700" y="2402776"/>
             <a:ext cx="419100" cy="28575"/>
           </a:xfrm>
           <a:prstGeom prst="rect">
@@ -33794,7 +33794,7 @@
         </p:nvSpPr>
         <p:spPr>
           <a:xfrm>
-            <a:off x="6381750" y="2660523"/>
+            <a:off x="6381750" y="2792540"/>
             <a:ext cx="57150" cy="57150"/>
           </a:xfrm>
           <a:prstGeom prst="rect">
@@ -33838,7 +33838,7 @@
         </p:nvSpPr>
         <p:spPr>
           <a:xfrm>
-            <a:off x="6648450" y="2556510"/>
+            <a:off x="6648450" y="2688526"/>
             <a:ext cx="4857750" cy="95250"/>
           </a:xfrm>
           <a:prstGeom prst="rect">
@@ -33877,7 +33877,7 @@
         </p:nvSpPr>
         <p:spPr>
           <a:xfrm>
-            <a:off x="6381750" y="3455289"/>
+            <a:off x="6381750" y="3587306"/>
             <a:ext cx="57150" cy="57150"/>
           </a:xfrm>
           <a:prstGeom prst="rect">
@@ -33921,7 +33921,7 @@
         </p:nvSpPr>
         <p:spPr>
           <a:xfrm>
-            <a:off x="6648450" y="3351276"/>
+            <a:off x="6648450" y="3483292"/>
             <a:ext cx="4857750" cy="95250"/>
           </a:xfrm>
           <a:prstGeom prst="rect">
@@ -33960,7 +33960,7 @@
         </p:nvSpPr>
         <p:spPr>
           <a:xfrm>
-            <a:off x="6381750" y="4250055"/>
+            <a:off x="6381750" y="4382072"/>
             <a:ext cx="57150" cy="57150"/>
           </a:xfrm>
           <a:prstGeom prst="rect">
@@ -34004,7 +34004,7 @@
         </p:nvSpPr>
         <p:spPr>
           <a:xfrm>
-            <a:off x="6648450" y="4146042"/>
+            <a:off x="6648450" y="4278058"/>
             <a:ext cx="4857750" cy="95250"/>
           </a:xfrm>
           <a:prstGeom prst="rect">
@@ -34030,7 +34030,7 @@
                 </a:solidFill>
                 <a:latin typeface="Roboto"/>
               </a:rPr>
-              <a:t>O limite de CPU não mata, ele freia o processo, o que piora as requisições mais lentas e quase não mexe na média, por isso é mais difícil de perceber.</a:t>
+              <a:t>O limite de CPU não mata, freia. Piora as requisições mais lentas e quase não mexe na média, por isso passa despercebido.</a:t>
             </a:r>
           </a:p>
         </p:txBody>

--- a/trabalhos/T1-Docker-Invite-People.pptx
+++ b/trabalhos/T1-Docker-Invite-People.pptx
@@ -12096,8 +12096,8 @@
         </p:nvSpPr>
         <p:spPr>
           <a:xfrm>
-            <a:off x="685800" y="628650"/>
-            <a:ext cx="10820400" cy="198120"/>
+            <a:off x="685800" y="685800"/>
+            <a:ext cx="9620250" cy="1524000"/>
           </a:xfrm>
           <a:prstGeom prst="rect">
             <a:avLst/>
@@ -12112,63 +12112,24 @@
           <a:p>
             <a:pPr algn="l">
               <a:lnSpc>
-                <a:spcPct val="120000"/>
-              </a:lnSpc>
-            </a:pPr>
-            <a:r>
-              <a:rPr sz="980" b="1" i="0" spc="160">
-                <a:solidFill>
-                  <a:srgbClr val="E94D1C"/>
+                <a:spcPct val="104000"/>
+              </a:lnSpc>
+            </a:pPr>
+            <a:r>
+              <a:rPr sz="3000" b="1" i="0">
+                <a:solidFill>
+                  <a:srgbClr val="21049A"/>
                 </a:solidFill>
                 <a:latin typeface="Roboto"/>
               </a:rPr>
-              <a:t>RESTRIÇÃO DE PRIVILÉGIO</a:t>
-            </a:r>
-          </a:p>
-        </p:txBody>
-      </p:sp>
-      <p:sp>
-        <p:nvSpPr>
-          <p:cNvPr id="4" name="TextBox 3"/>
-          <p:cNvSpPr txBox="1"/>
-          <p:nvPr/>
-        </p:nvSpPr>
-        <p:spPr>
-          <a:xfrm>
-            <a:off x="685800" y="838200"/>
-            <a:ext cx="9620250" cy="1524000"/>
-          </a:xfrm>
-          <a:prstGeom prst="rect">
-            <a:avLst/>
-          </a:prstGeom>
-          <a:noFill/>
-        </p:spPr>
-        <p:txBody>
-          <a:bodyPr wrap="square" lIns="0" rIns="0" tIns="0" bIns="0" anchor="t">
-            <a:spAutoFit/>
-          </a:bodyPr>
-          <a:lstStyle/>
-          <a:p>
-            <a:pPr algn="l">
-              <a:lnSpc>
-                <a:spcPct val="104000"/>
-              </a:lnSpc>
-            </a:pPr>
-            <a:r>
-              <a:rPr sz="3000" b="1" i="0">
-                <a:solidFill>
-                  <a:srgbClr val="21049A"/>
-                </a:solidFill>
-                <a:latin typeface="Roboto"/>
-              </a:rPr>
-              <a:t>Capabilities, seccomp e LSM</a:t>
-            </a:r>
-          </a:p>
-        </p:txBody>
-      </p:sp>
-      <p:sp>
-        <p:nvSpPr>
-          <p:cNvPr id="5" name="Rectangle 4"/>
+              <a:t>Como o privilégio do container é reduzido</a:t>
+            </a:r>
+          </a:p>
+        </p:txBody>
+      </p:sp>
+      <p:sp>
+        <p:nvSpPr>
+          <p:cNvPr id="4" name="Rectangle 3"/>
           <p:cNvSpPr/>
           <p:nvPr/>
         </p:nvSpPr>
@@ -12212,7 +12173,7 @@
       </p:sp>
       <p:sp>
         <p:nvSpPr>
-          <p:cNvPr id="6" name="TextBox 5"/>
+          <p:cNvPr id="5" name="TextBox 4"/>
           <p:cNvSpPr txBox="1"/>
           <p:nvPr/>
         </p:nvSpPr>
@@ -12251,7 +12212,7 @@
       </p:sp>
       <p:sp>
         <p:nvSpPr>
-          <p:cNvPr id="7" name="Rectangle 6"/>
+          <p:cNvPr id="6" name="Rectangle 5"/>
           <p:cNvSpPr/>
           <p:nvPr/>
         </p:nvSpPr>
@@ -12295,7 +12256,7 @@
       </p:sp>
       <p:sp>
         <p:nvSpPr>
-          <p:cNvPr id="8" name="TextBox 7"/>
+          <p:cNvPr id="7" name="TextBox 6"/>
           <p:cNvSpPr txBox="1"/>
           <p:nvPr/>
         </p:nvSpPr>
@@ -12334,7 +12295,7 @@
       </p:sp>
       <p:sp>
         <p:nvSpPr>
-          <p:cNvPr id="9" name="Rectangle 8"/>
+          <p:cNvPr id="8" name="Rectangle 7"/>
           <p:cNvSpPr/>
           <p:nvPr/>
         </p:nvSpPr>
@@ -12378,7 +12339,7 @@
       </p:sp>
       <p:sp>
         <p:nvSpPr>
-          <p:cNvPr id="10" name="TextBox 9"/>
+          <p:cNvPr id="9" name="TextBox 8"/>
           <p:cNvSpPr txBox="1"/>
           <p:nvPr/>
         </p:nvSpPr>
@@ -12417,7 +12378,7 @@
       </p:sp>
       <p:sp>
         <p:nvSpPr>
-          <p:cNvPr id="11" name="Isosceles Triangle 10"/>
+          <p:cNvPr id="10" name="Isosceles Triangle 9"/>
           <p:cNvSpPr/>
           <p:nvPr/>
         </p:nvSpPr>
@@ -12461,7 +12422,7 @@
       </p:sp>
       <p:sp>
         <p:nvSpPr>
-          <p:cNvPr id="12" name="Rectangle 11"/>
+          <p:cNvPr id="11" name="Rectangle 10"/>
           <p:cNvSpPr/>
           <p:nvPr/>
         </p:nvSpPr>
@@ -12505,7 +12466,7 @@
       </p:sp>
       <p:sp>
         <p:nvSpPr>
-          <p:cNvPr id="13" name="TextBox 12"/>
+          <p:cNvPr id="12" name="TextBox 11"/>
           <p:cNvSpPr txBox="1"/>
           <p:nvPr/>
         </p:nvSpPr>
@@ -12544,7 +12505,7 @@
       </p:sp>
       <p:sp>
         <p:nvSpPr>
-          <p:cNvPr id="14" name="Rectangle 13"/>
+          <p:cNvPr id="13" name="Rectangle 12"/>
           <p:cNvSpPr/>
           <p:nvPr/>
         </p:nvSpPr>
@@ -12588,7 +12549,7 @@
       </p:sp>
       <p:sp>
         <p:nvSpPr>
-          <p:cNvPr id="15" name="TextBox 14"/>
+          <p:cNvPr id="14" name="TextBox 13"/>
           <p:cNvSpPr txBox="1"/>
           <p:nvPr/>
         </p:nvSpPr>
@@ -12630,7 +12591,7 @@
       </p:sp>
       <p:sp>
         <p:nvSpPr>
-          <p:cNvPr id="16" name="TextBox 15"/>
+          <p:cNvPr id="15" name="TextBox 14"/>
           <p:cNvSpPr txBox="1"/>
           <p:nvPr/>
         </p:nvSpPr>
@@ -12669,7 +12630,7 @@
       </p:sp>
       <p:sp>
         <p:nvSpPr>
-          <p:cNvPr id="17" name="TextBox 16"/>
+          <p:cNvPr id="16" name="TextBox 15"/>
           <p:cNvSpPr txBox="1"/>
           <p:nvPr/>
         </p:nvSpPr>
@@ -12834,7 +12795,7 @@
                 </a:solidFill>
                 <a:latin typeface="Roboto"/>
               </a:rPr>
-              <a:t>PADRONIZAÇÃO, DESDE 2015</a:t>
+              <a:t/>
             </a:r>
           </a:p>
         </p:txBody>
@@ -13490,8 +13451,8 @@
         </p:nvSpPr>
         <p:spPr>
           <a:xfrm>
-            <a:off x="685800" y="628650"/>
-            <a:ext cx="10820400" cy="198120"/>
+            <a:off x="685800" y="685800"/>
+            <a:ext cx="9620250" cy="1524000"/>
           </a:xfrm>
           <a:prstGeom prst="rect">
             <a:avLst/>
@@ -13506,17 +13467,17 @@
           <a:p>
             <a:pPr algn="l">
               <a:lnSpc>
-                <a:spcPct val="120000"/>
-              </a:lnSpc>
-            </a:pPr>
-            <a:r>
-              <a:rPr sz="980" b="1" i="0" spc="160">
-                <a:solidFill>
-                  <a:srgbClr val="E94D1C"/>
+                <a:spcPct val="104000"/>
+              </a:lnSpc>
+            </a:pPr>
+            <a:r>
+              <a:rPr sz="3000" b="1" i="0">
+                <a:solidFill>
+                  <a:srgbClr val="21049A"/>
                 </a:solidFill>
                 <a:latin typeface="Roboto"/>
               </a:rPr>
-              <a:t>CAMADA LÓGICA E TIER</a:t>
+              <a:t>Camada lógica e tier</a:t>
             </a:r>
           </a:p>
         </p:txBody>
@@ -13529,8 +13490,8 @@
         </p:nvSpPr>
         <p:spPr>
           <a:xfrm>
-            <a:off x="685800" y="838200"/>
-            <a:ext cx="9620250" cy="1524000"/>
+            <a:off x="857250" y="2457450"/>
+            <a:ext cx="10001250" cy="182880"/>
           </a:xfrm>
           <a:prstGeom prst="rect">
             <a:avLst/>
@@ -13545,79 +13506,24 @@
           <a:p>
             <a:pPr algn="l">
               <a:lnSpc>
-                <a:spcPct val="104000"/>
-              </a:lnSpc>
-            </a:pPr>
-            <a:r>
-              <a:rPr sz="3000" b="1" i="0">
-                <a:solidFill>
-                  <a:srgbClr val="21049A"/>
+                <a:spcPct val="120000"/>
+              </a:lnSpc>
+            </a:pPr>
+            <a:r>
+              <a:rPr sz="900" b="1" i="0" spc="140">
+                <a:solidFill>
+                  <a:srgbClr val="6B6B78"/>
                 </a:solidFill>
                 <a:latin typeface="Roboto"/>
               </a:rPr>
-              <a:t>O sistema inteiro em um,</a:t>
-            </a:r>
-          </a:p>
-          <a:p>
-            <a:pPr>
-              <a:lnSpc>
-                <a:spcPct val="104000"/>
-              </a:lnSpc>
-            </a:pPr>
-            <a:r>
-              <a:rPr sz="3000" b="1" i="0">
-                <a:solidFill>
-                  <a:srgbClr val="21049A"/>
-                </a:solidFill>
-                <a:latin typeface="Roboto"/>
-              </a:rPr>
-              <a:t>dois ou três containers</a:t>
-            </a:r>
-          </a:p>
-        </p:txBody>
-      </p:sp>
-      <p:sp>
-        <p:nvSpPr>
-          <p:cNvPr id="5" name="TextBox 4"/>
-          <p:cNvSpPr txBox="1"/>
-          <p:nvPr/>
-        </p:nvSpPr>
-        <p:spPr>
-          <a:xfrm>
-            <a:off x="857250" y="2457450"/>
-            <a:ext cx="10001250" cy="182880"/>
-          </a:xfrm>
-          <a:prstGeom prst="rect">
-            <a:avLst/>
-          </a:prstGeom>
-          <a:noFill/>
-        </p:spPr>
-        <p:txBody>
-          <a:bodyPr wrap="square" lIns="0" rIns="0" tIns="0" bIns="0" anchor="t">
-            <a:spAutoFit/>
-          </a:bodyPr>
-          <a:lstStyle/>
-          <a:p>
-            <a:pPr algn="l">
-              <a:lnSpc>
-                <a:spcPct val="120000"/>
-              </a:lnSpc>
-            </a:pPr>
-            <a:r>
-              <a:rPr sz="900" b="1" i="0" spc="140">
-                <a:solidFill>
-                  <a:srgbClr val="6B6B78"/>
-                </a:solidFill>
-                <a:latin typeface="Roboto"/>
-              </a:rPr>
-              <a:t>AS TRÊS CAMADAS DO BACK-END FICAM NA MESMA IMAGEM NOS TRÊS DESENHOS.</a:t>
-            </a:r>
-          </a:p>
-        </p:txBody>
-      </p:sp>
-      <p:sp>
-        <p:nvSpPr>
-          <p:cNvPr id="6" name="Rounded Rectangle 5"/>
+              <a:t>TIER É CADA PROCESSO SEPARADO EM QUE O SISTEMA RODA. AS TRÊS CAMADAS DO BACK-END FICAM SEMPRE JUNTAS NUM SÓ.</a:t>
+            </a:r>
+          </a:p>
+        </p:txBody>
+      </p:sp>
+      <p:sp>
+        <p:nvSpPr>
+          <p:cNvPr id="5" name="Rounded Rectangle 4"/>
           <p:cNvSpPr/>
           <p:nvPr/>
         </p:nvSpPr>
@@ -13666,7 +13572,7 @@
       </p:sp>
       <p:sp>
         <p:nvSpPr>
-          <p:cNvPr id="7" name="Rounded Rectangle 6"/>
+          <p:cNvPr id="6" name="Rounded Rectangle 5"/>
           <p:cNvSpPr/>
           <p:nvPr/>
         </p:nvSpPr>
@@ -13714,7 +13620,7 @@
       </p:sp>
       <p:sp>
         <p:nvSpPr>
-          <p:cNvPr id="8" name="TextBox 7"/>
+          <p:cNvPr id="7" name="TextBox 6"/>
           <p:cNvSpPr txBox="1"/>
           <p:nvPr/>
         </p:nvSpPr>
@@ -13753,7 +13659,7 @@
       </p:sp>
       <p:sp>
         <p:nvSpPr>
-          <p:cNvPr id="9" name="Rounded Rectangle 8"/>
+          <p:cNvPr id="8" name="Rounded Rectangle 7"/>
           <p:cNvSpPr/>
           <p:nvPr/>
         </p:nvSpPr>
@@ -13801,7 +13707,7 @@
       </p:sp>
       <p:sp>
         <p:nvSpPr>
-          <p:cNvPr id="10" name="TextBox 9"/>
+          <p:cNvPr id="9" name="TextBox 8"/>
           <p:cNvSpPr txBox="1"/>
           <p:nvPr/>
         </p:nvSpPr>
@@ -13840,7 +13746,7 @@
       </p:sp>
       <p:sp>
         <p:nvSpPr>
-          <p:cNvPr id="11" name="TextBox 10"/>
+          <p:cNvPr id="10" name="TextBox 9"/>
           <p:cNvSpPr txBox="1"/>
           <p:nvPr/>
         </p:nvSpPr>
@@ -13879,7 +13785,7 @@
       </p:sp>
       <p:sp>
         <p:nvSpPr>
-          <p:cNvPr id="12" name="TextBox 11"/>
+          <p:cNvPr id="11" name="TextBox 10"/>
           <p:cNvSpPr txBox="1"/>
           <p:nvPr/>
         </p:nvSpPr>
@@ -13918,7 +13824,7 @@
       </p:sp>
       <p:sp>
         <p:nvSpPr>
-          <p:cNvPr id="13" name="Rounded Rectangle 12"/>
+          <p:cNvPr id="12" name="Rounded Rectangle 11"/>
           <p:cNvSpPr/>
           <p:nvPr/>
         </p:nvSpPr>
@@ -13966,7 +13872,7 @@
       </p:sp>
       <p:sp>
         <p:nvSpPr>
-          <p:cNvPr id="14" name="TextBox 13"/>
+          <p:cNvPr id="13" name="TextBox 12"/>
           <p:cNvSpPr txBox="1"/>
           <p:nvPr/>
         </p:nvSpPr>
@@ -14005,7 +13911,7 @@
       </p:sp>
       <p:sp>
         <p:nvSpPr>
-          <p:cNvPr id="15" name="TextBox 14"/>
+          <p:cNvPr id="14" name="TextBox 13"/>
           <p:cNvSpPr txBox="1"/>
           <p:nvPr/>
         </p:nvSpPr>
@@ -14044,7 +13950,7 @@
       </p:sp>
       <p:sp>
         <p:nvSpPr>
-          <p:cNvPr id="16" name="TextBox 15"/>
+          <p:cNvPr id="15" name="TextBox 14"/>
           <p:cNvSpPr txBox="1"/>
           <p:nvPr/>
         </p:nvSpPr>
@@ -14083,7 +13989,7 @@
       </p:sp>
       <p:sp>
         <p:nvSpPr>
-          <p:cNvPr id="17" name="Rounded Rectangle 16"/>
+          <p:cNvPr id="16" name="Rounded Rectangle 15"/>
           <p:cNvSpPr/>
           <p:nvPr/>
         </p:nvSpPr>
@@ -14132,7 +14038,7 @@
       </p:sp>
       <p:sp>
         <p:nvSpPr>
-          <p:cNvPr id="18" name="Rounded Rectangle 17"/>
+          <p:cNvPr id="17" name="Rounded Rectangle 16"/>
           <p:cNvSpPr/>
           <p:nvPr/>
         </p:nvSpPr>
@@ -14180,7 +14086,7 @@
       </p:sp>
       <p:sp>
         <p:nvSpPr>
-          <p:cNvPr id="19" name="TextBox 18"/>
+          <p:cNvPr id="18" name="TextBox 17"/>
           <p:cNvSpPr txBox="1"/>
           <p:nvPr/>
         </p:nvSpPr>
@@ -14219,7 +14125,7 @@
       </p:sp>
       <p:sp>
         <p:nvSpPr>
-          <p:cNvPr id="20" name="Rounded Rectangle 19"/>
+          <p:cNvPr id="19" name="Rounded Rectangle 18"/>
           <p:cNvSpPr/>
           <p:nvPr/>
         </p:nvSpPr>
@@ -14268,7 +14174,7 @@
       </p:sp>
       <p:sp>
         <p:nvSpPr>
-          <p:cNvPr id="21" name="Rounded Rectangle 20"/>
+          <p:cNvPr id="20" name="Rounded Rectangle 19"/>
           <p:cNvSpPr/>
           <p:nvPr/>
         </p:nvSpPr>
@@ -14316,7 +14222,7 @@
       </p:sp>
       <p:sp>
         <p:nvSpPr>
-          <p:cNvPr id="22" name="TextBox 21"/>
+          <p:cNvPr id="21" name="TextBox 20"/>
           <p:cNvSpPr txBox="1"/>
           <p:nvPr/>
         </p:nvSpPr>
@@ -14355,7 +14261,7 @@
       </p:sp>
       <p:sp>
         <p:nvSpPr>
-          <p:cNvPr id="23" name="TextBox 22"/>
+          <p:cNvPr id="22" name="TextBox 21"/>
           <p:cNvSpPr txBox="1"/>
           <p:nvPr/>
         </p:nvSpPr>
@@ -14394,7 +14300,7 @@
       </p:sp>
       <p:sp>
         <p:nvSpPr>
-          <p:cNvPr id="24" name="TextBox 23"/>
+          <p:cNvPr id="23" name="TextBox 22"/>
           <p:cNvSpPr txBox="1"/>
           <p:nvPr/>
         </p:nvSpPr>
@@ -14433,7 +14339,7 @@
       </p:sp>
       <p:sp>
         <p:nvSpPr>
-          <p:cNvPr id="25" name="Rounded Rectangle 24"/>
+          <p:cNvPr id="24" name="Rounded Rectangle 23"/>
           <p:cNvSpPr/>
           <p:nvPr/>
         </p:nvSpPr>
@@ -14481,7 +14387,7 @@
       </p:sp>
       <p:sp>
         <p:nvSpPr>
-          <p:cNvPr id="26" name="TextBox 25"/>
+          <p:cNvPr id="25" name="TextBox 24"/>
           <p:cNvSpPr txBox="1"/>
           <p:nvPr/>
         </p:nvSpPr>
@@ -14520,7 +14426,7 @@
       </p:sp>
       <p:sp>
         <p:nvSpPr>
-          <p:cNvPr id="27" name="TextBox 26"/>
+          <p:cNvPr id="26" name="TextBox 25"/>
           <p:cNvSpPr txBox="1"/>
           <p:nvPr/>
         </p:nvSpPr>
@@ -14559,7 +14465,7 @@
       </p:sp>
       <p:sp>
         <p:nvSpPr>
-          <p:cNvPr id="28" name="TextBox 27"/>
+          <p:cNvPr id="27" name="TextBox 26"/>
           <p:cNvSpPr txBox="1"/>
           <p:nvPr/>
         </p:nvSpPr>
@@ -14598,7 +14504,7 @@
       </p:sp>
       <p:sp>
         <p:nvSpPr>
-          <p:cNvPr id="29" name="Rounded Rectangle 28"/>
+          <p:cNvPr id="28" name="Rounded Rectangle 27"/>
           <p:cNvSpPr/>
           <p:nvPr/>
         </p:nvSpPr>
@@ -14647,7 +14553,7 @@
       </p:sp>
       <p:sp>
         <p:nvSpPr>
-          <p:cNvPr id="30" name="Rounded Rectangle 29"/>
+          <p:cNvPr id="29" name="Rounded Rectangle 28"/>
           <p:cNvSpPr/>
           <p:nvPr/>
         </p:nvSpPr>
@@ -14695,7 +14601,7 @@
       </p:sp>
       <p:sp>
         <p:nvSpPr>
-          <p:cNvPr id="31" name="TextBox 30"/>
+          <p:cNvPr id="30" name="TextBox 29"/>
           <p:cNvSpPr txBox="1"/>
           <p:nvPr/>
         </p:nvSpPr>
@@ -14734,7 +14640,7 @@
       </p:sp>
       <p:sp>
         <p:nvSpPr>
-          <p:cNvPr id="32" name="Rounded Rectangle 31"/>
+          <p:cNvPr id="31" name="Rounded Rectangle 30"/>
           <p:cNvSpPr/>
           <p:nvPr/>
         </p:nvSpPr>
@@ -14783,7 +14689,7 @@
       </p:sp>
       <p:sp>
         <p:nvSpPr>
-          <p:cNvPr id="33" name="Rounded Rectangle 32"/>
+          <p:cNvPr id="32" name="Rounded Rectangle 31"/>
           <p:cNvSpPr/>
           <p:nvPr/>
         </p:nvSpPr>
@@ -14831,7 +14737,7 @@
       </p:sp>
       <p:sp>
         <p:nvSpPr>
-          <p:cNvPr id="34" name="TextBox 33"/>
+          <p:cNvPr id="33" name="TextBox 32"/>
           <p:cNvSpPr txBox="1"/>
           <p:nvPr/>
         </p:nvSpPr>
@@ -14870,7 +14776,7 @@
       </p:sp>
       <p:sp>
         <p:nvSpPr>
-          <p:cNvPr id="35" name="TextBox 34"/>
+          <p:cNvPr id="34" name="TextBox 33"/>
           <p:cNvSpPr txBox="1"/>
           <p:nvPr/>
         </p:nvSpPr>
@@ -14909,7 +14815,7 @@
       </p:sp>
       <p:sp>
         <p:nvSpPr>
-          <p:cNvPr id="36" name="TextBox 35"/>
+          <p:cNvPr id="35" name="TextBox 34"/>
           <p:cNvSpPr txBox="1"/>
           <p:nvPr/>
         </p:nvSpPr>
@@ -14948,7 +14854,7 @@
       </p:sp>
       <p:sp>
         <p:nvSpPr>
-          <p:cNvPr id="37" name="Rounded Rectangle 36"/>
+          <p:cNvPr id="36" name="Rounded Rectangle 35"/>
           <p:cNvSpPr/>
           <p:nvPr/>
         </p:nvSpPr>
@@ -14997,7 +14903,7 @@
       </p:sp>
       <p:sp>
         <p:nvSpPr>
-          <p:cNvPr id="38" name="Rounded Rectangle 37"/>
+          <p:cNvPr id="37" name="Rounded Rectangle 36"/>
           <p:cNvSpPr/>
           <p:nvPr/>
         </p:nvSpPr>
@@ -15045,7 +14951,7 @@
       </p:sp>
       <p:sp>
         <p:nvSpPr>
-          <p:cNvPr id="39" name="TextBox 38"/>
+          <p:cNvPr id="38" name="TextBox 37"/>
           <p:cNvSpPr txBox="1"/>
           <p:nvPr/>
         </p:nvSpPr>
@@ -15084,7 +14990,7 @@
       </p:sp>
       <p:sp>
         <p:nvSpPr>
-          <p:cNvPr id="40" name="TextBox 39"/>
+          <p:cNvPr id="39" name="TextBox 38"/>
           <p:cNvSpPr txBox="1"/>
           <p:nvPr/>
         </p:nvSpPr>
@@ -15123,7 +15029,7 @@
       </p:sp>
       <p:sp>
         <p:nvSpPr>
-          <p:cNvPr id="41" name="TextBox 40"/>
+          <p:cNvPr id="40" name="TextBox 39"/>
           <p:cNvSpPr txBox="1"/>
           <p:nvPr/>
         </p:nvSpPr>
@@ -15162,7 +15068,7 @@
       </p:sp>
       <p:sp>
         <p:nvSpPr>
-          <p:cNvPr id="42" name="Rectangle 41"/>
+          <p:cNvPr id="41" name="Rectangle 40"/>
           <p:cNvSpPr/>
           <p:nvPr/>
         </p:nvSpPr>
@@ -15206,7 +15112,7 @@
       </p:sp>
       <p:sp>
         <p:nvSpPr>
-          <p:cNvPr id="43" name="TextBox 42"/>
+          <p:cNvPr id="42" name="TextBox 41"/>
           <p:cNvSpPr txBox="1"/>
           <p:nvPr/>
         </p:nvSpPr>
@@ -15263,7 +15169,7 @@
       </p:sp>
       <p:sp>
         <p:nvSpPr>
-          <p:cNvPr id="44" name="TextBox 43"/>
+          <p:cNvPr id="43" name="TextBox 42"/>
           <p:cNvSpPr txBox="1"/>
           <p:nvPr/>
         </p:nvSpPr>
@@ -15302,7 +15208,7 @@
       </p:sp>
       <p:sp>
         <p:nvSpPr>
-          <p:cNvPr id="45" name="TextBox 44"/>
+          <p:cNvPr id="44" name="TextBox 43"/>
           <p:cNvSpPr txBox="1"/>
           <p:nvPr/>
         </p:nvSpPr>
@@ -15397,8 +15303,8 @@
         </p:nvSpPr>
         <p:spPr>
           <a:xfrm>
-            <a:off x="685800" y="628650"/>
-            <a:ext cx="10820400" cy="198120"/>
+            <a:off x="685800" y="685800"/>
+            <a:ext cx="9620250" cy="1524000"/>
           </a:xfrm>
           <a:prstGeom prst="rect">
             <a:avLst/>
@@ -15413,44 +15319,21 @@
           <a:p>
             <a:pPr algn="l">
               <a:lnSpc>
-                <a:spcPct val="120000"/>
-              </a:lnSpc>
-            </a:pPr>
-            <a:r>
-              <a:rPr sz="980" b="1" i="0" spc="160">
-                <a:solidFill>
-                  <a:srgbClr val="E94D1C"/>
+                <a:spcPct val="104000"/>
+              </a:lnSpc>
+            </a:pPr>
+            <a:r>
+              <a:rPr sz="3000" b="1" i="0">
+                <a:solidFill>
+                  <a:srgbClr val="21049A"/>
                 </a:solidFill>
                 <a:latin typeface="Roboto"/>
               </a:rPr>
-              <a:t>MODELAGEM UML</a:t>
-            </a:r>
-          </a:p>
-        </p:txBody>
-      </p:sp>
-      <p:sp>
-        <p:nvSpPr>
-          <p:cNvPr id="4" name="TextBox 3"/>
-          <p:cNvSpPr txBox="1"/>
-          <p:nvPr/>
-        </p:nvSpPr>
-        <p:spPr>
-          <a:xfrm>
-            <a:off x="685800" y="838200"/>
-            <a:ext cx="9620250" cy="1524000"/>
-          </a:xfrm>
-          <a:prstGeom prst="rect">
-            <a:avLst/>
-          </a:prstGeom>
-          <a:noFill/>
-        </p:spPr>
-        <p:txBody>
-          <a:bodyPr wrap="square" lIns="0" rIns="0" tIns="0" bIns="0" anchor="t">
-            <a:spAutoFit/>
-          </a:bodyPr>
-          <a:lstStyle/>
-          <a:p>
-            <a:pPr algn="l">
+              <a:t>Container e imagem</a:t>
+            </a:r>
+          </a:p>
+          <a:p>
+            <a:pPr>
               <a:lnSpc>
                 <a:spcPct val="104000"/>
               </a:lnSpc>
@@ -15462,30 +15345,14 @@
                 </a:solidFill>
                 <a:latin typeface="Roboto"/>
               </a:rPr>
-              <a:t>No diagrama de implantação, o container</a:t>
-            </a:r>
-          </a:p>
-          <a:p>
-            <a:pPr>
-              <a:lnSpc>
-                <a:spcPct val="104000"/>
-              </a:lnSpc>
-            </a:pPr>
-            <a:r>
-              <a:rPr sz="3000" b="1" i="0">
-                <a:solidFill>
-                  <a:srgbClr val="21049A"/>
-                </a:solidFill>
-                <a:latin typeface="Roboto"/>
-              </a:rPr>
-              <a:t>é um nó e a imagem é um artefato</a:t>
-            </a:r>
-          </a:p>
-        </p:txBody>
-      </p:sp>
-      <p:sp>
-        <p:nvSpPr>
-          <p:cNvPr id="5" name="Rectangle 4"/>
+              <a:t>no diagrama de implantação</a:t>
+            </a:r>
+          </a:p>
+        </p:txBody>
+      </p:sp>
+      <p:sp>
+        <p:nvSpPr>
+          <p:cNvPr id="4" name="Rectangle 3"/>
           <p:cNvSpPr/>
           <p:nvPr/>
         </p:nvSpPr>
@@ -15529,7 +15396,7 @@
       </p:sp>
       <p:sp>
         <p:nvSpPr>
-          <p:cNvPr id="6" name="TextBox 5"/>
+          <p:cNvPr id="5" name="TextBox 4"/>
           <p:cNvSpPr txBox="1"/>
           <p:nvPr/>
         </p:nvSpPr>
@@ -15568,7 +15435,7 @@
       </p:sp>
       <p:sp>
         <p:nvSpPr>
-          <p:cNvPr id="7" name="TextBox 6"/>
+          <p:cNvPr id="6" name="TextBox 5"/>
           <p:cNvSpPr txBox="1"/>
           <p:nvPr/>
         </p:nvSpPr>
@@ -15607,7 +15474,7 @@
       </p:sp>
       <p:sp>
         <p:nvSpPr>
-          <p:cNvPr id="8" name="Rectangle 7"/>
+          <p:cNvPr id="7" name="Rectangle 6"/>
           <p:cNvSpPr/>
           <p:nvPr/>
         </p:nvSpPr>
@@ -15651,7 +15518,7 @@
       </p:sp>
       <p:sp>
         <p:nvSpPr>
-          <p:cNvPr id="9" name="TextBox 8"/>
+          <p:cNvPr id="8" name="TextBox 7"/>
           <p:cNvSpPr txBox="1"/>
           <p:nvPr/>
         </p:nvSpPr>
@@ -15690,7 +15557,7 @@
       </p:sp>
       <p:sp>
         <p:nvSpPr>
-          <p:cNvPr id="10" name="TextBox 9"/>
+          <p:cNvPr id="9" name="TextBox 8"/>
           <p:cNvSpPr txBox="1"/>
           <p:nvPr/>
         </p:nvSpPr>
@@ -15729,7 +15596,7 @@
       </p:sp>
       <p:sp>
         <p:nvSpPr>
-          <p:cNvPr id="11" name="Rounded Rectangle 10"/>
+          <p:cNvPr id="10" name="Rounded Rectangle 9"/>
           <p:cNvSpPr/>
           <p:nvPr/>
         </p:nvSpPr>
@@ -15777,7 +15644,7 @@
       </p:sp>
       <p:sp>
         <p:nvSpPr>
-          <p:cNvPr id="12" name="TextBox 11"/>
+          <p:cNvPr id="11" name="TextBox 10"/>
           <p:cNvSpPr txBox="1"/>
           <p:nvPr/>
         </p:nvSpPr>
@@ -15816,7 +15683,7 @@
       </p:sp>
       <p:sp>
         <p:nvSpPr>
-          <p:cNvPr id="13" name="TextBox 12"/>
+          <p:cNvPr id="12" name="TextBox 11"/>
           <p:cNvSpPr txBox="1"/>
           <p:nvPr/>
         </p:nvSpPr>
@@ -15855,7 +15722,7 @@
       </p:sp>
       <p:sp>
         <p:nvSpPr>
-          <p:cNvPr id="14" name="TextBox 13"/>
+          <p:cNvPr id="13" name="TextBox 12"/>
           <p:cNvSpPr txBox="1"/>
           <p:nvPr/>
         </p:nvSpPr>
@@ -15910,7 +15777,7 @@
       </p:sp>
       <p:sp>
         <p:nvSpPr>
-          <p:cNvPr id="15" name="TextBox 14"/>
+          <p:cNvPr id="14" name="TextBox 13"/>
           <p:cNvSpPr txBox="1"/>
           <p:nvPr/>
         </p:nvSpPr>
@@ -15949,7 +15816,7 @@
       </p:sp>
       <p:cxnSp>
         <p:nvCxnSpPr>
-          <p:cNvPr id="16" name="Connector 15"/>
+          <p:cNvPr id="15" name="Connector 14"/>
           <p:cNvCxnSpPr/>
           <p:nvPr/>
         </p:nvCxnSpPr>
@@ -15984,7 +15851,7 @@
       </p:cxnSp>
       <p:sp>
         <p:nvSpPr>
-          <p:cNvPr id="17" name="TextBox 16"/>
+          <p:cNvPr id="16" name="TextBox 15"/>
           <p:cNvSpPr txBox="1"/>
           <p:nvPr/>
         </p:nvSpPr>
@@ -16023,7 +15890,7 @@
       </p:sp>
       <p:sp>
         <p:nvSpPr>
-          <p:cNvPr id="18" name="TextBox 17"/>
+          <p:cNvPr id="17" name="TextBox 16"/>
           <p:cNvSpPr txBox="1"/>
           <p:nvPr/>
         </p:nvSpPr>
@@ -16062,7 +15929,7 @@
       </p:sp>
       <p:sp>
         <p:nvSpPr>
-          <p:cNvPr id="19" name="TextBox 18"/>
+          <p:cNvPr id="18" name="TextBox 17"/>
           <p:cNvSpPr txBox="1"/>
           <p:nvPr/>
         </p:nvSpPr>
@@ -16157,8 +16024,8 @@
         </p:nvSpPr>
         <p:spPr>
           <a:xfrm>
-            <a:off x="685800" y="628650"/>
-            <a:ext cx="10820400" cy="198120"/>
+            <a:off x="685800" y="685800"/>
+            <a:ext cx="9620250" cy="1524000"/>
           </a:xfrm>
           <a:prstGeom prst="rect">
             <a:avLst/>
@@ -16173,17 +16040,17 @@
           <a:p>
             <a:pPr algn="l">
               <a:lnSpc>
-                <a:spcPct val="120000"/>
-              </a:lnSpc>
-            </a:pPr>
-            <a:r>
-              <a:rPr sz="980" b="1" i="0" spc="160">
-                <a:solidFill>
-                  <a:srgbClr val="E94D1C"/>
+                <a:spcPct val="104000"/>
+              </a:lnSpc>
+            </a:pPr>
+            <a:r>
+              <a:rPr sz="3000" b="1" i="0">
+                <a:solidFill>
+                  <a:srgbClr val="21049A"/>
                 </a:solidFill>
                 <a:latin typeface="Roboto"/>
               </a:rPr>
-              <a:t>RASCUNHOS DOS DOIS DIAGRAMAS</a:t>
+              <a:t>Dos componentes para os nós</a:t>
             </a:r>
           </a:p>
         </p:txBody>
@@ -16196,8 +16063,8 @@
         </p:nvSpPr>
         <p:spPr>
           <a:xfrm>
-            <a:off x="685800" y="838200"/>
-            <a:ext cx="9620250" cy="1524000"/>
+            <a:off x="857250" y="3028950"/>
+            <a:ext cx="3810000" cy="167640"/>
           </a:xfrm>
           <a:prstGeom prst="rect">
             <a:avLst/>
@@ -16212,71 +16079,16 @@
           <a:p>
             <a:pPr algn="l">
               <a:lnSpc>
-                <a:spcPct val="104000"/>
-              </a:lnSpc>
-            </a:pPr>
-            <a:r>
-              <a:rPr sz="3000" b="1" i="0">
+                <a:spcPct val="120000"/>
+              </a:lnSpc>
+            </a:pPr>
+            <a:r>
+              <a:rPr sz="819" b="1" i="0" spc="140">
                 <a:solidFill>
                   <a:srgbClr val="21049A"/>
                 </a:solidFill>
                 <a:latin typeface="Roboto"/>
               </a:rPr>
-              <a:t>Mapeamento dos componentes</a:t>
-            </a:r>
-          </a:p>
-          <a:p>
-            <a:pPr>
-              <a:lnSpc>
-                <a:spcPct val="104000"/>
-              </a:lnSpc>
-            </a:pPr>
-            <a:r>
-              <a:rPr sz="3000" b="1" i="0">
-                <a:solidFill>
-                  <a:srgbClr val="21049A"/>
-                </a:solidFill>
-                <a:latin typeface="Roboto"/>
-              </a:rPr>
-              <a:t>para os nós do diagrama</a:t>
-            </a:r>
-          </a:p>
-        </p:txBody>
-      </p:sp>
-      <p:sp>
-        <p:nvSpPr>
-          <p:cNvPr id="5" name="TextBox 4"/>
-          <p:cNvSpPr txBox="1"/>
-          <p:nvPr/>
-        </p:nvSpPr>
-        <p:spPr>
-          <a:xfrm>
-            <a:off x="857250" y="3028950"/>
-            <a:ext cx="3810000" cy="167640"/>
-          </a:xfrm>
-          <a:prstGeom prst="rect">
-            <a:avLst/>
-          </a:prstGeom>
-          <a:noFill/>
-        </p:spPr>
-        <p:txBody>
-          <a:bodyPr wrap="square" lIns="0" rIns="0" tIns="0" bIns="0" anchor="t">
-            <a:spAutoFit/>
-          </a:bodyPr>
-          <a:lstStyle/>
-          <a:p>
-            <a:pPr algn="l">
-              <a:lnSpc>
-                <a:spcPct val="120000"/>
-              </a:lnSpc>
-            </a:pPr>
-            <a:r>
-              <a:rPr sz="819" b="1" i="0" spc="140">
-                <a:solidFill>
-                  <a:srgbClr val="21049A"/>
-                </a:solidFill>
-                <a:latin typeface="Roboto"/>
-              </a:rPr>
               <a:t>RASCUNHO DO DIAGRAMA DE COMPONENTES</a:t>
             </a:r>
           </a:p>
@@ -16284,7 +16096,7 @@
       </p:sp>
       <p:sp>
         <p:nvSpPr>
-          <p:cNvPr id="6" name="Rectangle 5"/>
+          <p:cNvPr id="5" name="Rectangle 4"/>
           <p:cNvSpPr/>
           <p:nvPr/>
         </p:nvSpPr>
@@ -16328,7 +16140,7 @@
       </p:sp>
       <p:sp>
         <p:nvSpPr>
-          <p:cNvPr id="7" name="Rounded Rectangle 6"/>
+          <p:cNvPr id="6" name="Rounded Rectangle 5"/>
           <p:cNvSpPr/>
           <p:nvPr/>
         </p:nvSpPr>
@@ -16374,7 +16186,7 @@
       </p:sp>
       <p:sp>
         <p:nvSpPr>
-          <p:cNvPr id="8" name="TextBox 7"/>
+          <p:cNvPr id="7" name="TextBox 6"/>
           <p:cNvSpPr txBox="1"/>
           <p:nvPr/>
         </p:nvSpPr>
@@ -16413,7 +16225,7 @@
       </p:sp>
       <p:sp>
         <p:nvSpPr>
-          <p:cNvPr id="9" name="Rounded Rectangle 8"/>
+          <p:cNvPr id="8" name="Rounded Rectangle 7"/>
           <p:cNvSpPr/>
           <p:nvPr/>
         </p:nvSpPr>
@@ -16459,7 +16271,7 @@
       </p:sp>
       <p:sp>
         <p:nvSpPr>
-          <p:cNvPr id="10" name="TextBox 9"/>
+          <p:cNvPr id="9" name="TextBox 8"/>
           <p:cNvSpPr txBox="1"/>
           <p:nvPr/>
         </p:nvSpPr>
@@ -16498,7 +16310,7 @@
       </p:sp>
       <p:sp>
         <p:nvSpPr>
-          <p:cNvPr id="11" name="Rounded Rectangle 10"/>
+          <p:cNvPr id="10" name="Rounded Rectangle 9"/>
           <p:cNvSpPr/>
           <p:nvPr/>
         </p:nvSpPr>
@@ -16544,7 +16356,7 @@
       </p:sp>
       <p:sp>
         <p:nvSpPr>
-          <p:cNvPr id="12" name="TextBox 11"/>
+          <p:cNvPr id="11" name="TextBox 10"/>
           <p:cNvSpPr txBox="1"/>
           <p:nvPr/>
         </p:nvSpPr>
@@ -16583,7 +16395,7 @@
       </p:sp>
       <p:sp>
         <p:nvSpPr>
-          <p:cNvPr id="13" name="Rounded Rectangle 12"/>
+          <p:cNvPr id="12" name="Rounded Rectangle 11"/>
           <p:cNvSpPr/>
           <p:nvPr/>
         </p:nvSpPr>
@@ -16629,7 +16441,7 @@
       </p:sp>
       <p:sp>
         <p:nvSpPr>
-          <p:cNvPr id="14" name="TextBox 13"/>
+          <p:cNvPr id="13" name="TextBox 12"/>
           <p:cNvSpPr txBox="1"/>
           <p:nvPr/>
         </p:nvSpPr>
@@ -16666,6 +16478,41 @@
           </a:p>
         </p:txBody>
       </p:sp>
+      <p:cxnSp>
+        <p:nvCxnSpPr>
+          <p:cNvPr id="14" name="Connector 13"/>
+          <p:cNvCxnSpPr/>
+          <p:nvPr/>
+        </p:nvCxnSpPr>
+        <p:spPr>
+          <a:xfrm>
+            <a:off x="1838325" y="3905250"/>
+            <a:ext cx="733425" cy="209550"/>
+          </a:xfrm>
+          <a:prstGeom prst="line">
+            <a:avLst/>
+          </a:prstGeom>
+          <a:ln w="25400">
+            <a:solidFill>
+              <a:srgbClr val="21049A"/>
+            </a:solidFill>
+          </a:ln>
+        </p:spPr>
+        <p:style>
+          <a:lnRef idx="2">
+            <a:schemeClr val="accent1"/>
+          </a:lnRef>
+          <a:fillRef idx="0">
+            <a:schemeClr val="accent1"/>
+          </a:fillRef>
+          <a:effectRef idx="1">
+            <a:schemeClr val="accent1"/>
+          </a:effectRef>
+          <a:fontRef idx="minor">
+            <a:schemeClr val="tx1"/>
+          </a:fontRef>
+        </p:style>
+      </p:cxnSp>
       <p:cxnSp>
         <p:nvCxnSpPr>
           <p:cNvPr id="15" name="Connector 14"/>
@@ -16673,8 +16520,8 @@
           <p:nvPr/>
         </p:nvCxnSpPr>
         <p:spPr>
-          <a:xfrm>
-            <a:off x="1838325" y="3905250"/>
+          <a:xfrm flipH="1">
+            <a:off x="2952750" y="3905250"/>
             <a:ext cx="733425" cy="209550"/>
           </a:xfrm>
           <a:prstGeom prst="line">
@@ -16708,9 +16555,9 @@
           <p:nvPr/>
         </p:nvCxnSpPr>
         <p:spPr>
-          <a:xfrm flipH="1">
-            <a:off x="2952750" y="3905250"/>
-            <a:ext cx="733425" cy="209550"/>
+          <a:xfrm>
+            <a:off x="2762250" y="4533900"/>
+            <a:ext cx="0" cy="133350"/>
           </a:xfrm>
           <a:prstGeom prst="line">
             <a:avLst/>
@@ -16744,15 +16591,15 @@
         </p:nvCxnSpPr>
         <p:spPr>
           <a:xfrm>
-            <a:off x="2762250" y="4533900"/>
-            <a:ext cx="0" cy="133350"/>
+            <a:off x="4667250" y="4133850"/>
+            <a:ext cx="1524000" cy="0"/>
           </a:xfrm>
           <a:prstGeom prst="line">
             <a:avLst/>
           </a:prstGeom>
-          <a:ln w="25400">
+          <a:ln w="38100">
             <a:solidFill>
-              <a:srgbClr val="21049A"/>
+              <a:srgbClr val="E94D1C"/>
             </a:solidFill>
           </a:ln>
         </p:spPr>
@@ -16771,44 +16618,9 @@
           </a:fontRef>
         </p:style>
       </p:cxnSp>
-      <p:cxnSp>
-        <p:nvCxnSpPr>
-          <p:cNvPr id="18" name="Connector 17"/>
-          <p:cNvCxnSpPr/>
-          <p:nvPr/>
-        </p:nvCxnSpPr>
-        <p:spPr>
-          <a:xfrm>
-            <a:off x="4667250" y="4133850"/>
-            <a:ext cx="1524000" cy="0"/>
-          </a:xfrm>
-          <a:prstGeom prst="line">
-            <a:avLst/>
-          </a:prstGeom>
-          <a:ln w="38100">
-            <a:solidFill>
-              <a:srgbClr val="E94D1C"/>
-            </a:solidFill>
-          </a:ln>
-        </p:spPr>
-        <p:style>
-          <a:lnRef idx="2">
-            <a:schemeClr val="accent1"/>
-          </a:lnRef>
-          <a:fillRef idx="0">
-            <a:schemeClr val="accent1"/>
-          </a:fillRef>
-          <a:effectRef idx="1">
-            <a:schemeClr val="accent1"/>
-          </a:effectRef>
-          <a:fontRef idx="minor">
-            <a:schemeClr val="tx1"/>
-          </a:fontRef>
-        </p:style>
-      </p:cxnSp>
-      <p:sp>
-        <p:nvSpPr>
-          <p:cNvPr id="19" name="TextBox 18"/>
+      <p:sp>
+        <p:nvSpPr>
+          <p:cNvPr id="18" name="TextBox 17"/>
           <p:cNvSpPr txBox="1"/>
           <p:nvPr/>
         </p:nvSpPr>
@@ -16847,7 +16659,7 @@
       </p:sp>
       <p:sp>
         <p:nvSpPr>
-          <p:cNvPr id="20" name="TextBox 19"/>
+          <p:cNvPr id="19" name="TextBox 18"/>
           <p:cNvSpPr txBox="1"/>
           <p:nvPr/>
         </p:nvSpPr>
@@ -16886,7 +16698,7 @@
       </p:sp>
       <p:sp>
         <p:nvSpPr>
-          <p:cNvPr id="21" name="Rectangle 20"/>
+          <p:cNvPr id="20" name="Rectangle 19"/>
           <p:cNvSpPr/>
           <p:nvPr/>
         </p:nvSpPr>
@@ -16930,7 +16742,7 @@
       </p:sp>
       <p:sp>
         <p:nvSpPr>
-          <p:cNvPr id="22" name="TextBox 21"/>
+          <p:cNvPr id="21" name="TextBox 20"/>
           <p:cNvSpPr txBox="1"/>
           <p:nvPr/>
         </p:nvSpPr>
@@ -16969,7 +16781,7 @@
       </p:sp>
       <p:sp>
         <p:nvSpPr>
-          <p:cNvPr id="23" name="Rectangle 22"/>
+          <p:cNvPr id="22" name="Rectangle 21"/>
           <p:cNvSpPr/>
           <p:nvPr/>
         </p:nvSpPr>
@@ -17013,7 +16825,7 @@
       </p:sp>
       <p:sp>
         <p:nvSpPr>
-          <p:cNvPr id="24" name="TextBox 23"/>
+          <p:cNvPr id="23" name="TextBox 22"/>
           <p:cNvSpPr txBox="1"/>
           <p:nvPr/>
         </p:nvSpPr>
@@ -17052,7 +16864,7 @@
       </p:sp>
       <p:sp>
         <p:nvSpPr>
-          <p:cNvPr id="25" name="TextBox 24"/>
+          <p:cNvPr id="24" name="TextBox 23"/>
           <p:cNvSpPr txBox="1"/>
           <p:nvPr/>
         </p:nvSpPr>
@@ -17091,7 +16903,7 @@
       </p:sp>
       <p:sp>
         <p:nvSpPr>
-          <p:cNvPr id="26" name="Rectangle 25"/>
+          <p:cNvPr id="25" name="Rectangle 24"/>
           <p:cNvSpPr/>
           <p:nvPr/>
         </p:nvSpPr>
@@ -17135,7 +16947,7 @@
       </p:sp>
       <p:sp>
         <p:nvSpPr>
-          <p:cNvPr id="27" name="TextBox 26"/>
+          <p:cNvPr id="26" name="TextBox 25"/>
           <p:cNvSpPr txBox="1"/>
           <p:nvPr/>
         </p:nvSpPr>
@@ -17174,7 +16986,7 @@
       </p:sp>
       <p:sp>
         <p:nvSpPr>
-          <p:cNvPr id="28" name="TextBox 27"/>
+          <p:cNvPr id="27" name="TextBox 26"/>
           <p:cNvSpPr txBox="1"/>
           <p:nvPr/>
         </p:nvSpPr>
@@ -17213,7 +17025,7 @@
       </p:sp>
       <p:cxnSp>
         <p:nvCxnSpPr>
-          <p:cNvPr id="29" name="Connector 28"/>
+          <p:cNvPr id="28" name="Connector 27"/>
           <p:cNvCxnSpPr/>
           <p:nvPr/>
         </p:nvCxnSpPr>
@@ -17248,7 +17060,7 @@
       </p:cxnSp>
       <p:sp>
         <p:nvSpPr>
-          <p:cNvPr id="30" name="Rectangle 29"/>
+          <p:cNvPr id="29" name="Rectangle 28"/>
           <p:cNvSpPr/>
           <p:nvPr/>
         </p:nvSpPr>
@@ -17292,7 +17104,7 @@
       </p:sp>
       <p:sp>
         <p:nvSpPr>
-          <p:cNvPr id="31" name="TextBox 30"/>
+          <p:cNvPr id="30" name="TextBox 29"/>
           <p:cNvSpPr txBox="1"/>
           <p:nvPr/>
         </p:nvSpPr>
@@ -17331,7 +17143,7 @@
       </p:sp>
       <p:sp>
         <p:nvSpPr>
-          <p:cNvPr id="32" name="TextBox 31"/>
+          <p:cNvPr id="31" name="TextBox 30"/>
           <p:cNvSpPr txBox="1"/>
           <p:nvPr/>
         </p:nvSpPr>
@@ -17370,7 +17182,7 @@
       </p:sp>
       <p:cxnSp>
         <p:nvCxnSpPr>
-          <p:cNvPr id="33" name="Connector 32"/>
+          <p:cNvPr id="32" name="Connector 31"/>
           <p:cNvCxnSpPr/>
           <p:nvPr/>
         </p:nvCxnSpPr>
@@ -17405,7 +17217,7 @@
       </p:cxnSp>
       <p:sp>
         <p:nvSpPr>
-          <p:cNvPr id="34" name="Rounded Rectangle 33"/>
+          <p:cNvPr id="33" name="Rounded Rectangle 32"/>
           <p:cNvSpPr/>
           <p:nvPr/>
         </p:nvSpPr>
@@ -17454,7 +17266,7 @@
       </p:sp>
       <p:sp>
         <p:nvSpPr>
-          <p:cNvPr id="35" name="TextBox 34"/>
+          <p:cNvPr id="34" name="TextBox 33"/>
           <p:cNvSpPr txBox="1"/>
           <p:nvPr/>
         </p:nvSpPr>
@@ -17493,7 +17305,7 @@
       </p:sp>
       <p:sp>
         <p:nvSpPr>
-          <p:cNvPr id="36" name="TextBox 35"/>
+          <p:cNvPr id="35" name="TextBox 34"/>
           <p:cNvSpPr txBox="1"/>
           <p:nvPr/>
         </p:nvSpPr>
@@ -17532,7 +17344,7 @@
       </p:sp>
       <p:sp>
         <p:nvSpPr>
-          <p:cNvPr id="37" name="TextBox 36"/>
+          <p:cNvPr id="36" name="TextBox 35"/>
           <p:cNvSpPr txBox="1"/>
           <p:nvPr/>
         </p:nvSpPr>
@@ -17571,7 +17383,7 @@
       </p:sp>
       <p:sp>
         <p:nvSpPr>
-          <p:cNvPr id="38" name="TextBox 37"/>
+          <p:cNvPr id="37" name="TextBox 36"/>
           <p:cNvSpPr txBox="1"/>
           <p:nvPr/>
         </p:nvSpPr>
@@ -17666,8 +17478,8 @@
         </p:nvSpPr>
         <p:spPr>
           <a:xfrm>
-            <a:off x="685800" y="628650"/>
-            <a:ext cx="10820400" cy="198120"/>
+            <a:off x="685800" y="685800"/>
+            <a:ext cx="9620250" cy="1524000"/>
           </a:xfrm>
           <a:prstGeom prst="rect">
             <a:avLst/>
@@ -17682,79 +17494,24 @@
           <a:p>
             <a:pPr algn="l">
               <a:lnSpc>
-                <a:spcPct val="120000"/>
-              </a:lnSpc>
-            </a:pPr>
-            <a:r>
-              <a:rPr sz="980" b="1" i="0" spc="160">
-                <a:solidFill>
-                  <a:srgbClr val="E94D1C"/>
+                <a:spcPct val="104000"/>
+              </a:lnSpc>
+            </a:pPr>
+            <a:r>
+              <a:rPr sz="3000" b="1" i="0">
+                <a:solidFill>
+                  <a:srgbClr val="21049A"/>
                 </a:solidFill>
                 <a:latin typeface="Roboto"/>
               </a:rPr>
-              <a:t>INTERFACES NO ARQUIVO DE COMPOSE</a:t>
-            </a:r>
-          </a:p>
-        </p:txBody>
-      </p:sp>
-      <p:sp>
-        <p:nvSpPr>
-          <p:cNvPr id="4" name="TextBox 3"/>
-          <p:cNvSpPr txBox="1"/>
-          <p:nvPr/>
-        </p:nvSpPr>
-        <p:spPr>
-          <a:xfrm>
-            <a:off x="685800" y="838200"/>
-            <a:ext cx="9620250" cy="1524000"/>
-          </a:xfrm>
-          <a:prstGeom prst="rect">
-            <a:avLst/>
-          </a:prstGeom>
-          <a:noFill/>
-        </p:spPr>
-        <p:txBody>
-          <a:bodyPr wrap="square" lIns="0" rIns="0" tIns="0" bIns="0" anchor="t">
-            <a:spAutoFit/>
-          </a:bodyPr>
-          <a:lstStyle/>
-          <a:p>
-            <a:pPr algn="l">
-              <a:lnSpc>
-                <a:spcPct val="104000"/>
-              </a:lnSpc>
-            </a:pPr>
-            <a:r>
-              <a:rPr sz="3000" b="1" i="0">
-                <a:solidFill>
-                  <a:srgbClr val="21049A"/>
-                </a:solidFill>
-                <a:latin typeface="Roboto"/>
-              </a:rPr>
-              <a:t>Onde ficam a interface</a:t>
-            </a:r>
-          </a:p>
-          <a:p>
-            <a:pPr>
-              <a:lnSpc>
-                <a:spcPct val="104000"/>
-              </a:lnSpc>
-            </a:pPr>
-            <a:r>
-              <a:rPr sz="3000" b="1" i="0">
-                <a:solidFill>
-                  <a:srgbClr val="21049A"/>
-                </a:solidFill>
-                <a:latin typeface="Roboto"/>
-              </a:rPr>
-              <a:t>provida e a requerida</a:t>
-            </a:r>
-          </a:p>
-        </p:txBody>
-      </p:sp>
-      <p:sp>
-        <p:nvSpPr>
-          <p:cNvPr id="5" name="Rounded Rectangle 4"/>
+              <a:t>As interfaces no arquivo de compose</a:t>
+            </a:r>
+          </a:p>
+        </p:txBody>
+      </p:sp>
+      <p:sp>
+        <p:nvSpPr>
+          <p:cNvPr id="4" name="Rounded Rectangle 3"/>
           <p:cNvSpPr/>
           <p:nvPr/>
         </p:nvSpPr>
@@ -17802,7 +17559,7 @@
       </p:sp>
       <p:sp>
         <p:nvSpPr>
-          <p:cNvPr id="6" name="TextBox 5"/>
+          <p:cNvPr id="5" name="TextBox 4"/>
           <p:cNvSpPr txBox="1"/>
           <p:nvPr/>
         </p:nvSpPr>
@@ -17841,7 +17598,7 @@
       </p:sp>
       <p:sp>
         <p:nvSpPr>
-          <p:cNvPr id="7" name="TextBox 6"/>
+          <p:cNvPr id="6" name="TextBox 5"/>
           <p:cNvSpPr txBox="1"/>
           <p:nvPr/>
         </p:nvSpPr>
@@ -17880,7 +17637,7 @@
       </p:sp>
       <p:sp>
         <p:nvSpPr>
-          <p:cNvPr id="8" name="TextBox 7"/>
+          <p:cNvPr id="7" name="TextBox 6"/>
           <p:cNvSpPr txBox="1"/>
           <p:nvPr/>
         </p:nvSpPr>
@@ -17919,7 +17676,7 @@
       </p:sp>
       <p:sp>
         <p:nvSpPr>
-          <p:cNvPr id="9" name="TextBox 8"/>
+          <p:cNvPr id="8" name="TextBox 7"/>
           <p:cNvSpPr txBox="1"/>
           <p:nvPr/>
         </p:nvSpPr>
@@ -17958,7 +17715,7 @@
       </p:sp>
       <p:sp>
         <p:nvSpPr>
-          <p:cNvPr id="10" name="TextBox 9"/>
+          <p:cNvPr id="9" name="TextBox 8"/>
           <p:cNvSpPr txBox="1"/>
           <p:nvPr/>
         </p:nvSpPr>
@@ -17997,7 +17754,7 @@
       </p:sp>
       <p:sp>
         <p:nvSpPr>
-          <p:cNvPr id="11" name="TextBox 10"/>
+          <p:cNvPr id="10" name="TextBox 9"/>
           <p:cNvSpPr txBox="1"/>
           <p:nvPr/>
         </p:nvSpPr>
@@ -18036,7 +17793,7 @@
       </p:sp>
       <p:sp>
         <p:nvSpPr>
-          <p:cNvPr id="12" name="TextBox 11"/>
+          <p:cNvPr id="11" name="TextBox 10"/>
           <p:cNvSpPr txBox="1"/>
           <p:nvPr/>
         </p:nvSpPr>
@@ -18075,7 +17832,7 @@
       </p:sp>
       <p:sp>
         <p:nvSpPr>
-          <p:cNvPr id="13" name="TextBox 12"/>
+          <p:cNvPr id="12" name="TextBox 11"/>
           <p:cNvSpPr txBox="1"/>
           <p:nvPr/>
         </p:nvSpPr>
@@ -18114,7 +17871,7 @@
       </p:sp>
       <p:sp>
         <p:nvSpPr>
-          <p:cNvPr id="14" name="TextBox 13"/>
+          <p:cNvPr id="13" name="TextBox 12"/>
           <p:cNvSpPr txBox="1"/>
           <p:nvPr/>
         </p:nvSpPr>
@@ -18153,7 +17910,7 @@
       </p:sp>
       <p:sp>
         <p:nvSpPr>
-          <p:cNvPr id="15" name="TextBox 14"/>
+          <p:cNvPr id="14" name="TextBox 13"/>
           <p:cNvSpPr txBox="1"/>
           <p:nvPr/>
         </p:nvSpPr>
@@ -18192,7 +17949,7 @@
       </p:sp>
       <p:sp>
         <p:nvSpPr>
-          <p:cNvPr id="16" name="Rectangle 15"/>
+          <p:cNvPr id="15" name="Rectangle 14"/>
           <p:cNvSpPr/>
           <p:nvPr/>
         </p:nvSpPr>
@@ -18236,7 +17993,7 @@
       </p:sp>
       <p:sp>
         <p:nvSpPr>
-          <p:cNvPr id="17" name="TextBox 16"/>
+          <p:cNvPr id="16" name="TextBox 15"/>
           <p:cNvSpPr txBox="1"/>
           <p:nvPr/>
         </p:nvSpPr>
@@ -18293,7 +18050,7 @@
       </p:sp>
       <p:sp>
         <p:nvSpPr>
-          <p:cNvPr id="18" name="Rectangle 17"/>
+          <p:cNvPr id="17" name="Rectangle 16"/>
           <p:cNvSpPr/>
           <p:nvPr/>
         </p:nvSpPr>
@@ -18337,7 +18094,7 @@
       </p:sp>
       <p:sp>
         <p:nvSpPr>
-          <p:cNvPr id="19" name="TextBox 18"/>
+          <p:cNvPr id="18" name="TextBox 17"/>
           <p:cNvSpPr txBox="1"/>
           <p:nvPr/>
         </p:nvSpPr>
@@ -18394,7 +18151,7 @@
       </p:sp>
       <p:sp>
         <p:nvSpPr>
-          <p:cNvPr id="20" name="Rectangle 19"/>
+          <p:cNvPr id="19" name="Rectangle 18"/>
           <p:cNvSpPr/>
           <p:nvPr/>
         </p:nvSpPr>
@@ -18438,7 +18195,7 @@
       </p:sp>
       <p:sp>
         <p:nvSpPr>
-          <p:cNvPr id="21" name="TextBox 20"/>
+          <p:cNvPr id="20" name="TextBox 19"/>
           <p:cNvSpPr txBox="1"/>
           <p:nvPr/>
         </p:nvSpPr>
@@ -18477,7 +18234,7 @@
       </p:sp>
       <p:sp>
         <p:nvSpPr>
-          <p:cNvPr id="22" name="Rectangle 21"/>
+          <p:cNvPr id="21" name="Rectangle 20"/>
           <p:cNvSpPr/>
           <p:nvPr/>
         </p:nvSpPr>
@@ -18521,7 +18278,7 @@
       </p:sp>
       <p:sp>
         <p:nvSpPr>
-          <p:cNvPr id="23" name="TextBox 22"/>
+          <p:cNvPr id="22" name="TextBox 21"/>
           <p:cNvSpPr txBox="1"/>
           <p:nvPr/>
         </p:nvSpPr>
@@ -18560,7 +18317,7 @@
       </p:sp>
       <p:sp>
         <p:nvSpPr>
-          <p:cNvPr id="24" name="TextBox 23"/>
+          <p:cNvPr id="23" name="TextBox 22"/>
           <p:cNvSpPr txBox="1"/>
           <p:nvPr/>
         </p:nvSpPr>
@@ -18599,7 +18356,7 @@
       </p:sp>
       <p:sp>
         <p:nvSpPr>
-          <p:cNvPr id="25" name="TextBox 24"/>
+          <p:cNvPr id="24" name="TextBox 23"/>
           <p:cNvSpPr txBox="1"/>
           <p:nvPr/>
         </p:nvSpPr>
@@ -18694,8 +18451,8 @@
         </p:nvSpPr>
         <p:spPr>
           <a:xfrm>
-            <a:off x="685800" y="628650"/>
-            <a:ext cx="10820400" cy="198120"/>
+            <a:off x="685800" y="685800"/>
+            <a:ext cx="9620250" cy="1524000"/>
           </a:xfrm>
           <a:prstGeom prst="rect">
             <a:avLst/>
@@ -18710,17 +18467,17 @@
           <a:p>
             <a:pPr algn="l">
               <a:lnSpc>
-                <a:spcPct val="120000"/>
-              </a:lnSpc>
-            </a:pPr>
-            <a:r>
-              <a:rPr sz="980" b="1" i="0" spc="160">
-                <a:solidFill>
-                  <a:srgbClr val="E94D1C"/>
+                <a:spcPct val="104000"/>
+              </a:lnSpc>
+            </a:pPr>
+            <a:r>
+              <a:rPr sz="3000" b="1" i="0">
+                <a:solidFill>
+                  <a:srgbClr val="21049A"/>
                 </a:solidFill>
                 <a:latin typeface="Roboto"/>
               </a:rPr>
-              <a:t>COESÃO E ACOPLAMENTO</a:t>
+              <a:t>Coesão e acoplamento</a:t>
             </a:r>
           </a:p>
         </p:txBody>
@@ -18733,8 +18490,8 @@
         </p:nvSpPr>
         <p:spPr>
           <a:xfrm>
-            <a:off x="685800" y="838200"/>
-            <a:ext cx="9620250" cy="1524000"/>
+            <a:off x="685800" y="2061210"/>
+            <a:ext cx="5143500" cy="182880"/>
           </a:xfrm>
           <a:prstGeom prst="rect">
             <a:avLst/>
@@ -18749,71 +18506,16 @@
           <a:p>
             <a:pPr algn="l">
               <a:lnSpc>
-                <a:spcPct val="104000"/>
-              </a:lnSpc>
-            </a:pPr>
-            <a:r>
-              <a:rPr sz="3000" b="1" i="0">
+                <a:spcPct val="120000"/>
+              </a:lnSpc>
+            </a:pPr>
+            <a:r>
+              <a:rPr sz="900" b="1" i="0" spc="120">
                 <a:solidFill>
                   <a:srgbClr val="21049A"/>
                 </a:solidFill>
                 <a:latin typeface="Roboto"/>
               </a:rPr>
-              <a:t>A fronteira aumenta a coesão</a:t>
-            </a:r>
-          </a:p>
-          <a:p>
-            <a:pPr>
-              <a:lnSpc>
-                <a:spcPct val="104000"/>
-              </a:lnSpc>
-            </a:pPr>
-            <a:r>
-              <a:rPr sz="3000" b="1" i="0">
-                <a:solidFill>
-                  <a:srgbClr val="21049A"/>
-                </a:solidFill>
-                <a:latin typeface="Roboto"/>
-              </a:rPr>
-              <a:t>e muda a forma do acoplamento</a:t>
-            </a:r>
-          </a:p>
-        </p:txBody>
-      </p:sp>
-      <p:sp>
-        <p:nvSpPr>
-          <p:cNvPr id="5" name="TextBox 4"/>
-          <p:cNvSpPr txBox="1"/>
-          <p:nvPr/>
-        </p:nvSpPr>
-        <p:spPr>
-          <a:xfrm>
-            <a:off x="685800" y="2061210"/>
-            <a:ext cx="5143500" cy="182880"/>
-          </a:xfrm>
-          <a:prstGeom prst="rect">
-            <a:avLst/>
-          </a:prstGeom>
-          <a:noFill/>
-        </p:spPr>
-        <p:txBody>
-          <a:bodyPr wrap="square" lIns="0" rIns="0" tIns="0" bIns="0" anchor="t">
-            <a:spAutoFit/>
-          </a:bodyPr>
-          <a:lstStyle/>
-          <a:p>
-            <a:pPr algn="l">
-              <a:lnSpc>
-                <a:spcPct val="120000"/>
-              </a:lnSpc>
-            </a:pPr>
-            <a:r>
-              <a:rPr sz="900" b="1" i="0" spc="120">
-                <a:solidFill>
-                  <a:srgbClr val="21049A"/>
-                </a:solidFill>
-                <a:latin typeface="Roboto"/>
-              </a:rPr>
               <a:t>COESÃO</a:t>
             </a:r>
           </a:p>
@@ -18821,7 +18523,7 @@
       </p:sp>
       <p:sp>
         <p:nvSpPr>
-          <p:cNvPr id="6" name="Rectangle 5"/>
+          <p:cNvPr id="5" name="Rectangle 4"/>
           <p:cNvSpPr/>
           <p:nvPr/>
         </p:nvSpPr>
@@ -18865,7 +18567,7 @@
       </p:sp>
       <p:sp>
         <p:nvSpPr>
-          <p:cNvPr id="7" name="Rectangle 6"/>
+          <p:cNvPr id="6" name="Rectangle 5"/>
           <p:cNvSpPr/>
           <p:nvPr/>
         </p:nvSpPr>
@@ -18909,7 +18611,7 @@
       </p:sp>
       <p:sp>
         <p:nvSpPr>
-          <p:cNvPr id="8" name="TextBox 7"/>
+          <p:cNvPr id="7" name="TextBox 6"/>
           <p:cNvSpPr txBox="1"/>
           <p:nvPr/>
         </p:nvSpPr>
@@ -18948,7 +18650,7 @@
       </p:sp>
       <p:sp>
         <p:nvSpPr>
-          <p:cNvPr id="9" name="Rectangle 8"/>
+          <p:cNvPr id="8" name="Rectangle 7"/>
           <p:cNvSpPr/>
           <p:nvPr/>
         </p:nvSpPr>
@@ -18992,7 +18694,7 @@
       </p:sp>
       <p:sp>
         <p:nvSpPr>
-          <p:cNvPr id="10" name="TextBox 9"/>
+          <p:cNvPr id="9" name="TextBox 8"/>
           <p:cNvSpPr txBox="1"/>
           <p:nvPr/>
         </p:nvSpPr>
@@ -19031,7 +18733,7 @@
       </p:sp>
       <p:sp>
         <p:nvSpPr>
-          <p:cNvPr id="11" name="Rectangle 10"/>
+          <p:cNvPr id="10" name="Rectangle 9"/>
           <p:cNvSpPr/>
           <p:nvPr/>
         </p:nvSpPr>
@@ -19075,7 +18777,7 @@
       </p:sp>
       <p:sp>
         <p:nvSpPr>
-          <p:cNvPr id="12" name="TextBox 11"/>
+          <p:cNvPr id="11" name="TextBox 10"/>
           <p:cNvSpPr txBox="1"/>
           <p:nvPr/>
         </p:nvSpPr>
@@ -19114,7 +18816,7 @@
       </p:sp>
       <p:sp>
         <p:nvSpPr>
-          <p:cNvPr id="13" name="Rectangle 12"/>
+          <p:cNvPr id="12" name="Rectangle 11"/>
           <p:cNvSpPr/>
           <p:nvPr/>
         </p:nvSpPr>
@@ -19158,7 +18860,7 @@
       </p:sp>
       <p:sp>
         <p:nvSpPr>
-          <p:cNvPr id="14" name="TextBox 13"/>
+          <p:cNvPr id="13" name="TextBox 12"/>
           <p:cNvSpPr txBox="1"/>
           <p:nvPr/>
         </p:nvSpPr>
@@ -19197,7 +18899,7 @@
       </p:sp>
       <p:sp>
         <p:nvSpPr>
-          <p:cNvPr id="15" name="TextBox 14"/>
+          <p:cNvPr id="14" name="TextBox 13"/>
           <p:cNvSpPr txBox="1"/>
           <p:nvPr/>
         </p:nvSpPr>
@@ -19236,7 +18938,7 @@
       </p:sp>
       <p:sp>
         <p:nvSpPr>
-          <p:cNvPr id="16" name="Rectangle 15"/>
+          <p:cNvPr id="15" name="Rectangle 14"/>
           <p:cNvSpPr/>
           <p:nvPr/>
         </p:nvSpPr>
@@ -19280,7 +18982,7 @@
       </p:sp>
       <p:sp>
         <p:nvSpPr>
-          <p:cNvPr id="17" name="Rectangle 16"/>
+          <p:cNvPr id="16" name="Rectangle 15"/>
           <p:cNvSpPr/>
           <p:nvPr/>
         </p:nvSpPr>
@@ -19324,7 +19026,7 @@
       </p:sp>
       <p:sp>
         <p:nvSpPr>
-          <p:cNvPr id="18" name="TextBox 17"/>
+          <p:cNvPr id="17" name="TextBox 16"/>
           <p:cNvSpPr txBox="1"/>
           <p:nvPr/>
         </p:nvSpPr>
@@ -19363,7 +19065,7 @@
       </p:sp>
       <p:sp>
         <p:nvSpPr>
-          <p:cNvPr id="19" name="Rectangle 18"/>
+          <p:cNvPr id="18" name="Rectangle 17"/>
           <p:cNvSpPr/>
           <p:nvPr/>
         </p:nvSpPr>
@@ -19407,7 +19109,7 @@
       </p:sp>
       <p:sp>
         <p:nvSpPr>
-          <p:cNvPr id="20" name="TextBox 19"/>
+          <p:cNvPr id="19" name="TextBox 18"/>
           <p:cNvSpPr txBox="1"/>
           <p:nvPr/>
         </p:nvSpPr>
@@ -19446,7 +19148,7 @@
       </p:sp>
       <p:sp>
         <p:nvSpPr>
-          <p:cNvPr id="21" name="TextBox 20"/>
+          <p:cNvPr id="20" name="TextBox 19"/>
           <p:cNvSpPr txBox="1"/>
           <p:nvPr/>
         </p:nvSpPr>
@@ -19485,7 +19187,7 @@
       </p:sp>
       <p:sp>
         <p:nvSpPr>
-          <p:cNvPr id="22" name="TextBox 21"/>
+          <p:cNvPr id="21" name="TextBox 20"/>
           <p:cNvSpPr txBox="1"/>
           <p:nvPr/>
         </p:nvSpPr>
@@ -19580,8 +19282,8 @@
         </p:nvSpPr>
         <p:spPr>
           <a:xfrm>
-            <a:off x="685800" y="628650"/>
-            <a:ext cx="10820400" cy="198120"/>
+            <a:off x="685800" y="685800"/>
+            <a:ext cx="9620250" cy="1524000"/>
           </a:xfrm>
           <a:prstGeom prst="rect">
             <a:avLst/>
@@ -19596,44 +19298,21 @@
           <a:p>
             <a:pPr algn="l">
               <a:lnSpc>
-                <a:spcPct val="120000"/>
-              </a:lnSpc>
-            </a:pPr>
-            <a:r>
-              <a:rPr sz="980" b="1" i="0" spc="160">
-                <a:solidFill>
-                  <a:srgbClr val="E94D1C"/>
+                <a:spcPct val="104000"/>
+              </a:lnSpc>
+            </a:pPr>
+            <a:r>
+              <a:rPr sz="3000" b="1" i="0">
+                <a:solidFill>
+                  <a:srgbClr val="21049A"/>
                 </a:solidFill>
                 <a:latin typeface="Roboto"/>
               </a:rPr>
-              <a:t>CONSEQUÊNCIA PARA O PROJETO</a:t>
-            </a:r>
-          </a:p>
-        </p:txBody>
-      </p:sp>
-      <p:sp>
-        <p:nvSpPr>
-          <p:cNvPr id="4" name="TextBox 3"/>
-          <p:cNvSpPr txBox="1"/>
-          <p:nvPr/>
-        </p:nvSpPr>
-        <p:spPr>
-          <a:xfrm>
-            <a:off x="685800" y="838200"/>
-            <a:ext cx="9620250" cy="1524000"/>
-          </a:xfrm>
-          <a:prstGeom prst="rect">
-            <a:avLst/>
-          </a:prstGeom>
-          <a:noFill/>
-        </p:spPr>
-        <p:txBody>
-          <a:bodyPr wrap="square" lIns="0" rIns="0" tIns="0" bIns="0" anchor="t">
-            <a:spAutoFit/>
-          </a:bodyPr>
-          <a:lstStyle/>
-          <a:p>
-            <a:pPr algn="l">
+              <a:t>O convite público e o painel</a:t>
+            </a:r>
+          </a:p>
+          <a:p>
+            <a:pPr>
               <a:lnSpc>
                 <a:spcPct val="104000"/>
               </a:lnSpc>
@@ -19645,22 +19324,6 @@
                 </a:solidFill>
                 <a:latin typeface="Roboto"/>
               </a:rPr>
-              <a:t>O convite público e o painel</a:t>
-            </a:r>
-          </a:p>
-          <a:p>
-            <a:pPr>
-              <a:lnSpc>
-                <a:spcPct val="104000"/>
-              </a:lnSpc>
-            </a:pPr>
-            <a:r>
-              <a:rPr sz="3000" b="1" i="0">
-                <a:solidFill>
-                  <a:srgbClr val="21049A"/>
-                </a:solidFill>
-                <a:latin typeface="Roboto"/>
-              </a:rPr>
               <a:t>têm cargas diferentes</a:t>
             </a:r>
           </a:p>
@@ -19668,7 +19331,7 @@
       </p:sp>
       <p:sp>
         <p:nvSpPr>
-          <p:cNvPr id="5" name="Rectangle 4"/>
+          <p:cNvPr id="4" name="Rectangle 3"/>
           <p:cNvSpPr/>
           <p:nvPr/>
         </p:nvSpPr>
@@ -19712,7 +19375,7 @@
       </p:sp>
       <p:sp>
         <p:nvSpPr>
-          <p:cNvPr id="6" name="TextBox 5"/>
+          <p:cNvPr id="5" name="TextBox 4"/>
           <p:cNvSpPr txBox="1"/>
           <p:nvPr/>
         </p:nvSpPr>
@@ -19751,7 +19414,7 @@
       </p:sp>
       <p:sp>
         <p:nvSpPr>
-          <p:cNvPr id="7" name="Rectangle 6"/>
+          <p:cNvPr id="6" name="Rectangle 5"/>
           <p:cNvSpPr/>
           <p:nvPr/>
         </p:nvSpPr>
@@ -19795,7 +19458,7 @@
       </p:sp>
       <p:sp>
         <p:nvSpPr>
-          <p:cNvPr id="8" name="TextBox 7"/>
+          <p:cNvPr id="7" name="TextBox 6"/>
           <p:cNvSpPr txBox="1"/>
           <p:nvPr/>
         </p:nvSpPr>
@@ -19834,7 +19497,7 @@
       </p:sp>
       <p:sp>
         <p:nvSpPr>
-          <p:cNvPr id="9" name="Rectangle 8"/>
+          <p:cNvPr id="8" name="Rectangle 7"/>
           <p:cNvSpPr/>
           <p:nvPr/>
         </p:nvSpPr>
@@ -19878,7 +19541,7 @@
       </p:sp>
       <p:sp>
         <p:nvSpPr>
-          <p:cNvPr id="10" name="TextBox 9"/>
+          <p:cNvPr id="9" name="TextBox 8"/>
           <p:cNvSpPr txBox="1"/>
           <p:nvPr/>
         </p:nvSpPr>
@@ -19917,7 +19580,7 @@
       </p:sp>
       <p:sp>
         <p:nvSpPr>
-          <p:cNvPr id="11" name="Donut 10"/>
+          <p:cNvPr id="10" name="Donut 9"/>
           <p:cNvSpPr/>
           <p:nvPr/>
         </p:nvSpPr>
@@ -19961,7 +19624,7 @@
       </p:sp>
       <p:sp>
         <p:nvSpPr>
-          <p:cNvPr id="12" name="TextBox 11"/>
+          <p:cNvPr id="11" name="TextBox 10"/>
           <p:cNvSpPr txBox="1"/>
           <p:nvPr/>
         </p:nvSpPr>
@@ -20000,7 +19663,7 @@
       </p:sp>
       <p:sp>
         <p:nvSpPr>
-          <p:cNvPr id="13" name="Rectangle 12"/>
+          <p:cNvPr id="12" name="Rectangle 11"/>
           <p:cNvSpPr/>
           <p:nvPr/>
         </p:nvSpPr>
@@ -20044,7 +19707,7 @@
       </p:sp>
       <p:sp>
         <p:nvSpPr>
-          <p:cNvPr id="14" name="TextBox 13"/>
+          <p:cNvPr id="13" name="TextBox 12"/>
           <p:cNvSpPr txBox="1"/>
           <p:nvPr/>
         </p:nvSpPr>
@@ -20124,7 +19787,7 @@
       </p:sp>
       <p:sp>
         <p:nvSpPr>
-          <p:cNvPr id="15" name="TextBox 14"/>
+          <p:cNvPr id="14" name="TextBox 13"/>
           <p:cNvSpPr txBox="1"/>
           <p:nvPr/>
         </p:nvSpPr>
@@ -20163,7 +19826,7 @@
       </p:sp>
       <p:sp>
         <p:nvSpPr>
-          <p:cNvPr id="16" name="TextBox 15"/>
+          <p:cNvPr id="15" name="TextBox 14"/>
           <p:cNvSpPr txBox="1"/>
           <p:nvPr/>
         </p:nvSpPr>
@@ -20679,8 +20342,8 @@
         </p:nvSpPr>
         <p:spPr>
           <a:xfrm>
-            <a:off x="685800" y="628650"/>
-            <a:ext cx="10820400" cy="198120"/>
+            <a:off x="685800" y="685800"/>
+            <a:ext cx="9620250" cy="1524000"/>
           </a:xfrm>
           <a:prstGeom prst="rect">
             <a:avLst/>
@@ -20695,63 +20358,24 @@
           <a:p>
             <a:pPr algn="l">
               <a:lnSpc>
-                <a:spcPct val="120000"/>
-              </a:lnSpc>
-            </a:pPr>
-            <a:r>
-              <a:rPr sz="980" b="1" i="0" spc="160">
-                <a:solidFill>
-                  <a:srgbClr val="E94D1C"/>
+                <a:spcPct val="104000"/>
+              </a:lnSpc>
+            </a:pPr>
+            <a:r>
+              <a:rPr sz="3000" b="1" i="0">
+                <a:solidFill>
+                  <a:srgbClr val="21049A"/>
                 </a:solidFill>
                 <a:latin typeface="Roboto"/>
               </a:rPr>
-              <a:t>O PROJETO</a:t>
-            </a:r>
-          </a:p>
-        </p:txBody>
-      </p:sp>
-      <p:sp>
-        <p:nvSpPr>
-          <p:cNvPr id="4" name="TextBox 3"/>
-          <p:cNvSpPr txBox="1"/>
-          <p:nvPr/>
-        </p:nvSpPr>
-        <p:spPr>
-          <a:xfrm>
-            <a:off x="685800" y="838200"/>
-            <a:ext cx="9620250" cy="1524000"/>
-          </a:xfrm>
-          <a:prstGeom prst="rect">
-            <a:avLst/>
-          </a:prstGeom>
-          <a:noFill/>
-        </p:spPr>
-        <p:txBody>
-          <a:bodyPr wrap="square" lIns="0" rIns="0" tIns="0" bIns="0" anchor="t">
-            <a:spAutoFit/>
-          </a:bodyPr>
-          <a:lstStyle/>
-          <a:p>
-            <a:pPr algn="l">
-              <a:lnSpc>
-                <a:spcPct val="104000"/>
-              </a:lnSpc>
-            </a:pPr>
-            <a:r>
-              <a:rPr sz="3000" b="1" i="0">
-                <a:solidFill>
-                  <a:srgbClr val="21049A"/>
-                </a:solidFill>
-                <a:latin typeface="Roboto"/>
-              </a:rPr>
-              <a:t>Invite People</a:t>
-            </a:r>
-          </a:p>
-        </p:txBody>
-      </p:sp>
-      <p:sp>
-        <p:nvSpPr>
-          <p:cNvPr id="5" name="Rectangle 4"/>
+              <a:t>O projeto Invite People</a:t>
+            </a:r>
+          </a:p>
+        </p:txBody>
+      </p:sp>
+      <p:sp>
+        <p:nvSpPr>
+          <p:cNvPr id="4" name="Rectangle 3"/>
           <p:cNvSpPr/>
           <p:nvPr/>
         </p:nvSpPr>
@@ -20795,7 +20419,7 @@
       </p:sp>
       <p:sp>
         <p:nvSpPr>
-          <p:cNvPr id="6" name="TextBox 5"/>
+          <p:cNvPr id="5" name="TextBox 4"/>
           <p:cNvSpPr txBox="1"/>
           <p:nvPr/>
         </p:nvSpPr>
@@ -20834,7 +20458,7 @@
       </p:sp>
       <p:sp>
         <p:nvSpPr>
-          <p:cNvPr id="7" name="Rectangle 6"/>
+          <p:cNvPr id="6" name="Rectangle 5"/>
           <p:cNvSpPr/>
           <p:nvPr/>
         </p:nvSpPr>
@@ -20878,7 +20502,7 @@
       </p:sp>
       <p:sp>
         <p:nvSpPr>
-          <p:cNvPr id="8" name="TextBox 7"/>
+          <p:cNvPr id="7" name="TextBox 6"/>
           <p:cNvSpPr txBox="1"/>
           <p:nvPr/>
         </p:nvSpPr>
@@ -20917,7 +20541,7 @@
       </p:sp>
       <p:sp>
         <p:nvSpPr>
-          <p:cNvPr id="9" name="Rectangle 8"/>
+          <p:cNvPr id="8" name="Rectangle 7"/>
           <p:cNvSpPr/>
           <p:nvPr/>
         </p:nvSpPr>
@@ -20961,7 +20585,7 @@
       </p:sp>
       <p:sp>
         <p:nvSpPr>
-          <p:cNvPr id="10" name="TextBox 9"/>
+          <p:cNvPr id="9" name="TextBox 8"/>
           <p:cNvSpPr txBox="1"/>
           <p:nvPr/>
         </p:nvSpPr>
@@ -21000,7 +20624,7 @@
       </p:sp>
       <p:sp>
         <p:nvSpPr>
-          <p:cNvPr id="11" name="Rectangle 10"/>
+          <p:cNvPr id="10" name="Rectangle 9"/>
           <p:cNvSpPr/>
           <p:nvPr/>
         </p:nvSpPr>
@@ -21044,7 +20668,7 @@
       </p:sp>
       <p:sp>
         <p:nvSpPr>
-          <p:cNvPr id="12" name="TextBox 11"/>
+          <p:cNvPr id="11" name="TextBox 10"/>
           <p:cNvSpPr txBox="1"/>
           <p:nvPr/>
         </p:nvSpPr>
@@ -21083,7 +20707,7 @@
       </p:sp>
       <p:sp>
         <p:nvSpPr>
-          <p:cNvPr id="13" name="Donut 12"/>
+          <p:cNvPr id="12" name="Donut 11"/>
           <p:cNvSpPr/>
           <p:nvPr/>
         </p:nvSpPr>
@@ -21127,7 +20751,7 @@
       </p:sp>
       <p:sp>
         <p:nvSpPr>
-          <p:cNvPr id="14" name="TextBox 13"/>
+          <p:cNvPr id="13" name="TextBox 12"/>
           <p:cNvSpPr txBox="1"/>
           <p:nvPr/>
         </p:nvSpPr>
@@ -21166,7 +20790,7 @@
       </p:sp>
       <p:sp>
         <p:nvSpPr>
-          <p:cNvPr id="15" name="Rectangle 14"/>
+          <p:cNvPr id="14" name="Rectangle 13"/>
           <p:cNvSpPr/>
           <p:nvPr/>
         </p:nvSpPr>
@@ -21210,7 +20834,7 @@
       </p:sp>
       <p:sp>
         <p:nvSpPr>
-          <p:cNvPr id="16" name="TextBox 15"/>
+          <p:cNvPr id="15" name="TextBox 14"/>
           <p:cNvSpPr txBox="1"/>
           <p:nvPr/>
         </p:nvSpPr>
@@ -21290,7 +20914,7 @@
       </p:sp>
       <p:sp>
         <p:nvSpPr>
-          <p:cNvPr id="17" name="TextBox 16"/>
+          <p:cNvPr id="16" name="TextBox 15"/>
           <p:cNvSpPr txBox="1"/>
           <p:nvPr/>
         </p:nvSpPr>
@@ -21329,7 +20953,7 @@
       </p:sp>
       <p:sp>
         <p:nvSpPr>
-          <p:cNvPr id="18" name="TextBox 17"/>
+          <p:cNvPr id="17" name="TextBox 16"/>
           <p:cNvSpPr txBox="1"/>
           <p:nvPr/>
         </p:nvSpPr>
@@ -21424,8 +21048,8 @@
         </p:nvSpPr>
         <p:spPr>
           <a:xfrm>
-            <a:off x="685800" y="628650"/>
-            <a:ext cx="10820400" cy="198120"/>
+            <a:off x="685800" y="685800"/>
+            <a:ext cx="9620250" cy="1524000"/>
           </a:xfrm>
           <a:prstGeom prst="rect">
             <a:avLst/>
@@ -21440,79 +21064,24 @@
           <a:p>
             <a:pPr algn="l">
               <a:lnSpc>
-                <a:spcPct val="120000"/>
-              </a:lnSpc>
-            </a:pPr>
-            <a:r>
-              <a:rPr sz="980" b="1" i="0" spc="160">
-                <a:solidFill>
-                  <a:srgbClr val="E94D1C"/>
+                <a:spcPct val="104000"/>
+              </a:lnSpc>
+            </a:pPr>
+            <a:r>
+              <a:rPr sz="3000" b="1" i="0">
+                <a:solidFill>
+                  <a:srgbClr val="21049A"/>
                 </a:solidFill>
                 <a:latin typeface="Roboto"/>
               </a:rPr>
-              <a:t>DEMONSTRAÇÃO</a:t>
-            </a:r>
-          </a:p>
-        </p:txBody>
-      </p:sp>
-      <p:sp>
-        <p:nvSpPr>
-          <p:cNvPr id="4" name="TextBox 3"/>
-          <p:cNvSpPr txBox="1"/>
-          <p:nvPr/>
-        </p:nvSpPr>
-        <p:spPr>
-          <a:xfrm>
-            <a:off x="685800" y="838200"/>
-            <a:ext cx="9620250" cy="1524000"/>
-          </a:xfrm>
-          <a:prstGeom prst="rect">
-            <a:avLst/>
-          </a:prstGeom>
-          <a:noFill/>
-        </p:spPr>
-        <p:txBody>
-          <a:bodyPr wrap="square" lIns="0" rIns="0" tIns="0" bIns="0" anchor="t">
-            <a:spAutoFit/>
-          </a:bodyPr>
-          <a:lstStyle/>
-          <a:p>
-            <a:pPr algn="l">
-              <a:lnSpc>
-                <a:spcPct val="104000"/>
-              </a:lnSpc>
-            </a:pPr>
-            <a:r>
-              <a:rPr sz="3000" b="1" i="0">
-                <a:solidFill>
-                  <a:srgbClr val="21049A"/>
-                </a:solidFill>
-                <a:latin typeface="Roboto"/>
-              </a:rPr>
               <a:t>O que acontece com o dado</a:t>
             </a:r>
           </a:p>
-          <a:p>
-            <a:pPr>
-              <a:lnSpc>
-                <a:spcPct val="104000"/>
-              </a:lnSpc>
-            </a:pPr>
-            <a:r>
-              <a:rPr sz="3000" b="1" i="0">
-                <a:solidFill>
-                  <a:srgbClr val="21049A"/>
-                </a:solidFill>
-                <a:latin typeface="Roboto"/>
-              </a:rPr>
-              <a:t>quando o container é derrubado</a:t>
-            </a:r>
-          </a:p>
-        </p:txBody>
-      </p:sp>
-      <p:sp>
-        <p:nvSpPr>
-          <p:cNvPr id="5" name="Rounded Rectangle 4"/>
+        </p:txBody>
+      </p:sp>
+      <p:sp>
+        <p:nvSpPr>
+          <p:cNvPr id="4" name="Rounded Rectangle 3"/>
           <p:cNvSpPr/>
           <p:nvPr/>
         </p:nvSpPr>
@@ -21558,7 +21127,7 @@
       </p:sp>
       <p:sp>
         <p:nvSpPr>
-          <p:cNvPr id="6" name="Rounded Rectangle 5"/>
+          <p:cNvPr id="5" name="Rounded Rectangle 4"/>
           <p:cNvSpPr/>
           <p:nvPr/>
         </p:nvSpPr>
@@ -21604,7 +21173,7 @@
       </p:sp>
       <p:sp>
         <p:nvSpPr>
-          <p:cNvPr id="7" name="TextBox 6"/>
+          <p:cNvPr id="6" name="TextBox 5"/>
           <p:cNvSpPr txBox="1"/>
           <p:nvPr/>
         </p:nvSpPr>
@@ -21643,7 +21212,7 @@
       </p:sp>
       <p:sp>
         <p:nvSpPr>
-          <p:cNvPr id="8" name="TextBox 7"/>
+          <p:cNvPr id="7" name="TextBox 6"/>
           <p:cNvSpPr txBox="1"/>
           <p:nvPr/>
         </p:nvSpPr>
@@ -21682,7 +21251,7 @@
       </p:sp>
       <p:sp>
         <p:nvSpPr>
-          <p:cNvPr id="9" name="TextBox 8"/>
+          <p:cNvPr id="8" name="TextBox 7"/>
           <p:cNvSpPr txBox="1"/>
           <p:nvPr/>
         </p:nvSpPr>
@@ -21721,7 +21290,7 @@
       </p:sp>
       <p:sp>
         <p:nvSpPr>
-          <p:cNvPr id="10" name="TextBox 9"/>
+          <p:cNvPr id="9" name="TextBox 8"/>
           <p:cNvSpPr txBox="1"/>
           <p:nvPr/>
         </p:nvSpPr>
@@ -21760,7 +21329,7 @@
       </p:sp>
       <p:sp>
         <p:nvSpPr>
-          <p:cNvPr id="11" name="TextBox 10"/>
+          <p:cNvPr id="10" name="TextBox 9"/>
           <p:cNvSpPr txBox="1"/>
           <p:nvPr/>
         </p:nvSpPr>
@@ -21799,7 +21368,7 @@
       </p:sp>
       <p:sp>
         <p:nvSpPr>
-          <p:cNvPr id="12" name="TextBox 11"/>
+          <p:cNvPr id="11" name="TextBox 10"/>
           <p:cNvSpPr txBox="1"/>
           <p:nvPr/>
         </p:nvSpPr>
@@ -21838,7 +21407,7 @@
       </p:sp>
       <p:sp>
         <p:nvSpPr>
-          <p:cNvPr id="13" name="TextBox 12"/>
+          <p:cNvPr id="12" name="TextBox 11"/>
           <p:cNvSpPr txBox="1"/>
           <p:nvPr/>
         </p:nvSpPr>
@@ -21877,7 +21446,7 @@
       </p:sp>
       <p:sp>
         <p:nvSpPr>
-          <p:cNvPr id="14" name="TextBox 13"/>
+          <p:cNvPr id="13" name="TextBox 12"/>
           <p:cNvSpPr txBox="1"/>
           <p:nvPr/>
         </p:nvSpPr>
@@ -21916,7 +21485,7 @@
       </p:sp>
       <p:sp>
         <p:nvSpPr>
-          <p:cNvPr id="15" name="TextBox 14"/>
+          <p:cNvPr id="14" name="TextBox 13"/>
           <p:cNvSpPr txBox="1"/>
           <p:nvPr/>
         </p:nvSpPr>
@@ -21955,7 +21524,7 @@
       </p:sp>
       <p:sp>
         <p:nvSpPr>
-          <p:cNvPr id="16" name="TextBox 15"/>
+          <p:cNvPr id="15" name="TextBox 14"/>
           <p:cNvSpPr txBox="1"/>
           <p:nvPr/>
         </p:nvSpPr>
@@ -21994,7 +21563,7 @@
       </p:sp>
       <p:sp>
         <p:nvSpPr>
-          <p:cNvPr id="17" name="TextBox 16"/>
+          <p:cNvPr id="16" name="TextBox 15"/>
           <p:cNvSpPr txBox="1"/>
           <p:nvPr/>
         </p:nvSpPr>
@@ -22033,7 +21602,7 @@
       </p:sp>
       <p:sp>
         <p:nvSpPr>
-          <p:cNvPr id="18" name="TextBox 17"/>
+          <p:cNvPr id="17" name="TextBox 16"/>
           <p:cNvSpPr txBox="1"/>
           <p:nvPr/>
         </p:nvSpPr>
@@ -22072,7 +21641,7 @@
       </p:sp>
       <p:sp>
         <p:nvSpPr>
-          <p:cNvPr id="19" name="TextBox 18"/>
+          <p:cNvPr id="18" name="TextBox 17"/>
           <p:cNvSpPr txBox="1"/>
           <p:nvPr/>
         </p:nvSpPr>
@@ -22111,7 +21680,7 @@
       </p:sp>
       <p:sp>
         <p:nvSpPr>
-          <p:cNvPr id="20" name="Rectangle 19"/>
+          <p:cNvPr id="19" name="Rectangle 18"/>
           <p:cNvSpPr/>
           <p:nvPr/>
         </p:nvSpPr>
@@ -22155,7 +21724,7 @@
       </p:sp>
       <p:sp>
         <p:nvSpPr>
-          <p:cNvPr id="21" name="TextBox 20"/>
+          <p:cNvPr id="20" name="TextBox 19"/>
           <p:cNvSpPr txBox="1"/>
           <p:nvPr/>
         </p:nvSpPr>
@@ -22194,7 +21763,7 @@
       </p:sp>
       <p:sp>
         <p:nvSpPr>
-          <p:cNvPr id="22" name="TextBox 21"/>
+          <p:cNvPr id="21" name="TextBox 20"/>
           <p:cNvSpPr txBox="1"/>
           <p:nvPr/>
         </p:nvSpPr>
@@ -22233,7 +21802,7 @@
       </p:sp>
       <p:sp>
         <p:nvSpPr>
-          <p:cNvPr id="23" name="TextBox 22"/>
+          <p:cNvPr id="22" name="TextBox 21"/>
           <p:cNvSpPr txBox="1"/>
           <p:nvPr/>
         </p:nvSpPr>
@@ -22398,7 +21967,7 @@
                 </a:solidFill>
                 <a:latin typeface="Roboto"/>
               </a:rPr>
-              <a:t>KUBERNETES 1.24, 2022</a:t>
+              <a:t/>
             </a:r>
           </a:p>
         </p:txBody>
@@ -22633,8 +22202,8 @@
         </p:nvSpPr>
         <p:spPr>
           <a:xfrm>
-            <a:off x="685800" y="628650"/>
-            <a:ext cx="10820400" cy="198120"/>
+            <a:off x="685800" y="685800"/>
+            <a:ext cx="9620250" cy="1524000"/>
           </a:xfrm>
           <a:prstGeom prst="rect">
             <a:avLst/>
@@ -22649,55 +22218,16 @@
           <a:p>
             <a:pPr algn="l">
               <a:lnSpc>
-                <a:spcPct val="120000"/>
-              </a:lnSpc>
-            </a:pPr>
-            <a:r>
-              <a:rPr sz="980" b="1" i="0" spc="160">
-                <a:solidFill>
-                  <a:srgbClr val="E94D1C"/>
+                <a:spcPct val="104000"/>
+              </a:lnSpc>
+            </a:pPr>
+            <a:r>
+              <a:rPr sz="3000" b="1" i="0">
+                <a:solidFill>
+                  <a:srgbClr val="21049A"/>
                 </a:solidFill>
                 <a:latin typeface="Roboto"/>
               </a:rPr>
-              <a:t>DESVANTAGENS</a:t>
-            </a:r>
-          </a:p>
-        </p:txBody>
-      </p:sp>
-      <p:sp>
-        <p:nvSpPr>
-          <p:cNvPr id="4" name="TextBox 3"/>
-          <p:cNvSpPr txBox="1"/>
-          <p:nvPr/>
-        </p:nvSpPr>
-        <p:spPr>
-          <a:xfrm>
-            <a:off x="685800" y="838200"/>
-            <a:ext cx="9620250" cy="1524000"/>
-          </a:xfrm>
-          <a:prstGeom prst="rect">
-            <a:avLst/>
-          </a:prstGeom>
-          <a:noFill/>
-        </p:spPr>
-        <p:txBody>
-          <a:bodyPr wrap="square" lIns="0" rIns="0" tIns="0" bIns="0" anchor="t">
-            <a:spAutoFit/>
-          </a:bodyPr>
-          <a:lstStyle/>
-          <a:p>
-            <a:pPr algn="l">
-              <a:lnSpc>
-                <a:spcPct val="104000"/>
-              </a:lnSpc>
-            </a:pPr>
-            <a:r>
-              <a:rPr sz="3000" b="1" i="0">
-                <a:solidFill>
-                  <a:srgbClr val="21049A"/>
-                </a:solidFill>
-                <a:latin typeface="Roboto"/>
-              </a:rPr>
               <a:t>Limitações e custos</a:t>
             </a:r>
           </a:p>
@@ -22705,7 +22235,7 @@
       </p:sp>
       <p:sp>
         <p:nvSpPr>
-          <p:cNvPr id="5" name="Rectangle 4"/>
+          <p:cNvPr id="4" name="Rectangle 3"/>
           <p:cNvSpPr/>
           <p:nvPr/>
         </p:nvSpPr>
@@ -22749,7 +22279,7 @@
       </p:sp>
       <p:sp>
         <p:nvSpPr>
-          <p:cNvPr id="6" name="TextBox 5"/>
+          <p:cNvPr id="5" name="TextBox 4"/>
           <p:cNvSpPr txBox="1"/>
           <p:nvPr/>
         </p:nvSpPr>
@@ -22788,7 +22318,7 @@
       </p:sp>
       <p:sp>
         <p:nvSpPr>
-          <p:cNvPr id="7" name="Rectangle 6"/>
+          <p:cNvPr id="6" name="Rectangle 5"/>
           <p:cNvSpPr/>
           <p:nvPr/>
         </p:nvSpPr>
@@ -22832,7 +22362,7 @@
       </p:sp>
       <p:sp>
         <p:nvSpPr>
-          <p:cNvPr id="8" name="TextBox 7"/>
+          <p:cNvPr id="7" name="TextBox 6"/>
           <p:cNvSpPr txBox="1"/>
           <p:nvPr/>
         </p:nvSpPr>
@@ -22871,7 +22401,7 @@
       </p:sp>
       <p:sp>
         <p:nvSpPr>
-          <p:cNvPr id="9" name="Rectangle 8"/>
+          <p:cNvPr id="8" name="Rectangle 7"/>
           <p:cNvSpPr/>
           <p:nvPr/>
         </p:nvSpPr>
@@ -22915,7 +22445,7 @@
       </p:sp>
       <p:sp>
         <p:nvSpPr>
-          <p:cNvPr id="10" name="TextBox 9"/>
+          <p:cNvPr id="9" name="TextBox 8"/>
           <p:cNvSpPr txBox="1"/>
           <p:nvPr/>
         </p:nvSpPr>
@@ -22954,7 +22484,7 @@
       </p:sp>
       <p:sp>
         <p:nvSpPr>
-          <p:cNvPr id="11" name="Rectangle 10"/>
+          <p:cNvPr id="10" name="Rectangle 9"/>
           <p:cNvSpPr/>
           <p:nvPr/>
         </p:nvSpPr>
@@ -22998,7 +22528,7 @@
       </p:sp>
       <p:sp>
         <p:nvSpPr>
-          <p:cNvPr id="12" name="TextBox 11"/>
+          <p:cNvPr id="11" name="TextBox 10"/>
           <p:cNvSpPr txBox="1"/>
           <p:nvPr/>
         </p:nvSpPr>
@@ -23037,7 +22567,7 @@
       </p:sp>
       <p:sp>
         <p:nvSpPr>
-          <p:cNvPr id="13" name="Isosceles Triangle 12"/>
+          <p:cNvPr id="12" name="Isosceles Triangle 11"/>
           <p:cNvSpPr/>
           <p:nvPr/>
         </p:nvSpPr>
@@ -23081,7 +22611,7 @@
       </p:sp>
       <p:sp>
         <p:nvSpPr>
-          <p:cNvPr id="14" name="Rectangle 13"/>
+          <p:cNvPr id="13" name="Rectangle 12"/>
           <p:cNvSpPr/>
           <p:nvPr/>
         </p:nvSpPr>
@@ -23125,7 +22655,7 @@
       </p:sp>
       <p:sp>
         <p:nvSpPr>
-          <p:cNvPr id="15" name="TextBox 14"/>
+          <p:cNvPr id="14" name="TextBox 13"/>
           <p:cNvSpPr txBox="1"/>
           <p:nvPr/>
         </p:nvSpPr>
@@ -23164,7 +22694,7 @@
       </p:sp>
       <p:sp>
         <p:nvSpPr>
-          <p:cNvPr id="16" name="Rectangle 15"/>
+          <p:cNvPr id="15" name="Rectangle 14"/>
           <p:cNvSpPr/>
           <p:nvPr/>
         </p:nvSpPr>
@@ -23208,7 +22738,7 @@
       </p:sp>
       <p:sp>
         <p:nvSpPr>
-          <p:cNvPr id="17" name="TextBox 16"/>
+          <p:cNvPr id="16" name="TextBox 15"/>
           <p:cNvSpPr txBox="1"/>
           <p:nvPr/>
         </p:nvSpPr>
@@ -23250,7 +22780,7 @@
       </p:sp>
       <p:sp>
         <p:nvSpPr>
-          <p:cNvPr id="18" name="TextBox 17"/>
+          <p:cNvPr id="17" name="TextBox 16"/>
           <p:cNvSpPr txBox="1"/>
           <p:nvPr/>
         </p:nvSpPr>
@@ -23289,7 +22819,7 @@
       </p:sp>
       <p:sp>
         <p:nvSpPr>
-          <p:cNvPr id="19" name="TextBox 18"/>
+          <p:cNvPr id="18" name="TextBox 17"/>
           <p:cNvSpPr txBox="1"/>
           <p:nvPr/>
         </p:nvSpPr>
@@ -23384,8 +22914,8 @@
         </p:nvSpPr>
         <p:spPr>
           <a:xfrm>
-            <a:off x="685800" y="628650"/>
-            <a:ext cx="10820400" cy="198120"/>
+            <a:off x="685800" y="685800"/>
+            <a:ext cx="9620250" cy="1524000"/>
           </a:xfrm>
           <a:prstGeom prst="rect">
             <a:avLst/>
@@ -23400,17 +22930,17 @@
           <a:p>
             <a:pPr algn="l">
               <a:lnSpc>
-                <a:spcPct val="120000"/>
-              </a:lnSpc>
-            </a:pPr>
-            <a:r>
-              <a:rPr sz="980" b="1" i="0" spc="160">
-                <a:solidFill>
-                  <a:srgbClr val="E94D1C"/>
+                <a:spcPct val="104000"/>
+              </a:lnSpc>
+            </a:pPr>
+            <a:r>
+              <a:rPr sz="2400" b="1" i="0">
+                <a:solidFill>
+                  <a:srgbClr val="21049A"/>
                 </a:solidFill>
                 <a:latin typeface="Roboto"/>
               </a:rPr>
-              <a:t>CONTAINER E MÁQUINA VIRTUAL</a:t>
+              <a:t>Container e máquina virtual</a:t>
             </a:r>
           </a:p>
         </p:txBody>
@@ -23423,8 +22953,8 @@
         </p:nvSpPr>
         <p:spPr>
           <a:xfrm>
-            <a:off x="685800" y="838200"/>
-            <a:ext cx="9620250" cy="1524000"/>
+            <a:off x="685800" y="2193226"/>
+            <a:ext cx="5143500" cy="182880"/>
           </a:xfrm>
           <a:prstGeom prst="rect">
             <a:avLst/>
@@ -23439,71 +22969,16 @@
           <a:p>
             <a:pPr algn="l">
               <a:lnSpc>
-                <a:spcPct val="104000"/>
-              </a:lnSpc>
-            </a:pPr>
-            <a:r>
-              <a:rPr sz="2400" b="1" i="0">
+                <a:spcPct val="120000"/>
+              </a:lnSpc>
+            </a:pPr>
+            <a:r>
+              <a:rPr sz="900" b="1" i="0" spc="120">
                 <a:solidFill>
                   <a:srgbClr val="21049A"/>
                 </a:solidFill>
                 <a:latin typeface="Roboto"/>
               </a:rPr>
-              <a:t>Comparação pela</a:t>
-            </a:r>
-          </a:p>
-          <a:p>
-            <a:pPr>
-              <a:lnSpc>
-                <a:spcPct val="104000"/>
-              </a:lnSpc>
-            </a:pPr>
-            <a:r>
-              <a:rPr sz="2400" b="1" i="0">
-                <a:solidFill>
-                  <a:srgbClr val="21049A"/>
-                </a:solidFill>
-                <a:latin typeface="Roboto"/>
-              </a:rPr>
-              <a:t>superfície de ataque</a:t>
-            </a:r>
-          </a:p>
-        </p:txBody>
-      </p:sp>
-      <p:sp>
-        <p:nvSpPr>
-          <p:cNvPr id="5" name="TextBox 4"/>
-          <p:cNvSpPr txBox="1"/>
-          <p:nvPr/>
-        </p:nvSpPr>
-        <p:spPr>
-          <a:xfrm>
-            <a:off x="685800" y="2193226"/>
-            <a:ext cx="5143500" cy="182880"/>
-          </a:xfrm>
-          <a:prstGeom prst="rect">
-            <a:avLst/>
-          </a:prstGeom>
-          <a:noFill/>
-        </p:spPr>
-        <p:txBody>
-          <a:bodyPr wrap="square" lIns="0" rIns="0" tIns="0" bIns="0" anchor="t">
-            <a:spAutoFit/>
-          </a:bodyPr>
-          <a:lstStyle/>
-          <a:p>
-            <a:pPr algn="l">
-              <a:lnSpc>
-                <a:spcPct val="120000"/>
-              </a:lnSpc>
-            </a:pPr>
-            <a:r>
-              <a:rPr sz="900" b="1" i="0" spc="120">
-                <a:solidFill>
-                  <a:srgbClr val="21049A"/>
-                </a:solidFill>
-                <a:latin typeface="Roboto"/>
-              </a:rPr>
               <a:t>MÁQUINA VIRTUAL</a:t>
             </a:r>
           </a:p>
@@ -23511,7 +22986,7 @@
       </p:sp>
       <p:sp>
         <p:nvSpPr>
-          <p:cNvPr id="6" name="Rectangle 5"/>
+          <p:cNvPr id="5" name="Rectangle 4"/>
           <p:cNvSpPr/>
           <p:nvPr/>
         </p:nvSpPr>
@@ -23555,7 +23030,7 @@
       </p:sp>
       <p:sp>
         <p:nvSpPr>
-          <p:cNvPr id="7" name="Rectangle 6"/>
+          <p:cNvPr id="6" name="Rectangle 5"/>
           <p:cNvSpPr/>
           <p:nvPr/>
         </p:nvSpPr>
@@ -23599,7 +23074,7 @@
       </p:sp>
       <p:sp>
         <p:nvSpPr>
-          <p:cNvPr id="8" name="TextBox 7"/>
+          <p:cNvPr id="7" name="TextBox 6"/>
           <p:cNvSpPr txBox="1"/>
           <p:nvPr/>
         </p:nvSpPr>
@@ -23638,7 +23113,7 @@
       </p:sp>
       <p:sp>
         <p:nvSpPr>
-          <p:cNvPr id="9" name="Rectangle 8"/>
+          <p:cNvPr id="8" name="Rectangle 7"/>
           <p:cNvSpPr/>
           <p:nvPr/>
         </p:nvSpPr>
@@ -23682,7 +23157,7 @@
       </p:sp>
       <p:sp>
         <p:nvSpPr>
-          <p:cNvPr id="10" name="TextBox 9"/>
+          <p:cNvPr id="9" name="TextBox 8"/>
           <p:cNvSpPr txBox="1"/>
           <p:nvPr/>
         </p:nvSpPr>
@@ -23721,7 +23196,7 @@
       </p:sp>
       <p:sp>
         <p:nvSpPr>
-          <p:cNvPr id="11" name="Rectangle 10"/>
+          <p:cNvPr id="10" name="Rectangle 9"/>
           <p:cNvSpPr/>
           <p:nvPr/>
         </p:nvSpPr>
@@ -23765,7 +23240,7 @@
       </p:sp>
       <p:sp>
         <p:nvSpPr>
-          <p:cNvPr id="12" name="TextBox 11"/>
+          <p:cNvPr id="11" name="TextBox 10"/>
           <p:cNvSpPr txBox="1"/>
           <p:nvPr/>
         </p:nvSpPr>
@@ -23804,7 +23279,7 @@
       </p:sp>
       <p:sp>
         <p:nvSpPr>
-          <p:cNvPr id="13" name="TextBox 12"/>
+          <p:cNvPr id="12" name="TextBox 11"/>
           <p:cNvSpPr txBox="1"/>
           <p:nvPr/>
         </p:nvSpPr>
@@ -23843,7 +23318,7 @@
       </p:sp>
       <p:sp>
         <p:nvSpPr>
-          <p:cNvPr id="14" name="Rectangle 13"/>
+          <p:cNvPr id="13" name="Rectangle 12"/>
           <p:cNvSpPr/>
           <p:nvPr/>
         </p:nvSpPr>
@@ -23887,7 +23362,7 @@
       </p:sp>
       <p:sp>
         <p:nvSpPr>
-          <p:cNvPr id="15" name="Rectangle 14"/>
+          <p:cNvPr id="14" name="Rectangle 13"/>
           <p:cNvSpPr/>
           <p:nvPr/>
         </p:nvSpPr>
@@ -23931,7 +23406,7 @@
       </p:sp>
       <p:sp>
         <p:nvSpPr>
-          <p:cNvPr id="16" name="TextBox 15"/>
+          <p:cNvPr id="15" name="TextBox 14"/>
           <p:cNvSpPr txBox="1"/>
           <p:nvPr/>
         </p:nvSpPr>
@@ -23970,7 +23445,7 @@
       </p:sp>
       <p:sp>
         <p:nvSpPr>
-          <p:cNvPr id="17" name="Rectangle 16"/>
+          <p:cNvPr id="16" name="Rectangle 15"/>
           <p:cNvSpPr/>
           <p:nvPr/>
         </p:nvSpPr>
@@ -24014,7 +23489,7 @@
       </p:sp>
       <p:sp>
         <p:nvSpPr>
-          <p:cNvPr id="18" name="TextBox 17"/>
+          <p:cNvPr id="17" name="TextBox 16"/>
           <p:cNvSpPr txBox="1"/>
           <p:nvPr/>
         </p:nvSpPr>
@@ -24053,7 +23528,7 @@
       </p:sp>
       <p:sp>
         <p:nvSpPr>
-          <p:cNvPr id="19" name="Rectangle 18"/>
+          <p:cNvPr id="18" name="Rectangle 17"/>
           <p:cNvSpPr/>
           <p:nvPr/>
         </p:nvSpPr>
@@ -24097,7 +23572,7 @@
       </p:sp>
       <p:sp>
         <p:nvSpPr>
-          <p:cNvPr id="20" name="TextBox 19"/>
+          <p:cNvPr id="19" name="TextBox 18"/>
           <p:cNvSpPr txBox="1"/>
           <p:nvPr/>
         </p:nvSpPr>
@@ -24136,7 +23611,7 @@
       </p:sp>
       <p:sp>
         <p:nvSpPr>
-          <p:cNvPr id="21" name="Rectangle 20"/>
+          <p:cNvPr id="20" name="Rectangle 19"/>
           <p:cNvSpPr/>
           <p:nvPr/>
         </p:nvSpPr>
@@ -24180,7 +23655,7 @@
       </p:sp>
       <p:sp>
         <p:nvSpPr>
-          <p:cNvPr id="22" name="TextBox 21"/>
+          <p:cNvPr id="21" name="TextBox 20"/>
           <p:cNvSpPr txBox="1"/>
           <p:nvPr/>
         </p:nvSpPr>
@@ -24219,7 +23694,7 @@
       </p:sp>
       <p:sp>
         <p:nvSpPr>
-          <p:cNvPr id="23" name="TextBox 22"/>
+          <p:cNvPr id="22" name="TextBox 21"/>
           <p:cNvSpPr txBox="1"/>
           <p:nvPr/>
         </p:nvSpPr>
@@ -24258,7 +23733,7 @@
       </p:sp>
       <p:sp>
         <p:nvSpPr>
-          <p:cNvPr id="24" name="TextBox 23"/>
+          <p:cNvPr id="23" name="TextBox 22"/>
           <p:cNvSpPr txBox="1"/>
           <p:nvPr/>
         </p:nvSpPr>
@@ -24353,8 +23828,8 @@
         </p:nvSpPr>
         <p:spPr>
           <a:xfrm>
-            <a:off x="685800" y="628650"/>
-            <a:ext cx="10820400" cy="198120"/>
+            <a:off x="685800" y="685800"/>
+            <a:ext cx="9620250" cy="1524000"/>
           </a:xfrm>
           <a:prstGeom prst="rect">
             <a:avLst/>
@@ -24369,17 +23844,17 @@
           <a:p>
             <a:pPr algn="l">
               <a:lnSpc>
-                <a:spcPct val="120000"/>
-              </a:lnSpc>
-            </a:pPr>
-            <a:r>
-              <a:rPr sz="980" b="1" i="0" spc="160">
-                <a:solidFill>
-                  <a:srgbClr val="E94D1C"/>
+                <a:spcPct val="104000"/>
+              </a:lnSpc>
+            </a:pPr>
+            <a:r>
+              <a:rPr sz="3000" b="1" i="0">
+                <a:solidFill>
+                  <a:srgbClr val="21049A"/>
                 </a:solidFill>
                 <a:latin typeface="Roboto"/>
               </a:rPr>
-              <a:t>ALTERNATIVAS CONSIDERADAS</a:t>
+              <a:t>Alternativas consideradas</a:t>
             </a:r>
           </a:p>
         </p:txBody>
@@ -24392,8 +23867,8 @@
         </p:nvSpPr>
         <p:spPr>
           <a:xfrm>
-            <a:off x="685800" y="838200"/>
-            <a:ext cx="9620250" cy="1524000"/>
+            <a:off x="685800" y="2864739"/>
+            <a:ext cx="2190750" cy="167640"/>
           </a:xfrm>
           <a:prstGeom prst="rect">
             <a:avLst/>
@@ -24408,17 +23883,17 @@
           <a:p>
             <a:pPr algn="l">
               <a:lnSpc>
-                <a:spcPct val="104000"/>
-              </a:lnSpc>
-            </a:pPr>
-            <a:r>
-              <a:rPr sz="3000" b="1" i="0">
+                <a:spcPct val="120000"/>
+              </a:lnSpc>
+            </a:pPr>
+            <a:r>
+              <a:rPr sz="819" b="1" i="0" spc="120">
                 <a:solidFill>
                   <a:srgbClr val="21049A"/>
                 </a:solidFill>
                 <a:latin typeface="Roboto"/>
               </a:rPr>
-              <a:t>Comparação com as outras opções</a:t>
+              <a:t>OPÇÃO</a:t>
             </a:r>
           </a:p>
         </p:txBody>
@@ -24431,8 +23906,8 @@
         </p:nvSpPr>
         <p:spPr>
           <a:xfrm>
-            <a:off x="685800" y="2864739"/>
-            <a:ext cx="2190750" cy="167640"/>
+            <a:off x="3048000" y="2864739"/>
+            <a:ext cx="3429000" cy="167640"/>
           </a:xfrm>
           <a:prstGeom prst="rect">
             <a:avLst/>
@@ -24457,7 +23932,7 @@
                 </a:solidFill>
                 <a:latin typeface="Roboto"/>
               </a:rPr>
-              <a:t>OPÇÃO</a:t>
+              <a:t>A FAVOR</a:t>
             </a:r>
           </a:p>
         </p:txBody>
@@ -24470,8 +23945,8 @@
         </p:nvSpPr>
         <p:spPr>
           <a:xfrm>
-            <a:off x="3048000" y="2864739"/>
-            <a:ext cx="3429000" cy="167640"/>
+            <a:off x="6667500" y="2864739"/>
+            <a:ext cx="4762500" cy="167640"/>
           </a:xfrm>
           <a:prstGeom prst="rect">
             <a:avLst/>
@@ -24496,45 +23971,6 @@
                 </a:solidFill>
                 <a:latin typeface="Roboto"/>
               </a:rPr>
-              <a:t>A FAVOR</a:t>
-            </a:r>
-          </a:p>
-        </p:txBody>
-      </p:sp>
-      <p:sp>
-        <p:nvSpPr>
-          <p:cNvPr id="7" name="TextBox 6"/>
-          <p:cNvSpPr txBox="1"/>
-          <p:nvPr/>
-        </p:nvSpPr>
-        <p:spPr>
-          <a:xfrm>
-            <a:off x="6667500" y="2864739"/>
-            <a:ext cx="4762500" cy="167640"/>
-          </a:xfrm>
-          <a:prstGeom prst="rect">
-            <a:avLst/>
-          </a:prstGeom>
-          <a:noFill/>
-        </p:spPr>
-        <p:txBody>
-          <a:bodyPr wrap="square" lIns="0" rIns="0" tIns="0" bIns="0" anchor="t">
-            <a:spAutoFit/>
-          </a:bodyPr>
-          <a:lstStyle/>
-          <a:p>
-            <a:pPr algn="l">
-              <a:lnSpc>
-                <a:spcPct val="120000"/>
-              </a:lnSpc>
-            </a:pPr>
-            <a:r>
-              <a:rPr sz="819" b="1" i="0" spc="120">
-                <a:solidFill>
-                  <a:srgbClr val="21049A"/>
-                </a:solidFill>
-                <a:latin typeface="Roboto"/>
-              </a:rPr>
               <a:t>CONTRA</a:t>
             </a:r>
           </a:p>
@@ -24542,7 +23978,7 @@
       </p:sp>
       <p:sp>
         <p:nvSpPr>
-          <p:cNvPr id="8" name="Rectangle 7"/>
+          <p:cNvPr id="7" name="Rectangle 6"/>
           <p:cNvSpPr/>
           <p:nvPr/>
         </p:nvSpPr>
@@ -24586,7 +24022,7 @@
       </p:sp>
       <p:sp>
         <p:nvSpPr>
-          <p:cNvPr id="9" name="TextBox 8"/>
+          <p:cNvPr id="8" name="TextBox 7"/>
           <p:cNvSpPr txBox="1"/>
           <p:nvPr/>
         </p:nvSpPr>
@@ -24625,7 +24061,7 @@
       </p:sp>
       <p:sp>
         <p:nvSpPr>
-          <p:cNvPr id="10" name="TextBox 9"/>
+          <p:cNvPr id="9" name="TextBox 8"/>
           <p:cNvSpPr txBox="1"/>
           <p:nvPr/>
         </p:nvSpPr>
@@ -24664,7 +24100,7 @@
       </p:sp>
       <p:sp>
         <p:nvSpPr>
-          <p:cNvPr id="11" name="TextBox 10"/>
+          <p:cNvPr id="10" name="TextBox 9"/>
           <p:cNvSpPr txBox="1"/>
           <p:nvPr/>
         </p:nvSpPr>
@@ -24703,7 +24139,7 @@
       </p:sp>
       <p:sp>
         <p:nvSpPr>
-          <p:cNvPr id="12" name="Rectangle 11"/>
+          <p:cNvPr id="11" name="Rectangle 10"/>
           <p:cNvSpPr/>
           <p:nvPr/>
         </p:nvSpPr>
@@ -24747,7 +24183,7 @@
       </p:sp>
       <p:sp>
         <p:nvSpPr>
-          <p:cNvPr id="13" name="TextBox 12"/>
+          <p:cNvPr id="12" name="TextBox 11"/>
           <p:cNvSpPr txBox="1"/>
           <p:nvPr/>
         </p:nvSpPr>
@@ -24786,7 +24222,7 @@
       </p:sp>
       <p:sp>
         <p:nvSpPr>
-          <p:cNvPr id="14" name="TextBox 13"/>
+          <p:cNvPr id="13" name="TextBox 12"/>
           <p:cNvSpPr txBox="1"/>
           <p:nvPr/>
         </p:nvSpPr>
@@ -24825,7 +24261,7 @@
       </p:sp>
       <p:sp>
         <p:nvSpPr>
-          <p:cNvPr id="15" name="TextBox 14"/>
+          <p:cNvPr id="14" name="TextBox 13"/>
           <p:cNvSpPr txBox="1"/>
           <p:nvPr/>
         </p:nvSpPr>
@@ -24864,7 +24300,7 @@
       </p:sp>
       <p:sp>
         <p:nvSpPr>
-          <p:cNvPr id="16" name="Rectangle 15"/>
+          <p:cNvPr id="15" name="Rectangle 14"/>
           <p:cNvSpPr/>
           <p:nvPr/>
         </p:nvSpPr>
@@ -24908,7 +24344,7 @@
       </p:sp>
       <p:sp>
         <p:nvSpPr>
-          <p:cNvPr id="17" name="TextBox 16"/>
+          <p:cNvPr id="16" name="TextBox 15"/>
           <p:cNvSpPr txBox="1"/>
           <p:nvPr/>
         </p:nvSpPr>
@@ -24947,7 +24383,7 @@
       </p:sp>
       <p:sp>
         <p:nvSpPr>
-          <p:cNvPr id="18" name="TextBox 17"/>
+          <p:cNvPr id="17" name="TextBox 16"/>
           <p:cNvSpPr txBox="1"/>
           <p:nvPr/>
         </p:nvSpPr>
@@ -24986,7 +24422,7 @@
       </p:sp>
       <p:sp>
         <p:nvSpPr>
-          <p:cNvPr id="19" name="TextBox 18"/>
+          <p:cNvPr id="18" name="TextBox 17"/>
           <p:cNvSpPr txBox="1"/>
           <p:nvPr/>
         </p:nvSpPr>
@@ -25025,7 +24461,7 @@
       </p:sp>
       <p:sp>
         <p:nvSpPr>
-          <p:cNvPr id="20" name="Rectangle 19"/>
+          <p:cNvPr id="19" name="Rectangle 18"/>
           <p:cNvSpPr/>
           <p:nvPr/>
         </p:nvSpPr>
@@ -25069,7 +24505,7 @@
       </p:sp>
       <p:sp>
         <p:nvSpPr>
-          <p:cNvPr id="21" name="Rectangle 20"/>
+          <p:cNvPr id="20" name="Rectangle 19"/>
           <p:cNvSpPr/>
           <p:nvPr/>
         </p:nvSpPr>
@@ -25113,7 +24549,7 @@
       </p:sp>
       <p:sp>
         <p:nvSpPr>
-          <p:cNvPr id="22" name="TextBox 21"/>
+          <p:cNvPr id="21" name="TextBox 20"/>
           <p:cNvSpPr txBox="1"/>
           <p:nvPr/>
         </p:nvSpPr>
@@ -25152,7 +24588,7 @@
       </p:sp>
       <p:sp>
         <p:nvSpPr>
-          <p:cNvPr id="23" name="TextBox 22"/>
+          <p:cNvPr id="22" name="TextBox 21"/>
           <p:cNvSpPr txBox="1"/>
           <p:nvPr/>
         </p:nvSpPr>
@@ -25191,7 +24627,7 @@
       </p:sp>
       <p:sp>
         <p:nvSpPr>
-          <p:cNvPr id="24" name="TextBox 23"/>
+          <p:cNvPr id="23" name="TextBox 22"/>
           <p:cNvSpPr txBox="1"/>
           <p:nvPr/>
         </p:nvSpPr>
@@ -25230,7 +24666,7 @@
       </p:sp>
       <p:sp>
         <p:nvSpPr>
-          <p:cNvPr id="25" name="Rectangle 24"/>
+          <p:cNvPr id="24" name="Rectangle 23"/>
           <p:cNvSpPr/>
           <p:nvPr/>
         </p:nvSpPr>
@@ -25274,7 +24710,7 @@
       </p:sp>
       <p:sp>
         <p:nvSpPr>
-          <p:cNvPr id="26" name="TextBox 25"/>
+          <p:cNvPr id="25" name="TextBox 24"/>
           <p:cNvSpPr txBox="1"/>
           <p:nvPr/>
         </p:nvSpPr>
@@ -25313,7 +24749,7 @@
       </p:sp>
       <p:sp>
         <p:nvSpPr>
-          <p:cNvPr id="27" name="TextBox 26"/>
+          <p:cNvPr id="26" name="TextBox 25"/>
           <p:cNvSpPr txBox="1"/>
           <p:nvPr/>
         </p:nvSpPr>
@@ -25408,8 +24844,8 @@
         </p:nvSpPr>
         <p:spPr>
           <a:xfrm>
-            <a:off x="685800" y="628650"/>
-            <a:ext cx="10820400" cy="198120"/>
+            <a:off x="685800" y="685800"/>
+            <a:ext cx="9620250" cy="1524000"/>
           </a:xfrm>
           <a:prstGeom prst="rect">
             <a:avLst/>
@@ -25424,17 +24860,17 @@
           <a:p>
             <a:pPr algn="l">
               <a:lnSpc>
-                <a:spcPct val="120000"/>
-              </a:lnSpc>
-            </a:pPr>
-            <a:r>
-              <a:rPr sz="980" b="1" i="0" spc="160">
-                <a:solidFill>
-                  <a:srgbClr val="E94D1C"/>
+                <a:spcPct val="104000"/>
+              </a:lnSpc>
+            </a:pPr>
+            <a:r>
+              <a:rPr sz="2550" b="1" i="0">
+                <a:solidFill>
+                  <a:srgbClr val="21049A"/>
                 </a:solidFill>
                 <a:latin typeface="Roboto"/>
               </a:rPr>
-              <a:t>QUANDO NÃO COMPENSA</a:t>
+              <a:t>Quando não compensa</a:t>
             </a:r>
           </a:p>
         </p:txBody>
@@ -25447,8 +24883,8 @@
         </p:nvSpPr>
         <p:spPr>
           <a:xfrm>
-            <a:off x="685800" y="838200"/>
-            <a:ext cx="9620250" cy="1524000"/>
+            <a:off x="685800" y="2457260"/>
+            <a:ext cx="5143500" cy="182880"/>
           </a:xfrm>
           <a:prstGeom prst="rect">
             <a:avLst/>
@@ -25463,71 +24899,16 @@
           <a:p>
             <a:pPr algn="l">
               <a:lnSpc>
-                <a:spcPct val="104000"/>
-              </a:lnSpc>
-            </a:pPr>
-            <a:r>
-              <a:rPr sz="2550" b="1" i="0">
+                <a:spcPct val="120000"/>
+              </a:lnSpc>
+            </a:pPr>
+            <a:r>
+              <a:rPr sz="900" b="1" i="0" spc="120">
                 <a:solidFill>
                   <a:srgbClr val="21049A"/>
                 </a:solidFill>
                 <a:latin typeface="Roboto"/>
               </a:rPr>
-              <a:t>Quatro critérios para não conteinerizar,</a:t>
-            </a:r>
-          </a:p>
-          <a:p>
-            <a:pPr>
-              <a:lnSpc>
-                <a:spcPct val="104000"/>
-              </a:lnSpc>
-            </a:pPr>
-            <a:r>
-              <a:rPr sz="2550" b="1" i="0">
-                <a:solidFill>
-                  <a:srgbClr val="21049A"/>
-                </a:solidFill>
-                <a:latin typeface="Roboto"/>
-              </a:rPr>
-              <a:t>e a nossa situação</a:t>
-            </a:r>
-          </a:p>
-        </p:txBody>
-      </p:sp>
-      <p:sp>
-        <p:nvSpPr>
-          <p:cNvPr id="5" name="TextBox 4"/>
-          <p:cNvSpPr txBox="1"/>
-          <p:nvPr/>
-        </p:nvSpPr>
-        <p:spPr>
-          <a:xfrm>
-            <a:off x="685800" y="2457260"/>
-            <a:ext cx="5143500" cy="182880"/>
-          </a:xfrm>
-          <a:prstGeom prst="rect">
-            <a:avLst/>
-          </a:prstGeom>
-          <a:noFill/>
-        </p:spPr>
-        <p:txBody>
-          <a:bodyPr wrap="square" lIns="0" rIns="0" tIns="0" bIns="0" anchor="t">
-            <a:spAutoFit/>
-          </a:bodyPr>
-          <a:lstStyle/>
-          <a:p>
-            <a:pPr algn="l">
-              <a:lnSpc>
-                <a:spcPct val="120000"/>
-              </a:lnSpc>
-            </a:pPr>
-            <a:r>
-              <a:rPr sz="900" b="1" i="0" spc="120">
-                <a:solidFill>
-                  <a:srgbClr val="21049A"/>
-                </a:solidFill>
-                <a:latin typeface="Roboto"/>
-              </a:rPr>
               <a:t>OS QUATRO CRITÉRIOS</a:t>
             </a:r>
           </a:p>
@@ -25535,7 +24916,7 @@
       </p:sp>
       <p:sp>
         <p:nvSpPr>
-          <p:cNvPr id="6" name="Rectangle 5"/>
+          <p:cNvPr id="5" name="Rectangle 4"/>
           <p:cNvSpPr/>
           <p:nvPr/>
         </p:nvSpPr>
@@ -25579,7 +24960,7 @@
       </p:sp>
       <p:sp>
         <p:nvSpPr>
-          <p:cNvPr id="7" name="Rectangle 6"/>
+          <p:cNvPr id="6" name="Rectangle 5"/>
           <p:cNvSpPr/>
           <p:nvPr/>
         </p:nvSpPr>
@@ -25623,7 +25004,7 @@
       </p:sp>
       <p:sp>
         <p:nvSpPr>
-          <p:cNvPr id="8" name="TextBox 7"/>
+          <p:cNvPr id="7" name="TextBox 6"/>
           <p:cNvSpPr txBox="1"/>
           <p:nvPr/>
         </p:nvSpPr>
@@ -25662,7 +25043,7 @@
       </p:sp>
       <p:sp>
         <p:nvSpPr>
-          <p:cNvPr id="9" name="Rectangle 8"/>
+          <p:cNvPr id="8" name="Rectangle 7"/>
           <p:cNvSpPr/>
           <p:nvPr/>
         </p:nvSpPr>
@@ -25706,7 +25087,7 @@
       </p:sp>
       <p:sp>
         <p:nvSpPr>
-          <p:cNvPr id="10" name="TextBox 9"/>
+          <p:cNvPr id="9" name="TextBox 8"/>
           <p:cNvSpPr txBox="1"/>
           <p:nvPr/>
         </p:nvSpPr>
@@ -25745,7 +25126,7 @@
       </p:sp>
       <p:sp>
         <p:nvSpPr>
-          <p:cNvPr id="11" name="Rectangle 10"/>
+          <p:cNvPr id="10" name="Rectangle 9"/>
           <p:cNvSpPr/>
           <p:nvPr/>
         </p:nvSpPr>
@@ -25789,7 +25170,7 @@
       </p:sp>
       <p:sp>
         <p:nvSpPr>
-          <p:cNvPr id="12" name="TextBox 11"/>
+          <p:cNvPr id="11" name="TextBox 10"/>
           <p:cNvSpPr txBox="1"/>
           <p:nvPr/>
         </p:nvSpPr>
@@ -25828,7 +25209,7 @@
       </p:sp>
       <p:sp>
         <p:nvSpPr>
-          <p:cNvPr id="13" name="Rectangle 12"/>
+          <p:cNvPr id="12" name="Rectangle 11"/>
           <p:cNvSpPr/>
           <p:nvPr/>
         </p:nvSpPr>
@@ -25872,7 +25253,7 @@
       </p:sp>
       <p:sp>
         <p:nvSpPr>
-          <p:cNvPr id="14" name="TextBox 13"/>
+          <p:cNvPr id="13" name="TextBox 12"/>
           <p:cNvSpPr txBox="1"/>
           <p:nvPr/>
         </p:nvSpPr>
@@ -25911,7 +25292,7 @@
       </p:sp>
       <p:sp>
         <p:nvSpPr>
-          <p:cNvPr id="15" name="TextBox 14"/>
+          <p:cNvPr id="14" name="TextBox 13"/>
           <p:cNvSpPr txBox="1"/>
           <p:nvPr/>
         </p:nvSpPr>
@@ -25950,7 +25331,7 @@
       </p:sp>
       <p:sp>
         <p:nvSpPr>
-          <p:cNvPr id="16" name="Rectangle 15"/>
+          <p:cNvPr id="15" name="Rectangle 14"/>
           <p:cNvSpPr/>
           <p:nvPr/>
         </p:nvSpPr>
@@ -25994,7 +25375,7 @@
       </p:sp>
       <p:sp>
         <p:nvSpPr>
-          <p:cNvPr id="17" name="Rectangle 16"/>
+          <p:cNvPr id="16" name="Rectangle 15"/>
           <p:cNvSpPr/>
           <p:nvPr/>
         </p:nvSpPr>
@@ -26038,7 +25419,7 @@
       </p:sp>
       <p:sp>
         <p:nvSpPr>
-          <p:cNvPr id="18" name="TextBox 17"/>
+          <p:cNvPr id="17" name="TextBox 16"/>
           <p:cNvSpPr txBox="1"/>
           <p:nvPr/>
         </p:nvSpPr>
@@ -26077,7 +25458,7 @@
       </p:sp>
       <p:sp>
         <p:nvSpPr>
-          <p:cNvPr id="19" name="Rectangle 18"/>
+          <p:cNvPr id="18" name="Rectangle 17"/>
           <p:cNvSpPr/>
           <p:nvPr/>
         </p:nvSpPr>
@@ -26121,7 +25502,7 @@
       </p:sp>
       <p:sp>
         <p:nvSpPr>
-          <p:cNvPr id="20" name="TextBox 19"/>
+          <p:cNvPr id="19" name="TextBox 18"/>
           <p:cNvSpPr txBox="1"/>
           <p:nvPr/>
         </p:nvSpPr>
@@ -26160,7 +25541,7 @@
       </p:sp>
       <p:sp>
         <p:nvSpPr>
-          <p:cNvPr id="21" name="TextBox 20"/>
+          <p:cNvPr id="20" name="TextBox 19"/>
           <p:cNvSpPr txBox="1"/>
           <p:nvPr/>
         </p:nvSpPr>
@@ -26199,7 +25580,7 @@
       </p:sp>
       <p:sp>
         <p:nvSpPr>
-          <p:cNvPr id="22" name="TextBox 21"/>
+          <p:cNvPr id="21" name="TextBox 20"/>
           <p:cNvSpPr txBox="1"/>
           <p:nvPr/>
         </p:nvSpPr>
@@ -26294,8 +25675,8 @@
         </p:nvSpPr>
         <p:spPr>
           <a:xfrm>
-            <a:off x="685800" y="628650"/>
-            <a:ext cx="10820400" cy="198120"/>
+            <a:off x="685800" y="685800"/>
+            <a:ext cx="9620250" cy="1524000"/>
           </a:xfrm>
           <a:prstGeom prst="rect">
             <a:avLst/>
@@ -26310,17 +25691,17 @@
           <a:p>
             <a:pPr algn="l">
               <a:lnSpc>
-                <a:spcPct val="120000"/>
-              </a:lnSpc>
-            </a:pPr>
-            <a:r>
-              <a:rPr sz="980" b="1" i="0" spc="160">
-                <a:solidFill>
-                  <a:srgbClr val="E94D1C"/>
+                <a:spcPct val="104000"/>
+              </a:lnSpc>
+            </a:pPr>
+            <a:r>
+              <a:rPr sz="2550" b="1" i="0">
+                <a:solidFill>
+                  <a:srgbClr val="21049A"/>
                 </a:solidFill>
                 <a:latin typeface="Roboto"/>
               </a:rPr>
-              <a:t>VANTAGENS E CUSTOS</a:t>
+              <a:t>Vantagens e custos</a:t>
             </a:r>
           </a:p>
         </p:txBody>
@@ -26333,8 +25714,8 @@
         </p:nvSpPr>
         <p:spPr>
           <a:xfrm>
-            <a:off x="685800" y="838200"/>
-            <a:ext cx="9620250" cy="1524000"/>
+            <a:off x="685800" y="2028825"/>
+            <a:ext cx="5143500" cy="182880"/>
           </a:xfrm>
           <a:prstGeom prst="rect">
             <a:avLst/>
@@ -26349,71 +25730,16 @@
           <a:p>
             <a:pPr algn="l">
               <a:lnSpc>
-                <a:spcPct val="104000"/>
-              </a:lnSpc>
-            </a:pPr>
-            <a:r>
-              <a:rPr sz="2550" b="1" i="0">
+                <a:spcPct val="120000"/>
+              </a:lnSpc>
+            </a:pPr>
+            <a:r>
+              <a:rPr sz="900" b="1" i="0" spc="120">
                 <a:solidFill>
                   <a:srgbClr val="21049A"/>
                 </a:solidFill>
                 <a:latin typeface="Roboto"/>
               </a:rPr>
-              <a:t>Efeito nos atributos</a:t>
-            </a:r>
-          </a:p>
-          <a:p>
-            <a:pPr>
-              <a:lnSpc>
-                <a:spcPct val="104000"/>
-              </a:lnSpc>
-            </a:pPr>
-            <a:r>
-              <a:rPr sz="2550" b="1" i="0">
-                <a:solidFill>
-                  <a:srgbClr val="21049A"/>
-                </a:solidFill>
-                <a:latin typeface="Roboto"/>
-              </a:rPr>
-              <a:t>de qualidade do projeto</a:t>
-            </a:r>
-          </a:p>
-        </p:txBody>
-      </p:sp>
-      <p:sp>
-        <p:nvSpPr>
-          <p:cNvPr id="5" name="TextBox 4"/>
-          <p:cNvSpPr txBox="1"/>
-          <p:nvPr/>
-        </p:nvSpPr>
-        <p:spPr>
-          <a:xfrm>
-            <a:off x="685800" y="2028825"/>
-            <a:ext cx="5143500" cy="182880"/>
-          </a:xfrm>
-          <a:prstGeom prst="rect">
-            <a:avLst/>
-          </a:prstGeom>
-          <a:noFill/>
-        </p:spPr>
-        <p:txBody>
-          <a:bodyPr wrap="square" lIns="0" rIns="0" tIns="0" bIns="0" anchor="t">
-            <a:spAutoFit/>
-          </a:bodyPr>
-          <a:lstStyle/>
-          <a:p>
-            <a:pPr algn="l">
-              <a:lnSpc>
-                <a:spcPct val="120000"/>
-              </a:lnSpc>
-            </a:pPr>
-            <a:r>
-              <a:rPr sz="900" b="1" i="0" spc="120">
-                <a:solidFill>
-                  <a:srgbClr val="21049A"/>
-                </a:solidFill>
-                <a:latin typeface="Roboto"/>
-              </a:rPr>
               <a:t>GANHA</a:t>
             </a:r>
           </a:p>
@@ -26421,7 +25747,7 @@
       </p:sp>
       <p:sp>
         <p:nvSpPr>
-          <p:cNvPr id="6" name="Rectangle 5"/>
+          <p:cNvPr id="5" name="Rectangle 4"/>
           <p:cNvSpPr/>
           <p:nvPr/>
         </p:nvSpPr>
@@ -26465,7 +25791,7 @@
       </p:sp>
       <p:sp>
         <p:nvSpPr>
-          <p:cNvPr id="7" name="Rectangle 6"/>
+          <p:cNvPr id="6" name="Rectangle 5"/>
           <p:cNvSpPr/>
           <p:nvPr/>
         </p:nvSpPr>
@@ -26509,7 +25835,7 @@
       </p:sp>
       <p:sp>
         <p:nvSpPr>
-          <p:cNvPr id="8" name="TextBox 7"/>
+          <p:cNvPr id="7" name="TextBox 6"/>
           <p:cNvSpPr txBox="1"/>
           <p:nvPr/>
         </p:nvSpPr>
@@ -26548,7 +25874,7 @@
       </p:sp>
       <p:sp>
         <p:nvSpPr>
-          <p:cNvPr id="9" name="Rectangle 8"/>
+          <p:cNvPr id="8" name="Rectangle 7"/>
           <p:cNvSpPr/>
           <p:nvPr/>
         </p:nvSpPr>
@@ -26592,7 +25918,7 @@
       </p:sp>
       <p:sp>
         <p:nvSpPr>
-          <p:cNvPr id="10" name="TextBox 9"/>
+          <p:cNvPr id="9" name="TextBox 8"/>
           <p:cNvSpPr txBox="1"/>
           <p:nvPr/>
         </p:nvSpPr>
@@ -26631,7 +25957,7 @@
       </p:sp>
       <p:sp>
         <p:nvSpPr>
-          <p:cNvPr id="11" name="Rectangle 10"/>
+          <p:cNvPr id="10" name="Rectangle 9"/>
           <p:cNvSpPr/>
           <p:nvPr/>
         </p:nvSpPr>
@@ -26675,7 +26001,7 @@
       </p:sp>
       <p:sp>
         <p:nvSpPr>
-          <p:cNvPr id="12" name="TextBox 11"/>
+          <p:cNvPr id="11" name="TextBox 10"/>
           <p:cNvSpPr txBox="1"/>
           <p:nvPr/>
         </p:nvSpPr>
@@ -26714,7 +26040,7 @@
       </p:sp>
       <p:sp>
         <p:nvSpPr>
-          <p:cNvPr id="13" name="Rectangle 12"/>
+          <p:cNvPr id="12" name="Rectangle 11"/>
           <p:cNvSpPr/>
           <p:nvPr/>
         </p:nvSpPr>
@@ -26758,7 +26084,7 @@
       </p:sp>
       <p:sp>
         <p:nvSpPr>
-          <p:cNvPr id="14" name="TextBox 13"/>
+          <p:cNvPr id="13" name="TextBox 12"/>
           <p:cNvSpPr txBox="1"/>
           <p:nvPr/>
         </p:nvSpPr>
@@ -26797,7 +26123,7 @@
       </p:sp>
       <p:sp>
         <p:nvSpPr>
-          <p:cNvPr id="15" name="Rectangle 14"/>
+          <p:cNvPr id="14" name="Rectangle 13"/>
           <p:cNvSpPr/>
           <p:nvPr/>
         </p:nvSpPr>
@@ -26841,7 +26167,7 @@
       </p:sp>
       <p:sp>
         <p:nvSpPr>
-          <p:cNvPr id="16" name="TextBox 15"/>
+          <p:cNvPr id="15" name="TextBox 14"/>
           <p:cNvSpPr txBox="1"/>
           <p:nvPr/>
         </p:nvSpPr>
@@ -26880,7 +26206,7 @@
       </p:sp>
       <p:sp>
         <p:nvSpPr>
-          <p:cNvPr id="17" name="TextBox 16"/>
+          <p:cNvPr id="16" name="TextBox 15"/>
           <p:cNvSpPr txBox="1"/>
           <p:nvPr/>
         </p:nvSpPr>
@@ -26919,7 +26245,7 @@
       </p:sp>
       <p:sp>
         <p:nvSpPr>
-          <p:cNvPr id="18" name="Rectangle 17"/>
+          <p:cNvPr id="17" name="Rectangle 16"/>
           <p:cNvSpPr/>
           <p:nvPr/>
         </p:nvSpPr>
@@ -26963,7 +26289,7 @@
       </p:sp>
       <p:sp>
         <p:nvSpPr>
-          <p:cNvPr id="19" name="Rectangle 18"/>
+          <p:cNvPr id="18" name="Rectangle 17"/>
           <p:cNvSpPr/>
           <p:nvPr/>
         </p:nvSpPr>
@@ -27007,7 +26333,7 @@
       </p:sp>
       <p:sp>
         <p:nvSpPr>
-          <p:cNvPr id="20" name="TextBox 19"/>
+          <p:cNvPr id="19" name="TextBox 18"/>
           <p:cNvSpPr txBox="1"/>
           <p:nvPr/>
         </p:nvSpPr>
@@ -27046,7 +26372,7 @@
       </p:sp>
       <p:sp>
         <p:nvSpPr>
-          <p:cNvPr id="21" name="Rectangle 20"/>
+          <p:cNvPr id="20" name="Rectangle 19"/>
           <p:cNvSpPr/>
           <p:nvPr/>
         </p:nvSpPr>
@@ -27090,7 +26416,7 @@
       </p:sp>
       <p:sp>
         <p:nvSpPr>
-          <p:cNvPr id="22" name="TextBox 21"/>
+          <p:cNvPr id="21" name="TextBox 20"/>
           <p:cNvSpPr txBox="1"/>
           <p:nvPr/>
         </p:nvSpPr>
@@ -27129,7 +26455,7 @@
       </p:sp>
       <p:sp>
         <p:nvSpPr>
-          <p:cNvPr id="23" name="TextBox 22"/>
+          <p:cNvPr id="22" name="TextBox 21"/>
           <p:cNvSpPr txBox="1"/>
           <p:nvPr/>
         </p:nvSpPr>
@@ -27168,7 +26494,7 @@
       </p:sp>
       <p:sp>
         <p:nvSpPr>
-          <p:cNvPr id="24" name="TextBox 23"/>
+          <p:cNvPr id="23" name="TextBox 22"/>
           <p:cNvSpPr txBox="1"/>
           <p:nvPr/>
         </p:nvSpPr>
@@ -27263,8 +26589,8 @@
         </p:nvSpPr>
         <p:spPr>
           <a:xfrm>
-            <a:off x="685800" y="628650"/>
-            <a:ext cx="10820400" cy="198120"/>
+            <a:off x="685800" y="685800"/>
+            <a:ext cx="9620250" cy="1524000"/>
           </a:xfrm>
           <a:prstGeom prst="rect">
             <a:avLst/>
@@ -27279,55 +26605,16 @@
           <a:p>
             <a:pPr algn="l">
               <a:lnSpc>
-                <a:spcPct val="120000"/>
-              </a:lnSpc>
-            </a:pPr>
-            <a:r>
-              <a:rPr sz="980" b="1" i="0" spc="160">
-                <a:solidFill>
-                  <a:srgbClr val="E94D1C"/>
+                <a:spcPct val="104000"/>
+              </a:lnSpc>
+            </a:pPr>
+            <a:r>
+              <a:rPr sz="3000" b="1" i="0">
+                <a:solidFill>
+                  <a:srgbClr val="21049A"/>
                 </a:solidFill>
                 <a:latin typeface="Roboto"/>
               </a:rPr>
-              <a:t>ENTRADA PARA O ADR</a:t>
-            </a:r>
-          </a:p>
-        </p:txBody>
-      </p:sp>
-      <p:sp>
-        <p:nvSpPr>
-          <p:cNvPr id="4" name="TextBox 3"/>
-          <p:cNvSpPr txBox="1"/>
-          <p:nvPr/>
-        </p:nvSpPr>
-        <p:spPr>
-          <a:xfrm>
-            <a:off x="685800" y="838200"/>
-            <a:ext cx="9620250" cy="1524000"/>
-          </a:xfrm>
-          <a:prstGeom prst="rect">
-            <a:avLst/>
-          </a:prstGeom>
-          <a:noFill/>
-        </p:spPr>
-        <p:txBody>
-          <a:bodyPr wrap="square" lIns="0" rIns="0" tIns="0" bIns="0" anchor="t">
-            <a:spAutoFit/>
-          </a:bodyPr>
-          <a:lstStyle/>
-          <a:p>
-            <a:pPr algn="l">
-              <a:lnSpc>
-                <a:spcPct val="104000"/>
-              </a:lnSpc>
-            </a:pPr>
-            <a:r>
-              <a:rPr sz="3000" b="1" i="0">
-                <a:solidFill>
-                  <a:srgbClr val="21049A"/>
-                </a:solidFill>
-                <a:latin typeface="Roboto"/>
-              </a:rPr>
               <a:t>Recomendação do grupo</a:t>
             </a:r>
           </a:p>
@@ -27335,7 +26622,7 @@
       </p:sp>
       <p:sp>
         <p:nvSpPr>
-          <p:cNvPr id="5" name="Rectangle 4"/>
+          <p:cNvPr id="4" name="Rectangle 3"/>
           <p:cNvSpPr/>
           <p:nvPr/>
         </p:nvSpPr>
@@ -27379,7 +26666,7 @@
       </p:sp>
       <p:sp>
         <p:nvSpPr>
-          <p:cNvPr id="6" name="TextBox 5"/>
+          <p:cNvPr id="5" name="TextBox 4"/>
           <p:cNvSpPr txBox="1"/>
           <p:nvPr/>
         </p:nvSpPr>
@@ -27418,7 +26705,7 @@
       </p:sp>
       <p:sp>
         <p:nvSpPr>
-          <p:cNvPr id="7" name="Rectangle 6"/>
+          <p:cNvPr id="6" name="Rectangle 5"/>
           <p:cNvSpPr/>
           <p:nvPr/>
         </p:nvSpPr>
@@ -27462,7 +26749,7 @@
       </p:sp>
       <p:sp>
         <p:nvSpPr>
-          <p:cNvPr id="8" name="TextBox 7"/>
+          <p:cNvPr id="7" name="TextBox 6"/>
           <p:cNvSpPr txBox="1"/>
           <p:nvPr/>
         </p:nvSpPr>
@@ -27501,7 +26788,7 @@
       </p:sp>
       <p:sp>
         <p:nvSpPr>
-          <p:cNvPr id="9" name="Rectangle 8"/>
+          <p:cNvPr id="8" name="Rectangle 7"/>
           <p:cNvSpPr/>
           <p:nvPr/>
         </p:nvSpPr>
@@ -27545,7 +26832,7 @@
       </p:sp>
       <p:sp>
         <p:nvSpPr>
-          <p:cNvPr id="10" name="TextBox 9"/>
+          <p:cNvPr id="9" name="TextBox 8"/>
           <p:cNvSpPr txBox="1"/>
           <p:nvPr/>
         </p:nvSpPr>
@@ -27584,7 +26871,7 @@
       </p:sp>
       <p:sp>
         <p:nvSpPr>
-          <p:cNvPr id="11" name="Chevron 10"/>
+          <p:cNvPr id="10" name="Chevron 9"/>
           <p:cNvSpPr/>
           <p:nvPr/>
         </p:nvSpPr>
@@ -27628,7 +26915,7 @@
       </p:sp>
       <p:sp>
         <p:nvSpPr>
-          <p:cNvPr id="12" name="TextBox 11"/>
+          <p:cNvPr id="11" name="TextBox 10"/>
           <p:cNvSpPr txBox="1"/>
           <p:nvPr/>
         </p:nvSpPr>
@@ -27667,7 +26954,7 @@
       </p:sp>
       <p:sp>
         <p:nvSpPr>
-          <p:cNvPr id="13" name="Rectangle 12"/>
+          <p:cNvPr id="12" name="Rectangle 11"/>
           <p:cNvSpPr/>
           <p:nvPr/>
         </p:nvSpPr>
@@ -27711,7 +26998,7 @@
       </p:sp>
       <p:sp>
         <p:nvSpPr>
-          <p:cNvPr id="14" name="TextBox 13"/>
+          <p:cNvPr id="13" name="TextBox 12"/>
           <p:cNvSpPr txBox="1"/>
           <p:nvPr/>
         </p:nvSpPr>
@@ -27753,7 +27040,7 @@
       </p:sp>
       <p:sp>
         <p:nvSpPr>
-          <p:cNvPr id="15" name="TextBox 14"/>
+          <p:cNvPr id="14" name="TextBox 13"/>
           <p:cNvSpPr txBox="1"/>
           <p:nvPr/>
         </p:nvSpPr>
@@ -27792,7 +27079,7 @@
       </p:sp>
       <p:sp>
         <p:nvSpPr>
-          <p:cNvPr id="16" name="TextBox 15"/>
+          <p:cNvPr id="15" name="TextBox 14"/>
           <p:cNvSpPr txBox="1"/>
           <p:nvPr/>
         </p:nvSpPr>
@@ -27887,8 +27174,8 @@
         </p:nvSpPr>
         <p:spPr>
           <a:xfrm>
-            <a:off x="685800" y="628650"/>
-            <a:ext cx="10820400" cy="198120"/>
+            <a:off x="685800" y="685800"/>
+            <a:ext cx="9620250" cy="1524000"/>
           </a:xfrm>
           <a:prstGeom prst="rect">
             <a:avLst/>
@@ -27903,17 +27190,17 @@
           <a:p>
             <a:pPr algn="l">
               <a:lnSpc>
-                <a:spcPct val="120000"/>
-              </a:lnSpc>
-            </a:pPr>
-            <a:r>
-              <a:rPr sz="980" b="1" i="0" spc="160">
-                <a:solidFill>
-                  <a:srgbClr val="E94D1C"/>
+                <a:spcPct val="104000"/>
+              </a:lnSpc>
+            </a:pPr>
+            <a:r>
+              <a:rPr sz="3000" b="1" i="0">
+                <a:solidFill>
+                  <a:srgbClr val="21049A"/>
                 </a:solidFill>
                 <a:latin typeface="Roboto"/>
               </a:rPr>
-              <a:t>ANTES E DEPOIS</a:t>
+              <a:t>O que mudou no ambiente do time</a:t>
             </a:r>
           </a:p>
         </p:txBody>
@@ -27926,8 +27213,8 @@
         </p:nvSpPr>
         <p:spPr>
           <a:xfrm>
-            <a:off x="685800" y="838200"/>
-            <a:ext cx="9620250" cy="1524000"/>
+            <a:off x="685800" y="2987992"/>
+            <a:ext cx="5143500" cy="182880"/>
           </a:xfrm>
           <a:prstGeom prst="rect">
             <a:avLst/>
@@ -27942,71 +27229,16 @@
           <a:p>
             <a:pPr algn="l">
               <a:lnSpc>
-                <a:spcPct val="104000"/>
-              </a:lnSpc>
-            </a:pPr>
-            <a:r>
-              <a:rPr sz="3000" b="1" i="0">
+                <a:spcPct val="120000"/>
+              </a:lnSpc>
+            </a:pPr>
+            <a:r>
+              <a:rPr sz="900" b="1" i="0" spc="120">
                 <a:solidFill>
                   <a:srgbClr val="21049A"/>
                 </a:solidFill>
                 <a:latin typeface="Roboto"/>
               </a:rPr>
-              <a:t>O que mudou no ambiente</a:t>
-            </a:r>
-          </a:p>
-          <a:p>
-            <a:pPr>
-              <a:lnSpc>
-                <a:spcPct val="104000"/>
-              </a:lnSpc>
-            </a:pPr>
-            <a:r>
-              <a:rPr sz="3000" b="1" i="0">
-                <a:solidFill>
-                  <a:srgbClr val="21049A"/>
-                </a:solidFill>
-                <a:latin typeface="Roboto"/>
-              </a:rPr>
-              <a:t>do time</a:t>
-            </a:r>
-          </a:p>
-        </p:txBody>
-      </p:sp>
-      <p:sp>
-        <p:nvSpPr>
-          <p:cNvPr id="5" name="TextBox 4"/>
-          <p:cNvSpPr txBox="1"/>
-          <p:nvPr/>
-        </p:nvSpPr>
-        <p:spPr>
-          <a:xfrm>
-            <a:off x="685800" y="2987992"/>
-            <a:ext cx="5143500" cy="182880"/>
-          </a:xfrm>
-          <a:prstGeom prst="rect">
-            <a:avLst/>
-          </a:prstGeom>
-          <a:noFill/>
-        </p:spPr>
-        <p:txBody>
-          <a:bodyPr wrap="square" lIns="0" rIns="0" tIns="0" bIns="0" anchor="t">
-            <a:spAutoFit/>
-          </a:bodyPr>
-          <a:lstStyle/>
-          <a:p>
-            <a:pPr algn="l">
-              <a:lnSpc>
-                <a:spcPct val="120000"/>
-              </a:lnSpc>
-            </a:pPr>
-            <a:r>
-              <a:rPr sz="900" b="1" i="0" spc="120">
-                <a:solidFill>
-                  <a:srgbClr val="21049A"/>
-                </a:solidFill>
-                <a:latin typeface="Roboto"/>
-              </a:rPr>
               <a:t>NO COMEÇO DO PROJETO</a:t>
             </a:r>
           </a:p>
@@ -28014,7 +27246,7 @@
       </p:sp>
       <p:sp>
         <p:nvSpPr>
-          <p:cNvPr id="6" name="Rectangle 5"/>
+          <p:cNvPr id="5" name="Rectangle 4"/>
           <p:cNvSpPr/>
           <p:nvPr/>
         </p:nvSpPr>
@@ -28058,7 +27290,7 @@
       </p:sp>
       <p:sp>
         <p:nvSpPr>
-          <p:cNvPr id="7" name="Rectangle 6"/>
+          <p:cNvPr id="6" name="Rectangle 5"/>
           <p:cNvSpPr/>
           <p:nvPr/>
         </p:nvSpPr>
@@ -28102,7 +27334,7 @@
       </p:sp>
       <p:sp>
         <p:nvSpPr>
-          <p:cNvPr id="8" name="TextBox 7"/>
+          <p:cNvPr id="7" name="TextBox 6"/>
           <p:cNvSpPr txBox="1"/>
           <p:nvPr/>
         </p:nvSpPr>
@@ -28141,7 +27373,7 @@
       </p:sp>
       <p:sp>
         <p:nvSpPr>
-          <p:cNvPr id="9" name="Rectangle 8"/>
+          <p:cNvPr id="8" name="Rectangle 7"/>
           <p:cNvSpPr/>
           <p:nvPr/>
         </p:nvSpPr>
@@ -28185,7 +27417,7 @@
       </p:sp>
       <p:sp>
         <p:nvSpPr>
-          <p:cNvPr id="10" name="TextBox 9"/>
+          <p:cNvPr id="9" name="TextBox 8"/>
           <p:cNvSpPr txBox="1"/>
           <p:nvPr/>
         </p:nvSpPr>
@@ -28224,7 +27456,7 @@
       </p:sp>
       <p:sp>
         <p:nvSpPr>
-          <p:cNvPr id="11" name="TextBox 10"/>
+          <p:cNvPr id="10" name="TextBox 9"/>
           <p:cNvSpPr txBox="1"/>
           <p:nvPr/>
         </p:nvSpPr>
@@ -28263,7 +27495,7 @@
       </p:sp>
       <p:sp>
         <p:nvSpPr>
-          <p:cNvPr id="12" name="Rectangle 11"/>
+          <p:cNvPr id="11" name="Rectangle 10"/>
           <p:cNvSpPr/>
           <p:nvPr/>
         </p:nvSpPr>
@@ -28307,7 +27539,7 @@
       </p:sp>
       <p:sp>
         <p:nvSpPr>
-          <p:cNvPr id="13" name="Rectangle 12"/>
+          <p:cNvPr id="12" name="Rectangle 11"/>
           <p:cNvSpPr/>
           <p:nvPr/>
         </p:nvSpPr>
@@ -28351,7 +27583,7 @@
       </p:sp>
       <p:sp>
         <p:nvSpPr>
-          <p:cNvPr id="14" name="TextBox 13"/>
+          <p:cNvPr id="13" name="TextBox 12"/>
           <p:cNvSpPr txBox="1"/>
           <p:nvPr/>
         </p:nvSpPr>
@@ -28390,7 +27622,7 @@
       </p:sp>
       <p:sp>
         <p:nvSpPr>
-          <p:cNvPr id="15" name="Rectangle 14"/>
+          <p:cNvPr id="14" name="Rectangle 13"/>
           <p:cNvSpPr/>
           <p:nvPr/>
         </p:nvSpPr>
@@ -28434,7 +27666,7 @@
       </p:sp>
       <p:sp>
         <p:nvSpPr>
-          <p:cNvPr id="16" name="TextBox 15"/>
+          <p:cNvPr id="15" name="TextBox 14"/>
           <p:cNvSpPr txBox="1"/>
           <p:nvPr/>
         </p:nvSpPr>
@@ -28473,7 +27705,7 @@
       </p:sp>
       <p:sp>
         <p:nvSpPr>
-          <p:cNvPr id="17" name="TextBox 16"/>
+          <p:cNvPr id="16" name="TextBox 15"/>
           <p:cNvSpPr txBox="1"/>
           <p:nvPr/>
         </p:nvSpPr>
@@ -28512,7 +27744,7 @@
       </p:sp>
       <p:sp>
         <p:nvSpPr>
-          <p:cNvPr id="18" name="TextBox 17"/>
+          <p:cNvPr id="17" name="TextBox 16"/>
           <p:cNvSpPr txBox="1"/>
           <p:nvPr/>
         </p:nvSpPr>
@@ -28607,8 +27839,8 @@
         </p:nvSpPr>
         <p:spPr>
           <a:xfrm>
-            <a:off x="685800" y="628650"/>
-            <a:ext cx="10820400" cy="198120"/>
+            <a:off x="685800" y="685800"/>
+            <a:ext cx="9620250" cy="1524000"/>
           </a:xfrm>
           <a:prstGeom prst="rect">
             <a:avLst/>
@@ -28623,63 +27855,24 @@
           <a:p>
             <a:pPr algn="l">
               <a:lnSpc>
-                <a:spcPct val="120000"/>
-              </a:lnSpc>
-            </a:pPr>
-            <a:r>
-              <a:rPr sz="980" b="1" i="0" spc="160">
-                <a:solidFill>
-                  <a:srgbClr val="E94D1C"/>
+                <a:spcPct val="104000"/>
+              </a:lnSpc>
+            </a:pPr>
+            <a:r>
+              <a:rPr sz="3000" b="1" i="0">
+                <a:solidFill>
+                  <a:srgbClr val="21049A"/>
                 </a:solidFill>
                 <a:latin typeface="Roboto"/>
               </a:rPr>
-              <a:t>O QUE NÃO ESTAMOS AFIRMANDO</a:t>
-            </a:r>
-          </a:p>
-        </p:txBody>
-      </p:sp>
-      <p:sp>
-        <p:nvSpPr>
-          <p:cNvPr id="4" name="TextBox 3"/>
-          <p:cNvSpPr txBox="1"/>
-          <p:nvPr/>
-        </p:nvSpPr>
-        <p:spPr>
-          <a:xfrm>
-            <a:off x="685800" y="838200"/>
-            <a:ext cx="9620250" cy="1524000"/>
-          </a:xfrm>
-          <a:prstGeom prst="rect">
-            <a:avLst/>
-          </a:prstGeom>
-          <a:noFill/>
-        </p:spPr>
-        <p:txBody>
-          <a:bodyPr wrap="square" lIns="0" rIns="0" tIns="0" bIns="0" anchor="t">
-            <a:spAutoFit/>
-          </a:bodyPr>
-          <a:lstStyle/>
-          <a:p>
-            <a:pPr algn="l">
-              <a:lnSpc>
-                <a:spcPct val="104000"/>
-              </a:lnSpc>
-            </a:pPr>
-            <a:r>
-              <a:rPr sz="3000" b="1" i="0">
-                <a:solidFill>
-                  <a:srgbClr val="21049A"/>
-                </a:solidFill>
-                <a:latin typeface="Roboto"/>
-              </a:rPr>
-              <a:t>Pendências, com número de item</a:t>
-            </a:r>
-          </a:p>
-        </p:txBody>
-      </p:sp>
-      <p:sp>
-        <p:nvSpPr>
-          <p:cNvPr id="5" name="Rectangle 4"/>
+              <a:t>O que não estamos afirmando</a:t>
+            </a:r>
+          </a:p>
+        </p:txBody>
+      </p:sp>
+      <p:sp>
+        <p:nvSpPr>
+          <p:cNvPr id="4" name="Rectangle 3"/>
           <p:cNvSpPr/>
           <p:nvPr/>
         </p:nvSpPr>
@@ -28723,7 +27916,7 @@
       </p:sp>
       <p:sp>
         <p:nvSpPr>
-          <p:cNvPr id="6" name="TextBox 5"/>
+          <p:cNvPr id="5" name="TextBox 4"/>
           <p:cNvSpPr txBox="1"/>
           <p:nvPr/>
         </p:nvSpPr>
@@ -28762,7 +27955,7 @@
       </p:sp>
       <p:sp>
         <p:nvSpPr>
-          <p:cNvPr id="7" name="Rectangle 6"/>
+          <p:cNvPr id="6" name="Rectangle 5"/>
           <p:cNvSpPr/>
           <p:nvPr/>
         </p:nvSpPr>
@@ -28806,7 +27999,7 @@
       </p:sp>
       <p:sp>
         <p:nvSpPr>
-          <p:cNvPr id="8" name="TextBox 7"/>
+          <p:cNvPr id="7" name="TextBox 6"/>
           <p:cNvSpPr txBox="1"/>
           <p:nvPr/>
         </p:nvSpPr>
@@ -28845,7 +28038,7 @@
       </p:sp>
       <p:sp>
         <p:nvSpPr>
-          <p:cNvPr id="9" name="Document 8"/>
+          <p:cNvPr id="8" name="Document 7"/>
           <p:cNvSpPr/>
           <p:nvPr/>
         </p:nvSpPr>
@@ -28889,7 +28082,7 @@
       </p:sp>
       <p:sp>
         <p:nvSpPr>
-          <p:cNvPr id="10" name="TextBox 9"/>
+          <p:cNvPr id="9" name="TextBox 8"/>
           <p:cNvSpPr txBox="1"/>
           <p:nvPr/>
         </p:nvSpPr>
@@ -28928,7 +28121,7 @@
       </p:sp>
       <p:sp>
         <p:nvSpPr>
-          <p:cNvPr id="11" name="Rectangle 10"/>
+          <p:cNvPr id="10" name="Rectangle 9"/>
           <p:cNvSpPr/>
           <p:nvPr/>
         </p:nvSpPr>
@@ -28972,7 +28165,7 @@
       </p:sp>
       <p:sp>
         <p:nvSpPr>
-          <p:cNvPr id="12" name="TextBox 11"/>
+          <p:cNvPr id="11" name="TextBox 10"/>
           <p:cNvSpPr txBox="1"/>
           <p:nvPr/>
         </p:nvSpPr>
@@ -29090,7 +28283,7 @@
       </p:sp>
       <p:sp>
         <p:nvSpPr>
-          <p:cNvPr id="13" name="TextBox 12"/>
+          <p:cNvPr id="12" name="TextBox 11"/>
           <p:cNvSpPr txBox="1"/>
           <p:nvPr/>
         </p:nvSpPr>
@@ -29129,7 +28322,7 @@
       </p:sp>
       <p:sp>
         <p:nvSpPr>
-          <p:cNvPr id="14" name="TextBox 13"/>
+          <p:cNvPr id="13" name="TextBox 12"/>
           <p:cNvSpPr txBox="1"/>
           <p:nvPr/>
         </p:nvSpPr>
@@ -29645,8 +28838,8 @@
         </p:nvSpPr>
         <p:spPr>
           <a:xfrm>
-            <a:off x="685800" y="628650"/>
-            <a:ext cx="10820400" cy="198120"/>
+            <a:off x="685800" y="685800"/>
+            <a:ext cx="9620250" cy="1524000"/>
           </a:xfrm>
           <a:prstGeom prst="rect">
             <a:avLst/>
@@ -29661,55 +28854,16 @@
           <a:p>
             <a:pPr algn="l">
               <a:lnSpc>
-                <a:spcPct val="120000"/>
-              </a:lnSpc>
-            </a:pPr>
-            <a:r>
-              <a:rPr sz="980" b="1" i="0" spc="160">
-                <a:solidFill>
-                  <a:srgbClr val="E94D1C"/>
+                <a:spcPct val="104000"/>
+              </a:lnSpc>
+            </a:pPr>
+            <a:r>
+              <a:rPr sz="3000" b="1" i="0">
+                <a:solidFill>
+                  <a:srgbClr val="21049A"/>
                 </a:solidFill>
                 <a:latin typeface="Roboto"/>
               </a:rPr>
-              <a:t>FONTES CITADAS</a:t>
-            </a:r>
-          </a:p>
-        </p:txBody>
-      </p:sp>
-      <p:sp>
-        <p:nvSpPr>
-          <p:cNvPr id="4" name="TextBox 3"/>
-          <p:cNvSpPr txBox="1"/>
-          <p:nvPr/>
-        </p:nvSpPr>
-        <p:spPr>
-          <a:xfrm>
-            <a:off x="685800" y="838200"/>
-            <a:ext cx="9620250" cy="1524000"/>
-          </a:xfrm>
-          <a:prstGeom prst="rect">
-            <a:avLst/>
-          </a:prstGeom>
-          <a:noFill/>
-        </p:spPr>
-        <p:txBody>
-          <a:bodyPr wrap="square" lIns="0" rIns="0" tIns="0" bIns="0" anchor="t">
-            <a:spAutoFit/>
-          </a:bodyPr>
-          <a:lstStyle/>
-          <a:p>
-            <a:pPr algn="l">
-              <a:lnSpc>
-                <a:spcPct val="104000"/>
-              </a:lnSpc>
-            </a:pPr>
-            <a:r>
-              <a:rPr sz="3000" b="1" i="0">
-                <a:solidFill>
-                  <a:srgbClr val="21049A"/>
-                </a:solidFill>
-                <a:latin typeface="Roboto"/>
-              </a:rPr>
               <a:t>Referências</a:t>
             </a:r>
           </a:p>
@@ -29717,7 +28871,7 @@
       </p:sp>
       <p:sp>
         <p:nvSpPr>
-          <p:cNvPr id="5" name="Rectangle 4"/>
+          <p:cNvPr id="4" name="Rectangle 3"/>
           <p:cNvSpPr/>
           <p:nvPr/>
         </p:nvSpPr>
@@ -29761,7 +28915,7 @@
       </p:sp>
       <p:sp>
         <p:nvSpPr>
-          <p:cNvPr id="6" name="TextBox 5"/>
+          <p:cNvPr id="5" name="TextBox 4"/>
           <p:cNvSpPr txBox="1"/>
           <p:nvPr/>
         </p:nvSpPr>
@@ -29800,7 +28954,7 @@
       </p:sp>
       <p:sp>
         <p:nvSpPr>
-          <p:cNvPr id="7" name="Rectangle 6"/>
+          <p:cNvPr id="6" name="Rectangle 5"/>
           <p:cNvSpPr/>
           <p:nvPr/>
         </p:nvSpPr>
@@ -29844,7 +28998,7 @@
       </p:sp>
       <p:sp>
         <p:nvSpPr>
-          <p:cNvPr id="8" name="TextBox 7"/>
+          <p:cNvPr id="7" name="TextBox 6"/>
           <p:cNvSpPr txBox="1"/>
           <p:nvPr/>
         </p:nvSpPr>
@@ -29883,7 +29037,7 @@
       </p:sp>
       <p:sp>
         <p:nvSpPr>
-          <p:cNvPr id="9" name="Rectangle 8"/>
+          <p:cNvPr id="8" name="Rectangle 7"/>
           <p:cNvSpPr/>
           <p:nvPr/>
         </p:nvSpPr>
@@ -29927,7 +29081,7 @@
       </p:sp>
       <p:sp>
         <p:nvSpPr>
-          <p:cNvPr id="10" name="TextBox 9"/>
+          <p:cNvPr id="9" name="TextBox 8"/>
           <p:cNvSpPr txBox="1"/>
           <p:nvPr/>
         </p:nvSpPr>
@@ -29966,7 +29120,7 @@
       </p:sp>
       <p:sp>
         <p:nvSpPr>
-          <p:cNvPr id="11" name="Rectangle 10"/>
+          <p:cNvPr id="10" name="Rectangle 9"/>
           <p:cNvSpPr/>
           <p:nvPr/>
         </p:nvSpPr>
@@ -30010,7 +29164,7 @@
       </p:sp>
       <p:sp>
         <p:nvSpPr>
-          <p:cNvPr id="12" name="TextBox 11"/>
+          <p:cNvPr id="11" name="TextBox 10"/>
           <p:cNvSpPr txBox="1"/>
           <p:nvPr/>
         </p:nvSpPr>
@@ -30049,7 +29203,7 @@
       </p:sp>
       <p:sp>
         <p:nvSpPr>
-          <p:cNvPr id="13" name="Rectangle 12"/>
+          <p:cNvPr id="12" name="Rectangle 11"/>
           <p:cNvSpPr/>
           <p:nvPr/>
         </p:nvSpPr>
@@ -30093,7 +29247,7 @@
       </p:sp>
       <p:sp>
         <p:nvSpPr>
-          <p:cNvPr id="14" name="TextBox 13"/>
+          <p:cNvPr id="13" name="TextBox 12"/>
           <p:cNvSpPr txBox="1"/>
           <p:nvPr/>
         </p:nvSpPr>
@@ -30132,7 +29286,7 @@
       </p:sp>
       <p:sp>
         <p:nvSpPr>
-          <p:cNvPr id="15" name="Rectangle 14"/>
+          <p:cNvPr id="14" name="Rectangle 13"/>
           <p:cNvSpPr/>
           <p:nvPr/>
         </p:nvSpPr>
@@ -30176,7 +29330,7 @@
       </p:sp>
       <p:sp>
         <p:nvSpPr>
-          <p:cNvPr id="16" name="TextBox 15"/>
+          <p:cNvPr id="15" name="TextBox 14"/>
           <p:cNvSpPr txBox="1"/>
           <p:nvPr/>
         </p:nvSpPr>
@@ -30215,7 +29369,7 @@
       </p:sp>
       <p:sp>
         <p:nvSpPr>
-          <p:cNvPr id="17" name="Rectangle 16"/>
+          <p:cNvPr id="16" name="Rectangle 15"/>
           <p:cNvSpPr/>
           <p:nvPr/>
         </p:nvSpPr>
@@ -30259,7 +29413,7 @@
       </p:sp>
       <p:sp>
         <p:nvSpPr>
-          <p:cNvPr id="18" name="TextBox 17"/>
+          <p:cNvPr id="17" name="TextBox 16"/>
           <p:cNvSpPr txBox="1"/>
           <p:nvPr/>
         </p:nvSpPr>
@@ -30298,7 +29452,7 @@
       </p:sp>
       <p:sp>
         <p:nvSpPr>
-          <p:cNvPr id="19" name="Rectangle 18"/>
+          <p:cNvPr id="18" name="Rectangle 17"/>
           <p:cNvSpPr/>
           <p:nvPr/>
         </p:nvSpPr>
@@ -30342,7 +29496,7 @@
       </p:sp>
       <p:sp>
         <p:nvSpPr>
-          <p:cNvPr id="20" name="TextBox 19"/>
+          <p:cNvPr id="19" name="TextBox 18"/>
           <p:cNvSpPr txBox="1"/>
           <p:nvPr/>
         </p:nvSpPr>
@@ -30381,7 +29535,7 @@
       </p:sp>
       <p:sp>
         <p:nvSpPr>
-          <p:cNvPr id="21" name="TextBox 20"/>
+          <p:cNvPr id="20" name="TextBox 19"/>
           <p:cNvSpPr txBox="1"/>
           <p:nvPr/>
         </p:nvSpPr>
@@ -30420,7 +29574,7 @@
       </p:sp>
       <p:sp>
         <p:nvSpPr>
-          <p:cNvPr id="22" name="TextBox 21"/>
+          <p:cNvPr id="21" name="TextBox 20"/>
           <p:cNvSpPr txBox="1"/>
           <p:nvPr/>
         </p:nvSpPr>
@@ -30515,8 +29669,8 @@
         </p:nvSpPr>
         <p:spPr>
           <a:xfrm>
-            <a:off x="685800" y="628650"/>
-            <a:ext cx="10820400" cy="198120"/>
+            <a:off x="685800" y="685800"/>
+            <a:ext cx="9620250" cy="1524000"/>
           </a:xfrm>
           <a:prstGeom prst="rect">
             <a:avLst/>
@@ -30531,63 +29685,24 @@
           <a:p>
             <a:pPr algn="l">
               <a:lnSpc>
-                <a:spcPct val="120000"/>
-              </a:lnSpc>
-            </a:pPr>
-            <a:r>
-              <a:rPr sz="980" b="1" i="0" spc="160">
-                <a:solidFill>
-                  <a:srgbClr val="E94D1C"/>
+                <a:spcPct val="104000"/>
+              </a:lnSpc>
+            </a:pPr>
+            <a:r>
+              <a:rPr sz="3000" b="1" i="0">
+                <a:solidFill>
+                  <a:srgbClr val="21049A"/>
                 </a:solidFill>
                 <a:latin typeface="Roboto"/>
               </a:rPr>
-              <a:t>LINHA DO TEMPO</a:t>
-            </a:r>
-          </a:p>
-        </p:txBody>
-      </p:sp>
-      <p:sp>
-        <p:nvSpPr>
-          <p:cNvPr id="4" name="TextBox 3"/>
-          <p:cNvSpPr txBox="1"/>
-          <p:nvPr/>
-        </p:nvSpPr>
-        <p:spPr>
-          <a:xfrm>
-            <a:off x="685800" y="838200"/>
-            <a:ext cx="9620250" cy="1524000"/>
-          </a:xfrm>
-          <a:prstGeom prst="rect">
-            <a:avLst/>
-          </a:prstGeom>
-          <a:noFill/>
-        </p:spPr>
-        <p:txBody>
-          <a:bodyPr wrap="square" lIns="0" rIns="0" tIns="0" bIns="0" anchor="t">
-            <a:spAutoFit/>
-          </a:bodyPr>
-          <a:lstStyle/>
-          <a:p>
-            <a:pPr algn="l">
-              <a:lnSpc>
-                <a:spcPct val="104000"/>
-              </a:lnSpc>
-            </a:pPr>
-            <a:r>
-              <a:rPr sz="3000" b="1" i="0">
-                <a:solidFill>
-                  <a:srgbClr val="21049A"/>
-                </a:solidFill>
-                <a:latin typeface="Roboto"/>
-              </a:rPr>
-              <a:t>Marcos do isolamento de processos</a:t>
-            </a:r>
-          </a:p>
-        </p:txBody>
-      </p:sp>
-      <p:sp>
-        <p:nvSpPr>
-          <p:cNvPr id="5" name="Rectangle 4"/>
+              <a:t>Linha do tempo do isolamento de processos</a:t>
+            </a:r>
+          </a:p>
+        </p:txBody>
+      </p:sp>
+      <p:sp>
+        <p:nvSpPr>
+          <p:cNvPr id="4" name="Rectangle 3"/>
           <p:cNvSpPr/>
           <p:nvPr/>
         </p:nvSpPr>
@@ -30631,7 +29746,7 @@
       </p:sp>
       <p:sp>
         <p:nvSpPr>
-          <p:cNvPr id="6" name="Rounded Rectangle 5"/>
+          <p:cNvPr id="5" name="Rounded Rectangle 4"/>
           <p:cNvSpPr/>
           <p:nvPr/>
         </p:nvSpPr>
@@ -30677,7 +29792,7 @@
       </p:sp>
       <p:sp>
         <p:nvSpPr>
-          <p:cNvPr id="7" name="TextBox 6"/>
+          <p:cNvPr id="6" name="TextBox 5"/>
           <p:cNvSpPr txBox="1"/>
           <p:nvPr/>
         </p:nvSpPr>
@@ -30716,7 +29831,7 @@
       </p:sp>
       <p:sp>
         <p:nvSpPr>
-          <p:cNvPr id="8" name="TextBox 7"/>
+          <p:cNvPr id="7" name="TextBox 6"/>
           <p:cNvSpPr txBox="1"/>
           <p:nvPr/>
         </p:nvSpPr>
@@ -30755,7 +29870,7 @@
       </p:sp>
       <p:sp>
         <p:nvSpPr>
-          <p:cNvPr id="9" name="Rounded Rectangle 8"/>
+          <p:cNvPr id="8" name="Rounded Rectangle 7"/>
           <p:cNvSpPr/>
           <p:nvPr/>
         </p:nvSpPr>
@@ -30801,7 +29916,7 @@
       </p:sp>
       <p:sp>
         <p:nvSpPr>
-          <p:cNvPr id="10" name="TextBox 9"/>
+          <p:cNvPr id="9" name="TextBox 8"/>
           <p:cNvSpPr txBox="1"/>
           <p:nvPr/>
         </p:nvSpPr>
@@ -30840,7 +29955,7 @@
       </p:sp>
       <p:sp>
         <p:nvSpPr>
-          <p:cNvPr id="11" name="TextBox 10"/>
+          <p:cNvPr id="10" name="TextBox 9"/>
           <p:cNvSpPr txBox="1"/>
           <p:nvPr/>
         </p:nvSpPr>
@@ -30879,7 +29994,7 @@
       </p:sp>
       <p:sp>
         <p:nvSpPr>
-          <p:cNvPr id="12" name="Rounded Rectangle 11"/>
+          <p:cNvPr id="11" name="Rounded Rectangle 10"/>
           <p:cNvSpPr/>
           <p:nvPr/>
         </p:nvSpPr>
@@ -30925,7 +30040,7 @@
       </p:sp>
       <p:sp>
         <p:nvSpPr>
-          <p:cNvPr id="13" name="TextBox 12"/>
+          <p:cNvPr id="12" name="TextBox 11"/>
           <p:cNvSpPr txBox="1"/>
           <p:nvPr/>
         </p:nvSpPr>
@@ -30964,7 +30079,7 @@
       </p:sp>
       <p:sp>
         <p:nvSpPr>
-          <p:cNvPr id="14" name="TextBox 13"/>
+          <p:cNvPr id="13" name="TextBox 12"/>
           <p:cNvSpPr txBox="1"/>
           <p:nvPr/>
         </p:nvSpPr>
@@ -31003,7 +30118,7 @@
       </p:sp>
       <p:sp>
         <p:nvSpPr>
-          <p:cNvPr id="15" name="Rounded Rectangle 14"/>
+          <p:cNvPr id="14" name="Rounded Rectangle 13"/>
           <p:cNvSpPr/>
           <p:nvPr/>
         </p:nvSpPr>
@@ -31049,7 +30164,7 @@
       </p:sp>
       <p:sp>
         <p:nvSpPr>
-          <p:cNvPr id="16" name="TextBox 15"/>
+          <p:cNvPr id="15" name="TextBox 14"/>
           <p:cNvSpPr txBox="1"/>
           <p:nvPr/>
         </p:nvSpPr>
@@ -31088,7 +30203,7 @@
       </p:sp>
       <p:sp>
         <p:nvSpPr>
-          <p:cNvPr id="17" name="TextBox 16"/>
+          <p:cNvPr id="16" name="TextBox 15"/>
           <p:cNvSpPr txBox="1"/>
           <p:nvPr/>
         </p:nvSpPr>
@@ -31127,7 +30242,7 @@
       </p:sp>
       <p:sp>
         <p:nvSpPr>
-          <p:cNvPr id="18" name="Rounded Rectangle 17"/>
+          <p:cNvPr id="17" name="Rounded Rectangle 16"/>
           <p:cNvSpPr/>
           <p:nvPr/>
         </p:nvSpPr>
@@ -31173,7 +30288,7 @@
       </p:sp>
       <p:sp>
         <p:nvSpPr>
-          <p:cNvPr id="19" name="TextBox 18"/>
+          <p:cNvPr id="18" name="TextBox 17"/>
           <p:cNvSpPr txBox="1"/>
           <p:nvPr/>
         </p:nvSpPr>
@@ -31212,7 +30327,7 @@
       </p:sp>
       <p:sp>
         <p:nvSpPr>
-          <p:cNvPr id="20" name="TextBox 19"/>
+          <p:cNvPr id="19" name="TextBox 18"/>
           <p:cNvSpPr txBox="1"/>
           <p:nvPr/>
         </p:nvSpPr>
@@ -31251,7 +30366,7 @@
       </p:sp>
       <p:sp>
         <p:nvSpPr>
-          <p:cNvPr id="21" name="Rounded Rectangle 20"/>
+          <p:cNvPr id="20" name="Rounded Rectangle 19"/>
           <p:cNvSpPr/>
           <p:nvPr/>
         </p:nvSpPr>
@@ -31297,7 +30412,7 @@
       </p:sp>
       <p:sp>
         <p:nvSpPr>
-          <p:cNvPr id="22" name="TextBox 21"/>
+          <p:cNvPr id="21" name="TextBox 20"/>
           <p:cNvSpPr txBox="1"/>
           <p:nvPr/>
         </p:nvSpPr>
@@ -31336,7 +30451,7 @@
       </p:sp>
       <p:sp>
         <p:nvSpPr>
-          <p:cNvPr id="23" name="TextBox 22"/>
+          <p:cNvPr id="22" name="TextBox 21"/>
           <p:cNvSpPr txBox="1"/>
           <p:nvPr/>
         </p:nvSpPr>
@@ -31375,7 +30490,7 @@
       </p:sp>
       <p:sp>
         <p:nvSpPr>
-          <p:cNvPr id="24" name="Rounded Rectangle 23"/>
+          <p:cNvPr id="23" name="Rounded Rectangle 22"/>
           <p:cNvSpPr/>
           <p:nvPr/>
         </p:nvSpPr>
@@ -31421,7 +30536,7 @@
       </p:sp>
       <p:sp>
         <p:nvSpPr>
-          <p:cNvPr id="25" name="TextBox 24"/>
+          <p:cNvPr id="24" name="TextBox 23"/>
           <p:cNvSpPr txBox="1"/>
           <p:nvPr/>
         </p:nvSpPr>
@@ -31460,7 +30575,7 @@
       </p:sp>
       <p:sp>
         <p:nvSpPr>
-          <p:cNvPr id="26" name="TextBox 25"/>
+          <p:cNvPr id="25" name="TextBox 24"/>
           <p:cNvSpPr txBox="1"/>
           <p:nvPr/>
         </p:nvSpPr>
@@ -31499,7 +30614,7 @@
       </p:sp>
       <p:sp>
         <p:nvSpPr>
-          <p:cNvPr id="27" name="Rectangle 26"/>
+          <p:cNvPr id="26" name="Rectangle 25"/>
           <p:cNvSpPr/>
           <p:nvPr/>
         </p:nvSpPr>
@@ -31543,7 +30658,7 @@
       </p:sp>
       <p:sp>
         <p:nvSpPr>
-          <p:cNvPr id="28" name="TextBox 27"/>
+          <p:cNvPr id="27" name="TextBox 26"/>
           <p:cNvSpPr txBox="1"/>
           <p:nvPr/>
         </p:nvSpPr>
@@ -31582,7 +30697,7 @@
       </p:sp>
       <p:sp>
         <p:nvSpPr>
-          <p:cNvPr id="29" name="TextBox 28"/>
+          <p:cNvPr id="28" name="TextBox 27"/>
           <p:cNvSpPr txBox="1"/>
           <p:nvPr/>
         </p:nvSpPr>
@@ -31621,7 +30736,7 @@
       </p:sp>
       <p:sp>
         <p:nvSpPr>
-          <p:cNvPr id="30" name="TextBox 29"/>
+          <p:cNvPr id="29" name="TextBox 28"/>
           <p:cNvSpPr txBox="1"/>
           <p:nvPr/>
         </p:nvSpPr>
@@ -31716,8 +30831,8 @@
         </p:nvSpPr>
         <p:spPr>
           <a:xfrm>
-            <a:off x="685800" y="628650"/>
-            <a:ext cx="10820400" cy="198120"/>
+            <a:off x="685800" y="685800"/>
+            <a:ext cx="9620250" cy="1524000"/>
           </a:xfrm>
           <a:prstGeom prst="rect">
             <a:avLst/>
@@ -31732,17 +30847,17 @@
           <a:p>
             <a:pPr algn="l">
               <a:lnSpc>
-                <a:spcPct val="120000"/>
-              </a:lnSpc>
-            </a:pPr>
-            <a:r>
-              <a:rPr sz="980" b="1" i="0" spc="160">
-                <a:solidFill>
-                  <a:srgbClr val="E94D1C"/>
+                <a:spcPct val="104000"/>
+              </a:lnSpc>
+            </a:pPr>
+            <a:r>
+              <a:rPr sz="3000" b="1" i="0">
+                <a:solidFill>
+                  <a:srgbClr val="21049A"/>
                 </a:solidFill>
                 <a:latin typeface="Roboto"/>
               </a:rPr>
-              <a:t>DUAS DEFINIÇÕES</a:t>
+              <a:t>Container e imagem</a:t>
             </a:r>
           </a:p>
         </p:txBody>
@@ -31755,8 +30870,8 @@
         </p:nvSpPr>
         <p:spPr>
           <a:xfrm>
-            <a:off x="685800" y="838200"/>
-            <a:ext cx="9620250" cy="1524000"/>
+            <a:off x="685800" y="2855976"/>
+            <a:ext cx="5143500" cy="182880"/>
           </a:xfrm>
           <a:prstGeom prst="rect">
             <a:avLst/>
@@ -31771,55 +30886,16 @@
           <a:p>
             <a:pPr algn="l">
               <a:lnSpc>
-                <a:spcPct val="104000"/>
-              </a:lnSpc>
-            </a:pPr>
-            <a:r>
-              <a:rPr sz="3000" b="1" i="0">
+                <a:spcPct val="120000"/>
+              </a:lnSpc>
+            </a:pPr>
+            <a:r>
+              <a:rPr sz="900" b="1" i="0" spc="120">
                 <a:solidFill>
                   <a:srgbClr val="21049A"/>
                 </a:solidFill>
                 <a:latin typeface="Roboto"/>
               </a:rPr>
-              <a:t>Container e imagem</a:t>
-            </a:r>
-          </a:p>
-        </p:txBody>
-      </p:sp>
-      <p:sp>
-        <p:nvSpPr>
-          <p:cNvPr id="5" name="TextBox 4"/>
-          <p:cNvSpPr txBox="1"/>
-          <p:nvPr/>
-        </p:nvSpPr>
-        <p:spPr>
-          <a:xfrm>
-            <a:off x="685800" y="2855976"/>
-            <a:ext cx="5143500" cy="182880"/>
-          </a:xfrm>
-          <a:prstGeom prst="rect">
-            <a:avLst/>
-          </a:prstGeom>
-          <a:noFill/>
-        </p:spPr>
-        <p:txBody>
-          <a:bodyPr wrap="square" lIns="0" rIns="0" tIns="0" bIns="0" anchor="t">
-            <a:spAutoFit/>
-          </a:bodyPr>
-          <a:lstStyle/>
-          <a:p>
-            <a:pPr algn="l">
-              <a:lnSpc>
-                <a:spcPct val="120000"/>
-              </a:lnSpc>
-            </a:pPr>
-            <a:r>
-              <a:rPr sz="900" b="1" i="0" spc="120">
-                <a:solidFill>
-                  <a:srgbClr val="21049A"/>
-                </a:solidFill>
-                <a:latin typeface="Roboto"/>
-              </a:rPr>
               <a:t>CONTAINER</a:t>
             </a:r>
           </a:p>
@@ -31827,7 +30903,7 @@
       </p:sp>
       <p:sp>
         <p:nvSpPr>
-          <p:cNvPr id="6" name="Rectangle 5"/>
+          <p:cNvPr id="5" name="Rectangle 4"/>
           <p:cNvSpPr/>
           <p:nvPr/>
         </p:nvSpPr>
@@ -31871,7 +30947,7 @@
       </p:sp>
       <p:sp>
         <p:nvSpPr>
-          <p:cNvPr id="7" name="Rectangle 6"/>
+          <p:cNvPr id="6" name="Rectangle 5"/>
           <p:cNvSpPr/>
           <p:nvPr/>
         </p:nvSpPr>
@@ -31915,7 +30991,7 @@
       </p:sp>
       <p:sp>
         <p:nvSpPr>
-          <p:cNvPr id="8" name="TextBox 7"/>
+          <p:cNvPr id="7" name="TextBox 6"/>
           <p:cNvSpPr txBox="1"/>
           <p:nvPr/>
         </p:nvSpPr>
@@ -31954,7 +31030,7 @@
       </p:sp>
       <p:sp>
         <p:nvSpPr>
-          <p:cNvPr id="9" name="TextBox 8"/>
+          <p:cNvPr id="8" name="TextBox 7"/>
           <p:cNvSpPr txBox="1"/>
           <p:nvPr/>
         </p:nvSpPr>
@@ -31993,7 +31069,7 @@
       </p:sp>
       <p:sp>
         <p:nvSpPr>
-          <p:cNvPr id="10" name="Rectangle 9"/>
+          <p:cNvPr id="9" name="Rectangle 8"/>
           <p:cNvSpPr/>
           <p:nvPr/>
         </p:nvSpPr>
@@ -32037,7 +31113,7 @@
       </p:sp>
       <p:sp>
         <p:nvSpPr>
-          <p:cNvPr id="11" name="Rectangle 10"/>
+          <p:cNvPr id="10" name="Rectangle 9"/>
           <p:cNvSpPr/>
           <p:nvPr/>
         </p:nvSpPr>
@@ -32081,7 +31157,7 @@
       </p:sp>
       <p:sp>
         <p:nvSpPr>
-          <p:cNvPr id="12" name="TextBox 11"/>
+          <p:cNvPr id="11" name="TextBox 10"/>
           <p:cNvSpPr txBox="1"/>
           <p:nvPr/>
         </p:nvSpPr>
@@ -32120,7 +31196,7 @@
       </p:sp>
       <p:sp>
         <p:nvSpPr>
-          <p:cNvPr id="13" name="Rectangle 12"/>
+          <p:cNvPr id="12" name="Rectangle 11"/>
           <p:cNvSpPr/>
           <p:nvPr/>
         </p:nvSpPr>
@@ -32164,7 +31240,7 @@
       </p:sp>
       <p:sp>
         <p:nvSpPr>
-          <p:cNvPr id="14" name="TextBox 13"/>
+          <p:cNvPr id="13" name="TextBox 12"/>
           <p:cNvSpPr txBox="1"/>
           <p:nvPr/>
         </p:nvSpPr>
@@ -32203,7 +31279,7 @@
       </p:sp>
       <p:sp>
         <p:nvSpPr>
-          <p:cNvPr id="15" name="TextBox 14"/>
+          <p:cNvPr id="14" name="TextBox 13"/>
           <p:cNvSpPr txBox="1"/>
           <p:nvPr/>
         </p:nvSpPr>
@@ -32242,7 +31318,7 @@
       </p:sp>
       <p:sp>
         <p:nvSpPr>
-          <p:cNvPr id="16" name="TextBox 15"/>
+          <p:cNvPr id="15" name="TextBox 14"/>
           <p:cNvSpPr txBox="1"/>
           <p:nvPr/>
         </p:nvSpPr>
@@ -32337,8 +31413,8 @@
         </p:nvSpPr>
         <p:spPr>
           <a:xfrm>
-            <a:off x="685800" y="628650"/>
-            <a:ext cx="10820400" cy="198120"/>
+            <a:off x="685800" y="685800"/>
+            <a:ext cx="9620250" cy="1524000"/>
           </a:xfrm>
           <a:prstGeom prst="rect">
             <a:avLst/>
@@ -32353,44 +31429,21 @@
           <a:p>
             <a:pPr algn="l">
               <a:lnSpc>
-                <a:spcPct val="120000"/>
-              </a:lnSpc>
-            </a:pPr>
-            <a:r>
-              <a:rPr sz="980" b="1" i="0" spc="160">
-                <a:solidFill>
-                  <a:srgbClr val="E94D1C"/>
+                <a:spcPct val="104000"/>
+              </a:lnSpc>
+            </a:pPr>
+            <a:r>
+              <a:rPr sz="3000" b="1" i="0">
+                <a:solidFill>
+                  <a:srgbClr val="21049A"/>
                 </a:solidFill>
                 <a:latin typeface="Roboto"/>
               </a:rPr>
-              <a:t>O PROCESSO VISTO DO HOST</a:t>
-            </a:r>
-          </a:p>
-        </p:txBody>
-      </p:sp>
-      <p:sp>
-        <p:nvSpPr>
-          <p:cNvPr id="4" name="TextBox 3"/>
-          <p:cNvSpPr txBox="1"/>
-          <p:nvPr/>
-        </p:nvSpPr>
-        <p:spPr>
-          <a:xfrm>
-            <a:off x="685800" y="838200"/>
-            <a:ext cx="9620250" cy="1524000"/>
-          </a:xfrm>
-          <a:prstGeom prst="rect">
-            <a:avLst/>
-          </a:prstGeom>
-          <a:noFill/>
-        </p:spPr>
-        <p:txBody>
-          <a:bodyPr wrap="square" lIns="0" rIns="0" tIns="0" bIns="0" anchor="t">
-            <a:spAutoFit/>
-          </a:bodyPr>
-          <a:lstStyle/>
-          <a:p>
-            <a:pPr algn="l">
+              <a:t>Container é um processo comum,</a:t>
+            </a:r>
+          </a:p>
+          <a:p>
+            <a:pPr>
               <a:lnSpc>
                 <a:spcPct val="104000"/>
               </a:lnSpc>
@@ -32402,30 +31455,14 @@
                 </a:solidFill>
                 <a:latin typeface="Roboto"/>
               </a:rPr>
-              <a:t>Um container é um processo</a:t>
-            </a:r>
-          </a:p>
-          <a:p>
-            <a:pPr>
-              <a:lnSpc>
-                <a:spcPct val="104000"/>
-              </a:lnSpc>
-            </a:pPr>
-            <a:r>
-              <a:rPr sz="3000" b="1" i="0">
-                <a:solidFill>
-                  <a:srgbClr val="21049A"/>
-                </a:solidFill>
-                <a:latin typeface="Roboto"/>
-              </a:rPr>
-              <a:t>com a visão restringida por namespaces</a:t>
-            </a:r>
-          </a:p>
-        </p:txBody>
-      </p:sp>
-      <p:sp>
-        <p:nvSpPr>
-          <p:cNvPr id="5" name="Rounded Rectangle 4"/>
+              <a:t>com a visão restringida</a:t>
+            </a:r>
+          </a:p>
+        </p:txBody>
+      </p:sp>
+      <p:sp>
+        <p:nvSpPr>
+          <p:cNvPr id="4" name="Rounded Rectangle 3"/>
           <p:cNvSpPr/>
           <p:nvPr/>
         </p:nvSpPr>
@@ -32471,7 +31508,7 @@
       </p:sp>
       <p:sp>
         <p:nvSpPr>
-          <p:cNvPr id="6" name="Rounded Rectangle 5"/>
+          <p:cNvPr id="5" name="Rounded Rectangle 4"/>
           <p:cNvSpPr/>
           <p:nvPr/>
         </p:nvSpPr>
@@ -32517,7 +31554,7 @@
       </p:sp>
       <p:sp>
         <p:nvSpPr>
-          <p:cNvPr id="7" name="TextBox 6"/>
+          <p:cNvPr id="6" name="TextBox 5"/>
           <p:cNvSpPr txBox="1"/>
           <p:nvPr/>
         </p:nvSpPr>
@@ -32556,7 +31593,7 @@
       </p:sp>
       <p:sp>
         <p:nvSpPr>
-          <p:cNvPr id="8" name="TextBox 7"/>
+          <p:cNvPr id="7" name="TextBox 6"/>
           <p:cNvSpPr txBox="1"/>
           <p:nvPr/>
         </p:nvSpPr>
@@ -32595,7 +31632,7 @@
       </p:sp>
       <p:sp>
         <p:nvSpPr>
-          <p:cNvPr id="9" name="TextBox 8"/>
+          <p:cNvPr id="8" name="TextBox 7"/>
           <p:cNvSpPr txBox="1"/>
           <p:nvPr/>
         </p:nvSpPr>
@@ -32634,7 +31671,7 @@
       </p:sp>
       <p:sp>
         <p:nvSpPr>
-          <p:cNvPr id="10" name="TextBox 9"/>
+          <p:cNvPr id="9" name="TextBox 8"/>
           <p:cNvSpPr txBox="1"/>
           <p:nvPr/>
         </p:nvSpPr>
@@ -32673,7 +31710,7 @@
       </p:sp>
       <p:sp>
         <p:nvSpPr>
-          <p:cNvPr id="11" name="TextBox 10"/>
+          <p:cNvPr id="10" name="TextBox 9"/>
           <p:cNvSpPr txBox="1"/>
           <p:nvPr/>
         </p:nvSpPr>
@@ -32712,7 +31749,7 @@
       </p:sp>
       <p:sp>
         <p:nvSpPr>
-          <p:cNvPr id="12" name="TextBox 11"/>
+          <p:cNvPr id="11" name="TextBox 10"/>
           <p:cNvSpPr txBox="1"/>
           <p:nvPr/>
         </p:nvSpPr>
@@ -32751,7 +31788,7 @@
       </p:sp>
       <p:sp>
         <p:nvSpPr>
-          <p:cNvPr id="13" name="TextBox 12"/>
+          <p:cNvPr id="12" name="TextBox 11"/>
           <p:cNvSpPr txBox="1"/>
           <p:nvPr/>
         </p:nvSpPr>
@@ -32790,7 +31827,7 @@
       </p:sp>
       <p:sp>
         <p:nvSpPr>
-          <p:cNvPr id="14" name="TextBox 13"/>
+          <p:cNvPr id="13" name="TextBox 12"/>
           <p:cNvSpPr txBox="1"/>
           <p:nvPr/>
         </p:nvSpPr>
@@ -32829,7 +31866,7 @@
       </p:sp>
       <p:sp>
         <p:nvSpPr>
-          <p:cNvPr id="15" name="TextBox 14"/>
+          <p:cNvPr id="14" name="TextBox 13"/>
           <p:cNvSpPr txBox="1"/>
           <p:nvPr/>
         </p:nvSpPr>
@@ -32868,7 +31905,7 @@
       </p:sp>
       <p:sp>
         <p:nvSpPr>
-          <p:cNvPr id="16" name="TextBox 15"/>
+          <p:cNvPr id="15" name="TextBox 14"/>
           <p:cNvSpPr txBox="1"/>
           <p:nvPr/>
         </p:nvSpPr>
@@ -32907,7 +31944,7 @@
       </p:sp>
       <p:sp>
         <p:nvSpPr>
-          <p:cNvPr id="17" name="TextBox 16"/>
+          <p:cNvPr id="16" name="TextBox 15"/>
           <p:cNvSpPr txBox="1"/>
           <p:nvPr/>
         </p:nvSpPr>
@@ -32946,7 +31983,7 @@
       </p:sp>
       <p:sp>
         <p:nvSpPr>
-          <p:cNvPr id="18" name="TextBox 17"/>
+          <p:cNvPr id="17" name="TextBox 16"/>
           <p:cNvSpPr txBox="1"/>
           <p:nvPr/>
         </p:nvSpPr>
@@ -32985,7 +32022,7 @@
       </p:sp>
       <p:sp>
         <p:nvSpPr>
-          <p:cNvPr id="19" name="Rectangle 18"/>
+          <p:cNvPr id="18" name="Rectangle 17"/>
           <p:cNvSpPr/>
           <p:nvPr/>
         </p:nvSpPr>
@@ -33029,7 +32066,7 @@
       </p:sp>
       <p:sp>
         <p:nvSpPr>
-          <p:cNvPr id="20" name="TextBox 19"/>
+          <p:cNvPr id="19" name="TextBox 18"/>
           <p:cNvSpPr txBox="1"/>
           <p:nvPr/>
         </p:nvSpPr>
@@ -33068,7 +32105,7 @@
       </p:sp>
       <p:sp>
         <p:nvSpPr>
-          <p:cNvPr id="21" name="TextBox 20"/>
+          <p:cNvPr id="20" name="TextBox 19"/>
           <p:cNvSpPr txBox="1"/>
           <p:nvPr/>
         </p:nvSpPr>
@@ -33107,7 +32144,7 @@
       </p:sp>
       <p:sp>
         <p:nvSpPr>
-          <p:cNvPr id="22" name="TextBox 21"/>
+          <p:cNvPr id="21" name="TextBox 20"/>
           <p:cNvSpPr txBox="1"/>
           <p:nvPr/>
         </p:nvSpPr>
@@ -33202,8 +32239,8 @@
         </p:nvSpPr>
         <p:spPr>
           <a:xfrm>
-            <a:off x="685800" y="628650"/>
-            <a:ext cx="10820400" cy="198120"/>
+            <a:off x="685800" y="685800"/>
+            <a:ext cx="9620250" cy="1524000"/>
           </a:xfrm>
           <a:prstGeom prst="rect">
             <a:avLst/>
@@ -33218,17 +32255,33 @@
           <a:p>
             <a:pPr algn="l">
               <a:lnSpc>
-                <a:spcPct val="120000"/>
-              </a:lnSpc>
-            </a:pPr>
-            <a:r>
-              <a:rPr sz="980" b="1" i="0" spc="160">
-                <a:solidFill>
-                  <a:srgbClr val="E94D1C"/>
+                <a:spcPct val="104000"/>
+              </a:lnSpc>
+            </a:pPr>
+            <a:r>
+              <a:rPr sz="3000" b="1" i="0">
+                <a:solidFill>
+                  <a:srgbClr val="21049A"/>
                 </a:solidFill>
                 <a:latin typeface="Roboto"/>
               </a:rPr>
-              <a:t>OS DOIS MECANISMOS DO KERNEL</a:t>
+              <a:t>Namespaces e cgroups</a:t>
+            </a:r>
+          </a:p>
+          <a:p>
+            <a:pPr>
+              <a:lnSpc>
+                <a:spcPct val="104000"/>
+              </a:lnSpc>
+            </a:pPr>
+            <a:r>
+              <a:rPr sz="3000" b="1" i="0">
+                <a:solidFill>
+                  <a:srgbClr val="21049A"/>
+                </a:solidFill>
+                <a:latin typeface="Roboto"/>
+              </a:rPr>
+              <a:t>fazem coisas diferentes</a:t>
             </a:r>
           </a:p>
         </p:txBody>
@@ -33241,8 +32294,8 @@
         </p:nvSpPr>
         <p:spPr>
           <a:xfrm>
-            <a:off x="685800" y="838200"/>
-            <a:ext cx="9620250" cy="1524000"/>
+            <a:off x="685800" y="2193226"/>
+            <a:ext cx="5143500" cy="182880"/>
           </a:xfrm>
           <a:prstGeom prst="rect">
             <a:avLst/>
@@ -33257,71 +32310,16 @@
           <a:p>
             <a:pPr algn="l">
               <a:lnSpc>
-                <a:spcPct val="104000"/>
-              </a:lnSpc>
-            </a:pPr>
-            <a:r>
-              <a:rPr sz="3000" b="1" i="0">
+                <a:spcPct val="120000"/>
+              </a:lnSpc>
+            </a:pPr>
+            <a:r>
+              <a:rPr sz="900" b="1" i="0" spc="120">
                 <a:solidFill>
                   <a:srgbClr val="21049A"/>
                 </a:solidFill>
                 <a:latin typeface="Roboto"/>
               </a:rPr>
-              <a:t>Namespaces e cgroups</a:t>
-            </a:r>
-          </a:p>
-          <a:p>
-            <a:pPr>
-              <a:lnSpc>
-                <a:spcPct val="104000"/>
-              </a:lnSpc>
-            </a:pPr>
-            <a:r>
-              <a:rPr sz="3000" b="1" i="0">
-                <a:solidFill>
-                  <a:srgbClr val="21049A"/>
-                </a:solidFill>
-                <a:latin typeface="Roboto"/>
-              </a:rPr>
-              <a:t>fazem coisas diferentes</a:t>
-            </a:r>
-          </a:p>
-        </p:txBody>
-      </p:sp>
-      <p:sp>
-        <p:nvSpPr>
-          <p:cNvPr id="5" name="TextBox 4"/>
-          <p:cNvSpPr txBox="1"/>
-          <p:nvPr/>
-        </p:nvSpPr>
-        <p:spPr>
-          <a:xfrm>
-            <a:off x="685800" y="2193226"/>
-            <a:ext cx="5143500" cy="182880"/>
-          </a:xfrm>
-          <a:prstGeom prst="rect">
-            <a:avLst/>
-          </a:prstGeom>
-          <a:noFill/>
-        </p:spPr>
-        <p:txBody>
-          <a:bodyPr wrap="square" lIns="0" rIns="0" tIns="0" bIns="0" anchor="t">
-            <a:spAutoFit/>
-          </a:bodyPr>
-          <a:lstStyle/>
-          <a:p>
-            <a:pPr algn="l">
-              <a:lnSpc>
-                <a:spcPct val="120000"/>
-              </a:lnSpc>
-            </a:pPr>
-            <a:r>
-              <a:rPr sz="900" b="1" i="0" spc="120">
-                <a:solidFill>
-                  <a:srgbClr val="21049A"/>
-                </a:solidFill>
-                <a:latin typeface="Roboto"/>
-              </a:rPr>
               <a:t>NAMESPACES</a:t>
             </a:r>
           </a:p>
@@ -33329,7 +32327,7 @@
       </p:sp>
       <p:sp>
         <p:nvSpPr>
-          <p:cNvPr id="6" name="Rectangle 5"/>
+          <p:cNvPr id="5" name="Rectangle 4"/>
           <p:cNvSpPr/>
           <p:nvPr/>
         </p:nvSpPr>
@@ -33373,7 +32371,7 @@
       </p:sp>
       <p:sp>
         <p:nvSpPr>
-          <p:cNvPr id="7" name="Rectangle 6"/>
+          <p:cNvPr id="6" name="Rectangle 5"/>
           <p:cNvSpPr/>
           <p:nvPr/>
         </p:nvSpPr>
@@ -33417,7 +32415,7 @@
       </p:sp>
       <p:sp>
         <p:nvSpPr>
-          <p:cNvPr id="8" name="TextBox 7"/>
+          <p:cNvPr id="7" name="TextBox 6"/>
           <p:cNvSpPr txBox="1"/>
           <p:nvPr/>
         </p:nvSpPr>
@@ -33456,7 +32454,7 @@
       </p:sp>
       <p:sp>
         <p:nvSpPr>
-          <p:cNvPr id="9" name="Rectangle 8"/>
+          <p:cNvPr id="8" name="Rectangle 7"/>
           <p:cNvSpPr/>
           <p:nvPr/>
         </p:nvSpPr>
@@ -33500,7 +32498,7 @@
       </p:sp>
       <p:sp>
         <p:nvSpPr>
-          <p:cNvPr id="10" name="TextBox 9"/>
+          <p:cNvPr id="9" name="TextBox 8"/>
           <p:cNvSpPr txBox="1"/>
           <p:nvPr/>
         </p:nvSpPr>
@@ -33539,7 +32537,7 @@
       </p:sp>
       <p:sp>
         <p:nvSpPr>
-          <p:cNvPr id="11" name="Rectangle 10"/>
+          <p:cNvPr id="10" name="Rectangle 9"/>
           <p:cNvSpPr/>
           <p:nvPr/>
         </p:nvSpPr>
@@ -33583,7 +32581,7 @@
       </p:sp>
       <p:sp>
         <p:nvSpPr>
-          <p:cNvPr id="12" name="TextBox 11"/>
+          <p:cNvPr id="11" name="TextBox 10"/>
           <p:cNvSpPr txBox="1"/>
           <p:nvPr/>
         </p:nvSpPr>
@@ -33622,7 +32620,7 @@
       </p:sp>
       <p:sp>
         <p:nvSpPr>
-          <p:cNvPr id="13" name="Rectangle 12"/>
+          <p:cNvPr id="12" name="Rectangle 11"/>
           <p:cNvSpPr/>
           <p:nvPr/>
         </p:nvSpPr>
@@ -33666,7 +32664,7 @@
       </p:sp>
       <p:sp>
         <p:nvSpPr>
-          <p:cNvPr id="14" name="TextBox 13"/>
+          <p:cNvPr id="13" name="TextBox 12"/>
           <p:cNvSpPr txBox="1"/>
           <p:nvPr/>
         </p:nvSpPr>
@@ -33705,7 +32703,7 @@
       </p:sp>
       <p:sp>
         <p:nvSpPr>
-          <p:cNvPr id="15" name="TextBox 14"/>
+          <p:cNvPr id="14" name="TextBox 13"/>
           <p:cNvSpPr txBox="1"/>
           <p:nvPr/>
         </p:nvSpPr>
@@ -33744,7 +32742,7 @@
       </p:sp>
       <p:sp>
         <p:nvSpPr>
-          <p:cNvPr id="16" name="Rectangle 15"/>
+          <p:cNvPr id="15" name="Rectangle 14"/>
           <p:cNvSpPr/>
           <p:nvPr/>
         </p:nvSpPr>
@@ -33788,7 +32786,7 @@
       </p:sp>
       <p:sp>
         <p:nvSpPr>
-          <p:cNvPr id="17" name="Rectangle 16"/>
+          <p:cNvPr id="16" name="Rectangle 15"/>
           <p:cNvSpPr/>
           <p:nvPr/>
         </p:nvSpPr>
@@ -33832,7 +32830,7 @@
       </p:sp>
       <p:sp>
         <p:nvSpPr>
-          <p:cNvPr id="18" name="TextBox 17"/>
+          <p:cNvPr id="17" name="TextBox 16"/>
           <p:cNvSpPr txBox="1"/>
           <p:nvPr/>
         </p:nvSpPr>
@@ -33871,7 +32869,7 @@
       </p:sp>
       <p:sp>
         <p:nvSpPr>
-          <p:cNvPr id="19" name="Rectangle 18"/>
+          <p:cNvPr id="18" name="Rectangle 17"/>
           <p:cNvSpPr/>
           <p:nvPr/>
         </p:nvSpPr>
@@ -33915,7 +32913,7 @@
       </p:sp>
       <p:sp>
         <p:nvSpPr>
-          <p:cNvPr id="20" name="TextBox 19"/>
+          <p:cNvPr id="19" name="TextBox 18"/>
           <p:cNvSpPr txBox="1"/>
           <p:nvPr/>
         </p:nvSpPr>
@@ -33954,7 +32952,7 @@
       </p:sp>
       <p:sp>
         <p:nvSpPr>
-          <p:cNvPr id="21" name="Rectangle 20"/>
+          <p:cNvPr id="20" name="Rectangle 19"/>
           <p:cNvSpPr/>
           <p:nvPr/>
         </p:nvSpPr>
@@ -33998,7 +32996,7 @@
       </p:sp>
       <p:sp>
         <p:nvSpPr>
-          <p:cNvPr id="22" name="TextBox 21"/>
+          <p:cNvPr id="21" name="TextBox 20"/>
           <p:cNvSpPr txBox="1"/>
           <p:nvPr/>
         </p:nvSpPr>
@@ -34037,7 +33035,7 @@
       </p:sp>
       <p:sp>
         <p:nvSpPr>
-          <p:cNvPr id="23" name="TextBox 22"/>
+          <p:cNvPr id="22" name="TextBox 21"/>
           <p:cNvSpPr txBox="1"/>
           <p:nvPr/>
         </p:nvSpPr>
@@ -34076,7 +33074,7 @@
       </p:sp>
       <p:sp>
         <p:nvSpPr>
-          <p:cNvPr id="24" name="TextBox 23"/>
+          <p:cNvPr id="23" name="TextBox 22"/>
           <p:cNvSpPr txBox="1"/>
           <p:nvPr/>
         </p:nvSpPr>
@@ -34171,8 +33169,8 @@
         </p:nvSpPr>
         <p:spPr>
           <a:xfrm>
-            <a:off x="685800" y="628650"/>
-            <a:ext cx="10820400" cy="198120"/>
+            <a:off x="685800" y="685800"/>
+            <a:ext cx="9620250" cy="1524000"/>
           </a:xfrm>
           <a:prstGeom prst="rect">
             <a:avLst/>
@@ -34187,17 +33185,17 @@
           <a:p>
             <a:pPr algn="l">
               <a:lnSpc>
-                <a:spcPct val="120000"/>
-              </a:lnSpc>
-            </a:pPr>
-            <a:r>
-              <a:rPr sz="980" b="1" i="0" spc="160">
-                <a:solidFill>
-                  <a:srgbClr val="E94D1C"/>
+                <a:spcPct val="104000"/>
+              </a:lnSpc>
+            </a:pPr>
+            <a:r>
+              <a:rPr sz="3000" b="1" i="0">
+                <a:solidFill>
+                  <a:srgbClr val="21049A"/>
                 </a:solidFill>
                 <a:latin typeface="Roboto"/>
               </a:rPr>
-              <a:t>ESTRUTURA DA IMAGEM</a:t>
+              <a:t>As camadas de uma imagem</a:t>
             </a:r>
           </a:p>
         </p:txBody>
@@ -34210,8 +33208,8 @@
         </p:nvSpPr>
         <p:spPr>
           <a:xfrm>
-            <a:off x="685800" y="838200"/>
-            <a:ext cx="9620250" cy="1524000"/>
+            <a:off x="857250" y="2257425"/>
+            <a:ext cx="4381500" cy="167640"/>
           </a:xfrm>
           <a:prstGeom prst="rect">
             <a:avLst/>
@@ -34226,71 +33224,16 @@
           <a:p>
             <a:pPr algn="l">
               <a:lnSpc>
-                <a:spcPct val="104000"/>
-              </a:lnSpc>
-            </a:pPr>
-            <a:r>
-              <a:rPr sz="3000" b="1" i="0">
-                <a:solidFill>
-                  <a:srgbClr val="21049A"/>
+                <a:spcPct val="120000"/>
+              </a:lnSpc>
+            </a:pPr>
+            <a:r>
+              <a:rPr sz="819" b="1" i="0" spc="160">
+                <a:solidFill>
+                  <a:srgbClr val="6B6B78"/>
                 </a:solidFill>
                 <a:latin typeface="Roboto"/>
               </a:rPr>
-              <a:t>Camadas somente leitura</a:t>
-            </a:r>
-          </a:p>
-          <a:p>
-            <a:pPr>
-              <a:lnSpc>
-                <a:spcPct val="104000"/>
-              </a:lnSpc>
-            </a:pPr>
-            <a:r>
-              <a:rPr sz="3000" b="1" i="0">
-                <a:solidFill>
-                  <a:srgbClr val="21049A"/>
-                </a:solidFill>
-                <a:latin typeface="Roboto"/>
-              </a:rPr>
-              <a:t>e a camada de escrita</a:t>
-            </a:r>
-          </a:p>
-        </p:txBody>
-      </p:sp>
-      <p:sp>
-        <p:nvSpPr>
-          <p:cNvPr id="5" name="TextBox 4"/>
-          <p:cNvSpPr txBox="1"/>
-          <p:nvPr/>
-        </p:nvSpPr>
-        <p:spPr>
-          <a:xfrm>
-            <a:off x="857250" y="2257425"/>
-            <a:ext cx="4381500" cy="167640"/>
-          </a:xfrm>
-          <a:prstGeom prst="rect">
-            <a:avLst/>
-          </a:prstGeom>
-          <a:noFill/>
-        </p:spPr>
-        <p:txBody>
-          <a:bodyPr wrap="square" lIns="0" rIns="0" tIns="0" bIns="0" anchor="t">
-            <a:spAutoFit/>
-          </a:bodyPr>
-          <a:lstStyle/>
-          <a:p>
-            <a:pPr algn="l">
-              <a:lnSpc>
-                <a:spcPct val="120000"/>
-              </a:lnSpc>
-            </a:pPr>
-            <a:r>
-              <a:rPr sz="819" b="1" i="0" spc="160">
-                <a:solidFill>
-                  <a:srgbClr val="6B6B78"/>
-                </a:solidFill>
-                <a:latin typeface="Roboto"/>
-              </a:rPr>
               <a:t>CAMADAS DE UMA IMAGEM E DO CONTAINER</a:t>
             </a:r>
           </a:p>
@@ -34298,7 +33241,7 @@
       </p:sp>
       <p:sp>
         <p:nvSpPr>
-          <p:cNvPr id="6" name="Rounded Rectangle 5"/>
+          <p:cNvPr id="5" name="Rounded Rectangle 4"/>
           <p:cNvSpPr/>
           <p:nvPr/>
         </p:nvSpPr>
@@ -34346,7 +33289,7 @@
       </p:sp>
       <p:sp>
         <p:nvSpPr>
-          <p:cNvPr id="7" name="TextBox 6"/>
+          <p:cNvPr id="6" name="TextBox 5"/>
           <p:cNvSpPr txBox="1"/>
           <p:nvPr/>
         </p:nvSpPr>
@@ -34385,7 +33328,7 @@
       </p:sp>
       <p:sp>
         <p:nvSpPr>
-          <p:cNvPr id="8" name="Rounded Rectangle 7"/>
+          <p:cNvPr id="7" name="Rounded Rectangle 6"/>
           <p:cNvSpPr/>
           <p:nvPr/>
         </p:nvSpPr>
@@ -34433,7 +33376,7 @@
       </p:sp>
       <p:sp>
         <p:nvSpPr>
-          <p:cNvPr id="9" name="TextBox 8"/>
+          <p:cNvPr id="8" name="TextBox 7"/>
           <p:cNvSpPr txBox="1"/>
           <p:nvPr/>
         </p:nvSpPr>
@@ -34472,7 +33415,7 @@
       </p:sp>
       <p:sp>
         <p:nvSpPr>
-          <p:cNvPr id="10" name="Rounded Rectangle 9"/>
+          <p:cNvPr id="9" name="Rounded Rectangle 8"/>
           <p:cNvSpPr/>
           <p:nvPr/>
         </p:nvSpPr>
@@ -34520,7 +33463,7 @@
       </p:sp>
       <p:sp>
         <p:nvSpPr>
-          <p:cNvPr id="11" name="TextBox 10"/>
+          <p:cNvPr id="10" name="TextBox 9"/>
           <p:cNvSpPr txBox="1"/>
           <p:nvPr/>
         </p:nvSpPr>
@@ -34559,7 +33502,7 @@
       </p:sp>
       <p:sp>
         <p:nvSpPr>
-          <p:cNvPr id="12" name="Rectangle 11"/>
+          <p:cNvPr id="11" name="Rectangle 10"/>
           <p:cNvSpPr/>
           <p:nvPr/>
         </p:nvSpPr>
@@ -34603,7 +33546,7 @@
       </p:sp>
       <p:sp>
         <p:nvSpPr>
-          <p:cNvPr id="13" name="TextBox 12"/>
+          <p:cNvPr id="12" name="TextBox 11"/>
           <p:cNvSpPr txBox="1"/>
           <p:nvPr/>
         </p:nvSpPr>
@@ -34642,7 +33585,7 @@
       </p:sp>
       <p:sp>
         <p:nvSpPr>
-          <p:cNvPr id="14" name="Rounded Rectangle 13"/>
+          <p:cNvPr id="13" name="Rounded Rectangle 12"/>
           <p:cNvSpPr/>
           <p:nvPr/>
         </p:nvSpPr>
@@ -34691,7 +33634,7 @@
       </p:sp>
       <p:sp>
         <p:nvSpPr>
-          <p:cNvPr id="15" name="TextBox 14"/>
+          <p:cNvPr id="14" name="TextBox 13"/>
           <p:cNvSpPr txBox="1"/>
           <p:nvPr/>
         </p:nvSpPr>
@@ -34730,7 +33673,7 @@
       </p:sp>
       <p:sp>
         <p:nvSpPr>
-          <p:cNvPr id="16" name="TextBox 15"/>
+          <p:cNvPr id="15" name="TextBox 14"/>
           <p:cNvSpPr txBox="1"/>
           <p:nvPr/>
         </p:nvSpPr>
@@ -34769,7 +33712,7 @@
       </p:sp>
       <p:cxnSp>
         <p:nvCxnSpPr>
-          <p:cNvPr id="17" name="Connector 16"/>
+          <p:cNvPr id="16" name="Connector 15"/>
           <p:cNvCxnSpPr/>
           <p:nvPr/>
         </p:nvCxnSpPr>
@@ -34804,7 +33747,7 @@
       </p:cxnSp>
       <p:sp>
         <p:nvSpPr>
-          <p:cNvPr id="18" name="TextBox 17"/>
+          <p:cNvPr id="17" name="TextBox 16"/>
           <p:cNvSpPr txBox="1"/>
           <p:nvPr/>
         </p:nvSpPr>
@@ -34843,7 +33786,7 @@
       </p:sp>
       <p:sp>
         <p:nvSpPr>
-          <p:cNvPr id="19" name="TextBox 18"/>
+          <p:cNvPr id="18" name="TextBox 17"/>
           <p:cNvSpPr txBox="1"/>
           <p:nvPr/>
         </p:nvSpPr>
@@ -34882,7 +33825,7 @@
       </p:sp>
       <p:sp>
         <p:nvSpPr>
-          <p:cNvPr id="20" name="TextBox 19"/>
+          <p:cNvPr id="19" name="TextBox 18"/>
           <p:cNvSpPr txBox="1"/>
           <p:nvPr/>
         </p:nvSpPr>
@@ -34921,7 +33864,7 @@
       </p:sp>
       <p:sp>
         <p:nvSpPr>
-          <p:cNvPr id="21" name="TextBox 20"/>
+          <p:cNvPr id="20" name="TextBox 19"/>
           <p:cNvSpPr txBox="1"/>
           <p:nvPr/>
         </p:nvSpPr>
@@ -34960,7 +33903,7 @@
       </p:sp>
       <p:sp>
         <p:nvSpPr>
-          <p:cNvPr id="22" name="Rectangle 21"/>
+          <p:cNvPr id="21" name="Rectangle 20"/>
           <p:cNvSpPr/>
           <p:nvPr/>
         </p:nvSpPr>
@@ -35004,7 +33947,7 @@
       </p:sp>
       <p:sp>
         <p:nvSpPr>
-          <p:cNvPr id="23" name="TextBox 22"/>
+          <p:cNvPr id="22" name="TextBox 21"/>
           <p:cNvSpPr txBox="1"/>
           <p:nvPr/>
         </p:nvSpPr>
@@ -35043,7 +33986,7 @@
       </p:sp>
       <p:sp>
         <p:nvSpPr>
-          <p:cNvPr id="24" name="TextBox 23"/>
+          <p:cNvPr id="23" name="TextBox 22"/>
           <p:cNvSpPr txBox="1"/>
           <p:nvPr/>
         </p:nvSpPr>
@@ -35082,7 +34025,7 @@
       </p:sp>
       <p:sp>
         <p:nvSpPr>
-          <p:cNvPr id="25" name="TextBox 24"/>
+          <p:cNvPr id="24" name="TextBox 23"/>
           <p:cNvSpPr txBox="1"/>
           <p:nvPr/>
         </p:nvSpPr>
@@ -35177,8 +34120,8 @@
         </p:nvSpPr>
         <p:spPr>
           <a:xfrm>
-            <a:off x="685800" y="628650"/>
-            <a:ext cx="10820400" cy="198120"/>
+            <a:off x="685800" y="685800"/>
+            <a:ext cx="9620250" cy="1524000"/>
           </a:xfrm>
           <a:prstGeom prst="rect">
             <a:avLst/>
@@ -35193,79 +34136,24 @@
           <a:p>
             <a:pPr algn="l">
               <a:lnSpc>
-                <a:spcPct val="120000"/>
-              </a:lnSpc>
-            </a:pPr>
-            <a:r>
-              <a:rPr sz="980" b="1" i="0" spc="160">
-                <a:solidFill>
-                  <a:srgbClr val="E94D1C"/>
+                <a:spcPct val="104000"/>
+              </a:lnSpc>
+            </a:pPr>
+            <a:r>
+              <a:rPr sz="3000" b="1" i="0">
+                <a:solidFill>
+                  <a:srgbClr val="21049A"/>
                 </a:solidFill>
                 <a:latin typeface="Roboto"/>
               </a:rPr>
-              <a:t>A PILHA DE EXECUÇÃO</a:t>
-            </a:r>
-          </a:p>
-        </p:txBody>
-      </p:sp>
-      <p:sp>
-        <p:nvSpPr>
-          <p:cNvPr id="4" name="TextBox 3"/>
-          <p:cNvSpPr txBox="1"/>
-          <p:nvPr/>
-        </p:nvSpPr>
-        <p:spPr>
-          <a:xfrm>
-            <a:off x="685800" y="838200"/>
-            <a:ext cx="9620250" cy="1524000"/>
-          </a:xfrm>
-          <a:prstGeom prst="rect">
-            <a:avLst/>
-          </a:prstGeom>
-          <a:noFill/>
-        </p:spPr>
-        <p:txBody>
-          <a:bodyPr wrap="square" lIns="0" rIns="0" tIns="0" bIns="0" anchor="t">
-            <a:spAutoFit/>
-          </a:bodyPr>
-          <a:lstStyle/>
-          <a:p>
-            <a:pPr algn="l">
-              <a:lnSpc>
-                <a:spcPct val="104000"/>
-              </a:lnSpc>
-            </a:pPr>
-            <a:r>
-              <a:rPr sz="3000" b="1" i="0">
-                <a:solidFill>
-                  <a:srgbClr val="21049A"/>
-                </a:solidFill>
-                <a:latin typeface="Roboto"/>
-              </a:rPr>
-              <a:t>CLI, dockerd, containerd,</a:t>
-            </a:r>
-          </a:p>
-          <a:p>
-            <a:pPr>
-              <a:lnSpc>
-                <a:spcPct val="104000"/>
-              </a:lnSpc>
-            </a:pPr>
-            <a:r>
-              <a:rPr sz="3000" b="1" i="0">
-                <a:solidFill>
-                  <a:srgbClr val="21049A"/>
-                </a:solidFill>
-                <a:latin typeface="Roboto"/>
-              </a:rPr>
-              <a:t>shim e runc</a:t>
-            </a:r>
-          </a:p>
-        </p:txBody>
-      </p:sp>
-      <p:sp>
-        <p:nvSpPr>
-          <p:cNvPr id="5" name="Rounded Rectangle 4"/>
+              <a:t>A pilha de execução do Docker</a:t>
+            </a:r>
+          </a:p>
+        </p:txBody>
+      </p:sp>
+      <p:sp>
+        <p:nvSpPr>
+          <p:cNvPr id="4" name="Rounded Rectangle 3"/>
           <p:cNvSpPr/>
           <p:nvPr/>
         </p:nvSpPr>
@@ -35311,7 +34199,7 @@
       </p:sp>
       <p:sp>
         <p:nvSpPr>
-          <p:cNvPr id="6" name="TextBox 5"/>
+          <p:cNvPr id="5" name="TextBox 4"/>
           <p:cNvSpPr txBox="1"/>
           <p:nvPr/>
         </p:nvSpPr>
@@ -35350,7 +34238,7 @@
       </p:sp>
       <p:sp>
         <p:nvSpPr>
-          <p:cNvPr id="7" name="TextBox 6"/>
+          <p:cNvPr id="6" name="TextBox 5"/>
           <p:cNvSpPr txBox="1"/>
           <p:nvPr/>
         </p:nvSpPr>
@@ -35389,7 +34277,7 @@
       </p:sp>
       <p:sp>
         <p:nvSpPr>
-          <p:cNvPr id="8" name="Rounded Rectangle 7"/>
+          <p:cNvPr id="7" name="Rounded Rectangle 6"/>
           <p:cNvSpPr/>
           <p:nvPr/>
         </p:nvSpPr>
@@ -35435,7 +34323,7 @@
       </p:sp>
       <p:sp>
         <p:nvSpPr>
-          <p:cNvPr id="9" name="TextBox 8"/>
+          <p:cNvPr id="8" name="TextBox 7"/>
           <p:cNvSpPr txBox="1"/>
           <p:nvPr/>
         </p:nvSpPr>
@@ -35474,7 +34362,7 @@
       </p:sp>
       <p:sp>
         <p:nvSpPr>
-          <p:cNvPr id="10" name="TextBox 9"/>
+          <p:cNvPr id="9" name="TextBox 8"/>
           <p:cNvSpPr txBox="1"/>
           <p:nvPr/>
         </p:nvSpPr>
@@ -35513,7 +34401,7 @@
       </p:sp>
       <p:cxnSp>
         <p:nvCxnSpPr>
-          <p:cNvPr id="11" name="Connector 10"/>
+          <p:cNvPr id="10" name="Connector 9"/>
           <p:cNvCxnSpPr/>
           <p:nvPr/>
         </p:nvCxnSpPr>
@@ -35548,7 +34436,7 @@
       </p:cxnSp>
       <p:sp>
         <p:nvSpPr>
-          <p:cNvPr id="12" name="Rounded Rectangle 11"/>
+          <p:cNvPr id="11" name="Rounded Rectangle 10"/>
           <p:cNvSpPr/>
           <p:nvPr/>
         </p:nvSpPr>
@@ -35594,7 +34482,7 @@
       </p:sp>
       <p:sp>
         <p:nvSpPr>
-          <p:cNvPr id="13" name="TextBox 12"/>
+          <p:cNvPr id="12" name="TextBox 11"/>
           <p:cNvSpPr txBox="1"/>
           <p:nvPr/>
         </p:nvSpPr>
@@ -35633,7 +34521,7 @@
       </p:sp>
       <p:sp>
         <p:nvSpPr>
-          <p:cNvPr id="14" name="TextBox 13"/>
+          <p:cNvPr id="13" name="TextBox 12"/>
           <p:cNvSpPr txBox="1"/>
           <p:nvPr/>
         </p:nvSpPr>
@@ -35672,7 +34560,7 @@
       </p:sp>
       <p:cxnSp>
         <p:nvCxnSpPr>
-          <p:cNvPr id="15" name="Connector 14"/>
+          <p:cNvPr id="14" name="Connector 13"/>
           <p:cNvCxnSpPr/>
           <p:nvPr/>
         </p:nvCxnSpPr>
@@ -35707,7 +34595,7 @@
       </p:cxnSp>
       <p:sp>
         <p:nvSpPr>
-          <p:cNvPr id="16" name="Rounded Rectangle 15"/>
+          <p:cNvPr id="15" name="Rounded Rectangle 14"/>
           <p:cNvSpPr/>
           <p:nvPr/>
         </p:nvSpPr>
@@ -35753,7 +34641,7 @@
       </p:sp>
       <p:sp>
         <p:nvSpPr>
-          <p:cNvPr id="17" name="TextBox 16"/>
+          <p:cNvPr id="16" name="TextBox 15"/>
           <p:cNvSpPr txBox="1"/>
           <p:nvPr/>
         </p:nvSpPr>
@@ -35792,7 +34680,7 @@
       </p:sp>
       <p:sp>
         <p:nvSpPr>
-          <p:cNvPr id="18" name="TextBox 17"/>
+          <p:cNvPr id="17" name="TextBox 16"/>
           <p:cNvSpPr txBox="1"/>
           <p:nvPr/>
         </p:nvSpPr>
@@ -35831,7 +34719,7 @@
       </p:sp>
       <p:cxnSp>
         <p:nvCxnSpPr>
-          <p:cNvPr id="19" name="Connector 18"/>
+          <p:cNvPr id="18" name="Connector 17"/>
           <p:cNvCxnSpPr/>
           <p:nvPr/>
         </p:nvCxnSpPr>
@@ -35866,7 +34754,7 @@
       </p:cxnSp>
       <p:sp>
         <p:nvSpPr>
-          <p:cNvPr id="20" name="Rounded Rectangle 19"/>
+          <p:cNvPr id="19" name="Rounded Rectangle 18"/>
           <p:cNvSpPr/>
           <p:nvPr/>
         </p:nvSpPr>
@@ -35912,7 +34800,7 @@
       </p:sp>
       <p:sp>
         <p:nvSpPr>
-          <p:cNvPr id="21" name="TextBox 20"/>
+          <p:cNvPr id="20" name="TextBox 19"/>
           <p:cNvSpPr txBox="1"/>
           <p:nvPr/>
         </p:nvSpPr>
@@ -35951,7 +34839,7 @@
       </p:sp>
       <p:sp>
         <p:nvSpPr>
-          <p:cNvPr id="22" name="TextBox 21"/>
+          <p:cNvPr id="21" name="TextBox 20"/>
           <p:cNvSpPr txBox="1"/>
           <p:nvPr/>
         </p:nvSpPr>
@@ -35990,7 +34878,7 @@
       </p:sp>
       <p:cxnSp>
         <p:nvCxnSpPr>
-          <p:cNvPr id="23" name="Connector 22"/>
+          <p:cNvPr id="22" name="Connector 21"/>
           <p:cNvCxnSpPr/>
           <p:nvPr/>
         </p:nvCxnSpPr>
@@ -36025,7 +34913,7 @@
       </p:cxnSp>
       <p:sp>
         <p:nvSpPr>
-          <p:cNvPr id="24" name="TextBox 23"/>
+          <p:cNvPr id="23" name="TextBox 22"/>
           <p:cNvSpPr txBox="1"/>
           <p:nvPr/>
         </p:nvSpPr>
@@ -36064,7 +34952,7 @@
       </p:sp>
       <p:sp>
         <p:nvSpPr>
-          <p:cNvPr id="25" name="Rectangle 24"/>
+          <p:cNvPr id="24" name="Rectangle 23"/>
           <p:cNvSpPr/>
           <p:nvPr/>
         </p:nvSpPr>
@@ -36108,7 +34996,7 @@
       </p:sp>
       <p:sp>
         <p:nvSpPr>
-          <p:cNvPr id="26" name="TextBox 25"/>
+          <p:cNvPr id="25" name="TextBox 24"/>
           <p:cNvSpPr txBox="1"/>
           <p:nvPr/>
         </p:nvSpPr>
@@ -36147,7 +35035,7 @@
       </p:sp>
       <p:sp>
         <p:nvSpPr>
-          <p:cNvPr id="27" name="Rectangle 26"/>
+          <p:cNvPr id="26" name="Rectangle 25"/>
           <p:cNvSpPr/>
           <p:nvPr/>
         </p:nvSpPr>
@@ -36191,7 +35079,7 @@
       </p:sp>
       <p:sp>
         <p:nvSpPr>
-          <p:cNvPr id="28" name="TextBox 27"/>
+          <p:cNvPr id="27" name="TextBox 26"/>
           <p:cNvSpPr txBox="1"/>
           <p:nvPr/>
         </p:nvSpPr>
@@ -36230,7 +35118,7 @@
       </p:sp>
       <p:sp>
         <p:nvSpPr>
-          <p:cNvPr id="29" name="TextBox 28"/>
+          <p:cNvPr id="28" name="TextBox 27"/>
           <p:cNvSpPr txBox="1"/>
           <p:nvPr/>
         </p:nvSpPr>
@@ -36269,7 +35157,7 @@
       </p:sp>
       <p:sp>
         <p:nvSpPr>
-          <p:cNvPr id="30" name="TextBox 29"/>
+          <p:cNvPr id="29" name="TextBox 28"/>
           <p:cNvSpPr txBox="1"/>
           <p:nvPr/>
         </p:nvSpPr>

--- a/trabalhos/T1-Docker-Invite-People.pptx
+++ b/trabalhos/T1-Docker-Invite-People.pptx
@@ -12378,102 +12378,14 @@
       </p:sp>
       <p:sp>
         <p:nvSpPr>
-          <p:cNvPr id="10" name="Isosceles Triangle 9"/>
-          <p:cNvSpPr/>
-          <p:nvPr/>
-        </p:nvSpPr>
-        <p:spPr>
-          <a:xfrm>
-            <a:off x="9124950" y="2894457"/>
-            <a:ext cx="152400" cy="133350"/>
-          </a:xfrm>
-          <a:prstGeom prst="triangle">
-            <a:avLst/>
-          </a:prstGeom>
-          <a:noFill/>
-          <a:ln w="19050">
-            <a:solidFill>
-              <a:srgbClr val="E94D1C"/>
-            </a:solidFill>
-          </a:ln>
-          <a:effectLst/>
-        </p:spPr>
-        <p:style>
-          <a:lnRef idx="1">
-            <a:schemeClr val="accent1"/>
-          </a:lnRef>
-          <a:fillRef idx="3">
-            <a:schemeClr val="accent1"/>
-          </a:fillRef>
-          <a:effectRef idx="2">
-            <a:schemeClr val="accent1"/>
-          </a:effectRef>
-          <a:fontRef idx="minor">
-            <a:schemeClr val="lt1"/>
-          </a:fontRef>
-        </p:style>
-        <p:txBody>
-          <a:bodyPr rtlCol="0" anchor="ctr"/>
-          <a:lstStyle/>
-          <a:p>
-            <a:pPr algn="ctr"/>
-          </a:p>
-        </p:txBody>
-      </p:sp>
-      <p:sp>
-        <p:nvSpPr>
-          <p:cNvPr id="11" name="Rectangle 10"/>
-          <p:cNvSpPr/>
-          <p:nvPr/>
-        </p:nvSpPr>
-        <p:spPr>
-          <a:xfrm>
-            <a:off x="9193530" y="2951607"/>
-            <a:ext cx="15240" cy="38100"/>
-          </a:xfrm>
-          <a:prstGeom prst="rect">
-            <a:avLst/>
-          </a:prstGeom>
-          <a:solidFill>
-            <a:srgbClr val="E94D1C"/>
-          </a:solidFill>
-          <a:ln>
-            <a:noFill/>
-          </a:ln>
-          <a:effectLst/>
-        </p:spPr>
-        <p:style>
-          <a:lnRef idx="1">
-            <a:schemeClr val="accent1"/>
-          </a:lnRef>
-          <a:fillRef idx="3">
-            <a:schemeClr val="accent1"/>
-          </a:fillRef>
-          <a:effectRef idx="2">
-            <a:schemeClr val="accent1"/>
-          </a:effectRef>
-          <a:fontRef idx="minor">
-            <a:schemeClr val="lt1"/>
-          </a:fontRef>
-        </p:style>
-        <p:txBody>
-          <a:bodyPr rtlCol="0" anchor="ctr"/>
-          <a:lstStyle/>
-          <a:p>
-            <a:pPr algn="ctr"/>
-          </a:p>
-        </p:txBody>
-      </p:sp>
-      <p:sp>
-        <p:nvSpPr>
-          <p:cNvPr id="12" name="TextBox 11"/>
+          <p:cNvPr id="10" name="TextBox 9"/>
           <p:cNvSpPr txBox="1"/>
           <p:nvPr/>
         </p:nvSpPr>
         <p:spPr>
           <a:xfrm>
-            <a:off x="9372600" y="2903982"/>
-            <a:ext cx="2133600" cy="182880"/>
+            <a:off x="685800" y="6324600"/>
+            <a:ext cx="6667500" cy="182880"/>
           </a:xfrm>
           <a:prstGeom prst="rect">
             <a:avLst/>
@@ -12492,137 +12404,12 @@
               </a:lnSpc>
             </a:pPr>
             <a:r>
-              <a:rPr sz="900" b="1" i="0" spc="120">
-                <a:solidFill>
-                  <a:srgbClr val="E94D1C"/>
+              <a:rPr sz="900" b="0" i="0">
+                <a:solidFill>
+                  <a:srgbClr val="6B6B78"/>
                 </a:solidFill>
                 <a:latin typeface="Roboto"/>
               </a:rPr>
-              <a:t>CUIDADO</a:t>
-            </a:r>
-          </a:p>
-        </p:txBody>
-      </p:sp>
-      <p:sp>
-        <p:nvSpPr>
-          <p:cNvPr id="13" name="Rectangle 12"/>
-          <p:cNvSpPr/>
-          <p:nvPr/>
-        </p:nvSpPr>
-        <p:spPr>
-          <a:xfrm>
-            <a:off x="9124950" y="3180207"/>
-            <a:ext cx="38100" cy="603504"/>
-          </a:xfrm>
-          <a:prstGeom prst="rect">
-            <a:avLst/>
-          </a:prstGeom>
-          <a:solidFill>
-            <a:srgbClr val="E94D1C"/>
-          </a:solidFill>
-          <a:ln>
-            <a:noFill/>
-          </a:ln>
-          <a:effectLst/>
-        </p:spPr>
-        <p:style>
-          <a:lnRef idx="1">
-            <a:schemeClr val="accent1"/>
-          </a:lnRef>
-          <a:fillRef idx="3">
-            <a:schemeClr val="accent1"/>
-          </a:fillRef>
-          <a:effectRef idx="2">
-            <a:schemeClr val="accent1"/>
-          </a:effectRef>
-          <a:fontRef idx="minor">
-            <a:schemeClr val="lt1"/>
-          </a:fontRef>
-        </p:style>
-        <p:txBody>
-          <a:bodyPr rtlCol="0" anchor="ctr" wrap="square" lIns="0" rIns="0" tIns="0" bIns="0"/>
-          <a:lstStyle/>
-          <a:p>
-            <a:pPr algn="ctr"/>
-          </a:p>
-        </p:txBody>
-      </p:sp>
-      <p:sp>
-        <p:nvSpPr>
-          <p:cNvPr id="14" name="TextBox 13"/>
-          <p:cNvSpPr txBox="1"/>
-          <p:nvPr/>
-        </p:nvSpPr>
-        <p:spPr>
-          <a:xfrm>
-            <a:off x="9334500" y="3180207"/>
-            <a:ext cx="2171700" cy="1175004"/>
-          </a:xfrm>
-          <a:prstGeom prst="rect">
-            <a:avLst/>
-          </a:prstGeom>
-          <a:noFill/>
-        </p:spPr>
-        <p:txBody>
-          <a:bodyPr wrap="square" lIns="0" rIns="0" tIns="0" bIns="0" anchor="t">
-            <a:spAutoFit/>
-          </a:bodyPr>
-          <a:lstStyle/>
-          <a:p>
-            <a:pPr algn="l">
-              <a:lnSpc>
-                <a:spcPct val="140000"/>
-              </a:lnSpc>
-              <a:spcAft>
-                <a:spcPts val="600"/>
-              </a:spcAft>
-            </a:pPr>
-            <a:r>
-              <a:rPr sz="1200" b="0" i="0">
-                <a:solidFill>
-                  <a:srgbClr val="3A3A44"/>
-                </a:solidFill>
-                <a:latin typeface="Roboto"/>
-              </a:rPr>
-              <a:t>A opção --privileged devolve tudo de uma vez e ainda desliga o seccomp.</a:t>
-            </a:r>
-          </a:p>
-        </p:txBody>
-      </p:sp>
-      <p:sp>
-        <p:nvSpPr>
-          <p:cNvPr id="15" name="TextBox 14"/>
-          <p:cNvSpPr txBox="1"/>
-          <p:nvPr/>
-        </p:nvSpPr>
-        <p:spPr>
-          <a:xfrm>
-            <a:off x="685800" y="6324600"/>
-            <a:ext cx="6667500" cy="182880"/>
-          </a:xfrm>
-          <a:prstGeom prst="rect">
-            <a:avLst/>
-          </a:prstGeom>
-          <a:noFill/>
-        </p:spPr>
-        <p:txBody>
-          <a:bodyPr wrap="square" lIns="0" rIns="0" tIns="0" bIns="0" anchor="t">
-            <a:spAutoFit/>
-          </a:bodyPr>
-          <a:lstStyle/>
-          <a:p>
-            <a:pPr algn="l">
-              <a:lnSpc>
-                <a:spcPct val="120000"/>
-              </a:lnSpc>
-            </a:pPr>
-            <a:r>
-              <a:rPr sz="900" b="0" i="0">
-                <a:solidFill>
-                  <a:srgbClr val="6B6B78"/>
-                </a:solidFill>
-                <a:latin typeface="Roboto"/>
-              </a:rPr>
               <a:t>01 · Arquitetura</a:t>
             </a:r>
           </a:p>
@@ -12630,7 +12417,7 @@
       </p:sp>
       <p:sp>
         <p:nvSpPr>
-          <p:cNvPr id="16" name="TextBox 15"/>
+          <p:cNvPr id="11" name="TextBox 10"/>
           <p:cNvSpPr txBox="1"/>
           <p:nvPr/>
         </p:nvSpPr>
@@ -13310,7 +13097,7 @@
                 </a:solidFill>
                 <a:latin typeface="Roboto"/>
               </a:rPr>
-              <a:t>Mapeamento entre os diagramas da Sprint 2 e o arquivo de compose, com o número de cada task.</a:t>
+              <a:t>Mapeamento entre os diagramas de arquitetura e o arquivo de compose.</a:t>
             </a:r>
           </a:p>
         </p:txBody>
@@ -15144,7 +14931,7 @@
                 </a:solidFill>
                 <a:latin typeface="Roboto"/>
               </a:rPr>
-              <a:t>O projeto lógico é o mesmo nas três opções, e a escolha entre elas entra no ADR, o documento de decisões arquiteturais da Sprint 2. O Docker também usa a palavra </a:t>
+              <a:t>O projeto lógico é o mesmo nas três opções, e a escolha entre elas entra no ADR, o documento de decisões arquiteturais do projeto. O Docker também usa a palavra </a:t>
             </a:r>
             <a:r>
               <a:rPr sz="1280" b="0" i="1">
@@ -16063,7 +15850,7 @@
         </p:nvSpPr>
         <p:spPr>
           <a:xfrm>
-            <a:off x="857250" y="3028950"/>
+            <a:off x="857250" y="2990850"/>
             <a:ext cx="3810000" cy="167640"/>
           </a:xfrm>
           <a:prstGeom prst="rect">
@@ -16102,7 +15889,7 @@
         </p:nvSpPr>
         <p:spPr>
           <a:xfrm>
-            <a:off x="857250" y="3200400"/>
+            <a:off x="857250" y="3162300"/>
             <a:ext cx="3810000" cy="1866900"/>
           </a:xfrm>
           <a:prstGeom prst="rect">
@@ -16146,7 +15933,7 @@
         </p:nvSpPr>
         <p:spPr>
           <a:xfrm>
-            <a:off x="1123950" y="3448050"/>
+            <a:off x="1123950" y="3409950"/>
             <a:ext cx="1428750" cy="457200"/>
           </a:xfrm>
           <a:prstGeom prst="roundRect">
@@ -16192,7 +15979,7 @@
         </p:nvSpPr>
         <p:spPr>
           <a:xfrm>
-            <a:off x="1123950" y="3600450"/>
+            <a:off x="1123950" y="3562350"/>
             <a:ext cx="1428750" cy="198120"/>
           </a:xfrm>
           <a:prstGeom prst="rect">
@@ -16231,7 +16018,7 @@
         </p:nvSpPr>
         <p:spPr>
           <a:xfrm>
-            <a:off x="2971800" y="3448050"/>
+            <a:off x="2971800" y="3409950"/>
             <a:ext cx="1428750" cy="457200"/>
           </a:xfrm>
           <a:prstGeom prst="roundRect">
@@ -16277,7 +16064,7 @@
         </p:nvSpPr>
         <p:spPr>
           <a:xfrm>
-            <a:off x="2971800" y="3600450"/>
+            <a:off x="2971800" y="3562350"/>
             <a:ext cx="1428750" cy="198120"/>
           </a:xfrm>
           <a:prstGeom prst="rect">
@@ -16316,7 +16103,7 @@
         </p:nvSpPr>
         <p:spPr>
           <a:xfrm>
-            <a:off x="2047875" y="4114800"/>
+            <a:off x="2047875" y="4076700"/>
             <a:ext cx="1428750" cy="419100"/>
           </a:xfrm>
           <a:prstGeom prst="roundRect">
@@ -16362,7 +16149,7 @@
         </p:nvSpPr>
         <p:spPr>
           <a:xfrm>
-            <a:off x="2047875" y="4248150"/>
+            <a:off x="2047875" y="4210050"/>
             <a:ext cx="1428750" cy="198120"/>
           </a:xfrm>
           <a:prstGeom prst="rect">
@@ -16401,7 +16188,7 @@
         </p:nvSpPr>
         <p:spPr>
           <a:xfrm>
-            <a:off x="2047875" y="4667250"/>
+            <a:off x="2047875" y="4629150"/>
             <a:ext cx="1428750" cy="285750"/>
           </a:xfrm>
           <a:prstGeom prst="roundRect">
@@ -16447,7 +16234,7 @@
         </p:nvSpPr>
         <p:spPr>
           <a:xfrm>
-            <a:off x="2047875" y="4733925"/>
+            <a:off x="2047875" y="4695825"/>
             <a:ext cx="1428750" cy="182880"/>
           </a:xfrm>
           <a:prstGeom prst="rect">
@@ -16486,7 +16273,7 @@
         </p:nvCxnSpPr>
         <p:spPr>
           <a:xfrm>
-            <a:off x="1838325" y="3905250"/>
+            <a:off x="1838325" y="3867150"/>
             <a:ext cx="733425" cy="209550"/>
           </a:xfrm>
           <a:prstGeom prst="line">
@@ -16521,7 +16308,7 @@
         </p:nvCxnSpPr>
         <p:spPr>
           <a:xfrm flipH="1">
-            <a:off x="2952750" y="3905250"/>
+            <a:off x="2952750" y="3867150"/>
             <a:ext cx="733425" cy="209550"/>
           </a:xfrm>
           <a:prstGeom prst="line">
@@ -16556,7 +16343,7 @@
         </p:nvCxnSpPr>
         <p:spPr>
           <a:xfrm>
-            <a:off x="2762250" y="4533900"/>
+            <a:off x="2762250" y="4495800"/>
             <a:ext cx="0" cy="133350"/>
           </a:xfrm>
           <a:prstGeom prst="line">
@@ -16591,7 +16378,7 @@
         </p:nvCxnSpPr>
         <p:spPr>
           <a:xfrm>
-            <a:off x="4667250" y="4133850"/>
+            <a:off x="4667250" y="4095750"/>
             <a:ext cx="1524000" cy="0"/>
           </a:xfrm>
           <a:prstGeom prst="line">
@@ -16626,7 +16413,7 @@
         </p:nvSpPr>
         <p:spPr>
           <a:xfrm>
-            <a:off x="4667250" y="3867150"/>
+            <a:off x="4667250" y="3829050"/>
             <a:ext cx="1524000" cy="198120"/>
           </a:xfrm>
           <a:prstGeom prst="rect">
@@ -16665,7 +16452,7 @@
         </p:nvSpPr>
         <p:spPr>
           <a:xfrm>
-            <a:off x="6191250" y="3028950"/>
+            <a:off x="6191250" y="2990850"/>
             <a:ext cx="4000500" cy="167640"/>
           </a:xfrm>
           <a:prstGeom prst="rect">
@@ -16704,7 +16491,7 @@
         </p:nvSpPr>
         <p:spPr>
           <a:xfrm>
-            <a:off x="6191250" y="3200400"/>
+            <a:off x="6191250" y="3162300"/>
             <a:ext cx="3810000" cy="1866900"/>
           </a:xfrm>
           <a:prstGeom prst="rect">
@@ -16748,7 +16535,7 @@
         </p:nvSpPr>
         <p:spPr>
           <a:xfrm>
-            <a:off x="6381750" y="3314700"/>
+            <a:off x="6381750" y="3276600"/>
             <a:ext cx="1905000" cy="167640"/>
           </a:xfrm>
           <a:prstGeom prst="rect">
@@ -16787,7 +16574,7 @@
         </p:nvSpPr>
         <p:spPr>
           <a:xfrm>
-            <a:off x="6381750" y="3543300"/>
+            <a:off x="6381750" y="3505200"/>
             <a:ext cx="1066800" cy="495300"/>
           </a:xfrm>
           <a:prstGeom prst="rect">
@@ -16831,7 +16618,7 @@
         </p:nvSpPr>
         <p:spPr>
           <a:xfrm>
-            <a:off x="6400800" y="3619500"/>
+            <a:off x="6400800" y="3581400"/>
             <a:ext cx="1028700" cy="175260"/>
           </a:xfrm>
           <a:prstGeom prst="rect">
@@ -16870,7 +16657,7 @@
         </p:nvSpPr>
         <p:spPr>
           <a:xfrm>
-            <a:off x="6400800" y="3790950"/>
+            <a:off x="6400800" y="3752850"/>
             <a:ext cx="1028700" cy="167640"/>
           </a:xfrm>
           <a:prstGeom prst="rect">
@@ -16909,7 +16696,7 @@
         </p:nvSpPr>
         <p:spPr>
           <a:xfrm>
-            <a:off x="7562850" y="3543300"/>
+            <a:off x="7562850" y="3505200"/>
             <a:ext cx="1066800" cy="495300"/>
           </a:xfrm>
           <a:prstGeom prst="rect">
@@ -16953,7 +16740,7 @@
         </p:nvSpPr>
         <p:spPr>
           <a:xfrm>
-            <a:off x="7581900" y="3619500"/>
+            <a:off x="7581900" y="3581400"/>
             <a:ext cx="1028700" cy="175260"/>
           </a:xfrm>
           <a:prstGeom prst="rect">
@@ -16992,7 +16779,7 @@
         </p:nvSpPr>
         <p:spPr>
           <a:xfrm>
-            <a:off x="7581900" y="3790950"/>
+            <a:off x="7581900" y="3752850"/>
             <a:ext cx="1028700" cy="167640"/>
           </a:xfrm>
           <a:prstGeom prst="rect">
@@ -17031,7 +16818,7 @@
         </p:nvCxnSpPr>
         <p:spPr>
           <a:xfrm>
-            <a:off x="7448550" y="3790950"/>
+            <a:off x="7448550" y="3752850"/>
             <a:ext cx="114300" cy="0"/>
           </a:xfrm>
           <a:prstGeom prst="line">
@@ -17066,7 +16853,7 @@
         </p:nvSpPr>
         <p:spPr>
           <a:xfrm>
-            <a:off x="8743950" y="3543300"/>
+            <a:off x="8743950" y="3505200"/>
             <a:ext cx="1066800" cy="495300"/>
           </a:xfrm>
           <a:prstGeom prst="rect">
@@ -17110,7 +16897,7 @@
         </p:nvSpPr>
         <p:spPr>
           <a:xfrm>
-            <a:off x="8763000" y="3619500"/>
+            <a:off x="8763000" y="3581400"/>
             <a:ext cx="1028700" cy="175260"/>
           </a:xfrm>
           <a:prstGeom prst="rect">
@@ -17149,7 +16936,7 @@
         </p:nvSpPr>
         <p:spPr>
           <a:xfrm>
-            <a:off x="8763000" y="3790950"/>
+            <a:off x="8763000" y="3752850"/>
             <a:ext cx="1028700" cy="167640"/>
           </a:xfrm>
           <a:prstGeom prst="rect">
@@ -17188,7 +16975,7 @@
         </p:nvCxnSpPr>
         <p:spPr>
           <a:xfrm>
-            <a:off x="8629650" y="3790950"/>
+            <a:off x="8629650" y="3752850"/>
             <a:ext cx="114300" cy="0"/>
           </a:xfrm>
           <a:prstGeom prst="line">
@@ -17223,7 +17010,7 @@
         </p:nvSpPr>
         <p:spPr>
           <a:xfrm>
-            <a:off x="6381750" y="4267200"/>
+            <a:off x="6381750" y="4229100"/>
             <a:ext cx="3429000" cy="323850"/>
           </a:xfrm>
           <a:prstGeom prst="roundRect">
@@ -17272,7 +17059,7 @@
         </p:nvSpPr>
         <p:spPr>
           <a:xfrm>
-            <a:off x="6381750" y="4362450"/>
+            <a:off x="6381750" y="4324350"/>
             <a:ext cx="3429000" cy="182880"/>
           </a:xfrm>
           <a:prstGeom prst="rect">
@@ -17311,8 +17098,8 @@
         </p:nvSpPr>
         <p:spPr>
           <a:xfrm>
-            <a:off x="6381750" y="4762500"/>
-            <a:ext cx="3810000" cy="182880"/>
+            <a:off x="6381750" y="4667250"/>
+            <a:ext cx="3390900" cy="438150"/>
           </a:xfrm>
           <a:prstGeom prst="rect">
             <a:avLst/>
@@ -17327,7 +17114,7 @@
           <a:p>
             <a:pPr algn="l">
               <a:lnSpc>
-                <a:spcPct val="120000"/>
+                <a:spcPct val="140000"/>
               </a:lnSpc>
             </a:pPr>
             <a:r>
@@ -18043,7 +17830,7 @@
                 </a:solidFill>
                 <a:latin typeface="Roboto"/>
               </a:rPr>
-              <a:t>, o pirulito da UML.</a:t>
+              <a:t> da UML.</a:t>
             </a:r>
           </a:p>
         </p:txBody>
@@ -18144,7 +17931,7 @@
                 </a:solidFill>
                 <a:latin typeface="Roboto"/>
               </a:rPr>
-              <a:t>, o soquete.</a:t>
+              <a:t>.</a:t>
             </a:r>
           </a:p>
         </p:txBody>
@@ -19780,7 +19567,7 @@
                 </a:solidFill>
                 <a:latin typeface="Roboto"/>
               </a:rPr>
-              <a:t>Entrada direta para os dois diagramas da Sprint 2. Ainda não decidida.</a:t>
+              <a:t>Entrada direta para os dois diagramas de arquitetura. Ainda não decidida.</a:t>
             </a:r>
           </a:p>
         </p:txBody>
@@ -23202,7 +22989,7 @@
         </p:nvSpPr>
         <p:spPr>
           <a:xfrm>
-            <a:off x="704850" y="4118039"/>
+            <a:off x="704850" y="3854006"/>
             <a:ext cx="57150" cy="57150"/>
           </a:xfrm>
           <a:prstGeom prst="rect">
@@ -23246,7 +23033,7 @@
         </p:nvSpPr>
         <p:spPr>
           <a:xfrm>
-            <a:off x="971550" y="4014026"/>
+            <a:off x="971550" y="3749993"/>
             <a:ext cx="4857750" cy="95250"/>
           </a:xfrm>
           <a:prstGeom prst="rect">
@@ -26448,7 +26235,7 @@
                 </a:solidFill>
                 <a:latin typeface="Roboto"/>
               </a:rPr>
-              <a:t>I/O mais lento, principalmente nas máquinas Windows. A Aula 03 já avisa que camada extra prejudica desempenho.</a:t>
+              <a:t>I/O mais lento, principalmente nas máquinas Windows.</a:t>
             </a:r>
           </a:p>
         </p:txBody>
@@ -26628,7 +26415,7 @@
         </p:nvSpPr>
         <p:spPr>
           <a:xfrm>
-            <a:off x="704850" y="3003423"/>
+            <a:off x="704850" y="3141726"/>
             <a:ext cx="57150" cy="57150"/>
           </a:xfrm>
           <a:prstGeom prst="rect">
@@ -26672,7 +26459,7 @@
         </p:nvSpPr>
         <p:spPr>
           <a:xfrm>
-            <a:off x="971550" y="2894457"/>
+            <a:off x="971550" y="3032760"/>
             <a:ext cx="7677150" cy="95250"/>
           </a:xfrm>
           <a:prstGeom prst="rect">
@@ -26711,7 +26498,7 @@
         </p:nvSpPr>
         <p:spPr>
           <a:xfrm>
-            <a:off x="704850" y="3842385"/>
+            <a:off x="704850" y="3980688"/>
             <a:ext cx="57150" cy="57150"/>
           </a:xfrm>
           <a:prstGeom prst="rect">
@@ -26755,7 +26542,7 @@
         </p:nvSpPr>
         <p:spPr>
           <a:xfrm>
-            <a:off x="971550" y="3733419"/>
+            <a:off x="971550" y="3871722"/>
             <a:ext cx="7677150" cy="95250"/>
           </a:xfrm>
           <a:prstGeom prst="rect">
@@ -26794,7 +26581,7 @@
         </p:nvSpPr>
         <p:spPr>
           <a:xfrm>
-            <a:off x="704850" y="4957953"/>
+            <a:off x="704850" y="4819650"/>
             <a:ext cx="57150" cy="57150"/>
           </a:xfrm>
           <a:prstGeom prst="rect">
@@ -26838,7 +26625,7 @@
         </p:nvSpPr>
         <p:spPr>
           <a:xfrm>
-            <a:off x="971550" y="4848987"/>
+            <a:off x="971550" y="4710684"/>
             <a:ext cx="7677150" cy="95250"/>
           </a:xfrm>
           <a:prstGeom prst="rect">
@@ -26877,7 +26664,7 @@
         </p:nvSpPr>
         <p:spPr>
           <a:xfrm>
-            <a:off x="9124950" y="2903982"/>
+            <a:off x="9124950" y="3042285"/>
             <a:ext cx="142875" cy="123825"/>
           </a:xfrm>
           <a:prstGeom prst="chevron">
@@ -26921,7 +26708,7 @@
         </p:nvSpPr>
         <p:spPr>
           <a:xfrm>
-            <a:off x="9372600" y="2903982"/>
+            <a:off x="9372600" y="3042285"/>
             <a:ext cx="2133600" cy="182880"/>
           </a:xfrm>
           <a:prstGeom prst="rect">
@@ -26960,8 +26747,8 @@
         </p:nvSpPr>
         <p:spPr>
           <a:xfrm>
-            <a:off x="9124950" y="3180207"/>
-            <a:ext cx="38100" cy="1005840"/>
+            <a:off x="9124950" y="3318510"/>
+            <a:ext cx="38100" cy="804672"/>
           </a:xfrm>
           <a:prstGeom prst="rect">
             <a:avLst/>
@@ -27004,8 +26791,8 @@
         </p:nvSpPr>
         <p:spPr>
           <a:xfrm>
-            <a:off x="9334500" y="3180207"/>
-            <a:ext cx="2171700" cy="1577340"/>
+            <a:off x="9334500" y="3318510"/>
+            <a:ext cx="2171700" cy="1376172"/>
           </a:xfrm>
           <a:prstGeom prst="rect">
             <a:avLst/>
@@ -27033,7 +26820,7 @@
                 </a:solidFill>
                 <a:latin typeface="Roboto"/>
               </a:rPr>
-              <a:t>Insumo direto da Sprint 3, que começa no dia 15 e tem como objetivo declarado definir as tecnologias e os mecanismos da implementação.</a:t>
+              <a:t>Insumo direto da próxima sprint, que vai definir as tecnologias e os mecanismos da implementação.</a:t>
             </a:r>
           </a:p>
         </p:txBody>
@@ -27628,7 +27415,7 @@
         </p:nvSpPr>
         <p:spPr>
           <a:xfrm>
-            <a:off x="6381750" y="4646104"/>
+            <a:off x="6381750" y="4382072"/>
             <a:ext cx="57150" cy="57150"/>
           </a:xfrm>
           <a:prstGeom prst="rect">
@@ -27672,7 +27459,7 @@
         </p:nvSpPr>
         <p:spPr>
           <a:xfrm>
-            <a:off x="6648450" y="4542092"/>
+            <a:off x="6648450" y="4278058"/>
             <a:ext cx="4857750" cy="95250"/>
           </a:xfrm>
           <a:prstGeom prst="rect">
@@ -27698,7 +27485,7 @@
                 </a:solidFill>
                 <a:latin typeface="Roboto"/>
               </a:rPr>
-              <a:t>Esse mesmo arquivo é o que vira o diagrama de implantação da Sprint 2.</a:t>
+              <a:t>Esse mesmo arquivo é o que vira o diagrama de implantação do projeto.</a:t>
             </a:r>
           </a:p>
         </p:txBody>
@@ -28877,7 +28664,7 @@
         </p:nvSpPr>
         <p:spPr>
           <a:xfrm>
-            <a:off x="704850" y="2347341"/>
+            <a:off x="704850" y="2229040"/>
             <a:ext cx="57150" cy="57150"/>
           </a:xfrm>
           <a:prstGeom prst="rect">
@@ -28921,7 +28708,7 @@
         </p:nvSpPr>
         <p:spPr>
           <a:xfrm>
-            <a:off x="971550" y="2258187"/>
+            <a:off x="971550" y="2134934"/>
             <a:ext cx="9677400" cy="95250"/>
           </a:xfrm>
           <a:prstGeom prst="rect">
@@ -28941,7 +28728,7 @@
               </a:lnSpc>
             </a:pPr>
             <a:r>
-              <a:rPr sz="1350" b="0" i="0">
+              <a:rPr sz="1420" b="0" i="0">
                 <a:solidFill>
                   <a:srgbClr val="1A1A1E"/>
                 </a:solidFill>
@@ -28960,7 +28747,7 @@
         </p:nvSpPr>
         <p:spPr>
           <a:xfrm>
-            <a:off x="704850" y="2783205"/>
+            <a:off x="704850" y="2696528"/>
             <a:ext cx="57150" cy="57150"/>
           </a:xfrm>
           <a:prstGeom prst="rect">
@@ -29004,7 +28791,7 @@
         </p:nvSpPr>
         <p:spPr>
           <a:xfrm>
-            <a:off x="971550" y="2694051"/>
+            <a:off x="971550" y="2602421"/>
             <a:ext cx="9677400" cy="95250"/>
           </a:xfrm>
           <a:prstGeom prst="rect">
@@ -29024,7 +28811,7 @@
               </a:lnSpc>
             </a:pPr>
             <a:r>
-              <a:rPr sz="1350" b="0" i="0">
+              <a:rPr sz="1420" b="0" i="0">
                 <a:solidFill>
                   <a:srgbClr val="1A1A1E"/>
                 </a:solidFill>
@@ -29043,7 +28830,7 @@
         </p:nvSpPr>
         <p:spPr>
           <a:xfrm>
-            <a:off x="704850" y="3219069"/>
+            <a:off x="704850" y="3164014"/>
             <a:ext cx="57150" cy="57150"/>
           </a:xfrm>
           <a:prstGeom prst="rect">
@@ -29087,7 +28874,7 @@
         </p:nvSpPr>
         <p:spPr>
           <a:xfrm>
-            <a:off x="971550" y="3129915"/>
+            <a:off x="971550" y="3069908"/>
             <a:ext cx="9677400" cy="95250"/>
           </a:xfrm>
           <a:prstGeom prst="rect">
@@ -29107,7 +28894,7 @@
               </a:lnSpc>
             </a:pPr>
             <a:r>
-              <a:rPr sz="1350" b="0" i="0">
+              <a:rPr sz="1420" b="0" i="0">
                 <a:solidFill>
                   <a:srgbClr val="1A1A1E"/>
                 </a:solidFill>
@@ -29126,7 +28913,7 @@
         </p:nvSpPr>
         <p:spPr>
           <a:xfrm>
-            <a:off x="704850" y="3881247"/>
+            <a:off x="704850" y="3870389"/>
             <a:ext cx="57150" cy="57150"/>
           </a:xfrm>
           <a:prstGeom prst="rect">
@@ -29170,7 +28957,7 @@
         </p:nvSpPr>
         <p:spPr>
           <a:xfrm>
-            <a:off x="971550" y="3792093"/>
+            <a:off x="971550" y="3776282"/>
             <a:ext cx="9677400" cy="95250"/>
           </a:xfrm>
           <a:prstGeom prst="rect">
@@ -29190,7 +28977,7 @@
               </a:lnSpc>
             </a:pPr>
             <a:r>
-              <a:rPr sz="1350" b="0" i="0">
+              <a:rPr sz="1420" b="0" i="0">
                 <a:solidFill>
                   <a:srgbClr val="1A1A1E"/>
                 </a:solidFill>
@@ -29209,7 +28996,7 @@
         </p:nvSpPr>
         <p:spPr>
           <a:xfrm>
-            <a:off x="704850" y="4317111"/>
+            <a:off x="704850" y="4337876"/>
             <a:ext cx="57150" cy="57150"/>
           </a:xfrm>
           <a:prstGeom prst="rect">
@@ -29253,7 +29040,7 @@
         </p:nvSpPr>
         <p:spPr>
           <a:xfrm>
-            <a:off x="971550" y="4227957"/>
+            <a:off x="971550" y="4243768"/>
             <a:ext cx="9677400" cy="95250"/>
           </a:xfrm>
           <a:prstGeom prst="rect">
@@ -29273,7 +29060,7 @@
               </a:lnSpc>
             </a:pPr>
             <a:r>
-              <a:rPr sz="1350" b="0" i="0">
+              <a:rPr sz="1420" b="0" i="0">
                 <a:solidFill>
                   <a:srgbClr val="1A1A1E"/>
                 </a:solidFill>
@@ -29292,7 +29079,7 @@
         </p:nvSpPr>
         <p:spPr>
           <a:xfrm>
-            <a:off x="704850" y="4752975"/>
+            <a:off x="704850" y="4805362"/>
             <a:ext cx="57150" cy="57150"/>
           </a:xfrm>
           <a:prstGeom prst="rect">
@@ -29336,7 +29123,7 @@
         </p:nvSpPr>
         <p:spPr>
           <a:xfrm>
-            <a:off x="971550" y="4663821"/>
+            <a:off x="971550" y="4711256"/>
             <a:ext cx="9677400" cy="95250"/>
           </a:xfrm>
           <a:prstGeom prst="rect">
@@ -29356,7 +29143,7 @@
               </a:lnSpc>
             </a:pPr>
             <a:r>
-              <a:rPr sz="1350" b="0" i="0">
+              <a:rPr sz="1420" b="0" i="0">
                 <a:solidFill>
                   <a:srgbClr val="1A1A1E"/>
                 </a:solidFill>
@@ -29375,7 +29162,7 @@
         </p:nvSpPr>
         <p:spPr>
           <a:xfrm>
-            <a:off x="704850" y="5188839"/>
+            <a:off x="704850" y="5272850"/>
             <a:ext cx="57150" cy="57150"/>
           </a:xfrm>
           <a:prstGeom prst="rect">
@@ -29419,7 +29206,7 @@
         </p:nvSpPr>
         <p:spPr>
           <a:xfrm>
-            <a:off x="971550" y="5099685"/>
+            <a:off x="971550" y="5178742"/>
             <a:ext cx="9677400" cy="95250"/>
           </a:xfrm>
           <a:prstGeom prst="rect">
@@ -29439,7 +29226,7 @@
               </a:lnSpc>
             </a:pPr>
             <a:r>
-              <a:rPr sz="1350" b="0" i="0">
+              <a:rPr sz="1420" b="0" i="0">
                 <a:solidFill>
                   <a:srgbClr val="1A1A1E"/>
                 </a:solidFill>
@@ -29458,7 +29245,7 @@
         </p:nvSpPr>
         <p:spPr>
           <a:xfrm>
-            <a:off x="704850" y="5624703"/>
+            <a:off x="704850" y="5740337"/>
             <a:ext cx="57150" cy="57150"/>
           </a:xfrm>
           <a:prstGeom prst="rect">
@@ -29502,7 +29289,7 @@
         </p:nvSpPr>
         <p:spPr>
           <a:xfrm>
-            <a:off x="971550" y="5535549"/>
+            <a:off x="971550" y="5646230"/>
             <a:ext cx="9677400" cy="95250"/>
           </a:xfrm>
           <a:prstGeom prst="rect">
@@ -29522,7 +29309,7 @@
               </a:lnSpc>
             </a:pPr>
             <a:r>
-              <a:rPr sz="1350" b="0" i="0">
+              <a:rPr sz="1420" b="0" i="0">
                 <a:solidFill>
                   <a:srgbClr val="1A1A1E"/>
                 </a:solidFill>
@@ -30621,7 +30408,7 @@
         <p:spPr>
           <a:xfrm>
             <a:off x="685800" y="4629150"/>
-            <a:ext cx="28575" cy="477774"/>
+            <a:ext cx="28575" cy="238887"/>
           </a:xfrm>
           <a:prstGeom prst="rect">
             <a:avLst/>
@@ -30870,7 +30657,7 @@
         </p:nvSpPr>
         <p:spPr>
           <a:xfrm>
-            <a:off x="685800" y="2855976"/>
+            <a:off x="685800" y="2723960"/>
             <a:ext cx="5143500" cy="182880"/>
           </a:xfrm>
           <a:prstGeom prst="rect">
@@ -30909,7 +30696,7 @@
         </p:nvSpPr>
         <p:spPr>
           <a:xfrm>
-            <a:off x="685800" y="3065526"/>
+            <a:off x="685800" y="2933510"/>
             <a:ext cx="419100" cy="28575"/>
           </a:xfrm>
           <a:prstGeom prst="rect">
@@ -30953,7 +30740,7 @@
         </p:nvSpPr>
         <p:spPr>
           <a:xfrm>
-            <a:off x="704850" y="3455289"/>
+            <a:off x="704850" y="3323273"/>
             <a:ext cx="57150" cy="57150"/>
           </a:xfrm>
           <a:prstGeom prst="rect">
@@ -30997,7 +30784,7 @@
         </p:nvSpPr>
         <p:spPr>
           <a:xfrm>
-            <a:off x="971550" y="3351276"/>
+            <a:off x="971550" y="3219260"/>
             <a:ext cx="4857750" cy="95250"/>
           </a:xfrm>
           <a:prstGeom prst="rect">
@@ -31036,7 +30823,7 @@
         </p:nvSpPr>
         <p:spPr>
           <a:xfrm>
-            <a:off x="6362700" y="2855976"/>
+            <a:off x="6362700" y="2723960"/>
             <a:ext cx="5143500" cy="182880"/>
           </a:xfrm>
           <a:prstGeom prst="rect">
@@ -31075,7 +30862,7 @@
         </p:nvSpPr>
         <p:spPr>
           <a:xfrm>
-            <a:off x="6362700" y="3065526"/>
+            <a:off x="6362700" y="2933510"/>
             <a:ext cx="419100" cy="28575"/>
           </a:xfrm>
           <a:prstGeom prst="rect">
@@ -31119,7 +30906,7 @@
         </p:nvSpPr>
         <p:spPr>
           <a:xfrm>
-            <a:off x="6381750" y="3455289"/>
+            <a:off x="6381750" y="3323273"/>
             <a:ext cx="57150" cy="57150"/>
           </a:xfrm>
           <a:prstGeom prst="rect">
@@ -31163,7 +30950,7 @@
         </p:nvSpPr>
         <p:spPr>
           <a:xfrm>
-            <a:off x="6648450" y="3351276"/>
+            <a:off x="6648450" y="3219260"/>
             <a:ext cx="4857750" cy="95250"/>
           </a:xfrm>
           <a:prstGeom prst="rect">
@@ -31202,7 +30989,7 @@
         </p:nvSpPr>
         <p:spPr>
           <a:xfrm>
-            <a:off x="6381750" y="4514088"/>
+            <a:off x="6381750" y="4646104"/>
             <a:ext cx="57150" cy="57150"/>
           </a:xfrm>
           <a:prstGeom prst="rect">
@@ -31246,7 +31033,7 @@
         </p:nvSpPr>
         <p:spPr>
           <a:xfrm>
-            <a:off x="6648450" y="4410075"/>
+            <a:off x="6648450" y="4542092"/>
             <a:ext cx="4857750" cy="95250"/>
           </a:xfrm>
           <a:prstGeom prst="rect">
@@ -33208,7 +32995,7 @@
         </p:nvSpPr>
         <p:spPr>
           <a:xfrm>
-            <a:off x="857250" y="2257425"/>
+            <a:off x="857250" y="2238375"/>
             <a:ext cx="4381500" cy="167640"/>
           </a:xfrm>
           <a:prstGeom prst="rect">
@@ -33247,7 +33034,7 @@
         </p:nvSpPr>
         <p:spPr>
           <a:xfrm>
-            <a:off x="857250" y="3971925"/>
+            <a:off x="857250" y="3952875"/>
             <a:ext cx="3429000" cy="438150"/>
           </a:xfrm>
           <a:prstGeom prst="roundRect">
@@ -33295,7 +33082,7 @@
         </p:nvSpPr>
         <p:spPr>
           <a:xfrm>
-            <a:off x="1047750" y="4105275"/>
+            <a:off x="1047750" y="4086225"/>
             <a:ext cx="3048000" cy="213360"/>
           </a:xfrm>
           <a:prstGeom prst="rect">
@@ -33334,7 +33121,7 @@
         </p:nvSpPr>
         <p:spPr>
           <a:xfrm>
-            <a:off x="857250" y="3476625"/>
+            <a:off x="857250" y="3457575"/>
             <a:ext cx="3429000" cy="438150"/>
           </a:xfrm>
           <a:prstGeom prst="roundRect">
@@ -33382,7 +33169,7 @@
         </p:nvSpPr>
         <p:spPr>
           <a:xfrm>
-            <a:off x="1047750" y="3609975"/>
+            <a:off x="1047750" y="3590925"/>
             <a:ext cx="3048000" cy="213360"/>
           </a:xfrm>
           <a:prstGeom prst="rect">
@@ -33421,7 +33208,7 @@
         </p:nvSpPr>
         <p:spPr>
           <a:xfrm>
-            <a:off x="857250" y="2981325"/>
+            <a:off x="857250" y="2962275"/>
             <a:ext cx="3429000" cy="438150"/>
           </a:xfrm>
           <a:prstGeom prst="roundRect">
@@ -33469,7 +33256,7 @@
         </p:nvSpPr>
         <p:spPr>
           <a:xfrm>
-            <a:off x="1047750" y="3114675"/>
+            <a:off x="1047750" y="3095625"/>
             <a:ext cx="3048000" cy="213360"/>
           </a:xfrm>
           <a:prstGeom prst="rect">
@@ -33508,7 +33295,7 @@
         </p:nvSpPr>
         <p:spPr>
           <a:xfrm>
-            <a:off x="4400550" y="2981325"/>
+            <a:off x="4400550" y="2962275"/>
             <a:ext cx="28575" cy="1428750"/>
           </a:xfrm>
           <a:prstGeom prst="rect">
@@ -33552,7 +33339,7 @@
         </p:nvSpPr>
         <p:spPr>
           <a:xfrm>
-            <a:off x="742950" y="4543425"/>
+            <a:off x="742950" y="4524375"/>
             <a:ext cx="3657600" cy="381000"/>
           </a:xfrm>
           <a:prstGeom prst="rect">
@@ -33591,7 +33378,7 @@
         </p:nvSpPr>
         <p:spPr>
           <a:xfrm>
-            <a:off x="857250" y="2428875"/>
+            <a:off x="857250" y="2409825"/>
             <a:ext cx="3429000" cy="495300"/>
           </a:xfrm>
           <a:prstGeom prst="roundRect">
@@ -33640,7 +33427,7 @@
         </p:nvSpPr>
         <p:spPr>
           <a:xfrm>
-            <a:off x="1047750" y="2524125"/>
+            <a:off x="1047750" y="2505075"/>
             <a:ext cx="3048000" cy="213360"/>
           </a:xfrm>
           <a:prstGeom prst="rect">
@@ -33679,7 +33466,7 @@
         </p:nvSpPr>
         <p:spPr>
           <a:xfrm>
-            <a:off x="1047750" y="2705100"/>
+            <a:off x="1047750" y="2686050"/>
             <a:ext cx="3048000" cy="182880"/>
           </a:xfrm>
           <a:prstGeom prst="rect">
@@ -33718,7 +33505,7 @@
         </p:nvCxnSpPr>
         <p:spPr>
           <a:xfrm>
-            <a:off x="4857750" y="2371725"/>
+            <a:off x="4857750" y="2352675"/>
             <a:ext cx="0" cy="2152650"/>
           </a:xfrm>
           <a:prstGeom prst="line">
@@ -33753,7 +33540,7 @@
         </p:nvSpPr>
         <p:spPr>
           <a:xfrm>
-            <a:off x="5257800" y="2828925"/>
+            <a:off x="5257800" y="2809875"/>
             <a:ext cx="3619500" cy="243840"/>
           </a:xfrm>
           <a:prstGeom prst="rect">
@@ -33792,7 +33579,7 @@
         </p:nvSpPr>
         <p:spPr>
           <a:xfrm>
-            <a:off x="5257800" y="3095625"/>
+            <a:off x="5257800" y="3076575"/>
             <a:ext cx="3810000" cy="666750"/>
           </a:xfrm>
           <a:prstGeom prst="rect">
@@ -33831,7 +33618,7 @@
         </p:nvSpPr>
         <p:spPr>
           <a:xfrm>
-            <a:off x="5257800" y="3667125"/>
+            <a:off x="5257800" y="3648075"/>
             <a:ext cx="3619500" cy="243840"/>
           </a:xfrm>
           <a:prstGeom prst="rect">
@@ -33870,7 +33657,7 @@
         </p:nvSpPr>
         <p:spPr>
           <a:xfrm>
-            <a:off x="5257800" y="3933825"/>
+            <a:off x="5257800" y="3914775"/>
             <a:ext cx="3810000" cy="666750"/>
           </a:xfrm>
           <a:prstGeom prst="rect">
@@ -33909,8 +33696,8 @@
         </p:nvSpPr>
         <p:spPr>
           <a:xfrm>
-            <a:off x="685800" y="5472135"/>
-            <a:ext cx="28575" cy="661965"/>
+            <a:off x="685800" y="5428381"/>
+            <a:ext cx="28575" cy="705719"/>
           </a:xfrm>
           <a:prstGeom prst="rect">
             <a:avLst/>
@@ -33953,8 +33740,8 @@
         </p:nvSpPr>
         <p:spPr>
           <a:xfrm>
-            <a:off x="876300" y="5453085"/>
-            <a:ext cx="10629900" cy="795315"/>
+            <a:off x="876300" y="5409331"/>
+            <a:ext cx="10629900" cy="839069"/>
           </a:xfrm>
           <a:prstGeom prst="rect">
             <a:avLst/>
@@ -33973,7 +33760,7 @@
               </a:lnSpc>
             </a:pPr>
             <a:r>
-              <a:rPr sz="1200" b="0" i="0">
+              <a:rPr sz="1280" b="0" i="0">
                 <a:solidFill>
                   <a:srgbClr val="3A3A44"/>
                 </a:solidFill>

--- a/trabalhos/T1-Docker-Invite-People.pptx
+++ b/trabalhos/T1-Docker-Invite-People.pptx
@@ -14949,7 +14949,7 @@
                 </a:solidFill>
                 <a:latin typeface="Roboto"/>
               </a:rPr>
-              <a:t>, mas para o empilhamento do sistema de arquivos da imagem, que é outra coisa e não tem relação com a camada lógica da Aula 03.</a:t>
+              <a:t>, mas para o empilhamento do sistema de arquivos da imagem, que é outra coisa e não tem relação com a camada lógica da arquitetura em camadas.</a:t>
             </a:r>
           </a:p>
         </p:txBody>
@@ -25903,7 +25903,7 @@
                 </a:solidFill>
                 <a:latin typeface="Roboto"/>
               </a:rPr>
-              <a:t>A mesma imagem atravessa notebook, pipeline e a demonstração do T3.</a:t>
+              <a:t>A mesma imagem atravessa notebook, pipeline e a apresentação do projeto mais adiante.</a:t>
             </a:r>
           </a:p>
         </p:txBody>
@@ -26651,7 +26651,7 @@
                 </a:solidFill>
                 <a:latin typeface="Roboto"/>
               </a:rPr>
-              <a:t>A stack ainda não está decidida, e o ADR #63 é onde ela será registrada.</a:t>
+              <a:t>A stack ainda não está decidida, e o ADR é onde ela será registrada.</a:t>
             </a:r>
           </a:p>
         </p:txBody>
@@ -27735,7 +27735,7 @@
                 </a:solidFill>
                 <a:latin typeface="Roboto"/>
               </a:rPr>
-              <a:t>Os seis itens de modelagem da Sprint 2, do #58 ao #63, estão em To Do. Isto é insumo desses itens, não relato de item concluído.</a:t>
+              <a:t>Os seis itens de modelagem da arquitetura estão em To Do. Isto é insumo desses itens, não relato de item concluído.</a:t>
             </a:r>
           </a:p>
         </p:txBody>
@@ -27818,7 +27818,7 @@
                 </a:solidFill>
                 <a:latin typeface="Roboto"/>
               </a:rPr>
-              <a:t>O ADR #63, onde a stack será decidida, ainda não foi escrito.</a:t>
+              <a:t>O ADR, onde a stack será decidida, ainda não foi escrito.</a:t>
             </a:r>
           </a:p>
         </p:txBody>
@@ -33766,7 +33766,7 @@
                 </a:solidFill>
                 <a:latin typeface="Roboto"/>
               </a:rPr>
-              <a:t>A imagem é construída a partir de um Dockerfile, o arquivo de texto que declara a base e os passos, e circula entre máquinas por um registry. Cada instrução vira uma camada, e por isso um Dockerfile que copia um .env e faz RUN rm na instrução seguinte produz uma imagem em que o segredo continua legível. No nosso caso o segredo seria a senha do banco e o segredo de sessão do login do anfitrião, o UC001.</a:t>
+              <a:t>A imagem é construída a partir de um Dockerfile, o arquivo de texto que declara a base e os passos, e circula entre máquinas por um registry. Cada instrução vira uma camada, e por isso um Dockerfile que copia um .env e faz RUN rm na instrução seguinte produz uma imagem em que o segredo continua legível. No nosso caso o segredo seria a senha do banco e o segredo de sessão do login do anfitrião.</a:t>
             </a:r>
           </a:p>
         </p:txBody>

--- a/trabalhos/T1-Docker-Invite-People.pptx
+++ b/trabalhos/T1-Docker-Invite-People.pptx
@@ -18679,7 +18679,7 @@
                 </a:solidFill>
                 <a:latin typeface="Roboto"/>
               </a:rPr>
-              <a:t>Uma regra escrita na wiki depende de alguém revisar. A mesma regra na topologia é verificada pela estrutura.</a:t>
+              <a:t>Uma regra que só existe escrita depende de alguém lembrar de aplicar. Na topologia ela é garantida pela estrutura.</a:t>
             </a:r>
           </a:p>
         </p:txBody>
@@ -19194,7 +19194,7 @@
                 </a:solidFill>
                 <a:latin typeface="Roboto"/>
               </a:rPr>
-              <a:t>Marina é a persona da anfitriã, e a jornada dela descreve o link caindo no grupo da família. Isso é pico no convite público, onde o convidado confirma presença, e uma pessoa só no painel, onde a anfitriã vê a lista.</a:t>
+              <a:t>A jornada da anfitriã descreve o link caindo no grupo da família. Isso é pico no convite público, onde o convidado confirma presença, e uma pessoa só no painel, onde a anfitriã vê a lista.</a:t>
             </a:r>
           </a:p>
         </p:txBody>
@@ -20404,7 +20404,7 @@
                 </a:solidFill>
                 <a:latin typeface="Roboto"/>
               </a:rPr>
-              <a:t>A arquitetura já está registrada no Guia da Arquitetura, com MVC no front-end e três camadas no back-end.</a:t>
+              <a:t>A arquitetura já está registrada na documentação do projeto, com MVC no front-end e três camadas no back-end.</a:t>
             </a:r>
           </a:p>
         </p:txBody>
@@ -27735,7 +27735,7 @@
                 </a:solidFill>
                 <a:latin typeface="Roboto"/>
               </a:rPr>
-              <a:t>Os seis itens de modelagem da arquitetura estão em To Do. Isto é insumo desses itens, não relato de item concluído.</a:t>
+              <a:t>Os seis itens de modelagem da arquitetura seguem em aberto. Isto é insumo desses itens, não relato de item concluído.</a:t>
             </a:r>
           </a:p>
         </p:txBody>

--- a/trabalhos/T1-Docker-Invite-People.pptx
+++ b/trabalhos/T1-Docker-Invite-People.pptx
@@ -14931,7 +14931,7 @@
                 </a:solidFill>
                 <a:latin typeface="Roboto"/>
               </a:rPr>
-              <a:t>O projeto lógico é o mesmo nas três opções, e a escolha entre elas entra no ADR, o documento de decisões arquiteturais do projeto. O Docker também usa a palavra </a:t>
+              <a:t>O projeto lógico é o mesmo nas três opções, e a escolha entre elas entra no documento de decisões arquiteturais do projeto. O Docker também usa a palavra </a:t>
             </a:r>
             <a:r>
               <a:rPr sz="1280" b="0" i="1">
@@ -18097,7 +18097,7 @@
                 </a:solidFill>
                 <a:latin typeface="Roboto"/>
               </a:rPr>
-              <a:t>As imagens do arquivo são exemplo. A stack ainda não foi decidida e é assunto do ADR.</a:t>
+              <a:t>As imagens do arquivo são exemplo. A stack ainda não foi decidida e é assunto do documento de decisões arquiteturais.</a:t>
             </a:r>
           </a:p>
         </p:txBody>
@@ -19988,7 +19988,7 @@
                 </a:solidFill>
                 <a:latin typeface="Roboto"/>
               </a:rPr>
-              <a:t>A demonstração é do ambiente e da topologia, não do produto. A implementação começa na Sprint 4.</a:t>
+              <a:t>A demonstração é do ambiente e da topologia, não do produto. A implementação do produto começa em outubro.</a:t>
             </a:r>
           </a:p>
         </p:txBody>
@@ -20487,7 +20487,7 @@
                 </a:solidFill>
                 <a:latin typeface="Roboto"/>
               </a:rPr>
-              <a:t>A Sprint 2 tem uma Questão Norteadora a responder: como os componentes serão distribuídos e implantados no ambiente de execução.</a:t>
+              <a:t>O projeto ainda não decidiu como os componentes serão distribuídos e implantados no ambiente de execução.</a:t>
             </a:r>
           </a:p>
         </p:txBody>
@@ -22740,7 +22740,7 @@
         </p:nvSpPr>
         <p:spPr>
           <a:xfrm>
-            <a:off x="685800" y="2193226"/>
+            <a:off x="685800" y="2061210"/>
             <a:ext cx="5143500" cy="182880"/>
           </a:xfrm>
           <a:prstGeom prst="rect">
@@ -22779,7 +22779,7 @@
         </p:nvSpPr>
         <p:spPr>
           <a:xfrm>
-            <a:off x="685800" y="2402776"/>
+            <a:off x="685800" y="2270760"/>
             <a:ext cx="419100" cy="28575"/>
           </a:xfrm>
           <a:prstGeom prst="rect">
@@ -22823,7 +22823,7 @@
         </p:nvSpPr>
         <p:spPr>
           <a:xfrm>
-            <a:off x="704850" y="2792540"/>
+            <a:off x="704850" y="2660523"/>
             <a:ext cx="57150" cy="57150"/>
           </a:xfrm>
           <a:prstGeom prst="rect">
@@ -22867,7 +22867,7 @@
         </p:nvSpPr>
         <p:spPr>
           <a:xfrm>
-            <a:off x="971550" y="2688526"/>
+            <a:off x="971550" y="2556510"/>
             <a:ext cx="4857750" cy="95250"/>
           </a:xfrm>
           <a:prstGeom prst="rect">
@@ -22906,7 +22906,7 @@
         </p:nvSpPr>
         <p:spPr>
           <a:xfrm>
-            <a:off x="704850" y="3323273"/>
+            <a:off x="704850" y="3191256"/>
             <a:ext cx="57150" cy="57150"/>
           </a:xfrm>
           <a:prstGeom prst="rect">
@@ -22950,7 +22950,7 @@
         </p:nvSpPr>
         <p:spPr>
           <a:xfrm>
-            <a:off x="971550" y="3219260"/>
+            <a:off x="971550" y="3087243"/>
             <a:ext cx="4857750" cy="95250"/>
           </a:xfrm>
           <a:prstGeom prst="rect">
@@ -22989,7 +22989,7 @@
         </p:nvSpPr>
         <p:spPr>
           <a:xfrm>
-            <a:off x="704850" y="3854006"/>
+            <a:off x="704850" y="3721989"/>
             <a:ext cx="57150" cy="57150"/>
           </a:xfrm>
           <a:prstGeom prst="rect">
@@ -23033,7 +23033,7 @@
         </p:nvSpPr>
         <p:spPr>
           <a:xfrm>
-            <a:off x="971550" y="3749993"/>
+            <a:off x="971550" y="3617976"/>
             <a:ext cx="4857750" cy="95250"/>
           </a:xfrm>
           <a:prstGeom prst="rect">
@@ -23072,7 +23072,7 @@
         </p:nvSpPr>
         <p:spPr>
           <a:xfrm>
-            <a:off x="6362700" y="2193226"/>
+            <a:off x="6362700" y="2061210"/>
             <a:ext cx="5143500" cy="182880"/>
           </a:xfrm>
           <a:prstGeom prst="rect">
@@ -23111,7 +23111,7 @@
         </p:nvSpPr>
         <p:spPr>
           <a:xfrm>
-            <a:off x="6362700" y="2402776"/>
+            <a:off x="6362700" y="2270760"/>
             <a:ext cx="419100" cy="28575"/>
           </a:xfrm>
           <a:prstGeom prst="rect">
@@ -23155,7 +23155,7 @@
         </p:nvSpPr>
         <p:spPr>
           <a:xfrm>
-            <a:off x="6381750" y="2792540"/>
+            <a:off x="6381750" y="2660523"/>
             <a:ext cx="57150" cy="57150"/>
           </a:xfrm>
           <a:prstGeom prst="rect">
@@ -23199,7 +23199,7 @@
         </p:nvSpPr>
         <p:spPr>
           <a:xfrm>
-            <a:off x="6648450" y="2688526"/>
+            <a:off x="6648450" y="2556510"/>
             <a:ext cx="4857750" cy="95250"/>
           </a:xfrm>
           <a:prstGeom prst="rect">
@@ -23238,7 +23238,7 @@
         </p:nvSpPr>
         <p:spPr>
           <a:xfrm>
-            <a:off x="6381750" y="3323273"/>
+            <a:off x="6381750" y="3191256"/>
             <a:ext cx="57150" cy="57150"/>
           </a:xfrm>
           <a:prstGeom prst="rect">
@@ -23282,7 +23282,7 @@
         </p:nvSpPr>
         <p:spPr>
           <a:xfrm>
-            <a:off x="6648450" y="3219260"/>
+            <a:off x="6648450" y="3087243"/>
             <a:ext cx="4857750" cy="95250"/>
           </a:xfrm>
           <a:prstGeom prst="rect">
@@ -23321,7 +23321,7 @@
         </p:nvSpPr>
         <p:spPr>
           <a:xfrm>
-            <a:off x="6381750" y="4382072"/>
+            <a:off x="6381750" y="4250055"/>
             <a:ext cx="57150" cy="57150"/>
           </a:xfrm>
           <a:prstGeom prst="rect">
@@ -23365,7 +23365,7 @@
         </p:nvSpPr>
         <p:spPr>
           <a:xfrm>
-            <a:off x="6648450" y="4278058"/>
+            <a:off x="6648450" y="4146042"/>
             <a:ext cx="4857750" cy="95250"/>
           </a:xfrm>
           <a:prstGeom prst="rect">
@@ -23404,7 +23404,7 @@
         </p:nvSpPr>
         <p:spPr>
           <a:xfrm>
-            <a:off x="6381750" y="5440870"/>
+            <a:off x="6381750" y="5308854"/>
             <a:ext cx="57150" cy="57150"/>
           </a:xfrm>
           <a:prstGeom prst="rect">
@@ -23448,7 +23448,7 @@
         </p:nvSpPr>
         <p:spPr>
           <a:xfrm>
-            <a:off x="6648450" y="5336858"/>
+            <a:off x="6648450" y="5204841"/>
             <a:ext cx="4857750" cy="95250"/>
           </a:xfrm>
           <a:prstGeom prst="rect">
@@ -23474,7 +23474,7 @@
                 </a:solidFill>
                 <a:latin typeface="Roboto"/>
               </a:rPr>
-              <a:t>Por isso o ADR precisa registrar que container não dá o mesmo isolamento de uma máquina virtual.</a:t>
+              <a:t>Por isso o documento de decisões arquiteturais precisa registrar que container não dá o mesmo isolamento de uma máquina virtual.</a:t>
             </a:r>
           </a:p>
         </p:txBody>
@@ -26415,7 +26415,7 @@
         </p:nvSpPr>
         <p:spPr>
           <a:xfrm>
-            <a:off x="704850" y="3141726"/>
+            <a:off x="704850" y="3003423"/>
             <a:ext cx="57150" cy="57150"/>
           </a:xfrm>
           <a:prstGeom prst="rect">
@@ -26459,7 +26459,7 @@
         </p:nvSpPr>
         <p:spPr>
           <a:xfrm>
-            <a:off x="971550" y="3032760"/>
+            <a:off x="971550" y="2894457"/>
             <a:ext cx="7677150" cy="95250"/>
           </a:xfrm>
           <a:prstGeom prst="rect">
@@ -26498,7 +26498,7 @@
         </p:nvSpPr>
         <p:spPr>
           <a:xfrm>
-            <a:off x="704850" y="3980688"/>
+            <a:off x="704850" y="3842385"/>
             <a:ext cx="57150" cy="57150"/>
           </a:xfrm>
           <a:prstGeom prst="rect">
@@ -26542,7 +26542,7 @@
         </p:nvSpPr>
         <p:spPr>
           <a:xfrm>
-            <a:off x="971550" y="3871722"/>
+            <a:off x="971550" y="3733419"/>
             <a:ext cx="7677150" cy="95250"/>
           </a:xfrm>
           <a:prstGeom prst="rect">
@@ -26581,7 +26581,7 @@
         </p:nvSpPr>
         <p:spPr>
           <a:xfrm>
-            <a:off x="704850" y="4819650"/>
+            <a:off x="704850" y="4681347"/>
             <a:ext cx="57150" cy="57150"/>
           </a:xfrm>
           <a:prstGeom prst="rect">
@@ -26625,7 +26625,7 @@
         </p:nvSpPr>
         <p:spPr>
           <a:xfrm>
-            <a:off x="971550" y="4710684"/>
+            <a:off x="971550" y="4572381"/>
             <a:ext cx="7677150" cy="95250"/>
           </a:xfrm>
           <a:prstGeom prst="rect">
@@ -26651,7 +26651,7 @@
                 </a:solidFill>
                 <a:latin typeface="Roboto"/>
               </a:rPr>
-              <a:t>A stack ainda não está decidida, e o ADR é onde ela será registrada.</a:t>
+              <a:t>A stack ainda não está decidida, e é o documento de decisões arquiteturais que vai registrar isso.</a:t>
             </a:r>
           </a:p>
         </p:txBody>
@@ -26664,7 +26664,7 @@
         </p:nvSpPr>
         <p:spPr>
           <a:xfrm>
-            <a:off x="9124950" y="3042285"/>
+            <a:off x="9124950" y="2903982"/>
             <a:ext cx="142875" cy="123825"/>
           </a:xfrm>
           <a:prstGeom prst="chevron">
@@ -26708,7 +26708,7 @@
         </p:nvSpPr>
         <p:spPr>
           <a:xfrm>
-            <a:off x="9372600" y="3042285"/>
+            <a:off x="9372600" y="2903982"/>
             <a:ext cx="2133600" cy="182880"/>
           </a:xfrm>
           <a:prstGeom prst="rect">
@@ -26747,7 +26747,7 @@
         </p:nvSpPr>
         <p:spPr>
           <a:xfrm>
-            <a:off x="9124950" y="3318510"/>
+            <a:off x="9124950" y="3180207"/>
             <a:ext cx="38100" cy="804672"/>
           </a:xfrm>
           <a:prstGeom prst="rect">
@@ -26791,7 +26791,7 @@
         </p:nvSpPr>
         <p:spPr>
           <a:xfrm>
-            <a:off x="9334500" y="3318510"/>
+            <a:off x="9334500" y="3180207"/>
             <a:ext cx="2171700" cy="1376172"/>
           </a:xfrm>
           <a:prstGeom prst="rect">
@@ -27665,7 +27665,7 @@
         </p:nvSpPr>
         <p:spPr>
           <a:xfrm>
-            <a:off x="704850" y="3561207"/>
+            <a:off x="704850" y="3422904"/>
             <a:ext cx="57150" cy="57150"/>
           </a:xfrm>
           <a:prstGeom prst="rect">
@@ -27709,7 +27709,7 @@
         </p:nvSpPr>
         <p:spPr>
           <a:xfrm>
-            <a:off x="971550" y="3452241"/>
+            <a:off x="971550" y="3313938"/>
             <a:ext cx="7486650" cy="95250"/>
           </a:xfrm>
           <a:prstGeom prst="rect">
@@ -27748,7 +27748,7 @@
         </p:nvSpPr>
         <p:spPr>
           <a:xfrm>
-            <a:off x="704850" y="4400169"/>
+            <a:off x="704850" y="4261866"/>
             <a:ext cx="57150" cy="57150"/>
           </a:xfrm>
           <a:prstGeom prst="rect">
@@ -27792,7 +27792,7 @@
         </p:nvSpPr>
         <p:spPr>
           <a:xfrm>
-            <a:off x="971550" y="4291203"/>
+            <a:off x="971550" y="4152900"/>
             <a:ext cx="7486650" cy="95250"/>
           </a:xfrm>
           <a:prstGeom prst="rect">
@@ -27818,7 +27818,7 @@
                 </a:solidFill>
                 <a:latin typeface="Roboto"/>
               </a:rPr>
-              <a:t>O ADR, onde a stack será decidida, ainda não foi escrito.</a:t>
+              <a:t>O documento de decisões arquiteturais, onde a stack será decidida, ainda não foi escrito.</a:t>
             </a:r>
           </a:p>
         </p:txBody>
@@ -27831,7 +27831,7 @@
         </p:nvSpPr>
         <p:spPr>
           <a:xfrm>
-            <a:off x="9124950" y="3452241"/>
+            <a:off x="9124950" y="3313938"/>
             <a:ext cx="142875" cy="133350"/>
           </a:xfrm>
           <a:prstGeom prst="flowChartDocument">
@@ -27875,7 +27875,7 @@
         </p:nvSpPr>
         <p:spPr>
           <a:xfrm>
-            <a:off x="9372600" y="3461766"/>
+            <a:off x="9372600" y="3323463"/>
             <a:ext cx="2133600" cy="182880"/>
           </a:xfrm>
           <a:prstGeom prst="rect">
@@ -27914,7 +27914,7 @@
         </p:nvSpPr>
         <p:spPr>
           <a:xfrm>
-            <a:off x="9124950" y="3737991"/>
+            <a:off x="9124950" y="3599688"/>
             <a:ext cx="38100" cy="1664208"/>
           </a:xfrm>
           <a:prstGeom prst="rect">
@@ -27958,7 +27958,7 @@
         </p:nvSpPr>
         <p:spPr>
           <a:xfrm>
-            <a:off x="9334500" y="3737991"/>
+            <a:off x="9334500" y="3599688"/>
             <a:ext cx="2171700" cy="2235708"/>
           </a:xfrm>
           <a:prstGeom prst="rect">

--- a/trabalhos/T1-Docker-Invite-People.pptx
+++ b/trabalhos/T1-Docker-Invite-People.pptx
@@ -11829,7 +11829,7 @@
                 </a:solidFill>
                 <a:latin typeface="Roboto"/>
               </a:rPr>
-              <a:t>Tiago Passos · Guilherme Toebe</a:t>
+              <a:t>Andreas Grings · Gabriel Tomasi</a:t>
             </a:r>
           </a:p>
           <a:p>
@@ -11845,7 +11845,7 @@
                 </a:solidFill>
                 <a:latin typeface="Roboto"/>
               </a:rPr>
-              <a:t>Andreas Grings · Gabriel Tomasi</a:t>
+              <a:t>Guilherme Toebe · Tiago Passos</a:t>
             </a:r>
           </a:p>
         </p:txBody>
@@ -11940,100 +11940,6 @@
                 <a:latin typeface="Roboto"/>
               </a:rPr>
               <a:t>Prof. Kleinner Farias</a:t>
-            </a:r>
-          </a:p>
-        </p:txBody>
-      </p:sp>
-      <p:sp>
-        <p:nvSpPr>
-          <p:cNvPr id="11" name="TextBox 10"/>
-          <p:cNvSpPr txBox="1"/>
-          <p:nvPr/>
-        </p:nvSpPr>
-        <p:spPr>
-          <a:xfrm>
-            <a:off x="7924800" y="5391150"/>
-            <a:ext cx="2667000" cy="152400"/>
-          </a:xfrm>
-          <a:prstGeom prst="rect">
-            <a:avLst/>
-          </a:prstGeom>
-          <a:noFill/>
-        </p:spPr>
-        <p:txBody>
-          <a:bodyPr wrap="square" lIns="0" rIns="0" tIns="0" bIns="0" anchor="t">
-            <a:spAutoFit/>
-          </a:bodyPr>
-          <a:lstStyle/>
-          <a:p>
-            <a:pPr algn="l">
-              <a:lnSpc>
-                <a:spcPct val="120000"/>
-              </a:lnSpc>
-            </a:pPr>
-            <a:r>
-              <a:rPr sz="750" b="0" i="0" spc="140">
-                <a:solidFill>
-                  <a:srgbClr val="9C90D4"/>
-                </a:solidFill>
-                <a:latin typeface="Roboto"/>
-              </a:rPr>
-              <a:t>DATA</a:t>
-            </a:r>
-          </a:p>
-        </p:txBody>
-      </p:sp>
-      <p:sp>
-        <p:nvSpPr>
-          <p:cNvPr id="12" name="TextBox 11"/>
-          <p:cNvSpPr txBox="1"/>
-          <p:nvPr/>
-        </p:nvSpPr>
-        <p:spPr>
-          <a:xfrm>
-            <a:off x="7924800" y="5581650"/>
-            <a:ext cx="2667000" cy="666750"/>
-          </a:xfrm>
-          <a:prstGeom prst="rect">
-            <a:avLst/>
-          </a:prstGeom>
-          <a:noFill/>
-        </p:spPr>
-        <p:txBody>
-          <a:bodyPr wrap="square" lIns="0" rIns="0" tIns="0" bIns="0" anchor="t">
-            <a:spAutoFit/>
-          </a:bodyPr>
-          <a:lstStyle/>
-          <a:p>
-            <a:pPr algn="l">
-              <a:lnSpc>
-                <a:spcPct val="140000"/>
-              </a:lnSpc>
-            </a:pPr>
-            <a:r>
-              <a:rPr sz="980" b="0" i="0">
-                <a:solidFill>
-                  <a:srgbClr val="E0DBF2"/>
-                </a:solidFill>
-                <a:latin typeface="Roboto"/>
-              </a:rPr>
-              <a:t>08 de setembro</a:t>
-            </a:r>
-          </a:p>
-          <a:p>
-            <a:pPr>
-              <a:lnSpc>
-                <a:spcPct val="140000"/>
-              </a:lnSpc>
-            </a:pPr>
-            <a:r>
-              <a:rPr sz="980" b="0" i="0">
-                <a:solidFill>
-                  <a:srgbClr val="E0DBF2"/>
-                </a:solidFill>
-                <a:latin typeface="Roboto"/>
-              </a:rPr>
-              <a:t>de 2026</a:t>
             </a:r>
           </a:p>
         </p:txBody>
@@ -26402,7 +26308,7 @@
                 </a:solidFill>
                 <a:latin typeface="Roboto"/>
               </a:rPr>
-              <a:t>Recomendação do grupo</a:t>
+              <a:t>Para que o grupo vai usar</a:t>
             </a:r>
           </a:p>
         </p:txBody>
@@ -26415,7 +26321,7 @@
         </p:nvSpPr>
         <p:spPr>
           <a:xfrm>
-            <a:off x="704850" y="3003423"/>
+            <a:off x="704850" y="2164461"/>
             <a:ext cx="57150" cy="57150"/>
           </a:xfrm>
           <a:prstGeom prst="rect">
@@ -26459,7 +26365,7 @@
         </p:nvSpPr>
         <p:spPr>
           <a:xfrm>
-            <a:off x="971550" y="2894457"/>
+            <a:off x="971550" y="2055495"/>
             <a:ext cx="7677150" cy="95250"/>
           </a:xfrm>
           <a:prstGeom prst="rect">
@@ -26485,7 +26391,7 @@
                 </a:solidFill>
                 <a:latin typeface="Roboto"/>
               </a:rPr>
-              <a:t>O grupo recomenda adotar conteinerização como estratégia de empacotamento e de ambiente de desenvolvimento, com o custo declarado junto.</a:t>
+              <a:t>Ambiente de desenvolvimento igual para os quatro, com o banco rodando sem ninguém instalar nada na própria máquina.</a:t>
             </a:r>
           </a:p>
         </p:txBody>
@@ -26498,7 +26404,7 @@
         </p:nvSpPr>
         <p:spPr>
           <a:xfrm>
-            <a:off x="704850" y="3842385"/>
+            <a:off x="704850" y="3003423"/>
             <a:ext cx="57150" cy="57150"/>
           </a:xfrm>
           <a:prstGeom prst="rect">
@@ -26542,7 +26448,7 @@
         </p:nvSpPr>
         <p:spPr>
           <a:xfrm>
-            <a:off x="971550" y="3733419"/>
+            <a:off x="971550" y="2894457"/>
             <a:ext cx="7677150" cy="95250"/>
           </a:xfrm>
           <a:prstGeom prst="rect">
@@ -26568,7 +26474,7 @@
                 </a:solidFill>
                 <a:latin typeface="Roboto"/>
               </a:rPr>
-              <a:t>O diagrama de implantação deixa de ser caixa genérica e passa a ter um arquivo correspondente que roda, e esse arquivo vira artefato do repositório.</a:t>
+              <a:t>Um arquivo no repositório que descreve esse ambiente inteiro, versionado junto com o código, e que qualquer um sobe com um comando.</a:t>
             </a:r>
           </a:p>
         </p:txBody>
@@ -26581,7 +26487,7 @@
         </p:nvSpPr>
         <p:spPr>
           <a:xfrm>
-            <a:off x="704850" y="4681347"/>
+            <a:off x="704850" y="3842385"/>
             <a:ext cx="57150" cy="57150"/>
           </a:xfrm>
           <a:prstGeom prst="rect">
@@ -26625,7 +26531,7 @@
         </p:nvSpPr>
         <p:spPr>
           <a:xfrm>
-            <a:off x="971550" y="4572381"/>
+            <a:off x="971550" y="3733419"/>
             <a:ext cx="7677150" cy="95250"/>
           </a:xfrm>
           <a:prstGeom prst="rect">
@@ -26651,23 +26557,23 @@
                 </a:solidFill>
                 <a:latin typeface="Roboto"/>
               </a:rPr>
-              <a:t>A stack ainda não está decidida, e é o documento de decisões arquiteturais que vai registrar isso.</a:t>
-            </a:r>
-          </a:p>
-        </p:txBody>
-      </p:sp>
-      <p:sp>
-        <p:nvSpPr>
-          <p:cNvPr id="10" name="Chevron 9"/>
+              <a:t>Na entrega e na apresentação do produto, a mesma imagem que rodou no desenvolvimento, sem reconfigurar máquina.</a:t>
+            </a:r>
+          </a:p>
+        </p:txBody>
+      </p:sp>
+      <p:sp>
+        <p:nvSpPr>
+          <p:cNvPr id="10" name="Rectangle 9"/>
           <p:cNvSpPr/>
           <p:nvPr/>
         </p:nvSpPr>
         <p:spPr>
           <a:xfrm>
-            <a:off x="9124950" y="2903982"/>
-            <a:ext cx="142875" cy="123825"/>
-          </a:xfrm>
-          <a:prstGeom prst="chevron">
+            <a:off x="704850" y="4681347"/>
+            <a:ext cx="57150" cy="57150"/>
+          </a:xfrm>
+          <a:prstGeom prst="rect">
             <a:avLst/>
           </a:prstGeom>
           <a:solidFill>
@@ -26693,7 +26599,7 @@
           </a:fontRef>
         </p:style>
         <p:txBody>
-          <a:bodyPr rtlCol="0" anchor="ctr"/>
+          <a:bodyPr rtlCol="0" anchor="ctr" wrap="square" lIns="0" rIns="0" tIns="0" bIns="0"/>
           <a:lstStyle/>
           <a:p>
             <a:pPr algn="ctr"/>
@@ -26708,8 +26614,8 @@
         </p:nvSpPr>
         <p:spPr>
           <a:xfrm>
-            <a:off x="9372600" y="2903982"/>
-            <a:ext cx="2133600" cy="182880"/>
+            <a:off x="971550" y="4572381"/>
+            <a:ext cx="7677150" cy="95250"/>
           </a:xfrm>
           <a:prstGeom prst="rect">
             <a:avLst/>
@@ -26724,17 +26630,17 @@
           <a:p>
             <a:pPr algn="l">
               <a:lnSpc>
-                <a:spcPct val="120000"/>
-              </a:lnSpc>
-            </a:pPr>
-            <a:r>
-              <a:rPr sz="900" b="1" i="0" spc="120">
-                <a:solidFill>
-                  <a:srgbClr val="E94D1C"/>
+                <a:spcPct val="130000"/>
+              </a:lnSpc>
+            </a:pPr>
+            <a:r>
+              <a:rPr sz="1650" b="0" i="0">
+                <a:solidFill>
+                  <a:srgbClr val="1A1A1E"/>
                 </a:solidFill>
                 <a:latin typeface="Roboto"/>
               </a:rPr>
-              <a:t>PRÓXIMO PASSO</a:t>
+              <a:t>O diagrama de implantação deixa de ser caixa genérica e passa a ter um arquivo correspondente que roda.</a:t>
             </a:r>
           </a:p>
         </p:txBody>
@@ -26747,8 +26653,8 @@
         </p:nvSpPr>
         <p:spPr>
           <a:xfrm>
-            <a:off x="9124950" y="3180207"/>
-            <a:ext cx="38100" cy="804672"/>
+            <a:off x="704850" y="5520309"/>
+            <a:ext cx="57150" cy="57150"/>
           </a:xfrm>
           <a:prstGeom prst="rect">
             <a:avLst/>
@@ -26791,8 +26697,8 @@
         </p:nvSpPr>
         <p:spPr>
           <a:xfrm>
-            <a:off x="9334500" y="3180207"/>
-            <a:ext cx="2171700" cy="1376172"/>
+            <a:off x="971550" y="5411343"/>
+            <a:ext cx="7677150" cy="95250"/>
           </a:xfrm>
           <a:prstGeom prst="rect">
             <a:avLst/>
@@ -26807,6 +26713,172 @@
           <a:p>
             <a:pPr algn="l">
               <a:lnSpc>
+                <a:spcPct val="130000"/>
+              </a:lnSpc>
+            </a:pPr>
+            <a:r>
+              <a:rPr sz="1650" b="0" i="0">
+                <a:solidFill>
+                  <a:srgbClr val="1A1A1E"/>
+                </a:solidFill>
+                <a:latin typeface="Roboto"/>
+              </a:rPr>
+              <a:t>A stack ainda não está decidida, e é o documento de decisões arquiteturais que vai registrar isso.</a:t>
+            </a:r>
+          </a:p>
+        </p:txBody>
+      </p:sp>
+      <p:sp>
+        <p:nvSpPr>
+          <p:cNvPr id="14" name="Chevron 13"/>
+          <p:cNvSpPr/>
+          <p:nvPr/>
+        </p:nvSpPr>
+        <p:spPr>
+          <a:xfrm>
+            <a:off x="9124950" y="2065020"/>
+            <a:ext cx="142875" cy="123825"/>
+          </a:xfrm>
+          <a:prstGeom prst="chevron">
+            <a:avLst/>
+          </a:prstGeom>
+          <a:solidFill>
+            <a:srgbClr val="E94D1C"/>
+          </a:solidFill>
+          <a:ln>
+            <a:noFill/>
+          </a:ln>
+          <a:effectLst/>
+        </p:spPr>
+        <p:style>
+          <a:lnRef idx="1">
+            <a:schemeClr val="accent1"/>
+          </a:lnRef>
+          <a:fillRef idx="3">
+            <a:schemeClr val="accent1"/>
+          </a:fillRef>
+          <a:effectRef idx="2">
+            <a:schemeClr val="accent1"/>
+          </a:effectRef>
+          <a:fontRef idx="minor">
+            <a:schemeClr val="lt1"/>
+          </a:fontRef>
+        </p:style>
+        <p:txBody>
+          <a:bodyPr rtlCol="0" anchor="ctr"/>
+          <a:lstStyle/>
+          <a:p>
+            <a:pPr algn="ctr"/>
+          </a:p>
+        </p:txBody>
+      </p:sp>
+      <p:sp>
+        <p:nvSpPr>
+          <p:cNvPr id="15" name="TextBox 14"/>
+          <p:cNvSpPr txBox="1"/>
+          <p:nvPr/>
+        </p:nvSpPr>
+        <p:spPr>
+          <a:xfrm>
+            <a:off x="9372600" y="2065020"/>
+            <a:ext cx="2133600" cy="182880"/>
+          </a:xfrm>
+          <a:prstGeom prst="rect">
+            <a:avLst/>
+          </a:prstGeom>
+          <a:noFill/>
+        </p:spPr>
+        <p:txBody>
+          <a:bodyPr wrap="square" lIns="0" rIns="0" tIns="0" bIns="0" anchor="t">
+            <a:spAutoFit/>
+          </a:bodyPr>
+          <a:lstStyle/>
+          <a:p>
+            <a:pPr algn="l">
+              <a:lnSpc>
+                <a:spcPct val="120000"/>
+              </a:lnSpc>
+            </a:pPr>
+            <a:r>
+              <a:rPr sz="900" b="1" i="0" spc="120">
+                <a:solidFill>
+                  <a:srgbClr val="E94D1C"/>
+                </a:solidFill>
+                <a:latin typeface="Roboto"/>
+              </a:rPr>
+              <a:t>PRÓXIMO PASSO</a:t>
+            </a:r>
+          </a:p>
+        </p:txBody>
+      </p:sp>
+      <p:sp>
+        <p:nvSpPr>
+          <p:cNvPr id="16" name="Rectangle 15"/>
+          <p:cNvSpPr/>
+          <p:nvPr/>
+        </p:nvSpPr>
+        <p:spPr>
+          <a:xfrm>
+            <a:off x="9124950" y="2341245"/>
+            <a:ext cx="38100" cy="804672"/>
+          </a:xfrm>
+          <a:prstGeom prst="rect">
+            <a:avLst/>
+          </a:prstGeom>
+          <a:solidFill>
+            <a:srgbClr val="E94D1C"/>
+          </a:solidFill>
+          <a:ln>
+            <a:noFill/>
+          </a:ln>
+          <a:effectLst/>
+        </p:spPr>
+        <p:style>
+          <a:lnRef idx="1">
+            <a:schemeClr val="accent1"/>
+          </a:lnRef>
+          <a:fillRef idx="3">
+            <a:schemeClr val="accent1"/>
+          </a:fillRef>
+          <a:effectRef idx="2">
+            <a:schemeClr val="accent1"/>
+          </a:effectRef>
+          <a:fontRef idx="minor">
+            <a:schemeClr val="lt1"/>
+          </a:fontRef>
+        </p:style>
+        <p:txBody>
+          <a:bodyPr rtlCol="0" anchor="ctr" wrap="square" lIns="0" rIns="0" tIns="0" bIns="0"/>
+          <a:lstStyle/>
+          <a:p>
+            <a:pPr algn="ctr"/>
+          </a:p>
+        </p:txBody>
+      </p:sp>
+      <p:sp>
+        <p:nvSpPr>
+          <p:cNvPr id="17" name="TextBox 16"/>
+          <p:cNvSpPr txBox="1"/>
+          <p:nvPr/>
+        </p:nvSpPr>
+        <p:spPr>
+          <a:xfrm>
+            <a:off x="9334500" y="2341245"/>
+            <a:ext cx="2171700" cy="1376172"/>
+          </a:xfrm>
+          <a:prstGeom prst="rect">
+            <a:avLst/>
+          </a:prstGeom>
+          <a:noFill/>
+        </p:spPr>
+        <p:txBody>
+          <a:bodyPr wrap="square" lIns="0" rIns="0" tIns="0" bIns="0" anchor="t">
+            <a:spAutoFit/>
+          </a:bodyPr>
+          <a:lstStyle/>
+          <a:p>
+            <a:pPr algn="l">
+              <a:lnSpc>
                 <a:spcPct val="140000"/>
               </a:lnSpc>
               <a:spcAft>
@@ -26827,7 +26899,7 @@
       </p:sp>
       <p:sp>
         <p:nvSpPr>
-          <p:cNvPr id="14" name="TextBox 13"/>
+          <p:cNvPr id="18" name="TextBox 17"/>
           <p:cNvSpPr txBox="1"/>
           <p:nvPr/>
         </p:nvSpPr>
@@ -26866,7 +26938,7 @@
       </p:sp>
       <p:sp>
         <p:nvSpPr>
-          <p:cNvPr id="15" name="TextBox 14"/>
+          <p:cNvPr id="19" name="TextBox 18"/>
           <p:cNvSpPr txBox="1"/>
           <p:nvPr/>
         </p:nvSpPr>

--- a/trabalhos/T1-Docker-Invite-People.pptx
+++ b/trabalhos/T1-Docker-Invite-People.pptx
@@ -12041,7 +12041,7 @@
         </p:nvSpPr>
         <p:spPr>
           <a:xfrm>
-            <a:off x="857250" y="3381375"/>
+            <a:off x="857250" y="3219450"/>
             <a:ext cx="1771650" cy="628650"/>
           </a:xfrm>
           <a:prstGeom prst="roundRect">
@@ -12087,7 +12087,7 @@
         </p:nvSpPr>
         <p:spPr>
           <a:xfrm>
-            <a:off x="857250" y="3495675"/>
+            <a:off x="857250" y="3333750"/>
             <a:ext cx="1771650" cy="228600"/>
           </a:xfrm>
           <a:prstGeom prst="rect">
@@ -12126,7 +12126,7 @@
         </p:nvSpPr>
         <p:spPr>
           <a:xfrm>
-            <a:off x="914400" y="3705225"/>
+            <a:off x="914400" y="3543300"/>
             <a:ext cx="1657350" cy="175260"/>
           </a:xfrm>
           <a:prstGeom prst="rect">
@@ -12165,7 +12165,7 @@
         </p:nvSpPr>
         <p:spPr>
           <a:xfrm>
-            <a:off x="2952750" y="3381375"/>
+            <a:off x="2952750" y="3219450"/>
             <a:ext cx="1771650" cy="628650"/>
           </a:xfrm>
           <a:prstGeom prst="roundRect">
@@ -12211,7 +12211,7 @@
         </p:nvSpPr>
         <p:spPr>
           <a:xfrm>
-            <a:off x="2952750" y="3495675"/>
+            <a:off x="2952750" y="3333750"/>
             <a:ext cx="1771650" cy="228600"/>
           </a:xfrm>
           <a:prstGeom prst="rect">
@@ -12250,7 +12250,7 @@
         </p:nvSpPr>
         <p:spPr>
           <a:xfrm>
-            <a:off x="3009900" y="3705225"/>
+            <a:off x="3009900" y="3543300"/>
             <a:ext cx="1657350" cy="175260"/>
           </a:xfrm>
           <a:prstGeom prst="rect">
@@ -12289,7 +12289,7 @@
         </p:nvCxnSpPr>
         <p:spPr>
           <a:xfrm>
-            <a:off x="2628900" y="3695700"/>
+            <a:off x="2628900" y="3533775"/>
             <a:ext cx="323850" cy="0"/>
           </a:xfrm>
           <a:prstGeom prst="line">
@@ -12324,7 +12324,7 @@
         </p:nvSpPr>
         <p:spPr>
           <a:xfrm>
-            <a:off x="5048250" y="3381375"/>
+            <a:off x="5048250" y="3219450"/>
             <a:ext cx="1771650" cy="628650"/>
           </a:xfrm>
           <a:prstGeom prst="roundRect">
@@ -12370,7 +12370,7 @@
         </p:nvSpPr>
         <p:spPr>
           <a:xfrm>
-            <a:off x="5048250" y="3495675"/>
+            <a:off x="5048250" y="3333750"/>
             <a:ext cx="1771650" cy="228600"/>
           </a:xfrm>
           <a:prstGeom prst="rect">
@@ -12409,7 +12409,7 @@
         </p:nvSpPr>
         <p:spPr>
           <a:xfrm>
-            <a:off x="5105400" y="3705225"/>
+            <a:off x="5105400" y="3543300"/>
             <a:ext cx="1657350" cy="175260"/>
           </a:xfrm>
           <a:prstGeom prst="rect">
@@ -12448,7 +12448,7 @@
         </p:nvCxnSpPr>
         <p:spPr>
           <a:xfrm>
-            <a:off x="4724400" y="3695700"/>
+            <a:off x="4724400" y="3533775"/>
             <a:ext cx="323850" cy="0"/>
           </a:xfrm>
           <a:prstGeom prst="line">
@@ -12483,7 +12483,7 @@
         </p:nvSpPr>
         <p:spPr>
           <a:xfrm>
-            <a:off x="7143750" y="3381375"/>
+            <a:off x="7143750" y="3219450"/>
             <a:ext cx="1771650" cy="628650"/>
           </a:xfrm>
           <a:prstGeom prst="roundRect">
@@ -12529,7 +12529,7 @@
         </p:nvSpPr>
         <p:spPr>
           <a:xfrm>
-            <a:off x="7143750" y="3495675"/>
+            <a:off x="7143750" y="3333750"/>
             <a:ext cx="1771650" cy="228600"/>
           </a:xfrm>
           <a:prstGeom prst="rect">
@@ -12568,7 +12568,7 @@
         </p:nvSpPr>
         <p:spPr>
           <a:xfrm>
-            <a:off x="7200900" y="3705225"/>
+            <a:off x="7200900" y="3543300"/>
             <a:ext cx="1657350" cy="175260"/>
           </a:xfrm>
           <a:prstGeom prst="rect">
@@ -12607,7 +12607,7 @@
         </p:nvCxnSpPr>
         <p:spPr>
           <a:xfrm>
-            <a:off x="6819900" y="3695700"/>
+            <a:off x="6819900" y="3533775"/>
             <a:ext cx="323850" cy="0"/>
           </a:xfrm>
           <a:prstGeom prst="line">
@@ -12642,7 +12642,7 @@
         </p:nvSpPr>
         <p:spPr>
           <a:xfrm>
-            <a:off x="9239250" y="3381375"/>
+            <a:off x="9239250" y="3219450"/>
             <a:ext cx="1771650" cy="628650"/>
           </a:xfrm>
           <a:prstGeom prst="roundRect">
@@ -12688,7 +12688,7 @@
         </p:nvSpPr>
         <p:spPr>
           <a:xfrm>
-            <a:off x="9239250" y="3495675"/>
+            <a:off x="9239250" y="3333750"/>
             <a:ext cx="1771650" cy="228600"/>
           </a:xfrm>
           <a:prstGeom prst="rect">
@@ -12727,7 +12727,7 @@
         </p:nvSpPr>
         <p:spPr>
           <a:xfrm>
-            <a:off x="9296400" y="3705225"/>
+            <a:off x="9296400" y="3543300"/>
             <a:ext cx="1657350" cy="175260"/>
           </a:xfrm>
           <a:prstGeom prst="rect">
@@ -12766,7 +12766,7 @@
         </p:nvCxnSpPr>
         <p:spPr>
           <a:xfrm>
-            <a:off x="8915400" y="3695700"/>
+            <a:off x="8915400" y="3533775"/>
             <a:ext cx="323850" cy="0"/>
           </a:xfrm>
           <a:prstGeom prst="line">
@@ -12801,7 +12801,7 @@
         </p:nvSpPr>
         <p:spPr>
           <a:xfrm>
-            <a:off x="4667250" y="3133725"/>
+            <a:off x="4667250" y="2971800"/>
             <a:ext cx="857250" cy="198120"/>
           </a:xfrm>
           <a:prstGeom prst="rect">
@@ -12840,7 +12840,7 @@
         </p:nvSpPr>
         <p:spPr>
           <a:xfrm>
-            <a:off x="876300" y="4475226"/>
+            <a:off x="876300" y="4313301"/>
             <a:ext cx="57150" cy="57150"/>
           </a:xfrm>
           <a:prstGeom prst="rect">
@@ -12884,7 +12884,7 @@
         </p:nvSpPr>
         <p:spPr>
           <a:xfrm>
-            <a:off x="1143000" y="4391025"/>
+            <a:off x="1143000" y="4229100"/>
             <a:ext cx="9620250" cy="95250"/>
           </a:xfrm>
           <a:prstGeom prst="rect">
@@ -12923,7 +12923,7 @@
         </p:nvSpPr>
         <p:spPr>
           <a:xfrm>
-            <a:off x="876300" y="5093208"/>
+            <a:off x="876300" y="4931283"/>
             <a:ext cx="57150" cy="57150"/>
           </a:xfrm>
           <a:prstGeom prst="rect">
@@ -12967,7 +12967,7 @@
         </p:nvSpPr>
         <p:spPr>
           <a:xfrm>
-            <a:off x="1143000" y="5009007"/>
+            <a:off x="1143000" y="4847082"/>
             <a:ext cx="9620250" cy="95250"/>
           </a:xfrm>
           <a:prstGeom prst="rect">
@@ -13173,7 +13173,7 @@
         </p:nvSpPr>
         <p:spPr>
           <a:xfrm>
-            <a:off x="704850" y="3003423"/>
+            <a:off x="704850" y="2860548"/>
             <a:ext cx="57150" cy="57150"/>
           </a:xfrm>
           <a:prstGeom prst="rect">
@@ -13217,7 +13217,7 @@
         </p:nvSpPr>
         <p:spPr>
           <a:xfrm>
-            <a:off x="971550" y="2894457"/>
+            <a:off x="971550" y="2751582"/>
             <a:ext cx="7677150" cy="95250"/>
           </a:xfrm>
           <a:prstGeom prst="rect">
@@ -13256,7 +13256,7 @@
         </p:nvSpPr>
         <p:spPr>
           <a:xfrm>
-            <a:off x="704850" y="3842385"/>
+            <a:off x="704850" y="3699510"/>
             <a:ext cx="57150" cy="57150"/>
           </a:xfrm>
           <a:prstGeom prst="rect">
@@ -13300,7 +13300,7 @@
         </p:nvSpPr>
         <p:spPr>
           <a:xfrm>
-            <a:off x="971550" y="3733419"/>
+            <a:off x="971550" y="3590544"/>
             <a:ext cx="7677150" cy="95250"/>
           </a:xfrm>
           <a:prstGeom prst="rect">
@@ -13339,7 +13339,7 @@
         </p:nvSpPr>
         <p:spPr>
           <a:xfrm>
-            <a:off x="704850" y="4681347"/>
+            <a:off x="704850" y="4538472"/>
             <a:ext cx="57150" cy="57150"/>
           </a:xfrm>
           <a:prstGeom prst="rect">
@@ -13383,7 +13383,7 @@
         </p:nvSpPr>
         <p:spPr>
           <a:xfrm>
-            <a:off x="971550" y="4572381"/>
+            <a:off x="971550" y="4429506"/>
             <a:ext cx="7677150" cy="95250"/>
           </a:xfrm>
           <a:prstGeom prst="rect">
@@ -13544,58 +13544,14 @@
       </p:pic>
       <p:sp>
         <p:nvSpPr>
-          <p:cNvPr id="3" name="Rectangle 2"/>
-          <p:cNvSpPr/>
-          <p:nvPr/>
-        </p:nvSpPr>
-        <p:spPr>
-          <a:xfrm>
-            <a:off x="914400" y="1638300"/>
-            <a:ext cx="38100" cy="171450"/>
-          </a:xfrm>
-          <a:prstGeom prst="rect">
-            <a:avLst/>
-          </a:prstGeom>
-          <a:solidFill>
-            <a:srgbClr val="E94D1C"/>
-          </a:solidFill>
-          <a:ln>
-            <a:noFill/>
-          </a:ln>
-          <a:effectLst/>
-        </p:spPr>
-        <p:style>
-          <a:lnRef idx="1">
-            <a:schemeClr val="accent1"/>
-          </a:lnRef>
-          <a:fillRef idx="3">
-            <a:schemeClr val="accent1"/>
-          </a:fillRef>
-          <a:effectRef idx="2">
-            <a:schemeClr val="accent1"/>
-          </a:effectRef>
-          <a:fontRef idx="minor">
-            <a:schemeClr val="lt1"/>
-          </a:fontRef>
-        </p:style>
-        <p:txBody>
-          <a:bodyPr rtlCol="0" anchor="ctr" wrap="square" lIns="0" rIns="0" tIns="0" bIns="0"/>
-          <a:lstStyle/>
-          <a:p>
-            <a:pPr algn="ctr"/>
-          </a:p>
-        </p:txBody>
-      </p:sp>
-      <p:sp>
-        <p:nvSpPr>
-          <p:cNvPr id="4" name="TextBox 3"/>
+          <p:cNvPr id="3" name="TextBox 2"/>
           <p:cNvSpPr txBox="1"/>
           <p:nvPr/>
         </p:nvSpPr>
         <p:spPr>
           <a:xfrm>
-            <a:off x="1066800" y="1600200"/>
-            <a:ext cx="8572500" cy="228600"/>
+            <a:off x="914400" y="1866900"/>
+            <a:ext cx="9715500" cy="1905000"/>
           </a:xfrm>
           <a:prstGeom prst="rect">
             <a:avLst/>
@@ -13610,31 +13566,47 @@
           <a:p>
             <a:pPr algn="l">
               <a:lnSpc>
-                <a:spcPct val="120000"/>
-              </a:lnSpc>
-            </a:pPr>
-            <a:r>
-              <a:rPr sz="1120" b="1" i="0" spc="160">
+                <a:spcPct val="106000"/>
+              </a:lnSpc>
+            </a:pPr>
+            <a:r>
+              <a:rPr sz="3450" b="1" i="0">
                 <a:solidFill>
                   <a:srgbClr val="FFFFFF"/>
                 </a:solidFill>
                 <a:latin typeface="Roboto"/>
               </a:rPr>
-              <a:t/>
-            </a:r>
-          </a:p>
-        </p:txBody>
-      </p:sp>
-      <p:sp>
-        <p:nvSpPr>
-          <p:cNvPr id="5" name="TextBox 4"/>
+              <a:t>Docker implementa as</a:t>
+            </a:r>
+          </a:p>
+          <a:p>
+            <a:pPr>
+              <a:lnSpc>
+                <a:spcPct val="106000"/>
+              </a:lnSpc>
+            </a:pPr>
+            <a:r>
+              <a:rPr sz="3450" b="1" i="0">
+                <a:solidFill>
+                  <a:srgbClr val="FFFFFF"/>
+                </a:solidFill>
+                <a:latin typeface="Roboto"/>
+              </a:rPr>
+              <a:t>especificações da OCI</a:t>
+            </a:r>
+          </a:p>
+        </p:txBody>
+      </p:sp>
+      <p:sp>
+        <p:nvSpPr>
+          <p:cNvPr id="4" name="TextBox 3"/>
           <p:cNvSpPr txBox="1"/>
           <p:nvPr/>
         </p:nvSpPr>
         <p:spPr>
           <a:xfrm>
-            <a:off x="914400" y="1866900"/>
-            <a:ext cx="9715500" cy="1905000"/>
+            <a:off x="914400" y="4095750"/>
+            <a:ext cx="8572500" cy="1524000"/>
           </a:xfrm>
           <a:prstGeom prst="rect">
             <a:avLst/>
@@ -13649,47 +13621,31 @@
           <a:p>
             <a:pPr algn="l">
               <a:lnSpc>
-                <a:spcPct val="106000"/>
-              </a:lnSpc>
-            </a:pPr>
-            <a:r>
-              <a:rPr sz="3450" b="1" i="0">
-                <a:solidFill>
-                  <a:srgbClr val="FFFFFF"/>
+                <a:spcPct val="150000"/>
+              </a:lnSpc>
+            </a:pPr>
+            <a:r>
+              <a:rPr sz="1420" b="0" i="0">
+                <a:solidFill>
+                  <a:srgbClr val="E2DEF5"/>
                 </a:solidFill>
                 <a:latin typeface="Roboto"/>
               </a:rPr>
-              <a:t>Docker implementa as</a:t>
-            </a:r>
-          </a:p>
-          <a:p>
-            <a:pPr>
-              <a:lnSpc>
-                <a:spcPct val="106000"/>
-              </a:lnSpc>
-            </a:pPr>
-            <a:r>
-              <a:rPr sz="3450" b="1" i="0">
-                <a:solidFill>
-                  <a:srgbClr val="FFFFFF"/>
-                </a:solidFill>
-                <a:latin typeface="Roboto"/>
-              </a:rPr>
-              <a:t>especificações da OCI</a:t>
-            </a:r>
-          </a:p>
-        </p:txBody>
-      </p:sp>
-      <p:sp>
-        <p:nvSpPr>
-          <p:cNvPr id="6" name="TextBox 5"/>
+              <a:t>Fundada em 2015 sob a Linux Foundation, com a Runtime Spec, a Image Spec e a Distribution Spec. O runc é trocável por crun, gVisor ou Kata. O engine é trocável por Podman. É substituibilidade por compatibilidade de interface, e a seção 03 traz um caso real disso.</a:t>
+            </a:r>
+          </a:p>
+        </p:txBody>
+      </p:sp>
+      <p:sp>
+        <p:nvSpPr>
+          <p:cNvPr id="5" name="TextBox 4"/>
           <p:cNvSpPr txBox="1"/>
           <p:nvPr/>
         </p:nvSpPr>
         <p:spPr>
           <a:xfrm>
-            <a:off x="914400" y="4095750"/>
-            <a:ext cx="8572500" cy="1524000"/>
+            <a:off x="685800" y="6324600"/>
+            <a:ext cx="6667500" cy="182880"/>
           </a:xfrm>
           <a:prstGeom prst="rect">
             <a:avLst/>
@@ -13704,55 +13660,16 @@
           <a:p>
             <a:pPr algn="l">
               <a:lnSpc>
-                <a:spcPct val="150000"/>
-              </a:lnSpc>
-            </a:pPr>
-            <a:r>
-              <a:rPr sz="1420" b="0" i="0">
-                <a:solidFill>
-                  <a:srgbClr val="E2DEF5"/>
+                <a:spcPct val="120000"/>
+              </a:lnSpc>
+            </a:pPr>
+            <a:r>
+              <a:rPr sz="900" b="0" i="0">
+                <a:solidFill>
+                  <a:srgbClr val="FFFFFF"/>
                 </a:solidFill>
                 <a:latin typeface="Roboto"/>
               </a:rPr>
-              <a:t>Fundada em 2015 sob a Linux Foundation, com a Runtime Spec, a Image Spec e a Distribution Spec. O runc é trocável por crun, gVisor ou Kata. O engine é trocável por Podman. É substituibilidade por compatibilidade de interface, e a seção 03 traz um caso real disso.</a:t>
-            </a:r>
-          </a:p>
-        </p:txBody>
-      </p:sp>
-      <p:sp>
-        <p:nvSpPr>
-          <p:cNvPr id="7" name="TextBox 6"/>
-          <p:cNvSpPr txBox="1"/>
-          <p:nvPr/>
-        </p:nvSpPr>
-        <p:spPr>
-          <a:xfrm>
-            <a:off x="685800" y="6324600"/>
-            <a:ext cx="6667500" cy="182880"/>
-          </a:xfrm>
-          <a:prstGeom prst="rect">
-            <a:avLst/>
-          </a:prstGeom>
-          <a:noFill/>
-        </p:spPr>
-        <p:txBody>
-          <a:bodyPr wrap="square" lIns="0" rIns="0" tIns="0" bIns="0" anchor="t">
-            <a:spAutoFit/>
-          </a:bodyPr>
-          <a:lstStyle/>
-          <a:p>
-            <a:pPr algn="l">
-              <a:lnSpc>
-                <a:spcPct val="120000"/>
-              </a:lnSpc>
-            </a:pPr>
-            <a:r>
-              <a:rPr sz="900" b="0" i="0">
-                <a:solidFill>
-                  <a:srgbClr val="FFFFFF"/>
-                </a:solidFill>
-                <a:latin typeface="Roboto"/>
-              </a:rPr>
               <a:t>01 · Arquitetura</a:t>
             </a:r>
           </a:p>
@@ -13760,7 +13677,7 @@
       </p:sp>
       <p:sp>
         <p:nvSpPr>
-          <p:cNvPr id="8" name="TextBox 7"/>
+          <p:cNvPr id="6" name="TextBox 5"/>
           <p:cNvSpPr txBox="1"/>
           <p:nvPr/>
         </p:nvSpPr>
@@ -14315,7 +14232,7 @@
         </p:nvSpPr>
         <p:spPr>
           <a:xfrm>
-            <a:off x="857250" y="2457450"/>
+            <a:off x="857250" y="2295525"/>
             <a:ext cx="10001250" cy="182880"/>
           </a:xfrm>
           <a:prstGeom prst="rect">
@@ -14354,7 +14271,7 @@
         </p:nvSpPr>
         <p:spPr>
           <a:xfrm>
-            <a:off x="857250" y="2705100"/>
+            <a:off x="857250" y="2543175"/>
             <a:ext cx="2724150" cy="1504950"/>
           </a:xfrm>
           <a:prstGeom prst="roundRect">
@@ -14403,7 +14320,7 @@
         </p:nvSpPr>
         <p:spPr>
           <a:xfrm>
-            <a:off x="1009650" y="2781300"/>
+            <a:off x="1009650" y="2619375"/>
             <a:ext cx="2419350" cy="247650"/>
           </a:xfrm>
           <a:prstGeom prst="roundRect">
@@ -14451,7 +14368,7 @@
         </p:nvSpPr>
         <p:spPr>
           <a:xfrm>
-            <a:off x="1009650" y="2838450"/>
+            <a:off x="1009650" y="2676525"/>
             <a:ext cx="2419350" cy="198120"/>
           </a:xfrm>
           <a:prstGeom prst="rect">
@@ -14490,7 +14407,7 @@
         </p:nvSpPr>
         <p:spPr>
           <a:xfrm>
-            <a:off x="1009650" y="3067050"/>
+            <a:off x="1009650" y="2905125"/>
             <a:ext cx="2419350" cy="781050"/>
           </a:xfrm>
           <a:prstGeom prst="roundRect">
@@ -14538,7 +14455,7 @@
         </p:nvSpPr>
         <p:spPr>
           <a:xfrm>
-            <a:off x="1038225" y="3181350"/>
+            <a:off x="1038225" y="3019425"/>
             <a:ext cx="2362200" cy="182880"/>
           </a:xfrm>
           <a:prstGeom prst="rect">
@@ -14577,7 +14494,7 @@
         </p:nvSpPr>
         <p:spPr>
           <a:xfrm>
-            <a:off x="1038225" y="3409950"/>
+            <a:off x="1038225" y="3248025"/>
             <a:ext cx="2362200" cy="182880"/>
           </a:xfrm>
           <a:prstGeom prst="rect">
@@ -14616,7 +14533,7 @@
         </p:nvSpPr>
         <p:spPr>
           <a:xfrm>
-            <a:off x="1038225" y="3638550"/>
+            <a:off x="1038225" y="3476625"/>
             <a:ext cx="2362200" cy="182880"/>
           </a:xfrm>
           <a:prstGeom prst="rect">
@@ -14655,7 +14572,7 @@
         </p:nvSpPr>
         <p:spPr>
           <a:xfrm>
-            <a:off x="1009650" y="3886200"/>
+            <a:off x="1009650" y="3724275"/>
             <a:ext cx="2419350" cy="247650"/>
           </a:xfrm>
           <a:prstGeom prst="roundRect">
@@ -14703,7 +14620,7 @@
         </p:nvSpPr>
         <p:spPr>
           <a:xfrm>
-            <a:off x="1009650" y="3943350"/>
+            <a:off x="1009650" y="3781425"/>
             <a:ext cx="2419350" cy="198120"/>
           </a:xfrm>
           <a:prstGeom prst="rect">
@@ -14742,7 +14659,7 @@
         </p:nvSpPr>
         <p:spPr>
           <a:xfrm>
-            <a:off x="857250" y="4324350"/>
+            <a:off x="857250" y="4162425"/>
             <a:ext cx="2724150" cy="228600"/>
           </a:xfrm>
           <a:prstGeom prst="rect">
@@ -14781,7 +14698,7 @@
         </p:nvSpPr>
         <p:spPr>
           <a:xfrm>
-            <a:off x="857250" y="4533900"/>
+            <a:off x="857250" y="4371975"/>
             <a:ext cx="2724150" cy="198120"/>
           </a:xfrm>
           <a:prstGeom prst="rect">
@@ -14820,7 +14737,7 @@
         </p:nvSpPr>
         <p:spPr>
           <a:xfrm>
-            <a:off x="4162425" y="2705100"/>
+            <a:off x="4162425" y="2543175"/>
             <a:ext cx="1143000" cy="1504950"/>
           </a:xfrm>
           <a:prstGeom prst="roundRect">
@@ -14869,7 +14786,7 @@
         </p:nvSpPr>
         <p:spPr>
           <a:xfrm>
-            <a:off x="4295775" y="3371850"/>
+            <a:off x="4295775" y="3209925"/>
             <a:ext cx="876300" cy="247650"/>
           </a:xfrm>
           <a:prstGeom prst="roundRect">
@@ -14917,7 +14834,7 @@
         </p:nvSpPr>
         <p:spPr>
           <a:xfrm>
-            <a:off x="4295775" y="3429000"/>
+            <a:off x="4295775" y="3267075"/>
             <a:ext cx="876300" cy="198120"/>
           </a:xfrm>
           <a:prstGeom prst="rect">
@@ -14956,7 +14873,7 @@
         </p:nvSpPr>
         <p:spPr>
           <a:xfrm>
-            <a:off x="5495925" y="2705100"/>
+            <a:off x="5495925" y="2543175"/>
             <a:ext cx="1390650" cy="1504950"/>
           </a:xfrm>
           <a:prstGeom prst="roundRect">
@@ -15005,7 +14922,7 @@
         </p:nvSpPr>
         <p:spPr>
           <a:xfrm>
-            <a:off x="5562600" y="2924175"/>
+            <a:off x="5562600" y="2762250"/>
             <a:ext cx="1257300" cy="781050"/>
           </a:xfrm>
           <a:prstGeom prst="roundRect">
@@ -15053,7 +14970,7 @@
         </p:nvSpPr>
         <p:spPr>
           <a:xfrm>
-            <a:off x="5591175" y="3038475"/>
+            <a:off x="5591175" y="2876550"/>
             <a:ext cx="1200150" cy="182880"/>
           </a:xfrm>
           <a:prstGeom prst="rect">
@@ -15092,7 +15009,7 @@
         </p:nvSpPr>
         <p:spPr>
           <a:xfrm>
-            <a:off x="5591175" y="3267075"/>
+            <a:off x="5591175" y="3105150"/>
             <a:ext cx="1200150" cy="182880"/>
           </a:xfrm>
           <a:prstGeom prst="rect">
@@ -15131,7 +15048,7 @@
         </p:nvSpPr>
         <p:spPr>
           <a:xfrm>
-            <a:off x="5591175" y="3495675"/>
+            <a:off x="5591175" y="3333750"/>
             <a:ext cx="1200150" cy="182880"/>
           </a:xfrm>
           <a:prstGeom prst="rect">
@@ -15170,7 +15087,7 @@
         </p:nvSpPr>
         <p:spPr>
           <a:xfrm>
-            <a:off x="5629275" y="3762375"/>
+            <a:off x="5629275" y="3600450"/>
             <a:ext cx="1123950" cy="247650"/>
           </a:xfrm>
           <a:prstGeom prst="roundRect">
@@ -15218,7 +15135,7 @@
         </p:nvSpPr>
         <p:spPr>
           <a:xfrm>
-            <a:off x="5629275" y="3819525"/>
+            <a:off x="5629275" y="3657600"/>
             <a:ext cx="1123950" cy="182880"/>
           </a:xfrm>
           <a:prstGeom prst="rect">
@@ -15257,7 +15174,7 @@
         </p:nvSpPr>
         <p:spPr>
           <a:xfrm>
-            <a:off x="4162425" y="4324350"/>
+            <a:off x="4162425" y="4162425"/>
             <a:ext cx="2724150" cy="228600"/>
           </a:xfrm>
           <a:prstGeom prst="rect">
@@ -15296,7 +15213,7 @@
         </p:nvSpPr>
         <p:spPr>
           <a:xfrm>
-            <a:off x="4162425" y="4533900"/>
+            <a:off x="4162425" y="4371975"/>
             <a:ext cx="2724150" cy="198120"/>
           </a:xfrm>
           <a:prstGeom prst="rect">
@@ -15335,7 +15252,7 @@
         </p:nvSpPr>
         <p:spPr>
           <a:xfrm>
-            <a:off x="7239000" y="2705100"/>
+            <a:off x="7239000" y="2543175"/>
             <a:ext cx="838200" cy="1504950"/>
           </a:xfrm>
           <a:prstGeom prst="roundRect">
@@ -15384,7 +15301,7 @@
         </p:nvSpPr>
         <p:spPr>
           <a:xfrm>
-            <a:off x="7353300" y="3371850"/>
+            <a:off x="7353300" y="3209925"/>
             <a:ext cx="609600" cy="247650"/>
           </a:xfrm>
           <a:prstGeom prst="roundRect">
@@ -15432,7 +15349,7 @@
         </p:nvSpPr>
         <p:spPr>
           <a:xfrm>
-            <a:off x="7353300" y="3429000"/>
+            <a:off x="7353300" y="3267075"/>
             <a:ext cx="609600" cy="182880"/>
           </a:xfrm>
           <a:prstGeom prst="rect">
@@ -15471,7 +15388,7 @@
         </p:nvSpPr>
         <p:spPr>
           <a:xfrm>
-            <a:off x="8305800" y="2705100"/>
+            <a:off x="8305800" y="2543175"/>
             <a:ext cx="1619250" cy="1504950"/>
           </a:xfrm>
           <a:prstGeom prst="roundRect">
@@ -15520,7 +15437,7 @@
         </p:nvSpPr>
         <p:spPr>
           <a:xfrm>
-            <a:off x="8420100" y="3067050"/>
+            <a:off x="8420100" y="2905125"/>
             <a:ext cx="1390650" cy="781050"/>
           </a:xfrm>
           <a:prstGeom prst="roundRect">
@@ -15568,7 +15485,7 @@
         </p:nvSpPr>
         <p:spPr>
           <a:xfrm>
-            <a:off x="8448675" y="3181350"/>
+            <a:off x="8448675" y="3019425"/>
             <a:ext cx="1333500" cy="182880"/>
           </a:xfrm>
           <a:prstGeom prst="rect">
@@ -15607,7 +15524,7 @@
         </p:nvSpPr>
         <p:spPr>
           <a:xfrm>
-            <a:off x="8448675" y="3409950"/>
+            <a:off x="8448675" y="3248025"/>
             <a:ext cx="1333500" cy="182880"/>
           </a:xfrm>
           <a:prstGeom prst="rect">
@@ -15646,7 +15563,7 @@
         </p:nvSpPr>
         <p:spPr>
           <a:xfrm>
-            <a:off x="8448675" y="3638550"/>
+            <a:off x="8448675" y="3476625"/>
             <a:ext cx="1333500" cy="182880"/>
           </a:xfrm>
           <a:prstGeom prst="rect">
@@ -15685,7 +15602,7 @@
         </p:nvSpPr>
         <p:spPr>
           <a:xfrm>
-            <a:off x="10153650" y="2705100"/>
+            <a:off x="10153650" y="2543175"/>
             <a:ext cx="838200" cy="1504950"/>
           </a:xfrm>
           <a:prstGeom prst="roundRect">
@@ -15734,7 +15651,7 @@
         </p:nvSpPr>
         <p:spPr>
           <a:xfrm>
-            <a:off x="10267950" y="3371850"/>
+            <a:off x="10267950" y="3209925"/>
             <a:ext cx="609600" cy="247650"/>
           </a:xfrm>
           <a:prstGeom prst="roundRect">
@@ -15782,7 +15699,7 @@
         </p:nvSpPr>
         <p:spPr>
           <a:xfrm>
-            <a:off x="10267950" y="3429000"/>
+            <a:off x="10267950" y="3267075"/>
             <a:ext cx="609600" cy="182880"/>
           </a:xfrm>
           <a:prstGeom prst="rect">
@@ -15821,7 +15738,7 @@
         </p:nvSpPr>
         <p:spPr>
           <a:xfrm>
-            <a:off x="7239000" y="4324350"/>
+            <a:off x="7239000" y="4162425"/>
             <a:ext cx="3752850" cy="228600"/>
           </a:xfrm>
           <a:prstGeom prst="rect">
@@ -15860,7 +15777,7 @@
         </p:nvSpPr>
         <p:spPr>
           <a:xfrm>
-            <a:off x="7239000" y="4533900"/>
+            <a:off x="7239000" y="4371975"/>
             <a:ext cx="3752850" cy="198120"/>
           </a:xfrm>
           <a:prstGeom prst="rect">
@@ -16183,7 +16100,7 @@
         </p:nvSpPr>
         <p:spPr>
           <a:xfrm>
-            <a:off x="857250" y="2771775"/>
+            <a:off x="857250" y="2609850"/>
             <a:ext cx="3810000" cy="2286000"/>
           </a:xfrm>
           <a:prstGeom prst="rect">
@@ -16227,7 +16144,7 @@
         </p:nvSpPr>
         <p:spPr>
           <a:xfrm>
-            <a:off x="1047750" y="2924175"/>
+            <a:off x="1047750" y="2762250"/>
             <a:ext cx="3429000" cy="182880"/>
           </a:xfrm>
           <a:prstGeom prst="rect">
@@ -16266,7 +16183,7 @@
         </p:nvSpPr>
         <p:spPr>
           <a:xfrm>
-            <a:off x="1047750" y="3114675"/>
+            <a:off x="1047750" y="2952750"/>
             <a:ext cx="3429000" cy="289560"/>
           </a:xfrm>
           <a:prstGeom prst="rect">
@@ -16305,7 +16222,7 @@
         </p:nvSpPr>
         <p:spPr>
           <a:xfrm>
-            <a:off x="1162050" y="3476625"/>
+            <a:off x="1162050" y="3314700"/>
             <a:ext cx="3200400" cy="1390650"/>
           </a:xfrm>
           <a:prstGeom prst="rect">
@@ -16349,7 +16266,7 @@
         </p:nvSpPr>
         <p:spPr>
           <a:xfrm>
-            <a:off x="1352550" y="3609975"/>
+            <a:off x="1352550" y="3448050"/>
             <a:ext cx="2857500" cy="182880"/>
           </a:xfrm>
           <a:prstGeom prst="rect">
@@ -16388,7 +16305,7 @@
         </p:nvSpPr>
         <p:spPr>
           <a:xfrm>
-            <a:off x="1352550" y="3819525"/>
+            <a:off x="1352550" y="3657600"/>
             <a:ext cx="2857500" cy="259080"/>
           </a:xfrm>
           <a:prstGeom prst="rect">
@@ -16427,7 +16344,7 @@
         </p:nvSpPr>
         <p:spPr>
           <a:xfrm>
-            <a:off x="1466850" y="4143375"/>
+            <a:off x="1466850" y="3981450"/>
             <a:ext cx="2590800" cy="552450"/>
           </a:xfrm>
           <a:prstGeom prst="roundRect">
@@ -16475,7 +16392,7 @@
         </p:nvSpPr>
         <p:spPr>
           <a:xfrm>
-            <a:off x="1657350" y="4257675"/>
+            <a:off x="1657350" y="4095750"/>
             <a:ext cx="2286000" cy="175260"/>
           </a:xfrm>
           <a:prstGeom prst="rect">
@@ -16514,7 +16431,7 @@
         </p:nvSpPr>
         <p:spPr>
           <a:xfrm>
-            <a:off x="1657350" y="4448175"/>
+            <a:off x="1657350" y="4286250"/>
             <a:ext cx="2286000" cy="228600"/>
           </a:xfrm>
           <a:prstGeom prst="rect">
@@ -16553,7 +16470,7 @@
         </p:nvSpPr>
         <p:spPr>
           <a:xfrm>
-            <a:off x="5143500" y="2962275"/>
+            <a:off x="5143500" y="2800350"/>
             <a:ext cx="4000500" cy="857250"/>
           </a:xfrm>
           <a:prstGeom prst="rect">
@@ -16608,7 +16525,7 @@
         </p:nvSpPr>
         <p:spPr>
           <a:xfrm>
-            <a:off x="5143500" y="3629025"/>
+            <a:off x="5143500" y="3467100"/>
             <a:ext cx="4095750" cy="1047750"/>
           </a:xfrm>
           <a:prstGeom prst="rect">
@@ -16647,7 +16564,7 @@
         </p:nvCxnSpPr>
         <p:spPr>
           <a:xfrm>
-            <a:off x="5143500" y="4410075"/>
+            <a:off x="5143500" y="4248150"/>
             <a:ext cx="4095750" cy="0"/>
           </a:xfrm>
           <a:prstGeom prst="line">
@@ -16682,7 +16599,7 @@
         </p:nvSpPr>
         <p:spPr>
           <a:xfrm>
-            <a:off x="5143500" y="4562475"/>
+            <a:off x="5143500" y="4400550"/>
             <a:ext cx="4095750" cy="762000"/>
           </a:xfrm>
           <a:prstGeom prst="rect">
@@ -16888,7 +16805,7 @@
         </p:nvSpPr>
         <p:spPr>
           <a:xfrm>
-            <a:off x="857250" y="2990850"/>
+            <a:off x="857250" y="2828925"/>
             <a:ext cx="3810000" cy="167640"/>
           </a:xfrm>
           <a:prstGeom prst="rect">
@@ -16927,7 +16844,7 @@
         </p:nvSpPr>
         <p:spPr>
           <a:xfrm>
-            <a:off x="857250" y="3162300"/>
+            <a:off x="857250" y="3000375"/>
             <a:ext cx="3810000" cy="1866900"/>
           </a:xfrm>
           <a:prstGeom prst="rect">
@@ -16971,7 +16888,7 @@
         </p:nvSpPr>
         <p:spPr>
           <a:xfrm>
-            <a:off x="1123950" y="3409950"/>
+            <a:off x="1123950" y="3248025"/>
             <a:ext cx="1428750" cy="457200"/>
           </a:xfrm>
           <a:prstGeom prst="roundRect">
@@ -17017,7 +16934,7 @@
         </p:nvSpPr>
         <p:spPr>
           <a:xfrm>
-            <a:off x="1123950" y="3562350"/>
+            <a:off x="1123950" y="3400425"/>
             <a:ext cx="1428750" cy="198120"/>
           </a:xfrm>
           <a:prstGeom prst="rect">
@@ -17056,7 +16973,7 @@
         </p:nvSpPr>
         <p:spPr>
           <a:xfrm>
-            <a:off x="2971800" y="3409950"/>
+            <a:off x="2971800" y="3248025"/>
             <a:ext cx="1428750" cy="457200"/>
           </a:xfrm>
           <a:prstGeom prst="roundRect">
@@ -17102,7 +17019,7 @@
         </p:nvSpPr>
         <p:spPr>
           <a:xfrm>
-            <a:off x="2971800" y="3562350"/>
+            <a:off x="2971800" y="3400425"/>
             <a:ext cx="1428750" cy="198120"/>
           </a:xfrm>
           <a:prstGeom prst="rect">
@@ -17141,7 +17058,7 @@
         </p:nvSpPr>
         <p:spPr>
           <a:xfrm>
-            <a:off x="2047875" y="4076700"/>
+            <a:off x="2047875" y="3914775"/>
             <a:ext cx="1428750" cy="419100"/>
           </a:xfrm>
           <a:prstGeom prst="roundRect">
@@ -17187,7 +17104,7 @@
         </p:nvSpPr>
         <p:spPr>
           <a:xfrm>
-            <a:off x="2047875" y="4210050"/>
+            <a:off x="2047875" y="4048125"/>
             <a:ext cx="1428750" cy="198120"/>
           </a:xfrm>
           <a:prstGeom prst="rect">
@@ -17226,7 +17143,7 @@
         </p:nvSpPr>
         <p:spPr>
           <a:xfrm>
-            <a:off x="2047875" y="4629150"/>
+            <a:off x="2047875" y="4467225"/>
             <a:ext cx="1428750" cy="285750"/>
           </a:xfrm>
           <a:prstGeom prst="roundRect">
@@ -17272,7 +17189,7 @@
         </p:nvSpPr>
         <p:spPr>
           <a:xfrm>
-            <a:off x="2047875" y="4695825"/>
+            <a:off x="2047875" y="4533900"/>
             <a:ext cx="1428750" cy="182880"/>
           </a:xfrm>
           <a:prstGeom prst="rect">
@@ -17311,7 +17228,7 @@
         </p:nvCxnSpPr>
         <p:spPr>
           <a:xfrm>
-            <a:off x="1838325" y="3867150"/>
+            <a:off x="1838325" y="3705225"/>
             <a:ext cx="733425" cy="209550"/>
           </a:xfrm>
           <a:prstGeom prst="line">
@@ -17346,7 +17263,7 @@
         </p:nvCxnSpPr>
         <p:spPr>
           <a:xfrm flipH="1">
-            <a:off x="2952750" y="3867150"/>
+            <a:off x="2952750" y="3705225"/>
             <a:ext cx="733425" cy="209550"/>
           </a:xfrm>
           <a:prstGeom prst="line">
@@ -17381,7 +17298,7 @@
         </p:nvCxnSpPr>
         <p:spPr>
           <a:xfrm>
-            <a:off x="2762250" y="4495800"/>
+            <a:off x="2762250" y="4333875"/>
             <a:ext cx="0" cy="133350"/>
           </a:xfrm>
           <a:prstGeom prst="line">
@@ -17416,7 +17333,7 @@
         </p:nvCxnSpPr>
         <p:spPr>
           <a:xfrm>
-            <a:off x="4667250" y="4095750"/>
+            <a:off x="4667250" y="3933825"/>
             <a:ext cx="1524000" cy="0"/>
           </a:xfrm>
           <a:prstGeom prst="line">
@@ -17451,7 +17368,7 @@
         </p:nvSpPr>
         <p:spPr>
           <a:xfrm>
-            <a:off x="4667250" y="3829050"/>
+            <a:off x="4667250" y="3667125"/>
             <a:ext cx="1524000" cy="198120"/>
           </a:xfrm>
           <a:prstGeom prst="rect">
@@ -17490,7 +17407,7 @@
         </p:nvSpPr>
         <p:spPr>
           <a:xfrm>
-            <a:off x="6191250" y="2990850"/>
+            <a:off x="6191250" y="2828925"/>
             <a:ext cx="4000500" cy="167640"/>
           </a:xfrm>
           <a:prstGeom prst="rect">
@@ -17529,7 +17446,7 @@
         </p:nvSpPr>
         <p:spPr>
           <a:xfrm>
-            <a:off x="6191250" y="3162300"/>
+            <a:off x="6191250" y="3000375"/>
             <a:ext cx="3810000" cy="1866900"/>
           </a:xfrm>
           <a:prstGeom prst="rect">
@@ -17573,7 +17490,7 @@
         </p:nvSpPr>
         <p:spPr>
           <a:xfrm>
-            <a:off x="6381750" y="3276600"/>
+            <a:off x="6381750" y="3114675"/>
             <a:ext cx="1905000" cy="167640"/>
           </a:xfrm>
           <a:prstGeom prst="rect">
@@ -17612,7 +17529,7 @@
         </p:nvSpPr>
         <p:spPr>
           <a:xfrm>
-            <a:off x="6381750" y="3505200"/>
+            <a:off x="6381750" y="3343275"/>
             <a:ext cx="1066800" cy="495300"/>
           </a:xfrm>
           <a:prstGeom prst="rect">
@@ -17656,7 +17573,7 @@
         </p:nvSpPr>
         <p:spPr>
           <a:xfrm>
-            <a:off x="6400800" y="3581400"/>
+            <a:off x="6400800" y="3419475"/>
             <a:ext cx="1028700" cy="175260"/>
           </a:xfrm>
           <a:prstGeom prst="rect">
@@ -17695,7 +17612,7 @@
         </p:nvSpPr>
         <p:spPr>
           <a:xfrm>
-            <a:off x="6400800" y="3752850"/>
+            <a:off x="6400800" y="3590925"/>
             <a:ext cx="1028700" cy="167640"/>
           </a:xfrm>
           <a:prstGeom prst="rect">
@@ -17734,7 +17651,7 @@
         </p:nvSpPr>
         <p:spPr>
           <a:xfrm>
-            <a:off x="7562850" y="3505200"/>
+            <a:off x="7562850" y="3343275"/>
             <a:ext cx="1066800" cy="495300"/>
           </a:xfrm>
           <a:prstGeom prst="rect">
@@ -17778,7 +17695,7 @@
         </p:nvSpPr>
         <p:spPr>
           <a:xfrm>
-            <a:off x="7581900" y="3581400"/>
+            <a:off x="7581900" y="3419475"/>
             <a:ext cx="1028700" cy="175260"/>
           </a:xfrm>
           <a:prstGeom prst="rect">
@@ -17817,7 +17734,7 @@
         </p:nvSpPr>
         <p:spPr>
           <a:xfrm>
-            <a:off x="7581900" y="3752850"/>
+            <a:off x="7581900" y="3590925"/>
             <a:ext cx="1028700" cy="167640"/>
           </a:xfrm>
           <a:prstGeom prst="rect">
@@ -17856,7 +17773,7 @@
         </p:nvCxnSpPr>
         <p:spPr>
           <a:xfrm>
-            <a:off x="7448550" y="3752850"/>
+            <a:off x="7448550" y="3590925"/>
             <a:ext cx="114300" cy="0"/>
           </a:xfrm>
           <a:prstGeom prst="line">
@@ -17891,7 +17808,7 @@
         </p:nvSpPr>
         <p:spPr>
           <a:xfrm>
-            <a:off x="8743950" y="3505200"/>
+            <a:off x="8743950" y="3343275"/>
             <a:ext cx="1066800" cy="495300"/>
           </a:xfrm>
           <a:prstGeom prst="rect">
@@ -17935,7 +17852,7 @@
         </p:nvSpPr>
         <p:spPr>
           <a:xfrm>
-            <a:off x="8763000" y="3581400"/>
+            <a:off x="8763000" y="3419475"/>
             <a:ext cx="1028700" cy="175260"/>
           </a:xfrm>
           <a:prstGeom prst="rect">
@@ -17974,7 +17891,7 @@
         </p:nvSpPr>
         <p:spPr>
           <a:xfrm>
-            <a:off x="8763000" y="3752850"/>
+            <a:off x="8763000" y="3590925"/>
             <a:ext cx="1028700" cy="167640"/>
           </a:xfrm>
           <a:prstGeom prst="rect">
@@ -18013,7 +17930,7 @@
         </p:nvCxnSpPr>
         <p:spPr>
           <a:xfrm>
-            <a:off x="8629650" y="3752850"/>
+            <a:off x="8629650" y="3590925"/>
             <a:ext cx="114300" cy="0"/>
           </a:xfrm>
           <a:prstGeom prst="line">
@@ -18048,7 +17965,7 @@
         </p:nvSpPr>
         <p:spPr>
           <a:xfrm>
-            <a:off x="6381750" y="4229100"/>
+            <a:off x="6381750" y="4067175"/>
             <a:ext cx="3429000" cy="323850"/>
           </a:xfrm>
           <a:prstGeom prst="roundRect">
@@ -18097,7 +18014,7 @@
         </p:nvSpPr>
         <p:spPr>
           <a:xfrm>
-            <a:off x="6381750" y="4324350"/>
+            <a:off x="6381750" y="4162425"/>
             <a:ext cx="3429000" cy="182880"/>
           </a:xfrm>
           <a:prstGeom prst="rect">
@@ -18136,7 +18053,7 @@
         </p:nvSpPr>
         <p:spPr>
           <a:xfrm>
-            <a:off x="6381750" y="4667250"/>
+            <a:off x="6381750" y="4505325"/>
             <a:ext cx="3390900" cy="438150"/>
           </a:xfrm>
           <a:prstGeom prst="rect">
@@ -18342,7 +18259,7 @@
         </p:nvSpPr>
         <p:spPr>
           <a:xfrm>
-            <a:off x="685800" y="2505075"/>
+            <a:off x="685800" y="2343150"/>
             <a:ext cx="5905500" cy="2895600"/>
           </a:xfrm>
           <a:prstGeom prst="roundRect">
@@ -18390,7 +18307,7 @@
         </p:nvSpPr>
         <p:spPr>
           <a:xfrm>
-            <a:off x="933450" y="2714625"/>
+            <a:off x="933450" y="2552700"/>
             <a:ext cx="5524500" cy="213360"/>
           </a:xfrm>
           <a:prstGeom prst="rect">
@@ -18429,7 +18346,7 @@
         </p:nvSpPr>
         <p:spPr>
           <a:xfrm>
-            <a:off x="933450" y="2962275"/>
+            <a:off x="933450" y="2800350"/>
             <a:ext cx="5524500" cy="213360"/>
           </a:xfrm>
           <a:prstGeom prst="rect">
@@ -18468,7 +18385,7 @@
         </p:nvSpPr>
         <p:spPr>
           <a:xfrm>
-            <a:off x="933450" y="3209925"/>
+            <a:off x="933450" y="3048000"/>
             <a:ext cx="5524500" cy="213360"/>
           </a:xfrm>
           <a:prstGeom prst="rect">
@@ -18507,7 +18424,7 @@
         </p:nvSpPr>
         <p:spPr>
           <a:xfrm>
-            <a:off x="933450" y="3457575"/>
+            <a:off x="933450" y="3295650"/>
             <a:ext cx="5524500" cy="213360"/>
           </a:xfrm>
           <a:prstGeom prst="rect">
@@ -18546,7 +18463,7 @@
         </p:nvSpPr>
         <p:spPr>
           <a:xfrm>
-            <a:off x="933450" y="3705225"/>
+            <a:off x="933450" y="3543300"/>
             <a:ext cx="5524500" cy="213360"/>
           </a:xfrm>
           <a:prstGeom prst="rect">
@@ -18585,7 +18502,7 @@
         </p:nvSpPr>
         <p:spPr>
           <a:xfrm>
-            <a:off x="933450" y="3952875"/>
+            <a:off x="933450" y="3790950"/>
             <a:ext cx="5524500" cy="213360"/>
           </a:xfrm>
           <a:prstGeom prst="rect">
@@ -18624,7 +18541,7 @@
         </p:nvSpPr>
         <p:spPr>
           <a:xfrm>
-            <a:off x="933450" y="4200525"/>
+            <a:off x="933450" y="4038600"/>
             <a:ext cx="5524500" cy="213360"/>
           </a:xfrm>
           <a:prstGeom prst="rect">
@@ -18663,7 +18580,7 @@
         </p:nvSpPr>
         <p:spPr>
           <a:xfrm>
-            <a:off x="933450" y="4448175"/>
+            <a:off x="933450" y="4286250"/>
             <a:ext cx="5524500" cy="213360"/>
           </a:xfrm>
           <a:prstGeom prst="rect">
@@ -18702,7 +18619,7 @@
         </p:nvSpPr>
         <p:spPr>
           <a:xfrm>
-            <a:off x="933450" y="4695825"/>
+            <a:off x="933450" y="4533900"/>
             <a:ext cx="5524500" cy="213360"/>
           </a:xfrm>
           <a:prstGeom prst="rect">
@@ -18741,7 +18658,7 @@
         </p:nvSpPr>
         <p:spPr>
           <a:xfrm>
-            <a:off x="933450" y="4943475"/>
+            <a:off x="933450" y="4781550"/>
             <a:ext cx="5524500" cy="213360"/>
           </a:xfrm>
           <a:prstGeom prst="rect">
@@ -18780,7 +18697,7 @@
         </p:nvSpPr>
         <p:spPr>
           <a:xfrm>
-            <a:off x="7067550" y="2589276"/>
+            <a:off x="7067550" y="2427351"/>
             <a:ext cx="57150" cy="57150"/>
           </a:xfrm>
           <a:prstGeom prst="rect">
@@ -18824,7 +18741,7 @@
         </p:nvSpPr>
         <p:spPr>
           <a:xfrm>
-            <a:off x="7334250" y="2505075"/>
+            <a:off x="7334250" y="2343150"/>
             <a:ext cx="4171950" cy="95250"/>
           </a:xfrm>
           <a:prstGeom prst="rect">
@@ -18881,7 +18798,7 @@
         </p:nvSpPr>
         <p:spPr>
           <a:xfrm>
-            <a:off x="7067550" y="3169158"/>
+            <a:off x="7067550" y="3007233"/>
             <a:ext cx="57150" cy="57150"/>
           </a:xfrm>
           <a:prstGeom prst="rect">
@@ -18925,7 +18842,7 @@
         </p:nvSpPr>
         <p:spPr>
           <a:xfrm>
-            <a:off x="7334250" y="3084957"/>
+            <a:off x="7334250" y="2923032"/>
             <a:ext cx="4171950" cy="95250"/>
           </a:xfrm>
           <a:prstGeom prst="rect">
@@ -18982,7 +18899,7 @@
         </p:nvSpPr>
         <p:spPr>
           <a:xfrm>
-            <a:off x="7067550" y="3749040"/>
+            <a:off x="7067550" y="3587115"/>
             <a:ext cx="57150" cy="57150"/>
           </a:xfrm>
           <a:prstGeom prst="rect">
@@ -19026,7 +18943,7 @@
         </p:nvSpPr>
         <p:spPr>
           <a:xfrm>
-            <a:off x="7334250" y="3664839"/>
+            <a:off x="7334250" y="3502914"/>
             <a:ext cx="4171950" cy="95250"/>
           </a:xfrm>
           <a:prstGeom prst="rect">
@@ -19065,7 +18982,7 @@
         </p:nvSpPr>
         <p:spPr>
           <a:xfrm>
-            <a:off x="7067550" y="4328922"/>
+            <a:off x="7067550" y="4166997"/>
             <a:ext cx="57150" cy="57150"/>
           </a:xfrm>
           <a:prstGeom prst="rect">
@@ -19109,7 +19026,7 @@
         </p:nvSpPr>
         <p:spPr>
           <a:xfrm>
-            <a:off x="7334250" y="4244721"/>
+            <a:off x="7334250" y="4082796"/>
             <a:ext cx="4171950" cy="95250"/>
           </a:xfrm>
           <a:prstGeom prst="rect">
@@ -19315,7 +19232,7 @@
         </p:nvSpPr>
         <p:spPr>
           <a:xfrm>
-            <a:off x="685800" y="2061210"/>
+            <a:off x="685800" y="1899285"/>
             <a:ext cx="5143500" cy="182880"/>
           </a:xfrm>
           <a:prstGeom prst="rect">
@@ -19354,7 +19271,7 @@
         </p:nvSpPr>
         <p:spPr>
           <a:xfrm>
-            <a:off x="685800" y="2270760"/>
+            <a:off x="685800" y="2108835"/>
             <a:ext cx="419100" cy="28575"/>
           </a:xfrm>
           <a:prstGeom prst="rect">
@@ -19398,7 +19315,7 @@
         </p:nvSpPr>
         <p:spPr>
           <a:xfrm>
-            <a:off x="704850" y="2660523"/>
+            <a:off x="704850" y="2498598"/>
             <a:ext cx="57150" cy="57150"/>
           </a:xfrm>
           <a:prstGeom prst="rect">
@@ -19442,7 +19359,7 @@
         </p:nvSpPr>
         <p:spPr>
           <a:xfrm>
-            <a:off x="971550" y="2556510"/>
+            <a:off x="971550" y="2394585"/>
             <a:ext cx="4857750" cy="95250"/>
           </a:xfrm>
           <a:prstGeom prst="rect">
@@ -19481,7 +19398,7 @@
         </p:nvSpPr>
         <p:spPr>
           <a:xfrm>
-            <a:off x="704850" y="3191256"/>
+            <a:off x="704850" y="3029331"/>
             <a:ext cx="57150" cy="57150"/>
           </a:xfrm>
           <a:prstGeom prst="rect">
@@ -19525,7 +19442,7 @@
         </p:nvSpPr>
         <p:spPr>
           <a:xfrm>
-            <a:off x="971550" y="3087243"/>
+            <a:off x="971550" y="2925318"/>
             <a:ext cx="4857750" cy="95250"/>
           </a:xfrm>
           <a:prstGeom prst="rect">
@@ -19564,7 +19481,7 @@
         </p:nvSpPr>
         <p:spPr>
           <a:xfrm>
-            <a:off x="704850" y="3986022"/>
+            <a:off x="704850" y="3824097"/>
             <a:ext cx="57150" cy="57150"/>
           </a:xfrm>
           <a:prstGeom prst="rect">
@@ -19608,7 +19525,7 @@
         </p:nvSpPr>
         <p:spPr>
           <a:xfrm>
-            <a:off x="971550" y="3882009"/>
+            <a:off x="971550" y="3720084"/>
             <a:ext cx="4857750" cy="95250"/>
           </a:xfrm>
           <a:prstGeom prst="rect">
@@ -19647,7 +19564,7 @@
         </p:nvSpPr>
         <p:spPr>
           <a:xfrm>
-            <a:off x="704850" y="5308854"/>
+            <a:off x="704850" y="5146929"/>
             <a:ext cx="57150" cy="57150"/>
           </a:xfrm>
           <a:prstGeom prst="rect">
@@ -19691,7 +19608,7 @@
         </p:nvSpPr>
         <p:spPr>
           <a:xfrm>
-            <a:off x="971550" y="5204841"/>
+            <a:off x="971550" y="5042916"/>
             <a:ext cx="4857750" cy="95250"/>
           </a:xfrm>
           <a:prstGeom prst="rect">
@@ -19730,7 +19647,7 @@
         </p:nvSpPr>
         <p:spPr>
           <a:xfrm>
-            <a:off x="6362700" y="2061210"/>
+            <a:off x="6362700" y="1899285"/>
             <a:ext cx="5143500" cy="182880"/>
           </a:xfrm>
           <a:prstGeom prst="rect">
@@ -19769,7 +19686,7 @@
         </p:nvSpPr>
         <p:spPr>
           <a:xfrm>
-            <a:off x="6362700" y="2270760"/>
+            <a:off x="6362700" y="2108835"/>
             <a:ext cx="419100" cy="28575"/>
           </a:xfrm>
           <a:prstGeom prst="rect">
@@ -19813,7 +19730,7 @@
         </p:nvSpPr>
         <p:spPr>
           <a:xfrm>
-            <a:off x="6381750" y="2660523"/>
+            <a:off x="6381750" y="2498598"/>
             <a:ext cx="57150" cy="57150"/>
           </a:xfrm>
           <a:prstGeom prst="rect">
@@ -19857,7 +19774,7 @@
         </p:nvSpPr>
         <p:spPr>
           <a:xfrm>
-            <a:off x="6648450" y="2556510"/>
+            <a:off x="6648450" y="2394585"/>
             <a:ext cx="4857750" cy="95250"/>
           </a:xfrm>
           <a:prstGeom prst="rect">
@@ -19896,7 +19813,7 @@
         </p:nvSpPr>
         <p:spPr>
           <a:xfrm>
-            <a:off x="6381750" y="3719322"/>
+            <a:off x="6381750" y="3557397"/>
             <a:ext cx="57150" cy="57150"/>
           </a:xfrm>
           <a:prstGeom prst="rect">
@@ -19940,7 +19857,7 @@
         </p:nvSpPr>
         <p:spPr>
           <a:xfrm>
-            <a:off x="6648450" y="3615309"/>
+            <a:off x="6648450" y="3453384"/>
             <a:ext cx="4857750" cy="95250"/>
           </a:xfrm>
           <a:prstGeom prst="rect">
@@ -20162,7 +20079,7 @@
         </p:nvSpPr>
         <p:spPr>
           <a:xfrm>
-            <a:off x="704850" y="3003423"/>
+            <a:off x="704850" y="2860548"/>
             <a:ext cx="57150" cy="57150"/>
           </a:xfrm>
           <a:prstGeom prst="rect">
@@ -20206,7 +20123,7 @@
         </p:nvSpPr>
         <p:spPr>
           <a:xfrm>
-            <a:off x="971550" y="2894457"/>
+            <a:off x="971550" y="2751582"/>
             <a:ext cx="7581900" cy="95250"/>
           </a:xfrm>
           <a:prstGeom prst="rect">
@@ -20245,7 +20162,7 @@
         </p:nvSpPr>
         <p:spPr>
           <a:xfrm>
-            <a:off x="704850" y="4118991"/>
+            <a:off x="704850" y="3976116"/>
             <a:ext cx="57150" cy="57150"/>
           </a:xfrm>
           <a:prstGeom prst="rect">
@@ -20289,7 +20206,7 @@
         </p:nvSpPr>
         <p:spPr>
           <a:xfrm>
-            <a:off x="971550" y="4010025"/>
+            <a:off x="971550" y="3867150"/>
             <a:ext cx="7581900" cy="95250"/>
           </a:xfrm>
           <a:prstGeom prst="rect">
@@ -20328,7 +20245,7 @@
         </p:nvSpPr>
         <p:spPr>
           <a:xfrm>
-            <a:off x="704850" y="4681347"/>
+            <a:off x="704850" y="4538472"/>
             <a:ext cx="57150" cy="57150"/>
           </a:xfrm>
           <a:prstGeom prst="rect">
@@ -20372,7 +20289,7 @@
         </p:nvSpPr>
         <p:spPr>
           <a:xfrm>
-            <a:off x="971550" y="4572381"/>
+            <a:off x="971550" y="4429506"/>
             <a:ext cx="7581900" cy="95250"/>
           </a:xfrm>
           <a:prstGeom prst="rect">
@@ -20411,7 +20328,7 @@
         </p:nvSpPr>
         <p:spPr>
           <a:xfrm>
-            <a:off x="9124950" y="2894457"/>
+            <a:off x="9124950" y="2751582"/>
             <a:ext cx="142875" cy="142875"/>
           </a:xfrm>
           <a:prstGeom prst="donut">
@@ -20455,7 +20372,7 @@
         </p:nvSpPr>
         <p:spPr>
           <a:xfrm>
-            <a:off x="9372600" y="2903982"/>
+            <a:off x="9372600" y="2761107"/>
             <a:ext cx="2133600" cy="182880"/>
           </a:xfrm>
           <a:prstGeom prst="rect">
@@ -20494,7 +20411,7 @@
         </p:nvSpPr>
         <p:spPr>
           <a:xfrm>
-            <a:off x="9124950" y="3180207"/>
+            <a:off x="9124950" y="3037332"/>
             <a:ext cx="38100" cy="1234440"/>
           </a:xfrm>
           <a:prstGeom prst="rect">
@@ -20538,7 +20455,7 @@
         </p:nvSpPr>
         <p:spPr>
           <a:xfrm>
-            <a:off x="9334500" y="3180207"/>
+            <a:off x="9334500" y="3037332"/>
             <a:ext cx="2171700" cy="1805940"/>
           </a:xfrm>
           <a:prstGeom prst="rect">
@@ -20785,7 +20702,7 @@
         </p:nvSpPr>
         <p:spPr>
           <a:xfrm>
-            <a:off x="704850" y="2583942"/>
+            <a:off x="704850" y="2441067"/>
             <a:ext cx="57150" cy="57150"/>
           </a:xfrm>
           <a:prstGeom prst="rect">
@@ -20829,7 +20746,7 @@
         </p:nvSpPr>
         <p:spPr>
           <a:xfrm>
-            <a:off x="971550" y="2474976"/>
+            <a:off x="971550" y="2332101"/>
             <a:ext cx="7677150" cy="95250"/>
           </a:xfrm>
           <a:prstGeom prst="rect">
@@ -20868,7 +20785,7 @@
         </p:nvSpPr>
         <p:spPr>
           <a:xfrm>
-            <a:off x="704850" y="3422904"/>
+            <a:off x="704850" y="3280029"/>
             <a:ext cx="57150" cy="57150"/>
           </a:xfrm>
           <a:prstGeom prst="rect">
@@ -20912,7 +20829,7 @@
         </p:nvSpPr>
         <p:spPr>
           <a:xfrm>
-            <a:off x="971550" y="3313938"/>
+            <a:off x="971550" y="3171063"/>
             <a:ext cx="7677150" cy="95250"/>
           </a:xfrm>
           <a:prstGeom prst="rect">
@@ -20951,7 +20868,7 @@
         </p:nvSpPr>
         <p:spPr>
           <a:xfrm>
-            <a:off x="704850" y="4261866"/>
+            <a:off x="704850" y="4118991"/>
             <a:ext cx="57150" cy="57150"/>
           </a:xfrm>
           <a:prstGeom prst="rect">
@@ -20995,7 +20912,7 @@
         </p:nvSpPr>
         <p:spPr>
           <a:xfrm>
-            <a:off x="971550" y="4152900"/>
+            <a:off x="971550" y="4010025"/>
             <a:ext cx="7677150" cy="95250"/>
           </a:xfrm>
           <a:prstGeom prst="rect">
@@ -21034,7 +20951,7 @@
         </p:nvSpPr>
         <p:spPr>
           <a:xfrm>
-            <a:off x="704850" y="5100828"/>
+            <a:off x="704850" y="4957953"/>
             <a:ext cx="57150" cy="57150"/>
           </a:xfrm>
           <a:prstGeom prst="rect">
@@ -21078,7 +20995,7 @@
         </p:nvSpPr>
         <p:spPr>
           <a:xfrm>
-            <a:off x="971550" y="4991862"/>
+            <a:off x="971550" y="4848987"/>
             <a:ext cx="7677150" cy="95250"/>
           </a:xfrm>
           <a:prstGeom prst="rect">
@@ -21117,7 +21034,7 @@
         </p:nvSpPr>
         <p:spPr>
           <a:xfrm>
-            <a:off x="9124950" y="2474976"/>
+            <a:off x="9124950" y="2332101"/>
             <a:ext cx="142875" cy="142875"/>
           </a:xfrm>
           <a:prstGeom prst="donut">
@@ -21161,7 +21078,7 @@
         </p:nvSpPr>
         <p:spPr>
           <a:xfrm>
-            <a:off x="9372600" y="2484501"/>
+            <a:off x="9372600" y="2341626"/>
             <a:ext cx="2133600" cy="182880"/>
           </a:xfrm>
           <a:prstGeom prst="rect">
@@ -21200,7 +21117,7 @@
         </p:nvSpPr>
         <p:spPr>
           <a:xfrm>
-            <a:off x="9124950" y="2760726"/>
+            <a:off x="9124950" y="2617851"/>
             <a:ext cx="38100" cy="1033272"/>
           </a:xfrm>
           <a:prstGeom prst="rect">
@@ -21244,7 +21161,7 @@
         </p:nvSpPr>
         <p:spPr>
           <a:xfrm>
-            <a:off x="9334500" y="2760726"/>
+            <a:off x="9334500" y="2617851"/>
             <a:ext cx="2171700" cy="1604772"/>
           </a:xfrm>
           <a:prstGeom prst="rect">
@@ -21912,7 +21829,7 @@
         </p:nvSpPr>
         <p:spPr>
           <a:xfrm>
-            <a:off x="685800" y="1964055"/>
+            <a:off x="685800" y="1821180"/>
             <a:ext cx="10820400" cy="3524250"/>
           </a:xfrm>
           <a:prstGeom prst="roundRect">
@@ -21958,7 +21875,7 @@
         </p:nvSpPr>
         <p:spPr>
           <a:xfrm>
-            <a:off x="952500" y="2173605"/>
+            <a:off x="952500" y="2030730"/>
             <a:ext cx="323850" cy="28575"/>
           </a:xfrm>
           <a:prstGeom prst="roundRect">
@@ -22004,7 +21921,7 @@
         </p:nvSpPr>
         <p:spPr>
           <a:xfrm>
-            <a:off x="1371600" y="2116455"/>
+            <a:off x="1371600" y="1973580"/>
             <a:ext cx="1905000" cy="167640"/>
           </a:xfrm>
           <a:prstGeom prst="rect">
@@ -22043,7 +21960,7 @@
         </p:nvSpPr>
         <p:spPr>
           <a:xfrm>
-            <a:off x="952500" y="2459355"/>
+            <a:off x="952500" y="2316480"/>
             <a:ext cx="10287000" cy="228600"/>
           </a:xfrm>
           <a:prstGeom prst="rect">
@@ -22082,7 +21999,7 @@
         </p:nvSpPr>
         <p:spPr>
           <a:xfrm>
-            <a:off x="952500" y="2697480"/>
+            <a:off x="952500" y="2554605"/>
             <a:ext cx="10287000" cy="228600"/>
           </a:xfrm>
           <a:prstGeom prst="rect">
@@ -22121,7 +22038,7 @@
         </p:nvSpPr>
         <p:spPr>
           <a:xfrm>
-            <a:off x="952500" y="2935605"/>
+            <a:off x="952500" y="2792730"/>
             <a:ext cx="10287000" cy="228600"/>
           </a:xfrm>
           <a:prstGeom prst="rect">
@@ -22160,7 +22077,7 @@
         </p:nvSpPr>
         <p:spPr>
           <a:xfrm>
-            <a:off x="952500" y="3173730"/>
+            <a:off x="952500" y="3030855"/>
             <a:ext cx="10287000" cy="228600"/>
           </a:xfrm>
           <a:prstGeom prst="rect">
@@ -22199,7 +22116,7 @@
         </p:nvSpPr>
         <p:spPr>
           <a:xfrm>
-            <a:off x="952500" y="3411855"/>
+            <a:off x="952500" y="3268980"/>
             <a:ext cx="10287000" cy="228600"/>
           </a:xfrm>
           <a:prstGeom prst="rect">
@@ -22238,7 +22155,7 @@
         </p:nvSpPr>
         <p:spPr>
           <a:xfrm>
-            <a:off x="952500" y="3649980"/>
+            <a:off x="952500" y="3507105"/>
             <a:ext cx="10287000" cy="228600"/>
           </a:xfrm>
           <a:prstGeom prst="rect">
@@ -22277,7 +22194,7 @@
         </p:nvSpPr>
         <p:spPr>
           <a:xfrm>
-            <a:off x="952500" y="3888105"/>
+            <a:off x="952500" y="3745230"/>
             <a:ext cx="10287000" cy="228600"/>
           </a:xfrm>
           <a:prstGeom prst="rect">
@@ -22316,7 +22233,7 @@
         </p:nvSpPr>
         <p:spPr>
           <a:xfrm>
-            <a:off x="952500" y="4126230"/>
+            <a:off x="952500" y="3983355"/>
             <a:ext cx="10287000" cy="228600"/>
           </a:xfrm>
           <a:prstGeom prst="rect">
@@ -22355,7 +22272,7 @@
         </p:nvSpPr>
         <p:spPr>
           <a:xfrm>
-            <a:off x="952500" y="4364355"/>
+            <a:off x="952500" y="4221480"/>
             <a:ext cx="10287000" cy="228600"/>
           </a:xfrm>
           <a:prstGeom prst="rect">
@@ -22394,7 +22311,7 @@
         </p:nvSpPr>
         <p:spPr>
           <a:xfrm>
-            <a:off x="952500" y="4602480"/>
+            <a:off x="952500" y="4459605"/>
             <a:ext cx="10287000" cy="228600"/>
           </a:xfrm>
           <a:prstGeom prst="rect">
@@ -22433,7 +22350,7 @@
         </p:nvSpPr>
         <p:spPr>
           <a:xfrm>
-            <a:off x="952500" y="4840605"/>
+            <a:off x="952500" y="4697730"/>
             <a:ext cx="10287000" cy="228600"/>
           </a:xfrm>
           <a:prstGeom prst="rect">
@@ -22472,7 +22389,7 @@
         </p:nvSpPr>
         <p:spPr>
           <a:xfrm>
-            <a:off x="952500" y="5078730"/>
+            <a:off x="952500" y="4935855"/>
             <a:ext cx="10287000" cy="228600"/>
           </a:xfrm>
           <a:prstGeom prst="rect">
@@ -22511,7 +22428,7 @@
         </p:nvSpPr>
         <p:spPr>
           <a:xfrm>
-            <a:off x="685800" y="5716905"/>
+            <a:off x="685800" y="5574030"/>
             <a:ext cx="28575" cy="377190"/>
           </a:xfrm>
           <a:prstGeom prst="rect">
@@ -22555,7 +22472,7 @@
         </p:nvSpPr>
         <p:spPr>
           <a:xfrm>
-            <a:off x="876300" y="5697855"/>
+            <a:off x="876300" y="5554980"/>
             <a:ext cx="10629900" cy="666750"/>
           </a:xfrm>
           <a:prstGeom prst="rect">
@@ -22716,58 +22633,14 @@
       </p:pic>
       <p:sp>
         <p:nvSpPr>
-          <p:cNvPr id="3" name="Rectangle 2"/>
-          <p:cNvSpPr/>
-          <p:nvPr/>
-        </p:nvSpPr>
-        <p:spPr>
-          <a:xfrm>
-            <a:off x="914400" y="1638300"/>
-            <a:ext cx="38100" cy="171450"/>
-          </a:xfrm>
-          <a:prstGeom prst="rect">
-            <a:avLst/>
-          </a:prstGeom>
-          <a:solidFill>
-            <a:srgbClr val="E94D1C"/>
-          </a:solidFill>
-          <a:ln>
-            <a:noFill/>
-          </a:ln>
-          <a:effectLst/>
-        </p:spPr>
-        <p:style>
-          <a:lnRef idx="1">
-            <a:schemeClr val="accent1"/>
-          </a:lnRef>
-          <a:fillRef idx="3">
-            <a:schemeClr val="accent1"/>
-          </a:fillRef>
-          <a:effectRef idx="2">
-            <a:schemeClr val="accent1"/>
-          </a:effectRef>
-          <a:fontRef idx="minor">
-            <a:schemeClr val="lt1"/>
-          </a:fontRef>
-        </p:style>
-        <p:txBody>
-          <a:bodyPr rtlCol="0" anchor="ctr" wrap="square" lIns="0" rIns="0" tIns="0" bIns="0"/>
-          <a:lstStyle/>
-          <a:p>
-            <a:pPr algn="ctr"/>
-          </a:p>
-        </p:txBody>
-      </p:sp>
-      <p:sp>
-        <p:nvSpPr>
-          <p:cNvPr id="4" name="TextBox 3"/>
+          <p:cNvPr id="3" name="TextBox 2"/>
           <p:cNvSpPr txBox="1"/>
           <p:nvPr/>
         </p:nvSpPr>
         <p:spPr>
           <a:xfrm>
-            <a:off x="1066800" y="1600200"/>
-            <a:ext cx="8572500" cy="228600"/>
+            <a:off x="914400" y="1866900"/>
+            <a:ext cx="9715500" cy="1905000"/>
           </a:xfrm>
           <a:prstGeom prst="rect">
             <a:avLst/>
@@ -22782,31 +22655,47 @@
           <a:p>
             <a:pPr algn="l">
               <a:lnSpc>
-                <a:spcPct val="120000"/>
-              </a:lnSpc>
-            </a:pPr>
-            <a:r>
-              <a:rPr sz="1120" b="1" i="0" spc="160">
+                <a:spcPct val="106000"/>
+              </a:lnSpc>
+            </a:pPr>
+            <a:r>
+              <a:rPr sz="3600" b="1" i="0">
                 <a:solidFill>
                   <a:srgbClr val="FFFFFF"/>
                 </a:solidFill>
                 <a:latin typeface="Roboto"/>
               </a:rPr>
-              <a:t/>
-            </a:r>
-          </a:p>
-        </p:txBody>
-      </p:sp>
-      <p:sp>
-        <p:nvSpPr>
-          <p:cNvPr id="5" name="TextBox 4"/>
+              <a:t>A remoção do dockershim</a:t>
+            </a:r>
+          </a:p>
+          <a:p>
+            <a:pPr>
+              <a:lnSpc>
+                <a:spcPct val="106000"/>
+              </a:lnSpc>
+            </a:pPr>
+            <a:r>
+              <a:rPr sz="3600" b="1" i="0">
+                <a:solidFill>
+                  <a:srgbClr val="FFFFFF"/>
+                </a:solidFill>
+                <a:latin typeface="Roboto"/>
+              </a:rPr>
+              <a:t>no Kubernetes 1.24</a:t>
+            </a:r>
+          </a:p>
+        </p:txBody>
+      </p:sp>
+      <p:sp>
+        <p:nvSpPr>
+          <p:cNvPr id="4" name="TextBox 3"/>
           <p:cNvSpPr txBox="1"/>
           <p:nvPr/>
         </p:nvSpPr>
         <p:spPr>
           <a:xfrm>
-            <a:off x="914400" y="1866900"/>
-            <a:ext cx="9715500" cy="1905000"/>
+            <a:off x="914400" y="4095750"/>
+            <a:ext cx="8572500" cy="1524000"/>
           </a:xfrm>
           <a:prstGeom prst="rect">
             <a:avLst/>
@@ -22821,47 +22710,31 @@
           <a:p>
             <a:pPr algn="l">
               <a:lnSpc>
-                <a:spcPct val="106000"/>
-              </a:lnSpc>
-            </a:pPr>
-            <a:r>
-              <a:rPr sz="3600" b="1" i="0">
-                <a:solidFill>
-                  <a:srgbClr val="FFFFFF"/>
+                <a:spcPct val="150000"/>
+              </a:lnSpc>
+            </a:pPr>
+            <a:r>
+              <a:rPr sz="1420" b="0" i="0">
+                <a:solidFill>
+                  <a:srgbClr val="E2DEF5"/>
                 </a:solidFill>
                 <a:latin typeface="Roboto"/>
               </a:rPr>
-              <a:t>A remoção do dockershim</a:t>
-            </a:r>
-          </a:p>
-          <a:p>
-            <a:pPr>
-              <a:lnSpc>
-                <a:spcPct val="106000"/>
-              </a:lnSpc>
-            </a:pPr>
-            <a:r>
-              <a:rPr sz="3600" b="1" i="0">
-                <a:solidFill>
-                  <a:srgbClr val="FFFFFF"/>
-                </a:solidFill>
-                <a:latin typeface="Roboto"/>
-              </a:rPr>
-              <a:t>no Kubernetes 1.24</a:t>
-            </a:r>
-          </a:p>
-        </p:txBody>
-      </p:sp>
-      <p:sp>
-        <p:nvSpPr>
-          <p:cNvPr id="6" name="TextBox 5"/>
+              <a:t>O que saiu foi o adaptador embutido que falava com o Docker Engine, não o formato das imagens. Como imagem é OCI, nada quebrou. É um caso real de substituição por compatibilidade de interface.</a:t>
+            </a:r>
+          </a:p>
+        </p:txBody>
+      </p:sp>
+      <p:sp>
+        <p:nvSpPr>
+          <p:cNvPr id="5" name="TextBox 4"/>
           <p:cNvSpPr txBox="1"/>
           <p:nvPr/>
         </p:nvSpPr>
         <p:spPr>
           <a:xfrm>
-            <a:off x="914400" y="4095750"/>
-            <a:ext cx="8572500" cy="1524000"/>
+            <a:off x="685800" y="6324600"/>
+            <a:ext cx="6667500" cy="182880"/>
           </a:xfrm>
           <a:prstGeom prst="rect">
             <a:avLst/>
@@ -22876,55 +22749,16 @@
           <a:p>
             <a:pPr algn="l">
               <a:lnSpc>
-                <a:spcPct val="150000"/>
-              </a:lnSpc>
-            </a:pPr>
-            <a:r>
-              <a:rPr sz="1420" b="0" i="0">
-                <a:solidFill>
-                  <a:srgbClr val="E2DEF5"/>
+                <a:spcPct val="120000"/>
+              </a:lnSpc>
+            </a:pPr>
+            <a:r>
+              <a:rPr sz="900" b="0" i="0">
+                <a:solidFill>
+                  <a:srgbClr val="FFFFFF"/>
                 </a:solidFill>
                 <a:latin typeface="Roboto"/>
               </a:rPr>
-              <a:t>O que saiu foi o adaptador embutido que falava com o Docker Engine, não o formato das imagens. Como imagem é OCI, nada quebrou. É um caso real de substituição por compatibilidade de interface.</a:t>
-            </a:r>
-          </a:p>
-        </p:txBody>
-      </p:sp>
-      <p:sp>
-        <p:nvSpPr>
-          <p:cNvPr id="7" name="TextBox 6"/>
-          <p:cNvSpPr txBox="1"/>
-          <p:nvPr/>
-        </p:nvSpPr>
-        <p:spPr>
-          <a:xfrm>
-            <a:off x="685800" y="6324600"/>
-            <a:ext cx="6667500" cy="182880"/>
-          </a:xfrm>
-          <a:prstGeom prst="rect">
-            <a:avLst/>
-          </a:prstGeom>
-          <a:noFill/>
-        </p:spPr>
-        <p:txBody>
-          <a:bodyPr wrap="square" lIns="0" rIns="0" tIns="0" bIns="0" anchor="t">
-            <a:spAutoFit/>
-          </a:bodyPr>
-          <a:lstStyle/>
-          <a:p>
-            <a:pPr algn="l">
-              <a:lnSpc>
-                <a:spcPct val="120000"/>
-              </a:lnSpc>
-            </a:pPr>
-            <a:r>
-              <a:rPr sz="900" b="0" i="0">
-                <a:solidFill>
-                  <a:srgbClr val="FFFFFF"/>
-                </a:solidFill>
-                <a:latin typeface="Roboto"/>
-              </a:rPr>
               <a:t>03 · Estudo de caso</a:t>
             </a:r>
           </a:p>
@@ -22932,7 +22766,7 @@
       </p:sp>
       <p:sp>
         <p:nvSpPr>
-          <p:cNvPr id="8" name="TextBox 7"/>
+          <p:cNvPr id="6" name="TextBox 5"/>
           <p:cNvSpPr txBox="1"/>
           <p:nvPr/>
         </p:nvSpPr>
@@ -23066,7 +22900,7 @@
         </p:nvSpPr>
         <p:spPr>
           <a:xfrm>
-            <a:off x="704850" y="2722245"/>
+            <a:off x="704850" y="2579370"/>
             <a:ext cx="57150" cy="57150"/>
           </a:xfrm>
           <a:prstGeom prst="rect">
@@ -23110,7 +22944,7 @@
         </p:nvSpPr>
         <p:spPr>
           <a:xfrm>
-            <a:off x="971550" y="2613279"/>
+            <a:off x="971550" y="2470404"/>
             <a:ext cx="7772400" cy="95250"/>
           </a:xfrm>
           <a:prstGeom prst="rect">
@@ -23149,7 +22983,7 @@
         </p:nvSpPr>
         <p:spPr>
           <a:xfrm>
-            <a:off x="704850" y="3561207"/>
+            <a:off x="704850" y="3418332"/>
             <a:ext cx="57150" cy="57150"/>
           </a:xfrm>
           <a:prstGeom prst="rect">
@@ -23193,7 +23027,7 @@
         </p:nvSpPr>
         <p:spPr>
           <a:xfrm>
-            <a:off x="971550" y="3452241"/>
+            <a:off x="971550" y="3309366"/>
             <a:ext cx="7772400" cy="95250"/>
           </a:xfrm>
           <a:prstGeom prst="rect">
@@ -23232,7 +23066,7 @@
         </p:nvSpPr>
         <p:spPr>
           <a:xfrm>
-            <a:off x="704850" y="4400169"/>
+            <a:off x="704850" y="4257294"/>
             <a:ext cx="57150" cy="57150"/>
           </a:xfrm>
           <a:prstGeom prst="rect">
@@ -23276,7 +23110,7 @@
         </p:nvSpPr>
         <p:spPr>
           <a:xfrm>
-            <a:off x="971550" y="4291203"/>
+            <a:off x="971550" y="4148328"/>
             <a:ext cx="7772400" cy="95250"/>
           </a:xfrm>
           <a:prstGeom prst="rect">
@@ -23315,7 +23149,7 @@
         </p:nvSpPr>
         <p:spPr>
           <a:xfrm>
-            <a:off x="704850" y="5239131"/>
+            <a:off x="704850" y="5096256"/>
             <a:ext cx="57150" cy="57150"/>
           </a:xfrm>
           <a:prstGeom prst="rect">
@@ -23359,7 +23193,7 @@
         </p:nvSpPr>
         <p:spPr>
           <a:xfrm>
-            <a:off x="971550" y="5130165"/>
+            <a:off x="971550" y="4987290"/>
             <a:ext cx="7772400" cy="95250"/>
           </a:xfrm>
           <a:prstGeom prst="rect">
@@ -23398,7 +23232,7 @@
         </p:nvSpPr>
         <p:spPr>
           <a:xfrm>
-            <a:off x="9124950" y="2613279"/>
+            <a:off x="9124950" y="2470404"/>
             <a:ext cx="152400" cy="133350"/>
           </a:xfrm>
           <a:prstGeom prst="triangle">
@@ -23442,7 +23276,7 @@
         </p:nvSpPr>
         <p:spPr>
           <a:xfrm>
-            <a:off x="9193530" y="2670429"/>
+            <a:off x="9193530" y="2527554"/>
             <a:ext cx="15240" cy="38100"/>
           </a:xfrm>
           <a:prstGeom prst="rect">
@@ -23486,7 +23320,7 @@
         </p:nvSpPr>
         <p:spPr>
           <a:xfrm>
-            <a:off x="9372600" y="2622804"/>
+            <a:off x="9372600" y="2479929"/>
             <a:ext cx="2133600" cy="182880"/>
           </a:xfrm>
           <a:prstGeom prst="rect">
@@ -23525,7 +23359,7 @@
         </p:nvSpPr>
         <p:spPr>
           <a:xfrm>
-            <a:off x="9124950" y="2899029"/>
+            <a:off x="9124950" y="2756154"/>
             <a:ext cx="38100" cy="1005840"/>
           </a:xfrm>
           <a:prstGeom prst="rect">
@@ -23569,7 +23403,7 @@
         </p:nvSpPr>
         <p:spPr>
           <a:xfrm>
-            <a:off x="9334500" y="2899029"/>
+            <a:off x="9334500" y="2756154"/>
             <a:ext cx="2171700" cy="1577340"/>
           </a:xfrm>
           <a:prstGeom prst="rect">
@@ -23759,7 +23593,7 @@
               </a:lnSpc>
             </a:pPr>
             <a:r>
-              <a:rPr sz="2400" b="1" i="0">
+              <a:rPr sz="3000" b="1" i="0">
                 <a:solidFill>
                   <a:srgbClr val="21049A"/>
                 </a:solidFill>
@@ -23778,8 +23612,8 @@
         </p:nvSpPr>
         <p:spPr>
           <a:xfrm>
-            <a:off x="685800" y="2061210"/>
-            <a:ext cx="5143500" cy="182880"/>
+            <a:off x="857250" y="2114550"/>
+            <a:ext cx="4762500" cy="182880"/>
           </a:xfrm>
           <a:prstGeom prst="rect">
             <a:avLst/>
@@ -23798,7 +23632,7 @@
               </a:lnSpc>
             </a:pPr>
             <a:r>
-              <a:rPr sz="900" b="1" i="0" spc="120">
+              <a:rPr sz="900" b="1" i="0" spc="140">
                 <a:solidFill>
                   <a:srgbClr val="21049A"/>
                 </a:solidFill>
@@ -23817,8 +23651,176 @@
         </p:nvSpPr>
         <p:spPr>
           <a:xfrm>
-            <a:off x="685800" y="2270760"/>
-            <a:ext cx="419100" cy="28575"/>
+            <a:off x="857250" y="4076700"/>
+            <a:ext cx="4762500" cy="323850"/>
+          </a:xfrm>
+          <a:prstGeom prst="rect">
+            <a:avLst/>
+          </a:prstGeom>
+          <a:solidFill>
+            <a:srgbClr val="D9D9D9"/>
+          </a:solidFill>
+          <a:ln>
+            <a:noFill/>
+          </a:ln>
+          <a:effectLst/>
+        </p:spPr>
+        <p:style>
+          <a:lnRef idx="1">
+            <a:schemeClr val="accent1"/>
+          </a:lnRef>
+          <a:fillRef idx="3">
+            <a:schemeClr val="accent1"/>
+          </a:fillRef>
+          <a:effectRef idx="2">
+            <a:schemeClr val="accent1"/>
+          </a:effectRef>
+          <a:fontRef idx="minor">
+            <a:schemeClr val="lt1"/>
+          </a:fontRef>
+        </p:style>
+        <p:txBody>
+          <a:bodyPr rtlCol="0" anchor="ctr" wrap="square" lIns="0" rIns="0" tIns="0" bIns="0"/>
+          <a:lstStyle/>
+          <a:p>
+            <a:pPr algn="ctr"/>
+          </a:p>
+        </p:txBody>
+      </p:sp>
+      <p:sp>
+        <p:nvSpPr>
+          <p:cNvPr id="6" name="TextBox 5"/>
+          <p:cNvSpPr txBox="1"/>
+          <p:nvPr/>
+        </p:nvSpPr>
+        <p:spPr>
+          <a:xfrm>
+            <a:off x="857250" y="4162425"/>
+            <a:ext cx="4762500" cy="198120"/>
+          </a:xfrm>
+          <a:prstGeom prst="rect">
+            <a:avLst/>
+          </a:prstGeom>
+          <a:noFill/>
+        </p:spPr>
+        <p:txBody>
+          <a:bodyPr wrap="square" lIns="0" rIns="0" tIns="0" bIns="0" anchor="t">
+            <a:spAutoFit/>
+          </a:bodyPr>
+          <a:lstStyle/>
+          <a:p>
+            <a:pPr algn="ctr">
+              <a:lnSpc>
+                <a:spcPct val="120000"/>
+              </a:lnSpc>
+            </a:pPr>
+            <a:r>
+              <a:rPr sz="980" b="0" i="0">
+                <a:solidFill>
+                  <a:srgbClr val="1A1A1E"/>
+                </a:solidFill>
+                <a:latin typeface="Roboto"/>
+              </a:rPr>
+              <a:t>hardware</a:t>
+            </a:r>
+          </a:p>
+        </p:txBody>
+      </p:sp>
+      <p:sp>
+        <p:nvSpPr>
+          <p:cNvPr id="7" name="Rectangle 6"/>
+          <p:cNvSpPr/>
+          <p:nvPr/>
+        </p:nvSpPr>
+        <p:spPr>
+          <a:xfrm>
+            <a:off x="857250" y="3714750"/>
+            <a:ext cx="4762500" cy="342900"/>
+          </a:xfrm>
+          <a:prstGeom prst="rect">
+            <a:avLst/>
+          </a:prstGeom>
+          <a:solidFill>
+            <a:srgbClr val="F2F2F5"/>
+          </a:solidFill>
+          <a:ln w="12700">
+            <a:solidFill>
+              <a:srgbClr val="D9D9D9"/>
+            </a:solidFill>
+          </a:ln>
+          <a:effectLst/>
+        </p:spPr>
+        <p:style>
+          <a:lnRef idx="1">
+            <a:schemeClr val="accent1"/>
+          </a:lnRef>
+          <a:fillRef idx="3">
+            <a:schemeClr val="accent1"/>
+          </a:fillRef>
+          <a:effectRef idx="2">
+            <a:schemeClr val="accent1"/>
+          </a:effectRef>
+          <a:fontRef idx="minor">
+            <a:schemeClr val="lt1"/>
+          </a:fontRef>
+        </p:style>
+        <p:txBody>
+          <a:bodyPr rtlCol="0" anchor="ctr" wrap="square" lIns="0" rIns="0" tIns="0" bIns="0"/>
+          <a:lstStyle/>
+          <a:p>
+            <a:pPr algn="ctr"/>
+          </a:p>
+        </p:txBody>
+      </p:sp>
+      <p:sp>
+        <p:nvSpPr>
+          <p:cNvPr id="8" name="TextBox 7"/>
+          <p:cNvSpPr txBox="1"/>
+          <p:nvPr/>
+        </p:nvSpPr>
+        <p:spPr>
+          <a:xfrm>
+            <a:off x="857250" y="3810000"/>
+            <a:ext cx="4762500" cy="198120"/>
+          </a:xfrm>
+          <a:prstGeom prst="rect">
+            <a:avLst/>
+          </a:prstGeom>
+          <a:noFill/>
+        </p:spPr>
+        <p:txBody>
+          <a:bodyPr wrap="square" lIns="0" rIns="0" tIns="0" bIns="0" anchor="t">
+            <a:spAutoFit/>
+          </a:bodyPr>
+          <a:lstStyle/>
+          <a:p>
+            <a:pPr algn="ctr">
+              <a:lnSpc>
+                <a:spcPct val="120000"/>
+              </a:lnSpc>
+            </a:pPr>
+            <a:r>
+              <a:rPr sz="980" b="0" i="0">
+                <a:solidFill>
+                  <a:srgbClr val="1A1A1E"/>
+                </a:solidFill>
+                <a:latin typeface="Roboto"/>
+              </a:rPr>
+              <a:t>sistema operacional do host</a:t>
+            </a:r>
+          </a:p>
+        </p:txBody>
+      </p:sp>
+      <p:sp>
+        <p:nvSpPr>
+          <p:cNvPr id="9" name="Rectangle 8"/>
+          <p:cNvSpPr/>
+          <p:nvPr/>
+        </p:nvSpPr>
+        <p:spPr>
+          <a:xfrm>
+            <a:off x="857250" y="3352800"/>
+            <a:ext cx="4762500" cy="342900"/>
           </a:xfrm>
           <a:prstGeom prst="rect">
             <a:avLst/>
@@ -23855,14 +23857,1726 @@
       </p:sp>
       <p:sp>
         <p:nvSpPr>
-          <p:cNvPr id="6" name="Rectangle 5"/>
+          <p:cNvPr id="10" name="TextBox 9"/>
+          <p:cNvSpPr txBox="1"/>
+          <p:nvPr/>
+        </p:nvSpPr>
+        <p:spPr>
+          <a:xfrm>
+            <a:off x="857250" y="3448050"/>
+            <a:ext cx="4762500" cy="198120"/>
+          </a:xfrm>
+          <a:prstGeom prst="rect">
+            <a:avLst/>
+          </a:prstGeom>
+          <a:noFill/>
+        </p:spPr>
+        <p:txBody>
+          <a:bodyPr wrap="square" lIns="0" rIns="0" tIns="0" bIns="0" anchor="t">
+            <a:spAutoFit/>
+          </a:bodyPr>
+          <a:lstStyle/>
+          <a:p>
+            <a:pPr algn="ctr">
+              <a:lnSpc>
+                <a:spcPct val="120000"/>
+              </a:lnSpc>
+            </a:pPr>
+            <a:r>
+              <a:rPr sz="980" b="1" i="0">
+                <a:solidFill>
+                  <a:srgbClr val="FFFFFF"/>
+                </a:solidFill>
+                <a:latin typeface="Roboto"/>
+              </a:rPr>
+              <a:t>hipervisor</a:t>
+            </a:r>
+          </a:p>
+        </p:txBody>
+      </p:sp>
+      <p:sp>
+        <p:nvSpPr>
+          <p:cNvPr id="11" name="Rounded Rectangle 10"/>
           <p:cNvSpPr/>
           <p:nvPr/>
         </p:nvSpPr>
         <p:spPr>
           <a:xfrm>
-            <a:off x="704850" y="2660523"/>
-            <a:ext cx="57150" cy="57150"/>
+            <a:off x="952500" y="2990850"/>
+            <a:ext cx="1428750" cy="342900"/>
+          </a:xfrm>
+          <a:prstGeom prst="roundRect">
+            <a:avLst>
+              <a:gd name="adj" fmla="val 5555"/>
+            </a:avLst>
+          </a:prstGeom>
+          <a:solidFill>
+            <a:srgbClr val="FDEAE3"/>
+          </a:solidFill>
+          <a:ln w="12700">
+            <a:solidFill>
+              <a:srgbClr val="E94D1C"/>
+            </a:solidFill>
+          </a:ln>
+          <a:effectLst/>
+        </p:spPr>
+        <p:style>
+          <a:lnRef idx="1">
+            <a:schemeClr val="accent1"/>
+          </a:lnRef>
+          <a:fillRef idx="3">
+            <a:schemeClr val="accent1"/>
+          </a:fillRef>
+          <a:effectRef idx="2">
+            <a:schemeClr val="accent1"/>
+          </a:effectRef>
+          <a:fontRef idx="minor">
+            <a:schemeClr val="lt1"/>
+          </a:fontRef>
+        </p:style>
+        <p:txBody>
+          <a:bodyPr rtlCol="0" anchor="ctr" wrap="square" lIns="0" rIns="0" tIns="0" bIns="0"/>
+          <a:lstStyle/>
+          <a:p>
+            <a:pPr algn="ctr"/>
+          </a:p>
+        </p:txBody>
+      </p:sp>
+      <p:sp>
+        <p:nvSpPr>
+          <p:cNvPr id="12" name="TextBox 11"/>
+          <p:cNvSpPr txBox="1"/>
+          <p:nvPr/>
+        </p:nvSpPr>
+        <p:spPr>
+          <a:xfrm>
+            <a:off x="952500" y="3086100"/>
+            <a:ext cx="1428750" cy="182880"/>
+          </a:xfrm>
+          <a:prstGeom prst="rect">
+            <a:avLst/>
+          </a:prstGeom>
+          <a:noFill/>
+        </p:spPr>
+        <p:txBody>
+          <a:bodyPr wrap="square" lIns="0" rIns="0" tIns="0" bIns="0" anchor="t">
+            <a:spAutoFit/>
+          </a:bodyPr>
+          <a:lstStyle/>
+          <a:p>
+            <a:pPr algn="ctr">
+              <a:lnSpc>
+                <a:spcPct val="120000"/>
+              </a:lnSpc>
+            </a:pPr>
+            <a:r>
+              <a:rPr sz="900" b="1" i="0">
+                <a:solidFill>
+                  <a:srgbClr val="E94D1C"/>
+                </a:solidFill>
+                <a:latin typeface="Roboto"/>
+              </a:rPr>
+              <a:t>SO convidado</a:t>
+            </a:r>
+          </a:p>
+        </p:txBody>
+      </p:sp>
+      <p:sp>
+        <p:nvSpPr>
+          <p:cNvPr id="13" name="Rounded Rectangle 12"/>
+          <p:cNvSpPr/>
+          <p:nvPr/>
+        </p:nvSpPr>
+        <p:spPr>
+          <a:xfrm>
+            <a:off x="952500" y="2705100"/>
+            <a:ext cx="1428750" cy="266700"/>
+          </a:xfrm>
+          <a:prstGeom prst="roundRect">
+            <a:avLst>
+              <a:gd name="adj" fmla="val 7142"/>
+            </a:avLst>
+          </a:prstGeom>
+          <a:solidFill>
+            <a:srgbClr val="FFFFFF"/>
+          </a:solidFill>
+          <a:ln w="12700">
+            <a:solidFill>
+              <a:srgbClr val="D9D9D9"/>
+            </a:solidFill>
+          </a:ln>
+          <a:effectLst/>
+        </p:spPr>
+        <p:style>
+          <a:lnRef idx="1">
+            <a:schemeClr val="accent1"/>
+          </a:lnRef>
+          <a:fillRef idx="3">
+            <a:schemeClr val="accent1"/>
+          </a:fillRef>
+          <a:effectRef idx="2">
+            <a:schemeClr val="accent1"/>
+          </a:effectRef>
+          <a:fontRef idx="minor">
+            <a:schemeClr val="lt1"/>
+          </a:fontRef>
+        </p:style>
+        <p:txBody>
+          <a:bodyPr rtlCol="0" anchor="ctr" wrap="square" lIns="0" rIns="0" tIns="0" bIns="0"/>
+          <a:lstStyle/>
+          <a:p>
+            <a:pPr algn="ctr"/>
+          </a:p>
+        </p:txBody>
+      </p:sp>
+      <p:sp>
+        <p:nvSpPr>
+          <p:cNvPr id="14" name="TextBox 13"/>
+          <p:cNvSpPr txBox="1"/>
+          <p:nvPr/>
+        </p:nvSpPr>
+        <p:spPr>
+          <a:xfrm>
+            <a:off x="952500" y="2762250"/>
+            <a:ext cx="1428750" cy="182880"/>
+          </a:xfrm>
+          <a:prstGeom prst="rect">
+            <a:avLst/>
+          </a:prstGeom>
+          <a:noFill/>
+        </p:spPr>
+        <p:txBody>
+          <a:bodyPr wrap="square" lIns="0" rIns="0" tIns="0" bIns="0" anchor="t">
+            <a:spAutoFit/>
+          </a:bodyPr>
+          <a:lstStyle/>
+          <a:p>
+            <a:pPr algn="ctr">
+              <a:lnSpc>
+                <a:spcPct val="120000"/>
+              </a:lnSpc>
+            </a:pPr>
+            <a:r>
+              <a:rPr sz="900" b="0" i="0">
+                <a:solidFill>
+                  <a:srgbClr val="6B6B78"/>
+                </a:solidFill>
+                <a:latin typeface="Roboto"/>
+              </a:rPr>
+              <a:t>bibliotecas</a:t>
+            </a:r>
+          </a:p>
+        </p:txBody>
+      </p:sp>
+      <p:sp>
+        <p:nvSpPr>
+          <p:cNvPr id="15" name="Rounded Rectangle 14"/>
+          <p:cNvSpPr/>
+          <p:nvPr/>
+        </p:nvSpPr>
+        <p:spPr>
+          <a:xfrm>
+            <a:off x="952500" y="2419350"/>
+            <a:ext cx="1428750" cy="266700"/>
+          </a:xfrm>
+          <a:prstGeom prst="roundRect">
+            <a:avLst>
+              <a:gd name="adj" fmla="val 7142"/>
+            </a:avLst>
+          </a:prstGeom>
+          <a:solidFill>
+            <a:srgbClr val="FFFFFF"/>
+          </a:solidFill>
+          <a:ln w="12700">
+            <a:solidFill>
+              <a:srgbClr val="21049A"/>
+            </a:solidFill>
+          </a:ln>
+          <a:effectLst/>
+        </p:spPr>
+        <p:style>
+          <a:lnRef idx="1">
+            <a:schemeClr val="accent1"/>
+          </a:lnRef>
+          <a:fillRef idx="3">
+            <a:schemeClr val="accent1"/>
+          </a:fillRef>
+          <a:effectRef idx="2">
+            <a:schemeClr val="accent1"/>
+          </a:effectRef>
+          <a:fontRef idx="minor">
+            <a:schemeClr val="lt1"/>
+          </a:fontRef>
+        </p:style>
+        <p:txBody>
+          <a:bodyPr rtlCol="0" anchor="ctr" wrap="square" lIns="0" rIns="0" tIns="0" bIns="0"/>
+          <a:lstStyle/>
+          <a:p>
+            <a:pPr algn="ctr"/>
+          </a:p>
+        </p:txBody>
+      </p:sp>
+      <p:sp>
+        <p:nvSpPr>
+          <p:cNvPr id="16" name="TextBox 15"/>
+          <p:cNvSpPr txBox="1"/>
+          <p:nvPr/>
+        </p:nvSpPr>
+        <p:spPr>
+          <a:xfrm>
+            <a:off x="952500" y="2476500"/>
+            <a:ext cx="1428750" cy="182880"/>
+          </a:xfrm>
+          <a:prstGeom prst="rect">
+            <a:avLst/>
+          </a:prstGeom>
+          <a:noFill/>
+        </p:spPr>
+        <p:txBody>
+          <a:bodyPr wrap="square" lIns="0" rIns="0" tIns="0" bIns="0" anchor="t">
+            <a:spAutoFit/>
+          </a:bodyPr>
+          <a:lstStyle/>
+          <a:p>
+            <a:pPr algn="ctr">
+              <a:lnSpc>
+                <a:spcPct val="120000"/>
+              </a:lnSpc>
+            </a:pPr>
+            <a:r>
+              <a:rPr sz="900" b="1" i="0">
+                <a:solidFill>
+                  <a:srgbClr val="21049A"/>
+                </a:solidFill>
+                <a:latin typeface="Roboto"/>
+              </a:rPr>
+              <a:t>app A</a:t>
+            </a:r>
+          </a:p>
+        </p:txBody>
+      </p:sp>
+      <p:sp>
+        <p:nvSpPr>
+          <p:cNvPr id="17" name="Rounded Rectangle 16"/>
+          <p:cNvSpPr/>
+          <p:nvPr/>
+        </p:nvSpPr>
+        <p:spPr>
+          <a:xfrm>
+            <a:off x="2524125" y="2990850"/>
+            <a:ext cx="1428750" cy="342900"/>
+          </a:xfrm>
+          <a:prstGeom prst="roundRect">
+            <a:avLst>
+              <a:gd name="adj" fmla="val 5555"/>
+            </a:avLst>
+          </a:prstGeom>
+          <a:solidFill>
+            <a:srgbClr val="FDEAE3"/>
+          </a:solidFill>
+          <a:ln w="12700">
+            <a:solidFill>
+              <a:srgbClr val="E94D1C"/>
+            </a:solidFill>
+          </a:ln>
+          <a:effectLst/>
+        </p:spPr>
+        <p:style>
+          <a:lnRef idx="1">
+            <a:schemeClr val="accent1"/>
+          </a:lnRef>
+          <a:fillRef idx="3">
+            <a:schemeClr val="accent1"/>
+          </a:fillRef>
+          <a:effectRef idx="2">
+            <a:schemeClr val="accent1"/>
+          </a:effectRef>
+          <a:fontRef idx="minor">
+            <a:schemeClr val="lt1"/>
+          </a:fontRef>
+        </p:style>
+        <p:txBody>
+          <a:bodyPr rtlCol="0" anchor="ctr" wrap="square" lIns="0" rIns="0" tIns="0" bIns="0"/>
+          <a:lstStyle/>
+          <a:p>
+            <a:pPr algn="ctr"/>
+          </a:p>
+        </p:txBody>
+      </p:sp>
+      <p:sp>
+        <p:nvSpPr>
+          <p:cNvPr id="18" name="TextBox 17"/>
+          <p:cNvSpPr txBox="1"/>
+          <p:nvPr/>
+        </p:nvSpPr>
+        <p:spPr>
+          <a:xfrm>
+            <a:off x="2524125" y="3086100"/>
+            <a:ext cx="1428750" cy="182880"/>
+          </a:xfrm>
+          <a:prstGeom prst="rect">
+            <a:avLst/>
+          </a:prstGeom>
+          <a:noFill/>
+        </p:spPr>
+        <p:txBody>
+          <a:bodyPr wrap="square" lIns="0" rIns="0" tIns="0" bIns="0" anchor="t">
+            <a:spAutoFit/>
+          </a:bodyPr>
+          <a:lstStyle/>
+          <a:p>
+            <a:pPr algn="ctr">
+              <a:lnSpc>
+                <a:spcPct val="120000"/>
+              </a:lnSpc>
+            </a:pPr>
+            <a:r>
+              <a:rPr sz="900" b="1" i="0">
+                <a:solidFill>
+                  <a:srgbClr val="E94D1C"/>
+                </a:solidFill>
+                <a:latin typeface="Roboto"/>
+              </a:rPr>
+              <a:t>SO convidado</a:t>
+            </a:r>
+          </a:p>
+        </p:txBody>
+      </p:sp>
+      <p:sp>
+        <p:nvSpPr>
+          <p:cNvPr id="19" name="Rounded Rectangle 18"/>
+          <p:cNvSpPr/>
+          <p:nvPr/>
+        </p:nvSpPr>
+        <p:spPr>
+          <a:xfrm>
+            <a:off x="2524125" y="2705100"/>
+            <a:ext cx="1428750" cy="266700"/>
+          </a:xfrm>
+          <a:prstGeom prst="roundRect">
+            <a:avLst>
+              <a:gd name="adj" fmla="val 7142"/>
+            </a:avLst>
+          </a:prstGeom>
+          <a:solidFill>
+            <a:srgbClr val="FFFFFF"/>
+          </a:solidFill>
+          <a:ln w="12700">
+            <a:solidFill>
+              <a:srgbClr val="D9D9D9"/>
+            </a:solidFill>
+          </a:ln>
+          <a:effectLst/>
+        </p:spPr>
+        <p:style>
+          <a:lnRef idx="1">
+            <a:schemeClr val="accent1"/>
+          </a:lnRef>
+          <a:fillRef idx="3">
+            <a:schemeClr val="accent1"/>
+          </a:fillRef>
+          <a:effectRef idx="2">
+            <a:schemeClr val="accent1"/>
+          </a:effectRef>
+          <a:fontRef idx="minor">
+            <a:schemeClr val="lt1"/>
+          </a:fontRef>
+        </p:style>
+        <p:txBody>
+          <a:bodyPr rtlCol="0" anchor="ctr" wrap="square" lIns="0" rIns="0" tIns="0" bIns="0"/>
+          <a:lstStyle/>
+          <a:p>
+            <a:pPr algn="ctr"/>
+          </a:p>
+        </p:txBody>
+      </p:sp>
+      <p:sp>
+        <p:nvSpPr>
+          <p:cNvPr id="20" name="TextBox 19"/>
+          <p:cNvSpPr txBox="1"/>
+          <p:nvPr/>
+        </p:nvSpPr>
+        <p:spPr>
+          <a:xfrm>
+            <a:off x="2524125" y="2762250"/>
+            <a:ext cx="1428750" cy="182880"/>
+          </a:xfrm>
+          <a:prstGeom prst="rect">
+            <a:avLst/>
+          </a:prstGeom>
+          <a:noFill/>
+        </p:spPr>
+        <p:txBody>
+          <a:bodyPr wrap="square" lIns="0" rIns="0" tIns="0" bIns="0" anchor="t">
+            <a:spAutoFit/>
+          </a:bodyPr>
+          <a:lstStyle/>
+          <a:p>
+            <a:pPr algn="ctr">
+              <a:lnSpc>
+                <a:spcPct val="120000"/>
+              </a:lnSpc>
+            </a:pPr>
+            <a:r>
+              <a:rPr sz="900" b="0" i="0">
+                <a:solidFill>
+                  <a:srgbClr val="6B6B78"/>
+                </a:solidFill>
+                <a:latin typeface="Roboto"/>
+              </a:rPr>
+              <a:t>bibliotecas</a:t>
+            </a:r>
+          </a:p>
+        </p:txBody>
+      </p:sp>
+      <p:sp>
+        <p:nvSpPr>
+          <p:cNvPr id="21" name="Rounded Rectangle 20"/>
+          <p:cNvSpPr/>
+          <p:nvPr/>
+        </p:nvSpPr>
+        <p:spPr>
+          <a:xfrm>
+            <a:off x="2524125" y="2419350"/>
+            <a:ext cx="1428750" cy="266700"/>
+          </a:xfrm>
+          <a:prstGeom prst="roundRect">
+            <a:avLst>
+              <a:gd name="adj" fmla="val 7142"/>
+            </a:avLst>
+          </a:prstGeom>
+          <a:solidFill>
+            <a:srgbClr val="FFFFFF"/>
+          </a:solidFill>
+          <a:ln w="12700">
+            <a:solidFill>
+              <a:srgbClr val="21049A"/>
+            </a:solidFill>
+          </a:ln>
+          <a:effectLst/>
+        </p:spPr>
+        <p:style>
+          <a:lnRef idx="1">
+            <a:schemeClr val="accent1"/>
+          </a:lnRef>
+          <a:fillRef idx="3">
+            <a:schemeClr val="accent1"/>
+          </a:fillRef>
+          <a:effectRef idx="2">
+            <a:schemeClr val="accent1"/>
+          </a:effectRef>
+          <a:fontRef idx="minor">
+            <a:schemeClr val="lt1"/>
+          </a:fontRef>
+        </p:style>
+        <p:txBody>
+          <a:bodyPr rtlCol="0" anchor="ctr" wrap="square" lIns="0" rIns="0" tIns="0" bIns="0"/>
+          <a:lstStyle/>
+          <a:p>
+            <a:pPr algn="ctr"/>
+          </a:p>
+        </p:txBody>
+      </p:sp>
+      <p:sp>
+        <p:nvSpPr>
+          <p:cNvPr id="22" name="TextBox 21"/>
+          <p:cNvSpPr txBox="1"/>
+          <p:nvPr/>
+        </p:nvSpPr>
+        <p:spPr>
+          <a:xfrm>
+            <a:off x="2524125" y="2476500"/>
+            <a:ext cx="1428750" cy="182880"/>
+          </a:xfrm>
+          <a:prstGeom prst="rect">
+            <a:avLst/>
+          </a:prstGeom>
+          <a:noFill/>
+        </p:spPr>
+        <p:txBody>
+          <a:bodyPr wrap="square" lIns="0" rIns="0" tIns="0" bIns="0" anchor="t">
+            <a:spAutoFit/>
+          </a:bodyPr>
+          <a:lstStyle/>
+          <a:p>
+            <a:pPr algn="ctr">
+              <a:lnSpc>
+                <a:spcPct val="120000"/>
+              </a:lnSpc>
+            </a:pPr>
+            <a:r>
+              <a:rPr sz="900" b="1" i="0">
+                <a:solidFill>
+                  <a:srgbClr val="21049A"/>
+                </a:solidFill>
+                <a:latin typeface="Roboto"/>
+              </a:rPr>
+              <a:t>app B</a:t>
+            </a:r>
+          </a:p>
+        </p:txBody>
+      </p:sp>
+      <p:sp>
+        <p:nvSpPr>
+          <p:cNvPr id="23" name="Rounded Rectangle 22"/>
+          <p:cNvSpPr/>
+          <p:nvPr/>
+        </p:nvSpPr>
+        <p:spPr>
+          <a:xfrm>
+            <a:off x="4095750" y="2990850"/>
+            <a:ext cx="1428750" cy="342900"/>
+          </a:xfrm>
+          <a:prstGeom prst="roundRect">
+            <a:avLst>
+              <a:gd name="adj" fmla="val 5555"/>
+            </a:avLst>
+          </a:prstGeom>
+          <a:solidFill>
+            <a:srgbClr val="FDEAE3"/>
+          </a:solidFill>
+          <a:ln w="12700">
+            <a:solidFill>
+              <a:srgbClr val="E94D1C"/>
+            </a:solidFill>
+          </a:ln>
+          <a:effectLst/>
+        </p:spPr>
+        <p:style>
+          <a:lnRef idx="1">
+            <a:schemeClr val="accent1"/>
+          </a:lnRef>
+          <a:fillRef idx="3">
+            <a:schemeClr val="accent1"/>
+          </a:fillRef>
+          <a:effectRef idx="2">
+            <a:schemeClr val="accent1"/>
+          </a:effectRef>
+          <a:fontRef idx="minor">
+            <a:schemeClr val="lt1"/>
+          </a:fontRef>
+        </p:style>
+        <p:txBody>
+          <a:bodyPr rtlCol="0" anchor="ctr" wrap="square" lIns="0" rIns="0" tIns="0" bIns="0"/>
+          <a:lstStyle/>
+          <a:p>
+            <a:pPr algn="ctr"/>
+          </a:p>
+        </p:txBody>
+      </p:sp>
+      <p:sp>
+        <p:nvSpPr>
+          <p:cNvPr id="24" name="TextBox 23"/>
+          <p:cNvSpPr txBox="1"/>
+          <p:nvPr/>
+        </p:nvSpPr>
+        <p:spPr>
+          <a:xfrm>
+            <a:off x="4095750" y="3086100"/>
+            <a:ext cx="1428750" cy="182880"/>
+          </a:xfrm>
+          <a:prstGeom prst="rect">
+            <a:avLst/>
+          </a:prstGeom>
+          <a:noFill/>
+        </p:spPr>
+        <p:txBody>
+          <a:bodyPr wrap="square" lIns="0" rIns="0" tIns="0" bIns="0" anchor="t">
+            <a:spAutoFit/>
+          </a:bodyPr>
+          <a:lstStyle/>
+          <a:p>
+            <a:pPr algn="ctr">
+              <a:lnSpc>
+                <a:spcPct val="120000"/>
+              </a:lnSpc>
+            </a:pPr>
+            <a:r>
+              <a:rPr sz="900" b="1" i="0">
+                <a:solidFill>
+                  <a:srgbClr val="E94D1C"/>
+                </a:solidFill>
+                <a:latin typeface="Roboto"/>
+              </a:rPr>
+              <a:t>SO convidado</a:t>
+            </a:r>
+          </a:p>
+        </p:txBody>
+      </p:sp>
+      <p:sp>
+        <p:nvSpPr>
+          <p:cNvPr id="25" name="Rounded Rectangle 24"/>
+          <p:cNvSpPr/>
+          <p:nvPr/>
+        </p:nvSpPr>
+        <p:spPr>
+          <a:xfrm>
+            <a:off x="4095750" y="2705100"/>
+            <a:ext cx="1428750" cy="266700"/>
+          </a:xfrm>
+          <a:prstGeom prst="roundRect">
+            <a:avLst>
+              <a:gd name="adj" fmla="val 7142"/>
+            </a:avLst>
+          </a:prstGeom>
+          <a:solidFill>
+            <a:srgbClr val="FFFFFF"/>
+          </a:solidFill>
+          <a:ln w="12700">
+            <a:solidFill>
+              <a:srgbClr val="D9D9D9"/>
+            </a:solidFill>
+          </a:ln>
+          <a:effectLst/>
+        </p:spPr>
+        <p:style>
+          <a:lnRef idx="1">
+            <a:schemeClr val="accent1"/>
+          </a:lnRef>
+          <a:fillRef idx="3">
+            <a:schemeClr val="accent1"/>
+          </a:fillRef>
+          <a:effectRef idx="2">
+            <a:schemeClr val="accent1"/>
+          </a:effectRef>
+          <a:fontRef idx="minor">
+            <a:schemeClr val="lt1"/>
+          </a:fontRef>
+        </p:style>
+        <p:txBody>
+          <a:bodyPr rtlCol="0" anchor="ctr" wrap="square" lIns="0" rIns="0" tIns="0" bIns="0"/>
+          <a:lstStyle/>
+          <a:p>
+            <a:pPr algn="ctr"/>
+          </a:p>
+        </p:txBody>
+      </p:sp>
+      <p:sp>
+        <p:nvSpPr>
+          <p:cNvPr id="26" name="TextBox 25"/>
+          <p:cNvSpPr txBox="1"/>
+          <p:nvPr/>
+        </p:nvSpPr>
+        <p:spPr>
+          <a:xfrm>
+            <a:off x="4095750" y="2762250"/>
+            <a:ext cx="1428750" cy="182880"/>
+          </a:xfrm>
+          <a:prstGeom prst="rect">
+            <a:avLst/>
+          </a:prstGeom>
+          <a:noFill/>
+        </p:spPr>
+        <p:txBody>
+          <a:bodyPr wrap="square" lIns="0" rIns="0" tIns="0" bIns="0" anchor="t">
+            <a:spAutoFit/>
+          </a:bodyPr>
+          <a:lstStyle/>
+          <a:p>
+            <a:pPr algn="ctr">
+              <a:lnSpc>
+                <a:spcPct val="120000"/>
+              </a:lnSpc>
+            </a:pPr>
+            <a:r>
+              <a:rPr sz="900" b="0" i="0">
+                <a:solidFill>
+                  <a:srgbClr val="6B6B78"/>
+                </a:solidFill>
+                <a:latin typeface="Roboto"/>
+              </a:rPr>
+              <a:t>bibliotecas</a:t>
+            </a:r>
+          </a:p>
+        </p:txBody>
+      </p:sp>
+      <p:sp>
+        <p:nvSpPr>
+          <p:cNvPr id="27" name="Rounded Rectangle 26"/>
+          <p:cNvSpPr/>
+          <p:nvPr/>
+        </p:nvSpPr>
+        <p:spPr>
+          <a:xfrm>
+            <a:off x="4095750" y="2419350"/>
+            <a:ext cx="1428750" cy="266700"/>
+          </a:xfrm>
+          <a:prstGeom prst="roundRect">
+            <a:avLst>
+              <a:gd name="adj" fmla="val 7142"/>
+            </a:avLst>
+          </a:prstGeom>
+          <a:solidFill>
+            <a:srgbClr val="FFFFFF"/>
+          </a:solidFill>
+          <a:ln w="12700">
+            <a:solidFill>
+              <a:srgbClr val="21049A"/>
+            </a:solidFill>
+          </a:ln>
+          <a:effectLst/>
+        </p:spPr>
+        <p:style>
+          <a:lnRef idx="1">
+            <a:schemeClr val="accent1"/>
+          </a:lnRef>
+          <a:fillRef idx="3">
+            <a:schemeClr val="accent1"/>
+          </a:fillRef>
+          <a:effectRef idx="2">
+            <a:schemeClr val="accent1"/>
+          </a:effectRef>
+          <a:fontRef idx="minor">
+            <a:schemeClr val="lt1"/>
+          </a:fontRef>
+        </p:style>
+        <p:txBody>
+          <a:bodyPr rtlCol="0" anchor="ctr" wrap="square" lIns="0" rIns="0" tIns="0" bIns="0"/>
+          <a:lstStyle/>
+          <a:p>
+            <a:pPr algn="ctr"/>
+          </a:p>
+        </p:txBody>
+      </p:sp>
+      <p:sp>
+        <p:nvSpPr>
+          <p:cNvPr id="28" name="TextBox 27"/>
+          <p:cNvSpPr txBox="1"/>
+          <p:nvPr/>
+        </p:nvSpPr>
+        <p:spPr>
+          <a:xfrm>
+            <a:off x="4095750" y="2476500"/>
+            <a:ext cx="1428750" cy="182880"/>
+          </a:xfrm>
+          <a:prstGeom prst="rect">
+            <a:avLst/>
+          </a:prstGeom>
+          <a:noFill/>
+        </p:spPr>
+        <p:txBody>
+          <a:bodyPr wrap="square" lIns="0" rIns="0" tIns="0" bIns="0" anchor="t">
+            <a:spAutoFit/>
+          </a:bodyPr>
+          <a:lstStyle/>
+          <a:p>
+            <a:pPr algn="ctr">
+              <a:lnSpc>
+                <a:spcPct val="120000"/>
+              </a:lnSpc>
+            </a:pPr>
+            <a:r>
+              <a:rPr sz="900" b="1" i="0">
+                <a:solidFill>
+                  <a:srgbClr val="21049A"/>
+                </a:solidFill>
+                <a:latin typeface="Roboto"/>
+              </a:rPr>
+              <a:t>app C</a:t>
+            </a:r>
+          </a:p>
+        </p:txBody>
+      </p:sp>
+      <p:sp>
+        <p:nvSpPr>
+          <p:cNvPr id="29" name="TextBox 28"/>
+          <p:cNvSpPr txBox="1"/>
+          <p:nvPr/>
+        </p:nvSpPr>
+        <p:spPr>
+          <a:xfrm>
+            <a:off x="6572250" y="2114550"/>
+            <a:ext cx="4762500" cy="182880"/>
+          </a:xfrm>
+          <a:prstGeom prst="rect">
+            <a:avLst/>
+          </a:prstGeom>
+          <a:noFill/>
+        </p:spPr>
+        <p:txBody>
+          <a:bodyPr wrap="square" lIns="0" rIns="0" tIns="0" bIns="0" anchor="t">
+            <a:spAutoFit/>
+          </a:bodyPr>
+          <a:lstStyle/>
+          <a:p>
+            <a:pPr algn="l">
+              <a:lnSpc>
+                <a:spcPct val="120000"/>
+              </a:lnSpc>
+            </a:pPr>
+            <a:r>
+              <a:rPr sz="900" b="1" i="0" spc="140">
+                <a:solidFill>
+                  <a:srgbClr val="E94D1C"/>
+                </a:solidFill>
+                <a:latin typeface="Roboto"/>
+              </a:rPr>
+              <a:t>CONTAINER</a:t>
+            </a:r>
+          </a:p>
+        </p:txBody>
+      </p:sp>
+      <p:sp>
+        <p:nvSpPr>
+          <p:cNvPr id="30" name="Rectangle 29"/>
+          <p:cNvSpPr/>
+          <p:nvPr/>
+        </p:nvSpPr>
+        <p:spPr>
+          <a:xfrm>
+            <a:off x="6572250" y="4076700"/>
+            <a:ext cx="4762500" cy="323850"/>
+          </a:xfrm>
+          <a:prstGeom prst="rect">
+            <a:avLst/>
+          </a:prstGeom>
+          <a:solidFill>
+            <a:srgbClr val="D9D9D9"/>
+          </a:solidFill>
+          <a:ln>
+            <a:noFill/>
+          </a:ln>
+          <a:effectLst/>
+        </p:spPr>
+        <p:style>
+          <a:lnRef idx="1">
+            <a:schemeClr val="accent1"/>
+          </a:lnRef>
+          <a:fillRef idx="3">
+            <a:schemeClr val="accent1"/>
+          </a:fillRef>
+          <a:effectRef idx="2">
+            <a:schemeClr val="accent1"/>
+          </a:effectRef>
+          <a:fontRef idx="minor">
+            <a:schemeClr val="lt1"/>
+          </a:fontRef>
+        </p:style>
+        <p:txBody>
+          <a:bodyPr rtlCol="0" anchor="ctr" wrap="square" lIns="0" rIns="0" tIns="0" bIns="0"/>
+          <a:lstStyle/>
+          <a:p>
+            <a:pPr algn="ctr"/>
+          </a:p>
+        </p:txBody>
+      </p:sp>
+      <p:sp>
+        <p:nvSpPr>
+          <p:cNvPr id="31" name="TextBox 30"/>
+          <p:cNvSpPr txBox="1"/>
+          <p:nvPr/>
+        </p:nvSpPr>
+        <p:spPr>
+          <a:xfrm>
+            <a:off x="6572250" y="4162425"/>
+            <a:ext cx="4762500" cy="198120"/>
+          </a:xfrm>
+          <a:prstGeom prst="rect">
+            <a:avLst/>
+          </a:prstGeom>
+          <a:noFill/>
+        </p:spPr>
+        <p:txBody>
+          <a:bodyPr wrap="square" lIns="0" rIns="0" tIns="0" bIns="0" anchor="t">
+            <a:spAutoFit/>
+          </a:bodyPr>
+          <a:lstStyle/>
+          <a:p>
+            <a:pPr algn="ctr">
+              <a:lnSpc>
+                <a:spcPct val="120000"/>
+              </a:lnSpc>
+            </a:pPr>
+            <a:r>
+              <a:rPr sz="980" b="0" i="0">
+                <a:solidFill>
+                  <a:srgbClr val="1A1A1E"/>
+                </a:solidFill>
+                <a:latin typeface="Roboto"/>
+              </a:rPr>
+              <a:t>hardware</a:t>
+            </a:r>
+          </a:p>
+        </p:txBody>
+      </p:sp>
+      <p:sp>
+        <p:nvSpPr>
+          <p:cNvPr id="32" name="Rectangle 31"/>
+          <p:cNvSpPr/>
+          <p:nvPr/>
+        </p:nvSpPr>
+        <p:spPr>
+          <a:xfrm>
+            <a:off x="6572250" y="3714750"/>
+            <a:ext cx="4762500" cy="342900"/>
+          </a:xfrm>
+          <a:prstGeom prst="rect">
+            <a:avLst/>
+          </a:prstGeom>
+          <a:solidFill>
+            <a:srgbClr val="F2F2F5"/>
+          </a:solidFill>
+          <a:ln w="12700">
+            <a:solidFill>
+              <a:srgbClr val="D9D9D9"/>
+            </a:solidFill>
+          </a:ln>
+          <a:effectLst/>
+        </p:spPr>
+        <p:style>
+          <a:lnRef idx="1">
+            <a:schemeClr val="accent1"/>
+          </a:lnRef>
+          <a:fillRef idx="3">
+            <a:schemeClr val="accent1"/>
+          </a:fillRef>
+          <a:effectRef idx="2">
+            <a:schemeClr val="accent1"/>
+          </a:effectRef>
+          <a:fontRef idx="minor">
+            <a:schemeClr val="lt1"/>
+          </a:fontRef>
+        </p:style>
+        <p:txBody>
+          <a:bodyPr rtlCol="0" anchor="ctr" wrap="square" lIns="0" rIns="0" tIns="0" bIns="0"/>
+          <a:lstStyle/>
+          <a:p>
+            <a:pPr algn="ctr"/>
+          </a:p>
+        </p:txBody>
+      </p:sp>
+      <p:sp>
+        <p:nvSpPr>
+          <p:cNvPr id="33" name="TextBox 32"/>
+          <p:cNvSpPr txBox="1"/>
+          <p:nvPr/>
+        </p:nvSpPr>
+        <p:spPr>
+          <a:xfrm>
+            <a:off x="6572250" y="3810000"/>
+            <a:ext cx="4762500" cy="198120"/>
+          </a:xfrm>
+          <a:prstGeom prst="rect">
+            <a:avLst/>
+          </a:prstGeom>
+          <a:noFill/>
+        </p:spPr>
+        <p:txBody>
+          <a:bodyPr wrap="square" lIns="0" rIns="0" tIns="0" bIns="0" anchor="t">
+            <a:spAutoFit/>
+          </a:bodyPr>
+          <a:lstStyle/>
+          <a:p>
+            <a:pPr algn="ctr">
+              <a:lnSpc>
+                <a:spcPct val="120000"/>
+              </a:lnSpc>
+            </a:pPr>
+            <a:r>
+              <a:rPr sz="980" b="0" i="0">
+                <a:solidFill>
+                  <a:srgbClr val="1A1A1E"/>
+                </a:solidFill>
+                <a:latin typeface="Roboto"/>
+              </a:rPr>
+              <a:t>kernel do host, compartilhado por todos</a:t>
+            </a:r>
+          </a:p>
+        </p:txBody>
+      </p:sp>
+      <p:sp>
+        <p:nvSpPr>
+          <p:cNvPr id="34" name="Rectangle 33"/>
+          <p:cNvSpPr/>
+          <p:nvPr/>
+        </p:nvSpPr>
+        <p:spPr>
+          <a:xfrm>
+            <a:off x="6572250" y="3352800"/>
+            <a:ext cx="4762500" cy="342900"/>
+          </a:xfrm>
+          <a:prstGeom prst="rect">
+            <a:avLst/>
+          </a:prstGeom>
+          <a:solidFill>
+            <a:srgbClr val="21049A"/>
+          </a:solidFill>
+          <a:ln>
+            <a:noFill/>
+          </a:ln>
+          <a:effectLst/>
+        </p:spPr>
+        <p:style>
+          <a:lnRef idx="1">
+            <a:schemeClr val="accent1"/>
+          </a:lnRef>
+          <a:fillRef idx="3">
+            <a:schemeClr val="accent1"/>
+          </a:fillRef>
+          <a:effectRef idx="2">
+            <a:schemeClr val="accent1"/>
+          </a:effectRef>
+          <a:fontRef idx="minor">
+            <a:schemeClr val="lt1"/>
+          </a:fontRef>
+        </p:style>
+        <p:txBody>
+          <a:bodyPr rtlCol="0" anchor="ctr" wrap="square" lIns="0" rIns="0" tIns="0" bIns="0"/>
+          <a:lstStyle/>
+          <a:p>
+            <a:pPr algn="ctr"/>
+          </a:p>
+        </p:txBody>
+      </p:sp>
+      <p:sp>
+        <p:nvSpPr>
+          <p:cNvPr id="35" name="TextBox 34"/>
+          <p:cNvSpPr txBox="1"/>
+          <p:nvPr/>
+        </p:nvSpPr>
+        <p:spPr>
+          <a:xfrm>
+            <a:off x="6572250" y="3448050"/>
+            <a:ext cx="4762500" cy="198120"/>
+          </a:xfrm>
+          <a:prstGeom prst="rect">
+            <a:avLst/>
+          </a:prstGeom>
+          <a:noFill/>
+        </p:spPr>
+        <p:txBody>
+          <a:bodyPr wrap="square" lIns="0" rIns="0" tIns="0" bIns="0" anchor="t">
+            <a:spAutoFit/>
+          </a:bodyPr>
+          <a:lstStyle/>
+          <a:p>
+            <a:pPr algn="ctr">
+              <a:lnSpc>
+                <a:spcPct val="120000"/>
+              </a:lnSpc>
+            </a:pPr>
+            <a:r>
+              <a:rPr sz="980" b="1" i="0">
+                <a:solidFill>
+                  <a:srgbClr val="FFFFFF"/>
+                </a:solidFill>
+                <a:latin typeface="Roboto"/>
+              </a:rPr>
+              <a:t>Docker Engine</a:t>
+            </a:r>
+          </a:p>
+        </p:txBody>
+      </p:sp>
+      <p:sp>
+        <p:nvSpPr>
+          <p:cNvPr id="36" name="Rounded Rectangle 35"/>
+          <p:cNvSpPr/>
+          <p:nvPr/>
+        </p:nvSpPr>
+        <p:spPr>
+          <a:xfrm>
+            <a:off x="6667500" y="3048000"/>
+            <a:ext cx="1428750" cy="266700"/>
+          </a:xfrm>
+          <a:prstGeom prst="roundRect">
+            <a:avLst>
+              <a:gd name="adj" fmla="val 7142"/>
+            </a:avLst>
+          </a:prstGeom>
+          <a:solidFill>
+            <a:srgbClr val="FFFFFF"/>
+          </a:solidFill>
+          <a:ln w="12700">
+            <a:solidFill>
+              <a:srgbClr val="D9D9D9"/>
+            </a:solidFill>
+          </a:ln>
+          <a:effectLst/>
+        </p:spPr>
+        <p:style>
+          <a:lnRef idx="1">
+            <a:schemeClr val="accent1"/>
+          </a:lnRef>
+          <a:fillRef idx="3">
+            <a:schemeClr val="accent1"/>
+          </a:fillRef>
+          <a:effectRef idx="2">
+            <a:schemeClr val="accent1"/>
+          </a:effectRef>
+          <a:fontRef idx="minor">
+            <a:schemeClr val="lt1"/>
+          </a:fontRef>
+        </p:style>
+        <p:txBody>
+          <a:bodyPr rtlCol="0" anchor="ctr" wrap="square" lIns="0" rIns="0" tIns="0" bIns="0"/>
+          <a:lstStyle/>
+          <a:p>
+            <a:pPr algn="ctr"/>
+          </a:p>
+        </p:txBody>
+      </p:sp>
+      <p:sp>
+        <p:nvSpPr>
+          <p:cNvPr id="37" name="TextBox 36"/>
+          <p:cNvSpPr txBox="1"/>
+          <p:nvPr/>
+        </p:nvSpPr>
+        <p:spPr>
+          <a:xfrm>
+            <a:off x="6667500" y="3105150"/>
+            <a:ext cx="1428750" cy="182880"/>
+          </a:xfrm>
+          <a:prstGeom prst="rect">
+            <a:avLst/>
+          </a:prstGeom>
+          <a:noFill/>
+        </p:spPr>
+        <p:txBody>
+          <a:bodyPr wrap="square" lIns="0" rIns="0" tIns="0" bIns="0" anchor="t">
+            <a:spAutoFit/>
+          </a:bodyPr>
+          <a:lstStyle/>
+          <a:p>
+            <a:pPr algn="ctr">
+              <a:lnSpc>
+                <a:spcPct val="120000"/>
+              </a:lnSpc>
+            </a:pPr>
+            <a:r>
+              <a:rPr sz="900" b="0" i="0">
+                <a:solidFill>
+                  <a:srgbClr val="6B6B78"/>
+                </a:solidFill>
+                <a:latin typeface="Roboto"/>
+              </a:rPr>
+              <a:t>bibliotecas</a:t>
+            </a:r>
+          </a:p>
+        </p:txBody>
+      </p:sp>
+      <p:sp>
+        <p:nvSpPr>
+          <p:cNvPr id="38" name="Rounded Rectangle 37"/>
+          <p:cNvSpPr/>
+          <p:nvPr/>
+        </p:nvSpPr>
+        <p:spPr>
+          <a:xfrm>
+            <a:off x="6667500" y="2762250"/>
+            <a:ext cx="1428750" cy="266700"/>
+          </a:xfrm>
+          <a:prstGeom prst="roundRect">
+            <a:avLst>
+              <a:gd name="adj" fmla="val 7142"/>
+            </a:avLst>
+          </a:prstGeom>
+          <a:solidFill>
+            <a:srgbClr val="FFFFFF"/>
+          </a:solidFill>
+          <a:ln w="12700">
+            <a:solidFill>
+              <a:srgbClr val="21049A"/>
+            </a:solidFill>
+          </a:ln>
+          <a:effectLst/>
+        </p:spPr>
+        <p:style>
+          <a:lnRef idx="1">
+            <a:schemeClr val="accent1"/>
+          </a:lnRef>
+          <a:fillRef idx="3">
+            <a:schemeClr val="accent1"/>
+          </a:fillRef>
+          <a:effectRef idx="2">
+            <a:schemeClr val="accent1"/>
+          </a:effectRef>
+          <a:fontRef idx="minor">
+            <a:schemeClr val="lt1"/>
+          </a:fontRef>
+        </p:style>
+        <p:txBody>
+          <a:bodyPr rtlCol="0" anchor="ctr" wrap="square" lIns="0" rIns="0" tIns="0" bIns="0"/>
+          <a:lstStyle/>
+          <a:p>
+            <a:pPr algn="ctr"/>
+          </a:p>
+        </p:txBody>
+      </p:sp>
+      <p:sp>
+        <p:nvSpPr>
+          <p:cNvPr id="39" name="TextBox 38"/>
+          <p:cNvSpPr txBox="1"/>
+          <p:nvPr/>
+        </p:nvSpPr>
+        <p:spPr>
+          <a:xfrm>
+            <a:off x="6667500" y="2819400"/>
+            <a:ext cx="1428750" cy="182880"/>
+          </a:xfrm>
+          <a:prstGeom prst="rect">
+            <a:avLst/>
+          </a:prstGeom>
+          <a:noFill/>
+        </p:spPr>
+        <p:txBody>
+          <a:bodyPr wrap="square" lIns="0" rIns="0" tIns="0" bIns="0" anchor="t">
+            <a:spAutoFit/>
+          </a:bodyPr>
+          <a:lstStyle/>
+          <a:p>
+            <a:pPr algn="ctr">
+              <a:lnSpc>
+                <a:spcPct val="120000"/>
+              </a:lnSpc>
+            </a:pPr>
+            <a:r>
+              <a:rPr sz="900" b="1" i="0">
+                <a:solidFill>
+                  <a:srgbClr val="21049A"/>
+                </a:solidFill>
+                <a:latin typeface="Roboto"/>
+              </a:rPr>
+              <a:t>app A</a:t>
+            </a:r>
+          </a:p>
+        </p:txBody>
+      </p:sp>
+      <p:sp>
+        <p:nvSpPr>
+          <p:cNvPr id="40" name="Rounded Rectangle 39"/>
+          <p:cNvSpPr/>
+          <p:nvPr/>
+        </p:nvSpPr>
+        <p:spPr>
+          <a:xfrm>
+            <a:off x="8239125" y="3048000"/>
+            <a:ext cx="1428750" cy="266700"/>
+          </a:xfrm>
+          <a:prstGeom prst="roundRect">
+            <a:avLst>
+              <a:gd name="adj" fmla="val 7142"/>
+            </a:avLst>
+          </a:prstGeom>
+          <a:solidFill>
+            <a:srgbClr val="FFFFFF"/>
+          </a:solidFill>
+          <a:ln w="12700">
+            <a:solidFill>
+              <a:srgbClr val="D9D9D9"/>
+            </a:solidFill>
+          </a:ln>
+          <a:effectLst/>
+        </p:spPr>
+        <p:style>
+          <a:lnRef idx="1">
+            <a:schemeClr val="accent1"/>
+          </a:lnRef>
+          <a:fillRef idx="3">
+            <a:schemeClr val="accent1"/>
+          </a:fillRef>
+          <a:effectRef idx="2">
+            <a:schemeClr val="accent1"/>
+          </a:effectRef>
+          <a:fontRef idx="minor">
+            <a:schemeClr val="lt1"/>
+          </a:fontRef>
+        </p:style>
+        <p:txBody>
+          <a:bodyPr rtlCol="0" anchor="ctr" wrap="square" lIns="0" rIns="0" tIns="0" bIns="0"/>
+          <a:lstStyle/>
+          <a:p>
+            <a:pPr algn="ctr"/>
+          </a:p>
+        </p:txBody>
+      </p:sp>
+      <p:sp>
+        <p:nvSpPr>
+          <p:cNvPr id="41" name="TextBox 40"/>
+          <p:cNvSpPr txBox="1"/>
+          <p:nvPr/>
+        </p:nvSpPr>
+        <p:spPr>
+          <a:xfrm>
+            <a:off x="8239125" y="3105150"/>
+            <a:ext cx="1428750" cy="182880"/>
+          </a:xfrm>
+          <a:prstGeom prst="rect">
+            <a:avLst/>
+          </a:prstGeom>
+          <a:noFill/>
+        </p:spPr>
+        <p:txBody>
+          <a:bodyPr wrap="square" lIns="0" rIns="0" tIns="0" bIns="0" anchor="t">
+            <a:spAutoFit/>
+          </a:bodyPr>
+          <a:lstStyle/>
+          <a:p>
+            <a:pPr algn="ctr">
+              <a:lnSpc>
+                <a:spcPct val="120000"/>
+              </a:lnSpc>
+            </a:pPr>
+            <a:r>
+              <a:rPr sz="900" b="0" i="0">
+                <a:solidFill>
+                  <a:srgbClr val="6B6B78"/>
+                </a:solidFill>
+                <a:latin typeface="Roboto"/>
+              </a:rPr>
+              <a:t>bibliotecas</a:t>
+            </a:r>
+          </a:p>
+        </p:txBody>
+      </p:sp>
+      <p:sp>
+        <p:nvSpPr>
+          <p:cNvPr id="42" name="Rounded Rectangle 41"/>
+          <p:cNvSpPr/>
+          <p:nvPr/>
+        </p:nvSpPr>
+        <p:spPr>
+          <a:xfrm>
+            <a:off x="8239125" y="2762250"/>
+            <a:ext cx="1428750" cy="266700"/>
+          </a:xfrm>
+          <a:prstGeom prst="roundRect">
+            <a:avLst>
+              <a:gd name="adj" fmla="val 7142"/>
+            </a:avLst>
+          </a:prstGeom>
+          <a:solidFill>
+            <a:srgbClr val="FFFFFF"/>
+          </a:solidFill>
+          <a:ln w="12700">
+            <a:solidFill>
+              <a:srgbClr val="21049A"/>
+            </a:solidFill>
+          </a:ln>
+          <a:effectLst/>
+        </p:spPr>
+        <p:style>
+          <a:lnRef idx="1">
+            <a:schemeClr val="accent1"/>
+          </a:lnRef>
+          <a:fillRef idx="3">
+            <a:schemeClr val="accent1"/>
+          </a:fillRef>
+          <a:effectRef idx="2">
+            <a:schemeClr val="accent1"/>
+          </a:effectRef>
+          <a:fontRef idx="minor">
+            <a:schemeClr val="lt1"/>
+          </a:fontRef>
+        </p:style>
+        <p:txBody>
+          <a:bodyPr rtlCol="0" anchor="ctr" wrap="square" lIns="0" rIns="0" tIns="0" bIns="0"/>
+          <a:lstStyle/>
+          <a:p>
+            <a:pPr algn="ctr"/>
+          </a:p>
+        </p:txBody>
+      </p:sp>
+      <p:sp>
+        <p:nvSpPr>
+          <p:cNvPr id="43" name="TextBox 42"/>
+          <p:cNvSpPr txBox="1"/>
+          <p:nvPr/>
+        </p:nvSpPr>
+        <p:spPr>
+          <a:xfrm>
+            <a:off x="8239125" y="2819400"/>
+            <a:ext cx="1428750" cy="182880"/>
+          </a:xfrm>
+          <a:prstGeom prst="rect">
+            <a:avLst/>
+          </a:prstGeom>
+          <a:noFill/>
+        </p:spPr>
+        <p:txBody>
+          <a:bodyPr wrap="square" lIns="0" rIns="0" tIns="0" bIns="0" anchor="t">
+            <a:spAutoFit/>
+          </a:bodyPr>
+          <a:lstStyle/>
+          <a:p>
+            <a:pPr algn="ctr">
+              <a:lnSpc>
+                <a:spcPct val="120000"/>
+              </a:lnSpc>
+            </a:pPr>
+            <a:r>
+              <a:rPr sz="900" b="1" i="0">
+                <a:solidFill>
+                  <a:srgbClr val="21049A"/>
+                </a:solidFill>
+                <a:latin typeface="Roboto"/>
+              </a:rPr>
+              <a:t>app B</a:t>
+            </a:r>
+          </a:p>
+        </p:txBody>
+      </p:sp>
+      <p:sp>
+        <p:nvSpPr>
+          <p:cNvPr id="44" name="Rounded Rectangle 43"/>
+          <p:cNvSpPr/>
+          <p:nvPr/>
+        </p:nvSpPr>
+        <p:spPr>
+          <a:xfrm>
+            <a:off x="9810750" y="3048000"/>
+            <a:ext cx="1428750" cy="266700"/>
+          </a:xfrm>
+          <a:prstGeom prst="roundRect">
+            <a:avLst>
+              <a:gd name="adj" fmla="val 7142"/>
+            </a:avLst>
+          </a:prstGeom>
+          <a:solidFill>
+            <a:srgbClr val="FFFFFF"/>
+          </a:solidFill>
+          <a:ln w="12700">
+            <a:solidFill>
+              <a:srgbClr val="D9D9D9"/>
+            </a:solidFill>
+          </a:ln>
+          <a:effectLst/>
+        </p:spPr>
+        <p:style>
+          <a:lnRef idx="1">
+            <a:schemeClr val="accent1"/>
+          </a:lnRef>
+          <a:fillRef idx="3">
+            <a:schemeClr val="accent1"/>
+          </a:fillRef>
+          <a:effectRef idx="2">
+            <a:schemeClr val="accent1"/>
+          </a:effectRef>
+          <a:fontRef idx="minor">
+            <a:schemeClr val="lt1"/>
+          </a:fontRef>
+        </p:style>
+        <p:txBody>
+          <a:bodyPr rtlCol="0" anchor="ctr" wrap="square" lIns="0" rIns="0" tIns="0" bIns="0"/>
+          <a:lstStyle/>
+          <a:p>
+            <a:pPr algn="ctr"/>
+          </a:p>
+        </p:txBody>
+      </p:sp>
+      <p:sp>
+        <p:nvSpPr>
+          <p:cNvPr id="45" name="TextBox 44"/>
+          <p:cNvSpPr txBox="1"/>
+          <p:nvPr/>
+        </p:nvSpPr>
+        <p:spPr>
+          <a:xfrm>
+            <a:off x="9810750" y="3105150"/>
+            <a:ext cx="1428750" cy="182880"/>
+          </a:xfrm>
+          <a:prstGeom prst="rect">
+            <a:avLst/>
+          </a:prstGeom>
+          <a:noFill/>
+        </p:spPr>
+        <p:txBody>
+          <a:bodyPr wrap="square" lIns="0" rIns="0" tIns="0" bIns="0" anchor="t">
+            <a:spAutoFit/>
+          </a:bodyPr>
+          <a:lstStyle/>
+          <a:p>
+            <a:pPr algn="ctr">
+              <a:lnSpc>
+                <a:spcPct val="120000"/>
+              </a:lnSpc>
+            </a:pPr>
+            <a:r>
+              <a:rPr sz="900" b="0" i="0">
+                <a:solidFill>
+                  <a:srgbClr val="6B6B78"/>
+                </a:solidFill>
+                <a:latin typeface="Roboto"/>
+              </a:rPr>
+              <a:t>bibliotecas</a:t>
+            </a:r>
+          </a:p>
+        </p:txBody>
+      </p:sp>
+      <p:sp>
+        <p:nvSpPr>
+          <p:cNvPr id="46" name="Rounded Rectangle 45"/>
+          <p:cNvSpPr/>
+          <p:nvPr/>
+        </p:nvSpPr>
+        <p:spPr>
+          <a:xfrm>
+            <a:off x="9810750" y="2762250"/>
+            <a:ext cx="1428750" cy="266700"/>
+          </a:xfrm>
+          <a:prstGeom prst="roundRect">
+            <a:avLst>
+              <a:gd name="adj" fmla="val 7142"/>
+            </a:avLst>
+          </a:prstGeom>
+          <a:solidFill>
+            <a:srgbClr val="FFFFFF"/>
+          </a:solidFill>
+          <a:ln w="12700">
+            <a:solidFill>
+              <a:srgbClr val="21049A"/>
+            </a:solidFill>
+          </a:ln>
+          <a:effectLst/>
+        </p:spPr>
+        <p:style>
+          <a:lnRef idx="1">
+            <a:schemeClr val="accent1"/>
+          </a:lnRef>
+          <a:fillRef idx="3">
+            <a:schemeClr val="accent1"/>
+          </a:fillRef>
+          <a:effectRef idx="2">
+            <a:schemeClr val="accent1"/>
+          </a:effectRef>
+          <a:fontRef idx="minor">
+            <a:schemeClr val="lt1"/>
+          </a:fontRef>
+        </p:style>
+        <p:txBody>
+          <a:bodyPr rtlCol="0" anchor="ctr" wrap="square" lIns="0" rIns="0" tIns="0" bIns="0"/>
+          <a:lstStyle/>
+          <a:p>
+            <a:pPr algn="ctr"/>
+          </a:p>
+        </p:txBody>
+      </p:sp>
+      <p:sp>
+        <p:nvSpPr>
+          <p:cNvPr id="47" name="TextBox 46"/>
+          <p:cNvSpPr txBox="1"/>
+          <p:nvPr/>
+        </p:nvSpPr>
+        <p:spPr>
+          <a:xfrm>
+            <a:off x="9810750" y="2819400"/>
+            <a:ext cx="1428750" cy="182880"/>
+          </a:xfrm>
+          <a:prstGeom prst="rect">
+            <a:avLst/>
+          </a:prstGeom>
+          <a:noFill/>
+        </p:spPr>
+        <p:txBody>
+          <a:bodyPr wrap="square" lIns="0" rIns="0" tIns="0" bIns="0" anchor="t">
+            <a:spAutoFit/>
+          </a:bodyPr>
+          <a:lstStyle/>
+          <a:p>
+            <a:pPr algn="ctr">
+              <a:lnSpc>
+                <a:spcPct val="120000"/>
+              </a:lnSpc>
+            </a:pPr>
+            <a:r>
+              <a:rPr sz="900" b="1" i="0">
+                <a:solidFill>
+                  <a:srgbClr val="21049A"/>
+                </a:solidFill>
+                <a:latin typeface="Roboto"/>
+              </a:rPr>
+              <a:t>app C</a:t>
+            </a:r>
+          </a:p>
+        </p:txBody>
+      </p:sp>
+      <p:sp>
+        <p:nvSpPr>
+          <p:cNvPr id="48" name="TextBox 47"/>
+          <p:cNvSpPr txBox="1"/>
+          <p:nvPr/>
+        </p:nvSpPr>
+        <p:spPr>
+          <a:xfrm>
+            <a:off x="857250" y="4514850"/>
+            <a:ext cx="4762500" cy="476250"/>
+          </a:xfrm>
+          <a:prstGeom prst="rect">
+            <a:avLst/>
+          </a:prstGeom>
+          <a:noFill/>
+        </p:spPr>
+        <p:txBody>
+          <a:bodyPr wrap="square" lIns="0" rIns="0" tIns="0" bIns="0" anchor="t">
+            <a:spAutoFit/>
+          </a:bodyPr>
+          <a:lstStyle/>
+          <a:p>
+            <a:pPr algn="l">
+              <a:lnSpc>
+                <a:spcPct val="140000"/>
+              </a:lnSpc>
+            </a:pPr>
+            <a:r>
+              <a:rPr sz="1050" b="0" i="0">
+                <a:solidFill>
+                  <a:srgbClr val="3A3A44"/>
+                </a:solidFill>
+                <a:latin typeface="Roboto"/>
+              </a:rPr>
+              <a:t>Um kernel inteiro para cada serviço. A fronteira é imposta pelo hardware.</a:t>
+            </a:r>
+          </a:p>
+        </p:txBody>
+      </p:sp>
+      <p:sp>
+        <p:nvSpPr>
+          <p:cNvPr id="49" name="TextBox 48"/>
+          <p:cNvSpPr txBox="1"/>
+          <p:nvPr/>
+        </p:nvSpPr>
+        <p:spPr>
+          <a:xfrm>
+            <a:off x="6572250" y="4514850"/>
+            <a:ext cx="4762500" cy="476250"/>
+          </a:xfrm>
+          <a:prstGeom prst="rect">
+            <a:avLst/>
+          </a:prstGeom>
+          <a:noFill/>
+        </p:spPr>
+        <p:txBody>
+          <a:bodyPr wrap="square" lIns="0" rIns="0" tIns="0" bIns="0" anchor="t">
+            <a:spAutoFit/>
+          </a:bodyPr>
+          <a:lstStyle/>
+          <a:p>
+            <a:pPr algn="l">
+              <a:lnSpc>
+                <a:spcPct val="140000"/>
+              </a:lnSpc>
+            </a:pPr>
+            <a:r>
+              <a:rPr sz="1050" b="0" i="0">
+                <a:solidFill>
+                  <a:srgbClr val="3A3A44"/>
+                </a:solidFill>
+                <a:latin typeface="Roboto"/>
+              </a:rPr>
+              <a:t>Um kernel só, dividido entre todos. A fronteira é a interface de chamadas de sistema.</a:t>
+            </a:r>
+          </a:p>
+        </p:txBody>
+      </p:sp>
+      <p:sp>
+        <p:nvSpPr>
+          <p:cNvPr id="50" name="Rectangle 49"/>
+          <p:cNvSpPr/>
+          <p:nvPr/>
+        </p:nvSpPr>
+        <p:spPr>
+          <a:xfrm>
+            <a:off x="685800" y="5676321"/>
+            <a:ext cx="28575" cy="457779"/>
           </a:xfrm>
           <a:prstGeom prst="rect">
             <a:avLst/>
@@ -23899,14 +25613,14 @@
       </p:sp>
       <p:sp>
         <p:nvSpPr>
-          <p:cNvPr id="7" name="TextBox 6"/>
+          <p:cNvPr id="51" name="TextBox 50"/>
           <p:cNvSpPr txBox="1"/>
           <p:nvPr/>
         </p:nvSpPr>
         <p:spPr>
           <a:xfrm>
-            <a:off x="971550" y="2556510"/>
-            <a:ext cx="4857750" cy="95250"/>
+            <a:off x="876300" y="5657271"/>
+            <a:ext cx="10629900" cy="591129"/>
           </a:xfrm>
           <a:prstGeom prst="rect">
             <a:avLst/>
@@ -23921,75 +25635,31 @@
           <a:p>
             <a:pPr algn="l">
               <a:lnSpc>
-                <a:spcPct val="130000"/>
-              </a:lnSpc>
-            </a:pPr>
-            <a:r>
-              <a:rPr sz="1580" b="0" i="0">
-                <a:solidFill>
-                  <a:srgbClr val="1A1A1E"/>
+                <a:spcPct val="150000"/>
+              </a:lnSpc>
+            </a:pPr>
+            <a:r>
+              <a:rPr sz="1280" b="0" i="0">
+                <a:solidFill>
+                  <a:srgbClr val="3A3A44"/>
                 </a:solidFill>
                 <a:latin typeface="Roboto"/>
               </a:rPr>
-              <a:t>A máquina virtual tem kernel próprio.</a:t>
-            </a:r>
-          </a:p>
-        </p:txBody>
-      </p:sp>
-      <p:sp>
-        <p:nvSpPr>
-          <p:cNvPr id="8" name="Rectangle 7"/>
-          <p:cNvSpPr/>
-          <p:nvPr/>
-        </p:nvSpPr>
-        <p:spPr>
-          <a:xfrm>
-            <a:off x="704850" y="3191256"/>
-            <a:ext cx="57150" cy="57150"/>
-          </a:xfrm>
-          <a:prstGeom prst="rect">
-            <a:avLst/>
-          </a:prstGeom>
-          <a:solidFill>
-            <a:srgbClr val="E94D1C"/>
-          </a:solidFill>
-          <a:ln>
-            <a:noFill/>
-          </a:ln>
-          <a:effectLst/>
-        </p:spPr>
-        <p:style>
-          <a:lnRef idx="1">
-            <a:schemeClr val="accent1"/>
-          </a:lnRef>
-          <a:fillRef idx="3">
-            <a:schemeClr val="accent1"/>
-          </a:fillRef>
-          <a:effectRef idx="2">
-            <a:schemeClr val="accent1"/>
-          </a:effectRef>
-          <a:fontRef idx="minor">
-            <a:schemeClr val="lt1"/>
-          </a:fontRef>
-        </p:style>
-        <p:txBody>
-          <a:bodyPr rtlCol="0" anchor="ctr" wrap="square" lIns="0" rIns="0" tIns="0" bIns="0"/>
-          <a:lstStyle/>
-          <a:p>
-            <a:pPr algn="ctr"/>
-          </a:p>
-        </p:txBody>
-      </p:sp>
-      <p:sp>
-        <p:nvSpPr>
-          <p:cNvPr id="9" name="TextBox 8"/>
+              <a:t>A CVE-2019-5736 mostrou o risco na prática: o processo de dentro conseguia sobrescrever o binário do runtime. Por isso o documento de decisões arquiteturais precisa registrar que container não dá o mesmo isolamento de uma máquina virtual.</a:t>
+            </a:r>
+          </a:p>
+        </p:txBody>
+      </p:sp>
+      <p:sp>
+        <p:nvSpPr>
+          <p:cNvPr id="52" name="TextBox 51"/>
           <p:cNvSpPr txBox="1"/>
           <p:nvPr/>
         </p:nvSpPr>
         <p:spPr>
           <a:xfrm>
-            <a:off x="971550" y="3087243"/>
-            <a:ext cx="4857750" cy="95250"/>
+            <a:off x="685800" y="6324600"/>
+            <a:ext cx="6667500" cy="182880"/>
           </a:xfrm>
           <a:prstGeom prst="rect">
             <a:avLst/>
@@ -24004,553 +25674,16 @@
           <a:p>
             <a:pPr algn="l">
               <a:lnSpc>
-                <a:spcPct val="130000"/>
-              </a:lnSpc>
-            </a:pPr>
-            <a:r>
-              <a:rPr sz="1580" b="0" i="0">
-                <a:solidFill>
-                  <a:srgbClr val="1A1A1E"/>
+                <a:spcPct val="120000"/>
+              </a:lnSpc>
+            </a:pPr>
+            <a:r>
+              <a:rPr sz="900" b="0" i="0">
+                <a:solidFill>
+                  <a:srgbClr val="6B6B78"/>
                 </a:solidFill>
                 <a:latin typeface="Roboto"/>
               </a:rPr>
-              <a:t>A fronteira entre ela e o host é imposta em hardware.</a:t>
-            </a:r>
-          </a:p>
-        </p:txBody>
-      </p:sp>
-      <p:sp>
-        <p:nvSpPr>
-          <p:cNvPr id="10" name="Rectangle 9"/>
-          <p:cNvSpPr/>
-          <p:nvPr/>
-        </p:nvSpPr>
-        <p:spPr>
-          <a:xfrm>
-            <a:off x="704850" y="3721989"/>
-            <a:ext cx="57150" cy="57150"/>
-          </a:xfrm>
-          <a:prstGeom prst="rect">
-            <a:avLst/>
-          </a:prstGeom>
-          <a:solidFill>
-            <a:srgbClr val="E94D1C"/>
-          </a:solidFill>
-          <a:ln>
-            <a:noFill/>
-          </a:ln>
-          <a:effectLst/>
-        </p:spPr>
-        <p:style>
-          <a:lnRef idx="1">
-            <a:schemeClr val="accent1"/>
-          </a:lnRef>
-          <a:fillRef idx="3">
-            <a:schemeClr val="accent1"/>
-          </a:fillRef>
-          <a:effectRef idx="2">
-            <a:schemeClr val="accent1"/>
-          </a:effectRef>
-          <a:fontRef idx="minor">
-            <a:schemeClr val="lt1"/>
-          </a:fontRef>
-        </p:style>
-        <p:txBody>
-          <a:bodyPr rtlCol="0" anchor="ctr" wrap="square" lIns="0" rIns="0" tIns="0" bIns="0"/>
-          <a:lstStyle/>
-          <a:p>
-            <a:pPr algn="ctr"/>
-          </a:p>
-        </p:txBody>
-      </p:sp>
-      <p:sp>
-        <p:nvSpPr>
-          <p:cNvPr id="11" name="TextBox 10"/>
-          <p:cNvSpPr txBox="1"/>
-          <p:nvPr/>
-        </p:nvSpPr>
-        <p:spPr>
-          <a:xfrm>
-            <a:off x="971550" y="3617976"/>
-            <a:ext cx="4857750" cy="95250"/>
-          </a:xfrm>
-          <a:prstGeom prst="rect">
-            <a:avLst/>
-          </a:prstGeom>
-          <a:noFill/>
-        </p:spPr>
-        <p:txBody>
-          <a:bodyPr wrap="square" lIns="0" rIns="0" tIns="0" bIns="0" anchor="t">
-            <a:spAutoFit/>
-          </a:bodyPr>
-          <a:lstStyle/>
-          <a:p>
-            <a:pPr algn="l">
-              <a:lnSpc>
-                <a:spcPct val="130000"/>
-              </a:lnSpc>
-            </a:pPr>
-            <a:r>
-              <a:rPr sz="1580" b="0" i="0">
-                <a:solidFill>
-                  <a:srgbClr val="1A1A1E"/>
-                </a:solidFill>
-                <a:latin typeface="Roboto"/>
-              </a:rPr>
-              <a:t>Por isso a superfície de ataque fica relativamente estreita.</a:t>
-            </a:r>
-          </a:p>
-        </p:txBody>
-      </p:sp>
-      <p:sp>
-        <p:nvSpPr>
-          <p:cNvPr id="12" name="TextBox 11"/>
-          <p:cNvSpPr txBox="1"/>
-          <p:nvPr/>
-        </p:nvSpPr>
-        <p:spPr>
-          <a:xfrm>
-            <a:off x="6362700" y="2061210"/>
-            <a:ext cx="5143500" cy="182880"/>
-          </a:xfrm>
-          <a:prstGeom prst="rect">
-            <a:avLst/>
-          </a:prstGeom>
-          <a:noFill/>
-        </p:spPr>
-        <p:txBody>
-          <a:bodyPr wrap="square" lIns="0" rIns="0" tIns="0" bIns="0" anchor="t">
-            <a:spAutoFit/>
-          </a:bodyPr>
-          <a:lstStyle/>
-          <a:p>
-            <a:pPr algn="l">
-              <a:lnSpc>
-                <a:spcPct val="120000"/>
-              </a:lnSpc>
-            </a:pPr>
-            <a:r>
-              <a:rPr sz="900" b="1" i="0" spc="120">
-                <a:solidFill>
-                  <a:srgbClr val="E94D1C"/>
-                </a:solidFill>
-                <a:latin typeface="Roboto"/>
-              </a:rPr>
-              <a:t>CONTAINER</a:t>
-            </a:r>
-          </a:p>
-        </p:txBody>
-      </p:sp>
-      <p:sp>
-        <p:nvSpPr>
-          <p:cNvPr id="13" name="Rectangle 12"/>
-          <p:cNvSpPr/>
-          <p:nvPr/>
-        </p:nvSpPr>
-        <p:spPr>
-          <a:xfrm>
-            <a:off x="6362700" y="2270760"/>
-            <a:ext cx="419100" cy="28575"/>
-          </a:xfrm>
-          <a:prstGeom prst="rect">
-            <a:avLst/>
-          </a:prstGeom>
-          <a:solidFill>
-            <a:srgbClr val="E94D1C"/>
-          </a:solidFill>
-          <a:ln>
-            <a:noFill/>
-          </a:ln>
-          <a:effectLst/>
-        </p:spPr>
-        <p:style>
-          <a:lnRef idx="1">
-            <a:schemeClr val="accent1"/>
-          </a:lnRef>
-          <a:fillRef idx="3">
-            <a:schemeClr val="accent1"/>
-          </a:fillRef>
-          <a:effectRef idx="2">
-            <a:schemeClr val="accent1"/>
-          </a:effectRef>
-          <a:fontRef idx="minor">
-            <a:schemeClr val="lt1"/>
-          </a:fontRef>
-        </p:style>
-        <p:txBody>
-          <a:bodyPr rtlCol="0" anchor="ctr" wrap="square" lIns="0" rIns="0" tIns="0" bIns="0"/>
-          <a:lstStyle/>
-          <a:p>
-            <a:pPr algn="ctr"/>
-          </a:p>
-        </p:txBody>
-      </p:sp>
-      <p:sp>
-        <p:nvSpPr>
-          <p:cNvPr id="14" name="Rectangle 13"/>
-          <p:cNvSpPr/>
-          <p:nvPr/>
-        </p:nvSpPr>
-        <p:spPr>
-          <a:xfrm>
-            <a:off x="6381750" y="2660523"/>
-            <a:ext cx="57150" cy="57150"/>
-          </a:xfrm>
-          <a:prstGeom prst="rect">
-            <a:avLst/>
-          </a:prstGeom>
-          <a:solidFill>
-            <a:srgbClr val="E94D1C"/>
-          </a:solidFill>
-          <a:ln>
-            <a:noFill/>
-          </a:ln>
-          <a:effectLst/>
-        </p:spPr>
-        <p:style>
-          <a:lnRef idx="1">
-            <a:schemeClr val="accent1"/>
-          </a:lnRef>
-          <a:fillRef idx="3">
-            <a:schemeClr val="accent1"/>
-          </a:fillRef>
-          <a:effectRef idx="2">
-            <a:schemeClr val="accent1"/>
-          </a:effectRef>
-          <a:fontRef idx="minor">
-            <a:schemeClr val="lt1"/>
-          </a:fontRef>
-        </p:style>
-        <p:txBody>
-          <a:bodyPr rtlCol="0" anchor="ctr" wrap="square" lIns="0" rIns="0" tIns="0" bIns="0"/>
-          <a:lstStyle/>
-          <a:p>
-            <a:pPr algn="ctr"/>
-          </a:p>
-        </p:txBody>
-      </p:sp>
-      <p:sp>
-        <p:nvSpPr>
-          <p:cNvPr id="15" name="TextBox 14"/>
-          <p:cNvSpPr txBox="1"/>
-          <p:nvPr/>
-        </p:nvSpPr>
-        <p:spPr>
-          <a:xfrm>
-            <a:off x="6648450" y="2556510"/>
-            <a:ext cx="4857750" cy="95250"/>
-          </a:xfrm>
-          <a:prstGeom prst="rect">
-            <a:avLst/>
-          </a:prstGeom>
-          <a:noFill/>
-        </p:spPr>
-        <p:txBody>
-          <a:bodyPr wrap="square" lIns="0" rIns="0" tIns="0" bIns="0" anchor="t">
-            <a:spAutoFit/>
-          </a:bodyPr>
-          <a:lstStyle/>
-          <a:p>
-            <a:pPr algn="l">
-              <a:lnSpc>
-                <a:spcPct val="130000"/>
-              </a:lnSpc>
-            </a:pPr>
-            <a:r>
-              <a:rPr sz="1580" b="0" i="0">
-                <a:solidFill>
-                  <a:srgbClr val="1A1A1E"/>
-                </a:solidFill>
-                <a:latin typeface="Roboto"/>
-              </a:rPr>
-              <a:t>O container compartilha o kernel do host.</a:t>
-            </a:r>
-          </a:p>
-        </p:txBody>
-      </p:sp>
-      <p:sp>
-        <p:nvSpPr>
-          <p:cNvPr id="16" name="Rectangle 15"/>
-          <p:cNvSpPr/>
-          <p:nvPr/>
-        </p:nvSpPr>
-        <p:spPr>
-          <a:xfrm>
-            <a:off x="6381750" y="3191256"/>
-            <a:ext cx="57150" cy="57150"/>
-          </a:xfrm>
-          <a:prstGeom prst="rect">
-            <a:avLst/>
-          </a:prstGeom>
-          <a:solidFill>
-            <a:srgbClr val="E94D1C"/>
-          </a:solidFill>
-          <a:ln>
-            <a:noFill/>
-          </a:ln>
-          <a:effectLst/>
-        </p:spPr>
-        <p:style>
-          <a:lnRef idx="1">
-            <a:schemeClr val="accent1"/>
-          </a:lnRef>
-          <a:fillRef idx="3">
-            <a:schemeClr val="accent1"/>
-          </a:fillRef>
-          <a:effectRef idx="2">
-            <a:schemeClr val="accent1"/>
-          </a:effectRef>
-          <a:fontRef idx="minor">
-            <a:schemeClr val="lt1"/>
-          </a:fontRef>
-        </p:style>
-        <p:txBody>
-          <a:bodyPr rtlCol="0" anchor="ctr" wrap="square" lIns="0" rIns="0" tIns="0" bIns="0"/>
-          <a:lstStyle/>
-          <a:p>
-            <a:pPr algn="ctr"/>
-          </a:p>
-        </p:txBody>
-      </p:sp>
-      <p:sp>
-        <p:nvSpPr>
-          <p:cNvPr id="17" name="TextBox 16"/>
-          <p:cNvSpPr txBox="1"/>
-          <p:nvPr/>
-        </p:nvSpPr>
-        <p:spPr>
-          <a:xfrm>
-            <a:off x="6648450" y="3087243"/>
-            <a:ext cx="4857750" cy="95250"/>
-          </a:xfrm>
-          <a:prstGeom prst="rect">
-            <a:avLst/>
-          </a:prstGeom>
-          <a:noFill/>
-        </p:spPr>
-        <p:txBody>
-          <a:bodyPr wrap="square" lIns="0" rIns="0" tIns="0" bIns="0" anchor="t">
-            <a:spAutoFit/>
-          </a:bodyPr>
-          <a:lstStyle/>
-          <a:p>
-            <a:pPr algn="l">
-              <a:lnSpc>
-                <a:spcPct val="130000"/>
-              </a:lnSpc>
-            </a:pPr>
-            <a:r>
-              <a:rPr sz="1580" b="0" i="0">
-                <a:solidFill>
-                  <a:srgbClr val="1A1A1E"/>
-                </a:solidFill>
-                <a:latin typeface="Roboto"/>
-              </a:rPr>
-              <a:t>A fronteira dele é a interface de chamadas de sistema, que são mais de trezentas, somadas a /proc, /sys e ioctl.</a:t>
-            </a:r>
-          </a:p>
-        </p:txBody>
-      </p:sp>
-      <p:sp>
-        <p:nvSpPr>
-          <p:cNvPr id="18" name="Rectangle 17"/>
-          <p:cNvSpPr/>
-          <p:nvPr/>
-        </p:nvSpPr>
-        <p:spPr>
-          <a:xfrm>
-            <a:off x="6381750" y="4250055"/>
-            <a:ext cx="57150" cy="57150"/>
-          </a:xfrm>
-          <a:prstGeom prst="rect">
-            <a:avLst/>
-          </a:prstGeom>
-          <a:solidFill>
-            <a:srgbClr val="E94D1C"/>
-          </a:solidFill>
-          <a:ln>
-            <a:noFill/>
-          </a:ln>
-          <a:effectLst/>
-        </p:spPr>
-        <p:style>
-          <a:lnRef idx="1">
-            <a:schemeClr val="accent1"/>
-          </a:lnRef>
-          <a:fillRef idx="3">
-            <a:schemeClr val="accent1"/>
-          </a:fillRef>
-          <a:effectRef idx="2">
-            <a:schemeClr val="accent1"/>
-          </a:effectRef>
-          <a:fontRef idx="minor">
-            <a:schemeClr val="lt1"/>
-          </a:fontRef>
-        </p:style>
-        <p:txBody>
-          <a:bodyPr rtlCol="0" anchor="ctr" wrap="square" lIns="0" rIns="0" tIns="0" bIns="0"/>
-          <a:lstStyle/>
-          <a:p>
-            <a:pPr algn="ctr"/>
-          </a:p>
-        </p:txBody>
-      </p:sp>
-      <p:sp>
-        <p:nvSpPr>
-          <p:cNvPr id="19" name="TextBox 18"/>
-          <p:cNvSpPr txBox="1"/>
-          <p:nvPr/>
-        </p:nvSpPr>
-        <p:spPr>
-          <a:xfrm>
-            <a:off x="6648450" y="4146042"/>
-            <a:ext cx="4857750" cy="95250"/>
-          </a:xfrm>
-          <a:prstGeom prst="rect">
-            <a:avLst/>
-          </a:prstGeom>
-          <a:noFill/>
-        </p:spPr>
-        <p:txBody>
-          <a:bodyPr wrap="square" lIns="0" rIns="0" tIns="0" bIns="0" anchor="t">
-            <a:spAutoFit/>
-          </a:bodyPr>
-          <a:lstStyle/>
-          <a:p>
-            <a:pPr algn="l">
-              <a:lnSpc>
-                <a:spcPct val="130000"/>
-              </a:lnSpc>
-            </a:pPr>
-            <a:r>
-              <a:rPr sz="1580" b="0" i="0">
-                <a:solidFill>
-                  <a:srgbClr val="1A1A1E"/>
-                </a:solidFill>
-                <a:latin typeface="Roboto"/>
-              </a:rPr>
-              <a:t>A CVE-2019-5736 mostrou o risco na prática, porque o processo de dentro conseguia sobrescrever o binário do runtime pelo /proc/self/exe.</a:t>
-            </a:r>
-          </a:p>
-        </p:txBody>
-      </p:sp>
-      <p:sp>
-        <p:nvSpPr>
-          <p:cNvPr id="20" name="Rectangle 19"/>
-          <p:cNvSpPr/>
-          <p:nvPr/>
-        </p:nvSpPr>
-        <p:spPr>
-          <a:xfrm>
-            <a:off x="6381750" y="5308854"/>
-            <a:ext cx="57150" cy="57150"/>
-          </a:xfrm>
-          <a:prstGeom prst="rect">
-            <a:avLst/>
-          </a:prstGeom>
-          <a:solidFill>
-            <a:srgbClr val="E94D1C"/>
-          </a:solidFill>
-          <a:ln>
-            <a:noFill/>
-          </a:ln>
-          <a:effectLst/>
-        </p:spPr>
-        <p:style>
-          <a:lnRef idx="1">
-            <a:schemeClr val="accent1"/>
-          </a:lnRef>
-          <a:fillRef idx="3">
-            <a:schemeClr val="accent1"/>
-          </a:fillRef>
-          <a:effectRef idx="2">
-            <a:schemeClr val="accent1"/>
-          </a:effectRef>
-          <a:fontRef idx="minor">
-            <a:schemeClr val="lt1"/>
-          </a:fontRef>
-        </p:style>
-        <p:txBody>
-          <a:bodyPr rtlCol="0" anchor="ctr" wrap="square" lIns="0" rIns="0" tIns="0" bIns="0"/>
-          <a:lstStyle/>
-          <a:p>
-            <a:pPr algn="ctr"/>
-          </a:p>
-        </p:txBody>
-      </p:sp>
-      <p:sp>
-        <p:nvSpPr>
-          <p:cNvPr id="21" name="TextBox 20"/>
-          <p:cNvSpPr txBox="1"/>
-          <p:nvPr/>
-        </p:nvSpPr>
-        <p:spPr>
-          <a:xfrm>
-            <a:off x="6648450" y="5204841"/>
-            <a:ext cx="4857750" cy="95250"/>
-          </a:xfrm>
-          <a:prstGeom prst="rect">
-            <a:avLst/>
-          </a:prstGeom>
-          <a:noFill/>
-        </p:spPr>
-        <p:txBody>
-          <a:bodyPr wrap="square" lIns="0" rIns="0" tIns="0" bIns="0" anchor="t">
-            <a:spAutoFit/>
-          </a:bodyPr>
-          <a:lstStyle/>
-          <a:p>
-            <a:pPr algn="l">
-              <a:lnSpc>
-                <a:spcPct val="130000"/>
-              </a:lnSpc>
-            </a:pPr>
-            <a:r>
-              <a:rPr sz="1580" b="0" i="0">
-                <a:solidFill>
-                  <a:srgbClr val="1A1A1E"/>
-                </a:solidFill>
-                <a:latin typeface="Roboto"/>
-              </a:rPr>
-              <a:t>Por isso o documento de decisões arquiteturais precisa registrar que container não dá o mesmo isolamento de uma máquina virtual.</a:t>
-            </a:r>
-          </a:p>
-        </p:txBody>
-      </p:sp>
-      <p:sp>
-        <p:nvSpPr>
-          <p:cNvPr id="22" name="TextBox 21"/>
-          <p:cNvSpPr txBox="1"/>
-          <p:nvPr/>
-        </p:nvSpPr>
-        <p:spPr>
-          <a:xfrm>
-            <a:off x="685800" y="6324600"/>
-            <a:ext cx="6667500" cy="182880"/>
-          </a:xfrm>
-          <a:prstGeom prst="rect">
-            <a:avLst/>
-          </a:prstGeom>
-          <a:noFill/>
-        </p:spPr>
-        <p:txBody>
-          <a:bodyPr wrap="square" lIns="0" rIns="0" tIns="0" bIns="0" anchor="t">
-            <a:spAutoFit/>
-          </a:bodyPr>
-          <a:lstStyle/>
-          <a:p>
-            <a:pPr algn="l">
-              <a:lnSpc>
-                <a:spcPct val="120000"/>
-              </a:lnSpc>
-            </a:pPr>
-            <a:r>
-              <a:rPr sz="900" b="0" i="0">
-                <a:solidFill>
-                  <a:srgbClr val="6B6B78"/>
-                </a:solidFill>
-                <a:latin typeface="Roboto"/>
-              </a:rPr>
               <a:t>03 · Vantagens e desvantagens</a:t>
             </a:r>
           </a:p>
@@ -24558,7 +25691,7 @@
       </p:sp>
       <p:sp>
         <p:nvSpPr>
-          <p:cNvPr id="23" name="TextBox 22"/>
+          <p:cNvPr id="53" name="TextBox 52"/>
           <p:cNvSpPr txBox="1"/>
           <p:nvPr/>
         </p:nvSpPr>
@@ -24692,7 +25825,7 @@
         </p:nvSpPr>
         <p:spPr>
           <a:xfrm>
-            <a:off x="685800" y="2864739"/>
+            <a:off x="685800" y="2702814"/>
             <a:ext cx="2190750" cy="167640"/>
           </a:xfrm>
           <a:prstGeom prst="rect">
@@ -24731,7 +25864,7 @@
         </p:nvSpPr>
         <p:spPr>
           <a:xfrm>
-            <a:off x="3048000" y="2864739"/>
+            <a:off x="3048000" y="2702814"/>
             <a:ext cx="3429000" cy="167640"/>
           </a:xfrm>
           <a:prstGeom prst="rect">
@@ -24770,7 +25903,7 @@
         </p:nvSpPr>
         <p:spPr>
           <a:xfrm>
-            <a:off x="6667500" y="2864739"/>
+            <a:off x="6667500" y="2702814"/>
             <a:ext cx="4762500" cy="167640"/>
           </a:xfrm>
           <a:prstGeom prst="rect">
@@ -24809,7 +25942,7 @@
         </p:nvSpPr>
         <p:spPr>
           <a:xfrm>
-            <a:off x="685800" y="3093339"/>
+            <a:off x="685800" y="2931414"/>
             <a:ext cx="10820400" cy="19050"/>
           </a:xfrm>
           <a:prstGeom prst="rect">
@@ -24853,7 +25986,7 @@
         </p:nvSpPr>
         <p:spPr>
           <a:xfrm>
-            <a:off x="685800" y="3245739"/>
+            <a:off x="685800" y="3083814"/>
             <a:ext cx="2019300" cy="762000"/>
           </a:xfrm>
           <a:prstGeom prst="rect">
@@ -24892,7 +26025,7 @@
         </p:nvSpPr>
         <p:spPr>
           <a:xfrm>
-            <a:off x="3048000" y="3245739"/>
+            <a:off x="3048000" y="3083814"/>
             <a:ext cx="3257550" cy="762000"/>
           </a:xfrm>
           <a:prstGeom prst="rect">
@@ -24931,7 +26064,7 @@
         </p:nvSpPr>
         <p:spPr>
           <a:xfrm>
-            <a:off x="6667500" y="3245739"/>
+            <a:off x="6667500" y="3083814"/>
             <a:ext cx="4591050" cy="762000"/>
           </a:xfrm>
           <a:prstGeom prst="rect">
@@ -24970,7 +26103,7 @@
         </p:nvSpPr>
         <p:spPr>
           <a:xfrm>
-            <a:off x="685800" y="3570732"/>
+            <a:off x="685800" y="3408807"/>
             <a:ext cx="10820400" cy="9525"/>
           </a:xfrm>
           <a:prstGeom prst="rect">
@@ -25014,7 +26147,7 @@
         </p:nvSpPr>
         <p:spPr>
           <a:xfrm>
-            <a:off x="685800" y="3694557"/>
+            <a:off x="685800" y="3532632"/>
             <a:ext cx="2019300" cy="762000"/>
           </a:xfrm>
           <a:prstGeom prst="rect">
@@ -25053,7 +26186,7 @@
         </p:nvSpPr>
         <p:spPr>
           <a:xfrm>
-            <a:off x="3048000" y="3694557"/>
+            <a:off x="3048000" y="3532632"/>
             <a:ext cx="3257550" cy="762000"/>
           </a:xfrm>
           <a:prstGeom prst="rect">
@@ -25092,7 +26225,7 @@
         </p:nvSpPr>
         <p:spPr>
           <a:xfrm>
-            <a:off x="6667500" y="3694557"/>
+            <a:off x="6667500" y="3532632"/>
             <a:ext cx="4591050" cy="762000"/>
           </a:xfrm>
           <a:prstGeom prst="rect">
@@ -25131,7 +26264,7 @@
         </p:nvSpPr>
         <p:spPr>
           <a:xfrm>
-            <a:off x="685800" y="4019550"/>
+            <a:off x="685800" y="3857625"/>
             <a:ext cx="10820400" cy="9525"/>
           </a:xfrm>
           <a:prstGeom prst="rect">
@@ -25175,7 +26308,7 @@
         </p:nvSpPr>
         <p:spPr>
           <a:xfrm>
-            <a:off x="685800" y="4143375"/>
+            <a:off x="685800" y="3981450"/>
             <a:ext cx="2019300" cy="762000"/>
           </a:xfrm>
           <a:prstGeom prst="rect">
@@ -25214,7 +26347,7 @@
         </p:nvSpPr>
         <p:spPr>
           <a:xfrm>
-            <a:off x="3048000" y="4143375"/>
+            <a:off x="3048000" y="3981450"/>
             <a:ext cx="3257550" cy="762000"/>
           </a:xfrm>
           <a:prstGeom prst="rect">
@@ -25253,7 +26386,7 @@
         </p:nvSpPr>
         <p:spPr>
           <a:xfrm>
-            <a:off x="6667500" y="4143375"/>
+            <a:off x="6667500" y="3981450"/>
             <a:ext cx="4591050" cy="762000"/>
           </a:xfrm>
           <a:prstGeom prst="rect">
@@ -25292,7 +26425,7 @@
         </p:nvSpPr>
         <p:spPr>
           <a:xfrm>
-            <a:off x="685800" y="4468368"/>
+            <a:off x="685800" y="4306443"/>
             <a:ext cx="10820400" cy="9525"/>
           </a:xfrm>
           <a:prstGeom prst="rect">
@@ -25336,7 +26469,7 @@
         </p:nvSpPr>
         <p:spPr>
           <a:xfrm>
-            <a:off x="571500" y="4535043"/>
+            <a:off x="571500" y="4373118"/>
             <a:ext cx="28575" cy="323850"/>
           </a:xfrm>
           <a:prstGeom prst="rect">
@@ -25380,7 +26513,7 @@
         </p:nvSpPr>
         <p:spPr>
           <a:xfrm>
-            <a:off x="685800" y="4592193"/>
+            <a:off x="685800" y="4430268"/>
             <a:ext cx="2019300" cy="762000"/>
           </a:xfrm>
           <a:prstGeom prst="rect">
@@ -25419,7 +26552,7 @@
         </p:nvSpPr>
         <p:spPr>
           <a:xfrm>
-            <a:off x="3048000" y="4592193"/>
+            <a:off x="3048000" y="4430268"/>
             <a:ext cx="3257550" cy="762000"/>
           </a:xfrm>
           <a:prstGeom prst="rect">
@@ -25458,7 +26591,7 @@
         </p:nvSpPr>
         <p:spPr>
           <a:xfrm>
-            <a:off x="6667500" y="4592193"/>
+            <a:off x="6667500" y="4430268"/>
             <a:ext cx="4591050" cy="762000"/>
           </a:xfrm>
           <a:prstGeom prst="rect">
@@ -25497,7 +26630,7 @@
         </p:nvSpPr>
         <p:spPr>
           <a:xfrm>
-            <a:off x="685800" y="4917186"/>
+            <a:off x="685800" y="4755261"/>
             <a:ext cx="10820400" cy="9525"/>
           </a:xfrm>
           <a:prstGeom prst="rect">
@@ -25708,7 +26841,7 @@
         </p:nvSpPr>
         <p:spPr>
           <a:xfrm>
-            <a:off x="685800" y="2457260"/>
+            <a:off x="685800" y="2295334"/>
             <a:ext cx="5143500" cy="182880"/>
           </a:xfrm>
           <a:prstGeom prst="rect">
@@ -25747,7 +26880,7 @@
         </p:nvSpPr>
         <p:spPr>
           <a:xfrm>
-            <a:off x="685800" y="2666810"/>
+            <a:off x="685800" y="2504884"/>
             <a:ext cx="419100" cy="28575"/>
           </a:xfrm>
           <a:prstGeom prst="rect">
@@ -25791,7 +26924,7 @@
         </p:nvSpPr>
         <p:spPr>
           <a:xfrm>
-            <a:off x="704850" y="3056573"/>
+            <a:off x="704850" y="2894648"/>
             <a:ext cx="57150" cy="57150"/>
           </a:xfrm>
           <a:prstGeom prst="rect">
@@ -25835,7 +26968,7 @@
         </p:nvSpPr>
         <p:spPr>
           <a:xfrm>
-            <a:off x="971550" y="2952560"/>
+            <a:off x="971550" y="2790634"/>
             <a:ext cx="4857750" cy="95250"/>
           </a:xfrm>
           <a:prstGeom prst="rect">
@@ -25874,7 +27007,7 @@
         </p:nvSpPr>
         <p:spPr>
           <a:xfrm>
-            <a:off x="704850" y="3851339"/>
+            <a:off x="704850" y="3689414"/>
             <a:ext cx="57150" cy="57150"/>
           </a:xfrm>
           <a:prstGeom prst="rect">
@@ -25918,7 +27051,7 @@
         </p:nvSpPr>
         <p:spPr>
           <a:xfrm>
-            <a:off x="971550" y="3747326"/>
+            <a:off x="971550" y="3585400"/>
             <a:ext cx="4857750" cy="95250"/>
           </a:xfrm>
           <a:prstGeom prst="rect">
@@ -25957,7 +27090,7 @@
         </p:nvSpPr>
         <p:spPr>
           <a:xfrm>
-            <a:off x="704850" y="4646104"/>
+            <a:off x="704850" y="4484180"/>
             <a:ext cx="57150" cy="57150"/>
           </a:xfrm>
           <a:prstGeom prst="rect">
@@ -26001,7 +27134,7 @@
         </p:nvSpPr>
         <p:spPr>
           <a:xfrm>
-            <a:off x="971550" y="4542092"/>
+            <a:off x="971550" y="4380166"/>
             <a:ext cx="4857750" cy="95250"/>
           </a:xfrm>
           <a:prstGeom prst="rect">
@@ -26040,7 +27173,7 @@
         </p:nvSpPr>
         <p:spPr>
           <a:xfrm>
-            <a:off x="704850" y="5440870"/>
+            <a:off x="704850" y="5278945"/>
             <a:ext cx="57150" cy="57150"/>
           </a:xfrm>
           <a:prstGeom prst="rect">
@@ -26084,7 +27217,7 @@
         </p:nvSpPr>
         <p:spPr>
           <a:xfrm>
-            <a:off x="971550" y="5336858"/>
+            <a:off x="971550" y="5174932"/>
             <a:ext cx="4857750" cy="95250"/>
           </a:xfrm>
           <a:prstGeom prst="rect">
@@ -26123,7 +27256,7 @@
         </p:nvSpPr>
         <p:spPr>
           <a:xfrm>
-            <a:off x="6362700" y="2457260"/>
+            <a:off x="6362700" y="2295334"/>
             <a:ext cx="5143500" cy="182880"/>
           </a:xfrm>
           <a:prstGeom prst="rect">
@@ -26162,7 +27295,7 @@
         </p:nvSpPr>
         <p:spPr>
           <a:xfrm>
-            <a:off x="6362700" y="2666810"/>
+            <a:off x="6362700" y="2504884"/>
             <a:ext cx="419100" cy="28575"/>
           </a:xfrm>
           <a:prstGeom prst="rect">
@@ -26206,7 +27339,7 @@
         </p:nvSpPr>
         <p:spPr>
           <a:xfrm>
-            <a:off x="6381750" y="3056573"/>
+            <a:off x="6381750" y="2894648"/>
             <a:ext cx="57150" cy="57150"/>
           </a:xfrm>
           <a:prstGeom prst="rect">
@@ -26250,7 +27383,7 @@
         </p:nvSpPr>
         <p:spPr>
           <a:xfrm>
-            <a:off x="6648450" y="2952560"/>
+            <a:off x="6648450" y="2790634"/>
             <a:ext cx="4857750" cy="95250"/>
           </a:xfrm>
           <a:prstGeom prst="rect">
@@ -26276,7 +27409,7 @@
                 </a:solidFill>
                 <a:latin typeface="Roboto"/>
               </a:rPr>
-              <a:t>Não temos integração contínua definida nem hospedagem decidida, então dois dos critérios ao lado se aplicam a nós.</a:t>
+              <a:t>Dois dos quatro se aplicam a nós, porque não temos integração contínua definida nem hospedagem decidida.</a:t>
             </a:r>
           </a:p>
         </p:txBody>
@@ -26289,7 +27422,7 @@
         </p:nvSpPr>
         <p:spPr>
           <a:xfrm>
-            <a:off x="6381750" y="4115372"/>
+            <a:off x="6381750" y="3953447"/>
             <a:ext cx="57150" cy="57150"/>
           </a:xfrm>
           <a:prstGeom prst="rect">
@@ -26333,7 +27466,7 @@
         </p:nvSpPr>
         <p:spPr>
           <a:xfrm>
-            <a:off x="6648450" y="4011359"/>
+            <a:off x="6648450" y="3849434"/>
             <a:ext cx="4857750" cy="95250"/>
           </a:xfrm>
           <a:prstGeom prst="rect">
@@ -26359,7 +27492,7 @@
                 </a:solidFill>
                 <a:latin typeface="Roboto"/>
               </a:rPr>
-              <a:t>O motivo que resta é o ambiente igual para quatro integrantes com stacks diferentes, com o banco rodando sem instalação local, antes de escrever a primeira linha.</a:t>
+              <a:t>O que resta é o motivo que abriu a apresentação: o ambiente igual para os quatro antes da primeira linha de código.</a:t>
             </a:r>
           </a:p>
         </p:txBody>
@@ -26539,7 +27672,7 @@
         </p:nvSpPr>
         <p:spPr>
           <a:xfrm>
-            <a:off x="685800" y="2028825"/>
+            <a:off x="685800" y="1866900"/>
             <a:ext cx="5143500" cy="182880"/>
           </a:xfrm>
           <a:prstGeom prst="rect">
@@ -26578,7 +27711,7 @@
         </p:nvSpPr>
         <p:spPr>
           <a:xfrm>
-            <a:off x="685800" y="2238375"/>
+            <a:off x="685800" y="2076450"/>
             <a:ext cx="419100" cy="28575"/>
           </a:xfrm>
           <a:prstGeom prst="rect">
@@ -26622,7 +27755,7 @@
         </p:nvSpPr>
         <p:spPr>
           <a:xfrm>
-            <a:off x="704850" y="2623185"/>
+            <a:off x="704850" y="2461260"/>
             <a:ext cx="57150" cy="57150"/>
           </a:xfrm>
           <a:prstGeom prst="rect">
@@ -26666,7 +27799,7 @@
         </p:nvSpPr>
         <p:spPr>
           <a:xfrm>
-            <a:off x="971550" y="2524125"/>
+            <a:off x="971550" y="2362200"/>
             <a:ext cx="4857750" cy="95250"/>
           </a:xfrm>
           <a:prstGeom prst="rect">
@@ -26705,7 +27838,7 @@
         </p:nvSpPr>
         <p:spPr>
           <a:xfrm>
-            <a:off x="704850" y="3373755"/>
+            <a:off x="704850" y="3211830"/>
             <a:ext cx="57150" cy="57150"/>
           </a:xfrm>
           <a:prstGeom prst="rect">
@@ -26749,7 +27882,7 @@
         </p:nvSpPr>
         <p:spPr>
           <a:xfrm>
-            <a:off x="971550" y="3274695"/>
+            <a:off x="971550" y="3112770"/>
             <a:ext cx="4857750" cy="95250"/>
           </a:xfrm>
           <a:prstGeom prst="rect">
@@ -26788,7 +27921,7 @@
         </p:nvSpPr>
         <p:spPr>
           <a:xfrm>
-            <a:off x="704850" y="4124325"/>
+            <a:off x="704850" y="3962400"/>
             <a:ext cx="57150" cy="57150"/>
           </a:xfrm>
           <a:prstGeom prst="rect">
@@ -26832,7 +27965,7 @@
         </p:nvSpPr>
         <p:spPr>
           <a:xfrm>
-            <a:off x="971550" y="4025265"/>
+            <a:off x="971550" y="3863340"/>
             <a:ext cx="4857750" cy="95250"/>
           </a:xfrm>
           <a:prstGeom prst="rect">
@@ -26871,7 +28004,7 @@
         </p:nvSpPr>
         <p:spPr>
           <a:xfrm>
-            <a:off x="704850" y="4874895"/>
+            <a:off x="704850" y="4712970"/>
             <a:ext cx="57150" cy="57150"/>
           </a:xfrm>
           <a:prstGeom prst="rect">
@@ -26915,7 +28048,7 @@
         </p:nvSpPr>
         <p:spPr>
           <a:xfrm>
-            <a:off x="971550" y="4775835"/>
+            <a:off x="971550" y="4613910"/>
             <a:ext cx="4857750" cy="95250"/>
           </a:xfrm>
           <a:prstGeom prst="rect">
@@ -26954,7 +28087,7 @@
         </p:nvSpPr>
         <p:spPr>
           <a:xfrm>
-            <a:off x="704850" y="5625465"/>
+            <a:off x="704850" y="5463540"/>
             <a:ext cx="57150" cy="57150"/>
           </a:xfrm>
           <a:prstGeom prst="rect">
@@ -26998,7 +28131,7 @@
         </p:nvSpPr>
         <p:spPr>
           <a:xfrm>
-            <a:off x="971550" y="5526405"/>
+            <a:off x="971550" y="5364480"/>
             <a:ext cx="4857750" cy="95250"/>
           </a:xfrm>
           <a:prstGeom prst="rect">
@@ -27037,7 +28170,7 @@
         </p:nvSpPr>
         <p:spPr>
           <a:xfrm>
-            <a:off x="6362700" y="2028825"/>
+            <a:off x="6362700" y="1866900"/>
             <a:ext cx="5143500" cy="182880"/>
           </a:xfrm>
           <a:prstGeom prst="rect">
@@ -27076,7 +28209,7 @@
         </p:nvSpPr>
         <p:spPr>
           <a:xfrm>
-            <a:off x="6362700" y="2238375"/>
+            <a:off x="6362700" y="2076450"/>
             <a:ext cx="419100" cy="28575"/>
           </a:xfrm>
           <a:prstGeom prst="rect">
@@ -27120,7 +28253,7 @@
         </p:nvSpPr>
         <p:spPr>
           <a:xfrm>
-            <a:off x="6381750" y="2623185"/>
+            <a:off x="6381750" y="2461260"/>
             <a:ext cx="57150" cy="57150"/>
           </a:xfrm>
           <a:prstGeom prst="rect">
@@ -27164,7 +28297,7 @@
         </p:nvSpPr>
         <p:spPr>
           <a:xfrm>
-            <a:off x="6648450" y="2524125"/>
+            <a:off x="6648450" y="2362200"/>
             <a:ext cx="4857750" cy="95250"/>
           </a:xfrm>
           <a:prstGeom prst="rect">
@@ -27203,7 +28336,7 @@
         </p:nvSpPr>
         <p:spPr>
           <a:xfrm>
-            <a:off x="6381750" y="3373755"/>
+            <a:off x="6381750" y="3211830"/>
             <a:ext cx="57150" cy="57150"/>
           </a:xfrm>
           <a:prstGeom prst="rect">
@@ -27247,7 +28380,7 @@
         </p:nvSpPr>
         <p:spPr>
           <a:xfrm>
-            <a:off x="6648450" y="3274695"/>
+            <a:off x="6648450" y="3112770"/>
             <a:ext cx="4857750" cy="95250"/>
           </a:xfrm>
           <a:prstGeom prst="rect">
@@ -27453,8 +28586,8 @@
         </p:nvSpPr>
         <p:spPr>
           <a:xfrm>
-            <a:off x="685800" y="2987992"/>
-            <a:ext cx="5143500" cy="182880"/>
+            <a:off x="857250" y="2409825"/>
+            <a:ext cx="4762500" cy="182880"/>
           </a:xfrm>
           <a:prstGeom prst="rect">
             <a:avLst/>
@@ -27473,7 +28606,7 @@
               </a:lnSpc>
             </a:pPr>
             <a:r>
-              <a:rPr sz="900" b="1" i="0" spc="120">
+              <a:rPr sz="900" b="1" i="0" spc="140">
                 <a:solidFill>
                   <a:srgbClr val="21049A"/>
                 </a:solidFill>
@@ -27492,7 +28625,7 @@
         </p:nvSpPr>
         <p:spPr>
           <a:xfrm>
-            <a:off x="685800" y="3197542"/>
+            <a:off x="857250" y="2619375"/>
             <a:ext cx="419100" cy="28575"/>
           </a:xfrm>
           <a:prstGeom prst="rect">
@@ -27530,14 +28663,374 @@
       </p:sp>
       <p:sp>
         <p:nvSpPr>
-          <p:cNvPr id="6" name="Rectangle 5"/>
+          <p:cNvPr id="6" name="Rounded Rectangle 5"/>
           <p:cNvSpPr/>
           <p:nvPr/>
         </p:nvSpPr>
         <p:spPr>
           <a:xfrm>
-            <a:off x="704850" y="3587306"/>
-            <a:ext cx="57150" cy="57150"/>
+            <a:off x="857250" y="2790825"/>
+            <a:ext cx="4762500" cy="1752600"/>
+          </a:xfrm>
+          <a:prstGeom prst="roundRect">
+            <a:avLst>
+              <a:gd name="adj" fmla="val 3260"/>
+            </a:avLst>
+          </a:prstGeom>
+          <a:solidFill>
+            <a:srgbClr val="F2F2F5"/>
+          </a:solidFill>
+          <a:ln w="12700">
+            <a:solidFill>
+              <a:srgbClr val="D9D9D9"/>
+            </a:solidFill>
+          </a:ln>
+          <a:effectLst/>
+        </p:spPr>
+        <p:style>
+          <a:lnRef idx="1">
+            <a:schemeClr val="accent1"/>
+          </a:lnRef>
+          <a:fillRef idx="3">
+            <a:schemeClr val="accent1"/>
+          </a:fillRef>
+          <a:effectRef idx="2">
+            <a:schemeClr val="accent1"/>
+          </a:effectRef>
+          <a:fontRef idx="minor">
+            <a:schemeClr val="lt1"/>
+          </a:fontRef>
+        </p:style>
+        <p:txBody>
+          <a:bodyPr rtlCol="0" anchor="ctr" wrap="square" lIns="0" rIns="0" tIns="0" bIns="0"/>
+          <a:lstStyle/>
+          <a:p>
+            <a:pPr algn="ctr"/>
+          </a:p>
+        </p:txBody>
+      </p:sp>
+      <p:sp>
+        <p:nvSpPr>
+          <p:cNvPr id="7" name="TextBox 6"/>
+          <p:cNvSpPr txBox="1"/>
+          <p:nvPr/>
+        </p:nvSpPr>
+        <p:spPr>
+          <a:xfrm>
+            <a:off x="1066800" y="2962275"/>
+            <a:ext cx="4381500" cy="213360"/>
+          </a:xfrm>
+          <a:prstGeom prst="rect">
+            <a:avLst/>
+          </a:prstGeom>
+          <a:noFill/>
+        </p:spPr>
+        <p:txBody>
+          <a:bodyPr wrap="square" lIns="0" rIns="0" tIns="0" bIns="0" anchor="t">
+            <a:spAutoFit/>
+          </a:bodyPr>
+          <a:lstStyle/>
+          <a:p>
+            <a:pPr algn="l">
+              <a:lnSpc>
+                <a:spcPct val="120000"/>
+              </a:lnSpc>
+            </a:pPr>
+            <a:r>
+              <a:rPr sz="1050" b="0" i="0">
+                <a:solidFill>
+                  <a:srgbClr val="6B6B78"/>
+                </a:solidFill>
+                <a:latin typeface="Roboto Mono"/>
+              </a:rPr>
+              <a:t># .gitattributes</a:t>
+            </a:r>
+          </a:p>
+        </p:txBody>
+      </p:sp>
+      <p:sp>
+        <p:nvSpPr>
+          <p:cNvPr id="8" name="TextBox 7"/>
+          <p:cNvSpPr txBox="1"/>
+          <p:nvPr/>
+        </p:nvSpPr>
+        <p:spPr>
+          <a:xfrm>
+            <a:off x="1066800" y="3190875"/>
+            <a:ext cx="4381500" cy="213360"/>
+          </a:xfrm>
+          <a:prstGeom prst="rect">
+            <a:avLst/>
+          </a:prstGeom>
+          <a:noFill/>
+        </p:spPr>
+        <p:txBody>
+          <a:bodyPr wrap="square" lIns="0" rIns="0" tIns="0" bIns="0" anchor="t">
+            <a:spAutoFit/>
+          </a:bodyPr>
+          <a:lstStyle/>
+          <a:p>
+            <a:pPr algn="l">
+              <a:lnSpc>
+                <a:spcPct val="120000"/>
+              </a:lnSpc>
+            </a:pPr>
+            <a:r>
+              <a:rPr sz="1050" b="0" i="0">
+                <a:solidFill>
+                  <a:srgbClr val="1A1A1E"/>
+                </a:solidFill>
+                <a:latin typeface="Roboto Mono"/>
+              </a:rPr>
+              <a:t>*.sh text eol=lf</a:t>
+            </a:r>
+          </a:p>
+        </p:txBody>
+      </p:sp>
+      <p:sp>
+        <p:nvSpPr>
+          <p:cNvPr id="9" name="TextBox 8"/>
+          <p:cNvSpPr txBox="1"/>
+          <p:nvPr/>
+        </p:nvSpPr>
+        <p:spPr>
+          <a:xfrm>
+            <a:off x="1066800" y="3419475"/>
+            <a:ext cx="4381500" cy="213360"/>
+          </a:xfrm>
+          <a:prstGeom prst="rect">
+            <a:avLst/>
+          </a:prstGeom>
+          <a:noFill/>
+        </p:spPr>
+        <p:txBody>
+          <a:bodyPr wrap="square" lIns="0" rIns="0" tIns="0" bIns="0" anchor="t">
+            <a:spAutoFit/>
+          </a:bodyPr>
+          <a:lstStyle/>
+          <a:p>
+            <a:pPr algn="l">
+              <a:lnSpc>
+                <a:spcPct val="120000"/>
+              </a:lnSpc>
+            </a:pPr>
+            <a:r>
+              <a:rPr sz="1050" b="0" i="0">
+                <a:solidFill>
+                  <a:srgbClr val="1A1A1E"/>
+                </a:solidFill>
+                <a:latin typeface="Roboto Mono"/>
+              </a:rPr>
+              <a:t/>
+            </a:r>
+          </a:p>
+        </p:txBody>
+      </p:sp>
+      <p:sp>
+        <p:nvSpPr>
+          <p:cNvPr id="10" name="TextBox 9"/>
+          <p:cNvSpPr txBox="1"/>
+          <p:nvPr/>
+        </p:nvSpPr>
+        <p:spPr>
+          <a:xfrm>
+            <a:off x="1066800" y="3648075"/>
+            <a:ext cx="4381500" cy="213360"/>
+          </a:xfrm>
+          <a:prstGeom prst="rect">
+            <a:avLst/>
+          </a:prstGeom>
+          <a:noFill/>
+        </p:spPr>
+        <p:txBody>
+          <a:bodyPr wrap="square" lIns="0" rIns="0" tIns="0" bIns="0" anchor="t">
+            <a:spAutoFit/>
+          </a:bodyPr>
+          <a:lstStyle/>
+          <a:p>
+            <a:pPr algn="l">
+              <a:lnSpc>
+                <a:spcPct val="120000"/>
+              </a:lnSpc>
+            </a:pPr>
+            <a:r>
+              <a:rPr sz="1050" b="0" i="0">
+                <a:solidFill>
+                  <a:srgbClr val="1A1A1E"/>
+                </a:solidFill>
+                <a:latin typeface="Roboto Mono"/>
+              </a:rPr>
+              <a:t/>
+            </a:r>
+          </a:p>
+        </p:txBody>
+      </p:sp>
+      <p:sp>
+        <p:nvSpPr>
+          <p:cNvPr id="11" name="TextBox 10"/>
+          <p:cNvSpPr txBox="1"/>
+          <p:nvPr/>
+        </p:nvSpPr>
+        <p:spPr>
+          <a:xfrm>
+            <a:off x="1066800" y="3876675"/>
+            <a:ext cx="4381500" cy="213360"/>
+          </a:xfrm>
+          <a:prstGeom prst="rect">
+            <a:avLst/>
+          </a:prstGeom>
+          <a:noFill/>
+        </p:spPr>
+        <p:txBody>
+          <a:bodyPr wrap="square" lIns="0" rIns="0" tIns="0" bIns="0" anchor="t">
+            <a:spAutoFit/>
+          </a:bodyPr>
+          <a:lstStyle/>
+          <a:p>
+            <a:pPr algn="l">
+              <a:lnSpc>
+                <a:spcPct val="120000"/>
+              </a:lnSpc>
+            </a:pPr>
+            <a:r>
+              <a:rPr sz="1050" b="0" i="0">
+                <a:solidFill>
+                  <a:srgbClr val="1A1A1E"/>
+                </a:solidFill>
+                <a:latin typeface="Roboto Mono"/>
+              </a:rPr>
+              <a:t/>
+            </a:r>
+          </a:p>
+        </p:txBody>
+      </p:sp>
+      <p:sp>
+        <p:nvSpPr>
+          <p:cNvPr id="12" name="TextBox 11"/>
+          <p:cNvSpPr txBox="1"/>
+          <p:nvPr/>
+        </p:nvSpPr>
+        <p:spPr>
+          <a:xfrm>
+            <a:off x="1066800" y="4105275"/>
+            <a:ext cx="4381500" cy="213360"/>
+          </a:xfrm>
+          <a:prstGeom prst="rect">
+            <a:avLst/>
+          </a:prstGeom>
+          <a:noFill/>
+        </p:spPr>
+        <p:txBody>
+          <a:bodyPr wrap="square" lIns="0" rIns="0" tIns="0" bIns="0" anchor="t">
+            <a:spAutoFit/>
+          </a:bodyPr>
+          <a:lstStyle/>
+          <a:p>
+            <a:pPr algn="l">
+              <a:lnSpc>
+                <a:spcPct val="120000"/>
+              </a:lnSpc>
+            </a:pPr>
+            <a:r>
+              <a:rPr sz="1050" b="0" i="0">
+                <a:solidFill>
+                  <a:srgbClr val="1A1A1E"/>
+                </a:solidFill>
+                <a:latin typeface="Roboto Mono"/>
+              </a:rPr>
+              <a:t/>
+            </a:r>
+          </a:p>
+        </p:txBody>
+      </p:sp>
+      <p:sp>
+        <p:nvSpPr>
+          <p:cNvPr id="13" name="TextBox 12"/>
+          <p:cNvSpPr txBox="1"/>
+          <p:nvPr/>
+        </p:nvSpPr>
+        <p:spPr>
+          <a:xfrm>
+            <a:off x="857250" y="4695825"/>
+            <a:ext cx="4762500" cy="666750"/>
+          </a:xfrm>
+          <a:prstGeom prst="rect">
+            <a:avLst/>
+          </a:prstGeom>
+          <a:noFill/>
+        </p:spPr>
+        <p:txBody>
+          <a:bodyPr wrap="square" lIns="0" rIns="0" tIns="0" bIns="0" anchor="t">
+            <a:spAutoFit/>
+          </a:bodyPr>
+          <a:lstStyle/>
+          <a:p>
+            <a:pPr algn="l">
+              <a:lnSpc>
+                <a:spcPct val="145000"/>
+              </a:lnSpc>
+            </a:pPr>
+            <a:r>
+              <a:rPr sz="1120" b="0" i="0">
+                <a:solidFill>
+                  <a:srgbClr val="3A3A44"/>
+                </a:solidFill>
+                <a:latin typeface="Roboto"/>
+              </a:rPr>
+              <a:t>Uma linha no repositório, porque sem ela o Git Bash quebra no Windows. Os ambientes do time já divergiam antes da primeira linha de código do produto.</a:t>
+            </a:r>
+          </a:p>
+        </p:txBody>
+      </p:sp>
+      <p:sp>
+        <p:nvSpPr>
+          <p:cNvPr id="14" name="TextBox 13"/>
+          <p:cNvSpPr txBox="1"/>
+          <p:nvPr/>
+        </p:nvSpPr>
+        <p:spPr>
+          <a:xfrm>
+            <a:off x="6572250" y="2409825"/>
+            <a:ext cx="4762500" cy="182880"/>
+          </a:xfrm>
+          <a:prstGeom prst="rect">
+            <a:avLst/>
+          </a:prstGeom>
+          <a:noFill/>
+        </p:spPr>
+        <p:txBody>
+          <a:bodyPr wrap="square" lIns="0" rIns="0" tIns="0" bIns="0" anchor="t">
+            <a:spAutoFit/>
+          </a:bodyPr>
+          <a:lstStyle/>
+          <a:p>
+            <a:pPr algn="l">
+              <a:lnSpc>
+                <a:spcPct val="120000"/>
+              </a:lnSpc>
+            </a:pPr>
+            <a:r>
+              <a:rPr sz="900" b="1" i="0" spc="140">
+                <a:solidFill>
+                  <a:srgbClr val="E94D1C"/>
+                </a:solidFill>
+                <a:latin typeface="Roboto"/>
+              </a:rPr>
+              <a:t>AGORA</a:t>
+            </a:r>
+          </a:p>
+        </p:txBody>
+      </p:sp>
+      <p:sp>
+        <p:nvSpPr>
+          <p:cNvPr id="15" name="Rectangle 14"/>
+          <p:cNvSpPr/>
+          <p:nvPr/>
+        </p:nvSpPr>
+        <p:spPr>
+          <a:xfrm>
+            <a:off x="6572250" y="2619375"/>
+            <a:ext cx="419100" cy="28575"/>
           </a:xfrm>
           <a:prstGeom prst="rect">
             <a:avLst/>
@@ -27574,62 +29067,27 @@
       </p:sp>
       <p:sp>
         <p:nvSpPr>
-          <p:cNvPr id="7" name="TextBox 6"/>
-          <p:cNvSpPr txBox="1"/>
-          <p:nvPr/>
-        </p:nvSpPr>
-        <p:spPr>
-          <a:xfrm>
-            <a:off x="971550" y="3483292"/>
-            <a:ext cx="4857750" cy="95250"/>
-          </a:xfrm>
-          <a:prstGeom prst="rect">
-            <a:avLst/>
-          </a:prstGeom>
-          <a:noFill/>
-        </p:spPr>
-        <p:txBody>
-          <a:bodyPr wrap="square" lIns="0" rIns="0" tIns="0" bIns="0" anchor="t">
-            <a:spAutoFit/>
-          </a:bodyPr>
-          <a:lstStyle/>
-          <a:p>
-            <a:pPr algn="l">
-              <a:lnSpc>
-                <a:spcPct val="130000"/>
-              </a:lnSpc>
-            </a:pPr>
-            <a:r>
-              <a:rPr sz="1580" b="0" i="0">
-                <a:solidFill>
-                  <a:srgbClr val="1A1A1E"/>
-                </a:solidFill>
-                <a:latin typeface="Roboto"/>
-              </a:rPr>
-              <a:t>O repositório tem uma linha de .gitattributes forçando LF nos scripts, porque sem ela o Git Bash quebra no Windows.</a:t>
-            </a:r>
-          </a:p>
-        </p:txBody>
-      </p:sp>
-      <p:sp>
-        <p:nvSpPr>
-          <p:cNvPr id="8" name="Rectangle 7"/>
+          <p:cNvPr id="16" name="Rounded Rectangle 15"/>
           <p:cNvSpPr/>
           <p:nvPr/>
         </p:nvSpPr>
         <p:spPr>
           <a:xfrm>
-            <a:off x="704850" y="4646104"/>
-            <a:ext cx="57150" cy="57150"/>
-          </a:xfrm>
-          <a:prstGeom prst="rect">
-            <a:avLst/>
+            <a:off x="6572250" y="2790825"/>
+            <a:ext cx="4762500" cy="1752600"/>
+          </a:xfrm>
+          <a:prstGeom prst="roundRect">
+            <a:avLst>
+              <a:gd name="adj" fmla="val 3260"/>
+            </a:avLst>
           </a:prstGeom>
           <a:solidFill>
-            <a:srgbClr val="E94D1C"/>
+            <a:srgbClr val="F2F2F5"/>
           </a:solidFill>
-          <a:ln>
-            <a:noFill/>
+          <a:ln w="12700">
+            <a:solidFill>
+              <a:srgbClr val="D9D9D9"/>
+            </a:solidFill>
           </a:ln>
           <a:effectLst/>
         </p:spPr>
@@ -27657,14 +29115,14 @@
       </p:sp>
       <p:sp>
         <p:nvSpPr>
-          <p:cNvPr id="9" name="TextBox 8"/>
+          <p:cNvPr id="17" name="TextBox 16"/>
           <p:cNvSpPr txBox="1"/>
           <p:nvPr/>
         </p:nvSpPr>
         <p:spPr>
           <a:xfrm>
-            <a:off x="971550" y="4542092"/>
-            <a:ext cx="4857750" cy="95250"/>
+            <a:off x="6781800" y="2962275"/>
+            <a:ext cx="4381500" cy="213360"/>
           </a:xfrm>
           <a:prstGeom prst="rect">
             <a:avLst/>
@@ -27679,31 +29137,31 @@
           <a:p>
             <a:pPr algn="l">
               <a:lnSpc>
-                <a:spcPct val="130000"/>
-              </a:lnSpc>
-            </a:pPr>
-            <a:r>
-              <a:rPr sz="1580" b="0" i="0">
-                <a:solidFill>
-                  <a:srgbClr val="1A1A1E"/>
-                </a:solidFill>
-                <a:latin typeface="Roboto"/>
-              </a:rPr>
-              <a:t>Os ambientes do time já divergem antes de existir a primeira linha de código do produto.</a:t>
-            </a:r>
-          </a:p>
-        </p:txBody>
-      </p:sp>
-      <p:sp>
-        <p:nvSpPr>
-          <p:cNvPr id="10" name="TextBox 9"/>
+                <a:spcPct val="120000"/>
+              </a:lnSpc>
+            </a:pPr>
+            <a:r>
+              <a:rPr sz="1050" b="0" i="0">
+                <a:solidFill>
+                  <a:srgbClr val="6B6B78"/>
+                </a:solidFill>
+                <a:latin typeface="Roboto Mono"/>
+              </a:rPr>
+              <a:t># docker-compose.yml</a:t>
+            </a:r>
+          </a:p>
+        </p:txBody>
+      </p:sp>
+      <p:sp>
+        <p:nvSpPr>
+          <p:cNvPr id="18" name="TextBox 17"/>
           <p:cNvSpPr txBox="1"/>
           <p:nvPr/>
         </p:nvSpPr>
         <p:spPr>
           <a:xfrm>
-            <a:off x="6362700" y="2987992"/>
-            <a:ext cx="5143500" cy="182880"/>
+            <a:off x="6781800" y="3190875"/>
+            <a:ext cx="4381500" cy="213360"/>
           </a:xfrm>
           <a:prstGeom prst="rect">
             <a:avLst/>
@@ -27722,115 +29180,27 @@
               </a:lnSpc>
             </a:pPr>
             <a:r>
-              <a:rPr sz="900" b="1" i="0" spc="120">
-                <a:solidFill>
-                  <a:srgbClr val="E94D1C"/>
-                </a:solidFill>
-                <a:latin typeface="Roboto"/>
-              </a:rPr>
-              <a:t>AGORA</a:t>
-            </a:r>
-          </a:p>
-        </p:txBody>
-      </p:sp>
-      <p:sp>
-        <p:nvSpPr>
-          <p:cNvPr id="11" name="Rectangle 10"/>
-          <p:cNvSpPr/>
-          <p:nvPr/>
-        </p:nvSpPr>
-        <p:spPr>
-          <a:xfrm>
-            <a:off x="6362700" y="3197542"/>
-            <a:ext cx="419100" cy="28575"/>
-          </a:xfrm>
-          <a:prstGeom prst="rect">
-            <a:avLst/>
-          </a:prstGeom>
-          <a:solidFill>
-            <a:srgbClr val="E94D1C"/>
-          </a:solidFill>
-          <a:ln>
-            <a:noFill/>
-          </a:ln>
-          <a:effectLst/>
-        </p:spPr>
-        <p:style>
-          <a:lnRef idx="1">
-            <a:schemeClr val="accent1"/>
-          </a:lnRef>
-          <a:fillRef idx="3">
-            <a:schemeClr val="accent1"/>
-          </a:fillRef>
-          <a:effectRef idx="2">
-            <a:schemeClr val="accent1"/>
-          </a:effectRef>
-          <a:fontRef idx="minor">
-            <a:schemeClr val="lt1"/>
-          </a:fontRef>
-        </p:style>
-        <p:txBody>
-          <a:bodyPr rtlCol="0" anchor="ctr" wrap="square" lIns="0" rIns="0" tIns="0" bIns="0"/>
-          <a:lstStyle/>
-          <a:p>
-            <a:pPr algn="ctr"/>
-          </a:p>
-        </p:txBody>
-      </p:sp>
-      <p:sp>
-        <p:nvSpPr>
-          <p:cNvPr id="12" name="Rectangle 11"/>
-          <p:cNvSpPr/>
-          <p:nvPr/>
-        </p:nvSpPr>
-        <p:spPr>
-          <a:xfrm>
-            <a:off x="6381750" y="3587306"/>
-            <a:ext cx="57150" cy="57150"/>
-          </a:xfrm>
-          <a:prstGeom prst="rect">
-            <a:avLst/>
-          </a:prstGeom>
-          <a:solidFill>
-            <a:srgbClr val="E94D1C"/>
-          </a:solidFill>
-          <a:ln>
-            <a:noFill/>
-          </a:ln>
-          <a:effectLst/>
-        </p:spPr>
-        <p:style>
-          <a:lnRef idx="1">
-            <a:schemeClr val="accent1"/>
-          </a:lnRef>
-          <a:fillRef idx="3">
-            <a:schemeClr val="accent1"/>
-          </a:fillRef>
-          <a:effectRef idx="2">
-            <a:schemeClr val="accent1"/>
-          </a:effectRef>
-          <a:fontRef idx="minor">
-            <a:schemeClr val="lt1"/>
-          </a:fontRef>
-        </p:style>
-        <p:txBody>
-          <a:bodyPr rtlCol="0" anchor="ctr" wrap="square" lIns="0" rIns="0" tIns="0" bIns="0"/>
-          <a:lstStyle/>
-          <a:p>
-            <a:pPr algn="ctr"/>
-          </a:p>
-        </p:txBody>
-      </p:sp>
-      <p:sp>
-        <p:nvSpPr>
-          <p:cNvPr id="13" name="TextBox 12"/>
+              <a:rPr sz="1050" b="0" i="0">
+                <a:solidFill>
+                  <a:srgbClr val="1A1A1E"/>
+                </a:solidFill>
+                <a:latin typeface="Roboto Mono"/>
+              </a:rPr>
+              <a:t>services:</a:t>
+            </a:r>
+          </a:p>
+        </p:txBody>
+      </p:sp>
+      <p:sp>
+        <p:nvSpPr>
+          <p:cNvPr id="19" name="TextBox 18"/>
           <p:cNvSpPr txBox="1"/>
           <p:nvPr/>
         </p:nvSpPr>
         <p:spPr>
           <a:xfrm>
-            <a:off x="6648450" y="3483292"/>
-            <a:ext cx="4857750" cy="95250"/>
+            <a:off x="6781800" y="3419475"/>
+            <a:ext cx="4381500" cy="213360"/>
           </a:xfrm>
           <a:prstGeom prst="rect">
             <a:avLst/>
@@ -27845,75 +29215,31 @@
           <a:p>
             <a:pPr algn="l">
               <a:lnSpc>
-                <a:spcPct val="130000"/>
-              </a:lnSpc>
-            </a:pPr>
-            <a:r>
-              <a:rPr sz="1580" b="0" i="0">
+                <a:spcPct val="120000"/>
+              </a:lnSpc>
+            </a:pPr>
+            <a:r>
+              <a:rPr sz="1050" b="0" i="0">
                 <a:solidFill>
                   <a:srgbClr val="1A1A1E"/>
                 </a:solidFill>
-                <a:latin typeface="Roboto"/>
-              </a:rPr>
-              <a:t>Existe um arquivo que descreve o ambiente inteiro e que qualquer um dos quatro sobe com um comando.</a:t>
-            </a:r>
-          </a:p>
-        </p:txBody>
-      </p:sp>
-      <p:sp>
-        <p:nvSpPr>
-          <p:cNvPr id="14" name="Rectangle 13"/>
-          <p:cNvSpPr/>
-          <p:nvPr/>
-        </p:nvSpPr>
-        <p:spPr>
-          <a:xfrm>
-            <a:off x="6381750" y="4382072"/>
-            <a:ext cx="57150" cy="57150"/>
-          </a:xfrm>
-          <a:prstGeom prst="rect">
-            <a:avLst/>
-          </a:prstGeom>
-          <a:solidFill>
-            <a:srgbClr val="E94D1C"/>
-          </a:solidFill>
-          <a:ln>
-            <a:noFill/>
-          </a:ln>
-          <a:effectLst/>
-        </p:spPr>
-        <p:style>
-          <a:lnRef idx="1">
-            <a:schemeClr val="accent1"/>
-          </a:lnRef>
-          <a:fillRef idx="3">
-            <a:schemeClr val="accent1"/>
-          </a:fillRef>
-          <a:effectRef idx="2">
-            <a:schemeClr val="accent1"/>
-          </a:effectRef>
-          <a:fontRef idx="minor">
-            <a:schemeClr val="lt1"/>
-          </a:fontRef>
-        </p:style>
-        <p:txBody>
-          <a:bodyPr rtlCol="0" anchor="ctr" wrap="square" lIns="0" rIns="0" tIns="0" bIns="0"/>
-          <a:lstStyle/>
-          <a:p>
-            <a:pPr algn="ctr"/>
-          </a:p>
-        </p:txBody>
-      </p:sp>
-      <p:sp>
-        <p:nvSpPr>
-          <p:cNvPr id="15" name="TextBox 14"/>
+                <a:latin typeface="Roboto Mono"/>
+              </a:rPr>
+              <a:t>  api:</a:t>
+            </a:r>
+          </a:p>
+        </p:txBody>
+      </p:sp>
+      <p:sp>
+        <p:nvSpPr>
+          <p:cNvPr id="20" name="TextBox 19"/>
           <p:cNvSpPr txBox="1"/>
           <p:nvPr/>
         </p:nvSpPr>
         <p:spPr>
           <a:xfrm>
-            <a:off x="6648450" y="4278058"/>
-            <a:ext cx="4857750" cy="95250"/>
+            <a:off x="6781800" y="3648075"/>
+            <a:ext cx="4381500" cy="213360"/>
           </a:xfrm>
           <a:prstGeom prst="rect">
             <a:avLst/>
@@ -27928,31 +29254,31 @@
           <a:p>
             <a:pPr algn="l">
               <a:lnSpc>
-                <a:spcPct val="130000"/>
-              </a:lnSpc>
-            </a:pPr>
-            <a:r>
-              <a:rPr sz="1580" b="0" i="0">
+                <a:spcPct val="120000"/>
+              </a:lnSpc>
+            </a:pPr>
+            <a:r>
+              <a:rPr sz="1050" b="0" i="0">
                 <a:solidFill>
                   <a:srgbClr val="1A1A1E"/>
                 </a:solidFill>
-                <a:latin typeface="Roboto"/>
-              </a:rPr>
-              <a:t>Esse mesmo arquivo é o que vira o diagrama de implantação do projeto.</a:t>
-            </a:r>
-          </a:p>
-        </p:txBody>
-      </p:sp>
-      <p:sp>
-        <p:nvSpPr>
-          <p:cNvPr id="16" name="TextBox 15"/>
+                <a:latin typeface="Roboto Mono"/>
+              </a:rPr>
+              <a:t>    image: node:22-alpine</a:t>
+            </a:r>
+          </a:p>
+        </p:txBody>
+      </p:sp>
+      <p:sp>
+        <p:nvSpPr>
+          <p:cNvPr id="21" name="TextBox 20"/>
           <p:cNvSpPr txBox="1"/>
           <p:nvPr/>
         </p:nvSpPr>
         <p:spPr>
           <a:xfrm>
-            <a:off x="685800" y="6324600"/>
-            <a:ext cx="6667500" cy="182880"/>
+            <a:off x="6781800" y="3876675"/>
+            <a:ext cx="4381500" cy="213360"/>
           </a:xfrm>
           <a:prstGeom prst="rect">
             <a:avLst/>
@@ -27971,6 +29297,123 @@
               </a:lnSpc>
             </a:pPr>
             <a:r>
+              <a:rPr sz="1050" b="0" i="0">
+                <a:solidFill>
+                  <a:srgbClr val="1A1A1E"/>
+                </a:solidFill>
+                <a:latin typeface="Roboto Mono"/>
+              </a:rPr>
+              <a:t>  db:</a:t>
+            </a:r>
+          </a:p>
+        </p:txBody>
+      </p:sp>
+      <p:sp>
+        <p:nvSpPr>
+          <p:cNvPr id="22" name="TextBox 21"/>
+          <p:cNvSpPr txBox="1"/>
+          <p:nvPr/>
+        </p:nvSpPr>
+        <p:spPr>
+          <a:xfrm>
+            <a:off x="6781800" y="4105275"/>
+            <a:ext cx="4381500" cy="213360"/>
+          </a:xfrm>
+          <a:prstGeom prst="rect">
+            <a:avLst/>
+          </a:prstGeom>
+          <a:noFill/>
+        </p:spPr>
+        <p:txBody>
+          <a:bodyPr wrap="square" lIns="0" rIns="0" tIns="0" bIns="0" anchor="t">
+            <a:spAutoFit/>
+          </a:bodyPr>
+          <a:lstStyle/>
+          <a:p>
+            <a:pPr algn="l">
+              <a:lnSpc>
+                <a:spcPct val="120000"/>
+              </a:lnSpc>
+            </a:pPr>
+            <a:r>
+              <a:rPr sz="1050" b="0" i="0">
+                <a:solidFill>
+                  <a:srgbClr val="1A1A1E"/>
+                </a:solidFill>
+                <a:latin typeface="Roboto Mono"/>
+              </a:rPr>
+              <a:t>    image: postgres:16</a:t>
+            </a:r>
+          </a:p>
+        </p:txBody>
+      </p:sp>
+      <p:sp>
+        <p:nvSpPr>
+          <p:cNvPr id="23" name="TextBox 22"/>
+          <p:cNvSpPr txBox="1"/>
+          <p:nvPr/>
+        </p:nvSpPr>
+        <p:spPr>
+          <a:xfrm>
+            <a:off x="6572250" y="4695825"/>
+            <a:ext cx="4762500" cy="666750"/>
+          </a:xfrm>
+          <a:prstGeom prst="rect">
+            <a:avLst/>
+          </a:prstGeom>
+          <a:noFill/>
+        </p:spPr>
+        <p:txBody>
+          <a:bodyPr wrap="square" lIns="0" rIns="0" tIns="0" bIns="0" anchor="t">
+            <a:spAutoFit/>
+          </a:bodyPr>
+          <a:lstStyle/>
+          <a:p>
+            <a:pPr algn="l">
+              <a:lnSpc>
+                <a:spcPct val="145000"/>
+              </a:lnSpc>
+            </a:pPr>
+            <a:r>
+              <a:rPr sz="1120" b="0" i="0">
+                <a:solidFill>
+                  <a:srgbClr val="3A3A44"/>
+                </a:solidFill>
+                <a:latin typeface="Roboto"/>
+              </a:rPr>
+              <a:t>Um arquivo que descreve o ambiente inteiro e que qualquer um dos quatro sobe com um comando. É ele que vira o diagrama de implantação.</a:t>
+            </a:r>
+          </a:p>
+        </p:txBody>
+      </p:sp>
+      <p:sp>
+        <p:nvSpPr>
+          <p:cNvPr id="24" name="TextBox 23"/>
+          <p:cNvSpPr txBox="1"/>
+          <p:nvPr/>
+        </p:nvSpPr>
+        <p:spPr>
+          <a:xfrm>
+            <a:off x="685800" y="6324600"/>
+            <a:ext cx="6667500" cy="182880"/>
+          </a:xfrm>
+          <a:prstGeom prst="rect">
+            <a:avLst/>
+          </a:prstGeom>
+          <a:noFill/>
+        </p:spPr>
+        <p:txBody>
+          <a:bodyPr wrap="square" lIns="0" rIns="0" tIns="0" bIns="0" anchor="t">
+            <a:spAutoFit/>
+          </a:bodyPr>
+          <a:lstStyle/>
+          <a:p>
+            <a:pPr algn="l">
+              <a:lnSpc>
+                <a:spcPct val="120000"/>
+              </a:lnSpc>
+            </a:pPr>
+            <a:r>
               <a:rPr sz="900" b="0" i="0">
                 <a:solidFill>
                   <a:srgbClr val="6B6B78"/>
@@ -27984,7 +29427,7 @@
       </p:sp>
       <p:sp>
         <p:nvSpPr>
-          <p:cNvPr id="17" name="TextBox 16"/>
+          <p:cNvPr id="25" name="TextBox 24"/>
           <p:cNvSpPr txBox="1"/>
           <p:nvPr/>
         </p:nvSpPr>
@@ -28105,7 +29548,7 @@
                 </a:solidFill>
                 <a:latin typeface="Roboto"/>
               </a:rPr>
-              <a:t>O que não estamos afirmando</a:t>
+              <a:t>Três coisas para lembrar</a:t>
             </a:r>
           </a:p>
         </p:txBody>
@@ -28118,7 +29561,7 @@
         </p:nvSpPr>
         <p:spPr>
           <a:xfrm>
-            <a:off x="704850" y="3422904"/>
+            <a:off x="704850" y="2939796"/>
             <a:ext cx="57150" cy="57150"/>
           </a:xfrm>
           <a:prstGeom prst="rect">
@@ -28162,8 +29605,8 @@
         </p:nvSpPr>
         <p:spPr>
           <a:xfrm>
-            <a:off x="971550" y="3313938"/>
-            <a:ext cx="7486650" cy="95250"/>
+            <a:off x="971550" y="2801112"/>
+            <a:ext cx="9677400" cy="95250"/>
           </a:xfrm>
           <a:prstGeom prst="rect">
             <a:avLst/>
@@ -28182,13 +29625,13 @@
               </a:lnSpc>
             </a:pPr>
             <a:r>
-              <a:rPr sz="1650" b="0" i="0">
+              <a:rPr sz="2100" b="0" i="0">
                 <a:solidFill>
                   <a:srgbClr val="1A1A1E"/>
                 </a:solidFill>
                 <a:latin typeface="Roboto"/>
               </a:rPr>
-              <a:t>Os seis itens de modelagem da arquitetura seguem em aberto. Isto é insumo desses itens, não relato de item concluído.</a:t>
+              <a:t>Container é um processo comum, isolado por mecanismos do kernel.</a:t>
             </a:r>
           </a:p>
         </p:txBody>
@@ -28201,7 +29644,7 @@
         </p:nvSpPr>
         <p:spPr>
           <a:xfrm>
-            <a:off x="704850" y="4261866"/>
+            <a:off x="704850" y="3653790"/>
             <a:ext cx="57150" cy="57150"/>
           </a:xfrm>
           <a:prstGeom prst="rect">
@@ -28245,8 +29688,8 @@
         </p:nvSpPr>
         <p:spPr>
           <a:xfrm>
-            <a:off x="971550" y="4152900"/>
-            <a:ext cx="7486650" cy="95250"/>
+            <a:off x="971550" y="3515106"/>
+            <a:ext cx="9677400" cy="95250"/>
           </a:xfrm>
           <a:prstGeom prst="rect">
             <a:avLst/>
@@ -28265,110 +29708,27 @@
               </a:lnSpc>
             </a:pPr>
             <a:r>
-              <a:rPr sz="1650" b="0" i="0">
+              <a:rPr sz="2100" b="0" i="0">
                 <a:solidFill>
                   <a:srgbClr val="1A1A1E"/>
                 </a:solidFill>
                 <a:latin typeface="Roboto"/>
               </a:rPr>
-              <a:t>O documento de decisões arquiteturais, onde a stack será decidida, ainda não foi escrito.</a:t>
-            </a:r>
-          </a:p>
-        </p:txBody>
-      </p:sp>
-      <p:sp>
-        <p:nvSpPr>
-          <p:cNvPr id="8" name="Document 7"/>
+              <a:t>Imagem é o artefato. Container é o ambiente de execução que roda a imagem.</a:t>
+            </a:r>
+          </a:p>
+        </p:txBody>
+      </p:sp>
+      <p:sp>
+        <p:nvSpPr>
+          <p:cNvPr id="8" name="Rectangle 7"/>
           <p:cNvSpPr/>
           <p:nvPr/>
         </p:nvSpPr>
         <p:spPr>
           <a:xfrm>
-            <a:off x="9124950" y="3313938"/>
-            <a:ext cx="142875" cy="133350"/>
-          </a:xfrm>
-          <a:prstGeom prst="flowChartDocument">
-            <a:avLst/>
-          </a:prstGeom>
-          <a:noFill/>
-          <a:ln w="19050">
-            <a:solidFill>
-              <a:srgbClr val="E94D1C"/>
-            </a:solidFill>
-          </a:ln>
-          <a:effectLst/>
-        </p:spPr>
-        <p:style>
-          <a:lnRef idx="1">
-            <a:schemeClr val="accent1"/>
-          </a:lnRef>
-          <a:fillRef idx="3">
-            <a:schemeClr val="accent1"/>
-          </a:fillRef>
-          <a:effectRef idx="2">
-            <a:schemeClr val="accent1"/>
-          </a:effectRef>
-          <a:fontRef idx="minor">
-            <a:schemeClr val="lt1"/>
-          </a:fontRef>
-        </p:style>
-        <p:txBody>
-          <a:bodyPr rtlCol="0" anchor="ctr"/>
-          <a:lstStyle/>
-          <a:p>
-            <a:pPr algn="ctr"/>
-          </a:p>
-        </p:txBody>
-      </p:sp>
-      <p:sp>
-        <p:nvSpPr>
-          <p:cNvPr id="9" name="TextBox 8"/>
-          <p:cNvSpPr txBox="1"/>
-          <p:nvPr/>
-        </p:nvSpPr>
-        <p:spPr>
-          <a:xfrm>
-            <a:off x="9372600" y="3323463"/>
-            <a:ext cx="2133600" cy="182880"/>
-          </a:xfrm>
-          <a:prstGeom prst="rect">
-            <a:avLst/>
-          </a:prstGeom>
-          <a:noFill/>
-        </p:spPr>
-        <p:txBody>
-          <a:bodyPr wrap="square" lIns="0" rIns="0" tIns="0" bIns="0" anchor="t">
-            <a:spAutoFit/>
-          </a:bodyPr>
-          <a:lstStyle/>
-          <a:p>
-            <a:pPr algn="l">
-              <a:lnSpc>
-                <a:spcPct val="120000"/>
-              </a:lnSpc>
-            </a:pPr>
-            <a:r>
-              <a:rPr sz="900" b="1" i="0" spc="120">
-                <a:solidFill>
-                  <a:srgbClr val="E94D1C"/>
-                </a:solidFill>
-                <a:latin typeface="Roboto"/>
-              </a:rPr>
-              <a:t>PARA LEVAR PARA A P1</a:t>
-            </a:r>
-          </a:p>
-        </p:txBody>
-      </p:sp>
-      <p:sp>
-        <p:nvSpPr>
-          <p:cNvPr id="10" name="Rectangle 9"/>
-          <p:cNvSpPr/>
-          <p:nvPr/>
-        </p:nvSpPr>
-        <p:spPr>
-          <a:xfrm>
-            <a:off x="9124950" y="3599688"/>
-            <a:ext cx="38100" cy="1664208"/>
+            <a:off x="704850" y="4367784"/>
+            <a:ext cx="57150" cy="57150"/>
           </a:xfrm>
           <a:prstGeom prst="rect">
             <a:avLst/>
@@ -28405,14 +29765,14 @@
       </p:sp>
       <p:sp>
         <p:nvSpPr>
-          <p:cNvPr id="11" name="TextBox 10"/>
+          <p:cNvPr id="9" name="TextBox 8"/>
           <p:cNvSpPr txBox="1"/>
           <p:nvPr/>
         </p:nvSpPr>
         <p:spPr>
           <a:xfrm>
-            <a:off x="9334500" y="3599688"/>
-            <a:ext cx="2171700" cy="2235708"/>
+            <a:off x="971550" y="4229100"/>
+            <a:ext cx="9677400" cy="95250"/>
           </a:xfrm>
           <a:prstGeom prst="rect">
             <a:avLst/>
@@ -28427,103 +29787,24 @@
           <a:p>
             <a:pPr algn="l">
               <a:lnSpc>
-                <a:spcPct val="140000"/>
-              </a:lnSpc>
-              <a:spcAft>
-                <a:spcPts val="600"/>
-              </a:spcAft>
-            </a:pPr>
-            <a:r>
-              <a:rPr sz="1200" b="0" i="0">
-                <a:solidFill>
-                  <a:srgbClr val="3A3A44"/>
+                <a:spcPct val="130000"/>
+              </a:lnSpc>
+            </a:pPr>
+            <a:r>
+              <a:rPr sz="2100" b="0" i="0">
+                <a:solidFill>
+                  <a:srgbClr val="1A1A1E"/>
                 </a:solidFill>
                 <a:latin typeface="Roboto"/>
               </a:rPr>
-              <a:t>Container é processo isolado por mecanismo de kernel.</a:t>
-            </a:r>
-          </a:p>
-          <a:p>
-            <a:pPr>
-              <a:lnSpc>
-                <a:spcPct val="140000"/>
-              </a:lnSpc>
-              <a:spcAft>
-                <a:spcPts val="600"/>
-              </a:spcAft>
-            </a:pPr>
-            <a:r>
-              <a:rPr sz="1200" b="0" i="0">
-                <a:solidFill>
-                  <a:srgbClr val="3A3A44"/>
-                </a:solidFill>
-                <a:latin typeface="Roboto"/>
-              </a:rPr>
-              <a:t/>
-            </a:r>
-          </a:p>
-          <a:p>
-            <a:pPr>
-              <a:lnSpc>
-                <a:spcPct val="140000"/>
-              </a:lnSpc>
-              <a:spcAft>
-                <a:spcPts val="600"/>
-              </a:spcAft>
-            </a:pPr>
-            <a:r>
-              <a:rPr sz="1200" b="0" i="0">
-                <a:solidFill>
-                  <a:srgbClr val="3A3A44"/>
-                </a:solidFill>
-                <a:latin typeface="Roboto"/>
-              </a:rPr>
-              <a:t>Imagem é artefato, container é ambiente de execução.</a:t>
-            </a:r>
-          </a:p>
-          <a:p>
-            <a:pPr>
-              <a:lnSpc>
-                <a:spcPct val="140000"/>
-              </a:lnSpc>
-              <a:spcAft>
-                <a:spcPts val="600"/>
-              </a:spcAft>
-            </a:pPr>
-            <a:r>
-              <a:rPr sz="1200" b="0" i="0">
-                <a:solidFill>
-                  <a:srgbClr val="3A3A44"/>
-                </a:solidFill>
-                <a:latin typeface="Roboto"/>
-              </a:rPr>
-              <a:t/>
-            </a:r>
-          </a:p>
-          <a:p>
-            <a:pPr>
-              <a:lnSpc>
-                <a:spcPct val="140000"/>
-              </a:lnSpc>
-              <a:spcAft>
-                <a:spcPts val="600"/>
-              </a:spcAft>
-            </a:pPr>
-            <a:r>
-              <a:rPr sz="1200" b="0" i="0">
-                <a:solidFill>
-                  <a:srgbClr val="3A3A44"/>
-                </a:solidFill>
-                <a:latin typeface="Roboto"/>
-              </a:rPr>
-              <a:t>A decisão arquitetural é a granularidade de tier.</a:t>
-            </a:r>
-          </a:p>
-        </p:txBody>
-      </p:sp>
-      <p:sp>
-        <p:nvSpPr>
-          <p:cNvPr id="12" name="TextBox 11"/>
+              <a:t>A decisão de arquitetura é em quantos processos separados o sistema vai rodar.</a:t>
+            </a:r>
+          </a:p>
+        </p:txBody>
+      </p:sp>
+      <p:sp>
+        <p:nvSpPr>
+          <p:cNvPr id="10" name="TextBox 9"/>
           <p:cNvSpPr txBox="1"/>
           <p:nvPr/>
         </p:nvSpPr>
@@ -28562,7 +29843,7 @@
       </p:sp>
       <p:sp>
         <p:nvSpPr>
-          <p:cNvPr id="13" name="TextBox 12"/>
+          <p:cNvPr id="11" name="TextBox 10"/>
           <p:cNvSpPr txBox="1"/>
           <p:nvPr/>
         </p:nvSpPr>
@@ -28696,7 +29977,7 @@
         </p:nvSpPr>
         <p:spPr>
           <a:xfrm>
-            <a:off x="704850" y="3003423"/>
+            <a:off x="704850" y="2860548"/>
             <a:ext cx="57150" cy="57150"/>
           </a:xfrm>
           <a:prstGeom prst="rect">
@@ -28740,7 +30021,7 @@
         </p:nvSpPr>
         <p:spPr>
           <a:xfrm>
-            <a:off x="971550" y="2894457"/>
+            <a:off x="971550" y="2751582"/>
             <a:ext cx="7581900" cy="95250"/>
           </a:xfrm>
           <a:prstGeom prst="rect">
@@ -28779,7 +30060,7 @@
         </p:nvSpPr>
         <p:spPr>
           <a:xfrm>
-            <a:off x="704850" y="3842385"/>
+            <a:off x="704850" y="3699510"/>
             <a:ext cx="57150" cy="57150"/>
           </a:xfrm>
           <a:prstGeom prst="rect">
@@ -28823,7 +30104,7 @@
         </p:nvSpPr>
         <p:spPr>
           <a:xfrm>
-            <a:off x="971550" y="3733419"/>
+            <a:off x="971550" y="3590544"/>
             <a:ext cx="7581900" cy="95250"/>
           </a:xfrm>
           <a:prstGeom prst="rect">
@@ -28862,7 +30143,7 @@
         </p:nvSpPr>
         <p:spPr>
           <a:xfrm>
-            <a:off x="704850" y="4681347"/>
+            <a:off x="704850" y="4538472"/>
             <a:ext cx="57150" cy="57150"/>
           </a:xfrm>
           <a:prstGeom prst="rect">
@@ -28906,7 +30187,7 @@
         </p:nvSpPr>
         <p:spPr>
           <a:xfrm>
-            <a:off x="971550" y="4572381"/>
+            <a:off x="971550" y="4429506"/>
             <a:ext cx="7581900" cy="95250"/>
           </a:xfrm>
           <a:prstGeom prst="rect">
@@ -28945,7 +30226,7 @@
         </p:nvSpPr>
         <p:spPr>
           <a:xfrm>
-            <a:off x="9124950" y="2894457"/>
+            <a:off x="9124950" y="2751582"/>
             <a:ext cx="152400" cy="133350"/>
           </a:xfrm>
           <a:prstGeom prst="triangle">
@@ -28989,7 +30270,7 @@
         </p:nvSpPr>
         <p:spPr>
           <a:xfrm>
-            <a:off x="9193530" y="2951607"/>
+            <a:off x="9193530" y="2808732"/>
             <a:ext cx="15240" cy="38100"/>
           </a:xfrm>
           <a:prstGeom prst="rect">
@@ -29033,7 +30314,7 @@
         </p:nvSpPr>
         <p:spPr>
           <a:xfrm>
-            <a:off x="9372600" y="2903982"/>
+            <a:off x="9372600" y="2761107"/>
             <a:ext cx="2133600" cy="182880"/>
           </a:xfrm>
           <a:prstGeom prst="rect">
@@ -29072,7 +30353,7 @@
         </p:nvSpPr>
         <p:spPr>
           <a:xfrm>
-            <a:off x="9124950" y="3180207"/>
+            <a:off x="9124950" y="3037332"/>
             <a:ext cx="38100" cy="804672"/>
           </a:xfrm>
           <a:prstGeom prst="rect">
@@ -29116,7 +30397,7 @@
         </p:nvSpPr>
         <p:spPr>
           <a:xfrm>
-            <a:off x="9334500" y="3180207"/>
+            <a:off x="9334500" y="3037332"/>
             <a:ext cx="2171700" cy="1376172"/>
           </a:xfrm>
           <a:prstGeom prst="rect">
@@ -29325,7 +30606,7 @@
         </p:nvSpPr>
         <p:spPr>
           <a:xfrm>
-            <a:off x="704850" y="2229040"/>
+            <a:off x="704850" y="2086166"/>
             <a:ext cx="57150" cy="57150"/>
           </a:xfrm>
           <a:prstGeom prst="rect">
@@ -29369,7 +30650,7 @@
         </p:nvSpPr>
         <p:spPr>
           <a:xfrm>
-            <a:off x="971550" y="2134934"/>
+            <a:off x="971550" y="1992059"/>
             <a:ext cx="9677400" cy="95250"/>
           </a:xfrm>
           <a:prstGeom prst="rect">
@@ -29408,7 +30689,7 @@
         </p:nvSpPr>
         <p:spPr>
           <a:xfrm>
-            <a:off x="704850" y="2696528"/>
+            <a:off x="704850" y="2553652"/>
             <a:ext cx="57150" cy="57150"/>
           </a:xfrm>
           <a:prstGeom prst="rect">
@@ -29452,7 +30733,7 @@
         </p:nvSpPr>
         <p:spPr>
           <a:xfrm>
-            <a:off x="971550" y="2602421"/>
+            <a:off x="971550" y="2459546"/>
             <a:ext cx="9677400" cy="95250"/>
           </a:xfrm>
           <a:prstGeom prst="rect">
@@ -29491,7 +30772,7 @@
         </p:nvSpPr>
         <p:spPr>
           <a:xfrm>
-            <a:off x="704850" y="3164014"/>
+            <a:off x="704850" y="3021140"/>
             <a:ext cx="57150" cy="57150"/>
           </a:xfrm>
           <a:prstGeom prst="rect">
@@ -29535,7 +30816,7 @@
         </p:nvSpPr>
         <p:spPr>
           <a:xfrm>
-            <a:off x="971550" y="3069908"/>
+            <a:off x="971550" y="2927032"/>
             <a:ext cx="9677400" cy="95250"/>
           </a:xfrm>
           <a:prstGeom prst="rect">
@@ -29574,7 +30855,7 @@
         </p:nvSpPr>
         <p:spPr>
           <a:xfrm>
-            <a:off x="704850" y="3870389"/>
+            <a:off x="704850" y="3727514"/>
             <a:ext cx="57150" cy="57150"/>
           </a:xfrm>
           <a:prstGeom prst="rect">
@@ -29618,7 +30899,7 @@
         </p:nvSpPr>
         <p:spPr>
           <a:xfrm>
-            <a:off x="971550" y="3776282"/>
+            <a:off x="971550" y="3633407"/>
             <a:ext cx="9677400" cy="95250"/>
           </a:xfrm>
           <a:prstGeom prst="rect">
@@ -29657,7 +30938,7 @@
         </p:nvSpPr>
         <p:spPr>
           <a:xfrm>
-            <a:off x="704850" y="4337876"/>
+            <a:off x="704850" y="4195000"/>
             <a:ext cx="57150" cy="57150"/>
           </a:xfrm>
           <a:prstGeom prst="rect">
@@ -29701,7 +30982,7 @@
         </p:nvSpPr>
         <p:spPr>
           <a:xfrm>
-            <a:off x="971550" y="4243768"/>
+            <a:off x="971550" y="4100894"/>
             <a:ext cx="9677400" cy="95250"/>
           </a:xfrm>
           <a:prstGeom prst="rect">
@@ -29740,7 +31021,7 @@
         </p:nvSpPr>
         <p:spPr>
           <a:xfrm>
-            <a:off x="704850" y="4805362"/>
+            <a:off x="704850" y="4662488"/>
             <a:ext cx="57150" cy="57150"/>
           </a:xfrm>
           <a:prstGeom prst="rect">
@@ -29784,7 +31065,7 @@
         </p:nvSpPr>
         <p:spPr>
           <a:xfrm>
-            <a:off x="971550" y="4711256"/>
+            <a:off x="971550" y="4568380"/>
             <a:ext cx="9677400" cy="95250"/>
           </a:xfrm>
           <a:prstGeom prst="rect">
@@ -29823,7 +31104,7 @@
         </p:nvSpPr>
         <p:spPr>
           <a:xfrm>
-            <a:off x="704850" y="5272850"/>
+            <a:off x="704850" y="5129974"/>
             <a:ext cx="57150" cy="57150"/>
           </a:xfrm>
           <a:prstGeom prst="rect">
@@ -29867,7 +31148,7 @@
         </p:nvSpPr>
         <p:spPr>
           <a:xfrm>
-            <a:off x="971550" y="5178742"/>
+            <a:off x="971550" y="5035868"/>
             <a:ext cx="9677400" cy="95250"/>
           </a:xfrm>
           <a:prstGeom prst="rect">
@@ -29906,7 +31187,7 @@
         </p:nvSpPr>
         <p:spPr>
           <a:xfrm>
-            <a:off x="704850" y="5740337"/>
+            <a:off x="704850" y="5597462"/>
             <a:ext cx="57150" cy="57150"/>
           </a:xfrm>
           <a:prstGeom prst="rect">
@@ -29950,7 +31231,7 @@
         </p:nvSpPr>
         <p:spPr>
           <a:xfrm>
-            <a:off x="971550" y="5646230"/>
+            <a:off x="971550" y="5503355"/>
             <a:ext cx="9677400" cy="95250"/>
           </a:xfrm>
           <a:prstGeom prst="rect">
@@ -31739,7 +33020,7 @@
         </p:nvSpPr>
         <p:spPr>
           <a:xfrm>
-            <a:off x="685800" y="2723960"/>
+            <a:off x="685800" y="2562034"/>
             <a:ext cx="5143500" cy="182880"/>
           </a:xfrm>
           <a:prstGeom prst="rect">
@@ -31778,7 +33059,7 @@
         </p:nvSpPr>
         <p:spPr>
           <a:xfrm>
-            <a:off x="685800" y="2933510"/>
+            <a:off x="685800" y="2771584"/>
             <a:ext cx="419100" cy="28575"/>
           </a:xfrm>
           <a:prstGeom prst="rect">
@@ -31822,7 +33103,7 @@
         </p:nvSpPr>
         <p:spPr>
           <a:xfrm>
-            <a:off x="704850" y="3323273"/>
+            <a:off x="704850" y="3161348"/>
             <a:ext cx="57150" cy="57150"/>
           </a:xfrm>
           <a:prstGeom prst="rect">
@@ -31866,7 +33147,7 @@
         </p:nvSpPr>
         <p:spPr>
           <a:xfrm>
-            <a:off x="971550" y="3219260"/>
+            <a:off x="971550" y="3057334"/>
             <a:ext cx="4857750" cy="95250"/>
           </a:xfrm>
           <a:prstGeom prst="rect">
@@ -31905,7 +33186,7 @@
         </p:nvSpPr>
         <p:spPr>
           <a:xfrm>
-            <a:off x="6362700" y="2723960"/>
+            <a:off x="6362700" y="2562034"/>
             <a:ext cx="5143500" cy="182880"/>
           </a:xfrm>
           <a:prstGeom prst="rect">
@@ -31944,7 +33225,7 @@
         </p:nvSpPr>
         <p:spPr>
           <a:xfrm>
-            <a:off x="6362700" y="2933510"/>
+            <a:off x="6362700" y="2771584"/>
             <a:ext cx="419100" cy="28575"/>
           </a:xfrm>
           <a:prstGeom prst="rect">
@@ -31988,7 +33269,7 @@
         </p:nvSpPr>
         <p:spPr>
           <a:xfrm>
-            <a:off x="6381750" y="3323273"/>
+            <a:off x="6381750" y="3161348"/>
             <a:ext cx="57150" cy="57150"/>
           </a:xfrm>
           <a:prstGeom prst="rect">
@@ -32032,7 +33313,7 @@
         </p:nvSpPr>
         <p:spPr>
           <a:xfrm>
-            <a:off x="6648450" y="3219260"/>
+            <a:off x="6648450" y="3057334"/>
             <a:ext cx="4857750" cy="95250"/>
           </a:xfrm>
           <a:prstGeom prst="rect">
@@ -32071,7 +33352,7 @@
         </p:nvSpPr>
         <p:spPr>
           <a:xfrm>
-            <a:off x="6381750" y="4646104"/>
+            <a:off x="6381750" y="4484180"/>
             <a:ext cx="57150" cy="57150"/>
           </a:xfrm>
           <a:prstGeom prst="rect">
@@ -32115,7 +33396,7 @@
         </p:nvSpPr>
         <p:spPr>
           <a:xfrm>
-            <a:off x="6648450" y="4542092"/>
+            <a:off x="6648450" y="4380166"/>
             <a:ext cx="4857750" cy="95250"/>
           </a:xfrm>
           <a:prstGeom prst="rect">
@@ -32337,7 +33618,7 @@
         </p:nvSpPr>
         <p:spPr>
           <a:xfrm>
-            <a:off x="685800" y="1988820"/>
+            <a:off x="685800" y="1845945"/>
             <a:ext cx="10820400" cy="3286125"/>
           </a:xfrm>
           <a:prstGeom prst="roundRect">
@@ -32383,7 +33664,7 @@
         </p:nvSpPr>
         <p:spPr>
           <a:xfrm>
-            <a:off x="952500" y="2198370"/>
+            <a:off x="952500" y="2055495"/>
             <a:ext cx="323850" cy="28575"/>
           </a:xfrm>
           <a:prstGeom prst="roundRect">
@@ -32429,7 +33710,7 @@
         </p:nvSpPr>
         <p:spPr>
           <a:xfrm>
-            <a:off x="1371600" y="2141220"/>
+            <a:off x="1371600" y="1998345"/>
             <a:ext cx="1905000" cy="167640"/>
           </a:xfrm>
           <a:prstGeom prst="rect">
@@ -32468,7 +33749,7 @@
         </p:nvSpPr>
         <p:spPr>
           <a:xfrm>
-            <a:off x="952500" y="2484120"/>
+            <a:off x="952500" y="2341245"/>
             <a:ext cx="10287000" cy="228600"/>
           </a:xfrm>
           <a:prstGeom prst="rect">
@@ -32507,7 +33788,7 @@
         </p:nvSpPr>
         <p:spPr>
           <a:xfrm>
-            <a:off x="952500" y="2722245"/>
+            <a:off x="952500" y="2579370"/>
             <a:ext cx="10287000" cy="228600"/>
           </a:xfrm>
           <a:prstGeom prst="rect">
@@ -32546,7 +33827,7 @@
         </p:nvSpPr>
         <p:spPr>
           <a:xfrm>
-            <a:off x="952500" y="2960370"/>
+            <a:off x="952500" y="2817495"/>
             <a:ext cx="10287000" cy="228600"/>
           </a:xfrm>
           <a:prstGeom prst="rect">
@@ -32585,7 +33866,7 @@
         </p:nvSpPr>
         <p:spPr>
           <a:xfrm>
-            <a:off x="952500" y="3198495"/>
+            <a:off x="952500" y="3055620"/>
             <a:ext cx="10287000" cy="228600"/>
           </a:xfrm>
           <a:prstGeom prst="rect">
@@ -32624,7 +33905,7 @@
         </p:nvSpPr>
         <p:spPr>
           <a:xfrm>
-            <a:off x="952500" y="3436620"/>
+            <a:off x="952500" y="3293745"/>
             <a:ext cx="10287000" cy="228600"/>
           </a:xfrm>
           <a:prstGeom prst="rect">
@@ -32663,7 +33944,7 @@
         </p:nvSpPr>
         <p:spPr>
           <a:xfrm>
-            <a:off x="952500" y="3674745"/>
+            <a:off x="952500" y="3531870"/>
             <a:ext cx="10287000" cy="228600"/>
           </a:xfrm>
           <a:prstGeom prst="rect">
@@ -32702,7 +33983,7 @@
         </p:nvSpPr>
         <p:spPr>
           <a:xfrm>
-            <a:off x="952500" y="3912870"/>
+            <a:off x="952500" y="3769995"/>
             <a:ext cx="10287000" cy="228600"/>
           </a:xfrm>
           <a:prstGeom prst="rect">
@@ -32741,7 +34022,7 @@
         </p:nvSpPr>
         <p:spPr>
           <a:xfrm>
-            <a:off x="952500" y="4150995"/>
+            <a:off x="952500" y="4008120"/>
             <a:ext cx="10287000" cy="228600"/>
           </a:xfrm>
           <a:prstGeom prst="rect">
@@ -32780,7 +34061,7 @@
         </p:nvSpPr>
         <p:spPr>
           <a:xfrm>
-            <a:off x="952500" y="4389120"/>
+            <a:off x="952500" y="4246245"/>
             <a:ext cx="10287000" cy="228600"/>
           </a:xfrm>
           <a:prstGeom prst="rect">
@@ -32819,7 +34100,7 @@
         </p:nvSpPr>
         <p:spPr>
           <a:xfrm>
-            <a:off x="952500" y="4627245"/>
+            <a:off x="952500" y="4484370"/>
             <a:ext cx="10287000" cy="228600"/>
           </a:xfrm>
           <a:prstGeom prst="rect">
@@ -32858,7 +34139,7 @@
         </p:nvSpPr>
         <p:spPr>
           <a:xfrm>
-            <a:off x="952500" y="4865370"/>
+            <a:off x="952500" y="4722495"/>
             <a:ext cx="10287000" cy="228600"/>
           </a:xfrm>
           <a:prstGeom prst="rect">
@@ -32897,7 +34178,7 @@
         </p:nvSpPr>
         <p:spPr>
           <a:xfrm>
-            <a:off x="685800" y="5503545"/>
+            <a:off x="685800" y="5360670"/>
             <a:ext cx="28575" cy="565785"/>
           </a:xfrm>
           <a:prstGeom prst="rect">
@@ -32941,7 +34222,7 @@
         </p:nvSpPr>
         <p:spPr>
           <a:xfrm>
-            <a:off x="876300" y="5484495"/>
+            <a:off x="876300" y="5341620"/>
             <a:ext cx="10629900" cy="666750"/>
           </a:xfrm>
           <a:prstGeom prst="rect">
@@ -33163,7 +34444,7 @@
         </p:nvSpPr>
         <p:spPr>
           <a:xfrm>
-            <a:off x="685800" y="2193226"/>
+            <a:off x="685800" y="2031302"/>
             <a:ext cx="5143500" cy="182880"/>
           </a:xfrm>
           <a:prstGeom prst="rect">
@@ -33202,7 +34483,7 @@
         </p:nvSpPr>
         <p:spPr>
           <a:xfrm>
-            <a:off x="685800" y="2402776"/>
+            <a:off x="685800" y="2240852"/>
             <a:ext cx="419100" cy="28575"/>
           </a:xfrm>
           <a:prstGeom prst="rect">
@@ -33246,7 +34527,7 @@
         </p:nvSpPr>
         <p:spPr>
           <a:xfrm>
-            <a:off x="704850" y="2792540"/>
+            <a:off x="704850" y="2630614"/>
             <a:ext cx="57150" cy="57150"/>
           </a:xfrm>
           <a:prstGeom prst="rect">
@@ -33290,7 +34571,7 @@
         </p:nvSpPr>
         <p:spPr>
           <a:xfrm>
-            <a:off x="971550" y="2688526"/>
+            <a:off x="971550" y="2526602"/>
             <a:ext cx="4857750" cy="95250"/>
           </a:xfrm>
           <a:prstGeom prst="rect">
@@ -33329,7 +34610,7 @@
         </p:nvSpPr>
         <p:spPr>
           <a:xfrm>
-            <a:off x="704850" y="3587306"/>
+            <a:off x="704850" y="3425380"/>
             <a:ext cx="57150" cy="57150"/>
           </a:xfrm>
           <a:prstGeom prst="rect">
@@ -33373,7 +34654,7 @@
         </p:nvSpPr>
         <p:spPr>
           <a:xfrm>
-            <a:off x="971550" y="3483292"/>
+            <a:off x="971550" y="3321368"/>
             <a:ext cx="4857750" cy="95250"/>
           </a:xfrm>
           <a:prstGeom prst="rect">
@@ -33412,7 +34693,7 @@
         </p:nvSpPr>
         <p:spPr>
           <a:xfrm>
-            <a:off x="704850" y="4382072"/>
+            <a:off x="704850" y="4220146"/>
             <a:ext cx="57150" cy="57150"/>
           </a:xfrm>
           <a:prstGeom prst="rect">
@@ -33456,7 +34737,7 @@
         </p:nvSpPr>
         <p:spPr>
           <a:xfrm>
-            <a:off x="971550" y="4278058"/>
+            <a:off x="971550" y="4116134"/>
             <a:ext cx="4857750" cy="95250"/>
           </a:xfrm>
           <a:prstGeom prst="rect">
@@ -33495,7 +34776,7 @@
         </p:nvSpPr>
         <p:spPr>
           <a:xfrm>
-            <a:off x="704850" y="5176837"/>
+            <a:off x="704850" y="5014912"/>
             <a:ext cx="57150" cy="57150"/>
           </a:xfrm>
           <a:prstGeom prst="rect">
@@ -33539,7 +34820,7 @@
         </p:nvSpPr>
         <p:spPr>
           <a:xfrm>
-            <a:off x="971550" y="5072824"/>
+            <a:off x="971550" y="4910899"/>
             <a:ext cx="4857750" cy="95250"/>
           </a:xfrm>
           <a:prstGeom prst="rect">
@@ -33578,7 +34859,7 @@
         </p:nvSpPr>
         <p:spPr>
           <a:xfrm>
-            <a:off x="6362700" y="2193226"/>
+            <a:off x="6362700" y="2031302"/>
             <a:ext cx="5143500" cy="182880"/>
           </a:xfrm>
           <a:prstGeom prst="rect">
@@ -33617,7 +34898,7 @@
         </p:nvSpPr>
         <p:spPr>
           <a:xfrm>
-            <a:off x="6362700" y="2402776"/>
+            <a:off x="6362700" y="2240852"/>
             <a:ext cx="419100" cy="28575"/>
           </a:xfrm>
           <a:prstGeom prst="rect">
@@ -33661,7 +34942,7 @@
         </p:nvSpPr>
         <p:spPr>
           <a:xfrm>
-            <a:off x="6381750" y="2792540"/>
+            <a:off x="6381750" y="2630614"/>
             <a:ext cx="57150" cy="57150"/>
           </a:xfrm>
           <a:prstGeom prst="rect">
@@ -33705,7 +34986,7 @@
         </p:nvSpPr>
         <p:spPr>
           <a:xfrm>
-            <a:off x="6648450" y="2688526"/>
+            <a:off x="6648450" y="2526602"/>
             <a:ext cx="4857750" cy="95250"/>
           </a:xfrm>
           <a:prstGeom prst="rect">
@@ -33744,7 +35025,7 @@
         </p:nvSpPr>
         <p:spPr>
           <a:xfrm>
-            <a:off x="6381750" y="3587306"/>
+            <a:off x="6381750" y="3425380"/>
             <a:ext cx="57150" cy="57150"/>
           </a:xfrm>
           <a:prstGeom prst="rect">
@@ -33788,7 +35069,7 @@
         </p:nvSpPr>
         <p:spPr>
           <a:xfrm>
-            <a:off x="6648450" y="3483292"/>
+            <a:off x="6648450" y="3321368"/>
             <a:ext cx="4857750" cy="95250"/>
           </a:xfrm>
           <a:prstGeom prst="rect">
@@ -33827,7 +35108,7 @@
         </p:nvSpPr>
         <p:spPr>
           <a:xfrm>
-            <a:off x="6381750" y="4382072"/>
+            <a:off x="6381750" y="4220146"/>
             <a:ext cx="57150" cy="57150"/>
           </a:xfrm>
           <a:prstGeom prst="rect">
@@ -33871,7 +35152,7 @@
         </p:nvSpPr>
         <p:spPr>
           <a:xfrm>
-            <a:off x="6648450" y="4278058"/>
+            <a:off x="6648450" y="4116134"/>
             <a:ext cx="4857750" cy="95250"/>
           </a:xfrm>
           <a:prstGeom prst="rect">
@@ -34077,7 +35358,7 @@
         </p:nvSpPr>
         <p:spPr>
           <a:xfrm>
-            <a:off x="857250" y="2238375"/>
+            <a:off x="857250" y="2076450"/>
             <a:ext cx="4381500" cy="167640"/>
           </a:xfrm>
           <a:prstGeom prst="rect">
@@ -34116,7 +35397,7 @@
         </p:nvSpPr>
         <p:spPr>
           <a:xfrm>
-            <a:off x="857250" y="3952875"/>
+            <a:off x="857250" y="3790950"/>
             <a:ext cx="3429000" cy="438150"/>
           </a:xfrm>
           <a:prstGeom prst="roundRect">
@@ -34164,7 +35445,7 @@
         </p:nvSpPr>
         <p:spPr>
           <a:xfrm>
-            <a:off x="1047750" y="4086225"/>
+            <a:off x="1047750" y="3924300"/>
             <a:ext cx="3048000" cy="213360"/>
           </a:xfrm>
           <a:prstGeom prst="rect">
@@ -34203,7 +35484,7 @@
         </p:nvSpPr>
         <p:spPr>
           <a:xfrm>
-            <a:off x="857250" y="3457575"/>
+            <a:off x="857250" y="3295650"/>
             <a:ext cx="3429000" cy="438150"/>
           </a:xfrm>
           <a:prstGeom prst="roundRect">
@@ -34251,7 +35532,7 @@
         </p:nvSpPr>
         <p:spPr>
           <a:xfrm>
-            <a:off x="1047750" y="3590925"/>
+            <a:off x="1047750" y="3429000"/>
             <a:ext cx="3048000" cy="213360"/>
           </a:xfrm>
           <a:prstGeom prst="rect">
@@ -34290,7 +35571,7 @@
         </p:nvSpPr>
         <p:spPr>
           <a:xfrm>
-            <a:off x="857250" y="2962275"/>
+            <a:off x="857250" y="2800350"/>
             <a:ext cx="3429000" cy="438150"/>
           </a:xfrm>
           <a:prstGeom prst="roundRect">
@@ -34338,7 +35619,7 @@
         </p:nvSpPr>
         <p:spPr>
           <a:xfrm>
-            <a:off x="1047750" y="3095625"/>
+            <a:off x="1047750" y="2933700"/>
             <a:ext cx="3048000" cy="213360"/>
           </a:xfrm>
           <a:prstGeom prst="rect">
@@ -34377,7 +35658,7 @@
         </p:nvSpPr>
         <p:spPr>
           <a:xfrm>
-            <a:off x="4400550" y="2962275"/>
+            <a:off x="4400550" y="2800350"/>
             <a:ext cx="28575" cy="1428750"/>
           </a:xfrm>
           <a:prstGeom prst="rect">
@@ -34421,7 +35702,7 @@
         </p:nvSpPr>
         <p:spPr>
           <a:xfrm>
-            <a:off x="742950" y="4524375"/>
+            <a:off x="742950" y="4362450"/>
             <a:ext cx="3657600" cy="381000"/>
           </a:xfrm>
           <a:prstGeom prst="rect">
@@ -34460,7 +35741,7 @@
         </p:nvSpPr>
         <p:spPr>
           <a:xfrm>
-            <a:off x="857250" y="2409825"/>
+            <a:off x="857250" y="2247900"/>
             <a:ext cx="3429000" cy="495300"/>
           </a:xfrm>
           <a:prstGeom prst="roundRect">
@@ -34509,7 +35790,7 @@
         </p:nvSpPr>
         <p:spPr>
           <a:xfrm>
-            <a:off x="1047750" y="2505075"/>
+            <a:off x="1047750" y="2343150"/>
             <a:ext cx="3048000" cy="213360"/>
           </a:xfrm>
           <a:prstGeom prst="rect">
@@ -34548,7 +35829,7 @@
         </p:nvSpPr>
         <p:spPr>
           <a:xfrm>
-            <a:off x="1047750" y="2686050"/>
+            <a:off x="1047750" y="2524125"/>
             <a:ext cx="3048000" cy="182880"/>
           </a:xfrm>
           <a:prstGeom prst="rect">
@@ -34587,7 +35868,7 @@
         </p:nvCxnSpPr>
         <p:spPr>
           <a:xfrm>
-            <a:off x="4857750" y="2352675"/>
+            <a:off x="4857750" y="2190750"/>
             <a:ext cx="0" cy="2152650"/>
           </a:xfrm>
           <a:prstGeom prst="line">
@@ -34622,7 +35903,7 @@
         </p:nvSpPr>
         <p:spPr>
           <a:xfrm>
-            <a:off x="5257800" y="2809875"/>
+            <a:off x="5257800" y="2647950"/>
             <a:ext cx="3619500" cy="243840"/>
           </a:xfrm>
           <a:prstGeom prst="rect">
@@ -34661,7 +35942,7 @@
         </p:nvSpPr>
         <p:spPr>
           <a:xfrm>
-            <a:off x="5257800" y="3076575"/>
+            <a:off x="5257800" y="2914650"/>
             <a:ext cx="3810000" cy="666750"/>
           </a:xfrm>
           <a:prstGeom prst="rect">
@@ -34700,7 +35981,7 @@
         </p:nvSpPr>
         <p:spPr>
           <a:xfrm>
-            <a:off x="5257800" y="3648075"/>
+            <a:off x="5257800" y="3486150"/>
             <a:ext cx="3619500" cy="243840"/>
           </a:xfrm>
           <a:prstGeom prst="rect">
@@ -34739,7 +36020,7 @@
         </p:nvSpPr>
         <p:spPr>
           <a:xfrm>
-            <a:off x="5257800" y="3914775"/>
+            <a:off x="5257800" y="3752850"/>
             <a:ext cx="3810000" cy="666750"/>
           </a:xfrm>
           <a:prstGeom prst="rect">

--- a/trabalhos/T1-Docker-Invite-People.pptx
+++ b/trabalhos/T1-Docker-Invite-People.pptx
@@ -11756,9 +11756,33 @@
           </a:p>
         </p:txBody>
       </p:sp>
-      <p:sp>
-        <p:nvSpPr>
-          <p:cNvPr id="7" name="TextBox 6"/>
+      <p:pic>
+        <p:nvPicPr>
+          <p:cNvPr id="7" name="Picture 6" descr="docker.png"/>
+          <p:cNvPicPr>
+            <a:picLocks noChangeAspect="1"/>
+          </p:cNvPicPr>
+          <p:nvPr/>
+        </p:nvPicPr>
+        <p:blipFill>
+          <a:blip r:embed="rId3"/>
+          <a:stretch>
+            <a:fillRect/>
+          </a:stretch>
+        </p:blipFill>
+        <p:spPr>
+          <a:xfrm>
+            <a:off x="8572500" y="2038350"/>
+            <a:ext cx="2667000" cy="1912607"/>
+          </a:xfrm>
+          <a:prstGeom prst="rect">
+            <a:avLst/>
+          </a:prstGeom>
+        </p:spPr>
+      </p:pic>
+      <p:sp>
+        <p:nvSpPr>
+          <p:cNvPr id="8" name="TextBox 7"/>
           <p:cNvSpPr txBox="1"/>
           <p:nvPr/>
         </p:nvSpPr>
@@ -11797,7 +11821,7 @@
       </p:sp>
       <p:sp>
         <p:nvSpPr>
-          <p:cNvPr id="8" name="TextBox 7"/>
+          <p:cNvPr id="9" name="TextBox 8"/>
           <p:cNvSpPr txBox="1"/>
           <p:nvPr/>
         </p:nvSpPr>
@@ -11852,7 +11876,7 @@
       </p:sp>
       <p:sp>
         <p:nvSpPr>
-          <p:cNvPr id="9" name="TextBox 8"/>
+          <p:cNvPr id="10" name="TextBox 9"/>
           <p:cNvSpPr txBox="1"/>
           <p:nvPr/>
         </p:nvSpPr>
@@ -11891,7 +11915,7 @@
       </p:sp>
       <p:sp>
         <p:nvSpPr>
-          <p:cNvPr id="10" name="TextBox 9"/>
+          <p:cNvPr id="11" name="TextBox 10"/>
           <p:cNvSpPr txBox="1"/>
           <p:nvPr/>
         </p:nvSpPr>
@@ -13542,16 +13566,40 @@
           </a:prstGeom>
         </p:spPr>
       </p:pic>
-      <p:sp>
-        <p:nvSpPr>
-          <p:cNvPr id="3" name="TextBox 2"/>
+      <p:pic>
+        <p:nvPicPr>
+          <p:cNvPr id="3" name="Picture 2" descr="oci-branco.png"/>
+          <p:cNvPicPr>
+            <a:picLocks noChangeAspect="1"/>
+          </p:cNvPicPr>
+          <p:nvPr/>
+        </p:nvPicPr>
+        <p:blipFill>
+          <a:blip r:embed="rId3"/>
+          <a:stretch>
+            <a:fillRect/>
+          </a:stretch>
+        </p:blipFill>
+        <p:spPr>
+          <a:xfrm>
+            <a:off x="7810500" y="1962150"/>
+            <a:ext cx="3048000" cy="839090"/>
+          </a:xfrm>
+          <a:prstGeom prst="rect">
+            <a:avLst/>
+          </a:prstGeom>
+        </p:spPr>
+      </p:pic>
+      <p:sp>
+        <p:nvSpPr>
+          <p:cNvPr id="4" name="TextBox 3"/>
           <p:cNvSpPr txBox="1"/>
           <p:nvPr/>
         </p:nvSpPr>
         <p:spPr>
           <a:xfrm>
             <a:off x="914400" y="1866900"/>
-            <a:ext cx="9715500" cy="1905000"/>
+            <a:ext cx="6667500" cy="1905000"/>
           </a:xfrm>
           <a:prstGeom prst="rect">
             <a:avLst/>
@@ -13599,7 +13647,7 @@
       </p:sp>
       <p:sp>
         <p:nvSpPr>
-          <p:cNvPr id="4" name="TextBox 3"/>
+          <p:cNvPr id="5" name="TextBox 4"/>
           <p:cNvSpPr txBox="1"/>
           <p:nvPr/>
         </p:nvSpPr>
@@ -13638,7 +13686,7 @@
       </p:sp>
       <p:sp>
         <p:nvSpPr>
-          <p:cNvPr id="5" name="TextBox 4"/>
+          <p:cNvPr id="6" name="TextBox 5"/>
           <p:cNvSpPr txBox="1"/>
           <p:nvPr/>
         </p:nvSpPr>
@@ -13677,7 +13725,7 @@
       </p:sp>
       <p:sp>
         <p:nvSpPr>
-          <p:cNvPr id="6" name="TextBox 5"/>
+          <p:cNvPr id="7" name="TextBox 6"/>
           <p:cNvSpPr txBox="1"/>
           <p:nvPr/>
         </p:nvSpPr>
@@ -22631,16 +22679,40 @@
           </a:prstGeom>
         </p:spPr>
       </p:pic>
-      <p:sp>
-        <p:nvSpPr>
-          <p:cNvPr id="3" name="TextBox 2"/>
+      <p:pic>
+        <p:nvPicPr>
+          <p:cNvPr id="3" name="Picture 2" descr="kubernetes-branco.png"/>
+          <p:cNvPicPr>
+            <a:picLocks noChangeAspect="1"/>
+          </p:cNvPicPr>
+          <p:nvPr/>
+        </p:nvPicPr>
+        <p:blipFill>
+          <a:blip r:embed="rId3"/>
+          <a:stretch>
+            <a:fillRect/>
+          </a:stretch>
+        </p:blipFill>
+        <p:spPr>
+          <a:xfrm>
+            <a:off x="9144000" y="1676400"/>
+            <a:ext cx="1809750" cy="1809750"/>
+          </a:xfrm>
+          <a:prstGeom prst="rect">
+            <a:avLst/>
+          </a:prstGeom>
+        </p:spPr>
+      </p:pic>
+      <p:sp>
+        <p:nvSpPr>
+          <p:cNvPr id="4" name="TextBox 3"/>
           <p:cNvSpPr txBox="1"/>
           <p:nvPr/>
         </p:nvSpPr>
         <p:spPr>
           <a:xfrm>
             <a:off x="914400" y="1866900"/>
-            <a:ext cx="9715500" cy="1905000"/>
+            <a:ext cx="6667500" cy="1905000"/>
           </a:xfrm>
           <a:prstGeom prst="rect">
             <a:avLst/>
@@ -22688,7 +22760,7 @@
       </p:sp>
       <p:sp>
         <p:nvSpPr>
-          <p:cNvPr id="4" name="TextBox 3"/>
+          <p:cNvPr id="5" name="TextBox 4"/>
           <p:cNvSpPr txBox="1"/>
           <p:nvPr/>
         </p:nvSpPr>
@@ -22727,7 +22799,7 @@
       </p:sp>
       <p:sp>
         <p:nvSpPr>
-          <p:cNvPr id="5" name="TextBox 4"/>
+          <p:cNvPr id="6" name="TextBox 5"/>
           <p:cNvSpPr txBox="1"/>
           <p:nvPr/>
         </p:nvSpPr>
@@ -22766,7 +22838,7 @@
       </p:sp>
       <p:sp>
         <p:nvSpPr>
-          <p:cNvPr id="6" name="TextBox 5"/>
+          <p:cNvPr id="7" name="TextBox 6"/>
           <p:cNvSpPr txBox="1"/>
           <p:nvPr/>
         </p:nvSpPr>
@@ -31434,141 +31506,33 @@
           </a:prstGeom>
         </p:spPr>
       </p:pic>
-      <p:sp>
-        <p:nvSpPr>
-          <p:cNvPr id="4" name="Rounded Rectangle 3"/>
-          <p:cNvSpPr/>
-          <p:nvPr/>
-        </p:nvSpPr>
-        <p:spPr>
-          <a:xfrm>
-            <a:off x="8953500" y="3448050"/>
-            <a:ext cx="1676400" cy="247650"/>
-          </a:xfrm>
-          <a:prstGeom prst="roundRect">
-            <a:avLst/>
-          </a:prstGeom>
-          <a:solidFill>
-            <a:srgbClr val="8A3A24"/>
-          </a:solidFill>
-          <a:ln>
-            <a:noFill/>
-          </a:ln>
-          <a:effectLst/>
-        </p:spPr>
-        <p:style>
-          <a:lnRef idx="1">
-            <a:schemeClr val="accent1"/>
-          </a:lnRef>
-          <a:fillRef idx="3">
-            <a:schemeClr val="accent1"/>
-          </a:fillRef>
-          <a:effectRef idx="2">
-            <a:schemeClr val="accent1"/>
-          </a:effectRef>
-          <a:fontRef idx="minor">
-            <a:schemeClr val="lt1"/>
-          </a:fontRef>
-        </p:style>
-        <p:txBody>
-          <a:bodyPr rtlCol="0" anchor="ctr"/>
-          <a:lstStyle/>
-          <a:p>
-            <a:pPr algn="ctr"/>
-          </a:p>
-        </p:txBody>
-      </p:sp>
-      <p:sp>
-        <p:nvSpPr>
-          <p:cNvPr id="5" name="Rounded Rectangle 4"/>
-          <p:cNvSpPr/>
-          <p:nvPr/>
-        </p:nvSpPr>
-        <p:spPr>
-          <a:xfrm>
-            <a:off x="8953500" y="3143250"/>
-            <a:ext cx="1676400" cy="247650"/>
-          </a:xfrm>
-          <a:prstGeom prst="roundRect">
-            <a:avLst/>
-          </a:prstGeom>
-          <a:solidFill>
-            <a:srgbClr val="C04420"/>
-          </a:solidFill>
-          <a:ln>
-            <a:noFill/>
-          </a:ln>
-          <a:effectLst/>
-        </p:spPr>
-        <p:style>
-          <a:lnRef idx="1">
-            <a:schemeClr val="accent1"/>
-          </a:lnRef>
-          <a:fillRef idx="3">
-            <a:schemeClr val="accent1"/>
-          </a:fillRef>
-          <a:effectRef idx="2">
-            <a:schemeClr val="accent1"/>
-          </a:effectRef>
-          <a:fontRef idx="minor">
-            <a:schemeClr val="lt1"/>
-          </a:fontRef>
-        </p:style>
-        <p:txBody>
-          <a:bodyPr rtlCol="0" anchor="ctr"/>
-          <a:lstStyle/>
-          <a:p>
-            <a:pPr algn="ctr"/>
-          </a:p>
-        </p:txBody>
-      </p:sp>
-      <p:sp>
-        <p:nvSpPr>
-          <p:cNvPr id="6" name="Rounded Rectangle 5"/>
-          <p:cNvSpPr/>
-          <p:nvPr/>
-        </p:nvSpPr>
-        <p:spPr>
-          <a:xfrm>
-            <a:off x="8953500" y="2838450"/>
-            <a:ext cx="1676400" cy="247650"/>
-          </a:xfrm>
-          <a:prstGeom prst="roundRect">
-            <a:avLst/>
-          </a:prstGeom>
-          <a:solidFill>
-            <a:srgbClr val="E94D1C"/>
-          </a:solidFill>
-          <a:ln>
-            <a:noFill/>
-          </a:ln>
-          <a:effectLst/>
-        </p:spPr>
-        <p:style>
-          <a:lnRef idx="1">
-            <a:schemeClr val="accent1"/>
-          </a:lnRef>
-          <a:fillRef idx="3">
-            <a:schemeClr val="accent1"/>
-          </a:fillRef>
-          <a:effectRef idx="2">
-            <a:schemeClr val="accent1"/>
-          </a:effectRef>
-          <a:fontRef idx="minor">
-            <a:schemeClr val="lt1"/>
-          </a:fontRef>
-        </p:style>
-        <p:txBody>
-          <a:bodyPr rtlCol="0" anchor="ctr"/>
-          <a:lstStyle/>
-          <a:p>
-            <a:pPr algn="ctr"/>
-          </a:p>
-        </p:txBody>
-      </p:sp>
-      <p:sp>
-        <p:nvSpPr>
-          <p:cNvPr id="7" name="TextBox 6"/>
+      <p:pic>
+        <p:nvPicPr>
+          <p:cNvPr id="4" name="Picture 3" descr="docker.png"/>
+          <p:cNvPicPr>
+            <a:picLocks noChangeAspect="1"/>
+          </p:cNvPicPr>
+          <p:nvPr/>
+        </p:nvPicPr>
+        <p:blipFill>
+          <a:blip r:embed="rId3"/>
+          <a:stretch>
+            <a:fillRect/>
+          </a:stretch>
+        </p:blipFill>
+        <p:spPr>
+          <a:xfrm>
+            <a:off x="8763000" y="2381250"/>
+            <a:ext cx="2476500" cy="1775993"/>
+          </a:xfrm>
+          <a:prstGeom prst="rect">
+            <a:avLst/>
+          </a:prstGeom>
+        </p:spPr>
+      </p:pic>
+      <p:sp>
+        <p:nvSpPr>
+          <p:cNvPr id="5" name="TextBox 4"/>
           <p:cNvSpPr txBox="1"/>
           <p:nvPr/>
         </p:nvSpPr>
@@ -31607,7 +31571,7 @@
       </p:sp>
       <p:sp>
         <p:nvSpPr>
-          <p:cNvPr id="8" name="TextBox 7"/>
+          <p:cNvPr id="6" name="TextBox 5"/>
           <p:cNvSpPr txBox="1"/>
           <p:nvPr/>
         </p:nvSpPr>
@@ -31646,7 +31610,7 @@
       </p:sp>
       <p:sp>
         <p:nvSpPr>
-          <p:cNvPr id="9" name="TextBox 8"/>
+          <p:cNvPr id="7" name="TextBox 6"/>
           <p:cNvSpPr txBox="1"/>
           <p:nvPr/>
         </p:nvSpPr>
@@ -31685,7 +31649,7 @@
       </p:sp>
       <p:sp>
         <p:nvSpPr>
-          <p:cNvPr id="10" name="TextBox 9"/>
+          <p:cNvPr id="8" name="TextBox 7"/>
           <p:cNvSpPr txBox="1"/>
           <p:nvPr/>
         </p:nvSpPr>
@@ -31724,7 +31688,7 @@
       </p:sp>
       <p:sp>
         <p:nvSpPr>
-          <p:cNvPr id="11" name="TextBox 10"/>
+          <p:cNvPr id="9" name="TextBox 8"/>
           <p:cNvSpPr txBox="1"/>
           <p:nvPr/>
         </p:nvSpPr>

--- a/trabalhos/T1-Docker-Invite-People.pptx
+++ b/trabalhos/T1-Docker-Invite-People.pptx
@@ -19100,7 +19100,7 @@
                 </a:solidFill>
                 <a:latin typeface="Roboto"/>
               </a:rPr>
-              <a:t>As imagens do arquivo são exemplo. A stack ainda não foi decidida e é assunto do documento de decisões arquiteturais.</a:t>
+              <a:t>As imagens do arquivo são exemplo. A stack é decisão do documento de decisões arquiteturais.</a:t>
             </a:r>
           </a:p>
         </p:txBody>
@@ -20127,7 +20127,7 @@
         </p:nvSpPr>
         <p:spPr>
           <a:xfrm>
-            <a:off x="704850" y="2860548"/>
+            <a:off x="704850" y="2998851"/>
             <a:ext cx="57150" cy="57150"/>
           </a:xfrm>
           <a:prstGeom prst="rect">
@@ -20171,8 +20171,8 @@
         </p:nvSpPr>
         <p:spPr>
           <a:xfrm>
-            <a:off x="971550" y="2751582"/>
-            <a:ext cx="7581900" cy="95250"/>
+            <a:off x="971550" y="2889885"/>
+            <a:ext cx="9677400" cy="95250"/>
           </a:xfrm>
           <a:prstGeom prst="rect">
             <a:avLst/>
@@ -20210,7 +20210,7 @@
         </p:nvSpPr>
         <p:spPr>
           <a:xfrm>
-            <a:off x="704850" y="3976116"/>
+            <a:off x="704850" y="3837813"/>
             <a:ext cx="57150" cy="57150"/>
           </a:xfrm>
           <a:prstGeom prst="rect">
@@ -20254,8 +20254,8 @@
         </p:nvSpPr>
         <p:spPr>
           <a:xfrm>
-            <a:off x="971550" y="3867150"/>
-            <a:ext cx="7581900" cy="95250"/>
+            <a:off x="971550" y="3728847"/>
+            <a:ext cx="9677400" cy="95250"/>
           </a:xfrm>
           <a:prstGeom prst="rect">
             <a:avLst/>
@@ -20293,7 +20293,7 @@
         </p:nvSpPr>
         <p:spPr>
           <a:xfrm>
-            <a:off x="704850" y="4538472"/>
+            <a:off x="704850" y="4400169"/>
             <a:ext cx="57150" cy="57150"/>
           </a:xfrm>
           <a:prstGeom prst="rect">
@@ -20337,8 +20337,8 @@
         </p:nvSpPr>
         <p:spPr>
           <a:xfrm>
-            <a:off x="971550" y="4429506"/>
-            <a:ext cx="7581900" cy="95250"/>
+            <a:off x="971550" y="4291203"/>
+            <a:ext cx="9677400" cy="95250"/>
           </a:xfrm>
           <a:prstGeom prst="rect">
             <a:avLst/>
@@ -20370,58 +20370,14 @@
       </p:sp>
       <p:sp>
         <p:nvSpPr>
-          <p:cNvPr id="10" name="Donut 9"/>
-          <p:cNvSpPr/>
-          <p:nvPr/>
-        </p:nvSpPr>
-        <p:spPr>
-          <a:xfrm>
-            <a:off x="9124950" y="2751582"/>
-            <a:ext cx="142875" cy="142875"/>
-          </a:xfrm>
-          <a:prstGeom prst="donut">
-            <a:avLst/>
-          </a:prstGeom>
-          <a:solidFill>
-            <a:srgbClr val="E94D1C"/>
-          </a:solidFill>
-          <a:ln>
-            <a:noFill/>
-          </a:ln>
-          <a:effectLst/>
-        </p:spPr>
-        <p:style>
-          <a:lnRef idx="1">
-            <a:schemeClr val="accent1"/>
-          </a:lnRef>
-          <a:fillRef idx="3">
-            <a:schemeClr val="accent1"/>
-          </a:fillRef>
-          <a:effectRef idx="2">
-            <a:schemeClr val="accent1"/>
-          </a:effectRef>
-          <a:fontRef idx="minor">
-            <a:schemeClr val="lt1"/>
-          </a:fontRef>
-        </p:style>
-        <p:txBody>
-          <a:bodyPr rtlCol="0" anchor="ctr"/>
-          <a:lstStyle/>
-          <a:p>
-            <a:pPr algn="ctr"/>
-          </a:p>
-        </p:txBody>
-      </p:sp>
-      <p:sp>
-        <p:nvSpPr>
-          <p:cNvPr id="11" name="TextBox 10"/>
+          <p:cNvPr id="10" name="TextBox 9"/>
           <p:cNvSpPr txBox="1"/>
           <p:nvPr/>
         </p:nvSpPr>
         <p:spPr>
           <a:xfrm>
-            <a:off x="9372600" y="2761107"/>
-            <a:ext cx="2133600" cy="182880"/>
+            <a:off x="685800" y="6324600"/>
+            <a:ext cx="6667500" cy="182880"/>
           </a:xfrm>
           <a:prstGeom prst="rect">
             <a:avLst/>
@@ -20440,175 +20396,12 @@
               </a:lnSpc>
             </a:pPr>
             <a:r>
-              <a:rPr sz="900" b="1" i="0" spc="120">
-                <a:solidFill>
-                  <a:srgbClr val="E94D1C"/>
+              <a:rPr sz="900" b="0" i="0">
+                <a:solidFill>
+                  <a:srgbClr val="6B6B78"/>
                 </a:solidFill>
                 <a:latin typeface="Roboto"/>
               </a:rPr>
-              <a:t>EM ABERTO</a:t>
-            </a:r>
-          </a:p>
-        </p:txBody>
-      </p:sp>
-      <p:sp>
-        <p:nvSpPr>
-          <p:cNvPr id="12" name="Rectangle 11"/>
-          <p:cNvSpPr/>
-          <p:nvPr/>
-        </p:nvSpPr>
-        <p:spPr>
-          <a:xfrm>
-            <a:off x="9124950" y="3037332"/>
-            <a:ext cx="38100" cy="1234440"/>
-          </a:xfrm>
-          <a:prstGeom prst="rect">
-            <a:avLst/>
-          </a:prstGeom>
-          <a:solidFill>
-            <a:srgbClr val="E94D1C"/>
-          </a:solidFill>
-          <a:ln>
-            <a:noFill/>
-          </a:ln>
-          <a:effectLst/>
-        </p:spPr>
-        <p:style>
-          <a:lnRef idx="1">
-            <a:schemeClr val="accent1"/>
-          </a:lnRef>
-          <a:fillRef idx="3">
-            <a:schemeClr val="accent1"/>
-          </a:fillRef>
-          <a:effectRef idx="2">
-            <a:schemeClr val="accent1"/>
-          </a:effectRef>
-          <a:fontRef idx="minor">
-            <a:schemeClr val="lt1"/>
-          </a:fontRef>
-        </p:style>
-        <p:txBody>
-          <a:bodyPr rtlCol="0" anchor="ctr" wrap="square" lIns="0" rIns="0" tIns="0" bIns="0"/>
-          <a:lstStyle/>
-          <a:p>
-            <a:pPr algn="ctr"/>
-          </a:p>
-        </p:txBody>
-      </p:sp>
-      <p:sp>
-        <p:nvSpPr>
-          <p:cNvPr id="13" name="TextBox 12"/>
-          <p:cNvSpPr txBox="1"/>
-          <p:nvPr/>
-        </p:nvSpPr>
-        <p:spPr>
-          <a:xfrm>
-            <a:off x="9334500" y="3037332"/>
-            <a:ext cx="2171700" cy="1805940"/>
-          </a:xfrm>
-          <a:prstGeom prst="rect">
-            <a:avLst/>
-          </a:prstGeom>
-          <a:noFill/>
-        </p:spPr>
-        <p:txBody>
-          <a:bodyPr wrap="square" lIns="0" rIns="0" tIns="0" bIns="0" anchor="t">
-            <a:spAutoFit/>
-          </a:bodyPr>
-          <a:lstStyle/>
-          <a:p>
-            <a:pPr algn="l">
-              <a:lnSpc>
-                <a:spcPct val="140000"/>
-              </a:lnSpc>
-              <a:spcAft>
-                <a:spcPts val="600"/>
-              </a:spcAft>
-            </a:pPr>
-            <a:r>
-              <a:rPr sz="1200" b="0" i="0">
-                <a:solidFill>
-                  <a:srgbClr val="3A3A44"/>
-                </a:solidFill>
-                <a:latin typeface="Roboto"/>
-              </a:rPr>
-              <a:t>Mesma imagem de front-end ou imagens separadas?</a:t>
-            </a:r>
-          </a:p>
-          <a:p>
-            <a:pPr>
-              <a:lnSpc>
-                <a:spcPct val="140000"/>
-              </a:lnSpc>
-              <a:spcAft>
-                <a:spcPts val="600"/>
-              </a:spcAft>
-            </a:pPr>
-            <a:r>
-              <a:rPr sz="1200" b="0" i="0">
-                <a:solidFill>
-                  <a:srgbClr val="3A3A44"/>
-                </a:solidFill>
-                <a:latin typeface="Roboto"/>
-              </a:rPr>
-              <a:t/>
-            </a:r>
-          </a:p>
-          <a:p>
-            <a:pPr>
-              <a:lnSpc>
-                <a:spcPct val="140000"/>
-              </a:lnSpc>
-              <a:spcAft>
-                <a:spcPts val="600"/>
-              </a:spcAft>
-            </a:pPr>
-            <a:r>
-              <a:rPr sz="1200" b="0" i="0">
-                <a:solidFill>
-                  <a:srgbClr val="3A3A44"/>
-                </a:solidFill>
-                <a:latin typeface="Roboto"/>
-              </a:rPr>
-              <a:t>Entrada direta para os dois diagramas de arquitetura. Ainda não decidida.</a:t>
-            </a:r>
-          </a:p>
-        </p:txBody>
-      </p:sp>
-      <p:sp>
-        <p:nvSpPr>
-          <p:cNvPr id="14" name="TextBox 13"/>
-          <p:cNvSpPr txBox="1"/>
-          <p:nvPr/>
-        </p:nvSpPr>
-        <p:spPr>
-          <a:xfrm>
-            <a:off x="685800" y="6324600"/>
-            <a:ext cx="6667500" cy="182880"/>
-          </a:xfrm>
-          <a:prstGeom prst="rect">
-            <a:avLst/>
-          </a:prstGeom>
-          <a:noFill/>
-        </p:spPr>
-        <p:txBody>
-          <a:bodyPr wrap="square" lIns="0" rIns="0" tIns="0" bIns="0" anchor="t">
-            <a:spAutoFit/>
-          </a:bodyPr>
-          <a:lstStyle/>
-          <a:p>
-            <a:pPr algn="l">
-              <a:lnSpc>
-                <a:spcPct val="120000"/>
-              </a:lnSpc>
-            </a:pPr>
-            <a:r>
-              <a:rPr sz="900" b="0" i="0">
-                <a:solidFill>
-                  <a:srgbClr val="6B6B78"/>
-                </a:solidFill>
-                <a:latin typeface="Roboto"/>
-              </a:rPr>
               <a:t>02 · Aplicação no projeto</a:t>
             </a:r>
           </a:p>
@@ -20616,7 +20409,7 @@
       </p:sp>
       <p:sp>
         <p:nvSpPr>
-          <p:cNvPr id="15" name="TextBox 14"/>
+          <p:cNvPr id="11" name="TextBox 10"/>
           <p:cNvSpPr txBox="1"/>
           <p:nvPr/>
         </p:nvSpPr>
@@ -21069,23 +20862,67 @@
                 </a:solidFill>
                 <a:latin typeface="Roboto"/>
               </a:rPr>
-              <a:t>O projeto ainda não decidiu como os componentes serão distribuídos e implantados no ambiente de execução.</a:t>
-            </a:r>
-          </a:p>
-        </p:txBody>
-      </p:sp>
-      <p:sp>
-        <p:nvSpPr>
-          <p:cNvPr id="12" name="Donut 11"/>
+              <a:t>A pergunta desta apresentação é como esses componentes serão distribuídos e implantados no ambiente de execução.</a:t>
+            </a:r>
+          </a:p>
+        </p:txBody>
+      </p:sp>
+      <p:sp>
+        <p:nvSpPr>
+          <p:cNvPr id="12" name="Isosceles Triangle 11"/>
           <p:cNvSpPr/>
           <p:nvPr/>
         </p:nvSpPr>
         <p:spPr>
           <a:xfrm>
             <a:off x="9124950" y="2332101"/>
-            <a:ext cx="142875" cy="142875"/>
-          </a:xfrm>
-          <a:prstGeom prst="donut">
+            <a:ext cx="152400" cy="133350"/>
+          </a:xfrm>
+          <a:prstGeom prst="triangle">
+            <a:avLst/>
+          </a:prstGeom>
+          <a:noFill/>
+          <a:ln w="19050">
+            <a:solidFill>
+              <a:srgbClr val="E94D1C"/>
+            </a:solidFill>
+          </a:ln>
+          <a:effectLst/>
+        </p:spPr>
+        <p:style>
+          <a:lnRef idx="1">
+            <a:schemeClr val="accent1"/>
+          </a:lnRef>
+          <a:fillRef idx="3">
+            <a:schemeClr val="accent1"/>
+          </a:fillRef>
+          <a:effectRef idx="2">
+            <a:schemeClr val="accent1"/>
+          </a:effectRef>
+          <a:fontRef idx="minor">
+            <a:schemeClr val="lt1"/>
+          </a:fontRef>
+        </p:style>
+        <p:txBody>
+          <a:bodyPr rtlCol="0" anchor="ctr"/>
+          <a:lstStyle/>
+          <a:p>
+            <a:pPr algn="ctr"/>
+          </a:p>
+        </p:txBody>
+      </p:sp>
+      <p:sp>
+        <p:nvSpPr>
+          <p:cNvPr id="13" name="Rectangle 12"/>
+          <p:cNvSpPr/>
+          <p:nvPr/>
+        </p:nvSpPr>
+        <p:spPr>
+          <a:xfrm>
+            <a:off x="9193530" y="2389251"/>
+            <a:ext cx="15240" cy="38100"/>
+          </a:xfrm>
+          <a:prstGeom prst="rect">
             <a:avLst/>
           </a:prstGeom>
           <a:solidFill>
@@ -21120,7 +20957,7 @@
       </p:sp>
       <p:sp>
         <p:nvSpPr>
-          <p:cNvPr id="13" name="TextBox 12"/>
+          <p:cNvPr id="14" name="TextBox 13"/>
           <p:cNvSpPr txBox="1"/>
           <p:nvPr/>
         </p:nvSpPr>
@@ -21152,14 +20989,14 @@
                 </a:solidFill>
                 <a:latin typeface="Roboto"/>
               </a:rPr>
-              <a:t>ONDE ESTAMOS HOJE</a:t>
-            </a:r>
-          </a:p>
-        </p:txBody>
-      </p:sp>
-      <p:sp>
-        <p:nvSpPr>
-          <p:cNvPr id="14" name="Rectangle 13"/>
+              <a:t>PONTO DE PARTIDA</a:t>
+            </a:r>
+          </a:p>
+        </p:txBody>
+      </p:sp>
+      <p:sp>
+        <p:nvSpPr>
+          <p:cNvPr id="15" name="Rectangle 14"/>
           <p:cNvSpPr/>
           <p:nvPr/>
         </p:nvSpPr>
@@ -21203,7 +21040,7 @@
       </p:sp>
       <p:sp>
         <p:nvSpPr>
-          <p:cNvPr id="15" name="TextBox 14"/>
+          <p:cNvPr id="16" name="TextBox 15"/>
           <p:cNvSpPr txBox="1"/>
           <p:nvPr/>
         </p:nvSpPr>
@@ -21238,7 +21075,7 @@
                 </a:solidFill>
                 <a:latin typeface="Roboto"/>
               </a:rPr>
-              <a:t>As três camadas do back-end já estão decididas.</a:t>
+              <a:t>Três camadas lógicas no back-end.</a:t>
             </a:r>
           </a:p>
           <a:p>
@@ -21276,14 +21113,14 @@
                 </a:solidFill>
                 <a:latin typeface="Roboto"/>
               </a:rPr>
-              <a:t>Falta decidir em quantos processos separados elas vão rodar.</a:t>
-            </a:r>
-          </a:p>
-        </p:txBody>
-      </p:sp>
-      <p:sp>
-        <p:nvSpPr>
-          <p:cNvPr id="16" name="TextBox 15"/>
+              <a:t>A decisão em jogo é em quantos processos separados elas rodam.</a:t>
+            </a:r>
+          </a:p>
+        </p:txBody>
+      </p:sp>
+      <p:sp>
+        <p:nvSpPr>
+          <p:cNvPr id="17" name="TextBox 16"/>
           <p:cNvSpPr txBox="1"/>
           <p:nvPr/>
         </p:nvSpPr>
@@ -21322,7 +21159,7 @@
       </p:sp>
       <p:sp>
         <p:nvSpPr>
-          <p:cNvPr id="17" name="TextBox 16"/>
+          <p:cNvPr id="18" name="TextBox 17"/>
           <p:cNvSpPr txBox="1"/>
           <p:nvPr/>
         </p:nvSpPr>
@@ -30094,7 +29931,7 @@
         <p:spPr>
           <a:xfrm>
             <a:off x="971550" y="2751582"/>
-            <a:ext cx="7581900" cy="95250"/>
+            <a:ext cx="9677400" cy="95250"/>
           </a:xfrm>
           <a:prstGeom prst="rect">
             <a:avLst/>
@@ -30177,7 +30014,7 @@
         <p:spPr>
           <a:xfrm>
             <a:off x="971550" y="3590544"/>
-            <a:ext cx="7581900" cy="95250"/>
+            <a:ext cx="9677400" cy="95250"/>
           </a:xfrm>
           <a:prstGeom prst="rect">
             <a:avLst/>
@@ -30260,7 +30097,7 @@
         <p:spPr>
           <a:xfrm>
             <a:off x="971550" y="4429506"/>
-            <a:ext cx="7581900" cy="95250"/>
+            <a:ext cx="9677400" cy="95250"/>
           </a:xfrm>
           <a:prstGeom prst="rect">
             <a:avLst/>
@@ -30292,102 +30129,14 @@
       </p:sp>
       <p:sp>
         <p:nvSpPr>
-          <p:cNvPr id="10" name="Isosceles Triangle 9"/>
-          <p:cNvSpPr/>
-          <p:nvPr/>
-        </p:nvSpPr>
-        <p:spPr>
-          <a:xfrm>
-            <a:off x="9124950" y="2751582"/>
-            <a:ext cx="152400" cy="133350"/>
-          </a:xfrm>
-          <a:prstGeom prst="triangle">
-            <a:avLst/>
-          </a:prstGeom>
-          <a:noFill/>
-          <a:ln w="19050">
-            <a:solidFill>
-              <a:srgbClr val="E94D1C"/>
-            </a:solidFill>
-          </a:ln>
-          <a:effectLst/>
-        </p:spPr>
-        <p:style>
-          <a:lnRef idx="1">
-            <a:schemeClr val="accent1"/>
-          </a:lnRef>
-          <a:fillRef idx="3">
-            <a:schemeClr val="accent1"/>
-          </a:fillRef>
-          <a:effectRef idx="2">
-            <a:schemeClr val="accent1"/>
-          </a:effectRef>
-          <a:fontRef idx="minor">
-            <a:schemeClr val="lt1"/>
-          </a:fontRef>
-        </p:style>
-        <p:txBody>
-          <a:bodyPr rtlCol="0" anchor="ctr"/>
-          <a:lstStyle/>
-          <a:p>
-            <a:pPr algn="ctr"/>
-          </a:p>
-        </p:txBody>
-      </p:sp>
-      <p:sp>
-        <p:nvSpPr>
-          <p:cNvPr id="11" name="Rectangle 10"/>
-          <p:cNvSpPr/>
-          <p:nvPr/>
-        </p:nvSpPr>
-        <p:spPr>
-          <a:xfrm>
-            <a:off x="9193530" y="2808732"/>
-            <a:ext cx="15240" cy="38100"/>
-          </a:xfrm>
-          <a:prstGeom prst="rect">
-            <a:avLst/>
-          </a:prstGeom>
-          <a:solidFill>
-            <a:srgbClr val="E94D1C"/>
-          </a:solidFill>
-          <a:ln>
-            <a:noFill/>
-          </a:ln>
-          <a:effectLst/>
-        </p:spPr>
-        <p:style>
-          <a:lnRef idx="1">
-            <a:schemeClr val="accent1"/>
-          </a:lnRef>
-          <a:fillRef idx="3">
-            <a:schemeClr val="accent1"/>
-          </a:fillRef>
-          <a:effectRef idx="2">
-            <a:schemeClr val="accent1"/>
-          </a:effectRef>
-          <a:fontRef idx="minor">
-            <a:schemeClr val="lt1"/>
-          </a:fontRef>
-        </p:style>
-        <p:txBody>
-          <a:bodyPr rtlCol="0" anchor="ctr"/>
-          <a:lstStyle/>
-          <a:p>
-            <a:pPr algn="ctr"/>
-          </a:p>
-        </p:txBody>
-      </p:sp>
-      <p:sp>
-        <p:nvSpPr>
-          <p:cNvPr id="12" name="TextBox 11"/>
+          <p:cNvPr id="10" name="TextBox 9"/>
           <p:cNvSpPr txBox="1"/>
           <p:nvPr/>
         </p:nvSpPr>
         <p:spPr>
           <a:xfrm>
-            <a:off x="9372600" y="2761107"/>
-            <a:ext cx="2133600" cy="182880"/>
+            <a:off x="685800" y="6324600"/>
+            <a:ext cx="6667500" cy="182880"/>
           </a:xfrm>
           <a:prstGeom prst="rect">
             <a:avLst/>
@@ -30406,137 +30155,12 @@
               </a:lnSpc>
             </a:pPr>
             <a:r>
-              <a:rPr sz="900" b="1" i="0" spc="120">
-                <a:solidFill>
-                  <a:srgbClr val="E94D1C"/>
+              <a:rPr sz="900" b="0" i="0">
+                <a:solidFill>
+                  <a:srgbClr val="6B6B78"/>
                 </a:solidFill>
                 <a:latin typeface="Roboto"/>
               </a:rPr>
-              <a:t>AINDA É PROPOSTA</a:t>
-            </a:r>
-          </a:p>
-        </p:txBody>
-      </p:sp>
-      <p:sp>
-        <p:nvSpPr>
-          <p:cNvPr id="13" name="Rectangle 12"/>
-          <p:cNvSpPr/>
-          <p:nvPr/>
-        </p:nvSpPr>
-        <p:spPr>
-          <a:xfrm>
-            <a:off x="9124950" y="3037332"/>
-            <a:ext cx="38100" cy="804672"/>
-          </a:xfrm>
-          <a:prstGeom prst="rect">
-            <a:avLst/>
-          </a:prstGeom>
-          <a:solidFill>
-            <a:srgbClr val="E94D1C"/>
-          </a:solidFill>
-          <a:ln>
-            <a:noFill/>
-          </a:ln>
-          <a:effectLst/>
-        </p:spPr>
-        <p:style>
-          <a:lnRef idx="1">
-            <a:schemeClr val="accent1"/>
-          </a:lnRef>
-          <a:fillRef idx="3">
-            <a:schemeClr val="accent1"/>
-          </a:fillRef>
-          <a:effectRef idx="2">
-            <a:schemeClr val="accent1"/>
-          </a:effectRef>
-          <a:fontRef idx="minor">
-            <a:schemeClr val="lt1"/>
-          </a:fontRef>
-        </p:style>
-        <p:txBody>
-          <a:bodyPr rtlCol="0" anchor="ctr" wrap="square" lIns="0" rIns="0" tIns="0" bIns="0"/>
-          <a:lstStyle/>
-          <a:p>
-            <a:pPr algn="ctr"/>
-          </a:p>
-        </p:txBody>
-      </p:sp>
-      <p:sp>
-        <p:nvSpPr>
-          <p:cNvPr id="14" name="TextBox 13"/>
-          <p:cNvSpPr txBox="1"/>
-          <p:nvPr/>
-        </p:nvSpPr>
-        <p:spPr>
-          <a:xfrm>
-            <a:off x="9334500" y="3037332"/>
-            <a:ext cx="2171700" cy="1376172"/>
-          </a:xfrm>
-          <a:prstGeom prst="rect">
-            <a:avLst/>
-          </a:prstGeom>
-          <a:noFill/>
-        </p:spPr>
-        <p:txBody>
-          <a:bodyPr wrap="square" lIns="0" rIns="0" tIns="0" bIns="0" anchor="t">
-            <a:spAutoFit/>
-          </a:bodyPr>
-          <a:lstStyle/>
-          <a:p>
-            <a:pPr algn="l">
-              <a:lnSpc>
-                <a:spcPct val="140000"/>
-              </a:lnSpc>
-              <a:spcAft>
-                <a:spcPts val="600"/>
-              </a:spcAft>
-            </a:pPr>
-            <a:r>
-              <a:rPr sz="1200" b="0" i="0">
-                <a:solidFill>
-                  <a:srgbClr val="3A3A44"/>
-                </a:solidFill>
-                <a:latin typeface="Roboto"/>
-              </a:rPr>
-              <a:t>Nada disso está feito. É o que o grupo quer testar, e o resto da apresentação é o exame dessa ideia.</a:t>
-            </a:r>
-          </a:p>
-        </p:txBody>
-      </p:sp>
-      <p:sp>
-        <p:nvSpPr>
-          <p:cNvPr id="15" name="TextBox 14"/>
-          <p:cNvSpPr txBox="1"/>
-          <p:nvPr/>
-        </p:nvSpPr>
-        <p:spPr>
-          <a:xfrm>
-            <a:off x="685800" y="6324600"/>
-            <a:ext cx="6667500" cy="182880"/>
-          </a:xfrm>
-          <a:prstGeom prst="rect">
-            <a:avLst/>
-          </a:prstGeom>
-          <a:noFill/>
-        </p:spPr>
-        <p:txBody>
-          <a:bodyPr wrap="square" lIns="0" rIns="0" tIns="0" bIns="0" anchor="t">
-            <a:spAutoFit/>
-          </a:bodyPr>
-          <a:lstStyle/>
-          <a:p>
-            <a:pPr algn="l">
-              <a:lnSpc>
-                <a:spcPct val="120000"/>
-              </a:lnSpc>
-            </a:pPr>
-            <a:r>
-              <a:rPr sz="900" b="0" i="0">
-                <a:solidFill>
-                  <a:srgbClr val="6B6B78"/>
-                </a:solidFill>
-                <a:latin typeface="Roboto"/>
-              </a:rPr>
               <a:t>Introdução</a:t>
             </a:r>
           </a:p>
@@ -30544,7 +30168,7 @@
       </p:sp>
       <p:sp>
         <p:nvSpPr>
-          <p:cNvPr id="16" name="TextBox 15"/>
+          <p:cNvPr id="11" name="TextBox 10"/>
           <p:cNvSpPr txBox="1"/>
           <p:nvPr/>
         </p:nvSpPr>

--- a/trabalhos/T1-Docker-Invite-People.pptx
+++ b/trabalhos/T1-Docker-Invite-People.pptx
@@ -11538,14 +11538,6 @@
 <file path=ppt/slides/slide1.xml><?xml version="1.0" encoding="utf-8"?>
 <p:sld xmlns:a="http://schemas.openxmlformats.org/drawingml/2006/main" xmlns:p="http://schemas.openxmlformats.org/presentationml/2006/main" xmlns:r="http://schemas.openxmlformats.org/officeDocument/2006/relationships">
   <p:cSld>
-    <p:bg>
-      <p:bgPr>
-        <a:solidFill>
-          <a:srgbClr val="21049A"/>
-        </a:solidFill>
-        <a:effectLst/>
-      </p:bgPr>
-    </p:bg>
     <p:spTree>
       <p:nvGrpSpPr>
         <p:cNvPr id="1" name=""/>
@@ -11555,7 +11547,7 @@
       <p:grpSpPr/>
       <p:pic>
         <p:nvPicPr>
-          <p:cNvPr id="2" name="Picture 1" descr="lockup-branco.png"/>
+          <p:cNvPr id="2" name="Picture 1" descr="fundo-capa.jpg"/>
           <p:cNvPicPr>
             <a:picLocks noChangeAspect="1"/>
           </p:cNvPicPr>
@@ -11569,6 +11561,30 @@
         </p:blipFill>
         <p:spPr>
           <a:xfrm>
+            <a:off x="0" y="0"/>
+            <a:ext cx="12192000" cy="6858000"/>
+          </a:xfrm>
+          <a:prstGeom prst="rect">
+            <a:avLst/>
+          </a:prstGeom>
+        </p:spPr>
+      </p:pic>
+      <p:pic>
+        <p:nvPicPr>
+          <p:cNvPr id="3" name="Picture 2" descr="lockup-branco.png"/>
+          <p:cNvPicPr>
+            <a:picLocks noChangeAspect="1"/>
+          </p:cNvPicPr>
+          <p:nvPr/>
+        </p:nvPicPr>
+        <p:blipFill>
+          <a:blip r:embed="rId3"/>
+          <a:stretch>
+            <a:fillRect/>
+          </a:stretch>
+        </p:blipFill>
+        <p:spPr>
+          <a:xfrm>
             <a:off x="685800" y="552450"/>
             <a:ext cx="2038350" cy="701063"/>
           </a:xfrm>
@@ -11579,7 +11595,7 @@
       </p:pic>
       <p:sp>
         <p:nvSpPr>
-          <p:cNvPr id="3" name="TextBox 2"/>
+          <p:cNvPr id="4" name="TextBox 3"/>
           <p:cNvSpPr txBox="1"/>
           <p:nvPr/>
         </p:nvSpPr>
@@ -11618,7 +11634,7 @@
       </p:sp>
       <p:sp>
         <p:nvSpPr>
-          <p:cNvPr id="4" name="TextBox 3"/>
+          <p:cNvPr id="5" name="TextBox 4"/>
           <p:cNvSpPr txBox="1"/>
           <p:nvPr/>
         </p:nvSpPr>
@@ -11673,7 +11689,7 @@
       </p:sp>
       <p:sp>
         <p:nvSpPr>
-          <p:cNvPr id="5" name="Rounded Rectangle 4"/>
+          <p:cNvPr id="6" name="Rounded Rectangle 5"/>
           <p:cNvSpPr/>
           <p:nvPr/>
         </p:nvSpPr>
@@ -11719,7 +11735,7 @@
       </p:sp>
       <p:sp>
         <p:nvSpPr>
-          <p:cNvPr id="6" name="TextBox 5"/>
+          <p:cNvPr id="7" name="TextBox 6"/>
           <p:cNvSpPr txBox="1"/>
           <p:nvPr/>
         </p:nvSpPr>
@@ -11758,14 +11774,14 @@
       </p:sp>
       <p:pic>
         <p:nvPicPr>
-          <p:cNvPr id="7" name="Picture 6" descr="docker.png"/>
+          <p:cNvPr id="8" name="Picture 7" descr="docker.png"/>
           <p:cNvPicPr>
             <a:picLocks noChangeAspect="1"/>
           </p:cNvPicPr>
           <p:nvPr/>
         </p:nvPicPr>
         <p:blipFill>
-          <a:blip r:embed="rId3"/>
+          <a:blip r:embed="rId4"/>
           <a:stretch>
             <a:fillRect/>
           </a:stretch>
@@ -11782,7 +11798,7 @@
       </p:pic>
       <p:sp>
         <p:nvSpPr>
-          <p:cNvPr id="8" name="TextBox 7"/>
+          <p:cNvPr id="9" name="TextBox 8"/>
           <p:cNvSpPr txBox="1"/>
           <p:nvPr/>
         </p:nvSpPr>
@@ -11821,7 +11837,7 @@
       </p:sp>
       <p:sp>
         <p:nvSpPr>
-          <p:cNvPr id="9" name="TextBox 8"/>
+          <p:cNvPr id="10" name="TextBox 9"/>
           <p:cNvSpPr txBox="1"/>
           <p:nvPr/>
         </p:nvSpPr>
@@ -11876,7 +11892,7 @@
       </p:sp>
       <p:sp>
         <p:nvSpPr>
-          <p:cNvPr id="10" name="TextBox 9"/>
+          <p:cNvPr id="11" name="TextBox 10"/>
           <p:cNvSpPr txBox="1"/>
           <p:nvPr/>
         </p:nvSpPr>
@@ -11915,7 +11931,7 @@
       </p:sp>
       <p:sp>
         <p:nvSpPr>
-          <p:cNvPr id="11" name="TextBox 10"/>
+          <p:cNvPr id="12" name="TextBox 11"/>
           <p:cNvSpPr txBox="1"/>
           <p:nvPr/>
         </p:nvSpPr>
@@ -13527,14 +13543,6 @@
 <file path=ppt/slides/slide12.xml><?xml version="1.0" encoding="utf-8"?>
 <p:sld xmlns:a="http://schemas.openxmlformats.org/drawingml/2006/main" xmlns:p="http://schemas.openxmlformats.org/presentationml/2006/main" xmlns:r="http://schemas.openxmlformats.org/officeDocument/2006/relationships">
   <p:cSld>
-    <p:bg>
-      <p:bgPr>
-        <a:solidFill>
-          <a:srgbClr val="21049A"/>
-        </a:solidFill>
-        <a:effectLst/>
-      </p:bgPr>
-    </p:bg>
     <p:spTree>
       <p:nvGrpSpPr>
         <p:cNvPr id="1" name=""/>
@@ -13544,7 +13552,7 @@
       <p:grpSpPr/>
       <p:pic>
         <p:nvPicPr>
-          <p:cNvPr id="2" name="Picture 1" descr="u-branco.png"/>
+          <p:cNvPr id="2" name="Picture 1" descr="fundo-secao.jpg"/>
           <p:cNvPicPr>
             <a:picLocks noChangeAspect="1"/>
           </p:cNvPicPr>
@@ -13558,8 +13566,8 @@
         </p:blipFill>
         <p:spPr>
           <a:xfrm>
-            <a:off x="10744200" y="457200"/>
-            <a:ext cx="342900" cy="342900"/>
+            <a:off x="0" y="0"/>
+            <a:ext cx="12192000" cy="6858000"/>
           </a:xfrm>
           <a:prstGeom prst="rect">
             <a:avLst/>
@@ -13568,7 +13576,7 @@
       </p:pic>
       <p:pic>
         <p:nvPicPr>
-          <p:cNvPr id="3" name="Picture 2" descr="oci-branco.png"/>
+          <p:cNvPr id="3" name="Picture 2" descr="u-branco.png"/>
           <p:cNvPicPr>
             <a:picLocks noChangeAspect="1"/>
           </p:cNvPicPr>
@@ -13582,6 +13590,30 @@
         </p:blipFill>
         <p:spPr>
           <a:xfrm>
+            <a:off x="10744200" y="457200"/>
+            <a:ext cx="342900" cy="342900"/>
+          </a:xfrm>
+          <a:prstGeom prst="rect">
+            <a:avLst/>
+          </a:prstGeom>
+        </p:spPr>
+      </p:pic>
+      <p:pic>
+        <p:nvPicPr>
+          <p:cNvPr id="4" name="Picture 3" descr="oci-branco.png"/>
+          <p:cNvPicPr>
+            <a:picLocks noChangeAspect="1"/>
+          </p:cNvPicPr>
+          <p:nvPr/>
+        </p:nvPicPr>
+        <p:blipFill>
+          <a:blip r:embed="rId4"/>
+          <a:stretch>
+            <a:fillRect/>
+          </a:stretch>
+        </p:blipFill>
+        <p:spPr>
+          <a:xfrm>
             <a:off x="7810500" y="1962150"/>
             <a:ext cx="3048000" cy="839090"/>
           </a:xfrm>
@@ -13592,7 +13624,7 @@
       </p:pic>
       <p:sp>
         <p:nvSpPr>
-          <p:cNvPr id="4" name="TextBox 3"/>
+          <p:cNvPr id="5" name="TextBox 4"/>
           <p:cNvSpPr txBox="1"/>
           <p:nvPr/>
         </p:nvSpPr>
@@ -13647,7 +13679,7 @@
       </p:sp>
       <p:sp>
         <p:nvSpPr>
-          <p:cNvPr id="5" name="TextBox 4"/>
+          <p:cNvPr id="6" name="TextBox 5"/>
           <p:cNvSpPr txBox="1"/>
           <p:nvPr/>
         </p:nvSpPr>
@@ -13686,7 +13718,7 @@
       </p:sp>
       <p:sp>
         <p:nvSpPr>
-          <p:cNvPr id="6" name="TextBox 5"/>
+          <p:cNvPr id="7" name="TextBox 6"/>
           <p:cNvSpPr txBox="1"/>
           <p:nvPr/>
         </p:nvSpPr>
@@ -13725,7 +13757,7 @@
       </p:sp>
       <p:sp>
         <p:nvSpPr>
-          <p:cNvPr id="7" name="TextBox 6"/>
+          <p:cNvPr id="8" name="TextBox 7"/>
           <p:cNvSpPr txBox="1"/>
           <p:nvPr/>
         </p:nvSpPr>
@@ -13773,14 +13805,6 @@
 <file path=ppt/slides/slide13.xml><?xml version="1.0" encoding="utf-8"?>
 <p:sld xmlns:a="http://schemas.openxmlformats.org/drawingml/2006/main" xmlns:p="http://schemas.openxmlformats.org/presentationml/2006/main" xmlns:r="http://schemas.openxmlformats.org/officeDocument/2006/relationships">
   <p:cSld>
-    <p:bg>
-      <p:bgPr>
-        <a:solidFill>
-          <a:srgbClr val="21049A"/>
-        </a:solidFill>
-        <a:effectLst/>
-      </p:bgPr>
-    </p:bg>
     <p:spTree>
       <p:nvGrpSpPr>
         <p:cNvPr id="1" name=""/>
@@ -13788,9 +13812,33 @@
         <p:nvPr/>
       </p:nvGrpSpPr>
       <p:grpSpPr/>
-      <p:sp>
-        <p:nvSpPr>
-          <p:cNvPr id="2" name="Rectangle 1"/>
+      <p:pic>
+        <p:nvPicPr>
+          <p:cNvPr id="2" name="Picture 1" descr="fundo-secao.jpg"/>
+          <p:cNvPicPr>
+            <a:picLocks noChangeAspect="1"/>
+          </p:cNvPicPr>
+          <p:nvPr/>
+        </p:nvPicPr>
+        <p:blipFill>
+          <a:blip r:embed="rId2"/>
+          <a:stretch>
+            <a:fillRect/>
+          </a:stretch>
+        </p:blipFill>
+        <p:spPr>
+          <a:xfrm>
+            <a:off x="0" y="0"/>
+            <a:ext cx="12192000" cy="6858000"/>
+          </a:xfrm>
+          <a:prstGeom prst="rect">
+            <a:avLst/>
+          </a:prstGeom>
+        </p:spPr>
+      </p:pic>
+      <p:sp>
+        <p:nvSpPr>
+          <p:cNvPr id="3" name="Rectangle 2"/>
           <p:cNvSpPr/>
           <p:nvPr/>
         </p:nvSpPr>
@@ -13834,14 +13882,14 @@
       </p:sp>
       <p:pic>
         <p:nvPicPr>
-          <p:cNvPr id="3" name="Picture 2" descr="u-branco.png"/>
+          <p:cNvPr id="4" name="Picture 3" descr="u-branco.png"/>
           <p:cNvPicPr>
             <a:picLocks noChangeAspect="1"/>
           </p:cNvPicPr>
           <p:nvPr/>
         </p:nvPicPr>
         <p:blipFill>
-          <a:blip r:embed="rId2"/>
+          <a:blip r:embed="rId3"/>
           <a:stretch>
             <a:fillRect/>
           </a:stretch>
@@ -13858,7 +13906,7 @@
       </p:pic>
       <p:sp>
         <p:nvSpPr>
-          <p:cNvPr id="4" name="Rounded Rectangle 3"/>
+          <p:cNvPr id="5" name="Rounded Rectangle 4"/>
           <p:cNvSpPr/>
           <p:nvPr/>
         </p:nvSpPr>
@@ -13902,7 +13950,7 @@
       </p:sp>
       <p:sp>
         <p:nvSpPr>
-          <p:cNvPr id="5" name="Right Arrow 4"/>
+          <p:cNvPr id="6" name="Right Arrow 5"/>
           <p:cNvSpPr/>
           <p:nvPr/>
         </p:nvSpPr>
@@ -13946,7 +13994,7 @@
       </p:sp>
       <p:sp>
         <p:nvSpPr>
-          <p:cNvPr id="6" name="Rounded Rectangle 5"/>
+          <p:cNvPr id="7" name="Rounded Rectangle 6"/>
           <p:cNvSpPr/>
           <p:nvPr/>
         </p:nvSpPr>
@@ -13990,7 +14038,7 @@
       </p:sp>
       <p:sp>
         <p:nvSpPr>
-          <p:cNvPr id="7" name="TextBox 6"/>
+          <p:cNvPr id="8" name="TextBox 7"/>
           <p:cNvSpPr txBox="1"/>
           <p:nvPr/>
         </p:nvSpPr>
@@ -14029,7 +14077,7 @@
       </p:sp>
       <p:sp>
         <p:nvSpPr>
-          <p:cNvPr id="8" name="TextBox 7"/>
+          <p:cNvPr id="9" name="TextBox 8"/>
           <p:cNvSpPr txBox="1"/>
           <p:nvPr/>
         </p:nvSpPr>
@@ -14068,7 +14116,7 @@
       </p:sp>
       <p:sp>
         <p:nvSpPr>
-          <p:cNvPr id="9" name="TextBox 8"/>
+          <p:cNvPr id="10" name="TextBox 9"/>
           <p:cNvSpPr txBox="1"/>
           <p:nvPr/>
         </p:nvSpPr>
@@ -14107,7 +14155,7 @@
       </p:sp>
       <p:sp>
         <p:nvSpPr>
-          <p:cNvPr id="10" name="TextBox 9"/>
+          <p:cNvPr id="11" name="TextBox 10"/>
           <p:cNvSpPr txBox="1"/>
           <p:nvPr/>
         </p:nvSpPr>
@@ -14146,7 +14194,7 @@
       </p:sp>
       <p:sp>
         <p:nvSpPr>
-          <p:cNvPr id="11" name="TextBox 10"/>
+          <p:cNvPr id="12" name="TextBox 11"/>
           <p:cNvSpPr txBox="1"/>
           <p:nvPr/>
         </p:nvSpPr>
@@ -21207,14 +21255,6 @@
 <file path=ppt/slides/slide20.xml><?xml version="1.0" encoding="utf-8"?>
 <p:sld xmlns:a="http://schemas.openxmlformats.org/drawingml/2006/main" xmlns:p="http://schemas.openxmlformats.org/presentationml/2006/main" xmlns:r="http://schemas.openxmlformats.org/officeDocument/2006/relationships">
   <p:cSld>
-    <p:bg>
-      <p:bgPr>
-        <a:solidFill>
-          <a:srgbClr val="21049A"/>
-        </a:solidFill>
-        <a:effectLst/>
-      </p:bgPr>
-    </p:bg>
     <p:spTree>
       <p:nvGrpSpPr>
         <p:cNvPr id="1" name=""/>
@@ -21222,9 +21262,33 @@
         <p:nvPr/>
       </p:nvGrpSpPr>
       <p:grpSpPr/>
-      <p:sp>
-        <p:nvSpPr>
-          <p:cNvPr id="2" name="Rectangle 1"/>
+      <p:pic>
+        <p:nvPicPr>
+          <p:cNvPr id="2" name="Picture 1" descr="fundo-secao.jpg"/>
+          <p:cNvPicPr>
+            <a:picLocks noChangeAspect="1"/>
+          </p:cNvPicPr>
+          <p:nvPr/>
+        </p:nvPicPr>
+        <p:blipFill>
+          <a:blip r:embed="rId2"/>
+          <a:stretch>
+            <a:fillRect/>
+          </a:stretch>
+        </p:blipFill>
+        <p:spPr>
+          <a:xfrm>
+            <a:off x="0" y="0"/>
+            <a:ext cx="12192000" cy="6858000"/>
+          </a:xfrm>
+          <a:prstGeom prst="rect">
+            <a:avLst/>
+          </a:prstGeom>
+        </p:spPr>
+      </p:pic>
+      <p:sp>
+        <p:nvSpPr>
+          <p:cNvPr id="3" name="Rectangle 2"/>
           <p:cNvSpPr/>
           <p:nvPr/>
         </p:nvSpPr>
@@ -21268,14 +21332,14 @@
       </p:sp>
       <p:pic>
         <p:nvPicPr>
-          <p:cNvPr id="3" name="Picture 2" descr="u-branco.png"/>
+          <p:cNvPr id="4" name="Picture 3" descr="u-branco.png"/>
           <p:cNvPicPr>
             <a:picLocks noChangeAspect="1"/>
           </p:cNvPicPr>
           <p:nvPr/>
         </p:nvPicPr>
         <p:blipFill>
-          <a:blip r:embed="rId2"/>
+          <a:blip r:embed="rId3"/>
           <a:stretch>
             <a:fillRect/>
           </a:stretch>
@@ -21292,7 +21356,7 @@
       </p:pic>
       <p:sp>
         <p:nvSpPr>
-          <p:cNvPr id="4" name="Rounded Rectangle 3"/>
+          <p:cNvPr id="5" name="Rounded Rectangle 4"/>
           <p:cNvSpPr/>
           <p:nvPr/>
         </p:nvSpPr>
@@ -21336,7 +21400,7 @@
       </p:sp>
       <p:sp>
         <p:nvSpPr>
-          <p:cNvPr id="5" name="Rounded Rectangle 4"/>
+          <p:cNvPr id="6" name="Rounded Rectangle 5"/>
           <p:cNvSpPr/>
           <p:nvPr/>
         </p:nvSpPr>
@@ -21380,7 +21444,7 @@
       </p:sp>
       <p:sp>
         <p:nvSpPr>
-          <p:cNvPr id="6" name="Rectangle 5"/>
+          <p:cNvPr id="7" name="Rectangle 6"/>
           <p:cNvSpPr/>
           <p:nvPr/>
         </p:nvSpPr>
@@ -21424,7 +21488,7 @@
       </p:sp>
       <p:sp>
         <p:nvSpPr>
-          <p:cNvPr id="7" name="TextBox 6"/>
+          <p:cNvPr id="8" name="TextBox 7"/>
           <p:cNvSpPr txBox="1"/>
           <p:nvPr/>
         </p:nvSpPr>
@@ -21463,7 +21527,7 @@
       </p:sp>
       <p:sp>
         <p:nvSpPr>
-          <p:cNvPr id="8" name="TextBox 7"/>
+          <p:cNvPr id="9" name="TextBox 8"/>
           <p:cNvSpPr txBox="1"/>
           <p:nvPr/>
         </p:nvSpPr>
@@ -21502,7 +21566,7 @@
       </p:sp>
       <p:sp>
         <p:nvSpPr>
-          <p:cNvPr id="9" name="TextBox 8"/>
+          <p:cNvPr id="10" name="TextBox 9"/>
           <p:cNvSpPr txBox="1"/>
           <p:nvPr/>
         </p:nvSpPr>
@@ -21541,7 +21605,7 @@
       </p:sp>
       <p:sp>
         <p:nvSpPr>
-          <p:cNvPr id="10" name="TextBox 9"/>
+          <p:cNvPr id="11" name="TextBox 10"/>
           <p:cNvSpPr txBox="1"/>
           <p:nvPr/>
         </p:nvSpPr>
@@ -21580,7 +21644,7 @@
       </p:sp>
       <p:sp>
         <p:nvSpPr>
-          <p:cNvPr id="11" name="TextBox 10"/>
+          <p:cNvPr id="12" name="TextBox 11"/>
           <p:cNvSpPr txBox="1"/>
           <p:nvPr/>
         </p:nvSpPr>
@@ -22477,14 +22541,6 @@
 <file path=ppt/slides/slide22.xml><?xml version="1.0" encoding="utf-8"?>
 <p:sld xmlns:a="http://schemas.openxmlformats.org/drawingml/2006/main" xmlns:p="http://schemas.openxmlformats.org/presentationml/2006/main" xmlns:r="http://schemas.openxmlformats.org/officeDocument/2006/relationships">
   <p:cSld>
-    <p:bg>
-      <p:bgPr>
-        <a:solidFill>
-          <a:srgbClr val="21049A"/>
-        </a:solidFill>
-        <a:effectLst/>
-      </p:bgPr>
-    </p:bg>
     <p:spTree>
       <p:nvGrpSpPr>
         <p:cNvPr id="1" name=""/>
@@ -22494,7 +22550,7 @@
       <p:grpSpPr/>
       <p:pic>
         <p:nvPicPr>
-          <p:cNvPr id="2" name="Picture 1" descr="u-branco.png"/>
+          <p:cNvPr id="2" name="Picture 1" descr="fundo-secao.jpg"/>
           <p:cNvPicPr>
             <a:picLocks noChangeAspect="1"/>
           </p:cNvPicPr>
@@ -22508,8 +22564,8 @@
         </p:blipFill>
         <p:spPr>
           <a:xfrm>
-            <a:off x="10744200" y="457200"/>
-            <a:ext cx="342900" cy="342900"/>
+            <a:off x="0" y="0"/>
+            <a:ext cx="12192000" cy="6858000"/>
           </a:xfrm>
           <a:prstGeom prst="rect">
             <a:avLst/>
@@ -22518,7 +22574,7 @@
       </p:pic>
       <p:pic>
         <p:nvPicPr>
-          <p:cNvPr id="3" name="Picture 2" descr="kubernetes-branco.png"/>
+          <p:cNvPr id="3" name="Picture 2" descr="u-branco.png"/>
           <p:cNvPicPr>
             <a:picLocks noChangeAspect="1"/>
           </p:cNvPicPr>
@@ -22532,6 +22588,30 @@
         </p:blipFill>
         <p:spPr>
           <a:xfrm>
+            <a:off x="10744200" y="457200"/>
+            <a:ext cx="342900" cy="342900"/>
+          </a:xfrm>
+          <a:prstGeom prst="rect">
+            <a:avLst/>
+          </a:prstGeom>
+        </p:spPr>
+      </p:pic>
+      <p:pic>
+        <p:nvPicPr>
+          <p:cNvPr id="4" name="Picture 3" descr="kubernetes-branco.png"/>
+          <p:cNvPicPr>
+            <a:picLocks noChangeAspect="1"/>
+          </p:cNvPicPr>
+          <p:nvPr/>
+        </p:nvPicPr>
+        <p:blipFill>
+          <a:blip r:embed="rId4"/>
+          <a:stretch>
+            <a:fillRect/>
+          </a:stretch>
+        </p:blipFill>
+        <p:spPr>
+          <a:xfrm>
             <a:off x="9144000" y="1676400"/>
             <a:ext cx="1809750" cy="1809750"/>
           </a:xfrm>
@@ -22542,7 +22622,7 @@
       </p:pic>
       <p:sp>
         <p:nvSpPr>
-          <p:cNvPr id="4" name="TextBox 3"/>
+          <p:cNvPr id="5" name="TextBox 4"/>
           <p:cNvSpPr txBox="1"/>
           <p:nvPr/>
         </p:nvSpPr>
@@ -22597,7 +22677,7 @@
       </p:sp>
       <p:sp>
         <p:nvSpPr>
-          <p:cNvPr id="5" name="TextBox 4"/>
+          <p:cNvPr id="6" name="TextBox 5"/>
           <p:cNvSpPr txBox="1"/>
           <p:nvPr/>
         </p:nvSpPr>
@@ -22636,7 +22716,7 @@
       </p:sp>
       <p:sp>
         <p:nvSpPr>
-          <p:cNvPr id="6" name="TextBox 5"/>
+          <p:cNvPr id="7" name="TextBox 6"/>
           <p:cNvSpPr txBox="1"/>
           <p:nvPr/>
         </p:nvSpPr>
@@ -22675,7 +22755,7 @@
       </p:sp>
       <p:sp>
         <p:nvSpPr>
-          <p:cNvPr id="7" name="TextBox 6"/>
+          <p:cNvPr id="8" name="TextBox 7"/>
           <p:cNvSpPr txBox="1"/>
           <p:nvPr/>
         </p:nvSpPr>
@@ -31047,14 +31127,6 @@
 <file path=ppt/slides/slide4.xml><?xml version="1.0" encoding="utf-8"?>
 <p:sld xmlns:a="http://schemas.openxmlformats.org/drawingml/2006/main" xmlns:p="http://schemas.openxmlformats.org/presentationml/2006/main" xmlns:r="http://schemas.openxmlformats.org/officeDocument/2006/relationships">
   <p:cSld>
-    <p:bg>
-      <p:bgPr>
-        <a:solidFill>
-          <a:srgbClr val="21049A"/>
-        </a:solidFill>
-        <a:effectLst/>
-      </p:bgPr>
-    </p:bg>
     <p:spTree>
       <p:nvGrpSpPr>
         <p:cNvPr id="1" name=""/>
@@ -31062,9 +31134,33 @@
         <p:nvPr/>
       </p:nvGrpSpPr>
       <p:grpSpPr/>
-      <p:sp>
-        <p:nvSpPr>
-          <p:cNvPr id="2" name="Rectangle 1"/>
+      <p:pic>
+        <p:nvPicPr>
+          <p:cNvPr id="2" name="Picture 1" descr="fundo-secao.jpg"/>
+          <p:cNvPicPr>
+            <a:picLocks noChangeAspect="1"/>
+          </p:cNvPicPr>
+          <p:nvPr/>
+        </p:nvPicPr>
+        <p:blipFill>
+          <a:blip r:embed="rId2"/>
+          <a:stretch>
+            <a:fillRect/>
+          </a:stretch>
+        </p:blipFill>
+        <p:spPr>
+          <a:xfrm>
+            <a:off x="0" y="0"/>
+            <a:ext cx="12192000" cy="6858000"/>
+          </a:xfrm>
+          <a:prstGeom prst="rect">
+            <a:avLst/>
+          </a:prstGeom>
+        </p:spPr>
+      </p:pic>
+      <p:sp>
+        <p:nvSpPr>
+          <p:cNvPr id="3" name="Rectangle 2"/>
           <p:cNvSpPr/>
           <p:nvPr/>
         </p:nvSpPr>
@@ -31108,31 +31204,7 @@
       </p:sp>
       <p:pic>
         <p:nvPicPr>
-          <p:cNvPr id="3" name="Picture 2" descr="u-branco.png"/>
-          <p:cNvPicPr>
-            <a:picLocks noChangeAspect="1"/>
-          </p:cNvPicPr>
-          <p:nvPr/>
-        </p:nvPicPr>
-        <p:blipFill>
-          <a:blip r:embed="rId2"/>
-          <a:stretch>
-            <a:fillRect/>
-          </a:stretch>
-        </p:blipFill>
-        <p:spPr>
-          <a:xfrm>
-            <a:off x="10744200" y="457200"/>
-            <a:ext cx="342900" cy="342900"/>
-          </a:xfrm>
-          <a:prstGeom prst="rect">
-            <a:avLst/>
-          </a:prstGeom>
-        </p:spPr>
-      </p:pic>
-      <p:pic>
-        <p:nvPicPr>
-          <p:cNvPr id="4" name="Picture 3" descr="docker.png"/>
+          <p:cNvPr id="4" name="Picture 3" descr="u-branco.png"/>
           <p:cNvPicPr>
             <a:picLocks noChangeAspect="1"/>
           </p:cNvPicPr>
@@ -31146,6 +31218,30 @@
         </p:blipFill>
         <p:spPr>
           <a:xfrm>
+            <a:off x="10744200" y="457200"/>
+            <a:ext cx="342900" cy="342900"/>
+          </a:xfrm>
+          <a:prstGeom prst="rect">
+            <a:avLst/>
+          </a:prstGeom>
+        </p:spPr>
+      </p:pic>
+      <p:pic>
+        <p:nvPicPr>
+          <p:cNvPr id="5" name="Picture 4" descr="docker.png"/>
+          <p:cNvPicPr>
+            <a:picLocks noChangeAspect="1"/>
+          </p:cNvPicPr>
+          <p:nvPr/>
+        </p:nvPicPr>
+        <p:blipFill>
+          <a:blip r:embed="rId4"/>
+          <a:stretch>
+            <a:fillRect/>
+          </a:stretch>
+        </p:blipFill>
+        <p:spPr>
+          <a:xfrm>
             <a:off x="8763000" y="2381250"/>
             <a:ext cx="2476500" cy="1775993"/>
           </a:xfrm>
@@ -31156,7 +31252,7 @@
       </p:pic>
       <p:sp>
         <p:nvSpPr>
-          <p:cNvPr id="5" name="TextBox 4"/>
+          <p:cNvPr id="6" name="TextBox 5"/>
           <p:cNvSpPr txBox="1"/>
           <p:nvPr/>
         </p:nvSpPr>
@@ -31195,7 +31291,7 @@
       </p:sp>
       <p:sp>
         <p:nvSpPr>
-          <p:cNvPr id="6" name="TextBox 5"/>
+          <p:cNvPr id="7" name="TextBox 6"/>
           <p:cNvSpPr txBox="1"/>
           <p:nvPr/>
         </p:nvSpPr>
@@ -31234,7 +31330,7 @@
       </p:sp>
       <p:sp>
         <p:nvSpPr>
-          <p:cNvPr id="7" name="TextBox 6"/>
+          <p:cNvPr id="8" name="TextBox 7"/>
           <p:cNvSpPr txBox="1"/>
           <p:nvPr/>
         </p:nvSpPr>
@@ -31273,7 +31369,7 @@
       </p:sp>
       <p:sp>
         <p:nvSpPr>
-          <p:cNvPr id="8" name="TextBox 7"/>
+          <p:cNvPr id="9" name="TextBox 8"/>
           <p:cNvSpPr txBox="1"/>
           <p:nvPr/>
         </p:nvSpPr>
@@ -31312,7 +31408,7 @@
       </p:sp>
       <p:sp>
         <p:nvSpPr>
-          <p:cNvPr id="9" name="TextBox 8"/>
+          <p:cNvPr id="10" name="TextBox 9"/>
           <p:cNvSpPr txBox="1"/>
           <p:nvPr/>
         </p:nvSpPr>

--- a/trabalhos/T1-Docker-Invite-People.pptx
+++ b/trabalhos/T1-Docker-Invite-People.pptx
@@ -37,7 +37,6 @@
     <p:sldId id="282" r:id="rId37"/>
     <p:sldId id="283" r:id="rId38"/>
     <p:sldId id="284" r:id="rId39"/>
-    <p:sldId id="285" r:id="rId40"/>
   </p:sldIdLst>
   <p:sldSz cx="12192000" cy="6858000"/>
   <p:notesSz cx="6858000" cy="9144000"/>
@@ -29537,7 +29536,7 @@
                 </a:solidFill>
                 <a:latin typeface="Roboto"/>
               </a:rPr>
-              <a:t>Três coisas para lembrar</a:t>
+              <a:t>Referências</a:t>
             </a:r>
           </a:p>
         </p:txBody>
@@ -29550,7 +29549,7 @@
         </p:nvSpPr>
         <p:spPr>
           <a:xfrm>
-            <a:off x="704850" y="2939796"/>
+            <a:off x="704850" y="2086166"/>
             <a:ext cx="57150" cy="57150"/>
           </a:xfrm>
           <a:prstGeom prst="rect">
@@ -29594,7 +29593,7 @@
         </p:nvSpPr>
         <p:spPr>
           <a:xfrm>
-            <a:off x="971550" y="2801112"/>
+            <a:off x="971550" y="1992059"/>
             <a:ext cx="9677400" cy="95250"/>
           </a:xfrm>
           <a:prstGeom prst="rect">
@@ -29614,13 +29613,13 @@
               </a:lnSpc>
             </a:pPr>
             <a:r>
-              <a:rPr sz="2100" b="0" i="0">
+              <a:rPr sz="1420" b="0" i="0">
                 <a:solidFill>
                   <a:srgbClr val="1A1A1E"/>
                 </a:solidFill>
                 <a:latin typeface="Roboto"/>
               </a:rPr>
-              <a:t>Container é um processo comum, isolado por mecanismos do kernel.</a:t>
+              <a:t>Open Container Initiative. Runtime Spec, Image Spec e Distribution Spec. Linux Foundation, fundada em 2015.</a:t>
             </a:r>
           </a:p>
         </p:txBody>
@@ -29633,7 +29632,7 @@
         </p:nvSpPr>
         <p:spPr>
           <a:xfrm>
-            <a:off x="704850" y="3653790"/>
+            <a:off x="704850" y="2553652"/>
             <a:ext cx="57150" cy="57150"/>
           </a:xfrm>
           <a:prstGeom prst="rect">
@@ -29677,7 +29676,7 @@
         </p:nvSpPr>
         <p:spPr>
           <a:xfrm>
-            <a:off x="971550" y="3515106"/>
+            <a:off x="971550" y="2459546"/>
             <a:ext cx="9677400" cy="95250"/>
           </a:xfrm>
           <a:prstGeom prst="rect">
@@ -29697,13 +29696,13 @@
               </a:lnSpc>
             </a:pPr>
             <a:r>
-              <a:rPr sz="2100" b="0" i="0">
+              <a:rPr sz="1420" b="0" i="0">
                 <a:solidFill>
                   <a:srgbClr val="1A1A1E"/>
                 </a:solidFill>
                 <a:latin typeface="Roboto"/>
               </a:rPr>
-              <a:t>Imagem é o artefato. Container é o ambiente de execução que roda a imagem.</a:t>
+              <a:t>WIGGINS, A. The Twelve-Factor App, 2011.</a:t>
             </a:r>
           </a:p>
         </p:txBody>
@@ -29716,7 +29715,7 @@
         </p:nvSpPr>
         <p:spPr>
           <a:xfrm>
-            <a:off x="704850" y="4367784"/>
+            <a:off x="704850" y="3021140"/>
             <a:ext cx="57150" cy="57150"/>
           </a:xfrm>
           <a:prstGeom prst="rect">
@@ -29760,7 +29759,7 @@
         </p:nvSpPr>
         <p:spPr>
           <a:xfrm>
-            <a:off x="971550" y="4229100"/>
+            <a:off x="971550" y="2927032"/>
             <a:ext cx="9677400" cy="95250"/>
           </a:xfrm>
           <a:prstGeom prst="rect">
@@ -29780,27 +29779,71 @@
               </a:lnSpc>
             </a:pPr>
             <a:r>
-              <a:rPr sz="2100" b="0" i="0">
+              <a:rPr sz="1420" b="0" i="0">
                 <a:solidFill>
                   <a:srgbClr val="1A1A1E"/>
                 </a:solidFill>
                 <a:latin typeface="Roboto"/>
               </a:rPr>
-              <a:t>A decisão de arquitetura é em quantos processos separados o sistema vai rodar.</a:t>
-            </a:r>
-          </a:p>
-        </p:txBody>
-      </p:sp>
-      <p:sp>
-        <p:nvSpPr>
-          <p:cNvPr id="10" name="TextBox 9"/>
+              <a:t>FELTER, W. et al. An updated performance comparison of virtual machines and Linux containers. IBM Research Report, 2015.</a:t>
+            </a:r>
+          </a:p>
+        </p:txBody>
+      </p:sp>
+      <p:sp>
+        <p:nvSpPr>
+          <p:cNvPr id="10" name="Rectangle 9"/>
+          <p:cNvSpPr/>
+          <p:nvPr/>
+        </p:nvSpPr>
+        <p:spPr>
+          <a:xfrm>
+            <a:off x="704850" y="3727514"/>
+            <a:ext cx="57150" cy="57150"/>
+          </a:xfrm>
+          <a:prstGeom prst="rect">
+            <a:avLst/>
+          </a:prstGeom>
+          <a:solidFill>
+            <a:srgbClr val="E94D1C"/>
+          </a:solidFill>
+          <a:ln>
+            <a:noFill/>
+          </a:ln>
+          <a:effectLst/>
+        </p:spPr>
+        <p:style>
+          <a:lnRef idx="1">
+            <a:schemeClr val="accent1"/>
+          </a:lnRef>
+          <a:fillRef idx="3">
+            <a:schemeClr val="accent1"/>
+          </a:fillRef>
+          <a:effectRef idx="2">
+            <a:schemeClr val="accent1"/>
+          </a:effectRef>
+          <a:fontRef idx="minor">
+            <a:schemeClr val="lt1"/>
+          </a:fontRef>
+        </p:style>
+        <p:txBody>
+          <a:bodyPr rtlCol="0" anchor="ctr" wrap="square" lIns="0" rIns="0" tIns="0" bIns="0"/>
+          <a:lstStyle/>
+          <a:p>
+            <a:pPr algn="ctr"/>
+          </a:p>
+        </p:txBody>
+      </p:sp>
+      <p:sp>
+        <p:nvSpPr>
+          <p:cNvPr id="11" name="TextBox 10"/>
           <p:cNvSpPr txBox="1"/>
           <p:nvPr/>
         </p:nvSpPr>
         <p:spPr>
           <a:xfrm>
-            <a:off x="685800" y="6324600"/>
-            <a:ext cx="6667500" cy="182880"/>
+            <a:off x="971550" y="3633407"/>
+            <a:ext cx="9677400" cy="95250"/>
           </a:xfrm>
           <a:prstGeom prst="rect">
             <a:avLst/>
@@ -29815,6 +29858,377 @@
           <a:p>
             <a:pPr algn="l">
               <a:lnSpc>
+                <a:spcPct val="130000"/>
+              </a:lnSpc>
+            </a:pPr>
+            <a:r>
+              <a:rPr sz="1420" b="0" i="0">
+                <a:solidFill>
+                  <a:srgbClr val="1A1A1E"/>
+                </a:solidFill>
+                <a:latin typeface="Roboto"/>
+              </a:rPr>
+              <a:t>MERKEL, D. Docker: lightweight Linux containers for consistent development and deployment. Linux Journal, 2014.</a:t>
+            </a:r>
+          </a:p>
+        </p:txBody>
+      </p:sp>
+      <p:sp>
+        <p:nvSpPr>
+          <p:cNvPr id="12" name="Rectangle 11"/>
+          <p:cNvSpPr/>
+          <p:nvPr/>
+        </p:nvSpPr>
+        <p:spPr>
+          <a:xfrm>
+            <a:off x="704850" y="4195000"/>
+            <a:ext cx="57150" cy="57150"/>
+          </a:xfrm>
+          <a:prstGeom prst="rect">
+            <a:avLst/>
+          </a:prstGeom>
+          <a:solidFill>
+            <a:srgbClr val="E94D1C"/>
+          </a:solidFill>
+          <a:ln>
+            <a:noFill/>
+          </a:ln>
+          <a:effectLst/>
+        </p:spPr>
+        <p:style>
+          <a:lnRef idx="1">
+            <a:schemeClr val="accent1"/>
+          </a:lnRef>
+          <a:fillRef idx="3">
+            <a:schemeClr val="accent1"/>
+          </a:fillRef>
+          <a:effectRef idx="2">
+            <a:schemeClr val="accent1"/>
+          </a:effectRef>
+          <a:fontRef idx="minor">
+            <a:schemeClr val="lt1"/>
+          </a:fontRef>
+        </p:style>
+        <p:txBody>
+          <a:bodyPr rtlCol="0" anchor="ctr" wrap="square" lIns="0" rIns="0" tIns="0" bIns="0"/>
+          <a:lstStyle/>
+          <a:p>
+            <a:pPr algn="ctr"/>
+          </a:p>
+        </p:txBody>
+      </p:sp>
+      <p:sp>
+        <p:nvSpPr>
+          <p:cNvPr id="13" name="TextBox 12"/>
+          <p:cNvSpPr txBox="1"/>
+          <p:nvPr/>
+        </p:nvSpPr>
+        <p:spPr>
+          <a:xfrm>
+            <a:off x="971550" y="4100894"/>
+            <a:ext cx="9677400" cy="95250"/>
+          </a:xfrm>
+          <a:prstGeom prst="rect">
+            <a:avLst/>
+          </a:prstGeom>
+          <a:noFill/>
+        </p:spPr>
+        <p:txBody>
+          <a:bodyPr wrap="square" lIns="0" rIns="0" tIns="0" bIns="0" anchor="t">
+            <a:spAutoFit/>
+          </a:bodyPr>
+          <a:lstStyle/>
+          <a:p>
+            <a:pPr algn="l">
+              <a:lnSpc>
+                <a:spcPct val="130000"/>
+              </a:lnSpc>
+            </a:pPr>
+            <a:r>
+              <a:rPr sz="1420" b="0" i="0">
+                <a:solidFill>
+                  <a:srgbClr val="1A1A1E"/>
+                </a:solidFill>
+                <a:latin typeface="Roboto"/>
+              </a:rPr>
+              <a:t>NIST SP 800-190. Application Container Security Guide.</a:t>
+            </a:r>
+          </a:p>
+        </p:txBody>
+      </p:sp>
+      <p:sp>
+        <p:nvSpPr>
+          <p:cNvPr id="14" name="Rectangle 13"/>
+          <p:cNvSpPr/>
+          <p:nvPr/>
+        </p:nvSpPr>
+        <p:spPr>
+          <a:xfrm>
+            <a:off x="704850" y="4662488"/>
+            <a:ext cx="57150" cy="57150"/>
+          </a:xfrm>
+          <a:prstGeom prst="rect">
+            <a:avLst/>
+          </a:prstGeom>
+          <a:solidFill>
+            <a:srgbClr val="E94D1C"/>
+          </a:solidFill>
+          <a:ln>
+            <a:noFill/>
+          </a:ln>
+          <a:effectLst/>
+        </p:spPr>
+        <p:style>
+          <a:lnRef idx="1">
+            <a:schemeClr val="accent1"/>
+          </a:lnRef>
+          <a:fillRef idx="3">
+            <a:schemeClr val="accent1"/>
+          </a:fillRef>
+          <a:effectRef idx="2">
+            <a:schemeClr val="accent1"/>
+          </a:effectRef>
+          <a:fontRef idx="minor">
+            <a:schemeClr val="lt1"/>
+          </a:fontRef>
+        </p:style>
+        <p:txBody>
+          <a:bodyPr rtlCol="0" anchor="ctr" wrap="square" lIns="0" rIns="0" tIns="0" bIns="0"/>
+          <a:lstStyle/>
+          <a:p>
+            <a:pPr algn="ctr"/>
+          </a:p>
+        </p:txBody>
+      </p:sp>
+      <p:sp>
+        <p:nvSpPr>
+          <p:cNvPr id="15" name="TextBox 14"/>
+          <p:cNvSpPr txBox="1"/>
+          <p:nvPr/>
+        </p:nvSpPr>
+        <p:spPr>
+          <a:xfrm>
+            <a:off x="971550" y="4568380"/>
+            <a:ext cx="9677400" cy="95250"/>
+          </a:xfrm>
+          <a:prstGeom prst="rect">
+            <a:avLst/>
+          </a:prstGeom>
+          <a:noFill/>
+        </p:spPr>
+        <p:txBody>
+          <a:bodyPr wrap="square" lIns="0" rIns="0" tIns="0" bIns="0" anchor="t">
+            <a:spAutoFit/>
+          </a:bodyPr>
+          <a:lstStyle/>
+          <a:p>
+            <a:pPr algn="l">
+              <a:lnSpc>
+                <a:spcPct val="130000"/>
+              </a:lnSpc>
+            </a:pPr>
+            <a:r>
+              <a:rPr sz="1420" b="0" i="0">
+                <a:solidFill>
+                  <a:srgbClr val="1A1A1E"/>
+                </a:solidFill>
+                <a:latin typeface="Roboto"/>
+              </a:rPr>
+              <a:t>SOMMERVILLE, I. Engenharia de Software. 6. ed. Addison Wesley, 2004.</a:t>
+            </a:r>
+          </a:p>
+        </p:txBody>
+      </p:sp>
+      <p:sp>
+        <p:nvSpPr>
+          <p:cNvPr id="16" name="Rectangle 15"/>
+          <p:cNvSpPr/>
+          <p:nvPr/>
+        </p:nvSpPr>
+        <p:spPr>
+          <a:xfrm>
+            <a:off x="704850" y="5129974"/>
+            <a:ext cx="57150" cy="57150"/>
+          </a:xfrm>
+          <a:prstGeom prst="rect">
+            <a:avLst/>
+          </a:prstGeom>
+          <a:solidFill>
+            <a:srgbClr val="E94D1C"/>
+          </a:solidFill>
+          <a:ln>
+            <a:noFill/>
+          </a:ln>
+          <a:effectLst/>
+        </p:spPr>
+        <p:style>
+          <a:lnRef idx="1">
+            <a:schemeClr val="accent1"/>
+          </a:lnRef>
+          <a:fillRef idx="3">
+            <a:schemeClr val="accent1"/>
+          </a:fillRef>
+          <a:effectRef idx="2">
+            <a:schemeClr val="accent1"/>
+          </a:effectRef>
+          <a:fontRef idx="minor">
+            <a:schemeClr val="lt1"/>
+          </a:fontRef>
+        </p:style>
+        <p:txBody>
+          <a:bodyPr rtlCol="0" anchor="ctr" wrap="square" lIns="0" rIns="0" tIns="0" bIns="0"/>
+          <a:lstStyle/>
+          <a:p>
+            <a:pPr algn="ctr"/>
+          </a:p>
+        </p:txBody>
+      </p:sp>
+      <p:sp>
+        <p:nvSpPr>
+          <p:cNvPr id="17" name="TextBox 16"/>
+          <p:cNvSpPr txBox="1"/>
+          <p:nvPr/>
+        </p:nvSpPr>
+        <p:spPr>
+          <a:xfrm>
+            <a:off x="971550" y="5035868"/>
+            <a:ext cx="9677400" cy="95250"/>
+          </a:xfrm>
+          <a:prstGeom prst="rect">
+            <a:avLst/>
+          </a:prstGeom>
+          <a:noFill/>
+        </p:spPr>
+        <p:txBody>
+          <a:bodyPr wrap="square" lIns="0" rIns="0" tIns="0" bIns="0" anchor="t">
+            <a:spAutoFit/>
+          </a:bodyPr>
+          <a:lstStyle/>
+          <a:p>
+            <a:pPr algn="l">
+              <a:lnSpc>
+                <a:spcPct val="130000"/>
+              </a:lnSpc>
+            </a:pPr>
+            <a:r>
+              <a:rPr sz="1420" b="0" i="0">
+                <a:solidFill>
+                  <a:srgbClr val="1A1A1E"/>
+                </a:solidFill>
+                <a:latin typeface="Roboto"/>
+              </a:rPr>
+              <a:t>FOWLER, M. Patterns of Enterprise Application Architecture. Addison Wesley, 2002.</a:t>
+            </a:r>
+          </a:p>
+        </p:txBody>
+      </p:sp>
+      <p:sp>
+        <p:nvSpPr>
+          <p:cNvPr id="18" name="Rectangle 17"/>
+          <p:cNvSpPr/>
+          <p:nvPr/>
+        </p:nvSpPr>
+        <p:spPr>
+          <a:xfrm>
+            <a:off x="704850" y="5597462"/>
+            <a:ext cx="57150" cy="57150"/>
+          </a:xfrm>
+          <a:prstGeom prst="rect">
+            <a:avLst/>
+          </a:prstGeom>
+          <a:solidFill>
+            <a:srgbClr val="E94D1C"/>
+          </a:solidFill>
+          <a:ln>
+            <a:noFill/>
+          </a:ln>
+          <a:effectLst/>
+        </p:spPr>
+        <p:style>
+          <a:lnRef idx="1">
+            <a:schemeClr val="accent1"/>
+          </a:lnRef>
+          <a:fillRef idx="3">
+            <a:schemeClr val="accent1"/>
+          </a:fillRef>
+          <a:effectRef idx="2">
+            <a:schemeClr val="accent1"/>
+          </a:effectRef>
+          <a:fontRef idx="minor">
+            <a:schemeClr val="lt1"/>
+          </a:fontRef>
+        </p:style>
+        <p:txBody>
+          <a:bodyPr rtlCol="0" anchor="ctr" wrap="square" lIns="0" rIns="0" tIns="0" bIns="0"/>
+          <a:lstStyle/>
+          <a:p>
+            <a:pPr algn="ctr"/>
+          </a:p>
+        </p:txBody>
+      </p:sp>
+      <p:sp>
+        <p:nvSpPr>
+          <p:cNvPr id="19" name="TextBox 18"/>
+          <p:cNvSpPr txBox="1"/>
+          <p:nvPr/>
+        </p:nvSpPr>
+        <p:spPr>
+          <a:xfrm>
+            <a:off x="971550" y="5503355"/>
+            <a:ext cx="9677400" cy="95250"/>
+          </a:xfrm>
+          <a:prstGeom prst="rect">
+            <a:avLst/>
+          </a:prstGeom>
+          <a:noFill/>
+        </p:spPr>
+        <p:txBody>
+          <a:bodyPr wrap="square" lIns="0" rIns="0" tIns="0" bIns="0" anchor="t">
+            <a:spAutoFit/>
+          </a:bodyPr>
+          <a:lstStyle/>
+          <a:p>
+            <a:pPr algn="l">
+              <a:lnSpc>
+                <a:spcPct val="130000"/>
+              </a:lnSpc>
+            </a:pPr>
+            <a:r>
+              <a:rPr sz="1420" b="0" i="0">
+                <a:solidFill>
+                  <a:srgbClr val="1A1A1E"/>
+                </a:solidFill>
+                <a:latin typeface="Roboto"/>
+              </a:rPr>
+              <a:t>FARIAS, K. Aula 03, Arquiteturas em Camadas. Aula 05, Arquiteturas Baseadas em Componentes.</a:t>
+            </a:r>
+          </a:p>
+        </p:txBody>
+      </p:sp>
+      <p:sp>
+        <p:nvSpPr>
+          <p:cNvPr id="20" name="TextBox 19"/>
+          <p:cNvSpPr txBox="1"/>
+          <p:nvPr/>
+        </p:nvSpPr>
+        <p:spPr>
+          <a:xfrm>
+            <a:off x="685800" y="6324600"/>
+            <a:ext cx="6667500" cy="182880"/>
+          </a:xfrm>
+          <a:prstGeom prst="rect">
+            <a:avLst/>
+          </a:prstGeom>
+          <a:noFill/>
+        </p:spPr>
+        <p:txBody>
+          <a:bodyPr wrap="square" lIns="0" rIns="0" tIns="0" bIns="0" anchor="t">
+            <a:spAutoFit/>
+          </a:bodyPr>
+          <a:lstStyle/>
+          <a:p>
+            <a:pPr algn="l">
+              <a:lnSpc>
                 <a:spcPct val="120000"/>
               </a:lnSpc>
             </a:pPr>
@@ -29825,14 +30239,14 @@
                 </a:solidFill>
                 <a:latin typeface="Roboto"/>
               </a:rPr>
-              <a:t>Considerações finais</a:t>
-            </a:r>
-          </a:p>
-        </p:txBody>
-      </p:sp>
-      <p:sp>
-        <p:nvSpPr>
-          <p:cNvPr id="11" name="TextBox 10"/>
+              <a:t>Referências</a:t>
+            </a:r>
+          </a:p>
+        </p:txBody>
+      </p:sp>
+      <p:sp>
+        <p:nvSpPr>
+          <p:cNvPr id="21" name="TextBox 20"/>
           <p:cNvSpPr txBox="1"/>
           <p:nvPr/>
         </p:nvSpPr>
@@ -30281,837 +30695,6 @@
                 <a:latin typeface="Roboto"/>
               </a:rPr>
               <a:t>03</a:t>
-            </a:r>
-          </a:p>
-        </p:txBody>
-      </p:sp>
-    </p:spTree>
-  </p:cSld>
-  <p:clrMapOvr>
-    <a:masterClrMapping/>
-  </p:clrMapOvr>
-</p:sld>
-</file>
-
-<file path=ppt/slides/slide30.xml><?xml version="1.0" encoding="utf-8"?>
-<p:sld xmlns:a="http://schemas.openxmlformats.org/drawingml/2006/main" xmlns:p="http://schemas.openxmlformats.org/presentationml/2006/main" xmlns:r="http://schemas.openxmlformats.org/officeDocument/2006/relationships">
-  <p:cSld>
-    <p:bg>
-      <p:bgPr>
-        <a:solidFill>
-          <a:srgbClr val="FFFFFF"/>
-        </a:solidFill>
-        <a:effectLst/>
-      </p:bgPr>
-    </p:bg>
-    <p:spTree>
-      <p:nvGrpSpPr>
-        <p:cNvPr id="1" name=""/>
-        <p:cNvGrpSpPr/>
-        <p:nvPr/>
-      </p:nvGrpSpPr>
-      <p:grpSpPr/>
-      <p:pic>
-        <p:nvPicPr>
-          <p:cNvPr id="2" name="Picture 1" descr="u-azul.png"/>
-          <p:cNvPicPr>
-            <a:picLocks noChangeAspect="1"/>
-          </p:cNvPicPr>
-          <p:nvPr/>
-        </p:nvPicPr>
-        <p:blipFill>
-          <a:blip r:embed="rId2"/>
-          <a:stretch>
-            <a:fillRect/>
-          </a:stretch>
-        </p:blipFill>
-        <p:spPr>
-          <a:xfrm>
-            <a:off x="10744200" y="457200"/>
-            <a:ext cx="342900" cy="342900"/>
-          </a:xfrm>
-          <a:prstGeom prst="rect">
-            <a:avLst/>
-          </a:prstGeom>
-        </p:spPr>
-      </p:pic>
-      <p:sp>
-        <p:nvSpPr>
-          <p:cNvPr id="3" name="TextBox 2"/>
-          <p:cNvSpPr txBox="1"/>
-          <p:nvPr/>
-        </p:nvSpPr>
-        <p:spPr>
-          <a:xfrm>
-            <a:off x="685800" y="685800"/>
-            <a:ext cx="9620250" cy="1524000"/>
-          </a:xfrm>
-          <a:prstGeom prst="rect">
-            <a:avLst/>
-          </a:prstGeom>
-          <a:noFill/>
-        </p:spPr>
-        <p:txBody>
-          <a:bodyPr wrap="square" lIns="0" rIns="0" tIns="0" bIns="0" anchor="t">
-            <a:spAutoFit/>
-          </a:bodyPr>
-          <a:lstStyle/>
-          <a:p>
-            <a:pPr algn="l">
-              <a:lnSpc>
-                <a:spcPct val="104000"/>
-              </a:lnSpc>
-            </a:pPr>
-            <a:r>
-              <a:rPr sz="3000" b="1" i="0">
-                <a:solidFill>
-                  <a:srgbClr val="21049A"/>
-                </a:solidFill>
-                <a:latin typeface="Roboto"/>
-              </a:rPr>
-              <a:t>Referências</a:t>
-            </a:r>
-          </a:p>
-        </p:txBody>
-      </p:sp>
-      <p:sp>
-        <p:nvSpPr>
-          <p:cNvPr id="4" name="Rectangle 3"/>
-          <p:cNvSpPr/>
-          <p:nvPr/>
-        </p:nvSpPr>
-        <p:spPr>
-          <a:xfrm>
-            <a:off x="704850" y="2086166"/>
-            <a:ext cx="57150" cy="57150"/>
-          </a:xfrm>
-          <a:prstGeom prst="rect">
-            <a:avLst/>
-          </a:prstGeom>
-          <a:solidFill>
-            <a:srgbClr val="E94D1C"/>
-          </a:solidFill>
-          <a:ln>
-            <a:noFill/>
-          </a:ln>
-          <a:effectLst/>
-        </p:spPr>
-        <p:style>
-          <a:lnRef idx="1">
-            <a:schemeClr val="accent1"/>
-          </a:lnRef>
-          <a:fillRef idx="3">
-            <a:schemeClr val="accent1"/>
-          </a:fillRef>
-          <a:effectRef idx="2">
-            <a:schemeClr val="accent1"/>
-          </a:effectRef>
-          <a:fontRef idx="minor">
-            <a:schemeClr val="lt1"/>
-          </a:fontRef>
-        </p:style>
-        <p:txBody>
-          <a:bodyPr rtlCol="0" anchor="ctr" wrap="square" lIns="0" rIns="0" tIns="0" bIns="0"/>
-          <a:lstStyle/>
-          <a:p>
-            <a:pPr algn="ctr"/>
-          </a:p>
-        </p:txBody>
-      </p:sp>
-      <p:sp>
-        <p:nvSpPr>
-          <p:cNvPr id="5" name="TextBox 4"/>
-          <p:cNvSpPr txBox="1"/>
-          <p:nvPr/>
-        </p:nvSpPr>
-        <p:spPr>
-          <a:xfrm>
-            <a:off x="971550" y="1992059"/>
-            <a:ext cx="9677400" cy="95250"/>
-          </a:xfrm>
-          <a:prstGeom prst="rect">
-            <a:avLst/>
-          </a:prstGeom>
-          <a:noFill/>
-        </p:spPr>
-        <p:txBody>
-          <a:bodyPr wrap="square" lIns="0" rIns="0" tIns="0" bIns="0" anchor="t">
-            <a:spAutoFit/>
-          </a:bodyPr>
-          <a:lstStyle/>
-          <a:p>
-            <a:pPr algn="l">
-              <a:lnSpc>
-                <a:spcPct val="130000"/>
-              </a:lnSpc>
-            </a:pPr>
-            <a:r>
-              <a:rPr sz="1420" b="0" i="0">
-                <a:solidFill>
-                  <a:srgbClr val="1A1A1E"/>
-                </a:solidFill>
-                <a:latin typeface="Roboto"/>
-              </a:rPr>
-              <a:t>Open Container Initiative. Runtime Spec, Image Spec e Distribution Spec. Linux Foundation, fundada em 2015.</a:t>
-            </a:r>
-          </a:p>
-        </p:txBody>
-      </p:sp>
-      <p:sp>
-        <p:nvSpPr>
-          <p:cNvPr id="6" name="Rectangle 5"/>
-          <p:cNvSpPr/>
-          <p:nvPr/>
-        </p:nvSpPr>
-        <p:spPr>
-          <a:xfrm>
-            <a:off x="704850" y="2553652"/>
-            <a:ext cx="57150" cy="57150"/>
-          </a:xfrm>
-          <a:prstGeom prst="rect">
-            <a:avLst/>
-          </a:prstGeom>
-          <a:solidFill>
-            <a:srgbClr val="E94D1C"/>
-          </a:solidFill>
-          <a:ln>
-            <a:noFill/>
-          </a:ln>
-          <a:effectLst/>
-        </p:spPr>
-        <p:style>
-          <a:lnRef idx="1">
-            <a:schemeClr val="accent1"/>
-          </a:lnRef>
-          <a:fillRef idx="3">
-            <a:schemeClr val="accent1"/>
-          </a:fillRef>
-          <a:effectRef idx="2">
-            <a:schemeClr val="accent1"/>
-          </a:effectRef>
-          <a:fontRef idx="minor">
-            <a:schemeClr val="lt1"/>
-          </a:fontRef>
-        </p:style>
-        <p:txBody>
-          <a:bodyPr rtlCol="0" anchor="ctr" wrap="square" lIns="0" rIns="0" tIns="0" bIns="0"/>
-          <a:lstStyle/>
-          <a:p>
-            <a:pPr algn="ctr"/>
-          </a:p>
-        </p:txBody>
-      </p:sp>
-      <p:sp>
-        <p:nvSpPr>
-          <p:cNvPr id="7" name="TextBox 6"/>
-          <p:cNvSpPr txBox="1"/>
-          <p:nvPr/>
-        </p:nvSpPr>
-        <p:spPr>
-          <a:xfrm>
-            <a:off x="971550" y="2459546"/>
-            <a:ext cx="9677400" cy="95250"/>
-          </a:xfrm>
-          <a:prstGeom prst="rect">
-            <a:avLst/>
-          </a:prstGeom>
-          <a:noFill/>
-        </p:spPr>
-        <p:txBody>
-          <a:bodyPr wrap="square" lIns="0" rIns="0" tIns="0" bIns="0" anchor="t">
-            <a:spAutoFit/>
-          </a:bodyPr>
-          <a:lstStyle/>
-          <a:p>
-            <a:pPr algn="l">
-              <a:lnSpc>
-                <a:spcPct val="130000"/>
-              </a:lnSpc>
-            </a:pPr>
-            <a:r>
-              <a:rPr sz="1420" b="0" i="0">
-                <a:solidFill>
-                  <a:srgbClr val="1A1A1E"/>
-                </a:solidFill>
-                <a:latin typeface="Roboto"/>
-              </a:rPr>
-              <a:t>WIGGINS, A. The Twelve-Factor App, 2011.</a:t>
-            </a:r>
-          </a:p>
-        </p:txBody>
-      </p:sp>
-      <p:sp>
-        <p:nvSpPr>
-          <p:cNvPr id="8" name="Rectangle 7"/>
-          <p:cNvSpPr/>
-          <p:nvPr/>
-        </p:nvSpPr>
-        <p:spPr>
-          <a:xfrm>
-            <a:off x="704850" y="3021140"/>
-            <a:ext cx="57150" cy="57150"/>
-          </a:xfrm>
-          <a:prstGeom prst="rect">
-            <a:avLst/>
-          </a:prstGeom>
-          <a:solidFill>
-            <a:srgbClr val="E94D1C"/>
-          </a:solidFill>
-          <a:ln>
-            <a:noFill/>
-          </a:ln>
-          <a:effectLst/>
-        </p:spPr>
-        <p:style>
-          <a:lnRef idx="1">
-            <a:schemeClr val="accent1"/>
-          </a:lnRef>
-          <a:fillRef idx="3">
-            <a:schemeClr val="accent1"/>
-          </a:fillRef>
-          <a:effectRef idx="2">
-            <a:schemeClr val="accent1"/>
-          </a:effectRef>
-          <a:fontRef idx="minor">
-            <a:schemeClr val="lt1"/>
-          </a:fontRef>
-        </p:style>
-        <p:txBody>
-          <a:bodyPr rtlCol="0" anchor="ctr" wrap="square" lIns="0" rIns="0" tIns="0" bIns="0"/>
-          <a:lstStyle/>
-          <a:p>
-            <a:pPr algn="ctr"/>
-          </a:p>
-        </p:txBody>
-      </p:sp>
-      <p:sp>
-        <p:nvSpPr>
-          <p:cNvPr id="9" name="TextBox 8"/>
-          <p:cNvSpPr txBox="1"/>
-          <p:nvPr/>
-        </p:nvSpPr>
-        <p:spPr>
-          <a:xfrm>
-            <a:off x="971550" y="2927032"/>
-            <a:ext cx="9677400" cy="95250"/>
-          </a:xfrm>
-          <a:prstGeom prst="rect">
-            <a:avLst/>
-          </a:prstGeom>
-          <a:noFill/>
-        </p:spPr>
-        <p:txBody>
-          <a:bodyPr wrap="square" lIns="0" rIns="0" tIns="0" bIns="0" anchor="t">
-            <a:spAutoFit/>
-          </a:bodyPr>
-          <a:lstStyle/>
-          <a:p>
-            <a:pPr algn="l">
-              <a:lnSpc>
-                <a:spcPct val="130000"/>
-              </a:lnSpc>
-            </a:pPr>
-            <a:r>
-              <a:rPr sz="1420" b="0" i="0">
-                <a:solidFill>
-                  <a:srgbClr val="1A1A1E"/>
-                </a:solidFill>
-                <a:latin typeface="Roboto"/>
-              </a:rPr>
-              <a:t>FELTER, W. et al. An updated performance comparison of virtual machines and Linux containers. IBM Research Report, 2015.</a:t>
-            </a:r>
-          </a:p>
-        </p:txBody>
-      </p:sp>
-      <p:sp>
-        <p:nvSpPr>
-          <p:cNvPr id="10" name="Rectangle 9"/>
-          <p:cNvSpPr/>
-          <p:nvPr/>
-        </p:nvSpPr>
-        <p:spPr>
-          <a:xfrm>
-            <a:off x="704850" y="3727514"/>
-            <a:ext cx="57150" cy="57150"/>
-          </a:xfrm>
-          <a:prstGeom prst="rect">
-            <a:avLst/>
-          </a:prstGeom>
-          <a:solidFill>
-            <a:srgbClr val="E94D1C"/>
-          </a:solidFill>
-          <a:ln>
-            <a:noFill/>
-          </a:ln>
-          <a:effectLst/>
-        </p:spPr>
-        <p:style>
-          <a:lnRef idx="1">
-            <a:schemeClr val="accent1"/>
-          </a:lnRef>
-          <a:fillRef idx="3">
-            <a:schemeClr val="accent1"/>
-          </a:fillRef>
-          <a:effectRef idx="2">
-            <a:schemeClr val="accent1"/>
-          </a:effectRef>
-          <a:fontRef idx="minor">
-            <a:schemeClr val="lt1"/>
-          </a:fontRef>
-        </p:style>
-        <p:txBody>
-          <a:bodyPr rtlCol="0" anchor="ctr" wrap="square" lIns="0" rIns="0" tIns="0" bIns="0"/>
-          <a:lstStyle/>
-          <a:p>
-            <a:pPr algn="ctr"/>
-          </a:p>
-        </p:txBody>
-      </p:sp>
-      <p:sp>
-        <p:nvSpPr>
-          <p:cNvPr id="11" name="TextBox 10"/>
-          <p:cNvSpPr txBox="1"/>
-          <p:nvPr/>
-        </p:nvSpPr>
-        <p:spPr>
-          <a:xfrm>
-            <a:off x="971550" y="3633407"/>
-            <a:ext cx="9677400" cy="95250"/>
-          </a:xfrm>
-          <a:prstGeom prst="rect">
-            <a:avLst/>
-          </a:prstGeom>
-          <a:noFill/>
-        </p:spPr>
-        <p:txBody>
-          <a:bodyPr wrap="square" lIns="0" rIns="0" tIns="0" bIns="0" anchor="t">
-            <a:spAutoFit/>
-          </a:bodyPr>
-          <a:lstStyle/>
-          <a:p>
-            <a:pPr algn="l">
-              <a:lnSpc>
-                <a:spcPct val="130000"/>
-              </a:lnSpc>
-            </a:pPr>
-            <a:r>
-              <a:rPr sz="1420" b="0" i="0">
-                <a:solidFill>
-                  <a:srgbClr val="1A1A1E"/>
-                </a:solidFill>
-                <a:latin typeface="Roboto"/>
-              </a:rPr>
-              <a:t>MERKEL, D. Docker: lightweight Linux containers for consistent development and deployment. Linux Journal, 2014.</a:t>
-            </a:r>
-          </a:p>
-        </p:txBody>
-      </p:sp>
-      <p:sp>
-        <p:nvSpPr>
-          <p:cNvPr id="12" name="Rectangle 11"/>
-          <p:cNvSpPr/>
-          <p:nvPr/>
-        </p:nvSpPr>
-        <p:spPr>
-          <a:xfrm>
-            <a:off x="704850" y="4195000"/>
-            <a:ext cx="57150" cy="57150"/>
-          </a:xfrm>
-          <a:prstGeom prst="rect">
-            <a:avLst/>
-          </a:prstGeom>
-          <a:solidFill>
-            <a:srgbClr val="E94D1C"/>
-          </a:solidFill>
-          <a:ln>
-            <a:noFill/>
-          </a:ln>
-          <a:effectLst/>
-        </p:spPr>
-        <p:style>
-          <a:lnRef idx="1">
-            <a:schemeClr val="accent1"/>
-          </a:lnRef>
-          <a:fillRef idx="3">
-            <a:schemeClr val="accent1"/>
-          </a:fillRef>
-          <a:effectRef idx="2">
-            <a:schemeClr val="accent1"/>
-          </a:effectRef>
-          <a:fontRef idx="minor">
-            <a:schemeClr val="lt1"/>
-          </a:fontRef>
-        </p:style>
-        <p:txBody>
-          <a:bodyPr rtlCol="0" anchor="ctr" wrap="square" lIns="0" rIns="0" tIns="0" bIns="0"/>
-          <a:lstStyle/>
-          <a:p>
-            <a:pPr algn="ctr"/>
-          </a:p>
-        </p:txBody>
-      </p:sp>
-      <p:sp>
-        <p:nvSpPr>
-          <p:cNvPr id="13" name="TextBox 12"/>
-          <p:cNvSpPr txBox="1"/>
-          <p:nvPr/>
-        </p:nvSpPr>
-        <p:spPr>
-          <a:xfrm>
-            <a:off x="971550" y="4100894"/>
-            <a:ext cx="9677400" cy="95250"/>
-          </a:xfrm>
-          <a:prstGeom prst="rect">
-            <a:avLst/>
-          </a:prstGeom>
-          <a:noFill/>
-        </p:spPr>
-        <p:txBody>
-          <a:bodyPr wrap="square" lIns="0" rIns="0" tIns="0" bIns="0" anchor="t">
-            <a:spAutoFit/>
-          </a:bodyPr>
-          <a:lstStyle/>
-          <a:p>
-            <a:pPr algn="l">
-              <a:lnSpc>
-                <a:spcPct val="130000"/>
-              </a:lnSpc>
-            </a:pPr>
-            <a:r>
-              <a:rPr sz="1420" b="0" i="0">
-                <a:solidFill>
-                  <a:srgbClr val="1A1A1E"/>
-                </a:solidFill>
-                <a:latin typeface="Roboto"/>
-              </a:rPr>
-              <a:t>NIST SP 800-190. Application Container Security Guide.</a:t>
-            </a:r>
-          </a:p>
-        </p:txBody>
-      </p:sp>
-      <p:sp>
-        <p:nvSpPr>
-          <p:cNvPr id="14" name="Rectangle 13"/>
-          <p:cNvSpPr/>
-          <p:nvPr/>
-        </p:nvSpPr>
-        <p:spPr>
-          <a:xfrm>
-            <a:off x="704850" y="4662488"/>
-            <a:ext cx="57150" cy="57150"/>
-          </a:xfrm>
-          <a:prstGeom prst="rect">
-            <a:avLst/>
-          </a:prstGeom>
-          <a:solidFill>
-            <a:srgbClr val="E94D1C"/>
-          </a:solidFill>
-          <a:ln>
-            <a:noFill/>
-          </a:ln>
-          <a:effectLst/>
-        </p:spPr>
-        <p:style>
-          <a:lnRef idx="1">
-            <a:schemeClr val="accent1"/>
-          </a:lnRef>
-          <a:fillRef idx="3">
-            <a:schemeClr val="accent1"/>
-          </a:fillRef>
-          <a:effectRef idx="2">
-            <a:schemeClr val="accent1"/>
-          </a:effectRef>
-          <a:fontRef idx="minor">
-            <a:schemeClr val="lt1"/>
-          </a:fontRef>
-        </p:style>
-        <p:txBody>
-          <a:bodyPr rtlCol="0" anchor="ctr" wrap="square" lIns="0" rIns="0" tIns="0" bIns="0"/>
-          <a:lstStyle/>
-          <a:p>
-            <a:pPr algn="ctr"/>
-          </a:p>
-        </p:txBody>
-      </p:sp>
-      <p:sp>
-        <p:nvSpPr>
-          <p:cNvPr id="15" name="TextBox 14"/>
-          <p:cNvSpPr txBox="1"/>
-          <p:nvPr/>
-        </p:nvSpPr>
-        <p:spPr>
-          <a:xfrm>
-            <a:off x="971550" y="4568380"/>
-            <a:ext cx="9677400" cy="95250"/>
-          </a:xfrm>
-          <a:prstGeom prst="rect">
-            <a:avLst/>
-          </a:prstGeom>
-          <a:noFill/>
-        </p:spPr>
-        <p:txBody>
-          <a:bodyPr wrap="square" lIns="0" rIns="0" tIns="0" bIns="0" anchor="t">
-            <a:spAutoFit/>
-          </a:bodyPr>
-          <a:lstStyle/>
-          <a:p>
-            <a:pPr algn="l">
-              <a:lnSpc>
-                <a:spcPct val="130000"/>
-              </a:lnSpc>
-            </a:pPr>
-            <a:r>
-              <a:rPr sz="1420" b="0" i="0">
-                <a:solidFill>
-                  <a:srgbClr val="1A1A1E"/>
-                </a:solidFill>
-                <a:latin typeface="Roboto"/>
-              </a:rPr>
-              <a:t>SOMMERVILLE, I. Engenharia de Software. 6. ed. Addison Wesley, 2004.</a:t>
-            </a:r>
-          </a:p>
-        </p:txBody>
-      </p:sp>
-      <p:sp>
-        <p:nvSpPr>
-          <p:cNvPr id="16" name="Rectangle 15"/>
-          <p:cNvSpPr/>
-          <p:nvPr/>
-        </p:nvSpPr>
-        <p:spPr>
-          <a:xfrm>
-            <a:off x="704850" y="5129974"/>
-            <a:ext cx="57150" cy="57150"/>
-          </a:xfrm>
-          <a:prstGeom prst="rect">
-            <a:avLst/>
-          </a:prstGeom>
-          <a:solidFill>
-            <a:srgbClr val="E94D1C"/>
-          </a:solidFill>
-          <a:ln>
-            <a:noFill/>
-          </a:ln>
-          <a:effectLst/>
-        </p:spPr>
-        <p:style>
-          <a:lnRef idx="1">
-            <a:schemeClr val="accent1"/>
-          </a:lnRef>
-          <a:fillRef idx="3">
-            <a:schemeClr val="accent1"/>
-          </a:fillRef>
-          <a:effectRef idx="2">
-            <a:schemeClr val="accent1"/>
-          </a:effectRef>
-          <a:fontRef idx="minor">
-            <a:schemeClr val="lt1"/>
-          </a:fontRef>
-        </p:style>
-        <p:txBody>
-          <a:bodyPr rtlCol="0" anchor="ctr" wrap="square" lIns="0" rIns="0" tIns="0" bIns="0"/>
-          <a:lstStyle/>
-          <a:p>
-            <a:pPr algn="ctr"/>
-          </a:p>
-        </p:txBody>
-      </p:sp>
-      <p:sp>
-        <p:nvSpPr>
-          <p:cNvPr id="17" name="TextBox 16"/>
-          <p:cNvSpPr txBox="1"/>
-          <p:nvPr/>
-        </p:nvSpPr>
-        <p:spPr>
-          <a:xfrm>
-            <a:off x="971550" y="5035868"/>
-            <a:ext cx="9677400" cy="95250"/>
-          </a:xfrm>
-          <a:prstGeom prst="rect">
-            <a:avLst/>
-          </a:prstGeom>
-          <a:noFill/>
-        </p:spPr>
-        <p:txBody>
-          <a:bodyPr wrap="square" lIns="0" rIns="0" tIns="0" bIns="0" anchor="t">
-            <a:spAutoFit/>
-          </a:bodyPr>
-          <a:lstStyle/>
-          <a:p>
-            <a:pPr algn="l">
-              <a:lnSpc>
-                <a:spcPct val="130000"/>
-              </a:lnSpc>
-            </a:pPr>
-            <a:r>
-              <a:rPr sz="1420" b="0" i="0">
-                <a:solidFill>
-                  <a:srgbClr val="1A1A1E"/>
-                </a:solidFill>
-                <a:latin typeface="Roboto"/>
-              </a:rPr>
-              <a:t>FOWLER, M. Patterns of Enterprise Application Architecture. Addison Wesley, 2002.</a:t>
-            </a:r>
-          </a:p>
-        </p:txBody>
-      </p:sp>
-      <p:sp>
-        <p:nvSpPr>
-          <p:cNvPr id="18" name="Rectangle 17"/>
-          <p:cNvSpPr/>
-          <p:nvPr/>
-        </p:nvSpPr>
-        <p:spPr>
-          <a:xfrm>
-            <a:off x="704850" y="5597462"/>
-            <a:ext cx="57150" cy="57150"/>
-          </a:xfrm>
-          <a:prstGeom prst="rect">
-            <a:avLst/>
-          </a:prstGeom>
-          <a:solidFill>
-            <a:srgbClr val="E94D1C"/>
-          </a:solidFill>
-          <a:ln>
-            <a:noFill/>
-          </a:ln>
-          <a:effectLst/>
-        </p:spPr>
-        <p:style>
-          <a:lnRef idx="1">
-            <a:schemeClr val="accent1"/>
-          </a:lnRef>
-          <a:fillRef idx="3">
-            <a:schemeClr val="accent1"/>
-          </a:fillRef>
-          <a:effectRef idx="2">
-            <a:schemeClr val="accent1"/>
-          </a:effectRef>
-          <a:fontRef idx="minor">
-            <a:schemeClr val="lt1"/>
-          </a:fontRef>
-        </p:style>
-        <p:txBody>
-          <a:bodyPr rtlCol="0" anchor="ctr" wrap="square" lIns="0" rIns="0" tIns="0" bIns="0"/>
-          <a:lstStyle/>
-          <a:p>
-            <a:pPr algn="ctr"/>
-          </a:p>
-        </p:txBody>
-      </p:sp>
-      <p:sp>
-        <p:nvSpPr>
-          <p:cNvPr id="19" name="TextBox 18"/>
-          <p:cNvSpPr txBox="1"/>
-          <p:nvPr/>
-        </p:nvSpPr>
-        <p:spPr>
-          <a:xfrm>
-            <a:off x="971550" y="5503355"/>
-            <a:ext cx="9677400" cy="95250"/>
-          </a:xfrm>
-          <a:prstGeom prst="rect">
-            <a:avLst/>
-          </a:prstGeom>
-          <a:noFill/>
-        </p:spPr>
-        <p:txBody>
-          <a:bodyPr wrap="square" lIns="0" rIns="0" tIns="0" bIns="0" anchor="t">
-            <a:spAutoFit/>
-          </a:bodyPr>
-          <a:lstStyle/>
-          <a:p>
-            <a:pPr algn="l">
-              <a:lnSpc>
-                <a:spcPct val="130000"/>
-              </a:lnSpc>
-            </a:pPr>
-            <a:r>
-              <a:rPr sz="1420" b="0" i="0">
-                <a:solidFill>
-                  <a:srgbClr val="1A1A1E"/>
-                </a:solidFill>
-                <a:latin typeface="Roboto"/>
-              </a:rPr>
-              <a:t>FARIAS, K. Aula 03, Arquiteturas em Camadas. Aula 05, Arquiteturas Baseadas em Componentes.</a:t>
-            </a:r>
-          </a:p>
-        </p:txBody>
-      </p:sp>
-      <p:sp>
-        <p:nvSpPr>
-          <p:cNvPr id="20" name="TextBox 19"/>
-          <p:cNvSpPr txBox="1"/>
-          <p:nvPr/>
-        </p:nvSpPr>
-        <p:spPr>
-          <a:xfrm>
-            <a:off x="685800" y="6324600"/>
-            <a:ext cx="6667500" cy="182880"/>
-          </a:xfrm>
-          <a:prstGeom prst="rect">
-            <a:avLst/>
-          </a:prstGeom>
-          <a:noFill/>
-        </p:spPr>
-        <p:txBody>
-          <a:bodyPr wrap="square" lIns="0" rIns="0" tIns="0" bIns="0" anchor="t">
-            <a:spAutoFit/>
-          </a:bodyPr>
-          <a:lstStyle/>
-          <a:p>
-            <a:pPr algn="l">
-              <a:lnSpc>
-                <a:spcPct val="120000"/>
-              </a:lnSpc>
-            </a:pPr>
-            <a:r>
-              <a:rPr sz="900" b="0" i="0">
-                <a:solidFill>
-                  <a:srgbClr val="6B6B78"/>
-                </a:solidFill>
-                <a:latin typeface="Roboto"/>
-              </a:rPr>
-              <a:t>Referências</a:t>
-            </a:r>
-          </a:p>
-        </p:txBody>
-      </p:sp>
-      <p:sp>
-        <p:nvSpPr>
-          <p:cNvPr id="21" name="TextBox 20"/>
-          <p:cNvSpPr txBox="1"/>
-          <p:nvPr/>
-        </p:nvSpPr>
-        <p:spPr>
-          <a:xfrm>
-            <a:off x="10477500" y="6324600"/>
-            <a:ext cx="1028700" cy="182880"/>
-          </a:xfrm>
-          <a:prstGeom prst="rect">
-            <a:avLst/>
-          </a:prstGeom>
-          <a:noFill/>
-        </p:spPr>
-        <p:txBody>
-          <a:bodyPr wrap="square" lIns="0" rIns="0" tIns="0" bIns="0" anchor="t">
-            <a:spAutoFit/>
-          </a:bodyPr>
-          <a:lstStyle/>
-          <a:p>
-            <a:pPr algn="r">
-              <a:lnSpc>
-                <a:spcPct val="120000"/>
-              </a:lnSpc>
-            </a:pPr>
-            <a:r>
-              <a:rPr sz="900" b="1" i="0">
-                <a:solidFill>
-                  <a:srgbClr val="21049A"/>
-                </a:solidFill>
-                <a:latin typeface="Roboto"/>
-              </a:rPr>
-              <a:t>30</a:t>
             </a:r>
           </a:p>
         </p:txBody>

--- a/trabalhos/T1-Docker-Invite-People.pptx
+++ b/trabalhos/T1-Docker-Invite-People.pptx
@@ -12080,7 +12080,7 @@
         </p:nvSpPr>
         <p:spPr>
           <a:xfrm>
-            <a:off x="857250" y="3219450"/>
+            <a:off x="857250" y="3324225"/>
             <a:ext cx="1771650" cy="628650"/>
           </a:xfrm>
           <a:prstGeom prst="roundRect">
@@ -12126,7 +12126,7 @@
         </p:nvSpPr>
         <p:spPr>
           <a:xfrm>
-            <a:off x="857250" y="3333750"/>
+            <a:off x="857250" y="3438525"/>
             <a:ext cx="1771650" cy="228600"/>
           </a:xfrm>
           <a:prstGeom prst="rect">
@@ -12165,7 +12165,7 @@
         </p:nvSpPr>
         <p:spPr>
           <a:xfrm>
-            <a:off x="914400" y="3543300"/>
+            <a:off x="914400" y="3648075"/>
             <a:ext cx="1657350" cy="175260"/>
           </a:xfrm>
           <a:prstGeom prst="rect">
@@ -12204,7 +12204,7 @@
         </p:nvSpPr>
         <p:spPr>
           <a:xfrm>
-            <a:off x="2952750" y="3219450"/>
+            <a:off x="2952750" y="3324225"/>
             <a:ext cx="1771650" cy="628650"/>
           </a:xfrm>
           <a:prstGeom prst="roundRect">
@@ -12250,7 +12250,7 @@
         </p:nvSpPr>
         <p:spPr>
           <a:xfrm>
-            <a:off x="2952750" y="3333750"/>
+            <a:off x="2952750" y="3438525"/>
             <a:ext cx="1771650" cy="228600"/>
           </a:xfrm>
           <a:prstGeom prst="rect">
@@ -12289,7 +12289,7 @@
         </p:nvSpPr>
         <p:spPr>
           <a:xfrm>
-            <a:off x="3009900" y="3543300"/>
+            <a:off x="3009900" y="3648075"/>
             <a:ext cx="1657350" cy="175260"/>
           </a:xfrm>
           <a:prstGeom prst="rect">
@@ -12328,7 +12328,7 @@
         </p:nvCxnSpPr>
         <p:spPr>
           <a:xfrm>
-            <a:off x="2628900" y="3533775"/>
+            <a:off x="2628900" y="3638550"/>
             <a:ext cx="323850" cy="0"/>
           </a:xfrm>
           <a:prstGeom prst="line">
@@ -12363,7 +12363,7 @@
         </p:nvSpPr>
         <p:spPr>
           <a:xfrm>
-            <a:off x="5048250" y="3219450"/>
+            <a:off x="5048250" y="3324225"/>
             <a:ext cx="1771650" cy="628650"/>
           </a:xfrm>
           <a:prstGeom prst="roundRect">
@@ -12409,7 +12409,7 @@
         </p:nvSpPr>
         <p:spPr>
           <a:xfrm>
-            <a:off x="5048250" y="3333750"/>
+            <a:off x="5048250" y="3438525"/>
             <a:ext cx="1771650" cy="228600"/>
           </a:xfrm>
           <a:prstGeom prst="rect">
@@ -12448,7 +12448,7 @@
         </p:nvSpPr>
         <p:spPr>
           <a:xfrm>
-            <a:off x="5105400" y="3543300"/>
+            <a:off x="5105400" y="3648075"/>
             <a:ext cx="1657350" cy="175260"/>
           </a:xfrm>
           <a:prstGeom prst="rect">
@@ -12487,7 +12487,7 @@
         </p:nvCxnSpPr>
         <p:spPr>
           <a:xfrm>
-            <a:off x="4724400" y="3533775"/>
+            <a:off x="4724400" y="3638550"/>
             <a:ext cx="323850" cy="0"/>
           </a:xfrm>
           <a:prstGeom prst="line">
@@ -12522,7 +12522,7 @@
         </p:nvSpPr>
         <p:spPr>
           <a:xfrm>
-            <a:off x="7143750" y="3219450"/>
+            <a:off x="7143750" y="3324225"/>
             <a:ext cx="1771650" cy="628650"/>
           </a:xfrm>
           <a:prstGeom prst="roundRect">
@@ -12568,7 +12568,7 @@
         </p:nvSpPr>
         <p:spPr>
           <a:xfrm>
-            <a:off x="7143750" y="3333750"/>
+            <a:off x="7143750" y="3438525"/>
             <a:ext cx="1771650" cy="228600"/>
           </a:xfrm>
           <a:prstGeom prst="rect">
@@ -12607,7 +12607,7 @@
         </p:nvSpPr>
         <p:spPr>
           <a:xfrm>
-            <a:off x="7200900" y="3543300"/>
+            <a:off x="7200900" y="3648075"/>
             <a:ext cx="1657350" cy="175260"/>
           </a:xfrm>
           <a:prstGeom prst="rect">
@@ -12646,7 +12646,7 @@
         </p:nvCxnSpPr>
         <p:spPr>
           <a:xfrm>
-            <a:off x="6819900" y="3533775"/>
+            <a:off x="6819900" y="3638550"/>
             <a:ext cx="323850" cy="0"/>
           </a:xfrm>
           <a:prstGeom prst="line">
@@ -12681,7 +12681,7 @@
         </p:nvSpPr>
         <p:spPr>
           <a:xfrm>
-            <a:off x="9239250" y="3219450"/>
+            <a:off x="9239250" y="3324225"/>
             <a:ext cx="1771650" cy="628650"/>
           </a:xfrm>
           <a:prstGeom prst="roundRect">
@@ -12727,7 +12727,7 @@
         </p:nvSpPr>
         <p:spPr>
           <a:xfrm>
-            <a:off x="9239250" y="3333750"/>
+            <a:off x="9239250" y="3438525"/>
             <a:ext cx="1771650" cy="228600"/>
           </a:xfrm>
           <a:prstGeom prst="rect">
@@ -12766,7 +12766,7 @@
         </p:nvSpPr>
         <p:spPr>
           <a:xfrm>
-            <a:off x="9296400" y="3543300"/>
+            <a:off x="9296400" y="3648075"/>
             <a:ext cx="1657350" cy="175260"/>
           </a:xfrm>
           <a:prstGeom prst="rect">
@@ -12805,7 +12805,7 @@
         </p:nvCxnSpPr>
         <p:spPr>
           <a:xfrm>
-            <a:off x="8915400" y="3533775"/>
+            <a:off x="8915400" y="3638550"/>
             <a:ext cx="323850" cy="0"/>
           </a:xfrm>
           <a:prstGeom prst="line">
@@ -12840,7 +12840,7 @@
         </p:nvSpPr>
         <p:spPr>
           <a:xfrm>
-            <a:off x="4667250" y="2971800"/>
+            <a:off x="4667250" y="3076575"/>
             <a:ext cx="857250" cy="198120"/>
           </a:xfrm>
           <a:prstGeom prst="rect">
@@ -12879,7 +12879,7 @@
         </p:nvSpPr>
         <p:spPr>
           <a:xfrm>
-            <a:off x="876300" y="4313301"/>
+            <a:off x="876300" y="4418076"/>
             <a:ext cx="57150" cy="57150"/>
           </a:xfrm>
           <a:prstGeom prst="rect">
@@ -12923,7 +12923,7 @@
         </p:nvSpPr>
         <p:spPr>
           <a:xfrm>
-            <a:off x="1143000" y="4229100"/>
+            <a:off x="1143000" y="4333875"/>
             <a:ext cx="9620250" cy="95250"/>
           </a:xfrm>
           <a:prstGeom prst="rect">
@@ -12949,7 +12949,7 @@
                 </a:solidFill>
                 <a:latin typeface="Roboto"/>
               </a:rPr>
-              <a:t>O shim é pai do container e não filho do daemon. Foi esse desenho que fez reiniciar o daemon deixar de matar os containers em execução.</a:t>
+              <a:t>O shim é o processo pai do container, não o daemon. Reiniciar o daemon não encerra os containers.</a:t>
             </a:r>
           </a:p>
         </p:txBody>
@@ -12962,7 +12962,7 @@
         </p:nvSpPr>
         <p:spPr>
           <a:xfrm>
-            <a:off x="876300" y="4931283"/>
+            <a:off x="876300" y="4822317"/>
             <a:ext cx="57150" cy="57150"/>
           </a:xfrm>
           <a:prstGeom prst="rect">
@@ -13006,7 +13006,7 @@
         </p:nvSpPr>
         <p:spPr>
           <a:xfrm>
-            <a:off x="1143000" y="4847082"/>
+            <a:off x="1143000" y="4738116"/>
             <a:ext cx="9620250" cy="95250"/>
           </a:xfrm>
           <a:prstGeom prst="rect">
@@ -13282,7 +13282,7 @@
                 </a:solidFill>
                 <a:latin typeface="Roboto"/>
               </a:rPr>
-              <a:t>Capabilities fatiam o root do POSIX em privilégios independentes, que podem ser derrubados e devolvidos um a um.</a:t>
+              <a:t>Capabilities dividem os privilégios de root em unidades independentes, removidas uma a uma.</a:t>
             </a:r>
           </a:p>
         </p:txBody>
@@ -13448,7 +13448,7 @@
                 </a:solidFill>
                 <a:latin typeface="Roboto"/>
               </a:rPr>
-              <a:t>AppArmor ou SELinux entram por cima de tudo, pelo módulo de segurança do próprio kernel.</a:t>
+              <a:t>AppArmor ou SELinux aplicam uma restrição adicional pelo módulo de segurança do kernel.</a:t>
             </a:r>
           </a:p>
         </p:txBody>
@@ -14327,7 +14327,7 @@
         </p:nvSpPr>
         <p:spPr>
           <a:xfrm>
-            <a:off x="857250" y="2295525"/>
+            <a:off x="857250" y="2419350"/>
             <a:ext cx="10001250" cy="182880"/>
           </a:xfrm>
           <a:prstGeom prst="rect">
@@ -14366,7 +14366,7 @@
         </p:nvSpPr>
         <p:spPr>
           <a:xfrm>
-            <a:off x="857250" y="2543175"/>
+            <a:off x="857250" y="2667000"/>
             <a:ext cx="2724150" cy="1504950"/>
           </a:xfrm>
           <a:prstGeom prst="roundRect">
@@ -14415,7 +14415,7 @@
         </p:nvSpPr>
         <p:spPr>
           <a:xfrm>
-            <a:off x="1009650" y="2619375"/>
+            <a:off x="1009650" y="2743200"/>
             <a:ext cx="2419350" cy="247650"/>
           </a:xfrm>
           <a:prstGeom prst="roundRect">
@@ -14463,7 +14463,7 @@
         </p:nvSpPr>
         <p:spPr>
           <a:xfrm>
-            <a:off x="1009650" y="2676525"/>
+            <a:off x="1009650" y="2800350"/>
             <a:ext cx="2419350" cy="198120"/>
           </a:xfrm>
           <a:prstGeom prst="rect">
@@ -14502,7 +14502,7 @@
         </p:nvSpPr>
         <p:spPr>
           <a:xfrm>
-            <a:off x="1009650" y="2905125"/>
+            <a:off x="1009650" y="3028950"/>
             <a:ext cx="2419350" cy="781050"/>
           </a:xfrm>
           <a:prstGeom prst="roundRect">
@@ -14550,7 +14550,7 @@
         </p:nvSpPr>
         <p:spPr>
           <a:xfrm>
-            <a:off x="1038225" y="3019425"/>
+            <a:off x="1038225" y="3143250"/>
             <a:ext cx="2362200" cy="182880"/>
           </a:xfrm>
           <a:prstGeom prst="rect">
@@ -14589,7 +14589,7 @@
         </p:nvSpPr>
         <p:spPr>
           <a:xfrm>
-            <a:off x="1038225" y="3248025"/>
+            <a:off x="1038225" y="3371850"/>
             <a:ext cx="2362200" cy="182880"/>
           </a:xfrm>
           <a:prstGeom prst="rect">
@@ -14628,7 +14628,7 @@
         </p:nvSpPr>
         <p:spPr>
           <a:xfrm>
-            <a:off x="1038225" y="3476625"/>
+            <a:off x="1038225" y="3600450"/>
             <a:ext cx="2362200" cy="182880"/>
           </a:xfrm>
           <a:prstGeom prst="rect">
@@ -14667,7 +14667,7 @@
         </p:nvSpPr>
         <p:spPr>
           <a:xfrm>
-            <a:off x="1009650" y="3724275"/>
+            <a:off x="1009650" y="3848100"/>
             <a:ext cx="2419350" cy="247650"/>
           </a:xfrm>
           <a:prstGeom prst="roundRect">
@@ -14715,7 +14715,7 @@
         </p:nvSpPr>
         <p:spPr>
           <a:xfrm>
-            <a:off x="1009650" y="3781425"/>
+            <a:off x="1009650" y="3905250"/>
             <a:ext cx="2419350" cy="198120"/>
           </a:xfrm>
           <a:prstGeom prst="rect">
@@ -14754,7 +14754,7 @@
         </p:nvSpPr>
         <p:spPr>
           <a:xfrm>
-            <a:off x="857250" y="4162425"/>
+            <a:off x="857250" y="4286250"/>
             <a:ext cx="2724150" cy="228600"/>
           </a:xfrm>
           <a:prstGeom prst="rect">
@@ -14793,7 +14793,7 @@
         </p:nvSpPr>
         <p:spPr>
           <a:xfrm>
-            <a:off x="857250" y="4371975"/>
+            <a:off x="857250" y="4495800"/>
             <a:ext cx="2724150" cy="198120"/>
           </a:xfrm>
           <a:prstGeom prst="rect">
@@ -14832,7 +14832,7 @@
         </p:nvSpPr>
         <p:spPr>
           <a:xfrm>
-            <a:off x="4162425" y="2543175"/>
+            <a:off x="4162425" y="2667000"/>
             <a:ext cx="1143000" cy="1504950"/>
           </a:xfrm>
           <a:prstGeom prst="roundRect">
@@ -14881,7 +14881,7 @@
         </p:nvSpPr>
         <p:spPr>
           <a:xfrm>
-            <a:off x="4295775" y="3209925"/>
+            <a:off x="4295775" y="3333750"/>
             <a:ext cx="876300" cy="247650"/>
           </a:xfrm>
           <a:prstGeom prst="roundRect">
@@ -14929,7 +14929,7 @@
         </p:nvSpPr>
         <p:spPr>
           <a:xfrm>
-            <a:off x="4295775" y="3267075"/>
+            <a:off x="4295775" y="3390900"/>
             <a:ext cx="876300" cy="198120"/>
           </a:xfrm>
           <a:prstGeom prst="rect">
@@ -14968,7 +14968,7 @@
         </p:nvSpPr>
         <p:spPr>
           <a:xfrm>
-            <a:off x="5495925" y="2543175"/>
+            <a:off x="5495925" y="2667000"/>
             <a:ext cx="1390650" cy="1504950"/>
           </a:xfrm>
           <a:prstGeom prst="roundRect">
@@ -15017,7 +15017,7 @@
         </p:nvSpPr>
         <p:spPr>
           <a:xfrm>
-            <a:off x="5562600" y="2762250"/>
+            <a:off x="5562600" y="2886075"/>
             <a:ext cx="1257300" cy="781050"/>
           </a:xfrm>
           <a:prstGeom prst="roundRect">
@@ -15065,7 +15065,7 @@
         </p:nvSpPr>
         <p:spPr>
           <a:xfrm>
-            <a:off x="5591175" y="2876550"/>
+            <a:off x="5591175" y="3000375"/>
             <a:ext cx="1200150" cy="182880"/>
           </a:xfrm>
           <a:prstGeom prst="rect">
@@ -15104,7 +15104,7 @@
         </p:nvSpPr>
         <p:spPr>
           <a:xfrm>
-            <a:off x="5591175" y="3105150"/>
+            <a:off x="5591175" y="3228975"/>
             <a:ext cx="1200150" cy="182880"/>
           </a:xfrm>
           <a:prstGeom prst="rect">
@@ -15143,7 +15143,7 @@
         </p:nvSpPr>
         <p:spPr>
           <a:xfrm>
-            <a:off x="5591175" y="3333750"/>
+            <a:off x="5591175" y="3457575"/>
             <a:ext cx="1200150" cy="182880"/>
           </a:xfrm>
           <a:prstGeom prst="rect">
@@ -15182,7 +15182,7 @@
         </p:nvSpPr>
         <p:spPr>
           <a:xfrm>
-            <a:off x="5629275" y="3600450"/>
+            <a:off x="5629275" y="3724275"/>
             <a:ext cx="1123950" cy="247650"/>
           </a:xfrm>
           <a:prstGeom prst="roundRect">
@@ -15230,7 +15230,7 @@
         </p:nvSpPr>
         <p:spPr>
           <a:xfrm>
-            <a:off x="5629275" y="3657600"/>
+            <a:off x="5629275" y="3781425"/>
             <a:ext cx="1123950" cy="182880"/>
           </a:xfrm>
           <a:prstGeom prst="rect">
@@ -15269,7 +15269,7 @@
         </p:nvSpPr>
         <p:spPr>
           <a:xfrm>
-            <a:off x="4162425" y="4162425"/>
+            <a:off x="4162425" y="4286250"/>
             <a:ext cx="2724150" cy="228600"/>
           </a:xfrm>
           <a:prstGeom prst="rect">
@@ -15308,7 +15308,7 @@
         </p:nvSpPr>
         <p:spPr>
           <a:xfrm>
-            <a:off x="4162425" y="4371975"/>
+            <a:off x="4162425" y="4495800"/>
             <a:ext cx="2724150" cy="198120"/>
           </a:xfrm>
           <a:prstGeom prst="rect">
@@ -15347,7 +15347,7 @@
         </p:nvSpPr>
         <p:spPr>
           <a:xfrm>
-            <a:off x="7239000" y="2543175"/>
+            <a:off x="7239000" y="2667000"/>
             <a:ext cx="838200" cy="1504950"/>
           </a:xfrm>
           <a:prstGeom prst="roundRect">
@@ -15396,7 +15396,7 @@
         </p:nvSpPr>
         <p:spPr>
           <a:xfrm>
-            <a:off x="7353300" y="3209925"/>
+            <a:off x="7353300" y="3333750"/>
             <a:ext cx="609600" cy="247650"/>
           </a:xfrm>
           <a:prstGeom prst="roundRect">
@@ -15444,7 +15444,7 @@
         </p:nvSpPr>
         <p:spPr>
           <a:xfrm>
-            <a:off x="7353300" y="3267075"/>
+            <a:off x="7353300" y="3390900"/>
             <a:ext cx="609600" cy="182880"/>
           </a:xfrm>
           <a:prstGeom prst="rect">
@@ -15483,7 +15483,7 @@
         </p:nvSpPr>
         <p:spPr>
           <a:xfrm>
-            <a:off x="8305800" y="2543175"/>
+            <a:off x="8305800" y="2667000"/>
             <a:ext cx="1619250" cy="1504950"/>
           </a:xfrm>
           <a:prstGeom prst="roundRect">
@@ -15532,7 +15532,7 @@
         </p:nvSpPr>
         <p:spPr>
           <a:xfrm>
-            <a:off x="8420100" y="2905125"/>
+            <a:off x="8420100" y="3028950"/>
             <a:ext cx="1390650" cy="781050"/>
           </a:xfrm>
           <a:prstGeom prst="roundRect">
@@ -15580,7 +15580,7 @@
         </p:nvSpPr>
         <p:spPr>
           <a:xfrm>
-            <a:off x="8448675" y="3019425"/>
+            <a:off x="8448675" y="3143250"/>
             <a:ext cx="1333500" cy="182880"/>
           </a:xfrm>
           <a:prstGeom prst="rect">
@@ -15619,7 +15619,7 @@
         </p:nvSpPr>
         <p:spPr>
           <a:xfrm>
-            <a:off x="8448675" y="3248025"/>
+            <a:off x="8448675" y="3371850"/>
             <a:ext cx="1333500" cy="182880"/>
           </a:xfrm>
           <a:prstGeom prst="rect">
@@ -15658,7 +15658,7 @@
         </p:nvSpPr>
         <p:spPr>
           <a:xfrm>
-            <a:off x="8448675" y="3476625"/>
+            <a:off x="8448675" y="3600450"/>
             <a:ext cx="1333500" cy="182880"/>
           </a:xfrm>
           <a:prstGeom prst="rect">
@@ -15697,7 +15697,7 @@
         </p:nvSpPr>
         <p:spPr>
           <a:xfrm>
-            <a:off x="10153650" y="2543175"/>
+            <a:off x="10153650" y="2667000"/>
             <a:ext cx="838200" cy="1504950"/>
           </a:xfrm>
           <a:prstGeom prst="roundRect">
@@ -15746,7 +15746,7 @@
         </p:nvSpPr>
         <p:spPr>
           <a:xfrm>
-            <a:off x="10267950" y="3209925"/>
+            <a:off x="10267950" y="3333750"/>
             <a:ext cx="609600" cy="247650"/>
           </a:xfrm>
           <a:prstGeom prst="roundRect">
@@ -15794,7 +15794,7 @@
         </p:nvSpPr>
         <p:spPr>
           <a:xfrm>
-            <a:off x="10267950" y="3267075"/>
+            <a:off x="10267950" y="3390900"/>
             <a:ext cx="609600" cy="182880"/>
           </a:xfrm>
           <a:prstGeom prst="rect">
@@ -15833,7 +15833,7 @@
         </p:nvSpPr>
         <p:spPr>
           <a:xfrm>
-            <a:off x="7239000" y="4162425"/>
+            <a:off x="7239000" y="4286250"/>
             <a:ext cx="3752850" cy="228600"/>
           </a:xfrm>
           <a:prstGeom prst="rect">
@@ -15872,7 +15872,7 @@
         </p:nvSpPr>
         <p:spPr>
           <a:xfrm>
-            <a:off x="7239000" y="4371975"/>
+            <a:off x="7239000" y="4495800"/>
             <a:ext cx="3752850" cy="198120"/>
           </a:xfrm>
           <a:prstGeom prst="rect">
@@ -15911,8 +15911,8 @@
         </p:nvSpPr>
         <p:spPr>
           <a:xfrm>
-            <a:off x="685800" y="5428381"/>
-            <a:ext cx="28575" cy="705719"/>
+            <a:off x="685800" y="5676321"/>
+            <a:ext cx="28575" cy="457779"/>
           </a:xfrm>
           <a:prstGeom prst="rect">
             <a:avLst/>
@@ -15955,8 +15955,8 @@
         </p:nvSpPr>
         <p:spPr>
           <a:xfrm>
-            <a:off x="876300" y="5409331"/>
-            <a:ext cx="10629900" cy="839069"/>
+            <a:off x="876300" y="5657271"/>
+            <a:ext cx="10629900" cy="591129"/>
           </a:xfrm>
           <a:prstGeom prst="rect">
             <a:avLst/>
@@ -15981,7 +15981,7 @@
                 </a:solidFill>
                 <a:latin typeface="Roboto"/>
               </a:rPr>
-              <a:t>O projeto lógico é o mesmo nas três opções, e a escolha entre elas entra no documento de decisões arquiteturais do projeto. O Docker também usa a palavra </a:t>
+              <a:t>O projeto lógico é o mesmo nas três opções, e a escolha entre elas é registrada no documento de decisões arquiteturais. No Docker, </a:t>
             </a:r>
             <a:r>
               <a:rPr sz="1280" b="0" i="1">
@@ -15999,7 +15999,7 @@
                 </a:solidFill>
                 <a:latin typeface="Roboto"/>
               </a:rPr>
-              <a:t>, mas para o empilhamento do sistema de arquivos da imagem, que é outra coisa e não tem relação com a camada lógica da arquitetura em camadas.</a:t>
+              <a:t> se refere às camadas do sistema de arquivos da imagem, não às camadas lógicas da arquitetura.</a:t>
             </a:r>
           </a:p>
         </p:txBody>
@@ -16646,7 +16646,7 @@
                 </a:solidFill>
                 <a:latin typeface="Roboto"/>
               </a:rPr>
-              <a:t>Por isso nunca dizer que container não é nó. O modelo fiel é o container aninhado no host, com a imagem implantada dentro dele.</a:t>
+              <a:t>Container é um nó aninhado no host, com a imagem implantada dentro dele.</a:t>
             </a:r>
           </a:p>
         </p:txBody>
@@ -16720,7 +16720,7 @@
                 </a:solidFill>
                 <a:latin typeface="Roboto"/>
               </a:rPr>
-              <a:t>Máquina virtual, essa sim, é um nó novo, com sistema operacional próprio.</a:t>
+              <a:t>Máquina virtual é um nó separado, com sistema operacional próprio.</a:t>
             </a:r>
           </a:p>
         </p:txBody>
@@ -18174,7 +18174,7 @@
                 </a:solidFill>
                 <a:latin typeface="Roboto"/>
               </a:rPr>
-              <a:t>Cada nó vira um serviço no arquivo de compose, com a imagem por tag e digest.</a:t>
+              <a:t>Cada nó corresponde a um serviço no arquivo de compose, com a imagem por tag e digest.</a:t>
             </a:r>
           </a:p>
         </p:txBody>
@@ -19064,7 +19064,7 @@
                 </a:solidFill>
                 <a:latin typeface="Roboto"/>
               </a:rPr>
-              <a:t>A porta da UML é literalmente a porta do container, com o mesmo desenho e o mesmo nome.</a:t>
+              <a:t>A porta da UML corresponde à porta publicada do container.</a:t>
             </a:r>
           </a:p>
         </p:txBody>
@@ -19327,7 +19327,7 @@
         </p:nvSpPr>
         <p:spPr>
           <a:xfrm>
-            <a:off x="685800" y="1899285"/>
+            <a:off x="685800" y="2031302"/>
             <a:ext cx="5143500" cy="182880"/>
           </a:xfrm>
           <a:prstGeom prst="rect">
@@ -19366,7 +19366,7 @@
         </p:nvSpPr>
         <p:spPr>
           <a:xfrm>
-            <a:off x="685800" y="2108835"/>
+            <a:off x="685800" y="2240852"/>
             <a:ext cx="419100" cy="28575"/>
           </a:xfrm>
           <a:prstGeom prst="rect">
@@ -19410,7 +19410,7 @@
         </p:nvSpPr>
         <p:spPr>
           <a:xfrm>
-            <a:off x="704850" y="2498598"/>
+            <a:off x="704850" y="2630614"/>
             <a:ext cx="57150" cy="57150"/>
           </a:xfrm>
           <a:prstGeom prst="rect">
@@ -19454,7 +19454,7 @@
         </p:nvSpPr>
         <p:spPr>
           <a:xfrm>
-            <a:off x="971550" y="2394585"/>
+            <a:off x="971550" y="2526602"/>
             <a:ext cx="4857750" cy="95250"/>
           </a:xfrm>
           <a:prstGeom prst="rect">
@@ -19480,7 +19480,7 @@
                 </a:solidFill>
                 <a:latin typeface="Roboto"/>
               </a:rPr>
-              <a:t>A imagem passa a ter uma responsabilidade só.</a:t>
+              <a:t>Cada imagem tem uma responsabilidade.</a:t>
             </a:r>
           </a:p>
         </p:txBody>
@@ -19493,7 +19493,7 @@
         </p:nvSpPr>
         <p:spPr>
           <a:xfrm>
-            <a:off x="704850" y="3029331"/>
+            <a:off x="704850" y="3161348"/>
             <a:ext cx="57150" cy="57150"/>
           </a:xfrm>
           <a:prstGeom prst="rect">
@@ -19537,7 +19537,7 @@
         </p:nvSpPr>
         <p:spPr>
           <a:xfrm>
-            <a:off x="971550" y="2925318"/>
+            <a:off x="971550" y="3057334"/>
             <a:ext cx="4857750" cy="95250"/>
           </a:xfrm>
           <a:prstGeom prst="rect">
@@ -19563,7 +19563,7 @@
                 </a:solidFill>
                 <a:latin typeface="Roboto"/>
               </a:rPr>
-              <a:t>O código do front-end não está na imagem da API, então a API não depende dele nem por acidente.</a:t>
+              <a:t>O código do front-end não está na imagem da API, então a API não depende dele.</a:t>
             </a:r>
           </a:p>
         </p:txBody>
@@ -19576,7 +19576,7 @@
         </p:nvSpPr>
         <p:spPr>
           <a:xfrm>
-            <a:off x="704850" y="3824097"/>
+            <a:off x="704850" y="3956114"/>
             <a:ext cx="57150" cy="57150"/>
           </a:xfrm>
           <a:prstGeom prst="rect">
@@ -19620,7 +19620,7 @@
         </p:nvSpPr>
         <p:spPr>
           <a:xfrm>
-            <a:off x="971550" y="3720084"/>
+            <a:off x="971550" y="3852100"/>
             <a:ext cx="4857750" cy="95250"/>
           </a:xfrm>
           <a:prstGeom prst="rect">
@@ -19659,7 +19659,7 @@
         </p:nvSpPr>
         <p:spPr>
           <a:xfrm>
-            <a:off x="704850" y="5146929"/>
+            <a:off x="704850" y="5278945"/>
             <a:ext cx="57150" cy="57150"/>
           </a:xfrm>
           <a:prstGeom prst="rect">
@@ -19703,7 +19703,7 @@
         </p:nvSpPr>
         <p:spPr>
           <a:xfrm>
-            <a:off x="971550" y="5042916"/>
+            <a:off x="971550" y="5174932"/>
             <a:ext cx="4857750" cy="95250"/>
           </a:xfrm>
           <a:prstGeom prst="rect">
@@ -19729,7 +19729,7 @@
                 </a:solidFill>
                 <a:latin typeface="Roboto"/>
               </a:rPr>
-              <a:t>Uma regra que só existe escrita depende de alguém lembrar de aplicar. Na topologia ela é garantida pela estrutura.</a:t>
+              <a:t>Uma regra só documentada depende de revisão manual. Na topologia ela é imposta pela estrutura.</a:t>
             </a:r>
           </a:p>
         </p:txBody>
@@ -19742,7 +19742,7 @@
         </p:nvSpPr>
         <p:spPr>
           <a:xfrm>
-            <a:off x="6362700" y="1899285"/>
+            <a:off x="6362700" y="2031302"/>
             <a:ext cx="5143500" cy="182880"/>
           </a:xfrm>
           <a:prstGeom prst="rect">
@@ -19781,7 +19781,7 @@
         </p:nvSpPr>
         <p:spPr>
           <a:xfrm>
-            <a:off x="6362700" y="2108835"/>
+            <a:off x="6362700" y="2240852"/>
             <a:ext cx="419100" cy="28575"/>
           </a:xfrm>
           <a:prstGeom prst="rect">
@@ -19825,7 +19825,7 @@
         </p:nvSpPr>
         <p:spPr>
           <a:xfrm>
-            <a:off x="6381750" y="2498598"/>
+            <a:off x="6381750" y="2630614"/>
             <a:ext cx="57150" cy="57150"/>
           </a:xfrm>
           <a:prstGeom prst="rect">
@@ -19869,7 +19869,7 @@
         </p:nvSpPr>
         <p:spPr>
           <a:xfrm>
-            <a:off x="6648450" y="2394585"/>
+            <a:off x="6648450" y="2526602"/>
             <a:ext cx="4857750" cy="95250"/>
           </a:xfrm>
           <a:prstGeom prst="rect">
@@ -19908,7 +19908,7 @@
         </p:nvSpPr>
         <p:spPr>
           <a:xfrm>
-            <a:off x="6381750" y="3557397"/>
+            <a:off x="6381750" y="3689414"/>
             <a:ext cx="57150" cy="57150"/>
           </a:xfrm>
           <a:prstGeom prst="rect">
@@ -19952,7 +19952,7 @@
         </p:nvSpPr>
         <p:spPr>
           <a:xfrm>
-            <a:off x="6648450" y="3453384"/>
+            <a:off x="6648450" y="3585400"/>
             <a:ext cx="4857750" cy="95250"/>
           </a:xfrm>
           <a:prstGeom prst="rect">
@@ -19978,7 +19978,7 @@
                 </a:solidFill>
                 <a:latin typeface="Roboto"/>
               </a:rPr>
-              <a:t>Onde há separação, o acoplamento não some, muda de forma e passa a ter latência, falha parcial e ordem de subida.</a:t>
+              <a:t>Onde há separação, o acoplamento continua, agora com latência, falha parcial e ordem de subida.</a:t>
             </a:r>
           </a:p>
         </p:txBody>
@@ -20327,7 +20327,7 @@
                 </a:solidFill>
                 <a:latin typeface="Roboto"/>
               </a:rPr>
-              <a:t>Replicar só o serviço público faz sentido, e replicar o painel não faz.</a:t>
+              <a:t>Só o serviço público precisa de réplicas. O painel não.</a:t>
             </a:r>
           </a:p>
         </p:txBody>
@@ -20909,7 +20909,7 @@
                 </a:solidFill>
                 <a:latin typeface="Roboto"/>
               </a:rPr>
-              <a:t>A pergunta desta apresentação é como esses componentes serão distribuídos e implantados no ambiente de execução.</a:t>
+              <a:t>Como esses componentes serão distribuídos e implantados no ambiente de execução.</a:t>
             </a:r>
           </a:p>
         </p:txBody>
@@ -21160,7 +21160,7 @@
                 </a:solidFill>
                 <a:latin typeface="Roboto"/>
               </a:rPr>
-              <a:t>A decisão em jogo é em quantos processos separados elas rodam.</a:t>
+              <a:t>A decisão é em quantos processos separados elas rodam.</a:t>
             </a:r>
           </a:p>
         </p:txBody>
@@ -22446,7 +22446,7 @@
                 </a:solidFill>
                 <a:latin typeface="Roboto"/>
               </a:rPr>
-              <a:t>A imagem de fundo que a anfitriã envia ao personalizar o convite e o CSV de restrições alimentares que ela exporta não podem morrer junto com o container. A decisão de implantação volta como restrição de projeto para as camadas de cima.</a:t>
+              <a:t>A imagem de fundo que a anfitriã envia ao personalizar o convite e o CSV de restrições alimentares que ela exporta não podem ser perdidos quando o container é removido. A decisão de implantação impõe uma restrição às camadas superiores.</a:t>
             </a:r>
           </a:p>
         </p:txBody>
@@ -23124,7 +23124,7 @@
                 </a:solidFill>
                 <a:latin typeface="Roboto"/>
               </a:rPr>
-              <a:t>Container com estado traz junto o problema de backup e o de upgrade de versão maior do banco, que não somem por estar em imagem.</a:t>
+              <a:t>Container com estado exige backup e upgrade de versão maior do banco. Estar em imagem não resolve isso.</a:t>
             </a:r>
           </a:p>
         </p:txBody>
@@ -25633,7 +25633,7 @@
                 </a:solidFill>
                 <a:latin typeface="Roboto"/>
               </a:rPr>
-              <a:t>A CVE-2019-5736 mostrou o risco na prática: o processo de dentro conseguia sobrescrever o binário do runtime. Por isso o documento de decisões arquiteturais precisa registrar que container não dá o mesmo isolamento de uma máquina virtual.</a:t>
+              <a:t>A CVE-2019-5736 confirmou o risco: o processo de dentro conseguia sobrescrever o binário do runtime. Por isso o documento de decisões arquiteturais precisa registrar que container não dá o mesmo isolamento de uma máquina virtual.</a:t>
             </a:r>
           </a:p>
         </p:txBody>
@@ -27065,7 +27065,7 @@
                 </a:solidFill>
                 <a:latin typeface="Roboto"/>
               </a:rPr>
-              <a:t>O segundo é o time sem integração contínua, que só ganha um passo de build a mais.</a:t>
+              <a:t>O segundo é o time sem integração contínua, que só acrescenta um passo de build.</a:t>
             </a:r>
           </a:p>
         </p:txBody>
@@ -27480,7 +27480,7 @@
                 </a:solidFill>
                 <a:latin typeface="Roboto"/>
               </a:rPr>
-              <a:t>O que resta é o motivo que abriu a apresentação: o ambiente igual para os quatro antes da primeira linha de código.</a:t>
+              <a:t>O motivo que se aplica é o ambiente igual para os quatro antes da primeira linha de código.</a:t>
             </a:r>
           </a:p>
         </p:txBody>
@@ -27660,7 +27660,7 @@
         </p:nvSpPr>
         <p:spPr>
           <a:xfrm>
-            <a:off x="685800" y="1866900"/>
+            <a:off x="685800" y="1992630"/>
             <a:ext cx="5143500" cy="182880"/>
           </a:xfrm>
           <a:prstGeom prst="rect">
@@ -27686,7 +27686,7 @@
                 </a:solidFill>
                 <a:latin typeface="Roboto"/>
               </a:rPr>
-              <a:t>GANHA</a:t>
+              <a:t>VANTAGENS</a:t>
             </a:r>
           </a:p>
         </p:txBody>
@@ -27699,7 +27699,7 @@
         </p:nvSpPr>
         <p:spPr>
           <a:xfrm>
-            <a:off x="685800" y="2076450"/>
+            <a:off x="685800" y="2202180"/>
             <a:ext cx="419100" cy="28575"/>
           </a:xfrm>
           <a:prstGeom prst="rect">
@@ -27743,7 +27743,7 @@
         </p:nvSpPr>
         <p:spPr>
           <a:xfrm>
-            <a:off x="704850" y="2461260"/>
+            <a:off x="704850" y="2586990"/>
             <a:ext cx="57150" cy="57150"/>
           </a:xfrm>
           <a:prstGeom prst="rect">
@@ -27787,7 +27787,7 @@
         </p:nvSpPr>
         <p:spPr>
           <a:xfrm>
-            <a:off x="971550" y="2362200"/>
+            <a:off x="971550" y="2487930"/>
             <a:ext cx="4857750" cy="95250"/>
           </a:xfrm>
           <a:prstGeom prst="rect">
@@ -27826,7 +27826,7 @@
         </p:nvSpPr>
         <p:spPr>
           <a:xfrm>
-            <a:off x="704850" y="3211830"/>
+            <a:off x="704850" y="3337560"/>
             <a:ext cx="57150" cy="57150"/>
           </a:xfrm>
           <a:prstGeom prst="rect">
@@ -27870,7 +27870,7 @@
         </p:nvSpPr>
         <p:spPr>
           <a:xfrm>
-            <a:off x="971550" y="3112770"/>
+            <a:off x="971550" y="3238500"/>
             <a:ext cx="4857750" cy="95250"/>
           </a:xfrm>
           <a:prstGeom prst="rect">
@@ -27896,7 +27896,7 @@
                 </a:solidFill>
                 <a:latin typeface="Roboto"/>
               </a:rPr>
-              <a:t>O ambiente vira arquivo legível, versionado junto com o código.</a:t>
+              <a:t>O ambiente fica descrito num arquivo legível, versionado junto com o código.</a:t>
             </a:r>
           </a:p>
         </p:txBody>
@@ -27909,7 +27909,7 @@
         </p:nvSpPr>
         <p:spPr>
           <a:xfrm>
-            <a:off x="704850" y="3962400"/>
+            <a:off x="704850" y="4088130"/>
             <a:ext cx="57150" cy="57150"/>
           </a:xfrm>
           <a:prstGeom prst="rect">
@@ -27953,7 +27953,7 @@
         </p:nvSpPr>
         <p:spPr>
           <a:xfrm>
-            <a:off x="971550" y="3863340"/>
+            <a:off x="971550" y="3989070"/>
             <a:ext cx="4857750" cy="95250"/>
           </a:xfrm>
           <a:prstGeom prst="rect">
@@ -27979,7 +27979,7 @@
                 </a:solidFill>
                 <a:latin typeface="Roboto"/>
               </a:rPr>
-              <a:t>Trocar runtime ou banco passa a ser editar uma linha de arquivo.</a:t>
+              <a:t>Trocar runtime ou banco é editar uma linha do arquivo.</a:t>
             </a:r>
           </a:p>
         </p:txBody>
@@ -27992,7 +27992,7 @@
         </p:nvSpPr>
         <p:spPr>
           <a:xfrm>
-            <a:off x="704850" y="4712970"/>
+            <a:off x="704850" y="4587240"/>
             <a:ext cx="57150" cy="57150"/>
           </a:xfrm>
           <a:prstGeom prst="rect">
@@ -28036,7 +28036,7 @@
         </p:nvSpPr>
         <p:spPr>
           <a:xfrm>
-            <a:off x="971550" y="4613910"/>
+            <a:off x="971550" y="4488180"/>
             <a:ext cx="4857750" cy="95250"/>
           </a:xfrm>
           <a:prstGeom prst="rect">
@@ -28062,7 +28062,7 @@
                 </a:solidFill>
                 <a:latin typeface="Roboto"/>
               </a:rPr>
-              <a:t>A mesma imagem atravessa notebook, pipeline e a apresentação do projeto mais adiante.</a:t>
+              <a:t>A mesma imagem roda no notebook, no pipeline e na apresentação do produto.</a:t>
             </a:r>
           </a:p>
         </p:txBody>
@@ -28075,7 +28075,7 @@
         </p:nvSpPr>
         <p:spPr>
           <a:xfrm>
-            <a:off x="704850" y="5463540"/>
+            <a:off x="704850" y="5337810"/>
             <a:ext cx="57150" cy="57150"/>
           </a:xfrm>
           <a:prstGeom prst="rect">
@@ -28119,7 +28119,7 @@
         </p:nvSpPr>
         <p:spPr>
           <a:xfrm>
-            <a:off x="971550" y="5364480"/>
+            <a:off x="971550" y="5238750"/>
             <a:ext cx="4857750" cy="95250"/>
           </a:xfrm>
           <a:prstGeom prst="rect">
@@ -28158,7 +28158,7 @@
         </p:nvSpPr>
         <p:spPr>
           <a:xfrm>
-            <a:off x="6362700" y="1866900"/>
+            <a:off x="6362700" y="1992630"/>
             <a:ext cx="5143500" cy="182880"/>
           </a:xfrm>
           <a:prstGeom prst="rect">
@@ -28184,7 +28184,7 @@
                 </a:solidFill>
                 <a:latin typeface="Roboto"/>
               </a:rPr>
-              <a:t>CUSTA</a:t>
+              <a:t>CUSTOS</a:t>
             </a:r>
           </a:p>
         </p:txBody>
@@ -28197,7 +28197,7 @@
         </p:nvSpPr>
         <p:spPr>
           <a:xfrm>
-            <a:off x="6362700" y="2076450"/>
+            <a:off x="6362700" y="2202180"/>
             <a:ext cx="419100" cy="28575"/>
           </a:xfrm>
           <a:prstGeom prst="rect">
@@ -28241,7 +28241,7 @@
         </p:nvSpPr>
         <p:spPr>
           <a:xfrm>
-            <a:off x="6381750" y="2461260"/>
+            <a:off x="6381750" y="2586990"/>
             <a:ext cx="57150" cy="57150"/>
           </a:xfrm>
           <a:prstGeom prst="rect">
@@ -28285,7 +28285,7 @@
         </p:nvSpPr>
         <p:spPr>
           <a:xfrm>
-            <a:off x="6648450" y="2362200"/>
+            <a:off x="6648450" y="2487930"/>
             <a:ext cx="4857750" cy="95250"/>
           </a:xfrm>
           <a:prstGeom prst="rect">
@@ -28324,7 +28324,7 @@
         </p:nvSpPr>
         <p:spPr>
           <a:xfrm>
-            <a:off x="6381750" y="3211830"/>
+            <a:off x="6381750" y="3337560"/>
             <a:ext cx="57150" cy="57150"/>
           </a:xfrm>
           <a:prstGeom prst="rect">
@@ -28368,7 +28368,7 @@
         </p:nvSpPr>
         <p:spPr>
           <a:xfrm>
-            <a:off x="6648450" y="3112770"/>
+            <a:off x="6648450" y="3238500"/>
             <a:ext cx="4857750" cy="95250"/>
           </a:xfrm>
           <a:prstGeom prst="rect">
@@ -28965,7 +28965,7 @@
                 </a:solidFill>
                 <a:latin typeface="Roboto"/>
               </a:rPr>
-              <a:t>Uma linha no repositório, porque sem ela o Git Bash quebra no Windows. Os ambientes do time já divergiam antes da primeira linha de código do produto.</a:t>
+              <a:t>Uma linha no repositório, necessária porque o Git Bash falha no Windows sem ela. Os ambientes do time já divergiam antes do primeiro código do produto.</a:t>
             </a:r>
           </a:p>
         </p:txBody>
@@ -29369,7 +29369,7 @@
                 </a:solidFill>
                 <a:latin typeface="Roboto"/>
               </a:rPr>
-              <a:t>Um arquivo que descreve o ambiente inteiro e que qualquer um dos quatro sobe com um comando. É ele que vira o diagrama de implantação.</a:t>
+              <a:t>Um arquivo que descreve o ambiente inteiro e que qualquer um dos quatro sobe com um comando. Esse arquivo é a base do diagrama de implantação.</a:t>
             </a:r>
           </a:p>
         </p:txBody>
@@ -30380,7 +30380,7 @@
         </p:nvSpPr>
         <p:spPr>
           <a:xfrm>
-            <a:off x="704850" y="2860548"/>
+            <a:off x="704850" y="2998851"/>
             <a:ext cx="57150" cy="57150"/>
           </a:xfrm>
           <a:prstGeom prst="rect">
@@ -30424,7 +30424,7 @@
         </p:nvSpPr>
         <p:spPr>
           <a:xfrm>
-            <a:off x="971550" y="2751582"/>
+            <a:off x="971550" y="2889885"/>
             <a:ext cx="9677400" cy="95250"/>
           </a:xfrm>
           <a:prstGeom prst="rect">
@@ -30463,7 +30463,7 @@
         </p:nvSpPr>
         <p:spPr>
           <a:xfrm>
-            <a:off x="704850" y="3699510"/>
+            <a:off x="704850" y="3837813"/>
             <a:ext cx="57150" cy="57150"/>
           </a:xfrm>
           <a:prstGeom prst="rect">
@@ -30507,7 +30507,7 @@
         </p:nvSpPr>
         <p:spPr>
           <a:xfrm>
-            <a:off x="971550" y="3590544"/>
+            <a:off x="971550" y="3728847"/>
             <a:ext cx="9677400" cy="95250"/>
           </a:xfrm>
           <a:prstGeom prst="rect">
@@ -30546,7 +30546,7 @@
         </p:nvSpPr>
         <p:spPr>
           <a:xfrm>
-            <a:off x="704850" y="4538472"/>
+            <a:off x="704850" y="4676775"/>
             <a:ext cx="57150" cy="57150"/>
           </a:xfrm>
           <a:prstGeom prst="rect">
@@ -30590,7 +30590,7 @@
         </p:nvSpPr>
         <p:spPr>
           <a:xfrm>
-            <a:off x="971550" y="4429506"/>
+            <a:off x="971550" y="4567809"/>
             <a:ext cx="9677400" cy="95250"/>
           </a:xfrm>
           <a:prstGeom prst="rect">
@@ -30616,7 +30616,7 @@
                 </a:solidFill>
                 <a:latin typeface="Roboto"/>
               </a:rPr>
-              <a:t>Mais adiante, o mesmo ambiente que rodou no desenvolvimento também na entrega e na apresentação do produto.</a:t>
+              <a:t>Na entrega e na apresentação do produto, o mesmo ambiente do desenvolvimento.</a:t>
             </a:r>
           </a:p>
         </p:txBody>
@@ -32107,7 +32107,7 @@
                 </a:solidFill>
                 <a:latin typeface="Roboto"/>
               </a:rPr>
-              <a:t>O isolamento de processos existe desde 1979. O que é recente é a padronização da cadeia de execução, a partir de 2015.</a:t>
+              <a:t>O isolamento de processos existe desde 1979. A padronização da cadeia de execução é de 2015.</a:t>
             </a:r>
           </a:p>
         </p:txBody>
@@ -32287,7 +32287,7 @@
         </p:nvSpPr>
         <p:spPr>
           <a:xfrm>
-            <a:off x="685800" y="2562034"/>
+            <a:off x="685800" y="2694051"/>
             <a:ext cx="5143500" cy="182880"/>
           </a:xfrm>
           <a:prstGeom prst="rect">
@@ -32326,7 +32326,7 @@
         </p:nvSpPr>
         <p:spPr>
           <a:xfrm>
-            <a:off x="685800" y="2771584"/>
+            <a:off x="685800" y="2903601"/>
             <a:ext cx="419100" cy="28575"/>
           </a:xfrm>
           <a:prstGeom prst="rect">
@@ -32370,7 +32370,7 @@
         </p:nvSpPr>
         <p:spPr>
           <a:xfrm>
-            <a:off x="704850" y="3161348"/>
+            <a:off x="704850" y="3293364"/>
             <a:ext cx="57150" cy="57150"/>
           </a:xfrm>
           <a:prstGeom prst="rect">
@@ -32414,7 +32414,7 @@
         </p:nvSpPr>
         <p:spPr>
           <a:xfrm>
-            <a:off x="971550" y="3057334"/>
+            <a:off x="971550" y="3189351"/>
             <a:ext cx="4857750" cy="95250"/>
           </a:xfrm>
           <a:prstGeom prst="rect">
@@ -32453,7 +32453,7 @@
         </p:nvSpPr>
         <p:spPr>
           <a:xfrm>
-            <a:off x="6362700" y="2562034"/>
+            <a:off x="6362700" y="2694051"/>
             <a:ext cx="5143500" cy="182880"/>
           </a:xfrm>
           <a:prstGeom prst="rect">
@@ -32492,7 +32492,7 @@
         </p:nvSpPr>
         <p:spPr>
           <a:xfrm>
-            <a:off x="6362700" y="2771584"/>
+            <a:off x="6362700" y="2903601"/>
             <a:ext cx="419100" cy="28575"/>
           </a:xfrm>
           <a:prstGeom prst="rect">
@@ -32536,7 +32536,7 @@
         </p:nvSpPr>
         <p:spPr>
           <a:xfrm>
-            <a:off x="6381750" y="3161348"/>
+            <a:off x="6381750" y="3293364"/>
             <a:ext cx="57150" cy="57150"/>
           </a:xfrm>
           <a:prstGeom prst="rect">
@@ -32580,7 +32580,7 @@
         </p:nvSpPr>
         <p:spPr>
           <a:xfrm>
-            <a:off x="6648450" y="3057334"/>
+            <a:off x="6648450" y="3189351"/>
             <a:ext cx="4857750" cy="95250"/>
           </a:xfrm>
           <a:prstGeom prst="rect">
@@ -32619,7 +32619,7 @@
         </p:nvSpPr>
         <p:spPr>
           <a:xfrm>
-            <a:off x="6381750" y="4484180"/>
+            <a:off x="6381750" y="4616196"/>
             <a:ext cx="57150" cy="57150"/>
           </a:xfrm>
           <a:prstGeom prst="rect">
@@ -32663,7 +32663,7 @@
         </p:nvSpPr>
         <p:spPr>
           <a:xfrm>
-            <a:off x="6648450" y="4380166"/>
+            <a:off x="6648450" y="4512183"/>
             <a:ext cx="4857750" cy="95250"/>
           </a:xfrm>
           <a:prstGeom prst="rect">
@@ -32689,7 +32689,7 @@
                 </a:solidFill>
                 <a:latin typeface="Roboto"/>
               </a:rPr>
-              <a:t>São essas duas definições que decidem o desenho do diagrama de implantação, com a imagem entrando como artefato e o container como nó.</a:t>
+              <a:t>No diagrama de implantação, a imagem é artefato e o container é nó.</a:t>
             </a:r>
           </a:p>
         </p:txBody>
@@ -32885,7 +32885,7 @@
         </p:nvSpPr>
         <p:spPr>
           <a:xfrm>
-            <a:off x="685800" y="1845945"/>
+            <a:off x="685800" y="1940242"/>
             <a:ext cx="10820400" cy="3286125"/>
           </a:xfrm>
           <a:prstGeom prst="roundRect">
@@ -32931,7 +32931,7 @@
         </p:nvSpPr>
         <p:spPr>
           <a:xfrm>
-            <a:off x="952500" y="2055495"/>
+            <a:off x="952500" y="2149792"/>
             <a:ext cx="323850" cy="28575"/>
           </a:xfrm>
           <a:prstGeom prst="roundRect">
@@ -32977,7 +32977,7 @@
         </p:nvSpPr>
         <p:spPr>
           <a:xfrm>
-            <a:off x="1371600" y="1998345"/>
+            <a:off x="1371600" y="2092642"/>
             <a:ext cx="1905000" cy="167640"/>
           </a:xfrm>
           <a:prstGeom prst="rect">
@@ -33016,7 +33016,7 @@
         </p:nvSpPr>
         <p:spPr>
           <a:xfrm>
-            <a:off x="952500" y="2341245"/>
+            <a:off x="952500" y="2435542"/>
             <a:ext cx="10287000" cy="228600"/>
           </a:xfrm>
           <a:prstGeom prst="rect">
@@ -33055,7 +33055,7 @@
         </p:nvSpPr>
         <p:spPr>
           <a:xfrm>
-            <a:off x="952500" y="2579370"/>
+            <a:off x="952500" y="2673668"/>
             <a:ext cx="10287000" cy="228600"/>
           </a:xfrm>
           <a:prstGeom prst="rect">
@@ -33094,7 +33094,7 @@
         </p:nvSpPr>
         <p:spPr>
           <a:xfrm>
-            <a:off x="952500" y="2817495"/>
+            <a:off x="952500" y="2911792"/>
             <a:ext cx="10287000" cy="228600"/>
           </a:xfrm>
           <a:prstGeom prst="rect">
@@ -33133,7 +33133,7 @@
         </p:nvSpPr>
         <p:spPr>
           <a:xfrm>
-            <a:off x="952500" y="3055620"/>
+            <a:off x="952500" y="3149918"/>
             <a:ext cx="10287000" cy="228600"/>
           </a:xfrm>
           <a:prstGeom prst="rect">
@@ -33172,7 +33172,7 @@
         </p:nvSpPr>
         <p:spPr>
           <a:xfrm>
-            <a:off x="952500" y="3293745"/>
+            <a:off x="952500" y="3388042"/>
             <a:ext cx="10287000" cy="228600"/>
           </a:xfrm>
           <a:prstGeom prst="rect">
@@ -33211,7 +33211,7 @@
         </p:nvSpPr>
         <p:spPr>
           <a:xfrm>
-            <a:off x="952500" y="3531870"/>
+            <a:off x="952500" y="3626168"/>
             <a:ext cx="10287000" cy="228600"/>
           </a:xfrm>
           <a:prstGeom prst="rect">
@@ -33250,7 +33250,7 @@
         </p:nvSpPr>
         <p:spPr>
           <a:xfrm>
-            <a:off x="952500" y="3769995"/>
+            <a:off x="952500" y="3864292"/>
             <a:ext cx="10287000" cy="228600"/>
           </a:xfrm>
           <a:prstGeom prst="rect">
@@ -33289,7 +33289,7 @@
         </p:nvSpPr>
         <p:spPr>
           <a:xfrm>
-            <a:off x="952500" y="4008120"/>
+            <a:off x="952500" y="4102418"/>
             <a:ext cx="10287000" cy="228600"/>
           </a:xfrm>
           <a:prstGeom prst="rect">
@@ -33328,7 +33328,7 @@
         </p:nvSpPr>
         <p:spPr>
           <a:xfrm>
-            <a:off x="952500" y="4246245"/>
+            <a:off x="952500" y="4340542"/>
             <a:ext cx="10287000" cy="228600"/>
           </a:xfrm>
           <a:prstGeom prst="rect">
@@ -33367,7 +33367,7 @@
         </p:nvSpPr>
         <p:spPr>
           <a:xfrm>
-            <a:off x="952500" y="4484370"/>
+            <a:off x="952500" y="4578668"/>
             <a:ext cx="10287000" cy="228600"/>
           </a:xfrm>
           <a:prstGeom prst="rect">
@@ -33406,7 +33406,7 @@
         </p:nvSpPr>
         <p:spPr>
           <a:xfrm>
-            <a:off x="952500" y="4722495"/>
+            <a:off x="952500" y="4816792"/>
             <a:ext cx="10287000" cy="228600"/>
           </a:xfrm>
           <a:prstGeom prst="rect">
@@ -33445,8 +33445,8 @@
         </p:nvSpPr>
         <p:spPr>
           <a:xfrm>
-            <a:off x="685800" y="5360670"/>
-            <a:ext cx="28575" cy="565785"/>
+            <a:off x="685800" y="5454968"/>
+            <a:ext cx="28575" cy="377190"/>
           </a:xfrm>
           <a:prstGeom prst="rect">
             <a:avLst/>
@@ -33489,7 +33489,7 @@
         </p:nvSpPr>
         <p:spPr>
           <a:xfrm>
-            <a:off x="876300" y="5341620"/>
+            <a:off x="876300" y="5435918"/>
             <a:ext cx="10629900" cy="666750"/>
           </a:xfrm>
           <a:prstGeom prst="rect">
@@ -33515,7 +33515,7 @@
                 </a:solidFill>
                 <a:latin typeface="Roboto"/>
               </a:rPr>
-              <a:t>Namespaces e cgroups são recursos do kernel Linux, então no Windows o Docker Desktop roda o engine sobre o WSL2, que fornece um kernel Linux real numa máquina virtual leve. Esta saída é dessa distro. O mesmo processo tem PID 1 dentro do container e outro PID no host, que é o que o namespace de PID faz. É por isso que no nosso diagrama de implantação o container aparece dentro do host, e não como máquina separada.</a:t>
+              <a:t>Namespaces e cgroups são recursos do kernel Linux. No Windows, o Docker Desktop roda o engine sobre o WSL2, uma máquina virtual leve com kernel Linux. O mesmo processo tem PID 1 dentro do container e outro PID no host. Por isso, no diagrama de implantação, o container fica dentro do nó do host.</a:t>
             </a:r>
           </a:p>
         </p:txBody>
@@ -34362,7 +34362,7 @@
                 </a:solidFill>
                 <a:latin typeface="Roboto"/>
               </a:rPr>
-              <a:t>Quando o processo estoura o limite de memória ele não fica lento, o kernel mata ele.</a:t>
+              <a:t>Estourar o limite de memória encerra o processo. Ele não fica lento.</a:t>
             </a:r>
           </a:p>
         </p:txBody>
@@ -34445,7 +34445,7 @@
                 </a:solidFill>
                 <a:latin typeface="Roboto"/>
               </a:rPr>
-              <a:t>O limite de CPU não mata, freia. Piora as requisições mais lentas e quase não mexe na média, por isso passa despercebido.</a:t>
+              <a:t>O limite de CPU só reduz a velocidade. As requisições mais lentas pioram e a média quase não muda.</a:t>
             </a:r>
           </a:p>
         </p:txBody>
@@ -34625,7 +34625,7 @@
         </p:nvSpPr>
         <p:spPr>
           <a:xfrm>
-            <a:off x="857250" y="2076450"/>
+            <a:off x="857250" y="2200275"/>
             <a:ext cx="4381500" cy="167640"/>
           </a:xfrm>
           <a:prstGeom prst="rect">
@@ -34664,7 +34664,7 @@
         </p:nvSpPr>
         <p:spPr>
           <a:xfrm>
-            <a:off x="857250" y="3790950"/>
+            <a:off x="857250" y="3914775"/>
             <a:ext cx="3429000" cy="438150"/>
           </a:xfrm>
           <a:prstGeom prst="roundRect">
@@ -34712,7 +34712,7 @@
         </p:nvSpPr>
         <p:spPr>
           <a:xfrm>
-            <a:off x="1047750" y="3924300"/>
+            <a:off x="1047750" y="4048125"/>
             <a:ext cx="3048000" cy="213360"/>
           </a:xfrm>
           <a:prstGeom prst="rect">
@@ -34751,7 +34751,7 @@
         </p:nvSpPr>
         <p:spPr>
           <a:xfrm>
-            <a:off x="857250" y="3295650"/>
+            <a:off x="857250" y="3419475"/>
             <a:ext cx="3429000" cy="438150"/>
           </a:xfrm>
           <a:prstGeom prst="roundRect">
@@ -34799,7 +34799,7 @@
         </p:nvSpPr>
         <p:spPr>
           <a:xfrm>
-            <a:off x="1047750" y="3429000"/>
+            <a:off x="1047750" y="3552825"/>
             <a:ext cx="3048000" cy="213360"/>
           </a:xfrm>
           <a:prstGeom prst="rect">
@@ -34838,7 +34838,7 @@
         </p:nvSpPr>
         <p:spPr>
           <a:xfrm>
-            <a:off x="857250" y="2800350"/>
+            <a:off x="857250" y="2924175"/>
             <a:ext cx="3429000" cy="438150"/>
           </a:xfrm>
           <a:prstGeom prst="roundRect">
@@ -34886,7 +34886,7 @@
         </p:nvSpPr>
         <p:spPr>
           <a:xfrm>
-            <a:off x="1047750" y="2933700"/>
+            <a:off x="1047750" y="3057525"/>
             <a:ext cx="3048000" cy="213360"/>
           </a:xfrm>
           <a:prstGeom prst="rect">
@@ -34925,7 +34925,7 @@
         </p:nvSpPr>
         <p:spPr>
           <a:xfrm>
-            <a:off x="4400550" y="2800350"/>
+            <a:off x="4400550" y="2924175"/>
             <a:ext cx="28575" cy="1428750"/>
           </a:xfrm>
           <a:prstGeom prst="rect">
@@ -34969,7 +34969,7 @@
         </p:nvSpPr>
         <p:spPr>
           <a:xfrm>
-            <a:off x="742950" y="4362450"/>
+            <a:off x="742950" y="4486275"/>
             <a:ext cx="3657600" cy="381000"/>
           </a:xfrm>
           <a:prstGeom prst="rect">
@@ -35008,7 +35008,7 @@
         </p:nvSpPr>
         <p:spPr>
           <a:xfrm>
-            <a:off x="857250" y="2247900"/>
+            <a:off x="857250" y="2371725"/>
             <a:ext cx="3429000" cy="495300"/>
           </a:xfrm>
           <a:prstGeom prst="roundRect">
@@ -35057,7 +35057,7 @@
         </p:nvSpPr>
         <p:spPr>
           <a:xfrm>
-            <a:off x="1047750" y="2343150"/>
+            <a:off x="1047750" y="2466975"/>
             <a:ext cx="3048000" cy="213360"/>
           </a:xfrm>
           <a:prstGeom prst="rect">
@@ -35096,7 +35096,7 @@
         </p:nvSpPr>
         <p:spPr>
           <a:xfrm>
-            <a:off x="1047750" y="2524125"/>
+            <a:off x="1047750" y="2647950"/>
             <a:ext cx="3048000" cy="182880"/>
           </a:xfrm>
           <a:prstGeom prst="rect">
@@ -35122,7 +35122,7 @@
                 </a:solidFill>
                 <a:latin typeface="Roboto"/>
               </a:rPr>
-              <a:t>criada pelo container, morre com ele</a:t>
+              <a:t>criada pelo container, removida com ele</a:t>
             </a:r>
           </a:p>
         </p:txBody>
@@ -35135,7 +35135,7 @@
         </p:nvCxnSpPr>
         <p:spPr>
           <a:xfrm>
-            <a:off x="4857750" y="2190750"/>
+            <a:off x="4857750" y="2314575"/>
             <a:ext cx="0" cy="2152650"/>
           </a:xfrm>
           <a:prstGeom prst="line">
@@ -35170,7 +35170,7 @@
         </p:nvSpPr>
         <p:spPr>
           <a:xfrm>
-            <a:off x="5257800" y="2647950"/>
+            <a:off x="5257800" y="2771775"/>
             <a:ext cx="3619500" cy="243840"/>
           </a:xfrm>
           <a:prstGeom prst="rect">
@@ -35209,7 +35209,7 @@
         </p:nvSpPr>
         <p:spPr>
           <a:xfrm>
-            <a:off x="5257800" y="2914650"/>
+            <a:off x="5257800" y="3038475"/>
             <a:ext cx="3810000" cy="666750"/>
           </a:xfrm>
           <a:prstGeom prst="rect">
@@ -35248,7 +35248,7 @@
         </p:nvSpPr>
         <p:spPr>
           <a:xfrm>
-            <a:off x="5257800" y="3486150"/>
+            <a:off x="5257800" y="3609975"/>
             <a:ext cx="3619500" cy="243840"/>
           </a:xfrm>
           <a:prstGeom prst="rect">
@@ -35287,7 +35287,7 @@
         </p:nvSpPr>
         <p:spPr>
           <a:xfrm>
-            <a:off x="5257800" y="3752850"/>
+            <a:off x="5257800" y="3876675"/>
             <a:ext cx="3810000" cy="666750"/>
           </a:xfrm>
           <a:prstGeom prst="rect">
@@ -35326,8 +35326,8 @@
         </p:nvSpPr>
         <p:spPr>
           <a:xfrm>
-            <a:off x="685800" y="5428381"/>
-            <a:ext cx="28575" cy="705719"/>
+            <a:off x="685800" y="5676321"/>
+            <a:ext cx="28575" cy="457779"/>
           </a:xfrm>
           <a:prstGeom prst="rect">
             <a:avLst/>
@@ -35370,8 +35370,8 @@
         </p:nvSpPr>
         <p:spPr>
           <a:xfrm>
-            <a:off x="876300" y="5409331"/>
-            <a:ext cx="10629900" cy="839069"/>
+            <a:off x="876300" y="5657271"/>
+            <a:ext cx="10629900" cy="591129"/>
           </a:xfrm>
           <a:prstGeom prst="rect">
             <a:avLst/>
@@ -35396,7 +35396,7 @@
                 </a:solidFill>
                 <a:latin typeface="Roboto"/>
               </a:rPr>
-              <a:t>A imagem é construída a partir de um Dockerfile, o arquivo de texto que declara a base e os passos, e circula entre máquinas por um registry. Cada instrução vira uma camada, e por isso um Dockerfile que copia um .env e faz RUN rm na instrução seguinte produz uma imagem em que o segredo continua legível. No nosso caso o segredo seria a senha do banco e o segredo de sessão do login do anfitrião.</a:t>
+              <a:t>A imagem é construída a partir de um Dockerfile e distribuída por um registry. Cada instrução gera uma camada. Um Dockerfile que copia um .env e o apaga na instrução seguinte deixa o segredo legível na camada anterior. No nosso caso, a senha do banco e o segredo de sessão do anfitrião.</a:t>
             </a:r>
           </a:p>
         </p:txBody>

--- a/trabalhos/T1-Docker-Invite-People.pptx
+++ b/trabalhos/T1-Docker-Invite-People.pptx
@@ -12949,7 +12949,7 @@
                 </a:solidFill>
                 <a:latin typeface="Roboto"/>
               </a:rPr>
-              <a:t>O shim é o processo pai do container, não o daemon. Reiniciar o daemon não encerra os containers.</a:t>
+              <a:t>O processo pai do container é o shim. Reiniciar o daemon não encerra os containers.</a:t>
             </a:r>
           </a:p>
         </p:txBody>
@@ -13710,7 +13710,7 @@
                 </a:solidFill>
                 <a:latin typeface="Roboto"/>
               </a:rPr>
-              <a:t>Fundada em 2015 sob a Linux Foundation, com a Runtime Spec, a Image Spec e a Distribution Spec. O runc é trocável por crun, gVisor ou Kata. O engine é trocável por Podman. É substituibilidade por compatibilidade de interface, e a seção 03 traz um caso real disso.</a:t>
+              <a:t>Fundada em 2015 sob a Linux Foundation, com a Runtime Spec, a Image Spec e a Distribution Spec. O runc pode ser trocado por crun, gVisor ou Kata, e o engine por Podman. É substituibilidade por compatibilidade de interface, e a seção 03 traz um caso real disso.</a:t>
             </a:r>
           </a:p>
         </p:txBody>
@@ -15999,7 +15999,7 @@
                 </a:solidFill>
                 <a:latin typeface="Roboto"/>
               </a:rPr>
-              <a:t> se refere às camadas do sistema de arquivos da imagem, não às camadas lógicas da arquitetura.</a:t>
+              <a:t> se refere às camadas do sistema de arquivos da imagem. A camada lógica da arquitetura é outro conceito.</a:t>
             </a:r>
           </a:p>
         </p:txBody>
@@ -18862,25 +18862,7 @@
                 </a:solidFill>
                 <a:latin typeface="Roboto"/>
               </a:rPr>
-              <a:t>A porta publicada mais o contrato HTTP é a </a:t>
-            </a:r>
-            <a:r>
-              <a:rPr sz="1280" b="1" i="0">
-                <a:solidFill>
-                  <a:srgbClr val="1A1A1E"/>
-                </a:solidFill>
-                <a:latin typeface="Roboto"/>
-              </a:rPr>
-              <a:t>interface provida</a:t>
-            </a:r>
-            <a:r>
-              <a:rPr sz="1280" b="0" i="0">
-                <a:solidFill>
-                  <a:srgbClr val="1A1A1E"/>
-                </a:solidFill>
-                <a:latin typeface="Roboto"/>
-              </a:rPr>
-              <a:t> da UML.</a:t>
+              <a:t>A porta publicada mais o contrato HTTP é a interface provida da UML.</a:t>
             </a:r>
           </a:p>
         </p:txBody>
@@ -18963,25 +18945,7 @@
                 </a:solidFill>
                 <a:latin typeface="Roboto"/>
               </a:rPr>
-              <a:t>A variável de conexão mais a dependência declarada é a </a:t>
-            </a:r>
-            <a:r>
-              <a:rPr sz="1280" b="1" i="0">
-                <a:solidFill>
-                  <a:srgbClr val="1A1A1E"/>
-                </a:solidFill>
-                <a:latin typeface="Roboto"/>
-              </a:rPr>
-              <a:t>interface requerida</a:t>
-            </a:r>
-            <a:r>
-              <a:rPr sz="1280" b="0" i="0">
-                <a:solidFill>
-                  <a:srgbClr val="1A1A1E"/>
-                </a:solidFill>
-                <a:latin typeface="Roboto"/>
-              </a:rPr>
-              <a:t>.</a:t>
+              <a:t>A variável de conexão mais a dependência declarada é a interface requerida.</a:t>
             </a:r>
           </a:p>
         </p:txBody>
@@ -20327,7 +20291,7 @@
                 </a:solidFill>
                 <a:latin typeface="Roboto"/>
               </a:rPr>
-              <a:t>Só o serviço público precisa de réplicas. O painel não.</a:t>
+              <a:t>Só o serviço público precisa de réplicas.</a:t>
             </a:r>
           </a:p>
         </p:txBody>
@@ -21597,7 +21561,7 @@
                 </a:solidFill>
                 <a:latin typeface="Roboto"/>
               </a:rPr>
-              <a:t>A demonstração é do ambiente e da topologia, não do produto. A implementação do produto começa em outubro.</a:t>
+              <a:t>A demonstração mostra o ambiente e a topologia. A implementação do produto começa em outubro.</a:t>
             </a:r>
           </a:p>
         </p:txBody>
@@ -22708,7 +22672,7 @@
                 </a:solidFill>
                 <a:latin typeface="Roboto"/>
               </a:rPr>
-              <a:t>O que saiu foi o adaptador embutido que falava com o Docker Engine, não o formato das imagens. Como imagem é OCI, nada quebrou. É um caso real de substituição por compatibilidade de interface.</a:t>
+              <a:t>Saiu o adaptador embutido que falava com o Docker Engine. O formato das imagens é o da OCI e continuou funcionando. É um caso real de substituição por compatibilidade de interface.</a:t>
             </a:r>
           </a:p>
         </p:txBody>
@@ -23041,7 +23005,7 @@
                 </a:solidFill>
                 <a:latin typeface="Roboto"/>
               </a:rPr>
-              <a:t>A regra de rede que o Docker escreve passa na frente da do administrador, então um deny de firewall na porta publicada não bloqueia nada.</a:t>
+              <a:t>A regra de rede que o Docker escreve é aplicada antes das regras do administrador, então um bloqueio de firewall na porta publicada não tem efeito.</a:t>
             </a:r>
           </a:p>
         </p:txBody>
@@ -23124,7 +23088,7 @@
                 </a:solidFill>
                 <a:latin typeface="Roboto"/>
               </a:rPr>
-              <a:t>Container com estado exige backup e upgrade de versão maior do banco. Estar em imagem não resolve isso.</a:t>
+              <a:t>Container com estado continua exigindo backup e upgrade de versão maior do banco.</a:t>
             </a:r>
           </a:p>
         </p:txBody>
@@ -26829,7 +26793,7 @@
         </p:nvSpPr>
         <p:spPr>
           <a:xfrm>
-            <a:off x="685800" y="2295334"/>
+            <a:off x="685800" y="2559368"/>
             <a:ext cx="5143500" cy="182880"/>
           </a:xfrm>
           <a:prstGeom prst="rect">
@@ -26868,7 +26832,7 @@
         </p:nvSpPr>
         <p:spPr>
           <a:xfrm>
-            <a:off x="685800" y="2504884"/>
+            <a:off x="685800" y="2768918"/>
             <a:ext cx="419100" cy="28575"/>
           </a:xfrm>
           <a:prstGeom prst="rect">
@@ -26912,7 +26876,7 @@
         </p:nvSpPr>
         <p:spPr>
           <a:xfrm>
-            <a:off x="704850" y="2894648"/>
+            <a:off x="704850" y="3158680"/>
             <a:ext cx="57150" cy="57150"/>
           </a:xfrm>
           <a:prstGeom prst="rect">
@@ -26956,7 +26920,7 @@
         </p:nvSpPr>
         <p:spPr>
           <a:xfrm>
-            <a:off x="971550" y="2790634"/>
+            <a:off x="971550" y="3054668"/>
             <a:ext cx="4857750" cy="95250"/>
           </a:xfrm>
           <a:prstGeom prst="rect">
@@ -26982,7 +26946,7 @@
                 </a:solidFill>
                 <a:latin typeface="Roboto"/>
               </a:rPr>
-              <a:t>O primeiro é o monolito que roda num servidor só e nunca vai escalar.</a:t>
+              <a:t>Um monolito num servidor só, que nunca vai escalar.</a:t>
             </a:r>
           </a:p>
         </p:txBody>
@@ -26995,7 +26959,7 @@
         </p:nvSpPr>
         <p:spPr>
           <a:xfrm>
-            <a:off x="704850" y="3689414"/>
+            <a:off x="704850" y="3689413"/>
             <a:ext cx="57150" cy="57150"/>
           </a:xfrm>
           <a:prstGeom prst="rect">
@@ -27065,7 +27029,7 @@
                 </a:solidFill>
                 <a:latin typeface="Roboto"/>
               </a:rPr>
-              <a:t>O segundo é o time sem integração contínua, que só acrescenta um passo de build.</a:t>
+              <a:t>Um time sem integração contínua, para quem é só um passo de build a mais.</a:t>
             </a:r>
           </a:p>
         </p:txBody>
@@ -27148,7 +27112,7 @@
                 </a:solidFill>
                 <a:latin typeface="Roboto"/>
               </a:rPr>
-              <a:t>O terceiro é a aplicação sensível a latência de cauda.</a:t>
+              <a:t>Uma aplicação sensível a latência de cauda.</a:t>
             </a:r>
           </a:p>
         </p:txBody>
@@ -27161,7 +27125,7 @@
         </p:nvSpPr>
         <p:spPr>
           <a:xfrm>
-            <a:off x="704850" y="5278945"/>
+            <a:off x="704850" y="5014912"/>
             <a:ext cx="57150" cy="57150"/>
           </a:xfrm>
           <a:prstGeom prst="rect">
@@ -27205,7 +27169,7 @@
         </p:nvSpPr>
         <p:spPr>
           <a:xfrm>
-            <a:off x="971550" y="5174932"/>
+            <a:off x="971550" y="4910899"/>
             <a:ext cx="4857750" cy="95250"/>
           </a:xfrm>
           <a:prstGeom prst="rect">
@@ -27231,7 +27195,7 @@
                 </a:solidFill>
                 <a:latin typeface="Roboto"/>
               </a:rPr>
-              <a:t>O quarto é o sistema dominado por estado.</a:t>
+              <a:t>Um sistema dominado por estado.</a:t>
             </a:r>
           </a:p>
         </p:txBody>
@@ -27244,7 +27208,7 @@
         </p:nvSpPr>
         <p:spPr>
           <a:xfrm>
-            <a:off x="6362700" y="2295334"/>
+            <a:off x="6362700" y="2559368"/>
             <a:ext cx="5143500" cy="182880"/>
           </a:xfrm>
           <a:prstGeom prst="rect">
@@ -27283,7 +27247,7 @@
         </p:nvSpPr>
         <p:spPr>
           <a:xfrm>
-            <a:off x="6362700" y="2504884"/>
+            <a:off x="6362700" y="2768918"/>
             <a:ext cx="419100" cy="28575"/>
           </a:xfrm>
           <a:prstGeom prst="rect">
@@ -27327,7 +27291,7 @@
         </p:nvSpPr>
         <p:spPr>
           <a:xfrm>
-            <a:off x="6381750" y="2894648"/>
+            <a:off x="6381750" y="3158680"/>
             <a:ext cx="57150" cy="57150"/>
           </a:xfrm>
           <a:prstGeom prst="rect">
@@ -27371,7 +27335,7 @@
         </p:nvSpPr>
         <p:spPr>
           <a:xfrm>
-            <a:off x="6648450" y="2790634"/>
+            <a:off x="6648450" y="3054668"/>
             <a:ext cx="4857750" cy="95250"/>
           </a:xfrm>
           <a:prstGeom prst="rect">
@@ -27410,7 +27374,7 @@
         </p:nvSpPr>
         <p:spPr>
           <a:xfrm>
-            <a:off x="6381750" y="3953447"/>
+            <a:off x="6381750" y="4217480"/>
             <a:ext cx="57150" cy="57150"/>
           </a:xfrm>
           <a:prstGeom prst="rect">
@@ -27454,7 +27418,7 @@
         </p:nvSpPr>
         <p:spPr>
           <a:xfrm>
-            <a:off x="6648450" y="3849434"/>
+            <a:off x="6648450" y="4113466"/>
             <a:ext cx="4857750" cy="95250"/>
           </a:xfrm>
           <a:prstGeom prst="rect">
@@ -27480,7 +27444,7 @@
                 </a:solidFill>
                 <a:latin typeface="Roboto"/>
               </a:rPr>
-              <a:t>O motivo que se aplica é o ambiente igual para os quatro antes da primeira linha de código.</a:t>
+              <a:t>O motivo para adotar é o ambiente igual para os quatro antes da primeira linha de código.</a:t>
             </a:r>
           </a:p>
         </p:txBody>
@@ -34279,7 +34243,7 @@
                 </a:solidFill>
                 <a:latin typeface="Roboto"/>
               </a:rPr>
-              <a:t>Os cgroups não isolam nada, eles contabilizam e limitam o consumo de recursos.</a:t>
+              <a:t>Os cgroups contabilizam e limitam o consumo de recursos, sem isolar nada.</a:t>
             </a:r>
           </a:p>
         </p:txBody>
@@ -34362,7 +34326,7 @@
                 </a:solidFill>
                 <a:latin typeface="Roboto"/>
               </a:rPr>
-              <a:t>Estourar o limite de memória encerra o processo. Ele não fica lento.</a:t>
+              <a:t>Estourar o limite de memória encerra o processo, sem degradação gradual.</a:t>
             </a:r>
           </a:p>
         </p:txBody>

--- a/trabalhos/T1-Docker-Invite-People.pptx
+++ b/trabalhos/T1-Docker-Invite-People.pptx
@@ -16900,7 +16900,7 @@
         </p:nvSpPr>
         <p:spPr>
           <a:xfrm>
-            <a:off x="857250" y="2828925"/>
+            <a:off x="857250" y="2771775"/>
             <a:ext cx="3810000" cy="167640"/>
           </a:xfrm>
           <a:prstGeom prst="rect">
@@ -16939,8 +16939,8 @@
         </p:nvSpPr>
         <p:spPr>
           <a:xfrm>
-            <a:off x="857250" y="3000375"/>
-            <a:ext cx="3810000" cy="1866900"/>
+            <a:off x="857250" y="2943225"/>
+            <a:ext cx="3810000" cy="2057400"/>
           </a:xfrm>
           <a:prstGeom prst="rect">
             <a:avLst/>
@@ -16983,7 +16983,7 @@
         </p:nvSpPr>
         <p:spPr>
           <a:xfrm>
-            <a:off x="1123950" y="3248025"/>
+            <a:off x="1123950" y="3190875"/>
             <a:ext cx="1428750" cy="457200"/>
           </a:xfrm>
           <a:prstGeom prst="roundRect">
@@ -17029,7 +17029,7 @@
         </p:nvSpPr>
         <p:spPr>
           <a:xfrm>
-            <a:off x="1123950" y="3400425"/>
+            <a:off x="1123950" y="3343275"/>
             <a:ext cx="1428750" cy="198120"/>
           </a:xfrm>
           <a:prstGeom prst="rect">
@@ -17068,7 +17068,7 @@
         </p:nvSpPr>
         <p:spPr>
           <a:xfrm>
-            <a:off x="2971800" y="3248025"/>
+            <a:off x="2971800" y="3190875"/>
             <a:ext cx="1428750" cy="457200"/>
           </a:xfrm>
           <a:prstGeom prst="roundRect">
@@ -17114,7 +17114,7 @@
         </p:nvSpPr>
         <p:spPr>
           <a:xfrm>
-            <a:off x="2971800" y="3400425"/>
+            <a:off x="2971800" y="3343275"/>
             <a:ext cx="1428750" cy="198120"/>
           </a:xfrm>
           <a:prstGeom prst="rect">
@@ -17153,7 +17153,7 @@
         </p:nvSpPr>
         <p:spPr>
           <a:xfrm>
-            <a:off x="2047875" y="3914775"/>
+            <a:off x="2047875" y="3857625"/>
             <a:ext cx="1428750" cy="419100"/>
           </a:xfrm>
           <a:prstGeom prst="roundRect">
@@ -17199,7 +17199,7 @@
         </p:nvSpPr>
         <p:spPr>
           <a:xfrm>
-            <a:off x="2047875" y="4048125"/>
+            <a:off x="2047875" y="3990975"/>
             <a:ext cx="1428750" cy="198120"/>
           </a:xfrm>
           <a:prstGeom prst="rect">
@@ -17238,7 +17238,7 @@
         </p:nvSpPr>
         <p:spPr>
           <a:xfrm>
-            <a:off x="2047875" y="4467225"/>
+            <a:off x="2047875" y="4410075"/>
             <a:ext cx="1428750" cy="285750"/>
           </a:xfrm>
           <a:prstGeom prst="roundRect">
@@ -17284,7 +17284,7 @@
         </p:nvSpPr>
         <p:spPr>
           <a:xfrm>
-            <a:off x="2047875" y="4533900"/>
+            <a:off x="2047875" y="4476750"/>
             <a:ext cx="1428750" cy="182880"/>
           </a:xfrm>
           <a:prstGeom prst="rect">
@@ -17323,7 +17323,7 @@
         </p:nvCxnSpPr>
         <p:spPr>
           <a:xfrm>
-            <a:off x="1838325" y="3705225"/>
+            <a:off x="1838325" y="3648075"/>
             <a:ext cx="733425" cy="209550"/>
           </a:xfrm>
           <a:prstGeom prst="line">
@@ -17358,7 +17358,7 @@
         </p:nvCxnSpPr>
         <p:spPr>
           <a:xfrm flipH="1">
-            <a:off x="2952750" y="3705225"/>
+            <a:off x="2952750" y="3648075"/>
             <a:ext cx="733425" cy="209550"/>
           </a:xfrm>
           <a:prstGeom prst="line">
@@ -17393,7 +17393,7 @@
         </p:nvCxnSpPr>
         <p:spPr>
           <a:xfrm>
-            <a:off x="2762250" y="4333875"/>
+            <a:off x="2762250" y="4276725"/>
             <a:ext cx="0" cy="133350"/>
           </a:xfrm>
           <a:prstGeom prst="line">
@@ -17428,7 +17428,7 @@
         </p:nvCxnSpPr>
         <p:spPr>
           <a:xfrm>
-            <a:off x="4667250" y="3933825"/>
+            <a:off x="4667250" y="3876675"/>
             <a:ext cx="1524000" cy="0"/>
           </a:xfrm>
           <a:prstGeom prst="line">
@@ -17463,7 +17463,7 @@
         </p:nvSpPr>
         <p:spPr>
           <a:xfrm>
-            <a:off x="4667250" y="3667125"/>
+            <a:off x="4667250" y="3609975"/>
             <a:ext cx="1524000" cy="198120"/>
           </a:xfrm>
           <a:prstGeom prst="rect">
@@ -17502,7 +17502,7 @@
         </p:nvSpPr>
         <p:spPr>
           <a:xfrm>
-            <a:off x="6191250" y="2828925"/>
+            <a:off x="6191250" y="2771775"/>
             <a:ext cx="4000500" cy="167640"/>
           </a:xfrm>
           <a:prstGeom prst="rect">
@@ -17541,8 +17541,8 @@
         </p:nvSpPr>
         <p:spPr>
           <a:xfrm>
-            <a:off x="6191250" y="3000375"/>
-            <a:ext cx="3810000" cy="1866900"/>
+            <a:off x="6191250" y="2943225"/>
+            <a:ext cx="3810000" cy="2057400"/>
           </a:xfrm>
           <a:prstGeom prst="rect">
             <a:avLst/>
@@ -17585,7 +17585,7 @@
         </p:nvSpPr>
         <p:spPr>
           <a:xfrm>
-            <a:off x="6381750" y="3114675"/>
+            <a:off x="6381750" y="3057525"/>
             <a:ext cx="1905000" cy="167640"/>
           </a:xfrm>
           <a:prstGeom prst="rect">
@@ -17624,7 +17624,7 @@
         </p:nvSpPr>
         <p:spPr>
           <a:xfrm>
-            <a:off x="6381750" y="3343275"/>
+            <a:off x="6381750" y="3286125"/>
             <a:ext cx="1066800" cy="495300"/>
           </a:xfrm>
           <a:prstGeom prst="rect">
@@ -17668,7 +17668,7 @@
         </p:nvSpPr>
         <p:spPr>
           <a:xfrm>
-            <a:off x="6400800" y="3419475"/>
+            <a:off x="6400800" y="3362325"/>
             <a:ext cx="1028700" cy="175260"/>
           </a:xfrm>
           <a:prstGeom prst="rect">
@@ -17707,7 +17707,7 @@
         </p:nvSpPr>
         <p:spPr>
           <a:xfrm>
-            <a:off x="6400800" y="3590925"/>
+            <a:off x="6400800" y="3533775"/>
             <a:ext cx="1028700" cy="167640"/>
           </a:xfrm>
           <a:prstGeom prst="rect">
@@ -17746,7 +17746,7 @@
         </p:nvSpPr>
         <p:spPr>
           <a:xfrm>
-            <a:off x="7562850" y="3343275"/>
+            <a:off x="7562850" y="3286125"/>
             <a:ext cx="1066800" cy="495300"/>
           </a:xfrm>
           <a:prstGeom prst="rect">
@@ -17790,7 +17790,7 @@
         </p:nvSpPr>
         <p:spPr>
           <a:xfrm>
-            <a:off x="7581900" y="3419475"/>
+            <a:off x="7581900" y="3362325"/>
             <a:ext cx="1028700" cy="175260"/>
           </a:xfrm>
           <a:prstGeom prst="rect">
@@ -17829,7 +17829,7 @@
         </p:nvSpPr>
         <p:spPr>
           <a:xfrm>
-            <a:off x="7581900" y="3590925"/>
+            <a:off x="7581900" y="3533775"/>
             <a:ext cx="1028700" cy="167640"/>
           </a:xfrm>
           <a:prstGeom prst="rect">
@@ -17868,7 +17868,7 @@
         </p:nvCxnSpPr>
         <p:spPr>
           <a:xfrm>
-            <a:off x="7448550" y="3590925"/>
+            <a:off x="7448550" y="3533775"/>
             <a:ext cx="114300" cy="0"/>
           </a:xfrm>
           <a:prstGeom prst="line">
@@ -17903,7 +17903,7 @@
         </p:nvSpPr>
         <p:spPr>
           <a:xfrm>
-            <a:off x="8743950" y="3343275"/>
+            <a:off x="8743950" y="3286125"/>
             <a:ext cx="1066800" cy="495300"/>
           </a:xfrm>
           <a:prstGeom prst="rect">
@@ -17947,7 +17947,7 @@
         </p:nvSpPr>
         <p:spPr>
           <a:xfrm>
-            <a:off x="8763000" y="3419475"/>
+            <a:off x="8763000" y="3362325"/>
             <a:ext cx="1028700" cy="175260"/>
           </a:xfrm>
           <a:prstGeom prst="rect">
@@ -17986,7 +17986,7 @@
         </p:nvSpPr>
         <p:spPr>
           <a:xfrm>
-            <a:off x="8763000" y="3590925"/>
+            <a:off x="8763000" y="3533775"/>
             <a:ext cx="1028700" cy="167640"/>
           </a:xfrm>
           <a:prstGeom prst="rect">
@@ -18025,7 +18025,7 @@
         </p:nvCxnSpPr>
         <p:spPr>
           <a:xfrm>
-            <a:off x="8629650" y="3590925"/>
+            <a:off x="8629650" y="3533775"/>
             <a:ext cx="114300" cy="0"/>
           </a:xfrm>
           <a:prstGeom prst="line">
@@ -18060,7 +18060,7 @@
         </p:nvSpPr>
         <p:spPr>
           <a:xfrm>
-            <a:off x="6381750" y="4067175"/>
+            <a:off x="6381750" y="4010025"/>
             <a:ext cx="3429000" cy="323850"/>
           </a:xfrm>
           <a:prstGeom prst="roundRect">
@@ -18109,7 +18109,7 @@
         </p:nvSpPr>
         <p:spPr>
           <a:xfrm>
-            <a:off x="6381750" y="4162425"/>
+            <a:off x="6381750" y="4105275"/>
             <a:ext cx="3429000" cy="182880"/>
           </a:xfrm>
           <a:prstGeom prst="rect">
@@ -18148,8 +18148,8 @@
         </p:nvSpPr>
         <p:spPr>
           <a:xfrm>
-            <a:off x="6381750" y="4505325"/>
-            <a:ext cx="3390900" cy="438150"/>
+            <a:off x="6381750" y="4429125"/>
+            <a:ext cx="3390900" cy="381000"/>
           </a:xfrm>
           <a:prstGeom prst="rect">
             <a:avLst/>
@@ -18164,7 +18164,7 @@
           <a:p>
             <a:pPr algn="l">
               <a:lnSpc>
-                <a:spcPct val="140000"/>
+                <a:spcPct val="130000"/>
               </a:lnSpc>
             </a:pPr>
             <a:r>

--- a/trabalhos/T1-Docker-Invite-People.pptx
+++ b/trabalhos/T1-Docker-Invite-People.pptx
@@ -15980,7 +15980,7 @@
                 </a:solidFill>
                 <a:latin typeface="Roboto"/>
               </a:rPr>
-              <a:t>O projeto lógico é o mesmo nas três opções, e a escolha entre elas é registrada no documento de decisões arquiteturais. No Docker, </a:t>
+              <a:t>O projeto lógico é o mesmo nas três opções. Os rascunhos dos próximos slides seguem a de três, e a escolha final é registrada no documento de decisões arquiteturais. No Docker, </a:t>
             </a:r>
             <a:r>
               <a:rPr sz="1280" b="0" i="1">
@@ -18353,12 +18353,12 @@
         </p:nvSpPr>
         <p:spPr>
           <a:xfrm>
-            <a:off x="685800" y="2343150"/>
-            <a:ext cx="5905500" cy="2895600"/>
+            <a:off x="685800" y="2095500"/>
+            <a:ext cx="5905500" cy="3390900"/>
           </a:xfrm>
           <a:prstGeom prst="roundRect">
             <a:avLst>
-              <a:gd name="adj" fmla="val 2631"/>
+              <a:gd name="adj" fmla="val 2247"/>
             </a:avLst>
           </a:prstGeom>
           <a:solidFill>
@@ -18401,7 +18401,7 @@
         </p:nvSpPr>
         <p:spPr>
           <a:xfrm>
-            <a:off x="933450" y="2552700"/>
+            <a:off x="933450" y="2305050"/>
             <a:ext cx="5524500" cy="213360"/>
           </a:xfrm>
           <a:prstGeom prst="rect">
@@ -18440,7 +18440,7 @@
         </p:nvSpPr>
         <p:spPr>
           <a:xfrm>
-            <a:off x="933450" y="2800350"/>
+            <a:off x="933450" y="2552700"/>
             <a:ext cx="5524500" cy="213360"/>
           </a:xfrm>
           <a:prstGeom prst="rect">
@@ -18466,7 +18466,7 @@
                 </a:solidFill>
                 <a:latin typeface="Roboto Mono"/>
               </a:rPr>
-              <a:t>  api:</a:t>
+              <a:t>  front:</a:t>
             </a:r>
           </a:p>
         </p:txBody>
@@ -18479,7 +18479,7 @@
         </p:nvSpPr>
         <p:spPr>
           <a:xfrm>
-            <a:off x="933450" y="3048000"/>
+            <a:off x="933450" y="2800350"/>
             <a:ext cx="5524500" cy="213360"/>
           </a:xfrm>
           <a:prstGeom prst="rect">
@@ -18505,7 +18505,7 @@
                 </a:solidFill>
                 <a:latin typeface="Roboto Mono"/>
               </a:rPr>
-              <a:t>    image: node:22-alpine</a:t>
+              <a:t>    image: nginx:alpine</a:t>
             </a:r>
           </a:p>
         </p:txBody>
@@ -18518,7 +18518,7 @@
         </p:nvSpPr>
         <p:spPr>
           <a:xfrm>
-            <a:off x="933450" y="3295650"/>
+            <a:off x="933450" y="3048000"/>
             <a:ext cx="5524500" cy="213360"/>
           </a:xfrm>
           <a:prstGeom prst="rect">
@@ -18544,7 +18544,7 @@
                 </a:solidFill>
                 <a:latin typeface="Roboto Mono"/>
               </a:rPr>
-              <a:t>    ports:</a:t>
+              <a:t>    ports: ["8080:80"]</a:t>
             </a:r>
           </a:p>
         </p:txBody>
@@ -18557,7 +18557,7 @@
         </p:nvSpPr>
         <p:spPr>
           <a:xfrm>
-            <a:off x="933450" y="3543300"/>
+            <a:off x="933450" y="3295650"/>
             <a:ext cx="5524500" cy="213360"/>
           </a:xfrm>
           <a:prstGeom prst="rect">
@@ -18583,7 +18583,7 @@
                 </a:solidFill>
                 <a:latin typeface="Roboto Mono"/>
               </a:rPr>
-              <a:t>      - "3000:3000"        # interface provida</a:t>
+              <a:t>  api:</a:t>
             </a:r>
           </a:p>
         </p:txBody>
@@ -18596,7 +18596,7 @@
         </p:nvSpPr>
         <p:spPr>
           <a:xfrm>
-            <a:off x="933450" y="3790950"/>
+            <a:off x="933450" y="3543300"/>
             <a:ext cx="5524500" cy="213360"/>
           </a:xfrm>
           <a:prstGeom prst="rect">
@@ -18622,7 +18622,7 @@
                 </a:solidFill>
                 <a:latin typeface="Roboto Mono"/>
               </a:rPr>
-              <a:t>    environment:</a:t>
+              <a:t>    image: node:22-alpine</a:t>
             </a:r>
           </a:p>
         </p:txBody>
@@ -18635,7 +18635,7 @@
         </p:nvSpPr>
         <p:spPr>
           <a:xfrm>
-            <a:off x="933450" y="4038600"/>
+            <a:off x="933450" y="3790950"/>
             <a:ext cx="5524500" cy="213360"/>
           </a:xfrm>
           <a:prstGeom prst="rect">
@@ -18661,7 +18661,7 @@
                 </a:solidFill>
                 <a:latin typeface="Roboto Mono"/>
               </a:rPr>
-              <a:t>      DATABASE_URL: ...    # interface requerida</a:t>
+              <a:t>    ports: ["3000:3000"]     # interface provida</a:t>
             </a:r>
           </a:p>
         </p:txBody>
@@ -18674,7 +18674,7 @@
         </p:nvSpPr>
         <p:spPr>
           <a:xfrm>
-            <a:off x="933450" y="4286250"/>
+            <a:off x="933450" y="4038600"/>
             <a:ext cx="5524500" cy="213360"/>
           </a:xfrm>
           <a:prstGeom prst="rect">
@@ -18700,7 +18700,7 @@
                 </a:solidFill>
                 <a:latin typeface="Roboto Mono"/>
               </a:rPr>
-              <a:t>    depends_on: [db]</a:t>
+              <a:t>    environment:</a:t>
             </a:r>
           </a:p>
         </p:txBody>
@@ -18713,7 +18713,7 @@
         </p:nvSpPr>
         <p:spPr>
           <a:xfrm>
-            <a:off x="933450" y="4533900"/>
+            <a:off x="933450" y="4286250"/>
             <a:ext cx="5524500" cy="213360"/>
           </a:xfrm>
           <a:prstGeom prst="rect">
@@ -18739,7 +18739,7 @@
                 </a:solidFill>
                 <a:latin typeface="Roboto Mono"/>
               </a:rPr>
-              <a:t>  db:</a:t>
+              <a:t>      DATABASE_URL: ...      # interface requerida</a:t>
             </a:r>
           </a:p>
         </p:txBody>
@@ -18752,7 +18752,7 @@
         </p:nvSpPr>
         <p:spPr>
           <a:xfrm>
-            <a:off x="933450" y="4781550"/>
+            <a:off x="933450" y="4533900"/>
             <a:ext cx="5524500" cy="213360"/>
           </a:xfrm>
           <a:prstGeom prst="rect">
@@ -18778,6 +18778,84 @@
                 </a:solidFill>
                 <a:latin typeface="Roboto Mono"/>
               </a:rPr>
+              <a:t>    depends_on: [db]</a:t>
+            </a:r>
+          </a:p>
+        </p:txBody>
+      </p:sp>
+      <p:sp>
+        <p:nvSpPr>
+          <p:cNvPr id="15" name="TextBox 14"/>
+          <p:cNvSpPr txBox="1"/>
+          <p:nvPr/>
+        </p:nvSpPr>
+        <p:spPr>
+          <a:xfrm>
+            <a:off x="933450" y="4781550"/>
+            <a:ext cx="5524500" cy="213360"/>
+          </a:xfrm>
+          <a:prstGeom prst="rect">
+            <a:avLst/>
+          </a:prstGeom>
+          <a:noFill/>
+        </p:spPr>
+        <p:txBody>
+          <a:bodyPr wrap="square" lIns="0" rIns="0" tIns="0" bIns="0" anchor="t">
+            <a:spAutoFit/>
+          </a:bodyPr>
+          <a:lstStyle/>
+          <a:p>
+            <a:pPr algn="l">
+              <a:lnSpc>
+                <a:spcPct val="120000"/>
+              </a:lnSpc>
+            </a:pPr>
+            <a:r>
+              <a:rPr sz="1050" b="0" i="0">
+                <a:solidFill>
+                  <a:srgbClr val="1A1A1E"/>
+                </a:solidFill>
+                <a:latin typeface="Roboto Mono"/>
+              </a:rPr>
+              <a:t>  db:</a:t>
+            </a:r>
+          </a:p>
+        </p:txBody>
+      </p:sp>
+      <p:sp>
+        <p:nvSpPr>
+          <p:cNvPr id="16" name="TextBox 15"/>
+          <p:cNvSpPr txBox="1"/>
+          <p:nvPr/>
+        </p:nvSpPr>
+        <p:spPr>
+          <a:xfrm>
+            <a:off x="933450" y="5029200"/>
+            <a:ext cx="5524500" cy="213360"/>
+          </a:xfrm>
+          <a:prstGeom prst="rect">
+            <a:avLst/>
+          </a:prstGeom>
+          <a:noFill/>
+        </p:spPr>
+        <p:txBody>
+          <a:bodyPr wrap="square" lIns="0" rIns="0" tIns="0" bIns="0" anchor="t">
+            <a:spAutoFit/>
+          </a:bodyPr>
+          <a:lstStyle/>
+          <a:p>
+            <a:pPr algn="l">
+              <a:lnSpc>
+                <a:spcPct val="120000"/>
+              </a:lnSpc>
+            </a:pPr>
+            <a:r>
+              <a:rPr sz="1050" b="0" i="0">
+                <a:solidFill>
+                  <a:srgbClr val="1A1A1E"/>
+                </a:solidFill>
+                <a:latin typeface="Roboto Mono"/>
+              </a:rPr>
               <a:t>    image: postgres:16</a:t>
             </a:r>
           </a:p>
@@ -18785,13 +18863,13 @@
       </p:sp>
       <p:sp>
         <p:nvSpPr>
-          <p:cNvPr id="15" name="Rectangle 14"/>
+          <p:cNvPr id="17" name="Rectangle 16"/>
           <p:cNvSpPr/>
           <p:nvPr/>
         </p:nvSpPr>
         <p:spPr>
           <a:xfrm>
-            <a:off x="7067550" y="2427351"/>
+            <a:off x="7067550" y="2179701"/>
             <a:ext cx="57150" cy="57150"/>
           </a:xfrm>
           <a:prstGeom prst="rect">
@@ -18829,13 +18907,13 @@
       </p:sp>
       <p:sp>
         <p:nvSpPr>
-          <p:cNvPr id="16" name="TextBox 15"/>
+          <p:cNvPr id="18" name="TextBox 17"/>
           <p:cNvSpPr txBox="1"/>
           <p:nvPr/>
         </p:nvSpPr>
         <p:spPr>
           <a:xfrm>
-            <a:off x="7334250" y="2343150"/>
+            <a:off x="7334250" y="2095500"/>
             <a:ext cx="4171950" cy="95250"/>
           </a:xfrm>
           <a:prstGeom prst="rect">
@@ -18868,13 +18946,13 @@
       </p:sp>
       <p:sp>
         <p:nvSpPr>
-          <p:cNvPr id="17" name="Rectangle 16"/>
+          <p:cNvPr id="19" name="Rectangle 18"/>
           <p:cNvSpPr/>
           <p:nvPr/>
         </p:nvSpPr>
         <p:spPr>
           <a:xfrm>
-            <a:off x="7067550" y="3007233"/>
+            <a:off x="7067550" y="2759583"/>
             <a:ext cx="57150" cy="57150"/>
           </a:xfrm>
           <a:prstGeom prst="rect">
@@ -18912,13 +18990,13 @@
       </p:sp>
       <p:sp>
         <p:nvSpPr>
-          <p:cNvPr id="18" name="TextBox 17"/>
+          <p:cNvPr id="20" name="TextBox 19"/>
           <p:cNvSpPr txBox="1"/>
           <p:nvPr/>
         </p:nvSpPr>
         <p:spPr>
           <a:xfrm>
-            <a:off x="7334250" y="2923032"/>
+            <a:off x="7334250" y="2675382"/>
             <a:ext cx="4171950" cy="95250"/>
           </a:xfrm>
           <a:prstGeom prst="rect">
@@ -18951,13 +19029,13 @@
       </p:sp>
       <p:sp>
         <p:nvSpPr>
-          <p:cNvPr id="19" name="Rectangle 18"/>
+          <p:cNvPr id="21" name="Rectangle 20"/>
           <p:cNvSpPr/>
           <p:nvPr/>
         </p:nvSpPr>
         <p:spPr>
           <a:xfrm>
-            <a:off x="7067550" y="3587115"/>
+            <a:off x="7067550" y="3339465"/>
             <a:ext cx="57150" cy="57150"/>
           </a:xfrm>
           <a:prstGeom prst="rect">
@@ -18995,13 +19073,13 @@
       </p:sp>
       <p:sp>
         <p:nvSpPr>
-          <p:cNvPr id="20" name="TextBox 19"/>
+          <p:cNvPr id="22" name="TextBox 21"/>
           <p:cNvSpPr txBox="1"/>
           <p:nvPr/>
         </p:nvSpPr>
         <p:spPr>
           <a:xfrm>
-            <a:off x="7334250" y="3502914"/>
+            <a:off x="7334250" y="3255264"/>
             <a:ext cx="4171950" cy="95250"/>
           </a:xfrm>
           <a:prstGeom prst="rect">
@@ -19034,13 +19112,13 @@
       </p:sp>
       <p:sp>
         <p:nvSpPr>
-          <p:cNvPr id="21" name="Rectangle 20"/>
+          <p:cNvPr id="23" name="Rectangle 22"/>
           <p:cNvSpPr/>
           <p:nvPr/>
         </p:nvSpPr>
         <p:spPr>
           <a:xfrm>
-            <a:off x="7067550" y="4166997"/>
+            <a:off x="7067550" y="3919347"/>
             <a:ext cx="57150" cy="57150"/>
           </a:xfrm>
           <a:prstGeom prst="rect">
@@ -19078,13 +19156,13 @@
       </p:sp>
       <p:sp>
         <p:nvSpPr>
-          <p:cNvPr id="22" name="TextBox 21"/>
+          <p:cNvPr id="24" name="TextBox 23"/>
           <p:cNvSpPr txBox="1"/>
           <p:nvPr/>
         </p:nvSpPr>
         <p:spPr>
           <a:xfrm>
-            <a:off x="7334250" y="4082796"/>
+            <a:off x="7334250" y="3835146"/>
             <a:ext cx="4171950" cy="95250"/>
           </a:xfrm>
           <a:prstGeom prst="rect">
@@ -19117,7 +19195,7 @@
       </p:sp>
       <p:sp>
         <p:nvSpPr>
-          <p:cNvPr id="23" name="TextBox 22"/>
+          <p:cNvPr id="25" name="TextBox 24"/>
           <p:cNvSpPr txBox="1"/>
           <p:nvPr/>
         </p:nvSpPr>
@@ -19156,7 +19234,7 @@
       </p:sp>
       <p:sp>
         <p:nvSpPr>
-          <p:cNvPr id="24" name="TextBox 23"/>
+          <p:cNvPr id="26" name="TextBox 25"/>
           <p:cNvSpPr txBox="1"/>
           <p:nvPr/>
         </p:nvSpPr>
@@ -19609,7 +19687,7 @@
                 </a:solidFill>
                 <a:latin typeface="Roboto"/>
               </a:rPr>
-              <a:t>Os serviços conversam por uma rede interna, onde cada um é achado pelo nome. Só o de fronteira publica porta para fora, e o banco fica sem mapeamento nenhum.</a:t>
+              <a:t>Os serviços conversam por uma rede interna, onde cada um é achado pelo nome. Só os serviços de fronteira publicam porta para fora. O banco fica sem mapeamento nenhum.</a:t>
             </a:r>
           </a:p>
         </p:txBody>
@@ -20290,7 +20368,7 @@
                 </a:solidFill>
                 <a:latin typeface="Roboto"/>
               </a:rPr>
-              <a:t>Só o serviço público precisa de réplicas.</a:t>
+              <a:t>Réplicas só do container da API, por causa do convite público. O painel sozinho não justificaria.</a:t>
             </a:r>
           </a:p>
         </p:txBody>
@@ -27846,7 +27924,7 @@
                 </a:solidFill>
                 <a:latin typeface="Roboto"/>
               </a:rPr>
-              <a:t>Dá para escalar só o serviço público, se a aplicação for mesmo sem estado.</a:t>
+              <a:t>Dá para replicar só a API, se o caminho do convite público for mesmo sem estado.</a:t>
             </a:r>
           </a:p>
         </p:txBody>

--- a/trabalhos/T1-Docker-Invite-People.pptx
+++ b/trabalhos/T1-Docker-Invite-People.pptx
@@ -20186,36 +20186,103 @@
                 </a:solidFill>
                 <a:latin typeface="Roboto"/>
               </a:rPr>
-              <a:t>O convite público e o painel</a:t>
-            </a:r>
-          </a:p>
-          <a:p>
-            <a:pPr>
-              <a:lnSpc>
-                <a:spcPct val="104000"/>
-              </a:lnSpc>
-            </a:pPr>
-            <a:r>
-              <a:rPr sz="3000" b="1" i="0">
+              <a:t>Área pública e área com login</a:t>
+            </a:r>
+          </a:p>
+        </p:txBody>
+      </p:sp>
+      <p:sp>
+        <p:nvSpPr>
+          <p:cNvPr id="4" name="TextBox 3"/>
+          <p:cNvSpPr txBox="1"/>
+          <p:nvPr/>
+        </p:nvSpPr>
+        <p:spPr>
+          <a:xfrm>
+            <a:off x="685800" y="2560701"/>
+            <a:ext cx="5143500" cy="182880"/>
+          </a:xfrm>
+          <a:prstGeom prst="rect">
+            <a:avLst/>
+          </a:prstGeom>
+          <a:noFill/>
+        </p:spPr>
+        <p:txBody>
+          <a:bodyPr wrap="square" lIns="0" rIns="0" tIns="0" bIns="0" anchor="t">
+            <a:spAutoFit/>
+          </a:bodyPr>
+          <a:lstStyle/>
+          <a:p>
+            <a:pPr algn="l">
+              <a:lnSpc>
+                <a:spcPct val="120000"/>
+              </a:lnSpc>
+            </a:pPr>
+            <a:r>
+              <a:rPr sz="900" b="1" i="0" spc="120">
                 <a:solidFill>
                   <a:srgbClr val="21049A"/>
                 </a:solidFill>
                 <a:latin typeface="Roboto"/>
               </a:rPr>
-              <a:t>têm cargas diferentes</a:t>
-            </a:r>
-          </a:p>
-        </p:txBody>
-      </p:sp>
-      <p:sp>
-        <p:nvSpPr>
-          <p:cNvPr id="4" name="Rectangle 3"/>
+              <a:t>CONVITE PÚBLICO, SEM LOGIN</a:t>
+            </a:r>
+          </a:p>
+        </p:txBody>
+      </p:sp>
+      <p:sp>
+        <p:nvSpPr>
+          <p:cNvPr id="5" name="Rectangle 4"/>
           <p:cNvSpPr/>
           <p:nvPr/>
         </p:nvSpPr>
         <p:spPr>
           <a:xfrm>
-            <a:off x="704850" y="2998851"/>
+            <a:off x="685800" y="2770251"/>
+            <a:ext cx="419100" cy="28575"/>
+          </a:xfrm>
+          <a:prstGeom prst="rect">
+            <a:avLst/>
+          </a:prstGeom>
+          <a:solidFill>
+            <a:srgbClr val="21049A"/>
+          </a:solidFill>
+          <a:ln>
+            <a:noFill/>
+          </a:ln>
+          <a:effectLst/>
+        </p:spPr>
+        <p:style>
+          <a:lnRef idx="1">
+            <a:schemeClr val="accent1"/>
+          </a:lnRef>
+          <a:fillRef idx="3">
+            <a:schemeClr val="accent1"/>
+          </a:fillRef>
+          <a:effectRef idx="2">
+            <a:schemeClr val="accent1"/>
+          </a:effectRef>
+          <a:fontRef idx="minor">
+            <a:schemeClr val="lt1"/>
+          </a:fontRef>
+        </p:style>
+        <p:txBody>
+          <a:bodyPr rtlCol="0" anchor="ctr" wrap="square" lIns="0" rIns="0" tIns="0" bIns="0"/>
+          <a:lstStyle/>
+          <a:p>
+            <a:pPr algn="ctr"/>
+          </a:p>
+        </p:txBody>
+      </p:sp>
+      <p:sp>
+        <p:nvSpPr>
+          <p:cNvPr id="6" name="Rectangle 5"/>
+          <p:cNvSpPr/>
+          <p:nvPr/>
+        </p:nvSpPr>
+        <p:spPr>
+          <a:xfrm>
+            <a:off x="704850" y="3160014"/>
             <a:ext cx="57150" cy="57150"/>
           </a:xfrm>
           <a:prstGeom prst="rect">
@@ -20253,14 +20320,14 @@
       </p:sp>
       <p:sp>
         <p:nvSpPr>
-          <p:cNvPr id="5" name="TextBox 4"/>
+          <p:cNvPr id="7" name="TextBox 6"/>
           <p:cNvSpPr txBox="1"/>
           <p:nvPr/>
         </p:nvSpPr>
         <p:spPr>
           <a:xfrm>
-            <a:off x="971550" y="2889885"/>
-            <a:ext cx="9677400" cy="95250"/>
+            <a:off x="971550" y="3056001"/>
+            <a:ext cx="4857750" cy="95250"/>
           </a:xfrm>
           <a:prstGeom prst="rect">
             <a:avLst/>
@@ -20279,26 +20346,26 @@
               </a:lnSpc>
             </a:pPr>
             <a:r>
-              <a:rPr sz="1650" b="0" i="0">
+              <a:rPr sz="1580" b="0" i="0">
                 <a:solidFill>
                   <a:srgbClr val="1A1A1E"/>
                 </a:solidFill>
                 <a:latin typeface="Roboto"/>
               </a:rPr>
-              <a:t>A jornada da anfitriã descreve o link caindo no grupo da família. Isso é pico no convite público, onde o convidado confirma presença, e uma pessoa só no painel, onde a anfitriã vê a lista.</a:t>
-            </a:r>
-          </a:p>
-        </p:txBody>
-      </p:sp>
-      <p:sp>
-        <p:nvSpPr>
-          <p:cNvPr id="6" name="Rectangle 5"/>
+              <a:t>Qualquer pessoa com o link acessa.</a:t>
+            </a:r>
+          </a:p>
+        </p:txBody>
+      </p:sp>
+      <p:sp>
+        <p:nvSpPr>
+          <p:cNvPr id="8" name="Rectangle 7"/>
           <p:cNvSpPr/>
           <p:nvPr/>
         </p:nvSpPr>
         <p:spPr>
           <a:xfrm>
-            <a:off x="704850" y="3837813"/>
+            <a:off x="704850" y="3690747"/>
             <a:ext cx="57150" cy="57150"/>
           </a:xfrm>
           <a:prstGeom prst="rect">
@@ -20336,14 +20403,14 @@
       </p:sp>
       <p:sp>
         <p:nvSpPr>
-          <p:cNvPr id="7" name="TextBox 6"/>
+          <p:cNvPr id="9" name="TextBox 8"/>
           <p:cNvSpPr txBox="1"/>
           <p:nvPr/>
         </p:nvSpPr>
         <p:spPr>
           <a:xfrm>
-            <a:off x="971550" y="3728847"/>
-            <a:ext cx="9677400" cy="95250"/>
+            <a:off x="971550" y="3586734"/>
+            <a:ext cx="4857750" cy="95250"/>
           </a:xfrm>
           <a:prstGeom prst="rect">
             <a:avLst/>
@@ -20362,26 +20429,26 @@
               </a:lnSpc>
             </a:pPr>
             <a:r>
-              <a:rPr sz="1650" b="0" i="0">
+              <a:rPr sz="1580" b="0" i="0">
                 <a:solidFill>
                   <a:srgbClr val="1A1A1E"/>
                 </a:solidFill>
                 <a:latin typeface="Roboto"/>
               </a:rPr>
-              <a:t>Réplicas só do container da API, por causa do convite público. O painel sozinho não justificaria.</a:t>
-            </a:r>
-          </a:p>
-        </p:txBody>
-      </p:sp>
-      <p:sp>
-        <p:nvSpPr>
-          <p:cNvPr id="8" name="Rectangle 7"/>
+              <a:t>O link é compartilhado no grupo da família e as confirmações de presença chegam em pico.</a:t>
+            </a:r>
+          </a:p>
+        </p:txBody>
+      </p:sp>
+      <p:sp>
+        <p:nvSpPr>
+          <p:cNvPr id="10" name="Rectangle 9"/>
           <p:cNvSpPr/>
           <p:nvPr/>
         </p:nvSpPr>
         <p:spPr>
           <a:xfrm>
-            <a:off x="704850" y="4400169"/>
+            <a:off x="704850" y="4485513"/>
             <a:ext cx="57150" cy="57150"/>
           </a:xfrm>
           <a:prstGeom prst="rect">
@@ -20419,14 +20486,14 @@
       </p:sp>
       <p:sp>
         <p:nvSpPr>
-          <p:cNvPr id="9" name="TextBox 8"/>
+          <p:cNvPr id="11" name="TextBox 10"/>
           <p:cNvSpPr txBox="1"/>
           <p:nvPr/>
         </p:nvSpPr>
         <p:spPr>
           <a:xfrm>
-            <a:off x="971550" y="4291203"/>
-            <a:ext cx="9677400" cy="95250"/>
+            <a:off x="971550" y="4381500"/>
+            <a:ext cx="4857750" cy="95250"/>
           </a:xfrm>
           <a:prstGeom prst="rect">
             <a:avLst/>
@@ -20445,27 +20512,27 @@
               </a:lnSpc>
             </a:pPr>
             <a:r>
-              <a:rPr sz="1650" b="0" i="0">
+              <a:rPr sz="1580" b="0" i="0">
                 <a:solidFill>
                   <a:srgbClr val="1A1A1E"/>
                 </a:solidFill>
                 <a:latin typeface="Roboto"/>
               </a:rPr>
-              <a:t>Para isso valer, o convite público não pode guardar sessão em memória nem gravar upload em disco local.</a:t>
-            </a:r>
-          </a:p>
-        </p:txBody>
-      </p:sp>
-      <p:sp>
-        <p:nvSpPr>
-          <p:cNvPr id="10" name="TextBox 9"/>
+              <a:t>É por esta área que o container da API ganha réplicas, e para isso ela não pode guardar sessão em memória nem gravar upload em disco local.</a:t>
+            </a:r>
+          </a:p>
+        </p:txBody>
+      </p:sp>
+      <p:sp>
+        <p:nvSpPr>
+          <p:cNvPr id="12" name="TextBox 11"/>
           <p:cNvSpPr txBox="1"/>
           <p:nvPr/>
         </p:nvSpPr>
         <p:spPr>
           <a:xfrm>
-            <a:off x="685800" y="6324600"/>
-            <a:ext cx="6667500" cy="182880"/>
+            <a:off x="6362700" y="2560701"/>
+            <a:ext cx="5143500" cy="182880"/>
           </a:xfrm>
           <a:prstGeom prst="rect">
             <a:avLst/>
@@ -20484,6 +20551,255 @@
               </a:lnSpc>
             </a:pPr>
             <a:r>
+              <a:rPr sz="900" b="1" i="0" spc="120">
+                <a:solidFill>
+                  <a:srgbClr val="E94D1C"/>
+                </a:solidFill>
+                <a:latin typeface="Roboto"/>
+              </a:rPr>
+              <a:t>PAINEL DO ANFITRIÃO, COM LOGIN</a:t>
+            </a:r>
+          </a:p>
+        </p:txBody>
+      </p:sp>
+      <p:sp>
+        <p:nvSpPr>
+          <p:cNvPr id="13" name="Rectangle 12"/>
+          <p:cNvSpPr/>
+          <p:nvPr/>
+        </p:nvSpPr>
+        <p:spPr>
+          <a:xfrm>
+            <a:off x="6362700" y="2770251"/>
+            <a:ext cx="419100" cy="28575"/>
+          </a:xfrm>
+          <a:prstGeom prst="rect">
+            <a:avLst/>
+          </a:prstGeom>
+          <a:solidFill>
+            <a:srgbClr val="E94D1C"/>
+          </a:solidFill>
+          <a:ln>
+            <a:noFill/>
+          </a:ln>
+          <a:effectLst/>
+        </p:spPr>
+        <p:style>
+          <a:lnRef idx="1">
+            <a:schemeClr val="accent1"/>
+          </a:lnRef>
+          <a:fillRef idx="3">
+            <a:schemeClr val="accent1"/>
+          </a:fillRef>
+          <a:effectRef idx="2">
+            <a:schemeClr val="accent1"/>
+          </a:effectRef>
+          <a:fontRef idx="minor">
+            <a:schemeClr val="lt1"/>
+          </a:fontRef>
+        </p:style>
+        <p:txBody>
+          <a:bodyPr rtlCol="0" anchor="ctr" wrap="square" lIns="0" rIns="0" tIns="0" bIns="0"/>
+          <a:lstStyle/>
+          <a:p>
+            <a:pPr algn="ctr"/>
+          </a:p>
+        </p:txBody>
+      </p:sp>
+      <p:sp>
+        <p:nvSpPr>
+          <p:cNvPr id="14" name="Rectangle 13"/>
+          <p:cNvSpPr/>
+          <p:nvPr/>
+        </p:nvSpPr>
+        <p:spPr>
+          <a:xfrm>
+            <a:off x="6381750" y="3160014"/>
+            <a:ext cx="57150" cy="57150"/>
+          </a:xfrm>
+          <a:prstGeom prst="rect">
+            <a:avLst/>
+          </a:prstGeom>
+          <a:solidFill>
+            <a:srgbClr val="E94D1C"/>
+          </a:solidFill>
+          <a:ln>
+            <a:noFill/>
+          </a:ln>
+          <a:effectLst/>
+        </p:spPr>
+        <p:style>
+          <a:lnRef idx="1">
+            <a:schemeClr val="accent1"/>
+          </a:lnRef>
+          <a:fillRef idx="3">
+            <a:schemeClr val="accent1"/>
+          </a:fillRef>
+          <a:effectRef idx="2">
+            <a:schemeClr val="accent1"/>
+          </a:effectRef>
+          <a:fontRef idx="minor">
+            <a:schemeClr val="lt1"/>
+          </a:fontRef>
+        </p:style>
+        <p:txBody>
+          <a:bodyPr rtlCol="0" anchor="ctr" wrap="square" lIns="0" rIns="0" tIns="0" bIns="0"/>
+          <a:lstStyle/>
+          <a:p>
+            <a:pPr algn="ctr"/>
+          </a:p>
+        </p:txBody>
+      </p:sp>
+      <p:sp>
+        <p:nvSpPr>
+          <p:cNvPr id="15" name="TextBox 14"/>
+          <p:cNvSpPr txBox="1"/>
+          <p:nvPr/>
+        </p:nvSpPr>
+        <p:spPr>
+          <a:xfrm>
+            <a:off x="6648450" y="3056001"/>
+            <a:ext cx="4857750" cy="95250"/>
+          </a:xfrm>
+          <a:prstGeom prst="rect">
+            <a:avLst/>
+          </a:prstGeom>
+          <a:noFill/>
+        </p:spPr>
+        <p:txBody>
+          <a:bodyPr wrap="square" lIns="0" rIns="0" tIns="0" bIns="0" anchor="t">
+            <a:spAutoFit/>
+          </a:bodyPr>
+          <a:lstStyle/>
+          <a:p>
+            <a:pPr algn="l">
+              <a:lnSpc>
+                <a:spcPct val="130000"/>
+              </a:lnSpc>
+            </a:pPr>
+            <a:r>
+              <a:rPr sz="1580" b="0" i="0">
+                <a:solidFill>
+                  <a:srgbClr val="1A1A1E"/>
+                </a:solidFill>
+                <a:latin typeface="Roboto"/>
+              </a:rPr>
+              <a:t>Só a anfitriã acessa.</a:t>
+            </a:r>
+          </a:p>
+        </p:txBody>
+      </p:sp>
+      <p:sp>
+        <p:nvSpPr>
+          <p:cNvPr id="16" name="Rectangle 15"/>
+          <p:cNvSpPr/>
+          <p:nvPr/>
+        </p:nvSpPr>
+        <p:spPr>
+          <a:xfrm>
+            <a:off x="6381750" y="3690747"/>
+            <a:ext cx="57150" cy="57150"/>
+          </a:xfrm>
+          <a:prstGeom prst="rect">
+            <a:avLst/>
+          </a:prstGeom>
+          <a:solidFill>
+            <a:srgbClr val="E94D1C"/>
+          </a:solidFill>
+          <a:ln>
+            <a:noFill/>
+          </a:ln>
+          <a:effectLst/>
+        </p:spPr>
+        <p:style>
+          <a:lnRef idx="1">
+            <a:schemeClr val="accent1"/>
+          </a:lnRef>
+          <a:fillRef idx="3">
+            <a:schemeClr val="accent1"/>
+          </a:fillRef>
+          <a:effectRef idx="2">
+            <a:schemeClr val="accent1"/>
+          </a:effectRef>
+          <a:fontRef idx="minor">
+            <a:schemeClr val="lt1"/>
+          </a:fontRef>
+        </p:style>
+        <p:txBody>
+          <a:bodyPr rtlCol="0" anchor="ctr" wrap="square" lIns="0" rIns="0" tIns="0" bIns="0"/>
+          <a:lstStyle/>
+          <a:p>
+            <a:pPr algn="ctr"/>
+          </a:p>
+        </p:txBody>
+      </p:sp>
+      <p:sp>
+        <p:nvSpPr>
+          <p:cNvPr id="17" name="TextBox 16"/>
+          <p:cNvSpPr txBox="1"/>
+          <p:nvPr/>
+        </p:nvSpPr>
+        <p:spPr>
+          <a:xfrm>
+            <a:off x="6648450" y="3586734"/>
+            <a:ext cx="4857750" cy="95250"/>
+          </a:xfrm>
+          <a:prstGeom prst="rect">
+            <a:avLst/>
+          </a:prstGeom>
+          <a:noFill/>
+        </p:spPr>
+        <p:txBody>
+          <a:bodyPr wrap="square" lIns="0" rIns="0" tIns="0" bIns="0" anchor="t">
+            <a:spAutoFit/>
+          </a:bodyPr>
+          <a:lstStyle/>
+          <a:p>
+            <a:pPr algn="l">
+              <a:lnSpc>
+                <a:spcPct val="130000"/>
+              </a:lnSpc>
+            </a:pPr>
+            <a:r>
+              <a:rPr sz="1580" b="0" i="0">
+                <a:solidFill>
+                  <a:srgbClr val="1A1A1E"/>
+                </a:solidFill>
+                <a:latin typeface="Roboto"/>
+              </a:rPr>
+              <a:t>Uma pessoa por evento, carga baixa, sem necessidade de réplica.</a:t>
+            </a:r>
+          </a:p>
+        </p:txBody>
+      </p:sp>
+      <p:sp>
+        <p:nvSpPr>
+          <p:cNvPr id="18" name="TextBox 17"/>
+          <p:cNvSpPr txBox="1"/>
+          <p:nvPr/>
+        </p:nvSpPr>
+        <p:spPr>
+          <a:xfrm>
+            <a:off x="685800" y="6324600"/>
+            <a:ext cx="6667500" cy="182880"/>
+          </a:xfrm>
+          <a:prstGeom prst="rect">
+            <a:avLst/>
+          </a:prstGeom>
+          <a:noFill/>
+        </p:spPr>
+        <p:txBody>
+          <a:bodyPr wrap="square" lIns="0" rIns="0" tIns="0" bIns="0" anchor="t">
+            <a:spAutoFit/>
+          </a:bodyPr>
+          <a:lstStyle/>
+          <a:p>
+            <a:pPr algn="l">
+              <a:lnSpc>
+                <a:spcPct val="120000"/>
+              </a:lnSpc>
+            </a:pPr>
+            <a:r>
               <a:rPr sz="900" b="0" i="0">
                 <a:solidFill>
                   <a:srgbClr val="6B6B78"/>
@@ -20497,7 +20813,7 @@
       </p:sp>
       <p:sp>
         <p:nvSpPr>
-          <p:cNvPr id="11" name="TextBox 10"/>
+          <p:cNvPr id="19" name="TextBox 18"/>
           <p:cNvSpPr txBox="1"/>
           <p:nvPr/>
         </p:nvSpPr>

--- a/trabalhos/T1-Docker-Invite-People.pptx
+++ b/trabalhos/T1-Docker-Invite-People.pptx
@@ -22134,12 +22134,12 @@
         </p:nvSpPr>
         <p:spPr>
           <a:xfrm>
-            <a:off x="685800" y="1821180"/>
-            <a:ext cx="10820400" cy="3524250"/>
+            <a:off x="685800" y="1702118"/>
+            <a:ext cx="10820400" cy="3762375"/>
           </a:xfrm>
           <a:prstGeom prst="roundRect">
             <a:avLst>
-              <a:gd name="adj" fmla="val 2162"/>
+              <a:gd name="adj" fmla="val 2025"/>
             </a:avLst>
           </a:prstGeom>
           <a:solidFill>
@@ -22180,7 +22180,7 @@
         </p:nvSpPr>
         <p:spPr>
           <a:xfrm>
-            <a:off x="952500" y="2030730"/>
+            <a:off x="952500" y="1911668"/>
             <a:ext cx="323850" cy="28575"/>
           </a:xfrm>
           <a:prstGeom prst="roundRect">
@@ -22226,7 +22226,7 @@
         </p:nvSpPr>
         <p:spPr>
           <a:xfrm>
-            <a:off x="1371600" y="1973580"/>
+            <a:off x="1371600" y="1854518"/>
             <a:ext cx="1905000" cy="167640"/>
           </a:xfrm>
           <a:prstGeom prst="rect">
@@ -22265,7 +22265,7 @@
         </p:nvSpPr>
         <p:spPr>
           <a:xfrm>
-            <a:off x="952500" y="2316480"/>
+            <a:off x="952500" y="2197418"/>
             <a:ext cx="10287000" cy="228600"/>
           </a:xfrm>
           <a:prstGeom prst="rect">
@@ -22304,7 +22304,7 @@
         </p:nvSpPr>
         <p:spPr>
           <a:xfrm>
-            <a:off x="952500" y="2554605"/>
+            <a:off x="952500" y="2435542"/>
             <a:ext cx="10287000" cy="228600"/>
           </a:xfrm>
           <a:prstGeom prst="rect">
@@ -22343,7 +22343,7 @@
         </p:nvSpPr>
         <p:spPr>
           <a:xfrm>
-            <a:off x="952500" y="2792730"/>
+            <a:off x="952500" y="2673668"/>
             <a:ext cx="10287000" cy="228600"/>
           </a:xfrm>
           <a:prstGeom prst="rect">
@@ -22369,7 +22369,7 @@
                 </a:solidFill>
                 <a:latin typeface="Roboto Mono"/>
               </a:rPr>
-              <a:t>NAME   IMAGE          STATUS</a:t>
+              <a:t>NAME    IMAGE             STATUS</a:t>
             </a:r>
           </a:p>
         </p:txBody>
@@ -22382,7 +22382,7 @@
         </p:nvSpPr>
         <p:spPr>
           <a:xfrm>
-            <a:off x="952500" y="3030855"/>
+            <a:off x="952500" y="2911792"/>
             <a:ext cx="10287000" cy="228600"/>
           </a:xfrm>
           <a:prstGeom prst="rect">
@@ -22408,7 +22408,7 @@
                 </a:solidFill>
                 <a:latin typeface="Roboto Mono"/>
               </a:rPr>
-              <a:t>web    nginx:alpine   Up</a:t>
+              <a:t>front   nginx:alpine      Up</a:t>
             </a:r>
           </a:p>
         </p:txBody>
@@ -22421,7 +22421,7 @@
         </p:nvSpPr>
         <p:spPr>
           <a:xfrm>
-            <a:off x="952500" y="3268980"/>
+            <a:off x="952500" y="3149918"/>
             <a:ext cx="10287000" cy="228600"/>
           </a:xfrm>
           <a:prstGeom prst="rect">
@@ -22447,7 +22447,7 @@
                 </a:solidFill>
                 <a:latin typeface="Roboto Mono"/>
               </a:rPr>
-              <a:t>db     postgres:16    Up (healthy)</a:t>
+              <a:t>api     node:22-alpine    Up</a:t>
             </a:r>
           </a:p>
         </p:txBody>
@@ -22460,7 +22460,7 @@
         </p:nvSpPr>
         <p:spPr>
           <a:xfrm>
-            <a:off x="952500" y="3507105"/>
+            <a:off x="952500" y="3388042"/>
             <a:ext cx="10287000" cy="228600"/>
           </a:xfrm>
           <a:prstGeom prst="rect">
@@ -22486,7 +22486,7 @@
                 </a:solidFill>
                 <a:latin typeface="Roboto Mono"/>
               </a:rPr>
-              <a:t> </a:t>
+              <a:t>db      postgres:16       Up (healthy)</a:t>
             </a:r>
           </a:p>
         </p:txBody>
@@ -22499,7 +22499,7 @@
         </p:nvSpPr>
         <p:spPr>
           <a:xfrm>
-            <a:off x="952500" y="3745230"/>
+            <a:off x="952500" y="3626168"/>
             <a:ext cx="10287000" cy="228600"/>
           </a:xfrm>
           <a:prstGeom prst="rect">
@@ -22521,11 +22521,11 @@
             <a:r>
               <a:rPr sz="1120" b="0" i="0">
                 <a:solidFill>
-                  <a:srgbClr val="7FE3A1"/>
+                  <a:srgbClr val="E4E4EC"/>
                 </a:solidFill>
                 <a:latin typeface="Roboto Mono"/>
               </a:rPr>
-              <a:t>$ docker compose run --rm client psql -h db -c "create table t(); "</a:t>
+              <a:t> </a:t>
             </a:r>
           </a:p>
         </p:txBody>
@@ -22538,7 +22538,7 @@
         </p:nvSpPr>
         <p:spPr>
           <a:xfrm>
-            <a:off x="952500" y="3983355"/>
+            <a:off x="952500" y="3864292"/>
             <a:ext cx="10287000" cy="228600"/>
           </a:xfrm>
           <a:prstGeom prst="rect">
@@ -22564,7 +22564,7 @@
                 </a:solidFill>
                 <a:latin typeface="Roboto Mono"/>
               </a:rPr>
-              <a:t>$ docker compose down &amp;&amp; docker compose up -d</a:t>
+              <a:t>$ docker compose exec db psql -U app -c "create table t()"</a:t>
             </a:r>
           </a:p>
         </p:txBody>
@@ -22577,7 +22577,7 @@
         </p:nvSpPr>
         <p:spPr>
           <a:xfrm>
-            <a:off x="952500" y="4221480"/>
+            <a:off x="952500" y="4102418"/>
             <a:ext cx="10287000" cy="228600"/>
           </a:xfrm>
           <a:prstGeom prst="rect">
@@ -22599,11 +22599,11 @@
             <a:r>
               <a:rPr sz="1120" b="0" i="0">
                 <a:solidFill>
-                  <a:srgbClr val="8A8A9A"/>
+                  <a:srgbClr val="7FE3A1"/>
                 </a:solidFill>
                 <a:latin typeface="Roboto Mono"/>
               </a:rPr>
-              <a:t># a tabela continua lá, o volume sobreviveu</a:t>
+              <a:t>$ docker compose down &amp;&amp; docker compose up -d</a:t>
             </a:r>
           </a:p>
         </p:txBody>
@@ -22616,7 +22616,7 @@
         </p:nvSpPr>
         <p:spPr>
           <a:xfrm>
-            <a:off x="952500" y="4459605"/>
+            <a:off x="952500" y="4340542"/>
             <a:ext cx="10287000" cy="228600"/>
           </a:xfrm>
           <a:prstGeom prst="rect">
@@ -22638,11 +22638,11 @@
             <a:r>
               <a:rPr sz="1120" b="0" i="0">
                 <a:solidFill>
-                  <a:srgbClr val="E4E4EC"/>
+                  <a:srgbClr val="8A8A9A"/>
                 </a:solidFill>
                 <a:latin typeface="Roboto Mono"/>
               </a:rPr>
-              <a:t> </a:t>
+              <a:t># a tabela continua lá, o volume sobreviveu</a:t>
             </a:r>
           </a:p>
         </p:txBody>
@@ -22655,7 +22655,7 @@
         </p:nvSpPr>
         <p:spPr>
           <a:xfrm>
-            <a:off x="952500" y="4697730"/>
+            <a:off x="952500" y="4578668"/>
             <a:ext cx="10287000" cy="228600"/>
           </a:xfrm>
           <a:prstGeom prst="rect">
@@ -22677,11 +22677,11 @@
             <a:r>
               <a:rPr sz="1120" b="0" i="0">
                 <a:solidFill>
-                  <a:srgbClr val="7FE3A1"/>
+                  <a:srgbClr val="E4E4EC"/>
                 </a:solidFill>
                 <a:latin typeface="Roboto Mono"/>
               </a:rPr>
-              <a:t>$ docker compose down -v</a:t>
+              <a:t> </a:t>
             </a:r>
           </a:p>
         </p:txBody>
@@ -22694,7 +22694,7 @@
         </p:nvSpPr>
         <p:spPr>
           <a:xfrm>
-            <a:off x="952500" y="4935855"/>
+            <a:off x="952500" y="4816792"/>
             <a:ext cx="10287000" cy="228600"/>
           </a:xfrm>
           <a:prstGeom prst="rect">
@@ -22716,6 +22716,45 @@
             <a:r>
               <a:rPr sz="1120" b="0" i="0">
                 <a:solidFill>
+                  <a:srgbClr val="7FE3A1"/>
+                </a:solidFill>
+                <a:latin typeface="Roboto Mono"/>
+              </a:rPr>
+              <a:t>$ docker compose down -v</a:t>
+            </a:r>
+          </a:p>
+        </p:txBody>
+      </p:sp>
+      <p:sp>
+        <p:nvSpPr>
+          <p:cNvPr id="19" name="TextBox 18"/>
+          <p:cNvSpPr txBox="1"/>
+          <p:nvPr/>
+        </p:nvSpPr>
+        <p:spPr>
+          <a:xfrm>
+            <a:off x="952500" y="5054918"/>
+            <a:ext cx="10287000" cy="228600"/>
+          </a:xfrm>
+          <a:prstGeom prst="rect">
+            <a:avLst/>
+          </a:prstGeom>
+          <a:noFill/>
+        </p:spPr>
+        <p:txBody>
+          <a:bodyPr wrap="square" lIns="0" rIns="0" tIns="0" bIns="0" anchor="t">
+            <a:spAutoFit/>
+          </a:bodyPr>
+          <a:lstStyle/>
+          <a:p>
+            <a:pPr algn="l">
+              <a:lnSpc>
+                <a:spcPct val="120000"/>
+              </a:lnSpc>
+            </a:pPr>
+            <a:r>
+              <a:rPr sz="1120" b="0" i="0">
+                <a:solidFill>
                   <a:srgbClr val="8A8A9A"/>
                 </a:solidFill>
                 <a:latin typeface="Roboto Mono"/>
@@ -22727,13 +22766,13 @@
       </p:sp>
       <p:sp>
         <p:nvSpPr>
-          <p:cNvPr id="19" name="Rectangle 18"/>
+          <p:cNvPr id="20" name="Rectangle 19"/>
           <p:cNvSpPr/>
           <p:nvPr/>
         </p:nvSpPr>
         <p:spPr>
           <a:xfrm>
-            <a:off x="685800" y="5574030"/>
+            <a:off x="685800" y="5693092"/>
             <a:ext cx="28575" cy="377190"/>
           </a:xfrm>
           <a:prstGeom prst="rect">
@@ -22771,13 +22810,13 @@
       </p:sp>
       <p:sp>
         <p:nvSpPr>
-          <p:cNvPr id="20" name="TextBox 19"/>
+          <p:cNvPr id="21" name="TextBox 20"/>
           <p:cNvSpPr txBox="1"/>
           <p:nvPr/>
         </p:nvSpPr>
         <p:spPr>
           <a:xfrm>
-            <a:off x="876300" y="5554980"/>
+            <a:off x="876300" y="5674042"/>
             <a:ext cx="10629900" cy="666750"/>
           </a:xfrm>
           <a:prstGeom prst="rect">
@@ -22810,7 +22849,7 @@
       </p:sp>
       <p:sp>
         <p:nvSpPr>
-          <p:cNvPr id="21" name="TextBox 20"/>
+          <p:cNvPr id="22" name="TextBox 21"/>
           <p:cNvSpPr txBox="1"/>
           <p:nvPr/>
         </p:nvSpPr>
@@ -22849,7 +22888,7 @@
       </p:sp>
       <p:sp>
         <p:nvSpPr>
-          <p:cNvPr id="22" name="TextBox 21"/>
+          <p:cNvPr id="23" name="TextBox 22"/>
           <p:cNvSpPr txBox="1"/>
           <p:nvPr/>
         </p:nvSpPr>

--- a/trabalhos/T1-Docker-Invite-People.pptx
+++ b/trabalhos/T1-Docker-Invite-People.pptx
@@ -18466,7 +18466,7 @@
                 </a:solidFill>
                 <a:latin typeface="Roboto Mono"/>
               </a:rPr>
-              <a:t>  front:</a:t>
+              <a:t>  front-end:</a:t>
             </a:r>
           </a:p>
         </p:txBody>
@@ -22369,7 +22369,7 @@
                 </a:solidFill>
                 <a:latin typeface="Roboto Mono"/>
               </a:rPr>
-              <a:t>NAME    IMAGE             STATUS</a:t>
+              <a:t>NAME        IMAGE             STATUS</a:t>
             </a:r>
           </a:p>
         </p:txBody>
@@ -22408,7 +22408,7 @@
                 </a:solidFill>
                 <a:latin typeface="Roboto Mono"/>
               </a:rPr>
-              <a:t>front   nginx:alpine      Up</a:t>
+              <a:t>front-end   nginx:alpine      Up</a:t>
             </a:r>
           </a:p>
         </p:txBody>
@@ -22447,7 +22447,7 @@
                 </a:solidFill>
                 <a:latin typeface="Roboto Mono"/>
               </a:rPr>
-              <a:t>api     node:22-alpine    Up</a:t>
+              <a:t>api         node:22-alpine    Up</a:t>
             </a:r>
           </a:p>
         </p:txBody>
@@ -22486,7 +22486,7 @@
                 </a:solidFill>
                 <a:latin typeface="Roboto Mono"/>
               </a:rPr>
-              <a:t>db      postgres:16       Up (healthy)</a:t>
+              <a:t>db          postgres:16       Up (healthy)</a:t>
             </a:r>
           </a:p>
         </p:txBody>

--- a/trabalhos/T1-Docker-Invite-People.pptx
+++ b/trabalhos/T1-Docker-Invite-People.pptx
@@ -35,7 +35,6 @@
     <p:sldId id="280" r:id="rId35"/>
     <p:sldId id="281" r:id="rId36"/>
     <p:sldId id="282" r:id="rId37"/>
-    <p:sldId id="283" r:id="rId38"/>
   </p:sldIdLst>
   <p:sldSz cx="12192000" cy="6858000"/>
   <p:notesSz cx="6858000" cy="9144000"/>
@@ -23009,21 +23008,1984 @@
                 </a:solidFill>
                 <a:latin typeface="Roboto"/>
               </a:rPr>
-              <a:t>Limitações e custos</a:t>
-            </a:r>
-          </a:p>
-        </p:txBody>
-      </p:sp>
-      <p:sp>
-        <p:nvSpPr>
-          <p:cNvPr id="4" name="Rectangle 3"/>
+              <a:t>Container vs máquina virtual</a:t>
+            </a:r>
+          </a:p>
+        </p:txBody>
+      </p:sp>
+      <p:sp>
+        <p:nvSpPr>
+          <p:cNvPr id="4" name="TextBox 3"/>
+          <p:cNvSpPr txBox="1"/>
+          <p:nvPr/>
+        </p:nvSpPr>
+        <p:spPr>
+          <a:xfrm>
+            <a:off x="857250" y="2114550"/>
+            <a:ext cx="4762500" cy="182880"/>
+          </a:xfrm>
+          <a:prstGeom prst="rect">
+            <a:avLst/>
+          </a:prstGeom>
+          <a:noFill/>
+        </p:spPr>
+        <p:txBody>
+          <a:bodyPr wrap="square" lIns="0" rIns="0" tIns="0" bIns="0" anchor="t">
+            <a:spAutoFit/>
+          </a:bodyPr>
+          <a:lstStyle/>
+          <a:p>
+            <a:pPr algn="l">
+              <a:lnSpc>
+                <a:spcPct val="120000"/>
+              </a:lnSpc>
+            </a:pPr>
+            <a:r>
+              <a:rPr sz="900" b="1" i="0" spc="140">
+                <a:solidFill>
+                  <a:srgbClr val="21049A"/>
+                </a:solidFill>
+                <a:latin typeface="Roboto"/>
+              </a:rPr>
+              <a:t>MÁQUINA VIRTUAL</a:t>
+            </a:r>
+          </a:p>
+        </p:txBody>
+      </p:sp>
+      <p:sp>
+        <p:nvSpPr>
+          <p:cNvPr id="5" name="Rectangle 4"/>
           <p:cNvSpPr/>
           <p:nvPr/>
         </p:nvSpPr>
         <p:spPr>
           <a:xfrm>
-            <a:off x="704850" y="2579370"/>
-            <a:ext cx="57150" cy="57150"/>
+            <a:off x="857250" y="4076700"/>
+            <a:ext cx="4762500" cy="323850"/>
+          </a:xfrm>
+          <a:prstGeom prst="rect">
+            <a:avLst/>
+          </a:prstGeom>
+          <a:solidFill>
+            <a:srgbClr val="D9D9D9"/>
+          </a:solidFill>
+          <a:ln>
+            <a:noFill/>
+          </a:ln>
+          <a:effectLst/>
+        </p:spPr>
+        <p:style>
+          <a:lnRef idx="1">
+            <a:schemeClr val="accent1"/>
+          </a:lnRef>
+          <a:fillRef idx="3">
+            <a:schemeClr val="accent1"/>
+          </a:fillRef>
+          <a:effectRef idx="2">
+            <a:schemeClr val="accent1"/>
+          </a:effectRef>
+          <a:fontRef idx="minor">
+            <a:schemeClr val="lt1"/>
+          </a:fontRef>
+        </p:style>
+        <p:txBody>
+          <a:bodyPr rtlCol="0" anchor="ctr" wrap="square" lIns="0" rIns="0" tIns="0" bIns="0"/>
+          <a:lstStyle/>
+          <a:p>
+            <a:pPr algn="ctr"/>
+          </a:p>
+        </p:txBody>
+      </p:sp>
+      <p:sp>
+        <p:nvSpPr>
+          <p:cNvPr id="6" name="TextBox 5"/>
+          <p:cNvSpPr txBox="1"/>
+          <p:nvPr/>
+        </p:nvSpPr>
+        <p:spPr>
+          <a:xfrm>
+            <a:off x="857250" y="4162425"/>
+            <a:ext cx="4762500" cy="198120"/>
+          </a:xfrm>
+          <a:prstGeom prst="rect">
+            <a:avLst/>
+          </a:prstGeom>
+          <a:noFill/>
+        </p:spPr>
+        <p:txBody>
+          <a:bodyPr wrap="square" lIns="0" rIns="0" tIns="0" bIns="0" anchor="t">
+            <a:spAutoFit/>
+          </a:bodyPr>
+          <a:lstStyle/>
+          <a:p>
+            <a:pPr algn="ctr">
+              <a:lnSpc>
+                <a:spcPct val="120000"/>
+              </a:lnSpc>
+            </a:pPr>
+            <a:r>
+              <a:rPr sz="980" b="0" i="0">
+                <a:solidFill>
+                  <a:srgbClr val="1A1A1E"/>
+                </a:solidFill>
+                <a:latin typeface="Roboto"/>
+              </a:rPr>
+              <a:t>hardware</a:t>
+            </a:r>
+          </a:p>
+        </p:txBody>
+      </p:sp>
+      <p:sp>
+        <p:nvSpPr>
+          <p:cNvPr id="7" name="Rectangle 6"/>
+          <p:cNvSpPr/>
+          <p:nvPr/>
+        </p:nvSpPr>
+        <p:spPr>
+          <a:xfrm>
+            <a:off x="857250" y="3714750"/>
+            <a:ext cx="4762500" cy="342900"/>
+          </a:xfrm>
+          <a:prstGeom prst="rect">
+            <a:avLst/>
+          </a:prstGeom>
+          <a:solidFill>
+            <a:srgbClr val="F2F2F5"/>
+          </a:solidFill>
+          <a:ln w="12700">
+            <a:solidFill>
+              <a:srgbClr val="D9D9D9"/>
+            </a:solidFill>
+          </a:ln>
+          <a:effectLst/>
+        </p:spPr>
+        <p:style>
+          <a:lnRef idx="1">
+            <a:schemeClr val="accent1"/>
+          </a:lnRef>
+          <a:fillRef idx="3">
+            <a:schemeClr val="accent1"/>
+          </a:fillRef>
+          <a:effectRef idx="2">
+            <a:schemeClr val="accent1"/>
+          </a:effectRef>
+          <a:fontRef idx="minor">
+            <a:schemeClr val="lt1"/>
+          </a:fontRef>
+        </p:style>
+        <p:txBody>
+          <a:bodyPr rtlCol="0" anchor="ctr" wrap="square" lIns="0" rIns="0" tIns="0" bIns="0"/>
+          <a:lstStyle/>
+          <a:p>
+            <a:pPr algn="ctr"/>
+          </a:p>
+        </p:txBody>
+      </p:sp>
+      <p:sp>
+        <p:nvSpPr>
+          <p:cNvPr id="8" name="TextBox 7"/>
+          <p:cNvSpPr txBox="1"/>
+          <p:nvPr/>
+        </p:nvSpPr>
+        <p:spPr>
+          <a:xfrm>
+            <a:off x="857250" y="3810000"/>
+            <a:ext cx="4762500" cy="198120"/>
+          </a:xfrm>
+          <a:prstGeom prst="rect">
+            <a:avLst/>
+          </a:prstGeom>
+          <a:noFill/>
+        </p:spPr>
+        <p:txBody>
+          <a:bodyPr wrap="square" lIns="0" rIns="0" tIns="0" bIns="0" anchor="t">
+            <a:spAutoFit/>
+          </a:bodyPr>
+          <a:lstStyle/>
+          <a:p>
+            <a:pPr algn="ctr">
+              <a:lnSpc>
+                <a:spcPct val="120000"/>
+              </a:lnSpc>
+            </a:pPr>
+            <a:r>
+              <a:rPr sz="980" b="0" i="0">
+                <a:solidFill>
+                  <a:srgbClr val="1A1A1E"/>
+                </a:solidFill>
+                <a:latin typeface="Roboto"/>
+              </a:rPr>
+              <a:t>sistema operacional do host</a:t>
+            </a:r>
+          </a:p>
+        </p:txBody>
+      </p:sp>
+      <p:sp>
+        <p:nvSpPr>
+          <p:cNvPr id="9" name="Rectangle 8"/>
+          <p:cNvSpPr/>
+          <p:nvPr/>
+        </p:nvSpPr>
+        <p:spPr>
+          <a:xfrm>
+            <a:off x="857250" y="3352800"/>
+            <a:ext cx="4762500" cy="342900"/>
+          </a:xfrm>
+          <a:prstGeom prst="rect">
+            <a:avLst/>
+          </a:prstGeom>
+          <a:solidFill>
+            <a:srgbClr val="21049A"/>
+          </a:solidFill>
+          <a:ln>
+            <a:noFill/>
+          </a:ln>
+          <a:effectLst/>
+        </p:spPr>
+        <p:style>
+          <a:lnRef idx="1">
+            <a:schemeClr val="accent1"/>
+          </a:lnRef>
+          <a:fillRef idx="3">
+            <a:schemeClr val="accent1"/>
+          </a:fillRef>
+          <a:effectRef idx="2">
+            <a:schemeClr val="accent1"/>
+          </a:effectRef>
+          <a:fontRef idx="minor">
+            <a:schemeClr val="lt1"/>
+          </a:fontRef>
+        </p:style>
+        <p:txBody>
+          <a:bodyPr rtlCol="0" anchor="ctr" wrap="square" lIns="0" rIns="0" tIns="0" bIns="0"/>
+          <a:lstStyle/>
+          <a:p>
+            <a:pPr algn="ctr"/>
+          </a:p>
+        </p:txBody>
+      </p:sp>
+      <p:sp>
+        <p:nvSpPr>
+          <p:cNvPr id="10" name="TextBox 9"/>
+          <p:cNvSpPr txBox="1"/>
+          <p:nvPr/>
+        </p:nvSpPr>
+        <p:spPr>
+          <a:xfrm>
+            <a:off x="857250" y="3448050"/>
+            <a:ext cx="4762500" cy="198120"/>
+          </a:xfrm>
+          <a:prstGeom prst="rect">
+            <a:avLst/>
+          </a:prstGeom>
+          <a:noFill/>
+        </p:spPr>
+        <p:txBody>
+          <a:bodyPr wrap="square" lIns="0" rIns="0" tIns="0" bIns="0" anchor="t">
+            <a:spAutoFit/>
+          </a:bodyPr>
+          <a:lstStyle/>
+          <a:p>
+            <a:pPr algn="ctr">
+              <a:lnSpc>
+                <a:spcPct val="120000"/>
+              </a:lnSpc>
+            </a:pPr>
+            <a:r>
+              <a:rPr sz="980" b="1" i="0">
+                <a:solidFill>
+                  <a:srgbClr val="FFFFFF"/>
+                </a:solidFill>
+                <a:latin typeface="Roboto"/>
+              </a:rPr>
+              <a:t>hipervisor</a:t>
+            </a:r>
+          </a:p>
+        </p:txBody>
+      </p:sp>
+      <p:sp>
+        <p:nvSpPr>
+          <p:cNvPr id="11" name="Rounded Rectangle 10"/>
+          <p:cNvSpPr/>
+          <p:nvPr/>
+        </p:nvSpPr>
+        <p:spPr>
+          <a:xfrm>
+            <a:off x="952500" y="2990850"/>
+            <a:ext cx="1428750" cy="342900"/>
+          </a:xfrm>
+          <a:prstGeom prst="roundRect">
+            <a:avLst>
+              <a:gd name="adj" fmla="val 5555"/>
+            </a:avLst>
+          </a:prstGeom>
+          <a:solidFill>
+            <a:srgbClr val="FDEAE3"/>
+          </a:solidFill>
+          <a:ln w="12700">
+            <a:solidFill>
+              <a:srgbClr val="E94D1C"/>
+            </a:solidFill>
+          </a:ln>
+          <a:effectLst/>
+        </p:spPr>
+        <p:style>
+          <a:lnRef idx="1">
+            <a:schemeClr val="accent1"/>
+          </a:lnRef>
+          <a:fillRef idx="3">
+            <a:schemeClr val="accent1"/>
+          </a:fillRef>
+          <a:effectRef idx="2">
+            <a:schemeClr val="accent1"/>
+          </a:effectRef>
+          <a:fontRef idx="minor">
+            <a:schemeClr val="lt1"/>
+          </a:fontRef>
+        </p:style>
+        <p:txBody>
+          <a:bodyPr rtlCol="0" anchor="ctr" wrap="square" lIns="0" rIns="0" tIns="0" bIns="0"/>
+          <a:lstStyle/>
+          <a:p>
+            <a:pPr algn="ctr"/>
+          </a:p>
+        </p:txBody>
+      </p:sp>
+      <p:sp>
+        <p:nvSpPr>
+          <p:cNvPr id="12" name="TextBox 11"/>
+          <p:cNvSpPr txBox="1"/>
+          <p:nvPr/>
+        </p:nvSpPr>
+        <p:spPr>
+          <a:xfrm>
+            <a:off x="952500" y="3086100"/>
+            <a:ext cx="1428750" cy="182880"/>
+          </a:xfrm>
+          <a:prstGeom prst="rect">
+            <a:avLst/>
+          </a:prstGeom>
+          <a:noFill/>
+        </p:spPr>
+        <p:txBody>
+          <a:bodyPr wrap="square" lIns="0" rIns="0" tIns="0" bIns="0" anchor="t">
+            <a:spAutoFit/>
+          </a:bodyPr>
+          <a:lstStyle/>
+          <a:p>
+            <a:pPr algn="ctr">
+              <a:lnSpc>
+                <a:spcPct val="120000"/>
+              </a:lnSpc>
+            </a:pPr>
+            <a:r>
+              <a:rPr sz="900" b="1" i="0">
+                <a:solidFill>
+                  <a:srgbClr val="E94D1C"/>
+                </a:solidFill>
+                <a:latin typeface="Roboto"/>
+              </a:rPr>
+              <a:t>SO convidado</a:t>
+            </a:r>
+          </a:p>
+        </p:txBody>
+      </p:sp>
+      <p:sp>
+        <p:nvSpPr>
+          <p:cNvPr id="13" name="Rounded Rectangle 12"/>
+          <p:cNvSpPr/>
+          <p:nvPr/>
+        </p:nvSpPr>
+        <p:spPr>
+          <a:xfrm>
+            <a:off x="952500" y="2705100"/>
+            <a:ext cx="1428750" cy="266700"/>
+          </a:xfrm>
+          <a:prstGeom prst="roundRect">
+            <a:avLst>
+              <a:gd name="adj" fmla="val 7142"/>
+            </a:avLst>
+          </a:prstGeom>
+          <a:solidFill>
+            <a:srgbClr val="FFFFFF"/>
+          </a:solidFill>
+          <a:ln w="12700">
+            <a:solidFill>
+              <a:srgbClr val="D9D9D9"/>
+            </a:solidFill>
+          </a:ln>
+          <a:effectLst/>
+        </p:spPr>
+        <p:style>
+          <a:lnRef idx="1">
+            <a:schemeClr val="accent1"/>
+          </a:lnRef>
+          <a:fillRef idx="3">
+            <a:schemeClr val="accent1"/>
+          </a:fillRef>
+          <a:effectRef idx="2">
+            <a:schemeClr val="accent1"/>
+          </a:effectRef>
+          <a:fontRef idx="minor">
+            <a:schemeClr val="lt1"/>
+          </a:fontRef>
+        </p:style>
+        <p:txBody>
+          <a:bodyPr rtlCol="0" anchor="ctr" wrap="square" lIns="0" rIns="0" tIns="0" bIns="0"/>
+          <a:lstStyle/>
+          <a:p>
+            <a:pPr algn="ctr"/>
+          </a:p>
+        </p:txBody>
+      </p:sp>
+      <p:sp>
+        <p:nvSpPr>
+          <p:cNvPr id="14" name="TextBox 13"/>
+          <p:cNvSpPr txBox="1"/>
+          <p:nvPr/>
+        </p:nvSpPr>
+        <p:spPr>
+          <a:xfrm>
+            <a:off x="952500" y="2762250"/>
+            <a:ext cx="1428750" cy="182880"/>
+          </a:xfrm>
+          <a:prstGeom prst="rect">
+            <a:avLst/>
+          </a:prstGeom>
+          <a:noFill/>
+        </p:spPr>
+        <p:txBody>
+          <a:bodyPr wrap="square" lIns="0" rIns="0" tIns="0" bIns="0" anchor="t">
+            <a:spAutoFit/>
+          </a:bodyPr>
+          <a:lstStyle/>
+          <a:p>
+            <a:pPr algn="ctr">
+              <a:lnSpc>
+                <a:spcPct val="120000"/>
+              </a:lnSpc>
+            </a:pPr>
+            <a:r>
+              <a:rPr sz="900" b="0" i="0">
+                <a:solidFill>
+                  <a:srgbClr val="6B6B78"/>
+                </a:solidFill>
+                <a:latin typeface="Roboto"/>
+              </a:rPr>
+              <a:t>bibliotecas</a:t>
+            </a:r>
+          </a:p>
+        </p:txBody>
+      </p:sp>
+      <p:sp>
+        <p:nvSpPr>
+          <p:cNvPr id="15" name="Rounded Rectangle 14"/>
+          <p:cNvSpPr/>
+          <p:nvPr/>
+        </p:nvSpPr>
+        <p:spPr>
+          <a:xfrm>
+            <a:off x="952500" y="2419350"/>
+            <a:ext cx="1428750" cy="266700"/>
+          </a:xfrm>
+          <a:prstGeom prst="roundRect">
+            <a:avLst>
+              <a:gd name="adj" fmla="val 7142"/>
+            </a:avLst>
+          </a:prstGeom>
+          <a:solidFill>
+            <a:srgbClr val="FFFFFF"/>
+          </a:solidFill>
+          <a:ln w="12700">
+            <a:solidFill>
+              <a:srgbClr val="21049A"/>
+            </a:solidFill>
+          </a:ln>
+          <a:effectLst/>
+        </p:spPr>
+        <p:style>
+          <a:lnRef idx="1">
+            <a:schemeClr val="accent1"/>
+          </a:lnRef>
+          <a:fillRef idx="3">
+            <a:schemeClr val="accent1"/>
+          </a:fillRef>
+          <a:effectRef idx="2">
+            <a:schemeClr val="accent1"/>
+          </a:effectRef>
+          <a:fontRef idx="minor">
+            <a:schemeClr val="lt1"/>
+          </a:fontRef>
+        </p:style>
+        <p:txBody>
+          <a:bodyPr rtlCol="0" anchor="ctr" wrap="square" lIns="0" rIns="0" tIns="0" bIns="0"/>
+          <a:lstStyle/>
+          <a:p>
+            <a:pPr algn="ctr"/>
+          </a:p>
+        </p:txBody>
+      </p:sp>
+      <p:sp>
+        <p:nvSpPr>
+          <p:cNvPr id="16" name="TextBox 15"/>
+          <p:cNvSpPr txBox="1"/>
+          <p:nvPr/>
+        </p:nvSpPr>
+        <p:spPr>
+          <a:xfrm>
+            <a:off x="952500" y="2476500"/>
+            <a:ext cx="1428750" cy="182880"/>
+          </a:xfrm>
+          <a:prstGeom prst="rect">
+            <a:avLst/>
+          </a:prstGeom>
+          <a:noFill/>
+        </p:spPr>
+        <p:txBody>
+          <a:bodyPr wrap="square" lIns="0" rIns="0" tIns="0" bIns="0" anchor="t">
+            <a:spAutoFit/>
+          </a:bodyPr>
+          <a:lstStyle/>
+          <a:p>
+            <a:pPr algn="ctr">
+              <a:lnSpc>
+                <a:spcPct val="120000"/>
+              </a:lnSpc>
+            </a:pPr>
+            <a:r>
+              <a:rPr sz="900" b="1" i="0">
+                <a:solidFill>
+                  <a:srgbClr val="21049A"/>
+                </a:solidFill>
+                <a:latin typeface="Roboto"/>
+              </a:rPr>
+              <a:t>app A</a:t>
+            </a:r>
+          </a:p>
+        </p:txBody>
+      </p:sp>
+      <p:sp>
+        <p:nvSpPr>
+          <p:cNvPr id="17" name="Rounded Rectangle 16"/>
+          <p:cNvSpPr/>
+          <p:nvPr/>
+        </p:nvSpPr>
+        <p:spPr>
+          <a:xfrm>
+            <a:off x="2524125" y="2990850"/>
+            <a:ext cx="1428750" cy="342900"/>
+          </a:xfrm>
+          <a:prstGeom prst="roundRect">
+            <a:avLst>
+              <a:gd name="adj" fmla="val 5555"/>
+            </a:avLst>
+          </a:prstGeom>
+          <a:solidFill>
+            <a:srgbClr val="FDEAE3"/>
+          </a:solidFill>
+          <a:ln w="12700">
+            <a:solidFill>
+              <a:srgbClr val="E94D1C"/>
+            </a:solidFill>
+          </a:ln>
+          <a:effectLst/>
+        </p:spPr>
+        <p:style>
+          <a:lnRef idx="1">
+            <a:schemeClr val="accent1"/>
+          </a:lnRef>
+          <a:fillRef idx="3">
+            <a:schemeClr val="accent1"/>
+          </a:fillRef>
+          <a:effectRef idx="2">
+            <a:schemeClr val="accent1"/>
+          </a:effectRef>
+          <a:fontRef idx="minor">
+            <a:schemeClr val="lt1"/>
+          </a:fontRef>
+        </p:style>
+        <p:txBody>
+          <a:bodyPr rtlCol="0" anchor="ctr" wrap="square" lIns="0" rIns="0" tIns="0" bIns="0"/>
+          <a:lstStyle/>
+          <a:p>
+            <a:pPr algn="ctr"/>
+          </a:p>
+        </p:txBody>
+      </p:sp>
+      <p:sp>
+        <p:nvSpPr>
+          <p:cNvPr id="18" name="TextBox 17"/>
+          <p:cNvSpPr txBox="1"/>
+          <p:nvPr/>
+        </p:nvSpPr>
+        <p:spPr>
+          <a:xfrm>
+            <a:off x="2524125" y="3086100"/>
+            <a:ext cx="1428750" cy="182880"/>
+          </a:xfrm>
+          <a:prstGeom prst="rect">
+            <a:avLst/>
+          </a:prstGeom>
+          <a:noFill/>
+        </p:spPr>
+        <p:txBody>
+          <a:bodyPr wrap="square" lIns="0" rIns="0" tIns="0" bIns="0" anchor="t">
+            <a:spAutoFit/>
+          </a:bodyPr>
+          <a:lstStyle/>
+          <a:p>
+            <a:pPr algn="ctr">
+              <a:lnSpc>
+                <a:spcPct val="120000"/>
+              </a:lnSpc>
+            </a:pPr>
+            <a:r>
+              <a:rPr sz="900" b="1" i="0">
+                <a:solidFill>
+                  <a:srgbClr val="E94D1C"/>
+                </a:solidFill>
+                <a:latin typeface="Roboto"/>
+              </a:rPr>
+              <a:t>SO convidado</a:t>
+            </a:r>
+          </a:p>
+        </p:txBody>
+      </p:sp>
+      <p:sp>
+        <p:nvSpPr>
+          <p:cNvPr id="19" name="Rounded Rectangle 18"/>
+          <p:cNvSpPr/>
+          <p:nvPr/>
+        </p:nvSpPr>
+        <p:spPr>
+          <a:xfrm>
+            <a:off x="2524125" y="2705100"/>
+            <a:ext cx="1428750" cy="266700"/>
+          </a:xfrm>
+          <a:prstGeom prst="roundRect">
+            <a:avLst>
+              <a:gd name="adj" fmla="val 7142"/>
+            </a:avLst>
+          </a:prstGeom>
+          <a:solidFill>
+            <a:srgbClr val="FFFFFF"/>
+          </a:solidFill>
+          <a:ln w="12700">
+            <a:solidFill>
+              <a:srgbClr val="D9D9D9"/>
+            </a:solidFill>
+          </a:ln>
+          <a:effectLst/>
+        </p:spPr>
+        <p:style>
+          <a:lnRef idx="1">
+            <a:schemeClr val="accent1"/>
+          </a:lnRef>
+          <a:fillRef idx="3">
+            <a:schemeClr val="accent1"/>
+          </a:fillRef>
+          <a:effectRef idx="2">
+            <a:schemeClr val="accent1"/>
+          </a:effectRef>
+          <a:fontRef idx="minor">
+            <a:schemeClr val="lt1"/>
+          </a:fontRef>
+        </p:style>
+        <p:txBody>
+          <a:bodyPr rtlCol="0" anchor="ctr" wrap="square" lIns="0" rIns="0" tIns="0" bIns="0"/>
+          <a:lstStyle/>
+          <a:p>
+            <a:pPr algn="ctr"/>
+          </a:p>
+        </p:txBody>
+      </p:sp>
+      <p:sp>
+        <p:nvSpPr>
+          <p:cNvPr id="20" name="TextBox 19"/>
+          <p:cNvSpPr txBox="1"/>
+          <p:nvPr/>
+        </p:nvSpPr>
+        <p:spPr>
+          <a:xfrm>
+            <a:off x="2524125" y="2762250"/>
+            <a:ext cx="1428750" cy="182880"/>
+          </a:xfrm>
+          <a:prstGeom prst="rect">
+            <a:avLst/>
+          </a:prstGeom>
+          <a:noFill/>
+        </p:spPr>
+        <p:txBody>
+          <a:bodyPr wrap="square" lIns="0" rIns="0" tIns="0" bIns="0" anchor="t">
+            <a:spAutoFit/>
+          </a:bodyPr>
+          <a:lstStyle/>
+          <a:p>
+            <a:pPr algn="ctr">
+              <a:lnSpc>
+                <a:spcPct val="120000"/>
+              </a:lnSpc>
+            </a:pPr>
+            <a:r>
+              <a:rPr sz="900" b="0" i="0">
+                <a:solidFill>
+                  <a:srgbClr val="6B6B78"/>
+                </a:solidFill>
+                <a:latin typeface="Roboto"/>
+              </a:rPr>
+              <a:t>bibliotecas</a:t>
+            </a:r>
+          </a:p>
+        </p:txBody>
+      </p:sp>
+      <p:sp>
+        <p:nvSpPr>
+          <p:cNvPr id="21" name="Rounded Rectangle 20"/>
+          <p:cNvSpPr/>
+          <p:nvPr/>
+        </p:nvSpPr>
+        <p:spPr>
+          <a:xfrm>
+            <a:off x="2524125" y="2419350"/>
+            <a:ext cx="1428750" cy="266700"/>
+          </a:xfrm>
+          <a:prstGeom prst="roundRect">
+            <a:avLst>
+              <a:gd name="adj" fmla="val 7142"/>
+            </a:avLst>
+          </a:prstGeom>
+          <a:solidFill>
+            <a:srgbClr val="FFFFFF"/>
+          </a:solidFill>
+          <a:ln w="12700">
+            <a:solidFill>
+              <a:srgbClr val="21049A"/>
+            </a:solidFill>
+          </a:ln>
+          <a:effectLst/>
+        </p:spPr>
+        <p:style>
+          <a:lnRef idx="1">
+            <a:schemeClr val="accent1"/>
+          </a:lnRef>
+          <a:fillRef idx="3">
+            <a:schemeClr val="accent1"/>
+          </a:fillRef>
+          <a:effectRef idx="2">
+            <a:schemeClr val="accent1"/>
+          </a:effectRef>
+          <a:fontRef idx="minor">
+            <a:schemeClr val="lt1"/>
+          </a:fontRef>
+        </p:style>
+        <p:txBody>
+          <a:bodyPr rtlCol="0" anchor="ctr" wrap="square" lIns="0" rIns="0" tIns="0" bIns="0"/>
+          <a:lstStyle/>
+          <a:p>
+            <a:pPr algn="ctr"/>
+          </a:p>
+        </p:txBody>
+      </p:sp>
+      <p:sp>
+        <p:nvSpPr>
+          <p:cNvPr id="22" name="TextBox 21"/>
+          <p:cNvSpPr txBox="1"/>
+          <p:nvPr/>
+        </p:nvSpPr>
+        <p:spPr>
+          <a:xfrm>
+            <a:off x="2524125" y="2476500"/>
+            <a:ext cx="1428750" cy="182880"/>
+          </a:xfrm>
+          <a:prstGeom prst="rect">
+            <a:avLst/>
+          </a:prstGeom>
+          <a:noFill/>
+        </p:spPr>
+        <p:txBody>
+          <a:bodyPr wrap="square" lIns="0" rIns="0" tIns="0" bIns="0" anchor="t">
+            <a:spAutoFit/>
+          </a:bodyPr>
+          <a:lstStyle/>
+          <a:p>
+            <a:pPr algn="ctr">
+              <a:lnSpc>
+                <a:spcPct val="120000"/>
+              </a:lnSpc>
+            </a:pPr>
+            <a:r>
+              <a:rPr sz="900" b="1" i="0">
+                <a:solidFill>
+                  <a:srgbClr val="21049A"/>
+                </a:solidFill>
+                <a:latin typeface="Roboto"/>
+              </a:rPr>
+              <a:t>app B</a:t>
+            </a:r>
+          </a:p>
+        </p:txBody>
+      </p:sp>
+      <p:sp>
+        <p:nvSpPr>
+          <p:cNvPr id="23" name="Rounded Rectangle 22"/>
+          <p:cNvSpPr/>
+          <p:nvPr/>
+        </p:nvSpPr>
+        <p:spPr>
+          <a:xfrm>
+            <a:off x="4095750" y="2990850"/>
+            <a:ext cx="1428750" cy="342900"/>
+          </a:xfrm>
+          <a:prstGeom prst="roundRect">
+            <a:avLst>
+              <a:gd name="adj" fmla="val 5555"/>
+            </a:avLst>
+          </a:prstGeom>
+          <a:solidFill>
+            <a:srgbClr val="FDEAE3"/>
+          </a:solidFill>
+          <a:ln w="12700">
+            <a:solidFill>
+              <a:srgbClr val="E94D1C"/>
+            </a:solidFill>
+          </a:ln>
+          <a:effectLst/>
+        </p:spPr>
+        <p:style>
+          <a:lnRef idx="1">
+            <a:schemeClr val="accent1"/>
+          </a:lnRef>
+          <a:fillRef idx="3">
+            <a:schemeClr val="accent1"/>
+          </a:fillRef>
+          <a:effectRef idx="2">
+            <a:schemeClr val="accent1"/>
+          </a:effectRef>
+          <a:fontRef idx="minor">
+            <a:schemeClr val="lt1"/>
+          </a:fontRef>
+        </p:style>
+        <p:txBody>
+          <a:bodyPr rtlCol="0" anchor="ctr" wrap="square" lIns="0" rIns="0" tIns="0" bIns="0"/>
+          <a:lstStyle/>
+          <a:p>
+            <a:pPr algn="ctr"/>
+          </a:p>
+        </p:txBody>
+      </p:sp>
+      <p:sp>
+        <p:nvSpPr>
+          <p:cNvPr id="24" name="TextBox 23"/>
+          <p:cNvSpPr txBox="1"/>
+          <p:nvPr/>
+        </p:nvSpPr>
+        <p:spPr>
+          <a:xfrm>
+            <a:off x="4095750" y="3086100"/>
+            <a:ext cx="1428750" cy="182880"/>
+          </a:xfrm>
+          <a:prstGeom prst="rect">
+            <a:avLst/>
+          </a:prstGeom>
+          <a:noFill/>
+        </p:spPr>
+        <p:txBody>
+          <a:bodyPr wrap="square" lIns="0" rIns="0" tIns="0" bIns="0" anchor="t">
+            <a:spAutoFit/>
+          </a:bodyPr>
+          <a:lstStyle/>
+          <a:p>
+            <a:pPr algn="ctr">
+              <a:lnSpc>
+                <a:spcPct val="120000"/>
+              </a:lnSpc>
+            </a:pPr>
+            <a:r>
+              <a:rPr sz="900" b="1" i="0">
+                <a:solidFill>
+                  <a:srgbClr val="E94D1C"/>
+                </a:solidFill>
+                <a:latin typeface="Roboto"/>
+              </a:rPr>
+              <a:t>SO convidado</a:t>
+            </a:r>
+          </a:p>
+        </p:txBody>
+      </p:sp>
+      <p:sp>
+        <p:nvSpPr>
+          <p:cNvPr id="25" name="Rounded Rectangle 24"/>
+          <p:cNvSpPr/>
+          <p:nvPr/>
+        </p:nvSpPr>
+        <p:spPr>
+          <a:xfrm>
+            <a:off x="4095750" y="2705100"/>
+            <a:ext cx="1428750" cy="266700"/>
+          </a:xfrm>
+          <a:prstGeom prst="roundRect">
+            <a:avLst>
+              <a:gd name="adj" fmla="val 7142"/>
+            </a:avLst>
+          </a:prstGeom>
+          <a:solidFill>
+            <a:srgbClr val="FFFFFF"/>
+          </a:solidFill>
+          <a:ln w="12700">
+            <a:solidFill>
+              <a:srgbClr val="D9D9D9"/>
+            </a:solidFill>
+          </a:ln>
+          <a:effectLst/>
+        </p:spPr>
+        <p:style>
+          <a:lnRef idx="1">
+            <a:schemeClr val="accent1"/>
+          </a:lnRef>
+          <a:fillRef idx="3">
+            <a:schemeClr val="accent1"/>
+          </a:fillRef>
+          <a:effectRef idx="2">
+            <a:schemeClr val="accent1"/>
+          </a:effectRef>
+          <a:fontRef idx="minor">
+            <a:schemeClr val="lt1"/>
+          </a:fontRef>
+        </p:style>
+        <p:txBody>
+          <a:bodyPr rtlCol="0" anchor="ctr" wrap="square" lIns="0" rIns="0" tIns="0" bIns="0"/>
+          <a:lstStyle/>
+          <a:p>
+            <a:pPr algn="ctr"/>
+          </a:p>
+        </p:txBody>
+      </p:sp>
+      <p:sp>
+        <p:nvSpPr>
+          <p:cNvPr id="26" name="TextBox 25"/>
+          <p:cNvSpPr txBox="1"/>
+          <p:nvPr/>
+        </p:nvSpPr>
+        <p:spPr>
+          <a:xfrm>
+            <a:off x="4095750" y="2762250"/>
+            <a:ext cx="1428750" cy="182880"/>
+          </a:xfrm>
+          <a:prstGeom prst="rect">
+            <a:avLst/>
+          </a:prstGeom>
+          <a:noFill/>
+        </p:spPr>
+        <p:txBody>
+          <a:bodyPr wrap="square" lIns="0" rIns="0" tIns="0" bIns="0" anchor="t">
+            <a:spAutoFit/>
+          </a:bodyPr>
+          <a:lstStyle/>
+          <a:p>
+            <a:pPr algn="ctr">
+              <a:lnSpc>
+                <a:spcPct val="120000"/>
+              </a:lnSpc>
+            </a:pPr>
+            <a:r>
+              <a:rPr sz="900" b="0" i="0">
+                <a:solidFill>
+                  <a:srgbClr val="6B6B78"/>
+                </a:solidFill>
+                <a:latin typeface="Roboto"/>
+              </a:rPr>
+              <a:t>bibliotecas</a:t>
+            </a:r>
+          </a:p>
+        </p:txBody>
+      </p:sp>
+      <p:sp>
+        <p:nvSpPr>
+          <p:cNvPr id="27" name="Rounded Rectangle 26"/>
+          <p:cNvSpPr/>
+          <p:nvPr/>
+        </p:nvSpPr>
+        <p:spPr>
+          <a:xfrm>
+            <a:off x="4095750" y="2419350"/>
+            <a:ext cx="1428750" cy="266700"/>
+          </a:xfrm>
+          <a:prstGeom prst="roundRect">
+            <a:avLst>
+              <a:gd name="adj" fmla="val 7142"/>
+            </a:avLst>
+          </a:prstGeom>
+          <a:solidFill>
+            <a:srgbClr val="FFFFFF"/>
+          </a:solidFill>
+          <a:ln w="12700">
+            <a:solidFill>
+              <a:srgbClr val="21049A"/>
+            </a:solidFill>
+          </a:ln>
+          <a:effectLst/>
+        </p:spPr>
+        <p:style>
+          <a:lnRef idx="1">
+            <a:schemeClr val="accent1"/>
+          </a:lnRef>
+          <a:fillRef idx="3">
+            <a:schemeClr val="accent1"/>
+          </a:fillRef>
+          <a:effectRef idx="2">
+            <a:schemeClr val="accent1"/>
+          </a:effectRef>
+          <a:fontRef idx="minor">
+            <a:schemeClr val="lt1"/>
+          </a:fontRef>
+        </p:style>
+        <p:txBody>
+          <a:bodyPr rtlCol="0" anchor="ctr" wrap="square" lIns="0" rIns="0" tIns="0" bIns="0"/>
+          <a:lstStyle/>
+          <a:p>
+            <a:pPr algn="ctr"/>
+          </a:p>
+        </p:txBody>
+      </p:sp>
+      <p:sp>
+        <p:nvSpPr>
+          <p:cNvPr id="28" name="TextBox 27"/>
+          <p:cNvSpPr txBox="1"/>
+          <p:nvPr/>
+        </p:nvSpPr>
+        <p:spPr>
+          <a:xfrm>
+            <a:off x="4095750" y="2476500"/>
+            <a:ext cx="1428750" cy="182880"/>
+          </a:xfrm>
+          <a:prstGeom prst="rect">
+            <a:avLst/>
+          </a:prstGeom>
+          <a:noFill/>
+        </p:spPr>
+        <p:txBody>
+          <a:bodyPr wrap="square" lIns="0" rIns="0" tIns="0" bIns="0" anchor="t">
+            <a:spAutoFit/>
+          </a:bodyPr>
+          <a:lstStyle/>
+          <a:p>
+            <a:pPr algn="ctr">
+              <a:lnSpc>
+                <a:spcPct val="120000"/>
+              </a:lnSpc>
+            </a:pPr>
+            <a:r>
+              <a:rPr sz="900" b="1" i="0">
+                <a:solidFill>
+                  <a:srgbClr val="21049A"/>
+                </a:solidFill>
+                <a:latin typeface="Roboto"/>
+              </a:rPr>
+              <a:t>app C</a:t>
+            </a:r>
+          </a:p>
+        </p:txBody>
+      </p:sp>
+      <p:sp>
+        <p:nvSpPr>
+          <p:cNvPr id="29" name="TextBox 28"/>
+          <p:cNvSpPr txBox="1"/>
+          <p:nvPr/>
+        </p:nvSpPr>
+        <p:spPr>
+          <a:xfrm>
+            <a:off x="6572250" y="2114550"/>
+            <a:ext cx="4762500" cy="182880"/>
+          </a:xfrm>
+          <a:prstGeom prst="rect">
+            <a:avLst/>
+          </a:prstGeom>
+          <a:noFill/>
+        </p:spPr>
+        <p:txBody>
+          <a:bodyPr wrap="square" lIns="0" rIns="0" tIns="0" bIns="0" anchor="t">
+            <a:spAutoFit/>
+          </a:bodyPr>
+          <a:lstStyle/>
+          <a:p>
+            <a:pPr algn="l">
+              <a:lnSpc>
+                <a:spcPct val="120000"/>
+              </a:lnSpc>
+            </a:pPr>
+            <a:r>
+              <a:rPr sz="900" b="1" i="0" spc="140">
+                <a:solidFill>
+                  <a:srgbClr val="E94D1C"/>
+                </a:solidFill>
+                <a:latin typeface="Roboto"/>
+              </a:rPr>
+              <a:t>CONTAINER</a:t>
+            </a:r>
+          </a:p>
+        </p:txBody>
+      </p:sp>
+      <p:sp>
+        <p:nvSpPr>
+          <p:cNvPr id="30" name="Rectangle 29"/>
+          <p:cNvSpPr/>
+          <p:nvPr/>
+        </p:nvSpPr>
+        <p:spPr>
+          <a:xfrm>
+            <a:off x="6572250" y="4076700"/>
+            <a:ext cx="4762500" cy="323850"/>
+          </a:xfrm>
+          <a:prstGeom prst="rect">
+            <a:avLst/>
+          </a:prstGeom>
+          <a:solidFill>
+            <a:srgbClr val="D9D9D9"/>
+          </a:solidFill>
+          <a:ln>
+            <a:noFill/>
+          </a:ln>
+          <a:effectLst/>
+        </p:spPr>
+        <p:style>
+          <a:lnRef idx="1">
+            <a:schemeClr val="accent1"/>
+          </a:lnRef>
+          <a:fillRef idx="3">
+            <a:schemeClr val="accent1"/>
+          </a:fillRef>
+          <a:effectRef idx="2">
+            <a:schemeClr val="accent1"/>
+          </a:effectRef>
+          <a:fontRef idx="minor">
+            <a:schemeClr val="lt1"/>
+          </a:fontRef>
+        </p:style>
+        <p:txBody>
+          <a:bodyPr rtlCol="0" anchor="ctr" wrap="square" lIns="0" rIns="0" tIns="0" bIns="0"/>
+          <a:lstStyle/>
+          <a:p>
+            <a:pPr algn="ctr"/>
+          </a:p>
+        </p:txBody>
+      </p:sp>
+      <p:sp>
+        <p:nvSpPr>
+          <p:cNvPr id="31" name="TextBox 30"/>
+          <p:cNvSpPr txBox="1"/>
+          <p:nvPr/>
+        </p:nvSpPr>
+        <p:spPr>
+          <a:xfrm>
+            <a:off x="6572250" y="4162425"/>
+            <a:ext cx="4762500" cy="198120"/>
+          </a:xfrm>
+          <a:prstGeom prst="rect">
+            <a:avLst/>
+          </a:prstGeom>
+          <a:noFill/>
+        </p:spPr>
+        <p:txBody>
+          <a:bodyPr wrap="square" lIns="0" rIns="0" tIns="0" bIns="0" anchor="t">
+            <a:spAutoFit/>
+          </a:bodyPr>
+          <a:lstStyle/>
+          <a:p>
+            <a:pPr algn="ctr">
+              <a:lnSpc>
+                <a:spcPct val="120000"/>
+              </a:lnSpc>
+            </a:pPr>
+            <a:r>
+              <a:rPr sz="980" b="0" i="0">
+                <a:solidFill>
+                  <a:srgbClr val="1A1A1E"/>
+                </a:solidFill>
+                <a:latin typeface="Roboto"/>
+              </a:rPr>
+              <a:t>hardware</a:t>
+            </a:r>
+          </a:p>
+        </p:txBody>
+      </p:sp>
+      <p:sp>
+        <p:nvSpPr>
+          <p:cNvPr id="32" name="Rectangle 31"/>
+          <p:cNvSpPr/>
+          <p:nvPr/>
+        </p:nvSpPr>
+        <p:spPr>
+          <a:xfrm>
+            <a:off x="6572250" y="3714750"/>
+            <a:ext cx="4762500" cy="342900"/>
+          </a:xfrm>
+          <a:prstGeom prst="rect">
+            <a:avLst/>
+          </a:prstGeom>
+          <a:solidFill>
+            <a:srgbClr val="F2F2F5"/>
+          </a:solidFill>
+          <a:ln w="12700">
+            <a:solidFill>
+              <a:srgbClr val="D9D9D9"/>
+            </a:solidFill>
+          </a:ln>
+          <a:effectLst/>
+        </p:spPr>
+        <p:style>
+          <a:lnRef idx="1">
+            <a:schemeClr val="accent1"/>
+          </a:lnRef>
+          <a:fillRef idx="3">
+            <a:schemeClr val="accent1"/>
+          </a:fillRef>
+          <a:effectRef idx="2">
+            <a:schemeClr val="accent1"/>
+          </a:effectRef>
+          <a:fontRef idx="minor">
+            <a:schemeClr val="lt1"/>
+          </a:fontRef>
+        </p:style>
+        <p:txBody>
+          <a:bodyPr rtlCol="0" anchor="ctr" wrap="square" lIns="0" rIns="0" tIns="0" bIns="0"/>
+          <a:lstStyle/>
+          <a:p>
+            <a:pPr algn="ctr"/>
+          </a:p>
+        </p:txBody>
+      </p:sp>
+      <p:sp>
+        <p:nvSpPr>
+          <p:cNvPr id="33" name="TextBox 32"/>
+          <p:cNvSpPr txBox="1"/>
+          <p:nvPr/>
+        </p:nvSpPr>
+        <p:spPr>
+          <a:xfrm>
+            <a:off x="6572250" y="3810000"/>
+            <a:ext cx="4762500" cy="198120"/>
+          </a:xfrm>
+          <a:prstGeom prst="rect">
+            <a:avLst/>
+          </a:prstGeom>
+          <a:noFill/>
+        </p:spPr>
+        <p:txBody>
+          <a:bodyPr wrap="square" lIns="0" rIns="0" tIns="0" bIns="0" anchor="t">
+            <a:spAutoFit/>
+          </a:bodyPr>
+          <a:lstStyle/>
+          <a:p>
+            <a:pPr algn="ctr">
+              <a:lnSpc>
+                <a:spcPct val="120000"/>
+              </a:lnSpc>
+            </a:pPr>
+            <a:r>
+              <a:rPr sz="980" b="0" i="0">
+                <a:solidFill>
+                  <a:srgbClr val="1A1A1E"/>
+                </a:solidFill>
+                <a:latin typeface="Roboto"/>
+              </a:rPr>
+              <a:t>kernel do host, compartilhado por todos</a:t>
+            </a:r>
+          </a:p>
+        </p:txBody>
+      </p:sp>
+      <p:sp>
+        <p:nvSpPr>
+          <p:cNvPr id="34" name="Rectangle 33"/>
+          <p:cNvSpPr/>
+          <p:nvPr/>
+        </p:nvSpPr>
+        <p:spPr>
+          <a:xfrm>
+            <a:off x="6572250" y="3352800"/>
+            <a:ext cx="4762500" cy="342900"/>
+          </a:xfrm>
+          <a:prstGeom prst="rect">
+            <a:avLst/>
+          </a:prstGeom>
+          <a:solidFill>
+            <a:srgbClr val="21049A"/>
+          </a:solidFill>
+          <a:ln>
+            <a:noFill/>
+          </a:ln>
+          <a:effectLst/>
+        </p:spPr>
+        <p:style>
+          <a:lnRef idx="1">
+            <a:schemeClr val="accent1"/>
+          </a:lnRef>
+          <a:fillRef idx="3">
+            <a:schemeClr val="accent1"/>
+          </a:fillRef>
+          <a:effectRef idx="2">
+            <a:schemeClr val="accent1"/>
+          </a:effectRef>
+          <a:fontRef idx="minor">
+            <a:schemeClr val="lt1"/>
+          </a:fontRef>
+        </p:style>
+        <p:txBody>
+          <a:bodyPr rtlCol="0" anchor="ctr" wrap="square" lIns="0" rIns="0" tIns="0" bIns="0"/>
+          <a:lstStyle/>
+          <a:p>
+            <a:pPr algn="ctr"/>
+          </a:p>
+        </p:txBody>
+      </p:sp>
+      <p:sp>
+        <p:nvSpPr>
+          <p:cNvPr id="35" name="TextBox 34"/>
+          <p:cNvSpPr txBox="1"/>
+          <p:nvPr/>
+        </p:nvSpPr>
+        <p:spPr>
+          <a:xfrm>
+            <a:off x="6572250" y="3448050"/>
+            <a:ext cx="4762500" cy="198120"/>
+          </a:xfrm>
+          <a:prstGeom prst="rect">
+            <a:avLst/>
+          </a:prstGeom>
+          <a:noFill/>
+        </p:spPr>
+        <p:txBody>
+          <a:bodyPr wrap="square" lIns="0" rIns="0" tIns="0" bIns="0" anchor="t">
+            <a:spAutoFit/>
+          </a:bodyPr>
+          <a:lstStyle/>
+          <a:p>
+            <a:pPr algn="ctr">
+              <a:lnSpc>
+                <a:spcPct val="120000"/>
+              </a:lnSpc>
+            </a:pPr>
+            <a:r>
+              <a:rPr sz="980" b="1" i="0">
+                <a:solidFill>
+                  <a:srgbClr val="FFFFFF"/>
+                </a:solidFill>
+                <a:latin typeface="Roboto"/>
+              </a:rPr>
+              <a:t>Docker Engine</a:t>
+            </a:r>
+          </a:p>
+        </p:txBody>
+      </p:sp>
+      <p:sp>
+        <p:nvSpPr>
+          <p:cNvPr id="36" name="Rounded Rectangle 35"/>
+          <p:cNvSpPr/>
+          <p:nvPr/>
+        </p:nvSpPr>
+        <p:spPr>
+          <a:xfrm>
+            <a:off x="6667500" y="3048000"/>
+            <a:ext cx="1428750" cy="266700"/>
+          </a:xfrm>
+          <a:prstGeom prst="roundRect">
+            <a:avLst>
+              <a:gd name="adj" fmla="val 7142"/>
+            </a:avLst>
+          </a:prstGeom>
+          <a:solidFill>
+            <a:srgbClr val="FFFFFF"/>
+          </a:solidFill>
+          <a:ln w="12700">
+            <a:solidFill>
+              <a:srgbClr val="D9D9D9"/>
+            </a:solidFill>
+          </a:ln>
+          <a:effectLst/>
+        </p:spPr>
+        <p:style>
+          <a:lnRef idx="1">
+            <a:schemeClr val="accent1"/>
+          </a:lnRef>
+          <a:fillRef idx="3">
+            <a:schemeClr val="accent1"/>
+          </a:fillRef>
+          <a:effectRef idx="2">
+            <a:schemeClr val="accent1"/>
+          </a:effectRef>
+          <a:fontRef idx="minor">
+            <a:schemeClr val="lt1"/>
+          </a:fontRef>
+        </p:style>
+        <p:txBody>
+          <a:bodyPr rtlCol="0" anchor="ctr" wrap="square" lIns="0" rIns="0" tIns="0" bIns="0"/>
+          <a:lstStyle/>
+          <a:p>
+            <a:pPr algn="ctr"/>
+          </a:p>
+        </p:txBody>
+      </p:sp>
+      <p:sp>
+        <p:nvSpPr>
+          <p:cNvPr id="37" name="TextBox 36"/>
+          <p:cNvSpPr txBox="1"/>
+          <p:nvPr/>
+        </p:nvSpPr>
+        <p:spPr>
+          <a:xfrm>
+            <a:off x="6667500" y="3105150"/>
+            <a:ext cx="1428750" cy="182880"/>
+          </a:xfrm>
+          <a:prstGeom prst="rect">
+            <a:avLst/>
+          </a:prstGeom>
+          <a:noFill/>
+        </p:spPr>
+        <p:txBody>
+          <a:bodyPr wrap="square" lIns="0" rIns="0" tIns="0" bIns="0" anchor="t">
+            <a:spAutoFit/>
+          </a:bodyPr>
+          <a:lstStyle/>
+          <a:p>
+            <a:pPr algn="ctr">
+              <a:lnSpc>
+                <a:spcPct val="120000"/>
+              </a:lnSpc>
+            </a:pPr>
+            <a:r>
+              <a:rPr sz="900" b="0" i="0">
+                <a:solidFill>
+                  <a:srgbClr val="6B6B78"/>
+                </a:solidFill>
+                <a:latin typeface="Roboto"/>
+              </a:rPr>
+              <a:t>bibliotecas</a:t>
+            </a:r>
+          </a:p>
+        </p:txBody>
+      </p:sp>
+      <p:sp>
+        <p:nvSpPr>
+          <p:cNvPr id="38" name="Rounded Rectangle 37"/>
+          <p:cNvSpPr/>
+          <p:nvPr/>
+        </p:nvSpPr>
+        <p:spPr>
+          <a:xfrm>
+            <a:off x="6667500" y="2762250"/>
+            <a:ext cx="1428750" cy="266700"/>
+          </a:xfrm>
+          <a:prstGeom prst="roundRect">
+            <a:avLst>
+              <a:gd name="adj" fmla="val 7142"/>
+            </a:avLst>
+          </a:prstGeom>
+          <a:solidFill>
+            <a:srgbClr val="FFFFFF"/>
+          </a:solidFill>
+          <a:ln w="12700">
+            <a:solidFill>
+              <a:srgbClr val="21049A"/>
+            </a:solidFill>
+          </a:ln>
+          <a:effectLst/>
+        </p:spPr>
+        <p:style>
+          <a:lnRef idx="1">
+            <a:schemeClr val="accent1"/>
+          </a:lnRef>
+          <a:fillRef idx="3">
+            <a:schemeClr val="accent1"/>
+          </a:fillRef>
+          <a:effectRef idx="2">
+            <a:schemeClr val="accent1"/>
+          </a:effectRef>
+          <a:fontRef idx="minor">
+            <a:schemeClr val="lt1"/>
+          </a:fontRef>
+        </p:style>
+        <p:txBody>
+          <a:bodyPr rtlCol="0" anchor="ctr" wrap="square" lIns="0" rIns="0" tIns="0" bIns="0"/>
+          <a:lstStyle/>
+          <a:p>
+            <a:pPr algn="ctr"/>
+          </a:p>
+        </p:txBody>
+      </p:sp>
+      <p:sp>
+        <p:nvSpPr>
+          <p:cNvPr id="39" name="TextBox 38"/>
+          <p:cNvSpPr txBox="1"/>
+          <p:nvPr/>
+        </p:nvSpPr>
+        <p:spPr>
+          <a:xfrm>
+            <a:off x="6667500" y="2819400"/>
+            <a:ext cx="1428750" cy="182880"/>
+          </a:xfrm>
+          <a:prstGeom prst="rect">
+            <a:avLst/>
+          </a:prstGeom>
+          <a:noFill/>
+        </p:spPr>
+        <p:txBody>
+          <a:bodyPr wrap="square" lIns="0" rIns="0" tIns="0" bIns="0" anchor="t">
+            <a:spAutoFit/>
+          </a:bodyPr>
+          <a:lstStyle/>
+          <a:p>
+            <a:pPr algn="ctr">
+              <a:lnSpc>
+                <a:spcPct val="120000"/>
+              </a:lnSpc>
+            </a:pPr>
+            <a:r>
+              <a:rPr sz="900" b="1" i="0">
+                <a:solidFill>
+                  <a:srgbClr val="21049A"/>
+                </a:solidFill>
+                <a:latin typeface="Roboto"/>
+              </a:rPr>
+              <a:t>app A</a:t>
+            </a:r>
+          </a:p>
+        </p:txBody>
+      </p:sp>
+      <p:sp>
+        <p:nvSpPr>
+          <p:cNvPr id="40" name="Rounded Rectangle 39"/>
+          <p:cNvSpPr/>
+          <p:nvPr/>
+        </p:nvSpPr>
+        <p:spPr>
+          <a:xfrm>
+            <a:off x="8239125" y="3048000"/>
+            <a:ext cx="1428750" cy="266700"/>
+          </a:xfrm>
+          <a:prstGeom prst="roundRect">
+            <a:avLst>
+              <a:gd name="adj" fmla="val 7142"/>
+            </a:avLst>
+          </a:prstGeom>
+          <a:solidFill>
+            <a:srgbClr val="FFFFFF"/>
+          </a:solidFill>
+          <a:ln w="12700">
+            <a:solidFill>
+              <a:srgbClr val="D9D9D9"/>
+            </a:solidFill>
+          </a:ln>
+          <a:effectLst/>
+        </p:spPr>
+        <p:style>
+          <a:lnRef idx="1">
+            <a:schemeClr val="accent1"/>
+          </a:lnRef>
+          <a:fillRef idx="3">
+            <a:schemeClr val="accent1"/>
+          </a:fillRef>
+          <a:effectRef idx="2">
+            <a:schemeClr val="accent1"/>
+          </a:effectRef>
+          <a:fontRef idx="minor">
+            <a:schemeClr val="lt1"/>
+          </a:fontRef>
+        </p:style>
+        <p:txBody>
+          <a:bodyPr rtlCol="0" anchor="ctr" wrap="square" lIns="0" rIns="0" tIns="0" bIns="0"/>
+          <a:lstStyle/>
+          <a:p>
+            <a:pPr algn="ctr"/>
+          </a:p>
+        </p:txBody>
+      </p:sp>
+      <p:sp>
+        <p:nvSpPr>
+          <p:cNvPr id="41" name="TextBox 40"/>
+          <p:cNvSpPr txBox="1"/>
+          <p:nvPr/>
+        </p:nvSpPr>
+        <p:spPr>
+          <a:xfrm>
+            <a:off x="8239125" y="3105150"/>
+            <a:ext cx="1428750" cy="182880"/>
+          </a:xfrm>
+          <a:prstGeom prst="rect">
+            <a:avLst/>
+          </a:prstGeom>
+          <a:noFill/>
+        </p:spPr>
+        <p:txBody>
+          <a:bodyPr wrap="square" lIns="0" rIns="0" tIns="0" bIns="0" anchor="t">
+            <a:spAutoFit/>
+          </a:bodyPr>
+          <a:lstStyle/>
+          <a:p>
+            <a:pPr algn="ctr">
+              <a:lnSpc>
+                <a:spcPct val="120000"/>
+              </a:lnSpc>
+            </a:pPr>
+            <a:r>
+              <a:rPr sz="900" b="0" i="0">
+                <a:solidFill>
+                  <a:srgbClr val="6B6B78"/>
+                </a:solidFill>
+                <a:latin typeface="Roboto"/>
+              </a:rPr>
+              <a:t>bibliotecas</a:t>
+            </a:r>
+          </a:p>
+        </p:txBody>
+      </p:sp>
+      <p:sp>
+        <p:nvSpPr>
+          <p:cNvPr id="42" name="Rounded Rectangle 41"/>
+          <p:cNvSpPr/>
+          <p:nvPr/>
+        </p:nvSpPr>
+        <p:spPr>
+          <a:xfrm>
+            <a:off x="8239125" y="2762250"/>
+            <a:ext cx="1428750" cy="266700"/>
+          </a:xfrm>
+          <a:prstGeom prst="roundRect">
+            <a:avLst>
+              <a:gd name="adj" fmla="val 7142"/>
+            </a:avLst>
+          </a:prstGeom>
+          <a:solidFill>
+            <a:srgbClr val="FFFFFF"/>
+          </a:solidFill>
+          <a:ln w="12700">
+            <a:solidFill>
+              <a:srgbClr val="21049A"/>
+            </a:solidFill>
+          </a:ln>
+          <a:effectLst/>
+        </p:spPr>
+        <p:style>
+          <a:lnRef idx="1">
+            <a:schemeClr val="accent1"/>
+          </a:lnRef>
+          <a:fillRef idx="3">
+            <a:schemeClr val="accent1"/>
+          </a:fillRef>
+          <a:effectRef idx="2">
+            <a:schemeClr val="accent1"/>
+          </a:effectRef>
+          <a:fontRef idx="minor">
+            <a:schemeClr val="lt1"/>
+          </a:fontRef>
+        </p:style>
+        <p:txBody>
+          <a:bodyPr rtlCol="0" anchor="ctr" wrap="square" lIns="0" rIns="0" tIns="0" bIns="0"/>
+          <a:lstStyle/>
+          <a:p>
+            <a:pPr algn="ctr"/>
+          </a:p>
+        </p:txBody>
+      </p:sp>
+      <p:sp>
+        <p:nvSpPr>
+          <p:cNvPr id="43" name="TextBox 42"/>
+          <p:cNvSpPr txBox="1"/>
+          <p:nvPr/>
+        </p:nvSpPr>
+        <p:spPr>
+          <a:xfrm>
+            <a:off x="8239125" y="2819400"/>
+            <a:ext cx="1428750" cy="182880"/>
+          </a:xfrm>
+          <a:prstGeom prst="rect">
+            <a:avLst/>
+          </a:prstGeom>
+          <a:noFill/>
+        </p:spPr>
+        <p:txBody>
+          <a:bodyPr wrap="square" lIns="0" rIns="0" tIns="0" bIns="0" anchor="t">
+            <a:spAutoFit/>
+          </a:bodyPr>
+          <a:lstStyle/>
+          <a:p>
+            <a:pPr algn="ctr">
+              <a:lnSpc>
+                <a:spcPct val="120000"/>
+              </a:lnSpc>
+            </a:pPr>
+            <a:r>
+              <a:rPr sz="900" b="1" i="0">
+                <a:solidFill>
+                  <a:srgbClr val="21049A"/>
+                </a:solidFill>
+                <a:latin typeface="Roboto"/>
+              </a:rPr>
+              <a:t>app B</a:t>
+            </a:r>
+          </a:p>
+        </p:txBody>
+      </p:sp>
+      <p:sp>
+        <p:nvSpPr>
+          <p:cNvPr id="44" name="Rounded Rectangle 43"/>
+          <p:cNvSpPr/>
+          <p:nvPr/>
+        </p:nvSpPr>
+        <p:spPr>
+          <a:xfrm>
+            <a:off x="9810750" y="3048000"/>
+            <a:ext cx="1428750" cy="266700"/>
+          </a:xfrm>
+          <a:prstGeom prst="roundRect">
+            <a:avLst>
+              <a:gd name="adj" fmla="val 7142"/>
+            </a:avLst>
+          </a:prstGeom>
+          <a:solidFill>
+            <a:srgbClr val="FFFFFF"/>
+          </a:solidFill>
+          <a:ln w="12700">
+            <a:solidFill>
+              <a:srgbClr val="D9D9D9"/>
+            </a:solidFill>
+          </a:ln>
+          <a:effectLst/>
+        </p:spPr>
+        <p:style>
+          <a:lnRef idx="1">
+            <a:schemeClr val="accent1"/>
+          </a:lnRef>
+          <a:fillRef idx="3">
+            <a:schemeClr val="accent1"/>
+          </a:fillRef>
+          <a:effectRef idx="2">
+            <a:schemeClr val="accent1"/>
+          </a:effectRef>
+          <a:fontRef idx="minor">
+            <a:schemeClr val="lt1"/>
+          </a:fontRef>
+        </p:style>
+        <p:txBody>
+          <a:bodyPr rtlCol="0" anchor="ctr" wrap="square" lIns="0" rIns="0" tIns="0" bIns="0"/>
+          <a:lstStyle/>
+          <a:p>
+            <a:pPr algn="ctr"/>
+          </a:p>
+        </p:txBody>
+      </p:sp>
+      <p:sp>
+        <p:nvSpPr>
+          <p:cNvPr id="45" name="TextBox 44"/>
+          <p:cNvSpPr txBox="1"/>
+          <p:nvPr/>
+        </p:nvSpPr>
+        <p:spPr>
+          <a:xfrm>
+            <a:off x="9810750" y="3105150"/>
+            <a:ext cx="1428750" cy="182880"/>
+          </a:xfrm>
+          <a:prstGeom prst="rect">
+            <a:avLst/>
+          </a:prstGeom>
+          <a:noFill/>
+        </p:spPr>
+        <p:txBody>
+          <a:bodyPr wrap="square" lIns="0" rIns="0" tIns="0" bIns="0" anchor="t">
+            <a:spAutoFit/>
+          </a:bodyPr>
+          <a:lstStyle/>
+          <a:p>
+            <a:pPr algn="ctr">
+              <a:lnSpc>
+                <a:spcPct val="120000"/>
+              </a:lnSpc>
+            </a:pPr>
+            <a:r>
+              <a:rPr sz="900" b="0" i="0">
+                <a:solidFill>
+                  <a:srgbClr val="6B6B78"/>
+                </a:solidFill>
+                <a:latin typeface="Roboto"/>
+              </a:rPr>
+              <a:t>bibliotecas</a:t>
+            </a:r>
+          </a:p>
+        </p:txBody>
+      </p:sp>
+      <p:sp>
+        <p:nvSpPr>
+          <p:cNvPr id="46" name="Rounded Rectangle 45"/>
+          <p:cNvSpPr/>
+          <p:nvPr/>
+        </p:nvSpPr>
+        <p:spPr>
+          <a:xfrm>
+            <a:off x="9810750" y="2762250"/>
+            <a:ext cx="1428750" cy="266700"/>
+          </a:xfrm>
+          <a:prstGeom prst="roundRect">
+            <a:avLst>
+              <a:gd name="adj" fmla="val 7142"/>
+            </a:avLst>
+          </a:prstGeom>
+          <a:solidFill>
+            <a:srgbClr val="FFFFFF"/>
+          </a:solidFill>
+          <a:ln w="12700">
+            <a:solidFill>
+              <a:srgbClr val="21049A"/>
+            </a:solidFill>
+          </a:ln>
+          <a:effectLst/>
+        </p:spPr>
+        <p:style>
+          <a:lnRef idx="1">
+            <a:schemeClr val="accent1"/>
+          </a:lnRef>
+          <a:fillRef idx="3">
+            <a:schemeClr val="accent1"/>
+          </a:fillRef>
+          <a:effectRef idx="2">
+            <a:schemeClr val="accent1"/>
+          </a:effectRef>
+          <a:fontRef idx="minor">
+            <a:schemeClr val="lt1"/>
+          </a:fontRef>
+        </p:style>
+        <p:txBody>
+          <a:bodyPr rtlCol="0" anchor="ctr" wrap="square" lIns="0" rIns="0" tIns="0" bIns="0"/>
+          <a:lstStyle/>
+          <a:p>
+            <a:pPr algn="ctr"/>
+          </a:p>
+        </p:txBody>
+      </p:sp>
+      <p:sp>
+        <p:nvSpPr>
+          <p:cNvPr id="47" name="TextBox 46"/>
+          <p:cNvSpPr txBox="1"/>
+          <p:nvPr/>
+        </p:nvSpPr>
+        <p:spPr>
+          <a:xfrm>
+            <a:off x="9810750" y="2819400"/>
+            <a:ext cx="1428750" cy="182880"/>
+          </a:xfrm>
+          <a:prstGeom prst="rect">
+            <a:avLst/>
+          </a:prstGeom>
+          <a:noFill/>
+        </p:spPr>
+        <p:txBody>
+          <a:bodyPr wrap="square" lIns="0" rIns="0" tIns="0" bIns="0" anchor="t">
+            <a:spAutoFit/>
+          </a:bodyPr>
+          <a:lstStyle/>
+          <a:p>
+            <a:pPr algn="ctr">
+              <a:lnSpc>
+                <a:spcPct val="120000"/>
+              </a:lnSpc>
+            </a:pPr>
+            <a:r>
+              <a:rPr sz="900" b="1" i="0">
+                <a:solidFill>
+                  <a:srgbClr val="21049A"/>
+                </a:solidFill>
+                <a:latin typeface="Roboto"/>
+              </a:rPr>
+              <a:t>app C</a:t>
+            </a:r>
+          </a:p>
+        </p:txBody>
+      </p:sp>
+      <p:sp>
+        <p:nvSpPr>
+          <p:cNvPr id="48" name="TextBox 47"/>
+          <p:cNvSpPr txBox="1"/>
+          <p:nvPr/>
+        </p:nvSpPr>
+        <p:spPr>
+          <a:xfrm>
+            <a:off x="857250" y="4514850"/>
+            <a:ext cx="4762500" cy="476250"/>
+          </a:xfrm>
+          <a:prstGeom prst="rect">
+            <a:avLst/>
+          </a:prstGeom>
+          <a:noFill/>
+        </p:spPr>
+        <p:txBody>
+          <a:bodyPr wrap="square" lIns="0" rIns="0" tIns="0" bIns="0" anchor="t">
+            <a:spAutoFit/>
+          </a:bodyPr>
+          <a:lstStyle/>
+          <a:p>
+            <a:pPr algn="l">
+              <a:lnSpc>
+                <a:spcPct val="140000"/>
+              </a:lnSpc>
+            </a:pPr>
+            <a:r>
+              <a:rPr sz="1050" b="0" i="0">
+                <a:solidFill>
+                  <a:srgbClr val="3A3A44"/>
+                </a:solidFill>
+                <a:latin typeface="Roboto"/>
+              </a:rPr>
+              <a:t>Um kernel inteiro para cada serviço. A fronteira é imposta pelo hardware.</a:t>
+            </a:r>
+          </a:p>
+        </p:txBody>
+      </p:sp>
+      <p:sp>
+        <p:nvSpPr>
+          <p:cNvPr id="49" name="TextBox 48"/>
+          <p:cNvSpPr txBox="1"/>
+          <p:nvPr/>
+        </p:nvSpPr>
+        <p:spPr>
+          <a:xfrm>
+            <a:off x="6572250" y="4514850"/>
+            <a:ext cx="4762500" cy="476250"/>
+          </a:xfrm>
+          <a:prstGeom prst="rect">
+            <a:avLst/>
+          </a:prstGeom>
+          <a:noFill/>
+        </p:spPr>
+        <p:txBody>
+          <a:bodyPr wrap="square" lIns="0" rIns="0" tIns="0" bIns="0" anchor="t">
+            <a:spAutoFit/>
+          </a:bodyPr>
+          <a:lstStyle/>
+          <a:p>
+            <a:pPr algn="l">
+              <a:lnSpc>
+                <a:spcPct val="140000"/>
+              </a:lnSpc>
+            </a:pPr>
+            <a:r>
+              <a:rPr sz="1050" b="0" i="0">
+                <a:solidFill>
+                  <a:srgbClr val="3A3A44"/>
+                </a:solidFill>
+                <a:latin typeface="Roboto"/>
+              </a:rPr>
+              <a:t>Um kernel só, dividido entre todos. A fronteira é a interface de chamadas de sistema.</a:t>
+            </a:r>
+          </a:p>
+        </p:txBody>
+      </p:sp>
+      <p:sp>
+        <p:nvSpPr>
+          <p:cNvPr id="50" name="Rectangle 49"/>
+          <p:cNvSpPr/>
+          <p:nvPr/>
+        </p:nvSpPr>
+        <p:spPr>
+          <a:xfrm>
+            <a:off x="685800" y="5676321"/>
+            <a:ext cx="28575" cy="457779"/>
           </a:xfrm>
           <a:prstGeom prst="rect">
             <a:avLst/>
@@ -23060,14 +25022,14 @@
       </p:sp>
       <p:sp>
         <p:nvSpPr>
-          <p:cNvPr id="5" name="TextBox 4"/>
+          <p:cNvPr id="51" name="TextBox 50"/>
           <p:cNvSpPr txBox="1"/>
           <p:nvPr/>
         </p:nvSpPr>
         <p:spPr>
           <a:xfrm>
-            <a:off x="971550" y="2470404"/>
-            <a:ext cx="7772400" cy="95250"/>
+            <a:off x="876300" y="5657271"/>
+            <a:ext cx="10629900" cy="591129"/>
           </a:xfrm>
           <a:prstGeom prst="rect">
             <a:avLst/>
@@ -23082,75 +25044,31 @@
           <a:p>
             <a:pPr algn="l">
               <a:lnSpc>
-                <a:spcPct val="130000"/>
-              </a:lnSpc>
-            </a:pPr>
-            <a:r>
-              <a:rPr sz="1650" b="0" i="0">
-                <a:solidFill>
-                  <a:srgbClr val="1A1A1E"/>
+                <a:spcPct val="150000"/>
+              </a:lnSpc>
+            </a:pPr>
+            <a:r>
+              <a:rPr sz="1280" b="0" i="0">
+                <a:solidFill>
+                  <a:srgbClr val="3A3A44"/>
                 </a:solidFill>
                 <a:latin typeface="Roboto"/>
               </a:rPr>
-              <a:t>O daemon roda como root. Estar no grupo docker equivale a root no host, sem sudo e sem trilha de auditoria.</a:t>
-            </a:r>
-          </a:p>
-        </p:txBody>
-      </p:sp>
-      <p:sp>
-        <p:nvSpPr>
-          <p:cNvPr id="6" name="Rectangle 5"/>
-          <p:cNvSpPr/>
-          <p:nvPr/>
-        </p:nvSpPr>
-        <p:spPr>
-          <a:xfrm>
-            <a:off x="704850" y="3418332"/>
-            <a:ext cx="57150" cy="57150"/>
-          </a:xfrm>
-          <a:prstGeom prst="rect">
-            <a:avLst/>
-          </a:prstGeom>
-          <a:solidFill>
-            <a:srgbClr val="E94D1C"/>
-          </a:solidFill>
-          <a:ln>
-            <a:noFill/>
-          </a:ln>
-          <a:effectLst/>
-        </p:spPr>
-        <p:style>
-          <a:lnRef idx="1">
-            <a:schemeClr val="accent1"/>
-          </a:lnRef>
-          <a:fillRef idx="3">
-            <a:schemeClr val="accent1"/>
-          </a:fillRef>
-          <a:effectRef idx="2">
-            <a:schemeClr val="accent1"/>
-          </a:effectRef>
-          <a:fontRef idx="minor">
-            <a:schemeClr val="lt1"/>
-          </a:fontRef>
-        </p:style>
-        <p:txBody>
-          <a:bodyPr rtlCol="0" anchor="ctr" wrap="square" lIns="0" rIns="0" tIns="0" bIns="0"/>
-          <a:lstStyle/>
-          <a:p>
-            <a:pPr algn="ctr"/>
-          </a:p>
-        </p:txBody>
-      </p:sp>
-      <p:sp>
-        <p:nvSpPr>
-          <p:cNvPr id="7" name="TextBox 6"/>
+              <a:t>A CVE-2019-5736 confirmou o risco: o processo de dentro conseguia sobrescrever o binário do runtime. Por isso o documento de decisões arquiteturais precisa registrar que container não dá o mesmo isolamento de uma máquina virtual.</a:t>
+            </a:r>
+          </a:p>
+        </p:txBody>
+      </p:sp>
+      <p:sp>
+        <p:nvSpPr>
+          <p:cNvPr id="52" name="TextBox 51"/>
           <p:cNvSpPr txBox="1"/>
           <p:nvPr/>
         </p:nvSpPr>
         <p:spPr>
           <a:xfrm>
-            <a:off x="971550" y="3309366"/>
-            <a:ext cx="7772400" cy="95250"/>
+            <a:off x="685800" y="6324600"/>
+            <a:ext cx="6667500" cy="182880"/>
           </a:xfrm>
           <a:prstGeom prst="rect">
             <a:avLst/>
@@ -23165,434 +25083,16 @@
           <a:p>
             <a:pPr algn="l">
               <a:lnSpc>
-                <a:spcPct val="130000"/>
-              </a:lnSpc>
-            </a:pPr>
-            <a:r>
-              <a:rPr sz="1650" b="0" i="0">
-                <a:solidFill>
-                  <a:srgbClr val="1A1A1E"/>
+                <a:spcPct val="120000"/>
+              </a:lnSpc>
+            </a:pPr>
+            <a:r>
+              <a:rPr sz="900" b="0" i="0">
+                <a:solidFill>
+                  <a:srgbClr val="6B6B78"/>
                 </a:solidFill>
                 <a:latin typeface="Roboto"/>
               </a:rPr>
-              <a:t>A regra de rede que o Docker escreve é aplicada antes das regras do administrador, então um bloqueio de firewall na porta publicada não tem efeito.</a:t>
-            </a:r>
-          </a:p>
-        </p:txBody>
-      </p:sp>
-      <p:sp>
-        <p:nvSpPr>
-          <p:cNvPr id="8" name="Rectangle 7"/>
-          <p:cNvSpPr/>
-          <p:nvPr/>
-        </p:nvSpPr>
-        <p:spPr>
-          <a:xfrm>
-            <a:off x="704850" y="4257294"/>
-            <a:ext cx="57150" cy="57150"/>
-          </a:xfrm>
-          <a:prstGeom prst="rect">
-            <a:avLst/>
-          </a:prstGeom>
-          <a:solidFill>
-            <a:srgbClr val="E94D1C"/>
-          </a:solidFill>
-          <a:ln>
-            <a:noFill/>
-          </a:ln>
-          <a:effectLst/>
-        </p:spPr>
-        <p:style>
-          <a:lnRef idx="1">
-            <a:schemeClr val="accent1"/>
-          </a:lnRef>
-          <a:fillRef idx="3">
-            <a:schemeClr val="accent1"/>
-          </a:fillRef>
-          <a:effectRef idx="2">
-            <a:schemeClr val="accent1"/>
-          </a:effectRef>
-          <a:fontRef idx="minor">
-            <a:schemeClr val="lt1"/>
-          </a:fontRef>
-        </p:style>
-        <p:txBody>
-          <a:bodyPr rtlCol="0" anchor="ctr" wrap="square" lIns="0" rIns="0" tIns="0" bIns="0"/>
-          <a:lstStyle/>
-          <a:p>
-            <a:pPr algn="ctr"/>
-          </a:p>
-        </p:txBody>
-      </p:sp>
-      <p:sp>
-        <p:nvSpPr>
-          <p:cNvPr id="9" name="TextBox 8"/>
-          <p:cNvSpPr txBox="1"/>
-          <p:nvPr/>
-        </p:nvSpPr>
-        <p:spPr>
-          <a:xfrm>
-            <a:off x="971550" y="4148328"/>
-            <a:ext cx="7772400" cy="95250"/>
-          </a:xfrm>
-          <a:prstGeom prst="rect">
-            <a:avLst/>
-          </a:prstGeom>
-          <a:noFill/>
-        </p:spPr>
-        <p:txBody>
-          <a:bodyPr wrap="square" lIns="0" rIns="0" tIns="0" bIns="0" anchor="t">
-            <a:spAutoFit/>
-          </a:bodyPr>
-          <a:lstStyle/>
-          <a:p>
-            <a:pPr algn="l">
-              <a:lnSpc>
-                <a:spcPct val="130000"/>
-              </a:lnSpc>
-            </a:pPr>
-            <a:r>
-              <a:rPr sz="1650" b="0" i="0">
-                <a:solidFill>
-                  <a:srgbClr val="1A1A1E"/>
-                </a:solidFill>
-                <a:latin typeface="Roboto"/>
-              </a:rPr>
-              <a:t>Container com estado continua exigindo backup e upgrade de versão maior do banco.</a:t>
-            </a:r>
-          </a:p>
-        </p:txBody>
-      </p:sp>
-      <p:sp>
-        <p:nvSpPr>
-          <p:cNvPr id="10" name="Rectangle 9"/>
-          <p:cNvSpPr/>
-          <p:nvPr/>
-        </p:nvSpPr>
-        <p:spPr>
-          <a:xfrm>
-            <a:off x="704850" y="5096256"/>
-            <a:ext cx="57150" cy="57150"/>
-          </a:xfrm>
-          <a:prstGeom prst="rect">
-            <a:avLst/>
-          </a:prstGeom>
-          <a:solidFill>
-            <a:srgbClr val="E94D1C"/>
-          </a:solidFill>
-          <a:ln>
-            <a:noFill/>
-          </a:ln>
-          <a:effectLst/>
-        </p:spPr>
-        <p:style>
-          <a:lnRef idx="1">
-            <a:schemeClr val="accent1"/>
-          </a:lnRef>
-          <a:fillRef idx="3">
-            <a:schemeClr val="accent1"/>
-          </a:fillRef>
-          <a:effectRef idx="2">
-            <a:schemeClr val="accent1"/>
-          </a:effectRef>
-          <a:fontRef idx="minor">
-            <a:schemeClr val="lt1"/>
-          </a:fontRef>
-        </p:style>
-        <p:txBody>
-          <a:bodyPr rtlCol="0" anchor="ctr" wrap="square" lIns="0" rIns="0" tIns="0" bIns="0"/>
-          <a:lstStyle/>
-          <a:p>
-            <a:pPr algn="ctr"/>
-          </a:p>
-        </p:txBody>
-      </p:sp>
-      <p:sp>
-        <p:nvSpPr>
-          <p:cNvPr id="11" name="TextBox 10"/>
-          <p:cNvSpPr txBox="1"/>
-          <p:nvPr/>
-        </p:nvSpPr>
-        <p:spPr>
-          <a:xfrm>
-            <a:off x="971550" y="4987290"/>
-            <a:ext cx="7772400" cy="95250"/>
-          </a:xfrm>
-          <a:prstGeom prst="rect">
-            <a:avLst/>
-          </a:prstGeom>
-          <a:noFill/>
-        </p:spPr>
-        <p:txBody>
-          <a:bodyPr wrap="square" lIns="0" rIns="0" tIns="0" bIns="0" anchor="t">
-            <a:spAutoFit/>
-          </a:bodyPr>
-          <a:lstStyle/>
-          <a:p>
-            <a:pPr algn="l">
-              <a:lnSpc>
-                <a:spcPct val="130000"/>
-              </a:lnSpc>
-            </a:pPr>
-            <a:r>
-              <a:rPr sz="1650" b="0" i="0">
-                <a:solidFill>
-                  <a:srgbClr val="1A1A1E"/>
-                </a:solidFill>
-                <a:latin typeface="Roboto"/>
-              </a:rPr>
-              <a:t>O Docker Desktop é pago para empresa acima de certo porte.</a:t>
-            </a:r>
-          </a:p>
-        </p:txBody>
-      </p:sp>
-      <p:sp>
-        <p:nvSpPr>
-          <p:cNvPr id="12" name="Isosceles Triangle 11"/>
-          <p:cNvSpPr/>
-          <p:nvPr/>
-        </p:nvSpPr>
-        <p:spPr>
-          <a:xfrm>
-            <a:off x="9124950" y="2470404"/>
-            <a:ext cx="152400" cy="133350"/>
-          </a:xfrm>
-          <a:prstGeom prst="triangle">
-            <a:avLst/>
-          </a:prstGeom>
-          <a:noFill/>
-          <a:ln w="19050">
-            <a:solidFill>
-              <a:srgbClr val="E94D1C"/>
-            </a:solidFill>
-          </a:ln>
-          <a:effectLst/>
-        </p:spPr>
-        <p:style>
-          <a:lnRef idx="1">
-            <a:schemeClr val="accent1"/>
-          </a:lnRef>
-          <a:fillRef idx="3">
-            <a:schemeClr val="accent1"/>
-          </a:fillRef>
-          <a:effectRef idx="2">
-            <a:schemeClr val="accent1"/>
-          </a:effectRef>
-          <a:fontRef idx="minor">
-            <a:schemeClr val="lt1"/>
-          </a:fontRef>
-        </p:style>
-        <p:txBody>
-          <a:bodyPr rtlCol="0" anchor="ctr"/>
-          <a:lstStyle/>
-          <a:p>
-            <a:pPr algn="ctr"/>
-          </a:p>
-        </p:txBody>
-      </p:sp>
-      <p:sp>
-        <p:nvSpPr>
-          <p:cNvPr id="13" name="Rectangle 12"/>
-          <p:cNvSpPr/>
-          <p:nvPr/>
-        </p:nvSpPr>
-        <p:spPr>
-          <a:xfrm>
-            <a:off x="9193530" y="2527554"/>
-            <a:ext cx="15240" cy="38100"/>
-          </a:xfrm>
-          <a:prstGeom prst="rect">
-            <a:avLst/>
-          </a:prstGeom>
-          <a:solidFill>
-            <a:srgbClr val="E94D1C"/>
-          </a:solidFill>
-          <a:ln>
-            <a:noFill/>
-          </a:ln>
-          <a:effectLst/>
-        </p:spPr>
-        <p:style>
-          <a:lnRef idx="1">
-            <a:schemeClr val="accent1"/>
-          </a:lnRef>
-          <a:fillRef idx="3">
-            <a:schemeClr val="accent1"/>
-          </a:fillRef>
-          <a:effectRef idx="2">
-            <a:schemeClr val="accent1"/>
-          </a:effectRef>
-          <a:fontRef idx="minor">
-            <a:schemeClr val="lt1"/>
-          </a:fontRef>
-        </p:style>
-        <p:txBody>
-          <a:bodyPr rtlCol="0" anchor="ctr"/>
-          <a:lstStyle/>
-          <a:p>
-            <a:pPr algn="ctr"/>
-          </a:p>
-        </p:txBody>
-      </p:sp>
-      <p:sp>
-        <p:nvSpPr>
-          <p:cNvPr id="14" name="TextBox 13"/>
-          <p:cNvSpPr txBox="1"/>
-          <p:nvPr/>
-        </p:nvSpPr>
-        <p:spPr>
-          <a:xfrm>
-            <a:off x="9372600" y="2479929"/>
-            <a:ext cx="2133600" cy="182880"/>
-          </a:xfrm>
-          <a:prstGeom prst="rect">
-            <a:avLst/>
-          </a:prstGeom>
-          <a:noFill/>
-        </p:spPr>
-        <p:txBody>
-          <a:bodyPr wrap="square" lIns="0" rIns="0" tIns="0" bIns="0" anchor="t">
-            <a:spAutoFit/>
-          </a:bodyPr>
-          <a:lstStyle/>
-          <a:p>
-            <a:pPr algn="l">
-              <a:lnSpc>
-                <a:spcPct val="120000"/>
-              </a:lnSpc>
-            </a:pPr>
-            <a:r>
-              <a:rPr sz="900" b="1" i="0" spc="120">
-                <a:solidFill>
-                  <a:srgbClr val="E94D1C"/>
-                </a:solidFill>
-                <a:latin typeface="Roboto"/>
-              </a:rPr>
-              <a:t>NO NOSSO CASO</a:t>
-            </a:r>
-          </a:p>
-        </p:txBody>
-      </p:sp>
-      <p:sp>
-        <p:nvSpPr>
-          <p:cNvPr id="15" name="Rectangle 14"/>
-          <p:cNvSpPr/>
-          <p:nvPr/>
-        </p:nvSpPr>
-        <p:spPr>
-          <a:xfrm>
-            <a:off x="9124950" y="2756154"/>
-            <a:ext cx="38100" cy="1005840"/>
-          </a:xfrm>
-          <a:prstGeom prst="rect">
-            <a:avLst/>
-          </a:prstGeom>
-          <a:solidFill>
-            <a:srgbClr val="E94D1C"/>
-          </a:solidFill>
-          <a:ln>
-            <a:noFill/>
-          </a:ln>
-          <a:effectLst/>
-        </p:spPr>
-        <p:style>
-          <a:lnRef idx="1">
-            <a:schemeClr val="accent1"/>
-          </a:lnRef>
-          <a:fillRef idx="3">
-            <a:schemeClr val="accent1"/>
-          </a:fillRef>
-          <a:effectRef idx="2">
-            <a:schemeClr val="accent1"/>
-          </a:effectRef>
-          <a:fontRef idx="minor">
-            <a:schemeClr val="lt1"/>
-          </a:fontRef>
-        </p:style>
-        <p:txBody>
-          <a:bodyPr rtlCol="0" anchor="ctr" wrap="square" lIns="0" rIns="0" tIns="0" bIns="0"/>
-          <a:lstStyle/>
-          <a:p>
-            <a:pPr algn="ctr"/>
-          </a:p>
-        </p:txBody>
-      </p:sp>
-      <p:sp>
-        <p:nvSpPr>
-          <p:cNvPr id="16" name="TextBox 15"/>
-          <p:cNvSpPr txBox="1"/>
-          <p:nvPr/>
-        </p:nvSpPr>
-        <p:spPr>
-          <a:xfrm>
-            <a:off x="9334500" y="2756154"/>
-            <a:ext cx="2171700" cy="1577340"/>
-          </a:xfrm>
-          <a:prstGeom prst="rect">
-            <a:avLst/>
-          </a:prstGeom>
-          <a:noFill/>
-        </p:spPr>
-        <p:txBody>
-          <a:bodyPr wrap="square" lIns="0" rIns="0" tIns="0" bIns="0" anchor="t">
-            <a:spAutoFit/>
-          </a:bodyPr>
-          <a:lstStyle/>
-          <a:p>
-            <a:pPr algn="l">
-              <a:lnSpc>
-                <a:spcPct val="140000"/>
-              </a:lnSpc>
-              <a:spcAft>
-                <a:spcPts val="600"/>
-              </a:spcAft>
-            </a:pPr>
-            <a:r>
-              <a:rPr sz="1200" b="0" i="0">
-                <a:solidFill>
-                  <a:srgbClr val="3A3A44"/>
-                </a:solidFill>
-                <a:latin typeface="Roboto"/>
-              </a:rPr>
-              <a:t>Dos quatro, o do daemon como root é o que atinge o projeto hoje, porque os quatro integrantes rodam na própria máquina.</a:t>
-            </a:r>
-          </a:p>
-        </p:txBody>
-      </p:sp>
-      <p:sp>
-        <p:nvSpPr>
-          <p:cNvPr id="17" name="TextBox 16"/>
-          <p:cNvSpPr txBox="1"/>
-          <p:nvPr/>
-        </p:nvSpPr>
-        <p:spPr>
-          <a:xfrm>
-            <a:off x="685800" y="6324600"/>
-            <a:ext cx="6667500" cy="182880"/>
-          </a:xfrm>
-          <a:prstGeom prst="rect">
-            <a:avLst/>
-          </a:prstGeom>
-          <a:noFill/>
-        </p:spPr>
-        <p:txBody>
-          <a:bodyPr wrap="square" lIns="0" rIns="0" tIns="0" bIns="0" anchor="t">
-            <a:spAutoFit/>
-          </a:bodyPr>
-          <a:lstStyle/>
-          <a:p>
-            <a:pPr algn="l">
-              <a:lnSpc>
-                <a:spcPct val="120000"/>
-              </a:lnSpc>
-            </a:pPr>
-            <a:r>
-              <a:rPr sz="900" b="0" i="0">
-                <a:solidFill>
-                  <a:srgbClr val="6B6B78"/>
-                </a:solidFill>
-                <a:latin typeface="Roboto"/>
-              </a:rPr>
               <a:t>03 · Vantagens e desvantagens</a:t>
             </a:r>
           </a:p>
@@ -23600,7 +25100,7 @@
       </p:sp>
       <p:sp>
         <p:nvSpPr>
-          <p:cNvPr id="18" name="TextBox 17"/>
+          <p:cNvPr id="53" name="TextBox 52"/>
           <p:cNvSpPr txBox="1"/>
           <p:nvPr/>
         </p:nvSpPr>
@@ -23721,7 +25221,7 @@
                 </a:solidFill>
                 <a:latin typeface="Roboto"/>
               </a:rPr>
-              <a:t>Container e máquina virtual</a:t>
+              <a:t>Alternativas consideradas</a:t>
             </a:r>
           </a:p>
         </p:txBody>
@@ -23734,8 +25234,8 @@
         </p:nvSpPr>
         <p:spPr>
           <a:xfrm>
-            <a:off x="857250" y="2114550"/>
-            <a:ext cx="4762500" cy="182880"/>
+            <a:off x="685800" y="2602230"/>
+            <a:ext cx="2190750" cy="167640"/>
           </a:xfrm>
           <a:prstGeom prst="rect">
             <a:avLst/>
@@ -23754,71 +25254,27 @@
               </a:lnSpc>
             </a:pPr>
             <a:r>
-              <a:rPr sz="900" b="1" i="0" spc="140">
+              <a:rPr sz="819" b="1" i="0" spc="120">
                 <a:solidFill>
                   <a:srgbClr val="21049A"/>
                 </a:solidFill>
                 <a:latin typeface="Roboto"/>
               </a:rPr>
-              <a:t>MÁQUINA VIRTUAL</a:t>
-            </a:r>
-          </a:p>
-        </p:txBody>
-      </p:sp>
-      <p:sp>
-        <p:nvSpPr>
-          <p:cNvPr id="5" name="Rectangle 4"/>
-          <p:cNvSpPr/>
-          <p:nvPr/>
-        </p:nvSpPr>
-        <p:spPr>
-          <a:xfrm>
-            <a:off x="857250" y="4076700"/>
-            <a:ext cx="4762500" cy="323850"/>
-          </a:xfrm>
-          <a:prstGeom prst="rect">
-            <a:avLst/>
-          </a:prstGeom>
-          <a:solidFill>
-            <a:srgbClr val="D9D9D9"/>
-          </a:solidFill>
-          <a:ln>
-            <a:noFill/>
-          </a:ln>
-          <a:effectLst/>
-        </p:spPr>
-        <p:style>
-          <a:lnRef idx="1">
-            <a:schemeClr val="accent1"/>
-          </a:lnRef>
-          <a:fillRef idx="3">
-            <a:schemeClr val="accent1"/>
-          </a:fillRef>
-          <a:effectRef idx="2">
-            <a:schemeClr val="accent1"/>
-          </a:effectRef>
-          <a:fontRef idx="minor">
-            <a:schemeClr val="lt1"/>
-          </a:fontRef>
-        </p:style>
-        <p:txBody>
-          <a:bodyPr rtlCol="0" anchor="ctr" wrap="square" lIns="0" rIns="0" tIns="0" bIns="0"/>
-          <a:lstStyle/>
-          <a:p>
-            <a:pPr algn="ctr"/>
-          </a:p>
-        </p:txBody>
-      </p:sp>
-      <p:sp>
-        <p:nvSpPr>
-          <p:cNvPr id="6" name="TextBox 5"/>
+              <a:t>OPÇÃO</a:t>
+            </a:r>
+          </a:p>
+        </p:txBody>
+      </p:sp>
+      <p:sp>
+        <p:nvSpPr>
+          <p:cNvPr id="5" name="TextBox 4"/>
           <p:cNvSpPr txBox="1"/>
           <p:nvPr/>
         </p:nvSpPr>
         <p:spPr>
           <a:xfrm>
-            <a:off x="857250" y="4162425"/>
-            <a:ext cx="4762500" cy="198120"/>
+            <a:off x="3048000" y="2602230"/>
+            <a:ext cx="3429000" cy="167640"/>
           </a:xfrm>
           <a:prstGeom prst="rect">
             <a:avLst/>
@@ -23831,79 +25287,33 @@
           </a:bodyPr>
           <a:lstStyle/>
           <a:p>
-            <a:pPr algn="ctr">
+            <a:pPr algn="l">
               <a:lnSpc>
                 <a:spcPct val="120000"/>
               </a:lnSpc>
             </a:pPr>
             <a:r>
-              <a:rPr sz="980" b="0" i="0">
-                <a:solidFill>
-                  <a:srgbClr val="1A1A1E"/>
+              <a:rPr sz="819" b="1" i="0" spc="120">
+                <a:solidFill>
+                  <a:srgbClr val="21049A"/>
                 </a:solidFill>
                 <a:latin typeface="Roboto"/>
               </a:rPr>
-              <a:t>hardware</a:t>
-            </a:r>
-          </a:p>
-        </p:txBody>
-      </p:sp>
-      <p:sp>
-        <p:nvSpPr>
-          <p:cNvPr id="7" name="Rectangle 6"/>
-          <p:cNvSpPr/>
-          <p:nvPr/>
-        </p:nvSpPr>
-        <p:spPr>
-          <a:xfrm>
-            <a:off x="857250" y="3714750"/>
-            <a:ext cx="4762500" cy="342900"/>
-          </a:xfrm>
-          <a:prstGeom prst="rect">
-            <a:avLst/>
-          </a:prstGeom>
-          <a:solidFill>
-            <a:srgbClr val="F2F2F5"/>
-          </a:solidFill>
-          <a:ln w="12700">
-            <a:solidFill>
-              <a:srgbClr val="D9D9D9"/>
-            </a:solidFill>
-          </a:ln>
-          <a:effectLst/>
-        </p:spPr>
-        <p:style>
-          <a:lnRef idx="1">
-            <a:schemeClr val="accent1"/>
-          </a:lnRef>
-          <a:fillRef idx="3">
-            <a:schemeClr val="accent1"/>
-          </a:fillRef>
-          <a:effectRef idx="2">
-            <a:schemeClr val="accent1"/>
-          </a:effectRef>
-          <a:fontRef idx="minor">
-            <a:schemeClr val="lt1"/>
-          </a:fontRef>
-        </p:style>
-        <p:txBody>
-          <a:bodyPr rtlCol="0" anchor="ctr" wrap="square" lIns="0" rIns="0" tIns="0" bIns="0"/>
-          <a:lstStyle/>
-          <a:p>
-            <a:pPr algn="ctr"/>
-          </a:p>
-        </p:txBody>
-      </p:sp>
-      <p:sp>
-        <p:nvSpPr>
-          <p:cNvPr id="8" name="TextBox 7"/>
+              <a:t>A FAVOR</a:t>
+            </a:r>
+          </a:p>
+        </p:txBody>
+      </p:sp>
+      <p:sp>
+        <p:nvSpPr>
+          <p:cNvPr id="6" name="TextBox 5"/>
           <p:cNvSpPr txBox="1"/>
           <p:nvPr/>
         </p:nvSpPr>
         <p:spPr>
           <a:xfrm>
-            <a:off x="857250" y="3810000"/>
-            <a:ext cx="4762500" cy="198120"/>
+            <a:off x="6667500" y="2602230"/>
+            <a:ext cx="4762500" cy="167640"/>
           </a:xfrm>
           <a:prstGeom prst="rect">
             <a:avLst/>
@@ -23916,33 +25326,33 @@
           </a:bodyPr>
           <a:lstStyle/>
           <a:p>
-            <a:pPr algn="ctr">
+            <a:pPr algn="l">
               <a:lnSpc>
                 <a:spcPct val="120000"/>
               </a:lnSpc>
             </a:pPr>
             <a:r>
-              <a:rPr sz="980" b="0" i="0">
-                <a:solidFill>
-                  <a:srgbClr val="1A1A1E"/>
+              <a:rPr sz="819" b="1" i="0" spc="120">
+                <a:solidFill>
+                  <a:srgbClr val="21049A"/>
                 </a:solidFill>
                 <a:latin typeface="Roboto"/>
               </a:rPr>
-              <a:t>sistema operacional do host</a:t>
-            </a:r>
-          </a:p>
-        </p:txBody>
-      </p:sp>
-      <p:sp>
-        <p:nvSpPr>
-          <p:cNvPr id="9" name="Rectangle 8"/>
+              <a:t>CONTRA</a:t>
+            </a:r>
+          </a:p>
+        </p:txBody>
+      </p:sp>
+      <p:sp>
+        <p:nvSpPr>
+          <p:cNvPr id="7" name="Rectangle 6"/>
           <p:cNvSpPr/>
           <p:nvPr/>
         </p:nvSpPr>
         <p:spPr>
           <a:xfrm>
-            <a:off x="857250" y="3352800"/>
-            <a:ext cx="4762500" cy="342900"/>
+            <a:off x="685800" y="2830830"/>
+            <a:ext cx="10820400" cy="19050"/>
           </a:xfrm>
           <a:prstGeom prst="rect">
             <a:avLst/>
@@ -23979,14 +25389,14 @@
       </p:sp>
       <p:sp>
         <p:nvSpPr>
-          <p:cNvPr id="10" name="TextBox 9"/>
+          <p:cNvPr id="8" name="TextBox 7"/>
           <p:cNvSpPr txBox="1"/>
           <p:nvPr/>
         </p:nvSpPr>
         <p:spPr>
           <a:xfrm>
-            <a:off x="857250" y="3448050"/>
-            <a:ext cx="4762500" cy="198120"/>
+            <a:off x="685800" y="2983230"/>
+            <a:ext cx="2019300" cy="762000"/>
           </a:xfrm>
           <a:prstGeom prst="rect">
             <a:avLst/>
@@ -23999,46 +25409,120 @@
           </a:bodyPr>
           <a:lstStyle/>
           <a:p>
-            <a:pPr algn="ctr">
-              <a:lnSpc>
-                <a:spcPct val="120000"/>
-              </a:lnSpc>
-            </a:pPr>
-            <a:r>
-              <a:rPr sz="980" b="1" i="0">
-                <a:solidFill>
-                  <a:srgbClr val="FFFFFF"/>
+            <a:pPr algn="l">
+              <a:lnSpc>
+                <a:spcPct val="135000"/>
+              </a:lnSpc>
+            </a:pPr>
+            <a:r>
+              <a:rPr sz="1350" b="1" i="0">
+                <a:solidFill>
+                  <a:srgbClr val="21049A"/>
                 </a:solidFill>
                 <a:latin typeface="Roboto"/>
               </a:rPr>
-              <a:t>hipervisor</a:t>
-            </a:r>
-          </a:p>
-        </p:txBody>
-      </p:sp>
-      <p:sp>
-        <p:nvSpPr>
-          <p:cNvPr id="11" name="Rounded Rectangle 10"/>
+              <a:t>Instalação manual pelo README</a:t>
+            </a:r>
+          </a:p>
+        </p:txBody>
+      </p:sp>
+      <p:sp>
+        <p:nvSpPr>
+          <p:cNvPr id="9" name="TextBox 8"/>
+          <p:cNvSpPr txBox="1"/>
+          <p:nvPr/>
+        </p:nvSpPr>
+        <p:spPr>
+          <a:xfrm>
+            <a:off x="3048000" y="2983230"/>
+            <a:ext cx="3257550" cy="762000"/>
+          </a:xfrm>
+          <a:prstGeom prst="rect">
+            <a:avLst/>
+          </a:prstGeom>
+          <a:noFill/>
+        </p:spPr>
+        <p:txBody>
+          <a:bodyPr wrap="square" lIns="0" rIns="0" tIns="0" bIns="0" anchor="t">
+            <a:spAutoFit/>
+          </a:bodyPr>
+          <a:lstStyle/>
+          <a:p>
+            <a:pPr algn="l">
+              <a:lnSpc>
+                <a:spcPct val="135000"/>
+              </a:lnSpc>
+            </a:pPr>
+            <a:r>
+              <a:rPr sz="1280" b="0" i="0">
+                <a:solidFill>
+                  <a:srgbClr val="1A1A1E"/>
+                </a:solidFill>
+                <a:latin typeface="Roboto"/>
+              </a:rPr>
+              <a:t>Custo zero para começar</a:t>
+            </a:r>
+          </a:p>
+        </p:txBody>
+      </p:sp>
+      <p:sp>
+        <p:nvSpPr>
+          <p:cNvPr id="10" name="TextBox 9"/>
+          <p:cNvSpPr txBox="1"/>
+          <p:nvPr/>
+        </p:nvSpPr>
+        <p:spPr>
+          <a:xfrm>
+            <a:off x="6667500" y="2983230"/>
+            <a:ext cx="4591050" cy="762000"/>
+          </a:xfrm>
+          <a:prstGeom prst="rect">
+            <a:avLst/>
+          </a:prstGeom>
+          <a:noFill/>
+        </p:spPr>
+        <p:txBody>
+          <a:bodyPr wrap="square" lIns="0" rIns="0" tIns="0" bIns="0" anchor="t">
+            <a:spAutoFit/>
+          </a:bodyPr>
+          <a:lstStyle/>
+          <a:p>
+            <a:pPr algn="l">
+              <a:lnSpc>
+                <a:spcPct val="135000"/>
+              </a:lnSpc>
+            </a:pPr>
+            <a:r>
+              <a:rPr sz="1280" b="0" i="0">
+                <a:solidFill>
+                  <a:srgbClr val="1A1A1E"/>
+                </a:solidFill>
+                <a:latin typeface="Roboto"/>
+              </a:rPr>
+              <a:t>Quebra na primeira divergência de versão</a:t>
+            </a:r>
+          </a:p>
+        </p:txBody>
+      </p:sp>
+      <p:sp>
+        <p:nvSpPr>
+          <p:cNvPr id="11" name="Rectangle 10"/>
           <p:cNvSpPr/>
           <p:nvPr/>
         </p:nvSpPr>
         <p:spPr>
           <a:xfrm>
-            <a:off x="952500" y="2990850"/>
-            <a:ext cx="1428750" cy="342900"/>
-          </a:xfrm>
-          <a:prstGeom prst="roundRect">
-            <a:avLst>
-              <a:gd name="adj" fmla="val 5555"/>
-            </a:avLst>
+            <a:off x="685800" y="3509391"/>
+            <a:ext cx="10820400" cy="9525"/>
+          </a:xfrm>
+          <a:prstGeom prst="rect">
+            <a:avLst/>
           </a:prstGeom>
           <a:solidFill>
-            <a:srgbClr val="FDEAE3"/>
+            <a:srgbClr val="EDEDF2"/>
           </a:solidFill>
-          <a:ln w="12700">
-            <a:solidFill>
-              <a:srgbClr val="E94D1C"/>
-            </a:solidFill>
+          <a:ln>
+            <a:noFill/>
           </a:ln>
           <a:effectLst/>
         </p:spPr>
@@ -24072,8 +25556,8 @@
         </p:nvSpPr>
         <p:spPr>
           <a:xfrm>
-            <a:off x="952500" y="3086100"/>
-            <a:ext cx="1428750" cy="182880"/>
+            <a:off x="685800" y="3633216"/>
+            <a:ext cx="2019300" cy="762000"/>
           </a:xfrm>
           <a:prstGeom prst="rect">
             <a:avLst/>
@@ -24086,46 +25570,120 @@
           </a:bodyPr>
           <a:lstStyle/>
           <a:p>
-            <a:pPr algn="ctr">
-              <a:lnSpc>
-                <a:spcPct val="120000"/>
-              </a:lnSpc>
-            </a:pPr>
-            <a:r>
-              <a:rPr sz="900" b="1" i="0">
-                <a:solidFill>
-                  <a:srgbClr val="E94D1C"/>
+            <a:pPr algn="l">
+              <a:lnSpc>
+                <a:spcPct val="135000"/>
+              </a:lnSpc>
+            </a:pPr>
+            <a:r>
+              <a:rPr sz="1350" b="1" i="0">
+                <a:solidFill>
+                  <a:srgbClr val="21049A"/>
                 </a:solidFill>
                 <a:latin typeface="Roboto"/>
               </a:rPr>
-              <a:t>SO convidado</a:t>
-            </a:r>
-          </a:p>
-        </p:txBody>
-      </p:sp>
-      <p:sp>
-        <p:nvSpPr>
-          <p:cNvPr id="13" name="Rounded Rectangle 12"/>
+              <a:t>VM compartilhada</a:t>
+            </a:r>
+          </a:p>
+        </p:txBody>
+      </p:sp>
+      <p:sp>
+        <p:nvSpPr>
+          <p:cNvPr id="13" name="TextBox 12"/>
+          <p:cNvSpPr txBox="1"/>
+          <p:nvPr/>
+        </p:nvSpPr>
+        <p:spPr>
+          <a:xfrm>
+            <a:off x="3048000" y="3633216"/>
+            <a:ext cx="3257550" cy="762000"/>
+          </a:xfrm>
+          <a:prstGeom prst="rect">
+            <a:avLst/>
+          </a:prstGeom>
+          <a:noFill/>
+        </p:spPr>
+        <p:txBody>
+          <a:bodyPr wrap="square" lIns="0" rIns="0" tIns="0" bIns="0" anchor="t">
+            <a:spAutoFit/>
+          </a:bodyPr>
+          <a:lstStyle/>
+          <a:p>
+            <a:pPr algn="l">
+              <a:lnSpc>
+                <a:spcPct val="135000"/>
+              </a:lnSpc>
+            </a:pPr>
+            <a:r>
+              <a:rPr sz="1280" b="0" i="0">
+                <a:solidFill>
+                  <a:srgbClr val="1A1A1E"/>
+                </a:solidFill>
+                <a:latin typeface="Roboto"/>
+              </a:rPr>
+              <a:t>Isolamento imposto em hardware</a:t>
+            </a:r>
+          </a:p>
+        </p:txBody>
+      </p:sp>
+      <p:sp>
+        <p:nvSpPr>
+          <p:cNvPr id="14" name="TextBox 13"/>
+          <p:cNvSpPr txBox="1"/>
+          <p:nvPr/>
+        </p:nvSpPr>
+        <p:spPr>
+          <a:xfrm>
+            <a:off x="6667500" y="3633216"/>
+            <a:ext cx="4591050" cy="762000"/>
+          </a:xfrm>
+          <a:prstGeom prst="rect">
+            <a:avLst/>
+          </a:prstGeom>
+          <a:noFill/>
+        </p:spPr>
+        <p:txBody>
+          <a:bodyPr wrap="square" lIns="0" rIns="0" tIns="0" bIns="0" anchor="t">
+            <a:spAutoFit/>
+          </a:bodyPr>
+          <a:lstStyle/>
+          <a:p>
+            <a:pPr algn="l">
+              <a:lnSpc>
+                <a:spcPct val="135000"/>
+              </a:lnSpc>
+            </a:pPr>
+            <a:r>
+              <a:rPr sz="1280" b="0" i="0">
+                <a:solidFill>
+                  <a:srgbClr val="1A1A1E"/>
+                </a:solidFill>
+                <a:latin typeface="Roboto"/>
+              </a:rPr>
+              <a:t>Pesada e difícil de versionar</a:t>
+            </a:r>
+          </a:p>
+        </p:txBody>
+      </p:sp>
+      <p:sp>
+        <p:nvSpPr>
+          <p:cNvPr id="15" name="Rectangle 14"/>
           <p:cNvSpPr/>
           <p:nvPr/>
         </p:nvSpPr>
         <p:spPr>
           <a:xfrm>
-            <a:off x="952500" y="2705100"/>
-            <a:ext cx="1428750" cy="266700"/>
-          </a:xfrm>
-          <a:prstGeom prst="roundRect">
-            <a:avLst>
-              <a:gd name="adj" fmla="val 7142"/>
-            </a:avLst>
+            <a:off x="685800" y="3958209"/>
+            <a:ext cx="10820400" cy="9525"/>
+          </a:xfrm>
+          <a:prstGeom prst="rect">
+            <a:avLst/>
           </a:prstGeom>
           <a:solidFill>
-            <a:srgbClr val="FFFFFF"/>
+            <a:srgbClr val="EDEDF2"/>
           </a:solidFill>
-          <a:ln w="12700">
-            <a:solidFill>
-              <a:srgbClr val="D9D9D9"/>
-            </a:solidFill>
+          <a:ln>
+            <a:noFill/>
           </a:ln>
           <a:effectLst/>
         </p:spPr>
@@ -24153,14 +25711,14 @@
       </p:sp>
       <p:sp>
         <p:nvSpPr>
-          <p:cNvPr id="14" name="TextBox 13"/>
+          <p:cNvPr id="16" name="TextBox 15"/>
           <p:cNvSpPr txBox="1"/>
           <p:nvPr/>
         </p:nvSpPr>
         <p:spPr>
           <a:xfrm>
-            <a:off x="952500" y="2762250"/>
-            <a:ext cx="1428750" cy="182880"/>
+            <a:off x="685800" y="4082034"/>
+            <a:ext cx="2019300" cy="762000"/>
           </a:xfrm>
           <a:prstGeom prst="rect">
             <a:avLst/>
@@ -24173,46 +25731,120 @@
           </a:bodyPr>
           <a:lstStyle/>
           <a:p>
-            <a:pPr algn="ctr">
-              <a:lnSpc>
-                <a:spcPct val="120000"/>
-              </a:lnSpc>
-            </a:pPr>
-            <a:r>
-              <a:rPr sz="900" b="0" i="0">
-                <a:solidFill>
-                  <a:srgbClr val="6B6B78"/>
+            <a:pPr algn="l">
+              <a:lnSpc>
+                <a:spcPct val="135000"/>
+              </a:lnSpc>
+            </a:pPr>
+            <a:r>
+              <a:rPr sz="1350" b="1" i="0">
+                <a:solidFill>
+                  <a:srgbClr val="21049A"/>
                 </a:solidFill>
                 <a:latin typeface="Roboto"/>
               </a:rPr>
-              <a:t>bibliotecas</a:t>
-            </a:r>
-          </a:p>
-        </p:txBody>
-      </p:sp>
-      <p:sp>
-        <p:nvSpPr>
-          <p:cNvPr id="15" name="Rounded Rectangle 14"/>
+              <a:t>Podman</a:t>
+            </a:r>
+          </a:p>
+        </p:txBody>
+      </p:sp>
+      <p:sp>
+        <p:nvSpPr>
+          <p:cNvPr id="17" name="TextBox 16"/>
+          <p:cNvSpPr txBox="1"/>
+          <p:nvPr/>
+        </p:nvSpPr>
+        <p:spPr>
+          <a:xfrm>
+            <a:off x="3048000" y="4082034"/>
+            <a:ext cx="3257550" cy="762000"/>
+          </a:xfrm>
+          <a:prstGeom prst="rect">
+            <a:avLst/>
+          </a:prstGeom>
+          <a:noFill/>
+        </p:spPr>
+        <p:txBody>
+          <a:bodyPr wrap="square" lIns="0" rIns="0" tIns="0" bIns="0" anchor="t">
+            <a:spAutoFit/>
+          </a:bodyPr>
+          <a:lstStyle/>
+          <a:p>
+            <a:pPr algn="l">
+              <a:lnSpc>
+                <a:spcPct val="135000"/>
+              </a:lnSpc>
+            </a:pPr>
+            <a:r>
+              <a:rPr sz="1280" b="0" i="0">
+                <a:solidFill>
+                  <a:srgbClr val="1A1A1E"/>
+                </a:solidFill>
+                <a:latin typeface="Roboto"/>
+              </a:rPr>
+              <a:t>Mesmo modelo, sem daemon root</a:t>
+            </a:r>
+          </a:p>
+        </p:txBody>
+      </p:sp>
+      <p:sp>
+        <p:nvSpPr>
+          <p:cNvPr id="18" name="TextBox 17"/>
+          <p:cNvSpPr txBox="1"/>
+          <p:nvPr/>
+        </p:nvSpPr>
+        <p:spPr>
+          <a:xfrm>
+            <a:off x="6667500" y="4082034"/>
+            <a:ext cx="4591050" cy="762000"/>
+          </a:xfrm>
+          <a:prstGeom prst="rect">
+            <a:avLst/>
+          </a:prstGeom>
+          <a:noFill/>
+        </p:spPr>
+        <p:txBody>
+          <a:bodyPr wrap="square" lIns="0" rIns="0" tIns="0" bIns="0" anchor="t">
+            <a:spAutoFit/>
+          </a:bodyPr>
+          <a:lstStyle/>
+          <a:p>
+            <a:pPr algn="l">
+              <a:lnSpc>
+                <a:spcPct val="135000"/>
+              </a:lnSpc>
+            </a:pPr>
+            <a:r>
+              <a:rPr sz="1280" b="0" i="0">
+                <a:solidFill>
+                  <a:srgbClr val="1A1A1E"/>
+                </a:solidFill>
+                <a:latin typeface="Roboto"/>
+              </a:rPr>
+              <a:t>Menos material e menos gente do time conhece</a:t>
+            </a:r>
+          </a:p>
+        </p:txBody>
+      </p:sp>
+      <p:sp>
+        <p:nvSpPr>
+          <p:cNvPr id="19" name="Rectangle 18"/>
           <p:cNvSpPr/>
           <p:nvPr/>
         </p:nvSpPr>
         <p:spPr>
           <a:xfrm>
-            <a:off x="952500" y="2419350"/>
-            <a:ext cx="1428750" cy="266700"/>
-          </a:xfrm>
-          <a:prstGeom prst="roundRect">
-            <a:avLst>
-              <a:gd name="adj" fmla="val 7142"/>
-            </a:avLst>
+            <a:off x="685800" y="4407027"/>
+            <a:ext cx="10820400" cy="9525"/>
+          </a:xfrm>
+          <a:prstGeom prst="rect">
+            <a:avLst/>
           </a:prstGeom>
           <a:solidFill>
-            <a:srgbClr val="FFFFFF"/>
+            <a:srgbClr val="EDEDF2"/>
           </a:solidFill>
-          <a:ln w="12700">
-            <a:solidFill>
-              <a:srgbClr val="21049A"/>
-            </a:solidFill>
+          <a:ln>
+            <a:noFill/>
           </a:ln>
           <a:effectLst/>
         </p:spPr>
@@ -24240,1465 +25872,14 @@
       </p:sp>
       <p:sp>
         <p:nvSpPr>
-          <p:cNvPr id="16" name="TextBox 15"/>
-          <p:cNvSpPr txBox="1"/>
-          <p:nvPr/>
-        </p:nvSpPr>
-        <p:spPr>
-          <a:xfrm>
-            <a:off x="952500" y="2476500"/>
-            <a:ext cx="1428750" cy="182880"/>
-          </a:xfrm>
-          <a:prstGeom prst="rect">
-            <a:avLst/>
-          </a:prstGeom>
-          <a:noFill/>
-        </p:spPr>
-        <p:txBody>
-          <a:bodyPr wrap="square" lIns="0" rIns="0" tIns="0" bIns="0" anchor="t">
-            <a:spAutoFit/>
-          </a:bodyPr>
-          <a:lstStyle/>
-          <a:p>
-            <a:pPr algn="ctr">
-              <a:lnSpc>
-                <a:spcPct val="120000"/>
-              </a:lnSpc>
-            </a:pPr>
-            <a:r>
-              <a:rPr sz="900" b="1" i="0">
-                <a:solidFill>
-                  <a:srgbClr val="21049A"/>
-                </a:solidFill>
-                <a:latin typeface="Roboto"/>
-              </a:rPr>
-              <a:t>app A</a:t>
-            </a:r>
-          </a:p>
-        </p:txBody>
-      </p:sp>
-      <p:sp>
-        <p:nvSpPr>
-          <p:cNvPr id="17" name="Rounded Rectangle 16"/>
+          <p:cNvPr id="20" name="Rectangle 19"/>
           <p:cNvSpPr/>
           <p:nvPr/>
         </p:nvSpPr>
         <p:spPr>
           <a:xfrm>
-            <a:off x="2524125" y="2990850"/>
-            <a:ext cx="1428750" cy="342900"/>
-          </a:xfrm>
-          <a:prstGeom prst="roundRect">
-            <a:avLst>
-              <a:gd name="adj" fmla="val 5555"/>
-            </a:avLst>
-          </a:prstGeom>
-          <a:solidFill>
-            <a:srgbClr val="FDEAE3"/>
-          </a:solidFill>
-          <a:ln w="12700">
-            <a:solidFill>
-              <a:srgbClr val="E94D1C"/>
-            </a:solidFill>
-          </a:ln>
-          <a:effectLst/>
-        </p:spPr>
-        <p:style>
-          <a:lnRef idx="1">
-            <a:schemeClr val="accent1"/>
-          </a:lnRef>
-          <a:fillRef idx="3">
-            <a:schemeClr val="accent1"/>
-          </a:fillRef>
-          <a:effectRef idx="2">
-            <a:schemeClr val="accent1"/>
-          </a:effectRef>
-          <a:fontRef idx="minor">
-            <a:schemeClr val="lt1"/>
-          </a:fontRef>
-        </p:style>
-        <p:txBody>
-          <a:bodyPr rtlCol="0" anchor="ctr" wrap="square" lIns="0" rIns="0" tIns="0" bIns="0"/>
-          <a:lstStyle/>
-          <a:p>
-            <a:pPr algn="ctr"/>
-          </a:p>
-        </p:txBody>
-      </p:sp>
-      <p:sp>
-        <p:nvSpPr>
-          <p:cNvPr id="18" name="TextBox 17"/>
-          <p:cNvSpPr txBox="1"/>
-          <p:nvPr/>
-        </p:nvSpPr>
-        <p:spPr>
-          <a:xfrm>
-            <a:off x="2524125" y="3086100"/>
-            <a:ext cx="1428750" cy="182880"/>
-          </a:xfrm>
-          <a:prstGeom prst="rect">
-            <a:avLst/>
-          </a:prstGeom>
-          <a:noFill/>
-        </p:spPr>
-        <p:txBody>
-          <a:bodyPr wrap="square" lIns="0" rIns="0" tIns="0" bIns="0" anchor="t">
-            <a:spAutoFit/>
-          </a:bodyPr>
-          <a:lstStyle/>
-          <a:p>
-            <a:pPr algn="ctr">
-              <a:lnSpc>
-                <a:spcPct val="120000"/>
-              </a:lnSpc>
-            </a:pPr>
-            <a:r>
-              <a:rPr sz="900" b="1" i="0">
-                <a:solidFill>
-                  <a:srgbClr val="E94D1C"/>
-                </a:solidFill>
-                <a:latin typeface="Roboto"/>
-              </a:rPr>
-              <a:t>SO convidado</a:t>
-            </a:r>
-          </a:p>
-        </p:txBody>
-      </p:sp>
-      <p:sp>
-        <p:nvSpPr>
-          <p:cNvPr id="19" name="Rounded Rectangle 18"/>
-          <p:cNvSpPr/>
-          <p:nvPr/>
-        </p:nvSpPr>
-        <p:spPr>
-          <a:xfrm>
-            <a:off x="2524125" y="2705100"/>
-            <a:ext cx="1428750" cy="266700"/>
-          </a:xfrm>
-          <a:prstGeom prst="roundRect">
-            <a:avLst>
-              <a:gd name="adj" fmla="val 7142"/>
-            </a:avLst>
-          </a:prstGeom>
-          <a:solidFill>
-            <a:srgbClr val="FFFFFF"/>
-          </a:solidFill>
-          <a:ln w="12700">
-            <a:solidFill>
-              <a:srgbClr val="D9D9D9"/>
-            </a:solidFill>
-          </a:ln>
-          <a:effectLst/>
-        </p:spPr>
-        <p:style>
-          <a:lnRef idx="1">
-            <a:schemeClr val="accent1"/>
-          </a:lnRef>
-          <a:fillRef idx="3">
-            <a:schemeClr val="accent1"/>
-          </a:fillRef>
-          <a:effectRef idx="2">
-            <a:schemeClr val="accent1"/>
-          </a:effectRef>
-          <a:fontRef idx="minor">
-            <a:schemeClr val="lt1"/>
-          </a:fontRef>
-        </p:style>
-        <p:txBody>
-          <a:bodyPr rtlCol="0" anchor="ctr" wrap="square" lIns="0" rIns="0" tIns="0" bIns="0"/>
-          <a:lstStyle/>
-          <a:p>
-            <a:pPr algn="ctr"/>
-          </a:p>
-        </p:txBody>
-      </p:sp>
-      <p:sp>
-        <p:nvSpPr>
-          <p:cNvPr id="20" name="TextBox 19"/>
-          <p:cNvSpPr txBox="1"/>
-          <p:nvPr/>
-        </p:nvSpPr>
-        <p:spPr>
-          <a:xfrm>
-            <a:off x="2524125" y="2762250"/>
-            <a:ext cx="1428750" cy="182880"/>
-          </a:xfrm>
-          <a:prstGeom prst="rect">
-            <a:avLst/>
-          </a:prstGeom>
-          <a:noFill/>
-        </p:spPr>
-        <p:txBody>
-          <a:bodyPr wrap="square" lIns="0" rIns="0" tIns="0" bIns="0" anchor="t">
-            <a:spAutoFit/>
-          </a:bodyPr>
-          <a:lstStyle/>
-          <a:p>
-            <a:pPr algn="ctr">
-              <a:lnSpc>
-                <a:spcPct val="120000"/>
-              </a:lnSpc>
-            </a:pPr>
-            <a:r>
-              <a:rPr sz="900" b="0" i="0">
-                <a:solidFill>
-                  <a:srgbClr val="6B6B78"/>
-                </a:solidFill>
-                <a:latin typeface="Roboto"/>
-              </a:rPr>
-              <a:t>bibliotecas</a:t>
-            </a:r>
-          </a:p>
-        </p:txBody>
-      </p:sp>
-      <p:sp>
-        <p:nvSpPr>
-          <p:cNvPr id="21" name="Rounded Rectangle 20"/>
-          <p:cNvSpPr/>
-          <p:nvPr/>
-        </p:nvSpPr>
-        <p:spPr>
-          <a:xfrm>
-            <a:off x="2524125" y="2419350"/>
-            <a:ext cx="1428750" cy="266700"/>
-          </a:xfrm>
-          <a:prstGeom prst="roundRect">
-            <a:avLst>
-              <a:gd name="adj" fmla="val 7142"/>
-            </a:avLst>
-          </a:prstGeom>
-          <a:solidFill>
-            <a:srgbClr val="FFFFFF"/>
-          </a:solidFill>
-          <a:ln w="12700">
-            <a:solidFill>
-              <a:srgbClr val="21049A"/>
-            </a:solidFill>
-          </a:ln>
-          <a:effectLst/>
-        </p:spPr>
-        <p:style>
-          <a:lnRef idx="1">
-            <a:schemeClr val="accent1"/>
-          </a:lnRef>
-          <a:fillRef idx="3">
-            <a:schemeClr val="accent1"/>
-          </a:fillRef>
-          <a:effectRef idx="2">
-            <a:schemeClr val="accent1"/>
-          </a:effectRef>
-          <a:fontRef idx="minor">
-            <a:schemeClr val="lt1"/>
-          </a:fontRef>
-        </p:style>
-        <p:txBody>
-          <a:bodyPr rtlCol="0" anchor="ctr" wrap="square" lIns="0" rIns="0" tIns="0" bIns="0"/>
-          <a:lstStyle/>
-          <a:p>
-            <a:pPr algn="ctr"/>
-          </a:p>
-        </p:txBody>
-      </p:sp>
-      <p:sp>
-        <p:nvSpPr>
-          <p:cNvPr id="22" name="TextBox 21"/>
-          <p:cNvSpPr txBox="1"/>
-          <p:nvPr/>
-        </p:nvSpPr>
-        <p:spPr>
-          <a:xfrm>
-            <a:off x="2524125" y="2476500"/>
-            <a:ext cx="1428750" cy="182880"/>
-          </a:xfrm>
-          <a:prstGeom prst="rect">
-            <a:avLst/>
-          </a:prstGeom>
-          <a:noFill/>
-        </p:spPr>
-        <p:txBody>
-          <a:bodyPr wrap="square" lIns="0" rIns="0" tIns="0" bIns="0" anchor="t">
-            <a:spAutoFit/>
-          </a:bodyPr>
-          <a:lstStyle/>
-          <a:p>
-            <a:pPr algn="ctr">
-              <a:lnSpc>
-                <a:spcPct val="120000"/>
-              </a:lnSpc>
-            </a:pPr>
-            <a:r>
-              <a:rPr sz="900" b="1" i="0">
-                <a:solidFill>
-                  <a:srgbClr val="21049A"/>
-                </a:solidFill>
-                <a:latin typeface="Roboto"/>
-              </a:rPr>
-              <a:t>app B</a:t>
-            </a:r>
-          </a:p>
-        </p:txBody>
-      </p:sp>
-      <p:sp>
-        <p:nvSpPr>
-          <p:cNvPr id="23" name="Rounded Rectangle 22"/>
-          <p:cNvSpPr/>
-          <p:nvPr/>
-        </p:nvSpPr>
-        <p:spPr>
-          <a:xfrm>
-            <a:off x="4095750" y="2990850"/>
-            <a:ext cx="1428750" cy="342900"/>
-          </a:xfrm>
-          <a:prstGeom prst="roundRect">
-            <a:avLst>
-              <a:gd name="adj" fmla="val 5555"/>
-            </a:avLst>
-          </a:prstGeom>
-          <a:solidFill>
-            <a:srgbClr val="FDEAE3"/>
-          </a:solidFill>
-          <a:ln w="12700">
-            <a:solidFill>
-              <a:srgbClr val="E94D1C"/>
-            </a:solidFill>
-          </a:ln>
-          <a:effectLst/>
-        </p:spPr>
-        <p:style>
-          <a:lnRef idx="1">
-            <a:schemeClr val="accent1"/>
-          </a:lnRef>
-          <a:fillRef idx="3">
-            <a:schemeClr val="accent1"/>
-          </a:fillRef>
-          <a:effectRef idx="2">
-            <a:schemeClr val="accent1"/>
-          </a:effectRef>
-          <a:fontRef idx="minor">
-            <a:schemeClr val="lt1"/>
-          </a:fontRef>
-        </p:style>
-        <p:txBody>
-          <a:bodyPr rtlCol="0" anchor="ctr" wrap="square" lIns="0" rIns="0" tIns="0" bIns="0"/>
-          <a:lstStyle/>
-          <a:p>
-            <a:pPr algn="ctr"/>
-          </a:p>
-        </p:txBody>
-      </p:sp>
-      <p:sp>
-        <p:nvSpPr>
-          <p:cNvPr id="24" name="TextBox 23"/>
-          <p:cNvSpPr txBox="1"/>
-          <p:nvPr/>
-        </p:nvSpPr>
-        <p:spPr>
-          <a:xfrm>
-            <a:off x="4095750" y="3086100"/>
-            <a:ext cx="1428750" cy="182880"/>
-          </a:xfrm>
-          <a:prstGeom prst="rect">
-            <a:avLst/>
-          </a:prstGeom>
-          <a:noFill/>
-        </p:spPr>
-        <p:txBody>
-          <a:bodyPr wrap="square" lIns="0" rIns="0" tIns="0" bIns="0" anchor="t">
-            <a:spAutoFit/>
-          </a:bodyPr>
-          <a:lstStyle/>
-          <a:p>
-            <a:pPr algn="ctr">
-              <a:lnSpc>
-                <a:spcPct val="120000"/>
-              </a:lnSpc>
-            </a:pPr>
-            <a:r>
-              <a:rPr sz="900" b="1" i="0">
-                <a:solidFill>
-                  <a:srgbClr val="E94D1C"/>
-                </a:solidFill>
-                <a:latin typeface="Roboto"/>
-              </a:rPr>
-              <a:t>SO convidado</a:t>
-            </a:r>
-          </a:p>
-        </p:txBody>
-      </p:sp>
-      <p:sp>
-        <p:nvSpPr>
-          <p:cNvPr id="25" name="Rounded Rectangle 24"/>
-          <p:cNvSpPr/>
-          <p:nvPr/>
-        </p:nvSpPr>
-        <p:spPr>
-          <a:xfrm>
-            <a:off x="4095750" y="2705100"/>
-            <a:ext cx="1428750" cy="266700"/>
-          </a:xfrm>
-          <a:prstGeom prst="roundRect">
-            <a:avLst>
-              <a:gd name="adj" fmla="val 7142"/>
-            </a:avLst>
-          </a:prstGeom>
-          <a:solidFill>
-            <a:srgbClr val="FFFFFF"/>
-          </a:solidFill>
-          <a:ln w="12700">
-            <a:solidFill>
-              <a:srgbClr val="D9D9D9"/>
-            </a:solidFill>
-          </a:ln>
-          <a:effectLst/>
-        </p:spPr>
-        <p:style>
-          <a:lnRef idx="1">
-            <a:schemeClr val="accent1"/>
-          </a:lnRef>
-          <a:fillRef idx="3">
-            <a:schemeClr val="accent1"/>
-          </a:fillRef>
-          <a:effectRef idx="2">
-            <a:schemeClr val="accent1"/>
-          </a:effectRef>
-          <a:fontRef idx="minor">
-            <a:schemeClr val="lt1"/>
-          </a:fontRef>
-        </p:style>
-        <p:txBody>
-          <a:bodyPr rtlCol="0" anchor="ctr" wrap="square" lIns="0" rIns="0" tIns="0" bIns="0"/>
-          <a:lstStyle/>
-          <a:p>
-            <a:pPr algn="ctr"/>
-          </a:p>
-        </p:txBody>
-      </p:sp>
-      <p:sp>
-        <p:nvSpPr>
-          <p:cNvPr id="26" name="TextBox 25"/>
-          <p:cNvSpPr txBox="1"/>
-          <p:nvPr/>
-        </p:nvSpPr>
-        <p:spPr>
-          <a:xfrm>
-            <a:off x="4095750" y="2762250"/>
-            <a:ext cx="1428750" cy="182880"/>
-          </a:xfrm>
-          <a:prstGeom prst="rect">
-            <a:avLst/>
-          </a:prstGeom>
-          <a:noFill/>
-        </p:spPr>
-        <p:txBody>
-          <a:bodyPr wrap="square" lIns="0" rIns="0" tIns="0" bIns="0" anchor="t">
-            <a:spAutoFit/>
-          </a:bodyPr>
-          <a:lstStyle/>
-          <a:p>
-            <a:pPr algn="ctr">
-              <a:lnSpc>
-                <a:spcPct val="120000"/>
-              </a:lnSpc>
-            </a:pPr>
-            <a:r>
-              <a:rPr sz="900" b="0" i="0">
-                <a:solidFill>
-                  <a:srgbClr val="6B6B78"/>
-                </a:solidFill>
-                <a:latin typeface="Roboto"/>
-              </a:rPr>
-              <a:t>bibliotecas</a:t>
-            </a:r>
-          </a:p>
-        </p:txBody>
-      </p:sp>
-      <p:sp>
-        <p:nvSpPr>
-          <p:cNvPr id="27" name="Rounded Rectangle 26"/>
-          <p:cNvSpPr/>
-          <p:nvPr/>
-        </p:nvSpPr>
-        <p:spPr>
-          <a:xfrm>
-            <a:off x="4095750" y="2419350"/>
-            <a:ext cx="1428750" cy="266700"/>
-          </a:xfrm>
-          <a:prstGeom prst="roundRect">
-            <a:avLst>
-              <a:gd name="adj" fmla="val 7142"/>
-            </a:avLst>
-          </a:prstGeom>
-          <a:solidFill>
-            <a:srgbClr val="FFFFFF"/>
-          </a:solidFill>
-          <a:ln w="12700">
-            <a:solidFill>
-              <a:srgbClr val="21049A"/>
-            </a:solidFill>
-          </a:ln>
-          <a:effectLst/>
-        </p:spPr>
-        <p:style>
-          <a:lnRef idx="1">
-            <a:schemeClr val="accent1"/>
-          </a:lnRef>
-          <a:fillRef idx="3">
-            <a:schemeClr val="accent1"/>
-          </a:fillRef>
-          <a:effectRef idx="2">
-            <a:schemeClr val="accent1"/>
-          </a:effectRef>
-          <a:fontRef idx="minor">
-            <a:schemeClr val="lt1"/>
-          </a:fontRef>
-        </p:style>
-        <p:txBody>
-          <a:bodyPr rtlCol="0" anchor="ctr" wrap="square" lIns="0" rIns="0" tIns="0" bIns="0"/>
-          <a:lstStyle/>
-          <a:p>
-            <a:pPr algn="ctr"/>
-          </a:p>
-        </p:txBody>
-      </p:sp>
-      <p:sp>
-        <p:nvSpPr>
-          <p:cNvPr id="28" name="TextBox 27"/>
-          <p:cNvSpPr txBox="1"/>
-          <p:nvPr/>
-        </p:nvSpPr>
-        <p:spPr>
-          <a:xfrm>
-            <a:off x="4095750" y="2476500"/>
-            <a:ext cx="1428750" cy="182880"/>
-          </a:xfrm>
-          <a:prstGeom prst="rect">
-            <a:avLst/>
-          </a:prstGeom>
-          <a:noFill/>
-        </p:spPr>
-        <p:txBody>
-          <a:bodyPr wrap="square" lIns="0" rIns="0" tIns="0" bIns="0" anchor="t">
-            <a:spAutoFit/>
-          </a:bodyPr>
-          <a:lstStyle/>
-          <a:p>
-            <a:pPr algn="ctr">
-              <a:lnSpc>
-                <a:spcPct val="120000"/>
-              </a:lnSpc>
-            </a:pPr>
-            <a:r>
-              <a:rPr sz="900" b="1" i="0">
-                <a:solidFill>
-                  <a:srgbClr val="21049A"/>
-                </a:solidFill>
-                <a:latin typeface="Roboto"/>
-              </a:rPr>
-              <a:t>app C</a:t>
-            </a:r>
-          </a:p>
-        </p:txBody>
-      </p:sp>
-      <p:sp>
-        <p:nvSpPr>
-          <p:cNvPr id="29" name="TextBox 28"/>
-          <p:cNvSpPr txBox="1"/>
-          <p:nvPr/>
-        </p:nvSpPr>
-        <p:spPr>
-          <a:xfrm>
-            <a:off x="6572250" y="2114550"/>
-            <a:ext cx="4762500" cy="182880"/>
-          </a:xfrm>
-          <a:prstGeom prst="rect">
-            <a:avLst/>
-          </a:prstGeom>
-          <a:noFill/>
-        </p:spPr>
-        <p:txBody>
-          <a:bodyPr wrap="square" lIns="0" rIns="0" tIns="0" bIns="0" anchor="t">
-            <a:spAutoFit/>
-          </a:bodyPr>
-          <a:lstStyle/>
-          <a:p>
-            <a:pPr algn="l">
-              <a:lnSpc>
-                <a:spcPct val="120000"/>
-              </a:lnSpc>
-            </a:pPr>
-            <a:r>
-              <a:rPr sz="900" b="1" i="0" spc="140">
-                <a:solidFill>
-                  <a:srgbClr val="E94D1C"/>
-                </a:solidFill>
-                <a:latin typeface="Roboto"/>
-              </a:rPr>
-              <a:t>CONTAINER</a:t>
-            </a:r>
-          </a:p>
-        </p:txBody>
-      </p:sp>
-      <p:sp>
-        <p:nvSpPr>
-          <p:cNvPr id="30" name="Rectangle 29"/>
-          <p:cNvSpPr/>
-          <p:nvPr/>
-        </p:nvSpPr>
-        <p:spPr>
-          <a:xfrm>
-            <a:off x="6572250" y="4076700"/>
-            <a:ext cx="4762500" cy="323850"/>
-          </a:xfrm>
-          <a:prstGeom prst="rect">
-            <a:avLst/>
-          </a:prstGeom>
-          <a:solidFill>
-            <a:srgbClr val="D9D9D9"/>
-          </a:solidFill>
-          <a:ln>
-            <a:noFill/>
-          </a:ln>
-          <a:effectLst/>
-        </p:spPr>
-        <p:style>
-          <a:lnRef idx="1">
-            <a:schemeClr val="accent1"/>
-          </a:lnRef>
-          <a:fillRef idx="3">
-            <a:schemeClr val="accent1"/>
-          </a:fillRef>
-          <a:effectRef idx="2">
-            <a:schemeClr val="accent1"/>
-          </a:effectRef>
-          <a:fontRef idx="minor">
-            <a:schemeClr val="lt1"/>
-          </a:fontRef>
-        </p:style>
-        <p:txBody>
-          <a:bodyPr rtlCol="0" anchor="ctr" wrap="square" lIns="0" rIns="0" tIns="0" bIns="0"/>
-          <a:lstStyle/>
-          <a:p>
-            <a:pPr algn="ctr"/>
-          </a:p>
-        </p:txBody>
-      </p:sp>
-      <p:sp>
-        <p:nvSpPr>
-          <p:cNvPr id="31" name="TextBox 30"/>
-          <p:cNvSpPr txBox="1"/>
-          <p:nvPr/>
-        </p:nvSpPr>
-        <p:spPr>
-          <a:xfrm>
-            <a:off x="6572250" y="4162425"/>
-            <a:ext cx="4762500" cy="198120"/>
-          </a:xfrm>
-          <a:prstGeom prst="rect">
-            <a:avLst/>
-          </a:prstGeom>
-          <a:noFill/>
-        </p:spPr>
-        <p:txBody>
-          <a:bodyPr wrap="square" lIns="0" rIns="0" tIns="0" bIns="0" anchor="t">
-            <a:spAutoFit/>
-          </a:bodyPr>
-          <a:lstStyle/>
-          <a:p>
-            <a:pPr algn="ctr">
-              <a:lnSpc>
-                <a:spcPct val="120000"/>
-              </a:lnSpc>
-            </a:pPr>
-            <a:r>
-              <a:rPr sz="980" b="0" i="0">
-                <a:solidFill>
-                  <a:srgbClr val="1A1A1E"/>
-                </a:solidFill>
-                <a:latin typeface="Roboto"/>
-              </a:rPr>
-              <a:t>hardware</a:t>
-            </a:r>
-          </a:p>
-        </p:txBody>
-      </p:sp>
-      <p:sp>
-        <p:nvSpPr>
-          <p:cNvPr id="32" name="Rectangle 31"/>
-          <p:cNvSpPr/>
-          <p:nvPr/>
-        </p:nvSpPr>
-        <p:spPr>
-          <a:xfrm>
-            <a:off x="6572250" y="3714750"/>
-            <a:ext cx="4762500" cy="342900"/>
-          </a:xfrm>
-          <a:prstGeom prst="rect">
-            <a:avLst/>
-          </a:prstGeom>
-          <a:solidFill>
-            <a:srgbClr val="F2F2F5"/>
-          </a:solidFill>
-          <a:ln w="12700">
-            <a:solidFill>
-              <a:srgbClr val="D9D9D9"/>
-            </a:solidFill>
-          </a:ln>
-          <a:effectLst/>
-        </p:spPr>
-        <p:style>
-          <a:lnRef idx="1">
-            <a:schemeClr val="accent1"/>
-          </a:lnRef>
-          <a:fillRef idx="3">
-            <a:schemeClr val="accent1"/>
-          </a:fillRef>
-          <a:effectRef idx="2">
-            <a:schemeClr val="accent1"/>
-          </a:effectRef>
-          <a:fontRef idx="minor">
-            <a:schemeClr val="lt1"/>
-          </a:fontRef>
-        </p:style>
-        <p:txBody>
-          <a:bodyPr rtlCol="0" anchor="ctr" wrap="square" lIns="0" rIns="0" tIns="0" bIns="0"/>
-          <a:lstStyle/>
-          <a:p>
-            <a:pPr algn="ctr"/>
-          </a:p>
-        </p:txBody>
-      </p:sp>
-      <p:sp>
-        <p:nvSpPr>
-          <p:cNvPr id="33" name="TextBox 32"/>
-          <p:cNvSpPr txBox="1"/>
-          <p:nvPr/>
-        </p:nvSpPr>
-        <p:spPr>
-          <a:xfrm>
-            <a:off x="6572250" y="3810000"/>
-            <a:ext cx="4762500" cy="198120"/>
-          </a:xfrm>
-          <a:prstGeom prst="rect">
-            <a:avLst/>
-          </a:prstGeom>
-          <a:noFill/>
-        </p:spPr>
-        <p:txBody>
-          <a:bodyPr wrap="square" lIns="0" rIns="0" tIns="0" bIns="0" anchor="t">
-            <a:spAutoFit/>
-          </a:bodyPr>
-          <a:lstStyle/>
-          <a:p>
-            <a:pPr algn="ctr">
-              <a:lnSpc>
-                <a:spcPct val="120000"/>
-              </a:lnSpc>
-            </a:pPr>
-            <a:r>
-              <a:rPr sz="980" b="0" i="0">
-                <a:solidFill>
-                  <a:srgbClr val="1A1A1E"/>
-                </a:solidFill>
-                <a:latin typeface="Roboto"/>
-              </a:rPr>
-              <a:t>kernel do host, compartilhado por todos</a:t>
-            </a:r>
-          </a:p>
-        </p:txBody>
-      </p:sp>
-      <p:sp>
-        <p:nvSpPr>
-          <p:cNvPr id="34" name="Rectangle 33"/>
-          <p:cNvSpPr/>
-          <p:nvPr/>
-        </p:nvSpPr>
-        <p:spPr>
-          <a:xfrm>
-            <a:off x="6572250" y="3352800"/>
-            <a:ext cx="4762500" cy="342900"/>
-          </a:xfrm>
-          <a:prstGeom prst="rect">
-            <a:avLst/>
-          </a:prstGeom>
-          <a:solidFill>
-            <a:srgbClr val="21049A"/>
-          </a:solidFill>
-          <a:ln>
-            <a:noFill/>
-          </a:ln>
-          <a:effectLst/>
-        </p:spPr>
-        <p:style>
-          <a:lnRef idx="1">
-            <a:schemeClr val="accent1"/>
-          </a:lnRef>
-          <a:fillRef idx="3">
-            <a:schemeClr val="accent1"/>
-          </a:fillRef>
-          <a:effectRef idx="2">
-            <a:schemeClr val="accent1"/>
-          </a:effectRef>
-          <a:fontRef idx="minor">
-            <a:schemeClr val="lt1"/>
-          </a:fontRef>
-        </p:style>
-        <p:txBody>
-          <a:bodyPr rtlCol="0" anchor="ctr" wrap="square" lIns="0" rIns="0" tIns="0" bIns="0"/>
-          <a:lstStyle/>
-          <a:p>
-            <a:pPr algn="ctr"/>
-          </a:p>
-        </p:txBody>
-      </p:sp>
-      <p:sp>
-        <p:nvSpPr>
-          <p:cNvPr id="35" name="TextBox 34"/>
-          <p:cNvSpPr txBox="1"/>
-          <p:nvPr/>
-        </p:nvSpPr>
-        <p:spPr>
-          <a:xfrm>
-            <a:off x="6572250" y="3448050"/>
-            <a:ext cx="4762500" cy="198120"/>
-          </a:xfrm>
-          <a:prstGeom prst="rect">
-            <a:avLst/>
-          </a:prstGeom>
-          <a:noFill/>
-        </p:spPr>
-        <p:txBody>
-          <a:bodyPr wrap="square" lIns="0" rIns="0" tIns="0" bIns="0" anchor="t">
-            <a:spAutoFit/>
-          </a:bodyPr>
-          <a:lstStyle/>
-          <a:p>
-            <a:pPr algn="ctr">
-              <a:lnSpc>
-                <a:spcPct val="120000"/>
-              </a:lnSpc>
-            </a:pPr>
-            <a:r>
-              <a:rPr sz="980" b="1" i="0">
-                <a:solidFill>
-                  <a:srgbClr val="FFFFFF"/>
-                </a:solidFill>
-                <a:latin typeface="Roboto"/>
-              </a:rPr>
-              <a:t>Docker Engine</a:t>
-            </a:r>
-          </a:p>
-        </p:txBody>
-      </p:sp>
-      <p:sp>
-        <p:nvSpPr>
-          <p:cNvPr id="36" name="Rounded Rectangle 35"/>
-          <p:cNvSpPr/>
-          <p:nvPr/>
-        </p:nvSpPr>
-        <p:spPr>
-          <a:xfrm>
-            <a:off x="6667500" y="3048000"/>
-            <a:ext cx="1428750" cy="266700"/>
-          </a:xfrm>
-          <a:prstGeom prst="roundRect">
-            <a:avLst>
-              <a:gd name="adj" fmla="val 7142"/>
-            </a:avLst>
-          </a:prstGeom>
-          <a:solidFill>
-            <a:srgbClr val="FFFFFF"/>
-          </a:solidFill>
-          <a:ln w="12700">
-            <a:solidFill>
-              <a:srgbClr val="D9D9D9"/>
-            </a:solidFill>
-          </a:ln>
-          <a:effectLst/>
-        </p:spPr>
-        <p:style>
-          <a:lnRef idx="1">
-            <a:schemeClr val="accent1"/>
-          </a:lnRef>
-          <a:fillRef idx="3">
-            <a:schemeClr val="accent1"/>
-          </a:fillRef>
-          <a:effectRef idx="2">
-            <a:schemeClr val="accent1"/>
-          </a:effectRef>
-          <a:fontRef idx="minor">
-            <a:schemeClr val="lt1"/>
-          </a:fontRef>
-        </p:style>
-        <p:txBody>
-          <a:bodyPr rtlCol="0" anchor="ctr" wrap="square" lIns="0" rIns="0" tIns="0" bIns="0"/>
-          <a:lstStyle/>
-          <a:p>
-            <a:pPr algn="ctr"/>
-          </a:p>
-        </p:txBody>
-      </p:sp>
-      <p:sp>
-        <p:nvSpPr>
-          <p:cNvPr id="37" name="TextBox 36"/>
-          <p:cNvSpPr txBox="1"/>
-          <p:nvPr/>
-        </p:nvSpPr>
-        <p:spPr>
-          <a:xfrm>
-      